--- a/presentaciones/clase02_pandas_eda.pptx
+++ b/presentaciones/clase02_pandas_eda.pptx
@@ -26,9 +26,6 @@
     <p:sldId id="274" r:id="rId25"/>
     <p:sldId id="275" r:id="rId26"/>
     <p:sldId id="276" r:id="rId27"/>
-    <p:sldId id="277" r:id="rId28"/>
-    <p:sldId id="278" r:id="rId29"/>
-    <p:sldId id="279" r:id="rId30"/>
   </p:sldIdLst>
   <p:sldSz cx="9144000" cy="5138928" type="screen4x3"/>
   <p:notesSz cx="6858000" cy="9144000"/>
@@ -3184,7 +3181,7 @@
                 </a:solidFill>
                 <a:latin typeface="PT Serif"/>
               </a:rPr>
-              <a:t>Manipulación de datos y análisis exploratorio</a:t>
+              <a:t>¿Cómo se mueve Santiago?</a:t>
             </a:r>
           </a:p>
         </p:txBody>
@@ -3237,7 +3234,7 @@
                 </a:solidFill>
                 <a:latin typeface="PT Serif"/>
               </a:rPr>
-              <a:t>Clase 2 · Pandas y EDA</a:t>
+              <a:t>Clase 2 · Pandas (repaso) y análisis exploratorio</a:t>
             </a:r>
           </a:p>
         </p:txBody>
@@ -3378,7 +3375,7 @@
                 </a:solidFill>
                 <a:latin typeface="PT Serif"/>
               </a:rPr>
-              <a:t>Filtrar con condiciones</a:t>
+              <a:t>¿Quiénes son? Derivar una columna</a:t>
             </a:r>
           </a:p>
         </p:txBody>
@@ -3392,7 +3389,7 @@
         <p:spPr>
           <a:xfrm>
             <a:off x="704088" y="1280160"/>
-            <a:ext cx="7744968" cy="3383280"/>
+            <a:ext cx="7744968" cy="2377440"/>
           </a:xfrm>
           <a:prstGeom prst="rect">
             <a:avLst/>
@@ -3433,7 +3430,7 @@
                 </a:solidFill>
                 <a:latin typeface="Menlo"/>
               </a:rPr>
-              <a:t>mp25 = emisiones[emisiones['contaminante'] == 'MP2,5']</a:t>
+              <a:t>personas['Edad'] = 2013 - personas['AnoNac']</a:t>
             </a:r>
           </a:p>
           <a:p>
@@ -3457,7 +3454,7 @@
                 </a:solidFill>
                 <a:latin typeface="Menlo"/>
               </a:rPr>
-              <a:t>rm = emisiones[</a:t>
+              <a:t>personas['Edad'].describe()</a:t>
             </a:r>
           </a:p>
           <a:p>
@@ -3469,31 +3466,7 @@
                 </a:solidFill>
                 <a:latin typeface="Menlo"/>
               </a:rPr>
-              <a:t>    (emisiones['contaminante'] == 'MP2,5')</a:t>
-            </a:r>
-          </a:p>
-          <a:p>
-            <a:pPr/>
-            <a:r>
-              <a:rPr sz="1500" b="0">
-                <a:solidFill>
-                  <a:srgbClr val="1D3557"/>
-                </a:solidFill>
-                <a:latin typeface="Menlo"/>
-              </a:rPr>
-              <a:t>    &amp; (emisiones['region'] == 'Metropolitana')</a:t>
-            </a:r>
-          </a:p>
-          <a:p>
-            <a:pPr/>
-            <a:r>
-              <a:rPr sz="1500" b="0">
-                <a:solidFill>
-                  <a:srgbClr val="1D3557"/>
-                </a:solidFill>
-                <a:latin typeface="Menlo"/>
-              </a:rPr>
-              <a:t>]</a:t>
+              <a:t>personas['Sexo'].value_counts()   # devuelve 1 y 2...</a:t>
             </a:r>
           </a:p>
         </p:txBody>
@@ -3506,7 +3479,7 @@
         </p:nvSpPr>
         <p:spPr>
           <a:xfrm>
-            <a:off x="704088" y="4892040"/>
+            <a:off x="704088" y="3886200"/>
             <a:ext cx="7744968" cy="1097280"/>
           </a:xfrm>
           <a:prstGeom prst="rect">
@@ -3536,7 +3509,7 @@
                 </a:solidFill>
                 <a:latin typeface="PT Serif"/>
               </a:rPr>
-              <a:t>Cada condición va entre paréntesis, y se combinan con &amp; y con |.</a:t>
+              <a:t>No hay columna de edad: se deriva. Y el sexo son códigos que no significan nada solos.</a:t>
             </a:r>
           </a:p>
         </p:txBody>
@@ -3632,21 +3605,124 @@
                 </a:solidFill>
                 <a:latin typeface="PT Serif"/>
               </a:rPr>
-              <a:t>Datos faltantes</a:t>
-            </a:r>
-          </a:p>
-        </p:txBody>
-      </p:sp>
-      <p:sp>
-        <p:nvSpPr>
-          <p:cNvPr id="4" name="TextBox 3"/>
+              <a:t>¿Qué significan los códigos? El merge motivado</a:t>
+            </a:r>
+          </a:p>
+        </p:txBody>
+      </p:sp>
+      <p:sp>
+        <p:nvSpPr>
+          <p:cNvPr id="4" name="Rectangle 3"/>
+          <p:cNvSpPr/>
+          <p:nvPr/>
+        </p:nvSpPr>
+        <p:spPr>
+          <a:xfrm>
+            <a:off x="704088" y="1280160"/>
+            <a:ext cx="7744968" cy="2880360"/>
+          </a:xfrm>
+          <a:prstGeom prst="rect">
+            <a:avLst/>
+          </a:prstGeom>
+          <a:solidFill>
+            <a:srgbClr val="F0F2F5"/>
+          </a:solidFill>
+          <a:ln>
+            <a:solidFill>
+              <a:srgbClr val="D8DDE3"/>
+            </a:solidFill>
+          </a:ln>
+          <a:effectLst/>
+        </p:spPr>
+        <p:style>
+          <a:lnRef idx="1">
+            <a:schemeClr val="accent1"/>
+          </a:lnRef>
+          <a:fillRef idx="3">
+            <a:schemeClr val="accent1"/>
+          </a:fillRef>
+          <a:effectRef idx="2">
+            <a:schemeClr val="accent1"/>
+          </a:effectRef>
+          <a:fontRef idx="minor">
+            <a:schemeClr val="lt1"/>
+          </a:fontRef>
+        </p:style>
+        <p:txBody>
+          <a:bodyPr rtlCol="0" anchor="ctr" wrap="square" lIns="228600" tIns="137160"/>
+          <a:lstStyle/>
+          <a:p>
+            <a:pPr/>
+            <a:r>
+              <a:rPr sz="1500" b="0">
+                <a:solidFill>
+                  <a:srgbClr val="1D3557"/>
+                </a:solidFill>
+                <a:latin typeface="Menlo"/>
+              </a:rPr>
+              <a:t>sexo = pd.read_csv('tablas_parametros/Sexo.csv', sep=';')</a:t>
+            </a:r>
+          </a:p>
+          <a:p>
+            <a:pPr/>
+            <a:r>
+              <a:rPr sz="1500" b="0">
+                <a:solidFill>
+                  <a:srgbClr val="1D3557"/>
+                </a:solidFill>
+                <a:latin typeface="Menlo"/>
+              </a:rPr>
+              <a:t>personas = personas.merge(sexo, left_on='Sexo',</a:t>
+            </a:r>
+          </a:p>
+          <a:p>
+            <a:pPr/>
+            <a:r>
+              <a:rPr sz="1500" b="0">
+                <a:solidFill>
+                  <a:srgbClr val="1D3557"/>
+                </a:solidFill>
+                <a:latin typeface="Menlo"/>
+              </a:rPr>
+              <a:t>                          right_on='Id', how='left')</a:t>
+            </a:r>
+          </a:p>
+          <a:p>
+            <a:pPr/>
+            <a:r>
+              <a:rPr sz="1500" b="0">
+                <a:solidFill>
+                  <a:srgbClr val="1D3557"/>
+                </a:solidFill>
+                <a:latin typeface="Menlo"/>
+              </a:rPr>
+              <a:t/>
+            </a:r>
+          </a:p>
+          <a:p>
+            <a:pPr/>
+            <a:r>
+              <a:rPr sz="1500" b="0">
+                <a:solidFill>
+                  <a:srgbClr val="1D3557"/>
+                </a:solidFill>
+                <a:latin typeface="Menlo"/>
+              </a:rPr>
+              <a:t>personas['Sexo'].isna().sum()   # regla de oro: contar los sin pareja</a:t>
+            </a:r>
+          </a:p>
+        </p:txBody>
+      </p:sp>
+      <p:sp>
+        <p:nvSpPr>
+          <p:cNvPr id="5" name="TextBox 4"/>
           <p:cNvSpPr txBox="1"/>
           <p:nvPr/>
         </p:nvSpPr>
         <p:spPr>
           <a:xfrm>
-            <a:off x="704088" y="1353312"/>
-            <a:ext cx="7744968" cy="3300984"/>
+            <a:off x="704088" y="4389120"/>
+            <a:ext cx="7744968" cy="1097280"/>
           </a:xfrm>
           <a:prstGeom prst="rect">
             <a:avLst/>
@@ -3660,7 +3736,7 @@
           <a:lstStyle/>
           <a:p>
             <a:r>
-              <a:rPr sz="1800" b="1">
+              <a:rPr sz="1600" b="1">
                 <a:solidFill>
                   <a:srgbClr val="E0A437"/>
                 </a:solidFill>
@@ -3669,93 +3745,13 @@
               <a:t>▸ </a:t>
             </a:r>
             <a:r>
-              <a:rPr sz="1800" b="0">
+              <a:rPr sz="1600" b="0">
                 <a:solidFill>
                   <a:srgbClr val="3A4A5C"/>
                 </a:solidFill>
                 <a:latin typeface="PT Serif"/>
               </a:rPr>
-              <a:t>Pandas los representa como NaN, y en datos reales siempre hay.</a:t>
-            </a:r>
-          </a:p>
-          <a:p>
-            <a:r>
-              <a:rPr sz="1800" b="1">
-                <a:solidFill>
-                  <a:srgbClr val="E0A437"/>
-                </a:solidFill>
-                <a:latin typeface="PT Serif"/>
-              </a:rPr>
-              <a:t>▸ </a:t>
-            </a:r>
-            <a:r>
-              <a:rPr sz="1800" b="0">
-                <a:solidFill>
-                  <a:srgbClr val="3A4A5C"/>
-                </a:solidFill>
-                <a:latin typeface="PT Serif"/>
-              </a:rPr>
-              <a:t>En este archivo faltan 58 valores de toneladas y 12 pares de coordenadas.</a:t>
-            </a:r>
-          </a:p>
-          <a:p>
-            <a:r>
-              <a:rPr sz="1400" b="0">
-                <a:solidFill>
-                  <a:srgbClr val="6B7785"/>
-                </a:solidFill>
-                <a:latin typeface="PT Serif"/>
-              </a:rPr>
-              <a:t>     ◦  </a:t>
-            </a:r>
-            <a:r>
-              <a:rPr sz="1400" b="0">
-                <a:solidFill>
-                  <a:srgbClr val="6B7785"/>
-                </a:solidFill>
-                <a:latin typeface="PT Serif"/>
-              </a:rPr>
-              <a:t>isna().sum() cuenta cuántos faltan en cada columna.</a:t>
-            </a:r>
-          </a:p>
-          <a:p>
-            <a:r>
-              <a:rPr sz="1400" b="0">
-                <a:solidFill>
-                  <a:srgbClr val="6B7785"/>
-                </a:solidFill>
-                <a:latin typeface="PT Serif"/>
-              </a:rPr>
-              <a:t>     ◦  </a:t>
-            </a:r>
-            <a:r>
-              <a:rPr sz="1400" b="0">
-                <a:solidFill>
-                  <a:srgbClr val="6B7785"/>
-                </a:solidFill>
-                <a:latin typeface="PT Serif"/>
-              </a:rPr>
-              <a:t>dropna() elimina filas; fillna() las rellena.</a:t>
-            </a:r>
-          </a:p>
-          <a:p>
-            <a:r>
-              <a:rPr sz="1800" b="1">
-                <a:solidFill>
-                  <a:srgbClr val="E0A437"/>
-                </a:solidFill>
-                <a:latin typeface="PT Serif"/>
-              </a:rPr>
-              <a:t>▸ </a:t>
-            </a:r>
-            <a:r>
-              <a:rPr sz="1800" b="1">
-                <a:solidFill>
-                  <a:srgbClr val="1D3557"/>
-                </a:solidFill>
-                <a:latin typeface="PT Serif"/>
-              </a:rPr>
-              <a:t>Qué hacer con ellos no es automático: depende de la pregunta.</a:t>
+              <a:t>Los significados viven en otra tabla: así se diseñan las bases de datos reales.</a:t>
             </a:r>
           </a:p>
         </p:txBody>
@@ -3851,7 +3847,7 @@
                 </a:solidFill>
                 <a:latin typeface="PT Serif"/>
               </a:rPr>
-              <a:t>groupby: separar, resumir y juntar</a:t>
+              <a:t>¿Cuántos viajes hace una persona? groupby y una trampa</a:t>
             </a:r>
           </a:p>
         </p:txBody>
@@ -3865,7 +3861,7 @@
         <p:spPr>
           <a:xfrm>
             <a:off x="704088" y="1280160"/>
-            <a:ext cx="7744968" cy="2880360"/>
+            <a:ext cx="7744968" cy="2377440"/>
           </a:xfrm>
           <a:prstGeom prst="rect">
             <a:avLst/>
@@ -3906,7 +3902,7 @@
                 </a:solidFill>
                 <a:latin typeface="Menlo"/>
               </a:rPr>
-              <a:t>mp25.groupby('region')['cantidad_toneladas'].sum()</a:t>
+              <a:t>viajes_por_persona = viajes.groupby(['Hogar', 'Persona']).size()</a:t>
             </a:r>
           </a:p>
           <a:p>
@@ -3930,7 +3926,7 @@
                 </a:solidFill>
                 <a:latin typeface="Menlo"/>
               </a:rPr>
-              <a:t>mp25.groupby('region')['cantidad_toneladas'].agg(</a:t>
+              <a:t>conteo = personas.set_index(['Hogar', 'Persona']).assign(</a:t>
             </a:r>
           </a:p>
           <a:p>
@@ -3942,19 +3938,7 @@
                 </a:solidFill>
                 <a:latin typeface="Menlo"/>
               </a:rPr>
-              <a:t>    total='sum', promedio='mean', mediana='median',</a:t>
-            </a:r>
-          </a:p>
-          <a:p>
-            <a:pPr/>
-            <a:r>
-              <a:rPr sz="1500" b="0">
-                <a:solidFill>
-                  <a:srgbClr val="1D3557"/>
-                </a:solidFill>
-                <a:latin typeface="Menlo"/>
-              </a:rPr>
-              <a:t>)</a:t>
+              <a:t>    n_viajes=viajes_por_persona)['n_viajes'].fillna(0)</a:t>
             </a:r>
           </a:p>
         </p:txBody>
@@ -3967,7 +3951,7 @@
         </p:nvSpPr>
         <p:spPr>
           <a:xfrm>
-            <a:off x="704088" y="4389120"/>
+            <a:off x="704088" y="3886200"/>
             <a:ext cx="7744968" cy="1097280"/>
           </a:xfrm>
           <a:prstGeom prst="rect">
@@ -3997,7 +3981,7 @@
                 </a:solidFill>
                 <a:latin typeface="PT Serif"/>
               </a:rPr>
-              <a:t>Responde la mayoría de las preguntas descriptivas de un conjunto de datos.</a:t>
+              <a:t>Quien no viajó no aparece en la tabla de viajes: si solo agrupamos, lo perdemos.</a:t>
             </a:r>
           </a:p>
         </p:txBody>
@@ -4093,14 +4077,117 @@
                 </a:solidFill>
                 <a:latin typeface="PT Serif"/>
               </a:rPr>
-              <a:t>Emisiones de MP2,5 por región</a:t>
+              <a:t>Quien no viaja también es dato</a:t>
+            </a:r>
+          </a:p>
+        </p:txBody>
+      </p:sp>
+      <p:sp>
+        <p:nvSpPr>
+          <p:cNvPr id="4" name="TextBox 3"/>
+          <p:cNvSpPr txBox="1"/>
+          <p:nvPr/>
+        </p:nvSpPr>
+        <p:spPr>
+          <a:xfrm>
+            <a:off x="502920" y="1252728"/>
+            <a:ext cx="4023360" cy="3200400"/>
+          </a:xfrm>
+          <a:prstGeom prst="rect">
+            <a:avLst/>
+          </a:prstGeom>
+          <a:noFill/>
+        </p:spPr>
+        <p:txBody>
+          <a:bodyPr wrap="square">
+            <a:spAutoFit/>
+          </a:bodyPr>
+          <a:lstStyle/>
+          <a:p>
+            <a:r>
+              <a:rPr sz="1500" b="1">
+                <a:solidFill>
+                  <a:srgbClr val="E0A437"/>
+                </a:solidFill>
+                <a:latin typeface="PT Serif"/>
+              </a:rPr>
+              <a:t>▸ </a:t>
+            </a:r>
+            <a:r>
+              <a:rPr sz="1500" b="0">
+                <a:solidFill>
+                  <a:srgbClr val="3A4A5C"/>
+                </a:solidFill>
+                <a:latin typeface="PT Serif"/>
+              </a:rPr>
+              <a:t>El 23% de las personas no viajó ese día.</a:t>
+            </a:r>
+          </a:p>
+          <a:p>
+            <a:r>
+              <a:rPr sz="1500" b="1">
+                <a:solidFill>
+                  <a:srgbClr val="E0A437"/>
+                </a:solidFill>
+                <a:latin typeface="PT Serif"/>
+              </a:rPr>
+              <a:t>▸ </a:t>
+            </a:r>
+            <a:r>
+              <a:rPr sz="1500" b="0">
+                <a:solidFill>
+                  <a:srgbClr val="3A4A5C"/>
+                </a:solidFill>
+                <a:latin typeface="PT Serif"/>
+              </a:rPr>
+              <a:t>Media: 1,9 viajes. Mediana: 2 viajes.</a:t>
+            </a:r>
+          </a:p>
+          <a:p>
+            <a:r>
+              <a:rPr sz="1500" b="1">
+                <a:solidFill>
+                  <a:srgbClr val="E0A437"/>
+                </a:solidFill>
+                <a:latin typeface="PT Serif"/>
+              </a:rPr>
+              <a:t>▸ </a:t>
+            </a:r>
+            <a:r>
+              <a:rPr sz="1500" b="0">
+                <a:solidFill>
+                  <a:srgbClr val="3A4A5C"/>
+                </a:solidFill>
+                <a:latin typeface="PT Serif"/>
+              </a:rPr>
+              <a:t>Aquí la media quedó BAJO la mediana: el bloque de ceros la arrastra.</a:t>
+            </a:r>
+          </a:p>
+          <a:p>
+            <a:r>
+              <a:rPr sz="1500" b="1">
+                <a:solidFill>
+                  <a:srgbClr val="E0A437"/>
+                </a:solidFill>
+                <a:latin typeface="PT Serif"/>
+              </a:rPr>
+              <a:t>▸ </a:t>
+            </a:r>
+            <a:r>
+              <a:rPr sz="1500" b="1">
+                <a:solidFill>
+                  <a:srgbClr val="1D3557"/>
+                </a:solidFill>
+                <a:latin typeface="PT Serif"/>
+              </a:rPr>
+              <a:t>La asimetría no siempre empuja hacia el mismo lado: se mira, no se adivina.</a:t>
             </a:r>
           </a:p>
         </p:txBody>
       </p:sp>
       <p:pic>
         <p:nvPicPr>
-          <p:cNvPr id="4" name="Picture 3" descr="04_regiones.png"/>
+          <p:cNvPr id="5" name="Picture 4" descr="02_viajes_por_persona.png"/>
           <p:cNvPicPr>
             <a:picLocks noChangeAspect="1"/>
           </p:cNvPicPr>
@@ -4114,48 +4201,14 @@
         </p:blipFill>
         <p:spPr>
           <a:xfrm>
-            <a:off x="1417320" y="1188720"/>
-            <a:ext cx="6309360" cy="2771071"/>
+            <a:off x="4892040" y="1371600"/>
+            <a:ext cx="3840480" cy="2196274"/>
           </a:xfrm>
           <a:prstGeom prst="rect">
             <a:avLst/>
           </a:prstGeom>
         </p:spPr>
       </p:pic>
-      <p:sp>
-        <p:nvSpPr>
-          <p:cNvPr id="5" name="TextBox 4"/>
-          <p:cNvSpPr txBox="1"/>
-          <p:nvPr/>
-        </p:nvSpPr>
-        <p:spPr>
-          <a:xfrm>
-            <a:off x="704088" y="4434840"/>
-            <a:ext cx="7744968" cy="457200"/>
-          </a:xfrm>
-          <a:prstGeom prst="rect">
-            <a:avLst/>
-          </a:prstGeom>
-          <a:noFill/>
-        </p:spPr>
-        <p:txBody>
-          <a:bodyPr wrap="square">
-            <a:spAutoFit/>
-          </a:bodyPr>
-          <a:lstStyle/>
-          <a:p>
-            <a:r>
-              <a:rPr sz="1300" b="0">
-                <a:solidFill>
-                  <a:srgbClr val="6B7785"/>
-                </a:solidFill>
-                <a:latin typeface="PT Serif"/>
-              </a:rPr>
-              <a:t>Antofagasta y O'Higgins están arriba con mucha menos población: pesa el perfil productivo.</a:t>
-            </a:r>
-          </a:p>
-        </p:txBody>
-      </p:sp>
     </p:spTree>
   </p:cSld>
   <p:clrMapOvr>
@@ -4189,7 +4242,7 @@
             <a:avLst/>
           </a:prstGeom>
           <a:solidFill>
-            <a:srgbClr val="FAFBFC"/>
+            <a:srgbClr val="1D3557"/>
           </a:solidFill>
           <a:ln>
             <a:noFill/>
@@ -4226,8 +4279,8 @@
         </p:nvSpPr>
         <p:spPr>
           <a:xfrm>
-            <a:off x="402336" y="301752"/>
-            <a:ext cx="8348472" cy="795528"/>
+            <a:off x="603504" y="1847088"/>
+            <a:ext cx="7946136" cy="1399032"/>
           </a:xfrm>
           <a:prstGeom prst="rect">
             <a:avLst/>
@@ -4241,135 +4294,24 @@
           <a:lstStyle/>
           <a:p>
             <a:r>
-              <a:rPr sz="2800" b="1">
-                <a:solidFill>
-                  <a:srgbClr val="0F0F0F"/>
-                </a:solidFill>
-                <a:latin typeface="PT Serif"/>
-              </a:rPr>
-              <a:t>merge: combinar dos tablas</a:t>
-            </a:r>
-          </a:p>
-        </p:txBody>
-      </p:sp>
-      <p:sp>
-        <p:nvSpPr>
-          <p:cNvPr id="4" name="Rectangle 3"/>
-          <p:cNvSpPr/>
-          <p:nvPr/>
-        </p:nvSpPr>
-        <p:spPr>
-          <a:xfrm>
-            <a:off x="704088" y="1280160"/>
-            <a:ext cx="7744968" cy="1874520"/>
-          </a:xfrm>
-          <a:prstGeom prst="rect">
-            <a:avLst/>
-          </a:prstGeom>
-          <a:solidFill>
-            <a:srgbClr val="F0F2F5"/>
-          </a:solidFill>
-          <a:ln>
-            <a:solidFill>
-              <a:srgbClr val="D8DDE3"/>
-            </a:solidFill>
-          </a:ln>
-          <a:effectLst/>
-        </p:spPr>
-        <p:style>
-          <a:lnRef idx="1">
-            <a:schemeClr val="accent1"/>
-          </a:lnRef>
-          <a:fillRef idx="3">
-            <a:schemeClr val="accent1"/>
-          </a:fillRef>
-          <a:effectRef idx="2">
-            <a:schemeClr val="accent1"/>
-          </a:effectRef>
-          <a:fontRef idx="minor">
-            <a:schemeClr val="lt1"/>
-          </a:fontRef>
-        </p:style>
-        <p:txBody>
-          <a:bodyPr rtlCol="0" anchor="ctr" wrap="square" lIns="228600" tIns="137160"/>
-          <a:lstStyle/>
-          <a:p>
-            <a:pPr/>
-            <a:r>
-              <a:rPr sz="1500" b="0">
-                <a:solidFill>
-                  <a:srgbClr val="1D3557"/>
-                </a:solidFill>
-                <a:latin typeface="Menlo"/>
-              </a:rPr>
-              <a:t>mp25_zonas = mp25.merge(macrozonas, on='region', how='left')</a:t>
-            </a:r>
-          </a:p>
-          <a:p>
-            <a:pPr/>
-            <a:r>
-              <a:rPr sz="1500" b="0">
-                <a:solidFill>
-                  <a:srgbClr val="1D3557"/>
-                </a:solidFill>
-                <a:latin typeface="Menlo"/>
-              </a:rPr>
-              <a:t/>
-            </a:r>
-          </a:p>
-          <a:p>
-            <a:pPr/>
-            <a:r>
-              <a:rPr sz="1500" b="0">
-                <a:solidFill>
-                  <a:srgbClr val="1D3557"/>
-                </a:solidFill>
-                <a:latin typeface="Menlo"/>
-              </a:rPr>
-              <a:t>mp25_zonas['macrozona'].isna().sum()   # revisar siempre</a:t>
-            </a:r>
-          </a:p>
-        </p:txBody>
-      </p:sp>
-      <p:sp>
-        <p:nvSpPr>
-          <p:cNvPr id="5" name="TextBox 4"/>
-          <p:cNvSpPr txBox="1"/>
-          <p:nvPr/>
-        </p:nvSpPr>
-        <p:spPr>
-          <a:xfrm>
-            <a:off x="704088" y="3383279"/>
-            <a:ext cx="7744968" cy="1097280"/>
-          </a:xfrm>
-          <a:prstGeom prst="rect">
-            <a:avLst/>
-          </a:prstGeom>
-          <a:noFill/>
-        </p:spPr>
-        <p:txBody>
-          <a:bodyPr wrap="square">
-            <a:spAutoFit/>
-          </a:bodyPr>
-          <a:lstStyle/>
-          <a:p>
-            <a:r>
-              <a:rPr sz="1600" b="1">
+              <a:rPr sz="3400" b="1">
+                <a:solidFill>
+                  <a:srgbClr val="FFFFFF"/>
+                </a:solidFill>
+                <a:latin typeface="PT Serif"/>
+              </a:rPr>
+              <a:t>¿A quién representa la encuesta?</a:t>
+            </a:r>
+          </a:p>
+          <a:p>
+            <a:r>
+              <a:rPr sz="1800" b="0">
                 <a:solidFill>
                   <a:srgbClr val="E0A437"/>
                 </a:solidFill>
                 <a:latin typeface="PT Serif"/>
               </a:rPr>
-              <a:t>▸ </a:t>
-            </a:r>
-            <a:r>
-              <a:rPr sz="1600" b="0">
-                <a:solidFill>
-                  <a:srgbClr val="3A4A5C"/>
-                </a:solidFill>
-                <a:latin typeface="PT Serif"/>
-              </a:rPr>
-              <a:t>Un nombre escrito distinto en las dos tablas produce NaN sin avisar.</a:t>
+              <a:t>Los factores de expansión</a:t>
             </a:r>
           </a:p>
         </p:txBody>
@@ -4407,7 +4349,7 @@
             <a:avLst/>
           </a:prstGeom>
           <a:solidFill>
-            <a:srgbClr val="1D3557"/>
+            <a:srgbClr val="FAFBFC"/>
           </a:solidFill>
           <a:ln>
             <a:noFill/>
@@ -4444,8 +4386,8 @@
         </p:nvSpPr>
         <p:spPr>
           <a:xfrm>
-            <a:off x="603504" y="1847088"/>
-            <a:ext cx="7946136" cy="1399032"/>
+            <a:off x="402336" y="301752"/>
+            <a:ext cx="8348472" cy="795528"/>
           </a:xfrm>
           <a:prstGeom prst="rect">
             <a:avLst/>
@@ -4459,24 +4401,156 @@
           <a:lstStyle/>
           <a:p>
             <a:r>
-              <a:rPr sz="3400" b="1">
-                <a:solidFill>
-                  <a:srgbClr val="FFFFFF"/>
-                </a:solidFill>
-                <a:latin typeface="PT Serif"/>
-              </a:rPr>
-              <a:t>Análisis exploratorio</a:t>
-            </a:r>
-          </a:p>
-          <a:p>
+              <a:rPr sz="2800" b="1">
+                <a:solidFill>
+                  <a:srgbClr val="0F0F0F"/>
+                </a:solidFill>
+                <a:latin typeface="PT Serif"/>
+              </a:rPr>
+              <a:t>De 37 mil encuestados a 6,7 millones de personas</a:t>
+            </a:r>
+          </a:p>
+        </p:txBody>
+      </p:sp>
+      <p:sp>
+        <p:nvSpPr>
+          <p:cNvPr id="4" name="TextBox 3"/>
+          <p:cNvSpPr txBox="1"/>
+          <p:nvPr/>
+        </p:nvSpPr>
+        <p:spPr>
+          <a:xfrm>
+            <a:off x="704088" y="1353312"/>
+            <a:ext cx="7744968" cy="3300984"/>
+          </a:xfrm>
+          <a:prstGeom prst="rect">
+            <a:avLst/>
+          </a:prstGeom>
+          <a:noFill/>
+        </p:spPr>
+        <p:txBody>
+          <a:bodyPr wrap="square">
+            <a:spAutoFit/>
+          </a:bodyPr>
+          <a:lstStyle/>
+          <a:p>
+            <a:r>
+              <a:rPr sz="1800" b="1">
+                <a:solidFill>
+                  <a:srgbClr val="E0A437"/>
+                </a:solidFill>
+                <a:latin typeface="PT Serif"/>
+              </a:rPr>
+              <a:t>▸ </a:t>
+            </a:r>
             <a:r>
               <a:rPr sz="1800" b="0">
                 <a:solidFill>
+                  <a:srgbClr val="3A4A5C"/>
+                </a:solidFill>
+                <a:latin typeface="PT Serif"/>
+              </a:rPr>
+              <a:t>Cada encuestado representa a un número de personas parecidas a él.</a:t>
+            </a:r>
+          </a:p>
+          <a:p>
+            <a:r>
+              <a:rPr sz="1800" b="1">
+                <a:solidFill>
                   <a:srgbClr val="E0A437"/>
                 </a:solidFill>
                 <a:latin typeface="PT Serif"/>
               </a:rPr>
-              <a:t>Mirar los datos antes de modelarlos</a:t>
+              <a:t>▸ </a:t>
+            </a:r>
+            <a:r>
+              <a:rPr sz="1800" b="0">
+                <a:solidFill>
+                  <a:srgbClr val="3A4A5C"/>
+                </a:solidFill>
+                <a:latin typeface="PT Serif"/>
+              </a:rPr>
+              <a:t>Ese número es su factor de expansión (Factor_LaboralNormal).</a:t>
+            </a:r>
+          </a:p>
+          <a:p>
+            <a:r>
+              <a:rPr sz="1400" b="0">
+                <a:solidFill>
+                  <a:srgbClr val="6B7785"/>
+                </a:solidFill>
+                <a:latin typeface="PT Serif"/>
+              </a:rPr>
+              <a:t>     ◦  </a:t>
+            </a:r>
+            <a:r>
+              <a:rPr sz="1400" b="0">
+                <a:solidFill>
+                  <a:srgbClr val="6B7785"/>
+                </a:solidFill>
+                <a:latin typeface="PT Serif"/>
+              </a:rPr>
+              <a:t>37.326 personas con factor de día laboral en temporada normal.</a:t>
+            </a:r>
+          </a:p>
+          <a:p>
+            <a:r>
+              <a:rPr sz="1400" b="0">
+                <a:solidFill>
+                  <a:srgbClr val="6B7785"/>
+                </a:solidFill>
+                <a:latin typeface="PT Serif"/>
+              </a:rPr>
+              <a:t>     ◦  </a:t>
+            </a:r>
+            <a:r>
+              <a:rPr sz="1400" b="0">
+                <a:solidFill>
+                  <a:srgbClr val="6B7785"/>
+                </a:solidFill>
+                <a:latin typeface="PT Serif"/>
+              </a:rPr>
+              <a:t>La suma de sus factores: 6.651.735 personas representadas.</a:t>
+            </a:r>
+          </a:p>
+          <a:p>
+            <a:r>
+              <a:rPr sz="1800" b="1">
+                <a:solidFill>
+                  <a:srgbClr val="E0A437"/>
+                </a:solidFill>
+                <a:latin typeface="PT Serif"/>
+              </a:rPr>
+              <a:t>▸ </a:t>
+            </a:r>
+            <a:r>
+              <a:rPr sz="1800" b="0">
+                <a:solidFill>
+                  <a:srgbClr val="3A4A5C"/>
+                </a:solidFill>
+                <a:latin typeface="PT Serif"/>
+              </a:rPr>
+              <a:t>Contar filas responde por la muestra; sumar factores responde por la ciudad.</a:t>
+            </a:r>
+          </a:p>
+          <a:p>
+            <a:r>
+              <a:rPr sz="1800" b="1">
+                <a:solidFill>
+                  <a:srgbClr val="E0A437"/>
+                </a:solidFill>
+                <a:latin typeface="PT Serif"/>
+              </a:rPr>
+              <a:t>▸ </a:t>
+            </a:r>
+            <a:r>
+              <a:rPr sz="1800" b="1">
+                <a:solidFill>
+                  <a:srgbClr val="1D3557"/>
+                </a:solidFill>
+                <a:latin typeface="PT Serif"/>
+              </a:rPr>
+              <a:t>Toda cifra oficial de la EOD, la Casen o la ENUSC está ponderada así.</a:t>
             </a:r>
           </a:p>
         </p:txBody>
@@ -4514,7 +4588,7 @@
             <a:avLst/>
           </a:prstGeom>
           <a:solidFill>
-            <a:srgbClr val="FAFBFC"/>
+            <a:srgbClr val="1D3557"/>
           </a:solidFill>
           <a:ln>
             <a:noFill/>
@@ -4551,8 +4625,8 @@
         </p:nvSpPr>
         <p:spPr>
           <a:xfrm>
-            <a:off x="402336" y="301752"/>
-            <a:ext cx="8348472" cy="795528"/>
+            <a:off x="603504" y="1847088"/>
+            <a:ext cx="7946136" cy="1399032"/>
           </a:xfrm>
           <a:prstGeom prst="rect">
             <a:avLst/>
@@ -4566,136 +4640,24 @@
           <a:lstStyle/>
           <a:p>
             <a:r>
-              <a:rPr sz="2800" b="1">
-                <a:solidFill>
-                  <a:srgbClr val="0F0F0F"/>
-                </a:solidFill>
-                <a:latin typeface="PT Serif"/>
-              </a:rPr>
-              <a:t>Qué es el análisis exploratorio</a:t>
-            </a:r>
-          </a:p>
-        </p:txBody>
-      </p:sp>
-      <p:sp>
-        <p:nvSpPr>
-          <p:cNvPr id="4" name="TextBox 3"/>
-          <p:cNvSpPr txBox="1"/>
-          <p:nvPr/>
-        </p:nvSpPr>
-        <p:spPr>
-          <a:xfrm>
-            <a:off x="704088" y="1353312"/>
-            <a:ext cx="7744968" cy="3300984"/>
-          </a:xfrm>
-          <a:prstGeom prst="rect">
-            <a:avLst/>
-          </a:prstGeom>
-          <a:noFill/>
-        </p:spPr>
-        <p:txBody>
-          <a:bodyPr wrap="square">
-            <a:spAutoFit/>
-          </a:bodyPr>
-          <a:lstStyle/>
-          <a:p>
-            <a:r>
-              <a:rPr sz="1800" b="1">
+              <a:rPr sz="3400" b="1">
+                <a:solidFill>
+                  <a:srgbClr val="FFFFFF"/>
+                </a:solidFill>
+                <a:latin typeface="PT Serif"/>
+              </a:rPr>
+              <a:t>Análisis exploratorio</a:t>
+            </a:r>
+          </a:p>
+          <a:p>
+            <a:r>
+              <a:rPr sz="1800" b="0">
                 <a:solidFill>
                   <a:srgbClr val="E0A437"/>
                 </a:solidFill>
                 <a:latin typeface="PT Serif"/>
               </a:rPr>
-              <a:t>▸ </a:t>
-            </a:r>
-            <a:r>
-              <a:rPr sz="1800" b="0">
-                <a:solidFill>
-                  <a:srgbClr val="3A4A5C"/>
-                </a:solidFill>
-                <a:latin typeface="PT Serif"/>
-              </a:rPr>
-              <a:t>El término lo acuña John Tukey en 1977, en el libro Exploratory Data Analysis.</a:t>
-            </a:r>
-          </a:p>
-          <a:p>
-            <a:r>
-              <a:rPr sz="1800" b="1">
-                <a:solidFill>
-                  <a:srgbClr val="E0A437"/>
-                </a:solidFill>
-                <a:latin typeface="PT Serif"/>
-              </a:rPr>
-              <a:t>▸ </a:t>
-            </a:r>
-            <a:r>
-              <a:rPr sz="1800" b="0">
-                <a:solidFill>
-                  <a:srgbClr val="3A4A5C"/>
-                </a:solidFill>
-                <a:latin typeface="PT Serif"/>
-              </a:rPr>
-              <a:t>La idea: mirar los datos antes de suponer un modelo.</a:t>
-            </a:r>
-          </a:p>
-          <a:p>
-            <a:r>
-              <a:rPr sz="1400" b="0">
-                <a:solidFill>
-                  <a:srgbClr val="6B7785"/>
-                </a:solidFill>
-                <a:latin typeface="PT Serif"/>
-              </a:rPr>
-              <a:t>     ◦  </a:t>
-            </a:r>
-            <a:r>
-              <a:rPr sz="1400" b="0">
-                <a:solidFill>
-                  <a:srgbClr val="6B7785"/>
-                </a:solidFill>
-                <a:latin typeface="PT Serif"/>
-              </a:rPr>
-              <a:t>Describir la forma de la distribución, no solo su centro.</a:t>
-            </a:r>
-          </a:p>
-          <a:p>
-            <a:r>
-              <a:rPr sz="1400" b="0">
-                <a:solidFill>
-                  <a:srgbClr val="6B7785"/>
-                </a:solidFill>
-                <a:latin typeface="PT Serif"/>
-              </a:rPr>
-              <a:t>     ◦  </a:t>
-            </a:r>
-            <a:r>
-              <a:rPr sz="1400" b="0">
-                <a:solidFill>
-                  <a:srgbClr val="6B7785"/>
-                </a:solidFill>
-                <a:latin typeface="PT Serif"/>
-              </a:rPr>
-              <a:t>Detectar errores, valores extremos y patrones inesperados.</a:t>
-            </a:r>
-          </a:p>
-          <a:p>
-            <a:r>
-              <a:rPr sz="1800" b="1">
-                <a:solidFill>
-                  <a:srgbClr val="E0A437"/>
-                </a:solidFill>
-                <a:latin typeface="PT Serif"/>
-              </a:rPr>
-              <a:t>▸ </a:t>
-            </a:r>
-            <a:r>
-              <a:rPr sz="1800" b="1">
-                <a:solidFill>
-                  <a:srgbClr val="1D3557"/>
-                </a:solidFill>
-                <a:latin typeface="PT Serif"/>
-              </a:rPr>
-              <a:t>Es la etapa donde uno se entera de con qué está trabajando.</a:t>
+              <a:t>¿Qué número resume bien una respuesta?</a:t>
             </a:r>
           </a:p>
         </p:txBody>
@@ -4791,7 +4753,7 @@
                 </a:solidFill>
                 <a:latin typeface="PT Serif"/>
               </a:rPr>
-              <a:t>El promedio puede engañar</a:t>
+              <a:t>¿Cuánto gana un hogar típico?</a:t>
             </a:r>
           </a:p>
         </p:txBody>
@@ -4834,67 +4796,7 @@
                 </a:solidFill>
                 <a:latin typeface="PT Serif"/>
               </a:rPr>
-              <a:t>En las emisiones de MP2,5:</a:t>
-            </a:r>
-          </a:p>
-          <a:p>
-            <a:r>
-              <a:rPr sz="1300" b="0">
-                <a:solidFill>
-                  <a:srgbClr val="6B7785"/>
-                </a:solidFill>
-                <a:latin typeface="PT Serif"/>
-              </a:rPr>
-              <a:t>     ◦  </a:t>
-            </a:r>
-            <a:r>
-              <a:rPr sz="1300" b="0">
-                <a:solidFill>
-                  <a:srgbClr val="6B7785"/>
-                </a:solidFill>
-                <a:latin typeface="PT Serif"/>
-              </a:rPr>
-              <a:t>Media: 0,382 toneladas.</a:t>
-            </a:r>
-          </a:p>
-          <a:p>
-            <a:r>
-              <a:rPr sz="1300" b="0">
-                <a:solidFill>
-                  <a:srgbClr val="6B7785"/>
-                </a:solidFill>
-                <a:latin typeface="PT Serif"/>
-              </a:rPr>
-              <a:t>     ◦  </a:t>
-            </a:r>
-            <a:r>
-              <a:rPr sz="1300" b="0">
-                <a:solidFill>
-                  <a:srgbClr val="6B7785"/>
-                </a:solidFill>
-                <a:latin typeface="PT Serif"/>
-              </a:rPr>
-              <a:t>Mediana: 0,006 toneladas.</a:t>
-            </a:r>
-          </a:p>
-          <a:p>
-            <a:r>
-              <a:rPr sz="1300" b="0">
-                <a:solidFill>
-                  <a:srgbClr val="6B7785"/>
-                </a:solidFill>
-                <a:latin typeface="PT Serif"/>
-              </a:rPr>
-              <a:t>     ◦  </a:t>
-            </a:r>
-            <a:r>
-              <a:rPr sz="1300" b="0">
-                <a:solidFill>
-                  <a:srgbClr val="6B7785"/>
-                </a:solidFill>
-                <a:latin typeface="PT Serif"/>
-              </a:rPr>
-              <a:t>Máximo: 299 toneladas.</a:t>
+              <a:t>Media: $688.274. Mediana: $507.826.</a:t>
             </a:r>
           </a:p>
           <a:p>
@@ -4914,7 +4816,7 @@
                 </a:solidFill>
                 <a:latin typeface="PT Serif"/>
               </a:rPr>
-              <a:t>La media es unas 66 veces la mediana.</a:t>
+              <a:t>La media es un 36% más alta que la mediana.</a:t>
             </a:r>
           </a:p>
           <a:p>
@@ -4928,20 +4830,40 @@
               <a:t>▸ </a:t>
             </a:r>
             <a:r>
+              <a:rPr sz="1500" b="0">
+                <a:solidFill>
+                  <a:srgbClr val="3A4A5C"/>
+                </a:solidFill>
+                <a:latin typeface="PT Serif"/>
+              </a:rPr>
+              <a:t>Unos pocos hogares de ingresos muy altos arrastran el promedio.</a:t>
+            </a:r>
+          </a:p>
+          <a:p>
+            <a:r>
               <a:rPr sz="1500" b="1">
                 <a:solidFill>
+                  <a:srgbClr val="E0A437"/>
+                </a:solidFill>
+                <a:latin typeface="PT Serif"/>
+              </a:rPr>
+              <a:t>▸ </a:t>
+            </a:r>
+            <a:r>
+              <a:rPr sz="1500" b="1">
+                <a:solidFill>
                   <a:srgbClr val="1D3557"/>
                 </a:solidFill>
                 <a:latin typeface="PT Serif"/>
               </a:rPr>
-              <a:t>Decir 'el establecimiento promedio emite 0,38 t' describe a casi ninguno.</a:t>
+              <a:t>'El hogar promedio gana $688 mil' describe una situación en la que la mayoría no está.</a:t>
             </a:r>
           </a:p>
         </p:txBody>
       </p:sp>
       <p:pic>
         <p:nvPicPr>
-          <p:cNvPr id="5" name="Picture 4" descr="03_media_vs_mediana.png"/>
+          <p:cNvPr id="5" name="Picture 4" descr="01_ingreso_media_mediana.png"/>
           <p:cNvPicPr>
             <a:picLocks noChangeAspect="1"/>
           </p:cNvPicPr>
@@ -4956,7 +4878,7 @@
         <p:spPr>
           <a:xfrm>
             <a:off x="4892040" y="1371600"/>
-            <a:ext cx="3840480" cy="2209974"/>
+            <a:ext cx="3840480" cy="2189433"/>
           </a:xfrm>
           <a:prstGeom prst="rect">
             <a:avLst/>
@@ -5054,7 +4976,7 @@
                 </a:solidFill>
                 <a:latin typeface="PT Serif"/>
               </a:rPr>
-              <a:t>Medidas robustas</a:t>
+              <a:t>¿Cuánto dura un viaje?</a:t>
             </a:r>
           </a:p>
         </p:txBody>
@@ -5067,8 +4989,8 @@
         </p:nvSpPr>
         <p:spPr>
           <a:xfrm>
-            <a:off x="704088" y="1353312"/>
-            <a:ext cx="7744968" cy="3300984"/>
+            <a:off x="502920" y="1252728"/>
+            <a:ext cx="4023360" cy="3200400"/>
           </a:xfrm>
           <a:prstGeom prst="rect">
             <a:avLst/>
@@ -5082,7 +5004,7 @@
           <a:lstStyle/>
           <a:p>
             <a:r>
-              <a:rPr sz="1800" b="1">
+              <a:rPr sz="1500" b="1">
                 <a:solidFill>
                   <a:srgbClr val="E0A437"/>
                 </a:solidFill>
@@ -5091,78 +5013,18 @@
               <a:t>▸ </a:t>
             </a:r>
             <a:r>
-              <a:rPr sz="1800" b="0">
+              <a:rPr sz="1500" b="0">
                 <a:solidFill>
                   <a:srgbClr val="3A4A5C"/>
                 </a:solidFill>
                 <a:latin typeface="PT Serif"/>
               </a:rPr>
-              <a:t>Una medida es robusta cuando los valores extremos no la alteran demasiado.</a:t>
-            </a:r>
-          </a:p>
-          <a:p>
-            <a:r>
-              <a:rPr sz="1400" b="0">
-                <a:solidFill>
-                  <a:srgbClr val="6B7785"/>
-                </a:solidFill>
-                <a:latin typeface="PT Serif"/>
-              </a:rPr>
-              <a:t>     ◦  </a:t>
-            </a:r>
-            <a:r>
-              <a:rPr sz="1400" b="0">
-                <a:solidFill>
-                  <a:srgbClr val="6B7785"/>
-                </a:solidFill>
-                <a:latin typeface="PT Serif"/>
-              </a:rPr>
-              <a:t>Media completa: 0,382 toneladas.</a:t>
-            </a:r>
-          </a:p>
-          <a:p>
-            <a:r>
-              <a:rPr sz="1400" b="0">
-                <a:solidFill>
-                  <a:srgbClr val="6B7785"/>
-                </a:solidFill>
-                <a:latin typeface="PT Serif"/>
-              </a:rPr>
-              <a:t>     ◦  </a:t>
-            </a:r>
-            <a:r>
-              <a:rPr sz="1400" b="0">
-                <a:solidFill>
-                  <a:srgbClr val="6B7785"/>
-                </a:solidFill>
-                <a:latin typeface="PT Serif"/>
-              </a:rPr>
-              <a:t>Media truncada al 10%: 0,017 toneladas.</a:t>
-            </a:r>
-          </a:p>
-          <a:p>
-            <a:r>
-              <a:rPr sz="1400" b="0">
-                <a:solidFill>
-                  <a:srgbClr val="6B7785"/>
-                </a:solidFill>
-                <a:latin typeface="PT Serif"/>
-              </a:rPr>
-              <a:t>     ◦  </a:t>
-            </a:r>
-            <a:r>
-              <a:rPr sz="1400" b="0">
-                <a:solidFill>
-                  <a:srgbClr val="6B7785"/>
-                </a:solidFill>
-                <a:latin typeface="PT Serif"/>
-              </a:rPr>
-              <a:t>Mediana: 0,006 toneladas.</a:t>
-            </a:r>
-          </a:p>
-          <a:p>
-            <a:r>
-              <a:rPr sz="1800" b="1">
+              <a:t>Mediana: 30 minutos. Percentil 95: 98 minutos.</a:t>
+            </a:r>
+          </a:p>
+          <a:p>
+            <a:r>
+              <a:rPr sz="1500" b="1">
                 <a:solidFill>
                   <a:srgbClr val="E0A437"/>
                 </a:solidFill>
@@ -5171,18 +5033,18 @@
               <a:t>▸ </a:t>
             </a:r>
             <a:r>
-              <a:rPr sz="1800" b="0">
+              <a:rPr sz="1500" b="0">
                 <a:solidFill>
                   <a:srgbClr val="3A4A5C"/>
                 </a:solidFill>
                 <a:latin typeface="PT Serif"/>
               </a:rPr>
-              <a:t>La media truncada descarta un porcentaje de cada extremo antes de promediar.</a:t>
-            </a:r>
-          </a:p>
-          <a:p>
-            <a:r>
-              <a:rPr sz="1800" b="1">
+              <a:t>Máximo registrado: 1.335 minutos, un viaje de 22 horas.</a:t>
+            </a:r>
+          </a:p>
+          <a:p>
+            <a:r>
+              <a:rPr sz="1500" b="1">
                 <a:solidFill>
                   <a:srgbClr val="E0A437"/>
                 </a:solidFill>
@@ -5191,17 +5053,61 @@
               <a:t>▸ </a:t>
             </a:r>
             <a:r>
-              <a:rPr sz="1800" b="1">
+              <a:rPr sz="1500" b="0">
+                <a:solidFill>
+                  <a:srgbClr val="3A4A5C"/>
+                </a:solidFill>
+                <a:latin typeface="PT Serif"/>
+              </a:rPr>
+              <a:t>¿Error de digitación? ¿Turno nocturno mal anotado?</a:t>
+            </a:r>
+          </a:p>
+          <a:p>
+            <a:r>
+              <a:rPr sz="1500" b="1">
+                <a:solidFill>
+                  <a:srgbClr val="E0A437"/>
+                </a:solidFill>
+                <a:latin typeface="PT Serif"/>
+              </a:rPr>
+              <a:t>▸ </a:t>
+            </a:r>
+            <a:r>
+              <a:rPr sz="1500" b="1">
                 <a:solidFill>
                   <a:srgbClr val="1D3557"/>
                 </a:solidFill>
                 <a:latin typeface="PT Serif"/>
               </a:rPr>
-              <a:t>Con distribuciones asimétricas, la mediana describe mejor el caso típico.</a:t>
-            </a:r>
-          </a:p>
-        </p:txBody>
-      </p:sp>
+              <a:t>Los valores extremos no se borran por molestos: se investigan y la decisión se declara.</a:t>
+            </a:r>
+          </a:p>
+        </p:txBody>
+      </p:sp>
+      <p:pic>
+        <p:nvPicPr>
+          <p:cNvPr id="5" name="Picture 4" descr="04_duracion_viajes.png"/>
+          <p:cNvPicPr>
+            <a:picLocks noChangeAspect="1"/>
+          </p:cNvPicPr>
+          <p:nvPr/>
+        </p:nvPicPr>
+        <p:blipFill>
+          <a:blip r:embed="rId2"/>
+          <a:stretch>
+            <a:fillRect/>
+          </a:stretch>
+        </p:blipFill>
+        <p:spPr>
+          <a:xfrm>
+            <a:off x="4892040" y="1371600"/>
+            <a:ext cx="3840480" cy="2196274"/>
+          </a:xfrm>
+          <a:prstGeom prst="rect">
+            <a:avLst/>
+          </a:prstGeom>
+        </p:spPr>
+      </p:pic>
     </p:spTree>
   </p:cSld>
   <p:clrMapOvr>
@@ -5293,7 +5199,7 @@
                 </a:solidFill>
                 <a:latin typeface="PT Serif"/>
               </a:rPr>
-              <a:t>Percentiles: la forma completa</a:t>
+              <a:t>¿En qué se mueve Santiago?</a:t>
             </a:r>
           </a:p>
         </p:txBody>
@@ -5306,8 +5212,8 @@
         </p:nvSpPr>
         <p:spPr>
           <a:xfrm>
-            <a:off x="704088" y="1353312"/>
-            <a:ext cx="7744968" cy="3300984"/>
+            <a:off x="502920" y="1252728"/>
+            <a:ext cx="4023360" cy="3200400"/>
           </a:xfrm>
           <a:prstGeom prst="rect">
             <a:avLst/>
@@ -5321,7 +5227,7 @@
           <a:lstStyle/>
           <a:p>
             <a:r>
-              <a:rPr sz="1800" b="1">
+              <a:rPr sz="1500" b="1">
                 <a:solidFill>
                   <a:srgbClr val="E0A437"/>
                 </a:solidFill>
@@ -5330,18 +5236,18 @@
               <a:t>▸ </a:t>
             </a:r>
             <a:r>
-              <a:rPr sz="1800" b="0">
+              <a:rPr sz="1500" b="0">
                 <a:solidFill>
                   <a:srgbClr val="3A4A5C"/>
                 </a:solidFill>
                 <a:latin typeface="PT Serif"/>
               </a:rPr>
-              <a:t>El percentil 90 es el valor bajo el cual queda el 90% de las observaciones.</a:t>
-            </a:r>
-          </a:p>
-          <a:p>
-            <a:r>
-              <a:rPr sz="1400" b="0">
+              <a:t>Dos merges y un groupby ponderado por factor.</a:t>
+            </a:r>
+          </a:p>
+          <a:p>
+            <a:r>
+              <a:rPr sz="1300" b="0">
                 <a:solidFill>
                   <a:srgbClr val="6B7785"/>
                 </a:solidFill>
@@ -5350,18 +5256,18 @@
               <a:t>     ◦  </a:t>
             </a:r>
             <a:r>
-              <a:rPr sz="1400" b="0">
+              <a:rPr sz="1300" b="0">
                 <a:solidFill>
                   <a:srgbClr val="6B7785"/>
                 </a:solidFill>
                 <a:latin typeface="PT Serif"/>
               </a:rPr>
-              <a:t>Percentil 50: 0,006 t.</a:t>
-            </a:r>
-          </a:p>
-          <a:p>
-            <a:r>
-              <a:rPr sz="1400" b="0">
+              <a:t>Caminata: 34% de los viajes.</a:t>
+            </a:r>
+          </a:p>
+          <a:p>
+            <a:r>
+              <a:rPr sz="1300" b="0">
                 <a:solidFill>
                   <a:srgbClr val="6B7785"/>
                 </a:solidFill>
@@ -5370,18 +5276,18 @@
               <a:t>     ◦  </a:t>
             </a:r>
             <a:r>
-              <a:rPr sz="1400" b="0">
+              <a:rPr sz="1300" b="0">
                 <a:solidFill>
                   <a:srgbClr val="6B7785"/>
                 </a:solidFill>
                 <a:latin typeface="PT Serif"/>
               </a:rPr>
-              <a:t>Percentil 90: 0,153 t.</a:t>
-            </a:r>
-          </a:p>
-          <a:p>
-            <a:r>
-              <a:rPr sz="1400" b="0">
+              <a:t>Transporte público (Bip!): 24%.</a:t>
+            </a:r>
+          </a:p>
+          <a:p>
+            <a:r>
+              <a:rPr sz="1300" b="0">
                 <a:solidFill>
                   <a:srgbClr val="6B7785"/>
                 </a:solidFill>
@@ -5390,38 +5296,18 @@
               <a:t>     ◦  </a:t>
             </a:r>
             <a:r>
-              <a:rPr sz="1400" b="0">
+              <a:rPr sz="1300" b="0">
                 <a:solidFill>
                   <a:srgbClr val="6B7785"/>
                 </a:solidFill>
                 <a:latin typeface="PT Serif"/>
               </a:rPr>
-              <a:t>Percentil 95: 0,672 t.</a:t>
-            </a:r>
-          </a:p>
-          <a:p>
-            <a:r>
-              <a:rPr sz="1400" b="0">
-                <a:solidFill>
-                  <a:srgbClr val="6B7785"/>
-                </a:solidFill>
-                <a:latin typeface="PT Serif"/>
-              </a:rPr>
-              <a:t>     ◦  </a:t>
-            </a:r>
-            <a:r>
-              <a:rPr sz="1400" b="0">
-                <a:solidFill>
-                  <a:srgbClr val="6B7785"/>
-                </a:solidFill>
-                <a:latin typeface="PT Serif"/>
-              </a:rPr>
-              <a:t>Percentil 99: 5,809 t.</a:t>
-            </a:r>
-          </a:p>
-          <a:p>
-            <a:r>
-              <a:rPr sz="1800" b="1">
+              <a:t>Auto: 23%.</a:t>
+            </a:r>
+          </a:p>
+          <a:p>
+            <a:r>
+              <a:rPr sz="1500" b="1">
                 <a:solidFill>
                   <a:srgbClr val="E0A437"/>
                 </a:solidFill>
@@ -5430,17 +5316,41 @@
               <a:t>▸ </a:t>
             </a:r>
             <a:r>
-              <a:rPr sz="1800" b="1">
+              <a:rPr sz="1500" b="1">
                 <a:solidFill>
                   <a:srgbClr val="1D3557"/>
                 </a:solidFill>
                 <a:latin typeface="PT Serif"/>
               </a:rPr>
-              <a:t>El 95% emite menos de 0,7 t al año, y el máximo llega a 299.</a:t>
-            </a:r>
-          </a:p>
-        </p:txBody>
-      </p:sp>
+              <a:t>Esta es la partición modal oficial, calculada por nosotros desde los microdatos.</a:t>
+            </a:r>
+          </a:p>
+        </p:txBody>
+      </p:sp>
+      <p:pic>
+        <p:nvPicPr>
+          <p:cNvPr id="5" name="Picture 4" descr="03_reparto_modal.png"/>
+          <p:cNvPicPr>
+            <a:picLocks noChangeAspect="1"/>
+          </p:cNvPicPr>
+          <p:nvPr/>
+        </p:nvPicPr>
+        <p:blipFill>
+          <a:blip r:embed="rId2"/>
+          <a:stretch>
+            <a:fillRect/>
+          </a:stretch>
+        </p:blipFill>
+        <p:spPr>
+          <a:xfrm>
+            <a:off x="4892040" y="1371600"/>
+            <a:ext cx="3840480" cy="1966813"/>
+          </a:xfrm>
+          <a:prstGeom prst="rect">
+            <a:avLst/>
+          </a:prstGeom>
+        </p:spPr>
+      </p:pic>
     </p:spTree>
   </p:cSld>
   <p:clrMapOvr>
@@ -5575,7 +5485,7 @@
                 </a:solidFill>
                 <a:latin typeface="PT Serif"/>
               </a:rPr>
-              <a:t>Cargar datos reales y describir su estructura.</a:t>
+              <a:t>Le haremos preguntas reales a la Encuesta Origen Destino de Santiago.</a:t>
             </a:r>
           </a:p>
           <a:p>
@@ -5595,7 +5505,47 @@
                 </a:solidFill>
                 <a:latin typeface="PT Serif"/>
               </a:rPr>
-              <a:t>Seleccionar, filtrar y tratar los datos faltantes.</a:t>
+              <a:t>Cada pregunta trae su herramienta: el repaso de Pandas va en el camino.</a:t>
+            </a:r>
+          </a:p>
+          <a:p>
+            <a:r>
+              <a:rPr sz="1400" b="0">
+                <a:solidFill>
+                  <a:srgbClr val="6B7785"/>
+                </a:solidFill>
+                <a:latin typeface="PT Serif"/>
+              </a:rPr>
+              <a:t>     ◦  </a:t>
+            </a:r>
+            <a:r>
+              <a:rPr sz="1400" b="0">
+                <a:solidFill>
+                  <a:srgbClr val="6B7785"/>
+                </a:solidFill>
+                <a:latin typeface="PT Serif"/>
+              </a:rPr>
+              <a:t>Cargar y mirar, derivar columnas, filtrar, merge, groupby.</a:t>
+            </a:r>
+          </a:p>
+          <a:p>
+            <a:r>
+              <a:rPr sz="1400" b="0">
+                <a:solidFill>
+                  <a:srgbClr val="6B7785"/>
+                </a:solidFill>
+                <a:latin typeface="PT Serif"/>
+              </a:rPr>
+              <a:t>     ◦  </a:t>
+            </a:r>
+            <a:r>
+              <a:rPr sz="1400" b="0">
+                <a:solidFill>
+                  <a:srgbClr val="6B7785"/>
+                </a:solidFill>
+                <a:latin typeface="PT Serif"/>
+              </a:rPr>
+              <a:t>Lo probablemente nuevo: tablas de códigos y factores de expansión.</a:t>
             </a:r>
           </a:p>
           <a:p>
@@ -5615,7 +5565,7 @@
                 </a:solidFill>
                 <a:latin typeface="PT Serif"/>
               </a:rPr>
-              <a:t>Resumir con groupby y combinar tablas con merge.</a:t>
+              <a:t>Inicio del análisis exploratorio: qué número resume bien una respuesta.</a:t>
             </a:r>
           </a:p>
           <a:p>
@@ -5629,33 +5579,13 @@
               <a:t>▸ </a:t>
             </a:r>
             <a:r>
-              <a:rPr sz="1800" b="0">
-                <a:solidFill>
-                  <a:srgbClr val="3A4A5C"/>
-                </a:solidFill>
-                <a:latin typeface="PT Serif"/>
-              </a:rPr>
-              <a:t>Empezar el análisis exploratorio: medidas de resumen y primeras figuras.</a:t>
-            </a:r>
-          </a:p>
-          <a:p>
-            <a:r>
               <a:rPr sz="1800" b="1">
                 <a:solidFill>
-                  <a:srgbClr val="E0A437"/>
-                </a:solidFill>
-                <a:latin typeface="PT Serif"/>
-              </a:rPr>
-              <a:t>▸ </a:t>
-            </a:r>
-            <a:r>
-              <a:rPr sz="1800" b="1">
-                <a:solidFill>
                   <a:srgbClr val="1D3557"/>
                 </a:solidFill>
                 <a:latin typeface="PT Serif"/>
               </a:rPr>
-              <a:t>Cerramos con la actividad en parejas, en el segundo bloque.</a:t>
+              <a:t>En el segundo bloque parte la Tarea 1: el retrato de tu comuna.</a:t>
             </a:r>
           </a:p>
         </p:txBody>
@@ -5751,45 +5681,21 @@
                 </a:solidFill>
                 <a:latin typeface="PT Serif"/>
               </a:rPr>
-              <a:t>Un histograma que no se puede leer</a:t>
-            </a:r>
-          </a:p>
-        </p:txBody>
-      </p:sp>
-      <p:pic>
-        <p:nvPicPr>
-          <p:cNvPr id="4" name="Picture 3" descr="01_histograma_crudo.png"/>
-          <p:cNvPicPr>
-            <a:picLocks noChangeAspect="1"/>
-          </p:cNvPicPr>
-          <p:nvPr/>
-        </p:nvPicPr>
-        <p:blipFill>
-          <a:blip r:embed="rId2"/>
-          <a:stretch>
-            <a:fillRect/>
-          </a:stretch>
-        </p:blipFill>
-        <p:spPr>
-          <a:xfrm>
-            <a:off x="1417320" y="1188720"/>
-            <a:ext cx="6309360" cy="3657697"/>
-          </a:xfrm>
-          <a:prstGeom prst="rect">
-            <a:avLst/>
-          </a:prstGeom>
-        </p:spPr>
-      </p:pic>
-      <p:sp>
-        <p:nvSpPr>
-          <p:cNvPr id="5" name="TextBox 4"/>
+              <a:t>Síntesis: ¿de quién habla este número?</a:t>
+            </a:r>
+          </a:p>
+        </p:txBody>
+      </p:sp>
+      <p:sp>
+        <p:nvSpPr>
+          <p:cNvPr id="4" name="TextBox 3"/>
           <p:cNvSpPr txBox="1"/>
           <p:nvPr/>
         </p:nvSpPr>
         <p:spPr>
           <a:xfrm>
-            <a:off x="704088" y="4434840"/>
-            <a:ext cx="7744968" cy="457200"/>
+            <a:off x="704088" y="1353312"/>
+            <a:ext cx="7744968" cy="3300984"/>
           </a:xfrm>
           <a:prstGeom prst="rect">
             <a:avLst/>
@@ -5803,13 +5709,102 @@
           <a:lstStyle/>
           <a:p>
             <a:r>
-              <a:rPr sz="1300" b="0">
-                <a:solidFill>
-                  <a:srgbClr val="6B7785"/>
-                </a:solidFill>
-                <a:latin typeface="PT Serif"/>
-              </a:rPr>
-              <a:t>Pasa siempre que la distribución es muy asimétrica: todo cae en la primera barra.</a:t>
+              <a:rPr sz="1800" b="1">
+                <a:solidFill>
+                  <a:srgbClr val="E0A437"/>
+                </a:solidFill>
+                <a:latin typeface="PT Serif"/>
+              </a:rPr>
+              <a:t>▸ </a:t>
+            </a:r>
+            <a:r>
+              <a:rPr sz="1800" b="0">
+                <a:solidFill>
+                  <a:srgbClr val="3A4A5C"/>
+                </a:solidFill>
+                <a:latin typeface="PT Serif"/>
+              </a:rPr>
+              <a:t>'El hogar promedio gana $688 mil': de casi nadie; la mediana habla del hogar típico.</a:t>
+            </a:r>
+          </a:p>
+          <a:p>
+            <a:r>
+              <a:rPr sz="1800" b="1">
+                <a:solidFill>
+                  <a:srgbClr val="E0A437"/>
+                </a:solidFill>
+                <a:latin typeface="PT Serif"/>
+              </a:rPr>
+              <a:t>▸ </a:t>
+            </a:r>
+            <a:r>
+              <a:rPr sz="1800" b="0">
+                <a:solidFill>
+                  <a:srgbClr val="3A4A5C"/>
+                </a:solidFill>
+                <a:latin typeface="PT Serif"/>
+              </a:rPr>
+              <a:t>'El 53% de los encuestados...': de la muestra; los factores de expansión hablan de la ciudad.</a:t>
+            </a:r>
+          </a:p>
+          <a:p>
+            <a:r>
+              <a:rPr sz="1800" b="1">
+                <a:solidFill>
+                  <a:srgbClr val="E0A437"/>
+                </a:solidFill>
+                <a:latin typeface="PT Serif"/>
+              </a:rPr>
+              <a:t>▸ </a:t>
+            </a:r>
+            <a:r>
+              <a:rPr sz="1800" b="0">
+                <a:solidFill>
+                  <a:srgbClr val="3A4A5C"/>
+                </a:solidFill>
+                <a:latin typeface="PT Serif"/>
+              </a:rPr>
+              <a:t>'1,9 viajes en promedio': solo si contamos a quienes no viajaron y no estaban en la tabla.</a:t>
+            </a:r>
+          </a:p>
+          <a:p>
+            <a:r>
+              <a:rPr sz="1800" b="1">
+                <a:solidFill>
+                  <a:srgbClr val="E0A437"/>
+                </a:solidFill>
+                <a:latin typeface="PT Serif"/>
+              </a:rPr>
+              <a:t>▸ </a:t>
+            </a:r>
+            <a:r>
+              <a:rPr sz="1800" b="0">
+                <a:solidFill>
+                  <a:srgbClr val="3A4A5C"/>
+                </a:solidFill>
+                <a:latin typeface="PT Serif"/>
+              </a:rPr>
+              <a:t>'El sexo es 1 o 2': sin su tabla de códigos, un número no habla de nada.</a:t>
+            </a:r>
+          </a:p>
+          <a:p>
+            <a:r>
+              <a:rPr sz="1800" b="1">
+                <a:solidFill>
+                  <a:srgbClr val="E0A437"/>
+                </a:solidFill>
+                <a:latin typeface="PT Serif"/>
+              </a:rPr>
+              <a:t>▸ </a:t>
+            </a:r>
+            <a:r>
+              <a:rPr sz="1800" b="1">
+                <a:solidFill>
+                  <a:srgbClr val="1D3557"/>
+                </a:solidFill>
+                <a:latin typeface="PT Serif"/>
+              </a:rPr>
+              <a:t>La técnica era repaso; el hábito de interrogar cada cifra es lo que se llevan.</a:t>
             </a:r>
           </a:p>
         </p:txBody>
@@ -5905,45 +5900,21 @@
                 </a:solidFill>
                 <a:latin typeface="PT Serif"/>
               </a:rPr>
-              <a:t>El mismo histograma en escala logarítmica</a:t>
-            </a:r>
-          </a:p>
-        </p:txBody>
-      </p:sp>
-      <p:pic>
-        <p:nvPicPr>
-          <p:cNvPr id="4" name="Picture 3" descr="02_histograma_log.png"/>
-          <p:cNvPicPr>
-            <a:picLocks noChangeAspect="1"/>
-          </p:cNvPicPr>
-          <p:nvPr/>
-        </p:nvPicPr>
-        <p:blipFill>
-          <a:blip r:embed="rId2"/>
-          <a:stretch>
-            <a:fillRect/>
-          </a:stretch>
-        </p:blipFill>
-        <p:spPr>
-          <a:xfrm>
-            <a:off x="1417320" y="1188720"/>
-            <a:ext cx="6309360" cy="3630672"/>
-          </a:xfrm>
-          <a:prstGeom prst="rect">
-            <a:avLst/>
-          </a:prstGeom>
-        </p:spPr>
-      </p:pic>
-      <p:sp>
-        <p:nvSpPr>
-          <p:cNvPr id="5" name="TextBox 4"/>
+              <a:t>Segundo bloque: parte la Tarea 1</a:t>
+            </a:r>
+          </a:p>
+        </p:txBody>
+      </p:sp>
+      <p:sp>
+        <p:nvSpPr>
+          <p:cNvPr id="4" name="TextBox 3"/>
           <p:cNvSpPr txBox="1"/>
           <p:nvPr/>
         </p:nvSpPr>
         <p:spPr>
           <a:xfrm>
-            <a:off x="704088" y="4434840"/>
-            <a:ext cx="7744968" cy="457200"/>
+            <a:off x="704088" y="1353312"/>
+            <a:ext cx="7744968" cy="3300984"/>
           </a:xfrm>
           <a:prstGeom prst="rect">
             <a:avLst/>
@@ -5957,288 +5928,84 @@
           <a:lstStyle/>
           <a:p>
             <a:r>
-              <a:rPr sz="1300" b="0">
+              <a:rPr sz="1800" b="1">
+                <a:solidFill>
+                  <a:srgbClr val="E0A437"/>
+                </a:solidFill>
+                <a:latin typeface="PT Serif"/>
+              </a:rPr>
+              <a:t>▸ </a:t>
+            </a:r>
+            <a:r>
+              <a:rPr sz="1800" b="0">
+                <a:solidFill>
+                  <a:srgbClr val="3A4A5C"/>
+                </a:solidFill>
+                <a:latin typeface="PT Serif"/>
+              </a:rPr>
+              <a:t>El retrato de tu comuna: cada pareja adopta una comuna del Gran Santiago.</a:t>
+            </a:r>
+          </a:p>
+          <a:p>
+            <a:r>
+              <a:rPr sz="1400" b="0">
                 <a:solidFill>
                   <a:srgbClr val="6B7785"/>
                 </a:solidFill>
                 <a:latin typeface="PT Serif"/>
               </a:rPr>
-              <a:t>Ojo: los intervalos también deben ser logarítmicos, no basta con cambiar el eje.</a:t>
-            </a:r>
-          </a:p>
-        </p:txBody>
-      </p:sp>
-    </p:spTree>
-  </p:cSld>
-  <p:clrMapOvr>
-    <a:masterClrMapping/>
-  </p:clrMapOvr>
-</p:sld>
-</file>
-
-<file path=ppt/slides/slide22.xml><?xml version="1.0" encoding="utf-8"?>
-<p:sld xmlns:a="http://schemas.openxmlformats.org/drawingml/2006/main" xmlns:p="http://schemas.openxmlformats.org/presentationml/2006/main" xmlns:r="http://schemas.openxmlformats.org/officeDocument/2006/relationships">
-  <p:cSld>
-    <p:spTree>
-      <p:nvGrpSpPr>
-        <p:cNvPr id="1" name=""/>
-        <p:cNvGrpSpPr/>
-        <p:nvPr/>
-      </p:nvGrpSpPr>
-      <p:grpSpPr/>
-      <p:sp>
-        <p:nvSpPr>
-          <p:cNvPr id="2" name="Rectangle 1"/>
-          <p:cNvSpPr/>
-          <p:nvPr/>
-        </p:nvSpPr>
-        <p:spPr>
-          <a:xfrm>
-            <a:off x="0" y="0"/>
-            <a:ext cx="9144000" cy="5138928"/>
-          </a:xfrm>
-          <a:prstGeom prst="rect">
-            <a:avLst/>
-          </a:prstGeom>
-          <a:solidFill>
-            <a:srgbClr val="FAFBFC"/>
-          </a:solidFill>
-          <a:ln>
-            <a:noFill/>
-          </a:ln>
-          <a:effectLst/>
-        </p:spPr>
-        <p:style>
-          <a:lnRef idx="1">
-            <a:schemeClr val="accent1"/>
-          </a:lnRef>
-          <a:fillRef idx="3">
-            <a:schemeClr val="accent1"/>
-          </a:fillRef>
-          <a:effectRef idx="2">
-            <a:schemeClr val="accent1"/>
-          </a:effectRef>
-          <a:fontRef idx="minor">
-            <a:schemeClr val="lt1"/>
-          </a:fontRef>
-        </p:style>
-        <p:txBody>
-          <a:bodyPr rtlCol="0" anchor="ctr"/>
-          <a:lstStyle/>
-          <a:p>
-            <a:pPr algn="ctr"/>
-          </a:p>
-        </p:txBody>
-      </p:sp>
-      <p:sp>
-        <p:nvSpPr>
-          <p:cNvPr id="3" name="TextBox 2"/>
-          <p:cNvSpPr txBox="1"/>
-          <p:nvPr/>
-        </p:nvSpPr>
-        <p:spPr>
-          <a:xfrm>
-            <a:off x="402336" y="301752"/>
-            <a:ext cx="8348472" cy="795528"/>
-          </a:xfrm>
-          <a:prstGeom prst="rect">
-            <a:avLst/>
-          </a:prstGeom>
-          <a:noFill/>
-        </p:spPr>
-        <p:txBody>
-          <a:bodyPr wrap="square">
-            <a:spAutoFit/>
-          </a:bodyPr>
-          <a:lstStyle/>
-          <a:p>
-            <a:r>
-              <a:rPr sz="2800" b="1">
-                <a:solidFill>
-                  <a:srgbClr val="0F0F0F"/>
-                </a:solidFill>
-                <a:latin typeface="PT Serif"/>
-              </a:rPr>
-              <a:t>Comparar grupos con diagramas de caja</a:t>
-            </a:r>
-          </a:p>
-        </p:txBody>
-      </p:sp>
-      <p:pic>
-        <p:nvPicPr>
-          <p:cNvPr id="4" name="Picture 3" descr="05_boxplot_macrozona.png"/>
-          <p:cNvPicPr>
-            <a:picLocks noChangeAspect="1"/>
-          </p:cNvPicPr>
-          <p:nvPr/>
-        </p:nvPicPr>
-        <p:blipFill>
-          <a:blip r:embed="rId2"/>
-          <a:stretch>
-            <a:fillRect/>
-          </a:stretch>
-        </p:blipFill>
-        <p:spPr>
-          <a:xfrm>
-            <a:off x="1417320" y="1188720"/>
-            <a:ext cx="6309360" cy="3691647"/>
-          </a:xfrm>
-          <a:prstGeom prst="rect">
-            <a:avLst/>
-          </a:prstGeom>
-        </p:spPr>
-      </p:pic>
-      <p:sp>
-        <p:nvSpPr>
-          <p:cNvPr id="5" name="TextBox 4"/>
-          <p:cNvSpPr txBox="1"/>
-          <p:nvPr/>
-        </p:nvSpPr>
-        <p:spPr>
-          <a:xfrm>
-            <a:off x="704088" y="4434840"/>
-            <a:ext cx="7744968" cy="457200"/>
-          </a:xfrm>
-          <a:prstGeom prst="rect">
-            <a:avLst/>
-          </a:prstGeom>
-          <a:noFill/>
-        </p:spPr>
-        <p:txBody>
-          <a:bodyPr wrap="square">
-            <a:spAutoFit/>
-          </a:bodyPr>
-          <a:lstStyle/>
-          <a:p>
-            <a:r>
-              <a:rPr sz="1300" b="0">
+              <a:t>     ◦  </a:t>
+            </a:r>
+            <a:r>
+              <a:rPr sz="1400" b="0">
                 <a:solidFill>
                   <a:srgbClr val="6B7785"/>
                 </a:solidFill>
                 <a:latin typeface="PT Serif"/>
               </a:rPr>
-              <a:t>La caja va del percentil 25 al 75, y la línea del medio es la mediana.</a:t>
-            </a:r>
-          </a:p>
-        </p:txBody>
-      </p:sp>
-    </p:spTree>
-  </p:cSld>
-  <p:clrMapOvr>
-    <a:masterClrMapping/>
-  </p:clrMapOvr>
-</p:sld>
-</file>
-
-<file path=ppt/slides/slide23.xml><?xml version="1.0" encoding="utf-8"?>
-<p:sld xmlns:a="http://schemas.openxmlformats.org/drawingml/2006/main" xmlns:p="http://schemas.openxmlformats.org/presentationml/2006/main" xmlns:r="http://schemas.openxmlformats.org/officeDocument/2006/relationships">
-  <p:cSld>
-    <p:spTree>
-      <p:nvGrpSpPr>
-        <p:cNvPr id="1" name=""/>
-        <p:cNvGrpSpPr/>
-        <p:nvPr/>
-      </p:nvGrpSpPr>
-      <p:grpSpPr/>
-      <p:sp>
-        <p:nvSpPr>
-          <p:cNvPr id="2" name="Rectangle 1"/>
-          <p:cNvSpPr/>
-          <p:nvPr/>
-        </p:nvSpPr>
-        <p:spPr>
-          <a:xfrm>
-            <a:off x="0" y="0"/>
-            <a:ext cx="9144000" cy="5138928"/>
-          </a:xfrm>
-          <a:prstGeom prst="rect">
-            <a:avLst/>
-          </a:prstGeom>
-          <a:solidFill>
-            <a:srgbClr val="FAFBFC"/>
-          </a:solidFill>
-          <a:ln>
-            <a:noFill/>
-          </a:ln>
-          <a:effectLst/>
-        </p:spPr>
-        <p:style>
-          <a:lnRef idx="1">
-            <a:schemeClr val="accent1"/>
-          </a:lnRef>
-          <a:fillRef idx="3">
-            <a:schemeClr val="accent1"/>
-          </a:fillRef>
-          <a:effectRef idx="2">
-            <a:schemeClr val="accent1"/>
-          </a:effectRef>
-          <a:fontRef idx="minor">
-            <a:schemeClr val="lt1"/>
-          </a:fontRef>
-        </p:style>
-        <p:txBody>
-          <a:bodyPr rtlCol="0" anchor="ctr"/>
-          <a:lstStyle/>
-          <a:p>
-            <a:pPr algn="ctr"/>
-          </a:p>
-        </p:txBody>
-      </p:sp>
-      <p:sp>
-        <p:nvSpPr>
-          <p:cNvPr id="3" name="TextBox 2"/>
-          <p:cNvSpPr txBox="1"/>
-          <p:nvPr/>
-        </p:nvSpPr>
-        <p:spPr>
-          <a:xfrm>
-            <a:off x="402336" y="301752"/>
-            <a:ext cx="8348472" cy="795528"/>
-          </a:xfrm>
-          <a:prstGeom prst="rect">
-            <a:avLst/>
-          </a:prstGeom>
-          <a:noFill/>
-        </p:spPr>
-        <p:txBody>
-          <a:bodyPr wrap="square">
-            <a:spAutoFit/>
-          </a:bodyPr>
-          <a:lstStyle/>
-          <a:p>
-            <a:r>
-              <a:rPr sz="2800" b="1">
-                <a:solidFill>
-                  <a:srgbClr val="0F0F0F"/>
-                </a:solidFill>
-                <a:latin typeface="PT Serif"/>
-              </a:rPr>
-              <a:t>Síntesis</a:t>
-            </a:r>
-          </a:p>
-        </p:txBody>
-      </p:sp>
-      <p:sp>
-        <p:nvSpPr>
-          <p:cNvPr id="4" name="TextBox 3"/>
-          <p:cNvSpPr txBox="1"/>
-          <p:nvPr/>
-        </p:nvSpPr>
-        <p:spPr>
-          <a:xfrm>
-            <a:off x="704088" y="1353312"/>
-            <a:ext cx="7744968" cy="3300984"/>
-          </a:xfrm>
-          <a:prstGeom prst="rect">
-            <a:avLst/>
-          </a:prstGeom>
-          <a:noFill/>
-        </p:spPr>
-        <p:txBody>
-          <a:bodyPr wrap="square">
-            <a:spAutoFit/>
-          </a:bodyPr>
-          <a:lstStyle/>
+              <a:t>Hoy: elegir la comuna y construir su retrato numérico.</a:t>
+            </a:r>
+          </a:p>
+          <a:p>
+            <a:r>
+              <a:rPr sz="1400" b="0">
+                <a:solidFill>
+                  <a:srgbClr val="6B7785"/>
+                </a:solidFill>
+                <a:latin typeface="PT Serif"/>
+              </a:rPr>
+              <a:t>     ◦  </a:t>
+            </a:r>
+            <a:r>
+              <a:rPr sz="1400" b="0">
+                <a:solidFill>
+                  <a:srgbClr val="6B7785"/>
+                </a:solidFill>
+                <a:latin typeface="PT Serif"/>
+              </a:rPr>
+              <a:t>Próxima clase: el retrato gráfico, con métodos de visualización.</a:t>
+            </a:r>
+          </a:p>
+          <a:p>
+            <a:r>
+              <a:rPr sz="1400" b="0">
+                <a:solidFill>
+                  <a:srgbClr val="6B7785"/>
+                </a:solidFill>
+                <a:latin typeface="PT Serif"/>
+              </a:rPr>
+              <a:t>     ◦  </a:t>
+            </a:r>
+            <a:r>
+              <a:rPr sz="1400" b="0">
+                <a:solidFill>
+                  <a:srgbClr val="6B7785"/>
+                </a:solidFill>
+                <a:latin typeface="PT Serif"/>
+              </a:rPr>
+              <a:t>Entrega del retrato completo: jueves 10 de septiembre, por Aula.</a:t>
+            </a:r>
+          </a:p>
           <a:p>
             <a:r>
               <a:rPr sz="1800" b="1">
@@ -6256,7 +6023,7 @@
                 </a:solidFill>
                 <a:latin typeface="PT Serif"/>
               </a:rPr>
-              <a:t>Antes de calcular: shape, info() y datos faltantes.</a:t>
+              <a:t>El enunciado está en evaluaciones/tareas/ y la guía de hoy en actividades/.</a:t>
             </a:r>
           </a:p>
           <a:p>
@@ -6270,312 +6037,13 @@
               <a:t>▸ </a:t>
             </a:r>
             <a:r>
-              <a:rPr sz="1800" b="0">
-                <a:solidFill>
-                  <a:srgbClr val="3A4A5C"/>
-                </a:solidFill>
-                <a:latin typeface="PT Serif"/>
-              </a:rPr>
-              <a:t>loc es por etiqueta, iloc por posición, y los filtros son condiciones booleanas.</a:t>
-            </a:r>
-          </a:p>
-          <a:p>
-            <a:r>
               <a:rPr sz="1800" b="1">
                 <a:solidFill>
-                  <a:srgbClr val="E0A437"/>
-                </a:solidFill>
-                <a:latin typeface="PT Serif"/>
-              </a:rPr>
-              <a:t>▸ </a:t>
-            </a:r>
-            <a:r>
-              <a:rPr sz="1800" b="0">
-                <a:solidFill>
-                  <a:srgbClr val="3A4A5C"/>
-                </a:solidFill>
-                <a:latin typeface="PT Serif"/>
-              </a:rPr>
-              <a:t>groupby más una función de resumen responde casi todas las preguntas descriptivas.</a:t>
-            </a:r>
-          </a:p>
-          <a:p>
-            <a:r>
-              <a:rPr sz="1800" b="1">
-                <a:solidFill>
-                  <a:srgbClr val="E0A437"/>
-                </a:solidFill>
-                <a:latin typeface="PT Serif"/>
-              </a:rPr>
-              <a:t>▸ </a:t>
-            </a:r>
-            <a:r>
-              <a:rPr sz="1800" b="0">
-                <a:solidFill>
-                  <a:srgbClr val="3A4A5C"/>
-                </a:solidFill>
-                <a:latin typeface="PT Serif"/>
-              </a:rPr>
-              <a:t>Después de un merge, revise si quedaron filas sin pareja.</a:t>
-            </a:r>
-          </a:p>
-          <a:p>
-            <a:r>
-              <a:rPr sz="1800" b="1">
-                <a:solidFill>
-                  <a:srgbClr val="E0A437"/>
-                </a:solidFill>
-                <a:latin typeface="PT Serif"/>
-              </a:rPr>
-              <a:t>▸ </a:t>
-            </a:r>
-            <a:r>
-              <a:rPr sz="1800" b="1">
-                <a:solidFill>
                   <a:srgbClr val="1D3557"/>
                 </a:solidFill>
                 <a:latin typeface="PT Serif"/>
               </a:rPr>
-              <a:t>Con distribuciones asimétricas, la mediana y los percentiles son más honestos que la media.</a:t>
-            </a:r>
-          </a:p>
-        </p:txBody>
-      </p:sp>
-    </p:spTree>
-  </p:cSld>
-  <p:clrMapOvr>
-    <a:masterClrMapping/>
-  </p:clrMapOvr>
-</p:sld>
-</file>
-
-<file path=ppt/slides/slide24.xml><?xml version="1.0" encoding="utf-8"?>
-<p:sld xmlns:a="http://schemas.openxmlformats.org/drawingml/2006/main" xmlns:p="http://schemas.openxmlformats.org/presentationml/2006/main" xmlns:r="http://schemas.openxmlformats.org/officeDocument/2006/relationships">
-  <p:cSld>
-    <p:spTree>
-      <p:nvGrpSpPr>
-        <p:cNvPr id="1" name=""/>
-        <p:cNvGrpSpPr/>
-        <p:nvPr/>
-      </p:nvGrpSpPr>
-      <p:grpSpPr/>
-      <p:sp>
-        <p:nvSpPr>
-          <p:cNvPr id="2" name="Rectangle 1"/>
-          <p:cNvSpPr/>
-          <p:nvPr/>
-        </p:nvSpPr>
-        <p:spPr>
-          <a:xfrm>
-            <a:off x="0" y="0"/>
-            <a:ext cx="9144000" cy="5138928"/>
-          </a:xfrm>
-          <a:prstGeom prst="rect">
-            <a:avLst/>
-          </a:prstGeom>
-          <a:solidFill>
-            <a:srgbClr val="FAFBFC"/>
-          </a:solidFill>
-          <a:ln>
-            <a:noFill/>
-          </a:ln>
-          <a:effectLst/>
-        </p:spPr>
-        <p:style>
-          <a:lnRef idx="1">
-            <a:schemeClr val="accent1"/>
-          </a:lnRef>
-          <a:fillRef idx="3">
-            <a:schemeClr val="accent1"/>
-          </a:fillRef>
-          <a:effectRef idx="2">
-            <a:schemeClr val="accent1"/>
-          </a:effectRef>
-          <a:fontRef idx="minor">
-            <a:schemeClr val="lt1"/>
-          </a:fontRef>
-        </p:style>
-        <p:txBody>
-          <a:bodyPr rtlCol="0" anchor="ctr"/>
-          <a:lstStyle/>
-          <a:p>
-            <a:pPr algn="ctr"/>
-          </a:p>
-        </p:txBody>
-      </p:sp>
-      <p:sp>
-        <p:nvSpPr>
-          <p:cNvPr id="3" name="TextBox 2"/>
-          <p:cNvSpPr txBox="1"/>
-          <p:nvPr/>
-        </p:nvSpPr>
-        <p:spPr>
-          <a:xfrm>
-            <a:off x="402336" y="301752"/>
-            <a:ext cx="8348472" cy="795528"/>
-          </a:xfrm>
-          <a:prstGeom prst="rect">
-            <a:avLst/>
-          </a:prstGeom>
-          <a:noFill/>
-        </p:spPr>
-        <p:txBody>
-          <a:bodyPr wrap="square">
-            <a:spAutoFit/>
-          </a:bodyPr>
-          <a:lstStyle/>
-          <a:p>
-            <a:r>
-              <a:rPr sz="2800" b="1">
-                <a:solidFill>
-                  <a:srgbClr val="0F0F0F"/>
-                </a:solidFill>
-                <a:latin typeface="PT Serif"/>
-              </a:rPr>
-              <a:t>Actividad de hoy</a:t>
-            </a:r>
-          </a:p>
-        </p:txBody>
-      </p:sp>
-      <p:sp>
-        <p:nvSpPr>
-          <p:cNvPr id="4" name="TextBox 3"/>
-          <p:cNvSpPr txBox="1"/>
-          <p:nvPr/>
-        </p:nvSpPr>
-        <p:spPr>
-          <a:xfrm>
-            <a:off x="704088" y="1353312"/>
-            <a:ext cx="7744968" cy="3300984"/>
-          </a:xfrm>
-          <a:prstGeom prst="rect">
-            <a:avLst/>
-          </a:prstGeom>
-          <a:noFill/>
-        </p:spPr>
-        <p:txBody>
-          <a:bodyPr wrap="square">
-            <a:spAutoFit/>
-          </a:bodyPr>
-          <a:lstStyle/>
-          <a:p>
-            <a:r>
-              <a:rPr sz="1800" b="1">
-                <a:solidFill>
-                  <a:srgbClr val="E0A437"/>
-                </a:solidFill>
-                <a:latin typeface="PT Serif"/>
-              </a:rPr>
-              <a:t>▸ </a:t>
-            </a:r>
-            <a:r>
-              <a:rPr sz="1800" b="0">
-                <a:solidFill>
-                  <a:srgbClr val="3A4A5C"/>
-                </a:solidFill>
-                <a:latin typeface="PT Serif"/>
-              </a:rPr>
-              <a:t>En parejas, en el segundo bloque, sobre el mismo archivo de emisiones.</a:t>
-            </a:r>
-          </a:p>
-          <a:p>
-            <a:r>
-              <a:rPr sz="1400" b="0">
-                <a:solidFill>
-                  <a:srgbClr val="6B7785"/>
-                </a:solidFill>
-                <a:latin typeface="PT Serif"/>
-              </a:rPr>
-              <a:t>     ◦  </a:t>
-            </a:r>
-            <a:r>
-              <a:rPr sz="1400" b="0">
-                <a:solidFill>
-                  <a:srgbClr val="6B7785"/>
-                </a:solidFill>
-                <a:latin typeface="PT Serif"/>
-              </a:rPr>
-              <a:t>Cargar los datos y describir su estructura.</a:t>
-            </a:r>
-          </a:p>
-          <a:p>
-            <a:r>
-              <a:rPr sz="1400" b="0">
-                <a:solidFill>
-                  <a:srgbClr val="6B7785"/>
-                </a:solidFill>
-                <a:latin typeface="PT Serif"/>
-              </a:rPr>
-              <a:t>     ◦  </a:t>
-            </a:r>
-            <a:r>
-              <a:rPr sz="1400" b="0">
-                <a:solidFill>
-                  <a:srgbClr val="6B7785"/>
-                </a:solidFill>
-                <a:latin typeface="PT Serif"/>
-              </a:rPr>
-              <a:t>Comparar MP10 y MP2,5 por región.</a:t>
-            </a:r>
-          </a:p>
-          <a:p>
-            <a:r>
-              <a:rPr sz="1400" b="0">
-                <a:solidFill>
-                  <a:srgbClr val="6B7785"/>
-                </a:solidFill>
-                <a:latin typeface="PT Serif"/>
-              </a:rPr>
-              <a:t>     ◦  </a:t>
-            </a:r>
-            <a:r>
-              <a:rPr sz="1400" b="0">
-                <a:solidFill>
-                  <a:srgbClr val="6B7785"/>
-                </a:solidFill>
-                <a:latin typeface="PT Serif"/>
-              </a:rPr>
-              <a:t>Encontrar los establecimientos que más emiten SO2.</a:t>
-            </a:r>
-          </a:p>
-          <a:p>
-            <a:r>
-              <a:rPr sz="1400" b="0">
-                <a:solidFill>
-                  <a:srgbClr val="6B7785"/>
-                </a:solidFill>
-                <a:latin typeface="PT Serif"/>
-              </a:rPr>
-              <a:t>     ◦  </a:t>
-            </a:r>
-            <a:r>
-              <a:rPr sz="1400" b="0">
-                <a:solidFill>
-                  <a:srgbClr val="6B7785"/>
-                </a:solidFill>
-                <a:latin typeface="PT Serif"/>
-              </a:rPr>
-              <a:t>Decidir qué medida de resumen reportar y justificarlo.</a:t>
-            </a:r>
-          </a:p>
-          <a:p>
-            <a:r>
-              <a:rPr sz="1800" b="1">
-                <a:solidFill>
-                  <a:srgbClr val="E0A437"/>
-                </a:solidFill>
-                <a:latin typeface="PT Serif"/>
-              </a:rPr>
-              <a:t>▸ </a:t>
-            </a:r>
-            <a:r>
-              <a:rPr sz="1800" b="1">
-                <a:solidFill>
-                  <a:srgbClr val="1D3557"/>
-                </a:solidFill>
-                <a:latin typeface="PT Serif"/>
-              </a:rPr>
-              <a:t>El enunciado está en actividades/clase02_actividad.md.</a:t>
+              <a:t>Lo que hagan en este bloque ya es parte de la tarea.</a:t>
             </a:r>
           </a:p>
         </p:txBody>
@@ -6671,7 +6139,7 @@
                 </a:solidFill>
                 <a:latin typeface="PT Serif"/>
               </a:rPr>
-              <a:t>Los datos de hoy</a:t>
+              <a:t>¿De quién habla este número?</a:t>
             </a:r>
           </a:p>
           <a:p>
@@ -6682,7 +6150,7 @@
                 </a:solidFill>
                 <a:latin typeface="PT Serif"/>
               </a:rPr>
-              <a:t>Emisiones al aire declaradas en Chile</a:t>
+              <a:t>El concepto que nos llevamos hoy</a:t>
             </a:r>
           </a:p>
         </p:txBody>
@@ -6778,7 +6246,7 @@
                 </a:solidFill>
                 <a:latin typeface="PT Serif"/>
               </a:rPr>
-              <a:t>De dónde vienen los datos</a:t>
+              <a:t>La pregunta que ordena toda la clase</a:t>
             </a:r>
           </a:p>
         </p:txBody>
@@ -6821,7 +6289,7 @@
                 </a:solidFill>
                 <a:latin typeface="PT Serif"/>
               </a:rPr>
-              <a:t>Registro de Emisiones y Transferencias de Contaminantes (RETC), del Ministerio del Medio Ambiente.</a:t>
+              <a:t>Pandas ya lo conocen: hoy no es el aprendizaje, es la herramienta.</a:t>
             </a:r>
           </a:p>
           <a:p>
@@ -6841,7 +6309,7 @@
                 </a:solidFill>
                 <a:latin typeface="PT Serif"/>
               </a:rPr>
-              <a:t>Emisiones al aire de fuentes puntuales, año 2020.</a:t>
+              <a:t>Lo que se llevan es un hábito: interrogar cada cifra antes de creerle.</a:t>
             </a:r>
           </a:p>
           <a:p>
@@ -6861,7 +6329,7 @@
                 </a:solidFill>
                 <a:latin typeface="PT Serif"/>
               </a:rPr>
-              <a:t>Una fila es un contaminante emitido por un establecimiento.</a:t>
+              <a:t>Un promedio puede describir una situación en la que casi nadie está.</a:t>
             </a:r>
           </a:p>
           <a:p>
@@ -6881,7 +6349,7 @@
                 </a:solidFill>
                 <a:latin typeface="PT Serif"/>
               </a:rPr>
-              <a:t>27.015 filas, 16 regiones, 287 comunas y 19 rubros.</a:t>
+              <a:t>Contar filas de una encuesta habla de la muestra, no de la ciudad.</a:t>
             </a:r>
           </a:p>
           <a:p>
@@ -6901,7 +6369,7 @@
                 </a:solidFill>
                 <a:latin typeface="PT Serif"/>
               </a:rPr>
-              <a:t>MP2,5, MP10 y SO2: los contaminantes de los planes de descontaminación.</a:t>
+              <a:t>Hay personas de las que la tabla no dice nada, y ese silencio informa.</a:t>
             </a:r>
           </a:p>
           <a:p>
@@ -6921,7 +6389,7 @@
                 </a:solidFill>
                 <a:latin typeface="PT Serif"/>
               </a:rPr>
-              <a:t>Son datos reales, con faltantes y con una distribución muy despareja.</a:t>
+              <a:t>Al final de la clase volveremos a esta pregunta con cuatro respuestas.</a:t>
             </a:r>
           </a:p>
         </p:txBody>
@@ -7017,7 +6485,7 @@
                 </a:solidFill>
                 <a:latin typeface="PT Serif"/>
               </a:rPr>
-              <a:t>Pandas</a:t>
+              <a:t>Los datos de hoy</a:t>
             </a:r>
           </a:p>
           <a:p>
@@ -7028,7 +6496,7 @@
                 </a:solidFill>
                 <a:latin typeface="PT Serif"/>
               </a:rPr>
-              <a:t>La herramienta para manipular tablas</a:t>
+              <a:t>Encuesta Origen Destino de Santiago 2012</a:t>
             </a:r>
           </a:p>
         </p:txBody>
@@ -7124,7 +6592,7 @@
                 </a:solidFill>
                 <a:latin typeface="PT Serif"/>
               </a:rPr>
-              <a:t>Las dos estructuras de Pandas</a:t>
+              <a:t>La EOD 2012</a:t>
             </a:r>
           </a:p>
         </p:txBody>
@@ -7167,7 +6635,7 @@
                 </a:solidFill>
                 <a:latin typeface="PT Serif"/>
               </a:rPr>
-              <a:t>DataFrame: una tabla, con filas y columnas con nombre.</a:t>
+              <a:t>La encuesta de movilidad más completa de Chile (SECTRA y U. Alberto Hurtado).</a:t>
             </a:r>
           </a:p>
           <a:p>
@@ -7187,7 +6655,7 @@
                 </a:solidFill>
                 <a:latin typeface="PT Serif"/>
               </a:rPr>
-              <a:t>Series: una columna, con su índice.</a:t>
+              <a:t>Registra todos los viajes de un día de los hogares encuestados.</a:t>
             </a:r>
           </a:p>
           <a:p>
@@ -7207,7 +6675,7 @@
                 </a:solidFill>
                 <a:latin typeface="PT Serif"/>
               </a:rPr>
-              <a:t>Al seleccionar una columna de un DataFrame se obtiene una Series.</a:t>
+              <a:t>18.264 hogares, 60.054 personas, 113.591 viajes.</a:t>
             </a:r>
           </a:p>
           <a:p>
@@ -7227,7 +6695,7 @@
                 </a:solidFill>
                 <a:latin typeface="PT Serif"/>
               </a:rPr>
-              <a:t>El índice es lo que permite alinear datos entre tablas distintas.</a:t>
+              <a:t>Es la base de la planificación de transporte de Santiago.</a:t>
             </a:r>
           </a:p>
           <a:p>
@@ -7241,13 +6709,33 @@
               <a:t>▸ </a:t>
             </a:r>
             <a:r>
+              <a:rPr sz="1800" b="0">
+                <a:solidFill>
+                  <a:srgbClr val="3A4A5C"/>
+                </a:solidFill>
+                <a:latin typeface="PT Serif"/>
+              </a:rPr>
+              <a:t>Es una base relacional: varias tablas conectadas por identificadores.</a:t>
+            </a:r>
+          </a:p>
+          <a:p>
+            <a:r>
               <a:rPr sz="1800" b="1">
                 <a:solidFill>
+                  <a:srgbClr val="E0A437"/>
+                </a:solidFill>
+                <a:latin typeface="PT Serif"/>
+              </a:rPr>
+              <a:t>▸ </a:t>
+            </a:r>
+            <a:r>
+              <a:rPr sz="1800" b="1">
+                <a:solidFill>
                   <a:srgbClr val="1D3557"/>
                 </a:solidFill>
                 <a:latin typeface="PT Serif"/>
               </a:rPr>
-              <a:t>Casi todo el trabajo del curso pasa por estas dos estructuras.</a:t>
+              <a:t>El mismo diseño que van a encontrar en la Casen, el Censo o la ENUSC.</a:t>
             </a:r>
           </a:p>
         </p:txBody>
@@ -7343,124 +6831,21 @@
                 </a:solidFill>
                 <a:latin typeface="PT Serif"/>
               </a:rPr>
-              <a:t>Cargar y mirar antes de calcular</a:t>
-            </a:r>
-          </a:p>
-        </p:txBody>
-      </p:sp>
-      <p:sp>
-        <p:nvSpPr>
-          <p:cNvPr id="4" name="Rectangle 3"/>
-          <p:cNvSpPr/>
-          <p:nvPr/>
-        </p:nvSpPr>
-        <p:spPr>
-          <a:xfrm>
-            <a:off x="704088" y="1280160"/>
-            <a:ext cx="7744968" cy="2880360"/>
-          </a:xfrm>
-          <a:prstGeom prst="rect">
-            <a:avLst/>
-          </a:prstGeom>
-          <a:solidFill>
-            <a:srgbClr val="F0F2F5"/>
-          </a:solidFill>
-          <a:ln>
-            <a:solidFill>
-              <a:srgbClr val="D8DDE3"/>
-            </a:solidFill>
-          </a:ln>
-          <a:effectLst/>
-        </p:spPr>
-        <p:style>
-          <a:lnRef idx="1">
-            <a:schemeClr val="accent1"/>
-          </a:lnRef>
-          <a:fillRef idx="3">
-            <a:schemeClr val="accent1"/>
-          </a:fillRef>
-          <a:effectRef idx="2">
-            <a:schemeClr val="accent1"/>
-          </a:effectRef>
-          <a:fontRef idx="minor">
-            <a:schemeClr val="lt1"/>
-          </a:fontRef>
-        </p:style>
-        <p:txBody>
-          <a:bodyPr rtlCol="0" anchor="ctr" wrap="square" lIns="228600" tIns="137160"/>
-          <a:lstStyle/>
-          <a:p>
-            <a:pPr/>
-            <a:r>
-              <a:rPr sz="1500" b="0">
-                <a:solidFill>
-                  <a:srgbClr val="1D3557"/>
-                </a:solidFill>
-                <a:latin typeface="Menlo"/>
-              </a:rPr>
-              <a:t>emisiones = pd.read_csv('datos/emisiones_aire_2020.csv')</a:t>
-            </a:r>
-          </a:p>
-          <a:p>
-            <a:pPr/>
-            <a:r>
-              <a:rPr sz="1500" b="0">
-                <a:solidFill>
-                  <a:srgbClr val="1D3557"/>
-                </a:solidFill>
-                <a:latin typeface="Menlo"/>
-              </a:rPr>
-              <a:t/>
-            </a:r>
-          </a:p>
-          <a:p>
-            <a:pPr/>
-            <a:r>
-              <a:rPr sz="1500" b="0">
-                <a:solidFill>
-                  <a:srgbClr val="1D3557"/>
-                </a:solidFill>
-                <a:latin typeface="Menlo"/>
-              </a:rPr>
-              <a:t>emisiones.shape      # cuántas filas y columnas</a:t>
-            </a:r>
-          </a:p>
-          <a:p>
-            <a:pPr/>
-            <a:r>
-              <a:rPr sz="1500" b="0">
-                <a:solidFill>
-                  <a:srgbClr val="1D3557"/>
-                </a:solidFill>
-                <a:latin typeface="Menlo"/>
-              </a:rPr>
-              <a:t>emisiones.head()     # las primeras filas</a:t>
-            </a:r>
-          </a:p>
-          <a:p>
-            <a:pPr/>
-            <a:r>
-              <a:rPr sz="1500" b="0">
-                <a:solidFill>
-                  <a:srgbClr val="1D3557"/>
-                </a:solidFill>
-                <a:latin typeface="Menlo"/>
-              </a:rPr>
-              <a:t>emisiones.info()     # tipo de cada columna y cuántos no nulos</a:t>
-            </a:r>
-          </a:p>
-        </p:txBody>
-      </p:sp>
-      <p:sp>
-        <p:nvSpPr>
-          <p:cNvPr id="5" name="TextBox 4"/>
+              <a:t>Las tablas y sus llaves</a:t>
+            </a:r>
+          </a:p>
+        </p:txBody>
+      </p:sp>
+      <p:sp>
+        <p:nvSpPr>
+          <p:cNvPr id="4" name="TextBox 3"/>
           <p:cNvSpPr txBox="1"/>
           <p:nvPr/>
         </p:nvSpPr>
         <p:spPr>
           <a:xfrm>
-            <a:off x="704088" y="4389120"/>
-            <a:ext cx="7744968" cy="1097280"/>
+            <a:off x="704088" y="1353312"/>
+            <a:ext cx="7744968" cy="3300984"/>
           </a:xfrm>
           <a:prstGeom prst="rect">
             <a:avLst/>
@@ -7474,7 +6859,7 @@
           <a:lstStyle/>
           <a:p>
             <a:r>
-              <a:rPr sz="1600" b="1">
+              <a:rPr sz="1800" b="1">
                 <a:solidFill>
                   <a:srgbClr val="E0A437"/>
                 </a:solidFill>
@@ -7483,13 +6868,93 @@
               <a:t>▸ </a:t>
             </a:r>
             <a:r>
-              <a:rPr sz="1600" b="0">
+              <a:rPr sz="1800" b="0">
                 <a:solidFill>
                   <a:srgbClr val="3A4A5C"/>
                 </a:solidFill>
                 <a:latin typeface="PT Serif"/>
               </a:rPr>
-              <a:t>Nunca calcule nada antes de saber qué tiene entre manos.</a:t>
+              <a:t>Hogares.csv: una fila por hogar. Llave: Hogar.</a:t>
+            </a:r>
+          </a:p>
+          <a:p>
+            <a:r>
+              <a:rPr sz="1800" b="1">
+                <a:solidFill>
+                  <a:srgbClr val="E0A437"/>
+                </a:solidFill>
+                <a:latin typeface="PT Serif"/>
+              </a:rPr>
+              <a:t>▸ </a:t>
+            </a:r>
+            <a:r>
+              <a:rPr sz="1800" b="0">
+                <a:solidFill>
+                  <a:srgbClr val="3A4A5C"/>
+                </a:solidFill>
+                <a:latin typeface="PT Serif"/>
+              </a:rPr>
+              <a:t>personas.csv: una fila por persona. Llave: Hogar + Persona.</a:t>
+            </a:r>
+          </a:p>
+          <a:p>
+            <a:r>
+              <a:rPr sz="1800" b="1">
+                <a:solidFill>
+                  <a:srgbClr val="E0A437"/>
+                </a:solidFill>
+                <a:latin typeface="PT Serif"/>
+              </a:rPr>
+              <a:t>▸ </a:t>
+            </a:r>
+            <a:r>
+              <a:rPr sz="1800" b="0">
+                <a:solidFill>
+                  <a:srgbClr val="3A4A5C"/>
+                </a:solidFill>
+                <a:latin typeface="PT Serif"/>
+              </a:rPr>
+              <a:t>viajes.csv: una fila por viaje. Llave: Hogar + Persona + Viaje.</a:t>
+            </a:r>
+          </a:p>
+          <a:p>
+            <a:r>
+              <a:rPr sz="1800" b="1">
+                <a:solidFill>
+                  <a:srgbClr val="E0A437"/>
+                </a:solidFill>
+                <a:latin typeface="PT Serif"/>
+              </a:rPr>
+              <a:t>▸ </a:t>
+            </a:r>
+            <a:r>
+              <a:rPr sz="1800" b="0">
+                <a:solidFill>
+                  <a:srgbClr val="3A4A5C"/>
+                </a:solidFill>
+                <a:latin typeface="PT Serif"/>
+              </a:rPr>
+              <a:t>tablas_parametros/: el significado de cada código.</a:t>
+            </a:r>
+          </a:p>
+          <a:p>
+            <a:r>
+              <a:rPr sz="1800" b="1">
+                <a:solidFill>
+                  <a:srgbClr val="E0A437"/>
+                </a:solidFill>
+                <a:latin typeface="PT Serif"/>
+              </a:rPr>
+              <a:t>▸ </a:t>
+            </a:r>
+            <a:r>
+              <a:rPr sz="1800" b="1">
+                <a:solidFill>
+                  <a:srgbClr val="1D3557"/>
+                </a:solidFill>
+                <a:latin typeface="PT Serif"/>
+              </a:rPr>
+              <a:t>Equivocarse de llave es la fuente clásica de merges malos.</a:t>
             </a:r>
           </a:p>
         </p:txBody>
@@ -7527,7 +6992,7 @@
             <a:avLst/>
           </a:prstGeom>
           <a:solidFill>
-            <a:srgbClr val="FAFBFC"/>
+            <a:srgbClr val="1D3557"/>
           </a:solidFill>
           <a:ln>
             <a:noFill/>
@@ -7564,8 +7029,8 @@
         </p:nvSpPr>
         <p:spPr>
           <a:xfrm>
-            <a:off x="402336" y="301752"/>
-            <a:ext cx="8348472" cy="795528"/>
+            <a:off x="603504" y="1847088"/>
+            <a:ext cx="7946136" cy="1399032"/>
           </a:xfrm>
           <a:prstGeom prst="rect">
             <a:avLst/>
@@ -7579,123 +7044,24 @@
           <a:lstStyle/>
           <a:p>
             <a:r>
-              <a:rPr sz="2800" b="1">
-                <a:solidFill>
-                  <a:srgbClr val="0F0F0F"/>
-                </a:solidFill>
-                <a:latin typeface="PT Serif"/>
-              </a:rPr>
-              <a:t>Seleccionar columnas</a:t>
-            </a:r>
-          </a:p>
-        </p:txBody>
-      </p:sp>
-      <p:sp>
-        <p:nvSpPr>
-          <p:cNvPr id="4" name="Rectangle 3"/>
-          <p:cNvSpPr/>
-          <p:nvPr/>
-        </p:nvSpPr>
-        <p:spPr>
-          <a:xfrm>
-            <a:off x="704088" y="1280160"/>
-            <a:ext cx="7744968" cy="1371600"/>
-          </a:xfrm>
-          <a:prstGeom prst="rect">
-            <a:avLst/>
-          </a:prstGeom>
-          <a:solidFill>
-            <a:srgbClr val="F0F2F5"/>
-          </a:solidFill>
-          <a:ln>
-            <a:solidFill>
-              <a:srgbClr val="D8DDE3"/>
-            </a:solidFill>
-          </a:ln>
-          <a:effectLst/>
-        </p:spPr>
-        <p:style>
-          <a:lnRef idx="1">
-            <a:schemeClr val="accent1"/>
-          </a:lnRef>
-          <a:fillRef idx="3">
-            <a:schemeClr val="accent1"/>
-          </a:fillRef>
-          <a:effectRef idx="2">
-            <a:schemeClr val="accent1"/>
-          </a:effectRef>
-          <a:fontRef idx="minor">
-            <a:schemeClr val="lt1"/>
-          </a:fontRef>
-        </p:style>
-        <p:txBody>
-          <a:bodyPr rtlCol="0" anchor="ctr" wrap="square" lIns="228600" tIns="137160"/>
-          <a:lstStyle/>
-          <a:p>
-            <a:pPr/>
-            <a:r>
-              <a:rPr sz="1500" b="0">
-                <a:solidFill>
-                  <a:srgbClr val="1D3557"/>
-                </a:solidFill>
-                <a:latin typeface="Menlo"/>
-              </a:rPr>
-              <a:t>emisiones['region']                      # una Series</a:t>
-            </a:r>
-          </a:p>
-          <a:p>
-            <a:pPr/>
-            <a:r>
-              <a:rPr sz="1500" b="0">
-                <a:solidFill>
-                  <a:srgbClr val="1D3557"/>
-                </a:solidFill>
-                <a:latin typeface="Menlo"/>
-              </a:rPr>
-              <a:t>emisiones[['region', 'comuna']]          # un DataFrame</a:t>
-            </a:r>
-          </a:p>
-        </p:txBody>
-      </p:sp>
-      <p:sp>
-        <p:nvSpPr>
-          <p:cNvPr id="5" name="TextBox 4"/>
-          <p:cNvSpPr txBox="1"/>
-          <p:nvPr/>
-        </p:nvSpPr>
-        <p:spPr>
-          <a:xfrm>
-            <a:off x="704088" y="2880360"/>
-            <a:ext cx="7744968" cy="1097280"/>
-          </a:xfrm>
-          <a:prstGeom prst="rect">
-            <a:avLst/>
-          </a:prstGeom>
-          <a:noFill/>
-        </p:spPr>
-        <p:txBody>
-          <a:bodyPr wrap="square">
-            <a:spAutoFit/>
-          </a:bodyPr>
-          <a:lstStyle/>
-          <a:p>
-            <a:r>
-              <a:rPr sz="1600" b="1">
+              <a:rPr sz="3400" b="1">
+                <a:solidFill>
+                  <a:srgbClr val="FFFFFF"/>
+                </a:solidFill>
+                <a:latin typeface="PT Serif"/>
+              </a:rPr>
+              <a:t>Repaso de Pandas</a:t>
+            </a:r>
+          </a:p>
+          <a:p>
+            <a:r>
+              <a:rPr sz="1800" b="0">
                 <a:solidFill>
                   <a:srgbClr val="E0A437"/>
                 </a:solidFill>
                 <a:latin typeface="PT Serif"/>
               </a:rPr>
-              <a:t>▸ </a:t>
-            </a:r>
-            <a:r>
-              <a:rPr sz="1600" b="0">
-                <a:solidFill>
-                  <a:srgbClr val="3A4A5C"/>
-                </a:solidFill>
-                <a:latin typeface="PT Serif"/>
-              </a:rPr>
-              <a:t>Los dobles corchetes son la lista de nombres dentro de la selección.</a:t>
+              <a:t>Cinco preguntas, cinco herramientas</a:t>
             </a:r>
           </a:p>
         </p:txBody>
@@ -7791,7 +7157,7 @@
                 </a:solidFill>
                 <a:latin typeface="PT Serif"/>
               </a:rPr>
-              <a:t>loc y iloc: no confundirlos</a:t>
+              <a:t>¿A quiénes les preguntaron? Cargar y mirar</a:t>
             </a:r>
           </a:p>
         </p:txBody>
@@ -7805,7 +7171,7 @@
         <p:spPr>
           <a:xfrm>
             <a:off x="704088" y="1280160"/>
-            <a:ext cx="7744968" cy="1371600"/>
+            <a:ext cx="7744968" cy="2880360"/>
           </a:xfrm>
           <a:prstGeom prst="rect">
             <a:avLst/>
@@ -7846,7 +7212,7 @@
                 </a:solidFill>
                 <a:latin typeface="Menlo"/>
               </a:rPr>
-              <a:t>emisiones.iloc[0:3]                      # por posición</a:t>
+              <a:t>personas = pd.read_csv('datos/eod_stgo/personas.csv',</a:t>
             </a:r>
           </a:p>
           <a:p>
@@ -7858,7 +7224,43 @@
                 </a:solidFill>
                 <a:latin typeface="Menlo"/>
               </a:rPr>
-              <a:t>emisiones.loc[0:2, ['region', 'comuna']] # por etiqueta</a:t>
+              <a:t>                       sep=';', decimal=',')</a:t>
+            </a:r>
+          </a:p>
+          <a:p>
+            <a:pPr/>
+            <a:r>
+              <a:rPr sz="1500" b="0">
+                <a:solidFill>
+                  <a:srgbClr val="1D3557"/>
+                </a:solidFill>
+                <a:latin typeface="Menlo"/>
+              </a:rPr>
+              <a:t/>
+            </a:r>
+          </a:p>
+          <a:p>
+            <a:pPr/>
+            <a:r>
+              <a:rPr sz="1500" b="0">
+                <a:solidFill>
+                  <a:srgbClr val="1D3557"/>
+                </a:solidFill>
+                <a:latin typeface="Menlo"/>
+              </a:rPr>
+              <a:t>personas.shape    # 60.054 filas, 39 columnas</a:t>
+            </a:r>
+          </a:p>
+          <a:p>
+            <a:pPr/>
+            <a:r>
+              <a:rPr sz="1500" b="0">
+                <a:solidFill>
+                  <a:srgbClr val="1D3557"/>
+                </a:solidFill>
+                <a:latin typeface="Menlo"/>
+              </a:rPr>
+              <a:t>personas.info()   # tipos y no nulos, siempre antes de calcular</a:t>
             </a:r>
           </a:p>
         </p:txBody>
@@ -7871,7 +7273,7 @@
         </p:nvSpPr>
         <p:spPr>
           <a:xfrm>
-            <a:off x="704088" y="2880360"/>
+            <a:off x="704088" y="4389120"/>
             <a:ext cx="7744968" cy="1097280"/>
           </a:xfrm>
           <a:prstGeom prst="rect">
@@ -7901,7 +7303,7 @@
                 </a:solidFill>
                 <a:latin typeface="PT Serif"/>
               </a:rPr>
-              <a:t>iloc excluye el extremo derecho, como las listas de Python; loc lo incluye.</a:t>
+              <a:t>Estos archivos usan punto y coma como separador y coma decimal: primer hallazgo.</a:t>
             </a:r>
           </a:p>
         </p:txBody>

--- a/presentaciones/clase02_pandas_eda.pptx
+++ b/presentaciones/clase02_pandas_eda.pptx
@@ -26,6 +26,9 @@
     <p:sldId id="274" r:id="rId25"/>
     <p:sldId id="275" r:id="rId26"/>
     <p:sldId id="276" r:id="rId27"/>
+    <p:sldId id="277" r:id="rId28"/>
+    <p:sldId id="278" r:id="rId29"/>
+    <p:sldId id="279" r:id="rId30"/>
   </p:sldIdLst>
   <p:sldSz cx="9144000" cy="5138928" type="screen4x3"/>
   <p:notesSz cx="6858000" cy="9144000"/>
@@ -3375,102 +3378,35 @@
                 </a:solidFill>
                 <a:latin typeface="PT Serif"/>
               </a:rPr>
-              <a:t>¿Quiénes son? Derivar una columna</a:t>
-            </a:r>
-          </a:p>
-        </p:txBody>
-      </p:sp>
-      <p:sp>
-        <p:nvSpPr>
-          <p:cNvPr id="4" name="Rectangle 3"/>
-          <p:cNvSpPr/>
+              <a:t>Las variantes del merge: qué filas sobreviven</a:t>
+            </a:r>
+          </a:p>
+        </p:txBody>
+      </p:sp>
+      <p:pic>
+        <p:nvPicPr>
+          <p:cNvPr id="4" name="Picture 3" descr="07_diagrama_merge.png"/>
+          <p:cNvPicPr>
+            <a:picLocks noChangeAspect="1"/>
+          </p:cNvPicPr>
           <p:nvPr/>
-        </p:nvSpPr>
-        <p:spPr>
-          <a:xfrm>
-            <a:off x="704088" y="1280160"/>
-            <a:ext cx="7744968" cy="2377440"/>
-          </a:xfrm>
-          <a:prstGeom prst="rect">
-            <a:avLst/>
-          </a:prstGeom>
-          <a:solidFill>
-            <a:srgbClr val="F0F2F5"/>
-          </a:solidFill>
-          <a:ln>
-            <a:solidFill>
-              <a:srgbClr val="D8DDE3"/>
-            </a:solidFill>
-          </a:ln>
-          <a:effectLst/>
-        </p:spPr>
-        <p:style>
-          <a:lnRef idx="1">
-            <a:schemeClr val="accent1"/>
-          </a:lnRef>
-          <a:fillRef idx="3">
-            <a:schemeClr val="accent1"/>
-          </a:fillRef>
-          <a:effectRef idx="2">
-            <a:schemeClr val="accent1"/>
-          </a:effectRef>
-          <a:fontRef idx="minor">
-            <a:schemeClr val="lt1"/>
-          </a:fontRef>
-        </p:style>
-        <p:txBody>
-          <a:bodyPr rtlCol="0" anchor="ctr" wrap="square" lIns="228600" tIns="137160"/>
-          <a:lstStyle/>
-          <a:p>
-            <a:pPr/>
-            <a:r>
-              <a:rPr sz="1500" b="0">
-                <a:solidFill>
-                  <a:srgbClr val="1D3557"/>
-                </a:solidFill>
-                <a:latin typeface="Menlo"/>
-              </a:rPr>
-              <a:t>personas['Edad'] = 2013 - personas['AnoNac']</a:t>
-            </a:r>
-          </a:p>
-          <a:p>
-            <a:pPr/>
-            <a:r>
-              <a:rPr sz="1500" b="0">
-                <a:solidFill>
-                  <a:srgbClr val="1D3557"/>
-                </a:solidFill>
-                <a:latin typeface="Menlo"/>
-              </a:rPr>
-              <a:t/>
-            </a:r>
-          </a:p>
-          <a:p>
-            <a:pPr/>
-            <a:r>
-              <a:rPr sz="1500" b="0">
-                <a:solidFill>
-                  <a:srgbClr val="1D3557"/>
-                </a:solidFill>
-                <a:latin typeface="Menlo"/>
-              </a:rPr>
-              <a:t>personas['Edad'].describe()</a:t>
-            </a:r>
-          </a:p>
-          <a:p>
-            <a:pPr/>
-            <a:r>
-              <a:rPr sz="1500" b="0">
-                <a:solidFill>
-                  <a:srgbClr val="1D3557"/>
-                </a:solidFill>
-                <a:latin typeface="Menlo"/>
-              </a:rPr>
-              <a:t>personas['Sexo'].value_counts()   # devuelve 1 y 2...</a:t>
-            </a:r>
-          </a:p>
-        </p:txBody>
-      </p:sp>
+        </p:nvPicPr>
+        <p:blipFill>
+          <a:blip r:embed="rId2"/>
+          <a:stretch>
+            <a:fillRect/>
+          </a:stretch>
+        </p:blipFill>
+        <p:spPr>
+          <a:xfrm>
+            <a:off x="1417319" y="1143000"/>
+            <a:ext cx="6309360" cy="2373039"/>
+          </a:xfrm>
+          <a:prstGeom prst="rect">
+            <a:avLst/>
+          </a:prstGeom>
+        </p:spPr>
+      </p:pic>
       <p:sp>
         <p:nvSpPr>
           <p:cNvPr id="5" name="TextBox 4"/>
@@ -3479,8 +3415,8 @@
         </p:nvSpPr>
         <p:spPr>
           <a:xfrm>
-            <a:off x="704088" y="3886200"/>
-            <a:ext cx="7744968" cy="1097280"/>
+            <a:off x="704088" y="4434840"/>
+            <a:ext cx="7744968" cy="457200"/>
           </a:xfrm>
           <a:prstGeom prst="rect">
             <a:avLst/>
@@ -3494,22 +3430,13 @@
           <a:lstStyle/>
           <a:p>
             <a:r>
-              <a:rPr sz="1600" b="1">
-                <a:solidFill>
-                  <a:srgbClr val="E0A437"/>
-                </a:solidFill>
-                <a:latin typeface="PT Serif"/>
-              </a:rPr>
-              <a:t>▸ </a:t>
-            </a:r>
-            <a:r>
-              <a:rPr sz="1600" b="0">
-                <a:solidFill>
-                  <a:srgbClr val="3A4A5C"/>
-                </a:solidFill>
-                <a:latin typeface="PT Serif"/>
-              </a:rPr>
-              <a:t>No hay columna de edad: se deriva. Y el sexo son códigos que no significan nada solos.</a:t>
+              <a:rPr sz="1300" b="0">
+                <a:solidFill>
+                  <a:srgbClr val="6B7785"/>
+                </a:solidFill>
+                <a:latin typeface="PT Serif"/>
+              </a:rPr>
+              <a:t>El valor por defecto es inner: descarta sin aviso las filas sin pareja.</a:t>
             </a:r>
           </a:p>
         </p:txBody>
@@ -3605,124 +3532,21 @@
                 </a:solidFill>
                 <a:latin typeface="PT Serif"/>
               </a:rPr>
-              <a:t>¿Qué significan los códigos? El merge motivado</a:t>
-            </a:r>
-          </a:p>
-        </p:txBody>
-      </p:sp>
-      <p:sp>
-        <p:nvSpPr>
-          <p:cNvPr id="4" name="Rectangle 3"/>
-          <p:cNvSpPr/>
-          <p:nvPr/>
-        </p:nvSpPr>
-        <p:spPr>
-          <a:xfrm>
-            <a:off x="704088" y="1280160"/>
-            <a:ext cx="7744968" cy="2880360"/>
-          </a:xfrm>
-          <a:prstGeom prst="rect">
-            <a:avLst/>
-          </a:prstGeom>
-          <a:solidFill>
-            <a:srgbClr val="F0F2F5"/>
-          </a:solidFill>
-          <a:ln>
-            <a:solidFill>
-              <a:srgbClr val="D8DDE3"/>
-            </a:solidFill>
-          </a:ln>
-          <a:effectLst/>
-        </p:spPr>
-        <p:style>
-          <a:lnRef idx="1">
-            <a:schemeClr val="accent1"/>
-          </a:lnRef>
-          <a:fillRef idx="3">
-            <a:schemeClr val="accent1"/>
-          </a:fillRef>
-          <a:effectRef idx="2">
-            <a:schemeClr val="accent1"/>
-          </a:effectRef>
-          <a:fontRef idx="minor">
-            <a:schemeClr val="lt1"/>
-          </a:fontRef>
-        </p:style>
-        <p:txBody>
-          <a:bodyPr rtlCol="0" anchor="ctr" wrap="square" lIns="228600" tIns="137160"/>
-          <a:lstStyle/>
-          <a:p>
-            <a:pPr/>
-            <a:r>
-              <a:rPr sz="1500" b="0">
-                <a:solidFill>
-                  <a:srgbClr val="1D3557"/>
-                </a:solidFill>
-                <a:latin typeface="Menlo"/>
-              </a:rPr>
-              <a:t>sexo = pd.read_csv('tablas_parametros/Sexo.csv', sep=';')</a:t>
-            </a:r>
-          </a:p>
-          <a:p>
-            <a:pPr/>
-            <a:r>
-              <a:rPr sz="1500" b="0">
-                <a:solidFill>
-                  <a:srgbClr val="1D3557"/>
-                </a:solidFill>
-                <a:latin typeface="Menlo"/>
-              </a:rPr>
-              <a:t>personas = personas.merge(sexo, left_on='Sexo',</a:t>
-            </a:r>
-          </a:p>
-          <a:p>
-            <a:pPr/>
-            <a:r>
-              <a:rPr sz="1500" b="0">
-                <a:solidFill>
-                  <a:srgbClr val="1D3557"/>
-                </a:solidFill>
-                <a:latin typeface="Menlo"/>
-              </a:rPr>
-              <a:t>                          right_on='Id', how='left')</a:t>
-            </a:r>
-          </a:p>
-          <a:p>
-            <a:pPr/>
-            <a:r>
-              <a:rPr sz="1500" b="0">
-                <a:solidFill>
-                  <a:srgbClr val="1D3557"/>
-                </a:solidFill>
-                <a:latin typeface="Menlo"/>
-              </a:rPr>
-              <a:t/>
-            </a:r>
-          </a:p>
-          <a:p>
-            <a:pPr/>
-            <a:r>
-              <a:rPr sz="1500" b="0">
-                <a:solidFill>
-                  <a:srgbClr val="1D3557"/>
-                </a:solidFill>
-                <a:latin typeface="Menlo"/>
-              </a:rPr>
-              <a:t>personas['Sexo'].isna().sum()   # regla de oro: contar los sin pareja</a:t>
-            </a:r>
-          </a:p>
-        </p:txBody>
-      </p:sp>
-      <p:sp>
-        <p:nvSpPr>
-          <p:cNvPr id="5" name="TextBox 4"/>
+              <a:t>La elección de how define de quién hablan los números</a:t>
+            </a:r>
+          </a:p>
+        </p:txBody>
+      </p:sp>
+      <p:sp>
+        <p:nvSpPr>
+          <p:cNvPr id="4" name="TextBox 3"/>
           <p:cNvSpPr txBox="1"/>
           <p:nvPr/>
         </p:nvSpPr>
         <p:spPr>
           <a:xfrm>
-            <a:off x="704088" y="4389120"/>
-            <a:ext cx="7744968" cy="1097280"/>
+            <a:off x="704088" y="1353312"/>
+            <a:ext cx="7744968" cy="3300984"/>
           </a:xfrm>
           <a:prstGeom prst="rect">
             <a:avLst/>
@@ -3736,7 +3560,7 @@
           <a:lstStyle/>
           <a:p>
             <a:r>
-              <a:rPr sz="1600" b="1">
+              <a:rPr sz="1800" b="1">
                 <a:solidFill>
                   <a:srgbClr val="E0A437"/>
                 </a:solidFill>
@@ -3745,13 +3569,93 @@
               <a:t>▸ </a:t>
             </a:r>
             <a:r>
-              <a:rPr sz="1600" b="0">
+              <a:rPr sz="1800" b="0">
                 <a:solidFill>
                   <a:srgbClr val="3A4A5C"/>
                 </a:solidFill>
                 <a:latin typeface="PT Serif"/>
               </a:rPr>
-              <a:t>Los significados viven en otra tabla: así se diseñan las bases de datos reales.</a:t>
+              <a:t>Personas con viajes, merge inner: 113.591 filas (una por viaje).</a:t>
+            </a:r>
+          </a:p>
+          <a:p>
+            <a:r>
+              <a:rPr sz="1800" b="1">
+                <a:solidFill>
+                  <a:srgbClr val="E0A437"/>
+                </a:solidFill>
+                <a:latin typeface="PT Serif"/>
+              </a:rPr>
+              <a:t>▸ </a:t>
+            </a:r>
+            <a:r>
+              <a:rPr sz="1800" b="0">
+                <a:solidFill>
+                  <a:srgbClr val="3A4A5C"/>
+                </a:solidFill>
+                <a:latin typeface="PT Serif"/>
+              </a:rPr>
+              <a:t>El mismo merge en left: 127.379 filas.</a:t>
+            </a:r>
+          </a:p>
+          <a:p>
+            <a:r>
+              <a:rPr sz="1400" b="0">
+                <a:solidFill>
+                  <a:srgbClr val="6B7785"/>
+                </a:solidFill>
+                <a:latin typeface="PT Serif"/>
+              </a:rPr>
+              <a:t>     ◦  </a:t>
+            </a:r>
+            <a:r>
+              <a:rPr sz="1400" b="0">
+                <a:solidFill>
+                  <a:srgbClr val="6B7785"/>
+                </a:solidFill>
+                <a:latin typeface="PT Serif"/>
+              </a:rPr>
+              <a:t>La diferencia son 13.788 personas que no viajaron ese día.</a:t>
+            </a:r>
+          </a:p>
+          <a:p>
+            <a:r>
+              <a:rPr sz="1400" b="0">
+                <a:solidFill>
+                  <a:srgbClr val="6B7785"/>
+                </a:solidFill>
+                <a:latin typeface="PT Serif"/>
+              </a:rPr>
+              <a:t>     ◦  </a:t>
+            </a:r>
+            <a:r>
+              <a:rPr sz="1400" b="0">
+                <a:solidFill>
+                  <a:srgbClr val="6B7785"/>
+                </a:solidFill>
+                <a:latin typeface="PT Serif"/>
+              </a:rPr>
+              <a:t>Con inner desaparecen; con left quedan, con NaN en el viaje.</a:t>
+            </a:r>
+          </a:p>
+          <a:p>
+            <a:r>
+              <a:rPr sz="1800" b="1">
+                <a:solidFill>
+                  <a:srgbClr val="E0A437"/>
+                </a:solidFill>
+                <a:latin typeface="PT Serif"/>
+              </a:rPr>
+              <a:t>▸ </a:t>
+            </a:r>
+            <a:r>
+              <a:rPr sz="1800" b="1">
+                <a:solidFill>
+                  <a:srgbClr val="1D3557"/>
+                </a:solidFill>
+                <a:latin typeface="PT Serif"/>
+              </a:rPr>
+              <a:t>Un promedio de viajes calculado sobre el inner habla solo de quienes viajan.</a:t>
             </a:r>
           </a:p>
         </p:txBody>
@@ -3847,7 +3751,7 @@
                 </a:solidFill>
                 <a:latin typeface="PT Serif"/>
               </a:rPr>
-              <a:t>¿Cuántos viajes hace una persona? groupby y una trampa</a:t>
+              <a:t>Caso 2: contar sin perder a los que no aparecen</a:t>
             </a:r>
           </a:p>
         </p:txBody>
@@ -3981,7 +3885,7 @@
                 </a:solidFill>
                 <a:latin typeface="PT Serif"/>
               </a:rPr>
-              <a:t>Quien no viajó no aparece en la tabla de viajes: si solo agrupamos, lo perdemos.</a:t>
+              <a:t>El groupby cuenta sobre la tabla de viajes; el fillna(0) trae de vuelta a los ausentes.</a:t>
             </a:r>
           </a:p>
         </p:txBody>
@@ -4160,7 +4064,7 @@
                 </a:solidFill>
                 <a:latin typeface="PT Serif"/>
               </a:rPr>
-              <a:t>Aquí la media quedó BAJO la mediana: el bloque de ceros la arrastra.</a:t>
+              <a:t>Aquí la media quedó bajo la mediana: el bloque de ceros la baja.</a:t>
             </a:r>
           </a:p>
           <a:p>
@@ -4407,21 +4311,45 @@
                 </a:solidFill>
                 <a:latin typeface="PT Serif"/>
               </a:rPr>
-              <a:t>De 37 mil encuestados a 6,7 millones de personas</a:t>
-            </a:r>
-          </a:p>
-        </p:txBody>
-      </p:sp>
-      <p:sp>
-        <p:nvSpPr>
-          <p:cNvPr id="4" name="TextBox 3"/>
+              <a:t>De la muestra a la ciudad</a:t>
+            </a:r>
+          </a:p>
+        </p:txBody>
+      </p:sp>
+      <p:pic>
+        <p:nvPicPr>
+          <p:cNvPr id="4" name="Picture 3" descr="06_diagrama_factores.png"/>
+          <p:cNvPicPr>
+            <a:picLocks noChangeAspect="1"/>
+          </p:cNvPicPr>
+          <p:nvPr/>
+        </p:nvPicPr>
+        <p:blipFill>
+          <a:blip r:embed="rId2"/>
+          <a:stretch>
+            <a:fillRect/>
+          </a:stretch>
+        </p:blipFill>
+        <p:spPr>
+          <a:xfrm>
+            <a:off x="1417319" y="1143000"/>
+            <a:ext cx="6309360" cy="2869563"/>
+          </a:xfrm>
+          <a:prstGeom prst="rect">
+            <a:avLst/>
+          </a:prstGeom>
+        </p:spPr>
+      </p:pic>
+      <p:sp>
+        <p:nvSpPr>
+          <p:cNvPr id="5" name="TextBox 4"/>
           <p:cNvSpPr txBox="1"/>
           <p:nvPr/>
         </p:nvSpPr>
         <p:spPr>
           <a:xfrm>
-            <a:off x="704088" y="1353312"/>
-            <a:ext cx="7744968" cy="3300984"/>
+            <a:off x="704088" y="4434840"/>
+            <a:ext cx="7744968" cy="457200"/>
           </a:xfrm>
           <a:prstGeom prst="rect">
             <a:avLst/>
@@ -4435,122 +4363,13 @@
           <a:lstStyle/>
           <a:p>
             <a:r>
-              <a:rPr sz="1800" b="1">
-                <a:solidFill>
-                  <a:srgbClr val="E0A437"/>
-                </a:solidFill>
-                <a:latin typeface="PT Serif"/>
-              </a:rPr>
-              <a:t>▸ </a:t>
-            </a:r>
-            <a:r>
-              <a:rPr sz="1800" b="0">
-                <a:solidFill>
-                  <a:srgbClr val="3A4A5C"/>
-                </a:solidFill>
-                <a:latin typeface="PT Serif"/>
-              </a:rPr>
-              <a:t>Cada encuestado representa a un número de personas parecidas a él.</a:t>
-            </a:r>
-          </a:p>
-          <a:p>
-            <a:r>
-              <a:rPr sz="1800" b="1">
-                <a:solidFill>
-                  <a:srgbClr val="E0A437"/>
-                </a:solidFill>
-                <a:latin typeface="PT Serif"/>
-              </a:rPr>
-              <a:t>▸ </a:t>
-            </a:r>
-            <a:r>
-              <a:rPr sz="1800" b="0">
-                <a:solidFill>
-                  <a:srgbClr val="3A4A5C"/>
-                </a:solidFill>
-                <a:latin typeface="PT Serif"/>
-              </a:rPr>
-              <a:t>Ese número es su factor de expansión (Factor_LaboralNormal).</a:t>
-            </a:r>
-          </a:p>
-          <a:p>
-            <a:r>
-              <a:rPr sz="1400" b="0">
+              <a:rPr sz="1300" b="0">
                 <a:solidFill>
                   <a:srgbClr val="6B7785"/>
                 </a:solidFill>
                 <a:latin typeface="PT Serif"/>
               </a:rPr>
-              <a:t>     ◦  </a:t>
-            </a:r>
-            <a:r>
-              <a:rPr sz="1400" b="0">
-                <a:solidFill>
-                  <a:srgbClr val="6B7785"/>
-                </a:solidFill>
-                <a:latin typeface="PT Serif"/>
-              </a:rPr>
-              <a:t>37.326 personas con factor de día laboral en temporada normal.</a:t>
-            </a:r>
-          </a:p>
-          <a:p>
-            <a:r>
-              <a:rPr sz="1400" b="0">
-                <a:solidFill>
-                  <a:srgbClr val="6B7785"/>
-                </a:solidFill>
-                <a:latin typeface="PT Serif"/>
-              </a:rPr>
-              <a:t>     ◦  </a:t>
-            </a:r>
-            <a:r>
-              <a:rPr sz="1400" b="0">
-                <a:solidFill>
-                  <a:srgbClr val="6B7785"/>
-                </a:solidFill>
-                <a:latin typeface="PT Serif"/>
-              </a:rPr>
-              <a:t>La suma de sus factores: 6.651.735 personas representadas.</a:t>
-            </a:r>
-          </a:p>
-          <a:p>
-            <a:r>
-              <a:rPr sz="1800" b="1">
-                <a:solidFill>
-                  <a:srgbClr val="E0A437"/>
-                </a:solidFill>
-                <a:latin typeface="PT Serif"/>
-              </a:rPr>
-              <a:t>▸ </a:t>
-            </a:r>
-            <a:r>
-              <a:rPr sz="1800" b="0">
-                <a:solidFill>
-                  <a:srgbClr val="3A4A5C"/>
-                </a:solidFill>
-                <a:latin typeface="PT Serif"/>
-              </a:rPr>
               <a:t>Contar filas responde por la muestra; sumar factores responde por la ciudad.</a:t>
-            </a:r>
-          </a:p>
-          <a:p>
-            <a:r>
-              <a:rPr sz="1800" b="1">
-                <a:solidFill>
-                  <a:srgbClr val="E0A437"/>
-                </a:solidFill>
-                <a:latin typeface="PT Serif"/>
-              </a:rPr>
-              <a:t>▸ </a:t>
-            </a:r>
-            <a:r>
-              <a:rPr sz="1800" b="1">
-                <a:solidFill>
-                  <a:srgbClr val="1D3557"/>
-                </a:solidFill>
-                <a:latin typeface="PT Serif"/>
-              </a:rPr>
-              <a:t>Toda cifra oficial de la EOD, la Casen o la ENUSC está ponderada así.</a:t>
             </a:r>
           </a:p>
         </p:txBody>
@@ -4836,7 +4655,7 @@
                 </a:solidFill>
                 <a:latin typeface="PT Serif"/>
               </a:rPr>
-              <a:t>Unos pocos hogares de ingresos muy altos arrastran el promedio.</a:t>
+              <a:t>Los ingresos altos desplazan el promedio; la mayoría gana menos.</a:t>
             </a:r>
           </a:p>
           <a:p>
@@ -4856,7 +4675,7 @@
                 </a:solidFill>
                 <a:latin typeface="PT Serif"/>
               </a:rPr>
-              <a:t>'El hogar promedio gana $688 mil' describe una situación en la que la mayoría no está.</a:t>
+              <a:t>El promedio describe una situación en la que la mayoría no está.</a:t>
             </a:r>
           </a:p>
         </p:txBody>
@@ -5079,7 +4898,7 @@
                 </a:solidFill>
                 <a:latin typeface="PT Serif"/>
               </a:rPr>
-              <a:t>Los valores extremos no se borran por molestos: se investigan y la decisión se declara.</a:t>
+              <a:t>Los valores extremos se investigan y la decisión se declara.</a:t>
             </a:r>
           </a:p>
         </p:txBody>
@@ -5322,7 +5141,7 @@
                 </a:solidFill>
                 <a:latin typeface="PT Serif"/>
               </a:rPr>
-              <a:t>Esta es la partición modal oficial, calculada por nosotros desde los microdatos.</a:t>
+              <a:t>La partición modal de un día laboral, calculada desde los microdatos.</a:t>
             </a:r>
           </a:p>
         </p:txBody>
@@ -5485,7 +5304,7 @@
                 </a:solidFill>
                 <a:latin typeface="PT Serif"/>
               </a:rPr>
-              <a:t>Le haremos preguntas reales a la Encuesta Origen Destino de Santiago.</a:t>
+              <a:t>Le haremos preguntas a la Encuesta Origen Destino de Santiago 2012.</a:t>
             </a:r>
           </a:p>
           <a:p>
@@ -5505,7 +5324,7 @@
                 </a:solidFill>
                 <a:latin typeface="PT Serif"/>
               </a:rPr>
-              <a:t>Cada pregunta trae su herramienta: el repaso de Pandas va en el camino.</a:t>
+              <a:t>El repaso de Pandas va en el camino: cada pregunta trae su herramienta.</a:t>
             </a:r>
           </a:p>
           <a:p>
@@ -5525,7 +5344,7 @@
                 </a:solidFill>
                 <a:latin typeface="PT Serif"/>
               </a:rPr>
-              <a:t>Cargar y mirar, derivar columnas, filtrar, merge, groupby.</a:t>
+              <a:t>Merge y sus variantes, groupby, medidas de resumen.</a:t>
             </a:r>
           </a:p>
           <a:p>
@@ -5546,26 +5365,6 @@
                 <a:latin typeface="PT Serif"/>
               </a:rPr>
               <a:t>Lo probablemente nuevo: tablas de códigos y factores de expansión.</a:t>
-            </a:r>
-          </a:p>
-          <a:p>
-            <a:r>
-              <a:rPr sz="1800" b="1">
-                <a:solidFill>
-                  <a:srgbClr val="E0A437"/>
-                </a:solidFill>
-                <a:latin typeface="PT Serif"/>
-              </a:rPr>
-              <a:t>▸ </a:t>
-            </a:r>
-            <a:r>
-              <a:rPr sz="1800" b="0">
-                <a:solidFill>
-                  <a:srgbClr val="3A4A5C"/>
-                </a:solidFill>
-                <a:latin typeface="PT Serif"/>
-              </a:rPr>
-              <a:t>Inicio del análisis exploratorio: qué número resume bien una respuesta.</a:t>
             </a:r>
           </a:p>
           <a:p>
@@ -5681,21 +5480,45 @@
                 </a:solidFill>
                 <a:latin typeface="PT Serif"/>
               </a:rPr>
-              <a:t>Síntesis: ¿de quién habla este número?</a:t>
-            </a:r>
-          </a:p>
-        </p:txBody>
-      </p:sp>
-      <p:sp>
-        <p:nvSpPr>
-          <p:cNvPr id="4" name="TextBox 3"/>
+              <a:t>¿Se mueve igual toda la ciudad?</a:t>
+            </a:r>
+          </a:p>
+        </p:txBody>
+      </p:sp>
+      <p:pic>
+        <p:nvPicPr>
+          <p:cNvPr id="4" name="Picture 3" descr="08_modo_por_comuna.png"/>
+          <p:cNvPicPr>
+            <a:picLocks noChangeAspect="1"/>
+          </p:cNvPicPr>
+          <p:nvPr/>
+        </p:nvPicPr>
+        <p:blipFill>
+          <a:blip r:embed="rId2"/>
+          <a:stretch>
+            <a:fillRect/>
+          </a:stretch>
+        </p:blipFill>
+        <p:spPr>
+          <a:xfrm>
+            <a:off x="2011818" y="1143000"/>
+            <a:ext cx="5120362" cy="3154680"/>
+          </a:xfrm>
+          <a:prstGeom prst="rect">
+            <a:avLst/>
+          </a:prstGeom>
+        </p:spPr>
+      </p:pic>
+      <p:sp>
+        <p:nvSpPr>
+          <p:cNvPr id="5" name="TextBox 4"/>
           <p:cNvSpPr txBox="1"/>
           <p:nvPr/>
         </p:nvSpPr>
         <p:spPr>
           <a:xfrm>
-            <a:off x="704088" y="1353312"/>
-            <a:ext cx="7744968" cy="3300984"/>
+            <a:off x="704088" y="4434840"/>
+            <a:ext cx="7744968" cy="457200"/>
           </a:xfrm>
           <a:prstGeom prst="rect">
             <a:avLst/>
@@ -5709,102 +5532,13 @@
           <a:lstStyle/>
           <a:p>
             <a:r>
-              <a:rPr sz="1800" b="1">
-                <a:solidFill>
-                  <a:srgbClr val="E0A437"/>
-                </a:solidFill>
-                <a:latin typeface="PT Serif"/>
-              </a:rPr>
-              <a:t>▸ </a:t>
-            </a:r>
-            <a:r>
-              <a:rPr sz="1800" b="0">
-                <a:solidFill>
-                  <a:srgbClr val="3A4A5C"/>
-                </a:solidFill>
-                <a:latin typeface="PT Serif"/>
-              </a:rPr>
-              <a:t>'El hogar promedio gana $688 mil': de casi nadie; la mediana habla del hogar típico.</a:t>
-            </a:r>
-          </a:p>
-          <a:p>
-            <a:r>
-              <a:rPr sz="1800" b="1">
-                <a:solidFill>
-                  <a:srgbClr val="E0A437"/>
-                </a:solidFill>
-                <a:latin typeface="PT Serif"/>
-              </a:rPr>
-              <a:t>▸ </a:t>
-            </a:r>
-            <a:r>
-              <a:rPr sz="1800" b="0">
-                <a:solidFill>
-                  <a:srgbClr val="3A4A5C"/>
-                </a:solidFill>
-                <a:latin typeface="PT Serif"/>
-              </a:rPr>
-              <a:t>'El 53% de los encuestados...': de la muestra; los factores de expansión hablan de la ciudad.</a:t>
-            </a:r>
-          </a:p>
-          <a:p>
-            <a:r>
-              <a:rPr sz="1800" b="1">
-                <a:solidFill>
-                  <a:srgbClr val="E0A437"/>
-                </a:solidFill>
-                <a:latin typeface="PT Serif"/>
-              </a:rPr>
-              <a:t>▸ </a:t>
-            </a:r>
-            <a:r>
-              <a:rPr sz="1800" b="0">
-                <a:solidFill>
-                  <a:srgbClr val="3A4A5C"/>
-                </a:solidFill>
-                <a:latin typeface="PT Serif"/>
-              </a:rPr>
-              <a:t>'1,9 viajes en promedio': solo si contamos a quienes no viajaron y no estaban en la tabla.</a:t>
-            </a:r>
-          </a:p>
-          <a:p>
-            <a:r>
-              <a:rPr sz="1800" b="1">
-                <a:solidFill>
-                  <a:srgbClr val="E0A437"/>
-                </a:solidFill>
-                <a:latin typeface="PT Serif"/>
-              </a:rPr>
-              <a:t>▸ </a:t>
-            </a:r>
-            <a:r>
-              <a:rPr sz="1800" b="0">
-                <a:solidFill>
-                  <a:srgbClr val="3A4A5C"/>
-                </a:solidFill>
-                <a:latin typeface="PT Serif"/>
-              </a:rPr>
-              <a:t>'El sexo es 1 o 2': sin su tabla de códigos, un número no habla de nada.</a:t>
-            </a:r>
-          </a:p>
-          <a:p>
-            <a:r>
-              <a:rPr sz="1800" b="1">
-                <a:solidFill>
-                  <a:srgbClr val="E0A437"/>
-                </a:solidFill>
-                <a:latin typeface="PT Serif"/>
-              </a:rPr>
-              <a:t>▸ </a:t>
-            </a:r>
-            <a:r>
-              <a:rPr sz="1800" b="1">
-                <a:solidFill>
-                  <a:srgbClr val="1D3557"/>
-                </a:solidFill>
-                <a:latin typeface="PT Serif"/>
-              </a:rPr>
-              <a:t>La técnica era repaso; el hábito de interrogar cada cifra es lo que se llevan.</a:t>
+              <a:rPr sz="1300" b="0">
+                <a:solidFill>
+                  <a:srgbClr val="6B7785"/>
+                </a:solidFill>
+                <a:latin typeface="PT Serif"/>
+              </a:rPr>
+              <a:t>Normalizar por comuna permite comparar proporciones entre comunas de tamaños muy distintos.</a:t>
             </a:r>
           </a:p>
         </p:txBody>
@@ -5900,6 +5634,622 @@
                 </a:solidFill>
                 <a:latin typeface="PT Serif"/>
               </a:rPr>
+              <a:t>¿El ingreso explica el uso de transporte público?</a:t>
+            </a:r>
+          </a:p>
+        </p:txBody>
+      </p:sp>
+      <p:sp>
+        <p:nvSpPr>
+          <p:cNvPr id="4" name="TextBox 3"/>
+          <p:cNvSpPr txBox="1"/>
+          <p:nvPr/>
+        </p:nvSpPr>
+        <p:spPr>
+          <a:xfrm>
+            <a:off x="502920" y="1252728"/>
+            <a:ext cx="4023360" cy="3200400"/>
+          </a:xfrm>
+          <a:prstGeom prst="rect">
+            <a:avLst/>
+          </a:prstGeom>
+          <a:noFill/>
+        </p:spPr>
+        <p:txBody>
+          <a:bodyPr wrap="square">
+            <a:spAutoFit/>
+          </a:bodyPr>
+          <a:lstStyle/>
+          <a:p>
+            <a:r>
+              <a:rPr sz="1500" b="1">
+                <a:solidFill>
+                  <a:srgbClr val="E0A437"/>
+                </a:solidFill>
+                <a:latin typeface="PT Serif"/>
+              </a:rPr>
+              <a:t>▸ </a:t>
+            </a:r>
+            <a:r>
+              <a:rPr sz="1500" b="0">
+                <a:solidFill>
+                  <a:srgbClr val="3A4A5C"/>
+                </a:solidFill>
+                <a:latin typeface="PT Serif"/>
+              </a:rPr>
+              <a:t>Cada punto es una comuna: ingreso medio contra proporción de viajes en transporte público.</a:t>
+            </a:r>
+          </a:p>
+          <a:p>
+            <a:r>
+              <a:rPr sz="1300" b="0">
+                <a:solidFill>
+                  <a:srgbClr val="6B7785"/>
+                </a:solidFill>
+                <a:latin typeface="PT Serif"/>
+              </a:rPr>
+              <a:t>     ◦  </a:t>
+            </a:r>
+            <a:r>
+              <a:rPr sz="1300" b="0">
+                <a:solidFill>
+                  <a:srgbClr val="6B7785"/>
+                </a:solidFill>
+                <a:latin typeface="PT Serif"/>
+              </a:rPr>
+              <a:t>Periferia (Buin, Melipilla): poco transporte público porque la red no llega.</a:t>
+            </a:r>
+          </a:p>
+          <a:p>
+            <a:r>
+              <a:rPr sz="1300" b="0">
+                <a:solidFill>
+                  <a:srgbClr val="6B7785"/>
+                </a:solidFill>
+                <a:latin typeface="PT Serif"/>
+              </a:rPr>
+              <a:t>     ◦  </a:t>
+            </a:r>
+            <a:r>
+              <a:rPr sz="1300" b="0">
+                <a:solidFill>
+                  <a:srgbClr val="6B7785"/>
+                </a:solidFill>
+                <a:latin typeface="PT Serif"/>
+              </a:rPr>
+              <a:t>Ingresos altos (Vitacura, Lo Barnechea): conectadas, pero con poco uso.</a:t>
+            </a:r>
+          </a:p>
+          <a:p>
+            <a:r>
+              <a:rPr sz="1300" b="0">
+                <a:solidFill>
+                  <a:srgbClr val="6B7785"/>
+                </a:solidFill>
+                <a:latin typeface="PT Serif"/>
+              </a:rPr>
+              <a:t>     ◦  </a:t>
+            </a:r>
+            <a:r>
+              <a:rPr sz="1300" b="0">
+                <a:solidFill>
+                  <a:srgbClr val="6B7785"/>
+                </a:solidFill>
+                <a:latin typeface="PT Serif"/>
+              </a:rPr>
+              <a:t>La Pintana o Conchalí superan el 45%.</a:t>
+            </a:r>
+          </a:p>
+          <a:p>
+            <a:r>
+              <a:rPr sz="1500" b="1">
+                <a:solidFill>
+                  <a:srgbClr val="E0A437"/>
+                </a:solidFill>
+                <a:latin typeface="PT Serif"/>
+              </a:rPr>
+              <a:t>▸ </a:t>
+            </a:r>
+            <a:r>
+              <a:rPr sz="1500" b="1">
+                <a:solidFill>
+                  <a:srgbClr val="1D3557"/>
+                </a:solidFill>
+                <a:latin typeface="PT Serif"/>
+              </a:rPr>
+              <a:t>Un promedio comunal también esconde variación: ¿de quién habla ese punto?</a:t>
+            </a:r>
+          </a:p>
+        </p:txBody>
+      </p:sp>
+      <p:pic>
+        <p:nvPicPr>
+          <p:cNvPr id="5" name="Picture 4" descr="09_ingreso_vs_tp.png"/>
+          <p:cNvPicPr>
+            <a:picLocks noChangeAspect="1"/>
+          </p:cNvPicPr>
+          <p:nvPr/>
+        </p:nvPicPr>
+        <p:blipFill>
+          <a:blip r:embed="rId2"/>
+          <a:stretch>
+            <a:fillRect/>
+          </a:stretch>
+        </p:blipFill>
+        <p:spPr>
+          <a:xfrm>
+            <a:off x="4892040" y="1371600"/>
+            <a:ext cx="3840480" cy="2551368"/>
+          </a:xfrm>
+          <a:prstGeom prst="rect">
+            <a:avLst/>
+          </a:prstGeom>
+        </p:spPr>
+      </p:pic>
+    </p:spTree>
+  </p:cSld>
+  <p:clrMapOvr>
+    <a:masterClrMapping/>
+  </p:clrMapOvr>
+</p:sld>
+</file>
+
+<file path=ppt/slides/slide22.xml><?xml version="1.0" encoding="utf-8"?>
+<p:sld xmlns:a="http://schemas.openxmlformats.org/drawingml/2006/main" xmlns:p="http://schemas.openxmlformats.org/presentationml/2006/main" xmlns:r="http://schemas.openxmlformats.org/officeDocument/2006/relationships">
+  <p:cSld>
+    <p:spTree>
+      <p:nvGrpSpPr>
+        <p:cNvPr id="1" name=""/>
+        <p:cNvGrpSpPr/>
+        <p:nvPr/>
+      </p:nvGrpSpPr>
+      <p:grpSpPr/>
+      <p:sp>
+        <p:nvSpPr>
+          <p:cNvPr id="2" name="Rectangle 1"/>
+          <p:cNvSpPr/>
+          <p:nvPr/>
+        </p:nvSpPr>
+        <p:spPr>
+          <a:xfrm>
+            <a:off x="0" y="0"/>
+            <a:ext cx="9144000" cy="5138928"/>
+          </a:xfrm>
+          <a:prstGeom prst="rect">
+            <a:avLst/>
+          </a:prstGeom>
+          <a:solidFill>
+            <a:srgbClr val="FAFBFC"/>
+          </a:solidFill>
+          <a:ln>
+            <a:noFill/>
+          </a:ln>
+          <a:effectLst/>
+        </p:spPr>
+        <p:style>
+          <a:lnRef idx="1">
+            <a:schemeClr val="accent1"/>
+          </a:lnRef>
+          <a:fillRef idx="3">
+            <a:schemeClr val="accent1"/>
+          </a:fillRef>
+          <a:effectRef idx="2">
+            <a:schemeClr val="accent1"/>
+          </a:effectRef>
+          <a:fontRef idx="minor">
+            <a:schemeClr val="lt1"/>
+          </a:fontRef>
+        </p:style>
+        <p:txBody>
+          <a:bodyPr rtlCol="0" anchor="ctr"/>
+          <a:lstStyle/>
+          <a:p>
+            <a:pPr algn="ctr"/>
+          </a:p>
+        </p:txBody>
+      </p:sp>
+      <p:sp>
+        <p:nvSpPr>
+          <p:cNvPr id="3" name="TextBox 2"/>
+          <p:cNvSpPr txBox="1"/>
+          <p:nvPr/>
+        </p:nvSpPr>
+        <p:spPr>
+          <a:xfrm>
+            <a:off x="402336" y="301752"/>
+            <a:ext cx="8348472" cy="795528"/>
+          </a:xfrm>
+          <a:prstGeom prst="rect">
+            <a:avLst/>
+          </a:prstGeom>
+          <a:noFill/>
+        </p:spPr>
+        <p:txBody>
+          <a:bodyPr wrap="square">
+            <a:spAutoFit/>
+          </a:bodyPr>
+          <a:lstStyle/>
+          <a:p>
+            <a:r>
+              <a:rPr sz="2800" b="1">
+                <a:solidFill>
+                  <a:srgbClr val="0F0F0F"/>
+                </a:solidFill>
+                <a:latin typeface="PT Serif"/>
+              </a:rPr>
+              <a:t>¿Cambian las rutinas durante la semana?</a:t>
+            </a:r>
+          </a:p>
+        </p:txBody>
+      </p:sp>
+      <p:pic>
+        <p:nvPicPr>
+          <p:cNvPr id="4" name="Picture 3" descr="10_heatmap_rutinas.png"/>
+          <p:cNvPicPr>
+            <a:picLocks noChangeAspect="1"/>
+          </p:cNvPicPr>
+          <p:nvPr/>
+        </p:nvPicPr>
+        <p:blipFill>
+          <a:blip r:embed="rId2"/>
+          <a:stretch>
+            <a:fillRect/>
+          </a:stretch>
+        </p:blipFill>
+        <p:spPr>
+          <a:xfrm>
+            <a:off x="1631108" y="1143000"/>
+            <a:ext cx="5881783" cy="3154680"/>
+          </a:xfrm>
+          <a:prstGeom prst="rect">
+            <a:avLst/>
+          </a:prstGeom>
+        </p:spPr>
+      </p:pic>
+      <p:sp>
+        <p:nvSpPr>
+          <p:cNvPr id="5" name="TextBox 4"/>
+          <p:cNvSpPr txBox="1"/>
+          <p:nvPr/>
+        </p:nvSpPr>
+        <p:spPr>
+          <a:xfrm>
+            <a:off x="704088" y="4434840"/>
+            <a:ext cx="7744968" cy="457200"/>
+          </a:xfrm>
+          <a:prstGeom prst="rect">
+            <a:avLst/>
+          </a:prstGeom>
+          <a:noFill/>
+        </p:spPr>
+        <p:txBody>
+          <a:bodyPr wrap="square">
+            <a:spAutoFit/>
+          </a:bodyPr>
+          <a:lstStyle/>
+          <a:p>
+            <a:r>
+              <a:rPr sz="1300" b="0">
+                <a:solidFill>
+                  <a:srgbClr val="6B7785"/>
+                </a:solidFill>
+                <a:latin typeface="PT Serif"/>
+              </a:rPr>
+              <a:t>El heatmap muestra 14 propósitos por 7 días en una sola figura: útil para tablas completas.</a:t>
+            </a:r>
+          </a:p>
+        </p:txBody>
+      </p:sp>
+    </p:spTree>
+  </p:cSld>
+  <p:clrMapOvr>
+    <a:masterClrMapping/>
+  </p:clrMapOvr>
+</p:sld>
+</file>
+
+<file path=ppt/slides/slide23.xml><?xml version="1.0" encoding="utf-8"?>
+<p:sld xmlns:a="http://schemas.openxmlformats.org/drawingml/2006/main" xmlns:p="http://schemas.openxmlformats.org/presentationml/2006/main" xmlns:r="http://schemas.openxmlformats.org/officeDocument/2006/relationships">
+  <p:cSld>
+    <p:spTree>
+      <p:nvGrpSpPr>
+        <p:cNvPr id="1" name=""/>
+        <p:cNvGrpSpPr/>
+        <p:nvPr/>
+      </p:nvGrpSpPr>
+      <p:grpSpPr/>
+      <p:sp>
+        <p:nvSpPr>
+          <p:cNvPr id="2" name="Rectangle 1"/>
+          <p:cNvSpPr/>
+          <p:nvPr/>
+        </p:nvSpPr>
+        <p:spPr>
+          <a:xfrm>
+            <a:off x="0" y="0"/>
+            <a:ext cx="9144000" cy="5138928"/>
+          </a:xfrm>
+          <a:prstGeom prst="rect">
+            <a:avLst/>
+          </a:prstGeom>
+          <a:solidFill>
+            <a:srgbClr val="FAFBFC"/>
+          </a:solidFill>
+          <a:ln>
+            <a:noFill/>
+          </a:ln>
+          <a:effectLst/>
+        </p:spPr>
+        <p:style>
+          <a:lnRef idx="1">
+            <a:schemeClr val="accent1"/>
+          </a:lnRef>
+          <a:fillRef idx="3">
+            <a:schemeClr val="accent1"/>
+          </a:fillRef>
+          <a:effectRef idx="2">
+            <a:schemeClr val="accent1"/>
+          </a:effectRef>
+          <a:fontRef idx="minor">
+            <a:schemeClr val="lt1"/>
+          </a:fontRef>
+        </p:style>
+        <p:txBody>
+          <a:bodyPr rtlCol="0" anchor="ctr"/>
+          <a:lstStyle/>
+          <a:p>
+            <a:pPr algn="ctr"/>
+          </a:p>
+        </p:txBody>
+      </p:sp>
+      <p:sp>
+        <p:nvSpPr>
+          <p:cNvPr id="3" name="TextBox 2"/>
+          <p:cNvSpPr txBox="1"/>
+          <p:nvPr/>
+        </p:nvSpPr>
+        <p:spPr>
+          <a:xfrm>
+            <a:off x="402336" y="301752"/>
+            <a:ext cx="8348472" cy="795528"/>
+          </a:xfrm>
+          <a:prstGeom prst="rect">
+            <a:avLst/>
+          </a:prstGeom>
+          <a:noFill/>
+        </p:spPr>
+        <p:txBody>
+          <a:bodyPr wrap="square">
+            <a:spAutoFit/>
+          </a:bodyPr>
+          <a:lstStyle/>
+          <a:p>
+            <a:r>
+              <a:rPr sz="2800" b="1">
+                <a:solidFill>
+                  <a:srgbClr val="0F0F0F"/>
+                </a:solidFill>
+                <a:latin typeface="PT Serif"/>
+              </a:rPr>
+              <a:t>Síntesis: ¿de quién habla este número?</a:t>
+            </a:r>
+          </a:p>
+        </p:txBody>
+      </p:sp>
+      <p:sp>
+        <p:nvSpPr>
+          <p:cNvPr id="4" name="TextBox 3"/>
+          <p:cNvSpPr txBox="1"/>
+          <p:nvPr/>
+        </p:nvSpPr>
+        <p:spPr>
+          <a:xfrm>
+            <a:off x="704088" y="1353312"/>
+            <a:ext cx="7744968" cy="3300984"/>
+          </a:xfrm>
+          <a:prstGeom prst="rect">
+            <a:avLst/>
+          </a:prstGeom>
+          <a:noFill/>
+        </p:spPr>
+        <p:txBody>
+          <a:bodyPr wrap="square">
+            <a:spAutoFit/>
+          </a:bodyPr>
+          <a:lstStyle/>
+          <a:p>
+            <a:r>
+              <a:rPr sz="1800" b="1">
+                <a:solidFill>
+                  <a:srgbClr val="E0A437"/>
+                </a:solidFill>
+                <a:latin typeface="PT Serif"/>
+              </a:rPr>
+              <a:t>▸ </a:t>
+            </a:r>
+            <a:r>
+              <a:rPr sz="1800" b="0">
+                <a:solidFill>
+                  <a:srgbClr val="3A4A5C"/>
+                </a:solidFill>
+                <a:latin typeface="PT Serif"/>
+              </a:rPr>
+              <a:t>'El hogar promedio gana $688 mil': la mayoría gana menos; la mediana describe al hogar típico.</a:t>
+            </a:r>
+          </a:p>
+          <a:p>
+            <a:r>
+              <a:rPr sz="1800" b="1">
+                <a:solidFill>
+                  <a:srgbClr val="E0A437"/>
+                </a:solidFill>
+                <a:latin typeface="PT Serif"/>
+              </a:rPr>
+              <a:t>▸ </a:t>
+            </a:r>
+            <a:r>
+              <a:rPr sz="1800" b="0">
+                <a:solidFill>
+                  <a:srgbClr val="3A4A5C"/>
+                </a:solidFill>
+                <a:latin typeface="PT Serif"/>
+              </a:rPr>
+              <a:t>'El 53% de los encuestados...': habla de la muestra; los factores de expansión hablan de la ciudad.</a:t>
+            </a:r>
+          </a:p>
+          <a:p>
+            <a:r>
+              <a:rPr sz="1800" b="1">
+                <a:solidFill>
+                  <a:srgbClr val="E0A437"/>
+                </a:solidFill>
+                <a:latin typeface="PT Serif"/>
+              </a:rPr>
+              <a:t>▸ </a:t>
+            </a:r>
+            <a:r>
+              <a:rPr sz="1800" b="0">
+                <a:solidFill>
+                  <a:srgbClr val="3A4A5C"/>
+                </a:solidFill>
+                <a:latin typeface="PT Serif"/>
+              </a:rPr>
+              <a:t>'1,9 viajes en promedio': solo si contamos a quienes no viajaron; un inner los borra sin aviso.</a:t>
+            </a:r>
+          </a:p>
+          <a:p>
+            <a:r>
+              <a:rPr sz="1800" b="1">
+                <a:solidFill>
+                  <a:srgbClr val="E0A437"/>
+                </a:solidFill>
+                <a:latin typeface="PT Serif"/>
+              </a:rPr>
+              <a:t>▸ </a:t>
+            </a:r>
+            <a:r>
+              <a:rPr sz="1800" b="0">
+                <a:solidFill>
+                  <a:srgbClr val="3A4A5C"/>
+                </a:solidFill>
+                <a:latin typeface="PT Serif"/>
+              </a:rPr>
+              <a:t>'En Vitacura casi no se usa transporte público': un promedio comunal esconde la variación interna.</a:t>
+            </a:r>
+          </a:p>
+          <a:p>
+            <a:r>
+              <a:rPr sz="1800" b="1">
+                <a:solidFill>
+                  <a:srgbClr val="E0A437"/>
+                </a:solidFill>
+                <a:latin typeface="PT Serif"/>
+              </a:rPr>
+              <a:t>▸ </a:t>
+            </a:r>
+            <a:r>
+              <a:rPr sz="1800" b="1">
+                <a:solidFill>
+                  <a:srgbClr val="1D3557"/>
+                </a:solidFill>
+                <a:latin typeface="PT Serif"/>
+              </a:rPr>
+              <a:t>La técnica era repaso; el hábito de examinar cada cifra es lo nuevo.</a:t>
+            </a:r>
+          </a:p>
+        </p:txBody>
+      </p:sp>
+    </p:spTree>
+  </p:cSld>
+  <p:clrMapOvr>
+    <a:masterClrMapping/>
+  </p:clrMapOvr>
+</p:sld>
+</file>
+
+<file path=ppt/slides/slide24.xml><?xml version="1.0" encoding="utf-8"?>
+<p:sld xmlns:a="http://schemas.openxmlformats.org/drawingml/2006/main" xmlns:p="http://schemas.openxmlformats.org/presentationml/2006/main" xmlns:r="http://schemas.openxmlformats.org/officeDocument/2006/relationships">
+  <p:cSld>
+    <p:spTree>
+      <p:nvGrpSpPr>
+        <p:cNvPr id="1" name=""/>
+        <p:cNvGrpSpPr/>
+        <p:nvPr/>
+      </p:nvGrpSpPr>
+      <p:grpSpPr/>
+      <p:sp>
+        <p:nvSpPr>
+          <p:cNvPr id="2" name="Rectangle 1"/>
+          <p:cNvSpPr/>
+          <p:nvPr/>
+        </p:nvSpPr>
+        <p:spPr>
+          <a:xfrm>
+            <a:off x="0" y="0"/>
+            <a:ext cx="9144000" cy="5138928"/>
+          </a:xfrm>
+          <a:prstGeom prst="rect">
+            <a:avLst/>
+          </a:prstGeom>
+          <a:solidFill>
+            <a:srgbClr val="FAFBFC"/>
+          </a:solidFill>
+          <a:ln>
+            <a:noFill/>
+          </a:ln>
+          <a:effectLst/>
+        </p:spPr>
+        <p:style>
+          <a:lnRef idx="1">
+            <a:schemeClr val="accent1"/>
+          </a:lnRef>
+          <a:fillRef idx="3">
+            <a:schemeClr val="accent1"/>
+          </a:fillRef>
+          <a:effectRef idx="2">
+            <a:schemeClr val="accent1"/>
+          </a:effectRef>
+          <a:fontRef idx="minor">
+            <a:schemeClr val="lt1"/>
+          </a:fontRef>
+        </p:style>
+        <p:txBody>
+          <a:bodyPr rtlCol="0" anchor="ctr"/>
+          <a:lstStyle/>
+          <a:p>
+            <a:pPr algn="ctr"/>
+          </a:p>
+        </p:txBody>
+      </p:sp>
+      <p:sp>
+        <p:nvSpPr>
+          <p:cNvPr id="3" name="TextBox 2"/>
+          <p:cNvSpPr txBox="1"/>
+          <p:nvPr/>
+        </p:nvSpPr>
+        <p:spPr>
+          <a:xfrm>
+            <a:off x="402336" y="301752"/>
+            <a:ext cx="8348472" cy="795528"/>
+          </a:xfrm>
+          <a:prstGeom prst="rect">
+            <a:avLst/>
+          </a:prstGeom>
+          <a:noFill/>
+        </p:spPr>
+        <p:txBody>
+          <a:bodyPr wrap="square">
+            <a:spAutoFit/>
+          </a:bodyPr>
+          <a:lstStyle/>
+          <a:p>
+            <a:r>
+              <a:rPr sz="2800" b="1">
+                <a:solidFill>
+                  <a:srgbClr val="0F0F0F"/>
+                </a:solidFill>
+                <a:latin typeface="PT Serif"/>
+              </a:rPr>
               <a:t>Segundo bloque: parte la Tarea 1</a:t>
             </a:r>
           </a:p>
@@ -6150,7 +6500,7 @@
                 </a:solidFill>
                 <a:latin typeface="PT Serif"/>
               </a:rPr>
-              <a:t>El concepto que nos llevamos hoy</a:t>
+              <a:t>El concepto de esta clase</a:t>
             </a:r>
           </a:p>
         </p:txBody>
@@ -6246,7 +6596,7 @@
                 </a:solidFill>
                 <a:latin typeface="PT Serif"/>
               </a:rPr>
-              <a:t>La pregunta que ordena toda la clase</a:t>
+              <a:t>La pregunta que ordena la clase</a:t>
             </a:r>
           </a:p>
         </p:txBody>
@@ -6289,7 +6639,7 @@
                 </a:solidFill>
                 <a:latin typeface="PT Serif"/>
               </a:rPr>
-              <a:t>Pandas ya lo conocen: hoy no es el aprendizaje, es la herramienta.</a:t>
+              <a:t>Pandas ya lo conocen: hoy es la herramienta, no el aprendizaje.</a:t>
             </a:r>
           </a:p>
           <a:p>
@@ -6309,7 +6659,7 @@
                 </a:solidFill>
                 <a:latin typeface="PT Serif"/>
               </a:rPr>
-              <a:t>Lo que se llevan es un hábito: interrogar cada cifra antes de creerle.</a:t>
+              <a:t>Lo nuevo es un hábito: examinar cada cifra antes de usarla.</a:t>
             </a:r>
           </a:p>
           <a:p>
@@ -6329,7 +6679,7 @@
                 </a:solidFill>
                 <a:latin typeface="PT Serif"/>
               </a:rPr>
-              <a:t>Un promedio puede describir una situación en la que casi nadie está.</a:t>
+              <a:t>Un promedio puede describir una situación en la que pocos están.</a:t>
             </a:r>
           </a:p>
           <a:p>
@@ -6369,7 +6719,7 @@
                 </a:solidFill>
                 <a:latin typeface="PT Serif"/>
               </a:rPr>
-              <a:t>Hay personas de las que la tabla no dice nada, y ese silencio informa.</a:t>
+              <a:t>Hay personas de las que la tabla no dice nada; esa ausencia informa.</a:t>
             </a:r>
           </a:p>
           <a:p>
@@ -6389,7 +6739,7 @@
                 </a:solidFill>
                 <a:latin typeface="PT Serif"/>
               </a:rPr>
-              <a:t>Al final de la clase volveremos a esta pregunta con cuatro respuestas.</a:t>
+              <a:t>Al cierre volveremos a esta pregunta con las respuestas del día.</a:t>
             </a:r>
           </a:p>
         </p:txBody>
@@ -6635,7 +6985,7 @@
                 </a:solidFill>
                 <a:latin typeface="PT Serif"/>
               </a:rPr>
-              <a:t>La encuesta de movilidad más completa de Chile (SECTRA y U. Alberto Hurtado).</a:t>
+              <a:t>Encuesta de movilidad del Gran Santiago (SECTRA y U. Alberto Hurtado).</a:t>
             </a:r>
           </a:p>
           <a:p>
@@ -6695,7 +7045,7 @@
                 </a:solidFill>
                 <a:latin typeface="PT Serif"/>
               </a:rPr>
-              <a:t>Es la base de la planificación de transporte de Santiago.</a:t>
+              <a:t>Se usa en la planificación de transporte de la ciudad.</a:t>
             </a:r>
           </a:p>
           <a:p>
@@ -6709,33 +7059,13 @@
               <a:t>▸ </a:t>
             </a:r>
             <a:r>
-              <a:rPr sz="1800" b="0">
-                <a:solidFill>
-                  <a:srgbClr val="3A4A5C"/>
-                </a:solidFill>
-                <a:latin typeface="PT Serif"/>
-              </a:rPr>
-              <a:t>Es una base relacional: varias tablas conectadas por identificadores.</a:t>
-            </a:r>
-          </a:p>
-          <a:p>
-            <a:r>
               <a:rPr sz="1800" b="1">
                 <a:solidFill>
-                  <a:srgbClr val="E0A437"/>
-                </a:solidFill>
-                <a:latin typeface="PT Serif"/>
-              </a:rPr>
-              <a:t>▸ </a:t>
-            </a:r>
-            <a:r>
-              <a:rPr sz="1800" b="1">
-                <a:solidFill>
                   <a:srgbClr val="1D3557"/>
                 </a:solidFill>
                 <a:latin typeface="PT Serif"/>
               </a:rPr>
-              <a:t>El mismo diseño que van a encontrar en la Casen, el Censo o la ENUSC.</a:t>
+              <a:t>El mismo diseño relacional de la Casen, el Censo o la ENUSC.</a:t>
             </a:r>
           </a:p>
         </p:txBody>
@@ -6831,21 +7161,45 @@
                 </a:solidFill>
                 <a:latin typeface="PT Serif"/>
               </a:rPr>
-              <a:t>Las tablas y sus llaves</a:t>
-            </a:r>
-          </a:p>
-        </p:txBody>
-      </p:sp>
-      <p:sp>
-        <p:nvSpPr>
-          <p:cNvPr id="4" name="TextBox 3"/>
+              <a:t>Una encuesta, varias tablas</a:t>
+            </a:r>
+          </a:p>
+        </p:txBody>
+      </p:sp>
+      <p:pic>
+        <p:nvPicPr>
+          <p:cNvPr id="4" name="Picture 3" descr="05_diagrama_tablas.png"/>
+          <p:cNvPicPr>
+            <a:picLocks noChangeAspect="1"/>
+          </p:cNvPicPr>
+          <p:nvPr/>
+        </p:nvPicPr>
+        <p:blipFill>
+          <a:blip r:embed="rId2"/>
+          <a:stretch>
+            <a:fillRect/>
+          </a:stretch>
+        </p:blipFill>
+        <p:spPr>
+          <a:xfrm>
+            <a:off x="1555117" y="1143000"/>
+            <a:ext cx="6033765" cy="3154680"/>
+          </a:xfrm>
+          <a:prstGeom prst="rect">
+            <a:avLst/>
+          </a:prstGeom>
+        </p:spPr>
+      </p:pic>
+      <p:sp>
+        <p:nvSpPr>
+          <p:cNvPr id="5" name="TextBox 4"/>
           <p:cNvSpPr txBox="1"/>
           <p:nvPr/>
         </p:nvSpPr>
         <p:spPr>
           <a:xfrm>
-            <a:off x="704088" y="1353312"/>
-            <a:ext cx="7744968" cy="3300984"/>
+            <a:off x="704088" y="4434840"/>
+            <a:ext cx="7744968" cy="457200"/>
           </a:xfrm>
           <a:prstGeom prst="rect">
             <a:avLst/>
@@ -6859,102 +7213,13 @@
           <a:lstStyle/>
           <a:p>
             <a:r>
-              <a:rPr sz="1800" b="1">
-                <a:solidFill>
-                  <a:srgbClr val="E0A437"/>
-                </a:solidFill>
-                <a:latin typeface="PT Serif"/>
-              </a:rPr>
-              <a:t>▸ </a:t>
-            </a:r>
-            <a:r>
-              <a:rPr sz="1800" b="0">
-                <a:solidFill>
-                  <a:srgbClr val="3A4A5C"/>
-                </a:solidFill>
-                <a:latin typeface="PT Serif"/>
-              </a:rPr>
-              <a:t>Hogares.csv: una fila por hogar. Llave: Hogar.</a:t>
-            </a:r>
-          </a:p>
-          <a:p>
-            <a:r>
-              <a:rPr sz="1800" b="1">
-                <a:solidFill>
-                  <a:srgbClr val="E0A437"/>
-                </a:solidFill>
-                <a:latin typeface="PT Serif"/>
-              </a:rPr>
-              <a:t>▸ </a:t>
-            </a:r>
-            <a:r>
-              <a:rPr sz="1800" b="0">
-                <a:solidFill>
-                  <a:srgbClr val="3A4A5C"/>
-                </a:solidFill>
-                <a:latin typeface="PT Serif"/>
-              </a:rPr>
-              <a:t>personas.csv: una fila por persona. Llave: Hogar + Persona.</a:t>
-            </a:r>
-          </a:p>
-          <a:p>
-            <a:r>
-              <a:rPr sz="1800" b="1">
-                <a:solidFill>
-                  <a:srgbClr val="E0A437"/>
-                </a:solidFill>
-                <a:latin typeface="PT Serif"/>
-              </a:rPr>
-              <a:t>▸ </a:t>
-            </a:r>
-            <a:r>
-              <a:rPr sz="1800" b="0">
-                <a:solidFill>
-                  <a:srgbClr val="3A4A5C"/>
-                </a:solidFill>
-                <a:latin typeface="PT Serif"/>
-              </a:rPr>
-              <a:t>viajes.csv: una fila por viaje. Llave: Hogar + Persona + Viaje.</a:t>
-            </a:r>
-          </a:p>
-          <a:p>
-            <a:r>
-              <a:rPr sz="1800" b="1">
-                <a:solidFill>
-                  <a:srgbClr val="E0A437"/>
-                </a:solidFill>
-                <a:latin typeface="PT Serif"/>
-              </a:rPr>
-              <a:t>▸ </a:t>
-            </a:r>
-            <a:r>
-              <a:rPr sz="1800" b="0">
-                <a:solidFill>
-                  <a:srgbClr val="3A4A5C"/>
-                </a:solidFill>
-                <a:latin typeface="PT Serif"/>
-              </a:rPr>
-              <a:t>tablas_parametros/: el significado de cada código.</a:t>
-            </a:r>
-          </a:p>
-          <a:p>
-            <a:r>
-              <a:rPr sz="1800" b="1">
-                <a:solidFill>
-                  <a:srgbClr val="E0A437"/>
-                </a:solidFill>
-                <a:latin typeface="PT Serif"/>
-              </a:rPr>
-              <a:t>▸ </a:t>
-            </a:r>
-            <a:r>
-              <a:rPr sz="1800" b="1">
-                <a:solidFill>
-                  <a:srgbClr val="1D3557"/>
-                </a:solidFill>
-                <a:latin typeface="PT Serif"/>
-              </a:rPr>
-              <a:t>Equivocarse de llave es la fuente clásica de merges malos.</a:t>
+              <a:rPr sz="1300" b="0">
+                <a:solidFill>
+                  <a:srgbClr val="6B7785"/>
+                </a:solidFill>
+                <a:latin typeface="PT Serif"/>
+              </a:rPr>
+              <a:t>Los códigos no significan nada sin sus tablas de parámetros: unirlas es parte del análisis.</a:t>
             </a:r>
           </a:p>
         </p:txBody>
@@ -7061,7 +7326,7 @@
                 </a:solidFill>
                 <a:latin typeface="PT Serif"/>
               </a:rPr>
-              <a:t>Cinco preguntas, cinco herramientas</a:t>
+              <a:t>Dos casos concretos</a:t>
             </a:r>
           </a:p>
         </p:txBody>
@@ -7157,7 +7422,7 @@
                 </a:solidFill>
                 <a:latin typeface="PT Serif"/>
               </a:rPr>
-              <a:t>¿A quiénes les preguntaron? Cargar y mirar</a:t>
+              <a:t>Caso 1: códigos que no significan nada solos</a:t>
             </a:r>
           </a:p>
         </p:txBody>
@@ -7171,7 +7436,7 @@
         <p:spPr>
           <a:xfrm>
             <a:off x="704088" y="1280160"/>
-            <a:ext cx="7744968" cy="2880360"/>
+            <a:ext cx="7744968" cy="3886200"/>
           </a:xfrm>
           <a:prstGeom prst="rect">
             <a:avLst/>
@@ -7212,7 +7477,7 @@
                 </a:solidFill>
                 <a:latin typeface="Menlo"/>
               </a:rPr>
-              <a:t>personas = pd.read_csv('datos/eod_stgo/personas.csv',</a:t>
+              <a:t>personas['Sexo'].value_counts()      # 1 y 2: ¿qué son?</a:t>
             </a:r>
           </a:p>
           <a:p>
@@ -7224,7 +7489,7 @@
                 </a:solidFill>
                 <a:latin typeface="Menlo"/>
               </a:rPr>
-              <a:t>                       sep=';', decimal=',')</a:t>
+              <a:t/>
             </a:r>
           </a:p>
           <a:p>
@@ -7236,6 +7501,42 @@
                 </a:solidFill>
                 <a:latin typeface="Menlo"/>
               </a:rPr>
+              <a:t>sexo = pd.read_csv('tablas_parametros/Sexo.csv', sep=';')</a:t>
+            </a:r>
+          </a:p>
+          <a:p>
+            <a:pPr/>
+            <a:r>
+              <a:rPr sz="1500" b="0">
+                <a:solidFill>
+                  <a:srgbClr val="1D3557"/>
+                </a:solidFill>
+                <a:latin typeface="Menlo"/>
+              </a:rPr>
+              <a:t>personas = personas.merge(sexo, left_on='Sexo',</a:t>
+            </a:r>
+          </a:p>
+          <a:p>
+            <a:pPr/>
+            <a:r>
+              <a:rPr sz="1500" b="0">
+                <a:solidFill>
+                  <a:srgbClr val="1D3557"/>
+                </a:solidFill>
+                <a:latin typeface="Menlo"/>
+              </a:rPr>
+              <a:t>                          right_on='Id', how='left')</a:t>
+            </a:r>
+          </a:p>
+          <a:p>
+            <a:pPr/>
+            <a:r>
+              <a:rPr sz="1500" b="0">
+                <a:solidFill>
+                  <a:srgbClr val="1D3557"/>
+                </a:solidFill>
+                <a:latin typeface="Menlo"/>
+              </a:rPr>
               <a:t/>
             </a:r>
           </a:p>
@@ -7248,19 +7549,7 @@
                 </a:solidFill>
                 <a:latin typeface="Menlo"/>
               </a:rPr>
-              <a:t>personas.shape    # 60.054 filas, 39 columnas</a:t>
-            </a:r>
-          </a:p>
-          <a:p>
-            <a:pPr/>
-            <a:r>
-              <a:rPr sz="1500" b="0">
-                <a:solidFill>
-                  <a:srgbClr val="1D3557"/>
-                </a:solidFill>
-                <a:latin typeface="Menlo"/>
-              </a:rPr>
-              <a:t>personas.info()   # tipos y no nulos, siempre antes de calcular</a:t>
+              <a:t>personas['Sexo'].isna().sum()        # después de todo merge: contar los NaN</a:t>
             </a:r>
           </a:p>
         </p:txBody>
@@ -7273,7 +7562,7 @@
         </p:nvSpPr>
         <p:spPr>
           <a:xfrm>
-            <a:off x="704088" y="4389120"/>
+            <a:off x="704088" y="5394960"/>
             <a:ext cx="7744968" cy="1097280"/>
           </a:xfrm>
           <a:prstGeom prst="rect">
@@ -7303,7 +7592,7 @@
                 </a:solidFill>
                 <a:latin typeface="PT Serif"/>
               </a:rPr>
-              <a:t>Estos archivos usan punto y coma como separador y coma decimal: primer hallazgo.</a:t>
+              <a:t>El detalle completo, con las cuatro variantes de how, está en el notebook.</a:t>
             </a:r>
           </a:p>
         </p:txBody>

--- a/presentaciones/clase02_pandas_eda.pptx
+++ b/presentaciones/clase02_pandas_eda.pptx
@@ -29,6 +29,8 @@
     <p:sldId id="277" r:id="rId28"/>
     <p:sldId id="278" r:id="rId29"/>
     <p:sldId id="279" r:id="rId30"/>
+    <p:sldId id="280" r:id="rId31"/>
+    <p:sldId id="281" r:id="rId32"/>
   </p:sldIdLst>
   <p:sldSz cx="9144000" cy="5138928" type="screen4x3"/>
   <p:notesSz cx="6858000" cy="9144000"/>
@@ -3182,7 +3184,7 @@
                 <a:solidFill>
                   <a:srgbClr val="FFFFFF"/>
                 </a:solidFill>
-                <a:latin typeface="PT Serif"/>
+                <a:latin typeface="Fira Sans"/>
               </a:rPr>
               <a:t>¿Cómo se mueve Santiago?</a:t>
             </a:r>
@@ -3235,7 +3237,7 @@
                 <a:solidFill>
                   <a:srgbClr val="1D3557"/>
                 </a:solidFill>
-                <a:latin typeface="PT Serif"/>
+                <a:latin typeface="Fira Sans"/>
               </a:rPr>
               <a:t>Clase 2 · Pandas (repaso) y análisis exploratorio</a:t>
             </a:r>
@@ -3269,7 +3271,7 @@
                 <a:solidFill>
                   <a:srgbClr val="FFFFFF"/>
                 </a:solidFill>
-                <a:latin typeface="PT Serif"/>
+                <a:latin typeface="Fira Sans"/>
               </a:rPr>
               <a:t>Daniela Opitz</a:t>
             </a:r>
@@ -3280,7 +3282,7 @@
                 <a:solidFill>
                   <a:srgbClr val="B8C4D4"/>
                 </a:solidFill>
-                <a:latin typeface="PT Serif"/>
+                <a:latin typeface="Fira Sans"/>
               </a:rPr>
               <a:t>INF-396 · Departamento de Informática · UTFSM · viernes 21 de agosto, 2026</a:t>
             </a:r>
@@ -3376,7 +3378,7 @@
                 <a:solidFill>
                   <a:srgbClr val="0F0F0F"/>
                 </a:solidFill>
-                <a:latin typeface="PT Serif"/>
+                <a:latin typeface="Fira Sans"/>
               </a:rPr>
               <a:t>Las variantes del merge: qué filas sobreviven</a:t>
             </a:r>
@@ -3400,7 +3402,7 @@
         <p:spPr>
           <a:xfrm>
             <a:off x="1417319" y="1143000"/>
-            <a:ext cx="6309360" cy="2373039"/>
+            <a:ext cx="6309360" cy="2397276"/>
           </a:xfrm>
           <a:prstGeom prst="rect">
             <a:avLst/>
@@ -3434,7 +3436,7 @@
                 <a:solidFill>
                   <a:srgbClr val="6B7785"/>
                 </a:solidFill>
-                <a:latin typeface="PT Serif"/>
+                <a:latin typeface="Fira Sans"/>
               </a:rPr>
               <a:t>El valor por defecto es inner: descarta sin aviso las filas sin pareja.</a:t>
             </a:r>
@@ -3530,9 +3532,9 @@
                 <a:solidFill>
                   <a:srgbClr val="0F0F0F"/>
                 </a:solidFill>
-                <a:latin typeface="PT Serif"/>
-              </a:rPr>
-              <a:t>La elección de how define de quién hablan los números</a:t>
+                <a:latin typeface="Fira Sans"/>
+              </a:rPr>
+              <a:t>El efecto del parámetro how sobre la población analizada</a:t>
             </a:r>
           </a:p>
         </p:txBody>
@@ -3564,7 +3566,7 @@
                 <a:solidFill>
                   <a:srgbClr val="E0A437"/>
                 </a:solidFill>
-                <a:latin typeface="PT Serif"/>
+                <a:latin typeface="Fira Sans"/>
               </a:rPr>
               <a:t>▸ </a:t>
             </a:r>
@@ -3573,7 +3575,7 @@
                 <a:solidFill>
                   <a:srgbClr val="3A4A5C"/>
                 </a:solidFill>
-                <a:latin typeface="PT Serif"/>
+                <a:latin typeface="Fira Sans"/>
               </a:rPr>
               <a:t>Personas con viajes, merge inner: 113.591 filas (una por viaje).</a:t>
             </a:r>
@@ -3584,7 +3586,7 @@
                 <a:solidFill>
                   <a:srgbClr val="E0A437"/>
                 </a:solidFill>
-                <a:latin typeface="PT Serif"/>
+                <a:latin typeface="Fira Sans"/>
               </a:rPr>
               <a:t>▸ </a:t>
             </a:r>
@@ -3593,7 +3595,7 @@
                 <a:solidFill>
                   <a:srgbClr val="3A4A5C"/>
                 </a:solidFill>
-                <a:latin typeface="PT Serif"/>
+                <a:latin typeface="Fira Sans"/>
               </a:rPr>
               <a:t>El mismo merge en left: 127.379 filas.</a:t>
             </a:r>
@@ -3604,7 +3606,7 @@
                 <a:solidFill>
                   <a:srgbClr val="6B7785"/>
                 </a:solidFill>
-                <a:latin typeface="PT Serif"/>
+                <a:latin typeface="Fira Sans"/>
               </a:rPr>
               <a:t>     ◦  </a:t>
             </a:r>
@@ -3613,7 +3615,7 @@
                 <a:solidFill>
                   <a:srgbClr val="6B7785"/>
                 </a:solidFill>
-                <a:latin typeface="PT Serif"/>
+                <a:latin typeface="Fira Sans"/>
               </a:rPr>
               <a:t>La diferencia son 13.788 personas que no viajaron ese día.</a:t>
             </a:r>
@@ -3624,7 +3626,7 @@
                 <a:solidFill>
                   <a:srgbClr val="6B7785"/>
                 </a:solidFill>
-                <a:latin typeface="PT Serif"/>
+                <a:latin typeface="Fira Sans"/>
               </a:rPr>
               <a:t>     ◦  </a:t>
             </a:r>
@@ -3633,7 +3635,7 @@
                 <a:solidFill>
                   <a:srgbClr val="6B7785"/>
                 </a:solidFill>
-                <a:latin typeface="PT Serif"/>
+                <a:latin typeface="Fira Sans"/>
               </a:rPr>
               <a:t>Con inner desaparecen; con left quedan, con NaN en el viaje.</a:t>
             </a:r>
@@ -3644,7 +3646,7 @@
                 <a:solidFill>
                   <a:srgbClr val="E0A437"/>
                 </a:solidFill>
-                <a:latin typeface="PT Serif"/>
+                <a:latin typeface="Fira Sans"/>
               </a:rPr>
               <a:t>▸ </a:t>
             </a:r>
@@ -3653,9 +3655,9 @@
                 <a:solidFill>
                   <a:srgbClr val="1D3557"/>
                 </a:solidFill>
-                <a:latin typeface="PT Serif"/>
-              </a:rPr>
-              <a:t>Un promedio de viajes calculado sobre el inner habla solo de quienes viajan.</a:t>
+                <a:latin typeface="Fira Sans"/>
+              </a:rPr>
+              <a:t>Un promedio calculado sobre el resultado del inner excluye a quienes no viajaron.</a:t>
             </a:r>
           </a:p>
         </p:txBody>
@@ -3749,7 +3751,7 @@
                 <a:solidFill>
                   <a:srgbClr val="0F0F0F"/>
                 </a:solidFill>
-                <a:latin typeface="PT Serif"/>
+                <a:latin typeface="Fira Sans"/>
               </a:rPr>
               <a:t>Caso 2: contar sin perder a los que no aparecen</a:t>
             </a:r>
@@ -3874,7 +3876,7 @@
                 <a:solidFill>
                   <a:srgbClr val="E0A437"/>
                 </a:solidFill>
-                <a:latin typeface="PT Serif"/>
+                <a:latin typeface="Fira Sans"/>
               </a:rPr>
               <a:t>▸ </a:t>
             </a:r>
@@ -3883,7 +3885,7 @@
                 <a:solidFill>
                   <a:srgbClr val="3A4A5C"/>
                 </a:solidFill>
-                <a:latin typeface="PT Serif"/>
+                <a:latin typeface="Fira Sans"/>
               </a:rPr>
               <a:t>El groupby cuenta sobre la tabla de viajes; el fillna(0) trae de vuelta a los ausentes.</a:t>
             </a:r>
@@ -3979,7 +3981,7 @@
                 <a:solidFill>
                   <a:srgbClr val="0F0F0F"/>
                 </a:solidFill>
-                <a:latin typeface="PT Serif"/>
+                <a:latin typeface="Fira Sans"/>
               </a:rPr>
               <a:t>Quien no viaja también es dato</a:t>
             </a:r>
@@ -4013,7 +4015,7 @@
                 <a:solidFill>
                   <a:srgbClr val="E0A437"/>
                 </a:solidFill>
-                <a:latin typeface="PT Serif"/>
+                <a:latin typeface="Fira Sans"/>
               </a:rPr>
               <a:t>▸ </a:t>
             </a:r>
@@ -4022,7 +4024,7 @@
                 <a:solidFill>
                   <a:srgbClr val="3A4A5C"/>
                 </a:solidFill>
-                <a:latin typeface="PT Serif"/>
+                <a:latin typeface="Fira Sans"/>
               </a:rPr>
               <a:t>El 23% de las personas no viajó ese día.</a:t>
             </a:r>
@@ -4033,7 +4035,7 @@
                 <a:solidFill>
                   <a:srgbClr val="E0A437"/>
                 </a:solidFill>
-                <a:latin typeface="PT Serif"/>
+                <a:latin typeface="Fira Sans"/>
               </a:rPr>
               <a:t>▸ </a:t>
             </a:r>
@@ -4042,7 +4044,7 @@
                 <a:solidFill>
                   <a:srgbClr val="3A4A5C"/>
                 </a:solidFill>
-                <a:latin typeface="PT Serif"/>
+                <a:latin typeface="Fira Sans"/>
               </a:rPr>
               <a:t>Media: 1,9 viajes. Mediana: 2 viajes.</a:t>
             </a:r>
@@ -4053,7 +4055,7 @@
                 <a:solidFill>
                   <a:srgbClr val="E0A437"/>
                 </a:solidFill>
-                <a:latin typeface="PT Serif"/>
+                <a:latin typeface="Fira Sans"/>
               </a:rPr>
               <a:t>▸ </a:t>
             </a:r>
@@ -4062,7 +4064,7 @@
                 <a:solidFill>
                   <a:srgbClr val="3A4A5C"/>
                 </a:solidFill>
-                <a:latin typeface="PT Serif"/>
+                <a:latin typeface="Fira Sans"/>
               </a:rPr>
               <a:t>Aquí la media quedó bajo la mediana: el bloque de ceros la baja.</a:t>
             </a:r>
@@ -4073,7 +4075,7 @@
                 <a:solidFill>
                   <a:srgbClr val="E0A437"/>
                 </a:solidFill>
-                <a:latin typeface="PT Serif"/>
+                <a:latin typeface="Fira Sans"/>
               </a:rPr>
               <a:t>▸ </a:t>
             </a:r>
@@ -4082,9 +4084,9 @@
                 <a:solidFill>
                   <a:srgbClr val="1D3557"/>
                 </a:solidFill>
-                <a:latin typeface="PT Serif"/>
-              </a:rPr>
-              <a:t>La asimetría no siempre empuja hacia el mismo lado: se mira, no se adivina.</a:t>
+                <a:latin typeface="Fira Sans"/>
+              </a:rPr>
+              <a:t>La dirección del sesgo depende de la forma de la distribución.</a:t>
             </a:r>
           </a:p>
         </p:txBody>
@@ -4106,7 +4108,7 @@
         <p:spPr>
           <a:xfrm>
             <a:off x="4892040" y="1371600"/>
-            <a:ext cx="3840480" cy="2196274"/>
+            <a:ext cx="3840480" cy="2191739"/>
           </a:xfrm>
           <a:prstGeom prst="rect">
             <a:avLst/>
@@ -4202,7 +4204,7 @@
                 <a:solidFill>
                   <a:srgbClr val="FFFFFF"/>
                 </a:solidFill>
-                <a:latin typeface="PT Serif"/>
+                <a:latin typeface="Fira Sans"/>
               </a:rPr>
               <a:t>¿A quién representa la encuesta?</a:t>
             </a:r>
@@ -4213,7 +4215,7 @@
                 <a:solidFill>
                   <a:srgbClr val="E0A437"/>
                 </a:solidFill>
-                <a:latin typeface="PT Serif"/>
+                <a:latin typeface="Fira Sans"/>
               </a:rPr>
               <a:t>Los factores de expansión</a:t>
             </a:r>
@@ -4309,7 +4311,7 @@
                 <a:solidFill>
                   <a:srgbClr val="0F0F0F"/>
                 </a:solidFill>
-                <a:latin typeface="PT Serif"/>
+                <a:latin typeface="Fira Sans"/>
               </a:rPr>
               <a:t>De la muestra a la ciudad</a:t>
             </a:r>
@@ -4333,7 +4335,7 @@
         <p:spPr>
           <a:xfrm>
             <a:off x="1417319" y="1143000"/>
-            <a:ext cx="6309360" cy="2869563"/>
+            <a:ext cx="6309360" cy="2871234"/>
           </a:xfrm>
           <a:prstGeom prst="rect">
             <a:avLst/>
@@ -4367,7 +4369,7 @@
                 <a:solidFill>
                   <a:srgbClr val="6B7785"/>
                 </a:solidFill>
-                <a:latin typeface="PT Serif"/>
+                <a:latin typeface="Fira Sans"/>
               </a:rPr>
               <a:t>Contar filas responde por la muestra; sumar factores responde por la ciudad.</a:t>
             </a:r>
@@ -4463,7 +4465,7 @@
                 <a:solidFill>
                   <a:srgbClr val="FFFFFF"/>
                 </a:solidFill>
-                <a:latin typeface="PT Serif"/>
+                <a:latin typeface="Fira Sans"/>
               </a:rPr>
               <a:t>Análisis exploratorio</a:t>
             </a:r>
@@ -4474,9 +4476,9 @@
                 <a:solidFill>
                   <a:srgbClr val="E0A437"/>
                 </a:solidFill>
-                <a:latin typeface="PT Serif"/>
-              </a:rPr>
-              <a:t>¿Qué número resume bien una respuesta?</a:t>
+                <a:latin typeface="Fira Sans"/>
+              </a:rPr>
+              <a:t>Examinar los datos antes de modelarlos</a:t>
             </a:r>
           </a:p>
         </p:txBody>
@@ -4570,9 +4572,9 @@
                 <a:solidFill>
                   <a:srgbClr val="0F0F0F"/>
                 </a:solidFill>
-                <a:latin typeface="PT Serif"/>
-              </a:rPr>
-              <a:t>¿Cuánto gana un hogar típico?</a:t>
+                <a:latin typeface="Fira Sans"/>
+              </a:rPr>
+              <a:t>Qué es el análisis exploratorio de datos</a:t>
             </a:r>
           </a:p>
         </p:txBody>
@@ -4585,8 +4587,8 @@
         </p:nvSpPr>
         <p:spPr>
           <a:xfrm>
-            <a:off x="502920" y="1252728"/>
-            <a:ext cx="4023360" cy="3200400"/>
+            <a:off x="704088" y="1353312"/>
+            <a:ext cx="7744968" cy="3300984"/>
           </a:xfrm>
           <a:prstGeom prst="rect">
             <a:avLst/>
@@ -4600,110 +4602,146 @@
           <a:lstStyle/>
           <a:p>
             <a:r>
-              <a:rPr sz="1500" b="1">
+              <a:rPr sz="1800" b="1">
                 <a:solidFill>
                   <a:srgbClr val="E0A437"/>
                 </a:solidFill>
-                <a:latin typeface="PT Serif"/>
+                <a:latin typeface="Fira Sans"/>
               </a:rPr>
               <a:t>▸ </a:t>
             </a:r>
             <a:r>
-              <a:rPr sz="1500" b="0">
+              <a:rPr sz="1800" b="0">
                 <a:solidFill>
                   <a:srgbClr val="3A4A5C"/>
                 </a:solidFill>
-                <a:latin typeface="PT Serif"/>
-              </a:rPr>
-              <a:t>Media: $688.274. Mediana: $507.826.</a:t>
-            </a:r>
-          </a:p>
-          <a:p>
-            <a:r>
-              <a:rPr sz="1500" b="1">
+                <a:latin typeface="Fira Sans"/>
+              </a:rPr>
+              <a:t>La etapa en que se examinan los datos antes de modelarlos (Tukey, 1977).</a:t>
+            </a:r>
+          </a:p>
+          <a:p>
+            <a:r>
+              <a:rPr sz="1800" b="1">
                 <a:solidFill>
                   <a:srgbClr val="E0A437"/>
                 </a:solidFill>
-                <a:latin typeface="PT Serif"/>
+                <a:latin typeface="Fira Sans"/>
               </a:rPr>
               <a:t>▸ </a:t>
             </a:r>
             <a:r>
-              <a:rPr sz="1500" b="0">
+              <a:rPr sz="1800" b="0">
                 <a:solidFill>
                   <a:srgbClr val="3A4A5C"/>
                 </a:solidFill>
-                <a:latin typeface="PT Serif"/>
-              </a:rPr>
-              <a:t>La media es un 36% más alta que la mediana.</a:t>
-            </a:r>
-          </a:p>
-          <a:p>
-            <a:r>
-              <a:rPr sz="1500" b="1">
+                <a:latin typeface="Fira Sans"/>
+              </a:rPr>
+              <a:t>Responde cuatro tipos de pregunta:</a:t>
+            </a:r>
+          </a:p>
+          <a:p>
+            <a:r>
+              <a:rPr sz="1400" b="0">
+                <a:solidFill>
+                  <a:srgbClr val="6B7785"/>
+                </a:solidFill>
+                <a:latin typeface="Fira Sans"/>
+              </a:rPr>
+              <a:t>     ◦  </a:t>
+            </a:r>
+            <a:r>
+              <a:rPr sz="1400" b="0">
+                <a:solidFill>
+                  <a:srgbClr val="6B7785"/>
+                </a:solidFill>
+                <a:latin typeface="Fira Sans"/>
+              </a:rPr>
+              <a:t>La forma: cómo se distribuye cada variable.</a:t>
+            </a:r>
+          </a:p>
+          <a:p>
+            <a:r>
+              <a:rPr sz="1400" b="0">
+                <a:solidFill>
+                  <a:srgbClr val="6B7785"/>
+                </a:solidFill>
+                <a:latin typeface="Fira Sans"/>
+              </a:rPr>
+              <a:t>     ◦  </a:t>
+            </a:r>
+            <a:r>
+              <a:rPr sz="1400" b="0">
+                <a:solidFill>
+                  <a:srgbClr val="6B7785"/>
+                </a:solidFill>
+                <a:latin typeface="Fira Sans"/>
+              </a:rPr>
+              <a:t>Lo típico y lo extremo: qué es frecuente y qué es anómalo.</a:t>
+            </a:r>
+          </a:p>
+          <a:p>
+            <a:r>
+              <a:rPr sz="1400" b="0">
+                <a:solidFill>
+                  <a:srgbClr val="6B7785"/>
+                </a:solidFill>
+                <a:latin typeface="Fira Sans"/>
+              </a:rPr>
+              <a:t>     ◦  </a:t>
+            </a:r>
+            <a:r>
+              <a:rPr sz="1400" b="0">
+                <a:solidFill>
+                  <a:srgbClr val="6B7785"/>
+                </a:solidFill>
+                <a:latin typeface="Fira Sans"/>
+              </a:rPr>
+              <a:t>Lo que falta: qué datos están ausentes y con qué patrón.</a:t>
+            </a:r>
+          </a:p>
+          <a:p>
+            <a:r>
+              <a:rPr sz="1400" b="0">
+                <a:solidFill>
+                  <a:srgbClr val="6B7785"/>
+                </a:solidFill>
+                <a:latin typeface="Fira Sans"/>
+              </a:rPr>
+              <a:t>     ◦  </a:t>
+            </a:r>
+            <a:r>
+              <a:rPr sz="1400" b="0">
+                <a:solidFill>
+                  <a:srgbClr val="6B7785"/>
+                </a:solidFill>
+                <a:latin typeface="Fira Sans"/>
+              </a:rPr>
+              <a:t>Las relaciones: qué variables se asocian con qué otras.</a:t>
+            </a:r>
+          </a:p>
+          <a:p>
+            <a:r>
+              <a:rPr sz="1800" b="1">
                 <a:solidFill>
                   <a:srgbClr val="E0A437"/>
                 </a:solidFill>
-                <a:latin typeface="PT Serif"/>
+                <a:latin typeface="Fira Sans"/>
               </a:rPr>
               <a:t>▸ </a:t>
             </a:r>
             <a:r>
-              <a:rPr sz="1500" b="0">
-                <a:solidFill>
-                  <a:srgbClr val="3A4A5C"/>
-                </a:solidFill>
-                <a:latin typeface="PT Serif"/>
-              </a:rPr>
-              <a:t>Los ingresos altos desplazan el promedio; la mayoría gana menos.</a:t>
-            </a:r>
-          </a:p>
-          <a:p>
-            <a:r>
-              <a:rPr sz="1500" b="1">
-                <a:solidFill>
-                  <a:srgbClr val="E0A437"/>
-                </a:solidFill>
-                <a:latin typeface="PT Serif"/>
-              </a:rPr>
-              <a:t>▸ </a:t>
-            </a:r>
-            <a:r>
-              <a:rPr sz="1500" b="1">
+              <a:rPr sz="1800" b="1">
                 <a:solidFill>
                   <a:srgbClr val="1D3557"/>
                 </a:solidFill>
-                <a:latin typeface="PT Serif"/>
-              </a:rPr>
-              <a:t>El promedio describe una situación en la que la mayoría no está.</a:t>
-            </a:r>
-          </a:p>
-        </p:txBody>
-      </p:sp>
-      <p:pic>
-        <p:nvPicPr>
-          <p:cNvPr id="5" name="Picture 4" descr="01_ingreso_media_mediana.png"/>
-          <p:cNvPicPr>
-            <a:picLocks noChangeAspect="1"/>
-          </p:cNvPicPr>
-          <p:nvPr/>
-        </p:nvPicPr>
-        <p:blipFill>
-          <a:blip r:embed="rId2"/>
-          <a:stretch>
-            <a:fillRect/>
-          </a:stretch>
-        </p:blipFill>
-        <p:spPr>
-          <a:xfrm>
-            <a:off x="4892040" y="1371600"/>
-            <a:ext cx="3840480" cy="2189433"/>
-          </a:xfrm>
-          <a:prstGeom prst="rect">
-            <a:avLst/>
-          </a:prstGeom>
-        </p:spPr>
-      </p:pic>
+                <a:latin typeface="Fira Sans"/>
+              </a:rPr>
+              <a:t>Genera hipótesis; el análisis confirmatorio (unidad 5) las pone a prueba.</a:t>
+            </a:r>
+          </a:p>
+        </p:txBody>
+      </p:sp>
     </p:spTree>
   </p:cSld>
   <p:clrMapOvr>
@@ -4793,9 +4831,9 @@
                 <a:solidFill>
                   <a:srgbClr val="0F0F0F"/>
                 </a:solidFill>
-                <a:latin typeface="PT Serif"/>
-              </a:rPr>
-              <a:t>¿Cuánto dura un viaje?</a:t>
+                <a:latin typeface="Fira Sans"/>
+              </a:rPr>
+              <a:t>¿Cuánto gana un hogar típico?</a:t>
             </a:r>
           </a:p>
         </p:txBody>
@@ -4827,7 +4865,7 @@
                 <a:solidFill>
                   <a:srgbClr val="E0A437"/>
                 </a:solidFill>
-                <a:latin typeface="PT Serif"/>
+                <a:latin typeface="Fira Sans"/>
               </a:rPr>
               <a:t>▸ </a:t>
             </a:r>
@@ -4836,9 +4874,9 @@
                 <a:solidFill>
                   <a:srgbClr val="3A4A5C"/>
                 </a:solidFill>
-                <a:latin typeface="PT Serif"/>
-              </a:rPr>
-              <a:t>Mediana: 30 minutos. Percentil 95: 98 minutos.</a:t>
+                <a:latin typeface="Fira Sans"/>
+              </a:rPr>
+              <a:t>Media: $688.274. Mediana: $507.826.</a:t>
             </a:r>
           </a:p>
           <a:p>
@@ -4847,7 +4885,7 @@
                 <a:solidFill>
                   <a:srgbClr val="E0A437"/>
                 </a:solidFill>
-                <a:latin typeface="PT Serif"/>
+                <a:latin typeface="Fira Sans"/>
               </a:rPr>
               <a:t>▸ </a:t>
             </a:r>
@@ -4856,9 +4894,9 @@
                 <a:solidFill>
                   <a:srgbClr val="3A4A5C"/>
                 </a:solidFill>
-                <a:latin typeface="PT Serif"/>
-              </a:rPr>
-              <a:t>Máximo registrado: 1.335 minutos, un viaje de 22 horas.</a:t>
+                <a:latin typeface="Fira Sans"/>
+              </a:rPr>
+              <a:t>La media es un 36% más alta que la mediana.</a:t>
             </a:r>
           </a:p>
           <a:p>
@@ -4867,7 +4905,7 @@
                 <a:solidFill>
                   <a:srgbClr val="E0A437"/>
                 </a:solidFill>
-                <a:latin typeface="PT Serif"/>
+                <a:latin typeface="Fira Sans"/>
               </a:rPr>
               <a:t>▸ </a:t>
             </a:r>
@@ -4876,9 +4914,9 @@
                 <a:solidFill>
                   <a:srgbClr val="3A4A5C"/>
                 </a:solidFill>
-                <a:latin typeface="PT Serif"/>
-              </a:rPr>
-              <a:t>¿Error de digitación? ¿Turno nocturno mal anotado?</a:t>
+                <a:latin typeface="Fira Sans"/>
+              </a:rPr>
+              <a:t>Los ingresos altos desplazan el promedio; la mayoría gana menos.</a:t>
             </a:r>
           </a:p>
           <a:p>
@@ -4887,7 +4925,7 @@
                 <a:solidFill>
                   <a:srgbClr val="E0A437"/>
                 </a:solidFill>
-                <a:latin typeface="PT Serif"/>
+                <a:latin typeface="Fira Sans"/>
               </a:rPr>
               <a:t>▸ </a:t>
             </a:r>
@@ -4896,16 +4934,16 @@
                 <a:solidFill>
                   <a:srgbClr val="1D3557"/>
                 </a:solidFill>
-                <a:latin typeface="PT Serif"/>
-              </a:rPr>
-              <a:t>Los valores extremos se investigan y la decisión se declara.</a:t>
+                <a:latin typeface="Fira Sans"/>
+              </a:rPr>
+              <a:t>El promedio describe una situación en la que la mayoría no está.</a:t>
             </a:r>
           </a:p>
         </p:txBody>
       </p:sp>
       <p:pic>
         <p:nvPicPr>
-          <p:cNvPr id="5" name="Picture 4" descr="04_duracion_viajes.png"/>
+          <p:cNvPr id="5" name="Picture 4" descr="01_ingreso_media_mediana.png"/>
           <p:cNvPicPr>
             <a:picLocks noChangeAspect="1"/>
           </p:cNvPicPr>
@@ -4920,7 +4958,7 @@
         <p:spPr>
           <a:xfrm>
             <a:off x="4892040" y="1371600"/>
-            <a:ext cx="3840480" cy="2196274"/>
+            <a:ext cx="3840480" cy="2182719"/>
           </a:xfrm>
           <a:prstGeom prst="rect">
             <a:avLst/>
@@ -5016,9 +5054,9 @@
                 <a:solidFill>
                   <a:srgbClr val="0F0F0F"/>
                 </a:solidFill>
-                <a:latin typeface="PT Serif"/>
-              </a:rPr>
-              <a:t>¿En qué se mueve Santiago?</a:t>
+                <a:latin typeface="Fira Sans"/>
+              </a:rPr>
+              <a:t>¿Cuánto dura un viaje?</a:t>
             </a:r>
           </a:p>
         </p:txBody>
@@ -5050,7 +5088,7 @@
                 <a:solidFill>
                   <a:srgbClr val="E0A437"/>
                 </a:solidFill>
-                <a:latin typeface="PT Serif"/>
+                <a:latin typeface="Fira Sans"/>
               </a:rPr>
               <a:t>▸ </a:t>
             </a:r>
@@ -5059,69 +5097,9 @@
                 <a:solidFill>
                   <a:srgbClr val="3A4A5C"/>
                 </a:solidFill>
-                <a:latin typeface="PT Serif"/>
-              </a:rPr>
-              <a:t>Dos merges y un groupby ponderado por factor.</a:t>
-            </a:r>
-          </a:p>
-          <a:p>
-            <a:r>
-              <a:rPr sz="1300" b="0">
-                <a:solidFill>
-                  <a:srgbClr val="6B7785"/>
-                </a:solidFill>
-                <a:latin typeface="PT Serif"/>
-              </a:rPr>
-              <a:t>     ◦  </a:t>
-            </a:r>
-            <a:r>
-              <a:rPr sz="1300" b="0">
-                <a:solidFill>
-                  <a:srgbClr val="6B7785"/>
-                </a:solidFill>
-                <a:latin typeface="PT Serif"/>
-              </a:rPr>
-              <a:t>Caminata: 34% de los viajes.</a:t>
-            </a:r>
-          </a:p>
-          <a:p>
-            <a:r>
-              <a:rPr sz="1300" b="0">
-                <a:solidFill>
-                  <a:srgbClr val="6B7785"/>
-                </a:solidFill>
-                <a:latin typeface="PT Serif"/>
-              </a:rPr>
-              <a:t>     ◦  </a:t>
-            </a:r>
-            <a:r>
-              <a:rPr sz="1300" b="0">
-                <a:solidFill>
-                  <a:srgbClr val="6B7785"/>
-                </a:solidFill>
-                <a:latin typeface="PT Serif"/>
-              </a:rPr>
-              <a:t>Transporte público (Bip!): 24%.</a:t>
-            </a:r>
-          </a:p>
-          <a:p>
-            <a:r>
-              <a:rPr sz="1300" b="0">
-                <a:solidFill>
-                  <a:srgbClr val="6B7785"/>
-                </a:solidFill>
-                <a:latin typeface="PT Serif"/>
-              </a:rPr>
-              <a:t>     ◦  </a:t>
-            </a:r>
-            <a:r>
-              <a:rPr sz="1300" b="0">
-                <a:solidFill>
-                  <a:srgbClr val="6B7785"/>
-                </a:solidFill>
-                <a:latin typeface="PT Serif"/>
-              </a:rPr>
-              <a:t>Auto: 23%.</a:t>
+                <a:latin typeface="Fira Sans"/>
+              </a:rPr>
+              <a:t>Mediana: 30 minutos. Percentil 95: 98 minutos.</a:t>
             </a:r>
           </a:p>
           <a:p>
@@ -5130,25 +5108,65 @@
                 <a:solidFill>
                   <a:srgbClr val="E0A437"/>
                 </a:solidFill>
-                <a:latin typeface="PT Serif"/>
+                <a:latin typeface="Fira Sans"/>
               </a:rPr>
               <a:t>▸ </a:t>
             </a:r>
             <a:r>
+              <a:rPr sz="1500" b="0">
+                <a:solidFill>
+                  <a:srgbClr val="3A4A5C"/>
+                </a:solidFill>
+                <a:latin typeface="Fira Sans"/>
+              </a:rPr>
+              <a:t>Máximo registrado: 1.335 minutos, un viaje de 22 horas.</a:t>
+            </a:r>
+          </a:p>
+          <a:p>
+            <a:r>
               <a:rPr sz="1500" b="1">
                 <a:solidFill>
+                  <a:srgbClr val="E0A437"/>
+                </a:solidFill>
+                <a:latin typeface="Fira Sans"/>
+              </a:rPr>
+              <a:t>▸ </a:t>
+            </a:r>
+            <a:r>
+              <a:rPr sz="1500" b="0">
+                <a:solidFill>
+                  <a:srgbClr val="3A4A5C"/>
+                </a:solidFill>
+                <a:latin typeface="Fira Sans"/>
+              </a:rPr>
+              <a:t>¿Error de digitación? ¿Turno nocturno mal anotado?</a:t>
+            </a:r>
+          </a:p>
+          <a:p>
+            <a:r>
+              <a:rPr sz="1500" b="1">
+                <a:solidFill>
+                  <a:srgbClr val="E0A437"/>
+                </a:solidFill>
+                <a:latin typeface="Fira Sans"/>
+              </a:rPr>
+              <a:t>▸ </a:t>
+            </a:r>
+            <a:r>
+              <a:rPr sz="1500" b="1">
+                <a:solidFill>
                   <a:srgbClr val="1D3557"/>
                 </a:solidFill>
-                <a:latin typeface="PT Serif"/>
-              </a:rPr>
-              <a:t>La partición modal de un día laboral, calculada desde los microdatos.</a:t>
+                <a:latin typeface="Fira Sans"/>
+              </a:rPr>
+              <a:t>Los valores extremos se investigan y la decisión se declara.</a:t>
             </a:r>
           </a:p>
         </p:txBody>
       </p:sp>
       <p:pic>
         <p:nvPicPr>
-          <p:cNvPr id="5" name="Picture 4" descr="03_reparto_modal.png"/>
+          <p:cNvPr id="5" name="Picture 4" descr="04_duracion_viajes.png"/>
           <p:cNvPicPr>
             <a:picLocks noChangeAspect="1"/>
           </p:cNvPicPr>
@@ -5163,7 +5181,7 @@
         <p:spPr>
           <a:xfrm>
             <a:off x="4892040" y="1371600"/>
-            <a:ext cx="3840480" cy="1966813"/>
+            <a:ext cx="3840480" cy="2146492"/>
           </a:xfrm>
           <a:prstGeom prst="rect">
             <a:avLst/>
@@ -5259,7 +5277,7 @@
                 <a:solidFill>
                   <a:srgbClr val="0F0F0F"/>
                 </a:solidFill>
-                <a:latin typeface="PT Serif"/>
+                <a:latin typeface="Fira Sans"/>
               </a:rPr>
               <a:t>Qué veremos hoy</a:t>
             </a:r>
@@ -5293,7 +5311,7 @@
                 <a:solidFill>
                   <a:srgbClr val="E0A437"/>
                 </a:solidFill>
-                <a:latin typeface="PT Serif"/>
+                <a:latin typeface="Fira Sans"/>
               </a:rPr>
               <a:t>▸ </a:t>
             </a:r>
@@ -5302,7 +5320,7 @@
                 <a:solidFill>
                   <a:srgbClr val="3A4A5C"/>
                 </a:solidFill>
-                <a:latin typeface="PT Serif"/>
+                <a:latin typeface="Fira Sans"/>
               </a:rPr>
               <a:t>Le haremos preguntas a la Encuesta Origen Destino de Santiago 2012.</a:t>
             </a:r>
@@ -5313,7 +5331,7 @@
                 <a:solidFill>
                   <a:srgbClr val="E0A437"/>
                 </a:solidFill>
-                <a:latin typeface="PT Serif"/>
+                <a:latin typeface="Fira Sans"/>
               </a:rPr>
               <a:t>▸ </a:t>
             </a:r>
@@ -5322,9 +5340,9 @@
                 <a:solidFill>
                   <a:srgbClr val="3A4A5C"/>
                 </a:solidFill>
-                <a:latin typeface="PT Serif"/>
-              </a:rPr>
-              <a:t>El repaso de Pandas va en el camino: cada pregunta trae su herramienta.</a:t>
+                <a:latin typeface="Fira Sans"/>
+              </a:rPr>
+              <a:t>Repasaremos Pandas aplicándolo a esas preguntas.</a:t>
             </a:r>
           </a:p>
           <a:p>
@@ -5333,7 +5351,7 @@
                 <a:solidFill>
                   <a:srgbClr val="6B7785"/>
                 </a:solidFill>
-                <a:latin typeface="PT Serif"/>
+                <a:latin typeface="Fira Sans"/>
               </a:rPr>
               <a:t>     ◦  </a:t>
             </a:r>
@@ -5342,7 +5360,7 @@
                 <a:solidFill>
                   <a:srgbClr val="6B7785"/>
                 </a:solidFill>
-                <a:latin typeface="PT Serif"/>
+                <a:latin typeface="Fira Sans"/>
               </a:rPr>
               <a:t>Merge y sus variantes, groupby, medidas de resumen.</a:t>
             </a:r>
@@ -5353,7 +5371,7 @@
                 <a:solidFill>
                   <a:srgbClr val="6B7785"/>
                 </a:solidFill>
-                <a:latin typeface="PT Serif"/>
+                <a:latin typeface="Fira Sans"/>
               </a:rPr>
               <a:t>     ◦  </a:t>
             </a:r>
@@ -5362,7 +5380,7 @@
                 <a:solidFill>
                   <a:srgbClr val="6B7785"/>
                 </a:solidFill>
-                <a:latin typeface="PT Serif"/>
+                <a:latin typeface="Fira Sans"/>
               </a:rPr>
               <a:t>Lo probablemente nuevo: tablas de códigos y factores de expansión.</a:t>
             </a:r>
@@ -5373,7 +5391,7 @@
                 <a:solidFill>
                   <a:srgbClr val="E0A437"/>
                 </a:solidFill>
-                <a:latin typeface="PT Serif"/>
+                <a:latin typeface="Fira Sans"/>
               </a:rPr>
               <a:t>▸ </a:t>
             </a:r>
@@ -5382,7 +5400,7 @@
                 <a:solidFill>
                   <a:srgbClr val="1D3557"/>
                 </a:solidFill>
-                <a:latin typeface="PT Serif"/>
+                <a:latin typeface="Fira Sans"/>
               </a:rPr>
               <a:t>En el segundo bloque parte la Tarea 1: el retrato de tu comuna.</a:t>
             </a:r>
@@ -5478,16 +5496,139 @@
                 <a:solidFill>
                   <a:srgbClr val="0F0F0F"/>
                 </a:solidFill>
-                <a:latin typeface="PT Serif"/>
-              </a:rPr>
-              <a:t>¿Se mueve igual toda la ciudad?</a:t>
+                <a:latin typeface="Fira Sans"/>
+              </a:rPr>
+              <a:t>¿En qué se mueve Santiago?</a:t>
+            </a:r>
+          </a:p>
+        </p:txBody>
+      </p:sp>
+      <p:sp>
+        <p:nvSpPr>
+          <p:cNvPr id="4" name="TextBox 3"/>
+          <p:cNvSpPr txBox="1"/>
+          <p:nvPr/>
+        </p:nvSpPr>
+        <p:spPr>
+          <a:xfrm>
+            <a:off x="502920" y="1252728"/>
+            <a:ext cx="4023360" cy="3200400"/>
+          </a:xfrm>
+          <a:prstGeom prst="rect">
+            <a:avLst/>
+          </a:prstGeom>
+          <a:noFill/>
+        </p:spPr>
+        <p:txBody>
+          <a:bodyPr wrap="square">
+            <a:spAutoFit/>
+          </a:bodyPr>
+          <a:lstStyle/>
+          <a:p>
+            <a:r>
+              <a:rPr sz="1500" b="1">
+                <a:solidFill>
+                  <a:srgbClr val="E0A437"/>
+                </a:solidFill>
+                <a:latin typeface="Fira Sans"/>
+              </a:rPr>
+              <a:t>▸ </a:t>
+            </a:r>
+            <a:r>
+              <a:rPr sz="1500" b="0">
+                <a:solidFill>
+                  <a:srgbClr val="3A4A5C"/>
+                </a:solidFill>
+                <a:latin typeface="Fira Sans"/>
+              </a:rPr>
+              <a:t>Dos merges y un groupby ponderado por factor.</a:t>
+            </a:r>
+          </a:p>
+          <a:p>
+            <a:r>
+              <a:rPr sz="1300" b="0">
+                <a:solidFill>
+                  <a:srgbClr val="6B7785"/>
+                </a:solidFill>
+                <a:latin typeface="Fira Sans"/>
+              </a:rPr>
+              <a:t>     ◦  </a:t>
+            </a:r>
+            <a:r>
+              <a:rPr sz="1300" b="0">
+                <a:solidFill>
+                  <a:srgbClr val="6B7785"/>
+                </a:solidFill>
+                <a:latin typeface="Fira Sans"/>
+              </a:rPr>
+              <a:t>Caminata: 34% de los viajes.</a:t>
+            </a:r>
+          </a:p>
+          <a:p>
+            <a:r>
+              <a:rPr sz="1300" b="0">
+                <a:solidFill>
+                  <a:srgbClr val="6B7785"/>
+                </a:solidFill>
+                <a:latin typeface="Fira Sans"/>
+              </a:rPr>
+              <a:t>     ◦  </a:t>
+            </a:r>
+            <a:r>
+              <a:rPr sz="1300" b="0">
+                <a:solidFill>
+                  <a:srgbClr val="6B7785"/>
+                </a:solidFill>
+                <a:latin typeface="Fira Sans"/>
+              </a:rPr>
+              <a:t>Transporte público (Bip!): 24%.</a:t>
+            </a:r>
+          </a:p>
+          <a:p>
+            <a:r>
+              <a:rPr sz="1300" b="0">
+                <a:solidFill>
+                  <a:srgbClr val="6B7785"/>
+                </a:solidFill>
+                <a:latin typeface="Fira Sans"/>
+              </a:rPr>
+              <a:t>     ◦  </a:t>
+            </a:r>
+            <a:r>
+              <a:rPr sz="1300" b="0">
+                <a:solidFill>
+                  <a:srgbClr val="6B7785"/>
+                </a:solidFill>
+                <a:latin typeface="Fira Sans"/>
+              </a:rPr>
+              <a:t>Auto: 23%.</a:t>
+            </a:r>
+          </a:p>
+          <a:p>
+            <a:r>
+              <a:rPr sz="1500" b="1">
+                <a:solidFill>
+                  <a:srgbClr val="E0A437"/>
+                </a:solidFill>
+                <a:latin typeface="Fira Sans"/>
+              </a:rPr>
+              <a:t>▸ </a:t>
+            </a:r>
+            <a:r>
+              <a:rPr sz="1500" b="1">
+                <a:solidFill>
+                  <a:srgbClr val="1D3557"/>
+                </a:solidFill>
+                <a:latin typeface="Fira Sans"/>
+              </a:rPr>
+              <a:t>La partición modal de un día laboral, calculada desde los microdatos.</a:t>
             </a:r>
           </a:p>
         </p:txBody>
       </p:sp>
       <p:pic>
         <p:nvPicPr>
-          <p:cNvPr id="4" name="Picture 3" descr="08_modo_por_comuna.png"/>
+          <p:cNvPr id="5" name="Picture 4" descr="03_reparto_modal.png"/>
           <p:cNvPicPr>
             <a:picLocks noChangeAspect="1"/>
           </p:cNvPicPr>
@@ -5501,48 +5642,14 @@
         </p:blipFill>
         <p:spPr>
           <a:xfrm>
-            <a:off x="2011818" y="1143000"/>
-            <a:ext cx="5120362" cy="3154680"/>
+            <a:off x="4892040" y="1371600"/>
+            <a:ext cx="3840480" cy="1938578"/>
           </a:xfrm>
           <a:prstGeom prst="rect">
             <a:avLst/>
           </a:prstGeom>
         </p:spPr>
       </p:pic>
-      <p:sp>
-        <p:nvSpPr>
-          <p:cNvPr id="5" name="TextBox 4"/>
-          <p:cNvSpPr txBox="1"/>
-          <p:nvPr/>
-        </p:nvSpPr>
-        <p:spPr>
-          <a:xfrm>
-            <a:off x="704088" y="4434840"/>
-            <a:ext cx="7744968" cy="457200"/>
-          </a:xfrm>
-          <a:prstGeom prst="rect">
-            <a:avLst/>
-          </a:prstGeom>
-          <a:noFill/>
-        </p:spPr>
-        <p:txBody>
-          <a:bodyPr wrap="square">
-            <a:spAutoFit/>
-          </a:bodyPr>
-          <a:lstStyle/>
-          <a:p>
-            <a:r>
-              <a:rPr sz="1300" b="0">
-                <a:solidFill>
-                  <a:srgbClr val="6B7785"/>
-                </a:solidFill>
-                <a:latin typeface="PT Serif"/>
-              </a:rPr>
-              <a:t>Normalizar por comuna permite comparar proporciones entre comunas de tamaños muy distintos.</a:t>
-            </a:r>
-          </a:p>
-        </p:txBody>
-      </p:sp>
     </p:spTree>
   </p:cSld>
   <p:clrMapOvr>
@@ -5632,139 +5739,16 @@
                 <a:solidFill>
                   <a:srgbClr val="0F0F0F"/>
                 </a:solidFill>
-                <a:latin typeface="PT Serif"/>
-              </a:rPr>
-              <a:t>¿El ingreso explica el uso de transporte público?</a:t>
-            </a:r>
-          </a:p>
-        </p:txBody>
-      </p:sp>
-      <p:sp>
-        <p:nvSpPr>
-          <p:cNvPr id="4" name="TextBox 3"/>
-          <p:cNvSpPr txBox="1"/>
-          <p:nvPr/>
-        </p:nvSpPr>
-        <p:spPr>
-          <a:xfrm>
-            <a:off x="502920" y="1252728"/>
-            <a:ext cx="4023360" cy="3200400"/>
-          </a:xfrm>
-          <a:prstGeom prst="rect">
-            <a:avLst/>
-          </a:prstGeom>
-          <a:noFill/>
-        </p:spPr>
-        <p:txBody>
-          <a:bodyPr wrap="square">
-            <a:spAutoFit/>
-          </a:bodyPr>
-          <a:lstStyle/>
-          <a:p>
-            <a:r>
-              <a:rPr sz="1500" b="1">
-                <a:solidFill>
-                  <a:srgbClr val="E0A437"/>
-                </a:solidFill>
-                <a:latin typeface="PT Serif"/>
-              </a:rPr>
-              <a:t>▸ </a:t>
-            </a:r>
-            <a:r>
-              <a:rPr sz="1500" b="0">
-                <a:solidFill>
-                  <a:srgbClr val="3A4A5C"/>
-                </a:solidFill>
-                <a:latin typeface="PT Serif"/>
-              </a:rPr>
-              <a:t>Cada punto es una comuna: ingreso medio contra proporción de viajes en transporte público.</a:t>
-            </a:r>
-          </a:p>
-          <a:p>
-            <a:r>
-              <a:rPr sz="1300" b="0">
-                <a:solidFill>
-                  <a:srgbClr val="6B7785"/>
-                </a:solidFill>
-                <a:latin typeface="PT Serif"/>
-              </a:rPr>
-              <a:t>     ◦  </a:t>
-            </a:r>
-            <a:r>
-              <a:rPr sz="1300" b="0">
-                <a:solidFill>
-                  <a:srgbClr val="6B7785"/>
-                </a:solidFill>
-                <a:latin typeface="PT Serif"/>
-              </a:rPr>
-              <a:t>Periferia (Buin, Melipilla): poco transporte público porque la red no llega.</a:t>
-            </a:r>
-          </a:p>
-          <a:p>
-            <a:r>
-              <a:rPr sz="1300" b="0">
-                <a:solidFill>
-                  <a:srgbClr val="6B7785"/>
-                </a:solidFill>
-                <a:latin typeface="PT Serif"/>
-              </a:rPr>
-              <a:t>     ◦  </a:t>
-            </a:r>
-            <a:r>
-              <a:rPr sz="1300" b="0">
-                <a:solidFill>
-                  <a:srgbClr val="6B7785"/>
-                </a:solidFill>
-                <a:latin typeface="PT Serif"/>
-              </a:rPr>
-              <a:t>Ingresos altos (Vitacura, Lo Barnechea): conectadas, pero con poco uso.</a:t>
-            </a:r>
-          </a:p>
-          <a:p>
-            <a:r>
-              <a:rPr sz="1300" b="0">
-                <a:solidFill>
-                  <a:srgbClr val="6B7785"/>
-                </a:solidFill>
-                <a:latin typeface="PT Serif"/>
-              </a:rPr>
-              <a:t>     ◦  </a:t>
-            </a:r>
-            <a:r>
-              <a:rPr sz="1300" b="0">
-                <a:solidFill>
-                  <a:srgbClr val="6B7785"/>
-                </a:solidFill>
-                <a:latin typeface="PT Serif"/>
-              </a:rPr>
-              <a:t>La Pintana o Conchalí superan el 45%.</a:t>
-            </a:r>
-          </a:p>
-          <a:p>
-            <a:r>
-              <a:rPr sz="1500" b="1">
-                <a:solidFill>
-                  <a:srgbClr val="E0A437"/>
-                </a:solidFill>
-                <a:latin typeface="PT Serif"/>
-              </a:rPr>
-              <a:t>▸ </a:t>
-            </a:r>
-            <a:r>
-              <a:rPr sz="1500" b="1">
-                <a:solidFill>
-                  <a:srgbClr val="1D3557"/>
-                </a:solidFill>
-                <a:latin typeface="PT Serif"/>
-              </a:rPr>
-              <a:t>Un promedio comunal también esconde variación: ¿de quién habla ese punto?</a:t>
+                <a:latin typeface="Fira Sans"/>
+              </a:rPr>
+              <a:t>¿Se mueve igual toda la ciudad?</a:t>
             </a:r>
           </a:p>
         </p:txBody>
       </p:sp>
       <p:pic>
         <p:nvPicPr>
-          <p:cNvPr id="5" name="Picture 4" descr="09_ingreso_vs_tp.png"/>
+          <p:cNvPr id="4" name="Picture 3" descr="08_modo_por_comuna.png"/>
           <p:cNvPicPr>
             <a:picLocks noChangeAspect="1"/>
           </p:cNvPicPr>
@@ -5778,14 +5762,48 @@
         </p:blipFill>
         <p:spPr>
           <a:xfrm>
-            <a:off x="4892040" y="1371600"/>
-            <a:ext cx="3840480" cy="2551368"/>
+            <a:off x="1994250" y="1143000"/>
+            <a:ext cx="5155498" cy="3154679"/>
           </a:xfrm>
           <a:prstGeom prst="rect">
             <a:avLst/>
           </a:prstGeom>
         </p:spPr>
       </p:pic>
+      <p:sp>
+        <p:nvSpPr>
+          <p:cNvPr id="5" name="TextBox 4"/>
+          <p:cNvSpPr txBox="1"/>
+          <p:nvPr/>
+        </p:nvSpPr>
+        <p:spPr>
+          <a:xfrm>
+            <a:off x="704088" y="4434840"/>
+            <a:ext cx="7744968" cy="457200"/>
+          </a:xfrm>
+          <a:prstGeom prst="rect">
+            <a:avLst/>
+          </a:prstGeom>
+          <a:noFill/>
+        </p:spPr>
+        <p:txBody>
+          <a:bodyPr wrap="square">
+            <a:spAutoFit/>
+          </a:bodyPr>
+          <a:lstStyle/>
+          <a:p>
+            <a:r>
+              <a:rPr sz="1300" b="0">
+                <a:solidFill>
+                  <a:srgbClr val="6B7785"/>
+                </a:solidFill>
+                <a:latin typeface="Fira Sans"/>
+              </a:rPr>
+              <a:t>Normalizar por comuna permite comparar proporciones entre comunas de tamaños muy distintos.</a:t>
+            </a:r>
+          </a:p>
+        </p:txBody>
+      </p:sp>
     </p:spTree>
   </p:cSld>
   <p:clrMapOvr>
@@ -5875,16 +5893,139 @@
                 <a:solidFill>
                   <a:srgbClr val="0F0F0F"/>
                 </a:solidFill>
-                <a:latin typeface="PT Serif"/>
-              </a:rPr>
-              <a:t>¿Cambian las rutinas durante la semana?</a:t>
+                <a:latin typeface="Fira Sans"/>
+              </a:rPr>
+              <a:t>¿El ingreso explica el uso de transporte público?</a:t>
+            </a:r>
+          </a:p>
+        </p:txBody>
+      </p:sp>
+      <p:sp>
+        <p:nvSpPr>
+          <p:cNvPr id="4" name="TextBox 3"/>
+          <p:cNvSpPr txBox="1"/>
+          <p:nvPr/>
+        </p:nvSpPr>
+        <p:spPr>
+          <a:xfrm>
+            <a:off x="502920" y="1252728"/>
+            <a:ext cx="4023360" cy="3200400"/>
+          </a:xfrm>
+          <a:prstGeom prst="rect">
+            <a:avLst/>
+          </a:prstGeom>
+          <a:noFill/>
+        </p:spPr>
+        <p:txBody>
+          <a:bodyPr wrap="square">
+            <a:spAutoFit/>
+          </a:bodyPr>
+          <a:lstStyle/>
+          <a:p>
+            <a:r>
+              <a:rPr sz="1500" b="1">
+                <a:solidFill>
+                  <a:srgbClr val="E0A437"/>
+                </a:solidFill>
+                <a:latin typeface="Fira Sans"/>
+              </a:rPr>
+              <a:t>▸ </a:t>
+            </a:r>
+            <a:r>
+              <a:rPr sz="1500" b="0">
+                <a:solidFill>
+                  <a:srgbClr val="3A4A5C"/>
+                </a:solidFill>
+                <a:latin typeface="Fira Sans"/>
+              </a:rPr>
+              <a:t>Cada punto es una comuna: ingreso medio contra proporción de viajes en transporte público.</a:t>
+            </a:r>
+          </a:p>
+          <a:p>
+            <a:r>
+              <a:rPr sz="1300" b="0">
+                <a:solidFill>
+                  <a:srgbClr val="6B7785"/>
+                </a:solidFill>
+                <a:latin typeface="Fira Sans"/>
+              </a:rPr>
+              <a:t>     ◦  </a:t>
+            </a:r>
+            <a:r>
+              <a:rPr sz="1300" b="0">
+                <a:solidFill>
+                  <a:srgbClr val="6B7785"/>
+                </a:solidFill>
+                <a:latin typeface="Fira Sans"/>
+              </a:rPr>
+              <a:t>Periferia (Buin, Melipilla): poco transporte público; la red no llega.</a:t>
+            </a:r>
+          </a:p>
+          <a:p>
+            <a:r>
+              <a:rPr sz="1300" b="0">
+                <a:solidFill>
+                  <a:srgbClr val="6B7785"/>
+                </a:solidFill>
+                <a:latin typeface="Fira Sans"/>
+              </a:rPr>
+              <a:t>     ◦  </a:t>
+            </a:r>
+            <a:r>
+              <a:rPr sz="1300" b="0">
+                <a:solidFill>
+                  <a:srgbClr val="6B7785"/>
+                </a:solidFill>
+                <a:latin typeface="Fira Sans"/>
+              </a:rPr>
+              <a:t>Ingresos altos (Vitacura, Lo Barnechea): conectadas, con poco uso.</a:t>
+            </a:r>
+          </a:p>
+          <a:p>
+            <a:r>
+              <a:rPr sz="1300" b="0">
+                <a:solidFill>
+                  <a:srgbClr val="6B7785"/>
+                </a:solidFill>
+                <a:latin typeface="Fira Sans"/>
+              </a:rPr>
+              <a:t>     ◦  </a:t>
+            </a:r>
+            <a:r>
+              <a:rPr sz="1300" b="0">
+                <a:solidFill>
+                  <a:srgbClr val="6B7785"/>
+                </a:solidFill>
+                <a:latin typeface="Fira Sans"/>
+              </a:rPr>
+              <a:t>Correlación de Pearson: -0,17. La asociación lineal es débil.</a:t>
+            </a:r>
+          </a:p>
+          <a:p>
+            <a:r>
+              <a:rPr sz="1500" b="1">
+                <a:solidFill>
+                  <a:srgbClr val="E0A437"/>
+                </a:solidFill>
+                <a:latin typeface="Fira Sans"/>
+              </a:rPr>
+              <a:t>▸ </a:t>
+            </a:r>
+            <a:r>
+              <a:rPr sz="1500" b="1">
+                <a:solidFill>
+                  <a:srgbClr val="1D3557"/>
+                </a:solidFill>
+                <a:latin typeface="Fira Sans"/>
+              </a:rPr>
+              <a:t>El coeficiente no reemplaza al gráfico: la estructura está en los grupos.</a:t>
             </a:r>
           </a:p>
         </p:txBody>
       </p:sp>
       <p:pic>
         <p:nvPicPr>
-          <p:cNvPr id="4" name="Picture 3" descr="10_heatmap_rutinas.png"/>
+          <p:cNvPr id="5" name="Picture 4" descr="09_ingreso_vs_tp.png"/>
           <p:cNvPicPr>
             <a:picLocks noChangeAspect="1"/>
           </p:cNvPicPr>
@@ -5898,48 +6039,14 @@
         </p:blipFill>
         <p:spPr>
           <a:xfrm>
-            <a:off x="1631108" y="1143000"/>
-            <a:ext cx="5881783" cy="3154680"/>
+            <a:off x="4892040" y="1371600"/>
+            <a:ext cx="3840480" cy="2526979"/>
           </a:xfrm>
           <a:prstGeom prst="rect">
             <a:avLst/>
           </a:prstGeom>
         </p:spPr>
       </p:pic>
-      <p:sp>
-        <p:nvSpPr>
-          <p:cNvPr id="5" name="TextBox 4"/>
-          <p:cNvSpPr txBox="1"/>
-          <p:nvPr/>
-        </p:nvSpPr>
-        <p:spPr>
-          <a:xfrm>
-            <a:off x="704088" y="4434840"/>
-            <a:ext cx="7744968" cy="457200"/>
-          </a:xfrm>
-          <a:prstGeom prst="rect">
-            <a:avLst/>
-          </a:prstGeom>
-          <a:noFill/>
-        </p:spPr>
-        <p:txBody>
-          <a:bodyPr wrap="square">
-            <a:spAutoFit/>
-          </a:bodyPr>
-          <a:lstStyle/>
-          <a:p>
-            <a:r>
-              <a:rPr sz="1300" b="0">
-                <a:solidFill>
-                  <a:srgbClr val="6B7785"/>
-                </a:solidFill>
-                <a:latin typeface="PT Serif"/>
-              </a:rPr>
-              <a:t>El heatmap muestra 14 propósitos por 7 días en una sola figura: útil para tablas completas.</a:t>
-            </a:r>
-          </a:p>
-        </p:txBody>
-      </p:sp>
     </p:spTree>
   </p:cSld>
   <p:clrMapOvr>
@@ -6029,9 +6136,9 @@
                 <a:solidFill>
                   <a:srgbClr val="0F0F0F"/>
                 </a:solidFill>
-                <a:latin typeface="PT Serif"/>
-              </a:rPr>
-              <a:t>Síntesis: ¿de quién habla este número?</a:t>
+                <a:latin typeface="Fira Sans"/>
+              </a:rPr>
+              <a:t>Correlación y causalidad</a:t>
             </a:r>
           </a:p>
         </p:txBody>
@@ -6063,7 +6170,7 @@
                 <a:solidFill>
                   <a:srgbClr val="E0A437"/>
                 </a:solidFill>
-                <a:latin typeface="PT Serif"/>
+                <a:latin typeface="Fira Sans"/>
               </a:rPr>
               <a:t>▸ </a:t>
             </a:r>
@@ -6072,9 +6179,9 @@
                 <a:solidFill>
                   <a:srgbClr val="3A4A5C"/>
                 </a:solidFill>
-                <a:latin typeface="PT Serif"/>
-              </a:rPr>
-              <a:t>'El hogar promedio gana $688 mil': la mayoría gana menos; la mediana describe al hogar típico.</a:t>
+                <a:latin typeface="Fira Sans"/>
+              </a:rPr>
+              <a:t>Correlación: dos variables varían juntas.</a:t>
             </a:r>
           </a:p>
           <a:p>
@@ -6083,7 +6190,7 @@
                 <a:solidFill>
                   <a:srgbClr val="E0A437"/>
                 </a:solidFill>
-                <a:latin typeface="PT Serif"/>
+                <a:latin typeface="Fira Sans"/>
               </a:rPr>
               <a:t>▸ </a:t>
             </a:r>
@@ -6092,9 +6199,69 @@
                 <a:solidFill>
                   <a:srgbClr val="3A4A5C"/>
                 </a:solidFill>
-                <a:latin typeface="PT Serif"/>
-              </a:rPr>
-              <a:t>'El 53% de los encuestados...': habla de la muestra; los factores de expansión hablan de la ciudad.</a:t>
+                <a:latin typeface="Fira Sans"/>
+              </a:rPr>
+              <a:t>Causalidad: intervenir una cambiaría la otra. Es una afirmación más fuerte.</a:t>
+            </a:r>
+          </a:p>
+          <a:p>
+            <a:r>
+              <a:rPr sz="1400" b="0">
+                <a:solidFill>
+                  <a:srgbClr val="6B7785"/>
+                </a:solidFill>
+                <a:latin typeface="Fira Sans"/>
+              </a:rPr>
+              <a:t>     ◦  </a:t>
+            </a:r>
+            <a:r>
+              <a:rPr sz="1400" b="0">
+                <a:solidFill>
+                  <a:srgbClr val="6B7785"/>
+                </a:solidFill>
+                <a:latin typeface="Fira Sans"/>
+              </a:rPr>
+              <a:t>Los datos observacionales muestran lo primero, no bastan para lo segundo.</a:t>
+            </a:r>
+          </a:p>
+          <a:p>
+            <a:r>
+              <a:rPr sz="1400" b="0">
+                <a:solidFill>
+                  <a:srgbClr val="6B7785"/>
+                </a:solidFill>
+                <a:latin typeface="Fira Sans"/>
+              </a:rPr>
+              <a:t>     ◦  </a:t>
+            </a:r>
+            <a:r>
+              <a:rPr sz="1400" b="0">
+                <a:solidFill>
+                  <a:srgbClr val="6B7785"/>
+                </a:solidFill>
+                <a:latin typeface="Fira Sans"/>
+              </a:rPr>
+              <a:t>Variable de confusión: la cobertura de la red afecta el uso y no es independiente del ingreso.</a:t>
+            </a:r>
+          </a:p>
+          <a:p>
+            <a:r>
+              <a:rPr sz="1400" b="0">
+                <a:solidFill>
+                  <a:srgbClr val="6B7785"/>
+                </a:solidFill>
+                <a:latin typeface="Fira Sans"/>
+              </a:rPr>
+              <a:t>     ◦  </a:t>
+            </a:r>
+            <a:r>
+              <a:rPr sz="1400" b="0">
+                <a:solidFill>
+                  <a:srgbClr val="6B7785"/>
+                </a:solidFill>
+                <a:latin typeface="Fira Sans"/>
+              </a:rPr>
+              <a:t>La inferencia causal tiene métodos propios; este curso no los cubre.</a:t>
             </a:r>
           </a:p>
           <a:p>
@@ -6103,58 +6270,18 @@
                 <a:solidFill>
                   <a:srgbClr val="E0A437"/>
                 </a:solidFill>
-                <a:latin typeface="PT Serif"/>
+                <a:latin typeface="Fira Sans"/>
               </a:rPr>
               <a:t>▸ </a:t>
             </a:r>
             <a:r>
-              <a:rPr sz="1800" b="0">
-                <a:solidFill>
-                  <a:srgbClr val="3A4A5C"/>
-                </a:solidFill>
-                <a:latin typeface="PT Serif"/>
-              </a:rPr>
-              <a:t>'1,9 viajes en promedio': solo si contamos a quienes no viajaron; un inner los borra sin aviso.</a:t>
-            </a:r>
-          </a:p>
-          <a:p>
-            <a:r>
               <a:rPr sz="1800" b="1">
                 <a:solidFill>
-                  <a:srgbClr val="E0A437"/>
-                </a:solidFill>
-                <a:latin typeface="PT Serif"/>
-              </a:rPr>
-              <a:t>▸ </a:t>
-            </a:r>
-            <a:r>
-              <a:rPr sz="1800" b="0">
-                <a:solidFill>
-                  <a:srgbClr val="3A4A5C"/>
-                </a:solidFill>
-                <a:latin typeface="PT Serif"/>
-              </a:rPr>
-              <a:t>'En Vitacura casi no se usa transporte público': un promedio comunal esconde la variación interna.</a:t>
-            </a:r>
-          </a:p>
-          <a:p>
-            <a:r>
-              <a:rPr sz="1800" b="1">
-                <a:solidFill>
-                  <a:srgbClr val="E0A437"/>
-                </a:solidFill>
-                <a:latin typeface="PT Serif"/>
-              </a:rPr>
-              <a:t>▸ </a:t>
-            </a:r>
-            <a:r>
-              <a:rPr sz="1800" b="1">
-                <a:solidFill>
                   <a:srgbClr val="1D3557"/>
                 </a:solidFill>
-                <a:latin typeface="PT Serif"/>
-              </a:rPr>
-              <a:t>La técnica era repaso; el hábito de examinar cada cifra es lo nuevo.</a:t>
+                <a:latin typeface="Fira Sans"/>
+              </a:rPr>
+              <a:t>Una asociación se reporta como asociación, sin verbos causales que los datos no respaldan.</a:t>
             </a:r>
           </a:p>
         </p:txBody>
@@ -6248,23 +6375,47 @@
                 <a:solidFill>
                   <a:srgbClr val="0F0F0F"/>
                 </a:solidFill>
-                <a:latin typeface="PT Serif"/>
-              </a:rPr>
-              <a:t>Segundo bloque: parte la Tarea 1</a:t>
-            </a:r>
-          </a:p>
-        </p:txBody>
-      </p:sp>
-      <p:sp>
-        <p:nvSpPr>
-          <p:cNvPr id="4" name="TextBox 3"/>
+                <a:latin typeface="Fira Sans"/>
+              </a:rPr>
+              <a:t>¿Cambian las rutinas durante la semana?</a:t>
+            </a:r>
+          </a:p>
+        </p:txBody>
+      </p:sp>
+      <p:pic>
+        <p:nvPicPr>
+          <p:cNvPr id="4" name="Picture 3" descr="10_heatmap_rutinas.png"/>
+          <p:cNvPicPr>
+            <a:picLocks noChangeAspect="1"/>
+          </p:cNvPicPr>
+          <p:nvPr/>
+        </p:nvPicPr>
+        <p:blipFill>
+          <a:blip r:embed="rId2"/>
+          <a:stretch>
+            <a:fillRect/>
+          </a:stretch>
+        </p:blipFill>
+        <p:spPr>
+          <a:xfrm>
+            <a:off x="1563778" y="1143000"/>
+            <a:ext cx="6016443" cy="3154680"/>
+          </a:xfrm>
+          <a:prstGeom prst="rect">
+            <a:avLst/>
+          </a:prstGeom>
+        </p:spPr>
+      </p:pic>
+      <p:sp>
+        <p:nvSpPr>
+          <p:cNvPr id="5" name="TextBox 4"/>
           <p:cNvSpPr txBox="1"/>
           <p:nvPr/>
         </p:nvSpPr>
         <p:spPr>
           <a:xfrm>
-            <a:off x="704088" y="1353312"/>
-            <a:ext cx="7744968" cy="3300984"/>
+            <a:off x="704088" y="4434840"/>
+            <a:ext cx="7744968" cy="457200"/>
           </a:xfrm>
           <a:prstGeom prst="rect">
             <a:avLst/>
@@ -6278,11 +6429,141 @@
           <a:lstStyle/>
           <a:p>
             <a:r>
+              <a:rPr sz="1300" b="0">
+                <a:solidFill>
+                  <a:srgbClr val="6B7785"/>
+                </a:solidFill>
+                <a:latin typeface="Fira Sans"/>
+              </a:rPr>
+              <a:t>El heatmap muestra 14 propósitos por 7 días en una sola figura: útil para tablas completas.</a:t>
+            </a:r>
+          </a:p>
+        </p:txBody>
+      </p:sp>
+    </p:spTree>
+  </p:cSld>
+  <p:clrMapOvr>
+    <a:masterClrMapping/>
+  </p:clrMapOvr>
+</p:sld>
+</file>
+
+<file path=ppt/slides/slide25.xml><?xml version="1.0" encoding="utf-8"?>
+<p:sld xmlns:a="http://schemas.openxmlformats.org/drawingml/2006/main" xmlns:p="http://schemas.openxmlformats.org/presentationml/2006/main" xmlns:r="http://schemas.openxmlformats.org/officeDocument/2006/relationships">
+  <p:cSld>
+    <p:spTree>
+      <p:nvGrpSpPr>
+        <p:cNvPr id="1" name=""/>
+        <p:cNvGrpSpPr/>
+        <p:nvPr/>
+      </p:nvGrpSpPr>
+      <p:grpSpPr/>
+      <p:sp>
+        <p:nvSpPr>
+          <p:cNvPr id="2" name="Rectangle 1"/>
+          <p:cNvSpPr/>
+          <p:nvPr/>
+        </p:nvSpPr>
+        <p:spPr>
+          <a:xfrm>
+            <a:off x="0" y="0"/>
+            <a:ext cx="9144000" cy="5138928"/>
+          </a:xfrm>
+          <a:prstGeom prst="rect">
+            <a:avLst/>
+          </a:prstGeom>
+          <a:solidFill>
+            <a:srgbClr val="FAFBFC"/>
+          </a:solidFill>
+          <a:ln>
+            <a:noFill/>
+          </a:ln>
+          <a:effectLst/>
+        </p:spPr>
+        <p:style>
+          <a:lnRef idx="1">
+            <a:schemeClr val="accent1"/>
+          </a:lnRef>
+          <a:fillRef idx="3">
+            <a:schemeClr val="accent1"/>
+          </a:fillRef>
+          <a:effectRef idx="2">
+            <a:schemeClr val="accent1"/>
+          </a:effectRef>
+          <a:fontRef idx="minor">
+            <a:schemeClr val="lt1"/>
+          </a:fontRef>
+        </p:style>
+        <p:txBody>
+          <a:bodyPr rtlCol="0" anchor="ctr"/>
+          <a:lstStyle/>
+          <a:p>
+            <a:pPr algn="ctr"/>
+          </a:p>
+        </p:txBody>
+      </p:sp>
+      <p:sp>
+        <p:nvSpPr>
+          <p:cNvPr id="3" name="TextBox 2"/>
+          <p:cNvSpPr txBox="1"/>
+          <p:nvPr/>
+        </p:nvSpPr>
+        <p:spPr>
+          <a:xfrm>
+            <a:off x="402336" y="301752"/>
+            <a:ext cx="8348472" cy="795528"/>
+          </a:xfrm>
+          <a:prstGeom prst="rect">
+            <a:avLst/>
+          </a:prstGeom>
+          <a:noFill/>
+        </p:spPr>
+        <p:txBody>
+          <a:bodyPr wrap="square">
+            <a:spAutoFit/>
+          </a:bodyPr>
+          <a:lstStyle/>
+          <a:p>
+            <a:r>
+              <a:rPr sz="2800" b="1">
+                <a:solidFill>
+                  <a:srgbClr val="0F0F0F"/>
+                </a:solidFill>
+                <a:latin typeface="Fira Sans"/>
+              </a:rPr>
+              <a:t>Síntesis: ¿de quién habla este número?</a:t>
+            </a:r>
+          </a:p>
+        </p:txBody>
+      </p:sp>
+      <p:sp>
+        <p:nvSpPr>
+          <p:cNvPr id="4" name="TextBox 3"/>
+          <p:cNvSpPr txBox="1"/>
+          <p:nvPr/>
+        </p:nvSpPr>
+        <p:spPr>
+          <a:xfrm>
+            <a:off x="704088" y="1353312"/>
+            <a:ext cx="7744968" cy="3300984"/>
+          </a:xfrm>
+          <a:prstGeom prst="rect">
+            <a:avLst/>
+          </a:prstGeom>
+          <a:noFill/>
+        </p:spPr>
+        <p:txBody>
+          <a:bodyPr wrap="square">
+            <a:spAutoFit/>
+          </a:bodyPr>
+          <a:lstStyle/>
+          <a:p>
+            <a:r>
               <a:rPr sz="1800" b="1">
                 <a:solidFill>
                   <a:srgbClr val="E0A437"/>
                 </a:solidFill>
-                <a:latin typeface="PT Serif"/>
+                <a:latin typeface="Fira Sans"/>
               </a:rPr>
               <a:t>▸ </a:t>
             </a:r>
@@ -6291,7 +6572,226 @@
                 <a:solidFill>
                   <a:srgbClr val="3A4A5C"/>
                 </a:solidFill>
-                <a:latin typeface="PT Serif"/>
+                <a:latin typeface="Fira Sans"/>
+              </a:rPr>
+              <a:t>'El hogar promedio gana $688 mil': la mayoría gana menos; la mediana describe al hogar típico.</a:t>
+            </a:r>
+          </a:p>
+          <a:p>
+            <a:r>
+              <a:rPr sz="1800" b="1">
+                <a:solidFill>
+                  <a:srgbClr val="E0A437"/>
+                </a:solidFill>
+                <a:latin typeface="Fira Sans"/>
+              </a:rPr>
+              <a:t>▸ </a:t>
+            </a:r>
+            <a:r>
+              <a:rPr sz="1800" b="0">
+                <a:solidFill>
+                  <a:srgbClr val="3A4A5C"/>
+                </a:solidFill>
+                <a:latin typeface="Fira Sans"/>
+              </a:rPr>
+              <a:t>'El 53% de los encuestados...': habla de la muestra; los factores de expansión hablan de la ciudad.</a:t>
+            </a:r>
+          </a:p>
+          <a:p>
+            <a:r>
+              <a:rPr sz="1800" b="1">
+                <a:solidFill>
+                  <a:srgbClr val="E0A437"/>
+                </a:solidFill>
+                <a:latin typeface="Fira Sans"/>
+              </a:rPr>
+              <a:t>▸ </a:t>
+            </a:r>
+            <a:r>
+              <a:rPr sz="1800" b="0">
+                <a:solidFill>
+                  <a:srgbClr val="3A4A5C"/>
+                </a:solidFill>
+                <a:latin typeface="Fira Sans"/>
+              </a:rPr>
+              <a:t>'1,9 viajes en promedio': solo si contamos a quienes no viajaron; un inner los borra sin aviso.</a:t>
+            </a:r>
+          </a:p>
+          <a:p>
+            <a:r>
+              <a:rPr sz="1800" b="1">
+                <a:solidFill>
+                  <a:srgbClr val="E0A437"/>
+                </a:solidFill>
+                <a:latin typeface="Fira Sans"/>
+              </a:rPr>
+              <a:t>▸ </a:t>
+            </a:r>
+            <a:r>
+              <a:rPr sz="1800" b="0">
+                <a:solidFill>
+                  <a:srgbClr val="3A4A5C"/>
+                </a:solidFill>
+                <a:latin typeface="Fira Sans"/>
+              </a:rPr>
+              <a:t>'En Vitacura casi no se usa transporte público': un promedio comunal esconde la variación interna.</a:t>
+            </a:r>
+          </a:p>
+          <a:p>
+            <a:r>
+              <a:rPr sz="1800" b="1">
+                <a:solidFill>
+                  <a:srgbClr val="E0A437"/>
+                </a:solidFill>
+                <a:latin typeface="Fira Sans"/>
+              </a:rPr>
+              <a:t>▸ </a:t>
+            </a:r>
+            <a:r>
+              <a:rPr sz="1800" b="1">
+                <a:solidFill>
+                  <a:srgbClr val="1D3557"/>
+                </a:solidFill>
+                <a:latin typeface="Fira Sans"/>
+              </a:rPr>
+              <a:t>Las operaciones eran repaso; lo nuevo es examinar qué representa cada cifra.</a:t>
+            </a:r>
+          </a:p>
+        </p:txBody>
+      </p:sp>
+    </p:spTree>
+  </p:cSld>
+  <p:clrMapOvr>
+    <a:masterClrMapping/>
+  </p:clrMapOvr>
+</p:sld>
+</file>
+
+<file path=ppt/slides/slide26.xml><?xml version="1.0" encoding="utf-8"?>
+<p:sld xmlns:a="http://schemas.openxmlformats.org/drawingml/2006/main" xmlns:p="http://schemas.openxmlformats.org/presentationml/2006/main" xmlns:r="http://schemas.openxmlformats.org/officeDocument/2006/relationships">
+  <p:cSld>
+    <p:spTree>
+      <p:nvGrpSpPr>
+        <p:cNvPr id="1" name=""/>
+        <p:cNvGrpSpPr/>
+        <p:nvPr/>
+      </p:nvGrpSpPr>
+      <p:grpSpPr/>
+      <p:sp>
+        <p:nvSpPr>
+          <p:cNvPr id="2" name="Rectangle 1"/>
+          <p:cNvSpPr/>
+          <p:nvPr/>
+        </p:nvSpPr>
+        <p:spPr>
+          <a:xfrm>
+            <a:off x="0" y="0"/>
+            <a:ext cx="9144000" cy="5138928"/>
+          </a:xfrm>
+          <a:prstGeom prst="rect">
+            <a:avLst/>
+          </a:prstGeom>
+          <a:solidFill>
+            <a:srgbClr val="FAFBFC"/>
+          </a:solidFill>
+          <a:ln>
+            <a:noFill/>
+          </a:ln>
+          <a:effectLst/>
+        </p:spPr>
+        <p:style>
+          <a:lnRef idx="1">
+            <a:schemeClr val="accent1"/>
+          </a:lnRef>
+          <a:fillRef idx="3">
+            <a:schemeClr val="accent1"/>
+          </a:fillRef>
+          <a:effectRef idx="2">
+            <a:schemeClr val="accent1"/>
+          </a:effectRef>
+          <a:fontRef idx="minor">
+            <a:schemeClr val="lt1"/>
+          </a:fontRef>
+        </p:style>
+        <p:txBody>
+          <a:bodyPr rtlCol="0" anchor="ctr"/>
+          <a:lstStyle/>
+          <a:p>
+            <a:pPr algn="ctr"/>
+          </a:p>
+        </p:txBody>
+      </p:sp>
+      <p:sp>
+        <p:nvSpPr>
+          <p:cNvPr id="3" name="TextBox 2"/>
+          <p:cNvSpPr txBox="1"/>
+          <p:nvPr/>
+        </p:nvSpPr>
+        <p:spPr>
+          <a:xfrm>
+            <a:off x="402336" y="301752"/>
+            <a:ext cx="8348472" cy="795528"/>
+          </a:xfrm>
+          <a:prstGeom prst="rect">
+            <a:avLst/>
+          </a:prstGeom>
+          <a:noFill/>
+        </p:spPr>
+        <p:txBody>
+          <a:bodyPr wrap="square">
+            <a:spAutoFit/>
+          </a:bodyPr>
+          <a:lstStyle/>
+          <a:p>
+            <a:r>
+              <a:rPr sz="2800" b="1">
+                <a:solidFill>
+                  <a:srgbClr val="0F0F0F"/>
+                </a:solidFill>
+                <a:latin typeface="Fira Sans"/>
+              </a:rPr>
+              <a:t>Segundo bloque: parte la Tarea 1</a:t>
+            </a:r>
+          </a:p>
+        </p:txBody>
+      </p:sp>
+      <p:sp>
+        <p:nvSpPr>
+          <p:cNvPr id="4" name="TextBox 3"/>
+          <p:cNvSpPr txBox="1"/>
+          <p:nvPr/>
+        </p:nvSpPr>
+        <p:spPr>
+          <a:xfrm>
+            <a:off x="704088" y="1353312"/>
+            <a:ext cx="7744968" cy="3300984"/>
+          </a:xfrm>
+          <a:prstGeom prst="rect">
+            <a:avLst/>
+          </a:prstGeom>
+          <a:noFill/>
+        </p:spPr>
+        <p:txBody>
+          <a:bodyPr wrap="square">
+            <a:spAutoFit/>
+          </a:bodyPr>
+          <a:lstStyle/>
+          <a:p>
+            <a:r>
+              <a:rPr sz="1800" b="1">
+                <a:solidFill>
+                  <a:srgbClr val="E0A437"/>
+                </a:solidFill>
+                <a:latin typeface="Fira Sans"/>
+              </a:rPr>
+              <a:t>▸ </a:t>
+            </a:r>
+            <a:r>
+              <a:rPr sz="1800" b="0">
+                <a:solidFill>
+                  <a:srgbClr val="3A4A5C"/>
+                </a:solidFill>
+                <a:latin typeface="Fira Sans"/>
               </a:rPr>
               <a:t>El retrato de tu comuna: cada pareja adopta una comuna del Gran Santiago.</a:t>
             </a:r>
@@ -6302,7 +6802,7 @@
                 <a:solidFill>
                   <a:srgbClr val="6B7785"/>
                 </a:solidFill>
-                <a:latin typeface="PT Serif"/>
+                <a:latin typeface="Fira Sans"/>
               </a:rPr>
               <a:t>     ◦  </a:t>
             </a:r>
@@ -6311,7 +6811,7 @@
                 <a:solidFill>
                   <a:srgbClr val="6B7785"/>
                 </a:solidFill>
-                <a:latin typeface="PT Serif"/>
+                <a:latin typeface="Fira Sans"/>
               </a:rPr>
               <a:t>Hoy: elegir la comuna y construir su retrato numérico.</a:t>
             </a:r>
@@ -6322,7 +6822,7 @@
                 <a:solidFill>
                   <a:srgbClr val="6B7785"/>
                 </a:solidFill>
-                <a:latin typeface="PT Serif"/>
+                <a:latin typeface="Fira Sans"/>
               </a:rPr>
               <a:t>     ◦  </a:t>
             </a:r>
@@ -6331,7 +6831,7 @@
                 <a:solidFill>
                   <a:srgbClr val="6B7785"/>
                 </a:solidFill>
-                <a:latin typeface="PT Serif"/>
+                <a:latin typeface="Fira Sans"/>
               </a:rPr>
               <a:t>Próxima clase: el retrato gráfico, con métodos de visualización.</a:t>
             </a:r>
@@ -6342,7 +6842,7 @@
                 <a:solidFill>
                   <a:srgbClr val="6B7785"/>
                 </a:solidFill>
-                <a:latin typeface="PT Serif"/>
+                <a:latin typeface="Fira Sans"/>
               </a:rPr>
               <a:t>     ◦  </a:t>
             </a:r>
@@ -6351,7 +6851,7 @@
                 <a:solidFill>
                   <a:srgbClr val="6B7785"/>
                 </a:solidFill>
-                <a:latin typeface="PT Serif"/>
+                <a:latin typeface="Fira Sans"/>
               </a:rPr>
               <a:t>Entrega del retrato completo: jueves 10 de septiembre, por Aula.</a:t>
             </a:r>
@@ -6362,7 +6862,7 @@
                 <a:solidFill>
                   <a:srgbClr val="E0A437"/>
                 </a:solidFill>
-                <a:latin typeface="PT Serif"/>
+                <a:latin typeface="Fira Sans"/>
               </a:rPr>
               <a:t>▸ </a:t>
             </a:r>
@@ -6371,7 +6871,7 @@
                 <a:solidFill>
                   <a:srgbClr val="3A4A5C"/>
                 </a:solidFill>
-                <a:latin typeface="PT Serif"/>
+                <a:latin typeface="Fira Sans"/>
               </a:rPr>
               <a:t>El enunciado está en evaluaciones/tareas/ y la guía de hoy en actividades/.</a:t>
             </a:r>
@@ -6382,7 +6882,7 @@
                 <a:solidFill>
                   <a:srgbClr val="E0A437"/>
                 </a:solidFill>
-                <a:latin typeface="PT Serif"/>
+                <a:latin typeface="Fira Sans"/>
               </a:rPr>
               <a:t>▸ </a:t>
             </a:r>
@@ -6391,7 +6891,7 @@
                 <a:solidFill>
                   <a:srgbClr val="1D3557"/>
                 </a:solidFill>
-                <a:latin typeface="PT Serif"/>
+                <a:latin typeface="Fira Sans"/>
               </a:rPr>
               <a:t>Lo que hagan en este bloque ya es parte de la tarea.</a:t>
             </a:r>
@@ -6487,7 +6987,7 @@
                 <a:solidFill>
                   <a:srgbClr val="FFFFFF"/>
                 </a:solidFill>
-                <a:latin typeface="PT Serif"/>
+                <a:latin typeface="Fira Sans"/>
               </a:rPr>
               <a:t>¿De quién habla este número?</a:t>
             </a:r>
@@ -6498,7 +6998,7 @@
                 <a:solidFill>
                   <a:srgbClr val="E0A437"/>
                 </a:solidFill>
-                <a:latin typeface="PT Serif"/>
+                <a:latin typeface="Fira Sans"/>
               </a:rPr>
               <a:t>El concepto de esta clase</a:t>
             </a:r>
@@ -6594,9 +7094,9 @@
                 <a:solidFill>
                   <a:srgbClr val="0F0F0F"/>
                 </a:solidFill>
-                <a:latin typeface="PT Serif"/>
-              </a:rPr>
-              <a:t>La pregunta que ordena la clase</a:t>
+                <a:latin typeface="Fira Sans"/>
+              </a:rPr>
+              <a:t>Qué preguntarle a una cifra</a:t>
             </a:r>
           </a:p>
         </p:txBody>
@@ -6628,7 +7128,7 @@
                 <a:solidFill>
                   <a:srgbClr val="E0A437"/>
                 </a:solidFill>
-                <a:latin typeface="PT Serif"/>
+                <a:latin typeface="Fira Sans"/>
               </a:rPr>
               <a:t>▸ </a:t>
             </a:r>
@@ -6637,9 +7137,9 @@
                 <a:solidFill>
                   <a:srgbClr val="3A4A5C"/>
                 </a:solidFill>
-                <a:latin typeface="PT Serif"/>
-              </a:rPr>
-              <a:t>Pandas ya lo conocen: hoy es la herramienta, no el aprendizaje.</a:t>
+                <a:latin typeface="Fira Sans"/>
+              </a:rPr>
+              <a:t>Pandas ya lo conocen; en esta clase es la herramienta de trabajo.</a:t>
             </a:r>
           </a:p>
           <a:p>
@@ -6648,7 +7148,7 @@
                 <a:solidFill>
                   <a:srgbClr val="E0A437"/>
                 </a:solidFill>
-                <a:latin typeface="PT Serif"/>
+                <a:latin typeface="Fira Sans"/>
               </a:rPr>
               <a:t>▸ </a:t>
             </a:r>
@@ -6657,9 +7157,9 @@
                 <a:solidFill>
                   <a:srgbClr val="3A4A5C"/>
                 </a:solidFill>
-                <a:latin typeface="PT Serif"/>
-              </a:rPr>
-              <a:t>Lo nuevo es un hábito: examinar cada cifra antes de usarla.</a:t>
+                <a:latin typeface="Fira Sans"/>
+              </a:rPr>
+              <a:t>El objetivo es examinar qué representa una cifra antes de usarla.</a:t>
             </a:r>
           </a:p>
           <a:p>
@@ -6668,7 +7168,7 @@
                 <a:solidFill>
                   <a:srgbClr val="6B7785"/>
                 </a:solidFill>
-                <a:latin typeface="PT Serif"/>
+                <a:latin typeface="Fira Sans"/>
               </a:rPr>
               <a:t>     ◦  </a:t>
             </a:r>
@@ -6677,7 +7177,7 @@
                 <a:solidFill>
                   <a:srgbClr val="6B7785"/>
                 </a:solidFill>
-                <a:latin typeface="PT Serif"/>
+                <a:latin typeface="Fira Sans"/>
               </a:rPr>
               <a:t>Un promedio puede describir una situación en la que pocos están.</a:t>
             </a:r>
@@ -6688,7 +7188,7 @@
                 <a:solidFill>
                   <a:srgbClr val="6B7785"/>
                 </a:solidFill>
-                <a:latin typeface="PT Serif"/>
+                <a:latin typeface="Fira Sans"/>
               </a:rPr>
               <a:t>     ◦  </a:t>
             </a:r>
@@ -6697,7 +7197,7 @@
                 <a:solidFill>
                   <a:srgbClr val="6B7785"/>
                 </a:solidFill>
-                <a:latin typeface="PT Serif"/>
+                <a:latin typeface="Fira Sans"/>
               </a:rPr>
               <a:t>Contar filas de una encuesta habla de la muestra, no de la ciudad.</a:t>
             </a:r>
@@ -6708,7 +7208,7 @@
                 <a:solidFill>
                   <a:srgbClr val="6B7785"/>
                 </a:solidFill>
-                <a:latin typeface="PT Serif"/>
+                <a:latin typeface="Fira Sans"/>
               </a:rPr>
               <a:t>     ◦  </a:t>
             </a:r>
@@ -6717,7 +7217,7 @@
                 <a:solidFill>
                   <a:srgbClr val="6B7785"/>
                 </a:solidFill>
-                <a:latin typeface="PT Serif"/>
+                <a:latin typeface="Fira Sans"/>
               </a:rPr>
               <a:t>Hay personas de las que la tabla no dice nada; esa ausencia informa.</a:t>
             </a:r>
@@ -6728,7 +7228,7 @@
                 <a:solidFill>
                   <a:srgbClr val="E0A437"/>
                 </a:solidFill>
-                <a:latin typeface="PT Serif"/>
+                <a:latin typeface="Fira Sans"/>
               </a:rPr>
               <a:t>▸ </a:t>
             </a:r>
@@ -6737,9 +7237,9 @@
                 <a:solidFill>
                   <a:srgbClr val="1D3557"/>
                 </a:solidFill>
-                <a:latin typeface="PT Serif"/>
-              </a:rPr>
-              <a:t>Al cierre volveremos a esta pregunta con las respuestas del día.</a:t>
+                <a:latin typeface="Fira Sans"/>
+              </a:rPr>
+              <a:t>Al cierre se retoma esta pregunta con los resultados de la clase.</a:t>
             </a:r>
           </a:p>
         </p:txBody>
@@ -6833,7 +7333,7 @@
                 <a:solidFill>
                   <a:srgbClr val="FFFFFF"/>
                 </a:solidFill>
-                <a:latin typeface="PT Serif"/>
+                <a:latin typeface="Fira Sans"/>
               </a:rPr>
               <a:t>Los datos de hoy</a:t>
             </a:r>
@@ -6844,7 +7344,7 @@
                 <a:solidFill>
                   <a:srgbClr val="E0A437"/>
                 </a:solidFill>
-                <a:latin typeface="PT Serif"/>
+                <a:latin typeface="Fira Sans"/>
               </a:rPr>
               <a:t>Encuesta Origen Destino de Santiago 2012</a:t>
             </a:r>
@@ -6940,7 +7440,7 @@
                 <a:solidFill>
                   <a:srgbClr val="0F0F0F"/>
                 </a:solidFill>
-                <a:latin typeface="PT Serif"/>
+                <a:latin typeface="Fira Sans"/>
               </a:rPr>
               <a:t>La EOD 2012</a:t>
             </a:r>
@@ -6974,7 +7474,7 @@
                 <a:solidFill>
                   <a:srgbClr val="E0A437"/>
                 </a:solidFill>
-                <a:latin typeface="PT Serif"/>
+                <a:latin typeface="Fira Sans"/>
               </a:rPr>
               <a:t>▸ </a:t>
             </a:r>
@@ -6983,7 +7483,7 @@
                 <a:solidFill>
                   <a:srgbClr val="3A4A5C"/>
                 </a:solidFill>
-                <a:latin typeface="PT Serif"/>
+                <a:latin typeface="Fira Sans"/>
               </a:rPr>
               <a:t>Encuesta de movilidad del Gran Santiago (SECTRA y U. Alberto Hurtado).</a:t>
             </a:r>
@@ -6994,7 +7494,7 @@
                 <a:solidFill>
                   <a:srgbClr val="E0A437"/>
                 </a:solidFill>
-                <a:latin typeface="PT Serif"/>
+                <a:latin typeface="Fira Sans"/>
               </a:rPr>
               <a:t>▸ </a:t>
             </a:r>
@@ -7003,7 +7503,7 @@
                 <a:solidFill>
                   <a:srgbClr val="3A4A5C"/>
                 </a:solidFill>
-                <a:latin typeface="PT Serif"/>
+                <a:latin typeface="Fira Sans"/>
               </a:rPr>
               <a:t>Registra todos los viajes de un día de los hogares encuestados.</a:t>
             </a:r>
@@ -7014,7 +7514,7 @@
                 <a:solidFill>
                   <a:srgbClr val="6B7785"/>
                 </a:solidFill>
-                <a:latin typeface="PT Serif"/>
+                <a:latin typeface="Fira Sans"/>
               </a:rPr>
               <a:t>     ◦  </a:t>
             </a:r>
@@ -7023,7 +7523,7 @@
                 <a:solidFill>
                   <a:srgbClr val="6B7785"/>
                 </a:solidFill>
-                <a:latin typeface="PT Serif"/>
+                <a:latin typeface="Fira Sans"/>
               </a:rPr>
               <a:t>18.264 hogares, 60.054 personas, 113.591 viajes.</a:t>
             </a:r>
@@ -7034,7 +7534,7 @@
                 <a:solidFill>
                   <a:srgbClr val="6B7785"/>
                 </a:solidFill>
-                <a:latin typeface="PT Serif"/>
+                <a:latin typeface="Fira Sans"/>
               </a:rPr>
               <a:t>     ◦  </a:t>
             </a:r>
@@ -7043,7 +7543,7 @@
                 <a:solidFill>
                   <a:srgbClr val="6B7785"/>
                 </a:solidFill>
-                <a:latin typeface="PT Serif"/>
+                <a:latin typeface="Fira Sans"/>
               </a:rPr>
               <a:t>Se usa en la planificación de transporte de la ciudad.</a:t>
             </a:r>
@@ -7054,7 +7554,7 @@
                 <a:solidFill>
                   <a:srgbClr val="E0A437"/>
                 </a:solidFill>
-                <a:latin typeface="PT Serif"/>
+                <a:latin typeface="Fira Sans"/>
               </a:rPr>
               <a:t>▸ </a:t>
             </a:r>
@@ -7063,7 +7563,7 @@
                 <a:solidFill>
                   <a:srgbClr val="1D3557"/>
                 </a:solidFill>
-                <a:latin typeface="PT Serif"/>
+                <a:latin typeface="Fira Sans"/>
               </a:rPr>
               <a:t>El mismo diseño relacional de la Casen, el Censo o la ENUSC.</a:t>
             </a:r>
@@ -7159,7 +7659,7 @@
                 <a:solidFill>
                   <a:srgbClr val="0F0F0F"/>
                 </a:solidFill>
-                <a:latin typeface="PT Serif"/>
+                <a:latin typeface="Fira Sans"/>
               </a:rPr>
               <a:t>Una encuesta, varias tablas</a:t>
             </a:r>
@@ -7182,8 +7682,8 @@
         </p:blipFill>
         <p:spPr>
           <a:xfrm>
-            <a:off x="1555117" y="1143000"/>
-            <a:ext cx="6033765" cy="3154680"/>
+            <a:off x="1553651" y="1143000"/>
+            <a:ext cx="6036697" cy="3154680"/>
           </a:xfrm>
           <a:prstGeom prst="rect">
             <a:avLst/>
@@ -7217,7 +7717,7 @@
                 <a:solidFill>
                   <a:srgbClr val="6B7785"/>
                 </a:solidFill>
-                <a:latin typeface="PT Serif"/>
+                <a:latin typeface="Fira Sans"/>
               </a:rPr>
               <a:t>Los códigos no significan nada sin sus tablas de parámetros: unirlas es parte del análisis.</a:t>
             </a:r>
@@ -7313,7 +7813,7 @@
                 <a:solidFill>
                   <a:srgbClr val="FFFFFF"/>
                 </a:solidFill>
-                <a:latin typeface="PT Serif"/>
+                <a:latin typeface="Fira Sans"/>
               </a:rPr>
               <a:t>Repaso de Pandas</a:t>
             </a:r>
@@ -7324,7 +7824,7 @@
                 <a:solidFill>
                   <a:srgbClr val="E0A437"/>
                 </a:solidFill>
-                <a:latin typeface="PT Serif"/>
+                <a:latin typeface="Fira Sans"/>
               </a:rPr>
               <a:t>Dos casos concretos</a:t>
             </a:r>
@@ -7420,7 +7920,7 @@
                 <a:solidFill>
                   <a:srgbClr val="0F0F0F"/>
                 </a:solidFill>
-                <a:latin typeface="PT Serif"/>
+                <a:latin typeface="Fira Sans"/>
               </a:rPr>
               <a:t>Caso 1: códigos que no significan nada solos</a:t>
             </a:r>
@@ -7581,7 +8081,7 @@
                 <a:solidFill>
                   <a:srgbClr val="E0A437"/>
                 </a:solidFill>
-                <a:latin typeface="PT Serif"/>
+                <a:latin typeface="Fira Sans"/>
               </a:rPr>
               <a:t>▸ </a:t>
             </a:r>
@@ -7590,7 +8090,7 @@
                 <a:solidFill>
                   <a:srgbClr val="3A4A5C"/>
                 </a:solidFill>
-                <a:latin typeface="PT Serif"/>
+                <a:latin typeface="Fira Sans"/>
               </a:rPr>
               <a:t>El detalle completo, con las cuatro variantes de how, está en el notebook.</a:t>
             </a:r>

--- a/presentaciones/clase02_pandas_eda.pptx
+++ b/presentaciones/clase02_pandas_eda.pptx
@@ -31,6 +31,8 @@
     <p:sldId id="279" r:id="rId30"/>
     <p:sldId id="280" r:id="rId31"/>
     <p:sldId id="281" r:id="rId32"/>
+    <p:sldId id="282" r:id="rId33"/>
+    <p:sldId id="283" r:id="rId34"/>
   </p:sldIdLst>
   <p:sldSz cx="9144000" cy="5138928" type="screen4x3"/>
   <p:notesSz cx="6858000" cy="9144000"/>
@@ -3186,7 +3188,7 @@
                 </a:solidFill>
                 <a:latin typeface="Fira Sans"/>
               </a:rPr>
-              <a:t>¿Cómo se mueve Santiago?</a:t>
+              <a:t>Análisis exploratorio de datos</a:t>
             </a:r>
           </a:p>
         </p:txBody>
@@ -3239,7 +3241,7 @@
                 </a:solidFill>
                 <a:latin typeface="Fira Sans"/>
               </a:rPr>
-              <a:t>Clase 2 · Pandas (repaso) y análisis exploratorio</a:t>
+              <a:t>Clase 2 · Modelos, tipos de datos y Pandas</a:t>
             </a:r>
           </a:p>
         </p:txBody>
@@ -3322,7 +3324,7 @@
             <a:avLst/>
           </a:prstGeom>
           <a:solidFill>
-            <a:srgbClr val="FAFBFC"/>
+            <a:srgbClr val="1D3557"/>
           </a:solidFill>
           <a:ln>
             <a:noFill/>
@@ -3359,8 +3361,8 @@
         </p:nvSpPr>
         <p:spPr>
           <a:xfrm>
-            <a:off x="402336" y="301752"/>
-            <a:ext cx="8348472" cy="795528"/>
+            <a:off x="603504" y="1847088"/>
+            <a:ext cx="7946136" cy="1399032"/>
           </a:xfrm>
           <a:prstGeom prst="rect">
             <a:avLst/>
@@ -3374,71 +3376,24 @@
           <a:lstStyle/>
           <a:p>
             <a:r>
-              <a:rPr sz="2800" b="1">
-                <a:solidFill>
-                  <a:srgbClr val="0F0F0F"/>
-                </a:solidFill>
-                <a:latin typeface="Fira Sans"/>
-              </a:rPr>
-              <a:t>Las variantes del merge: qué filas sobreviven</a:t>
-            </a:r>
-          </a:p>
-        </p:txBody>
-      </p:sp>
-      <p:pic>
-        <p:nvPicPr>
-          <p:cNvPr id="4" name="Picture 3" descr="07_diagrama_merge.png"/>
-          <p:cNvPicPr>
-            <a:picLocks noChangeAspect="1"/>
-          </p:cNvPicPr>
-          <p:nvPr/>
-        </p:nvPicPr>
-        <p:blipFill>
-          <a:blip r:embed="rId2"/>
-          <a:stretch>
-            <a:fillRect/>
-          </a:stretch>
-        </p:blipFill>
-        <p:spPr>
-          <a:xfrm>
-            <a:off x="1417319" y="1143000"/>
-            <a:ext cx="6309360" cy="2397276"/>
-          </a:xfrm>
-          <a:prstGeom prst="rect">
-            <a:avLst/>
-          </a:prstGeom>
-        </p:spPr>
-      </p:pic>
-      <p:sp>
-        <p:nvSpPr>
-          <p:cNvPr id="5" name="TextBox 4"/>
-          <p:cNvSpPr txBox="1"/>
-          <p:nvPr/>
-        </p:nvSpPr>
-        <p:spPr>
-          <a:xfrm>
-            <a:off x="704088" y="4434840"/>
-            <a:ext cx="7744968" cy="457200"/>
-          </a:xfrm>
-          <a:prstGeom prst="rect">
-            <a:avLst/>
-          </a:prstGeom>
-          <a:noFill/>
-        </p:spPr>
-        <p:txBody>
-          <a:bodyPr wrap="square">
-            <a:spAutoFit/>
-          </a:bodyPr>
-          <a:lstStyle/>
-          <a:p>
-            <a:r>
-              <a:rPr sz="1300" b="0">
-                <a:solidFill>
-                  <a:srgbClr val="6B7785"/>
-                </a:solidFill>
-                <a:latin typeface="Fira Sans"/>
-              </a:rPr>
-              <a:t>El valor por defecto es inner: descarta sin aviso las filas sin pareja.</a:t>
+              <a:rPr sz="3400" b="1">
+                <a:solidFill>
+                  <a:srgbClr val="FFFFFF"/>
+                </a:solidFill>
+                <a:latin typeface="Fira Sans"/>
+              </a:rPr>
+              <a:t>Los datos</a:t>
+            </a:r>
+          </a:p>
+          <a:p>
+            <a:r>
+              <a:rPr sz="1800" b="0">
+                <a:solidFill>
+                  <a:srgbClr val="E0A437"/>
+                </a:solidFill>
+                <a:latin typeface="Fira Sans"/>
+              </a:rPr>
+              <a:t>Encuesta Origen Destino de Santiago 2012</a:t>
             </a:r>
           </a:p>
         </p:txBody>
@@ -3534,7 +3489,7 @@
                 </a:solidFill>
                 <a:latin typeface="Fira Sans"/>
               </a:rPr>
-              <a:t>El efecto del parámetro how sobre la población analizada</a:t>
+              <a:t>La EOD 2012</a:t>
             </a:r>
           </a:p>
         </p:txBody>
@@ -3561,6 +3516,14 @@
           </a:bodyPr>
           <a:lstStyle/>
           <a:p>
+            <a:pPr>
+              <a:lnSpc>
+                <a:spcPct val="112000"/>
+              </a:lnSpc>
+              <a:spcAft>
+                <a:spcPts val="900"/>
+              </a:spcAft>
+            </a:pPr>
             <a:r>
               <a:rPr sz="1800" b="1">
                 <a:solidFill>
@@ -3573,14 +3536,22 @@
             <a:r>
               <a:rPr sz="1800" b="0">
                 <a:solidFill>
-                  <a:srgbClr val="3A4A5C"/>
-                </a:solidFill>
-                <a:latin typeface="Fira Sans"/>
-              </a:rPr>
-              <a:t>Personas con viajes, merge inner: 113.591 filas (una por viaje).</a:t>
-            </a:r>
-          </a:p>
-          <a:p>
+                  <a:srgbClr val="000000"/>
+                </a:solidFill>
+                <a:latin typeface="Fira Sans"/>
+              </a:rPr>
+              <a:t>Encuesta de movilidad del Gran Santiago (SECTRA y U. Alberto Hurtado).</a:t>
+            </a:r>
+          </a:p>
+          <a:p>
+            <a:pPr>
+              <a:lnSpc>
+                <a:spcPct val="112000"/>
+              </a:lnSpc>
+              <a:spcAft>
+                <a:spcPts val="900"/>
+              </a:spcAft>
+            </a:pPr>
             <a:r>
               <a:rPr sz="1800" b="1">
                 <a:solidFill>
@@ -3593,18 +3564,26 @@
             <a:r>
               <a:rPr sz="1800" b="0">
                 <a:solidFill>
-                  <a:srgbClr val="3A4A5C"/>
-                </a:solidFill>
-                <a:latin typeface="Fira Sans"/>
-              </a:rPr>
-              <a:t>El mismo merge en left: 127.379 filas.</a:t>
-            </a:r>
-          </a:p>
-          <a:p>
+                  <a:srgbClr val="000000"/>
+                </a:solidFill>
+                <a:latin typeface="Fira Sans"/>
+              </a:rPr>
+              <a:t>Registra todos los viajes de un día de los hogares encuestados.</a:t>
+            </a:r>
+          </a:p>
+          <a:p>
+            <a:pPr>
+              <a:lnSpc>
+                <a:spcPct val="112000"/>
+              </a:lnSpc>
+              <a:spcAft>
+                <a:spcPts val="500"/>
+              </a:spcAft>
+            </a:pPr>
             <a:r>
               <a:rPr sz="1400" b="0">
                 <a:solidFill>
-                  <a:srgbClr val="6B7785"/>
+                  <a:srgbClr val="333333"/>
                 </a:solidFill>
                 <a:latin typeface="Fira Sans"/>
               </a:rPr>
@@ -3613,18 +3592,26 @@
             <a:r>
               <a:rPr sz="1400" b="0">
                 <a:solidFill>
-                  <a:srgbClr val="6B7785"/>
-                </a:solidFill>
-                <a:latin typeface="Fira Sans"/>
-              </a:rPr>
-              <a:t>La diferencia son 13.788 personas que no viajaron ese día.</a:t>
-            </a:r>
-          </a:p>
-          <a:p>
+                  <a:srgbClr val="333333"/>
+                </a:solidFill>
+                <a:latin typeface="Fira Sans"/>
+              </a:rPr>
+              <a:t>18.264 hogares, 60.054 personas, 113.591 viajes.</a:t>
+            </a:r>
+          </a:p>
+          <a:p>
+            <a:pPr>
+              <a:lnSpc>
+                <a:spcPct val="112000"/>
+              </a:lnSpc>
+              <a:spcAft>
+                <a:spcPts val="500"/>
+              </a:spcAft>
+            </a:pPr>
             <a:r>
               <a:rPr sz="1400" b="0">
                 <a:solidFill>
-                  <a:srgbClr val="6B7785"/>
+                  <a:srgbClr val="333333"/>
                 </a:solidFill>
                 <a:latin typeface="Fira Sans"/>
               </a:rPr>
@@ -3633,14 +3620,22 @@
             <a:r>
               <a:rPr sz="1400" b="0">
                 <a:solidFill>
-                  <a:srgbClr val="6B7785"/>
-                </a:solidFill>
-                <a:latin typeface="Fira Sans"/>
-              </a:rPr>
-              <a:t>Con inner desaparecen; con left quedan, con NaN en el viaje.</a:t>
-            </a:r>
-          </a:p>
-          <a:p>
+                  <a:srgbClr val="333333"/>
+                </a:solidFill>
+                <a:latin typeface="Fira Sans"/>
+              </a:rPr>
+              <a:t>Se usa en la planificación de transporte de la ciudad.</a:t>
+            </a:r>
+          </a:p>
+          <a:p>
+            <a:pPr>
+              <a:lnSpc>
+                <a:spcPct val="112000"/>
+              </a:lnSpc>
+              <a:spcAft>
+                <a:spcPts val="900"/>
+              </a:spcAft>
+            </a:pPr>
             <a:r>
               <a:rPr sz="1800" b="1">
                 <a:solidFill>
@@ -3657,7 +3652,7 @@
                 </a:solidFill>
                 <a:latin typeface="Fira Sans"/>
               </a:rPr>
-              <a:t>Un promedio calculado sobre el resultado del inner excluye a quienes no viajaron.</a:t>
+              <a:t>El mismo diseño relacional de la Casen, el Censo o la ENUSC.</a:t>
             </a:r>
           </a:p>
         </p:txBody>
@@ -3753,102 +3748,35 @@
                 </a:solidFill>
                 <a:latin typeface="Fira Sans"/>
               </a:rPr>
-              <a:t>Caso 2: contar sin perder a los que no aparecen</a:t>
-            </a:r>
-          </a:p>
-        </p:txBody>
-      </p:sp>
-      <p:sp>
-        <p:nvSpPr>
-          <p:cNvPr id="4" name="Rectangle 3"/>
-          <p:cNvSpPr/>
+              <a:t>Una encuesta, varias tablas</a:t>
+            </a:r>
+          </a:p>
+        </p:txBody>
+      </p:sp>
+      <p:pic>
+        <p:nvPicPr>
+          <p:cNvPr id="4" name="Picture 3" descr="05_diagrama_tablas.png"/>
+          <p:cNvPicPr>
+            <a:picLocks noChangeAspect="1"/>
+          </p:cNvPicPr>
           <p:nvPr/>
-        </p:nvSpPr>
-        <p:spPr>
-          <a:xfrm>
-            <a:off x="704088" y="1280160"/>
-            <a:ext cx="7744968" cy="2377440"/>
+        </p:nvPicPr>
+        <p:blipFill>
+          <a:blip r:embed="rId2"/>
+          <a:stretch>
+            <a:fillRect/>
+          </a:stretch>
+        </p:blipFill>
+        <p:spPr>
+          <a:xfrm>
+            <a:off x="1553651" y="1143000"/>
+            <a:ext cx="6036697" cy="3154680"/>
           </a:xfrm>
           <a:prstGeom prst="rect">
             <a:avLst/>
           </a:prstGeom>
-          <a:solidFill>
-            <a:srgbClr val="F0F2F5"/>
-          </a:solidFill>
-          <a:ln>
-            <a:solidFill>
-              <a:srgbClr val="D8DDE3"/>
-            </a:solidFill>
-          </a:ln>
-          <a:effectLst/>
-        </p:spPr>
-        <p:style>
-          <a:lnRef idx="1">
-            <a:schemeClr val="accent1"/>
-          </a:lnRef>
-          <a:fillRef idx="3">
-            <a:schemeClr val="accent1"/>
-          </a:fillRef>
-          <a:effectRef idx="2">
-            <a:schemeClr val="accent1"/>
-          </a:effectRef>
-          <a:fontRef idx="minor">
-            <a:schemeClr val="lt1"/>
-          </a:fontRef>
-        </p:style>
-        <p:txBody>
-          <a:bodyPr rtlCol="0" anchor="ctr" wrap="square" lIns="228600" tIns="137160"/>
-          <a:lstStyle/>
-          <a:p>
-            <a:pPr/>
-            <a:r>
-              <a:rPr sz="1500" b="0">
-                <a:solidFill>
-                  <a:srgbClr val="1D3557"/>
-                </a:solidFill>
-                <a:latin typeface="Menlo"/>
-              </a:rPr>
-              <a:t>viajes_por_persona = viajes.groupby(['Hogar', 'Persona']).size()</a:t>
-            </a:r>
-          </a:p>
-          <a:p>
-            <a:pPr/>
-            <a:r>
-              <a:rPr sz="1500" b="0">
-                <a:solidFill>
-                  <a:srgbClr val="1D3557"/>
-                </a:solidFill>
-                <a:latin typeface="Menlo"/>
-              </a:rPr>
-              <a:t/>
-            </a:r>
-          </a:p>
-          <a:p>
-            <a:pPr/>
-            <a:r>
-              <a:rPr sz="1500" b="0">
-                <a:solidFill>
-                  <a:srgbClr val="1D3557"/>
-                </a:solidFill>
-                <a:latin typeface="Menlo"/>
-              </a:rPr>
-              <a:t>conteo = personas.set_index(['Hogar', 'Persona']).assign(</a:t>
-            </a:r>
-          </a:p>
-          <a:p>
-            <a:pPr/>
-            <a:r>
-              <a:rPr sz="1500" b="0">
-                <a:solidFill>
-                  <a:srgbClr val="1D3557"/>
-                </a:solidFill>
-                <a:latin typeface="Menlo"/>
-              </a:rPr>
-              <a:t>    n_viajes=viajes_por_persona)['n_viajes'].fillna(0)</a:t>
-            </a:r>
-          </a:p>
-        </p:txBody>
-      </p:sp>
+        </p:spPr>
+      </p:pic>
       <p:sp>
         <p:nvSpPr>
           <p:cNvPr id="5" name="TextBox 4"/>
@@ -3857,8 +3785,8 @@
         </p:nvSpPr>
         <p:spPr>
           <a:xfrm>
-            <a:off x="704088" y="3886200"/>
-            <a:ext cx="7744968" cy="1097280"/>
+            <a:off x="704088" y="4434840"/>
+            <a:ext cx="7744968" cy="457200"/>
           </a:xfrm>
           <a:prstGeom prst="rect">
             <a:avLst/>
@@ -3872,22 +3800,13 @@
           <a:lstStyle/>
           <a:p>
             <a:r>
-              <a:rPr sz="1600" b="1">
-                <a:solidFill>
-                  <a:srgbClr val="E0A437"/>
-                </a:solidFill>
-                <a:latin typeface="Fira Sans"/>
-              </a:rPr>
-              <a:t>▸ </a:t>
-            </a:r>
-            <a:r>
-              <a:rPr sz="1600" b="0">
-                <a:solidFill>
-                  <a:srgbClr val="3A4A5C"/>
-                </a:solidFill>
-                <a:latin typeface="Fira Sans"/>
-              </a:rPr>
-              <a:t>El groupby cuenta sobre la tabla de viajes; el fillna(0) trae de vuelta a los ausentes.</a:t>
+              <a:rPr sz="1300" b="0">
+                <a:solidFill>
+                  <a:srgbClr val="333333"/>
+                </a:solidFill>
+                <a:latin typeface="Fira Sans"/>
+              </a:rPr>
+              <a:t>Los códigos no significan nada sin sus tablas de parámetros: unirlas es parte del análisis.</a:t>
             </a:r>
           </a:p>
         </p:txBody>
@@ -3925,7 +3844,7 @@
             <a:avLst/>
           </a:prstGeom>
           <a:solidFill>
-            <a:srgbClr val="FAFBFC"/>
+            <a:srgbClr val="1D3557"/>
           </a:solidFill>
           <a:ln>
             <a:noFill/>
@@ -3962,8 +3881,8 @@
         </p:nvSpPr>
         <p:spPr>
           <a:xfrm>
-            <a:off x="402336" y="301752"/>
-            <a:ext cx="8348472" cy="795528"/>
+            <a:off x="603504" y="1847088"/>
+            <a:ext cx="7946136" cy="1399032"/>
           </a:xfrm>
           <a:prstGeom prst="rect">
             <a:avLst/>
@@ -3977,144 +3896,28 @@
           <a:lstStyle/>
           <a:p>
             <a:r>
-              <a:rPr sz="2800" b="1">
-                <a:solidFill>
-                  <a:srgbClr val="0F0F0F"/>
-                </a:solidFill>
-                <a:latin typeface="Fira Sans"/>
-              </a:rPr>
-              <a:t>Quien no viaja también es dato</a:t>
-            </a:r>
-          </a:p>
-        </p:txBody>
-      </p:sp>
-      <p:sp>
-        <p:nvSpPr>
-          <p:cNvPr id="4" name="TextBox 3"/>
-          <p:cNvSpPr txBox="1"/>
-          <p:nvPr/>
-        </p:nvSpPr>
-        <p:spPr>
-          <a:xfrm>
-            <a:off x="502920" y="1252728"/>
-            <a:ext cx="4023360" cy="3200400"/>
-          </a:xfrm>
-          <a:prstGeom prst="rect">
-            <a:avLst/>
-          </a:prstGeom>
-          <a:noFill/>
-        </p:spPr>
-        <p:txBody>
-          <a:bodyPr wrap="square">
-            <a:spAutoFit/>
-          </a:bodyPr>
-          <a:lstStyle/>
-          <a:p>
-            <a:r>
-              <a:rPr sz="1500" b="1">
+              <a:rPr sz="3400" b="1">
+                <a:solidFill>
+                  <a:srgbClr val="FFFFFF"/>
+                </a:solidFill>
+                <a:latin typeface="Fira Sans"/>
+              </a:rPr>
+              <a:t>Repaso de Pandas</a:t>
+            </a:r>
+          </a:p>
+          <a:p>
+            <a:r>
+              <a:rPr sz="1800" b="0">
                 <a:solidFill>
                   <a:srgbClr val="E0A437"/>
                 </a:solidFill>
                 <a:latin typeface="Fira Sans"/>
               </a:rPr>
-              <a:t>▸ </a:t>
-            </a:r>
-            <a:r>
-              <a:rPr sz="1500" b="0">
-                <a:solidFill>
-                  <a:srgbClr val="3A4A5C"/>
-                </a:solidFill>
-                <a:latin typeface="Fira Sans"/>
-              </a:rPr>
-              <a:t>El 23% de las personas no viajó ese día.</a:t>
-            </a:r>
-          </a:p>
-          <a:p>
-            <a:r>
-              <a:rPr sz="1500" b="1">
-                <a:solidFill>
-                  <a:srgbClr val="E0A437"/>
-                </a:solidFill>
-                <a:latin typeface="Fira Sans"/>
-              </a:rPr>
-              <a:t>▸ </a:t>
-            </a:r>
-            <a:r>
-              <a:rPr sz="1500" b="0">
-                <a:solidFill>
-                  <a:srgbClr val="3A4A5C"/>
-                </a:solidFill>
-                <a:latin typeface="Fira Sans"/>
-              </a:rPr>
-              <a:t>Media: 1,9 viajes. Mediana: 2 viajes.</a:t>
-            </a:r>
-          </a:p>
-          <a:p>
-            <a:r>
-              <a:rPr sz="1500" b="1">
-                <a:solidFill>
-                  <a:srgbClr val="E0A437"/>
-                </a:solidFill>
-                <a:latin typeface="Fira Sans"/>
-              </a:rPr>
-              <a:t>▸ </a:t>
-            </a:r>
-            <a:r>
-              <a:rPr sz="1500" b="0">
-                <a:solidFill>
-                  <a:srgbClr val="3A4A5C"/>
-                </a:solidFill>
-                <a:latin typeface="Fira Sans"/>
-              </a:rPr>
-              <a:t>Aquí la media quedó bajo la mediana: el bloque de ceros la baja.</a:t>
-            </a:r>
-          </a:p>
-          <a:p>
-            <a:r>
-              <a:rPr sz="1500" b="1">
-                <a:solidFill>
-                  <a:srgbClr val="E0A437"/>
-                </a:solidFill>
-                <a:latin typeface="Fira Sans"/>
-              </a:rPr>
-              <a:t>▸ </a:t>
-            </a:r>
-            <a:r>
-              <a:rPr sz="1500" b="1">
-                <a:solidFill>
-                  <a:srgbClr val="1D3557"/>
-                </a:solidFill>
-                <a:latin typeface="Fira Sans"/>
-              </a:rPr>
-              <a:t>La dirección del sesgo depende de la forma de la distribución.</a:t>
-            </a:r>
-          </a:p>
-        </p:txBody>
-      </p:sp>
-      <p:pic>
-        <p:nvPicPr>
-          <p:cNvPr id="5" name="Picture 4" descr="02_viajes_por_persona.png"/>
-          <p:cNvPicPr>
-            <a:picLocks noChangeAspect="1"/>
-          </p:cNvPicPr>
-          <p:nvPr/>
-        </p:nvPicPr>
-        <p:blipFill>
-          <a:blip r:embed="rId2"/>
-          <a:stretch>
-            <a:fillRect/>
-          </a:stretch>
-        </p:blipFill>
-        <p:spPr>
-          <a:xfrm>
-            <a:off x="4892040" y="1371600"/>
-            <a:ext cx="3840480" cy="2191739"/>
-          </a:xfrm>
-          <a:prstGeom prst="rect">
-            <a:avLst/>
-          </a:prstGeom>
-        </p:spPr>
-      </p:pic>
+              <a:t>Dos casos concretos con la EOD</a:t>
+            </a:r>
+          </a:p>
+        </p:txBody>
+      </p:sp>
     </p:spTree>
   </p:cSld>
   <p:clrMapOvr>
@@ -4148,7 +3951,7 @@
             <a:avLst/>
           </a:prstGeom>
           <a:solidFill>
-            <a:srgbClr val="1D3557"/>
+            <a:srgbClr val="FAFBFC"/>
           </a:solidFill>
           <a:ln>
             <a:noFill/>
@@ -4185,8 +3988,8 @@
         </p:nvSpPr>
         <p:spPr>
           <a:xfrm>
-            <a:off x="603504" y="1847088"/>
-            <a:ext cx="7946136" cy="1399032"/>
+            <a:off x="402336" y="301752"/>
+            <a:ext cx="8348472" cy="795528"/>
           </a:xfrm>
           <a:prstGeom prst="rect">
             <a:avLst/>
@@ -4200,24 +4003,191 @@
           <a:lstStyle/>
           <a:p>
             <a:r>
-              <a:rPr sz="3400" b="1">
-                <a:solidFill>
-                  <a:srgbClr val="FFFFFF"/>
-                </a:solidFill>
-                <a:latin typeface="Fira Sans"/>
-              </a:rPr>
-              <a:t>¿A quién representa la encuesta?</a:t>
-            </a:r>
-          </a:p>
-          <a:p>
-            <a:r>
-              <a:rPr sz="1800" b="0">
+              <a:rPr sz="2800" b="1">
+                <a:solidFill>
+                  <a:srgbClr val="0F0F0F"/>
+                </a:solidFill>
+                <a:latin typeface="Fira Sans"/>
+              </a:rPr>
+              <a:t>Caso 1: códigos que requieren su tabla de parámetros</a:t>
+            </a:r>
+          </a:p>
+        </p:txBody>
+      </p:sp>
+      <p:sp>
+        <p:nvSpPr>
+          <p:cNvPr id="4" name="Rectangle 3"/>
+          <p:cNvSpPr/>
+          <p:nvPr/>
+        </p:nvSpPr>
+        <p:spPr>
+          <a:xfrm>
+            <a:off x="704088" y="1280160"/>
+            <a:ext cx="7744968" cy="3886200"/>
+          </a:xfrm>
+          <a:prstGeom prst="rect">
+            <a:avLst/>
+          </a:prstGeom>
+          <a:solidFill>
+            <a:srgbClr val="F0F2F5"/>
+          </a:solidFill>
+          <a:ln>
+            <a:solidFill>
+              <a:srgbClr val="D8DDE3"/>
+            </a:solidFill>
+          </a:ln>
+          <a:effectLst/>
+        </p:spPr>
+        <p:style>
+          <a:lnRef idx="1">
+            <a:schemeClr val="accent1"/>
+          </a:lnRef>
+          <a:fillRef idx="3">
+            <a:schemeClr val="accent1"/>
+          </a:fillRef>
+          <a:effectRef idx="2">
+            <a:schemeClr val="accent1"/>
+          </a:effectRef>
+          <a:fontRef idx="minor">
+            <a:schemeClr val="lt1"/>
+          </a:fontRef>
+        </p:style>
+        <p:txBody>
+          <a:bodyPr rtlCol="0" anchor="ctr" wrap="square" lIns="228600" tIns="137160"/>
+          <a:lstStyle/>
+          <a:p>
+            <a:pPr/>
+            <a:r>
+              <a:rPr sz="1500" b="0">
+                <a:solidFill>
+                  <a:srgbClr val="1D3557"/>
+                </a:solidFill>
+                <a:latin typeface="Menlo"/>
+              </a:rPr>
+              <a:t>personas['Sexo'].value_counts()      # 1 y 2: ¿qué son?</a:t>
+            </a:r>
+          </a:p>
+          <a:p>
+            <a:pPr/>
+            <a:r>
+              <a:rPr sz="1500" b="0">
+                <a:solidFill>
+                  <a:srgbClr val="1D3557"/>
+                </a:solidFill>
+                <a:latin typeface="Menlo"/>
+              </a:rPr>
+              <a:t/>
+            </a:r>
+          </a:p>
+          <a:p>
+            <a:pPr/>
+            <a:r>
+              <a:rPr sz="1500" b="0">
+                <a:solidFill>
+                  <a:srgbClr val="1D3557"/>
+                </a:solidFill>
+                <a:latin typeface="Menlo"/>
+              </a:rPr>
+              <a:t>sexo = pd.read_csv('tablas_parametros/Sexo.csv', sep=';')</a:t>
+            </a:r>
+          </a:p>
+          <a:p>
+            <a:pPr/>
+            <a:r>
+              <a:rPr sz="1500" b="0">
+                <a:solidFill>
+                  <a:srgbClr val="1D3557"/>
+                </a:solidFill>
+                <a:latin typeface="Menlo"/>
+              </a:rPr>
+              <a:t>personas = personas.merge(sexo, left_on='Sexo',</a:t>
+            </a:r>
+          </a:p>
+          <a:p>
+            <a:pPr/>
+            <a:r>
+              <a:rPr sz="1500" b="0">
+                <a:solidFill>
+                  <a:srgbClr val="1D3557"/>
+                </a:solidFill>
+                <a:latin typeface="Menlo"/>
+              </a:rPr>
+              <a:t>                          right_on='Id', how='left')</a:t>
+            </a:r>
+          </a:p>
+          <a:p>
+            <a:pPr/>
+            <a:r>
+              <a:rPr sz="1500" b="0">
+                <a:solidFill>
+                  <a:srgbClr val="1D3557"/>
+                </a:solidFill>
+                <a:latin typeface="Menlo"/>
+              </a:rPr>
+              <a:t/>
+            </a:r>
+          </a:p>
+          <a:p>
+            <a:pPr/>
+            <a:r>
+              <a:rPr sz="1500" b="0">
+                <a:solidFill>
+                  <a:srgbClr val="1D3557"/>
+                </a:solidFill>
+                <a:latin typeface="Menlo"/>
+              </a:rPr>
+              <a:t>personas['Sexo'].isna().sum()        # después de todo merge: contar los NaN</a:t>
+            </a:r>
+          </a:p>
+        </p:txBody>
+      </p:sp>
+      <p:sp>
+        <p:nvSpPr>
+          <p:cNvPr id="5" name="TextBox 4"/>
+          <p:cNvSpPr txBox="1"/>
+          <p:nvPr/>
+        </p:nvSpPr>
+        <p:spPr>
+          <a:xfrm>
+            <a:off x="704088" y="5394960"/>
+            <a:ext cx="7744968" cy="1097280"/>
+          </a:xfrm>
+          <a:prstGeom prst="rect">
+            <a:avLst/>
+          </a:prstGeom>
+          <a:noFill/>
+        </p:spPr>
+        <p:txBody>
+          <a:bodyPr wrap="square">
+            <a:spAutoFit/>
+          </a:bodyPr>
+          <a:lstStyle/>
+          <a:p>
+            <a:pPr>
+              <a:lnSpc>
+                <a:spcPct val="112000"/>
+              </a:lnSpc>
+              <a:spcAft>
+                <a:spcPts val="900"/>
+              </a:spcAft>
+            </a:pPr>
+            <a:r>
+              <a:rPr sz="1600" b="1">
                 <a:solidFill>
                   <a:srgbClr val="E0A437"/>
                 </a:solidFill>
                 <a:latin typeface="Fira Sans"/>
               </a:rPr>
-              <a:t>Los factores de expansión</a:t>
+              <a:t>▸ </a:t>
+            </a:r>
+            <a:r>
+              <a:rPr sz="1600" b="0">
+                <a:solidFill>
+                  <a:srgbClr val="000000"/>
+                </a:solidFill>
+                <a:latin typeface="Fira Sans"/>
+              </a:rPr>
+              <a:t>El detalle completo, con las cuatro variantes de how, está en el notebook.</a:t>
             </a:r>
           </a:p>
         </p:txBody>
@@ -4313,14 +4283,14 @@
                 </a:solidFill>
                 <a:latin typeface="Fira Sans"/>
               </a:rPr>
-              <a:t>De la muestra a la ciudad</a:t>
+              <a:t>Las variantes del merge: qué filas se conservan</a:t>
             </a:r>
           </a:p>
         </p:txBody>
       </p:sp>
       <p:pic>
         <p:nvPicPr>
-          <p:cNvPr id="4" name="Picture 3" descr="06_diagrama_factores.png"/>
+          <p:cNvPr id="4" name="Picture 3" descr="07_diagrama_merge.png"/>
           <p:cNvPicPr>
             <a:picLocks noChangeAspect="1"/>
           </p:cNvPicPr>
@@ -4335,7 +4305,7 @@
         <p:spPr>
           <a:xfrm>
             <a:off x="1417319" y="1143000"/>
-            <a:ext cx="6309360" cy="2871234"/>
+            <a:ext cx="6309360" cy="2397276"/>
           </a:xfrm>
           <a:prstGeom prst="rect">
             <a:avLst/>
@@ -4367,11 +4337,11 @@
             <a:r>
               <a:rPr sz="1300" b="0">
                 <a:solidFill>
-                  <a:srgbClr val="6B7785"/>
-                </a:solidFill>
-                <a:latin typeface="Fira Sans"/>
-              </a:rPr>
-              <a:t>Contar filas responde por la muestra; sumar factores responde por la ciudad.</a:t>
+                  <a:srgbClr val="333333"/>
+                </a:solidFill>
+                <a:latin typeface="Fira Sans"/>
+              </a:rPr>
+              <a:t>El valor por defecto es inner: descarta sin aviso las filas sin pareja.</a:t>
             </a:r>
           </a:p>
         </p:txBody>
@@ -4409,7 +4379,7 @@
             <a:avLst/>
           </a:prstGeom>
           <a:solidFill>
-            <a:srgbClr val="1D3557"/>
+            <a:srgbClr val="FAFBFC"/>
           </a:solidFill>
           <a:ln>
             <a:noFill/>
@@ -4446,8 +4416,8 @@
         </p:nvSpPr>
         <p:spPr>
           <a:xfrm>
-            <a:off x="603504" y="1847088"/>
-            <a:ext cx="7946136" cy="1399032"/>
+            <a:off x="402336" y="301752"/>
+            <a:ext cx="8348472" cy="795528"/>
           </a:xfrm>
           <a:prstGeom prst="rect">
             <a:avLst/>
@@ -4461,24 +4431,176 @@
           <a:lstStyle/>
           <a:p>
             <a:r>
-              <a:rPr sz="3400" b="1">
-                <a:solidFill>
-                  <a:srgbClr val="FFFFFF"/>
-                </a:solidFill>
-                <a:latin typeface="Fira Sans"/>
-              </a:rPr>
-              <a:t>Análisis exploratorio</a:t>
-            </a:r>
-          </a:p>
-          <a:p>
+              <a:rPr sz="2800" b="1">
+                <a:solidFill>
+                  <a:srgbClr val="0F0F0F"/>
+                </a:solidFill>
+                <a:latin typeface="Fira Sans"/>
+              </a:rPr>
+              <a:t>El efecto del parámetro how sobre la población analizada</a:t>
+            </a:r>
+          </a:p>
+        </p:txBody>
+      </p:sp>
+      <p:sp>
+        <p:nvSpPr>
+          <p:cNvPr id="4" name="TextBox 3"/>
+          <p:cNvSpPr txBox="1"/>
+          <p:nvPr/>
+        </p:nvSpPr>
+        <p:spPr>
+          <a:xfrm>
+            <a:off x="704088" y="1353312"/>
+            <a:ext cx="7744968" cy="3300984"/>
+          </a:xfrm>
+          <a:prstGeom prst="rect">
+            <a:avLst/>
+          </a:prstGeom>
+          <a:noFill/>
+        </p:spPr>
+        <p:txBody>
+          <a:bodyPr wrap="square">
+            <a:spAutoFit/>
+          </a:bodyPr>
+          <a:lstStyle/>
+          <a:p>
+            <a:pPr>
+              <a:lnSpc>
+                <a:spcPct val="112000"/>
+              </a:lnSpc>
+              <a:spcAft>
+                <a:spcPts val="900"/>
+              </a:spcAft>
+            </a:pPr>
+            <a:r>
+              <a:rPr sz="1800" b="1">
+                <a:solidFill>
+                  <a:srgbClr val="E0A437"/>
+                </a:solidFill>
+                <a:latin typeface="Fira Sans"/>
+              </a:rPr>
+              <a:t>▸ </a:t>
+            </a:r>
             <a:r>
               <a:rPr sz="1800" b="0">
                 <a:solidFill>
+                  <a:srgbClr val="000000"/>
+                </a:solidFill>
+                <a:latin typeface="Fira Sans"/>
+              </a:rPr>
+              <a:t>Personas con viajes, merge inner: 113.591 filas (una por viaje).</a:t>
+            </a:r>
+          </a:p>
+          <a:p>
+            <a:pPr>
+              <a:lnSpc>
+                <a:spcPct val="112000"/>
+              </a:lnSpc>
+              <a:spcAft>
+                <a:spcPts val="900"/>
+              </a:spcAft>
+            </a:pPr>
+            <a:r>
+              <a:rPr sz="1800" b="1">
+                <a:solidFill>
                   <a:srgbClr val="E0A437"/>
                 </a:solidFill>
                 <a:latin typeface="Fira Sans"/>
               </a:rPr>
-              <a:t>Examinar los datos antes de modelarlos</a:t>
+              <a:t>▸ </a:t>
+            </a:r>
+            <a:r>
+              <a:rPr sz="1800" b="0">
+                <a:solidFill>
+                  <a:srgbClr val="000000"/>
+                </a:solidFill>
+                <a:latin typeface="Fira Sans"/>
+              </a:rPr>
+              <a:t>El mismo merge en left: 127.379 filas.</a:t>
+            </a:r>
+          </a:p>
+          <a:p>
+            <a:pPr>
+              <a:lnSpc>
+                <a:spcPct val="112000"/>
+              </a:lnSpc>
+              <a:spcAft>
+                <a:spcPts val="500"/>
+              </a:spcAft>
+            </a:pPr>
+            <a:r>
+              <a:rPr sz="1400" b="0">
+                <a:solidFill>
+                  <a:srgbClr val="333333"/>
+                </a:solidFill>
+                <a:latin typeface="Fira Sans"/>
+              </a:rPr>
+              <a:t>     ◦  </a:t>
+            </a:r>
+            <a:r>
+              <a:rPr sz="1400" b="0">
+                <a:solidFill>
+                  <a:srgbClr val="333333"/>
+                </a:solidFill>
+                <a:latin typeface="Fira Sans"/>
+              </a:rPr>
+              <a:t>La diferencia son 13.788 personas que no viajaron ese día.</a:t>
+            </a:r>
+          </a:p>
+          <a:p>
+            <a:pPr>
+              <a:lnSpc>
+                <a:spcPct val="112000"/>
+              </a:lnSpc>
+              <a:spcAft>
+                <a:spcPts val="500"/>
+              </a:spcAft>
+            </a:pPr>
+            <a:r>
+              <a:rPr sz="1400" b="0">
+                <a:solidFill>
+                  <a:srgbClr val="333333"/>
+                </a:solidFill>
+                <a:latin typeface="Fira Sans"/>
+              </a:rPr>
+              <a:t>     ◦  </a:t>
+            </a:r>
+            <a:r>
+              <a:rPr sz="1400" b="0">
+                <a:solidFill>
+                  <a:srgbClr val="333333"/>
+                </a:solidFill>
+                <a:latin typeface="Fira Sans"/>
+              </a:rPr>
+              <a:t>Con inner desaparecen; con left quedan, con NaN en el viaje.</a:t>
+            </a:r>
+          </a:p>
+          <a:p>
+            <a:pPr>
+              <a:lnSpc>
+                <a:spcPct val="112000"/>
+              </a:lnSpc>
+              <a:spcAft>
+                <a:spcPts val="900"/>
+              </a:spcAft>
+            </a:pPr>
+            <a:r>
+              <a:rPr sz="1800" b="1">
+                <a:solidFill>
+                  <a:srgbClr val="E0A437"/>
+                </a:solidFill>
+                <a:latin typeface="Fira Sans"/>
+              </a:rPr>
+              <a:t>▸ </a:t>
+            </a:r>
+            <a:r>
+              <a:rPr sz="1800" b="1">
+                <a:solidFill>
+                  <a:srgbClr val="1D3557"/>
+                </a:solidFill>
+                <a:latin typeface="Fira Sans"/>
+              </a:rPr>
+              <a:t>Un promedio calculado sobre el resultado del inner excluye a quienes no viajaron.</a:t>
             </a:r>
           </a:p>
         </p:txBody>
@@ -4574,21 +4696,112 @@
                 </a:solidFill>
                 <a:latin typeface="Fira Sans"/>
               </a:rPr>
-              <a:t>Qué es el análisis exploratorio de datos</a:t>
-            </a:r>
-          </a:p>
-        </p:txBody>
-      </p:sp>
-      <p:sp>
-        <p:nvSpPr>
-          <p:cNvPr id="4" name="TextBox 3"/>
+              <a:t>Caso 2: contar sin perder a los que no aparecen</a:t>
+            </a:r>
+          </a:p>
+        </p:txBody>
+      </p:sp>
+      <p:sp>
+        <p:nvSpPr>
+          <p:cNvPr id="4" name="Rectangle 3"/>
+          <p:cNvSpPr/>
+          <p:nvPr/>
+        </p:nvSpPr>
+        <p:spPr>
+          <a:xfrm>
+            <a:off x="704088" y="1280160"/>
+            <a:ext cx="7744968" cy="2377440"/>
+          </a:xfrm>
+          <a:prstGeom prst="rect">
+            <a:avLst/>
+          </a:prstGeom>
+          <a:solidFill>
+            <a:srgbClr val="F0F2F5"/>
+          </a:solidFill>
+          <a:ln>
+            <a:solidFill>
+              <a:srgbClr val="D8DDE3"/>
+            </a:solidFill>
+          </a:ln>
+          <a:effectLst/>
+        </p:spPr>
+        <p:style>
+          <a:lnRef idx="1">
+            <a:schemeClr val="accent1"/>
+          </a:lnRef>
+          <a:fillRef idx="3">
+            <a:schemeClr val="accent1"/>
+          </a:fillRef>
+          <a:effectRef idx="2">
+            <a:schemeClr val="accent1"/>
+          </a:effectRef>
+          <a:fontRef idx="minor">
+            <a:schemeClr val="lt1"/>
+          </a:fontRef>
+        </p:style>
+        <p:txBody>
+          <a:bodyPr rtlCol="0" anchor="ctr" wrap="square" lIns="228600" tIns="137160"/>
+          <a:lstStyle/>
+          <a:p>
+            <a:pPr/>
+            <a:r>
+              <a:rPr sz="1500" b="0">
+                <a:solidFill>
+                  <a:srgbClr val="1D3557"/>
+                </a:solidFill>
+                <a:latin typeface="Menlo"/>
+              </a:rPr>
+              <a:t>viajes_por_persona = viajes.groupby(['Hogar', 'Persona']).size()</a:t>
+            </a:r>
+          </a:p>
+          <a:p>
+            <a:pPr/>
+            <a:r>
+              <a:rPr sz="1500" b="0">
+                <a:solidFill>
+                  <a:srgbClr val="1D3557"/>
+                </a:solidFill>
+                <a:latin typeface="Menlo"/>
+              </a:rPr>
+              <a:t/>
+            </a:r>
+          </a:p>
+          <a:p>
+            <a:pPr/>
+            <a:r>
+              <a:rPr sz="1500" b="0">
+                <a:solidFill>
+                  <a:srgbClr val="1D3557"/>
+                </a:solidFill>
+                <a:latin typeface="Menlo"/>
+              </a:rPr>
+              <a:t>conteo = personas.set_index(['Hogar', 'Persona']).assign(</a:t>
+            </a:r>
+          </a:p>
+          <a:p>
+            <a:pPr/>
+            <a:r>
+              <a:rPr sz="1500" b="0">
+                <a:solidFill>
+                  <a:srgbClr val="1D3557"/>
+                </a:solidFill>
+                <a:latin typeface="Menlo"/>
+              </a:rPr>
+              <a:t>    n_viajes=viajes_por_persona)['n_viajes'].fillna(0)</a:t>
+            </a:r>
+          </a:p>
+        </p:txBody>
+      </p:sp>
+      <p:sp>
+        <p:nvSpPr>
+          <p:cNvPr id="5" name="TextBox 4"/>
           <p:cNvSpPr txBox="1"/>
           <p:nvPr/>
         </p:nvSpPr>
         <p:spPr>
           <a:xfrm>
-            <a:off x="704088" y="1353312"/>
-            <a:ext cx="7744968" cy="3300984"/>
+            <a:off x="704088" y="3886200"/>
+            <a:ext cx="7744968" cy="1097280"/>
           </a:xfrm>
           <a:prstGeom prst="rect">
             <a:avLst/>
@@ -4601,8 +4814,16 @@
           </a:bodyPr>
           <a:lstStyle/>
           <a:p>
-            <a:r>
-              <a:rPr sz="1800" b="1">
+            <a:pPr>
+              <a:lnSpc>
+                <a:spcPct val="112000"/>
+              </a:lnSpc>
+              <a:spcAft>
+                <a:spcPts val="900"/>
+              </a:spcAft>
+            </a:pPr>
+            <a:r>
+              <a:rPr sz="1600" b="1">
                 <a:solidFill>
                   <a:srgbClr val="E0A437"/>
                 </a:solidFill>
@@ -4611,133 +4832,13 @@
               <a:t>▸ </a:t>
             </a:r>
             <a:r>
-              <a:rPr sz="1800" b="0">
-                <a:solidFill>
-                  <a:srgbClr val="3A4A5C"/>
-                </a:solidFill>
-                <a:latin typeface="Fira Sans"/>
-              </a:rPr>
-              <a:t>La etapa en que se examinan los datos antes de modelarlos (Tukey, 1977).</a:t>
-            </a:r>
-          </a:p>
-          <a:p>
-            <a:r>
-              <a:rPr sz="1800" b="1">
-                <a:solidFill>
-                  <a:srgbClr val="E0A437"/>
-                </a:solidFill>
-                <a:latin typeface="Fira Sans"/>
-              </a:rPr>
-              <a:t>▸ </a:t>
-            </a:r>
-            <a:r>
-              <a:rPr sz="1800" b="0">
-                <a:solidFill>
-                  <a:srgbClr val="3A4A5C"/>
-                </a:solidFill>
-                <a:latin typeface="Fira Sans"/>
-              </a:rPr>
-              <a:t>Responde cuatro tipos de pregunta:</a:t>
-            </a:r>
-          </a:p>
-          <a:p>
-            <a:r>
-              <a:rPr sz="1400" b="0">
-                <a:solidFill>
-                  <a:srgbClr val="6B7785"/>
-                </a:solidFill>
-                <a:latin typeface="Fira Sans"/>
-              </a:rPr>
-              <a:t>     ◦  </a:t>
-            </a:r>
-            <a:r>
-              <a:rPr sz="1400" b="0">
-                <a:solidFill>
-                  <a:srgbClr val="6B7785"/>
-                </a:solidFill>
-                <a:latin typeface="Fira Sans"/>
-              </a:rPr>
-              <a:t>La forma: cómo se distribuye cada variable.</a:t>
-            </a:r>
-          </a:p>
-          <a:p>
-            <a:r>
-              <a:rPr sz="1400" b="0">
-                <a:solidFill>
-                  <a:srgbClr val="6B7785"/>
-                </a:solidFill>
-                <a:latin typeface="Fira Sans"/>
-              </a:rPr>
-              <a:t>     ◦  </a:t>
-            </a:r>
-            <a:r>
-              <a:rPr sz="1400" b="0">
-                <a:solidFill>
-                  <a:srgbClr val="6B7785"/>
-                </a:solidFill>
-                <a:latin typeface="Fira Sans"/>
-              </a:rPr>
-              <a:t>Lo típico y lo extremo: qué es frecuente y qué es anómalo.</a:t>
-            </a:r>
-          </a:p>
-          <a:p>
-            <a:r>
-              <a:rPr sz="1400" b="0">
-                <a:solidFill>
-                  <a:srgbClr val="6B7785"/>
-                </a:solidFill>
-                <a:latin typeface="Fira Sans"/>
-              </a:rPr>
-              <a:t>     ◦  </a:t>
-            </a:r>
-            <a:r>
-              <a:rPr sz="1400" b="0">
-                <a:solidFill>
-                  <a:srgbClr val="6B7785"/>
-                </a:solidFill>
-                <a:latin typeface="Fira Sans"/>
-              </a:rPr>
-              <a:t>Lo que falta: qué datos están ausentes y con qué patrón.</a:t>
-            </a:r>
-          </a:p>
-          <a:p>
-            <a:r>
-              <a:rPr sz="1400" b="0">
-                <a:solidFill>
-                  <a:srgbClr val="6B7785"/>
-                </a:solidFill>
-                <a:latin typeface="Fira Sans"/>
-              </a:rPr>
-              <a:t>     ◦  </a:t>
-            </a:r>
-            <a:r>
-              <a:rPr sz="1400" b="0">
-                <a:solidFill>
-                  <a:srgbClr val="6B7785"/>
-                </a:solidFill>
-                <a:latin typeface="Fira Sans"/>
-              </a:rPr>
-              <a:t>Las relaciones: qué variables se asocian con qué otras.</a:t>
-            </a:r>
-          </a:p>
-          <a:p>
-            <a:r>
-              <a:rPr sz="1800" b="1">
-                <a:solidFill>
-                  <a:srgbClr val="E0A437"/>
-                </a:solidFill>
-                <a:latin typeface="Fira Sans"/>
-              </a:rPr>
-              <a:t>▸ </a:t>
-            </a:r>
-            <a:r>
-              <a:rPr sz="1800" b="1">
-                <a:solidFill>
-                  <a:srgbClr val="1D3557"/>
-                </a:solidFill>
-                <a:latin typeface="Fira Sans"/>
-              </a:rPr>
-              <a:t>Genera hipótesis; el análisis confirmatorio (unidad 5) las pone a prueba.</a:t>
+              <a:rPr sz="1600" b="0">
+                <a:solidFill>
+                  <a:srgbClr val="000000"/>
+                </a:solidFill>
+                <a:latin typeface="Fira Sans"/>
+              </a:rPr>
+              <a:t>El groupby cuenta sobre la tabla de viajes; el fillna(0) reincorpora a los ausentes.</a:t>
             </a:r>
           </a:p>
         </p:txBody>
@@ -4775,7 +4876,7 @@
             <a:avLst/>
           </a:prstGeom>
           <a:solidFill>
-            <a:srgbClr val="FAFBFC"/>
+            <a:srgbClr val="1D3557"/>
           </a:solidFill>
           <a:ln>
             <a:noFill/>
@@ -4812,8 +4913,8 @@
         </p:nvSpPr>
         <p:spPr>
           <a:xfrm>
-            <a:off x="402336" y="301752"/>
-            <a:ext cx="8348472" cy="795528"/>
+            <a:off x="603504" y="1847088"/>
+            <a:ext cx="7946136" cy="1399032"/>
           </a:xfrm>
           <a:prstGeom prst="rect">
             <a:avLst/>
@@ -4827,144 +4928,28 @@
           <a:lstStyle/>
           <a:p>
             <a:r>
-              <a:rPr sz="2800" b="1">
-                <a:solidFill>
-                  <a:srgbClr val="0F0F0F"/>
-                </a:solidFill>
-                <a:latin typeface="Fira Sans"/>
-              </a:rPr>
-              <a:t>¿Cuánto gana un hogar típico?</a:t>
-            </a:r>
-          </a:p>
-        </p:txBody>
-      </p:sp>
-      <p:sp>
-        <p:nvSpPr>
-          <p:cNvPr id="4" name="TextBox 3"/>
-          <p:cNvSpPr txBox="1"/>
-          <p:nvPr/>
-        </p:nvSpPr>
-        <p:spPr>
-          <a:xfrm>
-            <a:off x="502920" y="1252728"/>
-            <a:ext cx="4023360" cy="3200400"/>
-          </a:xfrm>
-          <a:prstGeom prst="rect">
-            <a:avLst/>
-          </a:prstGeom>
-          <a:noFill/>
-        </p:spPr>
-        <p:txBody>
-          <a:bodyPr wrap="square">
-            <a:spAutoFit/>
-          </a:bodyPr>
-          <a:lstStyle/>
-          <a:p>
-            <a:r>
-              <a:rPr sz="1500" b="1">
+              <a:rPr sz="3400" b="1">
+                <a:solidFill>
+                  <a:srgbClr val="FFFFFF"/>
+                </a:solidFill>
+                <a:latin typeface="Fira Sans"/>
+              </a:rPr>
+              <a:t>Exploración de la EOD</a:t>
+            </a:r>
+          </a:p>
+          <a:p>
+            <a:r>
+              <a:rPr sz="1800" b="0">
                 <a:solidFill>
                   <a:srgbClr val="E0A437"/>
                 </a:solidFill>
                 <a:latin typeface="Fira Sans"/>
               </a:rPr>
-              <a:t>▸ </a:t>
-            </a:r>
-            <a:r>
-              <a:rPr sz="1500" b="0">
-                <a:solidFill>
-                  <a:srgbClr val="3A4A5C"/>
-                </a:solidFill>
-                <a:latin typeface="Fira Sans"/>
-              </a:rPr>
-              <a:t>Media: $688.274. Mediana: $507.826.</a:t>
-            </a:r>
-          </a:p>
-          <a:p>
-            <a:r>
-              <a:rPr sz="1500" b="1">
-                <a:solidFill>
-                  <a:srgbClr val="E0A437"/>
-                </a:solidFill>
-                <a:latin typeface="Fira Sans"/>
-              </a:rPr>
-              <a:t>▸ </a:t>
-            </a:r>
-            <a:r>
-              <a:rPr sz="1500" b="0">
-                <a:solidFill>
-                  <a:srgbClr val="3A4A5C"/>
-                </a:solidFill>
-                <a:latin typeface="Fira Sans"/>
-              </a:rPr>
-              <a:t>La media es un 36% más alta que la mediana.</a:t>
-            </a:r>
-          </a:p>
-          <a:p>
-            <a:r>
-              <a:rPr sz="1500" b="1">
-                <a:solidFill>
-                  <a:srgbClr val="E0A437"/>
-                </a:solidFill>
-                <a:latin typeface="Fira Sans"/>
-              </a:rPr>
-              <a:t>▸ </a:t>
-            </a:r>
-            <a:r>
-              <a:rPr sz="1500" b="0">
-                <a:solidFill>
-                  <a:srgbClr val="3A4A5C"/>
-                </a:solidFill>
-                <a:latin typeface="Fira Sans"/>
-              </a:rPr>
-              <a:t>Los ingresos altos desplazan el promedio; la mayoría gana menos.</a:t>
-            </a:r>
-          </a:p>
-          <a:p>
-            <a:r>
-              <a:rPr sz="1500" b="1">
-                <a:solidFill>
-                  <a:srgbClr val="E0A437"/>
-                </a:solidFill>
-                <a:latin typeface="Fira Sans"/>
-              </a:rPr>
-              <a:t>▸ </a:t>
-            </a:r>
-            <a:r>
-              <a:rPr sz="1500" b="1">
-                <a:solidFill>
-                  <a:srgbClr val="1D3557"/>
-                </a:solidFill>
-                <a:latin typeface="Fira Sans"/>
-              </a:rPr>
-              <a:t>El promedio describe una situación en la que la mayoría no está.</a:t>
-            </a:r>
-          </a:p>
-        </p:txBody>
-      </p:sp>
-      <p:pic>
-        <p:nvPicPr>
-          <p:cNvPr id="5" name="Picture 4" descr="01_ingreso_media_mediana.png"/>
-          <p:cNvPicPr>
-            <a:picLocks noChangeAspect="1"/>
-          </p:cNvPicPr>
-          <p:nvPr/>
-        </p:nvPicPr>
-        <p:blipFill>
-          <a:blip r:embed="rId2"/>
-          <a:stretch>
-            <a:fillRect/>
-          </a:stretch>
-        </p:blipFill>
-        <p:spPr>
-          <a:xfrm>
-            <a:off x="4892040" y="1371600"/>
-            <a:ext cx="3840480" cy="2182719"/>
-          </a:xfrm>
-          <a:prstGeom prst="rect">
-            <a:avLst/>
-          </a:prstGeom>
-        </p:spPr>
-      </p:pic>
+              <a:t>Estadística descriptiva sobre datos reales</a:t>
+            </a:r>
+          </a:p>
+        </p:txBody>
+      </p:sp>
     </p:spTree>
   </p:cSld>
   <p:clrMapOvr>
@@ -5056,7 +5041,7 @@
                 </a:solidFill>
                 <a:latin typeface="Fira Sans"/>
               </a:rPr>
-              <a:t>¿Cuánto dura un viaje?</a:t>
+              <a:t>Viajes por persona: los ausentes también cuentan</a:t>
             </a:r>
           </a:p>
         </p:txBody>
@@ -5083,6 +5068,14 @@
           </a:bodyPr>
           <a:lstStyle/>
           <a:p>
+            <a:pPr>
+              <a:lnSpc>
+                <a:spcPct val="112000"/>
+              </a:lnSpc>
+              <a:spcAft>
+                <a:spcPts val="900"/>
+              </a:spcAft>
+            </a:pPr>
             <a:r>
               <a:rPr sz="1500" b="1">
                 <a:solidFill>
@@ -5095,14 +5088,22 @@
             <a:r>
               <a:rPr sz="1500" b="0">
                 <a:solidFill>
-                  <a:srgbClr val="3A4A5C"/>
-                </a:solidFill>
-                <a:latin typeface="Fira Sans"/>
-              </a:rPr>
-              <a:t>Mediana: 30 minutos. Percentil 95: 98 minutos.</a:t>
-            </a:r>
-          </a:p>
-          <a:p>
+                  <a:srgbClr val="000000"/>
+                </a:solidFill>
+                <a:latin typeface="Fira Sans"/>
+              </a:rPr>
+              <a:t>El 23% de las personas no viajó ese día.</a:t>
+            </a:r>
+          </a:p>
+          <a:p>
+            <a:pPr>
+              <a:lnSpc>
+                <a:spcPct val="112000"/>
+              </a:lnSpc>
+              <a:spcAft>
+                <a:spcPts val="900"/>
+              </a:spcAft>
+            </a:pPr>
             <a:r>
               <a:rPr sz="1500" b="1">
                 <a:solidFill>
@@ -5115,14 +5116,22 @@
             <a:r>
               <a:rPr sz="1500" b="0">
                 <a:solidFill>
-                  <a:srgbClr val="3A4A5C"/>
-                </a:solidFill>
-                <a:latin typeface="Fira Sans"/>
-              </a:rPr>
-              <a:t>Máximo registrado: 1.335 minutos, un viaje de 22 horas.</a:t>
-            </a:r>
-          </a:p>
-          <a:p>
+                  <a:srgbClr val="000000"/>
+                </a:solidFill>
+                <a:latin typeface="Fira Sans"/>
+              </a:rPr>
+              <a:t>Media: 1,9 viajes. Mediana: 2 viajes.</a:t>
+            </a:r>
+          </a:p>
+          <a:p>
+            <a:pPr>
+              <a:lnSpc>
+                <a:spcPct val="112000"/>
+              </a:lnSpc>
+              <a:spcAft>
+                <a:spcPts val="900"/>
+              </a:spcAft>
+            </a:pPr>
             <a:r>
               <a:rPr sz="1500" b="1">
                 <a:solidFill>
@@ -5135,14 +5144,22 @@
             <a:r>
               <a:rPr sz="1500" b="0">
                 <a:solidFill>
-                  <a:srgbClr val="3A4A5C"/>
-                </a:solidFill>
-                <a:latin typeface="Fira Sans"/>
-              </a:rPr>
-              <a:t>¿Error de digitación? ¿Turno nocturno mal anotado?</a:t>
-            </a:r>
-          </a:p>
-          <a:p>
+                  <a:srgbClr val="000000"/>
+                </a:solidFill>
+                <a:latin typeface="Fira Sans"/>
+              </a:rPr>
+              <a:t>La media quedó bajo la mediana: la masa de ceros la desplaza.</a:t>
+            </a:r>
+          </a:p>
+          <a:p>
+            <a:pPr>
+              <a:lnSpc>
+                <a:spcPct val="112000"/>
+              </a:lnSpc>
+              <a:spcAft>
+                <a:spcPts val="900"/>
+              </a:spcAft>
+            </a:pPr>
             <a:r>
               <a:rPr sz="1500" b="1">
                 <a:solidFill>
@@ -5159,14 +5176,14 @@
                 </a:solidFill>
                 <a:latin typeface="Fira Sans"/>
               </a:rPr>
-              <a:t>Los valores extremos se investigan y la decisión se declara.</a:t>
+              <a:t>La dirección del sesgo depende de la forma de la distribución.</a:t>
             </a:r>
           </a:p>
         </p:txBody>
       </p:sp>
       <p:pic>
         <p:nvPicPr>
-          <p:cNvPr id="5" name="Picture 4" descr="04_duracion_viajes.png"/>
+          <p:cNvPr id="5" name="Picture 4" descr="02_viajes_por_persona.png"/>
           <p:cNvPicPr>
             <a:picLocks noChangeAspect="1"/>
           </p:cNvPicPr>
@@ -5181,7 +5198,7 @@
         <p:spPr>
           <a:xfrm>
             <a:off x="4892040" y="1371600"/>
-            <a:ext cx="3840480" cy="2146492"/>
+            <a:ext cx="3840480" cy="2191739"/>
           </a:xfrm>
           <a:prstGeom prst="rect">
             <a:avLst/>
@@ -5279,7 +5296,7 @@
                 </a:solidFill>
                 <a:latin typeface="Fira Sans"/>
               </a:rPr>
-              <a:t>Qué veremos hoy</a:t>
+              <a:t>Contenidos de la clase</a:t>
             </a:r>
           </a:p>
         </p:txBody>
@@ -5306,6 +5323,14 @@
           </a:bodyPr>
           <a:lstStyle/>
           <a:p>
+            <a:pPr>
+              <a:lnSpc>
+                <a:spcPct val="112000"/>
+              </a:lnSpc>
+              <a:spcAft>
+                <a:spcPts val="900"/>
+              </a:spcAft>
+            </a:pPr>
             <a:r>
               <a:rPr sz="1800" b="1">
                 <a:solidFill>
@@ -5318,14 +5343,22 @@
             <a:r>
               <a:rPr sz="1800" b="0">
                 <a:solidFill>
-                  <a:srgbClr val="3A4A5C"/>
-                </a:solidFill>
-                <a:latin typeface="Fira Sans"/>
-              </a:rPr>
-              <a:t>Le haremos preguntas a la Encuesta Origen Destino de Santiago 2012.</a:t>
-            </a:r>
-          </a:p>
-          <a:p>
+                  <a:srgbClr val="000000"/>
+                </a:solidFill>
+                <a:latin typeface="Fira Sans"/>
+              </a:rPr>
+              <a:t>1. Qué es un modelo.</a:t>
+            </a:r>
+          </a:p>
+          <a:p>
+            <a:pPr>
+              <a:lnSpc>
+                <a:spcPct val="112000"/>
+              </a:lnSpc>
+              <a:spcAft>
+                <a:spcPts val="900"/>
+              </a:spcAft>
+            </a:pPr>
             <a:r>
               <a:rPr sz="1800" b="1">
                 <a:solidFill>
@@ -5338,54 +5371,22 @@
             <a:r>
               <a:rPr sz="1800" b="0">
                 <a:solidFill>
-                  <a:srgbClr val="3A4A5C"/>
-                </a:solidFill>
-                <a:latin typeface="Fira Sans"/>
-              </a:rPr>
-              <a:t>Repasaremos Pandas aplicándolo a esas preguntas.</a:t>
-            </a:r>
-          </a:p>
-          <a:p>
-            <a:r>
-              <a:rPr sz="1400" b="0">
-                <a:solidFill>
-                  <a:srgbClr val="6B7785"/>
-                </a:solidFill>
-                <a:latin typeface="Fira Sans"/>
-              </a:rPr>
-              <a:t>     ◦  </a:t>
-            </a:r>
-            <a:r>
-              <a:rPr sz="1400" b="0">
-                <a:solidFill>
-                  <a:srgbClr val="6B7785"/>
-                </a:solidFill>
-                <a:latin typeface="Fira Sans"/>
-              </a:rPr>
-              <a:t>Merge y sus variantes, groupby, medidas de resumen.</a:t>
-            </a:r>
-          </a:p>
-          <a:p>
-            <a:r>
-              <a:rPr sz="1400" b="0">
-                <a:solidFill>
-                  <a:srgbClr val="6B7785"/>
-                </a:solidFill>
-                <a:latin typeface="Fira Sans"/>
-              </a:rPr>
-              <a:t>     ◦  </a:t>
-            </a:r>
-            <a:r>
-              <a:rPr sz="1400" b="0">
-                <a:solidFill>
-                  <a:srgbClr val="6B7785"/>
-                </a:solidFill>
-                <a:latin typeface="Fira Sans"/>
-              </a:rPr>
-              <a:t>Lo probablemente nuevo: tablas de códigos y factores de expansión.</a:t>
-            </a:r>
-          </a:p>
-          <a:p>
+                  <a:srgbClr val="000000"/>
+                </a:solidFill>
+                <a:latin typeface="Fira Sans"/>
+              </a:rPr>
+              <a:t>2. Inferencia y predicción: dos objetivos distintos.</a:t>
+            </a:r>
+          </a:p>
+          <a:p>
+            <a:pPr>
+              <a:lnSpc>
+                <a:spcPct val="112000"/>
+              </a:lnSpc>
+              <a:spcAft>
+                <a:spcPts val="900"/>
+              </a:spcAft>
+            </a:pPr>
             <a:r>
               <a:rPr sz="1800" b="1">
                 <a:solidFill>
@@ -5396,13 +5397,125 @@
               <a:t>▸ </a:t>
             </a:r>
             <a:r>
+              <a:rPr sz="1800" b="0">
+                <a:solidFill>
+                  <a:srgbClr val="000000"/>
+                </a:solidFill>
+                <a:latin typeface="Fira Sans"/>
+              </a:rPr>
+              <a:t>3. Correlación (Pearson y Spearman) y causalidad.</a:t>
+            </a:r>
+          </a:p>
+          <a:p>
+            <a:pPr>
+              <a:lnSpc>
+                <a:spcPct val="112000"/>
+              </a:lnSpc>
+              <a:spcAft>
+                <a:spcPts val="900"/>
+              </a:spcAft>
+            </a:pPr>
+            <a:r>
               <a:rPr sz="1800" b="1">
                 <a:solidFill>
+                  <a:srgbClr val="E0A437"/>
+                </a:solidFill>
+                <a:latin typeface="Fira Sans"/>
+              </a:rPr>
+              <a:t>▸ </a:t>
+            </a:r>
+            <a:r>
+              <a:rPr sz="1800" b="0">
+                <a:solidFill>
+                  <a:srgbClr val="000000"/>
+                </a:solidFill>
+                <a:latin typeface="Fira Sans"/>
+              </a:rPr>
+              <a:t>4. Tipos de datos.</a:t>
+            </a:r>
+          </a:p>
+          <a:p>
+            <a:pPr>
+              <a:lnSpc>
+                <a:spcPct val="112000"/>
+              </a:lnSpc>
+              <a:spcAft>
+                <a:spcPts val="900"/>
+              </a:spcAft>
+            </a:pPr>
+            <a:r>
+              <a:rPr sz="1800" b="1">
+                <a:solidFill>
+                  <a:srgbClr val="E0A437"/>
+                </a:solidFill>
+                <a:latin typeface="Fira Sans"/>
+              </a:rPr>
+              <a:t>▸ </a:t>
+            </a:r>
+            <a:r>
+              <a:rPr sz="1800" b="0">
+                <a:solidFill>
+                  <a:srgbClr val="000000"/>
+                </a:solidFill>
+                <a:latin typeface="Fira Sans"/>
+              </a:rPr>
+              <a:t>5. El análisis exploratorio de datos.</a:t>
+            </a:r>
+          </a:p>
+          <a:p>
+            <a:pPr>
+              <a:lnSpc>
+                <a:spcPct val="112000"/>
+              </a:lnSpc>
+              <a:spcAft>
+                <a:spcPts val="900"/>
+              </a:spcAft>
+            </a:pPr>
+            <a:r>
+              <a:rPr sz="1800" b="1">
+                <a:solidFill>
+                  <a:srgbClr val="E0A437"/>
+                </a:solidFill>
+                <a:latin typeface="Fira Sans"/>
+              </a:rPr>
+              <a:t>▸ </a:t>
+            </a:r>
+            <a:r>
+              <a:rPr sz="1800" b="0">
+                <a:solidFill>
+                  <a:srgbClr val="000000"/>
+                </a:solidFill>
+                <a:latin typeface="Fira Sans"/>
+              </a:rPr>
+              <a:t>6. Aplicación: la Encuesta Origen Destino de Santiago, con Pandas.</a:t>
+            </a:r>
+          </a:p>
+          <a:p>
+            <a:pPr>
+              <a:lnSpc>
+                <a:spcPct val="112000"/>
+              </a:lnSpc>
+              <a:spcAft>
+                <a:spcPts val="900"/>
+              </a:spcAft>
+            </a:pPr>
+            <a:r>
+              <a:rPr sz="1800" b="1">
+                <a:solidFill>
+                  <a:srgbClr val="E0A437"/>
+                </a:solidFill>
+                <a:latin typeface="Fira Sans"/>
+              </a:rPr>
+              <a:t>▸ </a:t>
+            </a:r>
+            <a:r>
+              <a:rPr sz="1800" b="1">
+                <a:solidFill>
                   <a:srgbClr val="1D3557"/>
                 </a:solidFill>
                 <a:latin typeface="Fira Sans"/>
               </a:rPr>
-              <a:t>En el segundo bloque parte la Tarea 1: el retrato de tu comuna.</a:t>
+              <a:t>En el segundo bloque comienza la Tarea 1.</a:t>
             </a:r>
           </a:p>
         </p:txBody>
@@ -5498,137 +5611,14 @@
                 </a:solidFill>
                 <a:latin typeface="Fira Sans"/>
               </a:rPr>
-              <a:t>¿En qué se mueve Santiago?</a:t>
-            </a:r>
-          </a:p>
-        </p:txBody>
-      </p:sp>
-      <p:sp>
-        <p:nvSpPr>
-          <p:cNvPr id="4" name="TextBox 3"/>
-          <p:cNvSpPr txBox="1"/>
-          <p:nvPr/>
-        </p:nvSpPr>
-        <p:spPr>
-          <a:xfrm>
-            <a:off x="502920" y="1252728"/>
-            <a:ext cx="4023360" cy="3200400"/>
-          </a:xfrm>
-          <a:prstGeom prst="rect">
-            <a:avLst/>
-          </a:prstGeom>
-          <a:noFill/>
-        </p:spPr>
-        <p:txBody>
-          <a:bodyPr wrap="square">
-            <a:spAutoFit/>
-          </a:bodyPr>
-          <a:lstStyle/>
-          <a:p>
-            <a:r>
-              <a:rPr sz="1500" b="1">
-                <a:solidFill>
-                  <a:srgbClr val="E0A437"/>
-                </a:solidFill>
-                <a:latin typeface="Fira Sans"/>
-              </a:rPr>
-              <a:t>▸ </a:t>
-            </a:r>
-            <a:r>
-              <a:rPr sz="1500" b="0">
-                <a:solidFill>
-                  <a:srgbClr val="3A4A5C"/>
-                </a:solidFill>
-                <a:latin typeface="Fira Sans"/>
-              </a:rPr>
-              <a:t>Dos merges y un groupby ponderado por factor.</a:t>
-            </a:r>
-          </a:p>
-          <a:p>
-            <a:r>
-              <a:rPr sz="1300" b="0">
-                <a:solidFill>
-                  <a:srgbClr val="6B7785"/>
-                </a:solidFill>
-                <a:latin typeface="Fira Sans"/>
-              </a:rPr>
-              <a:t>     ◦  </a:t>
-            </a:r>
-            <a:r>
-              <a:rPr sz="1300" b="0">
-                <a:solidFill>
-                  <a:srgbClr val="6B7785"/>
-                </a:solidFill>
-                <a:latin typeface="Fira Sans"/>
-              </a:rPr>
-              <a:t>Caminata: 34% de los viajes.</a:t>
-            </a:r>
-          </a:p>
-          <a:p>
-            <a:r>
-              <a:rPr sz="1300" b="0">
-                <a:solidFill>
-                  <a:srgbClr val="6B7785"/>
-                </a:solidFill>
-                <a:latin typeface="Fira Sans"/>
-              </a:rPr>
-              <a:t>     ◦  </a:t>
-            </a:r>
-            <a:r>
-              <a:rPr sz="1300" b="0">
-                <a:solidFill>
-                  <a:srgbClr val="6B7785"/>
-                </a:solidFill>
-                <a:latin typeface="Fira Sans"/>
-              </a:rPr>
-              <a:t>Transporte público (Bip!): 24%.</a:t>
-            </a:r>
-          </a:p>
-          <a:p>
-            <a:r>
-              <a:rPr sz="1300" b="0">
-                <a:solidFill>
-                  <a:srgbClr val="6B7785"/>
-                </a:solidFill>
-                <a:latin typeface="Fira Sans"/>
-              </a:rPr>
-              <a:t>     ◦  </a:t>
-            </a:r>
-            <a:r>
-              <a:rPr sz="1300" b="0">
-                <a:solidFill>
-                  <a:srgbClr val="6B7785"/>
-                </a:solidFill>
-                <a:latin typeface="Fira Sans"/>
-              </a:rPr>
-              <a:t>Auto: 23%.</a:t>
-            </a:r>
-          </a:p>
-          <a:p>
-            <a:r>
-              <a:rPr sz="1500" b="1">
-                <a:solidFill>
-                  <a:srgbClr val="E0A437"/>
-                </a:solidFill>
-                <a:latin typeface="Fira Sans"/>
-              </a:rPr>
-              <a:t>▸ </a:t>
-            </a:r>
-            <a:r>
-              <a:rPr sz="1500" b="1">
-                <a:solidFill>
-                  <a:srgbClr val="1D3557"/>
-                </a:solidFill>
-                <a:latin typeface="Fira Sans"/>
-              </a:rPr>
-              <a:t>La partición modal de un día laboral, calculada desde los microdatos.</a:t>
+              <a:t>Los factores de expansión: de la muestra a la ciudad</a:t>
             </a:r>
           </a:p>
         </p:txBody>
       </p:sp>
       <p:pic>
         <p:nvPicPr>
-          <p:cNvPr id="5" name="Picture 4" descr="03_reparto_modal.png"/>
+          <p:cNvPr id="4" name="Picture 3" descr="06_diagrama_factores.png"/>
           <p:cNvPicPr>
             <a:picLocks noChangeAspect="1"/>
           </p:cNvPicPr>
@@ -5642,14 +5632,48 @@
         </p:blipFill>
         <p:spPr>
           <a:xfrm>
-            <a:off x="4892040" y="1371600"/>
-            <a:ext cx="3840480" cy="1938578"/>
+            <a:off x="1417319" y="1143000"/>
+            <a:ext cx="6309360" cy="2871234"/>
           </a:xfrm>
           <a:prstGeom prst="rect">
             <a:avLst/>
           </a:prstGeom>
         </p:spPr>
       </p:pic>
+      <p:sp>
+        <p:nvSpPr>
+          <p:cNvPr id="5" name="TextBox 4"/>
+          <p:cNvSpPr txBox="1"/>
+          <p:nvPr/>
+        </p:nvSpPr>
+        <p:spPr>
+          <a:xfrm>
+            <a:off x="704088" y="4434840"/>
+            <a:ext cx="7744968" cy="457200"/>
+          </a:xfrm>
+          <a:prstGeom prst="rect">
+            <a:avLst/>
+          </a:prstGeom>
+          <a:noFill/>
+        </p:spPr>
+        <p:txBody>
+          <a:bodyPr wrap="square">
+            <a:spAutoFit/>
+          </a:bodyPr>
+          <a:lstStyle/>
+          <a:p>
+            <a:r>
+              <a:rPr sz="1300" b="0">
+                <a:solidFill>
+                  <a:srgbClr val="333333"/>
+                </a:solidFill>
+                <a:latin typeface="Fira Sans"/>
+              </a:rPr>
+              <a:t>Contar filas responde por la muestra; sumar factores responde por la ciudad.</a:t>
+            </a:r>
+          </a:p>
+        </p:txBody>
+      </p:sp>
     </p:spTree>
   </p:cSld>
   <p:clrMapOvr>
@@ -5741,14 +5765,149 @@
                 </a:solidFill>
                 <a:latin typeface="Fira Sans"/>
               </a:rPr>
-              <a:t>¿Se mueve igual toda la ciudad?</a:t>
+              <a:t>El ingreso de los hogares: media y mediana</a:t>
+            </a:r>
+          </a:p>
+        </p:txBody>
+      </p:sp>
+      <p:sp>
+        <p:nvSpPr>
+          <p:cNvPr id="4" name="TextBox 3"/>
+          <p:cNvSpPr txBox="1"/>
+          <p:nvPr/>
+        </p:nvSpPr>
+        <p:spPr>
+          <a:xfrm>
+            <a:off x="502920" y="1252728"/>
+            <a:ext cx="4023360" cy="3200400"/>
+          </a:xfrm>
+          <a:prstGeom prst="rect">
+            <a:avLst/>
+          </a:prstGeom>
+          <a:noFill/>
+        </p:spPr>
+        <p:txBody>
+          <a:bodyPr wrap="square">
+            <a:spAutoFit/>
+          </a:bodyPr>
+          <a:lstStyle/>
+          <a:p>
+            <a:pPr>
+              <a:lnSpc>
+                <a:spcPct val="112000"/>
+              </a:lnSpc>
+              <a:spcAft>
+                <a:spcPts val="900"/>
+              </a:spcAft>
+            </a:pPr>
+            <a:r>
+              <a:rPr sz="1500" b="1">
+                <a:solidFill>
+                  <a:srgbClr val="E0A437"/>
+                </a:solidFill>
+                <a:latin typeface="Fira Sans"/>
+              </a:rPr>
+              <a:t>▸ </a:t>
+            </a:r>
+            <a:r>
+              <a:rPr sz="1500" b="0">
+                <a:solidFill>
+                  <a:srgbClr val="000000"/>
+                </a:solidFill>
+                <a:latin typeface="Fira Sans"/>
+              </a:rPr>
+              <a:t>Media: $688.274. Mediana: $507.826.</a:t>
+            </a:r>
+          </a:p>
+          <a:p>
+            <a:pPr>
+              <a:lnSpc>
+                <a:spcPct val="112000"/>
+              </a:lnSpc>
+              <a:spcAft>
+                <a:spcPts val="900"/>
+              </a:spcAft>
+            </a:pPr>
+            <a:r>
+              <a:rPr sz="1500" b="1">
+                <a:solidFill>
+                  <a:srgbClr val="E0A437"/>
+                </a:solidFill>
+                <a:latin typeface="Fira Sans"/>
+              </a:rPr>
+              <a:t>▸ </a:t>
+            </a:r>
+            <a:r>
+              <a:rPr sz="1500" b="0">
+                <a:solidFill>
+                  <a:srgbClr val="000000"/>
+                </a:solidFill>
+                <a:latin typeface="Fira Sans"/>
+              </a:rPr>
+              <a:t>La media es un 36% más alta que la mediana.</a:t>
+            </a:r>
+          </a:p>
+          <a:p>
+            <a:pPr>
+              <a:lnSpc>
+                <a:spcPct val="112000"/>
+              </a:lnSpc>
+              <a:spcAft>
+                <a:spcPts val="900"/>
+              </a:spcAft>
+            </a:pPr>
+            <a:r>
+              <a:rPr sz="1500" b="1">
+                <a:solidFill>
+                  <a:srgbClr val="E0A437"/>
+                </a:solidFill>
+                <a:latin typeface="Fira Sans"/>
+              </a:rPr>
+              <a:t>▸ </a:t>
+            </a:r>
+            <a:r>
+              <a:rPr sz="1500" b="0">
+                <a:solidFill>
+                  <a:srgbClr val="000000"/>
+                </a:solidFill>
+                <a:latin typeface="Fira Sans"/>
+              </a:rPr>
+              <a:t>Los ingresos altos desplazan el promedio; la mayoría gana menos.</a:t>
+            </a:r>
+          </a:p>
+          <a:p>
+            <a:pPr>
+              <a:lnSpc>
+                <a:spcPct val="112000"/>
+              </a:lnSpc>
+              <a:spcAft>
+                <a:spcPts val="900"/>
+              </a:spcAft>
+            </a:pPr>
+            <a:r>
+              <a:rPr sz="1500" b="1">
+                <a:solidFill>
+                  <a:srgbClr val="E0A437"/>
+                </a:solidFill>
+                <a:latin typeface="Fira Sans"/>
+              </a:rPr>
+              <a:t>▸ </a:t>
+            </a:r>
+            <a:r>
+              <a:rPr sz="1500" b="1">
+                <a:solidFill>
+                  <a:srgbClr val="1D3557"/>
+                </a:solidFill>
+                <a:latin typeface="Fira Sans"/>
+              </a:rPr>
+              <a:t>El promedio describe una situación en la que la mayoría no está.</a:t>
             </a:r>
           </a:p>
         </p:txBody>
       </p:sp>
       <p:pic>
         <p:nvPicPr>
-          <p:cNvPr id="4" name="Picture 3" descr="08_modo_por_comuna.png"/>
+          <p:cNvPr id="5" name="Picture 4" descr="01_ingreso_media_mediana.png"/>
           <p:cNvPicPr>
             <a:picLocks noChangeAspect="1"/>
           </p:cNvPicPr>
@@ -5762,48 +5921,14 @@
         </p:blipFill>
         <p:spPr>
           <a:xfrm>
-            <a:off x="1994250" y="1143000"/>
-            <a:ext cx="5155498" cy="3154679"/>
+            <a:off x="4892040" y="1371600"/>
+            <a:ext cx="3840480" cy="2182719"/>
           </a:xfrm>
           <a:prstGeom prst="rect">
             <a:avLst/>
           </a:prstGeom>
         </p:spPr>
       </p:pic>
-      <p:sp>
-        <p:nvSpPr>
-          <p:cNvPr id="5" name="TextBox 4"/>
-          <p:cNvSpPr txBox="1"/>
-          <p:nvPr/>
-        </p:nvSpPr>
-        <p:spPr>
-          <a:xfrm>
-            <a:off x="704088" y="4434840"/>
-            <a:ext cx="7744968" cy="457200"/>
-          </a:xfrm>
-          <a:prstGeom prst="rect">
-            <a:avLst/>
-          </a:prstGeom>
-          <a:noFill/>
-        </p:spPr>
-        <p:txBody>
-          <a:bodyPr wrap="square">
-            <a:spAutoFit/>
-          </a:bodyPr>
-          <a:lstStyle/>
-          <a:p>
-            <a:r>
-              <a:rPr sz="1300" b="0">
-                <a:solidFill>
-                  <a:srgbClr val="6B7785"/>
-                </a:solidFill>
-                <a:latin typeface="Fira Sans"/>
-              </a:rPr>
-              <a:t>Normalizar por comuna permite comparar proporciones entre comunas de tamaños muy distintos.</a:t>
-            </a:r>
-          </a:p>
-        </p:txBody>
-      </p:sp>
     </p:spTree>
   </p:cSld>
   <p:clrMapOvr>
@@ -5895,7 +6020,7 @@
                 </a:solidFill>
                 <a:latin typeface="Fira Sans"/>
               </a:rPr>
-              <a:t>¿El ingreso explica el uso de transporte público?</a:t>
+              <a:t>La duración de los viajes: valores extremos</a:t>
             </a:r>
           </a:p>
         </p:txBody>
@@ -5922,6 +6047,14 @@
           </a:bodyPr>
           <a:lstStyle/>
           <a:p>
+            <a:pPr>
+              <a:lnSpc>
+                <a:spcPct val="112000"/>
+              </a:lnSpc>
+              <a:spcAft>
+                <a:spcPts val="900"/>
+              </a:spcAft>
+            </a:pPr>
             <a:r>
               <a:rPr sz="1500" b="1">
                 <a:solidFill>
@@ -5934,74 +6067,22 @@
             <a:r>
               <a:rPr sz="1500" b="0">
                 <a:solidFill>
-                  <a:srgbClr val="3A4A5C"/>
-                </a:solidFill>
-                <a:latin typeface="Fira Sans"/>
-              </a:rPr>
-              <a:t>Cada punto es una comuna: ingreso medio contra proporción de viajes en transporte público.</a:t>
-            </a:r>
-          </a:p>
-          <a:p>
-            <a:r>
-              <a:rPr sz="1300" b="0">
-                <a:solidFill>
-                  <a:srgbClr val="6B7785"/>
-                </a:solidFill>
-                <a:latin typeface="Fira Sans"/>
-              </a:rPr>
-              <a:t>     ◦  </a:t>
-            </a:r>
-            <a:r>
-              <a:rPr sz="1300" b="0">
-                <a:solidFill>
-                  <a:srgbClr val="6B7785"/>
-                </a:solidFill>
-                <a:latin typeface="Fira Sans"/>
-              </a:rPr>
-              <a:t>Periferia (Buin, Melipilla): poco transporte público; la red no llega.</a:t>
-            </a:r>
-          </a:p>
-          <a:p>
-            <a:r>
-              <a:rPr sz="1300" b="0">
-                <a:solidFill>
-                  <a:srgbClr val="6B7785"/>
-                </a:solidFill>
-                <a:latin typeface="Fira Sans"/>
-              </a:rPr>
-              <a:t>     ◦  </a:t>
-            </a:r>
-            <a:r>
-              <a:rPr sz="1300" b="0">
-                <a:solidFill>
-                  <a:srgbClr val="6B7785"/>
-                </a:solidFill>
-                <a:latin typeface="Fira Sans"/>
-              </a:rPr>
-              <a:t>Ingresos altos (Vitacura, Lo Barnechea): conectadas, con poco uso.</a:t>
-            </a:r>
-          </a:p>
-          <a:p>
-            <a:r>
-              <a:rPr sz="1300" b="0">
-                <a:solidFill>
-                  <a:srgbClr val="6B7785"/>
-                </a:solidFill>
-                <a:latin typeface="Fira Sans"/>
-              </a:rPr>
-              <a:t>     ◦  </a:t>
-            </a:r>
-            <a:r>
-              <a:rPr sz="1300" b="0">
-                <a:solidFill>
-                  <a:srgbClr val="6B7785"/>
-                </a:solidFill>
-                <a:latin typeface="Fira Sans"/>
-              </a:rPr>
-              <a:t>Correlación de Pearson: -0,17. La asociación lineal es débil.</a:t>
-            </a:r>
-          </a:p>
-          <a:p>
+                  <a:srgbClr val="000000"/>
+                </a:solidFill>
+                <a:latin typeface="Fira Sans"/>
+              </a:rPr>
+              <a:t>Mediana: 30 minutos. Percentil 95: 98 minutos.</a:t>
+            </a:r>
+          </a:p>
+          <a:p>
+            <a:pPr>
+              <a:lnSpc>
+                <a:spcPct val="112000"/>
+              </a:lnSpc>
+              <a:spcAft>
+                <a:spcPts val="900"/>
+              </a:spcAft>
+            </a:pPr>
             <a:r>
               <a:rPr sz="1500" b="1">
                 <a:solidFill>
@@ -6012,20 +6093,76 @@
               <a:t>▸ </a:t>
             </a:r>
             <a:r>
+              <a:rPr sz="1500" b="0">
+                <a:solidFill>
+                  <a:srgbClr val="000000"/>
+                </a:solidFill>
+                <a:latin typeface="Fira Sans"/>
+              </a:rPr>
+              <a:t>Máximo registrado: 1.335 minutos, un viaje de 22 horas.</a:t>
+            </a:r>
+          </a:p>
+          <a:p>
+            <a:pPr>
+              <a:lnSpc>
+                <a:spcPct val="112000"/>
+              </a:lnSpc>
+              <a:spcAft>
+                <a:spcPts val="900"/>
+              </a:spcAft>
+            </a:pPr>
+            <a:r>
               <a:rPr sz="1500" b="1">
                 <a:solidFill>
+                  <a:srgbClr val="E0A437"/>
+                </a:solidFill>
+                <a:latin typeface="Fira Sans"/>
+              </a:rPr>
+              <a:t>▸ </a:t>
+            </a:r>
+            <a:r>
+              <a:rPr sz="1500" b="0">
+                <a:solidFill>
+                  <a:srgbClr val="000000"/>
+                </a:solidFill>
+                <a:latin typeface="Fira Sans"/>
+              </a:rPr>
+              <a:t>¿Error de digitación? ¿Turno nocturno mal anotado?</a:t>
+            </a:r>
+          </a:p>
+          <a:p>
+            <a:pPr>
+              <a:lnSpc>
+                <a:spcPct val="112000"/>
+              </a:lnSpc>
+              <a:spcAft>
+                <a:spcPts val="900"/>
+              </a:spcAft>
+            </a:pPr>
+            <a:r>
+              <a:rPr sz="1500" b="1">
+                <a:solidFill>
+                  <a:srgbClr val="E0A437"/>
+                </a:solidFill>
+                <a:latin typeface="Fira Sans"/>
+              </a:rPr>
+              <a:t>▸ </a:t>
+            </a:r>
+            <a:r>
+              <a:rPr sz="1500" b="1">
+                <a:solidFill>
                   <a:srgbClr val="1D3557"/>
                 </a:solidFill>
                 <a:latin typeface="Fira Sans"/>
               </a:rPr>
-              <a:t>El coeficiente no reemplaza al gráfico: la estructura está en los grupos.</a:t>
+              <a:t>Los valores extremos se investigan y la decisión se declara.</a:t>
             </a:r>
           </a:p>
         </p:txBody>
       </p:sp>
       <p:pic>
         <p:nvPicPr>
-          <p:cNvPr id="5" name="Picture 4" descr="09_ingreso_vs_tp.png"/>
+          <p:cNvPr id="5" name="Picture 4" descr="04_duracion_viajes.png"/>
           <p:cNvPicPr>
             <a:picLocks noChangeAspect="1"/>
           </p:cNvPicPr>
@@ -6040,7 +6177,7 @@
         <p:spPr>
           <a:xfrm>
             <a:off x="4892040" y="1371600"/>
-            <a:ext cx="3840480" cy="2526979"/>
+            <a:ext cx="3840480" cy="2146492"/>
           </a:xfrm>
           <a:prstGeom prst="rect">
             <a:avLst/>
@@ -6138,7 +6275,7 @@
                 </a:solidFill>
                 <a:latin typeface="Fira Sans"/>
               </a:rPr>
-              <a:t>Correlación y causalidad</a:t>
+              <a:t>La partición modal del Gran Santiago</a:t>
             </a:r>
           </a:p>
         </p:txBody>
@@ -6151,8 +6288,8 @@
         </p:nvSpPr>
         <p:spPr>
           <a:xfrm>
-            <a:off x="704088" y="1353312"/>
-            <a:ext cx="7744968" cy="3300984"/>
+            <a:off x="502920" y="1252728"/>
+            <a:ext cx="4023360" cy="3200400"/>
           </a:xfrm>
           <a:prstGeom prst="rect">
             <a:avLst/>
@@ -6165,8 +6302,16 @@
           </a:bodyPr>
           <a:lstStyle/>
           <a:p>
-            <a:r>
-              <a:rPr sz="1800" b="1">
+            <a:pPr>
+              <a:lnSpc>
+                <a:spcPct val="112000"/>
+              </a:lnSpc>
+              <a:spcAft>
+                <a:spcPts val="900"/>
+              </a:spcAft>
+            </a:pPr>
+            <a:r>
+              <a:rPr sz="1500" b="1">
                 <a:solidFill>
                   <a:srgbClr val="E0A437"/>
                 </a:solidFill>
@@ -6175,18 +6320,110 @@
               <a:t>▸ </a:t>
             </a:r>
             <a:r>
-              <a:rPr sz="1800" b="0">
-                <a:solidFill>
-                  <a:srgbClr val="3A4A5C"/>
-                </a:solidFill>
-                <a:latin typeface="Fira Sans"/>
-              </a:rPr>
-              <a:t>Correlación: dos variables varían juntas.</a:t>
-            </a:r>
-          </a:p>
-          <a:p>
-            <a:r>
-              <a:rPr sz="1800" b="1">
+              <a:rPr sz="1500" b="0">
+                <a:solidFill>
+                  <a:srgbClr val="000000"/>
+                </a:solidFill>
+                <a:latin typeface="Fira Sans"/>
+              </a:rPr>
+              <a:t>Dos merges y un groupby ponderado por factor.</a:t>
+            </a:r>
+          </a:p>
+          <a:p>
+            <a:pPr>
+              <a:lnSpc>
+                <a:spcPct val="112000"/>
+              </a:lnSpc>
+              <a:spcAft>
+                <a:spcPts val="500"/>
+              </a:spcAft>
+            </a:pPr>
+            <a:r>
+              <a:rPr sz="1300" b="0">
+                <a:solidFill>
+                  <a:srgbClr val="333333"/>
+                </a:solidFill>
+                <a:latin typeface="Fira Sans"/>
+              </a:rPr>
+              <a:t>     ◦  </a:t>
+            </a:r>
+            <a:r>
+              <a:rPr sz="1300" b="0">
+                <a:solidFill>
+                  <a:srgbClr val="333333"/>
+                </a:solidFill>
+                <a:latin typeface="Fira Sans"/>
+              </a:rPr>
+              <a:t>Caminata: 34% de los viajes.</a:t>
+            </a:r>
+          </a:p>
+          <a:p>
+            <a:pPr>
+              <a:lnSpc>
+                <a:spcPct val="112000"/>
+              </a:lnSpc>
+              <a:spcAft>
+                <a:spcPts val="500"/>
+              </a:spcAft>
+            </a:pPr>
+            <a:r>
+              <a:rPr sz="1300" b="0">
+                <a:solidFill>
+                  <a:srgbClr val="333333"/>
+                </a:solidFill>
+                <a:latin typeface="Fira Sans"/>
+              </a:rPr>
+              <a:t>     ◦  </a:t>
+            </a:r>
+            <a:r>
+              <a:rPr sz="1300" b="0">
+                <a:solidFill>
+                  <a:srgbClr val="333333"/>
+                </a:solidFill>
+                <a:latin typeface="Fira Sans"/>
+              </a:rPr>
+              <a:t>Transporte público (Bip!): 24%.</a:t>
+            </a:r>
+          </a:p>
+          <a:p>
+            <a:pPr>
+              <a:lnSpc>
+                <a:spcPct val="112000"/>
+              </a:lnSpc>
+              <a:spcAft>
+                <a:spcPts val="500"/>
+              </a:spcAft>
+            </a:pPr>
+            <a:r>
+              <a:rPr sz="1300" b="0">
+                <a:solidFill>
+                  <a:srgbClr val="333333"/>
+                </a:solidFill>
+                <a:latin typeface="Fira Sans"/>
+              </a:rPr>
+              <a:t>     ◦  </a:t>
+            </a:r>
+            <a:r>
+              <a:rPr sz="1300" b="0">
+                <a:solidFill>
+                  <a:srgbClr val="333333"/>
+                </a:solidFill>
+                <a:latin typeface="Fira Sans"/>
+              </a:rPr>
+              <a:t>Auto: 23%.</a:t>
+            </a:r>
+          </a:p>
+          <a:p>
+            <a:pPr>
+              <a:lnSpc>
+                <a:spcPct val="112000"/>
+              </a:lnSpc>
+              <a:spcAft>
+                <a:spcPts val="900"/>
+              </a:spcAft>
+            </a:pPr>
+            <a:r>
+              <a:rPr sz="1500" b="1">
                 <a:solidFill>
                   <a:srgbClr val="E0A437"/>
                 </a:solidFill>
@@ -6195,97 +6432,41 @@
               <a:t>▸ </a:t>
             </a:r>
             <a:r>
-              <a:rPr sz="1800" b="0">
-                <a:solidFill>
-                  <a:srgbClr val="3A4A5C"/>
-                </a:solidFill>
-                <a:latin typeface="Fira Sans"/>
-              </a:rPr>
-              <a:t>Causalidad: intervenir una cambiaría la otra. Es una afirmación más fuerte.</a:t>
-            </a:r>
-          </a:p>
-          <a:p>
-            <a:r>
-              <a:rPr sz="1400" b="0">
-                <a:solidFill>
-                  <a:srgbClr val="6B7785"/>
-                </a:solidFill>
-                <a:latin typeface="Fira Sans"/>
-              </a:rPr>
-              <a:t>     ◦  </a:t>
-            </a:r>
-            <a:r>
-              <a:rPr sz="1400" b="0">
-                <a:solidFill>
-                  <a:srgbClr val="6B7785"/>
-                </a:solidFill>
-                <a:latin typeface="Fira Sans"/>
-              </a:rPr>
-              <a:t>Los datos observacionales muestran lo primero, no bastan para lo segundo.</a:t>
-            </a:r>
-          </a:p>
-          <a:p>
-            <a:r>
-              <a:rPr sz="1400" b="0">
-                <a:solidFill>
-                  <a:srgbClr val="6B7785"/>
-                </a:solidFill>
-                <a:latin typeface="Fira Sans"/>
-              </a:rPr>
-              <a:t>     ◦  </a:t>
-            </a:r>
-            <a:r>
-              <a:rPr sz="1400" b="0">
-                <a:solidFill>
-                  <a:srgbClr val="6B7785"/>
-                </a:solidFill>
-                <a:latin typeface="Fira Sans"/>
-              </a:rPr>
-              <a:t>Variable de confusión: la cobertura de la red afecta el uso y no es independiente del ingreso.</a:t>
-            </a:r>
-          </a:p>
-          <a:p>
-            <a:r>
-              <a:rPr sz="1400" b="0">
-                <a:solidFill>
-                  <a:srgbClr val="6B7785"/>
-                </a:solidFill>
-                <a:latin typeface="Fira Sans"/>
-              </a:rPr>
-              <a:t>     ◦  </a:t>
-            </a:r>
-            <a:r>
-              <a:rPr sz="1400" b="0">
-                <a:solidFill>
-                  <a:srgbClr val="6B7785"/>
-                </a:solidFill>
-                <a:latin typeface="Fira Sans"/>
-              </a:rPr>
-              <a:t>La inferencia causal tiene métodos propios; este curso no los cubre.</a:t>
-            </a:r>
-          </a:p>
-          <a:p>
-            <a:r>
-              <a:rPr sz="1800" b="1">
-                <a:solidFill>
-                  <a:srgbClr val="E0A437"/>
-                </a:solidFill>
-                <a:latin typeface="Fira Sans"/>
-              </a:rPr>
-              <a:t>▸ </a:t>
-            </a:r>
-            <a:r>
-              <a:rPr sz="1800" b="1">
+              <a:rPr sz="1500" b="1">
                 <a:solidFill>
                   <a:srgbClr val="1D3557"/>
                 </a:solidFill>
                 <a:latin typeface="Fira Sans"/>
               </a:rPr>
-              <a:t>Una asociación se reporta como asociación, sin verbos causales que los datos no respaldan.</a:t>
-            </a:r>
-          </a:p>
-        </p:txBody>
-      </p:sp>
+              <a:t>Calculada desde los microdatos, con los factores de un día laboral.</a:t>
+            </a:r>
+          </a:p>
+        </p:txBody>
+      </p:sp>
+      <p:pic>
+        <p:nvPicPr>
+          <p:cNvPr id="5" name="Picture 4" descr="03_reparto_modal.png"/>
+          <p:cNvPicPr>
+            <a:picLocks noChangeAspect="1"/>
+          </p:cNvPicPr>
+          <p:nvPr/>
+        </p:nvPicPr>
+        <p:blipFill>
+          <a:blip r:embed="rId2"/>
+          <a:stretch>
+            <a:fillRect/>
+          </a:stretch>
+        </p:blipFill>
+        <p:spPr>
+          <a:xfrm>
+            <a:off x="4892040" y="1371600"/>
+            <a:ext cx="3840480" cy="1938578"/>
+          </a:xfrm>
+          <a:prstGeom prst="rect">
+            <a:avLst/>
+          </a:prstGeom>
+        </p:spPr>
+      </p:pic>
     </p:spTree>
   </p:cSld>
   <p:clrMapOvr>
@@ -6377,14 +6558,14 @@
                 </a:solidFill>
                 <a:latin typeface="Fira Sans"/>
               </a:rPr>
-              <a:t>¿Cambian las rutinas durante la semana?</a:t>
+              <a:t>El reparto modal difiere entre comunas</a:t>
             </a:r>
           </a:p>
         </p:txBody>
       </p:sp>
       <p:pic>
         <p:nvPicPr>
-          <p:cNvPr id="4" name="Picture 3" descr="10_heatmap_rutinas.png"/>
+          <p:cNvPr id="4" name="Picture 3" descr="08_modo_por_comuna.png"/>
           <p:cNvPicPr>
             <a:picLocks noChangeAspect="1"/>
           </p:cNvPicPr>
@@ -6398,8 +6579,8 @@
         </p:blipFill>
         <p:spPr>
           <a:xfrm>
-            <a:off x="1563778" y="1143000"/>
-            <a:ext cx="6016443" cy="3154680"/>
+            <a:off x="1994250" y="1143000"/>
+            <a:ext cx="5155498" cy="3154679"/>
           </a:xfrm>
           <a:prstGeom prst="rect">
             <a:avLst/>
@@ -6431,11 +6612,11 @@
             <a:r>
               <a:rPr sz="1300" b="0">
                 <a:solidFill>
-                  <a:srgbClr val="6B7785"/>
-                </a:solidFill>
-                <a:latin typeface="Fira Sans"/>
-              </a:rPr>
-              <a:t>El heatmap muestra 14 propósitos por 7 días en una sola figura: útil para tablas completas.</a:t>
+                  <a:srgbClr val="333333"/>
+                </a:solidFill>
+                <a:latin typeface="Fira Sans"/>
+              </a:rPr>
+              <a:t>Normalizar por comuna permite comparar proporciones entre comunas de tamaños muy distintos.</a:t>
             </a:r>
           </a:p>
         </p:txBody>
@@ -6531,7 +6712,7 @@
                 </a:solidFill>
                 <a:latin typeface="Fira Sans"/>
               </a:rPr>
-              <a:t>Síntesis: ¿de quién habla este número?</a:t>
+              <a:t>Ingreso y uso de transporte público</a:t>
             </a:r>
           </a:p>
         </p:txBody>
@@ -6544,8 +6725,8 @@
         </p:nvSpPr>
         <p:spPr>
           <a:xfrm>
-            <a:off x="704088" y="1353312"/>
-            <a:ext cx="7744968" cy="3300984"/>
+            <a:off x="502920" y="1252728"/>
+            <a:ext cx="4023360" cy="3200400"/>
           </a:xfrm>
           <a:prstGeom prst="rect">
             <a:avLst/>
@@ -6558,8 +6739,16 @@
           </a:bodyPr>
           <a:lstStyle/>
           <a:p>
-            <a:r>
-              <a:rPr sz="1800" b="1">
+            <a:pPr>
+              <a:lnSpc>
+                <a:spcPct val="112000"/>
+              </a:lnSpc>
+              <a:spcAft>
+                <a:spcPts val="900"/>
+              </a:spcAft>
+            </a:pPr>
+            <a:r>
+              <a:rPr sz="1500" b="1">
                 <a:solidFill>
                   <a:srgbClr val="E0A437"/>
                 </a:solidFill>
@@ -6568,18 +6757,110 @@
               <a:t>▸ </a:t>
             </a:r>
             <a:r>
-              <a:rPr sz="1800" b="0">
-                <a:solidFill>
-                  <a:srgbClr val="3A4A5C"/>
-                </a:solidFill>
-                <a:latin typeface="Fira Sans"/>
-              </a:rPr>
-              <a:t>'El hogar promedio gana $688 mil': la mayoría gana menos; la mediana describe al hogar típico.</a:t>
-            </a:r>
-          </a:p>
-          <a:p>
-            <a:r>
-              <a:rPr sz="1800" b="1">
+              <a:rPr sz="1500" b="0">
+                <a:solidFill>
+                  <a:srgbClr val="000000"/>
+                </a:solidFill>
+                <a:latin typeface="Fira Sans"/>
+              </a:rPr>
+              <a:t>Cada punto es una comuna: ingreso medio contra proporción de viajes en transporte público.</a:t>
+            </a:r>
+          </a:p>
+          <a:p>
+            <a:pPr>
+              <a:lnSpc>
+                <a:spcPct val="112000"/>
+              </a:lnSpc>
+              <a:spcAft>
+                <a:spcPts val="500"/>
+              </a:spcAft>
+            </a:pPr>
+            <a:r>
+              <a:rPr sz="1300" b="0">
+                <a:solidFill>
+                  <a:srgbClr val="333333"/>
+                </a:solidFill>
+                <a:latin typeface="Fira Sans"/>
+              </a:rPr>
+              <a:t>     ◦  </a:t>
+            </a:r>
+            <a:r>
+              <a:rPr sz="1300" b="0">
+                <a:solidFill>
+                  <a:srgbClr val="333333"/>
+                </a:solidFill>
+                <a:latin typeface="Fira Sans"/>
+              </a:rPr>
+              <a:t>Periferia (Buin, Melipilla): poco transporte público; la red no llega.</a:t>
+            </a:r>
+          </a:p>
+          <a:p>
+            <a:pPr>
+              <a:lnSpc>
+                <a:spcPct val="112000"/>
+              </a:lnSpc>
+              <a:spcAft>
+                <a:spcPts val="500"/>
+              </a:spcAft>
+            </a:pPr>
+            <a:r>
+              <a:rPr sz="1300" b="0">
+                <a:solidFill>
+                  <a:srgbClr val="333333"/>
+                </a:solidFill>
+                <a:latin typeface="Fira Sans"/>
+              </a:rPr>
+              <a:t>     ◦  </a:t>
+            </a:r>
+            <a:r>
+              <a:rPr sz="1300" b="0">
+                <a:solidFill>
+                  <a:srgbClr val="333333"/>
+                </a:solidFill>
+                <a:latin typeface="Fira Sans"/>
+              </a:rPr>
+              <a:t>Ingresos altos (Vitacura, Lo Barnechea): conectadas, con poco uso.</a:t>
+            </a:r>
+          </a:p>
+          <a:p>
+            <a:pPr>
+              <a:lnSpc>
+                <a:spcPct val="112000"/>
+              </a:lnSpc>
+              <a:spcAft>
+                <a:spcPts val="500"/>
+              </a:spcAft>
+            </a:pPr>
+            <a:r>
+              <a:rPr sz="1300" b="0">
+                <a:solidFill>
+                  <a:srgbClr val="333333"/>
+                </a:solidFill>
+                <a:latin typeface="Fira Sans"/>
+              </a:rPr>
+              <a:t>     ◦  </a:t>
+            </a:r>
+            <a:r>
+              <a:rPr sz="1300" b="0">
+                <a:solidFill>
+                  <a:srgbClr val="333333"/>
+                </a:solidFill>
+                <a:latin typeface="Fira Sans"/>
+              </a:rPr>
+              <a:t>Correlación de Pearson: -0,17. La asociación lineal es débil.</a:t>
+            </a:r>
+          </a:p>
+          <a:p>
+            <a:pPr>
+              <a:lnSpc>
+                <a:spcPct val="112000"/>
+              </a:lnSpc>
+              <a:spcAft>
+                <a:spcPts val="900"/>
+              </a:spcAft>
+            </a:pPr>
+            <a:r>
+              <a:rPr sz="1500" b="1">
                 <a:solidFill>
                   <a:srgbClr val="E0A437"/>
                 </a:solidFill>
@@ -6588,77 +6869,41 @@
               <a:t>▸ </a:t>
             </a:r>
             <a:r>
-              <a:rPr sz="1800" b="0">
-                <a:solidFill>
-                  <a:srgbClr val="3A4A5C"/>
-                </a:solidFill>
-                <a:latin typeface="Fira Sans"/>
-              </a:rPr>
-              <a:t>'El 53% de los encuestados...': habla de la muestra; los factores de expansión hablan de la ciudad.</a:t>
-            </a:r>
-          </a:p>
-          <a:p>
-            <a:r>
-              <a:rPr sz="1800" b="1">
-                <a:solidFill>
-                  <a:srgbClr val="E0A437"/>
-                </a:solidFill>
-                <a:latin typeface="Fira Sans"/>
-              </a:rPr>
-              <a:t>▸ </a:t>
-            </a:r>
-            <a:r>
-              <a:rPr sz="1800" b="0">
-                <a:solidFill>
-                  <a:srgbClr val="3A4A5C"/>
-                </a:solidFill>
-                <a:latin typeface="Fira Sans"/>
-              </a:rPr>
-              <a:t>'1,9 viajes en promedio': solo si contamos a quienes no viajaron; un inner los borra sin aviso.</a:t>
-            </a:r>
-          </a:p>
-          <a:p>
-            <a:r>
-              <a:rPr sz="1800" b="1">
-                <a:solidFill>
-                  <a:srgbClr val="E0A437"/>
-                </a:solidFill>
-                <a:latin typeface="Fira Sans"/>
-              </a:rPr>
-              <a:t>▸ </a:t>
-            </a:r>
-            <a:r>
-              <a:rPr sz="1800" b="0">
-                <a:solidFill>
-                  <a:srgbClr val="3A4A5C"/>
-                </a:solidFill>
-                <a:latin typeface="Fira Sans"/>
-              </a:rPr>
-              <a:t>'En Vitacura casi no se usa transporte público': un promedio comunal esconde la variación interna.</a:t>
-            </a:r>
-          </a:p>
-          <a:p>
-            <a:r>
-              <a:rPr sz="1800" b="1">
-                <a:solidFill>
-                  <a:srgbClr val="E0A437"/>
-                </a:solidFill>
-                <a:latin typeface="Fira Sans"/>
-              </a:rPr>
-              <a:t>▸ </a:t>
-            </a:r>
-            <a:r>
-              <a:rPr sz="1800" b="1">
+              <a:rPr sz="1500" b="1">
                 <a:solidFill>
                   <a:srgbClr val="1D3557"/>
                 </a:solidFill>
                 <a:latin typeface="Fira Sans"/>
               </a:rPr>
-              <a:t>Las operaciones eran repaso; lo nuevo es examinar qué representa cada cifra.</a:t>
-            </a:r>
-          </a:p>
-        </p:txBody>
-      </p:sp>
+              <a:t>Como vimos en el marco conceptual: el coeficiente no reemplaza al gráfico, y la asociación no autoriza verbos causales.</a:t>
+            </a:r>
+          </a:p>
+        </p:txBody>
+      </p:sp>
+      <p:pic>
+        <p:nvPicPr>
+          <p:cNvPr id="5" name="Picture 4" descr="09_ingreso_vs_tp.png"/>
+          <p:cNvPicPr>
+            <a:picLocks noChangeAspect="1"/>
+          </p:cNvPicPr>
+          <p:nvPr/>
+        </p:nvPicPr>
+        <p:blipFill>
+          <a:blip r:embed="rId2"/>
+          <a:stretch>
+            <a:fillRect/>
+          </a:stretch>
+        </p:blipFill>
+        <p:spPr>
+          <a:xfrm>
+            <a:off x="4892040" y="1371600"/>
+            <a:ext cx="3840480" cy="2526979"/>
+          </a:xfrm>
+          <a:prstGeom prst="rect">
+            <a:avLst/>
+          </a:prstGeom>
+        </p:spPr>
+      </p:pic>
     </p:spTree>
   </p:cSld>
   <p:clrMapOvr>
@@ -6750,21 +6995,45 @@
                 </a:solidFill>
                 <a:latin typeface="Fira Sans"/>
               </a:rPr>
-              <a:t>Segundo bloque: parte la Tarea 1</a:t>
-            </a:r>
-          </a:p>
-        </p:txBody>
-      </p:sp>
-      <p:sp>
-        <p:nvSpPr>
-          <p:cNvPr id="4" name="TextBox 3"/>
+              <a:t>Los propósitos de viaje según el día de la semana</a:t>
+            </a:r>
+          </a:p>
+        </p:txBody>
+      </p:sp>
+      <p:pic>
+        <p:nvPicPr>
+          <p:cNvPr id="4" name="Picture 3" descr="10_heatmap_rutinas.png"/>
+          <p:cNvPicPr>
+            <a:picLocks noChangeAspect="1"/>
+          </p:cNvPicPr>
+          <p:nvPr/>
+        </p:nvPicPr>
+        <p:blipFill>
+          <a:blip r:embed="rId2"/>
+          <a:stretch>
+            <a:fillRect/>
+          </a:stretch>
+        </p:blipFill>
+        <p:spPr>
+          <a:xfrm>
+            <a:off x="1563778" y="1143000"/>
+            <a:ext cx="6016443" cy="3154680"/>
+          </a:xfrm>
+          <a:prstGeom prst="rect">
+            <a:avLst/>
+          </a:prstGeom>
+        </p:spPr>
+      </p:pic>
+      <p:sp>
+        <p:nvSpPr>
+          <p:cNvPr id="5" name="TextBox 4"/>
           <p:cNvSpPr txBox="1"/>
           <p:nvPr/>
         </p:nvSpPr>
         <p:spPr>
           <a:xfrm>
-            <a:off x="704088" y="1353312"/>
-            <a:ext cx="7744968" cy="3300984"/>
+            <a:off x="704088" y="4434840"/>
+            <a:ext cx="7744968" cy="457200"/>
           </a:xfrm>
           <a:prstGeom prst="rect">
             <a:avLst/>
@@ -6778,6 +7047,144 @@
           <a:lstStyle/>
           <a:p>
             <a:r>
+              <a:rPr sz="1300" b="0">
+                <a:solidFill>
+                  <a:srgbClr val="333333"/>
+                </a:solidFill>
+                <a:latin typeface="Fira Sans"/>
+              </a:rPr>
+              <a:t>El heatmap muestra 14 propósitos por 7 días en una sola figura: útil para tablas completas.</a:t>
+            </a:r>
+          </a:p>
+        </p:txBody>
+      </p:sp>
+    </p:spTree>
+  </p:cSld>
+  <p:clrMapOvr>
+    <a:masterClrMapping/>
+  </p:clrMapOvr>
+</p:sld>
+</file>
+
+<file path=ppt/slides/slide27.xml><?xml version="1.0" encoding="utf-8"?>
+<p:sld xmlns:a="http://schemas.openxmlformats.org/drawingml/2006/main" xmlns:p="http://schemas.openxmlformats.org/presentationml/2006/main" xmlns:r="http://schemas.openxmlformats.org/officeDocument/2006/relationships">
+  <p:cSld>
+    <p:spTree>
+      <p:nvGrpSpPr>
+        <p:cNvPr id="1" name=""/>
+        <p:cNvGrpSpPr/>
+        <p:nvPr/>
+      </p:nvGrpSpPr>
+      <p:grpSpPr/>
+      <p:sp>
+        <p:nvSpPr>
+          <p:cNvPr id="2" name="Rectangle 1"/>
+          <p:cNvSpPr/>
+          <p:nvPr/>
+        </p:nvSpPr>
+        <p:spPr>
+          <a:xfrm>
+            <a:off x="0" y="0"/>
+            <a:ext cx="9144000" cy="5138928"/>
+          </a:xfrm>
+          <a:prstGeom prst="rect">
+            <a:avLst/>
+          </a:prstGeom>
+          <a:solidFill>
+            <a:srgbClr val="FAFBFC"/>
+          </a:solidFill>
+          <a:ln>
+            <a:noFill/>
+          </a:ln>
+          <a:effectLst/>
+        </p:spPr>
+        <p:style>
+          <a:lnRef idx="1">
+            <a:schemeClr val="accent1"/>
+          </a:lnRef>
+          <a:fillRef idx="3">
+            <a:schemeClr val="accent1"/>
+          </a:fillRef>
+          <a:effectRef idx="2">
+            <a:schemeClr val="accent1"/>
+          </a:effectRef>
+          <a:fontRef idx="minor">
+            <a:schemeClr val="lt1"/>
+          </a:fontRef>
+        </p:style>
+        <p:txBody>
+          <a:bodyPr rtlCol="0" anchor="ctr"/>
+          <a:lstStyle/>
+          <a:p>
+            <a:pPr algn="ctr"/>
+          </a:p>
+        </p:txBody>
+      </p:sp>
+      <p:sp>
+        <p:nvSpPr>
+          <p:cNvPr id="3" name="TextBox 2"/>
+          <p:cNvSpPr txBox="1"/>
+          <p:nvPr/>
+        </p:nvSpPr>
+        <p:spPr>
+          <a:xfrm>
+            <a:off x="402336" y="301752"/>
+            <a:ext cx="8348472" cy="795528"/>
+          </a:xfrm>
+          <a:prstGeom prst="rect">
+            <a:avLst/>
+          </a:prstGeom>
+          <a:noFill/>
+        </p:spPr>
+        <p:txBody>
+          <a:bodyPr wrap="square">
+            <a:spAutoFit/>
+          </a:bodyPr>
+          <a:lstStyle/>
+          <a:p>
+            <a:r>
+              <a:rPr sz="2800" b="1">
+                <a:solidFill>
+                  <a:srgbClr val="0F0F0F"/>
+                </a:solidFill>
+                <a:latin typeface="Fira Sans"/>
+              </a:rPr>
+              <a:t>Síntesis</a:t>
+            </a:r>
+          </a:p>
+        </p:txBody>
+      </p:sp>
+      <p:sp>
+        <p:nvSpPr>
+          <p:cNvPr id="4" name="TextBox 3"/>
+          <p:cNvSpPr txBox="1"/>
+          <p:nvPr/>
+        </p:nvSpPr>
+        <p:spPr>
+          <a:xfrm>
+            <a:off x="704088" y="1353312"/>
+            <a:ext cx="7744968" cy="3300984"/>
+          </a:xfrm>
+          <a:prstGeom prst="rect">
+            <a:avLst/>
+          </a:prstGeom>
+          <a:noFill/>
+        </p:spPr>
+        <p:txBody>
+          <a:bodyPr wrap="square">
+            <a:spAutoFit/>
+          </a:bodyPr>
+          <a:lstStyle/>
+          <a:p>
+            <a:pPr>
+              <a:lnSpc>
+                <a:spcPct val="112000"/>
+              </a:lnSpc>
+              <a:spcAft>
+                <a:spcPts val="900"/>
+              </a:spcAft>
+            </a:pPr>
+            <a:r>
               <a:rPr sz="1800" b="1">
                 <a:solidFill>
                   <a:srgbClr val="E0A437"/>
@@ -6789,7 +7196,266 @@
             <a:r>
               <a:rPr sz="1800" b="0">
                 <a:solidFill>
-                  <a:srgbClr val="3A4A5C"/>
+                  <a:srgbClr val="000000"/>
+                </a:solidFill>
+                <a:latin typeface="Fira Sans"/>
+              </a:rPr>
+              <a:t>Un modelo es una simplificación con decisiones incorporadas; estimarlo puede buscar inferencia o predicción.</a:t>
+            </a:r>
+          </a:p>
+          <a:p>
+            <a:pPr>
+              <a:lnSpc>
+                <a:spcPct val="112000"/>
+              </a:lnSpc>
+              <a:spcAft>
+                <a:spcPts val="900"/>
+              </a:spcAft>
+            </a:pPr>
+            <a:r>
+              <a:rPr sz="1800" b="1">
+                <a:solidFill>
+                  <a:srgbClr val="E0A437"/>
+                </a:solidFill>
+                <a:latin typeface="Fira Sans"/>
+              </a:rPr>
+              <a:t>▸ </a:t>
+            </a:r>
+            <a:r>
+              <a:rPr sz="1800" b="0">
+                <a:solidFill>
+                  <a:srgbClr val="000000"/>
+                </a:solidFill>
+                <a:latin typeface="Fira Sans"/>
+              </a:rPr>
+              <a:t>Las asociaciones se reportan como asociaciones: la causalidad exige más que datos observacionales.</a:t>
+            </a:r>
+          </a:p>
+          <a:p>
+            <a:pPr>
+              <a:lnSpc>
+                <a:spcPct val="112000"/>
+              </a:lnSpc>
+              <a:spcAft>
+                <a:spcPts val="900"/>
+              </a:spcAft>
+            </a:pPr>
+            <a:r>
+              <a:rPr sz="1800" b="1">
+                <a:solidFill>
+                  <a:srgbClr val="E0A437"/>
+                </a:solidFill>
+                <a:latin typeface="Fira Sans"/>
+              </a:rPr>
+              <a:t>▸ </a:t>
+            </a:r>
+            <a:r>
+              <a:rPr sz="1800" b="0">
+                <a:solidFill>
+                  <a:srgbClr val="000000"/>
+                </a:solidFill>
+                <a:latin typeface="Fira Sans"/>
+              </a:rPr>
+              <a:t>El tipo de la variable, no su dtype, determina qué resúmenes tienen sentido.</a:t>
+            </a:r>
+          </a:p>
+          <a:p>
+            <a:pPr>
+              <a:lnSpc>
+                <a:spcPct val="112000"/>
+              </a:lnSpc>
+              <a:spcAft>
+                <a:spcPts val="900"/>
+              </a:spcAft>
+            </a:pPr>
+            <a:r>
+              <a:rPr sz="1800" b="1">
+                <a:solidFill>
+                  <a:srgbClr val="E0A437"/>
+                </a:solidFill>
+                <a:latin typeface="Fira Sans"/>
+              </a:rPr>
+              <a:t>▸ </a:t>
+            </a:r>
+            <a:r>
+              <a:rPr sz="1800" b="0">
+                <a:solidFill>
+                  <a:srgbClr val="000000"/>
+                </a:solidFill>
+                <a:latin typeface="Fira Sans"/>
+              </a:rPr>
+              <a:t>Con distribuciones asimétricas, la mediana y los percentiles describen mejor lo típico que la media.</a:t>
+            </a:r>
+          </a:p>
+          <a:p>
+            <a:pPr>
+              <a:lnSpc>
+                <a:spcPct val="112000"/>
+              </a:lnSpc>
+              <a:spcAft>
+                <a:spcPts val="900"/>
+              </a:spcAft>
+            </a:pPr>
+            <a:r>
+              <a:rPr sz="1800" b="1">
+                <a:solidFill>
+                  <a:srgbClr val="E0A437"/>
+                </a:solidFill>
+                <a:latin typeface="Fira Sans"/>
+              </a:rPr>
+              <a:t>▸ </a:t>
+            </a:r>
+            <a:r>
+              <a:rPr sz="1800" b="1">
+                <a:solidFill>
+                  <a:srgbClr val="1D3557"/>
+                </a:solidFill>
+                <a:latin typeface="Fira Sans"/>
+              </a:rPr>
+              <a:t>Ante toda cifra resumen: ¿de quién habla este número? ¿Muestra, subgrupo o ciudad?</a:t>
+            </a:r>
+          </a:p>
+        </p:txBody>
+      </p:sp>
+    </p:spTree>
+  </p:cSld>
+  <p:clrMapOvr>
+    <a:masterClrMapping/>
+  </p:clrMapOvr>
+</p:sld>
+</file>
+
+<file path=ppt/slides/slide28.xml><?xml version="1.0" encoding="utf-8"?>
+<p:sld xmlns:a="http://schemas.openxmlformats.org/drawingml/2006/main" xmlns:p="http://schemas.openxmlformats.org/presentationml/2006/main" xmlns:r="http://schemas.openxmlformats.org/officeDocument/2006/relationships">
+  <p:cSld>
+    <p:spTree>
+      <p:nvGrpSpPr>
+        <p:cNvPr id="1" name=""/>
+        <p:cNvGrpSpPr/>
+        <p:nvPr/>
+      </p:nvGrpSpPr>
+      <p:grpSpPr/>
+      <p:sp>
+        <p:nvSpPr>
+          <p:cNvPr id="2" name="Rectangle 1"/>
+          <p:cNvSpPr/>
+          <p:nvPr/>
+        </p:nvSpPr>
+        <p:spPr>
+          <a:xfrm>
+            <a:off x="0" y="0"/>
+            <a:ext cx="9144000" cy="5138928"/>
+          </a:xfrm>
+          <a:prstGeom prst="rect">
+            <a:avLst/>
+          </a:prstGeom>
+          <a:solidFill>
+            <a:srgbClr val="FAFBFC"/>
+          </a:solidFill>
+          <a:ln>
+            <a:noFill/>
+          </a:ln>
+          <a:effectLst/>
+        </p:spPr>
+        <p:style>
+          <a:lnRef idx="1">
+            <a:schemeClr val="accent1"/>
+          </a:lnRef>
+          <a:fillRef idx="3">
+            <a:schemeClr val="accent1"/>
+          </a:fillRef>
+          <a:effectRef idx="2">
+            <a:schemeClr val="accent1"/>
+          </a:effectRef>
+          <a:fontRef idx="minor">
+            <a:schemeClr val="lt1"/>
+          </a:fontRef>
+        </p:style>
+        <p:txBody>
+          <a:bodyPr rtlCol="0" anchor="ctr"/>
+          <a:lstStyle/>
+          <a:p>
+            <a:pPr algn="ctr"/>
+          </a:p>
+        </p:txBody>
+      </p:sp>
+      <p:sp>
+        <p:nvSpPr>
+          <p:cNvPr id="3" name="TextBox 2"/>
+          <p:cNvSpPr txBox="1"/>
+          <p:nvPr/>
+        </p:nvSpPr>
+        <p:spPr>
+          <a:xfrm>
+            <a:off x="402336" y="301752"/>
+            <a:ext cx="8348472" cy="795528"/>
+          </a:xfrm>
+          <a:prstGeom prst="rect">
+            <a:avLst/>
+          </a:prstGeom>
+          <a:noFill/>
+        </p:spPr>
+        <p:txBody>
+          <a:bodyPr wrap="square">
+            <a:spAutoFit/>
+          </a:bodyPr>
+          <a:lstStyle/>
+          <a:p>
+            <a:r>
+              <a:rPr sz="2800" b="1">
+                <a:solidFill>
+                  <a:srgbClr val="0F0F0F"/>
+                </a:solidFill>
+                <a:latin typeface="Fira Sans"/>
+              </a:rPr>
+              <a:t>Segundo bloque: comienza la Tarea 1</a:t>
+            </a:r>
+          </a:p>
+        </p:txBody>
+      </p:sp>
+      <p:sp>
+        <p:nvSpPr>
+          <p:cNvPr id="4" name="TextBox 3"/>
+          <p:cNvSpPr txBox="1"/>
+          <p:nvPr/>
+        </p:nvSpPr>
+        <p:spPr>
+          <a:xfrm>
+            <a:off x="704088" y="1353312"/>
+            <a:ext cx="7744968" cy="3300984"/>
+          </a:xfrm>
+          <a:prstGeom prst="rect">
+            <a:avLst/>
+          </a:prstGeom>
+          <a:noFill/>
+        </p:spPr>
+        <p:txBody>
+          <a:bodyPr wrap="square">
+            <a:spAutoFit/>
+          </a:bodyPr>
+          <a:lstStyle/>
+          <a:p>
+            <a:pPr>
+              <a:lnSpc>
+                <a:spcPct val="112000"/>
+              </a:lnSpc>
+              <a:spcAft>
+                <a:spcPts val="900"/>
+              </a:spcAft>
+            </a:pPr>
+            <a:r>
+              <a:rPr sz="1800" b="1">
+                <a:solidFill>
+                  <a:srgbClr val="E0A437"/>
+                </a:solidFill>
+                <a:latin typeface="Fira Sans"/>
+              </a:rPr>
+              <a:t>▸ </a:t>
+            </a:r>
+            <a:r>
+              <a:rPr sz="1800" b="0">
+                <a:solidFill>
+                  <a:srgbClr val="000000"/>
                 </a:solidFill>
                 <a:latin typeface="Fira Sans"/>
               </a:rPr>
@@ -6797,10 +7463,18 @@
             </a:r>
           </a:p>
           <a:p>
+            <a:pPr>
+              <a:lnSpc>
+                <a:spcPct val="112000"/>
+              </a:lnSpc>
+              <a:spcAft>
+                <a:spcPts val="500"/>
+              </a:spcAft>
+            </a:pPr>
             <a:r>
               <a:rPr sz="1400" b="0">
                 <a:solidFill>
-                  <a:srgbClr val="6B7785"/>
+                  <a:srgbClr val="333333"/>
                 </a:solidFill>
                 <a:latin typeface="Fira Sans"/>
               </a:rPr>
@@ -6809,7 +7483,7 @@
             <a:r>
               <a:rPr sz="1400" b="0">
                 <a:solidFill>
-                  <a:srgbClr val="6B7785"/>
+                  <a:srgbClr val="333333"/>
                 </a:solidFill>
                 <a:latin typeface="Fira Sans"/>
               </a:rPr>
@@ -6817,10 +7491,18 @@
             </a:r>
           </a:p>
           <a:p>
+            <a:pPr>
+              <a:lnSpc>
+                <a:spcPct val="112000"/>
+              </a:lnSpc>
+              <a:spcAft>
+                <a:spcPts val="500"/>
+              </a:spcAft>
+            </a:pPr>
             <a:r>
               <a:rPr sz="1400" b="0">
                 <a:solidFill>
-                  <a:srgbClr val="6B7785"/>
+                  <a:srgbClr val="333333"/>
                 </a:solidFill>
                 <a:latin typeface="Fira Sans"/>
               </a:rPr>
@@ -6829,7 +7511,7 @@
             <a:r>
               <a:rPr sz="1400" b="0">
                 <a:solidFill>
-                  <a:srgbClr val="6B7785"/>
+                  <a:srgbClr val="333333"/>
                 </a:solidFill>
                 <a:latin typeface="Fira Sans"/>
               </a:rPr>
@@ -6837,10 +7519,18 @@
             </a:r>
           </a:p>
           <a:p>
+            <a:pPr>
+              <a:lnSpc>
+                <a:spcPct val="112000"/>
+              </a:lnSpc>
+              <a:spcAft>
+                <a:spcPts val="500"/>
+              </a:spcAft>
+            </a:pPr>
             <a:r>
               <a:rPr sz="1400" b="0">
                 <a:solidFill>
-                  <a:srgbClr val="6B7785"/>
+                  <a:srgbClr val="333333"/>
                 </a:solidFill>
                 <a:latin typeface="Fira Sans"/>
               </a:rPr>
@@ -6849,7 +7539,7 @@
             <a:r>
               <a:rPr sz="1400" b="0">
                 <a:solidFill>
-                  <a:srgbClr val="6B7785"/>
+                  <a:srgbClr val="333333"/>
                 </a:solidFill>
                 <a:latin typeface="Fira Sans"/>
               </a:rPr>
@@ -6857,6 +7547,14 @@
             </a:r>
           </a:p>
           <a:p>
+            <a:pPr>
+              <a:lnSpc>
+                <a:spcPct val="112000"/>
+              </a:lnSpc>
+              <a:spcAft>
+                <a:spcPts val="900"/>
+              </a:spcAft>
+            </a:pPr>
             <a:r>
               <a:rPr sz="1800" b="1">
                 <a:solidFill>
@@ -6869,7 +7567,7 @@
             <a:r>
               <a:rPr sz="1800" b="0">
                 <a:solidFill>
-                  <a:srgbClr val="3A4A5C"/>
+                  <a:srgbClr val="000000"/>
                 </a:solidFill>
                 <a:latin typeface="Fira Sans"/>
               </a:rPr>
@@ -6877,6 +7575,14 @@
             </a:r>
           </a:p>
           <a:p>
+            <a:pPr>
+              <a:lnSpc>
+                <a:spcPct val="112000"/>
+              </a:lnSpc>
+              <a:spcAft>
+                <a:spcPts val="900"/>
+              </a:spcAft>
+            </a:pPr>
             <a:r>
               <a:rPr sz="1800" b="1">
                 <a:solidFill>
@@ -6893,7 +7599,7 @@
                 </a:solidFill>
                 <a:latin typeface="Fira Sans"/>
               </a:rPr>
-              <a:t>Lo que hagan en este bloque ya es parte de la tarea.</a:t>
+              <a:t>Lo que avancen en este bloque ya es parte de la tarea.</a:t>
             </a:r>
           </a:p>
         </p:txBody>
@@ -6989,7 +7695,7 @@
                 </a:solidFill>
                 <a:latin typeface="Fira Sans"/>
               </a:rPr>
-              <a:t>¿De quién habla este número?</a:t>
+              <a:t>Marco conceptual</a:t>
             </a:r>
           </a:p>
           <a:p>
@@ -7000,7 +7706,7 @@
                 </a:solidFill>
                 <a:latin typeface="Fira Sans"/>
               </a:rPr>
-              <a:t>El concepto de esta clase</a:t>
+              <a:t>Modelos, inferencia y tipos de datos</a:t>
             </a:r>
           </a:p>
         </p:txBody>
@@ -7096,7 +7802,7 @@
                 </a:solidFill>
                 <a:latin typeface="Fira Sans"/>
               </a:rPr>
-              <a:t>Qué preguntarle a una cifra</a:t>
+              <a:t>¿Qué es un modelo?</a:t>
             </a:r>
           </a:p>
         </p:txBody>
@@ -7123,6 +7829,14 @@
           </a:bodyPr>
           <a:lstStyle/>
           <a:p>
+            <a:pPr>
+              <a:lnSpc>
+                <a:spcPct val="112000"/>
+              </a:lnSpc>
+              <a:spcAft>
+                <a:spcPts val="900"/>
+              </a:spcAft>
+            </a:pPr>
             <a:r>
               <a:rPr sz="1800" b="1">
                 <a:solidFill>
@@ -7135,14 +7849,22 @@
             <a:r>
               <a:rPr sz="1800" b="0">
                 <a:solidFill>
-                  <a:srgbClr val="3A4A5C"/>
-                </a:solidFill>
-                <a:latin typeface="Fira Sans"/>
-              </a:rPr>
-              <a:t>Pandas ya lo conocen; en esta clase es la herramienta de trabajo.</a:t>
-            </a:r>
-          </a:p>
-          <a:p>
+                  <a:srgbClr val="000000"/>
+                </a:solidFill>
+                <a:latin typeface="Fira Sans"/>
+              </a:rPr>
+              <a:t>Una representación simplificada del proceso que genera los datos.</a:t>
+            </a:r>
+          </a:p>
+          <a:p>
+            <a:pPr>
+              <a:lnSpc>
+                <a:spcPct val="112000"/>
+              </a:lnSpc>
+              <a:spcAft>
+                <a:spcPts val="900"/>
+              </a:spcAft>
+            </a:pPr>
             <a:r>
               <a:rPr sz="1800" b="1">
                 <a:solidFill>
@@ -7155,18 +7877,26 @@
             <a:r>
               <a:rPr sz="1800" b="0">
                 <a:solidFill>
-                  <a:srgbClr val="3A4A5C"/>
-                </a:solidFill>
-                <a:latin typeface="Fira Sans"/>
-              </a:rPr>
-              <a:t>El objetivo es examinar qué representa una cifra antes de usarla.</a:t>
-            </a:r>
-          </a:p>
-          <a:p>
+                  <a:srgbClr val="000000"/>
+                </a:solidFill>
+                <a:latin typeface="Fira Sans"/>
+              </a:rPr>
+              <a:t>Formalmente, se postula Y = f(X) + ε:</a:t>
+            </a:r>
+          </a:p>
+          <a:p>
+            <a:pPr>
+              <a:lnSpc>
+                <a:spcPct val="112000"/>
+              </a:lnSpc>
+              <a:spcAft>
+                <a:spcPts val="500"/>
+              </a:spcAft>
+            </a:pPr>
             <a:r>
               <a:rPr sz="1400" b="0">
                 <a:solidFill>
-                  <a:srgbClr val="6B7785"/>
+                  <a:srgbClr val="333333"/>
                 </a:solidFill>
                 <a:latin typeface="Fira Sans"/>
               </a:rPr>
@@ -7175,18 +7905,26 @@
             <a:r>
               <a:rPr sz="1400" b="0">
                 <a:solidFill>
-                  <a:srgbClr val="6B7785"/>
-                </a:solidFill>
-                <a:latin typeface="Fira Sans"/>
-              </a:rPr>
-              <a:t>Un promedio puede describir una situación en la que pocos están.</a:t>
-            </a:r>
-          </a:p>
-          <a:p>
+                  <a:srgbClr val="333333"/>
+                </a:solidFill>
+                <a:latin typeface="Fira Sans"/>
+              </a:rPr>
+              <a:t>Y es la variable de interés; X, las variables observadas.</a:t>
+            </a:r>
+          </a:p>
+          <a:p>
+            <a:pPr>
+              <a:lnSpc>
+                <a:spcPct val="112000"/>
+              </a:lnSpc>
+              <a:spcAft>
+                <a:spcPts val="500"/>
+              </a:spcAft>
+            </a:pPr>
             <a:r>
               <a:rPr sz="1400" b="0">
                 <a:solidFill>
-                  <a:srgbClr val="6B7785"/>
+                  <a:srgbClr val="333333"/>
                 </a:solidFill>
                 <a:latin typeface="Fira Sans"/>
               </a:rPr>
@@ -7195,18 +7933,26 @@
             <a:r>
               <a:rPr sz="1400" b="0">
                 <a:solidFill>
-                  <a:srgbClr val="6B7785"/>
-                </a:solidFill>
-                <a:latin typeface="Fira Sans"/>
-              </a:rPr>
-              <a:t>Contar filas de una encuesta habla de la muestra, no de la ciudad.</a:t>
-            </a:r>
-          </a:p>
-          <a:p>
+                  <a:srgbClr val="333333"/>
+                </a:solidFill>
+                <a:latin typeface="Fira Sans"/>
+              </a:rPr>
+              <a:t>f es la relación sistemática que se quiere estimar.</a:t>
+            </a:r>
+          </a:p>
+          <a:p>
+            <a:pPr>
+              <a:lnSpc>
+                <a:spcPct val="112000"/>
+              </a:lnSpc>
+              <a:spcAft>
+                <a:spcPts val="500"/>
+              </a:spcAft>
+            </a:pPr>
             <a:r>
               <a:rPr sz="1400" b="0">
                 <a:solidFill>
-                  <a:srgbClr val="6B7785"/>
+                  <a:srgbClr val="333333"/>
                 </a:solidFill>
                 <a:latin typeface="Fira Sans"/>
               </a:rPr>
@@ -7215,14 +7961,22 @@
             <a:r>
               <a:rPr sz="1400" b="0">
                 <a:solidFill>
-                  <a:srgbClr val="6B7785"/>
-                </a:solidFill>
-                <a:latin typeface="Fira Sans"/>
-              </a:rPr>
-              <a:t>Hay personas de las que la tabla no dice nada; esa ausencia informa.</a:t>
-            </a:r>
-          </a:p>
-          <a:p>
+                  <a:srgbClr val="333333"/>
+                </a:solidFill>
+                <a:latin typeface="Fira Sans"/>
+              </a:rPr>
+              <a:t>ε es el error irreducible: lo que X no explica de Y.</a:t>
+            </a:r>
+          </a:p>
+          <a:p>
+            <a:pPr>
+              <a:lnSpc>
+                <a:spcPct val="112000"/>
+              </a:lnSpc>
+              <a:spcAft>
+                <a:spcPts val="900"/>
+              </a:spcAft>
+            </a:pPr>
             <a:r>
               <a:rPr sz="1800" b="1">
                 <a:solidFill>
@@ -7233,13 +7987,41 @@
               <a:t>▸ </a:t>
             </a:r>
             <a:r>
+              <a:rPr sz="1800" b="0">
+                <a:solidFill>
+                  <a:srgbClr val="000000"/>
+                </a:solidFill>
+                <a:latin typeface="Fira Sans"/>
+              </a:rPr>
+              <a:t>Ejemplo: el tiempo de un viaje en función de la distancia, el modo y la hora.</a:t>
+            </a:r>
+          </a:p>
+          <a:p>
+            <a:pPr>
+              <a:lnSpc>
+                <a:spcPct val="112000"/>
+              </a:lnSpc>
+              <a:spcAft>
+                <a:spcPts val="900"/>
+              </a:spcAft>
+            </a:pPr>
+            <a:r>
               <a:rPr sz="1800" b="1">
                 <a:solidFill>
+                  <a:srgbClr val="E0A437"/>
+                </a:solidFill>
+                <a:latin typeface="Fira Sans"/>
+              </a:rPr>
+              <a:t>▸ </a:t>
+            </a:r>
+            <a:r>
+              <a:rPr sz="1800" b="1">
+                <a:solidFill>
                   <a:srgbClr val="1D3557"/>
                 </a:solidFill>
                 <a:latin typeface="Fira Sans"/>
               </a:rPr>
-              <a:t>Al cierre se retoma esta pregunta con los resultados de la clase.</a:t>
+              <a:t>Construir un modelo implica decidir qué variables entran, qué se omite y qué se considera éxito (clase 1: esas decisiones incorporan las opiniones de quien modela).</a:t>
             </a:r>
           </a:p>
         </p:txBody>
@@ -7277,7 +8059,7 @@
             <a:avLst/>
           </a:prstGeom>
           <a:solidFill>
-            <a:srgbClr val="1D3557"/>
+            <a:srgbClr val="FAFBFC"/>
           </a:solidFill>
           <a:ln>
             <a:noFill/>
@@ -7314,8 +8096,8 @@
         </p:nvSpPr>
         <p:spPr>
           <a:xfrm>
-            <a:off x="603504" y="1847088"/>
-            <a:ext cx="7946136" cy="1399032"/>
+            <a:off x="402336" y="301752"/>
+            <a:ext cx="8348472" cy="795528"/>
           </a:xfrm>
           <a:prstGeom prst="rect">
             <a:avLst/>
@@ -7329,24 +8111,288 @@
           <a:lstStyle/>
           <a:p>
             <a:r>
-              <a:rPr sz="3400" b="1">
-                <a:solidFill>
-                  <a:srgbClr val="FFFFFF"/>
-                </a:solidFill>
-                <a:latin typeface="Fira Sans"/>
-              </a:rPr>
-              <a:t>Los datos de hoy</a:t>
-            </a:r>
-          </a:p>
-          <a:p>
+              <a:rPr sz="2800" b="1">
+                <a:solidFill>
+                  <a:srgbClr val="0F0F0F"/>
+                </a:solidFill>
+                <a:latin typeface="Fira Sans"/>
+              </a:rPr>
+              <a:t>Inferencia y predicción</a:t>
+            </a:r>
+          </a:p>
+        </p:txBody>
+      </p:sp>
+      <p:sp>
+        <p:nvSpPr>
+          <p:cNvPr id="4" name="TextBox 3"/>
+          <p:cNvSpPr txBox="1"/>
+          <p:nvPr/>
+        </p:nvSpPr>
+        <p:spPr>
+          <a:xfrm>
+            <a:off x="704088" y="1353312"/>
+            <a:ext cx="7744968" cy="3300984"/>
+          </a:xfrm>
+          <a:prstGeom prst="rect">
+            <a:avLst/>
+          </a:prstGeom>
+          <a:noFill/>
+        </p:spPr>
+        <p:txBody>
+          <a:bodyPr wrap="square">
+            <a:spAutoFit/>
+          </a:bodyPr>
+          <a:lstStyle/>
+          <a:p>
+            <a:pPr>
+              <a:lnSpc>
+                <a:spcPct val="112000"/>
+              </a:lnSpc>
+              <a:spcAft>
+                <a:spcPts val="900"/>
+              </a:spcAft>
+            </a:pPr>
+            <a:r>
+              <a:rPr sz="1800" b="1">
+                <a:solidFill>
+                  <a:srgbClr val="E0A437"/>
+                </a:solidFill>
+                <a:latin typeface="Fira Sans"/>
+              </a:rPr>
+              <a:t>▸ </a:t>
+            </a:r>
             <a:r>
               <a:rPr sz="1800" b="0">
                 <a:solidFill>
+                  <a:srgbClr val="000000"/>
+                </a:solidFill>
+                <a:latin typeface="Fira Sans"/>
+              </a:rPr>
+              <a:t>Al estimar f puede buscarse una de dos cosas (James et al., cap. 2):</a:t>
+            </a:r>
+          </a:p>
+          <a:p>
+            <a:pPr>
+              <a:lnSpc>
+                <a:spcPct val="112000"/>
+              </a:lnSpc>
+              <a:spcAft>
+                <a:spcPts val="900"/>
+              </a:spcAft>
+            </a:pPr>
+            <a:r>
+              <a:rPr sz="1800" b="1">
+                <a:solidFill>
                   <a:srgbClr val="E0A437"/>
                 </a:solidFill>
                 <a:latin typeface="Fira Sans"/>
               </a:rPr>
-              <a:t>Encuesta Origen Destino de Santiago 2012</a:t>
+              <a:t>▸ </a:t>
+            </a:r>
+            <a:r>
+              <a:rPr sz="1800" b="0">
+                <a:solidFill>
+                  <a:srgbClr val="000000"/>
+                </a:solidFill>
+                <a:latin typeface="Fira Sans"/>
+              </a:rPr>
+              <a:t>Inferencia: comprender la relación entre X e Y.</a:t>
+            </a:r>
+          </a:p>
+          <a:p>
+            <a:pPr>
+              <a:lnSpc>
+                <a:spcPct val="112000"/>
+              </a:lnSpc>
+              <a:spcAft>
+                <a:spcPts val="500"/>
+              </a:spcAft>
+            </a:pPr>
+            <a:r>
+              <a:rPr sz="1400" b="0">
+                <a:solidFill>
+                  <a:srgbClr val="333333"/>
+                </a:solidFill>
+                <a:latin typeface="Fira Sans"/>
+              </a:rPr>
+              <a:t>     ◦  </a:t>
+            </a:r>
+            <a:r>
+              <a:rPr sz="1400" b="0">
+                <a:solidFill>
+                  <a:srgbClr val="333333"/>
+                </a:solidFill>
+                <a:latin typeface="Fira Sans"/>
+              </a:rPr>
+              <a:t>Qué variables se asocian con Y, con qué magnitud y signo.</a:t>
+            </a:r>
+          </a:p>
+          <a:p>
+            <a:pPr>
+              <a:lnSpc>
+                <a:spcPct val="112000"/>
+              </a:lnSpc>
+              <a:spcAft>
+                <a:spcPts val="500"/>
+              </a:spcAft>
+            </a:pPr>
+            <a:r>
+              <a:rPr sz="1400" b="0">
+                <a:solidFill>
+                  <a:srgbClr val="333333"/>
+                </a:solidFill>
+                <a:latin typeface="Fira Sans"/>
+              </a:rPr>
+              <a:t>     ◦  </a:t>
+            </a:r>
+            <a:r>
+              <a:rPr sz="1400" b="0">
+                <a:solidFill>
+                  <a:srgbClr val="333333"/>
+                </a:solidFill>
+                <a:latin typeface="Fira Sans"/>
+              </a:rPr>
+              <a:t>La forma de f importa: se prefieren modelos interpretables.</a:t>
+            </a:r>
+          </a:p>
+          <a:p>
+            <a:pPr>
+              <a:lnSpc>
+                <a:spcPct val="112000"/>
+              </a:lnSpc>
+              <a:spcAft>
+                <a:spcPts val="500"/>
+              </a:spcAft>
+            </a:pPr>
+            <a:r>
+              <a:rPr sz="1400" b="0">
+                <a:solidFill>
+                  <a:srgbClr val="333333"/>
+                </a:solidFill>
+                <a:latin typeface="Fira Sans"/>
+              </a:rPr>
+              <a:t>     ◦  </a:t>
+            </a:r>
+            <a:r>
+              <a:rPr sz="1400" b="0">
+                <a:solidFill>
+                  <a:srgbClr val="333333"/>
+                </a:solidFill>
+                <a:latin typeface="Fira Sans"/>
+              </a:rPr>
+              <a:t>Ejemplo: ¿cómo se asocia el nivel socioeconómico con el uso de transporte público?</a:t>
+            </a:r>
+          </a:p>
+          <a:p>
+            <a:pPr>
+              <a:lnSpc>
+                <a:spcPct val="112000"/>
+              </a:lnSpc>
+              <a:spcAft>
+                <a:spcPts val="900"/>
+              </a:spcAft>
+            </a:pPr>
+            <a:r>
+              <a:rPr sz="1800" b="1">
+                <a:solidFill>
+                  <a:srgbClr val="E0A437"/>
+                </a:solidFill>
+                <a:latin typeface="Fira Sans"/>
+              </a:rPr>
+              <a:t>▸ </a:t>
+            </a:r>
+            <a:r>
+              <a:rPr sz="1800" b="0">
+                <a:solidFill>
+                  <a:srgbClr val="000000"/>
+                </a:solidFill>
+                <a:latin typeface="Fira Sans"/>
+              </a:rPr>
+              <a:t>Predicción: estimar Y para casos nuevos.</a:t>
+            </a:r>
+          </a:p>
+          <a:p>
+            <a:pPr>
+              <a:lnSpc>
+                <a:spcPct val="112000"/>
+              </a:lnSpc>
+              <a:spcAft>
+                <a:spcPts val="500"/>
+              </a:spcAft>
+            </a:pPr>
+            <a:r>
+              <a:rPr sz="1400" b="0">
+                <a:solidFill>
+                  <a:srgbClr val="333333"/>
+                </a:solidFill>
+                <a:latin typeface="Fira Sans"/>
+              </a:rPr>
+              <a:t>     ◦  </a:t>
+            </a:r>
+            <a:r>
+              <a:rPr sz="1400" b="0">
+                <a:solidFill>
+                  <a:srgbClr val="333333"/>
+                </a:solidFill>
+                <a:latin typeface="Fira Sans"/>
+              </a:rPr>
+              <a:t>f puede tratarse como caja negra si predice con precisión.</a:t>
+            </a:r>
+          </a:p>
+          <a:p>
+            <a:pPr>
+              <a:lnSpc>
+                <a:spcPct val="112000"/>
+              </a:lnSpc>
+              <a:spcAft>
+                <a:spcPts val="500"/>
+              </a:spcAft>
+            </a:pPr>
+            <a:r>
+              <a:rPr sz="1400" b="0">
+                <a:solidFill>
+                  <a:srgbClr val="333333"/>
+                </a:solidFill>
+                <a:latin typeface="Fira Sans"/>
+              </a:rPr>
+              <a:t>     ◦  </a:t>
+            </a:r>
+            <a:r>
+              <a:rPr sz="1400" b="0">
+                <a:solidFill>
+                  <a:srgbClr val="333333"/>
+                </a:solidFill>
+                <a:latin typeface="Fira Sans"/>
+              </a:rPr>
+              <a:t>Ejemplo: ¿cuántos viajes tendrá esta zona un día laboral?</a:t>
+            </a:r>
+          </a:p>
+          <a:p>
+            <a:pPr>
+              <a:lnSpc>
+                <a:spcPct val="112000"/>
+              </a:lnSpc>
+              <a:spcAft>
+                <a:spcPts val="900"/>
+              </a:spcAft>
+            </a:pPr>
+            <a:r>
+              <a:rPr sz="1800" b="1">
+                <a:solidFill>
+                  <a:srgbClr val="E0A437"/>
+                </a:solidFill>
+                <a:latin typeface="Fira Sans"/>
+              </a:rPr>
+              <a:t>▸ </a:t>
+            </a:r>
+            <a:r>
+              <a:rPr sz="1800" b="1">
+                <a:solidFill>
+                  <a:srgbClr val="1D3557"/>
+                </a:solidFill>
+                <a:latin typeface="Fira Sans"/>
+              </a:rPr>
+              <a:t>En el curso: unidades 2 a 5 son descriptivas e inferenciales; unidades 6 a 9, predictivas.</a:t>
             </a:r>
           </a:p>
         </p:txBody>
@@ -7442,7 +8488,7 @@
                 </a:solidFill>
                 <a:latin typeface="Fira Sans"/>
               </a:rPr>
-              <a:t>La EOD 2012</a:t>
+              <a:t>Correlación: los coeficientes de Pearson y de Spearman</a:t>
             </a:r>
           </a:p>
         </p:txBody>
@@ -7469,6 +8515,14 @@
           </a:bodyPr>
           <a:lstStyle/>
           <a:p>
+            <a:pPr>
+              <a:lnSpc>
+                <a:spcPct val="112000"/>
+              </a:lnSpc>
+              <a:spcAft>
+                <a:spcPts val="900"/>
+              </a:spcAft>
+            </a:pPr>
             <a:r>
               <a:rPr sz="1800" b="1">
                 <a:solidFill>
@@ -7481,14 +8535,78 @@
             <a:r>
               <a:rPr sz="1800" b="0">
                 <a:solidFill>
-                  <a:srgbClr val="3A4A5C"/>
-                </a:solidFill>
-                <a:latin typeface="Fira Sans"/>
-              </a:rPr>
-              <a:t>Encuesta de movilidad del Gran Santiago (SECTRA y U. Alberto Hurtado).</a:t>
-            </a:r>
-          </a:p>
-          <a:p>
+                  <a:srgbClr val="000000"/>
+                </a:solidFill>
+                <a:latin typeface="Fira Sans"/>
+              </a:rPr>
+              <a:t>La correlación cuantifica cuánto varían conjuntamente dos variables numéricas. Veremos dos coeficientes, ambos entre -1 y 1:</a:t>
+            </a:r>
+          </a:p>
+          <a:p>
+            <a:pPr>
+              <a:lnSpc>
+                <a:spcPct val="112000"/>
+              </a:lnSpc>
+              <a:spcAft>
+                <a:spcPts val="500"/>
+              </a:spcAft>
+            </a:pPr>
+            <a:r>
+              <a:rPr sz="1400" b="0">
+                <a:solidFill>
+                  <a:srgbClr val="333333"/>
+                </a:solidFill>
+                <a:latin typeface="Fira Sans"/>
+              </a:rPr>
+              <a:t>     ◦  </a:t>
+            </a:r>
+            <a:r>
+              <a:rPr sz="1400" b="0">
+                <a:solidFill>
+                  <a:srgbClr val="333333"/>
+                </a:solidFill>
+                <a:latin typeface="Fira Sans"/>
+              </a:rPr>
+              <a:t>Pearson: mide asociación lineal, sobre los valores originales.</a:t>
+            </a:r>
+          </a:p>
+          <a:p>
+            <a:pPr>
+              <a:lnSpc>
+                <a:spcPct val="112000"/>
+              </a:lnSpc>
+              <a:spcAft>
+                <a:spcPts val="500"/>
+              </a:spcAft>
+            </a:pPr>
+            <a:r>
+              <a:rPr sz="1400" b="0">
+                <a:solidFill>
+                  <a:srgbClr val="333333"/>
+                </a:solidFill>
+                <a:latin typeface="Fira Sans"/>
+              </a:rPr>
+              <a:t>     ◦  </a:t>
+            </a:r>
+            <a:r>
+              <a:rPr sz="1400" b="0">
+                <a:solidFill>
+                  <a:srgbClr val="333333"/>
+                </a:solidFill>
+                <a:latin typeface="Fira Sans"/>
+              </a:rPr>
+              <a:t>Spearman: mide asociación monotónica, sobre los rangos; es robusto a valores extremos.</a:t>
+            </a:r>
+          </a:p>
+          <a:p>
+            <a:pPr>
+              <a:lnSpc>
+                <a:spcPct val="112000"/>
+              </a:lnSpc>
+              <a:spcAft>
+                <a:spcPts val="900"/>
+              </a:spcAft>
+            </a:pPr>
             <a:r>
               <a:rPr sz="1800" b="1">
                 <a:solidFill>
@@ -7501,18 +8619,26 @@
             <a:r>
               <a:rPr sz="1800" b="0">
                 <a:solidFill>
-                  <a:srgbClr val="3A4A5C"/>
-                </a:solidFill>
-                <a:latin typeface="Fira Sans"/>
-              </a:rPr>
-              <a:t>Registra todos los viajes de un día de los hogares encuestados.</a:t>
-            </a:r>
-          </a:p>
-          <a:p>
+                  <a:srgbClr val="000000"/>
+                </a:solidFill>
+                <a:latin typeface="Fira Sans"/>
+              </a:rPr>
+              <a:t>En la EOD, distancia y duración del viaje tienen Pearson 0,43 y Spearman 0,72.</a:t>
+            </a:r>
+          </a:p>
+          <a:p>
+            <a:pPr>
+              <a:lnSpc>
+                <a:spcPct val="112000"/>
+              </a:lnSpc>
+              <a:spcAft>
+                <a:spcPts val="500"/>
+              </a:spcAft>
+            </a:pPr>
             <a:r>
               <a:rPr sz="1400" b="0">
                 <a:solidFill>
-                  <a:srgbClr val="6B7785"/>
+                  <a:srgbClr val="333333"/>
                 </a:solidFill>
                 <a:latin typeface="Fira Sans"/>
               </a:rPr>
@@ -7521,34 +8647,22 @@
             <a:r>
               <a:rPr sz="1400" b="0">
                 <a:solidFill>
-                  <a:srgbClr val="6B7785"/>
-                </a:solidFill>
-                <a:latin typeface="Fira Sans"/>
-              </a:rPr>
-              <a:t>18.264 hogares, 60.054 personas, 113.591 viajes.</a:t>
-            </a:r>
-          </a:p>
-          <a:p>
-            <a:r>
-              <a:rPr sz="1400" b="0">
-                <a:solidFill>
-                  <a:srgbClr val="6B7785"/>
-                </a:solidFill>
-                <a:latin typeface="Fira Sans"/>
-              </a:rPr>
-              <a:t>     ◦  </a:t>
-            </a:r>
-            <a:r>
-              <a:rPr sz="1400" b="0">
-                <a:solidFill>
-                  <a:srgbClr val="6B7785"/>
-                </a:solidFill>
-                <a:latin typeface="Fira Sans"/>
-              </a:rPr>
-              <a:t>Se usa en la planificación de transporte de la ciudad.</a:t>
-            </a:r>
-          </a:p>
-          <a:p>
+                  <a:srgbClr val="333333"/>
+                </a:solidFill>
+                <a:latin typeface="Fira Sans"/>
+              </a:rPr>
+              <a:t>La relación es claramente creciente (Spearman alto), pero no lineal y con valores extremos (Pearson moderado).</a:t>
+            </a:r>
+          </a:p>
+          <a:p>
+            <a:pPr>
+              <a:lnSpc>
+                <a:spcPct val="112000"/>
+              </a:lnSpc>
+              <a:spcAft>
+                <a:spcPts val="900"/>
+              </a:spcAft>
+            </a:pPr>
             <a:r>
               <a:rPr sz="1800" b="1">
                 <a:solidFill>
@@ -7565,7 +8679,7 @@
                 </a:solidFill>
                 <a:latin typeface="Fira Sans"/>
               </a:rPr>
-              <a:t>El mismo diseño relacional de la Casen, el Censo o la ENUSC.</a:t>
+              <a:t>Un coeficiente no reemplaza al gráfico: la estructura de la relación se mira.</a:t>
             </a:r>
           </a:p>
         </p:txBody>
@@ -7661,45 +8775,21 @@
                 </a:solidFill>
                 <a:latin typeface="Fira Sans"/>
               </a:rPr>
-              <a:t>Una encuesta, varias tablas</a:t>
-            </a:r>
-          </a:p>
-        </p:txBody>
-      </p:sp>
-      <p:pic>
-        <p:nvPicPr>
-          <p:cNvPr id="4" name="Picture 3" descr="05_diagrama_tablas.png"/>
-          <p:cNvPicPr>
-            <a:picLocks noChangeAspect="1"/>
-          </p:cNvPicPr>
-          <p:nvPr/>
-        </p:nvPicPr>
-        <p:blipFill>
-          <a:blip r:embed="rId2"/>
-          <a:stretch>
-            <a:fillRect/>
-          </a:stretch>
-        </p:blipFill>
-        <p:spPr>
-          <a:xfrm>
-            <a:off x="1553651" y="1143000"/>
-            <a:ext cx="6036697" cy="3154680"/>
-          </a:xfrm>
-          <a:prstGeom prst="rect">
-            <a:avLst/>
-          </a:prstGeom>
-        </p:spPr>
-      </p:pic>
-      <p:sp>
-        <p:nvSpPr>
-          <p:cNvPr id="5" name="TextBox 4"/>
+              <a:t>Correlación y causalidad</a:t>
+            </a:r>
+          </a:p>
+        </p:txBody>
+      </p:sp>
+      <p:sp>
+        <p:nvSpPr>
+          <p:cNvPr id="4" name="TextBox 3"/>
           <p:cNvSpPr txBox="1"/>
           <p:nvPr/>
         </p:nvSpPr>
         <p:spPr>
           <a:xfrm>
-            <a:off x="704088" y="4434840"/>
-            <a:ext cx="7744968" cy="457200"/>
+            <a:off x="704088" y="1353312"/>
+            <a:ext cx="7744968" cy="3300984"/>
           </a:xfrm>
           <a:prstGeom prst="rect">
             <a:avLst/>
@@ -7712,14 +8802,143 @@
           </a:bodyPr>
           <a:lstStyle/>
           <a:p>
-            <a:r>
-              <a:rPr sz="1300" b="0">
-                <a:solidFill>
-                  <a:srgbClr val="6B7785"/>
-                </a:solidFill>
-                <a:latin typeface="Fira Sans"/>
-              </a:rPr>
-              <a:t>Los códigos no significan nada sin sus tablas de parámetros: unirlas es parte del análisis.</a:t>
+            <a:pPr>
+              <a:lnSpc>
+                <a:spcPct val="112000"/>
+              </a:lnSpc>
+              <a:spcAft>
+                <a:spcPts val="900"/>
+              </a:spcAft>
+            </a:pPr>
+            <a:r>
+              <a:rPr sz="1800" b="1">
+                <a:solidFill>
+                  <a:srgbClr val="E0A437"/>
+                </a:solidFill>
+                <a:latin typeface="Fira Sans"/>
+              </a:rPr>
+              <a:t>▸ </a:t>
+            </a:r>
+            <a:r>
+              <a:rPr sz="1800" b="0">
+                <a:solidFill>
+                  <a:srgbClr val="000000"/>
+                </a:solidFill>
+                <a:latin typeface="Fira Sans"/>
+              </a:rPr>
+              <a:t>Causalidad: intervenir X cambiaría Y. Es una afirmación más fuerte que la asociación.</a:t>
+            </a:r>
+          </a:p>
+          <a:p>
+            <a:pPr>
+              <a:lnSpc>
+                <a:spcPct val="112000"/>
+              </a:lnSpc>
+              <a:spcAft>
+                <a:spcPts val="500"/>
+              </a:spcAft>
+            </a:pPr>
+            <a:r>
+              <a:rPr sz="1400" b="0">
+                <a:solidFill>
+                  <a:srgbClr val="333333"/>
+                </a:solidFill>
+                <a:latin typeface="Fira Sans"/>
+              </a:rPr>
+              <a:t>     ◦  </a:t>
+            </a:r>
+            <a:r>
+              <a:rPr sz="1400" b="0">
+                <a:solidFill>
+                  <a:srgbClr val="333333"/>
+                </a:solidFill>
+                <a:latin typeface="Fira Sans"/>
+              </a:rPr>
+              <a:t>Una asociación observada admite varias explicaciones: X causa Y, Y causa X, o una variable de confusión Z afecta a ambas.</a:t>
+            </a:r>
+          </a:p>
+          <a:p>
+            <a:pPr>
+              <a:lnSpc>
+                <a:spcPct val="112000"/>
+              </a:lnSpc>
+              <a:spcAft>
+                <a:spcPts val="500"/>
+              </a:spcAft>
+            </a:pPr>
+            <a:r>
+              <a:rPr sz="1400" b="0">
+                <a:solidFill>
+                  <a:srgbClr val="333333"/>
+                </a:solidFill>
+                <a:latin typeface="Fira Sans"/>
+              </a:rPr>
+              <a:t>     ◦  </a:t>
+            </a:r>
+            <a:r>
+              <a:rPr sz="1400" b="0">
+                <a:solidFill>
+                  <a:srgbClr val="333333"/>
+                </a:solidFill>
+                <a:latin typeface="Fira Sans"/>
+              </a:rPr>
+              <a:t>Los datos observacionales, como los de una encuesta, muestran asociación; no bastan para establecer causalidad.</a:t>
+            </a:r>
+          </a:p>
+          <a:p>
+            <a:pPr>
+              <a:lnSpc>
+                <a:spcPct val="112000"/>
+              </a:lnSpc>
+              <a:spcAft>
+                <a:spcPts val="500"/>
+              </a:spcAft>
+            </a:pPr>
+            <a:r>
+              <a:rPr sz="1400" b="0">
+                <a:solidFill>
+                  <a:srgbClr val="333333"/>
+                </a:solidFill>
+                <a:latin typeface="Fira Sans"/>
+              </a:rPr>
+              <a:t>     ◦  </a:t>
+            </a:r>
+            <a:r>
+              <a:rPr sz="1400" b="0">
+                <a:solidFill>
+                  <a:srgbClr val="333333"/>
+                </a:solidFill>
+                <a:latin typeface="Fira Sans"/>
+              </a:rPr>
+              <a:t>La inferencia causal tiene métodos propios; este curso no los cubre.</a:t>
+            </a:r>
+          </a:p>
+          <a:p>
+            <a:pPr>
+              <a:lnSpc>
+                <a:spcPct val="112000"/>
+              </a:lnSpc>
+              <a:spcAft>
+                <a:spcPts val="900"/>
+              </a:spcAft>
+            </a:pPr>
+            <a:r>
+              <a:rPr sz="1800" b="1">
+                <a:solidFill>
+                  <a:srgbClr val="E0A437"/>
+                </a:solidFill>
+                <a:latin typeface="Fira Sans"/>
+              </a:rPr>
+              <a:t>▸ </a:t>
+            </a:r>
+            <a:r>
+              <a:rPr sz="1800" b="1">
+                <a:solidFill>
+                  <a:srgbClr val="1D3557"/>
+                </a:solidFill>
+                <a:latin typeface="Fira Sans"/>
+              </a:rPr>
+              <a:t>Regla de trabajo: una asociación se reporta como asociación, sin verbos causales que los datos no respaldan.</a:t>
             </a:r>
           </a:p>
         </p:txBody>
@@ -7757,7 +8976,7 @@
             <a:avLst/>
           </a:prstGeom>
           <a:solidFill>
-            <a:srgbClr val="1D3557"/>
+            <a:srgbClr val="FAFBFC"/>
           </a:solidFill>
           <a:ln>
             <a:noFill/>
@@ -7794,8 +9013,8 @@
         </p:nvSpPr>
         <p:spPr>
           <a:xfrm>
-            <a:off x="603504" y="1847088"/>
-            <a:ext cx="7946136" cy="1399032"/>
+            <a:off x="402336" y="301752"/>
+            <a:ext cx="8348472" cy="795528"/>
           </a:xfrm>
           <a:prstGeom prst="rect">
             <a:avLst/>
@@ -7809,24 +9028,232 @@
           <a:lstStyle/>
           <a:p>
             <a:r>
-              <a:rPr sz="3400" b="1">
-                <a:solidFill>
-                  <a:srgbClr val="FFFFFF"/>
-                </a:solidFill>
-                <a:latin typeface="Fira Sans"/>
-              </a:rPr>
-              <a:t>Repaso de Pandas</a:t>
-            </a:r>
-          </a:p>
-          <a:p>
+              <a:rPr sz="2800" b="1">
+                <a:solidFill>
+                  <a:srgbClr val="0F0F0F"/>
+                </a:solidFill>
+                <a:latin typeface="Fira Sans"/>
+              </a:rPr>
+              <a:t>Tipos de datos</a:t>
+            </a:r>
+          </a:p>
+        </p:txBody>
+      </p:sp>
+      <p:sp>
+        <p:nvSpPr>
+          <p:cNvPr id="4" name="TextBox 3"/>
+          <p:cNvSpPr txBox="1"/>
+          <p:nvPr/>
+        </p:nvSpPr>
+        <p:spPr>
+          <a:xfrm>
+            <a:off x="704088" y="1353312"/>
+            <a:ext cx="7744968" cy="3300984"/>
+          </a:xfrm>
+          <a:prstGeom prst="rect">
+            <a:avLst/>
+          </a:prstGeom>
+          <a:noFill/>
+        </p:spPr>
+        <p:txBody>
+          <a:bodyPr wrap="square">
+            <a:spAutoFit/>
+          </a:bodyPr>
+          <a:lstStyle/>
+          <a:p>
+            <a:pPr>
+              <a:lnSpc>
+                <a:spcPct val="112000"/>
+              </a:lnSpc>
+              <a:spcAft>
+                <a:spcPts val="900"/>
+              </a:spcAft>
+            </a:pPr>
+            <a:r>
+              <a:rPr sz="1800" b="1">
+                <a:solidFill>
+                  <a:srgbClr val="E0A437"/>
+                </a:solidFill>
+                <a:latin typeface="Fira Sans"/>
+              </a:rPr>
+              <a:t>▸ </a:t>
+            </a:r>
             <a:r>
               <a:rPr sz="1800" b="0">
                 <a:solidFill>
+                  <a:srgbClr val="000000"/>
+                </a:solidFill>
+                <a:latin typeface="Fira Sans"/>
+              </a:rPr>
+              <a:t>El tipo de una variable determina qué operaciones tienen sentido:</a:t>
+            </a:r>
+          </a:p>
+          <a:p>
+            <a:pPr>
+              <a:lnSpc>
+                <a:spcPct val="112000"/>
+              </a:lnSpc>
+              <a:spcAft>
+                <a:spcPts val="500"/>
+              </a:spcAft>
+            </a:pPr>
+            <a:r>
+              <a:rPr sz="1400" b="0">
+                <a:solidFill>
+                  <a:srgbClr val="333333"/>
+                </a:solidFill>
+                <a:latin typeface="Fira Sans"/>
+              </a:rPr>
+              <a:t>     ◦  </a:t>
+            </a:r>
+            <a:r>
+              <a:rPr sz="1400" b="0">
+                <a:solidFill>
+                  <a:srgbClr val="333333"/>
+                </a:solidFill>
+                <a:latin typeface="Fira Sans"/>
+              </a:rPr>
+              <a:t>Categórico nominal: categorías sin orden (sexo, comuna, propósito del viaje).</a:t>
+            </a:r>
+          </a:p>
+          <a:p>
+            <a:pPr>
+              <a:lnSpc>
+                <a:spcPct val="112000"/>
+              </a:lnSpc>
+              <a:spcAft>
+                <a:spcPts val="500"/>
+              </a:spcAft>
+            </a:pPr>
+            <a:r>
+              <a:rPr sz="1400" b="0">
+                <a:solidFill>
+                  <a:srgbClr val="333333"/>
+                </a:solidFill>
+                <a:latin typeface="Fira Sans"/>
+              </a:rPr>
+              <a:t>     ◦  </a:t>
+            </a:r>
+            <a:r>
+              <a:rPr sz="1400" b="0">
+                <a:solidFill>
+                  <a:srgbClr val="333333"/>
+                </a:solidFill>
+                <a:latin typeface="Fira Sans"/>
+              </a:rPr>
+              <a:t>Categórico ordinal: categorías con orden (nivel educacional).</a:t>
+            </a:r>
+          </a:p>
+          <a:p>
+            <a:pPr>
+              <a:lnSpc>
+                <a:spcPct val="112000"/>
+              </a:lnSpc>
+              <a:spcAft>
+                <a:spcPts val="500"/>
+              </a:spcAft>
+            </a:pPr>
+            <a:r>
+              <a:rPr sz="1400" b="0">
+                <a:solidFill>
+                  <a:srgbClr val="333333"/>
+                </a:solidFill>
+                <a:latin typeface="Fira Sans"/>
+              </a:rPr>
+              <a:t>     ◦  </a:t>
+            </a:r>
+            <a:r>
+              <a:rPr sz="1400" b="0">
+                <a:solidFill>
+                  <a:srgbClr val="333333"/>
+                </a:solidFill>
+                <a:latin typeface="Fira Sans"/>
+              </a:rPr>
+              <a:t>Numérico discreto: conteos enteros (viajes por persona).</a:t>
+            </a:r>
+          </a:p>
+          <a:p>
+            <a:pPr>
+              <a:lnSpc>
+                <a:spcPct val="112000"/>
+              </a:lnSpc>
+              <a:spcAft>
+                <a:spcPts val="500"/>
+              </a:spcAft>
+            </a:pPr>
+            <a:r>
+              <a:rPr sz="1400" b="0">
+                <a:solidFill>
+                  <a:srgbClr val="333333"/>
+                </a:solidFill>
+                <a:latin typeface="Fira Sans"/>
+              </a:rPr>
+              <a:t>     ◦  </a:t>
+            </a:r>
+            <a:r>
+              <a:rPr sz="1400" b="0">
+                <a:solidFill>
+                  <a:srgbClr val="333333"/>
+                </a:solidFill>
+                <a:latin typeface="Fira Sans"/>
+              </a:rPr>
+              <a:t>Numérico continuo: mediciones (ingreso del hogar, duración del viaje).</a:t>
+            </a:r>
+          </a:p>
+          <a:p>
+            <a:pPr>
+              <a:lnSpc>
+                <a:spcPct val="112000"/>
+              </a:lnSpc>
+              <a:spcAft>
+                <a:spcPts val="900"/>
+              </a:spcAft>
+            </a:pPr>
+            <a:r>
+              <a:rPr sz="1800" b="1">
+                <a:solidFill>
                   <a:srgbClr val="E0A437"/>
                 </a:solidFill>
                 <a:latin typeface="Fira Sans"/>
               </a:rPr>
-              <a:t>Dos casos concretos</a:t>
+              <a:t>▸ </a:t>
+            </a:r>
+            <a:r>
+              <a:rPr sz="1800" b="0">
+                <a:solidFill>
+                  <a:srgbClr val="000000"/>
+                </a:solidFill>
+                <a:latin typeface="Fira Sans"/>
+              </a:rPr>
+              <a:t>El dtype computacional no es el tipo estadístico: un sexo codificado 1 o 2 es un int64 para Pandas, pero sigue siendo nominal.</a:t>
+            </a:r>
+          </a:p>
+          <a:p>
+            <a:pPr>
+              <a:lnSpc>
+                <a:spcPct val="112000"/>
+              </a:lnSpc>
+              <a:spcAft>
+                <a:spcPts val="900"/>
+              </a:spcAft>
+            </a:pPr>
+            <a:r>
+              <a:rPr sz="1800" b="1">
+                <a:solidFill>
+                  <a:srgbClr val="E0A437"/>
+                </a:solidFill>
+                <a:latin typeface="Fira Sans"/>
+              </a:rPr>
+              <a:t>▸ </a:t>
+            </a:r>
+            <a:r>
+              <a:rPr sz="1800" b="1">
+                <a:solidFill>
+                  <a:srgbClr val="1D3557"/>
+                </a:solidFill>
+                <a:latin typeface="Fira Sans"/>
+              </a:rPr>
+              <a:t>Promediar una variable nominal produce un número sin significado: el promedio de Sexo en la EOD es 1,53.</a:t>
             </a:r>
           </a:p>
         </p:txBody>
@@ -7922,148 +9349,21 @@
                 </a:solidFill>
                 <a:latin typeface="Fira Sans"/>
               </a:rPr>
-              <a:t>Caso 1: códigos que no significan nada solos</a:t>
-            </a:r>
-          </a:p>
-        </p:txBody>
-      </p:sp>
-      <p:sp>
-        <p:nvSpPr>
-          <p:cNvPr id="4" name="Rectangle 3"/>
-          <p:cNvSpPr/>
-          <p:nvPr/>
-        </p:nvSpPr>
-        <p:spPr>
-          <a:xfrm>
-            <a:off x="704088" y="1280160"/>
-            <a:ext cx="7744968" cy="3886200"/>
-          </a:xfrm>
-          <a:prstGeom prst="rect">
-            <a:avLst/>
-          </a:prstGeom>
-          <a:solidFill>
-            <a:srgbClr val="F0F2F5"/>
-          </a:solidFill>
-          <a:ln>
-            <a:solidFill>
-              <a:srgbClr val="D8DDE3"/>
-            </a:solidFill>
-          </a:ln>
-          <a:effectLst/>
-        </p:spPr>
-        <p:style>
-          <a:lnRef idx="1">
-            <a:schemeClr val="accent1"/>
-          </a:lnRef>
-          <a:fillRef idx="3">
-            <a:schemeClr val="accent1"/>
-          </a:fillRef>
-          <a:effectRef idx="2">
-            <a:schemeClr val="accent1"/>
-          </a:effectRef>
-          <a:fontRef idx="minor">
-            <a:schemeClr val="lt1"/>
-          </a:fontRef>
-        </p:style>
-        <p:txBody>
-          <a:bodyPr rtlCol="0" anchor="ctr" wrap="square" lIns="228600" tIns="137160"/>
-          <a:lstStyle/>
-          <a:p>
-            <a:pPr/>
-            <a:r>
-              <a:rPr sz="1500" b="0">
-                <a:solidFill>
-                  <a:srgbClr val="1D3557"/>
-                </a:solidFill>
-                <a:latin typeface="Menlo"/>
-              </a:rPr>
-              <a:t>personas['Sexo'].value_counts()      # 1 y 2: ¿qué son?</a:t>
-            </a:r>
-          </a:p>
-          <a:p>
-            <a:pPr/>
-            <a:r>
-              <a:rPr sz="1500" b="0">
-                <a:solidFill>
-                  <a:srgbClr val="1D3557"/>
-                </a:solidFill>
-                <a:latin typeface="Menlo"/>
-              </a:rPr>
-              <a:t/>
-            </a:r>
-          </a:p>
-          <a:p>
-            <a:pPr/>
-            <a:r>
-              <a:rPr sz="1500" b="0">
-                <a:solidFill>
-                  <a:srgbClr val="1D3557"/>
-                </a:solidFill>
-                <a:latin typeface="Menlo"/>
-              </a:rPr>
-              <a:t>sexo = pd.read_csv('tablas_parametros/Sexo.csv', sep=';')</a:t>
-            </a:r>
-          </a:p>
-          <a:p>
-            <a:pPr/>
-            <a:r>
-              <a:rPr sz="1500" b="0">
-                <a:solidFill>
-                  <a:srgbClr val="1D3557"/>
-                </a:solidFill>
-                <a:latin typeface="Menlo"/>
-              </a:rPr>
-              <a:t>personas = personas.merge(sexo, left_on='Sexo',</a:t>
-            </a:r>
-          </a:p>
-          <a:p>
-            <a:pPr/>
-            <a:r>
-              <a:rPr sz="1500" b="0">
-                <a:solidFill>
-                  <a:srgbClr val="1D3557"/>
-                </a:solidFill>
-                <a:latin typeface="Menlo"/>
-              </a:rPr>
-              <a:t>                          right_on='Id', how='left')</a:t>
-            </a:r>
-          </a:p>
-          <a:p>
-            <a:pPr/>
-            <a:r>
-              <a:rPr sz="1500" b="0">
-                <a:solidFill>
-                  <a:srgbClr val="1D3557"/>
-                </a:solidFill>
-                <a:latin typeface="Menlo"/>
-              </a:rPr>
-              <a:t/>
-            </a:r>
-          </a:p>
-          <a:p>
-            <a:pPr/>
-            <a:r>
-              <a:rPr sz="1500" b="0">
-                <a:solidFill>
-                  <a:srgbClr val="1D3557"/>
-                </a:solidFill>
-                <a:latin typeface="Menlo"/>
-              </a:rPr>
-              <a:t>personas['Sexo'].isna().sum()        # después de todo merge: contar los NaN</a:t>
-            </a:r>
-          </a:p>
-        </p:txBody>
-      </p:sp>
-      <p:sp>
-        <p:nvSpPr>
-          <p:cNvPr id="5" name="TextBox 4"/>
+              <a:t>El análisis exploratorio de datos</a:t>
+            </a:r>
+          </a:p>
+        </p:txBody>
+      </p:sp>
+      <p:sp>
+        <p:nvSpPr>
+          <p:cNvPr id="4" name="TextBox 3"/>
           <p:cNvSpPr txBox="1"/>
           <p:nvPr/>
         </p:nvSpPr>
         <p:spPr>
           <a:xfrm>
-            <a:off x="704088" y="5394960"/>
-            <a:ext cx="7744968" cy="1097280"/>
+            <a:off x="704088" y="1353312"/>
+            <a:ext cx="7744968" cy="3300984"/>
           </a:xfrm>
           <a:prstGeom prst="rect">
             <a:avLst/>
@@ -8076,8 +9376,16 @@
           </a:bodyPr>
           <a:lstStyle/>
           <a:p>
-            <a:r>
-              <a:rPr sz="1600" b="1">
+            <a:pPr>
+              <a:lnSpc>
+                <a:spcPct val="112000"/>
+              </a:lnSpc>
+              <a:spcAft>
+                <a:spcPts val="900"/>
+              </a:spcAft>
+            </a:pPr>
+            <a:r>
+              <a:rPr sz="1800" b="1">
                 <a:solidFill>
                   <a:srgbClr val="E0A437"/>
                 </a:solidFill>
@@ -8086,13 +9394,209 @@
               <a:t>▸ </a:t>
             </a:r>
             <a:r>
-              <a:rPr sz="1600" b="0">
-                <a:solidFill>
-                  <a:srgbClr val="3A4A5C"/>
-                </a:solidFill>
-                <a:latin typeface="Fira Sans"/>
-              </a:rPr>
-              <a:t>El detalle completo, con las cuatro variantes de how, está en el notebook.</a:t>
+              <a:rPr sz="1800" b="0">
+                <a:solidFill>
+                  <a:srgbClr val="000000"/>
+                </a:solidFill>
+                <a:latin typeface="Fira Sans"/>
+              </a:rPr>
+              <a:t>La etapa en que se examinan los datos antes de modelarlos (Tukey, 1977).</a:t>
+            </a:r>
+          </a:p>
+          <a:p>
+            <a:pPr>
+              <a:lnSpc>
+                <a:spcPct val="112000"/>
+              </a:lnSpc>
+              <a:spcAft>
+                <a:spcPts val="900"/>
+              </a:spcAft>
+            </a:pPr>
+            <a:r>
+              <a:rPr sz="1800" b="1">
+                <a:solidFill>
+                  <a:srgbClr val="E0A437"/>
+                </a:solidFill>
+                <a:latin typeface="Fira Sans"/>
+              </a:rPr>
+              <a:t>▸ </a:t>
+            </a:r>
+            <a:r>
+              <a:rPr sz="1800" b="0">
+                <a:solidFill>
+                  <a:srgbClr val="000000"/>
+                </a:solidFill>
+                <a:latin typeface="Fira Sans"/>
+              </a:rPr>
+              <a:t>Responde cuatro tipos de pregunta:</a:t>
+            </a:r>
+          </a:p>
+          <a:p>
+            <a:pPr>
+              <a:lnSpc>
+                <a:spcPct val="112000"/>
+              </a:lnSpc>
+              <a:spcAft>
+                <a:spcPts val="500"/>
+              </a:spcAft>
+            </a:pPr>
+            <a:r>
+              <a:rPr sz="1400" b="0">
+                <a:solidFill>
+                  <a:srgbClr val="333333"/>
+                </a:solidFill>
+                <a:latin typeface="Fira Sans"/>
+              </a:rPr>
+              <a:t>     ◦  </a:t>
+            </a:r>
+            <a:r>
+              <a:rPr sz="1400" b="0">
+                <a:solidFill>
+                  <a:srgbClr val="333333"/>
+                </a:solidFill>
+                <a:latin typeface="Fira Sans"/>
+              </a:rPr>
+              <a:t>La forma: cómo se distribuye cada variable.</a:t>
+            </a:r>
+          </a:p>
+          <a:p>
+            <a:pPr>
+              <a:lnSpc>
+                <a:spcPct val="112000"/>
+              </a:lnSpc>
+              <a:spcAft>
+                <a:spcPts val="500"/>
+              </a:spcAft>
+            </a:pPr>
+            <a:r>
+              <a:rPr sz="1400" b="0">
+                <a:solidFill>
+                  <a:srgbClr val="333333"/>
+                </a:solidFill>
+                <a:latin typeface="Fira Sans"/>
+              </a:rPr>
+              <a:t>     ◦  </a:t>
+            </a:r>
+            <a:r>
+              <a:rPr sz="1400" b="0">
+                <a:solidFill>
+                  <a:srgbClr val="333333"/>
+                </a:solidFill>
+                <a:latin typeface="Fira Sans"/>
+              </a:rPr>
+              <a:t>Lo típico y lo extremo: qué es frecuente y qué es anómalo.</a:t>
+            </a:r>
+          </a:p>
+          <a:p>
+            <a:pPr>
+              <a:lnSpc>
+                <a:spcPct val="112000"/>
+              </a:lnSpc>
+              <a:spcAft>
+                <a:spcPts val="500"/>
+              </a:spcAft>
+            </a:pPr>
+            <a:r>
+              <a:rPr sz="1400" b="0">
+                <a:solidFill>
+                  <a:srgbClr val="333333"/>
+                </a:solidFill>
+                <a:latin typeface="Fira Sans"/>
+              </a:rPr>
+              <a:t>     ◦  </a:t>
+            </a:r>
+            <a:r>
+              <a:rPr sz="1400" b="0">
+                <a:solidFill>
+                  <a:srgbClr val="333333"/>
+                </a:solidFill>
+                <a:latin typeface="Fira Sans"/>
+              </a:rPr>
+              <a:t>Lo que falta: qué datos están ausentes y con qué patrón.</a:t>
+            </a:r>
+          </a:p>
+          <a:p>
+            <a:pPr>
+              <a:lnSpc>
+                <a:spcPct val="112000"/>
+              </a:lnSpc>
+              <a:spcAft>
+                <a:spcPts val="500"/>
+              </a:spcAft>
+            </a:pPr>
+            <a:r>
+              <a:rPr sz="1400" b="0">
+                <a:solidFill>
+                  <a:srgbClr val="333333"/>
+                </a:solidFill>
+                <a:latin typeface="Fira Sans"/>
+              </a:rPr>
+              <a:t>     ◦  </a:t>
+            </a:r>
+            <a:r>
+              <a:rPr sz="1400" b="0">
+                <a:solidFill>
+                  <a:srgbClr val="333333"/>
+                </a:solidFill>
+                <a:latin typeface="Fira Sans"/>
+              </a:rPr>
+              <a:t>Las relaciones: qué variables se asocian con qué otras.</a:t>
+            </a:r>
+          </a:p>
+          <a:p>
+            <a:pPr>
+              <a:lnSpc>
+                <a:spcPct val="112000"/>
+              </a:lnSpc>
+              <a:spcAft>
+                <a:spcPts val="900"/>
+              </a:spcAft>
+            </a:pPr>
+            <a:r>
+              <a:rPr sz="1800" b="1">
+                <a:solidFill>
+                  <a:srgbClr val="E0A437"/>
+                </a:solidFill>
+                <a:latin typeface="Fira Sans"/>
+              </a:rPr>
+              <a:t>▸ </a:t>
+            </a:r>
+            <a:r>
+              <a:rPr sz="1800" b="0">
+                <a:solidFill>
+                  <a:srgbClr val="000000"/>
+                </a:solidFill>
+                <a:latin typeface="Fira Sans"/>
+              </a:rPr>
+              <a:t>Genera hipótesis; el análisis confirmatorio (unidad 5) las pone a prueba.</a:t>
+            </a:r>
+          </a:p>
+          <a:p>
+            <a:pPr>
+              <a:lnSpc>
+                <a:spcPct val="112000"/>
+              </a:lnSpc>
+              <a:spcAft>
+                <a:spcPts val="900"/>
+              </a:spcAft>
+            </a:pPr>
+            <a:r>
+              <a:rPr sz="1800" b="1">
+                <a:solidFill>
+                  <a:srgbClr val="E0A437"/>
+                </a:solidFill>
+                <a:latin typeface="Fira Sans"/>
+              </a:rPr>
+              <a:t>▸ </a:t>
+            </a:r>
+            <a:r>
+              <a:rPr sz="1800" b="1">
+                <a:solidFill>
+                  <a:srgbClr val="1D3557"/>
+                </a:solidFill>
+                <a:latin typeface="Fira Sans"/>
+              </a:rPr>
+              <a:t>Una pregunta transversal para toda cifra resumen: ¿de quién habla este número? ¿De la muestra, de un subgrupo, de la ciudad?</a:t>
             </a:r>
           </a:p>
         </p:txBody>

--- a/presentaciones/clase02_pandas_eda.pptx
+++ b/presentaciones/clase02_pandas_eda.pptx
@@ -33,6 +33,10 @@
     <p:sldId id="281" r:id="rId32"/>
     <p:sldId id="282" r:id="rId33"/>
     <p:sldId id="283" r:id="rId34"/>
+    <p:sldId id="284" r:id="rId35"/>
+    <p:sldId id="285" r:id="rId36"/>
+    <p:sldId id="286" r:id="rId37"/>
+    <p:sldId id="287" r:id="rId38"/>
   </p:sldIdLst>
   <p:sldSz cx="9144000" cy="5138928" type="screen4x3"/>
   <p:notesSz cx="6858000" cy="9144000"/>
@@ -3324,7 +3328,7 @@
             <a:avLst/>
           </a:prstGeom>
           <a:solidFill>
-            <a:srgbClr val="1D3557"/>
+            <a:srgbClr val="FAFBFC"/>
           </a:solidFill>
           <a:ln>
             <a:noFill/>
@@ -3361,8 +3365,8 @@
         </p:nvSpPr>
         <p:spPr>
           <a:xfrm>
-            <a:off x="603504" y="1847088"/>
-            <a:ext cx="7946136" cy="1399032"/>
+            <a:off x="402336" y="301752"/>
+            <a:ext cx="8348472" cy="795528"/>
           </a:xfrm>
           <a:prstGeom prst="rect">
             <a:avLst/>
@@ -3376,24 +3380,176 @@
           <a:lstStyle/>
           <a:p>
             <a:r>
-              <a:rPr sz="3400" b="1">
-                <a:solidFill>
-                  <a:srgbClr val="FFFFFF"/>
-                </a:solidFill>
-                <a:latin typeface="Fira Sans"/>
-              </a:rPr>
-              <a:t>Los datos</a:t>
-            </a:r>
-          </a:p>
-          <a:p>
+              <a:rPr sz="2800" b="1">
+                <a:solidFill>
+                  <a:srgbClr val="0F0F0F"/>
+                </a:solidFill>
+                <a:latin typeface="Fira Sans"/>
+              </a:rPr>
+              <a:t>El tipo estadístico no es el tipo computacional</a:t>
+            </a:r>
+          </a:p>
+        </p:txBody>
+      </p:sp>
+      <p:sp>
+        <p:nvSpPr>
+          <p:cNvPr id="4" name="TextBox 3"/>
+          <p:cNvSpPr txBox="1"/>
+          <p:nvPr/>
+        </p:nvSpPr>
+        <p:spPr>
+          <a:xfrm>
+            <a:off x="704088" y="1353312"/>
+            <a:ext cx="7744968" cy="3300984"/>
+          </a:xfrm>
+          <a:prstGeom prst="rect">
+            <a:avLst/>
+          </a:prstGeom>
+          <a:noFill/>
+        </p:spPr>
+        <p:txBody>
+          <a:bodyPr wrap="square">
+            <a:spAutoFit/>
+          </a:bodyPr>
+          <a:lstStyle/>
+          <a:p>
+            <a:pPr>
+              <a:lnSpc>
+                <a:spcPct val="112000"/>
+              </a:lnSpc>
+              <a:spcAft>
+                <a:spcPts val="900"/>
+              </a:spcAft>
+            </a:pPr>
+            <a:r>
+              <a:rPr sz="1800" b="1">
+                <a:solidFill>
+                  <a:srgbClr val="E0A437"/>
+                </a:solidFill>
+                <a:latin typeface="Fira Sans"/>
+              </a:rPr>
+              <a:t>▸ </a:t>
+            </a:r>
             <a:r>
               <a:rPr sz="1800" b="0">
                 <a:solidFill>
+                  <a:srgbClr val="000000"/>
+                </a:solidFill>
+                <a:latin typeface="Fira Sans"/>
+              </a:rPr>
+              <a:t>En la EOD el sexo viene codificado 1 o 2: para Pandas es un entero (int64).</a:t>
+            </a:r>
+          </a:p>
+          <a:p>
+            <a:pPr>
+              <a:lnSpc>
+                <a:spcPct val="112000"/>
+              </a:lnSpc>
+              <a:spcAft>
+                <a:spcPts val="900"/>
+              </a:spcAft>
+            </a:pPr>
+            <a:r>
+              <a:rPr sz="1800" b="1">
+                <a:solidFill>
                   <a:srgbClr val="E0A437"/>
                 </a:solidFill>
                 <a:latin typeface="Fira Sans"/>
               </a:rPr>
-              <a:t>Encuesta Origen Destino de Santiago 2012</a:t>
+              <a:t>▸ </a:t>
+            </a:r>
+            <a:r>
+              <a:rPr sz="1800" b="0">
+                <a:solidFill>
+                  <a:srgbClr val="000000"/>
+                </a:solidFill>
+                <a:latin typeface="Fira Sans"/>
+              </a:rPr>
+              <a:t>El tipo computacional permite operar; el tipo estadístico decide si la operación significa algo.</a:t>
+            </a:r>
+          </a:p>
+          <a:p>
+            <a:pPr>
+              <a:lnSpc>
+                <a:spcPct val="112000"/>
+              </a:lnSpc>
+              <a:spcAft>
+                <a:spcPts val="500"/>
+              </a:spcAft>
+            </a:pPr>
+            <a:r>
+              <a:rPr sz="1400" b="0">
+                <a:solidFill>
+                  <a:srgbClr val="333333"/>
+                </a:solidFill>
+                <a:latin typeface="Fira Sans"/>
+              </a:rPr>
+              <a:t>     ◦  </a:t>
+            </a:r>
+            <a:r>
+              <a:rPr sz="1400" b="0">
+                <a:solidFill>
+                  <a:srgbClr val="333333"/>
+                </a:solidFill>
+                <a:latin typeface="Fira Sans"/>
+              </a:rPr>
+              <a:t>El promedio de Sexo en la EOD es 1,53: aritméticamente correcto, sin significado.</a:t>
+            </a:r>
+          </a:p>
+          <a:p>
+            <a:pPr>
+              <a:lnSpc>
+                <a:spcPct val="112000"/>
+              </a:lnSpc>
+              <a:spcAft>
+                <a:spcPts val="500"/>
+              </a:spcAft>
+            </a:pPr>
+            <a:r>
+              <a:rPr sz="1400" b="0">
+                <a:solidFill>
+                  <a:srgbClr val="333333"/>
+                </a:solidFill>
+                <a:latin typeface="Fira Sans"/>
+              </a:rPr>
+              <a:t>     ◦  </a:t>
+            </a:r>
+            <a:r>
+              <a:rPr sz="1400" b="0">
+                <a:solidFill>
+                  <a:srgbClr val="333333"/>
+                </a:solidFill>
+                <a:latin typeface="Fira Sans"/>
+              </a:rPr>
+              <a:t>El promedio de Edad sí es interpretable: la variable es numérica.</a:t>
+            </a:r>
+          </a:p>
+          <a:p>
+            <a:pPr>
+              <a:lnSpc>
+                <a:spcPct val="112000"/>
+              </a:lnSpc>
+              <a:spcAft>
+                <a:spcPts val="900"/>
+              </a:spcAft>
+            </a:pPr>
+            <a:r>
+              <a:rPr sz="1800" b="1">
+                <a:solidFill>
+                  <a:srgbClr val="E0A437"/>
+                </a:solidFill>
+                <a:latin typeface="Fira Sans"/>
+              </a:rPr>
+              <a:t>▸ </a:t>
+            </a:r>
+            <a:r>
+              <a:rPr sz="1800" b="1">
+                <a:solidFill>
+                  <a:srgbClr val="1D3557"/>
+                </a:solidFill>
+                <a:latin typeface="Fira Sans"/>
+              </a:rPr>
+              <a:t>Identificar el tipo de cada variable es un paso del análisis, no una formalidad.</a:t>
             </a:r>
           </a:p>
         </p:txBody>
@@ -3489,7 +3645,7 @@
                 </a:solidFill>
                 <a:latin typeface="Fira Sans"/>
               </a:rPr>
-              <a:t>La EOD 2012</a:t>
+              <a:t>El análisis exploratorio de datos</a:t>
             </a:r>
           </a:p>
         </p:txBody>
@@ -3540,7 +3696,7 @@
                 </a:solidFill>
                 <a:latin typeface="Fira Sans"/>
               </a:rPr>
-              <a:t>Encuesta de movilidad del Gran Santiago (SECTRA y U. Alberto Hurtado).</a:t>
+              <a:t>La etapa en que se examinan los datos antes de modelarlos (Tukey, 1977).</a:t>
             </a:r>
           </a:p>
           <a:p>
@@ -3568,7 +3724,7 @@
                 </a:solidFill>
                 <a:latin typeface="Fira Sans"/>
               </a:rPr>
-              <a:t>Registra todos los viajes de un día de los hogares encuestados.</a:t>
+              <a:t>Responde cuatro tipos de pregunta:</a:t>
             </a:r>
           </a:p>
           <a:p>
@@ -3596,7 +3752,7 @@
                 </a:solidFill>
                 <a:latin typeface="Fira Sans"/>
               </a:rPr>
-              <a:t>18.264 hogares, 60.054 personas, 113.591 viajes.</a:t>
+              <a:t>La forma: cómo se distribuye cada variable.</a:t>
             </a:r>
           </a:p>
           <a:p>
@@ -3624,7 +3780,63 @@
                 </a:solidFill>
                 <a:latin typeface="Fira Sans"/>
               </a:rPr>
-              <a:t>Se usa en la planificación de transporte de la ciudad.</a:t>
+              <a:t>Lo típico y lo extremo: qué es frecuente y qué es anómalo.</a:t>
+            </a:r>
+          </a:p>
+          <a:p>
+            <a:pPr>
+              <a:lnSpc>
+                <a:spcPct val="112000"/>
+              </a:lnSpc>
+              <a:spcAft>
+                <a:spcPts val="500"/>
+              </a:spcAft>
+            </a:pPr>
+            <a:r>
+              <a:rPr sz="1400" b="0">
+                <a:solidFill>
+                  <a:srgbClr val="333333"/>
+                </a:solidFill>
+                <a:latin typeface="Fira Sans"/>
+              </a:rPr>
+              <a:t>     ◦  </a:t>
+            </a:r>
+            <a:r>
+              <a:rPr sz="1400" b="0">
+                <a:solidFill>
+                  <a:srgbClr val="333333"/>
+                </a:solidFill>
+                <a:latin typeface="Fira Sans"/>
+              </a:rPr>
+              <a:t>Lo que falta: qué datos están ausentes y con qué patrón.</a:t>
+            </a:r>
+          </a:p>
+          <a:p>
+            <a:pPr>
+              <a:lnSpc>
+                <a:spcPct val="112000"/>
+              </a:lnSpc>
+              <a:spcAft>
+                <a:spcPts val="500"/>
+              </a:spcAft>
+            </a:pPr>
+            <a:r>
+              <a:rPr sz="1400" b="0">
+                <a:solidFill>
+                  <a:srgbClr val="333333"/>
+                </a:solidFill>
+                <a:latin typeface="Fira Sans"/>
+              </a:rPr>
+              <a:t>     ◦  </a:t>
+            </a:r>
+            <a:r>
+              <a:rPr sz="1400" b="0">
+                <a:solidFill>
+                  <a:srgbClr val="333333"/>
+                </a:solidFill>
+                <a:latin typeface="Fira Sans"/>
+              </a:rPr>
+              <a:t>Las relaciones: qué variables se asocian con qué otras.</a:t>
             </a:r>
           </a:p>
           <a:p>
@@ -3646,13 +3858,41 @@
               <a:t>▸ </a:t>
             </a:r>
             <a:r>
+              <a:rPr sz="1800" b="0">
+                <a:solidFill>
+                  <a:srgbClr val="000000"/>
+                </a:solidFill>
+                <a:latin typeface="Fira Sans"/>
+              </a:rPr>
+              <a:t>Genera hipótesis; el análisis confirmatorio (unidad 5) las pone a prueba.</a:t>
+            </a:r>
+          </a:p>
+          <a:p>
+            <a:pPr>
+              <a:lnSpc>
+                <a:spcPct val="112000"/>
+              </a:lnSpc>
+              <a:spcAft>
+                <a:spcPts val="900"/>
+              </a:spcAft>
+            </a:pPr>
+            <a:r>
               <a:rPr sz="1800" b="1">
                 <a:solidFill>
+                  <a:srgbClr val="E0A437"/>
+                </a:solidFill>
+                <a:latin typeface="Fira Sans"/>
+              </a:rPr>
+              <a:t>▸ </a:t>
+            </a:r>
+            <a:r>
+              <a:rPr sz="1800" b="1">
+                <a:solidFill>
                   <a:srgbClr val="1D3557"/>
                 </a:solidFill>
                 <a:latin typeface="Fira Sans"/>
               </a:rPr>
-              <a:t>El mismo diseño relacional de la Casen, el Censo o la ENUSC.</a:t>
+              <a:t>Una pregunta transversal para toda cifra resumen: ¿de quién habla este número? ¿De la muestra, de un subgrupo, de la ciudad?</a:t>
             </a:r>
           </a:p>
         </p:txBody>
@@ -3690,7 +3930,7 @@
             <a:avLst/>
           </a:prstGeom>
           <a:solidFill>
-            <a:srgbClr val="FAFBFC"/>
+            <a:srgbClr val="1D3557"/>
           </a:solidFill>
           <a:ln>
             <a:noFill/>
@@ -3727,8 +3967,8 @@
         </p:nvSpPr>
         <p:spPr>
           <a:xfrm>
-            <a:off x="402336" y="301752"/>
-            <a:ext cx="8348472" cy="795528"/>
+            <a:off x="603504" y="1847088"/>
+            <a:ext cx="7946136" cy="1399032"/>
           </a:xfrm>
           <a:prstGeom prst="rect">
             <a:avLst/>
@@ -3742,71 +3982,24 @@
           <a:lstStyle/>
           <a:p>
             <a:r>
-              <a:rPr sz="2800" b="1">
-                <a:solidFill>
-                  <a:srgbClr val="0F0F0F"/>
-                </a:solidFill>
-                <a:latin typeface="Fira Sans"/>
-              </a:rPr>
-              <a:t>Una encuesta, varias tablas</a:t>
-            </a:r>
-          </a:p>
-        </p:txBody>
-      </p:sp>
-      <p:pic>
-        <p:nvPicPr>
-          <p:cNvPr id="4" name="Picture 3" descr="05_diagrama_tablas.png"/>
-          <p:cNvPicPr>
-            <a:picLocks noChangeAspect="1"/>
-          </p:cNvPicPr>
-          <p:nvPr/>
-        </p:nvPicPr>
-        <p:blipFill>
-          <a:blip r:embed="rId2"/>
-          <a:stretch>
-            <a:fillRect/>
-          </a:stretch>
-        </p:blipFill>
-        <p:spPr>
-          <a:xfrm>
-            <a:off x="1553651" y="1143000"/>
-            <a:ext cx="6036697" cy="3154680"/>
-          </a:xfrm>
-          <a:prstGeom prst="rect">
-            <a:avLst/>
-          </a:prstGeom>
-        </p:spPr>
-      </p:pic>
-      <p:sp>
-        <p:nvSpPr>
-          <p:cNvPr id="5" name="TextBox 4"/>
-          <p:cNvSpPr txBox="1"/>
-          <p:nvPr/>
-        </p:nvSpPr>
-        <p:spPr>
-          <a:xfrm>
-            <a:off x="704088" y="4434840"/>
-            <a:ext cx="7744968" cy="457200"/>
-          </a:xfrm>
-          <a:prstGeom prst="rect">
-            <a:avLst/>
-          </a:prstGeom>
-          <a:noFill/>
-        </p:spPr>
-        <p:txBody>
-          <a:bodyPr wrap="square">
-            <a:spAutoFit/>
-          </a:bodyPr>
-          <a:lstStyle/>
-          <a:p>
-            <a:r>
-              <a:rPr sz="1300" b="0">
-                <a:solidFill>
-                  <a:srgbClr val="333333"/>
-                </a:solidFill>
-                <a:latin typeface="Fira Sans"/>
-              </a:rPr>
-              <a:t>Los códigos no significan nada sin sus tablas de parámetros: unirlas es parte del análisis.</a:t>
+              <a:rPr sz="3400" b="1">
+                <a:solidFill>
+                  <a:srgbClr val="FFFFFF"/>
+                </a:solidFill>
+                <a:latin typeface="Fira Sans"/>
+              </a:rPr>
+              <a:t>Los datos</a:t>
+            </a:r>
+          </a:p>
+          <a:p>
+            <a:r>
+              <a:rPr sz="1800" b="0">
+                <a:solidFill>
+                  <a:srgbClr val="E0A437"/>
+                </a:solidFill>
+                <a:latin typeface="Fira Sans"/>
+              </a:rPr>
+              <a:t>Encuesta Origen Destino de Santiago 2012</a:t>
             </a:r>
           </a:p>
         </p:txBody>
@@ -3844,7 +4037,7 @@
             <a:avLst/>
           </a:prstGeom>
           <a:solidFill>
-            <a:srgbClr val="1D3557"/>
+            <a:srgbClr val="FAFBFC"/>
           </a:solidFill>
           <a:ln>
             <a:noFill/>
@@ -3881,8 +4074,8 @@
         </p:nvSpPr>
         <p:spPr>
           <a:xfrm>
-            <a:off x="603504" y="1847088"/>
-            <a:ext cx="7946136" cy="1399032"/>
+            <a:off x="402336" y="301752"/>
+            <a:ext cx="8348472" cy="795528"/>
           </a:xfrm>
           <a:prstGeom prst="rect">
             <a:avLst/>
@@ -3896,24 +4089,176 @@
           <a:lstStyle/>
           <a:p>
             <a:r>
-              <a:rPr sz="3400" b="1">
-                <a:solidFill>
-                  <a:srgbClr val="FFFFFF"/>
-                </a:solidFill>
-                <a:latin typeface="Fira Sans"/>
-              </a:rPr>
-              <a:t>Repaso de Pandas</a:t>
-            </a:r>
-          </a:p>
-          <a:p>
+              <a:rPr sz="2800" b="1">
+                <a:solidFill>
+                  <a:srgbClr val="0F0F0F"/>
+                </a:solidFill>
+                <a:latin typeface="Fira Sans"/>
+              </a:rPr>
+              <a:t>La EOD 2012</a:t>
+            </a:r>
+          </a:p>
+        </p:txBody>
+      </p:sp>
+      <p:sp>
+        <p:nvSpPr>
+          <p:cNvPr id="4" name="TextBox 3"/>
+          <p:cNvSpPr txBox="1"/>
+          <p:nvPr/>
+        </p:nvSpPr>
+        <p:spPr>
+          <a:xfrm>
+            <a:off x="704088" y="1353312"/>
+            <a:ext cx="7744968" cy="3300984"/>
+          </a:xfrm>
+          <a:prstGeom prst="rect">
+            <a:avLst/>
+          </a:prstGeom>
+          <a:noFill/>
+        </p:spPr>
+        <p:txBody>
+          <a:bodyPr wrap="square">
+            <a:spAutoFit/>
+          </a:bodyPr>
+          <a:lstStyle/>
+          <a:p>
+            <a:pPr>
+              <a:lnSpc>
+                <a:spcPct val="112000"/>
+              </a:lnSpc>
+              <a:spcAft>
+                <a:spcPts val="900"/>
+              </a:spcAft>
+            </a:pPr>
+            <a:r>
+              <a:rPr sz="1800" b="1">
+                <a:solidFill>
+                  <a:srgbClr val="E0A437"/>
+                </a:solidFill>
+                <a:latin typeface="Fira Sans"/>
+              </a:rPr>
+              <a:t>▸ </a:t>
+            </a:r>
             <a:r>
               <a:rPr sz="1800" b="0">
                 <a:solidFill>
+                  <a:srgbClr val="000000"/>
+                </a:solidFill>
+                <a:latin typeface="Fira Sans"/>
+              </a:rPr>
+              <a:t>Encuesta de movilidad del Gran Santiago (SECTRA y U. Alberto Hurtado).</a:t>
+            </a:r>
+          </a:p>
+          <a:p>
+            <a:pPr>
+              <a:lnSpc>
+                <a:spcPct val="112000"/>
+              </a:lnSpc>
+              <a:spcAft>
+                <a:spcPts val="900"/>
+              </a:spcAft>
+            </a:pPr>
+            <a:r>
+              <a:rPr sz="1800" b="1">
+                <a:solidFill>
                   <a:srgbClr val="E0A437"/>
                 </a:solidFill>
                 <a:latin typeface="Fira Sans"/>
               </a:rPr>
-              <a:t>Dos casos concretos con la EOD</a:t>
+              <a:t>▸ </a:t>
+            </a:r>
+            <a:r>
+              <a:rPr sz="1800" b="0">
+                <a:solidFill>
+                  <a:srgbClr val="000000"/>
+                </a:solidFill>
+                <a:latin typeface="Fira Sans"/>
+              </a:rPr>
+              <a:t>Registra todos los viajes de un día de los hogares encuestados.</a:t>
+            </a:r>
+          </a:p>
+          <a:p>
+            <a:pPr>
+              <a:lnSpc>
+                <a:spcPct val="112000"/>
+              </a:lnSpc>
+              <a:spcAft>
+                <a:spcPts val="500"/>
+              </a:spcAft>
+            </a:pPr>
+            <a:r>
+              <a:rPr sz="1400" b="0">
+                <a:solidFill>
+                  <a:srgbClr val="333333"/>
+                </a:solidFill>
+                <a:latin typeface="Fira Sans"/>
+              </a:rPr>
+              <a:t>     ◦  </a:t>
+            </a:r>
+            <a:r>
+              <a:rPr sz="1400" b="0">
+                <a:solidFill>
+                  <a:srgbClr val="333333"/>
+                </a:solidFill>
+                <a:latin typeface="Fira Sans"/>
+              </a:rPr>
+              <a:t>18.264 hogares, 60.054 personas, 113.591 viajes.</a:t>
+            </a:r>
+          </a:p>
+          <a:p>
+            <a:pPr>
+              <a:lnSpc>
+                <a:spcPct val="112000"/>
+              </a:lnSpc>
+              <a:spcAft>
+                <a:spcPts val="500"/>
+              </a:spcAft>
+            </a:pPr>
+            <a:r>
+              <a:rPr sz="1400" b="0">
+                <a:solidFill>
+                  <a:srgbClr val="333333"/>
+                </a:solidFill>
+                <a:latin typeface="Fira Sans"/>
+              </a:rPr>
+              <a:t>     ◦  </a:t>
+            </a:r>
+            <a:r>
+              <a:rPr sz="1400" b="0">
+                <a:solidFill>
+                  <a:srgbClr val="333333"/>
+                </a:solidFill>
+                <a:latin typeface="Fira Sans"/>
+              </a:rPr>
+              <a:t>Se usa en la planificación de transporte de la ciudad.</a:t>
+            </a:r>
+          </a:p>
+          <a:p>
+            <a:pPr>
+              <a:lnSpc>
+                <a:spcPct val="112000"/>
+              </a:lnSpc>
+              <a:spcAft>
+                <a:spcPts val="900"/>
+              </a:spcAft>
+            </a:pPr>
+            <a:r>
+              <a:rPr sz="1800" b="1">
+                <a:solidFill>
+                  <a:srgbClr val="E0A437"/>
+                </a:solidFill>
+                <a:latin typeface="Fira Sans"/>
+              </a:rPr>
+              <a:t>▸ </a:t>
+            </a:r>
+            <a:r>
+              <a:rPr sz="1800" b="1">
+                <a:solidFill>
+                  <a:srgbClr val="1D3557"/>
+                </a:solidFill>
+                <a:latin typeface="Fira Sans"/>
+              </a:rPr>
+              <a:t>El mismo diseño relacional de la Casen, el Censo o la ENUSC.</a:t>
             </a:r>
           </a:p>
         </p:txBody>
@@ -4009,138 +4354,35 @@
                 </a:solidFill>
                 <a:latin typeface="Fira Sans"/>
               </a:rPr>
-              <a:t>Caso 1: códigos que requieren su tabla de parámetros</a:t>
-            </a:r>
-          </a:p>
-        </p:txBody>
-      </p:sp>
-      <p:sp>
-        <p:nvSpPr>
-          <p:cNvPr id="4" name="Rectangle 3"/>
-          <p:cNvSpPr/>
-          <p:nvPr/>
-        </p:nvSpPr>
-        <p:spPr>
-          <a:xfrm>
-            <a:off x="704088" y="1280160"/>
-            <a:ext cx="7744968" cy="3886200"/>
-          </a:xfrm>
-          <a:prstGeom prst="rect">
-            <a:avLst/>
-          </a:prstGeom>
-          <a:solidFill>
-            <a:srgbClr val="F0F2F5"/>
-          </a:solidFill>
-          <a:ln>
-            <a:solidFill>
-              <a:srgbClr val="D8DDE3"/>
-            </a:solidFill>
-          </a:ln>
-          <a:effectLst/>
-        </p:spPr>
-        <p:style>
-          <a:lnRef idx="1">
-            <a:schemeClr val="accent1"/>
-          </a:lnRef>
-          <a:fillRef idx="3">
-            <a:schemeClr val="accent1"/>
-          </a:fillRef>
-          <a:effectRef idx="2">
-            <a:schemeClr val="accent1"/>
-          </a:effectRef>
-          <a:fontRef idx="minor">
-            <a:schemeClr val="lt1"/>
-          </a:fontRef>
-        </p:style>
-        <p:txBody>
-          <a:bodyPr rtlCol="0" anchor="ctr" wrap="square" lIns="228600" tIns="137160"/>
-          <a:lstStyle/>
-          <a:p>
-            <a:pPr/>
-            <a:r>
-              <a:rPr sz="1500" b="0">
-                <a:solidFill>
-                  <a:srgbClr val="1D3557"/>
-                </a:solidFill>
-                <a:latin typeface="Menlo"/>
-              </a:rPr>
-              <a:t>personas['Sexo'].value_counts()      # 1 y 2: ¿qué son?</a:t>
-            </a:r>
-          </a:p>
-          <a:p>
-            <a:pPr/>
-            <a:r>
-              <a:rPr sz="1500" b="0">
-                <a:solidFill>
-                  <a:srgbClr val="1D3557"/>
-                </a:solidFill>
-                <a:latin typeface="Menlo"/>
-              </a:rPr>
-              <a:t/>
-            </a:r>
-          </a:p>
-          <a:p>
-            <a:pPr/>
-            <a:r>
-              <a:rPr sz="1500" b="0">
-                <a:solidFill>
-                  <a:srgbClr val="1D3557"/>
-                </a:solidFill>
-                <a:latin typeface="Menlo"/>
-              </a:rPr>
-              <a:t>sexo = pd.read_csv('tablas_parametros/Sexo.csv', sep=';')</a:t>
-            </a:r>
-          </a:p>
-          <a:p>
-            <a:pPr/>
-            <a:r>
-              <a:rPr sz="1500" b="0">
-                <a:solidFill>
-                  <a:srgbClr val="1D3557"/>
-                </a:solidFill>
-                <a:latin typeface="Menlo"/>
-              </a:rPr>
-              <a:t>personas = personas.merge(sexo, left_on='Sexo',</a:t>
-            </a:r>
-          </a:p>
-          <a:p>
-            <a:pPr/>
-            <a:r>
-              <a:rPr sz="1500" b="0">
-                <a:solidFill>
-                  <a:srgbClr val="1D3557"/>
-                </a:solidFill>
-                <a:latin typeface="Menlo"/>
-              </a:rPr>
-              <a:t>                          right_on='Id', how='left')</a:t>
-            </a:r>
-          </a:p>
-          <a:p>
-            <a:pPr/>
-            <a:r>
-              <a:rPr sz="1500" b="0">
-                <a:solidFill>
-                  <a:srgbClr val="1D3557"/>
-                </a:solidFill>
-                <a:latin typeface="Menlo"/>
-              </a:rPr>
-              <a:t/>
-            </a:r>
-          </a:p>
-          <a:p>
-            <a:pPr/>
-            <a:r>
-              <a:rPr sz="1500" b="0">
-                <a:solidFill>
-                  <a:srgbClr val="1D3557"/>
-                </a:solidFill>
-                <a:latin typeface="Menlo"/>
-              </a:rPr>
-              <a:t>personas['Sexo'].isna().sum()        # después de todo merge: contar los NaN</a:t>
-            </a:r>
-          </a:p>
-        </p:txBody>
-      </p:sp>
+              <a:t>Una encuesta, varias tablas</a:t>
+            </a:r>
+          </a:p>
+        </p:txBody>
+      </p:sp>
+      <p:pic>
+        <p:nvPicPr>
+          <p:cNvPr id="4" name="Picture 3" descr="05_diagrama_tablas.png"/>
+          <p:cNvPicPr>
+            <a:picLocks noChangeAspect="1"/>
+          </p:cNvPicPr>
+          <p:nvPr/>
+        </p:nvPicPr>
+        <p:blipFill>
+          <a:blip r:embed="rId2"/>
+          <a:stretch>
+            <a:fillRect/>
+          </a:stretch>
+        </p:blipFill>
+        <p:spPr>
+          <a:xfrm>
+            <a:off x="1553651" y="1143000"/>
+            <a:ext cx="6036697" cy="3154680"/>
+          </a:xfrm>
+          <a:prstGeom prst="rect">
+            <a:avLst/>
+          </a:prstGeom>
+        </p:spPr>
+      </p:pic>
       <p:sp>
         <p:nvSpPr>
           <p:cNvPr id="5" name="TextBox 4"/>
@@ -4149,8 +4391,8 @@
         </p:nvSpPr>
         <p:spPr>
           <a:xfrm>
-            <a:off x="704088" y="5394960"/>
-            <a:ext cx="7744968" cy="1097280"/>
+            <a:off x="704088" y="4434840"/>
+            <a:ext cx="7744968" cy="457200"/>
           </a:xfrm>
           <a:prstGeom prst="rect">
             <a:avLst/>
@@ -4163,31 +4405,14 @@
           </a:bodyPr>
           <a:lstStyle/>
           <a:p>
-            <a:pPr>
-              <a:lnSpc>
-                <a:spcPct val="112000"/>
-              </a:lnSpc>
-              <a:spcAft>
-                <a:spcPts val="900"/>
-              </a:spcAft>
-            </a:pPr>
-            <a:r>
-              <a:rPr sz="1600" b="1">
-                <a:solidFill>
-                  <a:srgbClr val="E0A437"/>
-                </a:solidFill>
-                <a:latin typeface="Fira Sans"/>
-              </a:rPr>
-              <a:t>▸ </a:t>
-            </a:r>
-            <a:r>
-              <a:rPr sz="1600" b="0">
-                <a:solidFill>
-                  <a:srgbClr val="000000"/>
-                </a:solidFill>
-                <a:latin typeface="Fira Sans"/>
-              </a:rPr>
-              <a:t>El detalle completo, con las cuatro variantes de how, está en el notebook.</a:t>
+            <a:r>
+              <a:rPr sz="1300" b="0">
+                <a:solidFill>
+                  <a:srgbClr val="333333"/>
+                </a:solidFill>
+                <a:latin typeface="Fira Sans"/>
+              </a:rPr>
+              <a:t>Los códigos no significan nada sin sus tablas de parámetros: unirlas es parte del análisis.</a:t>
             </a:r>
           </a:p>
         </p:txBody>
@@ -4225,7 +4450,7 @@
             <a:avLst/>
           </a:prstGeom>
           <a:solidFill>
-            <a:srgbClr val="FAFBFC"/>
+            <a:srgbClr val="1D3557"/>
           </a:solidFill>
           <a:ln>
             <a:noFill/>
@@ -4262,8 +4487,8 @@
         </p:nvSpPr>
         <p:spPr>
           <a:xfrm>
-            <a:off x="402336" y="301752"/>
-            <a:ext cx="8348472" cy="795528"/>
+            <a:off x="603504" y="1847088"/>
+            <a:ext cx="7946136" cy="1399032"/>
           </a:xfrm>
           <a:prstGeom prst="rect">
             <a:avLst/>
@@ -4277,71 +4502,24 @@
           <a:lstStyle/>
           <a:p>
             <a:r>
-              <a:rPr sz="2800" b="1">
-                <a:solidFill>
-                  <a:srgbClr val="0F0F0F"/>
-                </a:solidFill>
-                <a:latin typeface="Fira Sans"/>
-              </a:rPr>
-              <a:t>Las variantes del merge: qué filas se conservan</a:t>
-            </a:r>
-          </a:p>
-        </p:txBody>
-      </p:sp>
-      <p:pic>
-        <p:nvPicPr>
-          <p:cNvPr id="4" name="Picture 3" descr="07_diagrama_merge.png"/>
-          <p:cNvPicPr>
-            <a:picLocks noChangeAspect="1"/>
-          </p:cNvPicPr>
-          <p:nvPr/>
-        </p:nvPicPr>
-        <p:blipFill>
-          <a:blip r:embed="rId2"/>
-          <a:stretch>
-            <a:fillRect/>
-          </a:stretch>
-        </p:blipFill>
-        <p:spPr>
-          <a:xfrm>
-            <a:off x="1417319" y="1143000"/>
-            <a:ext cx="6309360" cy="2397276"/>
-          </a:xfrm>
-          <a:prstGeom prst="rect">
-            <a:avLst/>
-          </a:prstGeom>
-        </p:spPr>
-      </p:pic>
-      <p:sp>
-        <p:nvSpPr>
-          <p:cNvPr id="5" name="TextBox 4"/>
-          <p:cNvSpPr txBox="1"/>
-          <p:nvPr/>
-        </p:nvSpPr>
-        <p:spPr>
-          <a:xfrm>
-            <a:off x="704088" y="4434840"/>
-            <a:ext cx="7744968" cy="457200"/>
-          </a:xfrm>
-          <a:prstGeom prst="rect">
-            <a:avLst/>
-          </a:prstGeom>
-          <a:noFill/>
-        </p:spPr>
-        <p:txBody>
-          <a:bodyPr wrap="square">
-            <a:spAutoFit/>
-          </a:bodyPr>
-          <a:lstStyle/>
-          <a:p>
-            <a:r>
-              <a:rPr sz="1300" b="0">
-                <a:solidFill>
-                  <a:srgbClr val="333333"/>
-                </a:solidFill>
-                <a:latin typeface="Fira Sans"/>
-              </a:rPr>
-              <a:t>El valor por defecto es inner: descarta sin aviso las filas sin pareja.</a:t>
+              <a:rPr sz="3400" b="1">
+                <a:solidFill>
+                  <a:srgbClr val="FFFFFF"/>
+                </a:solidFill>
+                <a:latin typeface="Fira Sans"/>
+              </a:rPr>
+              <a:t>Repaso de Pandas</a:t>
+            </a:r>
+          </a:p>
+          <a:p>
+            <a:r>
+              <a:rPr sz="1800" b="0">
+                <a:solidFill>
+                  <a:srgbClr val="E0A437"/>
+                </a:solidFill>
+                <a:latin typeface="Fira Sans"/>
+              </a:rPr>
+              <a:t>Dos casos concretos con la EOD</a:t>
             </a:r>
           </a:p>
         </p:txBody>
@@ -4437,21 +4615,112 @@
                 </a:solidFill>
                 <a:latin typeface="Fira Sans"/>
               </a:rPr>
-              <a:t>El efecto del parámetro how sobre la población analizada</a:t>
-            </a:r>
-          </a:p>
-        </p:txBody>
-      </p:sp>
-      <p:sp>
-        <p:nvSpPr>
-          <p:cNvPr id="4" name="TextBox 3"/>
+              <a:t>Abrir el dataset</a:t>
+            </a:r>
+          </a:p>
+        </p:txBody>
+      </p:sp>
+      <p:sp>
+        <p:nvSpPr>
+          <p:cNvPr id="4" name="Rectangle 3"/>
+          <p:cNvSpPr/>
+          <p:nvPr/>
+        </p:nvSpPr>
+        <p:spPr>
+          <a:xfrm>
+            <a:off x="704088" y="1280160"/>
+            <a:ext cx="7744968" cy="2377440"/>
+          </a:xfrm>
+          <a:prstGeom prst="rect">
+            <a:avLst/>
+          </a:prstGeom>
+          <a:solidFill>
+            <a:srgbClr val="F0F2F5"/>
+          </a:solidFill>
+          <a:ln>
+            <a:solidFill>
+              <a:srgbClr val="D8DDE3"/>
+            </a:solidFill>
+          </a:ln>
+          <a:effectLst/>
+        </p:spPr>
+        <p:style>
+          <a:lnRef idx="1">
+            <a:schemeClr val="accent1"/>
+          </a:lnRef>
+          <a:fillRef idx="3">
+            <a:schemeClr val="accent1"/>
+          </a:fillRef>
+          <a:effectRef idx="2">
+            <a:schemeClr val="accent1"/>
+          </a:effectRef>
+          <a:fontRef idx="minor">
+            <a:schemeClr val="lt1"/>
+          </a:fontRef>
+        </p:style>
+        <p:txBody>
+          <a:bodyPr rtlCol="0" anchor="ctr" wrap="square" lIns="228600" tIns="137160"/>
+          <a:lstStyle/>
+          <a:p>
+            <a:pPr/>
+            <a:r>
+              <a:rPr sz="1500" b="0">
+                <a:solidFill>
+                  <a:srgbClr val="1D3557"/>
+                </a:solidFill>
+                <a:latin typeface="Menlo"/>
+              </a:rPr>
+              <a:t>import pandas as pd</a:t>
+            </a:r>
+          </a:p>
+          <a:p>
+            <a:pPr/>
+            <a:r>
+              <a:rPr sz="1500" b="0">
+                <a:solidFill>
+                  <a:srgbClr val="1D3557"/>
+                </a:solidFill>
+                <a:latin typeface="Menlo"/>
+              </a:rPr>
+              <a:t/>
+            </a:r>
+          </a:p>
+          <a:p>
+            <a:pPr/>
+            <a:r>
+              <a:rPr sz="1500" b="0">
+                <a:solidFill>
+                  <a:srgbClr val="1D3557"/>
+                </a:solidFill>
+                <a:latin typeface="Menlo"/>
+              </a:rPr>
+              <a:t>viajes = pd.read_csv('datos/eod_stgo/viajes.csv',</a:t>
+            </a:r>
+          </a:p>
+          <a:p>
+            <a:pPr/>
+            <a:r>
+              <a:rPr sz="1500" b="0">
+                <a:solidFill>
+                  <a:srgbClr val="1D3557"/>
+                </a:solidFill>
+                <a:latin typeface="Menlo"/>
+              </a:rPr>
+              <a:t>                     sep=';', decimal=',')</a:t>
+            </a:r>
+          </a:p>
+        </p:txBody>
+      </p:sp>
+      <p:sp>
+        <p:nvSpPr>
+          <p:cNvPr id="5" name="TextBox 4"/>
           <p:cNvSpPr txBox="1"/>
           <p:nvPr/>
         </p:nvSpPr>
         <p:spPr>
           <a:xfrm>
-            <a:off x="704088" y="1353312"/>
-            <a:ext cx="7744968" cy="3300984"/>
+            <a:off x="704088" y="3886200"/>
+            <a:ext cx="7744968" cy="1097280"/>
           </a:xfrm>
           <a:prstGeom prst="rect">
             <a:avLst/>
@@ -4473,7 +4742,7 @@
               </a:spcAft>
             </a:pPr>
             <a:r>
-              <a:rPr sz="1800" b="1">
+              <a:rPr sz="1600" b="1">
                 <a:solidFill>
                   <a:srgbClr val="E0A437"/>
                 </a:solidFill>
@@ -4482,125 +4751,13 @@
               <a:t>▸ </a:t>
             </a:r>
             <a:r>
-              <a:rPr sz="1800" b="0">
+              <a:rPr sz="1600" b="0">
                 <a:solidFill>
                   <a:srgbClr val="000000"/>
                 </a:solidFill>
                 <a:latin typeface="Fira Sans"/>
               </a:rPr>
-              <a:t>Personas con viajes, merge inner: 113.591 filas (una por viaje).</a:t>
-            </a:r>
-          </a:p>
-          <a:p>
-            <a:pPr>
-              <a:lnSpc>
-                <a:spcPct val="112000"/>
-              </a:lnSpc>
-              <a:spcAft>
-                <a:spcPts val="900"/>
-              </a:spcAft>
-            </a:pPr>
-            <a:r>
-              <a:rPr sz="1800" b="1">
-                <a:solidFill>
-                  <a:srgbClr val="E0A437"/>
-                </a:solidFill>
-                <a:latin typeface="Fira Sans"/>
-              </a:rPr>
-              <a:t>▸ </a:t>
-            </a:r>
-            <a:r>
-              <a:rPr sz="1800" b="0">
-                <a:solidFill>
-                  <a:srgbClr val="000000"/>
-                </a:solidFill>
-                <a:latin typeface="Fira Sans"/>
-              </a:rPr>
-              <a:t>El mismo merge en left: 127.379 filas.</a:t>
-            </a:r>
-          </a:p>
-          <a:p>
-            <a:pPr>
-              <a:lnSpc>
-                <a:spcPct val="112000"/>
-              </a:lnSpc>
-              <a:spcAft>
-                <a:spcPts val="500"/>
-              </a:spcAft>
-            </a:pPr>
-            <a:r>
-              <a:rPr sz="1400" b="0">
-                <a:solidFill>
-                  <a:srgbClr val="333333"/>
-                </a:solidFill>
-                <a:latin typeface="Fira Sans"/>
-              </a:rPr>
-              <a:t>     ◦  </a:t>
-            </a:r>
-            <a:r>
-              <a:rPr sz="1400" b="0">
-                <a:solidFill>
-                  <a:srgbClr val="333333"/>
-                </a:solidFill>
-                <a:latin typeface="Fira Sans"/>
-              </a:rPr>
-              <a:t>La diferencia son 13.788 personas que no viajaron ese día.</a:t>
-            </a:r>
-          </a:p>
-          <a:p>
-            <a:pPr>
-              <a:lnSpc>
-                <a:spcPct val="112000"/>
-              </a:lnSpc>
-              <a:spcAft>
-                <a:spcPts val="500"/>
-              </a:spcAft>
-            </a:pPr>
-            <a:r>
-              <a:rPr sz="1400" b="0">
-                <a:solidFill>
-                  <a:srgbClr val="333333"/>
-                </a:solidFill>
-                <a:latin typeface="Fira Sans"/>
-              </a:rPr>
-              <a:t>     ◦  </a:t>
-            </a:r>
-            <a:r>
-              <a:rPr sz="1400" b="0">
-                <a:solidFill>
-                  <a:srgbClr val="333333"/>
-                </a:solidFill>
-                <a:latin typeface="Fira Sans"/>
-              </a:rPr>
-              <a:t>Con inner desaparecen; con left quedan, con NaN en el viaje.</a:t>
-            </a:r>
-          </a:p>
-          <a:p>
-            <a:pPr>
-              <a:lnSpc>
-                <a:spcPct val="112000"/>
-              </a:lnSpc>
-              <a:spcAft>
-                <a:spcPts val="900"/>
-              </a:spcAft>
-            </a:pPr>
-            <a:r>
-              <a:rPr sz="1800" b="1">
-                <a:solidFill>
-                  <a:srgbClr val="E0A437"/>
-                </a:solidFill>
-                <a:latin typeface="Fira Sans"/>
-              </a:rPr>
-              <a:t>▸ </a:t>
-            </a:r>
-            <a:r>
-              <a:rPr sz="1800" b="1">
-                <a:solidFill>
-                  <a:srgbClr val="1D3557"/>
-                </a:solidFill>
-                <a:latin typeface="Fira Sans"/>
-              </a:rPr>
-              <a:t>Un promedio calculado sobre el resultado del inner excluye a quienes no viajaron.</a:t>
+              <a:t>Todo el código de la clase está en el notebook 02_pandas_eda.ipynb del repositorio.</a:t>
             </a:r>
           </a:p>
         </p:txBody>
@@ -4696,102 +4853,35 @@
                 </a:solidFill>
                 <a:latin typeface="Fira Sans"/>
               </a:rPr>
-              <a:t>Caso 2: contar sin perder a los que no aparecen</a:t>
-            </a:r>
-          </a:p>
-        </p:txBody>
-      </p:sp>
-      <p:sp>
-        <p:nvSpPr>
-          <p:cNvPr id="4" name="Rectangle 3"/>
-          <p:cNvSpPr/>
-          <p:nvPr/>
-        </p:nvSpPr>
-        <p:spPr>
-          <a:xfrm>
-            <a:off x="704088" y="1280160"/>
-            <a:ext cx="7744968" cy="2377440"/>
-          </a:xfrm>
-          <a:prstGeom prst="rect">
-            <a:avLst/>
-          </a:prstGeom>
-          <a:solidFill>
-            <a:srgbClr val="F0F2F5"/>
-          </a:solidFill>
-          <a:ln>
-            <a:solidFill>
-              <a:srgbClr val="D8DDE3"/>
-            </a:solidFill>
-          </a:ln>
-          <a:effectLst/>
-        </p:spPr>
-        <p:style>
-          <a:lnRef idx="1">
-            <a:schemeClr val="accent1"/>
-          </a:lnRef>
-          <a:fillRef idx="3">
-            <a:schemeClr val="accent1"/>
-          </a:fillRef>
-          <a:effectRef idx="2">
-            <a:schemeClr val="accent1"/>
-          </a:effectRef>
-          <a:fontRef idx="minor">
-            <a:schemeClr val="lt1"/>
-          </a:fontRef>
-        </p:style>
-        <p:txBody>
-          <a:bodyPr rtlCol="0" anchor="ctr" wrap="square" lIns="228600" tIns="137160"/>
-          <a:lstStyle/>
-          <a:p>
-            <a:pPr/>
-            <a:r>
-              <a:rPr sz="1500" b="0">
-                <a:solidFill>
-                  <a:srgbClr val="1D3557"/>
-                </a:solidFill>
-                <a:latin typeface="Menlo"/>
-              </a:rPr>
-              <a:t>viajes_por_persona = viajes.groupby(['Hogar', 'Persona']).size()</a:t>
-            </a:r>
-          </a:p>
-          <a:p>
-            <a:pPr/>
-            <a:r>
-              <a:rPr sz="1500" b="0">
-                <a:solidFill>
-                  <a:srgbClr val="1D3557"/>
-                </a:solidFill>
-                <a:latin typeface="Menlo"/>
-              </a:rPr>
-              <a:t/>
-            </a:r>
-          </a:p>
-          <a:p>
-            <a:pPr/>
-            <a:r>
-              <a:rPr sz="1500" b="0">
-                <a:solidFill>
-                  <a:srgbClr val="1D3557"/>
-                </a:solidFill>
-                <a:latin typeface="Menlo"/>
-              </a:rPr>
-              <a:t>conteo = personas.set_index(['Hogar', 'Persona']).assign(</a:t>
-            </a:r>
-          </a:p>
-          <a:p>
-            <a:pPr/>
-            <a:r>
-              <a:rPr sz="1500" b="0">
-                <a:solidFill>
-                  <a:srgbClr val="1D3557"/>
-                </a:solidFill>
-                <a:latin typeface="Menlo"/>
-              </a:rPr>
-              <a:t>    n_viajes=viajes_por_persona)['n_viajes'].fillna(0)</a:t>
-            </a:r>
-          </a:p>
-        </p:txBody>
-      </p:sp>
+              <a:t>El DataFrame: la estructura central de Pandas</a:t>
+            </a:r>
+          </a:p>
+        </p:txBody>
+      </p:sp>
+      <p:pic>
+        <p:nvPicPr>
+          <p:cNvPr id="4" name="Picture 3" descr="13_dataframe.png"/>
+          <p:cNvPicPr>
+            <a:picLocks noChangeAspect="1"/>
+          </p:cNvPicPr>
+          <p:nvPr/>
+        </p:nvPicPr>
+        <p:blipFill>
+          <a:blip r:embed="rId2"/>
+          <a:stretch>
+            <a:fillRect/>
+          </a:stretch>
+        </p:blipFill>
+        <p:spPr>
+          <a:xfrm>
+            <a:off x="1417319" y="1143000"/>
+            <a:ext cx="6309360" cy="2553789"/>
+          </a:xfrm>
+          <a:prstGeom prst="rect">
+            <a:avLst/>
+          </a:prstGeom>
+        </p:spPr>
+      </p:pic>
       <p:sp>
         <p:nvSpPr>
           <p:cNvPr id="5" name="TextBox 4"/>
@@ -4800,8 +4890,8 @@
         </p:nvSpPr>
         <p:spPr>
           <a:xfrm>
-            <a:off x="704088" y="3886200"/>
-            <a:ext cx="7744968" cy="1097280"/>
+            <a:off x="704088" y="4434840"/>
+            <a:ext cx="7744968" cy="457200"/>
           </a:xfrm>
           <a:prstGeom prst="rect">
             <a:avLst/>
@@ -4814,31 +4904,14 @@
           </a:bodyPr>
           <a:lstStyle/>
           <a:p>
-            <a:pPr>
-              <a:lnSpc>
-                <a:spcPct val="112000"/>
-              </a:lnSpc>
-              <a:spcAft>
-                <a:spcPts val="900"/>
-              </a:spcAft>
-            </a:pPr>
-            <a:r>
-              <a:rPr sz="1600" b="1">
-                <a:solidFill>
-                  <a:srgbClr val="E0A437"/>
-                </a:solidFill>
-                <a:latin typeface="Fira Sans"/>
-              </a:rPr>
-              <a:t>▸ </a:t>
-            </a:r>
-            <a:r>
-              <a:rPr sz="1600" b="0">
-                <a:solidFill>
-                  <a:srgbClr val="000000"/>
-                </a:solidFill>
-                <a:latin typeface="Fira Sans"/>
-              </a:rPr>
-              <a:t>El groupby cuenta sobre la tabla de viajes; el fillna(0) reincorpora a los ausentes.</a:t>
+            <a:r>
+              <a:rPr sz="1300" b="0">
+                <a:solidFill>
+                  <a:srgbClr val="333333"/>
+                </a:solidFill>
+                <a:latin typeface="Fira Sans"/>
+              </a:rPr>
+              <a:t>Una tabla con filas indexadas y columnas con nombre y tipo. Los códigos (comuna, propósito) se traducen con las tablas de parámetros, uniéndolas con merge.</a:t>
             </a:r>
           </a:p>
         </p:txBody>
@@ -4876,7 +4949,7 @@
             <a:avLst/>
           </a:prstGeom>
           <a:solidFill>
-            <a:srgbClr val="1D3557"/>
+            <a:srgbClr val="FAFBFC"/>
           </a:solidFill>
           <a:ln>
             <a:noFill/>
@@ -4913,8 +4986,8 @@
         </p:nvSpPr>
         <p:spPr>
           <a:xfrm>
-            <a:off x="603504" y="1847088"/>
-            <a:ext cx="7946136" cy="1399032"/>
+            <a:off x="402336" y="301752"/>
+            <a:ext cx="8348472" cy="795528"/>
           </a:xfrm>
           <a:prstGeom prst="rect">
             <a:avLst/>
@@ -4928,24 +5001,71 @@
           <a:lstStyle/>
           <a:p>
             <a:r>
-              <a:rPr sz="3400" b="1">
-                <a:solidFill>
-                  <a:srgbClr val="FFFFFF"/>
-                </a:solidFill>
-                <a:latin typeface="Fira Sans"/>
-              </a:rPr>
-              <a:t>Exploración de la EOD</a:t>
-            </a:r>
-          </a:p>
-          <a:p>
-            <a:r>
-              <a:rPr sz="1800" b="0">
-                <a:solidFill>
-                  <a:srgbClr val="E0A437"/>
-                </a:solidFill>
-                <a:latin typeface="Fira Sans"/>
-              </a:rPr>
-              <a:t>Estadística descriptiva sobre datos reales</a:t>
+              <a:rPr sz="2800" b="1">
+                <a:solidFill>
+                  <a:srgbClr val="0F0F0F"/>
+                </a:solidFill>
+                <a:latin typeface="Fira Sans"/>
+              </a:rPr>
+              <a:t>Las variantes del merge: qué filas se conservan</a:t>
+            </a:r>
+          </a:p>
+        </p:txBody>
+      </p:sp>
+      <p:pic>
+        <p:nvPicPr>
+          <p:cNvPr id="4" name="Picture 3" descr="07_diagrama_merge.png"/>
+          <p:cNvPicPr>
+            <a:picLocks noChangeAspect="1"/>
+          </p:cNvPicPr>
+          <p:nvPr/>
+        </p:nvPicPr>
+        <p:blipFill>
+          <a:blip r:embed="rId2"/>
+          <a:stretch>
+            <a:fillRect/>
+          </a:stretch>
+        </p:blipFill>
+        <p:spPr>
+          <a:xfrm>
+            <a:off x="1417319" y="1143000"/>
+            <a:ext cx="6309360" cy="2397276"/>
+          </a:xfrm>
+          <a:prstGeom prst="rect">
+            <a:avLst/>
+          </a:prstGeom>
+        </p:spPr>
+      </p:pic>
+      <p:sp>
+        <p:nvSpPr>
+          <p:cNvPr id="5" name="TextBox 4"/>
+          <p:cNvSpPr txBox="1"/>
+          <p:nvPr/>
+        </p:nvSpPr>
+        <p:spPr>
+          <a:xfrm>
+            <a:off x="704088" y="4434840"/>
+            <a:ext cx="7744968" cy="457200"/>
+          </a:xfrm>
+          <a:prstGeom prst="rect">
+            <a:avLst/>
+          </a:prstGeom>
+          <a:noFill/>
+        </p:spPr>
+        <p:txBody>
+          <a:bodyPr wrap="square">
+            <a:spAutoFit/>
+          </a:bodyPr>
+          <a:lstStyle/>
+          <a:p>
+            <a:r>
+              <a:rPr sz="1300" b="0">
+                <a:solidFill>
+                  <a:srgbClr val="333333"/>
+                </a:solidFill>
+                <a:latin typeface="Fira Sans"/>
+              </a:rPr>
+              <a:t>El valor por defecto es inner: descarta sin aviso las filas sin pareja.</a:t>
             </a:r>
           </a:p>
         </p:txBody>
@@ -5041,7 +5161,7 @@
                 </a:solidFill>
                 <a:latin typeface="Fira Sans"/>
               </a:rPr>
-              <a:t>Viajes por persona: los ausentes también cuentan</a:t>
+              <a:t>El efecto del parámetro how sobre la población analizada</a:t>
             </a:r>
           </a:p>
         </p:txBody>
@@ -5054,8 +5174,8 @@
         </p:nvSpPr>
         <p:spPr>
           <a:xfrm>
-            <a:off x="502920" y="1252728"/>
-            <a:ext cx="4023360" cy="3200400"/>
+            <a:off x="704088" y="1353312"/>
+            <a:ext cx="7744968" cy="3300984"/>
           </a:xfrm>
           <a:prstGeom prst="rect">
             <a:avLst/>
@@ -5077,7 +5197,7 @@
               </a:spcAft>
             </a:pPr>
             <a:r>
-              <a:rPr sz="1500" b="1">
+              <a:rPr sz="1800" b="1">
                 <a:solidFill>
                   <a:srgbClr val="E0A437"/>
                 </a:solidFill>
@@ -5086,13 +5206,13 @@
               <a:t>▸ </a:t>
             </a:r>
             <a:r>
-              <a:rPr sz="1500" b="0">
+              <a:rPr sz="1800" b="0">
                 <a:solidFill>
                   <a:srgbClr val="000000"/>
                 </a:solidFill>
                 <a:latin typeface="Fira Sans"/>
               </a:rPr>
-              <a:t>El 23% de las personas no viajó ese día.</a:t>
+              <a:t>Personas con viajes, merge inner: 113.591 filas (una por viaje).</a:t>
             </a:r>
           </a:p>
           <a:p>
@@ -5105,7 +5225,7 @@
               </a:spcAft>
             </a:pPr>
             <a:r>
-              <a:rPr sz="1500" b="1">
+              <a:rPr sz="1800" b="1">
                 <a:solidFill>
                   <a:srgbClr val="E0A437"/>
                 </a:solidFill>
@@ -5114,13 +5234,69 @@
               <a:t>▸ </a:t>
             </a:r>
             <a:r>
-              <a:rPr sz="1500" b="0">
+              <a:rPr sz="1800" b="0">
                 <a:solidFill>
                   <a:srgbClr val="000000"/>
                 </a:solidFill>
                 <a:latin typeface="Fira Sans"/>
               </a:rPr>
-              <a:t>Media: 1,9 viajes. Mediana: 2 viajes.</a:t>
+              <a:t>El mismo merge en left: 127.379 filas.</a:t>
+            </a:r>
+          </a:p>
+          <a:p>
+            <a:pPr>
+              <a:lnSpc>
+                <a:spcPct val="112000"/>
+              </a:lnSpc>
+              <a:spcAft>
+                <a:spcPts val="500"/>
+              </a:spcAft>
+            </a:pPr>
+            <a:r>
+              <a:rPr sz="1400" b="0">
+                <a:solidFill>
+                  <a:srgbClr val="333333"/>
+                </a:solidFill>
+                <a:latin typeface="Fira Sans"/>
+              </a:rPr>
+              <a:t>     ◦  </a:t>
+            </a:r>
+            <a:r>
+              <a:rPr sz="1400" b="0">
+                <a:solidFill>
+                  <a:srgbClr val="333333"/>
+                </a:solidFill>
+                <a:latin typeface="Fira Sans"/>
+              </a:rPr>
+              <a:t>La diferencia son 13.788 personas que no viajaron ese día.</a:t>
+            </a:r>
+          </a:p>
+          <a:p>
+            <a:pPr>
+              <a:lnSpc>
+                <a:spcPct val="112000"/>
+              </a:lnSpc>
+              <a:spcAft>
+                <a:spcPts val="500"/>
+              </a:spcAft>
+            </a:pPr>
+            <a:r>
+              <a:rPr sz="1400" b="0">
+                <a:solidFill>
+                  <a:srgbClr val="333333"/>
+                </a:solidFill>
+                <a:latin typeface="Fira Sans"/>
+              </a:rPr>
+              <a:t>     ◦  </a:t>
+            </a:r>
+            <a:r>
+              <a:rPr sz="1400" b="0">
+                <a:solidFill>
+                  <a:srgbClr val="333333"/>
+                </a:solidFill>
+                <a:latin typeface="Fira Sans"/>
+              </a:rPr>
+              <a:t>Con inner desaparecen; con left quedan, con NaN en el viaje.</a:t>
             </a:r>
           </a:p>
           <a:p>
@@ -5133,7 +5309,7 @@
               </a:spcAft>
             </a:pPr>
             <a:r>
-              <a:rPr sz="1500" b="1">
+              <a:rPr sz="1800" b="1">
                 <a:solidFill>
                   <a:srgbClr val="E0A437"/>
                 </a:solidFill>
@@ -5142,69 +5318,17 @@
               <a:t>▸ </a:t>
             </a:r>
             <a:r>
-              <a:rPr sz="1500" b="0">
-                <a:solidFill>
-                  <a:srgbClr val="000000"/>
-                </a:solidFill>
-                <a:latin typeface="Fira Sans"/>
-              </a:rPr>
-              <a:t>La media quedó bajo la mediana: la masa de ceros la desplaza.</a:t>
-            </a:r>
-          </a:p>
-          <a:p>
-            <a:pPr>
-              <a:lnSpc>
-                <a:spcPct val="112000"/>
-              </a:lnSpc>
-              <a:spcAft>
-                <a:spcPts val="900"/>
-              </a:spcAft>
-            </a:pPr>
-            <a:r>
-              <a:rPr sz="1500" b="1">
-                <a:solidFill>
-                  <a:srgbClr val="E0A437"/>
-                </a:solidFill>
-                <a:latin typeface="Fira Sans"/>
-              </a:rPr>
-              <a:t>▸ </a:t>
-            </a:r>
-            <a:r>
-              <a:rPr sz="1500" b="1">
+              <a:rPr sz="1800" b="1">
                 <a:solidFill>
                   <a:srgbClr val="1D3557"/>
                 </a:solidFill>
                 <a:latin typeface="Fira Sans"/>
               </a:rPr>
-              <a:t>La dirección del sesgo depende de la forma de la distribución.</a:t>
-            </a:r>
-          </a:p>
-        </p:txBody>
-      </p:sp>
-      <p:pic>
-        <p:nvPicPr>
-          <p:cNvPr id="5" name="Picture 4" descr="02_viajes_por_persona.png"/>
-          <p:cNvPicPr>
-            <a:picLocks noChangeAspect="1"/>
-          </p:cNvPicPr>
-          <p:nvPr/>
-        </p:nvPicPr>
-        <p:blipFill>
-          <a:blip r:embed="rId2"/>
-          <a:stretch>
-            <a:fillRect/>
-          </a:stretch>
-        </p:blipFill>
-        <p:spPr>
-          <a:xfrm>
-            <a:off x="4892040" y="1371600"/>
-            <a:ext cx="3840480" cy="2191739"/>
-          </a:xfrm>
-          <a:prstGeom prst="rect">
-            <a:avLst/>
-          </a:prstGeom>
-        </p:spPr>
-      </p:pic>
+              <a:t>Un promedio calculado sobre el resultado del inner excluye a quienes no viajaron.</a:t>
+            </a:r>
+          </a:p>
+        </p:txBody>
+      </p:sp>
     </p:spTree>
   </p:cSld>
   <p:clrMapOvr>
@@ -5553,7 +5677,7 @@
             <a:avLst/>
           </a:prstGeom>
           <a:solidFill>
-            <a:srgbClr val="FAFBFC"/>
+            <a:srgbClr val="1D3557"/>
           </a:solidFill>
           <a:ln>
             <a:noFill/>
@@ -5590,8 +5714,8 @@
         </p:nvSpPr>
         <p:spPr>
           <a:xfrm>
-            <a:off x="402336" y="301752"/>
-            <a:ext cx="8348472" cy="795528"/>
+            <a:off x="603504" y="1847088"/>
+            <a:ext cx="7946136" cy="1399032"/>
           </a:xfrm>
           <a:prstGeom prst="rect">
             <a:avLst/>
@@ -5605,71 +5729,24 @@
           <a:lstStyle/>
           <a:p>
             <a:r>
-              <a:rPr sz="2800" b="1">
-                <a:solidFill>
-                  <a:srgbClr val="0F0F0F"/>
-                </a:solidFill>
-                <a:latin typeface="Fira Sans"/>
-              </a:rPr>
-              <a:t>Los factores de expansión: de la muestra a la ciudad</a:t>
-            </a:r>
-          </a:p>
-        </p:txBody>
-      </p:sp>
-      <p:pic>
-        <p:nvPicPr>
-          <p:cNvPr id="4" name="Picture 3" descr="06_diagrama_factores.png"/>
-          <p:cNvPicPr>
-            <a:picLocks noChangeAspect="1"/>
-          </p:cNvPicPr>
-          <p:nvPr/>
-        </p:nvPicPr>
-        <p:blipFill>
-          <a:blip r:embed="rId2"/>
-          <a:stretch>
-            <a:fillRect/>
-          </a:stretch>
-        </p:blipFill>
-        <p:spPr>
-          <a:xfrm>
-            <a:off x="1417319" y="1143000"/>
-            <a:ext cx="6309360" cy="2871234"/>
-          </a:xfrm>
-          <a:prstGeom prst="rect">
-            <a:avLst/>
-          </a:prstGeom>
-        </p:spPr>
-      </p:pic>
-      <p:sp>
-        <p:nvSpPr>
-          <p:cNvPr id="5" name="TextBox 4"/>
-          <p:cNvSpPr txBox="1"/>
-          <p:nvPr/>
-        </p:nvSpPr>
-        <p:spPr>
-          <a:xfrm>
-            <a:off x="704088" y="4434840"/>
-            <a:ext cx="7744968" cy="457200"/>
-          </a:xfrm>
-          <a:prstGeom prst="rect">
-            <a:avLst/>
-          </a:prstGeom>
-          <a:noFill/>
-        </p:spPr>
-        <p:txBody>
-          <a:bodyPr wrap="square">
-            <a:spAutoFit/>
-          </a:bodyPr>
-          <a:lstStyle/>
-          <a:p>
-            <a:r>
-              <a:rPr sz="1300" b="0">
-                <a:solidFill>
-                  <a:srgbClr val="333333"/>
-                </a:solidFill>
-                <a:latin typeface="Fira Sans"/>
-              </a:rPr>
-              <a:t>Contar filas responde por la muestra; sumar factores responde por la ciudad.</a:t>
+              <a:rPr sz="3400" b="1">
+                <a:solidFill>
+                  <a:srgbClr val="FFFFFF"/>
+                </a:solidFill>
+                <a:latin typeface="Fira Sans"/>
+              </a:rPr>
+              <a:t>Exploración de la EOD</a:t>
+            </a:r>
+          </a:p>
+          <a:p>
+            <a:r>
+              <a:rPr sz="1800" b="0">
+                <a:solidFill>
+                  <a:srgbClr val="E0A437"/>
+                </a:solidFill>
+                <a:latin typeface="Fira Sans"/>
+              </a:rPr>
+              <a:t>Estadística descriptiva sobre datos reales</a:t>
             </a:r>
           </a:p>
         </p:txBody>
@@ -5765,7 +5842,7 @@
                 </a:solidFill>
                 <a:latin typeface="Fira Sans"/>
               </a:rPr>
-              <a:t>El ingreso de los hogares: media y mediana</a:t>
+              <a:t>Viajes por persona: los ausentes también cuentan</a:t>
             </a:r>
           </a:p>
         </p:txBody>
@@ -5816,7 +5893,7 @@
                 </a:solidFill>
                 <a:latin typeface="Fira Sans"/>
               </a:rPr>
-              <a:t>Media: $688.274. Mediana: $507.826.</a:t>
+              <a:t>El 23% de las personas no viajó ese día.</a:t>
             </a:r>
           </a:p>
           <a:p>
@@ -5844,7 +5921,7 @@
                 </a:solidFill>
                 <a:latin typeface="Fira Sans"/>
               </a:rPr>
-              <a:t>La media es un 36% más alta que la mediana.</a:t>
+              <a:t>Media: 1,9 viajes. Mediana: 2 viajes.</a:t>
             </a:r>
           </a:p>
           <a:p>
@@ -5872,7 +5949,7 @@
                 </a:solidFill>
                 <a:latin typeface="Fira Sans"/>
               </a:rPr>
-              <a:t>Los ingresos altos desplazan el promedio; la mayoría gana menos.</a:t>
+              <a:t>La media quedó bajo la mediana: la masa de ceros la desplaza.</a:t>
             </a:r>
           </a:p>
           <a:p>
@@ -5900,14 +5977,14 @@
                 </a:solidFill>
                 <a:latin typeface="Fira Sans"/>
               </a:rPr>
-              <a:t>El promedio describe una situación en la que la mayoría no está.</a:t>
+              <a:t>La dirección del sesgo depende de la forma de la distribución.</a:t>
             </a:r>
           </a:p>
         </p:txBody>
       </p:sp>
       <p:pic>
         <p:nvPicPr>
-          <p:cNvPr id="5" name="Picture 4" descr="01_ingreso_media_mediana.png"/>
+          <p:cNvPr id="5" name="Picture 4" descr="02_viajes_por_persona.png"/>
           <p:cNvPicPr>
             <a:picLocks noChangeAspect="1"/>
           </p:cNvPicPr>
@@ -5922,7 +5999,7 @@
         <p:spPr>
           <a:xfrm>
             <a:off x="4892040" y="1371600"/>
-            <a:ext cx="3840480" cy="2182719"/>
+            <a:ext cx="3840480" cy="2191739"/>
           </a:xfrm>
           <a:prstGeom prst="rect">
             <a:avLst/>
@@ -6020,149 +6097,14 @@
                 </a:solidFill>
                 <a:latin typeface="Fira Sans"/>
               </a:rPr>
-              <a:t>La duración de los viajes: valores extremos</a:t>
-            </a:r>
-          </a:p>
-        </p:txBody>
-      </p:sp>
-      <p:sp>
-        <p:nvSpPr>
-          <p:cNvPr id="4" name="TextBox 3"/>
-          <p:cNvSpPr txBox="1"/>
-          <p:nvPr/>
-        </p:nvSpPr>
-        <p:spPr>
-          <a:xfrm>
-            <a:off x="502920" y="1252728"/>
-            <a:ext cx="4023360" cy="3200400"/>
-          </a:xfrm>
-          <a:prstGeom prst="rect">
-            <a:avLst/>
-          </a:prstGeom>
-          <a:noFill/>
-        </p:spPr>
-        <p:txBody>
-          <a:bodyPr wrap="square">
-            <a:spAutoFit/>
-          </a:bodyPr>
-          <a:lstStyle/>
-          <a:p>
-            <a:pPr>
-              <a:lnSpc>
-                <a:spcPct val="112000"/>
-              </a:lnSpc>
-              <a:spcAft>
-                <a:spcPts val="900"/>
-              </a:spcAft>
-            </a:pPr>
-            <a:r>
-              <a:rPr sz="1500" b="1">
-                <a:solidFill>
-                  <a:srgbClr val="E0A437"/>
-                </a:solidFill>
-                <a:latin typeface="Fira Sans"/>
-              </a:rPr>
-              <a:t>▸ </a:t>
-            </a:r>
-            <a:r>
-              <a:rPr sz="1500" b="0">
-                <a:solidFill>
-                  <a:srgbClr val="000000"/>
-                </a:solidFill>
-                <a:latin typeface="Fira Sans"/>
-              </a:rPr>
-              <a:t>Mediana: 30 minutos. Percentil 95: 98 minutos.</a:t>
-            </a:r>
-          </a:p>
-          <a:p>
-            <a:pPr>
-              <a:lnSpc>
-                <a:spcPct val="112000"/>
-              </a:lnSpc>
-              <a:spcAft>
-                <a:spcPts val="900"/>
-              </a:spcAft>
-            </a:pPr>
-            <a:r>
-              <a:rPr sz="1500" b="1">
-                <a:solidFill>
-                  <a:srgbClr val="E0A437"/>
-                </a:solidFill>
-                <a:latin typeface="Fira Sans"/>
-              </a:rPr>
-              <a:t>▸ </a:t>
-            </a:r>
-            <a:r>
-              <a:rPr sz="1500" b="0">
-                <a:solidFill>
-                  <a:srgbClr val="000000"/>
-                </a:solidFill>
-                <a:latin typeface="Fira Sans"/>
-              </a:rPr>
-              <a:t>Máximo registrado: 1.335 minutos, un viaje de 22 horas.</a:t>
-            </a:r>
-          </a:p>
-          <a:p>
-            <a:pPr>
-              <a:lnSpc>
-                <a:spcPct val="112000"/>
-              </a:lnSpc>
-              <a:spcAft>
-                <a:spcPts val="900"/>
-              </a:spcAft>
-            </a:pPr>
-            <a:r>
-              <a:rPr sz="1500" b="1">
-                <a:solidFill>
-                  <a:srgbClr val="E0A437"/>
-                </a:solidFill>
-                <a:latin typeface="Fira Sans"/>
-              </a:rPr>
-              <a:t>▸ </a:t>
-            </a:r>
-            <a:r>
-              <a:rPr sz="1500" b="0">
-                <a:solidFill>
-                  <a:srgbClr val="000000"/>
-                </a:solidFill>
-                <a:latin typeface="Fira Sans"/>
-              </a:rPr>
-              <a:t>¿Error de digitación? ¿Turno nocturno mal anotado?</a:t>
-            </a:r>
-          </a:p>
-          <a:p>
-            <a:pPr>
-              <a:lnSpc>
-                <a:spcPct val="112000"/>
-              </a:lnSpc>
-              <a:spcAft>
-                <a:spcPts val="900"/>
-              </a:spcAft>
-            </a:pPr>
-            <a:r>
-              <a:rPr sz="1500" b="1">
-                <a:solidFill>
-                  <a:srgbClr val="E0A437"/>
-                </a:solidFill>
-                <a:latin typeface="Fira Sans"/>
-              </a:rPr>
-              <a:t>▸ </a:t>
-            </a:r>
-            <a:r>
-              <a:rPr sz="1500" b="1">
-                <a:solidFill>
-                  <a:srgbClr val="1D3557"/>
-                </a:solidFill>
-                <a:latin typeface="Fira Sans"/>
-              </a:rPr>
-              <a:t>Los valores extremos se investigan y la decisión se declara.</a:t>
+              <a:t>Los factores de expansión: de la muestra a la ciudad</a:t>
             </a:r>
           </a:p>
         </p:txBody>
       </p:sp>
       <p:pic>
         <p:nvPicPr>
-          <p:cNvPr id="5" name="Picture 4" descr="04_duracion_viajes.png"/>
+          <p:cNvPr id="4" name="Picture 3" descr="06_diagrama_factores.png"/>
           <p:cNvPicPr>
             <a:picLocks noChangeAspect="1"/>
           </p:cNvPicPr>
@@ -6176,14 +6118,48 @@
         </p:blipFill>
         <p:spPr>
           <a:xfrm>
-            <a:off x="4892040" y="1371600"/>
-            <a:ext cx="3840480" cy="2146492"/>
+            <a:off x="1417319" y="1143000"/>
+            <a:ext cx="6309360" cy="2871234"/>
           </a:xfrm>
           <a:prstGeom prst="rect">
             <a:avLst/>
           </a:prstGeom>
         </p:spPr>
       </p:pic>
+      <p:sp>
+        <p:nvSpPr>
+          <p:cNvPr id="5" name="TextBox 4"/>
+          <p:cNvSpPr txBox="1"/>
+          <p:nvPr/>
+        </p:nvSpPr>
+        <p:spPr>
+          <a:xfrm>
+            <a:off x="704088" y="4434840"/>
+            <a:ext cx="7744968" cy="457200"/>
+          </a:xfrm>
+          <a:prstGeom prst="rect">
+            <a:avLst/>
+          </a:prstGeom>
+          <a:noFill/>
+        </p:spPr>
+        <p:txBody>
+          <a:bodyPr wrap="square">
+            <a:spAutoFit/>
+          </a:bodyPr>
+          <a:lstStyle/>
+          <a:p>
+            <a:r>
+              <a:rPr sz="1300" b="0">
+                <a:solidFill>
+                  <a:srgbClr val="333333"/>
+                </a:solidFill>
+                <a:latin typeface="Fira Sans"/>
+              </a:rPr>
+              <a:t>Contar filas responde por la muestra; sumar factores responde por la ciudad.</a:t>
+            </a:r>
+          </a:p>
+        </p:txBody>
+      </p:sp>
     </p:spTree>
   </p:cSld>
   <p:clrMapOvr>
@@ -6275,7 +6251,7 @@
                 </a:solidFill>
                 <a:latin typeface="Fira Sans"/>
               </a:rPr>
-              <a:t>La partición modal del Gran Santiago</a:t>
+              <a:t>El ingreso de los hogares: media y mediana</a:t>
             </a:r>
           </a:p>
         </p:txBody>
@@ -6326,91 +6302,7 @@
                 </a:solidFill>
                 <a:latin typeface="Fira Sans"/>
               </a:rPr>
-              <a:t>Dos merges y un groupby ponderado por factor.</a:t>
-            </a:r>
-          </a:p>
-          <a:p>
-            <a:pPr>
-              <a:lnSpc>
-                <a:spcPct val="112000"/>
-              </a:lnSpc>
-              <a:spcAft>
-                <a:spcPts val="500"/>
-              </a:spcAft>
-            </a:pPr>
-            <a:r>
-              <a:rPr sz="1300" b="0">
-                <a:solidFill>
-                  <a:srgbClr val="333333"/>
-                </a:solidFill>
-                <a:latin typeface="Fira Sans"/>
-              </a:rPr>
-              <a:t>     ◦  </a:t>
-            </a:r>
-            <a:r>
-              <a:rPr sz="1300" b="0">
-                <a:solidFill>
-                  <a:srgbClr val="333333"/>
-                </a:solidFill>
-                <a:latin typeface="Fira Sans"/>
-              </a:rPr>
-              <a:t>Caminata: 34% de los viajes.</a:t>
-            </a:r>
-          </a:p>
-          <a:p>
-            <a:pPr>
-              <a:lnSpc>
-                <a:spcPct val="112000"/>
-              </a:lnSpc>
-              <a:spcAft>
-                <a:spcPts val="500"/>
-              </a:spcAft>
-            </a:pPr>
-            <a:r>
-              <a:rPr sz="1300" b="0">
-                <a:solidFill>
-                  <a:srgbClr val="333333"/>
-                </a:solidFill>
-                <a:latin typeface="Fira Sans"/>
-              </a:rPr>
-              <a:t>     ◦  </a:t>
-            </a:r>
-            <a:r>
-              <a:rPr sz="1300" b="0">
-                <a:solidFill>
-                  <a:srgbClr val="333333"/>
-                </a:solidFill>
-                <a:latin typeface="Fira Sans"/>
-              </a:rPr>
-              <a:t>Transporte público (Bip!): 24%.</a:t>
-            </a:r>
-          </a:p>
-          <a:p>
-            <a:pPr>
-              <a:lnSpc>
-                <a:spcPct val="112000"/>
-              </a:lnSpc>
-              <a:spcAft>
-                <a:spcPts val="500"/>
-              </a:spcAft>
-            </a:pPr>
-            <a:r>
-              <a:rPr sz="1300" b="0">
-                <a:solidFill>
-                  <a:srgbClr val="333333"/>
-                </a:solidFill>
-                <a:latin typeface="Fira Sans"/>
-              </a:rPr>
-              <a:t>     ◦  </a:t>
-            </a:r>
-            <a:r>
-              <a:rPr sz="1300" b="0">
-                <a:solidFill>
-                  <a:srgbClr val="333333"/>
-                </a:solidFill>
-                <a:latin typeface="Fira Sans"/>
-              </a:rPr>
-              <a:t>Auto: 23%.</a:t>
+              <a:t>Media: $688.274. Mediana: $507.826.</a:t>
             </a:r>
           </a:p>
           <a:p>
@@ -6432,20 +6324,76 @@
               <a:t>▸ </a:t>
             </a:r>
             <a:r>
+              <a:rPr sz="1500" b="0">
+                <a:solidFill>
+                  <a:srgbClr val="000000"/>
+                </a:solidFill>
+                <a:latin typeface="Fira Sans"/>
+              </a:rPr>
+              <a:t>La media es un 36% más alta que la mediana.</a:t>
+            </a:r>
+          </a:p>
+          <a:p>
+            <a:pPr>
+              <a:lnSpc>
+                <a:spcPct val="112000"/>
+              </a:lnSpc>
+              <a:spcAft>
+                <a:spcPts val="900"/>
+              </a:spcAft>
+            </a:pPr>
+            <a:r>
               <a:rPr sz="1500" b="1">
                 <a:solidFill>
+                  <a:srgbClr val="E0A437"/>
+                </a:solidFill>
+                <a:latin typeface="Fira Sans"/>
+              </a:rPr>
+              <a:t>▸ </a:t>
+            </a:r>
+            <a:r>
+              <a:rPr sz="1500" b="0">
+                <a:solidFill>
+                  <a:srgbClr val="000000"/>
+                </a:solidFill>
+                <a:latin typeface="Fira Sans"/>
+              </a:rPr>
+              <a:t>Los ingresos altos desplazan el promedio; la mayoría gana menos.</a:t>
+            </a:r>
+          </a:p>
+          <a:p>
+            <a:pPr>
+              <a:lnSpc>
+                <a:spcPct val="112000"/>
+              </a:lnSpc>
+              <a:spcAft>
+                <a:spcPts val="900"/>
+              </a:spcAft>
+            </a:pPr>
+            <a:r>
+              <a:rPr sz="1500" b="1">
+                <a:solidFill>
+                  <a:srgbClr val="E0A437"/>
+                </a:solidFill>
+                <a:latin typeface="Fira Sans"/>
+              </a:rPr>
+              <a:t>▸ </a:t>
+            </a:r>
+            <a:r>
+              <a:rPr sz="1500" b="1">
+                <a:solidFill>
                   <a:srgbClr val="1D3557"/>
                 </a:solidFill>
                 <a:latin typeface="Fira Sans"/>
               </a:rPr>
-              <a:t>Calculada desde los microdatos, con los factores de un día laboral.</a:t>
+              <a:t>El promedio describe una situación en la que la mayoría no está.</a:t>
             </a:r>
           </a:p>
         </p:txBody>
       </p:sp>
       <p:pic>
         <p:nvPicPr>
-          <p:cNvPr id="5" name="Picture 4" descr="03_reparto_modal.png"/>
+          <p:cNvPr id="5" name="Picture 4" descr="01_ingreso_media_mediana.png"/>
           <p:cNvPicPr>
             <a:picLocks noChangeAspect="1"/>
           </p:cNvPicPr>
@@ -6460,7 +6408,7 @@
         <p:spPr>
           <a:xfrm>
             <a:off x="4892040" y="1371600"/>
-            <a:ext cx="3840480" cy="1938578"/>
+            <a:ext cx="3840480" cy="2182719"/>
           </a:xfrm>
           <a:prstGeom prst="rect">
             <a:avLst/>
@@ -6558,14 +6506,149 @@
                 </a:solidFill>
                 <a:latin typeface="Fira Sans"/>
               </a:rPr>
-              <a:t>El reparto modal difiere entre comunas</a:t>
+              <a:t>La duración de los viajes: valores extremos</a:t>
+            </a:r>
+          </a:p>
+        </p:txBody>
+      </p:sp>
+      <p:sp>
+        <p:nvSpPr>
+          <p:cNvPr id="4" name="TextBox 3"/>
+          <p:cNvSpPr txBox="1"/>
+          <p:nvPr/>
+        </p:nvSpPr>
+        <p:spPr>
+          <a:xfrm>
+            <a:off x="502920" y="1252728"/>
+            <a:ext cx="4023360" cy="3200400"/>
+          </a:xfrm>
+          <a:prstGeom prst="rect">
+            <a:avLst/>
+          </a:prstGeom>
+          <a:noFill/>
+        </p:spPr>
+        <p:txBody>
+          <a:bodyPr wrap="square">
+            <a:spAutoFit/>
+          </a:bodyPr>
+          <a:lstStyle/>
+          <a:p>
+            <a:pPr>
+              <a:lnSpc>
+                <a:spcPct val="112000"/>
+              </a:lnSpc>
+              <a:spcAft>
+                <a:spcPts val="900"/>
+              </a:spcAft>
+            </a:pPr>
+            <a:r>
+              <a:rPr sz="1500" b="1">
+                <a:solidFill>
+                  <a:srgbClr val="E0A437"/>
+                </a:solidFill>
+                <a:latin typeface="Fira Sans"/>
+              </a:rPr>
+              <a:t>▸ </a:t>
+            </a:r>
+            <a:r>
+              <a:rPr sz="1500" b="0">
+                <a:solidFill>
+                  <a:srgbClr val="000000"/>
+                </a:solidFill>
+                <a:latin typeface="Fira Sans"/>
+              </a:rPr>
+              <a:t>Mediana: 30 minutos. Percentil 95: 98 minutos.</a:t>
+            </a:r>
+          </a:p>
+          <a:p>
+            <a:pPr>
+              <a:lnSpc>
+                <a:spcPct val="112000"/>
+              </a:lnSpc>
+              <a:spcAft>
+                <a:spcPts val="900"/>
+              </a:spcAft>
+            </a:pPr>
+            <a:r>
+              <a:rPr sz="1500" b="1">
+                <a:solidFill>
+                  <a:srgbClr val="E0A437"/>
+                </a:solidFill>
+                <a:latin typeface="Fira Sans"/>
+              </a:rPr>
+              <a:t>▸ </a:t>
+            </a:r>
+            <a:r>
+              <a:rPr sz="1500" b="0">
+                <a:solidFill>
+                  <a:srgbClr val="000000"/>
+                </a:solidFill>
+                <a:latin typeface="Fira Sans"/>
+              </a:rPr>
+              <a:t>Máximo registrado: 1.335 minutos, un viaje de 22 horas.</a:t>
+            </a:r>
+          </a:p>
+          <a:p>
+            <a:pPr>
+              <a:lnSpc>
+                <a:spcPct val="112000"/>
+              </a:lnSpc>
+              <a:spcAft>
+                <a:spcPts val="900"/>
+              </a:spcAft>
+            </a:pPr>
+            <a:r>
+              <a:rPr sz="1500" b="1">
+                <a:solidFill>
+                  <a:srgbClr val="E0A437"/>
+                </a:solidFill>
+                <a:latin typeface="Fira Sans"/>
+              </a:rPr>
+              <a:t>▸ </a:t>
+            </a:r>
+            <a:r>
+              <a:rPr sz="1500" b="0">
+                <a:solidFill>
+                  <a:srgbClr val="000000"/>
+                </a:solidFill>
+                <a:latin typeface="Fira Sans"/>
+              </a:rPr>
+              <a:t>¿Error de digitación? ¿Turno nocturno mal anotado?</a:t>
+            </a:r>
+          </a:p>
+          <a:p>
+            <a:pPr>
+              <a:lnSpc>
+                <a:spcPct val="112000"/>
+              </a:lnSpc>
+              <a:spcAft>
+                <a:spcPts val="900"/>
+              </a:spcAft>
+            </a:pPr>
+            <a:r>
+              <a:rPr sz="1500" b="1">
+                <a:solidFill>
+                  <a:srgbClr val="E0A437"/>
+                </a:solidFill>
+                <a:latin typeface="Fira Sans"/>
+              </a:rPr>
+              <a:t>▸ </a:t>
+            </a:r>
+            <a:r>
+              <a:rPr sz="1500" b="1">
+                <a:solidFill>
+                  <a:srgbClr val="1D3557"/>
+                </a:solidFill>
+                <a:latin typeface="Fira Sans"/>
+              </a:rPr>
+              <a:t>Los valores extremos se investigan y la decisión se declara.</a:t>
             </a:r>
           </a:p>
         </p:txBody>
       </p:sp>
       <p:pic>
         <p:nvPicPr>
-          <p:cNvPr id="4" name="Picture 3" descr="08_modo_por_comuna.png"/>
+          <p:cNvPr id="5" name="Picture 4" descr="04_duracion_viajes.png"/>
           <p:cNvPicPr>
             <a:picLocks noChangeAspect="1"/>
           </p:cNvPicPr>
@@ -6579,48 +6662,14 @@
         </p:blipFill>
         <p:spPr>
           <a:xfrm>
-            <a:off x="1994250" y="1143000"/>
-            <a:ext cx="5155498" cy="3154679"/>
+            <a:off x="4892040" y="1371600"/>
+            <a:ext cx="3840480" cy="2146492"/>
           </a:xfrm>
           <a:prstGeom prst="rect">
             <a:avLst/>
           </a:prstGeom>
         </p:spPr>
       </p:pic>
-      <p:sp>
-        <p:nvSpPr>
-          <p:cNvPr id="5" name="TextBox 4"/>
-          <p:cNvSpPr txBox="1"/>
-          <p:nvPr/>
-        </p:nvSpPr>
-        <p:spPr>
-          <a:xfrm>
-            <a:off x="704088" y="4434840"/>
-            <a:ext cx="7744968" cy="457200"/>
-          </a:xfrm>
-          <a:prstGeom prst="rect">
-            <a:avLst/>
-          </a:prstGeom>
-          <a:noFill/>
-        </p:spPr>
-        <p:txBody>
-          <a:bodyPr wrap="square">
-            <a:spAutoFit/>
-          </a:bodyPr>
-          <a:lstStyle/>
-          <a:p>
-            <a:r>
-              <a:rPr sz="1300" b="0">
-                <a:solidFill>
-                  <a:srgbClr val="333333"/>
-                </a:solidFill>
-                <a:latin typeface="Fira Sans"/>
-              </a:rPr>
-              <a:t>Normalizar por comuna permite comparar proporciones entre comunas de tamaños muy distintos.</a:t>
-            </a:r>
-          </a:p>
-        </p:txBody>
-      </p:sp>
     </p:spTree>
   </p:cSld>
   <p:clrMapOvr>
@@ -6712,7 +6761,7 @@
                 </a:solidFill>
                 <a:latin typeface="Fira Sans"/>
               </a:rPr>
-              <a:t>Ingreso y uso de transporte público</a:t>
+              <a:t>La partición modal del Gran Santiago</a:t>
             </a:r>
           </a:p>
         </p:txBody>
@@ -6763,7 +6812,7 @@
                 </a:solidFill>
                 <a:latin typeface="Fira Sans"/>
               </a:rPr>
-              <a:t>Cada punto es una comuna: ingreso medio contra proporción de viajes en transporte público.</a:t>
+              <a:t>Dos merges y un groupby ponderado por factor.</a:t>
             </a:r>
           </a:p>
           <a:p>
@@ -6791,7 +6840,7 @@
                 </a:solidFill>
                 <a:latin typeface="Fira Sans"/>
               </a:rPr>
-              <a:t>Periferia (Buin, Melipilla): poco transporte público; la red no llega.</a:t>
+              <a:t>Caminata: 34% de los viajes.</a:t>
             </a:r>
           </a:p>
           <a:p>
@@ -6819,7 +6868,7 @@
                 </a:solidFill>
                 <a:latin typeface="Fira Sans"/>
               </a:rPr>
-              <a:t>Ingresos altos (Vitacura, Lo Barnechea): conectadas, con poco uso.</a:t>
+              <a:t>Transporte público (Bip!): 24%.</a:t>
             </a:r>
           </a:p>
           <a:p>
@@ -6847,7 +6896,7 @@
                 </a:solidFill>
                 <a:latin typeface="Fira Sans"/>
               </a:rPr>
-              <a:t>Correlación de Pearson: -0,17. La asociación lineal es débil.</a:t>
+              <a:t>Auto: 23%.</a:t>
             </a:r>
           </a:p>
           <a:p>
@@ -6875,14 +6924,14 @@
                 </a:solidFill>
                 <a:latin typeface="Fira Sans"/>
               </a:rPr>
-              <a:t>Como vimos en el marco conceptual: el coeficiente no reemplaza al gráfico, y la asociación no autoriza verbos causales.</a:t>
+              <a:t>Calculada desde los microdatos, con los factores de un día laboral.</a:t>
             </a:r>
           </a:p>
         </p:txBody>
       </p:sp>
       <p:pic>
         <p:nvPicPr>
-          <p:cNvPr id="5" name="Picture 4" descr="09_ingreso_vs_tp.png"/>
+          <p:cNvPr id="5" name="Picture 4" descr="03_reparto_modal.png"/>
           <p:cNvPicPr>
             <a:picLocks noChangeAspect="1"/>
           </p:cNvPicPr>
@@ -6897,7 +6946,7 @@
         <p:spPr>
           <a:xfrm>
             <a:off x="4892040" y="1371600"/>
-            <a:ext cx="3840480" cy="2526979"/>
+            <a:ext cx="3840480" cy="1938578"/>
           </a:xfrm>
           <a:prstGeom prst="rect">
             <a:avLst/>
@@ -6995,14 +7044,14 @@
                 </a:solidFill>
                 <a:latin typeface="Fira Sans"/>
               </a:rPr>
-              <a:t>Los propósitos de viaje según el día de la semana</a:t>
+              <a:t>El reparto modal difiere entre comunas</a:t>
             </a:r>
           </a:p>
         </p:txBody>
       </p:sp>
       <p:pic>
         <p:nvPicPr>
-          <p:cNvPr id="4" name="Picture 3" descr="10_heatmap_rutinas.png"/>
+          <p:cNvPr id="4" name="Picture 3" descr="08_modo_por_comuna.png"/>
           <p:cNvPicPr>
             <a:picLocks noChangeAspect="1"/>
           </p:cNvPicPr>
@@ -7016,8 +7065,8 @@
         </p:blipFill>
         <p:spPr>
           <a:xfrm>
-            <a:off x="1563778" y="1143000"/>
-            <a:ext cx="6016443" cy="3154680"/>
+            <a:off x="1994250" y="1143000"/>
+            <a:ext cx="5155498" cy="3154679"/>
           </a:xfrm>
           <a:prstGeom prst="rect">
             <a:avLst/>
@@ -7053,7 +7102,7 @@
                 </a:solidFill>
                 <a:latin typeface="Fira Sans"/>
               </a:rPr>
-              <a:t>El heatmap muestra 14 propósitos por 7 días en una sola figura: útil para tablas completas.</a:t>
+              <a:t>Normalizar por comuna permite comparar proporciones entre comunas de tamaños muy distintos.</a:t>
             </a:r>
           </a:p>
         </p:txBody>
@@ -7149,7 +7198,7 @@
                 </a:solidFill>
                 <a:latin typeface="Fira Sans"/>
               </a:rPr>
-              <a:t>Síntesis</a:t>
+              <a:t>Ingreso y uso de transporte público</a:t>
             </a:r>
           </a:p>
         </p:txBody>
@@ -7162,8 +7211,8 @@
         </p:nvSpPr>
         <p:spPr>
           <a:xfrm>
-            <a:off x="704088" y="1353312"/>
-            <a:ext cx="7744968" cy="3300984"/>
+            <a:off x="502920" y="1252728"/>
+            <a:ext cx="4023360" cy="3200400"/>
           </a:xfrm>
           <a:prstGeom prst="rect">
             <a:avLst/>
@@ -7185,7 +7234,7 @@
               </a:spcAft>
             </a:pPr>
             <a:r>
-              <a:rPr sz="1800" b="1">
+              <a:rPr sz="1500" b="1">
                 <a:solidFill>
                   <a:srgbClr val="E0A437"/>
                 </a:solidFill>
@@ -7194,13 +7243,97 @@
               <a:t>▸ </a:t>
             </a:r>
             <a:r>
-              <a:rPr sz="1800" b="0">
+              <a:rPr sz="1500" b="0">
                 <a:solidFill>
                   <a:srgbClr val="000000"/>
                 </a:solidFill>
                 <a:latin typeface="Fira Sans"/>
               </a:rPr>
-              <a:t>Un modelo es una simplificación con decisiones incorporadas; estimarlo puede buscar inferencia o predicción.</a:t>
+              <a:t>Cada punto es una comuna: ingreso medio contra proporción de viajes en transporte público.</a:t>
+            </a:r>
+          </a:p>
+          <a:p>
+            <a:pPr>
+              <a:lnSpc>
+                <a:spcPct val="112000"/>
+              </a:lnSpc>
+              <a:spcAft>
+                <a:spcPts val="500"/>
+              </a:spcAft>
+            </a:pPr>
+            <a:r>
+              <a:rPr sz="1300" b="0">
+                <a:solidFill>
+                  <a:srgbClr val="333333"/>
+                </a:solidFill>
+                <a:latin typeface="Fira Sans"/>
+              </a:rPr>
+              <a:t>     ◦  </a:t>
+            </a:r>
+            <a:r>
+              <a:rPr sz="1300" b="0">
+                <a:solidFill>
+                  <a:srgbClr val="333333"/>
+                </a:solidFill>
+                <a:latin typeface="Fira Sans"/>
+              </a:rPr>
+              <a:t>Periferia (Buin, Melipilla): poco transporte público; la red no llega.</a:t>
+            </a:r>
+          </a:p>
+          <a:p>
+            <a:pPr>
+              <a:lnSpc>
+                <a:spcPct val="112000"/>
+              </a:lnSpc>
+              <a:spcAft>
+                <a:spcPts val="500"/>
+              </a:spcAft>
+            </a:pPr>
+            <a:r>
+              <a:rPr sz="1300" b="0">
+                <a:solidFill>
+                  <a:srgbClr val="333333"/>
+                </a:solidFill>
+                <a:latin typeface="Fira Sans"/>
+              </a:rPr>
+              <a:t>     ◦  </a:t>
+            </a:r>
+            <a:r>
+              <a:rPr sz="1300" b="0">
+                <a:solidFill>
+                  <a:srgbClr val="333333"/>
+                </a:solidFill>
+                <a:latin typeface="Fira Sans"/>
+              </a:rPr>
+              <a:t>Ingresos altos (Vitacura, Lo Barnechea): conectadas, con poco uso.</a:t>
+            </a:r>
+          </a:p>
+          <a:p>
+            <a:pPr>
+              <a:lnSpc>
+                <a:spcPct val="112000"/>
+              </a:lnSpc>
+              <a:spcAft>
+                <a:spcPts val="500"/>
+              </a:spcAft>
+            </a:pPr>
+            <a:r>
+              <a:rPr sz="1300" b="0">
+                <a:solidFill>
+                  <a:srgbClr val="333333"/>
+                </a:solidFill>
+                <a:latin typeface="Fira Sans"/>
+              </a:rPr>
+              <a:t>     ◦  </a:t>
+            </a:r>
+            <a:r>
+              <a:rPr sz="1300" b="0">
+                <a:solidFill>
+                  <a:srgbClr val="333333"/>
+                </a:solidFill>
+                <a:latin typeface="Fira Sans"/>
+              </a:rPr>
+              <a:t>Correlación de Pearson: -0,17. La asociación lineal es débil.</a:t>
             </a:r>
           </a:p>
           <a:p>
@@ -7213,7 +7346,7 @@
               </a:spcAft>
             </a:pPr>
             <a:r>
-              <a:rPr sz="1800" b="1">
+              <a:rPr sz="1500" b="1">
                 <a:solidFill>
                   <a:srgbClr val="E0A437"/>
                 </a:solidFill>
@@ -7222,101 +7355,41 @@
               <a:t>▸ </a:t>
             </a:r>
             <a:r>
-              <a:rPr sz="1800" b="0">
-                <a:solidFill>
-                  <a:srgbClr val="000000"/>
-                </a:solidFill>
-                <a:latin typeface="Fira Sans"/>
-              </a:rPr>
-              <a:t>Las asociaciones se reportan como asociaciones: la causalidad exige más que datos observacionales.</a:t>
-            </a:r>
-          </a:p>
-          <a:p>
-            <a:pPr>
-              <a:lnSpc>
-                <a:spcPct val="112000"/>
-              </a:lnSpc>
-              <a:spcAft>
-                <a:spcPts val="900"/>
-              </a:spcAft>
-            </a:pPr>
-            <a:r>
-              <a:rPr sz="1800" b="1">
-                <a:solidFill>
-                  <a:srgbClr val="E0A437"/>
-                </a:solidFill>
-                <a:latin typeface="Fira Sans"/>
-              </a:rPr>
-              <a:t>▸ </a:t>
-            </a:r>
-            <a:r>
-              <a:rPr sz="1800" b="0">
-                <a:solidFill>
-                  <a:srgbClr val="000000"/>
-                </a:solidFill>
-                <a:latin typeface="Fira Sans"/>
-              </a:rPr>
-              <a:t>El tipo de la variable, no su dtype, determina qué resúmenes tienen sentido.</a:t>
-            </a:r>
-          </a:p>
-          <a:p>
-            <a:pPr>
-              <a:lnSpc>
-                <a:spcPct val="112000"/>
-              </a:lnSpc>
-              <a:spcAft>
-                <a:spcPts val="900"/>
-              </a:spcAft>
-            </a:pPr>
-            <a:r>
-              <a:rPr sz="1800" b="1">
-                <a:solidFill>
-                  <a:srgbClr val="E0A437"/>
-                </a:solidFill>
-                <a:latin typeface="Fira Sans"/>
-              </a:rPr>
-              <a:t>▸ </a:t>
-            </a:r>
-            <a:r>
-              <a:rPr sz="1800" b="0">
-                <a:solidFill>
-                  <a:srgbClr val="000000"/>
-                </a:solidFill>
-                <a:latin typeface="Fira Sans"/>
-              </a:rPr>
-              <a:t>Con distribuciones asimétricas, la mediana y los percentiles describen mejor lo típico que la media.</a:t>
-            </a:r>
-          </a:p>
-          <a:p>
-            <a:pPr>
-              <a:lnSpc>
-                <a:spcPct val="112000"/>
-              </a:lnSpc>
-              <a:spcAft>
-                <a:spcPts val="900"/>
-              </a:spcAft>
-            </a:pPr>
-            <a:r>
-              <a:rPr sz="1800" b="1">
-                <a:solidFill>
-                  <a:srgbClr val="E0A437"/>
-                </a:solidFill>
-                <a:latin typeface="Fira Sans"/>
-              </a:rPr>
-              <a:t>▸ </a:t>
-            </a:r>
-            <a:r>
-              <a:rPr sz="1800" b="1">
+              <a:rPr sz="1500" b="1">
                 <a:solidFill>
                   <a:srgbClr val="1D3557"/>
                 </a:solidFill>
                 <a:latin typeface="Fira Sans"/>
               </a:rPr>
-              <a:t>Ante toda cifra resumen: ¿de quién habla este número? ¿Muestra, subgrupo o ciudad?</a:t>
-            </a:r>
-          </a:p>
-        </p:txBody>
-      </p:sp>
+              <a:t>Como vimos en el marco conceptual: el coeficiente no reemplaza al gráfico, y la asociación no autoriza verbos causales.</a:t>
+            </a:r>
+          </a:p>
+        </p:txBody>
+      </p:sp>
+      <p:pic>
+        <p:nvPicPr>
+          <p:cNvPr id="5" name="Picture 4" descr="09_ingreso_vs_tp.png"/>
+          <p:cNvPicPr>
+            <a:picLocks noChangeAspect="1"/>
+          </p:cNvPicPr>
+          <p:nvPr/>
+        </p:nvPicPr>
+        <p:blipFill>
+          <a:blip r:embed="rId2"/>
+          <a:stretch>
+            <a:fillRect/>
+          </a:stretch>
+        </p:blipFill>
+        <p:spPr>
+          <a:xfrm>
+            <a:off x="4892040" y="1371600"/>
+            <a:ext cx="3840480" cy="2526979"/>
+          </a:xfrm>
+          <a:prstGeom prst="rect">
+            <a:avLst/>
+          </a:prstGeom>
+        </p:spPr>
+      </p:pic>
     </p:spTree>
   </p:cSld>
   <p:clrMapOvr>
@@ -7408,21 +7481,45 @@
                 </a:solidFill>
                 <a:latin typeface="Fira Sans"/>
               </a:rPr>
-              <a:t>Segundo bloque: comienza la Tarea 1</a:t>
-            </a:r>
-          </a:p>
-        </p:txBody>
-      </p:sp>
-      <p:sp>
-        <p:nvSpPr>
-          <p:cNvPr id="4" name="TextBox 3"/>
+              <a:t>Los propósitos de viaje según el día de la semana</a:t>
+            </a:r>
+          </a:p>
+        </p:txBody>
+      </p:sp>
+      <p:pic>
+        <p:nvPicPr>
+          <p:cNvPr id="4" name="Picture 3" descr="10_heatmap_rutinas.png"/>
+          <p:cNvPicPr>
+            <a:picLocks noChangeAspect="1"/>
+          </p:cNvPicPr>
+          <p:nvPr/>
+        </p:nvPicPr>
+        <p:blipFill>
+          <a:blip r:embed="rId2"/>
+          <a:stretch>
+            <a:fillRect/>
+          </a:stretch>
+        </p:blipFill>
+        <p:spPr>
+          <a:xfrm>
+            <a:off x="1563778" y="1143000"/>
+            <a:ext cx="6016443" cy="3154680"/>
+          </a:xfrm>
+          <a:prstGeom prst="rect">
+            <a:avLst/>
+          </a:prstGeom>
+        </p:spPr>
+      </p:pic>
+      <p:sp>
+        <p:nvSpPr>
+          <p:cNvPr id="5" name="TextBox 4"/>
           <p:cNvSpPr txBox="1"/>
           <p:nvPr/>
         </p:nvSpPr>
         <p:spPr>
           <a:xfrm>
-            <a:off x="704088" y="1353312"/>
-            <a:ext cx="7744968" cy="3300984"/>
+            <a:off x="704088" y="4434840"/>
+            <a:ext cx="7744968" cy="457200"/>
           </a:xfrm>
           <a:prstGeom prst="rect">
             <a:avLst/>
@@ -7435,171 +7532,168 @@
           </a:bodyPr>
           <a:lstStyle/>
           <a:p>
-            <a:pPr>
-              <a:lnSpc>
-                <a:spcPct val="112000"/>
-              </a:lnSpc>
-              <a:spcAft>
-                <a:spcPts val="900"/>
-              </a:spcAft>
-            </a:pPr>
-            <a:r>
-              <a:rPr sz="1800" b="1">
-                <a:solidFill>
-                  <a:srgbClr val="E0A437"/>
-                </a:solidFill>
-                <a:latin typeface="Fira Sans"/>
-              </a:rPr>
-              <a:t>▸ </a:t>
-            </a:r>
-            <a:r>
-              <a:rPr sz="1800" b="0">
-                <a:solidFill>
-                  <a:srgbClr val="000000"/>
-                </a:solidFill>
-                <a:latin typeface="Fira Sans"/>
-              </a:rPr>
-              <a:t>El retrato de tu comuna: cada pareja adopta una comuna del Gran Santiago.</a:t>
-            </a:r>
-          </a:p>
-          <a:p>
-            <a:pPr>
-              <a:lnSpc>
-                <a:spcPct val="112000"/>
-              </a:lnSpc>
-              <a:spcAft>
-                <a:spcPts val="500"/>
-              </a:spcAft>
-            </a:pPr>
-            <a:r>
-              <a:rPr sz="1400" b="0">
+            <a:r>
+              <a:rPr sz="1300" b="0">
                 <a:solidFill>
                   <a:srgbClr val="333333"/>
                 </a:solidFill>
                 <a:latin typeface="Fira Sans"/>
               </a:rPr>
-              <a:t>     ◦  </a:t>
-            </a:r>
-            <a:r>
-              <a:rPr sz="1400" b="0">
+              <a:t>El heatmap muestra 14 propósitos por 7 días en una sola figura: útil para tablas completas.</a:t>
+            </a:r>
+          </a:p>
+        </p:txBody>
+      </p:sp>
+    </p:spTree>
+  </p:cSld>
+  <p:clrMapOvr>
+    <a:masterClrMapping/>
+  </p:clrMapOvr>
+</p:sld>
+</file>
+
+<file path=ppt/slides/slide29.xml><?xml version="1.0" encoding="utf-8"?>
+<p:sld xmlns:a="http://schemas.openxmlformats.org/drawingml/2006/main" xmlns:p="http://schemas.openxmlformats.org/presentationml/2006/main" xmlns:r="http://schemas.openxmlformats.org/officeDocument/2006/relationships">
+  <p:cSld>
+    <p:spTree>
+      <p:nvGrpSpPr>
+        <p:cNvPr id="1" name=""/>
+        <p:cNvGrpSpPr/>
+        <p:nvPr/>
+      </p:nvGrpSpPr>
+      <p:grpSpPr/>
+      <p:sp>
+        <p:nvSpPr>
+          <p:cNvPr id="2" name="Rectangle 1"/>
+          <p:cNvSpPr/>
+          <p:nvPr/>
+        </p:nvSpPr>
+        <p:spPr>
+          <a:xfrm>
+            <a:off x="0" y="0"/>
+            <a:ext cx="9144000" cy="5138928"/>
+          </a:xfrm>
+          <a:prstGeom prst="rect">
+            <a:avLst/>
+          </a:prstGeom>
+          <a:solidFill>
+            <a:srgbClr val="FAFBFC"/>
+          </a:solidFill>
+          <a:ln>
+            <a:noFill/>
+          </a:ln>
+          <a:effectLst/>
+        </p:spPr>
+        <p:style>
+          <a:lnRef idx="1">
+            <a:schemeClr val="accent1"/>
+          </a:lnRef>
+          <a:fillRef idx="3">
+            <a:schemeClr val="accent1"/>
+          </a:fillRef>
+          <a:effectRef idx="2">
+            <a:schemeClr val="accent1"/>
+          </a:effectRef>
+          <a:fontRef idx="minor">
+            <a:schemeClr val="lt1"/>
+          </a:fontRef>
+        </p:style>
+        <p:txBody>
+          <a:bodyPr rtlCol="0" anchor="ctr"/>
+          <a:lstStyle/>
+          <a:p>
+            <a:pPr algn="ctr"/>
+          </a:p>
+        </p:txBody>
+      </p:sp>
+      <p:sp>
+        <p:nvSpPr>
+          <p:cNvPr id="3" name="TextBox 2"/>
+          <p:cNvSpPr txBox="1"/>
+          <p:nvPr/>
+        </p:nvSpPr>
+        <p:spPr>
+          <a:xfrm>
+            <a:off x="402336" y="301752"/>
+            <a:ext cx="8348472" cy="795528"/>
+          </a:xfrm>
+          <a:prstGeom prst="rect">
+            <a:avLst/>
+          </a:prstGeom>
+          <a:noFill/>
+        </p:spPr>
+        <p:txBody>
+          <a:bodyPr wrap="square">
+            <a:spAutoFit/>
+          </a:bodyPr>
+          <a:lstStyle/>
+          <a:p>
+            <a:r>
+              <a:rPr sz="2800" b="1">
+                <a:solidFill>
+                  <a:srgbClr val="0F0F0F"/>
+                </a:solidFill>
+                <a:latin typeface="Fira Sans"/>
+              </a:rPr>
+              <a:t>Cuando los datos crecen</a:t>
+            </a:r>
+          </a:p>
+        </p:txBody>
+      </p:sp>
+      <p:pic>
+        <p:nvPicPr>
+          <p:cNvPr id="4" name="Picture 3" descr="14_escala_datos.png"/>
+          <p:cNvPicPr>
+            <a:picLocks noChangeAspect="1"/>
+          </p:cNvPicPr>
+          <p:nvPr/>
+        </p:nvPicPr>
+        <p:blipFill>
+          <a:blip r:embed="rId2"/>
+          <a:stretch>
+            <a:fillRect/>
+          </a:stretch>
+        </p:blipFill>
+        <p:spPr>
+          <a:xfrm>
+            <a:off x="1417319" y="1143000"/>
+            <a:ext cx="6309360" cy="2324913"/>
+          </a:xfrm>
+          <a:prstGeom prst="rect">
+            <a:avLst/>
+          </a:prstGeom>
+        </p:spPr>
+      </p:pic>
+      <p:sp>
+        <p:nvSpPr>
+          <p:cNvPr id="5" name="TextBox 4"/>
+          <p:cNvSpPr txBox="1"/>
+          <p:nvPr/>
+        </p:nvSpPr>
+        <p:spPr>
+          <a:xfrm>
+            <a:off x="704088" y="4434840"/>
+            <a:ext cx="7744968" cy="457200"/>
+          </a:xfrm>
+          <a:prstGeom prst="rect">
+            <a:avLst/>
+          </a:prstGeom>
+          <a:noFill/>
+        </p:spPr>
+        <p:txBody>
+          <a:bodyPr wrap="square">
+            <a:spAutoFit/>
+          </a:bodyPr>
+          <a:lstStyle/>
+          <a:p>
+            <a:r>
+              <a:rPr sz="1300" b="0">
                 <a:solidFill>
                   <a:srgbClr val="333333"/>
                 </a:solidFill>
                 <a:latin typeface="Fira Sans"/>
               </a:rPr>
-              <a:t>Hoy: elegir la comuna y construir su retrato numérico.</a:t>
-            </a:r>
-          </a:p>
-          <a:p>
-            <a:pPr>
-              <a:lnSpc>
-                <a:spcPct val="112000"/>
-              </a:lnSpc>
-              <a:spcAft>
-                <a:spcPts val="500"/>
-              </a:spcAft>
-            </a:pPr>
-            <a:r>
-              <a:rPr sz="1400" b="0">
-                <a:solidFill>
-                  <a:srgbClr val="333333"/>
-                </a:solidFill>
-                <a:latin typeface="Fira Sans"/>
-              </a:rPr>
-              <a:t>     ◦  </a:t>
-            </a:r>
-            <a:r>
-              <a:rPr sz="1400" b="0">
-                <a:solidFill>
-                  <a:srgbClr val="333333"/>
-                </a:solidFill>
-                <a:latin typeface="Fira Sans"/>
-              </a:rPr>
-              <a:t>Próxima clase: el retrato gráfico, con métodos de visualización.</a:t>
-            </a:r>
-          </a:p>
-          <a:p>
-            <a:pPr>
-              <a:lnSpc>
-                <a:spcPct val="112000"/>
-              </a:lnSpc>
-              <a:spcAft>
-                <a:spcPts val="500"/>
-              </a:spcAft>
-            </a:pPr>
-            <a:r>
-              <a:rPr sz="1400" b="0">
-                <a:solidFill>
-                  <a:srgbClr val="333333"/>
-                </a:solidFill>
-                <a:latin typeface="Fira Sans"/>
-              </a:rPr>
-              <a:t>     ◦  </a:t>
-            </a:r>
-            <a:r>
-              <a:rPr sz="1400" b="0">
-                <a:solidFill>
-                  <a:srgbClr val="333333"/>
-                </a:solidFill>
-                <a:latin typeface="Fira Sans"/>
-              </a:rPr>
-              <a:t>Entrega del retrato completo: jueves 10 de septiembre, por Aula.</a:t>
-            </a:r>
-          </a:p>
-          <a:p>
-            <a:pPr>
-              <a:lnSpc>
-                <a:spcPct val="112000"/>
-              </a:lnSpc>
-              <a:spcAft>
-                <a:spcPts val="900"/>
-              </a:spcAft>
-            </a:pPr>
-            <a:r>
-              <a:rPr sz="1800" b="1">
-                <a:solidFill>
-                  <a:srgbClr val="E0A437"/>
-                </a:solidFill>
-                <a:latin typeface="Fira Sans"/>
-              </a:rPr>
-              <a:t>▸ </a:t>
-            </a:r>
-            <a:r>
-              <a:rPr sz="1800" b="0">
-                <a:solidFill>
-                  <a:srgbClr val="000000"/>
-                </a:solidFill>
-                <a:latin typeface="Fira Sans"/>
-              </a:rPr>
-              <a:t>El enunciado está en evaluaciones/tareas/ y la guía de hoy en actividades/.</a:t>
-            </a:r>
-          </a:p>
-          <a:p>
-            <a:pPr>
-              <a:lnSpc>
-                <a:spcPct val="112000"/>
-              </a:lnSpc>
-              <a:spcAft>
-                <a:spcPts val="900"/>
-              </a:spcAft>
-            </a:pPr>
-            <a:r>
-              <a:rPr sz="1800" b="1">
-                <a:solidFill>
-                  <a:srgbClr val="E0A437"/>
-                </a:solidFill>
-                <a:latin typeface="Fira Sans"/>
-              </a:rPr>
-              <a:t>▸ </a:t>
-            </a:r>
-            <a:r>
-              <a:rPr sz="1800" b="1">
-                <a:solidFill>
-                  <a:srgbClr val="1D3557"/>
-                </a:solidFill>
-                <a:latin typeface="Fira Sans"/>
-              </a:rPr>
-              <a:t>Lo que avancen en este bloque ya es parte de la tarea.</a:t>
+              <a:t>PySpark se usa con SQL o con sus propios DataFrames; Dask reparte operaciones estilo Pandas; Polars y DuckDB rinden en una sola máquina.</a:t>
             </a:r>
           </a:p>
         </p:txBody>
@@ -7719,7 +7813,7 @@
 </p:sld>
 </file>
 
-<file path=ppt/slides/slide4.xml><?xml version="1.0" encoding="utf-8"?>
+<file path=ppt/slides/slide30.xml><?xml version="1.0" encoding="utf-8"?>
 <p:sld xmlns:a="http://schemas.openxmlformats.org/drawingml/2006/main" xmlns:p="http://schemas.openxmlformats.org/presentationml/2006/main" xmlns:r="http://schemas.openxmlformats.org/officeDocument/2006/relationships">
   <p:cSld>
     <p:spTree>
@@ -7802,7 +7896,7 @@
                 </a:solidFill>
                 <a:latin typeface="Fira Sans"/>
               </a:rPr>
-              <a:t>¿Qué es un modelo?</a:t>
+              <a:t>Síntesis</a:t>
             </a:r>
           </a:p>
         </p:txBody>
@@ -7853,7 +7947,812 @@
                 </a:solidFill>
                 <a:latin typeface="Fira Sans"/>
               </a:rPr>
-              <a:t>Una representación simplificada del proceso que genera los datos.</a:t>
+              <a:t>Un modelo es una simplificación con decisiones incorporadas; estimarlo puede buscar inferencia o predicción.</a:t>
+            </a:r>
+          </a:p>
+          <a:p>
+            <a:pPr>
+              <a:lnSpc>
+                <a:spcPct val="112000"/>
+              </a:lnSpc>
+              <a:spcAft>
+                <a:spcPts val="900"/>
+              </a:spcAft>
+            </a:pPr>
+            <a:r>
+              <a:rPr sz="1800" b="1">
+                <a:solidFill>
+                  <a:srgbClr val="E0A437"/>
+                </a:solidFill>
+                <a:latin typeface="Fira Sans"/>
+              </a:rPr>
+              <a:t>▸ </a:t>
+            </a:r>
+            <a:r>
+              <a:rPr sz="1800" b="0">
+                <a:solidFill>
+                  <a:srgbClr val="000000"/>
+                </a:solidFill>
+                <a:latin typeface="Fira Sans"/>
+              </a:rPr>
+              <a:t>Las asociaciones se reportan como asociaciones: la causalidad exige más que datos observacionales.</a:t>
+            </a:r>
+          </a:p>
+          <a:p>
+            <a:pPr>
+              <a:lnSpc>
+                <a:spcPct val="112000"/>
+              </a:lnSpc>
+              <a:spcAft>
+                <a:spcPts val="900"/>
+              </a:spcAft>
+            </a:pPr>
+            <a:r>
+              <a:rPr sz="1800" b="1">
+                <a:solidFill>
+                  <a:srgbClr val="E0A437"/>
+                </a:solidFill>
+                <a:latin typeface="Fira Sans"/>
+              </a:rPr>
+              <a:t>▸ </a:t>
+            </a:r>
+            <a:r>
+              <a:rPr sz="1800" b="0">
+                <a:solidFill>
+                  <a:srgbClr val="000000"/>
+                </a:solidFill>
+                <a:latin typeface="Fira Sans"/>
+              </a:rPr>
+              <a:t>El tipo de la variable, no su dtype, determina qué resúmenes tienen sentido.</a:t>
+            </a:r>
+          </a:p>
+          <a:p>
+            <a:pPr>
+              <a:lnSpc>
+                <a:spcPct val="112000"/>
+              </a:lnSpc>
+              <a:spcAft>
+                <a:spcPts val="900"/>
+              </a:spcAft>
+            </a:pPr>
+            <a:r>
+              <a:rPr sz="1800" b="1">
+                <a:solidFill>
+                  <a:srgbClr val="E0A437"/>
+                </a:solidFill>
+                <a:latin typeface="Fira Sans"/>
+              </a:rPr>
+              <a:t>▸ </a:t>
+            </a:r>
+            <a:r>
+              <a:rPr sz="1800" b="0">
+                <a:solidFill>
+                  <a:srgbClr val="000000"/>
+                </a:solidFill>
+                <a:latin typeface="Fira Sans"/>
+              </a:rPr>
+              <a:t>Con distribuciones asimétricas, la mediana y los percentiles describen mejor lo típico que la media.</a:t>
+            </a:r>
+          </a:p>
+          <a:p>
+            <a:pPr>
+              <a:lnSpc>
+                <a:spcPct val="112000"/>
+              </a:lnSpc>
+              <a:spcAft>
+                <a:spcPts val="900"/>
+              </a:spcAft>
+            </a:pPr>
+            <a:r>
+              <a:rPr sz="1800" b="1">
+                <a:solidFill>
+                  <a:srgbClr val="E0A437"/>
+                </a:solidFill>
+                <a:latin typeface="Fira Sans"/>
+              </a:rPr>
+              <a:t>▸ </a:t>
+            </a:r>
+            <a:r>
+              <a:rPr sz="1800" b="1">
+                <a:solidFill>
+                  <a:srgbClr val="1D3557"/>
+                </a:solidFill>
+                <a:latin typeface="Fira Sans"/>
+              </a:rPr>
+              <a:t>Ante toda cifra resumen: ¿de quién habla este número? ¿Muestra, subgrupo o ciudad?</a:t>
+            </a:r>
+          </a:p>
+        </p:txBody>
+      </p:sp>
+    </p:spTree>
+  </p:cSld>
+  <p:clrMapOvr>
+    <a:masterClrMapping/>
+  </p:clrMapOvr>
+</p:sld>
+</file>
+
+<file path=ppt/slides/slide31.xml><?xml version="1.0" encoding="utf-8"?>
+<p:sld xmlns:a="http://schemas.openxmlformats.org/drawingml/2006/main" xmlns:p="http://schemas.openxmlformats.org/presentationml/2006/main" xmlns:r="http://schemas.openxmlformats.org/officeDocument/2006/relationships">
+  <p:cSld>
+    <p:spTree>
+      <p:nvGrpSpPr>
+        <p:cNvPr id="1" name=""/>
+        <p:cNvGrpSpPr/>
+        <p:nvPr/>
+      </p:nvGrpSpPr>
+      <p:grpSpPr/>
+      <p:sp>
+        <p:nvSpPr>
+          <p:cNvPr id="2" name="Rectangle 1"/>
+          <p:cNvSpPr/>
+          <p:nvPr/>
+        </p:nvSpPr>
+        <p:spPr>
+          <a:xfrm>
+            <a:off x="0" y="0"/>
+            <a:ext cx="9144000" cy="5138928"/>
+          </a:xfrm>
+          <a:prstGeom prst="rect">
+            <a:avLst/>
+          </a:prstGeom>
+          <a:solidFill>
+            <a:srgbClr val="FAFBFC"/>
+          </a:solidFill>
+          <a:ln>
+            <a:noFill/>
+          </a:ln>
+          <a:effectLst/>
+        </p:spPr>
+        <p:style>
+          <a:lnRef idx="1">
+            <a:schemeClr val="accent1"/>
+          </a:lnRef>
+          <a:fillRef idx="3">
+            <a:schemeClr val="accent1"/>
+          </a:fillRef>
+          <a:effectRef idx="2">
+            <a:schemeClr val="accent1"/>
+          </a:effectRef>
+          <a:fontRef idx="minor">
+            <a:schemeClr val="lt1"/>
+          </a:fontRef>
+        </p:style>
+        <p:txBody>
+          <a:bodyPr rtlCol="0" anchor="ctr"/>
+          <a:lstStyle/>
+          <a:p>
+            <a:pPr algn="ctr"/>
+          </a:p>
+        </p:txBody>
+      </p:sp>
+      <p:sp>
+        <p:nvSpPr>
+          <p:cNvPr id="3" name="TextBox 2"/>
+          <p:cNvSpPr txBox="1"/>
+          <p:nvPr/>
+        </p:nvSpPr>
+        <p:spPr>
+          <a:xfrm>
+            <a:off x="402336" y="301752"/>
+            <a:ext cx="8348472" cy="795528"/>
+          </a:xfrm>
+          <a:prstGeom prst="rect">
+            <a:avLst/>
+          </a:prstGeom>
+          <a:noFill/>
+        </p:spPr>
+        <p:txBody>
+          <a:bodyPr wrap="square">
+            <a:spAutoFit/>
+          </a:bodyPr>
+          <a:lstStyle/>
+          <a:p>
+            <a:r>
+              <a:rPr sz="2800" b="1">
+                <a:solidFill>
+                  <a:srgbClr val="0F0F0F"/>
+                </a:solidFill>
+                <a:latin typeface="Fira Sans"/>
+              </a:rPr>
+              <a:t>Segundo bloque: comienza la Tarea 1</a:t>
+            </a:r>
+          </a:p>
+        </p:txBody>
+      </p:sp>
+      <p:sp>
+        <p:nvSpPr>
+          <p:cNvPr id="4" name="TextBox 3"/>
+          <p:cNvSpPr txBox="1"/>
+          <p:nvPr/>
+        </p:nvSpPr>
+        <p:spPr>
+          <a:xfrm>
+            <a:off x="704088" y="1353312"/>
+            <a:ext cx="7744968" cy="3300984"/>
+          </a:xfrm>
+          <a:prstGeom prst="rect">
+            <a:avLst/>
+          </a:prstGeom>
+          <a:noFill/>
+        </p:spPr>
+        <p:txBody>
+          <a:bodyPr wrap="square">
+            <a:spAutoFit/>
+          </a:bodyPr>
+          <a:lstStyle/>
+          <a:p>
+            <a:pPr>
+              <a:lnSpc>
+                <a:spcPct val="112000"/>
+              </a:lnSpc>
+              <a:spcAft>
+                <a:spcPts val="900"/>
+              </a:spcAft>
+            </a:pPr>
+            <a:r>
+              <a:rPr sz="1800" b="1">
+                <a:solidFill>
+                  <a:srgbClr val="E0A437"/>
+                </a:solidFill>
+                <a:latin typeface="Fira Sans"/>
+              </a:rPr>
+              <a:t>▸ </a:t>
+            </a:r>
+            <a:r>
+              <a:rPr sz="1800" b="0">
+                <a:solidFill>
+                  <a:srgbClr val="000000"/>
+                </a:solidFill>
+                <a:latin typeface="Fira Sans"/>
+              </a:rPr>
+              <a:t>El retrato de tu comuna: cada pareja adopta una comuna del Gran Santiago.</a:t>
+            </a:r>
+          </a:p>
+          <a:p>
+            <a:pPr>
+              <a:lnSpc>
+                <a:spcPct val="112000"/>
+              </a:lnSpc>
+              <a:spcAft>
+                <a:spcPts val="500"/>
+              </a:spcAft>
+            </a:pPr>
+            <a:r>
+              <a:rPr sz="1400" b="0">
+                <a:solidFill>
+                  <a:srgbClr val="333333"/>
+                </a:solidFill>
+                <a:latin typeface="Fira Sans"/>
+              </a:rPr>
+              <a:t>     ◦  </a:t>
+            </a:r>
+            <a:r>
+              <a:rPr sz="1400" b="0">
+                <a:solidFill>
+                  <a:srgbClr val="333333"/>
+                </a:solidFill>
+                <a:latin typeface="Fira Sans"/>
+              </a:rPr>
+              <a:t>Hoy: elegir la comuna y construir su retrato numérico.</a:t>
+            </a:r>
+          </a:p>
+          <a:p>
+            <a:pPr>
+              <a:lnSpc>
+                <a:spcPct val="112000"/>
+              </a:lnSpc>
+              <a:spcAft>
+                <a:spcPts val="500"/>
+              </a:spcAft>
+            </a:pPr>
+            <a:r>
+              <a:rPr sz="1400" b="0">
+                <a:solidFill>
+                  <a:srgbClr val="333333"/>
+                </a:solidFill>
+                <a:latin typeface="Fira Sans"/>
+              </a:rPr>
+              <a:t>     ◦  </a:t>
+            </a:r>
+            <a:r>
+              <a:rPr sz="1400" b="0">
+                <a:solidFill>
+                  <a:srgbClr val="333333"/>
+                </a:solidFill>
+                <a:latin typeface="Fira Sans"/>
+              </a:rPr>
+              <a:t>Próxima clase: el retrato gráfico, con métodos de visualización.</a:t>
+            </a:r>
+          </a:p>
+          <a:p>
+            <a:pPr>
+              <a:lnSpc>
+                <a:spcPct val="112000"/>
+              </a:lnSpc>
+              <a:spcAft>
+                <a:spcPts val="500"/>
+              </a:spcAft>
+            </a:pPr>
+            <a:r>
+              <a:rPr sz="1400" b="0">
+                <a:solidFill>
+                  <a:srgbClr val="333333"/>
+                </a:solidFill>
+                <a:latin typeface="Fira Sans"/>
+              </a:rPr>
+              <a:t>     ◦  </a:t>
+            </a:r>
+            <a:r>
+              <a:rPr sz="1400" b="0">
+                <a:solidFill>
+                  <a:srgbClr val="333333"/>
+                </a:solidFill>
+                <a:latin typeface="Fira Sans"/>
+              </a:rPr>
+              <a:t>Entrega del retrato completo: jueves 10 de septiembre, por Aula.</a:t>
+            </a:r>
+          </a:p>
+          <a:p>
+            <a:pPr>
+              <a:lnSpc>
+                <a:spcPct val="112000"/>
+              </a:lnSpc>
+              <a:spcAft>
+                <a:spcPts val="900"/>
+              </a:spcAft>
+            </a:pPr>
+            <a:r>
+              <a:rPr sz="1800" b="1">
+                <a:solidFill>
+                  <a:srgbClr val="E0A437"/>
+                </a:solidFill>
+                <a:latin typeface="Fira Sans"/>
+              </a:rPr>
+              <a:t>▸ </a:t>
+            </a:r>
+            <a:r>
+              <a:rPr sz="1800" b="0">
+                <a:solidFill>
+                  <a:srgbClr val="000000"/>
+                </a:solidFill>
+                <a:latin typeface="Fira Sans"/>
+              </a:rPr>
+              <a:t>El enunciado está en evaluaciones/tareas/ y la guía de hoy en actividades/.</a:t>
+            </a:r>
+          </a:p>
+          <a:p>
+            <a:pPr>
+              <a:lnSpc>
+                <a:spcPct val="112000"/>
+              </a:lnSpc>
+              <a:spcAft>
+                <a:spcPts val="900"/>
+              </a:spcAft>
+            </a:pPr>
+            <a:r>
+              <a:rPr sz="1800" b="1">
+                <a:solidFill>
+                  <a:srgbClr val="E0A437"/>
+                </a:solidFill>
+                <a:latin typeface="Fira Sans"/>
+              </a:rPr>
+              <a:t>▸ </a:t>
+            </a:r>
+            <a:r>
+              <a:rPr sz="1800" b="1">
+                <a:solidFill>
+                  <a:srgbClr val="1D3557"/>
+                </a:solidFill>
+                <a:latin typeface="Fira Sans"/>
+              </a:rPr>
+              <a:t>Lo que avancen en este bloque ya es parte de la tarea.</a:t>
+            </a:r>
+          </a:p>
+        </p:txBody>
+      </p:sp>
+    </p:spTree>
+  </p:cSld>
+  <p:clrMapOvr>
+    <a:masterClrMapping/>
+  </p:clrMapOvr>
+</p:sld>
+</file>
+
+<file path=ppt/slides/slide32.xml><?xml version="1.0" encoding="utf-8"?>
+<p:sld xmlns:a="http://schemas.openxmlformats.org/drawingml/2006/main" xmlns:p="http://schemas.openxmlformats.org/presentationml/2006/main" xmlns:r="http://schemas.openxmlformats.org/officeDocument/2006/relationships">
+  <p:cSld>
+    <p:spTree>
+      <p:nvGrpSpPr>
+        <p:cNvPr id="1" name=""/>
+        <p:cNvGrpSpPr/>
+        <p:nvPr/>
+      </p:nvGrpSpPr>
+      <p:grpSpPr/>
+      <p:sp>
+        <p:nvSpPr>
+          <p:cNvPr id="2" name="Rectangle 1"/>
+          <p:cNvSpPr/>
+          <p:nvPr/>
+        </p:nvSpPr>
+        <p:spPr>
+          <a:xfrm>
+            <a:off x="0" y="0"/>
+            <a:ext cx="9144000" cy="5138928"/>
+          </a:xfrm>
+          <a:prstGeom prst="rect">
+            <a:avLst/>
+          </a:prstGeom>
+          <a:solidFill>
+            <a:srgbClr val="FAFBFC"/>
+          </a:solidFill>
+          <a:ln>
+            <a:noFill/>
+          </a:ln>
+          <a:effectLst/>
+        </p:spPr>
+        <p:style>
+          <a:lnRef idx="1">
+            <a:schemeClr val="accent1"/>
+          </a:lnRef>
+          <a:fillRef idx="3">
+            <a:schemeClr val="accent1"/>
+          </a:fillRef>
+          <a:effectRef idx="2">
+            <a:schemeClr val="accent1"/>
+          </a:effectRef>
+          <a:fontRef idx="minor">
+            <a:schemeClr val="lt1"/>
+          </a:fontRef>
+        </p:style>
+        <p:txBody>
+          <a:bodyPr rtlCol="0" anchor="ctr"/>
+          <a:lstStyle/>
+          <a:p>
+            <a:pPr algn="ctr"/>
+          </a:p>
+        </p:txBody>
+      </p:sp>
+      <p:sp>
+        <p:nvSpPr>
+          <p:cNvPr id="3" name="TextBox 2"/>
+          <p:cNvSpPr txBox="1"/>
+          <p:nvPr/>
+        </p:nvSpPr>
+        <p:spPr>
+          <a:xfrm>
+            <a:off x="402336" y="301752"/>
+            <a:ext cx="8348472" cy="795528"/>
+          </a:xfrm>
+          <a:prstGeom prst="rect">
+            <a:avLst/>
+          </a:prstGeom>
+          <a:noFill/>
+        </p:spPr>
+        <p:txBody>
+          <a:bodyPr wrap="square">
+            <a:spAutoFit/>
+          </a:bodyPr>
+          <a:lstStyle/>
+          <a:p>
+            <a:r>
+              <a:rPr sz="2800" b="1">
+                <a:solidFill>
+                  <a:srgbClr val="0F0F0F"/>
+                </a:solidFill>
+                <a:latin typeface="Fira Sans"/>
+              </a:rPr>
+              <a:t>Referencias</a:t>
+            </a:r>
+          </a:p>
+        </p:txBody>
+      </p:sp>
+      <p:sp>
+        <p:nvSpPr>
+          <p:cNvPr id="4" name="TextBox 3"/>
+          <p:cNvSpPr txBox="1"/>
+          <p:nvPr/>
+        </p:nvSpPr>
+        <p:spPr>
+          <a:xfrm>
+            <a:off x="704088" y="1353312"/>
+            <a:ext cx="7744968" cy="3300984"/>
+          </a:xfrm>
+          <a:prstGeom prst="rect">
+            <a:avLst/>
+          </a:prstGeom>
+          <a:noFill/>
+        </p:spPr>
+        <p:txBody>
+          <a:bodyPr wrap="square">
+            <a:spAutoFit/>
+          </a:bodyPr>
+          <a:lstStyle/>
+          <a:p>
+            <a:pPr>
+              <a:lnSpc>
+                <a:spcPct val="112000"/>
+              </a:lnSpc>
+              <a:spcAft>
+                <a:spcPts val="900"/>
+              </a:spcAft>
+            </a:pPr>
+            <a:r>
+              <a:rPr sz="1800" b="1">
+                <a:solidFill>
+                  <a:srgbClr val="E0A437"/>
+                </a:solidFill>
+                <a:latin typeface="Fira Sans"/>
+              </a:rPr>
+              <a:t>▸ </a:t>
+            </a:r>
+            <a:r>
+              <a:rPr sz="1800" b="0">
+                <a:solidFill>
+                  <a:srgbClr val="000000"/>
+                </a:solidFill>
+                <a:latin typeface="Fira Sans"/>
+              </a:rPr>
+              <a:t>James, G., Witten, D., Hastie, T. y Tibshirani, R. (2023). An Introduction to Statistical Learning with Applications in Python. Springer. Capítulo 2. Descarga gratuita en statlearning.com.</a:t>
+            </a:r>
+          </a:p>
+          <a:p>
+            <a:pPr>
+              <a:lnSpc>
+                <a:spcPct val="112000"/>
+              </a:lnSpc>
+              <a:spcAft>
+                <a:spcPts val="900"/>
+              </a:spcAft>
+            </a:pPr>
+            <a:r>
+              <a:rPr sz="1800" b="1">
+                <a:solidFill>
+                  <a:srgbClr val="E0A437"/>
+                </a:solidFill>
+                <a:latin typeface="Fira Sans"/>
+              </a:rPr>
+              <a:t>▸ </a:t>
+            </a:r>
+            <a:r>
+              <a:rPr sz="1800" b="0">
+                <a:solidFill>
+                  <a:srgbClr val="000000"/>
+                </a:solidFill>
+                <a:latin typeface="Fira Sans"/>
+              </a:rPr>
+              <a:t>Bruce, P., Bruce, A. y Gedeck, P. (2020). Practical Statistics for Data Scientists, 2ª ed. O'Reilly. Capítulo 1.</a:t>
+            </a:r>
+          </a:p>
+          <a:p>
+            <a:pPr>
+              <a:lnSpc>
+                <a:spcPct val="112000"/>
+              </a:lnSpc>
+              <a:spcAft>
+                <a:spcPts val="900"/>
+              </a:spcAft>
+            </a:pPr>
+            <a:r>
+              <a:rPr sz="1800" b="1">
+                <a:solidFill>
+                  <a:srgbClr val="E0A437"/>
+                </a:solidFill>
+                <a:latin typeface="Fira Sans"/>
+              </a:rPr>
+              <a:t>▸ </a:t>
+            </a:r>
+            <a:r>
+              <a:rPr sz="1800" b="0">
+                <a:solidFill>
+                  <a:srgbClr val="000000"/>
+                </a:solidFill>
+                <a:latin typeface="Fira Sans"/>
+              </a:rPr>
+              <a:t>Tukey, J. W. (1977). Exploratory Data Analysis. Addison-Wesley.</a:t>
+            </a:r>
+          </a:p>
+          <a:p>
+            <a:pPr>
+              <a:lnSpc>
+                <a:spcPct val="112000"/>
+              </a:lnSpc>
+              <a:spcAft>
+                <a:spcPts val="900"/>
+              </a:spcAft>
+            </a:pPr>
+            <a:r>
+              <a:rPr sz="1800" b="1">
+                <a:solidFill>
+                  <a:srgbClr val="E0A437"/>
+                </a:solidFill>
+                <a:latin typeface="Fira Sans"/>
+              </a:rPr>
+              <a:t>▸ </a:t>
+            </a:r>
+            <a:r>
+              <a:rPr sz="1800" b="0">
+                <a:solidFill>
+                  <a:srgbClr val="000000"/>
+                </a:solidFill>
+                <a:latin typeface="Fira Sans"/>
+              </a:rPr>
+              <a:t>SECTRA (2014). Encuesta Origen Destino de Viajes Santiago 2012.</a:t>
+            </a:r>
+          </a:p>
+          <a:p>
+            <a:pPr>
+              <a:lnSpc>
+                <a:spcPct val="112000"/>
+              </a:lnSpc>
+              <a:spcAft>
+                <a:spcPts val="900"/>
+              </a:spcAft>
+            </a:pPr>
+            <a:r>
+              <a:rPr sz="1800" b="1">
+                <a:solidFill>
+                  <a:srgbClr val="E0A437"/>
+                </a:solidFill>
+                <a:latin typeface="Fira Sans"/>
+              </a:rPr>
+              <a:t>▸ </a:t>
+            </a:r>
+            <a:r>
+              <a:rPr sz="1800" b="0">
+                <a:solidFill>
+                  <a:srgbClr val="000000"/>
+                </a:solidFill>
+                <a:latin typeface="Fira Sans"/>
+              </a:rPr>
+              <a:t>Material inspirado en el curso de visualización de E. Graells-Garrido (github.com/zorzalerrante/aves).</a:t>
+            </a:r>
+          </a:p>
+        </p:txBody>
+      </p:sp>
+    </p:spTree>
+  </p:cSld>
+  <p:clrMapOvr>
+    <a:masterClrMapping/>
+  </p:clrMapOvr>
+</p:sld>
+</file>
+
+<file path=ppt/slides/slide4.xml><?xml version="1.0" encoding="utf-8"?>
+<p:sld xmlns:a="http://schemas.openxmlformats.org/drawingml/2006/main" xmlns:p="http://schemas.openxmlformats.org/presentationml/2006/main" xmlns:r="http://schemas.openxmlformats.org/officeDocument/2006/relationships">
+  <p:cSld>
+    <p:spTree>
+      <p:nvGrpSpPr>
+        <p:cNvPr id="1" name=""/>
+        <p:cNvGrpSpPr/>
+        <p:nvPr/>
+      </p:nvGrpSpPr>
+      <p:grpSpPr/>
+      <p:sp>
+        <p:nvSpPr>
+          <p:cNvPr id="2" name="Rectangle 1"/>
+          <p:cNvSpPr/>
+          <p:nvPr/>
+        </p:nvSpPr>
+        <p:spPr>
+          <a:xfrm>
+            <a:off x="0" y="0"/>
+            <a:ext cx="9144000" cy="5138928"/>
+          </a:xfrm>
+          <a:prstGeom prst="rect">
+            <a:avLst/>
+          </a:prstGeom>
+          <a:solidFill>
+            <a:srgbClr val="FAFBFC"/>
+          </a:solidFill>
+          <a:ln>
+            <a:noFill/>
+          </a:ln>
+          <a:effectLst/>
+        </p:spPr>
+        <p:style>
+          <a:lnRef idx="1">
+            <a:schemeClr val="accent1"/>
+          </a:lnRef>
+          <a:fillRef idx="3">
+            <a:schemeClr val="accent1"/>
+          </a:fillRef>
+          <a:effectRef idx="2">
+            <a:schemeClr val="accent1"/>
+          </a:effectRef>
+          <a:fontRef idx="minor">
+            <a:schemeClr val="lt1"/>
+          </a:fontRef>
+        </p:style>
+        <p:txBody>
+          <a:bodyPr rtlCol="0" anchor="ctr"/>
+          <a:lstStyle/>
+          <a:p>
+            <a:pPr algn="ctr"/>
+          </a:p>
+        </p:txBody>
+      </p:sp>
+      <p:sp>
+        <p:nvSpPr>
+          <p:cNvPr id="3" name="TextBox 2"/>
+          <p:cNvSpPr txBox="1"/>
+          <p:nvPr/>
+        </p:nvSpPr>
+        <p:spPr>
+          <a:xfrm>
+            <a:off x="402336" y="301752"/>
+            <a:ext cx="8348472" cy="795528"/>
+          </a:xfrm>
+          <a:prstGeom prst="rect">
+            <a:avLst/>
+          </a:prstGeom>
+          <a:noFill/>
+        </p:spPr>
+        <p:txBody>
+          <a:bodyPr wrap="square">
+            <a:spAutoFit/>
+          </a:bodyPr>
+          <a:lstStyle/>
+          <a:p>
+            <a:r>
+              <a:rPr sz="2800" b="1">
+                <a:solidFill>
+                  <a:srgbClr val="0F0F0F"/>
+                </a:solidFill>
+                <a:latin typeface="Fira Sans"/>
+              </a:rPr>
+              <a:t>¿Qué es un modelo?</a:t>
+            </a:r>
+          </a:p>
+        </p:txBody>
+      </p:sp>
+      <p:sp>
+        <p:nvSpPr>
+          <p:cNvPr id="4" name="TextBox 3"/>
+          <p:cNvSpPr txBox="1"/>
+          <p:nvPr/>
+        </p:nvSpPr>
+        <p:spPr>
+          <a:xfrm>
+            <a:off x="704088" y="1353312"/>
+            <a:ext cx="7744968" cy="3300984"/>
+          </a:xfrm>
+          <a:prstGeom prst="rect">
+            <a:avLst/>
+          </a:prstGeom>
+          <a:noFill/>
+        </p:spPr>
+        <p:txBody>
+          <a:bodyPr wrap="square">
+            <a:spAutoFit/>
+          </a:bodyPr>
+          <a:lstStyle/>
+          <a:p>
+            <a:pPr>
+              <a:lnSpc>
+                <a:spcPct val="112000"/>
+              </a:lnSpc>
+              <a:spcAft>
+                <a:spcPts val="900"/>
+              </a:spcAft>
+            </a:pPr>
+            <a:r>
+              <a:rPr sz="1800" b="1">
+                <a:solidFill>
+                  <a:srgbClr val="E0A437"/>
+                </a:solidFill>
+                <a:latin typeface="Fira Sans"/>
+              </a:rPr>
+              <a:t>▸ </a:t>
+            </a:r>
+            <a:r>
+              <a:rPr sz="1800" b="0">
+                <a:solidFill>
+                  <a:srgbClr val="000000"/>
+                </a:solidFill>
+                <a:latin typeface="Fira Sans"/>
+              </a:rPr>
+              <a:t>Una representación simplificada del proceso que genera los datos (James et al., 2023, cap. 2).</a:t>
             </a:r>
           </a:p>
           <a:p>
@@ -8539,7 +9438,7 @@
                 </a:solidFill>
                 <a:latin typeface="Fira Sans"/>
               </a:rPr>
-              <a:t>La correlación cuantifica cuánto varían conjuntamente dos variables numéricas. Veremos dos coeficientes, ambos entre -1 y 1:</a:t>
+              <a:t>La correlación cuantifica cuánto varían conjuntamente dos variables numéricas (Bruce, Bruce y Gedeck, 2020, cap. 1). Dos coeficientes, ambos entre -1 y 1:</a:t>
             </a:r>
           </a:p>
           <a:p>
@@ -8775,21 +9674,45 @@
                 </a:solidFill>
                 <a:latin typeface="Fira Sans"/>
               </a:rPr>
-              <a:t>Correlación y causalidad</a:t>
-            </a:r>
-          </a:p>
-        </p:txBody>
-      </p:sp>
-      <p:sp>
-        <p:nvSpPr>
-          <p:cNvPr id="4" name="TextBox 3"/>
+              <a:t>La correlación, vista en los datos</a:t>
+            </a:r>
+          </a:p>
+        </p:txBody>
+      </p:sp>
+      <p:pic>
+        <p:nvPicPr>
+          <p:cNvPr id="4" name="Picture 3" descr="12_scatter_distancia_tiempo.png"/>
+          <p:cNvPicPr>
+            <a:picLocks noChangeAspect="1"/>
+          </p:cNvPicPr>
+          <p:nvPr/>
+        </p:nvPicPr>
+        <p:blipFill>
+          <a:blip r:embed="rId2"/>
+          <a:stretch>
+            <a:fillRect/>
+          </a:stretch>
+        </p:blipFill>
+        <p:spPr>
+          <a:xfrm>
+            <a:off x="2281014" y="1143000"/>
+            <a:ext cx="4581971" cy="3154680"/>
+          </a:xfrm>
+          <a:prstGeom prst="rect">
+            <a:avLst/>
+          </a:prstGeom>
+        </p:spPr>
+      </p:pic>
+      <p:sp>
+        <p:nvSpPr>
+          <p:cNvPr id="5" name="TextBox 4"/>
           <p:cNvSpPr txBox="1"/>
           <p:nvPr/>
         </p:nvSpPr>
         <p:spPr>
           <a:xfrm>
-            <a:off x="704088" y="1353312"/>
-            <a:ext cx="7744968" cy="3300984"/>
+            <a:off x="704088" y="4434840"/>
+            <a:ext cx="7744968" cy="457200"/>
           </a:xfrm>
           <a:prstGeom prst="rect">
             <a:avLst/>
@@ -8802,143 +9725,14 @@
           </a:bodyPr>
           <a:lstStyle/>
           <a:p>
-            <a:pPr>
-              <a:lnSpc>
-                <a:spcPct val="112000"/>
-              </a:lnSpc>
-              <a:spcAft>
-                <a:spcPts val="900"/>
-              </a:spcAft>
-            </a:pPr>
-            <a:r>
-              <a:rPr sz="1800" b="1">
-                <a:solidFill>
-                  <a:srgbClr val="E0A437"/>
-                </a:solidFill>
-                <a:latin typeface="Fira Sans"/>
-              </a:rPr>
-              <a:t>▸ </a:t>
-            </a:r>
-            <a:r>
-              <a:rPr sz="1800" b="0">
-                <a:solidFill>
-                  <a:srgbClr val="000000"/>
-                </a:solidFill>
-                <a:latin typeface="Fira Sans"/>
-              </a:rPr>
-              <a:t>Causalidad: intervenir X cambiaría Y. Es una afirmación más fuerte que la asociación.</a:t>
-            </a:r>
-          </a:p>
-          <a:p>
-            <a:pPr>
-              <a:lnSpc>
-                <a:spcPct val="112000"/>
-              </a:lnSpc>
-              <a:spcAft>
-                <a:spcPts val="500"/>
-              </a:spcAft>
-            </a:pPr>
-            <a:r>
-              <a:rPr sz="1400" b="0">
+            <a:r>
+              <a:rPr sz="1300" b="0">
                 <a:solidFill>
                   <a:srgbClr val="333333"/>
                 </a:solidFill>
                 <a:latin typeface="Fira Sans"/>
               </a:rPr>
-              <a:t>     ◦  </a:t>
-            </a:r>
-            <a:r>
-              <a:rPr sz="1400" b="0">
-                <a:solidFill>
-                  <a:srgbClr val="333333"/>
-                </a:solidFill>
-                <a:latin typeface="Fira Sans"/>
-              </a:rPr>
-              <a:t>Una asociación observada admite varias explicaciones: X causa Y, Y causa X, o una variable de confusión Z afecta a ambas.</a:t>
-            </a:r>
-          </a:p>
-          <a:p>
-            <a:pPr>
-              <a:lnSpc>
-                <a:spcPct val="112000"/>
-              </a:lnSpc>
-              <a:spcAft>
-                <a:spcPts val="500"/>
-              </a:spcAft>
-            </a:pPr>
-            <a:r>
-              <a:rPr sz="1400" b="0">
-                <a:solidFill>
-                  <a:srgbClr val="333333"/>
-                </a:solidFill>
-                <a:latin typeface="Fira Sans"/>
-              </a:rPr>
-              <a:t>     ◦  </a:t>
-            </a:r>
-            <a:r>
-              <a:rPr sz="1400" b="0">
-                <a:solidFill>
-                  <a:srgbClr val="333333"/>
-                </a:solidFill>
-                <a:latin typeface="Fira Sans"/>
-              </a:rPr>
-              <a:t>Los datos observacionales, como los de una encuesta, muestran asociación; no bastan para establecer causalidad.</a:t>
-            </a:r>
-          </a:p>
-          <a:p>
-            <a:pPr>
-              <a:lnSpc>
-                <a:spcPct val="112000"/>
-              </a:lnSpc>
-              <a:spcAft>
-                <a:spcPts val="500"/>
-              </a:spcAft>
-            </a:pPr>
-            <a:r>
-              <a:rPr sz="1400" b="0">
-                <a:solidFill>
-                  <a:srgbClr val="333333"/>
-                </a:solidFill>
-                <a:latin typeface="Fira Sans"/>
-              </a:rPr>
-              <a:t>     ◦  </a:t>
-            </a:r>
-            <a:r>
-              <a:rPr sz="1400" b="0">
-                <a:solidFill>
-                  <a:srgbClr val="333333"/>
-                </a:solidFill>
-                <a:latin typeface="Fira Sans"/>
-              </a:rPr>
-              <a:t>La inferencia causal tiene métodos propios; este curso no los cubre.</a:t>
-            </a:r>
-          </a:p>
-          <a:p>
-            <a:pPr>
-              <a:lnSpc>
-                <a:spcPct val="112000"/>
-              </a:lnSpc>
-              <a:spcAft>
-                <a:spcPts val="900"/>
-              </a:spcAft>
-            </a:pPr>
-            <a:r>
-              <a:rPr sz="1800" b="1">
-                <a:solidFill>
-                  <a:srgbClr val="E0A437"/>
-                </a:solidFill>
-                <a:latin typeface="Fira Sans"/>
-              </a:rPr>
-              <a:t>▸ </a:t>
-            </a:r>
-            <a:r>
-              <a:rPr sz="1800" b="1">
-                <a:solidFill>
-                  <a:srgbClr val="1D3557"/>
-                </a:solidFill>
-                <a:latin typeface="Fira Sans"/>
-              </a:rPr>
-              <a:t>Regla de trabajo: una asociación se reporta como asociación, sin verbos causales que los datos no respaldan.</a:t>
+              <a:t>La mediana por tramo sube de forma sostenida (Spearman 0,72) pero no recta y con extremos (Pearson 0,43): la diferencia entre coeficientes ya es información.</a:t>
             </a:r>
           </a:p>
         </p:txBody>
@@ -9034,7 +9828,7 @@
                 </a:solidFill>
                 <a:latin typeface="Fira Sans"/>
               </a:rPr>
-              <a:t>Tipos de datos</a:t>
+              <a:t>Correlación y causalidad</a:t>
             </a:r>
           </a:p>
         </p:txBody>
@@ -9085,7 +9879,7 @@
                 </a:solidFill>
                 <a:latin typeface="Fira Sans"/>
               </a:rPr>
-              <a:t>El tipo de una variable determina qué operaciones tienen sentido:</a:t>
+              <a:t>Causalidad: intervenir X cambiaría Y. Es una afirmación más fuerte que la asociación.</a:t>
             </a:r>
           </a:p>
           <a:p>
@@ -9113,7 +9907,7 @@
                 </a:solidFill>
                 <a:latin typeface="Fira Sans"/>
               </a:rPr>
-              <a:t>Categórico nominal: categorías sin orden (sexo, comuna, propósito del viaje).</a:t>
+              <a:t>Una asociación observada admite varias explicaciones: X causa Y, Y causa X, o una variable de confusión Z afecta a ambas.</a:t>
             </a:r>
           </a:p>
           <a:p>
@@ -9141,7 +9935,7 @@
                 </a:solidFill>
                 <a:latin typeface="Fira Sans"/>
               </a:rPr>
-              <a:t>Categórico ordinal: categorías con orden (nivel educacional).</a:t>
+              <a:t>Los datos observacionales, como los de una encuesta, muestran asociación; no bastan para establecer causalidad.</a:t>
             </a:r>
           </a:p>
           <a:p>
@@ -9169,35 +9963,7 @@
                 </a:solidFill>
                 <a:latin typeface="Fira Sans"/>
               </a:rPr>
-              <a:t>Numérico discreto: conteos enteros (viajes por persona).</a:t>
-            </a:r>
-          </a:p>
-          <a:p>
-            <a:pPr>
-              <a:lnSpc>
-                <a:spcPct val="112000"/>
-              </a:lnSpc>
-              <a:spcAft>
-                <a:spcPts val="500"/>
-              </a:spcAft>
-            </a:pPr>
-            <a:r>
-              <a:rPr sz="1400" b="0">
-                <a:solidFill>
-                  <a:srgbClr val="333333"/>
-                </a:solidFill>
-                <a:latin typeface="Fira Sans"/>
-              </a:rPr>
-              <a:t>     ◦  </a:t>
-            </a:r>
-            <a:r>
-              <a:rPr sz="1400" b="0">
-                <a:solidFill>
-                  <a:srgbClr val="333333"/>
-                </a:solidFill>
-                <a:latin typeface="Fira Sans"/>
-              </a:rPr>
-              <a:t>Numérico continuo: mediciones (ingreso del hogar, duración del viaje).</a:t>
+              <a:t>La inferencia causal tiene métodos propios; este curso no los cubre.</a:t>
             </a:r>
           </a:p>
           <a:p>
@@ -9219,41 +9985,13 @@
               <a:t>▸ </a:t>
             </a:r>
             <a:r>
-              <a:rPr sz="1800" b="0">
-                <a:solidFill>
-                  <a:srgbClr val="000000"/>
-                </a:solidFill>
-                <a:latin typeface="Fira Sans"/>
-              </a:rPr>
-              <a:t>El dtype computacional no es el tipo estadístico: un sexo codificado 1 o 2 es un int64 para Pandas, pero sigue siendo nominal.</a:t>
-            </a:r>
-          </a:p>
-          <a:p>
-            <a:pPr>
-              <a:lnSpc>
-                <a:spcPct val="112000"/>
-              </a:lnSpc>
-              <a:spcAft>
-                <a:spcPts val="900"/>
-              </a:spcAft>
-            </a:pPr>
-            <a:r>
               <a:rPr sz="1800" b="1">
                 <a:solidFill>
-                  <a:srgbClr val="E0A437"/>
-                </a:solidFill>
-                <a:latin typeface="Fira Sans"/>
-              </a:rPr>
-              <a:t>▸ </a:t>
-            </a:r>
-            <a:r>
-              <a:rPr sz="1800" b="1">
-                <a:solidFill>
                   <a:srgbClr val="1D3557"/>
                 </a:solidFill>
                 <a:latin typeface="Fira Sans"/>
               </a:rPr>
-              <a:t>Promediar una variable nominal produce un número sin significado: el promedio de Sexo en la EOD es 1,53.</a:t>
+              <a:t>Regla de trabajo: una asociación se reporta como asociación, sin verbos causales que los datos no respaldan.</a:t>
             </a:r>
           </a:p>
         </p:txBody>
@@ -9349,21 +10087,45 @@
                 </a:solidFill>
                 <a:latin typeface="Fira Sans"/>
               </a:rPr>
-              <a:t>El análisis exploratorio de datos</a:t>
-            </a:r>
-          </a:p>
-        </p:txBody>
-      </p:sp>
-      <p:sp>
-        <p:nvSpPr>
-          <p:cNvPr id="4" name="TextBox 3"/>
+              <a:t>Tipos de datos</a:t>
+            </a:r>
+          </a:p>
+        </p:txBody>
+      </p:sp>
+      <p:pic>
+        <p:nvPicPr>
+          <p:cNvPr id="4" name="Picture 3" descr="11_diagrama_tipos.png"/>
+          <p:cNvPicPr>
+            <a:picLocks noChangeAspect="1"/>
+          </p:cNvPicPr>
+          <p:nvPr/>
+        </p:nvPicPr>
+        <p:blipFill>
+          <a:blip r:embed="rId2"/>
+          <a:stretch>
+            <a:fillRect/>
+          </a:stretch>
+        </p:blipFill>
+        <p:spPr>
+          <a:xfrm>
+            <a:off x="2065807" y="1143000"/>
+            <a:ext cx="5012385" cy="3154680"/>
+          </a:xfrm>
+          <a:prstGeom prst="rect">
+            <a:avLst/>
+          </a:prstGeom>
+        </p:spPr>
+      </p:pic>
+      <p:sp>
+        <p:nvSpPr>
+          <p:cNvPr id="5" name="TextBox 4"/>
           <p:cNvSpPr txBox="1"/>
           <p:nvPr/>
         </p:nvSpPr>
         <p:spPr>
           <a:xfrm>
-            <a:off x="704088" y="1353312"/>
-            <a:ext cx="7744968" cy="3300984"/>
+            <a:off x="704088" y="4434840"/>
+            <a:ext cx="7744968" cy="457200"/>
           </a:xfrm>
           <a:prstGeom prst="rect">
             <a:avLst/>
@@ -9376,227 +10138,14 @@
           </a:bodyPr>
           <a:lstStyle/>
           <a:p>
-            <a:pPr>
-              <a:lnSpc>
-                <a:spcPct val="112000"/>
-              </a:lnSpc>
-              <a:spcAft>
-                <a:spcPts val="900"/>
-              </a:spcAft>
-            </a:pPr>
-            <a:r>
-              <a:rPr sz="1800" b="1">
-                <a:solidFill>
-                  <a:srgbClr val="E0A437"/>
-                </a:solidFill>
-                <a:latin typeface="Fira Sans"/>
-              </a:rPr>
-              <a:t>▸ </a:t>
-            </a:r>
-            <a:r>
-              <a:rPr sz="1800" b="0">
-                <a:solidFill>
-                  <a:srgbClr val="000000"/>
-                </a:solidFill>
-                <a:latin typeface="Fira Sans"/>
-              </a:rPr>
-              <a:t>La etapa en que se examinan los datos antes de modelarlos (Tukey, 1977).</a:t>
-            </a:r>
-          </a:p>
-          <a:p>
-            <a:pPr>
-              <a:lnSpc>
-                <a:spcPct val="112000"/>
-              </a:lnSpc>
-              <a:spcAft>
-                <a:spcPts val="900"/>
-              </a:spcAft>
-            </a:pPr>
-            <a:r>
-              <a:rPr sz="1800" b="1">
-                <a:solidFill>
-                  <a:srgbClr val="E0A437"/>
-                </a:solidFill>
-                <a:latin typeface="Fira Sans"/>
-              </a:rPr>
-              <a:t>▸ </a:t>
-            </a:r>
-            <a:r>
-              <a:rPr sz="1800" b="0">
-                <a:solidFill>
-                  <a:srgbClr val="000000"/>
-                </a:solidFill>
-                <a:latin typeface="Fira Sans"/>
-              </a:rPr>
-              <a:t>Responde cuatro tipos de pregunta:</a:t>
-            </a:r>
-          </a:p>
-          <a:p>
-            <a:pPr>
-              <a:lnSpc>
-                <a:spcPct val="112000"/>
-              </a:lnSpc>
-              <a:spcAft>
-                <a:spcPts val="500"/>
-              </a:spcAft>
-            </a:pPr>
-            <a:r>
-              <a:rPr sz="1400" b="0">
+            <a:r>
+              <a:rPr sz="1300" b="0">
                 <a:solidFill>
                   <a:srgbClr val="333333"/>
                 </a:solidFill>
                 <a:latin typeface="Fira Sans"/>
               </a:rPr>
-              <a:t>     ◦  </a:t>
-            </a:r>
-            <a:r>
-              <a:rPr sz="1400" b="0">
-                <a:solidFill>
-                  <a:srgbClr val="333333"/>
-                </a:solidFill>
-                <a:latin typeface="Fira Sans"/>
-              </a:rPr>
-              <a:t>La forma: cómo se distribuye cada variable.</a:t>
-            </a:r>
-          </a:p>
-          <a:p>
-            <a:pPr>
-              <a:lnSpc>
-                <a:spcPct val="112000"/>
-              </a:lnSpc>
-              <a:spcAft>
-                <a:spcPts val="500"/>
-              </a:spcAft>
-            </a:pPr>
-            <a:r>
-              <a:rPr sz="1400" b="0">
-                <a:solidFill>
-                  <a:srgbClr val="333333"/>
-                </a:solidFill>
-                <a:latin typeface="Fira Sans"/>
-              </a:rPr>
-              <a:t>     ◦  </a:t>
-            </a:r>
-            <a:r>
-              <a:rPr sz="1400" b="0">
-                <a:solidFill>
-                  <a:srgbClr val="333333"/>
-                </a:solidFill>
-                <a:latin typeface="Fira Sans"/>
-              </a:rPr>
-              <a:t>Lo típico y lo extremo: qué es frecuente y qué es anómalo.</a:t>
-            </a:r>
-          </a:p>
-          <a:p>
-            <a:pPr>
-              <a:lnSpc>
-                <a:spcPct val="112000"/>
-              </a:lnSpc>
-              <a:spcAft>
-                <a:spcPts val="500"/>
-              </a:spcAft>
-            </a:pPr>
-            <a:r>
-              <a:rPr sz="1400" b="0">
-                <a:solidFill>
-                  <a:srgbClr val="333333"/>
-                </a:solidFill>
-                <a:latin typeface="Fira Sans"/>
-              </a:rPr>
-              <a:t>     ◦  </a:t>
-            </a:r>
-            <a:r>
-              <a:rPr sz="1400" b="0">
-                <a:solidFill>
-                  <a:srgbClr val="333333"/>
-                </a:solidFill>
-                <a:latin typeface="Fira Sans"/>
-              </a:rPr>
-              <a:t>Lo que falta: qué datos están ausentes y con qué patrón.</a:t>
-            </a:r>
-          </a:p>
-          <a:p>
-            <a:pPr>
-              <a:lnSpc>
-                <a:spcPct val="112000"/>
-              </a:lnSpc>
-              <a:spcAft>
-                <a:spcPts val="500"/>
-              </a:spcAft>
-            </a:pPr>
-            <a:r>
-              <a:rPr sz="1400" b="0">
-                <a:solidFill>
-                  <a:srgbClr val="333333"/>
-                </a:solidFill>
-                <a:latin typeface="Fira Sans"/>
-              </a:rPr>
-              <a:t>     ◦  </a:t>
-            </a:r>
-            <a:r>
-              <a:rPr sz="1400" b="0">
-                <a:solidFill>
-                  <a:srgbClr val="333333"/>
-                </a:solidFill>
-                <a:latin typeface="Fira Sans"/>
-              </a:rPr>
-              <a:t>Las relaciones: qué variables se asocian con qué otras.</a:t>
-            </a:r>
-          </a:p>
-          <a:p>
-            <a:pPr>
-              <a:lnSpc>
-                <a:spcPct val="112000"/>
-              </a:lnSpc>
-              <a:spcAft>
-                <a:spcPts val="900"/>
-              </a:spcAft>
-            </a:pPr>
-            <a:r>
-              <a:rPr sz="1800" b="1">
-                <a:solidFill>
-                  <a:srgbClr val="E0A437"/>
-                </a:solidFill>
-                <a:latin typeface="Fira Sans"/>
-              </a:rPr>
-              <a:t>▸ </a:t>
-            </a:r>
-            <a:r>
-              <a:rPr sz="1800" b="0">
-                <a:solidFill>
-                  <a:srgbClr val="000000"/>
-                </a:solidFill>
-                <a:latin typeface="Fira Sans"/>
-              </a:rPr>
-              <a:t>Genera hipótesis; el análisis confirmatorio (unidad 5) las pone a prueba.</a:t>
-            </a:r>
-          </a:p>
-          <a:p>
-            <a:pPr>
-              <a:lnSpc>
-                <a:spcPct val="112000"/>
-              </a:lnSpc>
-              <a:spcAft>
-                <a:spcPts val="900"/>
-              </a:spcAft>
-            </a:pPr>
-            <a:r>
-              <a:rPr sz="1800" b="1">
-                <a:solidFill>
-                  <a:srgbClr val="E0A437"/>
-                </a:solidFill>
-                <a:latin typeface="Fira Sans"/>
-              </a:rPr>
-              <a:t>▸ </a:t>
-            </a:r>
-            <a:r>
-              <a:rPr sz="1800" b="1">
-                <a:solidFill>
-                  <a:srgbClr val="1D3557"/>
-                </a:solidFill>
-                <a:latin typeface="Fira Sans"/>
-              </a:rPr>
-              <a:t>Una pregunta transversal para toda cifra resumen: ¿de quién habla este número? ¿De la muestra, de un subgrupo, de la ciudad?</a:t>
+              <a:t>El tipo de la variable determina qué operaciones tienen sentido (Bruce, Bruce y Gedeck, 2020, cap. 1).</a:t>
             </a:r>
           </a:p>
         </p:txBody>

--- a/presentaciones/clase02_pandas_eda.pptx
+++ b/presentaciones/clase02_pandas_eda.pptx
@@ -37,6 +37,9 @@
     <p:sldId id="285" r:id="rId36"/>
     <p:sldId id="286" r:id="rId37"/>
     <p:sldId id="287" r:id="rId38"/>
+    <p:sldId id="288" r:id="rId39"/>
+    <p:sldId id="289" r:id="rId40"/>
+    <p:sldId id="290" r:id="rId41"/>
   </p:sldIdLst>
   <p:sldSz cx="9144000" cy="5138928" type="screen4x3"/>
   <p:notesSz cx="6858000" cy="9144000"/>
@@ -3386,7 +3389,7 @@
                 </a:solidFill>
                 <a:latin typeface="Fira Sans"/>
               </a:rPr>
-              <a:t>El tipo estadístico no es el tipo computacional</a:t>
+              <a:t>¿Cuándo usar cada coeficiente?</a:t>
             </a:r>
           </a:p>
         </p:txBody>
@@ -3437,7 +3440,7 @@
                 </a:solidFill>
                 <a:latin typeface="Fira Sans"/>
               </a:rPr>
-              <a:t>En la EOD el sexo viene codificado 1 o 2: para Pandas es un entero (int64).</a:t>
+              <a:t>Pearson: variables numéricas, relación aproximadamente recta en el gráfico, sin extremos dominantes.</a:t>
             </a:r>
           </a:p>
           <a:p>
@@ -3465,7 +3468,35 @@
                 </a:solidFill>
                 <a:latin typeface="Fira Sans"/>
               </a:rPr>
-              <a:t>El tipo computacional permite operar; el tipo estadístico decide si la operación significa algo.</a:t>
+              <a:t>Spearman: distribuciones asimétricas o con extremos, relaciones curvas pero crecientes, o variables ordinales.</a:t>
+            </a:r>
+          </a:p>
+          <a:p>
+            <a:pPr>
+              <a:lnSpc>
+                <a:spcPct val="112000"/>
+              </a:lnSpc>
+              <a:spcAft>
+                <a:spcPts val="900"/>
+              </a:spcAft>
+            </a:pPr>
+            <a:r>
+              <a:rPr sz="1800" b="1">
+                <a:solidFill>
+                  <a:srgbClr val="E0A437"/>
+                </a:solidFill>
+                <a:latin typeface="Fira Sans"/>
+              </a:rPr>
+              <a:t>▸ </a:t>
+            </a:r>
+            <a:r>
+              <a:rPr sz="1800" b="0">
+                <a:solidFill>
+                  <a:srgbClr val="000000"/>
+                </a:solidFill>
+                <a:latin typeface="Fira Sans"/>
+              </a:rPr>
+              <a:t>En el EDA conviene calcular ambos: la diferencia entre ellos es un diagnóstico.</a:t>
             </a:r>
           </a:p>
           <a:p>
@@ -3493,7 +3524,7 @@
                 </a:solidFill>
                 <a:latin typeface="Fira Sans"/>
               </a:rPr>
-              <a:t>El promedio de Sexo en la EOD es 1,53: aritméticamente correcto, sin significado.</a:t>
+              <a:t>Distancia y duración: Pearson 0,43 contra Spearman 0,76. La brecha indica relación monótona pero no lineal.</a:t>
             </a:r>
           </a:p>
           <a:p>
@@ -3521,7 +3552,7 @@
                 </a:solidFill>
                 <a:latin typeface="Fira Sans"/>
               </a:rPr>
-              <a:t>El promedio de Edad sí es interpretable: la variable es numérica.</a:t>
+              <a:t>Tras aplicar logaritmo a ambas variables, Pearson sube a 0,73, casi igual a Spearman: el logaritmo endereza la curva.</a:t>
             </a:r>
           </a:p>
           <a:p>
@@ -3549,7 +3580,7 @@
                 </a:solidFill>
                 <a:latin typeface="Fira Sans"/>
               </a:rPr>
-              <a:t>Identificar el tipo de cada variable es un paso del análisis, no una formalidad.</a:t>
+              <a:t>Si los dos coeficientes difieren mucho, mire el gráfico antes de reportar cualquiera.</a:t>
             </a:r>
           </a:p>
         </p:txBody>
@@ -3645,7 +3676,7 @@
                 </a:solidFill>
                 <a:latin typeface="Fira Sans"/>
               </a:rPr>
-              <a:t>El análisis exploratorio de datos</a:t>
+              <a:t>Correlación y causalidad</a:t>
             </a:r>
           </a:p>
         </p:txBody>
@@ -3696,7 +3727,91 @@
                 </a:solidFill>
                 <a:latin typeface="Fira Sans"/>
               </a:rPr>
-              <a:t>La etapa en que se examinan los datos antes de modelarlos (Tukey, 1977).</a:t>
+              <a:t>Causalidad: intervenir X cambiaría Y. Es una afirmación más fuerte que la asociación.</a:t>
+            </a:r>
+          </a:p>
+          <a:p>
+            <a:pPr>
+              <a:lnSpc>
+                <a:spcPct val="112000"/>
+              </a:lnSpc>
+              <a:spcAft>
+                <a:spcPts val="500"/>
+              </a:spcAft>
+            </a:pPr>
+            <a:r>
+              <a:rPr sz="1400" b="0">
+                <a:solidFill>
+                  <a:srgbClr val="333333"/>
+                </a:solidFill>
+                <a:latin typeface="Fira Sans"/>
+              </a:rPr>
+              <a:t>     ◦  </a:t>
+            </a:r>
+            <a:r>
+              <a:rPr sz="1400" b="0">
+                <a:solidFill>
+                  <a:srgbClr val="333333"/>
+                </a:solidFill>
+                <a:latin typeface="Fira Sans"/>
+              </a:rPr>
+              <a:t>Una asociación observada admite varias explicaciones: X causa Y, Y causa X, o una variable de confusión Z afecta a ambas.</a:t>
+            </a:r>
+          </a:p>
+          <a:p>
+            <a:pPr>
+              <a:lnSpc>
+                <a:spcPct val="112000"/>
+              </a:lnSpc>
+              <a:spcAft>
+                <a:spcPts val="500"/>
+              </a:spcAft>
+            </a:pPr>
+            <a:r>
+              <a:rPr sz="1400" b="0">
+                <a:solidFill>
+                  <a:srgbClr val="333333"/>
+                </a:solidFill>
+                <a:latin typeface="Fira Sans"/>
+              </a:rPr>
+              <a:t>     ◦  </a:t>
+            </a:r>
+            <a:r>
+              <a:rPr sz="1400" b="0">
+                <a:solidFill>
+                  <a:srgbClr val="333333"/>
+                </a:solidFill>
+                <a:latin typeface="Fira Sans"/>
+              </a:rPr>
+              <a:t>Los datos observacionales, como los de una encuesta, muestran asociación; no bastan para establecer causalidad.</a:t>
+            </a:r>
+          </a:p>
+          <a:p>
+            <a:pPr>
+              <a:lnSpc>
+                <a:spcPct val="112000"/>
+              </a:lnSpc>
+              <a:spcAft>
+                <a:spcPts val="500"/>
+              </a:spcAft>
+            </a:pPr>
+            <a:r>
+              <a:rPr sz="1400" b="0">
+                <a:solidFill>
+                  <a:srgbClr val="333333"/>
+                </a:solidFill>
+                <a:latin typeface="Fira Sans"/>
+              </a:rPr>
+              <a:t>     ◦  </a:t>
+            </a:r>
+            <a:r>
+              <a:rPr sz="1400" b="0">
+                <a:solidFill>
+                  <a:srgbClr val="333333"/>
+                </a:solidFill>
+                <a:latin typeface="Fira Sans"/>
+              </a:rPr>
+              <a:t>La inferencia causal tiene métodos propios; este curso no los cubre.</a:t>
             </a:r>
           </a:p>
           <a:p>
@@ -3718,181 +3833,13 @@
               <a:t>▸ </a:t>
             </a:r>
             <a:r>
-              <a:rPr sz="1800" b="0">
-                <a:solidFill>
-                  <a:srgbClr val="000000"/>
-                </a:solidFill>
-                <a:latin typeface="Fira Sans"/>
-              </a:rPr>
-              <a:t>Responde cuatro tipos de pregunta:</a:t>
-            </a:r>
-          </a:p>
-          <a:p>
-            <a:pPr>
-              <a:lnSpc>
-                <a:spcPct val="112000"/>
-              </a:lnSpc>
-              <a:spcAft>
-                <a:spcPts val="500"/>
-              </a:spcAft>
-            </a:pPr>
-            <a:r>
-              <a:rPr sz="1400" b="0">
-                <a:solidFill>
-                  <a:srgbClr val="333333"/>
-                </a:solidFill>
-                <a:latin typeface="Fira Sans"/>
-              </a:rPr>
-              <a:t>     ◦  </a:t>
-            </a:r>
-            <a:r>
-              <a:rPr sz="1400" b="0">
-                <a:solidFill>
-                  <a:srgbClr val="333333"/>
-                </a:solidFill>
-                <a:latin typeface="Fira Sans"/>
-              </a:rPr>
-              <a:t>La forma: cómo se distribuye cada variable.</a:t>
-            </a:r>
-          </a:p>
-          <a:p>
-            <a:pPr>
-              <a:lnSpc>
-                <a:spcPct val="112000"/>
-              </a:lnSpc>
-              <a:spcAft>
-                <a:spcPts val="500"/>
-              </a:spcAft>
-            </a:pPr>
-            <a:r>
-              <a:rPr sz="1400" b="0">
-                <a:solidFill>
-                  <a:srgbClr val="333333"/>
-                </a:solidFill>
-                <a:latin typeface="Fira Sans"/>
-              </a:rPr>
-              <a:t>     ◦  </a:t>
-            </a:r>
-            <a:r>
-              <a:rPr sz="1400" b="0">
-                <a:solidFill>
-                  <a:srgbClr val="333333"/>
-                </a:solidFill>
-                <a:latin typeface="Fira Sans"/>
-              </a:rPr>
-              <a:t>Lo típico y lo extremo: qué es frecuente y qué es anómalo.</a:t>
-            </a:r>
-          </a:p>
-          <a:p>
-            <a:pPr>
-              <a:lnSpc>
-                <a:spcPct val="112000"/>
-              </a:lnSpc>
-              <a:spcAft>
-                <a:spcPts val="500"/>
-              </a:spcAft>
-            </a:pPr>
-            <a:r>
-              <a:rPr sz="1400" b="0">
-                <a:solidFill>
-                  <a:srgbClr val="333333"/>
-                </a:solidFill>
-                <a:latin typeface="Fira Sans"/>
-              </a:rPr>
-              <a:t>     ◦  </a:t>
-            </a:r>
-            <a:r>
-              <a:rPr sz="1400" b="0">
-                <a:solidFill>
-                  <a:srgbClr val="333333"/>
-                </a:solidFill>
-                <a:latin typeface="Fira Sans"/>
-              </a:rPr>
-              <a:t>Lo que falta: qué datos están ausentes y con qué patrón.</a:t>
-            </a:r>
-          </a:p>
-          <a:p>
-            <a:pPr>
-              <a:lnSpc>
-                <a:spcPct val="112000"/>
-              </a:lnSpc>
-              <a:spcAft>
-                <a:spcPts val="500"/>
-              </a:spcAft>
-            </a:pPr>
-            <a:r>
-              <a:rPr sz="1400" b="0">
-                <a:solidFill>
-                  <a:srgbClr val="333333"/>
-                </a:solidFill>
-                <a:latin typeface="Fira Sans"/>
-              </a:rPr>
-              <a:t>     ◦  </a:t>
-            </a:r>
-            <a:r>
-              <a:rPr sz="1400" b="0">
-                <a:solidFill>
-                  <a:srgbClr val="333333"/>
-                </a:solidFill>
-                <a:latin typeface="Fira Sans"/>
-              </a:rPr>
-              <a:t>Las relaciones: qué variables se asocian con qué otras.</a:t>
-            </a:r>
-          </a:p>
-          <a:p>
-            <a:pPr>
-              <a:lnSpc>
-                <a:spcPct val="112000"/>
-              </a:lnSpc>
-              <a:spcAft>
-                <a:spcPts val="900"/>
-              </a:spcAft>
-            </a:pPr>
-            <a:r>
               <a:rPr sz="1800" b="1">
                 <a:solidFill>
-                  <a:srgbClr val="E0A437"/>
-                </a:solidFill>
-                <a:latin typeface="Fira Sans"/>
-              </a:rPr>
-              <a:t>▸ </a:t>
-            </a:r>
-            <a:r>
-              <a:rPr sz="1800" b="0">
-                <a:solidFill>
-                  <a:srgbClr val="000000"/>
-                </a:solidFill>
-                <a:latin typeface="Fira Sans"/>
-              </a:rPr>
-              <a:t>Genera hipótesis; el análisis confirmatorio (unidad 5) las pone a prueba.</a:t>
-            </a:r>
-          </a:p>
-          <a:p>
-            <a:pPr>
-              <a:lnSpc>
-                <a:spcPct val="112000"/>
-              </a:lnSpc>
-              <a:spcAft>
-                <a:spcPts val="900"/>
-              </a:spcAft>
-            </a:pPr>
-            <a:r>
-              <a:rPr sz="1800" b="1">
-                <a:solidFill>
-                  <a:srgbClr val="E0A437"/>
-                </a:solidFill>
-                <a:latin typeface="Fira Sans"/>
-              </a:rPr>
-              <a:t>▸ </a:t>
-            </a:r>
-            <a:r>
-              <a:rPr sz="1800" b="1">
-                <a:solidFill>
                   <a:srgbClr val="1D3557"/>
                 </a:solidFill>
                 <a:latin typeface="Fira Sans"/>
               </a:rPr>
-              <a:t>Una pregunta transversal para toda cifra resumen: ¿de quién habla este número? ¿De la muestra, de un subgrupo, de la ciudad?</a:t>
+              <a:t>Regla de trabajo: una asociación se reporta como asociación, sin verbos causales que los datos no respaldan.</a:t>
             </a:r>
           </a:p>
         </p:txBody>
@@ -3930,7 +3877,7 @@
             <a:avLst/>
           </a:prstGeom>
           <a:solidFill>
-            <a:srgbClr val="1D3557"/>
+            <a:srgbClr val="FAFBFC"/>
           </a:solidFill>
           <a:ln>
             <a:noFill/>
@@ -3967,8 +3914,8 @@
         </p:nvSpPr>
         <p:spPr>
           <a:xfrm>
-            <a:off x="603504" y="1847088"/>
-            <a:ext cx="7946136" cy="1399032"/>
+            <a:off x="402336" y="301752"/>
+            <a:ext cx="8348472" cy="795528"/>
           </a:xfrm>
           <a:prstGeom prst="rect">
             <a:avLst/>
@@ -3982,24 +3929,71 @@
           <a:lstStyle/>
           <a:p>
             <a:r>
-              <a:rPr sz="3400" b="1">
-                <a:solidFill>
-                  <a:srgbClr val="FFFFFF"/>
-                </a:solidFill>
-                <a:latin typeface="Fira Sans"/>
-              </a:rPr>
-              <a:t>Los datos</a:t>
-            </a:r>
-          </a:p>
-          <a:p>
-            <a:r>
-              <a:rPr sz="1800" b="0">
-                <a:solidFill>
-                  <a:srgbClr val="E0A437"/>
-                </a:solidFill>
-                <a:latin typeface="Fira Sans"/>
-              </a:rPr>
-              <a:t>Encuesta Origen Destino de Santiago 2012</a:t>
+              <a:rPr sz="2800" b="1">
+                <a:solidFill>
+                  <a:srgbClr val="0F0F0F"/>
+                </a:solidFill>
+                <a:latin typeface="Fira Sans"/>
+              </a:rPr>
+              <a:t>Tipos de datos</a:t>
+            </a:r>
+          </a:p>
+        </p:txBody>
+      </p:sp>
+      <p:pic>
+        <p:nvPicPr>
+          <p:cNvPr id="4" name="Picture 3" descr="11_diagrama_tipos.png"/>
+          <p:cNvPicPr>
+            <a:picLocks noChangeAspect="1"/>
+          </p:cNvPicPr>
+          <p:nvPr/>
+        </p:nvPicPr>
+        <p:blipFill>
+          <a:blip r:embed="rId2"/>
+          <a:stretch>
+            <a:fillRect/>
+          </a:stretch>
+        </p:blipFill>
+        <p:spPr>
+          <a:xfrm>
+            <a:off x="2065807" y="1143000"/>
+            <a:ext cx="5012385" cy="3154680"/>
+          </a:xfrm>
+          <a:prstGeom prst="rect">
+            <a:avLst/>
+          </a:prstGeom>
+        </p:spPr>
+      </p:pic>
+      <p:sp>
+        <p:nvSpPr>
+          <p:cNvPr id="5" name="TextBox 4"/>
+          <p:cNvSpPr txBox="1"/>
+          <p:nvPr/>
+        </p:nvSpPr>
+        <p:spPr>
+          <a:xfrm>
+            <a:off x="704088" y="4434840"/>
+            <a:ext cx="7744968" cy="457200"/>
+          </a:xfrm>
+          <a:prstGeom prst="rect">
+            <a:avLst/>
+          </a:prstGeom>
+          <a:noFill/>
+        </p:spPr>
+        <p:txBody>
+          <a:bodyPr wrap="square">
+            <a:spAutoFit/>
+          </a:bodyPr>
+          <a:lstStyle/>
+          <a:p>
+            <a:r>
+              <a:rPr sz="1300" b="0">
+                <a:solidFill>
+                  <a:srgbClr val="333333"/>
+                </a:solidFill>
+                <a:latin typeface="Fira Sans"/>
+              </a:rPr>
+              <a:t>El tipo de la variable determina qué operaciones tienen sentido (Bruce, Bruce y Gedeck, 2020, cap. 1).</a:t>
             </a:r>
           </a:p>
         </p:txBody>
@@ -4095,7 +4089,7 @@
                 </a:solidFill>
                 <a:latin typeface="Fira Sans"/>
               </a:rPr>
-              <a:t>La EOD 2012</a:t>
+              <a:t>El tipo estadístico no es el tipo computacional</a:t>
             </a:r>
           </a:p>
         </p:txBody>
@@ -4146,7 +4140,7 @@
                 </a:solidFill>
                 <a:latin typeface="Fira Sans"/>
               </a:rPr>
-              <a:t>Encuesta de movilidad del Gran Santiago (SECTRA y U. Alberto Hurtado).</a:t>
+              <a:t>En la EOD el sexo viene codificado 1 o 2: para Pandas es un entero (int64).</a:t>
             </a:r>
           </a:p>
           <a:p>
@@ -4174,7 +4168,7 @@
                 </a:solidFill>
                 <a:latin typeface="Fira Sans"/>
               </a:rPr>
-              <a:t>Registra todos los viajes de un día de los hogares encuestados.</a:t>
+              <a:t>El tipo computacional permite operar; el tipo estadístico decide si la operación significa algo.</a:t>
             </a:r>
           </a:p>
           <a:p>
@@ -4202,7 +4196,7 @@
                 </a:solidFill>
                 <a:latin typeface="Fira Sans"/>
               </a:rPr>
-              <a:t>18.264 hogares, 60.054 personas, 113.591 viajes.</a:t>
+              <a:t>El promedio de Sexo en la EOD es 1,53: aritméticamente correcto, sin significado.</a:t>
             </a:r>
           </a:p>
           <a:p>
@@ -4230,7 +4224,7 @@
                 </a:solidFill>
                 <a:latin typeface="Fira Sans"/>
               </a:rPr>
-              <a:t>Se usa en la planificación de transporte de la ciudad.</a:t>
+              <a:t>El promedio de Edad sí es interpretable: la variable es numérica.</a:t>
             </a:r>
           </a:p>
           <a:p>
@@ -4258,7 +4252,7 @@
                 </a:solidFill>
                 <a:latin typeface="Fira Sans"/>
               </a:rPr>
-              <a:t>El mismo diseño relacional de la Casen, el Censo o la ENUSC.</a:t>
+              <a:t>Identificar el tipo de cada variable es un paso del análisis, no una formalidad.</a:t>
             </a:r>
           </a:p>
         </p:txBody>
@@ -4354,45 +4348,21 @@
                 </a:solidFill>
                 <a:latin typeface="Fira Sans"/>
               </a:rPr>
-              <a:t>Una encuesta, varias tablas</a:t>
-            </a:r>
-          </a:p>
-        </p:txBody>
-      </p:sp>
-      <p:pic>
-        <p:nvPicPr>
-          <p:cNvPr id="4" name="Picture 3" descr="05_diagrama_tablas.png"/>
-          <p:cNvPicPr>
-            <a:picLocks noChangeAspect="1"/>
-          </p:cNvPicPr>
-          <p:nvPr/>
-        </p:nvPicPr>
-        <p:blipFill>
-          <a:blip r:embed="rId2"/>
-          <a:stretch>
-            <a:fillRect/>
-          </a:stretch>
-        </p:blipFill>
-        <p:spPr>
-          <a:xfrm>
-            <a:off x="1553651" y="1143000"/>
-            <a:ext cx="6036697" cy="3154680"/>
-          </a:xfrm>
-          <a:prstGeom prst="rect">
-            <a:avLst/>
-          </a:prstGeom>
-        </p:spPr>
-      </p:pic>
-      <p:sp>
-        <p:nvSpPr>
-          <p:cNvPr id="5" name="TextBox 4"/>
+              <a:t>El análisis exploratorio de datos</a:t>
+            </a:r>
+          </a:p>
+        </p:txBody>
+      </p:sp>
+      <p:sp>
+        <p:nvSpPr>
+          <p:cNvPr id="4" name="TextBox 3"/>
           <p:cNvSpPr txBox="1"/>
           <p:nvPr/>
         </p:nvSpPr>
         <p:spPr>
           <a:xfrm>
-            <a:off x="704088" y="4434840"/>
-            <a:ext cx="7744968" cy="457200"/>
+            <a:off x="704088" y="1353312"/>
+            <a:ext cx="7744968" cy="3300984"/>
           </a:xfrm>
           <a:prstGeom prst="rect">
             <a:avLst/>
@@ -4405,14 +4375,227 @@
           </a:bodyPr>
           <a:lstStyle/>
           <a:p>
-            <a:r>
-              <a:rPr sz="1300" b="0">
+            <a:pPr>
+              <a:lnSpc>
+                <a:spcPct val="112000"/>
+              </a:lnSpc>
+              <a:spcAft>
+                <a:spcPts val="900"/>
+              </a:spcAft>
+            </a:pPr>
+            <a:r>
+              <a:rPr sz="1800" b="1">
+                <a:solidFill>
+                  <a:srgbClr val="E0A437"/>
+                </a:solidFill>
+                <a:latin typeface="Fira Sans"/>
+              </a:rPr>
+              <a:t>▸ </a:t>
+            </a:r>
+            <a:r>
+              <a:rPr sz="1800" b="0">
+                <a:solidFill>
+                  <a:srgbClr val="000000"/>
+                </a:solidFill>
+                <a:latin typeface="Fira Sans"/>
+              </a:rPr>
+              <a:t>La etapa en que se examinan los datos antes de modelarlos (Tukey, 1977).</a:t>
+            </a:r>
+          </a:p>
+          <a:p>
+            <a:pPr>
+              <a:lnSpc>
+                <a:spcPct val="112000"/>
+              </a:lnSpc>
+              <a:spcAft>
+                <a:spcPts val="900"/>
+              </a:spcAft>
+            </a:pPr>
+            <a:r>
+              <a:rPr sz="1800" b="1">
+                <a:solidFill>
+                  <a:srgbClr val="E0A437"/>
+                </a:solidFill>
+                <a:latin typeface="Fira Sans"/>
+              </a:rPr>
+              <a:t>▸ </a:t>
+            </a:r>
+            <a:r>
+              <a:rPr sz="1800" b="0">
+                <a:solidFill>
+                  <a:srgbClr val="000000"/>
+                </a:solidFill>
+                <a:latin typeface="Fira Sans"/>
+              </a:rPr>
+              <a:t>Responde cuatro tipos de pregunta:</a:t>
+            </a:r>
+          </a:p>
+          <a:p>
+            <a:pPr>
+              <a:lnSpc>
+                <a:spcPct val="112000"/>
+              </a:lnSpc>
+              <a:spcAft>
+                <a:spcPts val="500"/>
+              </a:spcAft>
+            </a:pPr>
+            <a:r>
+              <a:rPr sz="1400" b="0">
                 <a:solidFill>
                   <a:srgbClr val="333333"/>
                 </a:solidFill>
                 <a:latin typeface="Fira Sans"/>
               </a:rPr>
-              <a:t>Los códigos no significan nada sin sus tablas de parámetros: unirlas es parte del análisis.</a:t>
+              <a:t>     ◦  </a:t>
+            </a:r>
+            <a:r>
+              <a:rPr sz="1400" b="0">
+                <a:solidFill>
+                  <a:srgbClr val="333333"/>
+                </a:solidFill>
+                <a:latin typeface="Fira Sans"/>
+              </a:rPr>
+              <a:t>La forma: cómo se distribuye cada variable.</a:t>
+            </a:r>
+          </a:p>
+          <a:p>
+            <a:pPr>
+              <a:lnSpc>
+                <a:spcPct val="112000"/>
+              </a:lnSpc>
+              <a:spcAft>
+                <a:spcPts val="500"/>
+              </a:spcAft>
+            </a:pPr>
+            <a:r>
+              <a:rPr sz="1400" b="0">
+                <a:solidFill>
+                  <a:srgbClr val="333333"/>
+                </a:solidFill>
+                <a:latin typeface="Fira Sans"/>
+              </a:rPr>
+              <a:t>     ◦  </a:t>
+            </a:r>
+            <a:r>
+              <a:rPr sz="1400" b="0">
+                <a:solidFill>
+                  <a:srgbClr val="333333"/>
+                </a:solidFill>
+                <a:latin typeface="Fira Sans"/>
+              </a:rPr>
+              <a:t>Lo típico y lo extremo: qué es frecuente y qué es anómalo.</a:t>
+            </a:r>
+          </a:p>
+          <a:p>
+            <a:pPr>
+              <a:lnSpc>
+                <a:spcPct val="112000"/>
+              </a:lnSpc>
+              <a:spcAft>
+                <a:spcPts val="500"/>
+              </a:spcAft>
+            </a:pPr>
+            <a:r>
+              <a:rPr sz="1400" b="0">
+                <a:solidFill>
+                  <a:srgbClr val="333333"/>
+                </a:solidFill>
+                <a:latin typeface="Fira Sans"/>
+              </a:rPr>
+              <a:t>     ◦  </a:t>
+            </a:r>
+            <a:r>
+              <a:rPr sz="1400" b="0">
+                <a:solidFill>
+                  <a:srgbClr val="333333"/>
+                </a:solidFill>
+                <a:latin typeface="Fira Sans"/>
+              </a:rPr>
+              <a:t>Lo que falta: qué datos están ausentes y con qué patrón.</a:t>
+            </a:r>
+          </a:p>
+          <a:p>
+            <a:pPr>
+              <a:lnSpc>
+                <a:spcPct val="112000"/>
+              </a:lnSpc>
+              <a:spcAft>
+                <a:spcPts val="500"/>
+              </a:spcAft>
+            </a:pPr>
+            <a:r>
+              <a:rPr sz="1400" b="0">
+                <a:solidFill>
+                  <a:srgbClr val="333333"/>
+                </a:solidFill>
+                <a:latin typeface="Fira Sans"/>
+              </a:rPr>
+              <a:t>     ◦  </a:t>
+            </a:r>
+            <a:r>
+              <a:rPr sz="1400" b="0">
+                <a:solidFill>
+                  <a:srgbClr val="333333"/>
+                </a:solidFill>
+                <a:latin typeface="Fira Sans"/>
+              </a:rPr>
+              <a:t>Las relaciones: qué variables se asocian con qué otras.</a:t>
+            </a:r>
+          </a:p>
+          <a:p>
+            <a:pPr>
+              <a:lnSpc>
+                <a:spcPct val="112000"/>
+              </a:lnSpc>
+              <a:spcAft>
+                <a:spcPts val="900"/>
+              </a:spcAft>
+            </a:pPr>
+            <a:r>
+              <a:rPr sz="1800" b="1">
+                <a:solidFill>
+                  <a:srgbClr val="E0A437"/>
+                </a:solidFill>
+                <a:latin typeface="Fira Sans"/>
+              </a:rPr>
+              <a:t>▸ </a:t>
+            </a:r>
+            <a:r>
+              <a:rPr sz="1800" b="0">
+                <a:solidFill>
+                  <a:srgbClr val="000000"/>
+                </a:solidFill>
+                <a:latin typeface="Fira Sans"/>
+              </a:rPr>
+              <a:t>Genera hipótesis; el análisis confirmatorio (unidad 5) las pone a prueba.</a:t>
+            </a:r>
+          </a:p>
+          <a:p>
+            <a:pPr>
+              <a:lnSpc>
+                <a:spcPct val="112000"/>
+              </a:lnSpc>
+              <a:spcAft>
+                <a:spcPts val="900"/>
+              </a:spcAft>
+            </a:pPr>
+            <a:r>
+              <a:rPr sz="1800" b="1">
+                <a:solidFill>
+                  <a:srgbClr val="E0A437"/>
+                </a:solidFill>
+                <a:latin typeface="Fira Sans"/>
+              </a:rPr>
+              <a:t>▸ </a:t>
+            </a:r>
+            <a:r>
+              <a:rPr sz="1800" b="1">
+                <a:solidFill>
+                  <a:srgbClr val="1D3557"/>
+                </a:solidFill>
+                <a:latin typeface="Fira Sans"/>
+              </a:rPr>
+              <a:t>Una pregunta transversal para toda cifra resumen: ¿de quién habla este número? ¿De la muestra, de un subgrupo, de la ciudad?</a:t>
             </a:r>
           </a:p>
         </p:txBody>
@@ -4508,7 +4691,7 @@
                 </a:solidFill>
                 <a:latin typeface="Fira Sans"/>
               </a:rPr>
-              <a:t>Repaso de Pandas</a:t>
+              <a:t>Los datos</a:t>
             </a:r>
           </a:p>
           <a:p>
@@ -4519,7 +4702,7 @@
                 </a:solidFill>
                 <a:latin typeface="Fira Sans"/>
               </a:rPr>
-              <a:t>Dos casos concretos con la EOD</a:t>
+              <a:t>Encuesta Origen Destino de Santiago 2012</a:t>
             </a:r>
           </a:p>
         </p:txBody>
@@ -4615,112 +4798,21 @@
                 </a:solidFill>
                 <a:latin typeface="Fira Sans"/>
               </a:rPr>
-              <a:t>Abrir el dataset</a:t>
-            </a:r>
-          </a:p>
-        </p:txBody>
-      </p:sp>
-      <p:sp>
-        <p:nvSpPr>
-          <p:cNvPr id="4" name="Rectangle 3"/>
-          <p:cNvSpPr/>
-          <p:nvPr/>
-        </p:nvSpPr>
-        <p:spPr>
-          <a:xfrm>
-            <a:off x="704088" y="1280160"/>
-            <a:ext cx="7744968" cy="2377440"/>
-          </a:xfrm>
-          <a:prstGeom prst="rect">
-            <a:avLst/>
-          </a:prstGeom>
-          <a:solidFill>
-            <a:srgbClr val="F0F2F5"/>
-          </a:solidFill>
-          <a:ln>
-            <a:solidFill>
-              <a:srgbClr val="D8DDE3"/>
-            </a:solidFill>
-          </a:ln>
-          <a:effectLst/>
-        </p:spPr>
-        <p:style>
-          <a:lnRef idx="1">
-            <a:schemeClr val="accent1"/>
-          </a:lnRef>
-          <a:fillRef idx="3">
-            <a:schemeClr val="accent1"/>
-          </a:fillRef>
-          <a:effectRef idx="2">
-            <a:schemeClr val="accent1"/>
-          </a:effectRef>
-          <a:fontRef idx="minor">
-            <a:schemeClr val="lt1"/>
-          </a:fontRef>
-        </p:style>
-        <p:txBody>
-          <a:bodyPr rtlCol="0" anchor="ctr" wrap="square" lIns="228600" tIns="137160"/>
-          <a:lstStyle/>
-          <a:p>
-            <a:pPr/>
-            <a:r>
-              <a:rPr sz="1500" b="0">
-                <a:solidFill>
-                  <a:srgbClr val="1D3557"/>
-                </a:solidFill>
-                <a:latin typeface="Menlo"/>
-              </a:rPr>
-              <a:t>import pandas as pd</a:t>
-            </a:r>
-          </a:p>
-          <a:p>
-            <a:pPr/>
-            <a:r>
-              <a:rPr sz="1500" b="0">
-                <a:solidFill>
-                  <a:srgbClr val="1D3557"/>
-                </a:solidFill>
-                <a:latin typeface="Menlo"/>
-              </a:rPr>
-              <a:t/>
-            </a:r>
-          </a:p>
-          <a:p>
-            <a:pPr/>
-            <a:r>
-              <a:rPr sz="1500" b="0">
-                <a:solidFill>
-                  <a:srgbClr val="1D3557"/>
-                </a:solidFill>
-                <a:latin typeface="Menlo"/>
-              </a:rPr>
-              <a:t>viajes = pd.read_csv('datos/eod_stgo/viajes.csv',</a:t>
-            </a:r>
-          </a:p>
-          <a:p>
-            <a:pPr/>
-            <a:r>
-              <a:rPr sz="1500" b="0">
-                <a:solidFill>
-                  <a:srgbClr val="1D3557"/>
-                </a:solidFill>
-                <a:latin typeface="Menlo"/>
-              </a:rPr>
-              <a:t>                     sep=';', decimal=',')</a:t>
-            </a:r>
-          </a:p>
-        </p:txBody>
-      </p:sp>
-      <p:sp>
-        <p:nvSpPr>
-          <p:cNvPr id="5" name="TextBox 4"/>
+              <a:t>La EOD 2012</a:t>
+            </a:r>
+          </a:p>
+        </p:txBody>
+      </p:sp>
+      <p:sp>
+        <p:nvSpPr>
+          <p:cNvPr id="4" name="TextBox 3"/>
           <p:cNvSpPr txBox="1"/>
           <p:nvPr/>
         </p:nvSpPr>
         <p:spPr>
           <a:xfrm>
-            <a:off x="704088" y="3886200"/>
-            <a:ext cx="7744968" cy="1097280"/>
+            <a:off x="704088" y="1353312"/>
+            <a:ext cx="7744968" cy="3300984"/>
           </a:xfrm>
           <a:prstGeom prst="rect">
             <a:avLst/>
@@ -4742,7 +4834,7 @@
               </a:spcAft>
             </a:pPr>
             <a:r>
-              <a:rPr sz="1600" b="1">
+              <a:rPr sz="1800" b="1">
                 <a:solidFill>
                   <a:srgbClr val="E0A437"/>
                 </a:solidFill>
@@ -4751,13 +4843,125 @@
               <a:t>▸ </a:t>
             </a:r>
             <a:r>
-              <a:rPr sz="1600" b="0">
+              <a:rPr sz="1800" b="0">
                 <a:solidFill>
                   <a:srgbClr val="000000"/>
                 </a:solidFill>
                 <a:latin typeface="Fira Sans"/>
               </a:rPr>
-              <a:t>Todo el código de la clase está en el notebook 02_pandas_eda.ipynb del repositorio.</a:t>
+              <a:t>Encuesta de movilidad del Gran Santiago (SECTRA y U. Alberto Hurtado).</a:t>
+            </a:r>
+          </a:p>
+          <a:p>
+            <a:pPr>
+              <a:lnSpc>
+                <a:spcPct val="112000"/>
+              </a:lnSpc>
+              <a:spcAft>
+                <a:spcPts val="900"/>
+              </a:spcAft>
+            </a:pPr>
+            <a:r>
+              <a:rPr sz="1800" b="1">
+                <a:solidFill>
+                  <a:srgbClr val="E0A437"/>
+                </a:solidFill>
+                <a:latin typeface="Fira Sans"/>
+              </a:rPr>
+              <a:t>▸ </a:t>
+            </a:r>
+            <a:r>
+              <a:rPr sz="1800" b="0">
+                <a:solidFill>
+                  <a:srgbClr val="000000"/>
+                </a:solidFill>
+                <a:latin typeface="Fira Sans"/>
+              </a:rPr>
+              <a:t>Registra todos los viajes de un día de los hogares encuestados.</a:t>
+            </a:r>
+          </a:p>
+          <a:p>
+            <a:pPr>
+              <a:lnSpc>
+                <a:spcPct val="112000"/>
+              </a:lnSpc>
+              <a:spcAft>
+                <a:spcPts val="500"/>
+              </a:spcAft>
+            </a:pPr>
+            <a:r>
+              <a:rPr sz="1400" b="0">
+                <a:solidFill>
+                  <a:srgbClr val="333333"/>
+                </a:solidFill>
+                <a:latin typeface="Fira Sans"/>
+              </a:rPr>
+              <a:t>     ◦  </a:t>
+            </a:r>
+            <a:r>
+              <a:rPr sz="1400" b="0">
+                <a:solidFill>
+                  <a:srgbClr val="333333"/>
+                </a:solidFill>
+                <a:latin typeface="Fira Sans"/>
+              </a:rPr>
+              <a:t>18.264 hogares, 60.054 personas, 113.591 viajes.</a:t>
+            </a:r>
+          </a:p>
+          <a:p>
+            <a:pPr>
+              <a:lnSpc>
+                <a:spcPct val="112000"/>
+              </a:lnSpc>
+              <a:spcAft>
+                <a:spcPts val="500"/>
+              </a:spcAft>
+            </a:pPr>
+            <a:r>
+              <a:rPr sz="1400" b="0">
+                <a:solidFill>
+                  <a:srgbClr val="333333"/>
+                </a:solidFill>
+                <a:latin typeface="Fira Sans"/>
+              </a:rPr>
+              <a:t>     ◦  </a:t>
+            </a:r>
+            <a:r>
+              <a:rPr sz="1400" b="0">
+                <a:solidFill>
+                  <a:srgbClr val="333333"/>
+                </a:solidFill>
+                <a:latin typeface="Fira Sans"/>
+              </a:rPr>
+              <a:t>Se usa en la planificación de transporte de la ciudad.</a:t>
+            </a:r>
+          </a:p>
+          <a:p>
+            <a:pPr>
+              <a:lnSpc>
+                <a:spcPct val="112000"/>
+              </a:lnSpc>
+              <a:spcAft>
+                <a:spcPts val="900"/>
+              </a:spcAft>
+            </a:pPr>
+            <a:r>
+              <a:rPr sz="1800" b="1">
+                <a:solidFill>
+                  <a:srgbClr val="E0A437"/>
+                </a:solidFill>
+                <a:latin typeface="Fira Sans"/>
+              </a:rPr>
+              <a:t>▸ </a:t>
+            </a:r>
+            <a:r>
+              <a:rPr sz="1800" b="1">
+                <a:solidFill>
+                  <a:srgbClr val="1D3557"/>
+                </a:solidFill>
+                <a:latin typeface="Fira Sans"/>
+              </a:rPr>
+              <a:t>El mismo diseño relacional de la Casen, el Censo o la ENUSC.</a:t>
             </a:r>
           </a:p>
         </p:txBody>
@@ -4853,14 +5057,14 @@
                 </a:solidFill>
                 <a:latin typeface="Fira Sans"/>
               </a:rPr>
-              <a:t>El DataFrame: la estructura central de Pandas</a:t>
+              <a:t>Una encuesta, varias tablas</a:t>
             </a:r>
           </a:p>
         </p:txBody>
       </p:sp>
       <p:pic>
         <p:nvPicPr>
-          <p:cNvPr id="4" name="Picture 3" descr="13_dataframe.png"/>
+          <p:cNvPr id="4" name="Picture 3" descr="05_diagrama_tablas.png"/>
           <p:cNvPicPr>
             <a:picLocks noChangeAspect="1"/>
           </p:cNvPicPr>
@@ -4874,8 +5078,8 @@
         </p:blipFill>
         <p:spPr>
           <a:xfrm>
-            <a:off x="1417319" y="1143000"/>
-            <a:ext cx="6309360" cy="2553789"/>
+            <a:off x="1553651" y="1143000"/>
+            <a:ext cx="6036697" cy="3154680"/>
           </a:xfrm>
           <a:prstGeom prst="rect">
             <a:avLst/>
@@ -4911,7 +5115,7 @@
                 </a:solidFill>
                 <a:latin typeface="Fira Sans"/>
               </a:rPr>
-              <a:t>Una tabla con filas indexadas y columnas con nombre y tipo. Los códigos (comuna, propósito) se traducen con las tablas de parámetros, uniéndolas con merge.</a:t>
+              <a:t>Los códigos no significan nada sin sus tablas de parámetros: unirlas es parte del análisis.</a:t>
             </a:r>
           </a:p>
         </p:txBody>
@@ -4949,7 +5153,7 @@
             <a:avLst/>
           </a:prstGeom>
           <a:solidFill>
-            <a:srgbClr val="FAFBFC"/>
+            <a:srgbClr val="1D3557"/>
           </a:solidFill>
           <a:ln>
             <a:noFill/>
@@ -4986,8 +5190,8 @@
         </p:nvSpPr>
         <p:spPr>
           <a:xfrm>
-            <a:off x="402336" y="301752"/>
-            <a:ext cx="8348472" cy="795528"/>
+            <a:off x="603504" y="1847088"/>
+            <a:ext cx="7946136" cy="1399032"/>
           </a:xfrm>
           <a:prstGeom prst="rect">
             <a:avLst/>
@@ -5001,71 +5205,24 @@
           <a:lstStyle/>
           <a:p>
             <a:r>
-              <a:rPr sz="2800" b="1">
-                <a:solidFill>
-                  <a:srgbClr val="0F0F0F"/>
-                </a:solidFill>
-                <a:latin typeface="Fira Sans"/>
-              </a:rPr>
-              <a:t>Las variantes del merge: qué filas se conservan</a:t>
-            </a:r>
-          </a:p>
-        </p:txBody>
-      </p:sp>
-      <p:pic>
-        <p:nvPicPr>
-          <p:cNvPr id="4" name="Picture 3" descr="07_diagrama_merge.png"/>
-          <p:cNvPicPr>
-            <a:picLocks noChangeAspect="1"/>
-          </p:cNvPicPr>
-          <p:nvPr/>
-        </p:nvPicPr>
-        <p:blipFill>
-          <a:blip r:embed="rId2"/>
-          <a:stretch>
-            <a:fillRect/>
-          </a:stretch>
-        </p:blipFill>
-        <p:spPr>
-          <a:xfrm>
-            <a:off x="1417319" y="1143000"/>
-            <a:ext cx="6309360" cy="2397276"/>
-          </a:xfrm>
-          <a:prstGeom prst="rect">
-            <a:avLst/>
-          </a:prstGeom>
-        </p:spPr>
-      </p:pic>
-      <p:sp>
-        <p:nvSpPr>
-          <p:cNvPr id="5" name="TextBox 4"/>
-          <p:cNvSpPr txBox="1"/>
-          <p:nvPr/>
-        </p:nvSpPr>
-        <p:spPr>
-          <a:xfrm>
-            <a:off x="704088" y="4434840"/>
-            <a:ext cx="7744968" cy="457200"/>
-          </a:xfrm>
-          <a:prstGeom prst="rect">
-            <a:avLst/>
-          </a:prstGeom>
-          <a:noFill/>
-        </p:spPr>
-        <p:txBody>
-          <a:bodyPr wrap="square">
-            <a:spAutoFit/>
-          </a:bodyPr>
-          <a:lstStyle/>
-          <a:p>
-            <a:r>
-              <a:rPr sz="1300" b="0">
-                <a:solidFill>
-                  <a:srgbClr val="333333"/>
-                </a:solidFill>
-                <a:latin typeface="Fira Sans"/>
-              </a:rPr>
-              <a:t>El valor por defecto es inner: descarta sin aviso las filas sin pareja.</a:t>
+              <a:rPr sz="3400" b="1">
+                <a:solidFill>
+                  <a:srgbClr val="FFFFFF"/>
+                </a:solidFill>
+                <a:latin typeface="Fira Sans"/>
+              </a:rPr>
+              <a:t>Repaso de Pandas</a:t>
+            </a:r>
+          </a:p>
+          <a:p>
+            <a:r>
+              <a:rPr sz="1800" b="0">
+                <a:solidFill>
+                  <a:srgbClr val="E0A437"/>
+                </a:solidFill>
+                <a:latin typeface="Fira Sans"/>
+              </a:rPr>
+              <a:t>Dos casos concretos con la EOD</a:t>
             </a:r>
           </a:p>
         </p:txBody>
@@ -5161,21 +5318,112 @@
                 </a:solidFill>
                 <a:latin typeface="Fira Sans"/>
               </a:rPr>
-              <a:t>El efecto del parámetro how sobre la población analizada</a:t>
-            </a:r>
-          </a:p>
-        </p:txBody>
-      </p:sp>
-      <p:sp>
-        <p:nvSpPr>
-          <p:cNvPr id="4" name="TextBox 3"/>
+              <a:t>Abrir el dataset</a:t>
+            </a:r>
+          </a:p>
+        </p:txBody>
+      </p:sp>
+      <p:sp>
+        <p:nvSpPr>
+          <p:cNvPr id="4" name="Rectangle 3"/>
+          <p:cNvSpPr/>
+          <p:nvPr/>
+        </p:nvSpPr>
+        <p:spPr>
+          <a:xfrm>
+            <a:off x="704088" y="1280160"/>
+            <a:ext cx="7744968" cy="2377440"/>
+          </a:xfrm>
+          <a:prstGeom prst="rect">
+            <a:avLst/>
+          </a:prstGeom>
+          <a:solidFill>
+            <a:srgbClr val="F0F2F5"/>
+          </a:solidFill>
+          <a:ln>
+            <a:solidFill>
+              <a:srgbClr val="D8DDE3"/>
+            </a:solidFill>
+          </a:ln>
+          <a:effectLst/>
+        </p:spPr>
+        <p:style>
+          <a:lnRef idx="1">
+            <a:schemeClr val="accent1"/>
+          </a:lnRef>
+          <a:fillRef idx="3">
+            <a:schemeClr val="accent1"/>
+          </a:fillRef>
+          <a:effectRef idx="2">
+            <a:schemeClr val="accent1"/>
+          </a:effectRef>
+          <a:fontRef idx="minor">
+            <a:schemeClr val="lt1"/>
+          </a:fontRef>
+        </p:style>
+        <p:txBody>
+          <a:bodyPr rtlCol="0" anchor="ctr" wrap="square" lIns="228600" tIns="137160"/>
+          <a:lstStyle/>
+          <a:p>
+            <a:pPr/>
+            <a:r>
+              <a:rPr sz="1500" b="0">
+                <a:solidFill>
+                  <a:srgbClr val="1D3557"/>
+                </a:solidFill>
+                <a:latin typeface="Menlo"/>
+              </a:rPr>
+              <a:t>import pandas as pd</a:t>
+            </a:r>
+          </a:p>
+          <a:p>
+            <a:pPr/>
+            <a:r>
+              <a:rPr sz="1500" b="0">
+                <a:solidFill>
+                  <a:srgbClr val="1D3557"/>
+                </a:solidFill>
+                <a:latin typeface="Menlo"/>
+              </a:rPr>
+              <a:t/>
+            </a:r>
+          </a:p>
+          <a:p>
+            <a:pPr/>
+            <a:r>
+              <a:rPr sz="1500" b="0">
+                <a:solidFill>
+                  <a:srgbClr val="1D3557"/>
+                </a:solidFill>
+                <a:latin typeface="Menlo"/>
+              </a:rPr>
+              <a:t>viajes = pd.read_csv('datos/eod_stgo/viajes.csv',</a:t>
+            </a:r>
+          </a:p>
+          <a:p>
+            <a:pPr/>
+            <a:r>
+              <a:rPr sz="1500" b="0">
+                <a:solidFill>
+                  <a:srgbClr val="1D3557"/>
+                </a:solidFill>
+                <a:latin typeface="Menlo"/>
+              </a:rPr>
+              <a:t>                     sep=';', decimal=',')</a:t>
+            </a:r>
+          </a:p>
+        </p:txBody>
+      </p:sp>
+      <p:sp>
+        <p:nvSpPr>
+          <p:cNvPr id="5" name="TextBox 4"/>
           <p:cNvSpPr txBox="1"/>
           <p:nvPr/>
         </p:nvSpPr>
         <p:spPr>
           <a:xfrm>
-            <a:off x="704088" y="1353312"/>
-            <a:ext cx="7744968" cy="3300984"/>
+            <a:off x="704088" y="3886200"/>
+            <a:ext cx="7744968" cy="1097280"/>
           </a:xfrm>
           <a:prstGeom prst="rect">
             <a:avLst/>
@@ -5197,7 +5445,7 @@
               </a:spcAft>
             </a:pPr>
             <a:r>
-              <a:rPr sz="1800" b="1">
+              <a:rPr sz="1600" b="1">
                 <a:solidFill>
                   <a:srgbClr val="E0A437"/>
                 </a:solidFill>
@@ -5206,125 +5454,13 @@
               <a:t>▸ </a:t>
             </a:r>
             <a:r>
-              <a:rPr sz="1800" b="0">
+              <a:rPr sz="1600" b="0">
                 <a:solidFill>
                   <a:srgbClr val="000000"/>
                 </a:solidFill>
                 <a:latin typeface="Fira Sans"/>
               </a:rPr>
-              <a:t>Personas con viajes, merge inner: 113.591 filas (una por viaje).</a:t>
-            </a:r>
-          </a:p>
-          <a:p>
-            <a:pPr>
-              <a:lnSpc>
-                <a:spcPct val="112000"/>
-              </a:lnSpc>
-              <a:spcAft>
-                <a:spcPts val="900"/>
-              </a:spcAft>
-            </a:pPr>
-            <a:r>
-              <a:rPr sz="1800" b="1">
-                <a:solidFill>
-                  <a:srgbClr val="E0A437"/>
-                </a:solidFill>
-                <a:latin typeface="Fira Sans"/>
-              </a:rPr>
-              <a:t>▸ </a:t>
-            </a:r>
-            <a:r>
-              <a:rPr sz="1800" b="0">
-                <a:solidFill>
-                  <a:srgbClr val="000000"/>
-                </a:solidFill>
-                <a:latin typeface="Fira Sans"/>
-              </a:rPr>
-              <a:t>El mismo merge en left: 127.379 filas.</a:t>
-            </a:r>
-          </a:p>
-          <a:p>
-            <a:pPr>
-              <a:lnSpc>
-                <a:spcPct val="112000"/>
-              </a:lnSpc>
-              <a:spcAft>
-                <a:spcPts val="500"/>
-              </a:spcAft>
-            </a:pPr>
-            <a:r>
-              <a:rPr sz="1400" b="0">
-                <a:solidFill>
-                  <a:srgbClr val="333333"/>
-                </a:solidFill>
-                <a:latin typeface="Fira Sans"/>
-              </a:rPr>
-              <a:t>     ◦  </a:t>
-            </a:r>
-            <a:r>
-              <a:rPr sz="1400" b="0">
-                <a:solidFill>
-                  <a:srgbClr val="333333"/>
-                </a:solidFill>
-                <a:latin typeface="Fira Sans"/>
-              </a:rPr>
-              <a:t>La diferencia son 13.788 personas que no viajaron ese día.</a:t>
-            </a:r>
-          </a:p>
-          <a:p>
-            <a:pPr>
-              <a:lnSpc>
-                <a:spcPct val="112000"/>
-              </a:lnSpc>
-              <a:spcAft>
-                <a:spcPts val="500"/>
-              </a:spcAft>
-            </a:pPr>
-            <a:r>
-              <a:rPr sz="1400" b="0">
-                <a:solidFill>
-                  <a:srgbClr val="333333"/>
-                </a:solidFill>
-                <a:latin typeface="Fira Sans"/>
-              </a:rPr>
-              <a:t>     ◦  </a:t>
-            </a:r>
-            <a:r>
-              <a:rPr sz="1400" b="0">
-                <a:solidFill>
-                  <a:srgbClr val="333333"/>
-                </a:solidFill>
-                <a:latin typeface="Fira Sans"/>
-              </a:rPr>
-              <a:t>Con inner desaparecen; con left quedan, con NaN en el viaje.</a:t>
-            </a:r>
-          </a:p>
-          <a:p>
-            <a:pPr>
-              <a:lnSpc>
-                <a:spcPct val="112000"/>
-              </a:lnSpc>
-              <a:spcAft>
-                <a:spcPts val="900"/>
-              </a:spcAft>
-            </a:pPr>
-            <a:r>
-              <a:rPr sz="1800" b="1">
-                <a:solidFill>
-                  <a:srgbClr val="E0A437"/>
-                </a:solidFill>
-                <a:latin typeface="Fira Sans"/>
-              </a:rPr>
-              <a:t>▸ </a:t>
-            </a:r>
-            <a:r>
-              <a:rPr sz="1800" b="1">
-                <a:solidFill>
-                  <a:srgbClr val="1D3557"/>
-                </a:solidFill>
-                <a:latin typeface="Fira Sans"/>
-              </a:rPr>
-              <a:t>Un promedio calculado sobre el resultado del inner excluye a quienes no viajaron.</a:t>
+              <a:t>Todo el código de la clase está en el notebook 02_pandas_eda.ipynb del repositorio.</a:t>
             </a:r>
           </a:p>
         </p:txBody>
@@ -5677,7 +5813,7 @@
             <a:avLst/>
           </a:prstGeom>
           <a:solidFill>
-            <a:srgbClr val="1D3557"/>
+            <a:srgbClr val="FAFBFC"/>
           </a:solidFill>
           <a:ln>
             <a:noFill/>
@@ -5714,8 +5850,8 @@
         </p:nvSpPr>
         <p:spPr>
           <a:xfrm>
-            <a:off x="603504" y="1847088"/>
-            <a:ext cx="7946136" cy="1399032"/>
+            <a:off x="402336" y="301752"/>
+            <a:ext cx="8348472" cy="795528"/>
           </a:xfrm>
           <a:prstGeom prst="rect">
             <a:avLst/>
@@ -5729,24 +5865,71 @@
           <a:lstStyle/>
           <a:p>
             <a:r>
-              <a:rPr sz="3400" b="1">
-                <a:solidFill>
-                  <a:srgbClr val="FFFFFF"/>
-                </a:solidFill>
-                <a:latin typeface="Fira Sans"/>
-              </a:rPr>
-              <a:t>Exploración de la EOD</a:t>
-            </a:r>
-          </a:p>
-          <a:p>
-            <a:r>
-              <a:rPr sz="1800" b="0">
-                <a:solidFill>
-                  <a:srgbClr val="E0A437"/>
-                </a:solidFill>
-                <a:latin typeface="Fira Sans"/>
-              </a:rPr>
-              <a:t>Estadística descriptiva sobre datos reales</a:t>
+              <a:rPr sz="2800" b="1">
+                <a:solidFill>
+                  <a:srgbClr val="0F0F0F"/>
+                </a:solidFill>
+                <a:latin typeface="Fira Sans"/>
+              </a:rPr>
+              <a:t>El DataFrame: la estructura central de Pandas</a:t>
+            </a:r>
+          </a:p>
+        </p:txBody>
+      </p:sp>
+      <p:pic>
+        <p:nvPicPr>
+          <p:cNvPr id="4" name="Picture 3" descr="13_dataframe.png"/>
+          <p:cNvPicPr>
+            <a:picLocks noChangeAspect="1"/>
+          </p:cNvPicPr>
+          <p:nvPr/>
+        </p:nvPicPr>
+        <p:blipFill>
+          <a:blip r:embed="rId2"/>
+          <a:stretch>
+            <a:fillRect/>
+          </a:stretch>
+        </p:blipFill>
+        <p:spPr>
+          <a:xfrm>
+            <a:off x="1417319" y="1143000"/>
+            <a:ext cx="6309360" cy="2553789"/>
+          </a:xfrm>
+          <a:prstGeom prst="rect">
+            <a:avLst/>
+          </a:prstGeom>
+        </p:spPr>
+      </p:pic>
+      <p:sp>
+        <p:nvSpPr>
+          <p:cNvPr id="5" name="TextBox 4"/>
+          <p:cNvSpPr txBox="1"/>
+          <p:nvPr/>
+        </p:nvSpPr>
+        <p:spPr>
+          <a:xfrm>
+            <a:off x="704088" y="4434840"/>
+            <a:ext cx="7744968" cy="457200"/>
+          </a:xfrm>
+          <a:prstGeom prst="rect">
+            <a:avLst/>
+          </a:prstGeom>
+          <a:noFill/>
+        </p:spPr>
+        <p:txBody>
+          <a:bodyPr wrap="square">
+            <a:spAutoFit/>
+          </a:bodyPr>
+          <a:lstStyle/>
+          <a:p>
+            <a:r>
+              <a:rPr sz="1300" b="0">
+                <a:solidFill>
+                  <a:srgbClr val="333333"/>
+                </a:solidFill>
+                <a:latin typeface="Fira Sans"/>
+              </a:rPr>
+              <a:t>Una tabla con filas indexadas y columnas con nombre y tipo. Los códigos (comuna, propósito) se traducen con las tablas de parámetros, uniéndolas con merge.</a:t>
             </a:r>
           </a:p>
         </p:txBody>
@@ -5842,149 +6025,14 @@
                 </a:solidFill>
                 <a:latin typeface="Fira Sans"/>
               </a:rPr>
-              <a:t>Viajes por persona: los ausentes también cuentan</a:t>
-            </a:r>
-          </a:p>
-        </p:txBody>
-      </p:sp>
-      <p:sp>
-        <p:nvSpPr>
-          <p:cNvPr id="4" name="TextBox 3"/>
-          <p:cNvSpPr txBox="1"/>
-          <p:nvPr/>
-        </p:nvSpPr>
-        <p:spPr>
-          <a:xfrm>
-            <a:off x="502920" y="1252728"/>
-            <a:ext cx="4023360" cy="3200400"/>
-          </a:xfrm>
-          <a:prstGeom prst="rect">
-            <a:avLst/>
-          </a:prstGeom>
-          <a:noFill/>
-        </p:spPr>
-        <p:txBody>
-          <a:bodyPr wrap="square">
-            <a:spAutoFit/>
-          </a:bodyPr>
-          <a:lstStyle/>
-          <a:p>
-            <a:pPr>
-              <a:lnSpc>
-                <a:spcPct val="112000"/>
-              </a:lnSpc>
-              <a:spcAft>
-                <a:spcPts val="900"/>
-              </a:spcAft>
-            </a:pPr>
-            <a:r>
-              <a:rPr sz="1500" b="1">
-                <a:solidFill>
-                  <a:srgbClr val="E0A437"/>
-                </a:solidFill>
-                <a:latin typeface="Fira Sans"/>
-              </a:rPr>
-              <a:t>▸ </a:t>
-            </a:r>
-            <a:r>
-              <a:rPr sz="1500" b="0">
-                <a:solidFill>
-                  <a:srgbClr val="000000"/>
-                </a:solidFill>
-                <a:latin typeface="Fira Sans"/>
-              </a:rPr>
-              <a:t>El 23% de las personas no viajó ese día.</a:t>
-            </a:r>
-          </a:p>
-          <a:p>
-            <a:pPr>
-              <a:lnSpc>
-                <a:spcPct val="112000"/>
-              </a:lnSpc>
-              <a:spcAft>
-                <a:spcPts val="900"/>
-              </a:spcAft>
-            </a:pPr>
-            <a:r>
-              <a:rPr sz="1500" b="1">
-                <a:solidFill>
-                  <a:srgbClr val="E0A437"/>
-                </a:solidFill>
-                <a:latin typeface="Fira Sans"/>
-              </a:rPr>
-              <a:t>▸ </a:t>
-            </a:r>
-            <a:r>
-              <a:rPr sz="1500" b="0">
-                <a:solidFill>
-                  <a:srgbClr val="000000"/>
-                </a:solidFill>
-                <a:latin typeface="Fira Sans"/>
-              </a:rPr>
-              <a:t>Media: 1,9 viajes. Mediana: 2 viajes.</a:t>
-            </a:r>
-          </a:p>
-          <a:p>
-            <a:pPr>
-              <a:lnSpc>
-                <a:spcPct val="112000"/>
-              </a:lnSpc>
-              <a:spcAft>
-                <a:spcPts val="900"/>
-              </a:spcAft>
-            </a:pPr>
-            <a:r>
-              <a:rPr sz="1500" b="1">
-                <a:solidFill>
-                  <a:srgbClr val="E0A437"/>
-                </a:solidFill>
-                <a:latin typeface="Fira Sans"/>
-              </a:rPr>
-              <a:t>▸ </a:t>
-            </a:r>
-            <a:r>
-              <a:rPr sz="1500" b="0">
-                <a:solidFill>
-                  <a:srgbClr val="000000"/>
-                </a:solidFill>
-                <a:latin typeface="Fira Sans"/>
-              </a:rPr>
-              <a:t>La media quedó bajo la mediana: la masa de ceros la desplaza.</a:t>
-            </a:r>
-          </a:p>
-          <a:p>
-            <a:pPr>
-              <a:lnSpc>
-                <a:spcPct val="112000"/>
-              </a:lnSpc>
-              <a:spcAft>
-                <a:spcPts val="900"/>
-              </a:spcAft>
-            </a:pPr>
-            <a:r>
-              <a:rPr sz="1500" b="1">
-                <a:solidFill>
-                  <a:srgbClr val="E0A437"/>
-                </a:solidFill>
-                <a:latin typeface="Fira Sans"/>
-              </a:rPr>
-              <a:t>▸ </a:t>
-            </a:r>
-            <a:r>
-              <a:rPr sz="1500" b="1">
-                <a:solidFill>
-                  <a:srgbClr val="1D3557"/>
-                </a:solidFill>
-                <a:latin typeface="Fira Sans"/>
-              </a:rPr>
-              <a:t>La dirección del sesgo depende de la forma de la distribución.</a:t>
+              <a:t>Las variantes del merge: qué filas se conservan</a:t>
             </a:r>
           </a:p>
         </p:txBody>
       </p:sp>
       <p:pic>
         <p:nvPicPr>
-          <p:cNvPr id="5" name="Picture 4" descr="02_viajes_por_persona.png"/>
+          <p:cNvPr id="4" name="Picture 3" descr="07_diagrama_merge.png"/>
           <p:cNvPicPr>
             <a:picLocks noChangeAspect="1"/>
           </p:cNvPicPr>
@@ -5998,14 +6046,48 @@
         </p:blipFill>
         <p:spPr>
           <a:xfrm>
-            <a:off x="4892040" y="1371600"/>
-            <a:ext cx="3840480" cy="2191739"/>
+            <a:off x="1417319" y="1143000"/>
+            <a:ext cx="6309360" cy="2397276"/>
           </a:xfrm>
           <a:prstGeom prst="rect">
             <a:avLst/>
           </a:prstGeom>
         </p:spPr>
       </p:pic>
+      <p:sp>
+        <p:nvSpPr>
+          <p:cNvPr id="5" name="TextBox 4"/>
+          <p:cNvSpPr txBox="1"/>
+          <p:nvPr/>
+        </p:nvSpPr>
+        <p:spPr>
+          <a:xfrm>
+            <a:off x="704088" y="4434840"/>
+            <a:ext cx="7744968" cy="457200"/>
+          </a:xfrm>
+          <a:prstGeom prst="rect">
+            <a:avLst/>
+          </a:prstGeom>
+          <a:noFill/>
+        </p:spPr>
+        <p:txBody>
+          <a:bodyPr wrap="square">
+            <a:spAutoFit/>
+          </a:bodyPr>
+          <a:lstStyle/>
+          <a:p>
+            <a:r>
+              <a:rPr sz="1300" b="0">
+                <a:solidFill>
+                  <a:srgbClr val="333333"/>
+                </a:solidFill>
+                <a:latin typeface="Fira Sans"/>
+              </a:rPr>
+              <a:t>El valor por defecto es inner: descarta sin aviso las filas sin pareja.</a:t>
+            </a:r>
+          </a:p>
+        </p:txBody>
+      </p:sp>
     </p:spTree>
   </p:cSld>
   <p:clrMapOvr>
@@ -6097,45 +6179,21 @@
                 </a:solidFill>
                 <a:latin typeface="Fira Sans"/>
               </a:rPr>
-              <a:t>Los factores de expansión: de la muestra a la ciudad</a:t>
-            </a:r>
-          </a:p>
-        </p:txBody>
-      </p:sp>
-      <p:pic>
-        <p:nvPicPr>
-          <p:cNvPr id="4" name="Picture 3" descr="06_diagrama_factores.png"/>
-          <p:cNvPicPr>
-            <a:picLocks noChangeAspect="1"/>
-          </p:cNvPicPr>
-          <p:nvPr/>
-        </p:nvPicPr>
-        <p:blipFill>
-          <a:blip r:embed="rId2"/>
-          <a:stretch>
-            <a:fillRect/>
-          </a:stretch>
-        </p:blipFill>
-        <p:spPr>
-          <a:xfrm>
-            <a:off x="1417319" y="1143000"/>
-            <a:ext cx="6309360" cy="2871234"/>
-          </a:xfrm>
-          <a:prstGeom prst="rect">
-            <a:avLst/>
-          </a:prstGeom>
-        </p:spPr>
-      </p:pic>
-      <p:sp>
-        <p:nvSpPr>
-          <p:cNvPr id="5" name="TextBox 4"/>
+              <a:t>El efecto del parámetro how sobre la población analizada</a:t>
+            </a:r>
+          </a:p>
+        </p:txBody>
+      </p:sp>
+      <p:sp>
+        <p:nvSpPr>
+          <p:cNvPr id="4" name="TextBox 3"/>
           <p:cNvSpPr txBox="1"/>
           <p:nvPr/>
         </p:nvSpPr>
         <p:spPr>
           <a:xfrm>
-            <a:off x="704088" y="4434840"/>
-            <a:ext cx="7744968" cy="457200"/>
+            <a:off x="704088" y="1353312"/>
+            <a:ext cx="7744968" cy="3300984"/>
           </a:xfrm>
           <a:prstGeom prst="rect">
             <a:avLst/>
@@ -6148,14 +6206,143 @@
           </a:bodyPr>
           <a:lstStyle/>
           <a:p>
-            <a:r>
-              <a:rPr sz="1300" b="0">
+            <a:pPr>
+              <a:lnSpc>
+                <a:spcPct val="112000"/>
+              </a:lnSpc>
+              <a:spcAft>
+                <a:spcPts val="900"/>
+              </a:spcAft>
+            </a:pPr>
+            <a:r>
+              <a:rPr sz="1800" b="1">
+                <a:solidFill>
+                  <a:srgbClr val="E0A437"/>
+                </a:solidFill>
+                <a:latin typeface="Fira Sans"/>
+              </a:rPr>
+              <a:t>▸ </a:t>
+            </a:r>
+            <a:r>
+              <a:rPr sz="1800" b="0">
+                <a:solidFill>
+                  <a:srgbClr val="000000"/>
+                </a:solidFill>
+                <a:latin typeface="Fira Sans"/>
+              </a:rPr>
+              <a:t>Personas con viajes, merge inner: 113.591 filas (una por viaje).</a:t>
+            </a:r>
+          </a:p>
+          <a:p>
+            <a:pPr>
+              <a:lnSpc>
+                <a:spcPct val="112000"/>
+              </a:lnSpc>
+              <a:spcAft>
+                <a:spcPts val="900"/>
+              </a:spcAft>
+            </a:pPr>
+            <a:r>
+              <a:rPr sz="1800" b="1">
+                <a:solidFill>
+                  <a:srgbClr val="E0A437"/>
+                </a:solidFill>
+                <a:latin typeface="Fira Sans"/>
+              </a:rPr>
+              <a:t>▸ </a:t>
+            </a:r>
+            <a:r>
+              <a:rPr sz="1800" b="0">
+                <a:solidFill>
+                  <a:srgbClr val="000000"/>
+                </a:solidFill>
+                <a:latin typeface="Fira Sans"/>
+              </a:rPr>
+              <a:t>El mismo merge en left: 127.379 filas.</a:t>
+            </a:r>
+          </a:p>
+          <a:p>
+            <a:pPr>
+              <a:lnSpc>
+                <a:spcPct val="112000"/>
+              </a:lnSpc>
+              <a:spcAft>
+                <a:spcPts val="500"/>
+              </a:spcAft>
+            </a:pPr>
+            <a:r>
+              <a:rPr sz="1400" b="0">
                 <a:solidFill>
                   <a:srgbClr val="333333"/>
                 </a:solidFill>
                 <a:latin typeface="Fira Sans"/>
               </a:rPr>
-              <a:t>Contar filas responde por la muestra; sumar factores responde por la ciudad.</a:t>
+              <a:t>     ◦  </a:t>
+            </a:r>
+            <a:r>
+              <a:rPr sz="1400" b="0">
+                <a:solidFill>
+                  <a:srgbClr val="333333"/>
+                </a:solidFill>
+                <a:latin typeface="Fira Sans"/>
+              </a:rPr>
+              <a:t>La diferencia son 13.788 personas que no viajaron ese día.</a:t>
+            </a:r>
+          </a:p>
+          <a:p>
+            <a:pPr>
+              <a:lnSpc>
+                <a:spcPct val="112000"/>
+              </a:lnSpc>
+              <a:spcAft>
+                <a:spcPts val="500"/>
+              </a:spcAft>
+            </a:pPr>
+            <a:r>
+              <a:rPr sz="1400" b="0">
+                <a:solidFill>
+                  <a:srgbClr val="333333"/>
+                </a:solidFill>
+                <a:latin typeface="Fira Sans"/>
+              </a:rPr>
+              <a:t>     ◦  </a:t>
+            </a:r>
+            <a:r>
+              <a:rPr sz="1400" b="0">
+                <a:solidFill>
+                  <a:srgbClr val="333333"/>
+                </a:solidFill>
+                <a:latin typeface="Fira Sans"/>
+              </a:rPr>
+              <a:t>Con inner desaparecen; con left quedan, con NaN en el viaje.</a:t>
+            </a:r>
+          </a:p>
+          <a:p>
+            <a:pPr>
+              <a:lnSpc>
+                <a:spcPct val="112000"/>
+              </a:lnSpc>
+              <a:spcAft>
+                <a:spcPts val="900"/>
+              </a:spcAft>
+            </a:pPr>
+            <a:r>
+              <a:rPr sz="1800" b="1">
+                <a:solidFill>
+                  <a:srgbClr val="E0A437"/>
+                </a:solidFill>
+                <a:latin typeface="Fira Sans"/>
+              </a:rPr>
+              <a:t>▸ </a:t>
+            </a:r>
+            <a:r>
+              <a:rPr sz="1800" b="1">
+                <a:solidFill>
+                  <a:srgbClr val="1D3557"/>
+                </a:solidFill>
+                <a:latin typeface="Fira Sans"/>
+              </a:rPr>
+              <a:t>Un promedio calculado sobre el resultado del inner excluye a quienes no viajaron.</a:t>
             </a:r>
           </a:p>
         </p:txBody>
@@ -6193,7 +6380,7 @@
             <a:avLst/>
           </a:prstGeom>
           <a:solidFill>
-            <a:srgbClr val="FAFBFC"/>
+            <a:srgbClr val="1D3557"/>
           </a:solidFill>
           <a:ln>
             <a:noFill/>
@@ -6230,8 +6417,8 @@
         </p:nvSpPr>
         <p:spPr>
           <a:xfrm>
-            <a:off x="402336" y="301752"/>
-            <a:ext cx="8348472" cy="795528"/>
+            <a:off x="603504" y="1847088"/>
+            <a:ext cx="7946136" cy="1399032"/>
           </a:xfrm>
           <a:prstGeom prst="rect">
             <a:avLst/>
@@ -6245,176 +6432,28 @@
           <a:lstStyle/>
           <a:p>
             <a:r>
-              <a:rPr sz="2800" b="1">
-                <a:solidFill>
-                  <a:srgbClr val="0F0F0F"/>
-                </a:solidFill>
-                <a:latin typeface="Fira Sans"/>
-              </a:rPr>
-              <a:t>El ingreso de los hogares: media y mediana</a:t>
-            </a:r>
-          </a:p>
-        </p:txBody>
-      </p:sp>
-      <p:sp>
-        <p:nvSpPr>
-          <p:cNvPr id="4" name="TextBox 3"/>
-          <p:cNvSpPr txBox="1"/>
-          <p:nvPr/>
-        </p:nvSpPr>
-        <p:spPr>
-          <a:xfrm>
-            <a:off x="502920" y="1252728"/>
-            <a:ext cx="4023360" cy="3200400"/>
-          </a:xfrm>
-          <a:prstGeom prst="rect">
-            <a:avLst/>
-          </a:prstGeom>
-          <a:noFill/>
-        </p:spPr>
-        <p:txBody>
-          <a:bodyPr wrap="square">
-            <a:spAutoFit/>
-          </a:bodyPr>
-          <a:lstStyle/>
-          <a:p>
-            <a:pPr>
-              <a:lnSpc>
-                <a:spcPct val="112000"/>
-              </a:lnSpc>
-              <a:spcAft>
-                <a:spcPts val="900"/>
-              </a:spcAft>
-            </a:pPr>
-            <a:r>
-              <a:rPr sz="1500" b="1">
+              <a:rPr sz="3400" b="1">
+                <a:solidFill>
+                  <a:srgbClr val="FFFFFF"/>
+                </a:solidFill>
+                <a:latin typeface="Fira Sans"/>
+              </a:rPr>
+              <a:t>Exploración de la EOD</a:t>
+            </a:r>
+          </a:p>
+          <a:p>
+            <a:r>
+              <a:rPr sz="1800" b="0">
                 <a:solidFill>
                   <a:srgbClr val="E0A437"/>
                 </a:solidFill>
                 <a:latin typeface="Fira Sans"/>
               </a:rPr>
-              <a:t>▸ </a:t>
-            </a:r>
-            <a:r>
-              <a:rPr sz="1500" b="0">
-                <a:solidFill>
-                  <a:srgbClr val="000000"/>
-                </a:solidFill>
-                <a:latin typeface="Fira Sans"/>
-              </a:rPr>
-              <a:t>Media: $688.274. Mediana: $507.826.</a:t>
-            </a:r>
-          </a:p>
-          <a:p>
-            <a:pPr>
-              <a:lnSpc>
-                <a:spcPct val="112000"/>
-              </a:lnSpc>
-              <a:spcAft>
-                <a:spcPts val="900"/>
-              </a:spcAft>
-            </a:pPr>
-            <a:r>
-              <a:rPr sz="1500" b="1">
-                <a:solidFill>
-                  <a:srgbClr val="E0A437"/>
-                </a:solidFill>
-                <a:latin typeface="Fira Sans"/>
-              </a:rPr>
-              <a:t>▸ </a:t>
-            </a:r>
-            <a:r>
-              <a:rPr sz="1500" b="0">
-                <a:solidFill>
-                  <a:srgbClr val="000000"/>
-                </a:solidFill>
-                <a:latin typeface="Fira Sans"/>
-              </a:rPr>
-              <a:t>La media es un 36% más alta que la mediana.</a:t>
-            </a:r>
-          </a:p>
-          <a:p>
-            <a:pPr>
-              <a:lnSpc>
-                <a:spcPct val="112000"/>
-              </a:lnSpc>
-              <a:spcAft>
-                <a:spcPts val="900"/>
-              </a:spcAft>
-            </a:pPr>
-            <a:r>
-              <a:rPr sz="1500" b="1">
-                <a:solidFill>
-                  <a:srgbClr val="E0A437"/>
-                </a:solidFill>
-                <a:latin typeface="Fira Sans"/>
-              </a:rPr>
-              <a:t>▸ </a:t>
-            </a:r>
-            <a:r>
-              <a:rPr sz="1500" b="0">
-                <a:solidFill>
-                  <a:srgbClr val="000000"/>
-                </a:solidFill>
-                <a:latin typeface="Fira Sans"/>
-              </a:rPr>
-              <a:t>Los ingresos altos desplazan el promedio; la mayoría gana menos.</a:t>
-            </a:r>
-          </a:p>
-          <a:p>
-            <a:pPr>
-              <a:lnSpc>
-                <a:spcPct val="112000"/>
-              </a:lnSpc>
-              <a:spcAft>
-                <a:spcPts val="900"/>
-              </a:spcAft>
-            </a:pPr>
-            <a:r>
-              <a:rPr sz="1500" b="1">
-                <a:solidFill>
-                  <a:srgbClr val="E0A437"/>
-                </a:solidFill>
-                <a:latin typeface="Fira Sans"/>
-              </a:rPr>
-              <a:t>▸ </a:t>
-            </a:r>
-            <a:r>
-              <a:rPr sz="1500" b="1">
-                <a:solidFill>
-                  <a:srgbClr val="1D3557"/>
-                </a:solidFill>
-                <a:latin typeface="Fira Sans"/>
-              </a:rPr>
-              <a:t>El promedio describe una situación en la que la mayoría no está.</a:t>
-            </a:r>
-          </a:p>
-        </p:txBody>
-      </p:sp>
-      <p:pic>
-        <p:nvPicPr>
-          <p:cNvPr id="5" name="Picture 4" descr="01_ingreso_media_mediana.png"/>
-          <p:cNvPicPr>
-            <a:picLocks noChangeAspect="1"/>
-          </p:cNvPicPr>
-          <p:nvPr/>
-        </p:nvPicPr>
-        <p:blipFill>
-          <a:blip r:embed="rId2"/>
-          <a:stretch>
-            <a:fillRect/>
-          </a:stretch>
-        </p:blipFill>
-        <p:spPr>
-          <a:xfrm>
-            <a:off x="4892040" y="1371600"/>
-            <a:ext cx="3840480" cy="2182719"/>
-          </a:xfrm>
-          <a:prstGeom prst="rect">
-            <a:avLst/>
-          </a:prstGeom>
-        </p:spPr>
-      </p:pic>
+              <a:t>Estadística descriptiva sobre datos reales</a:t>
+            </a:r>
+          </a:p>
+        </p:txBody>
+      </p:sp>
     </p:spTree>
   </p:cSld>
   <p:clrMapOvr>
@@ -6506,7 +6545,7 @@
                 </a:solidFill>
                 <a:latin typeface="Fira Sans"/>
               </a:rPr>
-              <a:t>La duración de los viajes: valores extremos</a:t>
+              <a:t>Viajes por persona: los ausentes también cuentan</a:t>
             </a:r>
           </a:p>
         </p:txBody>
@@ -6557,7 +6596,7 @@
                 </a:solidFill>
                 <a:latin typeface="Fira Sans"/>
               </a:rPr>
-              <a:t>Mediana: 30 minutos. Percentil 95: 98 minutos.</a:t>
+              <a:t>El 23% de las personas no viajó ese día.</a:t>
             </a:r>
           </a:p>
           <a:p>
@@ -6585,7 +6624,7 @@
                 </a:solidFill>
                 <a:latin typeface="Fira Sans"/>
               </a:rPr>
-              <a:t>Máximo registrado: 1.335 minutos, un viaje de 22 horas.</a:t>
+              <a:t>Media: 1,9 viajes. Mediana: 2 viajes.</a:t>
             </a:r>
           </a:p>
           <a:p>
@@ -6613,7 +6652,7 @@
                 </a:solidFill>
                 <a:latin typeface="Fira Sans"/>
               </a:rPr>
-              <a:t>¿Error de digitación? ¿Turno nocturno mal anotado?</a:t>
+              <a:t>La media quedó bajo la mediana: la masa de ceros la desplaza.</a:t>
             </a:r>
           </a:p>
           <a:p>
@@ -6641,14 +6680,14 @@
                 </a:solidFill>
                 <a:latin typeface="Fira Sans"/>
               </a:rPr>
-              <a:t>Los valores extremos se investigan y la decisión se declara.</a:t>
+              <a:t>La dirección del sesgo depende de la forma de la distribución.</a:t>
             </a:r>
           </a:p>
         </p:txBody>
       </p:sp>
       <p:pic>
         <p:nvPicPr>
-          <p:cNvPr id="5" name="Picture 4" descr="04_duracion_viajes.png"/>
+          <p:cNvPr id="5" name="Picture 4" descr="02_viajes_por_persona.png"/>
           <p:cNvPicPr>
             <a:picLocks noChangeAspect="1"/>
           </p:cNvPicPr>
@@ -6663,7 +6702,7 @@
         <p:spPr>
           <a:xfrm>
             <a:off x="4892040" y="1371600"/>
-            <a:ext cx="3840480" cy="2146492"/>
+            <a:ext cx="3840480" cy="2191739"/>
           </a:xfrm>
           <a:prstGeom prst="rect">
             <a:avLst/>
@@ -6761,177 +6800,14 @@
                 </a:solidFill>
                 <a:latin typeface="Fira Sans"/>
               </a:rPr>
-              <a:t>La partición modal del Gran Santiago</a:t>
-            </a:r>
-          </a:p>
-        </p:txBody>
-      </p:sp>
-      <p:sp>
-        <p:nvSpPr>
-          <p:cNvPr id="4" name="TextBox 3"/>
-          <p:cNvSpPr txBox="1"/>
-          <p:nvPr/>
-        </p:nvSpPr>
-        <p:spPr>
-          <a:xfrm>
-            <a:off x="502920" y="1252728"/>
-            <a:ext cx="4023360" cy="3200400"/>
-          </a:xfrm>
-          <a:prstGeom prst="rect">
-            <a:avLst/>
-          </a:prstGeom>
-          <a:noFill/>
-        </p:spPr>
-        <p:txBody>
-          <a:bodyPr wrap="square">
-            <a:spAutoFit/>
-          </a:bodyPr>
-          <a:lstStyle/>
-          <a:p>
-            <a:pPr>
-              <a:lnSpc>
-                <a:spcPct val="112000"/>
-              </a:lnSpc>
-              <a:spcAft>
-                <a:spcPts val="900"/>
-              </a:spcAft>
-            </a:pPr>
-            <a:r>
-              <a:rPr sz="1500" b="1">
-                <a:solidFill>
-                  <a:srgbClr val="E0A437"/>
-                </a:solidFill>
-                <a:latin typeface="Fira Sans"/>
-              </a:rPr>
-              <a:t>▸ </a:t>
-            </a:r>
-            <a:r>
-              <a:rPr sz="1500" b="0">
-                <a:solidFill>
-                  <a:srgbClr val="000000"/>
-                </a:solidFill>
-                <a:latin typeface="Fira Sans"/>
-              </a:rPr>
-              <a:t>Dos merges y un groupby ponderado por factor.</a:t>
-            </a:r>
-          </a:p>
-          <a:p>
-            <a:pPr>
-              <a:lnSpc>
-                <a:spcPct val="112000"/>
-              </a:lnSpc>
-              <a:spcAft>
-                <a:spcPts val="500"/>
-              </a:spcAft>
-            </a:pPr>
-            <a:r>
-              <a:rPr sz="1300" b="0">
-                <a:solidFill>
-                  <a:srgbClr val="333333"/>
-                </a:solidFill>
-                <a:latin typeface="Fira Sans"/>
-              </a:rPr>
-              <a:t>     ◦  </a:t>
-            </a:r>
-            <a:r>
-              <a:rPr sz="1300" b="0">
-                <a:solidFill>
-                  <a:srgbClr val="333333"/>
-                </a:solidFill>
-                <a:latin typeface="Fira Sans"/>
-              </a:rPr>
-              <a:t>Caminata: 34% de los viajes.</a:t>
-            </a:r>
-          </a:p>
-          <a:p>
-            <a:pPr>
-              <a:lnSpc>
-                <a:spcPct val="112000"/>
-              </a:lnSpc>
-              <a:spcAft>
-                <a:spcPts val="500"/>
-              </a:spcAft>
-            </a:pPr>
-            <a:r>
-              <a:rPr sz="1300" b="0">
-                <a:solidFill>
-                  <a:srgbClr val="333333"/>
-                </a:solidFill>
-                <a:latin typeface="Fira Sans"/>
-              </a:rPr>
-              <a:t>     ◦  </a:t>
-            </a:r>
-            <a:r>
-              <a:rPr sz="1300" b="0">
-                <a:solidFill>
-                  <a:srgbClr val="333333"/>
-                </a:solidFill>
-                <a:latin typeface="Fira Sans"/>
-              </a:rPr>
-              <a:t>Transporte público (Bip!): 24%.</a:t>
-            </a:r>
-          </a:p>
-          <a:p>
-            <a:pPr>
-              <a:lnSpc>
-                <a:spcPct val="112000"/>
-              </a:lnSpc>
-              <a:spcAft>
-                <a:spcPts val="500"/>
-              </a:spcAft>
-            </a:pPr>
-            <a:r>
-              <a:rPr sz="1300" b="0">
-                <a:solidFill>
-                  <a:srgbClr val="333333"/>
-                </a:solidFill>
-                <a:latin typeface="Fira Sans"/>
-              </a:rPr>
-              <a:t>     ◦  </a:t>
-            </a:r>
-            <a:r>
-              <a:rPr sz="1300" b="0">
-                <a:solidFill>
-                  <a:srgbClr val="333333"/>
-                </a:solidFill>
-                <a:latin typeface="Fira Sans"/>
-              </a:rPr>
-              <a:t>Auto: 23%.</a:t>
-            </a:r>
-          </a:p>
-          <a:p>
-            <a:pPr>
-              <a:lnSpc>
-                <a:spcPct val="112000"/>
-              </a:lnSpc>
-              <a:spcAft>
-                <a:spcPts val="900"/>
-              </a:spcAft>
-            </a:pPr>
-            <a:r>
-              <a:rPr sz="1500" b="1">
-                <a:solidFill>
-                  <a:srgbClr val="E0A437"/>
-                </a:solidFill>
-                <a:latin typeface="Fira Sans"/>
-              </a:rPr>
-              <a:t>▸ </a:t>
-            </a:r>
-            <a:r>
-              <a:rPr sz="1500" b="1">
-                <a:solidFill>
-                  <a:srgbClr val="1D3557"/>
-                </a:solidFill>
-                <a:latin typeface="Fira Sans"/>
-              </a:rPr>
-              <a:t>Calculada desde los microdatos, con los factores de un día laboral.</a:t>
+              <a:t>Los factores de expansión: de la muestra a la ciudad</a:t>
             </a:r>
           </a:p>
         </p:txBody>
       </p:sp>
       <p:pic>
         <p:nvPicPr>
-          <p:cNvPr id="5" name="Picture 4" descr="03_reparto_modal.png"/>
+          <p:cNvPr id="4" name="Picture 3" descr="06_diagrama_factores.png"/>
           <p:cNvPicPr>
             <a:picLocks noChangeAspect="1"/>
           </p:cNvPicPr>
@@ -6945,14 +6821,48 @@
         </p:blipFill>
         <p:spPr>
           <a:xfrm>
-            <a:off x="4892040" y="1371600"/>
-            <a:ext cx="3840480" cy="1938578"/>
+            <a:off x="1417319" y="1143000"/>
+            <a:ext cx="6309360" cy="2871234"/>
           </a:xfrm>
           <a:prstGeom prst="rect">
             <a:avLst/>
           </a:prstGeom>
         </p:spPr>
       </p:pic>
+      <p:sp>
+        <p:nvSpPr>
+          <p:cNvPr id="5" name="TextBox 4"/>
+          <p:cNvSpPr txBox="1"/>
+          <p:nvPr/>
+        </p:nvSpPr>
+        <p:spPr>
+          <a:xfrm>
+            <a:off x="704088" y="4434840"/>
+            <a:ext cx="7744968" cy="457200"/>
+          </a:xfrm>
+          <a:prstGeom prst="rect">
+            <a:avLst/>
+          </a:prstGeom>
+          <a:noFill/>
+        </p:spPr>
+        <p:txBody>
+          <a:bodyPr wrap="square">
+            <a:spAutoFit/>
+          </a:bodyPr>
+          <a:lstStyle/>
+          <a:p>
+            <a:r>
+              <a:rPr sz="1300" b="0">
+                <a:solidFill>
+                  <a:srgbClr val="333333"/>
+                </a:solidFill>
+                <a:latin typeface="Fira Sans"/>
+              </a:rPr>
+              <a:t>Contar filas responde por la muestra; sumar factores responde por la ciudad.</a:t>
+            </a:r>
+          </a:p>
+        </p:txBody>
+      </p:sp>
     </p:spTree>
   </p:cSld>
   <p:clrMapOvr>
@@ -7044,14 +6954,149 @@
                 </a:solidFill>
                 <a:latin typeface="Fira Sans"/>
               </a:rPr>
-              <a:t>El reparto modal difiere entre comunas</a:t>
+              <a:t>El ingreso de los hogares: media y mediana</a:t>
+            </a:r>
+          </a:p>
+        </p:txBody>
+      </p:sp>
+      <p:sp>
+        <p:nvSpPr>
+          <p:cNvPr id="4" name="TextBox 3"/>
+          <p:cNvSpPr txBox="1"/>
+          <p:nvPr/>
+        </p:nvSpPr>
+        <p:spPr>
+          <a:xfrm>
+            <a:off x="502920" y="1252728"/>
+            <a:ext cx="4023360" cy="3200400"/>
+          </a:xfrm>
+          <a:prstGeom prst="rect">
+            <a:avLst/>
+          </a:prstGeom>
+          <a:noFill/>
+        </p:spPr>
+        <p:txBody>
+          <a:bodyPr wrap="square">
+            <a:spAutoFit/>
+          </a:bodyPr>
+          <a:lstStyle/>
+          <a:p>
+            <a:pPr>
+              <a:lnSpc>
+                <a:spcPct val="112000"/>
+              </a:lnSpc>
+              <a:spcAft>
+                <a:spcPts val="900"/>
+              </a:spcAft>
+            </a:pPr>
+            <a:r>
+              <a:rPr sz="1500" b="1">
+                <a:solidFill>
+                  <a:srgbClr val="E0A437"/>
+                </a:solidFill>
+                <a:latin typeface="Fira Sans"/>
+              </a:rPr>
+              <a:t>▸ </a:t>
+            </a:r>
+            <a:r>
+              <a:rPr sz="1500" b="0">
+                <a:solidFill>
+                  <a:srgbClr val="000000"/>
+                </a:solidFill>
+                <a:latin typeface="Fira Sans"/>
+              </a:rPr>
+              <a:t>Media: $688.274. Mediana: $507.826.</a:t>
+            </a:r>
+          </a:p>
+          <a:p>
+            <a:pPr>
+              <a:lnSpc>
+                <a:spcPct val="112000"/>
+              </a:lnSpc>
+              <a:spcAft>
+                <a:spcPts val="900"/>
+              </a:spcAft>
+            </a:pPr>
+            <a:r>
+              <a:rPr sz="1500" b="1">
+                <a:solidFill>
+                  <a:srgbClr val="E0A437"/>
+                </a:solidFill>
+                <a:latin typeface="Fira Sans"/>
+              </a:rPr>
+              <a:t>▸ </a:t>
+            </a:r>
+            <a:r>
+              <a:rPr sz="1500" b="0">
+                <a:solidFill>
+                  <a:srgbClr val="000000"/>
+                </a:solidFill>
+                <a:latin typeface="Fira Sans"/>
+              </a:rPr>
+              <a:t>La media es un 36% más alta que la mediana.</a:t>
+            </a:r>
+          </a:p>
+          <a:p>
+            <a:pPr>
+              <a:lnSpc>
+                <a:spcPct val="112000"/>
+              </a:lnSpc>
+              <a:spcAft>
+                <a:spcPts val="900"/>
+              </a:spcAft>
+            </a:pPr>
+            <a:r>
+              <a:rPr sz="1500" b="1">
+                <a:solidFill>
+                  <a:srgbClr val="E0A437"/>
+                </a:solidFill>
+                <a:latin typeface="Fira Sans"/>
+              </a:rPr>
+              <a:t>▸ </a:t>
+            </a:r>
+            <a:r>
+              <a:rPr sz="1500" b="0">
+                <a:solidFill>
+                  <a:srgbClr val="000000"/>
+                </a:solidFill>
+                <a:latin typeface="Fira Sans"/>
+              </a:rPr>
+              <a:t>Los ingresos altos desplazan el promedio; la mayoría gana menos.</a:t>
+            </a:r>
+          </a:p>
+          <a:p>
+            <a:pPr>
+              <a:lnSpc>
+                <a:spcPct val="112000"/>
+              </a:lnSpc>
+              <a:spcAft>
+                <a:spcPts val="900"/>
+              </a:spcAft>
+            </a:pPr>
+            <a:r>
+              <a:rPr sz="1500" b="1">
+                <a:solidFill>
+                  <a:srgbClr val="E0A437"/>
+                </a:solidFill>
+                <a:latin typeface="Fira Sans"/>
+              </a:rPr>
+              <a:t>▸ </a:t>
+            </a:r>
+            <a:r>
+              <a:rPr sz="1500" b="1">
+                <a:solidFill>
+                  <a:srgbClr val="1D3557"/>
+                </a:solidFill>
+                <a:latin typeface="Fira Sans"/>
+              </a:rPr>
+              <a:t>El promedio describe una situación en la que la mayoría no está.</a:t>
             </a:r>
           </a:p>
         </p:txBody>
       </p:sp>
       <p:pic>
         <p:nvPicPr>
-          <p:cNvPr id="4" name="Picture 3" descr="08_modo_por_comuna.png"/>
+          <p:cNvPr id="5" name="Picture 4" descr="01_ingreso_media_mediana.png"/>
           <p:cNvPicPr>
             <a:picLocks noChangeAspect="1"/>
           </p:cNvPicPr>
@@ -7065,48 +7110,14 @@
         </p:blipFill>
         <p:spPr>
           <a:xfrm>
-            <a:off x="1994250" y="1143000"/>
-            <a:ext cx="5155498" cy="3154679"/>
+            <a:off x="4892040" y="1371600"/>
+            <a:ext cx="3840480" cy="2182719"/>
           </a:xfrm>
           <a:prstGeom prst="rect">
             <a:avLst/>
           </a:prstGeom>
         </p:spPr>
       </p:pic>
-      <p:sp>
-        <p:nvSpPr>
-          <p:cNvPr id="5" name="TextBox 4"/>
-          <p:cNvSpPr txBox="1"/>
-          <p:nvPr/>
-        </p:nvSpPr>
-        <p:spPr>
-          <a:xfrm>
-            <a:off x="704088" y="4434840"/>
-            <a:ext cx="7744968" cy="457200"/>
-          </a:xfrm>
-          <a:prstGeom prst="rect">
-            <a:avLst/>
-          </a:prstGeom>
-          <a:noFill/>
-        </p:spPr>
-        <p:txBody>
-          <a:bodyPr wrap="square">
-            <a:spAutoFit/>
-          </a:bodyPr>
-          <a:lstStyle/>
-          <a:p>
-            <a:r>
-              <a:rPr sz="1300" b="0">
-                <a:solidFill>
-                  <a:srgbClr val="333333"/>
-                </a:solidFill>
-                <a:latin typeface="Fira Sans"/>
-              </a:rPr>
-              <a:t>Normalizar por comuna permite comparar proporciones entre comunas de tamaños muy distintos.</a:t>
-            </a:r>
-          </a:p>
-        </p:txBody>
-      </p:sp>
     </p:spTree>
   </p:cSld>
   <p:clrMapOvr>
@@ -7198,7 +7209,7 @@
                 </a:solidFill>
                 <a:latin typeface="Fira Sans"/>
               </a:rPr>
-              <a:t>Ingreso y uso de transporte público</a:t>
+              <a:t>La duración de los viajes: valores extremos</a:t>
             </a:r>
           </a:p>
         </p:txBody>
@@ -7249,91 +7260,7 @@
                 </a:solidFill>
                 <a:latin typeface="Fira Sans"/>
               </a:rPr>
-              <a:t>Cada punto es una comuna: ingreso medio contra proporción de viajes en transporte público.</a:t>
-            </a:r>
-          </a:p>
-          <a:p>
-            <a:pPr>
-              <a:lnSpc>
-                <a:spcPct val="112000"/>
-              </a:lnSpc>
-              <a:spcAft>
-                <a:spcPts val="500"/>
-              </a:spcAft>
-            </a:pPr>
-            <a:r>
-              <a:rPr sz="1300" b="0">
-                <a:solidFill>
-                  <a:srgbClr val="333333"/>
-                </a:solidFill>
-                <a:latin typeface="Fira Sans"/>
-              </a:rPr>
-              <a:t>     ◦  </a:t>
-            </a:r>
-            <a:r>
-              <a:rPr sz="1300" b="0">
-                <a:solidFill>
-                  <a:srgbClr val="333333"/>
-                </a:solidFill>
-                <a:latin typeface="Fira Sans"/>
-              </a:rPr>
-              <a:t>Periferia (Buin, Melipilla): poco transporte público; la red no llega.</a:t>
-            </a:r>
-          </a:p>
-          <a:p>
-            <a:pPr>
-              <a:lnSpc>
-                <a:spcPct val="112000"/>
-              </a:lnSpc>
-              <a:spcAft>
-                <a:spcPts val="500"/>
-              </a:spcAft>
-            </a:pPr>
-            <a:r>
-              <a:rPr sz="1300" b="0">
-                <a:solidFill>
-                  <a:srgbClr val="333333"/>
-                </a:solidFill>
-                <a:latin typeface="Fira Sans"/>
-              </a:rPr>
-              <a:t>     ◦  </a:t>
-            </a:r>
-            <a:r>
-              <a:rPr sz="1300" b="0">
-                <a:solidFill>
-                  <a:srgbClr val="333333"/>
-                </a:solidFill>
-                <a:latin typeface="Fira Sans"/>
-              </a:rPr>
-              <a:t>Ingresos altos (Vitacura, Lo Barnechea): conectadas, con poco uso.</a:t>
-            </a:r>
-          </a:p>
-          <a:p>
-            <a:pPr>
-              <a:lnSpc>
-                <a:spcPct val="112000"/>
-              </a:lnSpc>
-              <a:spcAft>
-                <a:spcPts val="500"/>
-              </a:spcAft>
-            </a:pPr>
-            <a:r>
-              <a:rPr sz="1300" b="0">
-                <a:solidFill>
-                  <a:srgbClr val="333333"/>
-                </a:solidFill>
-                <a:latin typeface="Fira Sans"/>
-              </a:rPr>
-              <a:t>     ◦  </a:t>
-            </a:r>
-            <a:r>
-              <a:rPr sz="1300" b="0">
-                <a:solidFill>
-                  <a:srgbClr val="333333"/>
-                </a:solidFill>
-                <a:latin typeface="Fira Sans"/>
-              </a:rPr>
-              <a:t>Correlación de Pearson: -0,17. La asociación lineal es débil.</a:t>
+              <a:t>Mediana: 30 minutos. Percentil 95: 98 minutos.</a:t>
             </a:r>
           </a:p>
           <a:p>
@@ -7355,20 +7282,76 @@
               <a:t>▸ </a:t>
             </a:r>
             <a:r>
+              <a:rPr sz="1500" b="0">
+                <a:solidFill>
+                  <a:srgbClr val="000000"/>
+                </a:solidFill>
+                <a:latin typeface="Fira Sans"/>
+              </a:rPr>
+              <a:t>Máximo registrado: 1.335 minutos, un viaje de 22 horas.</a:t>
+            </a:r>
+          </a:p>
+          <a:p>
+            <a:pPr>
+              <a:lnSpc>
+                <a:spcPct val="112000"/>
+              </a:lnSpc>
+              <a:spcAft>
+                <a:spcPts val="900"/>
+              </a:spcAft>
+            </a:pPr>
+            <a:r>
               <a:rPr sz="1500" b="1">
                 <a:solidFill>
+                  <a:srgbClr val="E0A437"/>
+                </a:solidFill>
+                <a:latin typeface="Fira Sans"/>
+              </a:rPr>
+              <a:t>▸ </a:t>
+            </a:r>
+            <a:r>
+              <a:rPr sz="1500" b="0">
+                <a:solidFill>
+                  <a:srgbClr val="000000"/>
+                </a:solidFill>
+                <a:latin typeface="Fira Sans"/>
+              </a:rPr>
+              <a:t>¿Error de digitación? ¿Turno nocturno mal anotado?</a:t>
+            </a:r>
+          </a:p>
+          <a:p>
+            <a:pPr>
+              <a:lnSpc>
+                <a:spcPct val="112000"/>
+              </a:lnSpc>
+              <a:spcAft>
+                <a:spcPts val="900"/>
+              </a:spcAft>
+            </a:pPr>
+            <a:r>
+              <a:rPr sz="1500" b="1">
+                <a:solidFill>
+                  <a:srgbClr val="E0A437"/>
+                </a:solidFill>
+                <a:latin typeface="Fira Sans"/>
+              </a:rPr>
+              <a:t>▸ </a:t>
+            </a:r>
+            <a:r>
+              <a:rPr sz="1500" b="1">
+                <a:solidFill>
                   <a:srgbClr val="1D3557"/>
                 </a:solidFill>
                 <a:latin typeface="Fira Sans"/>
               </a:rPr>
-              <a:t>Como vimos en el marco conceptual: el coeficiente no reemplaza al gráfico, y la asociación no autoriza verbos causales.</a:t>
+              <a:t>Los valores extremos se investigan y la decisión se declara.</a:t>
             </a:r>
           </a:p>
         </p:txBody>
       </p:sp>
       <p:pic>
         <p:nvPicPr>
-          <p:cNvPr id="5" name="Picture 4" descr="09_ingreso_vs_tp.png"/>
+          <p:cNvPr id="5" name="Picture 4" descr="04_duracion_viajes.png"/>
           <p:cNvPicPr>
             <a:picLocks noChangeAspect="1"/>
           </p:cNvPicPr>
@@ -7383,7 +7366,7 @@
         <p:spPr>
           <a:xfrm>
             <a:off x="4892040" y="1371600"/>
-            <a:ext cx="3840480" cy="2526979"/>
+            <a:ext cx="3840480" cy="2146492"/>
           </a:xfrm>
           <a:prstGeom prst="rect">
             <a:avLst/>
@@ -7481,14 +7464,177 @@
                 </a:solidFill>
                 <a:latin typeface="Fira Sans"/>
               </a:rPr>
-              <a:t>Los propósitos de viaje según el día de la semana</a:t>
+              <a:t>La partición modal del Gran Santiago</a:t>
+            </a:r>
+          </a:p>
+        </p:txBody>
+      </p:sp>
+      <p:sp>
+        <p:nvSpPr>
+          <p:cNvPr id="4" name="TextBox 3"/>
+          <p:cNvSpPr txBox="1"/>
+          <p:nvPr/>
+        </p:nvSpPr>
+        <p:spPr>
+          <a:xfrm>
+            <a:off x="502920" y="1252728"/>
+            <a:ext cx="4023360" cy="3200400"/>
+          </a:xfrm>
+          <a:prstGeom prst="rect">
+            <a:avLst/>
+          </a:prstGeom>
+          <a:noFill/>
+        </p:spPr>
+        <p:txBody>
+          <a:bodyPr wrap="square">
+            <a:spAutoFit/>
+          </a:bodyPr>
+          <a:lstStyle/>
+          <a:p>
+            <a:pPr>
+              <a:lnSpc>
+                <a:spcPct val="112000"/>
+              </a:lnSpc>
+              <a:spcAft>
+                <a:spcPts val="900"/>
+              </a:spcAft>
+            </a:pPr>
+            <a:r>
+              <a:rPr sz="1500" b="1">
+                <a:solidFill>
+                  <a:srgbClr val="E0A437"/>
+                </a:solidFill>
+                <a:latin typeface="Fira Sans"/>
+              </a:rPr>
+              <a:t>▸ </a:t>
+            </a:r>
+            <a:r>
+              <a:rPr sz="1500" b="0">
+                <a:solidFill>
+                  <a:srgbClr val="000000"/>
+                </a:solidFill>
+                <a:latin typeface="Fira Sans"/>
+              </a:rPr>
+              <a:t>Dos merges y un groupby ponderado por factor.</a:t>
+            </a:r>
+          </a:p>
+          <a:p>
+            <a:pPr>
+              <a:lnSpc>
+                <a:spcPct val="112000"/>
+              </a:lnSpc>
+              <a:spcAft>
+                <a:spcPts val="500"/>
+              </a:spcAft>
+            </a:pPr>
+            <a:r>
+              <a:rPr sz="1300" b="0">
+                <a:solidFill>
+                  <a:srgbClr val="333333"/>
+                </a:solidFill>
+                <a:latin typeface="Fira Sans"/>
+              </a:rPr>
+              <a:t>     ◦  </a:t>
+            </a:r>
+            <a:r>
+              <a:rPr sz="1300" b="0">
+                <a:solidFill>
+                  <a:srgbClr val="333333"/>
+                </a:solidFill>
+                <a:latin typeface="Fira Sans"/>
+              </a:rPr>
+              <a:t>Caminata: 34% de los viajes.</a:t>
+            </a:r>
+          </a:p>
+          <a:p>
+            <a:pPr>
+              <a:lnSpc>
+                <a:spcPct val="112000"/>
+              </a:lnSpc>
+              <a:spcAft>
+                <a:spcPts val="500"/>
+              </a:spcAft>
+            </a:pPr>
+            <a:r>
+              <a:rPr sz="1300" b="0">
+                <a:solidFill>
+                  <a:srgbClr val="333333"/>
+                </a:solidFill>
+                <a:latin typeface="Fira Sans"/>
+              </a:rPr>
+              <a:t>     ◦  </a:t>
+            </a:r>
+            <a:r>
+              <a:rPr sz="1300" b="0">
+                <a:solidFill>
+                  <a:srgbClr val="333333"/>
+                </a:solidFill>
+                <a:latin typeface="Fira Sans"/>
+              </a:rPr>
+              <a:t>Transporte público (Bip!): 24%.</a:t>
+            </a:r>
+          </a:p>
+          <a:p>
+            <a:pPr>
+              <a:lnSpc>
+                <a:spcPct val="112000"/>
+              </a:lnSpc>
+              <a:spcAft>
+                <a:spcPts val="500"/>
+              </a:spcAft>
+            </a:pPr>
+            <a:r>
+              <a:rPr sz="1300" b="0">
+                <a:solidFill>
+                  <a:srgbClr val="333333"/>
+                </a:solidFill>
+                <a:latin typeface="Fira Sans"/>
+              </a:rPr>
+              <a:t>     ◦  </a:t>
+            </a:r>
+            <a:r>
+              <a:rPr sz="1300" b="0">
+                <a:solidFill>
+                  <a:srgbClr val="333333"/>
+                </a:solidFill>
+                <a:latin typeface="Fira Sans"/>
+              </a:rPr>
+              <a:t>Auto: 23%.</a:t>
+            </a:r>
+          </a:p>
+          <a:p>
+            <a:pPr>
+              <a:lnSpc>
+                <a:spcPct val="112000"/>
+              </a:lnSpc>
+              <a:spcAft>
+                <a:spcPts val="900"/>
+              </a:spcAft>
+            </a:pPr>
+            <a:r>
+              <a:rPr sz="1500" b="1">
+                <a:solidFill>
+                  <a:srgbClr val="E0A437"/>
+                </a:solidFill>
+                <a:latin typeface="Fira Sans"/>
+              </a:rPr>
+              <a:t>▸ </a:t>
+            </a:r>
+            <a:r>
+              <a:rPr sz="1500" b="1">
+                <a:solidFill>
+                  <a:srgbClr val="1D3557"/>
+                </a:solidFill>
+                <a:latin typeface="Fira Sans"/>
+              </a:rPr>
+              <a:t>Calculada desde los microdatos, con los factores de un día laboral.</a:t>
             </a:r>
           </a:p>
         </p:txBody>
       </p:sp>
       <p:pic>
         <p:nvPicPr>
-          <p:cNvPr id="4" name="Picture 3" descr="10_heatmap_rutinas.png"/>
+          <p:cNvPr id="5" name="Picture 4" descr="03_reparto_modal.png"/>
           <p:cNvPicPr>
             <a:picLocks noChangeAspect="1"/>
           </p:cNvPicPr>
@@ -7502,48 +7648,14 @@
         </p:blipFill>
         <p:spPr>
           <a:xfrm>
-            <a:off x="1563778" y="1143000"/>
-            <a:ext cx="6016443" cy="3154680"/>
+            <a:off x="4892040" y="1371600"/>
+            <a:ext cx="3840480" cy="1938578"/>
           </a:xfrm>
           <a:prstGeom prst="rect">
             <a:avLst/>
           </a:prstGeom>
         </p:spPr>
       </p:pic>
-      <p:sp>
-        <p:nvSpPr>
-          <p:cNvPr id="5" name="TextBox 4"/>
-          <p:cNvSpPr txBox="1"/>
-          <p:nvPr/>
-        </p:nvSpPr>
-        <p:spPr>
-          <a:xfrm>
-            <a:off x="704088" y="4434840"/>
-            <a:ext cx="7744968" cy="457200"/>
-          </a:xfrm>
-          <a:prstGeom prst="rect">
-            <a:avLst/>
-          </a:prstGeom>
-          <a:noFill/>
-        </p:spPr>
-        <p:txBody>
-          <a:bodyPr wrap="square">
-            <a:spAutoFit/>
-          </a:bodyPr>
-          <a:lstStyle/>
-          <a:p>
-            <a:r>
-              <a:rPr sz="1300" b="0">
-                <a:solidFill>
-                  <a:srgbClr val="333333"/>
-                </a:solidFill>
-                <a:latin typeface="Fira Sans"/>
-              </a:rPr>
-              <a:t>El heatmap muestra 14 propósitos por 7 días en una sola figura: útil para tablas completas.</a:t>
-            </a:r>
-          </a:p>
-        </p:txBody>
-      </p:sp>
     </p:spTree>
   </p:cSld>
   <p:clrMapOvr>
@@ -7635,14 +7747,14 @@
                 </a:solidFill>
                 <a:latin typeface="Fira Sans"/>
               </a:rPr>
-              <a:t>Cuando los datos crecen</a:t>
+              <a:t>El reparto modal difiere entre comunas</a:t>
             </a:r>
           </a:p>
         </p:txBody>
       </p:sp>
       <p:pic>
         <p:nvPicPr>
-          <p:cNvPr id="4" name="Picture 3" descr="14_escala_datos.png"/>
+          <p:cNvPr id="4" name="Picture 3" descr="08_modo_por_comuna.png"/>
           <p:cNvPicPr>
             <a:picLocks noChangeAspect="1"/>
           </p:cNvPicPr>
@@ -7656,8 +7768,8 @@
         </p:blipFill>
         <p:spPr>
           <a:xfrm>
-            <a:off x="1417319" y="1143000"/>
-            <a:ext cx="6309360" cy="2324913"/>
+            <a:off x="1994250" y="1143000"/>
+            <a:ext cx="5155498" cy="3154679"/>
           </a:xfrm>
           <a:prstGeom prst="rect">
             <a:avLst/>
@@ -7693,7 +7805,7 @@
                 </a:solidFill>
                 <a:latin typeface="Fira Sans"/>
               </a:rPr>
-              <a:t>PySpark se usa con SQL o con sus propios DataFrames; Dask reparte operaciones estilo Pandas; Polars y DuckDB rinden en una sola máquina.</a:t>
+              <a:t>Normalizar por comuna permite comparar proporciones entre comunas de tamaños muy distintos.</a:t>
             </a:r>
           </a:p>
         </p:txBody>
@@ -7896,7 +8008,7 @@
                 </a:solidFill>
                 <a:latin typeface="Fira Sans"/>
               </a:rPr>
-              <a:t>Síntesis</a:t>
+              <a:t>Ingreso y uso de transporte público</a:t>
             </a:r>
           </a:p>
         </p:txBody>
@@ -7909,8 +8021,8 @@
         </p:nvSpPr>
         <p:spPr>
           <a:xfrm>
-            <a:off x="704088" y="1353312"/>
-            <a:ext cx="7744968" cy="3300984"/>
+            <a:off x="502920" y="1252728"/>
+            <a:ext cx="4023360" cy="3200400"/>
           </a:xfrm>
           <a:prstGeom prst="rect">
             <a:avLst/>
@@ -7932,7 +8044,7 @@
               </a:spcAft>
             </a:pPr>
             <a:r>
-              <a:rPr sz="1800" b="1">
+              <a:rPr sz="1500" b="1">
                 <a:solidFill>
                   <a:srgbClr val="E0A437"/>
                 </a:solidFill>
@@ -7941,13 +8053,97 @@
               <a:t>▸ </a:t>
             </a:r>
             <a:r>
-              <a:rPr sz="1800" b="0">
+              <a:rPr sz="1500" b="0">
                 <a:solidFill>
                   <a:srgbClr val="000000"/>
                 </a:solidFill>
                 <a:latin typeface="Fira Sans"/>
               </a:rPr>
-              <a:t>Un modelo es una simplificación con decisiones incorporadas; estimarlo puede buscar inferencia o predicción.</a:t>
+              <a:t>Cada punto es una comuna: ingreso medio contra proporción de viajes en transporte público.</a:t>
+            </a:r>
+          </a:p>
+          <a:p>
+            <a:pPr>
+              <a:lnSpc>
+                <a:spcPct val="112000"/>
+              </a:lnSpc>
+              <a:spcAft>
+                <a:spcPts val="500"/>
+              </a:spcAft>
+            </a:pPr>
+            <a:r>
+              <a:rPr sz="1300" b="0">
+                <a:solidFill>
+                  <a:srgbClr val="333333"/>
+                </a:solidFill>
+                <a:latin typeface="Fira Sans"/>
+              </a:rPr>
+              <a:t>     ◦  </a:t>
+            </a:r>
+            <a:r>
+              <a:rPr sz="1300" b="0">
+                <a:solidFill>
+                  <a:srgbClr val="333333"/>
+                </a:solidFill>
+                <a:latin typeface="Fira Sans"/>
+              </a:rPr>
+              <a:t>Periferia (Buin, Melipilla): poco transporte público; la red no llega.</a:t>
+            </a:r>
+          </a:p>
+          <a:p>
+            <a:pPr>
+              <a:lnSpc>
+                <a:spcPct val="112000"/>
+              </a:lnSpc>
+              <a:spcAft>
+                <a:spcPts val="500"/>
+              </a:spcAft>
+            </a:pPr>
+            <a:r>
+              <a:rPr sz="1300" b="0">
+                <a:solidFill>
+                  <a:srgbClr val="333333"/>
+                </a:solidFill>
+                <a:latin typeface="Fira Sans"/>
+              </a:rPr>
+              <a:t>     ◦  </a:t>
+            </a:r>
+            <a:r>
+              <a:rPr sz="1300" b="0">
+                <a:solidFill>
+                  <a:srgbClr val="333333"/>
+                </a:solidFill>
+                <a:latin typeface="Fira Sans"/>
+              </a:rPr>
+              <a:t>Ingresos altos (Vitacura, Lo Barnechea): conectadas, con poco uso.</a:t>
+            </a:r>
+          </a:p>
+          <a:p>
+            <a:pPr>
+              <a:lnSpc>
+                <a:spcPct val="112000"/>
+              </a:lnSpc>
+              <a:spcAft>
+                <a:spcPts val="500"/>
+              </a:spcAft>
+            </a:pPr>
+            <a:r>
+              <a:rPr sz="1300" b="0">
+                <a:solidFill>
+                  <a:srgbClr val="333333"/>
+                </a:solidFill>
+                <a:latin typeface="Fira Sans"/>
+              </a:rPr>
+              <a:t>     ◦  </a:t>
+            </a:r>
+            <a:r>
+              <a:rPr sz="1300" b="0">
+                <a:solidFill>
+                  <a:srgbClr val="333333"/>
+                </a:solidFill>
+                <a:latin typeface="Fira Sans"/>
+              </a:rPr>
+              <a:t>Correlación de Pearson: -0,17. La asociación lineal es débil.</a:t>
             </a:r>
           </a:p>
           <a:p>
@@ -7960,7 +8156,7 @@
               </a:spcAft>
             </a:pPr>
             <a:r>
-              <a:rPr sz="1800" b="1">
+              <a:rPr sz="1500" b="1">
                 <a:solidFill>
                   <a:srgbClr val="E0A437"/>
                 </a:solidFill>
@@ -7969,101 +8165,41 @@
               <a:t>▸ </a:t>
             </a:r>
             <a:r>
-              <a:rPr sz="1800" b="0">
-                <a:solidFill>
-                  <a:srgbClr val="000000"/>
-                </a:solidFill>
-                <a:latin typeface="Fira Sans"/>
-              </a:rPr>
-              <a:t>Las asociaciones se reportan como asociaciones: la causalidad exige más que datos observacionales.</a:t>
-            </a:r>
-          </a:p>
-          <a:p>
-            <a:pPr>
-              <a:lnSpc>
-                <a:spcPct val="112000"/>
-              </a:lnSpc>
-              <a:spcAft>
-                <a:spcPts val="900"/>
-              </a:spcAft>
-            </a:pPr>
-            <a:r>
-              <a:rPr sz="1800" b="1">
-                <a:solidFill>
-                  <a:srgbClr val="E0A437"/>
-                </a:solidFill>
-                <a:latin typeface="Fira Sans"/>
-              </a:rPr>
-              <a:t>▸ </a:t>
-            </a:r>
-            <a:r>
-              <a:rPr sz="1800" b="0">
-                <a:solidFill>
-                  <a:srgbClr val="000000"/>
-                </a:solidFill>
-                <a:latin typeface="Fira Sans"/>
-              </a:rPr>
-              <a:t>El tipo de la variable, no su dtype, determina qué resúmenes tienen sentido.</a:t>
-            </a:r>
-          </a:p>
-          <a:p>
-            <a:pPr>
-              <a:lnSpc>
-                <a:spcPct val="112000"/>
-              </a:lnSpc>
-              <a:spcAft>
-                <a:spcPts val="900"/>
-              </a:spcAft>
-            </a:pPr>
-            <a:r>
-              <a:rPr sz="1800" b="1">
-                <a:solidFill>
-                  <a:srgbClr val="E0A437"/>
-                </a:solidFill>
-                <a:latin typeface="Fira Sans"/>
-              </a:rPr>
-              <a:t>▸ </a:t>
-            </a:r>
-            <a:r>
-              <a:rPr sz="1800" b="0">
-                <a:solidFill>
-                  <a:srgbClr val="000000"/>
-                </a:solidFill>
-                <a:latin typeface="Fira Sans"/>
-              </a:rPr>
-              <a:t>Con distribuciones asimétricas, la mediana y los percentiles describen mejor lo típico que la media.</a:t>
-            </a:r>
-          </a:p>
-          <a:p>
-            <a:pPr>
-              <a:lnSpc>
-                <a:spcPct val="112000"/>
-              </a:lnSpc>
-              <a:spcAft>
-                <a:spcPts val="900"/>
-              </a:spcAft>
-            </a:pPr>
-            <a:r>
-              <a:rPr sz="1800" b="1">
-                <a:solidFill>
-                  <a:srgbClr val="E0A437"/>
-                </a:solidFill>
-                <a:latin typeface="Fira Sans"/>
-              </a:rPr>
-              <a:t>▸ </a:t>
-            </a:r>
-            <a:r>
-              <a:rPr sz="1800" b="1">
+              <a:rPr sz="1500" b="1">
                 <a:solidFill>
                   <a:srgbClr val="1D3557"/>
                 </a:solidFill>
                 <a:latin typeface="Fira Sans"/>
               </a:rPr>
-              <a:t>Ante toda cifra resumen: ¿de quién habla este número? ¿Muestra, subgrupo o ciudad?</a:t>
-            </a:r>
-          </a:p>
-        </p:txBody>
-      </p:sp>
+              <a:t>Como vimos en el marco conceptual: el coeficiente no reemplaza al gráfico, y la asociación no autoriza verbos causales.</a:t>
+            </a:r>
+          </a:p>
+        </p:txBody>
+      </p:sp>
+      <p:pic>
+        <p:nvPicPr>
+          <p:cNvPr id="5" name="Picture 4" descr="09_ingreso_vs_tp.png"/>
+          <p:cNvPicPr>
+            <a:picLocks noChangeAspect="1"/>
+          </p:cNvPicPr>
+          <p:nvPr/>
+        </p:nvPicPr>
+        <p:blipFill>
+          <a:blip r:embed="rId2"/>
+          <a:stretch>
+            <a:fillRect/>
+          </a:stretch>
+        </p:blipFill>
+        <p:spPr>
+          <a:xfrm>
+            <a:off x="4892040" y="1371600"/>
+            <a:ext cx="3840480" cy="2526979"/>
+          </a:xfrm>
+          <a:prstGeom prst="rect">
+            <a:avLst/>
+          </a:prstGeom>
+        </p:spPr>
+      </p:pic>
     </p:spTree>
   </p:cSld>
   <p:clrMapOvr>
@@ -8155,21 +8291,45 @@
                 </a:solidFill>
                 <a:latin typeface="Fira Sans"/>
               </a:rPr>
-              <a:t>Segundo bloque: comienza la Tarea 1</a:t>
-            </a:r>
-          </a:p>
-        </p:txBody>
-      </p:sp>
-      <p:sp>
-        <p:nvSpPr>
-          <p:cNvPr id="4" name="TextBox 3"/>
+              <a:t>Los propósitos de viaje según el día de la semana</a:t>
+            </a:r>
+          </a:p>
+        </p:txBody>
+      </p:sp>
+      <p:pic>
+        <p:nvPicPr>
+          <p:cNvPr id="4" name="Picture 3" descr="10_heatmap_rutinas.png"/>
+          <p:cNvPicPr>
+            <a:picLocks noChangeAspect="1"/>
+          </p:cNvPicPr>
+          <p:nvPr/>
+        </p:nvPicPr>
+        <p:blipFill>
+          <a:blip r:embed="rId2"/>
+          <a:stretch>
+            <a:fillRect/>
+          </a:stretch>
+        </p:blipFill>
+        <p:spPr>
+          <a:xfrm>
+            <a:off x="1563778" y="1143000"/>
+            <a:ext cx="6016443" cy="3154680"/>
+          </a:xfrm>
+          <a:prstGeom prst="rect">
+            <a:avLst/>
+          </a:prstGeom>
+        </p:spPr>
+      </p:pic>
+      <p:sp>
+        <p:nvSpPr>
+          <p:cNvPr id="5" name="TextBox 4"/>
           <p:cNvSpPr txBox="1"/>
           <p:nvPr/>
         </p:nvSpPr>
         <p:spPr>
           <a:xfrm>
-            <a:off x="704088" y="1353312"/>
-            <a:ext cx="7744968" cy="3300984"/>
+            <a:off x="704088" y="4434840"/>
+            <a:ext cx="7744968" cy="457200"/>
           </a:xfrm>
           <a:prstGeom prst="rect">
             <a:avLst/>
@@ -8182,171 +8342,14 @@
           </a:bodyPr>
           <a:lstStyle/>
           <a:p>
-            <a:pPr>
-              <a:lnSpc>
-                <a:spcPct val="112000"/>
-              </a:lnSpc>
-              <a:spcAft>
-                <a:spcPts val="900"/>
-              </a:spcAft>
-            </a:pPr>
-            <a:r>
-              <a:rPr sz="1800" b="1">
-                <a:solidFill>
-                  <a:srgbClr val="E0A437"/>
-                </a:solidFill>
-                <a:latin typeface="Fira Sans"/>
-              </a:rPr>
-              <a:t>▸ </a:t>
-            </a:r>
-            <a:r>
-              <a:rPr sz="1800" b="0">
-                <a:solidFill>
-                  <a:srgbClr val="000000"/>
-                </a:solidFill>
-                <a:latin typeface="Fira Sans"/>
-              </a:rPr>
-              <a:t>El retrato de tu comuna: cada pareja adopta una comuna del Gran Santiago.</a:t>
-            </a:r>
-          </a:p>
-          <a:p>
-            <a:pPr>
-              <a:lnSpc>
-                <a:spcPct val="112000"/>
-              </a:lnSpc>
-              <a:spcAft>
-                <a:spcPts val="500"/>
-              </a:spcAft>
-            </a:pPr>
-            <a:r>
-              <a:rPr sz="1400" b="0">
+            <a:r>
+              <a:rPr sz="1300" b="0">
                 <a:solidFill>
                   <a:srgbClr val="333333"/>
                 </a:solidFill>
                 <a:latin typeface="Fira Sans"/>
               </a:rPr>
-              <a:t>     ◦  </a:t>
-            </a:r>
-            <a:r>
-              <a:rPr sz="1400" b="0">
-                <a:solidFill>
-                  <a:srgbClr val="333333"/>
-                </a:solidFill>
-                <a:latin typeface="Fira Sans"/>
-              </a:rPr>
-              <a:t>Hoy: elegir la comuna y construir su retrato numérico.</a:t>
-            </a:r>
-          </a:p>
-          <a:p>
-            <a:pPr>
-              <a:lnSpc>
-                <a:spcPct val="112000"/>
-              </a:lnSpc>
-              <a:spcAft>
-                <a:spcPts val="500"/>
-              </a:spcAft>
-            </a:pPr>
-            <a:r>
-              <a:rPr sz="1400" b="0">
-                <a:solidFill>
-                  <a:srgbClr val="333333"/>
-                </a:solidFill>
-                <a:latin typeface="Fira Sans"/>
-              </a:rPr>
-              <a:t>     ◦  </a:t>
-            </a:r>
-            <a:r>
-              <a:rPr sz="1400" b="0">
-                <a:solidFill>
-                  <a:srgbClr val="333333"/>
-                </a:solidFill>
-                <a:latin typeface="Fira Sans"/>
-              </a:rPr>
-              <a:t>Próxima clase: el retrato gráfico, con métodos de visualización.</a:t>
-            </a:r>
-          </a:p>
-          <a:p>
-            <a:pPr>
-              <a:lnSpc>
-                <a:spcPct val="112000"/>
-              </a:lnSpc>
-              <a:spcAft>
-                <a:spcPts val="500"/>
-              </a:spcAft>
-            </a:pPr>
-            <a:r>
-              <a:rPr sz="1400" b="0">
-                <a:solidFill>
-                  <a:srgbClr val="333333"/>
-                </a:solidFill>
-                <a:latin typeface="Fira Sans"/>
-              </a:rPr>
-              <a:t>     ◦  </a:t>
-            </a:r>
-            <a:r>
-              <a:rPr sz="1400" b="0">
-                <a:solidFill>
-                  <a:srgbClr val="333333"/>
-                </a:solidFill>
-                <a:latin typeface="Fira Sans"/>
-              </a:rPr>
-              <a:t>Entrega del retrato completo: jueves 10 de septiembre, por Aula.</a:t>
-            </a:r>
-          </a:p>
-          <a:p>
-            <a:pPr>
-              <a:lnSpc>
-                <a:spcPct val="112000"/>
-              </a:lnSpc>
-              <a:spcAft>
-                <a:spcPts val="900"/>
-              </a:spcAft>
-            </a:pPr>
-            <a:r>
-              <a:rPr sz="1800" b="1">
-                <a:solidFill>
-                  <a:srgbClr val="E0A437"/>
-                </a:solidFill>
-                <a:latin typeface="Fira Sans"/>
-              </a:rPr>
-              <a:t>▸ </a:t>
-            </a:r>
-            <a:r>
-              <a:rPr sz="1800" b="0">
-                <a:solidFill>
-                  <a:srgbClr val="000000"/>
-                </a:solidFill>
-                <a:latin typeface="Fira Sans"/>
-              </a:rPr>
-              <a:t>El enunciado está en evaluaciones/tareas/ y la guía de hoy en actividades/.</a:t>
-            </a:r>
-          </a:p>
-          <a:p>
-            <a:pPr>
-              <a:lnSpc>
-                <a:spcPct val="112000"/>
-              </a:lnSpc>
-              <a:spcAft>
-                <a:spcPts val="900"/>
-              </a:spcAft>
-            </a:pPr>
-            <a:r>
-              <a:rPr sz="1800" b="1">
-                <a:solidFill>
-                  <a:srgbClr val="E0A437"/>
-                </a:solidFill>
-                <a:latin typeface="Fira Sans"/>
-              </a:rPr>
-              <a:t>▸ </a:t>
-            </a:r>
-            <a:r>
-              <a:rPr sz="1800" b="1">
-                <a:solidFill>
-                  <a:srgbClr val="1D3557"/>
-                </a:solidFill>
-                <a:latin typeface="Fira Sans"/>
-              </a:rPr>
-              <a:t>Lo que avancen en este bloque ya es parte de la tarea.</a:t>
+              <a:t>El heatmap muestra 14 propósitos por 7 días en una sola figura: útil para tablas completas.</a:t>
             </a:r>
           </a:p>
         </p:txBody>
@@ -8442,6 +8445,706 @@
                 </a:solidFill>
                 <a:latin typeface="Fira Sans"/>
               </a:rPr>
+              <a:t>Cuando los datos crecen</a:t>
+            </a:r>
+          </a:p>
+        </p:txBody>
+      </p:sp>
+      <p:pic>
+        <p:nvPicPr>
+          <p:cNvPr id="4" name="Picture 3" descr="14_escala_datos.png"/>
+          <p:cNvPicPr>
+            <a:picLocks noChangeAspect="1"/>
+          </p:cNvPicPr>
+          <p:nvPr/>
+        </p:nvPicPr>
+        <p:blipFill>
+          <a:blip r:embed="rId2"/>
+          <a:stretch>
+            <a:fillRect/>
+          </a:stretch>
+        </p:blipFill>
+        <p:spPr>
+          <a:xfrm>
+            <a:off x="1417319" y="1143000"/>
+            <a:ext cx="6309360" cy="2324913"/>
+          </a:xfrm>
+          <a:prstGeom prst="rect">
+            <a:avLst/>
+          </a:prstGeom>
+        </p:spPr>
+      </p:pic>
+      <p:sp>
+        <p:nvSpPr>
+          <p:cNvPr id="5" name="TextBox 4"/>
+          <p:cNvSpPr txBox="1"/>
+          <p:nvPr/>
+        </p:nvSpPr>
+        <p:spPr>
+          <a:xfrm>
+            <a:off x="704088" y="4434840"/>
+            <a:ext cx="7744968" cy="457200"/>
+          </a:xfrm>
+          <a:prstGeom prst="rect">
+            <a:avLst/>
+          </a:prstGeom>
+          <a:noFill/>
+        </p:spPr>
+        <p:txBody>
+          <a:bodyPr wrap="square">
+            <a:spAutoFit/>
+          </a:bodyPr>
+          <a:lstStyle/>
+          <a:p>
+            <a:r>
+              <a:rPr sz="1300" b="0">
+                <a:solidFill>
+                  <a:srgbClr val="333333"/>
+                </a:solidFill>
+                <a:latin typeface="Fira Sans"/>
+              </a:rPr>
+              <a:t>PySpark se usa con SQL o con sus propios DataFrames; Dask reparte operaciones estilo Pandas; Polars y DuckDB rinden en una sola máquina.</a:t>
+            </a:r>
+          </a:p>
+        </p:txBody>
+      </p:sp>
+    </p:spTree>
+  </p:cSld>
+  <p:clrMapOvr>
+    <a:masterClrMapping/>
+  </p:clrMapOvr>
+</p:sld>
+</file>
+
+<file path=ppt/slides/slide33.xml><?xml version="1.0" encoding="utf-8"?>
+<p:sld xmlns:a="http://schemas.openxmlformats.org/drawingml/2006/main" xmlns:p="http://schemas.openxmlformats.org/presentationml/2006/main" xmlns:r="http://schemas.openxmlformats.org/officeDocument/2006/relationships">
+  <p:cSld>
+    <p:spTree>
+      <p:nvGrpSpPr>
+        <p:cNvPr id="1" name=""/>
+        <p:cNvGrpSpPr/>
+        <p:nvPr/>
+      </p:nvGrpSpPr>
+      <p:grpSpPr/>
+      <p:sp>
+        <p:nvSpPr>
+          <p:cNvPr id="2" name="Rectangle 1"/>
+          <p:cNvSpPr/>
+          <p:nvPr/>
+        </p:nvSpPr>
+        <p:spPr>
+          <a:xfrm>
+            <a:off x="0" y="0"/>
+            <a:ext cx="9144000" cy="5138928"/>
+          </a:xfrm>
+          <a:prstGeom prst="rect">
+            <a:avLst/>
+          </a:prstGeom>
+          <a:solidFill>
+            <a:srgbClr val="FAFBFC"/>
+          </a:solidFill>
+          <a:ln>
+            <a:noFill/>
+          </a:ln>
+          <a:effectLst/>
+        </p:spPr>
+        <p:style>
+          <a:lnRef idx="1">
+            <a:schemeClr val="accent1"/>
+          </a:lnRef>
+          <a:fillRef idx="3">
+            <a:schemeClr val="accent1"/>
+          </a:fillRef>
+          <a:effectRef idx="2">
+            <a:schemeClr val="accent1"/>
+          </a:effectRef>
+          <a:fontRef idx="minor">
+            <a:schemeClr val="lt1"/>
+          </a:fontRef>
+        </p:style>
+        <p:txBody>
+          <a:bodyPr rtlCol="0" anchor="ctr"/>
+          <a:lstStyle/>
+          <a:p>
+            <a:pPr algn="ctr"/>
+          </a:p>
+        </p:txBody>
+      </p:sp>
+      <p:sp>
+        <p:nvSpPr>
+          <p:cNvPr id="3" name="TextBox 2"/>
+          <p:cNvSpPr txBox="1"/>
+          <p:nvPr/>
+        </p:nvSpPr>
+        <p:spPr>
+          <a:xfrm>
+            <a:off x="402336" y="301752"/>
+            <a:ext cx="8348472" cy="795528"/>
+          </a:xfrm>
+          <a:prstGeom prst="rect">
+            <a:avLst/>
+          </a:prstGeom>
+          <a:noFill/>
+        </p:spPr>
+        <p:txBody>
+          <a:bodyPr wrap="square">
+            <a:spAutoFit/>
+          </a:bodyPr>
+          <a:lstStyle/>
+          <a:p>
+            <a:r>
+              <a:rPr sz="2800" b="1">
+                <a:solidFill>
+                  <a:srgbClr val="0F0F0F"/>
+                </a:solidFill>
+                <a:latin typeface="Fira Sans"/>
+              </a:rPr>
+              <a:t>Síntesis</a:t>
+            </a:r>
+          </a:p>
+        </p:txBody>
+      </p:sp>
+      <p:sp>
+        <p:nvSpPr>
+          <p:cNvPr id="4" name="TextBox 3"/>
+          <p:cNvSpPr txBox="1"/>
+          <p:nvPr/>
+        </p:nvSpPr>
+        <p:spPr>
+          <a:xfrm>
+            <a:off x="704088" y="1353312"/>
+            <a:ext cx="7744968" cy="3300984"/>
+          </a:xfrm>
+          <a:prstGeom prst="rect">
+            <a:avLst/>
+          </a:prstGeom>
+          <a:noFill/>
+        </p:spPr>
+        <p:txBody>
+          <a:bodyPr wrap="square">
+            <a:spAutoFit/>
+          </a:bodyPr>
+          <a:lstStyle/>
+          <a:p>
+            <a:pPr>
+              <a:lnSpc>
+                <a:spcPct val="112000"/>
+              </a:lnSpc>
+              <a:spcAft>
+                <a:spcPts val="900"/>
+              </a:spcAft>
+            </a:pPr>
+            <a:r>
+              <a:rPr sz="1800" b="1">
+                <a:solidFill>
+                  <a:srgbClr val="E0A437"/>
+                </a:solidFill>
+                <a:latin typeface="Fira Sans"/>
+              </a:rPr>
+              <a:t>▸ </a:t>
+            </a:r>
+            <a:r>
+              <a:rPr sz="1800" b="0">
+                <a:solidFill>
+                  <a:srgbClr val="000000"/>
+                </a:solidFill>
+                <a:latin typeface="Fira Sans"/>
+              </a:rPr>
+              <a:t>Un modelo es una simplificación con decisiones incorporadas; estimarlo puede buscar inferencia o predicción.</a:t>
+            </a:r>
+          </a:p>
+          <a:p>
+            <a:pPr>
+              <a:lnSpc>
+                <a:spcPct val="112000"/>
+              </a:lnSpc>
+              <a:spcAft>
+                <a:spcPts val="900"/>
+              </a:spcAft>
+            </a:pPr>
+            <a:r>
+              <a:rPr sz="1800" b="1">
+                <a:solidFill>
+                  <a:srgbClr val="E0A437"/>
+                </a:solidFill>
+                <a:latin typeface="Fira Sans"/>
+              </a:rPr>
+              <a:t>▸ </a:t>
+            </a:r>
+            <a:r>
+              <a:rPr sz="1800" b="0">
+                <a:solidFill>
+                  <a:srgbClr val="000000"/>
+                </a:solidFill>
+                <a:latin typeface="Fira Sans"/>
+              </a:rPr>
+              <a:t>Las asociaciones se reportan como asociaciones: la causalidad exige más que datos observacionales.</a:t>
+            </a:r>
+          </a:p>
+          <a:p>
+            <a:pPr>
+              <a:lnSpc>
+                <a:spcPct val="112000"/>
+              </a:lnSpc>
+              <a:spcAft>
+                <a:spcPts val="900"/>
+              </a:spcAft>
+            </a:pPr>
+            <a:r>
+              <a:rPr sz="1800" b="1">
+                <a:solidFill>
+                  <a:srgbClr val="E0A437"/>
+                </a:solidFill>
+                <a:latin typeface="Fira Sans"/>
+              </a:rPr>
+              <a:t>▸ </a:t>
+            </a:r>
+            <a:r>
+              <a:rPr sz="1800" b="0">
+                <a:solidFill>
+                  <a:srgbClr val="000000"/>
+                </a:solidFill>
+                <a:latin typeface="Fira Sans"/>
+              </a:rPr>
+              <a:t>El tipo de la variable, no su dtype, determina qué resúmenes tienen sentido.</a:t>
+            </a:r>
+          </a:p>
+          <a:p>
+            <a:pPr>
+              <a:lnSpc>
+                <a:spcPct val="112000"/>
+              </a:lnSpc>
+              <a:spcAft>
+                <a:spcPts val="900"/>
+              </a:spcAft>
+            </a:pPr>
+            <a:r>
+              <a:rPr sz="1800" b="1">
+                <a:solidFill>
+                  <a:srgbClr val="E0A437"/>
+                </a:solidFill>
+                <a:latin typeface="Fira Sans"/>
+              </a:rPr>
+              <a:t>▸ </a:t>
+            </a:r>
+            <a:r>
+              <a:rPr sz="1800" b="0">
+                <a:solidFill>
+                  <a:srgbClr val="000000"/>
+                </a:solidFill>
+                <a:latin typeface="Fira Sans"/>
+              </a:rPr>
+              <a:t>Con distribuciones asimétricas, la mediana y los percentiles describen mejor lo típico que la media.</a:t>
+            </a:r>
+          </a:p>
+          <a:p>
+            <a:pPr>
+              <a:lnSpc>
+                <a:spcPct val="112000"/>
+              </a:lnSpc>
+              <a:spcAft>
+                <a:spcPts val="900"/>
+              </a:spcAft>
+            </a:pPr>
+            <a:r>
+              <a:rPr sz="1800" b="1">
+                <a:solidFill>
+                  <a:srgbClr val="E0A437"/>
+                </a:solidFill>
+                <a:latin typeface="Fira Sans"/>
+              </a:rPr>
+              <a:t>▸ </a:t>
+            </a:r>
+            <a:r>
+              <a:rPr sz="1800" b="1">
+                <a:solidFill>
+                  <a:srgbClr val="1D3557"/>
+                </a:solidFill>
+                <a:latin typeface="Fira Sans"/>
+              </a:rPr>
+              <a:t>Ante toda cifra resumen: ¿de quién habla este número? ¿Muestra, subgrupo o ciudad?</a:t>
+            </a:r>
+          </a:p>
+        </p:txBody>
+      </p:sp>
+    </p:spTree>
+  </p:cSld>
+  <p:clrMapOvr>
+    <a:masterClrMapping/>
+  </p:clrMapOvr>
+</p:sld>
+</file>
+
+<file path=ppt/slides/slide34.xml><?xml version="1.0" encoding="utf-8"?>
+<p:sld xmlns:a="http://schemas.openxmlformats.org/drawingml/2006/main" xmlns:p="http://schemas.openxmlformats.org/presentationml/2006/main" xmlns:r="http://schemas.openxmlformats.org/officeDocument/2006/relationships">
+  <p:cSld>
+    <p:spTree>
+      <p:nvGrpSpPr>
+        <p:cNvPr id="1" name=""/>
+        <p:cNvGrpSpPr/>
+        <p:nvPr/>
+      </p:nvGrpSpPr>
+      <p:grpSpPr/>
+      <p:sp>
+        <p:nvSpPr>
+          <p:cNvPr id="2" name="Rectangle 1"/>
+          <p:cNvSpPr/>
+          <p:nvPr/>
+        </p:nvSpPr>
+        <p:spPr>
+          <a:xfrm>
+            <a:off x="0" y="0"/>
+            <a:ext cx="9144000" cy="5138928"/>
+          </a:xfrm>
+          <a:prstGeom prst="rect">
+            <a:avLst/>
+          </a:prstGeom>
+          <a:solidFill>
+            <a:srgbClr val="FAFBFC"/>
+          </a:solidFill>
+          <a:ln>
+            <a:noFill/>
+          </a:ln>
+          <a:effectLst/>
+        </p:spPr>
+        <p:style>
+          <a:lnRef idx="1">
+            <a:schemeClr val="accent1"/>
+          </a:lnRef>
+          <a:fillRef idx="3">
+            <a:schemeClr val="accent1"/>
+          </a:fillRef>
+          <a:effectRef idx="2">
+            <a:schemeClr val="accent1"/>
+          </a:effectRef>
+          <a:fontRef idx="minor">
+            <a:schemeClr val="lt1"/>
+          </a:fontRef>
+        </p:style>
+        <p:txBody>
+          <a:bodyPr rtlCol="0" anchor="ctr"/>
+          <a:lstStyle/>
+          <a:p>
+            <a:pPr algn="ctr"/>
+          </a:p>
+        </p:txBody>
+      </p:sp>
+      <p:sp>
+        <p:nvSpPr>
+          <p:cNvPr id="3" name="TextBox 2"/>
+          <p:cNvSpPr txBox="1"/>
+          <p:nvPr/>
+        </p:nvSpPr>
+        <p:spPr>
+          <a:xfrm>
+            <a:off x="402336" y="301752"/>
+            <a:ext cx="8348472" cy="795528"/>
+          </a:xfrm>
+          <a:prstGeom prst="rect">
+            <a:avLst/>
+          </a:prstGeom>
+          <a:noFill/>
+        </p:spPr>
+        <p:txBody>
+          <a:bodyPr wrap="square">
+            <a:spAutoFit/>
+          </a:bodyPr>
+          <a:lstStyle/>
+          <a:p>
+            <a:r>
+              <a:rPr sz="2800" b="1">
+                <a:solidFill>
+                  <a:srgbClr val="0F0F0F"/>
+                </a:solidFill>
+                <a:latin typeface="Fira Sans"/>
+              </a:rPr>
+              <a:t>Segundo bloque: comienza la Tarea 1</a:t>
+            </a:r>
+          </a:p>
+        </p:txBody>
+      </p:sp>
+      <p:sp>
+        <p:nvSpPr>
+          <p:cNvPr id="4" name="TextBox 3"/>
+          <p:cNvSpPr txBox="1"/>
+          <p:nvPr/>
+        </p:nvSpPr>
+        <p:spPr>
+          <a:xfrm>
+            <a:off x="704088" y="1353312"/>
+            <a:ext cx="7744968" cy="3300984"/>
+          </a:xfrm>
+          <a:prstGeom prst="rect">
+            <a:avLst/>
+          </a:prstGeom>
+          <a:noFill/>
+        </p:spPr>
+        <p:txBody>
+          <a:bodyPr wrap="square">
+            <a:spAutoFit/>
+          </a:bodyPr>
+          <a:lstStyle/>
+          <a:p>
+            <a:pPr>
+              <a:lnSpc>
+                <a:spcPct val="112000"/>
+              </a:lnSpc>
+              <a:spcAft>
+                <a:spcPts val="900"/>
+              </a:spcAft>
+            </a:pPr>
+            <a:r>
+              <a:rPr sz="1800" b="1">
+                <a:solidFill>
+                  <a:srgbClr val="E0A437"/>
+                </a:solidFill>
+                <a:latin typeface="Fira Sans"/>
+              </a:rPr>
+              <a:t>▸ </a:t>
+            </a:r>
+            <a:r>
+              <a:rPr sz="1800" b="0">
+                <a:solidFill>
+                  <a:srgbClr val="000000"/>
+                </a:solidFill>
+                <a:latin typeface="Fira Sans"/>
+              </a:rPr>
+              <a:t>El retrato de tu comuna: cada pareja adopta una comuna del Gran Santiago.</a:t>
+            </a:r>
+          </a:p>
+          <a:p>
+            <a:pPr>
+              <a:lnSpc>
+                <a:spcPct val="112000"/>
+              </a:lnSpc>
+              <a:spcAft>
+                <a:spcPts val="500"/>
+              </a:spcAft>
+            </a:pPr>
+            <a:r>
+              <a:rPr sz="1400" b="0">
+                <a:solidFill>
+                  <a:srgbClr val="333333"/>
+                </a:solidFill>
+                <a:latin typeface="Fira Sans"/>
+              </a:rPr>
+              <a:t>     ◦  </a:t>
+            </a:r>
+            <a:r>
+              <a:rPr sz="1400" b="0">
+                <a:solidFill>
+                  <a:srgbClr val="333333"/>
+                </a:solidFill>
+                <a:latin typeface="Fira Sans"/>
+              </a:rPr>
+              <a:t>Hoy: elegir la comuna y construir su retrato numérico.</a:t>
+            </a:r>
+          </a:p>
+          <a:p>
+            <a:pPr>
+              <a:lnSpc>
+                <a:spcPct val="112000"/>
+              </a:lnSpc>
+              <a:spcAft>
+                <a:spcPts val="500"/>
+              </a:spcAft>
+            </a:pPr>
+            <a:r>
+              <a:rPr sz="1400" b="0">
+                <a:solidFill>
+                  <a:srgbClr val="333333"/>
+                </a:solidFill>
+                <a:latin typeface="Fira Sans"/>
+              </a:rPr>
+              <a:t>     ◦  </a:t>
+            </a:r>
+            <a:r>
+              <a:rPr sz="1400" b="0">
+                <a:solidFill>
+                  <a:srgbClr val="333333"/>
+                </a:solidFill>
+                <a:latin typeface="Fira Sans"/>
+              </a:rPr>
+              <a:t>Próxima clase: el retrato gráfico, con métodos de visualización.</a:t>
+            </a:r>
+          </a:p>
+          <a:p>
+            <a:pPr>
+              <a:lnSpc>
+                <a:spcPct val="112000"/>
+              </a:lnSpc>
+              <a:spcAft>
+                <a:spcPts val="500"/>
+              </a:spcAft>
+            </a:pPr>
+            <a:r>
+              <a:rPr sz="1400" b="0">
+                <a:solidFill>
+                  <a:srgbClr val="333333"/>
+                </a:solidFill>
+                <a:latin typeface="Fira Sans"/>
+              </a:rPr>
+              <a:t>     ◦  </a:t>
+            </a:r>
+            <a:r>
+              <a:rPr sz="1400" b="0">
+                <a:solidFill>
+                  <a:srgbClr val="333333"/>
+                </a:solidFill>
+                <a:latin typeface="Fira Sans"/>
+              </a:rPr>
+              <a:t>Entrega del retrato completo: jueves 10 de septiembre, por Aula.</a:t>
+            </a:r>
+          </a:p>
+          <a:p>
+            <a:pPr>
+              <a:lnSpc>
+                <a:spcPct val="112000"/>
+              </a:lnSpc>
+              <a:spcAft>
+                <a:spcPts val="900"/>
+              </a:spcAft>
+            </a:pPr>
+            <a:r>
+              <a:rPr sz="1800" b="1">
+                <a:solidFill>
+                  <a:srgbClr val="E0A437"/>
+                </a:solidFill>
+                <a:latin typeface="Fira Sans"/>
+              </a:rPr>
+              <a:t>▸ </a:t>
+            </a:r>
+            <a:r>
+              <a:rPr sz="1800" b="0">
+                <a:solidFill>
+                  <a:srgbClr val="000000"/>
+                </a:solidFill>
+                <a:latin typeface="Fira Sans"/>
+              </a:rPr>
+              <a:t>El enunciado está en evaluaciones/tareas/ y la guía de hoy en actividades/.</a:t>
+            </a:r>
+          </a:p>
+          <a:p>
+            <a:pPr>
+              <a:lnSpc>
+                <a:spcPct val="112000"/>
+              </a:lnSpc>
+              <a:spcAft>
+                <a:spcPts val="900"/>
+              </a:spcAft>
+            </a:pPr>
+            <a:r>
+              <a:rPr sz="1800" b="1">
+                <a:solidFill>
+                  <a:srgbClr val="E0A437"/>
+                </a:solidFill>
+                <a:latin typeface="Fira Sans"/>
+              </a:rPr>
+              <a:t>▸ </a:t>
+            </a:r>
+            <a:r>
+              <a:rPr sz="1800" b="1">
+                <a:solidFill>
+                  <a:srgbClr val="1D3557"/>
+                </a:solidFill>
+                <a:latin typeface="Fira Sans"/>
+              </a:rPr>
+              <a:t>Lo que avancen en este bloque ya es parte de la tarea.</a:t>
+            </a:r>
+          </a:p>
+        </p:txBody>
+      </p:sp>
+    </p:spTree>
+  </p:cSld>
+  <p:clrMapOvr>
+    <a:masterClrMapping/>
+  </p:clrMapOvr>
+</p:sld>
+</file>
+
+<file path=ppt/slides/slide35.xml><?xml version="1.0" encoding="utf-8"?>
+<p:sld xmlns:a="http://schemas.openxmlformats.org/drawingml/2006/main" xmlns:p="http://schemas.openxmlformats.org/presentationml/2006/main" xmlns:r="http://schemas.openxmlformats.org/officeDocument/2006/relationships">
+  <p:cSld>
+    <p:spTree>
+      <p:nvGrpSpPr>
+        <p:cNvPr id="1" name=""/>
+        <p:cNvGrpSpPr/>
+        <p:nvPr/>
+      </p:nvGrpSpPr>
+      <p:grpSpPr/>
+      <p:sp>
+        <p:nvSpPr>
+          <p:cNvPr id="2" name="Rectangle 1"/>
+          <p:cNvSpPr/>
+          <p:nvPr/>
+        </p:nvSpPr>
+        <p:spPr>
+          <a:xfrm>
+            <a:off x="0" y="0"/>
+            <a:ext cx="9144000" cy="5138928"/>
+          </a:xfrm>
+          <a:prstGeom prst="rect">
+            <a:avLst/>
+          </a:prstGeom>
+          <a:solidFill>
+            <a:srgbClr val="FAFBFC"/>
+          </a:solidFill>
+          <a:ln>
+            <a:noFill/>
+          </a:ln>
+          <a:effectLst/>
+        </p:spPr>
+        <p:style>
+          <a:lnRef idx="1">
+            <a:schemeClr val="accent1"/>
+          </a:lnRef>
+          <a:fillRef idx="3">
+            <a:schemeClr val="accent1"/>
+          </a:fillRef>
+          <a:effectRef idx="2">
+            <a:schemeClr val="accent1"/>
+          </a:effectRef>
+          <a:fontRef idx="minor">
+            <a:schemeClr val="lt1"/>
+          </a:fontRef>
+        </p:style>
+        <p:txBody>
+          <a:bodyPr rtlCol="0" anchor="ctr"/>
+          <a:lstStyle/>
+          <a:p>
+            <a:pPr algn="ctr"/>
+          </a:p>
+        </p:txBody>
+      </p:sp>
+      <p:sp>
+        <p:nvSpPr>
+          <p:cNvPr id="3" name="TextBox 2"/>
+          <p:cNvSpPr txBox="1"/>
+          <p:nvPr/>
+        </p:nvSpPr>
+        <p:spPr>
+          <a:xfrm>
+            <a:off x="402336" y="301752"/>
+            <a:ext cx="8348472" cy="795528"/>
+          </a:xfrm>
+          <a:prstGeom prst="rect">
+            <a:avLst/>
+          </a:prstGeom>
+          <a:noFill/>
+        </p:spPr>
+        <p:txBody>
+          <a:bodyPr wrap="square">
+            <a:spAutoFit/>
+          </a:bodyPr>
+          <a:lstStyle/>
+          <a:p>
+            <a:r>
+              <a:rPr sz="2800" b="1">
+                <a:solidFill>
+                  <a:srgbClr val="0F0F0F"/>
+                </a:solidFill>
+                <a:latin typeface="Fira Sans"/>
+              </a:rPr>
               <a:t>Referencias</a:t>
             </a:r>
           </a:p>
@@ -9387,7 +10090,7 @@
                 </a:solidFill>
                 <a:latin typeface="Fira Sans"/>
               </a:rPr>
-              <a:t>Correlación: los coeficientes de Pearson y de Spearman</a:t>
+              <a:t>El coeficiente de correlación de Pearson</a:t>
             </a:r>
           </a:p>
         </p:txBody>
@@ -9438,7 +10141,35 @@
                 </a:solidFill>
                 <a:latin typeface="Fira Sans"/>
               </a:rPr>
-              <a:t>La correlación cuantifica cuánto varían conjuntamente dos variables numéricas (Bruce, Bruce y Gedeck, 2020, cap. 1). Dos coeficientes, ambos entre -1 y 1:</a:t>
+              <a:t>Mide la asociación lineal entre dos variables numéricas: qué tan bien se ajustan los puntos a una recta. Toma valores entre -1 y 1 (Bruce, Bruce y Gedeck, 2020, cap. 1).</a:t>
+            </a:r>
+          </a:p>
+          <a:p>
+            <a:pPr>
+              <a:lnSpc>
+                <a:spcPct val="112000"/>
+              </a:lnSpc>
+              <a:spcAft>
+                <a:spcPts val="900"/>
+              </a:spcAft>
+            </a:pPr>
+            <a:r>
+              <a:rPr sz="1800" b="1">
+                <a:solidFill>
+                  <a:srgbClr val="E0A437"/>
+                </a:solidFill>
+                <a:latin typeface="Fira Sans"/>
+              </a:rPr>
+              <a:t>▸ </a:t>
+            </a:r>
+            <a:r>
+              <a:rPr sz="1800" b="0">
+                <a:solidFill>
+                  <a:srgbClr val="000000"/>
+                </a:solidFill>
+                <a:latin typeface="Fira Sans"/>
+              </a:rPr>
+              <a:t>Es la covarianza estandarizada:  r = cov(X, Y) / (σX · σY).</a:t>
             </a:r>
           </a:p>
           <a:p>
@@ -9466,7 +10197,7 @@
                 </a:solidFill>
                 <a:latin typeface="Fira Sans"/>
               </a:rPr>
-              <a:t>Pearson: mide asociación lineal, sobre los valores originales.</a:t>
+              <a:t>Cada punto aporta el producto de sus desviaciones respecto de la media, en unidades de desviación estándar.</a:t>
             </a:r>
           </a:p>
           <a:p>
@@ -9494,7 +10225,63 @@
                 </a:solidFill>
                 <a:latin typeface="Fira Sans"/>
               </a:rPr>
-              <a:t>Spearman: mide asociación monotónica, sobre los rangos; es robusto a valores extremos.</a:t>
+              <a:t>Un valor extremo entra multiplicando y puede dominar el resultado.</a:t>
+            </a:r>
+          </a:p>
+          <a:p>
+            <a:pPr>
+              <a:lnSpc>
+                <a:spcPct val="112000"/>
+              </a:lnSpc>
+              <a:spcAft>
+                <a:spcPts val="500"/>
+              </a:spcAft>
+            </a:pPr>
+            <a:r>
+              <a:rPr sz="1400" b="0">
+                <a:solidFill>
+                  <a:srgbClr val="333333"/>
+                </a:solidFill>
+                <a:latin typeface="Fira Sans"/>
+              </a:rPr>
+              <a:t>     ◦  </a:t>
+            </a:r>
+            <a:r>
+              <a:rPr sz="1400" b="0">
+                <a:solidFill>
+                  <a:srgbClr val="333333"/>
+                </a:solidFill>
+                <a:latin typeface="Fira Sans"/>
+              </a:rPr>
+              <a:t>Una relación curva produce un coeficiente bajo aunque la asociación sea fuerte.</a:t>
+            </a:r>
+          </a:p>
+          <a:p>
+            <a:pPr>
+              <a:lnSpc>
+                <a:spcPct val="112000"/>
+              </a:lnSpc>
+              <a:spcAft>
+                <a:spcPts val="500"/>
+              </a:spcAft>
+            </a:pPr>
+            <a:r>
+              <a:rPr sz="1400" b="0">
+                <a:solidFill>
+                  <a:srgbClr val="333333"/>
+                </a:solidFill>
+                <a:latin typeface="Fira Sans"/>
+              </a:rPr>
+              <a:t>     ◦  </a:t>
+            </a:r>
+            <a:r>
+              <a:rPr sz="1400" b="0">
+                <a:solidFill>
+                  <a:srgbClr val="333333"/>
+                </a:solidFill>
+                <a:latin typeface="Fira Sans"/>
+              </a:rPr>
+              <a:t>Transformar los datos (por ejemplo con logaritmo) cambia su valor.</a:t>
             </a:r>
           </a:p>
           <a:p>
@@ -9516,69 +10303,13 @@
               <a:t>▸ </a:t>
             </a:r>
             <a:r>
-              <a:rPr sz="1800" b="0">
-                <a:solidFill>
-                  <a:srgbClr val="000000"/>
-                </a:solidFill>
-                <a:latin typeface="Fira Sans"/>
-              </a:rPr>
-              <a:t>En la EOD, distancia y duración del viaje tienen Pearson 0,43 y Spearman 0,72.</a:t>
-            </a:r>
-          </a:p>
-          <a:p>
-            <a:pPr>
-              <a:lnSpc>
-                <a:spcPct val="112000"/>
-              </a:lnSpc>
-              <a:spcAft>
-                <a:spcPts val="500"/>
-              </a:spcAft>
-            </a:pPr>
-            <a:r>
-              <a:rPr sz="1400" b="0">
-                <a:solidFill>
-                  <a:srgbClr val="333333"/>
-                </a:solidFill>
-                <a:latin typeface="Fira Sans"/>
-              </a:rPr>
-              <a:t>     ◦  </a:t>
-            </a:r>
-            <a:r>
-              <a:rPr sz="1400" b="0">
-                <a:solidFill>
-                  <a:srgbClr val="333333"/>
-                </a:solidFill>
-                <a:latin typeface="Fira Sans"/>
-              </a:rPr>
-              <a:t>La relación es claramente creciente (Spearman alto), pero no lineal y con valores extremos (Pearson moderado).</a:t>
-            </a:r>
-          </a:p>
-          <a:p>
-            <a:pPr>
-              <a:lnSpc>
-                <a:spcPct val="112000"/>
-              </a:lnSpc>
-              <a:spcAft>
-                <a:spcPts val="900"/>
-              </a:spcAft>
-            </a:pPr>
-            <a:r>
               <a:rPr sz="1800" b="1">
                 <a:solidFill>
-                  <a:srgbClr val="E0A437"/>
-                </a:solidFill>
-                <a:latin typeface="Fira Sans"/>
-              </a:rPr>
-              <a:t>▸ </a:t>
-            </a:r>
-            <a:r>
-              <a:rPr sz="1800" b="1">
-                <a:solidFill>
                   <a:srgbClr val="1D3557"/>
                 </a:solidFill>
                 <a:latin typeface="Fira Sans"/>
               </a:rPr>
-              <a:t>Un coeficiente no reemplaza al gráfico: la estructura de la relación se mira.</a:t>
+              <a:t>Su cuadrado anticipa el R² de la regresión lineal (unidad 7).</a:t>
             </a:r>
           </a:p>
         </p:txBody>
@@ -9674,45 +10405,21 @@
                 </a:solidFill>
                 <a:latin typeface="Fira Sans"/>
               </a:rPr>
-              <a:t>La correlación, vista en los datos</a:t>
-            </a:r>
-          </a:p>
-        </p:txBody>
-      </p:sp>
-      <p:pic>
-        <p:nvPicPr>
-          <p:cNvPr id="4" name="Picture 3" descr="12_scatter_distancia_tiempo.png"/>
-          <p:cNvPicPr>
-            <a:picLocks noChangeAspect="1"/>
-          </p:cNvPicPr>
-          <p:nvPr/>
-        </p:nvPicPr>
-        <p:blipFill>
-          <a:blip r:embed="rId2"/>
-          <a:stretch>
-            <a:fillRect/>
-          </a:stretch>
-        </p:blipFill>
-        <p:spPr>
-          <a:xfrm>
-            <a:off x="2281014" y="1143000"/>
-            <a:ext cx="4581971" cy="3154680"/>
-          </a:xfrm>
-          <a:prstGeom prst="rect">
-            <a:avLst/>
-          </a:prstGeom>
-        </p:spPr>
-      </p:pic>
-      <p:sp>
-        <p:nvSpPr>
-          <p:cNvPr id="5" name="TextBox 4"/>
+              <a:t>El coeficiente de Spearman</a:t>
+            </a:r>
+          </a:p>
+        </p:txBody>
+      </p:sp>
+      <p:sp>
+        <p:nvSpPr>
+          <p:cNvPr id="4" name="TextBox 3"/>
           <p:cNvSpPr txBox="1"/>
           <p:nvPr/>
         </p:nvSpPr>
         <p:spPr>
           <a:xfrm>
-            <a:off x="704088" y="4434840"/>
-            <a:ext cx="7744968" cy="457200"/>
+            <a:off x="704088" y="1353312"/>
+            <a:ext cx="7744968" cy="3300984"/>
           </a:xfrm>
           <a:prstGeom prst="rect">
             <a:avLst/>
@@ -9725,14 +10432,143 @@
           </a:bodyPr>
           <a:lstStyle/>
           <a:p>
-            <a:r>
-              <a:rPr sz="1300" b="0">
+            <a:pPr>
+              <a:lnSpc>
+                <a:spcPct val="112000"/>
+              </a:lnSpc>
+              <a:spcAft>
+                <a:spcPts val="900"/>
+              </a:spcAft>
+            </a:pPr>
+            <a:r>
+              <a:rPr sz="1800" b="1">
+                <a:solidFill>
+                  <a:srgbClr val="E0A437"/>
+                </a:solidFill>
+                <a:latin typeface="Fira Sans"/>
+              </a:rPr>
+              <a:t>▸ </a:t>
+            </a:r>
+            <a:r>
+              <a:rPr sz="1800" b="0">
+                <a:solidFill>
+                  <a:srgbClr val="000000"/>
+                </a:solidFill>
+                <a:latin typeface="Fira Sans"/>
+              </a:rPr>
+              <a:t>Es el mismo Pearson, pero calculado sobre los rangos: la posición de cada valor al ordenar la variable.</a:t>
+            </a:r>
+          </a:p>
+          <a:p>
+            <a:pPr>
+              <a:lnSpc>
+                <a:spcPct val="112000"/>
+              </a:lnSpc>
+              <a:spcAft>
+                <a:spcPts val="900"/>
+              </a:spcAft>
+            </a:pPr>
+            <a:r>
+              <a:rPr sz="1800" b="1">
+                <a:solidFill>
+                  <a:srgbClr val="E0A437"/>
+                </a:solidFill>
+                <a:latin typeface="Fira Sans"/>
+              </a:rPr>
+              <a:t>▸ </a:t>
+            </a:r>
+            <a:r>
+              <a:rPr sz="1800" b="0">
+                <a:solidFill>
+                  <a:srgbClr val="000000"/>
+                </a:solidFill>
+                <a:latin typeface="Fira Sans"/>
+              </a:rPr>
+              <a:t>Sin empates equivale a:  ρ = 1 - 6·Σd² / (n·(n² - 1)),  con d la diferencia de rangos de cada caso.</a:t>
+            </a:r>
+          </a:p>
+          <a:p>
+            <a:pPr>
+              <a:lnSpc>
+                <a:spcPct val="112000"/>
+              </a:lnSpc>
+              <a:spcAft>
+                <a:spcPts val="500"/>
+              </a:spcAft>
+            </a:pPr>
+            <a:r>
+              <a:rPr sz="1400" b="0">
                 <a:solidFill>
                   <a:srgbClr val="333333"/>
                 </a:solidFill>
                 <a:latin typeface="Fira Sans"/>
               </a:rPr>
-              <a:t>La mediana por tramo sube de forma sostenida (Spearman 0,72) pero no recta y con extremos (Pearson 0,43): la diferencia entre coeficientes ya es información.</a:t>
+              <a:t>     ◦  </a:t>
+            </a:r>
+            <a:r>
+              <a:rPr sz="1400" b="0">
+                <a:solidFill>
+                  <a:srgbClr val="333333"/>
+                </a:solidFill>
+                <a:latin typeface="Fira Sans"/>
+              </a:rPr>
+              <a:t>Los valores 5, 12, 8 y 200 tienen rangos 1, 3, 2 y 4: el 200 pasa a ser solo el cuarto.</a:t>
+            </a:r>
+          </a:p>
+          <a:p>
+            <a:pPr>
+              <a:lnSpc>
+                <a:spcPct val="112000"/>
+              </a:lnSpc>
+              <a:spcAft>
+                <a:spcPts val="500"/>
+              </a:spcAft>
+            </a:pPr>
+            <a:r>
+              <a:rPr sz="1400" b="0">
+                <a:solidFill>
+                  <a:srgbClr val="333333"/>
+                </a:solidFill>
+                <a:latin typeface="Fira Sans"/>
+              </a:rPr>
+              <a:t>     ◦  </a:t>
+            </a:r>
+            <a:r>
+              <a:rPr sz="1400" b="0">
+                <a:solidFill>
+                  <a:srgbClr val="333333"/>
+                </a:solidFill>
+                <a:latin typeface="Fira Sans"/>
+              </a:rPr>
+              <a:t>Mide si al crecer una variable crece la otra, sin importar la forma de la relación.</a:t>
+            </a:r>
+          </a:p>
+          <a:p>
+            <a:pPr>
+              <a:lnSpc>
+                <a:spcPct val="112000"/>
+              </a:lnSpc>
+              <a:spcAft>
+                <a:spcPts val="900"/>
+              </a:spcAft>
+            </a:pPr>
+            <a:r>
+              <a:rPr sz="1800" b="1">
+                <a:solidFill>
+                  <a:srgbClr val="E0A437"/>
+                </a:solidFill>
+                <a:latin typeface="Fira Sans"/>
+              </a:rPr>
+              <a:t>▸ </a:t>
+            </a:r>
+            <a:r>
+              <a:rPr sz="1800" b="1">
+                <a:solidFill>
+                  <a:srgbClr val="1D3557"/>
+                </a:solidFill>
+                <a:latin typeface="Fira Sans"/>
+              </a:rPr>
+              <a:t>Consecuencias: robusto a extremos, invariante ante transformaciones monótonas, y válido para variables ordinales, donde Pearson no tiene sentido.</a:t>
             </a:r>
           </a:p>
         </p:txBody>
@@ -9828,21 +10664,45 @@
                 </a:solidFill>
                 <a:latin typeface="Fira Sans"/>
               </a:rPr>
-              <a:t>Correlación y causalidad</a:t>
-            </a:r>
-          </a:p>
-        </p:txBody>
-      </p:sp>
-      <p:sp>
-        <p:nvSpPr>
-          <p:cNvPr id="4" name="TextBox 3"/>
+              <a:t>Spearman es Pearson sobre los rangos</a:t>
+            </a:r>
+          </a:p>
+        </p:txBody>
+      </p:sp>
+      <p:pic>
+        <p:nvPicPr>
+          <p:cNvPr id="4" name="Picture 3" descr="15_rangos_spearman.png"/>
+          <p:cNvPicPr>
+            <a:picLocks noChangeAspect="1"/>
+          </p:cNvPicPr>
+          <p:nvPr/>
+        </p:nvPicPr>
+        <p:blipFill>
+          <a:blip r:embed="rId2"/>
+          <a:stretch>
+            <a:fillRect/>
+          </a:stretch>
+        </p:blipFill>
+        <p:spPr>
+          <a:xfrm>
+            <a:off x="1611454" y="1143000"/>
+            <a:ext cx="5921091" cy="3154680"/>
+          </a:xfrm>
+          <a:prstGeom prst="rect">
+            <a:avLst/>
+          </a:prstGeom>
+        </p:spPr>
+      </p:pic>
+      <p:sp>
+        <p:nvSpPr>
+          <p:cNvPr id="5" name="TextBox 4"/>
           <p:cNvSpPr txBox="1"/>
           <p:nvPr/>
         </p:nvSpPr>
         <p:spPr>
           <a:xfrm>
-            <a:off x="704088" y="1353312"/>
-            <a:ext cx="7744968" cy="3300984"/>
+            <a:off x="704088" y="4434840"/>
+            <a:ext cx="7744968" cy="457200"/>
           </a:xfrm>
           <a:prstGeom prst="rect">
             <a:avLst/>
@@ -9855,143 +10715,14 @@
           </a:bodyPr>
           <a:lstStyle/>
           <a:p>
-            <a:pPr>
-              <a:lnSpc>
-                <a:spcPct val="112000"/>
-              </a:lnSpc>
-              <a:spcAft>
-                <a:spcPts val="900"/>
-              </a:spcAft>
-            </a:pPr>
-            <a:r>
-              <a:rPr sz="1800" b="1">
-                <a:solidFill>
-                  <a:srgbClr val="E0A437"/>
-                </a:solidFill>
-                <a:latin typeface="Fira Sans"/>
-              </a:rPr>
-              <a:t>▸ </a:t>
-            </a:r>
-            <a:r>
-              <a:rPr sz="1800" b="0">
-                <a:solidFill>
-                  <a:srgbClr val="000000"/>
-                </a:solidFill>
-                <a:latin typeface="Fira Sans"/>
-              </a:rPr>
-              <a:t>Causalidad: intervenir X cambiaría Y. Es una afirmación más fuerte que la asociación.</a:t>
-            </a:r>
-          </a:p>
-          <a:p>
-            <a:pPr>
-              <a:lnSpc>
-                <a:spcPct val="112000"/>
-              </a:lnSpc>
-              <a:spcAft>
-                <a:spcPts val="500"/>
-              </a:spcAft>
-            </a:pPr>
-            <a:r>
-              <a:rPr sz="1400" b="0">
+            <a:r>
+              <a:rPr sz="1300" b="0">
                 <a:solidFill>
                   <a:srgbClr val="333333"/>
                 </a:solidFill>
                 <a:latin typeface="Fira Sans"/>
               </a:rPr>
-              <a:t>     ◦  </a:t>
-            </a:r>
-            <a:r>
-              <a:rPr sz="1400" b="0">
-                <a:solidFill>
-                  <a:srgbClr val="333333"/>
-                </a:solidFill>
-                <a:latin typeface="Fira Sans"/>
-              </a:rPr>
-              <a:t>Una asociación observada admite varias explicaciones: X causa Y, Y causa X, o una variable de confusión Z afecta a ambas.</a:t>
-            </a:r>
-          </a:p>
-          <a:p>
-            <a:pPr>
-              <a:lnSpc>
-                <a:spcPct val="112000"/>
-              </a:lnSpc>
-              <a:spcAft>
-                <a:spcPts val="500"/>
-              </a:spcAft>
-            </a:pPr>
-            <a:r>
-              <a:rPr sz="1400" b="0">
-                <a:solidFill>
-                  <a:srgbClr val="333333"/>
-                </a:solidFill>
-                <a:latin typeface="Fira Sans"/>
-              </a:rPr>
-              <a:t>     ◦  </a:t>
-            </a:r>
-            <a:r>
-              <a:rPr sz="1400" b="0">
-                <a:solidFill>
-                  <a:srgbClr val="333333"/>
-                </a:solidFill>
-                <a:latin typeface="Fira Sans"/>
-              </a:rPr>
-              <a:t>Los datos observacionales, como los de una encuesta, muestran asociación; no bastan para establecer causalidad.</a:t>
-            </a:r>
-          </a:p>
-          <a:p>
-            <a:pPr>
-              <a:lnSpc>
-                <a:spcPct val="112000"/>
-              </a:lnSpc>
-              <a:spcAft>
-                <a:spcPts val="500"/>
-              </a:spcAft>
-            </a:pPr>
-            <a:r>
-              <a:rPr sz="1400" b="0">
-                <a:solidFill>
-                  <a:srgbClr val="333333"/>
-                </a:solidFill>
-                <a:latin typeface="Fira Sans"/>
-              </a:rPr>
-              <a:t>     ◦  </a:t>
-            </a:r>
-            <a:r>
-              <a:rPr sz="1400" b="0">
-                <a:solidFill>
-                  <a:srgbClr val="333333"/>
-                </a:solidFill>
-                <a:latin typeface="Fira Sans"/>
-              </a:rPr>
-              <a:t>La inferencia causal tiene métodos propios; este curso no los cubre.</a:t>
-            </a:r>
-          </a:p>
-          <a:p>
-            <a:pPr>
-              <a:lnSpc>
-                <a:spcPct val="112000"/>
-              </a:lnSpc>
-              <a:spcAft>
-                <a:spcPts val="900"/>
-              </a:spcAft>
-            </a:pPr>
-            <a:r>
-              <a:rPr sz="1800" b="1">
-                <a:solidFill>
-                  <a:srgbClr val="E0A437"/>
-                </a:solidFill>
-                <a:latin typeface="Fira Sans"/>
-              </a:rPr>
-              <a:t>▸ </a:t>
-            </a:r>
-            <a:r>
-              <a:rPr sz="1800" b="1">
-                <a:solidFill>
-                  <a:srgbClr val="1D3557"/>
-                </a:solidFill>
-                <a:latin typeface="Fira Sans"/>
-              </a:rPr>
-              <a:t>Regla de trabajo: una asociación se reporta como asociación, sin verbos causales que los datos no respaldan.</a:t>
+              <a:t>Los mismos 60 viajes en ambos paneles: al pasar a rangos, la curva se endereza y el extremo deja de dominar.</a:t>
             </a:r>
           </a:p>
         </p:txBody>
@@ -10087,14 +10818,14 @@
                 </a:solidFill>
                 <a:latin typeface="Fira Sans"/>
               </a:rPr>
-              <a:t>Tipos de datos</a:t>
+              <a:t>La correlación, vista en los datos completos</a:t>
             </a:r>
           </a:p>
         </p:txBody>
       </p:sp>
       <p:pic>
         <p:nvPicPr>
-          <p:cNvPr id="4" name="Picture 3" descr="11_diagrama_tipos.png"/>
+          <p:cNvPr id="4" name="Picture 3" descr="12_scatter_distancia_tiempo.png"/>
           <p:cNvPicPr>
             <a:picLocks noChangeAspect="1"/>
           </p:cNvPicPr>
@@ -10108,8 +10839,8 @@
         </p:blipFill>
         <p:spPr>
           <a:xfrm>
-            <a:off x="2065807" y="1143000"/>
-            <a:ext cx="5012385" cy="3154680"/>
+            <a:off x="2281014" y="1143000"/>
+            <a:ext cx="4581971" cy="3154680"/>
           </a:xfrm>
           <a:prstGeom prst="rect">
             <a:avLst/>
@@ -10145,7 +10876,7 @@
                 </a:solidFill>
                 <a:latin typeface="Fira Sans"/>
               </a:rPr>
-              <a:t>El tipo de la variable determina qué operaciones tienen sentido (Bruce, Bruce y Gedeck, 2020, cap. 1).</a:t>
+              <a:t>La mediana por tramo sube de forma sostenida (Spearman 0,76) pero no recta y con extremos (Pearson 0,43).</a:t>
             </a:r>
           </a:p>
         </p:txBody>

--- a/presentaciones/clase02_pandas_eda.pptx
+++ b/presentaciones/clase02_pandas_eda.pptx
@@ -39,7 +39,6 @@
     <p:sldId id="287" r:id="rId38"/>
     <p:sldId id="288" r:id="rId39"/>
     <p:sldId id="289" r:id="rId40"/>
-    <p:sldId id="290" r:id="rId41"/>
   </p:sldIdLst>
   <p:sldSz cx="9144000" cy="5138928" type="screen4x3"/>
   <p:notesSz cx="6858000" cy="9144000"/>
@@ -3389,7 +3388,7 @@
                 </a:solidFill>
                 <a:latin typeface="Fira Sans"/>
               </a:rPr>
-              <a:t>¿Cuándo usar cada coeficiente?</a:t>
+              <a:t>Correlación y causalidad</a:t>
             </a:r>
           </a:p>
         </p:txBody>
@@ -3440,7 +3439,91 @@
                 </a:solidFill>
                 <a:latin typeface="Fira Sans"/>
               </a:rPr>
-              <a:t>Pearson: variables numéricas, relación aproximadamente recta en el gráfico, sin extremos dominantes.</a:t>
+              <a:t>Causalidad: intervenir X cambiaría Y. Es una afirmación más fuerte que la asociación.</a:t>
+            </a:r>
+          </a:p>
+          <a:p>
+            <a:pPr>
+              <a:lnSpc>
+                <a:spcPct val="112000"/>
+              </a:lnSpc>
+              <a:spcAft>
+                <a:spcPts val="500"/>
+              </a:spcAft>
+            </a:pPr>
+            <a:r>
+              <a:rPr sz="1400" b="0">
+                <a:solidFill>
+                  <a:srgbClr val="333333"/>
+                </a:solidFill>
+                <a:latin typeface="Fira Sans"/>
+              </a:rPr>
+              <a:t>     ◦  </a:t>
+            </a:r>
+            <a:r>
+              <a:rPr sz="1400" b="0">
+                <a:solidFill>
+                  <a:srgbClr val="333333"/>
+                </a:solidFill>
+                <a:latin typeface="Fira Sans"/>
+              </a:rPr>
+              <a:t>Una asociación observada admite varias explicaciones: X causa Y, Y causa X, o una variable de confusión Z afecta a ambas.</a:t>
+            </a:r>
+          </a:p>
+          <a:p>
+            <a:pPr>
+              <a:lnSpc>
+                <a:spcPct val="112000"/>
+              </a:lnSpc>
+              <a:spcAft>
+                <a:spcPts val="500"/>
+              </a:spcAft>
+            </a:pPr>
+            <a:r>
+              <a:rPr sz="1400" b="0">
+                <a:solidFill>
+                  <a:srgbClr val="333333"/>
+                </a:solidFill>
+                <a:latin typeface="Fira Sans"/>
+              </a:rPr>
+              <a:t>     ◦  </a:t>
+            </a:r>
+            <a:r>
+              <a:rPr sz="1400" b="0">
+                <a:solidFill>
+                  <a:srgbClr val="333333"/>
+                </a:solidFill>
+                <a:latin typeface="Fira Sans"/>
+              </a:rPr>
+              <a:t>Los datos observacionales, como los de una encuesta, muestran asociación; no bastan para establecer causalidad.</a:t>
+            </a:r>
+          </a:p>
+          <a:p>
+            <a:pPr>
+              <a:lnSpc>
+                <a:spcPct val="112000"/>
+              </a:lnSpc>
+              <a:spcAft>
+                <a:spcPts val="500"/>
+              </a:spcAft>
+            </a:pPr>
+            <a:r>
+              <a:rPr sz="1400" b="0">
+                <a:solidFill>
+                  <a:srgbClr val="333333"/>
+                </a:solidFill>
+                <a:latin typeface="Fira Sans"/>
+              </a:rPr>
+              <a:t>     ◦  </a:t>
+            </a:r>
+            <a:r>
+              <a:rPr sz="1400" b="0">
+                <a:solidFill>
+                  <a:srgbClr val="333333"/>
+                </a:solidFill>
+                <a:latin typeface="Fira Sans"/>
+              </a:rPr>
+              <a:t>La inferencia causal tiene métodos propios; este curso no los cubre.</a:t>
             </a:r>
           </a:p>
           <a:p>
@@ -3462,125 +3545,13 @@
               <a:t>▸ </a:t>
             </a:r>
             <a:r>
-              <a:rPr sz="1800" b="0">
-                <a:solidFill>
-                  <a:srgbClr val="000000"/>
-                </a:solidFill>
-                <a:latin typeface="Fira Sans"/>
-              </a:rPr>
-              <a:t>Spearman: distribuciones asimétricas o con extremos, relaciones curvas pero crecientes, o variables ordinales.</a:t>
-            </a:r>
-          </a:p>
-          <a:p>
-            <a:pPr>
-              <a:lnSpc>
-                <a:spcPct val="112000"/>
-              </a:lnSpc>
-              <a:spcAft>
-                <a:spcPts val="900"/>
-              </a:spcAft>
-            </a:pPr>
-            <a:r>
               <a:rPr sz="1800" b="1">
                 <a:solidFill>
-                  <a:srgbClr val="E0A437"/>
-                </a:solidFill>
-                <a:latin typeface="Fira Sans"/>
-              </a:rPr>
-              <a:t>▸ </a:t>
-            </a:r>
-            <a:r>
-              <a:rPr sz="1800" b="0">
-                <a:solidFill>
-                  <a:srgbClr val="000000"/>
-                </a:solidFill>
-                <a:latin typeface="Fira Sans"/>
-              </a:rPr>
-              <a:t>En el EDA conviene calcular ambos: la diferencia entre ellos es un diagnóstico.</a:t>
-            </a:r>
-          </a:p>
-          <a:p>
-            <a:pPr>
-              <a:lnSpc>
-                <a:spcPct val="112000"/>
-              </a:lnSpc>
-              <a:spcAft>
-                <a:spcPts val="500"/>
-              </a:spcAft>
-            </a:pPr>
-            <a:r>
-              <a:rPr sz="1400" b="0">
-                <a:solidFill>
-                  <a:srgbClr val="333333"/>
-                </a:solidFill>
-                <a:latin typeface="Fira Sans"/>
-              </a:rPr>
-              <a:t>     ◦  </a:t>
-            </a:r>
-            <a:r>
-              <a:rPr sz="1400" b="0">
-                <a:solidFill>
-                  <a:srgbClr val="333333"/>
-                </a:solidFill>
-                <a:latin typeface="Fira Sans"/>
-              </a:rPr>
-              <a:t>Distancia y duración: Pearson 0,43 contra Spearman 0,76. La brecha indica relación monótona pero no lineal.</a:t>
-            </a:r>
-          </a:p>
-          <a:p>
-            <a:pPr>
-              <a:lnSpc>
-                <a:spcPct val="112000"/>
-              </a:lnSpc>
-              <a:spcAft>
-                <a:spcPts val="500"/>
-              </a:spcAft>
-            </a:pPr>
-            <a:r>
-              <a:rPr sz="1400" b="0">
-                <a:solidFill>
-                  <a:srgbClr val="333333"/>
-                </a:solidFill>
-                <a:latin typeface="Fira Sans"/>
-              </a:rPr>
-              <a:t>     ◦  </a:t>
-            </a:r>
-            <a:r>
-              <a:rPr sz="1400" b="0">
-                <a:solidFill>
-                  <a:srgbClr val="333333"/>
-                </a:solidFill>
-                <a:latin typeface="Fira Sans"/>
-              </a:rPr>
-              <a:t>Tras aplicar logaritmo a ambas variables, Pearson sube a 0,73, casi igual a Spearman: el logaritmo endereza la curva.</a:t>
-            </a:r>
-          </a:p>
-          <a:p>
-            <a:pPr>
-              <a:lnSpc>
-                <a:spcPct val="112000"/>
-              </a:lnSpc>
-              <a:spcAft>
-                <a:spcPts val="900"/>
-              </a:spcAft>
-            </a:pPr>
-            <a:r>
-              <a:rPr sz="1800" b="1">
-                <a:solidFill>
-                  <a:srgbClr val="E0A437"/>
-                </a:solidFill>
-                <a:latin typeface="Fira Sans"/>
-              </a:rPr>
-              <a:t>▸ </a:t>
-            </a:r>
-            <a:r>
-              <a:rPr sz="1800" b="1">
-                <a:solidFill>
                   <a:srgbClr val="1D3557"/>
                 </a:solidFill>
                 <a:latin typeface="Fira Sans"/>
               </a:rPr>
-              <a:t>Si los dos coeficientes difieren mucho, mire el gráfico antes de reportar cualquiera.</a:t>
+              <a:t>Regla de trabajo: una asociación se reporta como asociación, sin verbos causales que los datos no respaldan.</a:t>
             </a:r>
           </a:p>
         </p:txBody>
@@ -3676,21 +3647,45 @@
                 </a:solidFill>
                 <a:latin typeface="Fira Sans"/>
               </a:rPr>
-              <a:t>Correlación y causalidad</a:t>
-            </a:r>
-          </a:p>
-        </p:txBody>
-      </p:sp>
-      <p:sp>
-        <p:nvSpPr>
-          <p:cNvPr id="4" name="TextBox 3"/>
+              <a:t>Tipos de datos</a:t>
+            </a:r>
+          </a:p>
+        </p:txBody>
+      </p:sp>
+      <p:pic>
+        <p:nvPicPr>
+          <p:cNvPr id="4" name="Picture 3" descr="11_diagrama_tipos.png"/>
+          <p:cNvPicPr>
+            <a:picLocks noChangeAspect="1"/>
+          </p:cNvPicPr>
+          <p:nvPr/>
+        </p:nvPicPr>
+        <p:blipFill>
+          <a:blip r:embed="rId2"/>
+          <a:stretch>
+            <a:fillRect/>
+          </a:stretch>
+        </p:blipFill>
+        <p:spPr>
+          <a:xfrm>
+            <a:off x="2065807" y="1143000"/>
+            <a:ext cx="5012385" cy="3154680"/>
+          </a:xfrm>
+          <a:prstGeom prst="rect">
+            <a:avLst/>
+          </a:prstGeom>
+        </p:spPr>
+      </p:pic>
+      <p:sp>
+        <p:nvSpPr>
+          <p:cNvPr id="5" name="TextBox 4"/>
           <p:cNvSpPr txBox="1"/>
           <p:nvPr/>
         </p:nvSpPr>
         <p:spPr>
           <a:xfrm>
-            <a:off x="704088" y="1353312"/>
-            <a:ext cx="7744968" cy="3300984"/>
+            <a:off x="704088" y="4434840"/>
+            <a:ext cx="7744968" cy="457200"/>
           </a:xfrm>
           <a:prstGeom prst="rect">
             <a:avLst/>
@@ -3703,143 +3698,14 @@
           </a:bodyPr>
           <a:lstStyle/>
           <a:p>
-            <a:pPr>
-              <a:lnSpc>
-                <a:spcPct val="112000"/>
-              </a:lnSpc>
-              <a:spcAft>
-                <a:spcPts val="900"/>
-              </a:spcAft>
-            </a:pPr>
-            <a:r>
-              <a:rPr sz="1800" b="1">
-                <a:solidFill>
-                  <a:srgbClr val="E0A437"/>
-                </a:solidFill>
-                <a:latin typeface="Fira Sans"/>
-              </a:rPr>
-              <a:t>▸ </a:t>
-            </a:r>
-            <a:r>
-              <a:rPr sz="1800" b="0">
-                <a:solidFill>
-                  <a:srgbClr val="000000"/>
-                </a:solidFill>
-                <a:latin typeface="Fira Sans"/>
-              </a:rPr>
-              <a:t>Causalidad: intervenir X cambiaría Y. Es una afirmación más fuerte que la asociación.</a:t>
-            </a:r>
-          </a:p>
-          <a:p>
-            <a:pPr>
-              <a:lnSpc>
-                <a:spcPct val="112000"/>
-              </a:lnSpc>
-              <a:spcAft>
-                <a:spcPts val="500"/>
-              </a:spcAft>
-            </a:pPr>
-            <a:r>
-              <a:rPr sz="1400" b="0">
+            <a:r>
+              <a:rPr sz="1300" b="0">
                 <a:solidFill>
                   <a:srgbClr val="333333"/>
                 </a:solidFill>
                 <a:latin typeface="Fira Sans"/>
               </a:rPr>
-              <a:t>     ◦  </a:t>
-            </a:r>
-            <a:r>
-              <a:rPr sz="1400" b="0">
-                <a:solidFill>
-                  <a:srgbClr val="333333"/>
-                </a:solidFill>
-                <a:latin typeface="Fira Sans"/>
-              </a:rPr>
-              <a:t>Una asociación observada admite varias explicaciones: X causa Y, Y causa X, o una variable de confusión Z afecta a ambas.</a:t>
-            </a:r>
-          </a:p>
-          <a:p>
-            <a:pPr>
-              <a:lnSpc>
-                <a:spcPct val="112000"/>
-              </a:lnSpc>
-              <a:spcAft>
-                <a:spcPts val="500"/>
-              </a:spcAft>
-            </a:pPr>
-            <a:r>
-              <a:rPr sz="1400" b="0">
-                <a:solidFill>
-                  <a:srgbClr val="333333"/>
-                </a:solidFill>
-                <a:latin typeface="Fira Sans"/>
-              </a:rPr>
-              <a:t>     ◦  </a:t>
-            </a:r>
-            <a:r>
-              <a:rPr sz="1400" b="0">
-                <a:solidFill>
-                  <a:srgbClr val="333333"/>
-                </a:solidFill>
-                <a:latin typeface="Fira Sans"/>
-              </a:rPr>
-              <a:t>Los datos observacionales, como los de una encuesta, muestran asociación; no bastan para establecer causalidad.</a:t>
-            </a:r>
-          </a:p>
-          <a:p>
-            <a:pPr>
-              <a:lnSpc>
-                <a:spcPct val="112000"/>
-              </a:lnSpc>
-              <a:spcAft>
-                <a:spcPts val="500"/>
-              </a:spcAft>
-            </a:pPr>
-            <a:r>
-              <a:rPr sz="1400" b="0">
-                <a:solidFill>
-                  <a:srgbClr val="333333"/>
-                </a:solidFill>
-                <a:latin typeface="Fira Sans"/>
-              </a:rPr>
-              <a:t>     ◦  </a:t>
-            </a:r>
-            <a:r>
-              <a:rPr sz="1400" b="0">
-                <a:solidFill>
-                  <a:srgbClr val="333333"/>
-                </a:solidFill>
-                <a:latin typeface="Fira Sans"/>
-              </a:rPr>
-              <a:t>La inferencia causal tiene métodos propios; este curso no los cubre.</a:t>
-            </a:r>
-          </a:p>
-          <a:p>
-            <a:pPr>
-              <a:lnSpc>
-                <a:spcPct val="112000"/>
-              </a:lnSpc>
-              <a:spcAft>
-                <a:spcPts val="900"/>
-              </a:spcAft>
-            </a:pPr>
-            <a:r>
-              <a:rPr sz="1800" b="1">
-                <a:solidFill>
-                  <a:srgbClr val="E0A437"/>
-                </a:solidFill>
-                <a:latin typeface="Fira Sans"/>
-              </a:rPr>
-              <a:t>▸ </a:t>
-            </a:r>
-            <a:r>
-              <a:rPr sz="1800" b="1">
-                <a:solidFill>
-                  <a:srgbClr val="1D3557"/>
-                </a:solidFill>
-                <a:latin typeface="Fira Sans"/>
-              </a:rPr>
-              <a:t>Regla de trabajo: una asociación se reporta como asociación, sin verbos causales que los datos no respaldan.</a:t>
+              <a:t>El tipo de la variable determina qué operaciones tienen sentido (Bruce, Bruce y Gedeck, 2020, cap. 1).</a:t>
             </a:r>
           </a:p>
         </p:txBody>
@@ -3935,45 +3801,21 @@
                 </a:solidFill>
                 <a:latin typeface="Fira Sans"/>
               </a:rPr>
-              <a:t>Tipos de datos</a:t>
-            </a:r>
-          </a:p>
-        </p:txBody>
-      </p:sp>
-      <p:pic>
-        <p:nvPicPr>
-          <p:cNvPr id="4" name="Picture 3" descr="11_diagrama_tipos.png"/>
-          <p:cNvPicPr>
-            <a:picLocks noChangeAspect="1"/>
-          </p:cNvPicPr>
-          <p:nvPr/>
-        </p:nvPicPr>
-        <p:blipFill>
-          <a:blip r:embed="rId2"/>
-          <a:stretch>
-            <a:fillRect/>
-          </a:stretch>
-        </p:blipFill>
-        <p:spPr>
-          <a:xfrm>
-            <a:off x="2065807" y="1143000"/>
-            <a:ext cx="5012385" cy="3154680"/>
-          </a:xfrm>
-          <a:prstGeom prst="rect">
-            <a:avLst/>
-          </a:prstGeom>
-        </p:spPr>
-      </p:pic>
-      <p:sp>
-        <p:nvSpPr>
-          <p:cNvPr id="5" name="TextBox 4"/>
+              <a:t>El tipo estadístico no es el tipo computacional</a:t>
+            </a:r>
+          </a:p>
+        </p:txBody>
+      </p:sp>
+      <p:sp>
+        <p:nvSpPr>
+          <p:cNvPr id="4" name="TextBox 3"/>
           <p:cNvSpPr txBox="1"/>
           <p:nvPr/>
         </p:nvSpPr>
         <p:spPr>
           <a:xfrm>
-            <a:off x="704088" y="4434840"/>
-            <a:ext cx="7744968" cy="457200"/>
+            <a:off x="704088" y="1353312"/>
+            <a:ext cx="7744968" cy="3300984"/>
           </a:xfrm>
           <a:prstGeom prst="rect">
             <a:avLst/>
@@ -3986,14 +3828,143 @@
           </a:bodyPr>
           <a:lstStyle/>
           <a:p>
-            <a:r>
-              <a:rPr sz="1300" b="0">
+            <a:pPr>
+              <a:lnSpc>
+                <a:spcPct val="112000"/>
+              </a:lnSpc>
+              <a:spcAft>
+                <a:spcPts val="900"/>
+              </a:spcAft>
+            </a:pPr>
+            <a:r>
+              <a:rPr sz="1800" b="1">
+                <a:solidFill>
+                  <a:srgbClr val="E0A437"/>
+                </a:solidFill>
+                <a:latin typeface="Fira Sans"/>
+              </a:rPr>
+              <a:t>▸ </a:t>
+            </a:r>
+            <a:r>
+              <a:rPr sz="1800" b="0">
+                <a:solidFill>
+                  <a:srgbClr val="000000"/>
+                </a:solidFill>
+                <a:latin typeface="Fira Sans"/>
+              </a:rPr>
+              <a:t>En la EOD el sexo viene codificado 1 o 2: para Pandas es un entero (int64).</a:t>
+            </a:r>
+          </a:p>
+          <a:p>
+            <a:pPr>
+              <a:lnSpc>
+                <a:spcPct val="112000"/>
+              </a:lnSpc>
+              <a:spcAft>
+                <a:spcPts val="900"/>
+              </a:spcAft>
+            </a:pPr>
+            <a:r>
+              <a:rPr sz="1800" b="1">
+                <a:solidFill>
+                  <a:srgbClr val="E0A437"/>
+                </a:solidFill>
+                <a:latin typeface="Fira Sans"/>
+              </a:rPr>
+              <a:t>▸ </a:t>
+            </a:r>
+            <a:r>
+              <a:rPr sz="1800" b="0">
+                <a:solidFill>
+                  <a:srgbClr val="000000"/>
+                </a:solidFill>
+                <a:latin typeface="Fira Sans"/>
+              </a:rPr>
+              <a:t>El tipo computacional permite operar; el tipo estadístico decide si la operación significa algo.</a:t>
+            </a:r>
+          </a:p>
+          <a:p>
+            <a:pPr>
+              <a:lnSpc>
+                <a:spcPct val="112000"/>
+              </a:lnSpc>
+              <a:spcAft>
+                <a:spcPts val="500"/>
+              </a:spcAft>
+            </a:pPr>
+            <a:r>
+              <a:rPr sz="1400" b="0">
                 <a:solidFill>
                   <a:srgbClr val="333333"/>
                 </a:solidFill>
                 <a:latin typeface="Fira Sans"/>
               </a:rPr>
-              <a:t>El tipo de la variable determina qué operaciones tienen sentido (Bruce, Bruce y Gedeck, 2020, cap. 1).</a:t>
+              <a:t>     ◦  </a:t>
+            </a:r>
+            <a:r>
+              <a:rPr sz="1400" b="0">
+                <a:solidFill>
+                  <a:srgbClr val="333333"/>
+                </a:solidFill>
+                <a:latin typeface="Fira Sans"/>
+              </a:rPr>
+              <a:t>El promedio de Sexo en la EOD es 1,53: aritméticamente correcto, sin significado.</a:t>
+            </a:r>
+          </a:p>
+          <a:p>
+            <a:pPr>
+              <a:lnSpc>
+                <a:spcPct val="112000"/>
+              </a:lnSpc>
+              <a:spcAft>
+                <a:spcPts val="500"/>
+              </a:spcAft>
+            </a:pPr>
+            <a:r>
+              <a:rPr sz="1400" b="0">
+                <a:solidFill>
+                  <a:srgbClr val="333333"/>
+                </a:solidFill>
+                <a:latin typeface="Fira Sans"/>
+              </a:rPr>
+              <a:t>     ◦  </a:t>
+            </a:r>
+            <a:r>
+              <a:rPr sz="1400" b="0">
+                <a:solidFill>
+                  <a:srgbClr val="333333"/>
+                </a:solidFill>
+                <a:latin typeface="Fira Sans"/>
+              </a:rPr>
+              <a:t>El promedio de Edad sí es interpretable: la variable es numérica.</a:t>
+            </a:r>
+          </a:p>
+          <a:p>
+            <a:pPr>
+              <a:lnSpc>
+                <a:spcPct val="112000"/>
+              </a:lnSpc>
+              <a:spcAft>
+                <a:spcPts val="900"/>
+              </a:spcAft>
+            </a:pPr>
+            <a:r>
+              <a:rPr sz="1800" b="1">
+                <a:solidFill>
+                  <a:srgbClr val="E0A437"/>
+                </a:solidFill>
+                <a:latin typeface="Fira Sans"/>
+              </a:rPr>
+              <a:t>▸ </a:t>
+            </a:r>
+            <a:r>
+              <a:rPr sz="1800" b="1">
+                <a:solidFill>
+                  <a:srgbClr val="1D3557"/>
+                </a:solidFill>
+                <a:latin typeface="Fira Sans"/>
+              </a:rPr>
+              <a:t>Identificar el tipo de cada variable es un paso del análisis, no una formalidad.</a:t>
             </a:r>
           </a:p>
         </p:txBody>
@@ -4089,7 +4060,7 @@
                 </a:solidFill>
                 <a:latin typeface="Fira Sans"/>
               </a:rPr>
-              <a:t>El tipo estadístico no es el tipo computacional</a:t>
+              <a:t>El análisis exploratorio de datos</a:t>
             </a:r>
           </a:p>
         </p:txBody>
@@ -4140,7 +4111,7 @@
                 </a:solidFill>
                 <a:latin typeface="Fira Sans"/>
               </a:rPr>
-              <a:t>En la EOD el sexo viene codificado 1 o 2: para Pandas es un entero (int64).</a:t>
+              <a:t>La etapa en que se examinan los datos antes de modelarlos (Tukey, 1977).</a:t>
             </a:r>
           </a:p>
           <a:p>
@@ -4168,7 +4139,7 @@
                 </a:solidFill>
                 <a:latin typeface="Fira Sans"/>
               </a:rPr>
-              <a:t>El tipo computacional permite operar; el tipo estadístico decide si la operación significa algo.</a:t>
+              <a:t>Responde cuatro tipos de pregunta:</a:t>
             </a:r>
           </a:p>
           <a:p>
@@ -4196,7 +4167,7 @@
                 </a:solidFill>
                 <a:latin typeface="Fira Sans"/>
               </a:rPr>
-              <a:t>El promedio de Sexo en la EOD es 1,53: aritméticamente correcto, sin significado.</a:t>
+              <a:t>La forma: cómo se distribuye cada variable.</a:t>
             </a:r>
           </a:p>
           <a:p>
@@ -4224,7 +4195,63 @@
                 </a:solidFill>
                 <a:latin typeface="Fira Sans"/>
               </a:rPr>
-              <a:t>El promedio de Edad sí es interpretable: la variable es numérica.</a:t>
+              <a:t>Lo típico y lo extremo: qué es frecuente y qué es anómalo.</a:t>
+            </a:r>
+          </a:p>
+          <a:p>
+            <a:pPr>
+              <a:lnSpc>
+                <a:spcPct val="112000"/>
+              </a:lnSpc>
+              <a:spcAft>
+                <a:spcPts val="500"/>
+              </a:spcAft>
+            </a:pPr>
+            <a:r>
+              <a:rPr sz="1400" b="0">
+                <a:solidFill>
+                  <a:srgbClr val="333333"/>
+                </a:solidFill>
+                <a:latin typeface="Fira Sans"/>
+              </a:rPr>
+              <a:t>     ◦  </a:t>
+            </a:r>
+            <a:r>
+              <a:rPr sz="1400" b="0">
+                <a:solidFill>
+                  <a:srgbClr val="333333"/>
+                </a:solidFill>
+                <a:latin typeface="Fira Sans"/>
+              </a:rPr>
+              <a:t>Lo que falta: qué datos están ausentes y con qué patrón.</a:t>
+            </a:r>
+          </a:p>
+          <a:p>
+            <a:pPr>
+              <a:lnSpc>
+                <a:spcPct val="112000"/>
+              </a:lnSpc>
+              <a:spcAft>
+                <a:spcPts val="500"/>
+              </a:spcAft>
+            </a:pPr>
+            <a:r>
+              <a:rPr sz="1400" b="0">
+                <a:solidFill>
+                  <a:srgbClr val="333333"/>
+                </a:solidFill>
+                <a:latin typeface="Fira Sans"/>
+              </a:rPr>
+              <a:t>     ◦  </a:t>
+            </a:r>
+            <a:r>
+              <a:rPr sz="1400" b="0">
+                <a:solidFill>
+                  <a:srgbClr val="333333"/>
+                </a:solidFill>
+                <a:latin typeface="Fira Sans"/>
+              </a:rPr>
+              <a:t>Las relaciones: qué variables se asocian con qué otras.</a:t>
             </a:r>
           </a:p>
           <a:p>
@@ -4246,13 +4273,41 @@
               <a:t>▸ </a:t>
             </a:r>
             <a:r>
+              <a:rPr sz="1800" b="0">
+                <a:solidFill>
+                  <a:srgbClr val="000000"/>
+                </a:solidFill>
+                <a:latin typeface="Fira Sans"/>
+              </a:rPr>
+              <a:t>Genera hipótesis; el análisis confirmatorio (unidad 5) las pone a prueba.</a:t>
+            </a:r>
+          </a:p>
+          <a:p>
+            <a:pPr>
+              <a:lnSpc>
+                <a:spcPct val="112000"/>
+              </a:lnSpc>
+              <a:spcAft>
+                <a:spcPts val="900"/>
+              </a:spcAft>
+            </a:pPr>
+            <a:r>
               <a:rPr sz="1800" b="1">
                 <a:solidFill>
+                  <a:srgbClr val="E0A437"/>
+                </a:solidFill>
+                <a:latin typeface="Fira Sans"/>
+              </a:rPr>
+              <a:t>▸ </a:t>
+            </a:r>
+            <a:r>
+              <a:rPr sz="1800" b="1">
+                <a:solidFill>
                   <a:srgbClr val="1D3557"/>
                 </a:solidFill>
                 <a:latin typeface="Fira Sans"/>
               </a:rPr>
-              <a:t>Identificar el tipo de cada variable es un paso del análisis, no una formalidad.</a:t>
+              <a:t>Una pregunta transversal para toda cifra resumen: ¿de quién habla este número? ¿De la muestra, de un subgrupo, de la ciudad?</a:t>
             </a:r>
           </a:p>
         </p:txBody>
@@ -4290,7 +4345,7 @@
             <a:avLst/>
           </a:prstGeom>
           <a:solidFill>
-            <a:srgbClr val="FAFBFC"/>
+            <a:srgbClr val="1D3557"/>
           </a:solidFill>
           <a:ln>
             <a:noFill/>
@@ -4327,8 +4382,8 @@
         </p:nvSpPr>
         <p:spPr>
           <a:xfrm>
-            <a:off x="402336" y="301752"/>
-            <a:ext cx="8348472" cy="795528"/>
+            <a:off x="603504" y="1847088"/>
+            <a:ext cx="7946136" cy="1399032"/>
           </a:xfrm>
           <a:prstGeom prst="rect">
             <a:avLst/>
@@ -4342,260 +4397,24 @@
           <a:lstStyle/>
           <a:p>
             <a:r>
-              <a:rPr sz="2800" b="1">
-                <a:solidFill>
-                  <a:srgbClr val="0F0F0F"/>
-                </a:solidFill>
-                <a:latin typeface="Fira Sans"/>
-              </a:rPr>
-              <a:t>El análisis exploratorio de datos</a:t>
-            </a:r>
-          </a:p>
-        </p:txBody>
-      </p:sp>
-      <p:sp>
-        <p:nvSpPr>
-          <p:cNvPr id="4" name="TextBox 3"/>
-          <p:cNvSpPr txBox="1"/>
-          <p:nvPr/>
-        </p:nvSpPr>
-        <p:spPr>
-          <a:xfrm>
-            <a:off x="704088" y="1353312"/>
-            <a:ext cx="7744968" cy="3300984"/>
-          </a:xfrm>
-          <a:prstGeom prst="rect">
-            <a:avLst/>
-          </a:prstGeom>
-          <a:noFill/>
-        </p:spPr>
-        <p:txBody>
-          <a:bodyPr wrap="square">
-            <a:spAutoFit/>
-          </a:bodyPr>
-          <a:lstStyle/>
-          <a:p>
-            <a:pPr>
-              <a:lnSpc>
-                <a:spcPct val="112000"/>
-              </a:lnSpc>
-              <a:spcAft>
-                <a:spcPts val="900"/>
-              </a:spcAft>
-            </a:pPr>
-            <a:r>
-              <a:rPr sz="1800" b="1">
+              <a:rPr sz="3400" b="1">
+                <a:solidFill>
+                  <a:srgbClr val="FFFFFF"/>
+                </a:solidFill>
+                <a:latin typeface="Fira Sans"/>
+              </a:rPr>
+              <a:t>Los datos</a:t>
+            </a:r>
+          </a:p>
+          <a:p>
+            <a:r>
+              <a:rPr sz="1800" b="0">
                 <a:solidFill>
                   <a:srgbClr val="E0A437"/>
                 </a:solidFill>
                 <a:latin typeface="Fira Sans"/>
               </a:rPr>
-              <a:t>▸ </a:t>
-            </a:r>
-            <a:r>
-              <a:rPr sz="1800" b="0">
-                <a:solidFill>
-                  <a:srgbClr val="000000"/>
-                </a:solidFill>
-                <a:latin typeface="Fira Sans"/>
-              </a:rPr>
-              <a:t>La etapa en que se examinan los datos antes de modelarlos (Tukey, 1977).</a:t>
-            </a:r>
-          </a:p>
-          <a:p>
-            <a:pPr>
-              <a:lnSpc>
-                <a:spcPct val="112000"/>
-              </a:lnSpc>
-              <a:spcAft>
-                <a:spcPts val="900"/>
-              </a:spcAft>
-            </a:pPr>
-            <a:r>
-              <a:rPr sz="1800" b="1">
-                <a:solidFill>
-                  <a:srgbClr val="E0A437"/>
-                </a:solidFill>
-                <a:latin typeface="Fira Sans"/>
-              </a:rPr>
-              <a:t>▸ </a:t>
-            </a:r>
-            <a:r>
-              <a:rPr sz="1800" b="0">
-                <a:solidFill>
-                  <a:srgbClr val="000000"/>
-                </a:solidFill>
-                <a:latin typeface="Fira Sans"/>
-              </a:rPr>
-              <a:t>Responde cuatro tipos de pregunta:</a:t>
-            </a:r>
-          </a:p>
-          <a:p>
-            <a:pPr>
-              <a:lnSpc>
-                <a:spcPct val="112000"/>
-              </a:lnSpc>
-              <a:spcAft>
-                <a:spcPts val="500"/>
-              </a:spcAft>
-            </a:pPr>
-            <a:r>
-              <a:rPr sz="1400" b="0">
-                <a:solidFill>
-                  <a:srgbClr val="333333"/>
-                </a:solidFill>
-                <a:latin typeface="Fira Sans"/>
-              </a:rPr>
-              <a:t>     ◦  </a:t>
-            </a:r>
-            <a:r>
-              <a:rPr sz="1400" b="0">
-                <a:solidFill>
-                  <a:srgbClr val="333333"/>
-                </a:solidFill>
-                <a:latin typeface="Fira Sans"/>
-              </a:rPr>
-              <a:t>La forma: cómo se distribuye cada variable.</a:t>
-            </a:r>
-          </a:p>
-          <a:p>
-            <a:pPr>
-              <a:lnSpc>
-                <a:spcPct val="112000"/>
-              </a:lnSpc>
-              <a:spcAft>
-                <a:spcPts val="500"/>
-              </a:spcAft>
-            </a:pPr>
-            <a:r>
-              <a:rPr sz="1400" b="0">
-                <a:solidFill>
-                  <a:srgbClr val="333333"/>
-                </a:solidFill>
-                <a:latin typeface="Fira Sans"/>
-              </a:rPr>
-              <a:t>     ◦  </a:t>
-            </a:r>
-            <a:r>
-              <a:rPr sz="1400" b="0">
-                <a:solidFill>
-                  <a:srgbClr val="333333"/>
-                </a:solidFill>
-                <a:latin typeface="Fira Sans"/>
-              </a:rPr>
-              <a:t>Lo típico y lo extremo: qué es frecuente y qué es anómalo.</a:t>
-            </a:r>
-          </a:p>
-          <a:p>
-            <a:pPr>
-              <a:lnSpc>
-                <a:spcPct val="112000"/>
-              </a:lnSpc>
-              <a:spcAft>
-                <a:spcPts val="500"/>
-              </a:spcAft>
-            </a:pPr>
-            <a:r>
-              <a:rPr sz="1400" b="0">
-                <a:solidFill>
-                  <a:srgbClr val="333333"/>
-                </a:solidFill>
-                <a:latin typeface="Fira Sans"/>
-              </a:rPr>
-              <a:t>     ◦  </a:t>
-            </a:r>
-            <a:r>
-              <a:rPr sz="1400" b="0">
-                <a:solidFill>
-                  <a:srgbClr val="333333"/>
-                </a:solidFill>
-                <a:latin typeface="Fira Sans"/>
-              </a:rPr>
-              <a:t>Lo que falta: qué datos están ausentes y con qué patrón.</a:t>
-            </a:r>
-          </a:p>
-          <a:p>
-            <a:pPr>
-              <a:lnSpc>
-                <a:spcPct val="112000"/>
-              </a:lnSpc>
-              <a:spcAft>
-                <a:spcPts val="500"/>
-              </a:spcAft>
-            </a:pPr>
-            <a:r>
-              <a:rPr sz="1400" b="0">
-                <a:solidFill>
-                  <a:srgbClr val="333333"/>
-                </a:solidFill>
-                <a:latin typeface="Fira Sans"/>
-              </a:rPr>
-              <a:t>     ◦  </a:t>
-            </a:r>
-            <a:r>
-              <a:rPr sz="1400" b="0">
-                <a:solidFill>
-                  <a:srgbClr val="333333"/>
-                </a:solidFill>
-                <a:latin typeface="Fira Sans"/>
-              </a:rPr>
-              <a:t>Las relaciones: qué variables se asocian con qué otras.</a:t>
-            </a:r>
-          </a:p>
-          <a:p>
-            <a:pPr>
-              <a:lnSpc>
-                <a:spcPct val="112000"/>
-              </a:lnSpc>
-              <a:spcAft>
-                <a:spcPts val="900"/>
-              </a:spcAft>
-            </a:pPr>
-            <a:r>
-              <a:rPr sz="1800" b="1">
-                <a:solidFill>
-                  <a:srgbClr val="E0A437"/>
-                </a:solidFill>
-                <a:latin typeface="Fira Sans"/>
-              </a:rPr>
-              <a:t>▸ </a:t>
-            </a:r>
-            <a:r>
-              <a:rPr sz="1800" b="0">
-                <a:solidFill>
-                  <a:srgbClr val="000000"/>
-                </a:solidFill>
-                <a:latin typeface="Fira Sans"/>
-              </a:rPr>
-              <a:t>Genera hipótesis; el análisis confirmatorio (unidad 5) las pone a prueba.</a:t>
-            </a:r>
-          </a:p>
-          <a:p>
-            <a:pPr>
-              <a:lnSpc>
-                <a:spcPct val="112000"/>
-              </a:lnSpc>
-              <a:spcAft>
-                <a:spcPts val="900"/>
-              </a:spcAft>
-            </a:pPr>
-            <a:r>
-              <a:rPr sz="1800" b="1">
-                <a:solidFill>
-                  <a:srgbClr val="E0A437"/>
-                </a:solidFill>
-                <a:latin typeface="Fira Sans"/>
-              </a:rPr>
-              <a:t>▸ </a:t>
-            </a:r>
-            <a:r>
-              <a:rPr sz="1800" b="1">
-                <a:solidFill>
-                  <a:srgbClr val="1D3557"/>
-                </a:solidFill>
-                <a:latin typeface="Fira Sans"/>
-              </a:rPr>
-              <a:t>Una pregunta transversal para toda cifra resumen: ¿de quién habla este número? ¿De la muestra, de un subgrupo, de la ciudad?</a:t>
+              <a:t>Encuesta Origen Destino de Santiago 2012</a:t>
             </a:r>
           </a:p>
         </p:txBody>
@@ -4633,7 +4452,7 @@
             <a:avLst/>
           </a:prstGeom>
           <a:solidFill>
-            <a:srgbClr val="1D3557"/>
+            <a:srgbClr val="FAFBFC"/>
           </a:solidFill>
           <a:ln>
             <a:noFill/>
@@ -4670,8 +4489,8 @@
         </p:nvSpPr>
         <p:spPr>
           <a:xfrm>
-            <a:off x="603504" y="1847088"/>
-            <a:ext cx="7946136" cy="1399032"/>
+            <a:off x="402336" y="301752"/>
+            <a:ext cx="8348472" cy="795528"/>
           </a:xfrm>
           <a:prstGeom prst="rect">
             <a:avLst/>
@@ -4685,24 +4504,176 @@
           <a:lstStyle/>
           <a:p>
             <a:r>
-              <a:rPr sz="3400" b="1">
-                <a:solidFill>
-                  <a:srgbClr val="FFFFFF"/>
-                </a:solidFill>
-                <a:latin typeface="Fira Sans"/>
-              </a:rPr>
-              <a:t>Los datos</a:t>
-            </a:r>
-          </a:p>
-          <a:p>
+              <a:rPr sz="2800" b="1">
+                <a:solidFill>
+                  <a:srgbClr val="0F0F0F"/>
+                </a:solidFill>
+                <a:latin typeface="Fira Sans"/>
+              </a:rPr>
+              <a:t>La EOD 2012</a:t>
+            </a:r>
+          </a:p>
+        </p:txBody>
+      </p:sp>
+      <p:sp>
+        <p:nvSpPr>
+          <p:cNvPr id="4" name="TextBox 3"/>
+          <p:cNvSpPr txBox="1"/>
+          <p:nvPr/>
+        </p:nvSpPr>
+        <p:spPr>
+          <a:xfrm>
+            <a:off x="704088" y="1353312"/>
+            <a:ext cx="7744968" cy="3300984"/>
+          </a:xfrm>
+          <a:prstGeom prst="rect">
+            <a:avLst/>
+          </a:prstGeom>
+          <a:noFill/>
+        </p:spPr>
+        <p:txBody>
+          <a:bodyPr wrap="square">
+            <a:spAutoFit/>
+          </a:bodyPr>
+          <a:lstStyle/>
+          <a:p>
+            <a:pPr>
+              <a:lnSpc>
+                <a:spcPct val="112000"/>
+              </a:lnSpc>
+              <a:spcAft>
+                <a:spcPts val="900"/>
+              </a:spcAft>
+            </a:pPr>
+            <a:r>
+              <a:rPr sz="1800" b="1">
+                <a:solidFill>
+                  <a:srgbClr val="E0A437"/>
+                </a:solidFill>
+                <a:latin typeface="Fira Sans"/>
+              </a:rPr>
+              <a:t>▸ </a:t>
+            </a:r>
             <a:r>
               <a:rPr sz="1800" b="0">
                 <a:solidFill>
+                  <a:srgbClr val="000000"/>
+                </a:solidFill>
+                <a:latin typeface="Fira Sans"/>
+              </a:rPr>
+              <a:t>Encuesta de movilidad del Gran Santiago (SECTRA y U. Alberto Hurtado).</a:t>
+            </a:r>
+          </a:p>
+          <a:p>
+            <a:pPr>
+              <a:lnSpc>
+                <a:spcPct val="112000"/>
+              </a:lnSpc>
+              <a:spcAft>
+                <a:spcPts val="900"/>
+              </a:spcAft>
+            </a:pPr>
+            <a:r>
+              <a:rPr sz="1800" b="1">
+                <a:solidFill>
                   <a:srgbClr val="E0A437"/>
                 </a:solidFill>
                 <a:latin typeface="Fira Sans"/>
               </a:rPr>
-              <a:t>Encuesta Origen Destino de Santiago 2012</a:t>
+              <a:t>▸ </a:t>
+            </a:r>
+            <a:r>
+              <a:rPr sz="1800" b="0">
+                <a:solidFill>
+                  <a:srgbClr val="000000"/>
+                </a:solidFill>
+                <a:latin typeface="Fira Sans"/>
+              </a:rPr>
+              <a:t>Registra todos los viajes de un día de los hogares encuestados.</a:t>
+            </a:r>
+          </a:p>
+          <a:p>
+            <a:pPr>
+              <a:lnSpc>
+                <a:spcPct val="112000"/>
+              </a:lnSpc>
+              <a:spcAft>
+                <a:spcPts val="500"/>
+              </a:spcAft>
+            </a:pPr>
+            <a:r>
+              <a:rPr sz="1400" b="0">
+                <a:solidFill>
+                  <a:srgbClr val="333333"/>
+                </a:solidFill>
+                <a:latin typeface="Fira Sans"/>
+              </a:rPr>
+              <a:t>     ◦  </a:t>
+            </a:r>
+            <a:r>
+              <a:rPr sz="1400" b="0">
+                <a:solidFill>
+                  <a:srgbClr val="333333"/>
+                </a:solidFill>
+                <a:latin typeface="Fira Sans"/>
+              </a:rPr>
+              <a:t>18.264 hogares, 60.054 personas, 113.591 viajes.</a:t>
+            </a:r>
+          </a:p>
+          <a:p>
+            <a:pPr>
+              <a:lnSpc>
+                <a:spcPct val="112000"/>
+              </a:lnSpc>
+              <a:spcAft>
+                <a:spcPts val="500"/>
+              </a:spcAft>
+            </a:pPr>
+            <a:r>
+              <a:rPr sz="1400" b="0">
+                <a:solidFill>
+                  <a:srgbClr val="333333"/>
+                </a:solidFill>
+                <a:latin typeface="Fira Sans"/>
+              </a:rPr>
+              <a:t>     ◦  </a:t>
+            </a:r>
+            <a:r>
+              <a:rPr sz="1400" b="0">
+                <a:solidFill>
+                  <a:srgbClr val="333333"/>
+                </a:solidFill>
+                <a:latin typeface="Fira Sans"/>
+              </a:rPr>
+              <a:t>Se usa en la planificación de transporte de la ciudad.</a:t>
+            </a:r>
+          </a:p>
+          <a:p>
+            <a:pPr>
+              <a:lnSpc>
+                <a:spcPct val="112000"/>
+              </a:lnSpc>
+              <a:spcAft>
+                <a:spcPts val="900"/>
+              </a:spcAft>
+            </a:pPr>
+            <a:r>
+              <a:rPr sz="1800" b="1">
+                <a:solidFill>
+                  <a:srgbClr val="E0A437"/>
+                </a:solidFill>
+                <a:latin typeface="Fira Sans"/>
+              </a:rPr>
+              <a:t>▸ </a:t>
+            </a:r>
+            <a:r>
+              <a:rPr sz="1800" b="1">
+                <a:solidFill>
+                  <a:srgbClr val="1D3557"/>
+                </a:solidFill>
+                <a:latin typeface="Fira Sans"/>
+              </a:rPr>
+              <a:t>El mismo diseño relacional de la Casen, el Censo o la ENUSC.</a:t>
             </a:r>
           </a:p>
         </p:txBody>
@@ -4798,21 +4769,45 @@
                 </a:solidFill>
                 <a:latin typeface="Fira Sans"/>
               </a:rPr>
-              <a:t>La EOD 2012</a:t>
-            </a:r>
-          </a:p>
-        </p:txBody>
-      </p:sp>
-      <p:sp>
-        <p:nvSpPr>
-          <p:cNvPr id="4" name="TextBox 3"/>
+              <a:t>Una encuesta, varias tablas</a:t>
+            </a:r>
+          </a:p>
+        </p:txBody>
+      </p:sp>
+      <p:pic>
+        <p:nvPicPr>
+          <p:cNvPr id="4" name="Picture 3" descr="05_diagrama_tablas.png"/>
+          <p:cNvPicPr>
+            <a:picLocks noChangeAspect="1"/>
+          </p:cNvPicPr>
+          <p:nvPr/>
+        </p:nvPicPr>
+        <p:blipFill>
+          <a:blip r:embed="rId2"/>
+          <a:stretch>
+            <a:fillRect/>
+          </a:stretch>
+        </p:blipFill>
+        <p:spPr>
+          <a:xfrm>
+            <a:off x="1553651" y="1143000"/>
+            <a:ext cx="6036697" cy="3154680"/>
+          </a:xfrm>
+          <a:prstGeom prst="rect">
+            <a:avLst/>
+          </a:prstGeom>
+        </p:spPr>
+      </p:pic>
+      <p:sp>
+        <p:nvSpPr>
+          <p:cNvPr id="5" name="TextBox 4"/>
           <p:cNvSpPr txBox="1"/>
           <p:nvPr/>
         </p:nvSpPr>
         <p:spPr>
           <a:xfrm>
-            <a:off x="704088" y="1353312"/>
-            <a:ext cx="7744968" cy="3300984"/>
+            <a:off x="704088" y="4434840"/>
+            <a:ext cx="7744968" cy="457200"/>
           </a:xfrm>
           <a:prstGeom prst="rect">
             <a:avLst/>
@@ -4825,143 +4820,14 @@
           </a:bodyPr>
           <a:lstStyle/>
           <a:p>
-            <a:pPr>
-              <a:lnSpc>
-                <a:spcPct val="112000"/>
-              </a:lnSpc>
-              <a:spcAft>
-                <a:spcPts val="900"/>
-              </a:spcAft>
-            </a:pPr>
-            <a:r>
-              <a:rPr sz="1800" b="1">
-                <a:solidFill>
-                  <a:srgbClr val="E0A437"/>
-                </a:solidFill>
-                <a:latin typeface="Fira Sans"/>
-              </a:rPr>
-              <a:t>▸ </a:t>
-            </a:r>
-            <a:r>
-              <a:rPr sz="1800" b="0">
-                <a:solidFill>
-                  <a:srgbClr val="000000"/>
-                </a:solidFill>
-                <a:latin typeface="Fira Sans"/>
-              </a:rPr>
-              <a:t>Encuesta de movilidad del Gran Santiago (SECTRA y U. Alberto Hurtado).</a:t>
-            </a:r>
-          </a:p>
-          <a:p>
-            <a:pPr>
-              <a:lnSpc>
-                <a:spcPct val="112000"/>
-              </a:lnSpc>
-              <a:spcAft>
-                <a:spcPts val="900"/>
-              </a:spcAft>
-            </a:pPr>
-            <a:r>
-              <a:rPr sz="1800" b="1">
-                <a:solidFill>
-                  <a:srgbClr val="E0A437"/>
-                </a:solidFill>
-                <a:latin typeface="Fira Sans"/>
-              </a:rPr>
-              <a:t>▸ </a:t>
-            </a:r>
-            <a:r>
-              <a:rPr sz="1800" b="0">
-                <a:solidFill>
-                  <a:srgbClr val="000000"/>
-                </a:solidFill>
-                <a:latin typeface="Fira Sans"/>
-              </a:rPr>
-              <a:t>Registra todos los viajes de un día de los hogares encuestados.</a:t>
-            </a:r>
-          </a:p>
-          <a:p>
-            <a:pPr>
-              <a:lnSpc>
-                <a:spcPct val="112000"/>
-              </a:lnSpc>
-              <a:spcAft>
-                <a:spcPts val="500"/>
-              </a:spcAft>
-            </a:pPr>
-            <a:r>
-              <a:rPr sz="1400" b="0">
+            <a:r>
+              <a:rPr sz="1300" b="0">
                 <a:solidFill>
                   <a:srgbClr val="333333"/>
                 </a:solidFill>
                 <a:latin typeface="Fira Sans"/>
               </a:rPr>
-              <a:t>     ◦  </a:t>
-            </a:r>
-            <a:r>
-              <a:rPr sz="1400" b="0">
-                <a:solidFill>
-                  <a:srgbClr val="333333"/>
-                </a:solidFill>
-                <a:latin typeface="Fira Sans"/>
-              </a:rPr>
-              <a:t>18.264 hogares, 60.054 personas, 113.591 viajes.</a:t>
-            </a:r>
-          </a:p>
-          <a:p>
-            <a:pPr>
-              <a:lnSpc>
-                <a:spcPct val="112000"/>
-              </a:lnSpc>
-              <a:spcAft>
-                <a:spcPts val="500"/>
-              </a:spcAft>
-            </a:pPr>
-            <a:r>
-              <a:rPr sz="1400" b="0">
-                <a:solidFill>
-                  <a:srgbClr val="333333"/>
-                </a:solidFill>
-                <a:latin typeface="Fira Sans"/>
-              </a:rPr>
-              <a:t>     ◦  </a:t>
-            </a:r>
-            <a:r>
-              <a:rPr sz="1400" b="0">
-                <a:solidFill>
-                  <a:srgbClr val="333333"/>
-                </a:solidFill>
-                <a:latin typeface="Fira Sans"/>
-              </a:rPr>
-              <a:t>Se usa en la planificación de transporte de la ciudad.</a:t>
-            </a:r>
-          </a:p>
-          <a:p>
-            <a:pPr>
-              <a:lnSpc>
-                <a:spcPct val="112000"/>
-              </a:lnSpc>
-              <a:spcAft>
-                <a:spcPts val="900"/>
-              </a:spcAft>
-            </a:pPr>
-            <a:r>
-              <a:rPr sz="1800" b="1">
-                <a:solidFill>
-                  <a:srgbClr val="E0A437"/>
-                </a:solidFill>
-                <a:latin typeface="Fira Sans"/>
-              </a:rPr>
-              <a:t>▸ </a:t>
-            </a:r>
-            <a:r>
-              <a:rPr sz="1800" b="1">
-                <a:solidFill>
-                  <a:srgbClr val="1D3557"/>
-                </a:solidFill>
-                <a:latin typeface="Fira Sans"/>
-              </a:rPr>
-              <a:t>El mismo diseño relacional de la Casen, el Censo o la ENUSC.</a:t>
+              <a:t>Los códigos no significan nada sin sus tablas de parámetros: unirlas es parte del análisis.</a:t>
             </a:r>
           </a:p>
         </p:txBody>
@@ -4999,7 +4865,7 @@
             <a:avLst/>
           </a:prstGeom>
           <a:solidFill>
-            <a:srgbClr val="FAFBFC"/>
+            <a:srgbClr val="1D3557"/>
           </a:solidFill>
           <a:ln>
             <a:noFill/>
@@ -5036,8 +4902,8 @@
         </p:nvSpPr>
         <p:spPr>
           <a:xfrm>
-            <a:off x="402336" y="301752"/>
-            <a:ext cx="8348472" cy="795528"/>
+            <a:off x="603504" y="1847088"/>
+            <a:ext cx="7946136" cy="1399032"/>
           </a:xfrm>
           <a:prstGeom prst="rect">
             <a:avLst/>
@@ -5051,71 +4917,24 @@
           <a:lstStyle/>
           <a:p>
             <a:r>
-              <a:rPr sz="2800" b="1">
-                <a:solidFill>
-                  <a:srgbClr val="0F0F0F"/>
-                </a:solidFill>
-                <a:latin typeface="Fira Sans"/>
-              </a:rPr>
-              <a:t>Una encuesta, varias tablas</a:t>
-            </a:r>
-          </a:p>
-        </p:txBody>
-      </p:sp>
-      <p:pic>
-        <p:nvPicPr>
-          <p:cNvPr id="4" name="Picture 3" descr="05_diagrama_tablas.png"/>
-          <p:cNvPicPr>
-            <a:picLocks noChangeAspect="1"/>
-          </p:cNvPicPr>
-          <p:nvPr/>
-        </p:nvPicPr>
-        <p:blipFill>
-          <a:blip r:embed="rId2"/>
-          <a:stretch>
-            <a:fillRect/>
-          </a:stretch>
-        </p:blipFill>
-        <p:spPr>
-          <a:xfrm>
-            <a:off x="1553651" y="1143000"/>
-            <a:ext cx="6036697" cy="3154680"/>
-          </a:xfrm>
-          <a:prstGeom prst="rect">
-            <a:avLst/>
-          </a:prstGeom>
-        </p:spPr>
-      </p:pic>
-      <p:sp>
-        <p:nvSpPr>
-          <p:cNvPr id="5" name="TextBox 4"/>
-          <p:cNvSpPr txBox="1"/>
-          <p:nvPr/>
-        </p:nvSpPr>
-        <p:spPr>
-          <a:xfrm>
-            <a:off x="704088" y="4434840"/>
-            <a:ext cx="7744968" cy="457200"/>
-          </a:xfrm>
-          <a:prstGeom prst="rect">
-            <a:avLst/>
-          </a:prstGeom>
-          <a:noFill/>
-        </p:spPr>
-        <p:txBody>
-          <a:bodyPr wrap="square">
-            <a:spAutoFit/>
-          </a:bodyPr>
-          <a:lstStyle/>
-          <a:p>
-            <a:r>
-              <a:rPr sz="1300" b="0">
-                <a:solidFill>
-                  <a:srgbClr val="333333"/>
-                </a:solidFill>
-                <a:latin typeface="Fira Sans"/>
-              </a:rPr>
-              <a:t>Los códigos no significan nada sin sus tablas de parámetros: unirlas es parte del análisis.</a:t>
+              <a:rPr sz="3400" b="1">
+                <a:solidFill>
+                  <a:srgbClr val="FFFFFF"/>
+                </a:solidFill>
+                <a:latin typeface="Fira Sans"/>
+              </a:rPr>
+              <a:t>Repaso de Pandas</a:t>
+            </a:r>
+          </a:p>
+          <a:p>
+            <a:r>
+              <a:rPr sz="1800" b="0">
+                <a:solidFill>
+                  <a:srgbClr val="E0A437"/>
+                </a:solidFill>
+                <a:latin typeface="Fira Sans"/>
+              </a:rPr>
+              <a:t>Dos casos concretos con la EOD</a:t>
             </a:r>
           </a:p>
         </p:txBody>
@@ -5153,7 +4972,7 @@
             <a:avLst/>
           </a:prstGeom>
           <a:solidFill>
-            <a:srgbClr val="1D3557"/>
+            <a:srgbClr val="FAFBFC"/>
           </a:solidFill>
           <a:ln>
             <a:noFill/>
@@ -5190,8 +5009,8 @@
         </p:nvSpPr>
         <p:spPr>
           <a:xfrm>
-            <a:off x="603504" y="1847088"/>
-            <a:ext cx="7946136" cy="1399032"/>
+            <a:off x="402336" y="301752"/>
+            <a:ext cx="8348472" cy="795528"/>
           </a:xfrm>
           <a:prstGeom prst="rect">
             <a:avLst/>
@@ -5205,24 +5024,155 @@
           <a:lstStyle/>
           <a:p>
             <a:r>
-              <a:rPr sz="3400" b="1">
-                <a:solidFill>
-                  <a:srgbClr val="FFFFFF"/>
-                </a:solidFill>
-                <a:latin typeface="Fira Sans"/>
-              </a:rPr>
-              <a:t>Repaso de Pandas</a:t>
-            </a:r>
-          </a:p>
-          <a:p>
-            <a:r>
-              <a:rPr sz="1800" b="0">
+              <a:rPr sz="2800" b="1">
+                <a:solidFill>
+                  <a:srgbClr val="0F0F0F"/>
+                </a:solidFill>
+                <a:latin typeface="Fira Sans"/>
+              </a:rPr>
+              <a:t>Abrir el dataset</a:t>
+            </a:r>
+          </a:p>
+        </p:txBody>
+      </p:sp>
+      <p:sp>
+        <p:nvSpPr>
+          <p:cNvPr id="4" name="Rectangle 3"/>
+          <p:cNvSpPr/>
+          <p:nvPr/>
+        </p:nvSpPr>
+        <p:spPr>
+          <a:xfrm>
+            <a:off x="704088" y="1280160"/>
+            <a:ext cx="7744968" cy="2377440"/>
+          </a:xfrm>
+          <a:prstGeom prst="rect">
+            <a:avLst/>
+          </a:prstGeom>
+          <a:solidFill>
+            <a:srgbClr val="F0F2F5"/>
+          </a:solidFill>
+          <a:ln>
+            <a:solidFill>
+              <a:srgbClr val="D8DDE3"/>
+            </a:solidFill>
+          </a:ln>
+          <a:effectLst/>
+        </p:spPr>
+        <p:style>
+          <a:lnRef idx="1">
+            <a:schemeClr val="accent1"/>
+          </a:lnRef>
+          <a:fillRef idx="3">
+            <a:schemeClr val="accent1"/>
+          </a:fillRef>
+          <a:effectRef idx="2">
+            <a:schemeClr val="accent1"/>
+          </a:effectRef>
+          <a:fontRef idx="minor">
+            <a:schemeClr val="lt1"/>
+          </a:fontRef>
+        </p:style>
+        <p:txBody>
+          <a:bodyPr rtlCol="0" anchor="ctr" wrap="square" lIns="228600" tIns="137160"/>
+          <a:lstStyle/>
+          <a:p>
+            <a:pPr/>
+            <a:r>
+              <a:rPr sz="1500" b="0">
+                <a:solidFill>
+                  <a:srgbClr val="1D3557"/>
+                </a:solidFill>
+                <a:latin typeface="Menlo"/>
+              </a:rPr>
+              <a:t>import pandas as pd</a:t>
+            </a:r>
+          </a:p>
+          <a:p>
+            <a:pPr/>
+            <a:r>
+              <a:rPr sz="1500" b="0">
+                <a:solidFill>
+                  <a:srgbClr val="1D3557"/>
+                </a:solidFill>
+                <a:latin typeface="Menlo"/>
+              </a:rPr>
+              <a:t/>
+            </a:r>
+          </a:p>
+          <a:p>
+            <a:pPr/>
+            <a:r>
+              <a:rPr sz="1500" b="0">
+                <a:solidFill>
+                  <a:srgbClr val="1D3557"/>
+                </a:solidFill>
+                <a:latin typeface="Menlo"/>
+              </a:rPr>
+              <a:t>viajes = pd.read_csv('datos/eod_stgo/viajes.csv',</a:t>
+            </a:r>
+          </a:p>
+          <a:p>
+            <a:pPr/>
+            <a:r>
+              <a:rPr sz="1500" b="0">
+                <a:solidFill>
+                  <a:srgbClr val="1D3557"/>
+                </a:solidFill>
+                <a:latin typeface="Menlo"/>
+              </a:rPr>
+              <a:t>                     sep=';', decimal=',')</a:t>
+            </a:r>
+          </a:p>
+        </p:txBody>
+      </p:sp>
+      <p:sp>
+        <p:nvSpPr>
+          <p:cNvPr id="5" name="TextBox 4"/>
+          <p:cNvSpPr txBox="1"/>
+          <p:nvPr/>
+        </p:nvSpPr>
+        <p:spPr>
+          <a:xfrm>
+            <a:off x="704088" y="3886200"/>
+            <a:ext cx="7744968" cy="1097280"/>
+          </a:xfrm>
+          <a:prstGeom prst="rect">
+            <a:avLst/>
+          </a:prstGeom>
+          <a:noFill/>
+        </p:spPr>
+        <p:txBody>
+          <a:bodyPr wrap="square">
+            <a:spAutoFit/>
+          </a:bodyPr>
+          <a:lstStyle/>
+          <a:p>
+            <a:pPr>
+              <a:lnSpc>
+                <a:spcPct val="112000"/>
+              </a:lnSpc>
+              <a:spcAft>
+                <a:spcPts val="900"/>
+              </a:spcAft>
+            </a:pPr>
+            <a:r>
+              <a:rPr sz="1600" b="1">
                 <a:solidFill>
                   <a:srgbClr val="E0A437"/>
                 </a:solidFill>
                 <a:latin typeface="Fira Sans"/>
               </a:rPr>
-              <a:t>Dos casos concretos con la EOD</a:t>
+              <a:t>▸ </a:t>
+            </a:r>
+            <a:r>
+              <a:rPr sz="1600" b="0">
+                <a:solidFill>
+                  <a:srgbClr val="000000"/>
+                </a:solidFill>
+                <a:latin typeface="Fira Sans"/>
+              </a:rPr>
+              <a:t>Todo el código de la clase está en el notebook 02_pandas_eda.ipynb del repositorio.</a:t>
             </a:r>
           </a:p>
         </p:txBody>
@@ -5318,102 +5268,35 @@
                 </a:solidFill>
                 <a:latin typeface="Fira Sans"/>
               </a:rPr>
-              <a:t>Abrir el dataset</a:t>
-            </a:r>
-          </a:p>
-        </p:txBody>
-      </p:sp>
-      <p:sp>
-        <p:nvSpPr>
-          <p:cNvPr id="4" name="Rectangle 3"/>
-          <p:cNvSpPr/>
-          <p:nvPr/>
-        </p:nvSpPr>
-        <p:spPr>
-          <a:xfrm>
-            <a:off x="704088" y="1280160"/>
-            <a:ext cx="7744968" cy="2377440"/>
-          </a:xfrm>
-          <a:prstGeom prst="rect">
-            <a:avLst/>
-          </a:prstGeom>
-          <a:solidFill>
-            <a:srgbClr val="F0F2F5"/>
-          </a:solidFill>
-          <a:ln>
-            <a:solidFill>
-              <a:srgbClr val="D8DDE3"/>
-            </a:solidFill>
-          </a:ln>
-          <a:effectLst/>
-        </p:spPr>
-        <p:style>
-          <a:lnRef idx="1">
-            <a:schemeClr val="accent1"/>
-          </a:lnRef>
-          <a:fillRef idx="3">
-            <a:schemeClr val="accent1"/>
-          </a:fillRef>
-          <a:effectRef idx="2">
-            <a:schemeClr val="accent1"/>
-          </a:effectRef>
-          <a:fontRef idx="minor">
-            <a:schemeClr val="lt1"/>
-          </a:fontRef>
-        </p:style>
-        <p:txBody>
-          <a:bodyPr rtlCol="0" anchor="ctr" wrap="square" lIns="228600" tIns="137160"/>
-          <a:lstStyle/>
-          <a:p>
-            <a:pPr/>
-            <a:r>
-              <a:rPr sz="1500" b="0">
-                <a:solidFill>
-                  <a:srgbClr val="1D3557"/>
-                </a:solidFill>
-                <a:latin typeface="Menlo"/>
-              </a:rPr>
-              <a:t>import pandas as pd</a:t>
-            </a:r>
-          </a:p>
-          <a:p>
-            <a:pPr/>
-            <a:r>
-              <a:rPr sz="1500" b="0">
-                <a:solidFill>
-                  <a:srgbClr val="1D3557"/>
-                </a:solidFill>
-                <a:latin typeface="Menlo"/>
-              </a:rPr>
-              <a:t/>
-            </a:r>
-          </a:p>
-          <a:p>
-            <a:pPr/>
-            <a:r>
-              <a:rPr sz="1500" b="0">
-                <a:solidFill>
-                  <a:srgbClr val="1D3557"/>
-                </a:solidFill>
-                <a:latin typeface="Menlo"/>
-              </a:rPr>
-              <a:t>viajes = pd.read_csv('datos/eod_stgo/viajes.csv',</a:t>
-            </a:r>
-          </a:p>
-          <a:p>
-            <a:pPr/>
-            <a:r>
-              <a:rPr sz="1500" b="0">
-                <a:solidFill>
-                  <a:srgbClr val="1D3557"/>
-                </a:solidFill>
-                <a:latin typeface="Menlo"/>
-              </a:rPr>
-              <a:t>                     sep=';', decimal=',')</a:t>
-            </a:r>
-          </a:p>
-        </p:txBody>
-      </p:sp>
+              <a:t>El DataFrame: la estructura central de Pandas</a:t>
+            </a:r>
+          </a:p>
+        </p:txBody>
+      </p:sp>
+      <p:pic>
+        <p:nvPicPr>
+          <p:cNvPr id="4" name="Picture 3" descr="13_dataframe.png"/>
+          <p:cNvPicPr>
+            <a:picLocks noChangeAspect="1"/>
+          </p:cNvPicPr>
+          <p:nvPr/>
+        </p:nvPicPr>
+        <p:blipFill>
+          <a:blip r:embed="rId2"/>
+          <a:stretch>
+            <a:fillRect/>
+          </a:stretch>
+        </p:blipFill>
+        <p:spPr>
+          <a:xfrm>
+            <a:off x="1417319" y="1143000"/>
+            <a:ext cx="6309360" cy="2553789"/>
+          </a:xfrm>
+          <a:prstGeom prst="rect">
+            <a:avLst/>
+          </a:prstGeom>
+        </p:spPr>
+      </p:pic>
       <p:sp>
         <p:nvSpPr>
           <p:cNvPr id="5" name="TextBox 4"/>
@@ -5422,8 +5305,8 @@
         </p:nvSpPr>
         <p:spPr>
           <a:xfrm>
-            <a:off x="704088" y="3886200"/>
-            <a:ext cx="7744968" cy="1097280"/>
+            <a:off x="704088" y="4434840"/>
+            <a:ext cx="7744968" cy="457200"/>
           </a:xfrm>
           <a:prstGeom prst="rect">
             <a:avLst/>
@@ -5436,31 +5319,14 @@
           </a:bodyPr>
           <a:lstStyle/>
           <a:p>
-            <a:pPr>
-              <a:lnSpc>
-                <a:spcPct val="112000"/>
-              </a:lnSpc>
-              <a:spcAft>
-                <a:spcPts val="900"/>
-              </a:spcAft>
-            </a:pPr>
-            <a:r>
-              <a:rPr sz="1600" b="1">
-                <a:solidFill>
-                  <a:srgbClr val="E0A437"/>
-                </a:solidFill>
-                <a:latin typeface="Fira Sans"/>
-              </a:rPr>
-              <a:t>▸ </a:t>
-            </a:r>
-            <a:r>
-              <a:rPr sz="1600" b="0">
-                <a:solidFill>
-                  <a:srgbClr val="000000"/>
-                </a:solidFill>
-                <a:latin typeface="Fira Sans"/>
-              </a:rPr>
-              <a:t>Todo el código de la clase está en el notebook 02_pandas_eda.ipynb del repositorio.</a:t>
+            <a:r>
+              <a:rPr sz="1300" b="0">
+                <a:solidFill>
+                  <a:srgbClr val="333333"/>
+                </a:solidFill>
+                <a:latin typeface="Fira Sans"/>
+              </a:rPr>
+              <a:t>Una tabla con filas indexadas y columnas con nombre y tipo. Los códigos (comuna, propósito) se traducen con las tablas de parámetros, uniéndolas con merge.</a:t>
             </a:r>
           </a:p>
         </p:txBody>
@@ -5871,14 +5737,14 @@
                 </a:solidFill>
                 <a:latin typeface="Fira Sans"/>
               </a:rPr>
-              <a:t>El DataFrame: la estructura central de Pandas</a:t>
+              <a:t>Las variantes del merge: qué filas se conservan</a:t>
             </a:r>
           </a:p>
         </p:txBody>
       </p:sp>
       <p:pic>
         <p:nvPicPr>
-          <p:cNvPr id="4" name="Picture 3" descr="13_dataframe.png"/>
+          <p:cNvPr id="4" name="Picture 3" descr="07_diagrama_merge.png"/>
           <p:cNvPicPr>
             <a:picLocks noChangeAspect="1"/>
           </p:cNvPicPr>
@@ -5893,7 +5759,7 @@
         <p:spPr>
           <a:xfrm>
             <a:off x="1417319" y="1143000"/>
-            <a:ext cx="6309360" cy="2553789"/>
+            <a:ext cx="6309360" cy="2397276"/>
           </a:xfrm>
           <a:prstGeom prst="rect">
             <a:avLst/>
@@ -5929,7 +5795,7 @@
                 </a:solidFill>
                 <a:latin typeface="Fira Sans"/>
               </a:rPr>
-              <a:t>Una tabla con filas indexadas y columnas con nombre y tipo. Los códigos (comuna, propósito) se traducen con las tablas de parámetros, uniéndolas con merge.</a:t>
+              <a:t>El valor por defecto es inner: descarta sin aviso las filas sin pareja.</a:t>
             </a:r>
           </a:p>
         </p:txBody>
@@ -6025,45 +5891,21 @@
                 </a:solidFill>
                 <a:latin typeface="Fira Sans"/>
               </a:rPr>
-              <a:t>Las variantes del merge: qué filas se conservan</a:t>
-            </a:r>
-          </a:p>
-        </p:txBody>
-      </p:sp>
-      <p:pic>
-        <p:nvPicPr>
-          <p:cNvPr id="4" name="Picture 3" descr="07_diagrama_merge.png"/>
-          <p:cNvPicPr>
-            <a:picLocks noChangeAspect="1"/>
-          </p:cNvPicPr>
-          <p:nvPr/>
-        </p:nvPicPr>
-        <p:blipFill>
-          <a:blip r:embed="rId2"/>
-          <a:stretch>
-            <a:fillRect/>
-          </a:stretch>
-        </p:blipFill>
-        <p:spPr>
-          <a:xfrm>
-            <a:off x="1417319" y="1143000"/>
-            <a:ext cx="6309360" cy="2397276"/>
-          </a:xfrm>
-          <a:prstGeom prst="rect">
-            <a:avLst/>
-          </a:prstGeom>
-        </p:spPr>
-      </p:pic>
-      <p:sp>
-        <p:nvSpPr>
-          <p:cNvPr id="5" name="TextBox 4"/>
+              <a:t>El efecto del parámetro how sobre la población analizada</a:t>
+            </a:r>
+          </a:p>
+        </p:txBody>
+      </p:sp>
+      <p:sp>
+        <p:nvSpPr>
+          <p:cNvPr id="4" name="TextBox 3"/>
           <p:cNvSpPr txBox="1"/>
           <p:nvPr/>
         </p:nvSpPr>
         <p:spPr>
           <a:xfrm>
-            <a:off x="704088" y="4434840"/>
-            <a:ext cx="7744968" cy="457200"/>
+            <a:off x="704088" y="1353312"/>
+            <a:ext cx="7744968" cy="3300984"/>
           </a:xfrm>
           <a:prstGeom prst="rect">
             <a:avLst/>
@@ -6076,14 +5918,143 @@
           </a:bodyPr>
           <a:lstStyle/>
           <a:p>
-            <a:r>
-              <a:rPr sz="1300" b="0">
+            <a:pPr>
+              <a:lnSpc>
+                <a:spcPct val="112000"/>
+              </a:lnSpc>
+              <a:spcAft>
+                <a:spcPts val="900"/>
+              </a:spcAft>
+            </a:pPr>
+            <a:r>
+              <a:rPr sz="1800" b="1">
+                <a:solidFill>
+                  <a:srgbClr val="E0A437"/>
+                </a:solidFill>
+                <a:latin typeface="Fira Sans"/>
+              </a:rPr>
+              <a:t>▸ </a:t>
+            </a:r>
+            <a:r>
+              <a:rPr sz="1800" b="0">
+                <a:solidFill>
+                  <a:srgbClr val="000000"/>
+                </a:solidFill>
+                <a:latin typeface="Fira Sans"/>
+              </a:rPr>
+              <a:t>Personas con viajes, merge inner: 113.591 filas (una por viaje).</a:t>
+            </a:r>
+          </a:p>
+          <a:p>
+            <a:pPr>
+              <a:lnSpc>
+                <a:spcPct val="112000"/>
+              </a:lnSpc>
+              <a:spcAft>
+                <a:spcPts val="900"/>
+              </a:spcAft>
+            </a:pPr>
+            <a:r>
+              <a:rPr sz="1800" b="1">
+                <a:solidFill>
+                  <a:srgbClr val="E0A437"/>
+                </a:solidFill>
+                <a:latin typeface="Fira Sans"/>
+              </a:rPr>
+              <a:t>▸ </a:t>
+            </a:r>
+            <a:r>
+              <a:rPr sz="1800" b="0">
+                <a:solidFill>
+                  <a:srgbClr val="000000"/>
+                </a:solidFill>
+                <a:latin typeface="Fira Sans"/>
+              </a:rPr>
+              <a:t>El mismo merge en left: 127.379 filas.</a:t>
+            </a:r>
+          </a:p>
+          <a:p>
+            <a:pPr>
+              <a:lnSpc>
+                <a:spcPct val="112000"/>
+              </a:lnSpc>
+              <a:spcAft>
+                <a:spcPts val="500"/>
+              </a:spcAft>
+            </a:pPr>
+            <a:r>
+              <a:rPr sz="1400" b="0">
                 <a:solidFill>
                   <a:srgbClr val="333333"/>
                 </a:solidFill>
                 <a:latin typeface="Fira Sans"/>
               </a:rPr>
-              <a:t>El valor por defecto es inner: descarta sin aviso las filas sin pareja.</a:t>
+              <a:t>     ◦  </a:t>
+            </a:r>
+            <a:r>
+              <a:rPr sz="1400" b="0">
+                <a:solidFill>
+                  <a:srgbClr val="333333"/>
+                </a:solidFill>
+                <a:latin typeface="Fira Sans"/>
+              </a:rPr>
+              <a:t>La diferencia son 13.788 personas que no viajaron ese día.</a:t>
+            </a:r>
+          </a:p>
+          <a:p>
+            <a:pPr>
+              <a:lnSpc>
+                <a:spcPct val="112000"/>
+              </a:lnSpc>
+              <a:spcAft>
+                <a:spcPts val="500"/>
+              </a:spcAft>
+            </a:pPr>
+            <a:r>
+              <a:rPr sz="1400" b="0">
+                <a:solidFill>
+                  <a:srgbClr val="333333"/>
+                </a:solidFill>
+                <a:latin typeface="Fira Sans"/>
+              </a:rPr>
+              <a:t>     ◦  </a:t>
+            </a:r>
+            <a:r>
+              <a:rPr sz="1400" b="0">
+                <a:solidFill>
+                  <a:srgbClr val="333333"/>
+                </a:solidFill>
+                <a:latin typeface="Fira Sans"/>
+              </a:rPr>
+              <a:t>Con inner desaparecen; con left quedan, con NaN en el viaje.</a:t>
+            </a:r>
+          </a:p>
+          <a:p>
+            <a:pPr>
+              <a:lnSpc>
+                <a:spcPct val="112000"/>
+              </a:lnSpc>
+              <a:spcAft>
+                <a:spcPts val="900"/>
+              </a:spcAft>
+            </a:pPr>
+            <a:r>
+              <a:rPr sz="1800" b="1">
+                <a:solidFill>
+                  <a:srgbClr val="E0A437"/>
+                </a:solidFill>
+                <a:latin typeface="Fira Sans"/>
+              </a:rPr>
+              <a:t>▸ </a:t>
+            </a:r>
+            <a:r>
+              <a:rPr sz="1800" b="1">
+                <a:solidFill>
+                  <a:srgbClr val="1D3557"/>
+                </a:solidFill>
+                <a:latin typeface="Fira Sans"/>
+              </a:rPr>
+              <a:t>Un promedio calculado sobre el resultado del inner excluye a quienes no viajaron.</a:t>
             </a:r>
           </a:p>
         </p:txBody>
@@ -6121,7 +6092,7 @@
             <a:avLst/>
           </a:prstGeom>
           <a:solidFill>
-            <a:srgbClr val="FAFBFC"/>
+            <a:srgbClr val="1D3557"/>
           </a:solidFill>
           <a:ln>
             <a:noFill/>
@@ -6158,8 +6129,8 @@
         </p:nvSpPr>
         <p:spPr>
           <a:xfrm>
-            <a:off x="402336" y="301752"/>
-            <a:ext cx="8348472" cy="795528"/>
+            <a:off x="603504" y="1847088"/>
+            <a:ext cx="7946136" cy="1399032"/>
           </a:xfrm>
           <a:prstGeom prst="rect">
             <a:avLst/>
@@ -6173,176 +6144,24 @@
           <a:lstStyle/>
           <a:p>
             <a:r>
-              <a:rPr sz="2800" b="1">
-                <a:solidFill>
-                  <a:srgbClr val="0F0F0F"/>
-                </a:solidFill>
-                <a:latin typeface="Fira Sans"/>
-              </a:rPr>
-              <a:t>El efecto del parámetro how sobre la población analizada</a:t>
-            </a:r>
-          </a:p>
-        </p:txBody>
-      </p:sp>
-      <p:sp>
-        <p:nvSpPr>
-          <p:cNvPr id="4" name="TextBox 3"/>
-          <p:cNvSpPr txBox="1"/>
-          <p:nvPr/>
-        </p:nvSpPr>
-        <p:spPr>
-          <a:xfrm>
-            <a:off x="704088" y="1353312"/>
-            <a:ext cx="7744968" cy="3300984"/>
-          </a:xfrm>
-          <a:prstGeom prst="rect">
-            <a:avLst/>
-          </a:prstGeom>
-          <a:noFill/>
-        </p:spPr>
-        <p:txBody>
-          <a:bodyPr wrap="square">
-            <a:spAutoFit/>
-          </a:bodyPr>
-          <a:lstStyle/>
-          <a:p>
-            <a:pPr>
-              <a:lnSpc>
-                <a:spcPct val="112000"/>
-              </a:lnSpc>
-              <a:spcAft>
-                <a:spcPts val="900"/>
-              </a:spcAft>
-            </a:pPr>
-            <a:r>
-              <a:rPr sz="1800" b="1">
+              <a:rPr sz="3400" b="1">
+                <a:solidFill>
+                  <a:srgbClr val="FFFFFF"/>
+                </a:solidFill>
+                <a:latin typeface="Fira Sans"/>
+              </a:rPr>
+              <a:t>Exploración de la EOD</a:t>
+            </a:r>
+          </a:p>
+          <a:p>
+            <a:r>
+              <a:rPr sz="1800" b="0">
                 <a:solidFill>
                   <a:srgbClr val="E0A437"/>
                 </a:solidFill>
                 <a:latin typeface="Fira Sans"/>
               </a:rPr>
-              <a:t>▸ </a:t>
-            </a:r>
-            <a:r>
-              <a:rPr sz="1800" b="0">
-                <a:solidFill>
-                  <a:srgbClr val="000000"/>
-                </a:solidFill>
-                <a:latin typeface="Fira Sans"/>
-              </a:rPr>
-              <a:t>Personas con viajes, merge inner: 113.591 filas (una por viaje).</a:t>
-            </a:r>
-          </a:p>
-          <a:p>
-            <a:pPr>
-              <a:lnSpc>
-                <a:spcPct val="112000"/>
-              </a:lnSpc>
-              <a:spcAft>
-                <a:spcPts val="900"/>
-              </a:spcAft>
-            </a:pPr>
-            <a:r>
-              <a:rPr sz="1800" b="1">
-                <a:solidFill>
-                  <a:srgbClr val="E0A437"/>
-                </a:solidFill>
-                <a:latin typeface="Fira Sans"/>
-              </a:rPr>
-              <a:t>▸ </a:t>
-            </a:r>
-            <a:r>
-              <a:rPr sz="1800" b="0">
-                <a:solidFill>
-                  <a:srgbClr val="000000"/>
-                </a:solidFill>
-                <a:latin typeface="Fira Sans"/>
-              </a:rPr>
-              <a:t>El mismo merge en left: 127.379 filas.</a:t>
-            </a:r>
-          </a:p>
-          <a:p>
-            <a:pPr>
-              <a:lnSpc>
-                <a:spcPct val="112000"/>
-              </a:lnSpc>
-              <a:spcAft>
-                <a:spcPts val="500"/>
-              </a:spcAft>
-            </a:pPr>
-            <a:r>
-              <a:rPr sz="1400" b="0">
-                <a:solidFill>
-                  <a:srgbClr val="333333"/>
-                </a:solidFill>
-                <a:latin typeface="Fira Sans"/>
-              </a:rPr>
-              <a:t>     ◦  </a:t>
-            </a:r>
-            <a:r>
-              <a:rPr sz="1400" b="0">
-                <a:solidFill>
-                  <a:srgbClr val="333333"/>
-                </a:solidFill>
-                <a:latin typeface="Fira Sans"/>
-              </a:rPr>
-              <a:t>La diferencia son 13.788 personas que no viajaron ese día.</a:t>
-            </a:r>
-          </a:p>
-          <a:p>
-            <a:pPr>
-              <a:lnSpc>
-                <a:spcPct val="112000"/>
-              </a:lnSpc>
-              <a:spcAft>
-                <a:spcPts val="500"/>
-              </a:spcAft>
-            </a:pPr>
-            <a:r>
-              <a:rPr sz="1400" b="0">
-                <a:solidFill>
-                  <a:srgbClr val="333333"/>
-                </a:solidFill>
-                <a:latin typeface="Fira Sans"/>
-              </a:rPr>
-              <a:t>     ◦  </a:t>
-            </a:r>
-            <a:r>
-              <a:rPr sz="1400" b="0">
-                <a:solidFill>
-                  <a:srgbClr val="333333"/>
-                </a:solidFill>
-                <a:latin typeface="Fira Sans"/>
-              </a:rPr>
-              <a:t>Con inner desaparecen; con left quedan, con NaN en el viaje.</a:t>
-            </a:r>
-          </a:p>
-          <a:p>
-            <a:pPr>
-              <a:lnSpc>
-                <a:spcPct val="112000"/>
-              </a:lnSpc>
-              <a:spcAft>
-                <a:spcPts val="900"/>
-              </a:spcAft>
-            </a:pPr>
-            <a:r>
-              <a:rPr sz="1800" b="1">
-                <a:solidFill>
-                  <a:srgbClr val="E0A437"/>
-                </a:solidFill>
-                <a:latin typeface="Fira Sans"/>
-              </a:rPr>
-              <a:t>▸ </a:t>
-            </a:r>
-            <a:r>
-              <a:rPr sz="1800" b="1">
-                <a:solidFill>
-                  <a:srgbClr val="1D3557"/>
-                </a:solidFill>
-                <a:latin typeface="Fira Sans"/>
-              </a:rPr>
-              <a:t>Un promedio calculado sobre el resultado del inner excluye a quienes no viajaron.</a:t>
+              <a:t>Estadística descriptiva sobre datos reales</a:t>
             </a:r>
           </a:p>
         </p:txBody>
@@ -6380,7 +6199,7 @@
             <a:avLst/>
           </a:prstGeom>
           <a:solidFill>
-            <a:srgbClr val="1D3557"/>
+            <a:srgbClr val="FAFBFC"/>
           </a:solidFill>
           <a:ln>
             <a:noFill/>
@@ -6417,8 +6236,8 @@
         </p:nvSpPr>
         <p:spPr>
           <a:xfrm>
-            <a:off x="603504" y="1847088"/>
-            <a:ext cx="7946136" cy="1399032"/>
+            <a:off x="402336" y="301752"/>
+            <a:ext cx="8348472" cy="795528"/>
           </a:xfrm>
           <a:prstGeom prst="rect">
             <a:avLst/>
@@ -6432,28 +6251,176 @@
           <a:lstStyle/>
           <a:p>
             <a:r>
-              <a:rPr sz="3400" b="1">
-                <a:solidFill>
-                  <a:srgbClr val="FFFFFF"/>
-                </a:solidFill>
-                <a:latin typeface="Fira Sans"/>
-              </a:rPr>
-              <a:t>Exploración de la EOD</a:t>
-            </a:r>
-          </a:p>
-          <a:p>
-            <a:r>
-              <a:rPr sz="1800" b="0">
+              <a:rPr sz="2800" b="1">
+                <a:solidFill>
+                  <a:srgbClr val="0F0F0F"/>
+                </a:solidFill>
+                <a:latin typeface="Fira Sans"/>
+              </a:rPr>
+              <a:t>Viajes por persona: los ausentes también cuentan</a:t>
+            </a:r>
+          </a:p>
+        </p:txBody>
+      </p:sp>
+      <p:sp>
+        <p:nvSpPr>
+          <p:cNvPr id="4" name="TextBox 3"/>
+          <p:cNvSpPr txBox="1"/>
+          <p:nvPr/>
+        </p:nvSpPr>
+        <p:spPr>
+          <a:xfrm>
+            <a:off x="502920" y="1252728"/>
+            <a:ext cx="4023360" cy="3200400"/>
+          </a:xfrm>
+          <a:prstGeom prst="rect">
+            <a:avLst/>
+          </a:prstGeom>
+          <a:noFill/>
+        </p:spPr>
+        <p:txBody>
+          <a:bodyPr wrap="square">
+            <a:spAutoFit/>
+          </a:bodyPr>
+          <a:lstStyle/>
+          <a:p>
+            <a:pPr>
+              <a:lnSpc>
+                <a:spcPct val="112000"/>
+              </a:lnSpc>
+              <a:spcAft>
+                <a:spcPts val="900"/>
+              </a:spcAft>
+            </a:pPr>
+            <a:r>
+              <a:rPr sz="1500" b="1">
                 <a:solidFill>
                   <a:srgbClr val="E0A437"/>
                 </a:solidFill>
                 <a:latin typeface="Fira Sans"/>
               </a:rPr>
-              <a:t>Estadística descriptiva sobre datos reales</a:t>
-            </a:r>
-          </a:p>
-        </p:txBody>
-      </p:sp>
+              <a:t>▸ </a:t>
+            </a:r>
+            <a:r>
+              <a:rPr sz="1500" b="0">
+                <a:solidFill>
+                  <a:srgbClr val="000000"/>
+                </a:solidFill>
+                <a:latin typeface="Fira Sans"/>
+              </a:rPr>
+              <a:t>El 23% de las personas no viajó ese día.</a:t>
+            </a:r>
+          </a:p>
+          <a:p>
+            <a:pPr>
+              <a:lnSpc>
+                <a:spcPct val="112000"/>
+              </a:lnSpc>
+              <a:spcAft>
+                <a:spcPts val="900"/>
+              </a:spcAft>
+            </a:pPr>
+            <a:r>
+              <a:rPr sz="1500" b="1">
+                <a:solidFill>
+                  <a:srgbClr val="E0A437"/>
+                </a:solidFill>
+                <a:latin typeface="Fira Sans"/>
+              </a:rPr>
+              <a:t>▸ </a:t>
+            </a:r>
+            <a:r>
+              <a:rPr sz="1500" b="0">
+                <a:solidFill>
+                  <a:srgbClr val="000000"/>
+                </a:solidFill>
+                <a:latin typeface="Fira Sans"/>
+              </a:rPr>
+              <a:t>Media: 1,9 viajes. Mediana: 2 viajes.</a:t>
+            </a:r>
+          </a:p>
+          <a:p>
+            <a:pPr>
+              <a:lnSpc>
+                <a:spcPct val="112000"/>
+              </a:lnSpc>
+              <a:spcAft>
+                <a:spcPts val="900"/>
+              </a:spcAft>
+            </a:pPr>
+            <a:r>
+              <a:rPr sz="1500" b="1">
+                <a:solidFill>
+                  <a:srgbClr val="E0A437"/>
+                </a:solidFill>
+                <a:latin typeface="Fira Sans"/>
+              </a:rPr>
+              <a:t>▸ </a:t>
+            </a:r>
+            <a:r>
+              <a:rPr sz="1500" b="0">
+                <a:solidFill>
+                  <a:srgbClr val="000000"/>
+                </a:solidFill>
+                <a:latin typeface="Fira Sans"/>
+              </a:rPr>
+              <a:t>La media quedó bajo la mediana: la masa de ceros la desplaza.</a:t>
+            </a:r>
+          </a:p>
+          <a:p>
+            <a:pPr>
+              <a:lnSpc>
+                <a:spcPct val="112000"/>
+              </a:lnSpc>
+              <a:spcAft>
+                <a:spcPts val="900"/>
+              </a:spcAft>
+            </a:pPr>
+            <a:r>
+              <a:rPr sz="1500" b="1">
+                <a:solidFill>
+                  <a:srgbClr val="E0A437"/>
+                </a:solidFill>
+                <a:latin typeface="Fira Sans"/>
+              </a:rPr>
+              <a:t>▸ </a:t>
+            </a:r>
+            <a:r>
+              <a:rPr sz="1500" b="1">
+                <a:solidFill>
+                  <a:srgbClr val="1D3557"/>
+                </a:solidFill>
+                <a:latin typeface="Fira Sans"/>
+              </a:rPr>
+              <a:t>La dirección del sesgo depende de la forma de la distribución.</a:t>
+            </a:r>
+          </a:p>
+        </p:txBody>
+      </p:sp>
+      <p:pic>
+        <p:nvPicPr>
+          <p:cNvPr id="5" name="Picture 4" descr="02_viajes_por_persona.png"/>
+          <p:cNvPicPr>
+            <a:picLocks noChangeAspect="1"/>
+          </p:cNvPicPr>
+          <p:nvPr/>
+        </p:nvPicPr>
+        <p:blipFill>
+          <a:blip r:embed="rId2"/>
+          <a:stretch>
+            <a:fillRect/>
+          </a:stretch>
+        </p:blipFill>
+        <p:spPr>
+          <a:xfrm>
+            <a:off x="4892040" y="1371600"/>
+            <a:ext cx="3840480" cy="2191739"/>
+          </a:xfrm>
+          <a:prstGeom prst="rect">
+            <a:avLst/>
+          </a:prstGeom>
+        </p:spPr>
+      </p:pic>
     </p:spTree>
   </p:cSld>
   <p:clrMapOvr>
@@ -6545,149 +6512,14 @@
                 </a:solidFill>
                 <a:latin typeface="Fira Sans"/>
               </a:rPr>
-              <a:t>Viajes por persona: los ausentes también cuentan</a:t>
-            </a:r>
-          </a:p>
-        </p:txBody>
-      </p:sp>
-      <p:sp>
-        <p:nvSpPr>
-          <p:cNvPr id="4" name="TextBox 3"/>
-          <p:cNvSpPr txBox="1"/>
-          <p:nvPr/>
-        </p:nvSpPr>
-        <p:spPr>
-          <a:xfrm>
-            <a:off x="502920" y="1252728"/>
-            <a:ext cx="4023360" cy="3200400"/>
-          </a:xfrm>
-          <a:prstGeom prst="rect">
-            <a:avLst/>
-          </a:prstGeom>
-          <a:noFill/>
-        </p:spPr>
-        <p:txBody>
-          <a:bodyPr wrap="square">
-            <a:spAutoFit/>
-          </a:bodyPr>
-          <a:lstStyle/>
-          <a:p>
-            <a:pPr>
-              <a:lnSpc>
-                <a:spcPct val="112000"/>
-              </a:lnSpc>
-              <a:spcAft>
-                <a:spcPts val="900"/>
-              </a:spcAft>
-            </a:pPr>
-            <a:r>
-              <a:rPr sz="1500" b="1">
-                <a:solidFill>
-                  <a:srgbClr val="E0A437"/>
-                </a:solidFill>
-                <a:latin typeface="Fira Sans"/>
-              </a:rPr>
-              <a:t>▸ </a:t>
-            </a:r>
-            <a:r>
-              <a:rPr sz="1500" b="0">
-                <a:solidFill>
-                  <a:srgbClr val="000000"/>
-                </a:solidFill>
-                <a:latin typeface="Fira Sans"/>
-              </a:rPr>
-              <a:t>El 23% de las personas no viajó ese día.</a:t>
-            </a:r>
-          </a:p>
-          <a:p>
-            <a:pPr>
-              <a:lnSpc>
-                <a:spcPct val="112000"/>
-              </a:lnSpc>
-              <a:spcAft>
-                <a:spcPts val="900"/>
-              </a:spcAft>
-            </a:pPr>
-            <a:r>
-              <a:rPr sz="1500" b="1">
-                <a:solidFill>
-                  <a:srgbClr val="E0A437"/>
-                </a:solidFill>
-                <a:latin typeface="Fira Sans"/>
-              </a:rPr>
-              <a:t>▸ </a:t>
-            </a:r>
-            <a:r>
-              <a:rPr sz="1500" b="0">
-                <a:solidFill>
-                  <a:srgbClr val="000000"/>
-                </a:solidFill>
-                <a:latin typeface="Fira Sans"/>
-              </a:rPr>
-              <a:t>Media: 1,9 viajes. Mediana: 2 viajes.</a:t>
-            </a:r>
-          </a:p>
-          <a:p>
-            <a:pPr>
-              <a:lnSpc>
-                <a:spcPct val="112000"/>
-              </a:lnSpc>
-              <a:spcAft>
-                <a:spcPts val="900"/>
-              </a:spcAft>
-            </a:pPr>
-            <a:r>
-              <a:rPr sz="1500" b="1">
-                <a:solidFill>
-                  <a:srgbClr val="E0A437"/>
-                </a:solidFill>
-                <a:latin typeface="Fira Sans"/>
-              </a:rPr>
-              <a:t>▸ </a:t>
-            </a:r>
-            <a:r>
-              <a:rPr sz="1500" b="0">
-                <a:solidFill>
-                  <a:srgbClr val="000000"/>
-                </a:solidFill>
-                <a:latin typeface="Fira Sans"/>
-              </a:rPr>
-              <a:t>La media quedó bajo la mediana: la masa de ceros la desplaza.</a:t>
-            </a:r>
-          </a:p>
-          <a:p>
-            <a:pPr>
-              <a:lnSpc>
-                <a:spcPct val="112000"/>
-              </a:lnSpc>
-              <a:spcAft>
-                <a:spcPts val="900"/>
-              </a:spcAft>
-            </a:pPr>
-            <a:r>
-              <a:rPr sz="1500" b="1">
-                <a:solidFill>
-                  <a:srgbClr val="E0A437"/>
-                </a:solidFill>
-                <a:latin typeface="Fira Sans"/>
-              </a:rPr>
-              <a:t>▸ </a:t>
-            </a:r>
-            <a:r>
-              <a:rPr sz="1500" b="1">
-                <a:solidFill>
-                  <a:srgbClr val="1D3557"/>
-                </a:solidFill>
-                <a:latin typeface="Fira Sans"/>
-              </a:rPr>
-              <a:t>La dirección del sesgo depende de la forma de la distribución.</a:t>
+              <a:t>Los factores de expansión: de la muestra a la ciudad</a:t>
             </a:r>
           </a:p>
         </p:txBody>
       </p:sp>
       <p:pic>
         <p:nvPicPr>
-          <p:cNvPr id="5" name="Picture 4" descr="02_viajes_por_persona.png"/>
+          <p:cNvPr id="4" name="Picture 3" descr="06_diagrama_factores.png"/>
           <p:cNvPicPr>
             <a:picLocks noChangeAspect="1"/>
           </p:cNvPicPr>
@@ -6701,14 +6533,48 @@
         </p:blipFill>
         <p:spPr>
           <a:xfrm>
-            <a:off x="4892040" y="1371600"/>
-            <a:ext cx="3840480" cy="2191739"/>
+            <a:off x="1417319" y="1143000"/>
+            <a:ext cx="6309360" cy="2871234"/>
           </a:xfrm>
           <a:prstGeom prst="rect">
             <a:avLst/>
           </a:prstGeom>
         </p:spPr>
       </p:pic>
+      <p:sp>
+        <p:nvSpPr>
+          <p:cNvPr id="5" name="TextBox 4"/>
+          <p:cNvSpPr txBox="1"/>
+          <p:nvPr/>
+        </p:nvSpPr>
+        <p:spPr>
+          <a:xfrm>
+            <a:off x="704088" y="4434840"/>
+            <a:ext cx="7744968" cy="457200"/>
+          </a:xfrm>
+          <a:prstGeom prst="rect">
+            <a:avLst/>
+          </a:prstGeom>
+          <a:noFill/>
+        </p:spPr>
+        <p:txBody>
+          <a:bodyPr wrap="square">
+            <a:spAutoFit/>
+          </a:bodyPr>
+          <a:lstStyle/>
+          <a:p>
+            <a:r>
+              <a:rPr sz="1300" b="0">
+                <a:solidFill>
+                  <a:srgbClr val="333333"/>
+                </a:solidFill>
+                <a:latin typeface="Fira Sans"/>
+              </a:rPr>
+              <a:t>Contar filas responde por la muestra; sumar factores responde por la ciudad.</a:t>
+            </a:r>
+          </a:p>
+        </p:txBody>
+      </p:sp>
     </p:spTree>
   </p:cSld>
   <p:clrMapOvr>
@@ -6800,14 +6666,149 @@
                 </a:solidFill>
                 <a:latin typeface="Fira Sans"/>
               </a:rPr>
-              <a:t>Los factores de expansión: de la muestra a la ciudad</a:t>
+              <a:t>El ingreso de los hogares: media y mediana</a:t>
+            </a:r>
+          </a:p>
+        </p:txBody>
+      </p:sp>
+      <p:sp>
+        <p:nvSpPr>
+          <p:cNvPr id="4" name="TextBox 3"/>
+          <p:cNvSpPr txBox="1"/>
+          <p:nvPr/>
+        </p:nvSpPr>
+        <p:spPr>
+          <a:xfrm>
+            <a:off x="502920" y="1252728"/>
+            <a:ext cx="4023360" cy="3200400"/>
+          </a:xfrm>
+          <a:prstGeom prst="rect">
+            <a:avLst/>
+          </a:prstGeom>
+          <a:noFill/>
+        </p:spPr>
+        <p:txBody>
+          <a:bodyPr wrap="square">
+            <a:spAutoFit/>
+          </a:bodyPr>
+          <a:lstStyle/>
+          <a:p>
+            <a:pPr>
+              <a:lnSpc>
+                <a:spcPct val="112000"/>
+              </a:lnSpc>
+              <a:spcAft>
+                <a:spcPts val="900"/>
+              </a:spcAft>
+            </a:pPr>
+            <a:r>
+              <a:rPr sz="1500" b="1">
+                <a:solidFill>
+                  <a:srgbClr val="E0A437"/>
+                </a:solidFill>
+                <a:latin typeface="Fira Sans"/>
+              </a:rPr>
+              <a:t>▸ </a:t>
+            </a:r>
+            <a:r>
+              <a:rPr sz="1500" b="0">
+                <a:solidFill>
+                  <a:srgbClr val="000000"/>
+                </a:solidFill>
+                <a:latin typeface="Fira Sans"/>
+              </a:rPr>
+              <a:t>Media: $688.274. Mediana: $507.826.</a:t>
+            </a:r>
+          </a:p>
+          <a:p>
+            <a:pPr>
+              <a:lnSpc>
+                <a:spcPct val="112000"/>
+              </a:lnSpc>
+              <a:spcAft>
+                <a:spcPts val="900"/>
+              </a:spcAft>
+            </a:pPr>
+            <a:r>
+              <a:rPr sz="1500" b="1">
+                <a:solidFill>
+                  <a:srgbClr val="E0A437"/>
+                </a:solidFill>
+                <a:latin typeface="Fira Sans"/>
+              </a:rPr>
+              <a:t>▸ </a:t>
+            </a:r>
+            <a:r>
+              <a:rPr sz="1500" b="0">
+                <a:solidFill>
+                  <a:srgbClr val="000000"/>
+                </a:solidFill>
+                <a:latin typeface="Fira Sans"/>
+              </a:rPr>
+              <a:t>La media es un 36% más alta que la mediana.</a:t>
+            </a:r>
+          </a:p>
+          <a:p>
+            <a:pPr>
+              <a:lnSpc>
+                <a:spcPct val="112000"/>
+              </a:lnSpc>
+              <a:spcAft>
+                <a:spcPts val="900"/>
+              </a:spcAft>
+            </a:pPr>
+            <a:r>
+              <a:rPr sz="1500" b="1">
+                <a:solidFill>
+                  <a:srgbClr val="E0A437"/>
+                </a:solidFill>
+                <a:latin typeface="Fira Sans"/>
+              </a:rPr>
+              <a:t>▸ </a:t>
+            </a:r>
+            <a:r>
+              <a:rPr sz="1500" b="0">
+                <a:solidFill>
+                  <a:srgbClr val="000000"/>
+                </a:solidFill>
+                <a:latin typeface="Fira Sans"/>
+              </a:rPr>
+              <a:t>Los ingresos altos desplazan el promedio; la mayoría gana menos.</a:t>
+            </a:r>
+          </a:p>
+          <a:p>
+            <a:pPr>
+              <a:lnSpc>
+                <a:spcPct val="112000"/>
+              </a:lnSpc>
+              <a:spcAft>
+                <a:spcPts val="900"/>
+              </a:spcAft>
+            </a:pPr>
+            <a:r>
+              <a:rPr sz="1500" b="1">
+                <a:solidFill>
+                  <a:srgbClr val="E0A437"/>
+                </a:solidFill>
+                <a:latin typeface="Fira Sans"/>
+              </a:rPr>
+              <a:t>▸ </a:t>
+            </a:r>
+            <a:r>
+              <a:rPr sz="1500" b="1">
+                <a:solidFill>
+                  <a:srgbClr val="1D3557"/>
+                </a:solidFill>
+                <a:latin typeface="Fira Sans"/>
+              </a:rPr>
+              <a:t>El promedio describe una situación en la que la mayoría no está.</a:t>
             </a:r>
           </a:p>
         </p:txBody>
       </p:sp>
       <p:pic>
         <p:nvPicPr>
-          <p:cNvPr id="4" name="Picture 3" descr="06_diagrama_factores.png"/>
+          <p:cNvPr id="5" name="Picture 4" descr="01_ingreso_media_mediana.png"/>
           <p:cNvPicPr>
             <a:picLocks noChangeAspect="1"/>
           </p:cNvPicPr>
@@ -6821,48 +6822,14 @@
         </p:blipFill>
         <p:spPr>
           <a:xfrm>
-            <a:off x="1417319" y="1143000"/>
-            <a:ext cx="6309360" cy="2871234"/>
+            <a:off x="4892040" y="1371600"/>
+            <a:ext cx="3840480" cy="2182719"/>
           </a:xfrm>
           <a:prstGeom prst="rect">
             <a:avLst/>
           </a:prstGeom>
         </p:spPr>
       </p:pic>
-      <p:sp>
-        <p:nvSpPr>
-          <p:cNvPr id="5" name="TextBox 4"/>
-          <p:cNvSpPr txBox="1"/>
-          <p:nvPr/>
-        </p:nvSpPr>
-        <p:spPr>
-          <a:xfrm>
-            <a:off x="704088" y="4434840"/>
-            <a:ext cx="7744968" cy="457200"/>
-          </a:xfrm>
-          <a:prstGeom prst="rect">
-            <a:avLst/>
-          </a:prstGeom>
-          <a:noFill/>
-        </p:spPr>
-        <p:txBody>
-          <a:bodyPr wrap="square">
-            <a:spAutoFit/>
-          </a:bodyPr>
-          <a:lstStyle/>
-          <a:p>
-            <a:r>
-              <a:rPr sz="1300" b="0">
-                <a:solidFill>
-                  <a:srgbClr val="333333"/>
-                </a:solidFill>
-                <a:latin typeface="Fira Sans"/>
-              </a:rPr>
-              <a:t>Contar filas responde por la muestra; sumar factores responde por la ciudad.</a:t>
-            </a:r>
-          </a:p>
-        </p:txBody>
-      </p:sp>
     </p:spTree>
   </p:cSld>
   <p:clrMapOvr>
@@ -6954,7 +6921,7 @@
                 </a:solidFill>
                 <a:latin typeface="Fira Sans"/>
               </a:rPr>
-              <a:t>El ingreso de los hogares: media y mediana</a:t>
+              <a:t>La duración de los viajes: valores extremos</a:t>
             </a:r>
           </a:p>
         </p:txBody>
@@ -7005,7 +6972,7 @@
                 </a:solidFill>
                 <a:latin typeface="Fira Sans"/>
               </a:rPr>
-              <a:t>Media: $688.274. Mediana: $507.826.</a:t>
+              <a:t>Mediana: 30 minutos. Percentil 95: 98 minutos.</a:t>
             </a:r>
           </a:p>
           <a:p>
@@ -7033,7 +7000,7 @@
                 </a:solidFill>
                 <a:latin typeface="Fira Sans"/>
               </a:rPr>
-              <a:t>La media es un 36% más alta que la mediana.</a:t>
+              <a:t>Máximo registrado: 1.335 minutos, un viaje de 22 horas.</a:t>
             </a:r>
           </a:p>
           <a:p>
@@ -7061,7 +7028,7 @@
                 </a:solidFill>
                 <a:latin typeface="Fira Sans"/>
               </a:rPr>
-              <a:t>Los ingresos altos desplazan el promedio; la mayoría gana menos.</a:t>
+              <a:t>¿Error de digitación? ¿Turno nocturno mal anotado?</a:t>
             </a:r>
           </a:p>
           <a:p>
@@ -7089,14 +7056,14 @@
                 </a:solidFill>
                 <a:latin typeface="Fira Sans"/>
               </a:rPr>
-              <a:t>El promedio describe una situación en la que la mayoría no está.</a:t>
+              <a:t>Los valores extremos se investigan y la decisión se declara.</a:t>
             </a:r>
           </a:p>
         </p:txBody>
       </p:sp>
       <p:pic>
         <p:nvPicPr>
-          <p:cNvPr id="5" name="Picture 4" descr="01_ingreso_media_mediana.png"/>
+          <p:cNvPr id="5" name="Picture 4" descr="04_duracion_viajes.png"/>
           <p:cNvPicPr>
             <a:picLocks noChangeAspect="1"/>
           </p:cNvPicPr>
@@ -7111,7 +7078,7 @@
         <p:spPr>
           <a:xfrm>
             <a:off x="4892040" y="1371600"/>
-            <a:ext cx="3840480" cy="2182719"/>
+            <a:ext cx="3840480" cy="2146492"/>
           </a:xfrm>
           <a:prstGeom prst="rect">
             <a:avLst/>
@@ -7209,7 +7176,7 @@
                 </a:solidFill>
                 <a:latin typeface="Fira Sans"/>
               </a:rPr>
-              <a:t>La duración de los viajes: valores extremos</a:t>
+              <a:t>La partición modal del Gran Santiago</a:t>
             </a:r>
           </a:p>
         </p:txBody>
@@ -7260,7 +7227,91 @@
                 </a:solidFill>
                 <a:latin typeface="Fira Sans"/>
               </a:rPr>
-              <a:t>Mediana: 30 minutos. Percentil 95: 98 minutos.</a:t>
+              <a:t>Dos merges y un groupby ponderado por factor.</a:t>
+            </a:r>
+          </a:p>
+          <a:p>
+            <a:pPr>
+              <a:lnSpc>
+                <a:spcPct val="112000"/>
+              </a:lnSpc>
+              <a:spcAft>
+                <a:spcPts val="500"/>
+              </a:spcAft>
+            </a:pPr>
+            <a:r>
+              <a:rPr sz="1300" b="0">
+                <a:solidFill>
+                  <a:srgbClr val="333333"/>
+                </a:solidFill>
+                <a:latin typeface="Fira Sans"/>
+              </a:rPr>
+              <a:t>     ◦  </a:t>
+            </a:r>
+            <a:r>
+              <a:rPr sz="1300" b="0">
+                <a:solidFill>
+                  <a:srgbClr val="333333"/>
+                </a:solidFill>
+                <a:latin typeface="Fira Sans"/>
+              </a:rPr>
+              <a:t>Caminata: 34% de los viajes.</a:t>
+            </a:r>
+          </a:p>
+          <a:p>
+            <a:pPr>
+              <a:lnSpc>
+                <a:spcPct val="112000"/>
+              </a:lnSpc>
+              <a:spcAft>
+                <a:spcPts val="500"/>
+              </a:spcAft>
+            </a:pPr>
+            <a:r>
+              <a:rPr sz="1300" b="0">
+                <a:solidFill>
+                  <a:srgbClr val="333333"/>
+                </a:solidFill>
+                <a:latin typeface="Fira Sans"/>
+              </a:rPr>
+              <a:t>     ◦  </a:t>
+            </a:r>
+            <a:r>
+              <a:rPr sz="1300" b="0">
+                <a:solidFill>
+                  <a:srgbClr val="333333"/>
+                </a:solidFill>
+                <a:latin typeface="Fira Sans"/>
+              </a:rPr>
+              <a:t>Transporte público (Bip!): 24%.</a:t>
+            </a:r>
+          </a:p>
+          <a:p>
+            <a:pPr>
+              <a:lnSpc>
+                <a:spcPct val="112000"/>
+              </a:lnSpc>
+              <a:spcAft>
+                <a:spcPts val="500"/>
+              </a:spcAft>
+            </a:pPr>
+            <a:r>
+              <a:rPr sz="1300" b="0">
+                <a:solidFill>
+                  <a:srgbClr val="333333"/>
+                </a:solidFill>
+                <a:latin typeface="Fira Sans"/>
+              </a:rPr>
+              <a:t>     ◦  </a:t>
+            </a:r>
+            <a:r>
+              <a:rPr sz="1300" b="0">
+                <a:solidFill>
+                  <a:srgbClr val="333333"/>
+                </a:solidFill>
+                <a:latin typeface="Fira Sans"/>
+              </a:rPr>
+              <a:t>Auto: 23%.</a:t>
             </a:r>
           </a:p>
           <a:p>
@@ -7282,76 +7333,20 @@
               <a:t>▸ </a:t>
             </a:r>
             <a:r>
-              <a:rPr sz="1500" b="0">
-                <a:solidFill>
-                  <a:srgbClr val="000000"/>
-                </a:solidFill>
-                <a:latin typeface="Fira Sans"/>
-              </a:rPr>
-              <a:t>Máximo registrado: 1.335 minutos, un viaje de 22 horas.</a:t>
-            </a:r>
-          </a:p>
-          <a:p>
-            <a:pPr>
-              <a:lnSpc>
-                <a:spcPct val="112000"/>
-              </a:lnSpc>
-              <a:spcAft>
-                <a:spcPts val="900"/>
-              </a:spcAft>
-            </a:pPr>
-            <a:r>
               <a:rPr sz="1500" b="1">
                 <a:solidFill>
-                  <a:srgbClr val="E0A437"/>
-                </a:solidFill>
-                <a:latin typeface="Fira Sans"/>
-              </a:rPr>
-              <a:t>▸ </a:t>
-            </a:r>
-            <a:r>
-              <a:rPr sz="1500" b="0">
-                <a:solidFill>
-                  <a:srgbClr val="000000"/>
-                </a:solidFill>
-                <a:latin typeface="Fira Sans"/>
-              </a:rPr>
-              <a:t>¿Error de digitación? ¿Turno nocturno mal anotado?</a:t>
-            </a:r>
-          </a:p>
-          <a:p>
-            <a:pPr>
-              <a:lnSpc>
-                <a:spcPct val="112000"/>
-              </a:lnSpc>
-              <a:spcAft>
-                <a:spcPts val="900"/>
-              </a:spcAft>
-            </a:pPr>
-            <a:r>
-              <a:rPr sz="1500" b="1">
-                <a:solidFill>
-                  <a:srgbClr val="E0A437"/>
-                </a:solidFill>
-                <a:latin typeface="Fira Sans"/>
-              </a:rPr>
-              <a:t>▸ </a:t>
-            </a:r>
-            <a:r>
-              <a:rPr sz="1500" b="1">
-                <a:solidFill>
                   <a:srgbClr val="1D3557"/>
                 </a:solidFill>
                 <a:latin typeface="Fira Sans"/>
               </a:rPr>
-              <a:t>Los valores extremos se investigan y la decisión se declara.</a:t>
+              <a:t>Calculada desde los microdatos, con los factores de un día laboral.</a:t>
             </a:r>
           </a:p>
         </p:txBody>
       </p:sp>
       <p:pic>
         <p:nvPicPr>
-          <p:cNvPr id="5" name="Picture 4" descr="04_duracion_viajes.png"/>
+          <p:cNvPr id="5" name="Picture 4" descr="03_reparto_modal.png"/>
           <p:cNvPicPr>
             <a:picLocks noChangeAspect="1"/>
           </p:cNvPicPr>
@@ -7366,7 +7361,7 @@
         <p:spPr>
           <a:xfrm>
             <a:off x="4892040" y="1371600"/>
-            <a:ext cx="3840480" cy="2146492"/>
+            <a:ext cx="3840480" cy="1938578"/>
           </a:xfrm>
           <a:prstGeom prst="rect">
             <a:avLst/>
@@ -7464,177 +7459,14 @@
                 </a:solidFill>
                 <a:latin typeface="Fira Sans"/>
               </a:rPr>
-              <a:t>La partición modal del Gran Santiago</a:t>
-            </a:r>
-          </a:p>
-        </p:txBody>
-      </p:sp>
-      <p:sp>
-        <p:nvSpPr>
-          <p:cNvPr id="4" name="TextBox 3"/>
-          <p:cNvSpPr txBox="1"/>
-          <p:nvPr/>
-        </p:nvSpPr>
-        <p:spPr>
-          <a:xfrm>
-            <a:off x="502920" y="1252728"/>
-            <a:ext cx="4023360" cy="3200400"/>
-          </a:xfrm>
-          <a:prstGeom prst="rect">
-            <a:avLst/>
-          </a:prstGeom>
-          <a:noFill/>
-        </p:spPr>
-        <p:txBody>
-          <a:bodyPr wrap="square">
-            <a:spAutoFit/>
-          </a:bodyPr>
-          <a:lstStyle/>
-          <a:p>
-            <a:pPr>
-              <a:lnSpc>
-                <a:spcPct val="112000"/>
-              </a:lnSpc>
-              <a:spcAft>
-                <a:spcPts val="900"/>
-              </a:spcAft>
-            </a:pPr>
-            <a:r>
-              <a:rPr sz="1500" b="1">
-                <a:solidFill>
-                  <a:srgbClr val="E0A437"/>
-                </a:solidFill>
-                <a:latin typeface="Fira Sans"/>
-              </a:rPr>
-              <a:t>▸ </a:t>
-            </a:r>
-            <a:r>
-              <a:rPr sz="1500" b="0">
-                <a:solidFill>
-                  <a:srgbClr val="000000"/>
-                </a:solidFill>
-                <a:latin typeface="Fira Sans"/>
-              </a:rPr>
-              <a:t>Dos merges y un groupby ponderado por factor.</a:t>
-            </a:r>
-          </a:p>
-          <a:p>
-            <a:pPr>
-              <a:lnSpc>
-                <a:spcPct val="112000"/>
-              </a:lnSpc>
-              <a:spcAft>
-                <a:spcPts val="500"/>
-              </a:spcAft>
-            </a:pPr>
-            <a:r>
-              <a:rPr sz="1300" b="0">
-                <a:solidFill>
-                  <a:srgbClr val="333333"/>
-                </a:solidFill>
-                <a:latin typeface="Fira Sans"/>
-              </a:rPr>
-              <a:t>     ◦  </a:t>
-            </a:r>
-            <a:r>
-              <a:rPr sz="1300" b="0">
-                <a:solidFill>
-                  <a:srgbClr val="333333"/>
-                </a:solidFill>
-                <a:latin typeface="Fira Sans"/>
-              </a:rPr>
-              <a:t>Caminata: 34% de los viajes.</a:t>
-            </a:r>
-          </a:p>
-          <a:p>
-            <a:pPr>
-              <a:lnSpc>
-                <a:spcPct val="112000"/>
-              </a:lnSpc>
-              <a:spcAft>
-                <a:spcPts val="500"/>
-              </a:spcAft>
-            </a:pPr>
-            <a:r>
-              <a:rPr sz="1300" b="0">
-                <a:solidFill>
-                  <a:srgbClr val="333333"/>
-                </a:solidFill>
-                <a:latin typeface="Fira Sans"/>
-              </a:rPr>
-              <a:t>     ◦  </a:t>
-            </a:r>
-            <a:r>
-              <a:rPr sz="1300" b="0">
-                <a:solidFill>
-                  <a:srgbClr val="333333"/>
-                </a:solidFill>
-                <a:latin typeface="Fira Sans"/>
-              </a:rPr>
-              <a:t>Transporte público (Bip!): 24%.</a:t>
-            </a:r>
-          </a:p>
-          <a:p>
-            <a:pPr>
-              <a:lnSpc>
-                <a:spcPct val="112000"/>
-              </a:lnSpc>
-              <a:spcAft>
-                <a:spcPts val="500"/>
-              </a:spcAft>
-            </a:pPr>
-            <a:r>
-              <a:rPr sz="1300" b="0">
-                <a:solidFill>
-                  <a:srgbClr val="333333"/>
-                </a:solidFill>
-                <a:latin typeface="Fira Sans"/>
-              </a:rPr>
-              <a:t>     ◦  </a:t>
-            </a:r>
-            <a:r>
-              <a:rPr sz="1300" b="0">
-                <a:solidFill>
-                  <a:srgbClr val="333333"/>
-                </a:solidFill>
-                <a:latin typeface="Fira Sans"/>
-              </a:rPr>
-              <a:t>Auto: 23%.</a:t>
-            </a:r>
-          </a:p>
-          <a:p>
-            <a:pPr>
-              <a:lnSpc>
-                <a:spcPct val="112000"/>
-              </a:lnSpc>
-              <a:spcAft>
-                <a:spcPts val="900"/>
-              </a:spcAft>
-            </a:pPr>
-            <a:r>
-              <a:rPr sz="1500" b="1">
-                <a:solidFill>
-                  <a:srgbClr val="E0A437"/>
-                </a:solidFill>
-                <a:latin typeface="Fira Sans"/>
-              </a:rPr>
-              <a:t>▸ </a:t>
-            </a:r>
-            <a:r>
-              <a:rPr sz="1500" b="1">
-                <a:solidFill>
-                  <a:srgbClr val="1D3557"/>
-                </a:solidFill>
-                <a:latin typeface="Fira Sans"/>
-              </a:rPr>
-              <a:t>Calculada desde los microdatos, con los factores de un día laboral.</a:t>
+              <a:t>El reparto modal difiere entre comunas</a:t>
             </a:r>
           </a:p>
         </p:txBody>
       </p:sp>
       <p:pic>
         <p:nvPicPr>
-          <p:cNvPr id="5" name="Picture 4" descr="03_reparto_modal.png"/>
+          <p:cNvPr id="4" name="Picture 3" descr="08_modo_por_comuna.png"/>
           <p:cNvPicPr>
             <a:picLocks noChangeAspect="1"/>
           </p:cNvPicPr>
@@ -7648,14 +7480,48 @@
         </p:blipFill>
         <p:spPr>
           <a:xfrm>
-            <a:off x="4892040" y="1371600"/>
-            <a:ext cx="3840480" cy="1938578"/>
+            <a:off x="1994250" y="1143000"/>
+            <a:ext cx="5155498" cy="3154679"/>
           </a:xfrm>
           <a:prstGeom prst="rect">
             <a:avLst/>
           </a:prstGeom>
         </p:spPr>
       </p:pic>
+      <p:sp>
+        <p:nvSpPr>
+          <p:cNvPr id="5" name="TextBox 4"/>
+          <p:cNvSpPr txBox="1"/>
+          <p:nvPr/>
+        </p:nvSpPr>
+        <p:spPr>
+          <a:xfrm>
+            <a:off x="704088" y="4434840"/>
+            <a:ext cx="7744968" cy="457200"/>
+          </a:xfrm>
+          <a:prstGeom prst="rect">
+            <a:avLst/>
+          </a:prstGeom>
+          <a:noFill/>
+        </p:spPr>
+        <p:txBody>
+          <a:bodyPr wrap="square">
+            <a:spAutoFit/>
+          </a:bodyPr>
+          <a:lstStyle/>
+          <a:p>
+            <a:r>
+              <a:rPr sz="1300" b="0">
+                <a:solidFill>
+                  <a:srgbClr val="333333"/>
+                </a:solidFill>
+                <a:latin typeface="Fira Sans"/>
+              </a:rPr>
+              <a:t>Normalizar por comuna permite comparar proporciones entre comunas de tamaños muy distintos.</a:t>
+            </a:r>
+          </a:p>
+        </p:txBody>
+      </p:sp>
     </p:spTree>
   </p:cSld>
   <p:clrMapOvr>
@@ -7747,14 +7613,177 @@
                 </a:solidFill>
                 <a:latin typeface="Fira Sans"/>
               </a:rPr>
-              <a:t>El reparto modal difiere entre comunas</a:t>
+              <a:t>Ingreso y uso de transporte público</a:t>
+            </a:r>
+          </a:p>
+        </p:txBody>
+      </p:sp>
+      <p:sp>
+        <p:nvSpPr>
+          <p:cNvPr id="4" name="TextBox 3"/>
+          <p:cNvSpPr txBox="1"/>
+          <p:nvPr/>
+        </p:nvSpPr>
+        <p:spPr>
+          <a:xfrm>
+            <a:off x="502920" y="1252728"/>
+            <a:ext cx="4023360" cy="3200400"/>
+          </a:xfrm>
+          <a:prstGeom prst="rect">
+            <a:avLst/>
+          </a:prstGeom>
+          <a:noFill/>
+        </p:spPr>
+        <p:txBody>
+          <a:bodyPr wrap="square">
+            <a:spAutoFit/>
+          </a:bodyPr>
+          <a:lstStyle/>
+          <a:p>
+            <a:pPr>
+              <a:lnSpc>
+                <a:spcPct val="112000"/>
+              </a:lnSpc>
+              <a:spcAft>
+                <a:spcPts val="900"/>
+              </a:spcAft>
+            </a:pPr>
+            <a:r>
+              <a:rPr sz="1500" b="1">
+                <a:solidFill>
+                  <a:srgbClr val="E0A437"/>
+                </a:solidFill>
+                <a:latin typeface="Fira Sans"/>
+              </a:rPr>
+              <a:t>▸ </a:t>
+            </a:r>
+            <a:r>
+              <a:rPr sz="1500" b="0">
+                <a:solidFill>
+                  <a:srgbClr val="000000"/>
+                </a:solidFill>
+                <a:latin typeface="Fira Sans"/>
+              </a:rPr>
+              <a:t>Cada punto es una comuna: ingreso medio contra proporción de viajes en transporte público.</a:t>
+            </a:r>
+          </a:p>
+          <a:p>
+            <a:pPr>
+              <a:lnSpc>
+                <a:spcPct val="112000"/>
+              </a:lnSpc>
+              <a:spcAft>
+                <a:spcPts val="500"/>
+              </a:spcAft>
+            </a:pPr>
+            <a:r>
+              <a:rPr sz="1300" b="0">
+                <a:solidFill>
+                  <a:srgbClr val="333333"/>
+                </a:solidFill>
+                <a:latin typeface="Fira Sans"/>
+              </a:rPr>
+              <a:t>     ◦  </a:t>
+            </a:r>
+            <a:r>
+              <a:rPr sz="1300" b="0">
+                <a:solidFill>
+                  <a:srgbClr val="333333"/>
+                </a:solidFill>
+                <a:latin typeface="Fira Sans"/>
+              </a:rPr>
+              <a:t>Periferia (Buin, Melipilla): poco transporte público; la red no llega.</a:t>
+            </a:r>
+          </a:p>
+          <a:p>
+            <a:pPr>
+              <a:lnSpc>
+                <a:spcPct val="112000"/>
+              </a:lnSpc>
+              <a:spcAft>
+                <a:spcPts val="500"/>
+              </a:spcAft>
+            </a:pPr>
+            <a:r>
+              <a:rPr sz="1300" b="0">
+                <a:solidFill>
+                  <a:srgbClr val="333333"/>
+                </a:solidFill>
+                <a:latin typeface="Fira Sans"/>
+              </a:rPr>
+              <a:t>     ◦  </a:t>
+            </a:r>
+            <a:r>
+              <a:rPr sz="1300" b="0">
+                <a:solidFill>
+                  <a:srgbClr val="333333"/>
+                </a:solidFill>
+                <a:latin typeface="Fira Sans"/>
+              </a:rPr>
+              <a:t>Ingresos altos (Vitacura, Lo Barnechea): conectadas, con poco uso.</a:t>
+            </a:r>
+          </a:p>
+          <a:p>
+            <a:pPr>
+              <a:lnSpc>
+                <a:spcPct val="112000"/>
+              </a:lnSpc>
+              <a:spcAft>
+                <a:spcPts val="500"/>
+              </a:spcAft>
+            </a:pPr>
+            <a:r>
+              <a:rPr sz="1300" b="0">
+                <a:solidFill>
+                  <a:srgbClr val="333333"/>
+                </a:solidFill>
+                <a:latin typeface="Fira Sans"/>
+              </a:rPr>
+              <a:t>     ◦  </a:t>
+            </a:r>
+            <a:r>
+              <a:rPr sz="1300" b="0">
+                <a:solidFill>
+                  <a:srgbClr val="333333"/>
+                </a:solidFill>
+                <a:latin typeface="Fira Sans"/>
+              </a:rPr>
+              <a:t>Correlación de Pearson: -0,17. La asociación lineal es débil.</a:t>
+            </a:r>
+          </a:p>
+          <a:p>
+            <a:pPr>
+              <a:lnSpc>
+                <a:spcPct val="112000"/>
+              </a:lnSpc>
+              <a:spcAft>
+                <a:spcPts val="900"/>
+              </a:spcAft>
+            </a:pPr>
+            <a:r>
+              <a:rPr sz="1500" b="1">
+                <a:solidFill>
+                  <a:srgbClr val="E0A437"/>
+                </a:solidFill>
+                <a:latin typeface="Fira Sans"/>
+              </a:rPr>
+              <a:t>▸ </a:t>
+            </a:r>
+            <a:r>
+              <a:rPr sz="1500" b="1">
+                <a:solidFill>
+                  <a:srgbClr val="1D3557"/>
+                </a:solidFill>
+                <a:latin typeface="Fira Sans"/>
+              </a:rPr>
+              <a:t>Como vimos en el marco conceptual: el coeficiente no reemplaza al gráfico, y la asociación no autoriza verbos causales.</a:t>
             </a:r>
           </a:p>
         </p:txBody>
       </p:sp>
       <p:pic>
         <p:nvPicPr>
-          <p:cNvPr id="4" name="Picture 3" descr="08_modo_por_comuna.png"/>
+          <p:cNvPr id="5" name="Picture 4" descr="09_ingreso_vs_tp.png"/>
           <p:cNvPicPr>
             <a:picLocks noChangeAspect="1"/>
           </p:cNvPicPr>
@@ -7768,48 +7797,14 @@
         </p:blipFill>
         <p:spPr>
           <a:xfrm>
-            <a:off x="1994250" y="1143000"/>
-            <a:ext cx="5155498" cy="3154679"/>
+            <a:off x="4892040" y="1371600"/>
+            <a:ext cx="3840480" cy="2526979"/>
           </a:xfrm>
           <a:prstGeom prst="rect">
             <a:avLst/>
           </a:prstGeom>
         </p:spPr>
       </p:pic>
-      <p:sp>
-        <p:nvSpPr>
-          <p:cNvPr id="5" name="TextBox 4"/>
-          <p:cNvSpPr txBox="1"/>
-          <p:nvPr/>
-        </p:nvSpPr>
-        <p:spPr>
-          <a:xfrm>
-            <a:off x="704088" y="4434840"/>
-            <a:ext cx="7744968" cy="457200"/>
-          </a:xfrm>
-          <a:prstGeom prst="rect">
-            <a:avLst/>
-          </a:prstGeom>
-          <a:noFill/>
-        </p:spPr>
-        <p:txBody>
-          <a:bodyPr wrap="square">
-            <a:spAutoFit/>
-          </a:bodyPr>
-          <a:lstStyle/>
-          <a:p>
-            <a:r>
-              <a:rPr sz="1300" b="0">
-                <a:solidFill>
-                  <a:srgbClr val="333333"/>
-                </a:solidFill>
-                <a:latin typeface="Fira Sans"/>
-              </a:rPr>
-              <a:t>Normalizar por comuna permite comparar proporciones entre comunas de tamaños muy distintos.</a:t>
-            </a:r>
-          </a:p>
-        </p:txBody>
-      </p:sp>
     </p:spTree>
   </p:cSld>
   <p:clrMapOvr>
@@ -8008,177 +8003,14 @@
                 </a:solidFill>
                 <a:latin typeface="Fira Sans"/>
               </a:rPr>
-              <a:t>Ingreso y uso de transporte público</a:t>
-            </a:r>
-          </a:p>
-        </p:txBody>
-      </p:sp>
-      <p:sp>
-        <p:nvSpPr>
-          <p:cNvPr id="4" name="TextBox 3"/>
-          <p:cNvSpPr txBox="1"/>
-          <p:nvPr/>
-        </p:nvSpPr>
-        <p:spPr>
-          <a:xfrm>
-            <a:off x="502920" y="1252728"/>
-            <a:ext cx="4023360" cy="3200400"/>
-          </a:xfrm>
-          <a:prstGeom prst="rect">
-            <a:avLst/>
-          </a:prstGeom>
-          <a:noFill/>
-        </p:spPr>
-        <p:txBody>
-          <a:bodyPr wrap="square">
-            <a:spAutoFit/>
-          </a:bodyPr>
-          <a:lstStyle/>
-          <a:p>
-            <a:pPr>
-              <a:lnSpc>
-                <a:spcPct val="112000"/>
-              </a:lnSpc>
-              <a:spcAft>
-                <a:spcPts val="900"/>
-              </a:spcAft>
-            </a:pPr>
-            <a:r>
-              <a:rPr sz="1500" b="1">
-                <a:solidFill>
-                  <a:srgbClr val="E0A437"/>
-                </a:solidFill>
-                <a:latin typeface="Fira Sans"/>
-              </a:rPr>
-              <a:t>▸ </a:t>
-            </a:r>
-            <a:r>
-              <a:rPr sz="1500" b="0">
-                <a:solidFill>
-                  <a:srgbClr val="000000"/>
-                </a:solidFill>
-                <a:latin typeface="Fira Sans"/>
-              </a:rPr>
-              <a:t>Cada punto es una comuna: ingreso medio contra proporción de viajes en transporte público.</a:t>
-            </a:r>
-          </a:p>
-          <a:p>
-            <a:pPr>
-              <a:lnSpc>
-                <a:spcPct val="112000"/>
-              </a:lnSpc>
-              <a:spcAft>
-                <a:spcPts val="500"/>
-              </a:spcAft>
-            </a:pPr>
-            <a:r>
-              <a:rPr sz="1300" b="0">
-                <a:solidFill>
-                  <a:srgbClr val="333333"/>
-                </a:solidFill>
-                <a:latin typeface="Fira Sans"/>
-              </a:rPr>
-              <a:t>     ◦  </a:t>
-            </a:r>
-            <a:r>
-              <a:rPr sz="1300" b="0">
-                <a:solidFill>
-                  <a:srgbClr val="333333"/>
-                </a:solidFill>
-                <a:latin typeface="Fira Sans"/>
-              </a:rPr>
-              <a:t>Periferia (Buin, Melipilla): poco transporte público; la red no llega.</a:t>
-            </a:r>
-          </a:p>
-          <a:p>
-            <a:pPr>
-              <a:lnSpc>
-                <a:spcPct val="112000"/>
-              </a:lnSpc>
-              <a:spcAft>
-                <a:spcPts val="500"/>
-              </a:spcAft>
-            </a:pPr>
-            <a:r>
-              <a:rPr sz="1300" b="0">
-                <a:solidFill>
-                  <a:srgbClr val="333333"/>
-                </a:solidFill>
-                <a:latin typeface="Fira Sans"/>
-              </a:rPr>
-              <a:t>     ◦  </a:t>
-            </a:r>
-            <a:r>
-              <a:rPr sz="1300" b="0">
-                <a:solidFill>
-                  <a:srgbClr val="333333"/>
-                </a:solidFill>
-                <a:latin typeface="Fira Sans"/>
-              </a:rPr>
-              <a:t>Ingresos altos (Vitacura, Lo Barnechea): conectadas, con poco uso.</a:t>
-            </a:r>
-          </a:p>
-          <a:p>
-            <a:pPr>
-              <a:lnSpc>
-                <a:spcPct val="112000"/>
-              </a:lnSpc>
-              <a:spcAft>
-                <a:spcPts val="500"/>
-              </a:spcAft>
-            </a:pPr>
-            <a:r>
-              <a:rPr sz="1300" b="0">
-                <a:solidFill>
-                  <a:srgbClr val="333333"/>
-                </a:solidFill>
-                <a:latin typeface="Fira Sans"/>
-              </a:rPr>
-              <a:t>     ◦  </a:t>
-            </a:r>
-            <a:r>
-              <a:rPr sz="1300" b="0">
-                <a:solidFill>
-                  <a:srgbClr val="333333"/>
-                </a:solidFill>
-                <a:latin typeface="Fira Sans"/>
-              </a:rPr>
-              <a:t>Correlación de Pearson: -0,17. La asociación lineal es débil.</a:t>
-            </a:r>
-          </a:p>
-          <a:p>
-            <a:pPr>
-              <a:lnSpc>
-                <a:spcPct val="112000"/>
-              </a:lnSpc>
-              <a:spcAft>
-                <a:spcPts val="900"/>
-              </a:spcAft>
-            </a:pPr>
-            <a:r>
-              <a:rPr sz="1500" b="1">
-                <a:solidFill>
-                  <a:srgbClr val="E0A437"/>
-                </a:solidFill>
-                <a:latin typeface="Fira Sans"/>
-              </a:rPr>
-              <a:t>▸ </a:t>
-            </a:r>
-            <a:r>
-              <a:rPr sz="1500" b="1">
-                <a:solidFill>
-                  <a:srgbClr val="1D3557"/>
-                </a:solidFill>
-                <a:latin typeface="Fira Sans"/>
-              </a:rPr>
-              <a:t>Como vimos en el marco conceptual: el coeficiente no reemplaza al gráfico, y la asociación no autoriza verbos causales.</a:t>
+              <a:t>Los propósitos de viaje según el día de la semana</a:t>
             </a:r>
           </a:p>
         </p:txBody>
       </p:sp>
       <p:pic>
         <p:nvPicPr>
-          <p:cNvPr id="5" name="Picture 4" descr="09_ingreso_vs_tp.png"/>
+          <p:cNvPr id="4" name="Picture 3" descr="10_heatmap_rutinas.png"/>
           <p:cNvPicPr>
             <a:picLocks noChangeAspect="1"/>
           </p:cNvPicPr>
@@ -8192,14 +8024,48 @@
         </p:blipFill>
         <p:spPr>
           <a:xfrm>
-            <a:off x="4892040" y="1371600"/>
-            <a:ext cx="3840480" cy="2526979"/>
+            <a:off x="1563778" y="1143000"/>
+            <a:ext cx="6016443" cy="3154680"/>
           </a:xfrm>
           <a:prstGeom prst="rect">
             <a:avLst/>
           </a:prstGeom>
         </p:spPr>
       </p:pic>
+      <p:sp>
+        <p:nvSpPr>
+          <p:cNvPr id="5" name="TextBox 4"/>
+          <p:cNvSpPr txBox="1"/>
+          <p:nvPr/>
+        </p:nvSpPr>
+        <p:spPr>
+          <a:xfrm>
+            <a:off x="704088" y="4434840"/>
+            <a:ext cx="7744968" cy="457200"/>
+          </a:xfrm>
+          <a:prstGeom prst="rect">
+            <a:avLst/>
+          </a:prstGeom>
+          <a:noFill/>
+        </p:spPr>
+        <p:txBody>
+          <a:bodyPr wrap="square">
+            <a:spAutoFit/>
+          </a:bodyPr>
+          <a:lstStyle/>
+          <a:p>
+            <a:r>
+              <a:rPr sz="1300" b="0">
+                <a:solidFill>
+                  <a:srgbClr val="333333"/>
+                </a:solidFill>
+                <a:latin typeface="Fira Sans"/>
+              </a:rPr>
+              <a:t>El heatmap muestra 14 propósitos por 7 días en una sola figura: útil para tablas completas.</a:t>
+            </a:r>
+          </a:p>
+        </p:txBody>
+      </p:sp>
     </p:spTree>
   </p:cSld>
   <p:clrMapOvr>
@@ -8291,14 +8157,14 @@
                 </a:solidFill>
                 <a:latin typeface="Fira Sans"/>
               </a:rPr>
-              <a:t>Los propósitos de viaje según el día de la semana</a:t>
+              <a:t>Cuando los datos crecen</a:t>
             </a:r>
           </a:p>
         </p:txBody>
       </p:sp>
       <p:pic>
         <p:nvPicPr>
-          <p:cNvPr id="4" name="Picture 3" descr="10_heatmap_rutinas.png"/>
+          <p:cNvPr id="4" name="Picture 3" descr="14_escala_datos.png"/>
           <p:cNvPicPr>
             <a:picLocks noChangeAspect="1"/>
           </p:cNvPicPr>
@@ -8312,8 +8178,8 @@
         </p:blipFill>
         <p:spPr>
           <a:xfrm>
-            <a:off x="1563778" y="1143000"/>
-            <a:ext cx="6016443" cy="3154680"/>
+            <a:off x="1417319" y="1143000"/>
+            <a:ext cx="6309360" cy="2324913"/>
           </a:xfrm>
           <a:prstGeom prst="rect">
             <a:avLst/>
@@ -8349,7 +8215,7 @@
                 </a:solidFill>
                 <a:latin typeface="Fira Sans"/>
               </a:rPr>
-              <a:t>El heatmap muestra 14 propósitos por 7 días en una sola figura: útil para tablas completas.</a:t>
+              <a:t>PySpark se usa con SQL o con sus propios DataFrames; Dask reparte operaciones estilo Pandas; Polars y DuckDB rinden en una sola máquina.</a:t>
             </a:r>
           </a:p>
         </p:txBody>
@@ -8445,45 +8311,21 @@
                 </a:solidFill>
                 <a:latin typeface="Fira Sans"/>
               </a:rPr>
-              <a:t>Cuando los datos crecen</a:t>
-            </a:r>
-          </a:p>
-        </p:txBody>
-      </p:sp>
-      <p:pic>
-        <p:nvPicPr>
-          <p:cNvPr id="4" name="Picture 3" descr="14_escala_datos.png"/>
-          <p:cNvPicPr>
-            <a:picLocks noChangeAspect="1"/>
-          </p:cNvPicPr>
-          <p:nvPr/>
-        </p:nvPicPr>
-        <p:blipFill>
-          <a:blip r:embed="rId2"/>
-          <a:stretch>
-            <a:fillRect/>
-          </a:stretch>
-        </p:blipFill>
-        <p:spPr>
-          <a:xfrm>
-            <a:off x="1417319" y="1143000"/>
-            <a:ext cx="6309360" cy="2324913"/>
-          </a:xfrm>
-          <a:prstGeom prst="rect">
-            <a:avLst/>
-          </a:prstGeom>
-        </p:spPr>
-      </p:pic>
-      <p:sp>
-        <p:nvSpPr>
-          <p:cNvPr id="5" name="TextBox 4"/>
+              <a:t>Síntesis</a:t>
+            </a:r>
+          </a:p>
+        </p:txBody>
+      </p:sp>
+      <p:sp>
+        <p:nvSpPr>
+          <p:cNvPr id="4" name="TextBox 3"/>
           <p:cNvSpPr txBox="1"/>
           <p:nvPr/>
         </p:nvSpPr>
         <p:spPr>
           <a:xfrm>
-            <a:off x="704088" y="4434840"/>
-            <a:ext cx="7744968" cy="457200"/>
+            <a:off x="704088" y="1353312"/>
+            <a:ext cx="7744968" cy="3300984"/>
           </a:xfrm>
           <a:prstGeom prst="rect">
             <a:avLst/>
@@ -8496,14 +8338,143 @@
           </a:bodyPr>
           <a:lstStyle/>
           <a:p>
-            <a:r>
-              <a:rPr sz="1300" b="0">
-                <a:solidFill>
-                  <a:srgbClr val="333333"/>
-                </a:solidFill>
-                <a:latin typeface="Fira Sans"/>
-              </a:rPr>
-              <a:t>PySpark se usa con SQL o con sus propios DataFrames; Dask reparte operaciones estilo Pandas; Polars y DuckDB rinden en una sola máquina.</a:t>
+            <a:pPr>
+              <a:lnSpc>
+                <a:spcPct val="112000"/>
+              </a:lnSpc>
+              <a:spcAft>
+                <a:spcPts val="900"/>
+              </a:spcAft>
+            </a:pPr>
+            <a:r>
+              <a:rPr sz="1800" b="1">
+                <a:solidFill>
+                  <a:srgbClr val="E0A437"/>
+                </a:solidFill>
+                <a:latin typeface="Fira Sans"/>
+              </a:rPr>
+              <a:t>▸ </a:t>
+            </a:r>
+            <a:r>
+              <a:rPr sz="1800" b="0">
+                <a:solidFill>
+                  <a:srgbClr val="000000"/>
+                </a:solidFill>
+                <a:latin typeface="Fira Sans"/>
+              </a:rPr>
+              <a:t>Un modelo es una simplificación con decisiones incorporadas; estimarlo puede buscar inferencia o predicción.</a:t>
+            </a:r>
+          </a:p>
+          <a:p>
+            <a:pPr>
+              <a:lnSpc>
+                <a:spcPct val="112000"/>
+              </a:lnSpc>
+              <a:spcAft>
+                <a:spcPts val="900"/>
+              </a:spcAft>
+            </a:pPr>
+            <a:r>
+              <a:rPr sz="1800" b="1">
+                <a:solidFill>
+                  <a:srgbClr val="E0A437"/>
+                </a:solidFill>
+                <a:latin typeface="Fira Sans"/>
+              </a:rPr>
+              <a:t>▸ </a:t>
+            </a:r>
+            <a:r>
+              <a:rPr sz="1800" b="0">
+                <a:solidFill>
+                  <a:srgbClr val="000000"/>
+                </a:solidFill>
+                <a:latin typeface="Fira Sans"/>
+              </a:rPr>
+              <a:t>Las asociaciones se reportan como asociaciones: la causalidad exige más que datos observacionales.</a:t>
+            </a:r>
+          </a:p>
+          <a:p>
+            <a:pPr>
+              <a:lnSpc>
+                <a:spcPct val="112000"/>
+              </a:lnSpc>
+              <a:spcAft>
+                <a:spcPts val="900"/>
+              </a:spcAft>
+            </a:pPr>
+            <a:r>
+              <a:rPr sz="1800" b="1">
+                <a:solidFill>
+                  <a:srgbClr val="E0A437"/>
+                </a:solidFill>
+                <a:latin typeface="Fira Sans"/>
+              </a:rPr>
+              <a:t>▸ </a:t>
+            </a:r>
+            <a:r>
+              <a:rPr sz="1800" b="0">
+                <a:solidFill>
+                  <a:srgbClr val="000000"/>
+                </a:solidFill>
+                <a:latin typeface="Fira Sans"/>
+              </a:rPr>
+              <a:t>El tipo de la variable, no su dtype, determina qué resúmenes tienen sentido.</a:t>
+            </a:r>
+          </a:p>
+          <a:p>
+            <a:pPr>
+              <a:lnSpc>
+                <a:spcPct val="112000"/>
+              </a:lnSpc>
+              <a:spcAft>
+                <a:spcPts val="900"/>
+              </a:spcAft>
+            </a:pPr>
+            <a:r>
+              <a:rPr sz="1800" b="1">
+                <a:solidFill>
+                  <a:srgbClr val="E0A437"/>
+                </a:solidFill>
+                <a:latin typeface="Fira Sans"/>
+              </a:rPr>
+              <a:t>▸ </a:t>
+            </a:r>
+            <a:r>
+              <a:rPr sz="1800" b="0">
+                <a:solidFill>
+                  <a:srgbClr val="000000"/>
+                </a:solidFill>
+                <a:latin typeface="Fira Sans"/>
+              </a:rPr>
+              <a:t>Con distribuciones asimétricas, la mediana y los percentiles describen mejor lo típico que la media.</a:t>
+            </a:r>
+          </a:p>
+          <a:p>
+            <a:pPr>
+              <a:lnSpc>
+                <a:spcPct val="112000"/>
+              </a:lnSpc>
+              <a:spcAft>
+                <a:spcPts val="900"/>
+              </a:spcAft>
+            </a:pPr>
+            <a:r>
+              <a:rPr sz="1800" b="1">
+                <a:solidFill>
+                  <a:srgbClr val="E0A437"/>
+                </a:solidFill>
+                <a:latin typeface="Fira Sans"/>
+              </a:rPr>
+              <a:t>▸ </a:t>
+            </a:r>
+            <a:r>
+              <a:rPr sz="1800" b="1">
+                <a:solidFill>
+                  <a:srgbClr val="1D3557"/>
+                </a:solidFill>
+                <a:latin typeface="Fira Sans"/>
+              </a:rPr>
+              <a:t>Ante toda cifra resumen: ¿de quién habla este número? ¿Muestra, subgrupo o ciudad?</a:t>
             </a:r>
           </a:p>
         </p:txBody>
@@ -8599,7 +8570,7 @@
                 </a:solidFill>
                 <a:latin typeface="Fira Sans"/>
               </a:rPr>
-              <a:t>Síntesis</a:t>
+              <a:t>Segundo bloque: comienza la Tarea 1</a:t>
             </a:r>
           </a:p>
         </p:txBody>
@@ -8650,7 +8621,91 @@
                 </a:solidFill>
                 <a:latin typeface="Fira Sans"/>
               </a:rPr>
-              <a:t>Un modelo es una simplificación con decisiones incorporadas; estimarlo puede buscar inferencia o predicción.</a:t>
+              <a:t>El retrato de tu comuna: cada pareja adopta una comuna del Gran Santiago.</a:t>
+            </a:r>
+          </a:p>
+          <a:p>
+            <a:pPr>
+              <a:lnSpc>
+                <a:spcPct val="112000"/>
+              </a:lnSpc>
+              <a:spcAft>
+                <a:spcPts val="500"/>
+              </a:spcAft>
+            </a:pPr>
+            <a:r>
+              <a:rPr sz="1400" b="0">
+                <a:solidFill>
+                  <a:srgbClr val="333333"/>
+                </a:solidFill>
+                <a:latin typeface="Fira Sans"/>
+              </a:rPr>
+              <a:t>     ◦  </a:t>
+            </a:r>
+            <a:r>
+              <a:rPr sz="1400" b="0">
+                <a:solidFill>
+                  <a:srgbClr val="333333"/>
+                </a:solidFill>
+                <a:latin typeface="Fira Sans"/>
+              </a:rPr>
+              <a:t>Hoy: elegir la comuna y construir su retrato numérico.</a:t>
+            </a:r>
+          </a:p>
+          <a:p>
+            <a:pPr>
+              <a:lnSpc>
+                <a:spcPct val="112000"/>
+              </a:lnSpc>
+              <a:spcAft>
+                <a:spcPts val="500"/>
+              </a:spcAft>
+            </a:pPr>
+            <a:r>
+              <a:rPr sz="1400" b="0">
+                <a:solidFill>
+                  <a:srgbClr val="333333"/>
+                </a:solidFill>
+                <a:latin typeface="Fira Sans"/>
+              </a:rPr>
+              <a:t>     ◦  </a:t>
+            </a:r>
+            <a:r>
+              <a:rPr sz="1400" b="0">
+                <a:solidFill>
+                  <a:srgbClr val="333333"/>
+                </a:solidFill>
+                <a:latin typeface="Fira Sans"/>
+              </a:rPr>
+              <a:t>Próxima clase: el retrato gráfico, con métodos de visualización.</a:t>
+            </a:r>
+          </a:p>
+          <a:p>
+            <a:pPr>
+              <a:lnSpc>
+                <a:spcPct val="112000"/>
+              </a:lnSpc>
+              <a:spcAft>
+                <a:spcPts val="500"/>
+              </a:spcAft>
+            </a:pPr>
+            <a:r>
+              <a:rPr sz="1400" b="0">
+                <a:solidFill>
+                  <a:srgbClr val="333333"/>
+                </a:solidFill>
+                <a:latin typeface="Fira Sans"/>
+              </a:rPr>
+              <a:t>     ◦  </a:t>
+            </a:r>
+            <a:r>
+              <a:rPr sz="1400" b="0">
+                <a:solidFill>
+                  <a:srgbClr val="333333"/>
+                </a:solidFill>
+                <a:latin typeface="Fira Sans"/>
+              </a:rPr>
+              <a:t>Entrega del retrato completo: jueves 10 de septiembre, por Aula.</a:t>
             </a:r>
           </a:p>
           <a:p>
@@ -8678,7 +8733,7 @@
                 </a:solidFill>
                 <a:latin typeface="Fira Sans"/>
               </a:rPr>
-              <a:t>Las asociaciones se reportan como asociaciones: la causalidad exige más que datos observacionales.</a:t>
+              <a:t>El enunciado está en evaluaciones/tareas/ y la guía de hoy en actividades/.</a:t>
             </a:r>
           </a:p>
           <a:p>
@@ -8700,69 +8755,13 @@
               <a:t>▸ </a:t>
             </a:r>
             <a:r>
-              <a:rPr sz="1800" b="0">
-                <a:solidFill>
-                  <a:srgbClr val="000000"/>
-                </a:solidFill>
-                <a:latin typeface="Fira Sans"/>
-              </a:rPr>
-              <a:t>El tipo de la variable, no su dtype, determina qué resúmenes tienen sentido.</a:t>
-            </a:r>
-          </a:p>
-          <a:p>
-            <a:pPr>
-              <a:lnSpc>
-                <a:spcPct val="112000"/>
-              </a:lnSpc>
-              <a:spcAft>
-                <a:spcPts val="900"/>
-              </a:spcAft>
-            </a:pPr>
-            <a:r>
               <a:rPr sz="1800" b="1">
                 <a:solidFill>
-                  <a:srgbClr val="E0A437"/>
-                </a:solidFill>
-                <a:latin typeface="Fira Sans"/>
-              </a:rPr>
-              <a:t>▸ </a:t>
-            </a:r>
-            <a:r>
-              <a:rPr sz="1800" b="0">
-                <a:solidFill>
-                  <a:srgbClr val="000000"/>
-                </a:solidFill>
-                <a:latin typeface="Fira Sans"/>
-              </a:rPr>
-              <a:t>Con distribuciones asimétricas, la mediana y los percentiles describen mejor lo típico que la media.</a:t>
-            </a:r>
-          </a:p>
-          <a:p>
-            <a:pPr>
-              <a:lnSpc>
-                <a:spcPct val="112000"/>
-              </a:lnSpc>
-              <a:spcAft>
-                <a:spcPts val="900"/>
-              </a:spcAft>
-            </a:pPr>
-            <a:r>
-              <a:rPr sz="1800" b="1">
-                <a:solidFill>
-                  <a:srgbClr val="E0A437"/>
-                </a:solidFill>
-                <a:latin typeface="Fira Sans"/>
-              </a:rPr>
-              <a:t>▸ </a:t>
-            </a:r>
-            <a:r>
-              <a:rPr sz="1800" b="1">
-                <a:solidFill>
                   <a:srgbClr val="1D3557"/>
                 </a:solidFill>
                 <a:latin typeface="Fira Sans"/>
               </a:rPr>
-              <a:t>Ante toda cifra resumen: ¿de quién habla este número? ¿Muestra, subgrupo o ciudad?</a:t>
+              <a:t>Lo que avancen en este bloque ya es parte de la tarea.</a:t>
             </a:r>
           </a:p>
         </p:txBody>
@@ -8858,293 +8857,6 @@
                 </a:solidFill>
                 <a:latin typeface="Fira Sans"/>
               </a:rPr>
-              <a:t>Segundo bloque: comienza la Tarea 1</a:t>
-            </a:r>
-          </a:p>
-        </p:txBody>
-      </p:sp>
-      <p:sp>
-        <p:nvSpPr>
-          <p:cNvPr id="4" name="TextBox 3"/>
-          <p:cNvSpPr txBox="1"/>
-          <p:nvPr/>
-        </p:nvSpPr>
-        <p:spPr>
-          <a:xfrm>
-            <a:off x="704088" y="1353312"/>
-            <a:ext cx="7744968" cy="3300984"/>
-          </a:xfrm>
-          <a:prstGeom prst="rect">
-            <a:avLst/>
-          </a:prstGeom>
-          <a:noFill/>
-        </p:spPr>
-        <p:txBody>
-          <a:bodyPr wrap="square">
-            <a:spAutoFit/>
-          </a:bodyPr>
-          <a:lstStyle/>
-          <a:p>
-            <a:pPr>
-              <a:lnSpc>
-                <a:spcPct val="112000"/>
-              </a:lnSpc>
-              <a:spcAft>
-                <a:spcPts val="900"/>
-              </a:spcAft>
-            </a:pPr>
-            <a:r>
-              <a:rPr sz="1800" b="1">
-                <a:solidFill>
-                  <a:srgbClr val="E0A437"/>
-                </a:solidFill>
-                <a:latin typeface="Fira Sans"/>
-              </a:rPr>
-              <a:t>▸ </a:t>
-            </a:r>
-            <a:r>
-              <a:rPr sz="1800" b="0">
-                <a:solidFill>
-                  <a:srgbClr val="000000"/>
-                </a:solidFill>
-                <a:latin typeface="Fira Sans"/>
-              </a:rPr>
-              <a:t>El retrato de tu comuna: cada pareja adopta una comuna del Gran Santiago.</a:t>
-            </a:r>
-          </a:p>
-          <a:p>
-            <a:pPr>
-              <a:lnSpc>
-                <a:spcPct val="112000"/>
-              </a:lnSpc>
-              <a:spcAft>
-                <a:spcPts val="500"/>
-              </a:spcAft>
-            </a:pPr>
-            <a:r>
-              <a:rPr sz="1400" b="0">
-                <a:solidFill>
-                  <a:srgbClr val="333333"/>
-                </a:solidFill>
-                <a:latin typeface="Fira Sans"/>
-              </a:rPr>
-              <a:t>     ◦  </a:t>
-            </a:r>
-            <a:r>
-              <a:rPr sz="1400" b="0">
-                <a:solidFill>
-                  <a:srgbClr val="333333"/>
-                </a:solidFill>
-                <a:latin typeface="Fira Sans"/>
-              </a:rPr>
-              <a:t>Hoy: elegir la comuna y construir su retrato numérico.</a:t>
-            </a:r>
-          </a:p>
-          <a:p>
-            <a:pPr>
-              <a:lnSpc>
-                <a:spcPct val="112000"/>
-              </a:lnSpc>
-              <a:spcAft>
-                <a:spcPts val="500"/>
-              </a:spcAft>
-            </a:pPr>
-            <a:r>
-              <a:rPr sz="1400" b="0">
-                <a:solidFill>
-                  <a:srgbClr val="333333"/>
-                </a:solidFill>
-                <a:latin typeface="Fira Sans"/>
-              </a:rPr>
-              <a:t>     ◦  </a:t>
-            </a:r>
-            <a:r>
-              <a:rPr sz="1400" b="0">
-                <a:solidFill>
-                  <a:srgbClr val="333333"/>
-                </a:solidFill>
-                <a:latin typeface="Fira Sans"/>
-              </a:rPr>
-              <a:t>Próxima clase: el retrato gráfico, con métodos de visualización.</a:t>
-            </a:r>
-          </a:p>
-          <a:p>
-            <a:pPr>
-              <a:lnSpc>
-                <a:spcPct val="112000"/>
-              </a:lnSpc>
-              <a:spcAft>
-                <a:spcPts val="500"/>
-              </a:spcAft>
-            </a:pPr>
-            <a:r>
-              <a:rPr sz="1400" b="0">
-                <a:solidFill>
-                  <a:srgbClr val="333333"/>
-                </a:solidFill>
-                <a:latin typeface="Fira Sans"/>
-              </a:rPr>
-              <a:t>     ◦  </a:t>
-            </a:r>
-            <a:r>
-              <a:rPr sz="1400" b="0">
-                <a:solidFill>
-                  <a:srgbClr val="333333"/>
-                </a:solidFill>
-                <a:latin typeface="Fira Sans"/>
-              </a:rPr>
-              <a:t>Entrega del retrato completo: jueves 10 de septiembre, por Aula.</a:t>
-            </a:r>
-          </a:p>
-          <a:p>
-            <a:pPr>
-              <a:lnSpc>
-                <a:spcPct val="112000"/>
-              </a:lnSpc>
-              <a:spcAft>
-                <a:spcPts val="900"/>
-              </a:spcAft>
-            </a:pPr>
-            <a:r>
-              <a:rPr sz="1800" b="1">
-                <a:solidFill>
-                  <a:srgbClr val="E0A437"/>
-                </a:solidFill>
-                <a:latin typeface="Fira Sans"/>
-              </a:rPr>
-              <a:t>▸ </a:t>
-            </a:r>
-            <a:r>
-              <a:rPr sz="1800" b="0">
-                <a:solidFill>
-                  <a:srgbClr val="000000"/>
-                </a:solidFill>
-                <a:latin typeface="Fira Sans"/>
-              </a:rPr>
-              <a:t>El enunciado está en evaluaciones/tareas/ y la guía de hoy en actividades/.</a:t>
-            </a:r>
-          </a:p>
-          <a:p>
-            <a:pPr>
-              <a:lnSpc>
-                <a:spcPct val="112000"/>
-              </a:lnSpc>
-              <a:spcAft>
-                <a:spcPts val="900"/>
-              </a:spcAft>
-            </a:pPr>
-            <a:r>
-              <a:rPr sz="1800" b="1">
-                <a:solidFill>
-                  <a:srgbClr val="E0A437"/>
-                </a:solidFill>
-                <a:latin typeface="Fira Sans"/>
-              </a:rPr>
-              <a:t>▸ </a:t>
-            </a:r>
-            <a:r>
-              <a:rPr sz="1800" b="1">
-                <a:solidFill>
-                  <a:srgbClr val="1D3557"/>
-                </a:solidFill>
-                <a:latin typeface="Fira Sans"/>
-              </a:rPr>
-              <a:t>Lo que avancen en este bloque ya es parte de la tarea.</a:t>
-            </a:r>
-          </a:p>
-        </p:txBody>
-      </p:sp>
-    </p:spTree>
-  </p:cSld>
-  <p:clrMapOvr>
-    <a:masterClrMapping/>
-  </p:clrMapOvr>
-</p:sld>
-</file>
-
-<file path=ppt/slides/slide35.xml><?xml version="1.0" encoding="utf-8"?>
-<p:sld xmlns:a="http://schemas.openxmlformats.org/drawingml/2006/main" xmlns:p="http://schemas.openxmlformats.org/presentationml/2006/main" xmlns:r="http://schemas.openxmlformats.org/officeDocument/2006/relationships">
-  <p:cSld>
-    <p:spTree>
-      <p:nvGrpSpPr>
-        <p:cNvPr id="1" name=""/>
-        <p:cNvGrpSpPr/>
-        <p:nvPr/>
-      </p:nvGrpSpPr>
-      <p:grpSpPr/>
-      <p:sp>
-        <p:nvSpPr>
-          <p:cNvPr id="2" name="Rectangle 1"/>
-          <p:cNvSpPr/>
-          <p:nvPr/>
-        </p:nvSpPr>
-        <p:spPr>
-          <a:xfrm>
-            <a:off x="0" y="0"/>
-            <a:ext cx="9144000" cy="5138928"/>
-          </a:xfrm>
-          <a:prstGeom prst="rect">
-            <a:avLst/>
-          </a:prstGeom>
-          <a:solidFill>
-            <a:srgbClr val="FAFBFC"/>
-          </a:solidFill>
-          <a:ln>
-            <a:noFill/>
-          </a:ln>
-          <a:effectLst/>
-        </p:spPr>
-        <p:style>
-          <a:lnRef idx="1">
-            <a:schemeClr val="accent1"/>
-          </a:lnRef>
-          <a:fillRef idx="3">
-            <a:schemeClr val="accent1"/>
-          </a:fillRef>
-          <a:effectRef idx="2">
-            <a:schemeClr val="accent1"/>
-          </a:effectRef>
-          <a:fontRef idx="minor">
-            <a:schemeClr val="lt1"/>
-          </a:fontRef>
-        </p:style>
-        <p:txBody>
-          <a:bodyPr rtlCol="0" anchor="ctr"/>
-          <a:lstStyle/>
-          <a:p>
-            <a:pPr algn="ctr"/>
-          </a:p>
-        </p:txBody>
-      </p:sp>
-      <p:sp>
-        <p:nvSpPr>
-          <p:cNvPr id="3" name="TextBox 2"/>
-          <p:cNvSpPr txBox="1"/>
-          <p:nvPr/>
-        </p:nvSpPr>
-        <p:spPr>
-          <a:xfrm>
-            <a:off x="402336" y="301752"/>
-            <a:ext cx="8348472" cy="795528"/>
-          </a:xfrm>
-          <a:prstGeom prst="rect">
-            <a:avLst/>
-          </a:prstGeom>
-          <a:noFill/>
-        </p:spPr>
-        <p:txBody>
-          <a:bodyPr wrap="square">
-            <a:spAutoFit/>
-          </a:bodyPr>
-          <a:lstStyle/>
-          <a:p>
-            <a:r>
-              <a:rPr sz="2800" b="1">
-                <a:solidFill>
-                  <a:srgbClr val="0F0F0F"/>
-                </a:solidFill>
-                <a:latin typeface="Fira Sans"/>
-              </a:rPr>
               <a:t>Referencias</a:t>
             </a:r>
           </a:p>
@@ -10103,8 +9815,8 @@
         </p:nvSpPr>
         <p:spPr>
           <a:xfrm>
-            <a:off x="704088" y="1353312"/>
-            <a:ext cx="7744968" cy="3300984"/>
+            <a:off x="502920" y="1252728"/>
+            <a:ext cx="4023360" cy="3200400"/>
           </a:xfrm>
           <a:prstGeom prst="rect">
             <a:avLst/>
@@ -10126,7 +9838,7 @@
               </a:spcAft>
             </a:pPr>
             <a:r>
-              <a:rPr sz="1800" b="1">
+              <a:rPr sz="1500" b="1">
                 <a:solidFill>
                   <a:srgbClr val="E0A437"/>
                 </a:solidFill>
@@ -10135,13 +9847,13 @@
               <a:t>▸ </a:t>
             </a:r>
             <a:r>
-              <a:rPr sz="1800" b="0">
+              <a:rPr sz="1500" b="0">
                 <a:solidFill>
                   <a:srgbClr val="000000"/>
                 </a:solidFill>
                 <a:latin typeface="Fira Sans"/>
               </a:rPr>
-              <a:t>Mide la asociación lineal entre dos variables numéricas: qué tan bien se ajustan los puntos a una recta. Toma valores entre -1 y 1 (Bruce, Bruce y Gedeck, 2020, cap. 1).</a:t>
+              <a:t>Mide la asociación lineal: qué tan bien se ajustan los puntos a una recta. Entre -1 y 1 (Bruce, Bruce y Gedeck, 2020).</a:t>
             </a:r>
           </a:p>
           <a:p>
@@ -10154,7 +9866,7 @@
               </a:spcAft>
             </a:pPr>
             <a:r>
-              <a:rPr sz="1800" b="1">
+              <a:rPr sz="1500" b="1">
                 <a:solidFill>
                   <a:srgbClr val="E0A437"/>
                 </a:solidFill>
@@ -10163,13 +9875,13 @@
               <a:t>▸ </a:t>
             </a:r>
             <a:r>
-              <a:rPr sz="1800" b="0">
+              <a:rPr sz="1500" b="0">
                 <a:solidFill>
                   <a:srgbClr val="000000"/>
                 </a:solidFill>
                 <a:latin typeface="Fira Sans"/>
               </a:rPr>
-              <a:t>Es la covarianza estandarizada:  r = cov(X, Y) / (σX · σY).</a:t>
+              <a:t>r = cov(X, Y) / (σX · σY): la covarianza estandarizada.</a:t>
             </a:r>
           </a:p>
           <a:p>
@@ -10182,7 +9894,7 @@
               </a:spcAft>
             </a:pPr>
             <a:r>
-              <a:rPr sz="1400" b="0">
+              <a:rPr sz="1300" b="0">
                 <a:solidFill>
                   <a:srgbClr val="333333"/>
                 </a:solidFill>
@@ -10191,13 +9903,13 @@
               <a:t>     ◦  </a:t>
             </a:r>
             <a:r>
-              <a:rPr sz="1400" b="0">
+              <a:rPr sz="1300" b="0">
                 <a:solidFill>
                   <a:srgbClr val="333333"/>
                 </a:solidFill>
                 <a:latin typeface="Fira Sans"/>
               </a:rPr>
-              <a:t>Cada punto aporta el producto de sus desviaciones respecto de la media, en unidades de desviación estándar.</a:t>
+              <a:t>Un extremo entra multiplicando y puede dominar el resultado.</a:t>
             </a:r>
           </a:p>
           <a:p>
@@ -10210,7 +9922,7 @@
               </a:spcAft>
             </a:pPr>
             <a:r>
-              <a:rPr sz="1400" b="0">
+              <a:rPr sz="1300" b="0">
                 <a:solidFill>
                   <a:srgbClr val="333333"/>
                 </a:solidFill>
@@ -10219,13 +9931,13 @@
               <a:t>     ◦  </a:t>
             </a:r>
             <a:r>
-              <a:rPr sz="1400" b="0">
+              <a:rPr sz="1300" b="0">
                 <a:solidFill>
                   <a:srgbClr val="333333"/>
                 </a:solidFill>
                 <a:latin typeface="Fira Sans"/>
               </a:rPr>
-              <a:t>Un valor extremo entra multiplicando y puede dominar el resultado.</a:t>
+              <a:t>Una relación curva baja el coeficiente aunque la asociación sea fuerte.</a:t>
             </a:r>
           </a:p>
           <a:p>
@@ -10238,7 +9950,7 @@
               </a:spcAft>
             </a:pPr>
             <a:r>
-              <a:rPr sz="1400" b="0">
+              <a:rPr sz="1300" b="0">
                 <a:solidFill>
                   <a:srgbClr val="333333"/>
                 </a:solidFill>
@@ -10247,41 +9959,13 @@
               <a:t>     ◦  </a:t>
             </a:r>
             <a:r>
-              <a:rPr sz="1400" b="0">
+              <a:rPr sz="1300" b="0">
                 <a:solidFill>
                   <a:srgbClr val="333333"/>
                 </a:solidFill>
                 <a:latin typeface="Fira Sans"/>
               </a:rPr>
-              <a:t>Una relación curva produce un coeficiente bajo aunque la asociación sea fuerte.</a:t>
-            </a:r>
-          </a:p>
-          <a:p>
-            <a:pPr>
-              <a:lnSpc>
-                <a:spcPct val="112000"/>
-              </a:lnSpc>
-              <a:spcAft>
-                <a:spcPts val="500"/>
-              </a:spcAft>
-            </a:pPr>
-            <a:r>
-              <a:rPr sz="1400" b="0">
-                <a:solidFill>
-                  <a:srgbClr val="333333"/>
-                </a:solidFill>
-                <a:latin typeface="Fira Sans"/>
-              </a:rPr>
-              <a:t>     ◦  </a:t>
-            </a:r>
-            <a:r>
-              <a:rPr sz="1400" b="0">
-                <a:solidFill>
-                  <a:srgbClr val="333333"/>
-                </a:solidFill>
-                <a:latin typeface="Fira Sans"/>
-              </a:rPr>
-              <a:t>Transformar los datos (por ejemplo con logaritmo) cambia su valor.</a:t>
+              <a:t>Transformar los datos cambia su valor.</a:t>
             </a:r>
           </a:p>
           <a:p>
@@ -10294,7 +9978,7 @@
               </a:spcAft>
             </a:pPr>
             <a:r>
-              <a:rPr sz="1800" b="1">
+              <a:rPr sz="1500" b="1">
                 <a:solidFill>
                   <a:srgbClr val="E0A437"/>
                 </a:solidFill>
@@ -10303,17 +9987,41 @@
               <a:t>▸ </a:t>
             </a:r>
             <a:r>
-              <a:rPr sz="1800" b="1">
+              <a:rPr sz="1500" b="1">
                 <a:solidFill>
                   <a:srgbClr val="1D3557"/>
                 </a:solidFill>
                 <a:latin typeface="Fira Sans"/>
               </a:rPr>
-              <a:t>Su cuadrado anticipa el R² de la regresión lineal (unidad 7).</a:t>
-            </a:r>
-          </a:p>
-        </p:txBody>
-      </p:sp>
+              <a:t>Su cuadrado anticipa el R² de la regresión (unidad 7).</a:t>
+            </a:r>
+          </a:p>
+        </p:txBody>
+      </p:sp>
+      <p:pic>
+        <p:nvPicPr>
+          <p:cNvPr id="5" name="Picture 4" descr="16_pearson_recta.png"/>
+          <p:cNvPicPr>
+            <a:picLocks noChangeAspect="1"/>
+          </p:cNvPicPr>
+          <p:nvPr/>
+        </p:nvPicPr>
+        <p:blipFill>
+          <a:blip r:embed="rId2"/>
+          <a:stretch>
+            <a:fillRect/>
+          </a:stretch>
+        </p:blipFill>
+        <p:spPr>
+          <a:xfrm>
+            <a:off x="4892040" y="1371600"/>
+            <a:ext cx="3840480" cy="3313850"/>
+          </a:xfrm>
+          <a:prstGeom prst="rect">
+            <a:avLst/>
+          </a:prstGeom>
+        </p:spPr>
+      </p:pic>
     </p:spTree>
   </p:cSld>
   <p:clrMapOvr>
@@ -10418,8 +10126,8 @@
         </p:nvSpPr>
         <p:spPr>
           <a:xfrm>
-            <a:off x="704088" y="1353312"/>
-            <a:ext cx="7744968" cy="3300984"/>
+            <a:off x="502920" y="1252728"/>
+            <a:ext cx="4023360" cy="3200400"/>
           </a:xfrm>
           <a:prstGeom prst="rect">
             <a:avLst/>
@@ -10441,7 +10149,7 @@
               </a:spcAft>
             </a:pPr>
             <a:r>
-              <a:rPr sz="1800" b="1">
+              <a:rPr sz="1500" b="1">
                 <a:solidFill>
                   <a:srgbClr val="E0A437"/>
                 </a:solidFill>
@@ -10450,13 +10158,13 @@
               <a:t>▸ </a:t>
             </a:r>
             <a:r>
-              <a:rPr sz="1800" b="0">
+              <a:rPr sz="1500" b="0">
                 <a:solidFill>
                   <a:srgbClr val="000000"/>
                 </a:solidFill>
                 <a:latin typeface="Fira Sans"/>
               </a:rPr>
-              <a:t>Es el mismo Pearson, pero calculado sobre los rangos: la posición de cada valor al ordenar la variable.</a:t>
+              <a:t>El mismo Pearson, calculado sobre los rangos: la posición de cada valor al ordenar.</a:t>
             </a:r>
           </a:p>
           <a:p>
@@ -10469,7 +10177,7 @@
               </a:spcAft>
             </a:pPr>
             <a:r>
-              <a:rPr sz="1800" b="1">
+              <a:rPr sz="1500" b="1">
                 <a:solidFill>
                   <a:srgbClr val="E0A437"/>
                 </a:solidFill>
@@ -10478,13 +10186,13 @@
               <a:t>▸ </a:t>
             </a:r>
             <a:r>
-              <a:rPr sz="1800" b="0">
+              <a:rPr sz="1500" b="0">
                 <a:solidFill>
                   <a:srgbClr val="000000"/>
                 </a:solidFill>
                 <a:latin typeface="Fira Sans"/>
               </a:rPr>
-              <a:t>Sin empates equivale a:  ρ = 1 - 6·Σd² / (n·(n² - 1)),  con d la diferencia de rangos de cada caso.</a:t>
+              <a:t>Sin empates:  ρ = 1 - 6·Σd² / (n·(n² - 1)),  con d la diferencia de rangos.</a:t>
             </a:r>
           </a:p>
           <a:p>
@@ -10497,7 +10205,7 @@
               </a:spcAft>
             </a:pPr>
             <a:r>
-              <a:rPr sz="1400" b="0">
+              <a:rPr sz="1300" b="0">
                 <a:solidFill>
                   <a:srgbClr val="333333"/>
                 </a:solidFill>
@@ -10506,41 +10214,13 @@
               <a:t>     ◦  </a:t>
             </a:r>
             <a:r>
-              <a:rPr sz="1400" b="0">
+              <a:rPr sz="1300" b="0">
                 <a:solidFill>
                   <a:srgbClr val="333333"/>
                 </a:solidFill>
                 <a:latin typeface="Fira Sans"/>
               </a:rPr>
               <a:t>Los valores 5, 12, 8 y 200 tienen rangos 1, 3, 2 y 4: el 200 pasa a ser solo el cuarto.</a:t>
-            </a:r>
-          </a:p>
-          <a:p>
-            <a:pPr>
-              <a:lnSpc>
-                <a:spcPct val="112000"/>
-              </a:lnSpc>
-              <a:spcAft>
-                <a:spcPts val="500"/>
-              </a:spcAft>
-            </a:pPr>
-            <a:r>
-              <a:rPr sz="1400" b="0">
-                <a:solidFill>
-                  <a:srgbClr val="333333"/>
-                </a:solidFill>
-                <a:latin typeface="Fira Sans"/>
-              </a:rPr>
-              <a:t>     ◦  </a:t>
-            </a:r>
-            <a:r>
-              <a:rPr sz="1400" b="0">
-                <a:solidFill>
-                  <a:srgbClr val="333333"/>
-                </a:solidFill>
-                <a:latin typeface="Fira Sans"/>
-              </a:rPr>
-              <a:t>Mide si al crecer una variable crece la otra, sin importar la forma de la relación.</a:t>
             </a:r>
           </a:p>
           <a:p>
@@ -10553,7 +10233,7 @@
               </a:spcAft>
             </a:pPr>
             <a:r>
-              <a:rPr sz="1800" b="1">
+              <a:rPr sz="1500" b="1">
                 <a:solidFill>
                   <a:srgbClr val="E0A437"/>
                 </a:solidFill>
@@ -10562,17 +10242,41 @@
               <a:t>▸ </a:t>
             </a:r>
             <a:r>
-              <a:rPr sz="1800" b="1">
+              <a:rPr sz="1500" b="1">
                 <a:solidFill>
                   <a:srgbClr val="1D3557"/>
                 </a:solidFill>
                 <a:latin typeface="Fira Sans"/>
               </a:rPr>
-              <a:t>Consecuencias: robusto a extremos, invariante ante transformaciones monótonas, y válido para variables ordinales, donde Pearson no tiene sentido.</a:t>
-            </a:r>
-          </a:p>
-        </p:txBody>
-      </p:sp>
+              <a:t>Robusto a extremos, invariante ante transformaciones monótonas, y válido para variables ordinales.</a:t>
+            </a:r>
+          </a:p>
+        </p:txBody>
+      </p:sp>
+      <p:pic>
+        <p:nvPicPr>
+          <p:cNvPr id="5" name="Picture 4" descr="17_spearman_rangos.png"/>
+          <p:cNvPicPr>
+            <a:picLocks noChangeAspect="1"/>
+          </p:cNvPicPr>
+          <p:nvPr/>
+        </p:nvPicPr>
+        <p:blipFill>
+          <a:blip r:embed="rId2"/>
+          <a:stretch>
+            <a:fillRect/>
+          </a:stretch>
+        </p:blipFill>
+        <p:spPr>
+          <a:xfrm>
+            <a:off x="4892040" y="1371600"/>
+            <a:ext cx="3840480" cy="3382599"/>
+          </a:xfrm>
+          <a:prstGeom prst="rect">
+            <a:avLst/>
+          </a:prstGeom>
+        </p:spPr>
+      </p:pic>
     </p:spTree>
   </p:cSld>
   <p:clrMapOvr>
@@ -10664,14 +10368,14 @@
                 </a:solidFill>
                 <a:latin typeface="Fira Sans"/>
               </a:rPr>
-              <a:t>Spearman es Pearson sobre los rangos</a:t>
+              <a:t>La correlación, vista en los datos completos</a:t>
             </a:r>
           </a:p>
         </p:txBody>
       </p:sp>
       <p:pic>
         <p:nvPicPr>
-          <p:cNvPr id="4" name="Picture 3" descr="15_rangos_spearman.png"/>
+          <p:cNvPr id="4" name="Picture 3" descr="12_scatter_distancia_tiempo.png"/>
           <p:cNvPicPr>
             <a:picLocks noChangeAspect="1"/>
           </p:cNvPicPr>
@@ -10685,8 +10389,8 @@
         </p:blipFill>
         <p:spPr>
           <a:xfrm>
-            <a:off x="1611454" y="1143000"/>
-            <a:ext cx="5921091" cy="3154680"/>
+            <a:off x="2281014" y="1143000"/>
+            <a:ext cx="4581971" cy="3154680"/>
           </a:xfrm>
           <a:prstGeom prst="rect">
             <a:avLst/>
@@ -10722,7 +10426,7 @@
                 </a:solidFill>
                 <a:latin typeface="Fira Sans"/>
               </a:rPr>
-              <a:t>Los mismos 60 viajes en ambos paneles: al pasar a rangos, la curva se endereza y el extremo deja de dominar.</a:t>
+              <a:t>La mediana por tramo sube de forma sostenida (Spearman 0,76) pero no recta y con extremos (Pearson 0,43).</a:t>
             </a:r>
           </a:p>
         </p:txBody>
@@ -10818,14 +10522,177 @@
                 </a:solidFill>
                 <a:latin typeface="Fira Sans"/>
               </a:rPr>
-              <a:t>La correlación, vista en los datos completos</a:t>
+              <a:t>¿Cuándo usar cada coeficiente?</a:t>
+            </a:r>
+          </a:p>
+        </p:txBody>
+      </p:sp>
+      <p:sp>
+        <p:nvSpPr>
+          <p:cNvPr id="4" name="TextBox 3"/>
+          <p:cNvSpPr txBox="1"/>
+          <p:nvPr/>
+        </p:nvSpPr>
+        <p:spPr>
+          <a:xfrm>
+            <a:off x="502920" y="1252728"/>
+            <a:ext cx="4023360" cy="3200400"/>
+          </a:xfrm>
+          <a:prstGeom prst="rect">
+            <a:avLst/>
+          </a:prstGeom>
+          <a:noFill/>
+        </p:spPr>
+        <p:txBody>
+          <a:bodyPr wrap="square">
+            <a:spAutoFit/>
+          </a:bodyPr>
+          <a:lstStyle/>
+          <a:p>
+            <a:pPr>
+              <a:lnSpc>
+                <a:spcPct val="112000"/>
+              </a:lnSpc>
+              <a:spcAft>
+                <a:spcPts val="900"/>
+              </a:spcAft>
+            </a:pPr>
+            <a:r>
+              <a:rPr sz="1500" b="1">
+                <a:solidFill>
+                  <a:srgbClr val="E0A437"/>
+                </a:solidFill>
+                <a:latin typeface="Fira Sans"/>
+              </a:rPr>
+              <a:t>▸ </a:t>
+            </a:r>
+            <a:r>
+              <a:rPr sz="1500" b="0">
+                <a:solidFill>
+                  <a:srgbClr val="000000"/>
+                </a:solidFill>
+                <a:latin typeface="Fira Sans"/>
+              </a:rPr>
+              <a:t>Pearson: relación aproximadamente recta, sin extremos dominantes; antesala del modelo lineal.</a:t>
+            </a:r>
+          </a:p>
+          <a:p>
+            <a:pPr>
+              <a:lnSpc>
+                <a:spcPct val="112000"/>
+              </a:lnSpc>
+              <a:spcAft>
+                <a:spcPts val="900"/>
+              </a:spcAft>
+            </a:pPr>
+            <a:r>
+              <a:rPr sz="1500" b="1">
+                <a:solidFill>
+                  <a:srgbClr val="E0A437"/>
+                </a:solidFill>
+                <a:latin typeface="Fira Sans"/>
+              </a:rPr>
+              <a:t>▸ </a:t>
+            </a:r>
+            <a:r>
+              <a:rPr sz="1500" b="0">
+                <a:solidFill>
+                  <a:srgbClr val="000000"/>
+                </a:solidFill>
+                <a:latin typeface="Fira Sans"/>
+              </a:rPr>
+              <a:t>Spearman: asimetrías, extremos, curvas crecientes, o variables ordinales.</a:t>
+            </a:r>
+          </a:p>
+          <a:p>
+            <a:pPr>
+              <a:lnSpc>
+                <a:spcPct val="112000"/>
+              </a:lnSpc>
+              <a:spcAft>
+                <a:spcPts val="500"/>
+              </a:spcAft>
+            </a:pPr>
+            <a:r>
+              <a:rPr sz="1300" b="0">
+                <a:solidFill>
+                  <a:srgbClr val="333333"/>
+                </a:solidFill>
+                <a:latin typeface="Fira Sans"/>
+              </a:rPr>
+              <a:t>     ◦  </a:t>
+            </a:r>
+            <a:r>
+              <a:rPr sz="1300" b="0">
+                <a:solidFill>
+                  <a:srgbClr val="333333"/>
+                </a:solidFill>
+                <a:latin typeface="Fira Sans"/>
+              </a:rPr>
+              <a:t>La brecha entre ambos es un diagnóstico: 0,43 contra 0,76 indica curva o extremos.</a:t>
+            </a:r>
+          </a:p>
+          <a:p>
+            <a:pPr>
+              <a:lnSpc>
+                <a:spcPct val="112000"/>
+              </a:lnSpc>
+              <a:spcAft>
+                <a:spcPts val="500"/>
+              </a:spcAft>
+            </a:pPr>
+            <a:r>
+              <a:rPr sz="1300" b="0">
+                <a:solidFill>
+                  <a:srgbClr val="333333"/>
+                </a:solidFill>
+                <a:latin typeface="Fira Sans"/>
+              </a:rPr>
+              <a:t>     ◦  </a:t>
+            </a:r>
+            <a:r>
+              <a:rPr sz="1300" b="0">
+                <a:solidFill>
+                  <a:srgbClr val="333333"/>
+                </a:solidFill>
+                <a:latin typeface="Fira Sans"/>
+              </a:rPr>
+              <a:t>Tras el logaritmo, Pearson llega a 0,73, casi igual a Spearman.</a:t>
+            </a:r>
+          </a:p>
+          <a:p>
+            <a:pPr>
+              <a:lnSpc>
+                <a:spcPct val="112000"/>
+              </a:lnSpc>
+              <a:spcAft>
+                <a:spcPts val="900"/>
+              </a:spcAft>
+            </a:pPr>
+            <a:r>
+              <a:rPr sz="1500" b="1">
+                <a:solidFill>
+                  <a:srgbClr val="E0A437"/>
+                </a:solidFill>
+                <a:latin typeface="Fira Sans"/>
+              </a:rPr>
+              <a:t>▸ </a:t>
+            </a:r>
+            <a:r>
+              <a:rPr sz="1500" b="1">
+                <a:solidFill>
+                  <a:srgbClr val="1D3557"/>
+                </a:solidFill>
+                <a:latin typeface="Fira Sans"/>
+              </a:rPr>
+              <a:t>Calcule ambos; si difieren mucho, mire el gráfico antes de reportar.</a:t>
             </a:r>
           </a:p>
         </p:txBody>
       </p:sp>
       <p:pic>
         <p:nvPicPr>
-          <p:cNvPr id="4" name="Picture 3" descr="12_scatter_distancia_tiempo.png"/>
+          <p:cNvPr id="5" name="Picture 4" descr="18_loglog.png"/>
           <p:cNvPicPr>
             <a:picLocks noChangeAspect="1"/>
           </p:cNvPicPr>
@@ -10839,48 +10706,14 @@
         </p:blipFill>
         <p:spPr>
           <a:xfrm>
-            <a:off x="2281014" y="1143000"/>
-            <a:ext cx="4581971" cy="3154680"/>
+            <a:off x="4892040" y="1371600"/>
+            <a:ext cx="3840480" cy="3350924"/>
           </a:xfrm>
           <a:prstGeom prst="rect">
             <a:avLst/>
           </a:prstGeom>
         </p:spPr>
       </p:pic>
-      <p:sp>
-        <p:nvSpPr>
-          <p:cNvPr id="5" name="TextBox 4"/>
-          <p:cNvSpPr txBox="1"/>
-          <p:nvPr/>
-        </p:nvSpPr>
-        <p:spPr>
-          <a:xfrm>
-            <a:off x="704088" y="4434840"/>
-            <a:ext cx="7744968" cy="457200"/>
-          </a:xfrm>
-          <a:prstGeom prst="rect">
-            <a:avLst/>
-          </a:prstGeom>
-          <a:noFill/>
-        </p:spPr>
-        <p:txBody>
-          <a:bodyPr wrap="square">
-            <a:spAutoFit/>
-          </a:bodyPr>
-          <a:lstStyle/>
-          <a:p>
-            <a:r>
-              <a:rPr sz="1300" b="0">
-                <a:solidFill>
-                  <a:srgbClr val="333333"/>
-                </a:solidFill>
-                <a:latin typeface="Fira Sans"/>
-              </a:rPr>
-              <a:t>La mediana por tramo sube de forma sostenida (Spearman 0,76) pero no recta y con extremos (Pearson 0,43).</a:t>
-            </a:r>
-          </a:p>
-        </p:txBody>
-      </p:sp>
     </p:spTree>
   </p:cSld>
   <p:clrMapOvr>

--- a/presentaciones/clase02_pandas_eda.pptx
+++ b/presentaciones/clase02_pandas_eda.pptx
@@ -39,6 +39,7 @@
     <p:sldId id="287" r:id="rId38"/>
     <p:sldId id="288" r:id="rId39"/>
     <p:sldId id="289" r:id="rId40"/>
+    <p:sldId id="290" r:id="rId41"/>
   </p:sldIdLst>
   <p:sldSz cx="9144000" cy="5138928" type="screen4x3"/>
   <p:notesSz cx="6858000" cy="9144000"/>
@@ -3388,7 +3389,7 @@
                 </a:solidFill>
                 <a:latin typeface="Fira Sans"/>
               </a:rPr>
-              <a:t>Correlación y causalidad</a:t>
+              <a:t>¿Cuándo usar cada coeficiente?</a:t>
             </a:r>
           </a:p>
         </p:txBody>
@@ -3401,8 +3402,8 @@
         </p:nvSpPr>
         <p:spPr>
           <a:xfrm>
-            <a:off x="704088" y="1353312"/>
-            <a:ext cx="7744968" cy="3300984"/>
+            <a:off x="502920" y="1252728"/>
+            <a:ext cx="4023360" cy="3200400"/>
           </a:xfrm>
           <a:prstGeom prst="rect">
             <a:avLst/>
@@ -3424,7 +3425,7 @@
               </a:spcAft>
             </a:pPr>
             <a:r>
-              <a:rPr sz="1800" b="1">
+              <a:rPr sz="1500" b="1">
                 <a:solidFill>
                   <a:srgbClr val="E0A437"/>
                 </a:solidFill>
@@ -3433,13 +3434,41 @@
               <a:t>▸ </a:t>
             </a:r>
             <a:r>
-              <a:rPr sz="1800" b="0">
+              <a:rPr sz="1500" b="0">
                 <a:solidFill>
                   <a:srgbClr val="000000"/>
                 </a:solidFill>
                 <a:latin typeface="Fira Sans"/>
               </a:rPr>
-              <a:t>Causalidad: intervenir X cambiaría Y. Es una afirmación más fuerte que la asociación.</a:t>
+              <a:t>Pearson: relación aproximadamente recta, sin extremos dominantes; antesala del modelo lineal.</a:t>
+            </a:r>
+          </a:p>
+          <a:p>
+            <a:pPr>
+              <a:lnSpc>
+                <a:spcPct val="112000"/>
+              </a:lnSpc>
+              <a:spcAft>
+                <a:spcPts val="900"/>
+              </a:spcAft>
+            </a:pPr>
+            <a:r>
+              <a:rPr sz="1500" b="1">
+                <a:solidFill>
+                  <a:srgbClr val="E0A437"/>
+                </a:solidFill>
+                <a:latin typeface="Fira Sans"/>
+              </a:rPr>
+              <a:t>▸ </a:t>
+            </a:r>
+            <a:r>
+              <a:rPr sz="1500" b="0">
+                <a:solidFill>
+                  <a:srgbClr val="000000"/>
+                </a:solidFill>
+                <a:latin typeface="Fira Sans"/>
+              </a:rPr>
+              <a:t>Spearman: asimetrías, extremos, curvas crecientes, o variables ordinales.</a:t>
             </a:r>
           </a:p>
           <a:p>
@@ -3452,7 +3481,7 @@
               </a:spcAft>
             </a:pPr>
             <a:r>
-              <a:rPr sz="1400" b="0">
+              <a:rPr sz="1300" b="0">
                 <a:solidFill>
                   <a:srgbClr val="333333"/>
                 </a:solidFill>
@@ -3461,13 +3490,13 @@
               <a:t>     ◦  </a:t>
             </a:r>
             <a:r>
-              <a:rPr sz="1400" b="0">
+              <a:rPr sz="1300" b="0">
                 <a:solidFill>
                   <a:srgbClr val="333333"/>
                 </a:solidFill>
                 <a:latin typeface="Fira Sans"/>
               </a:rPr>
-              <a:t>Una asociación observada admite varias explicaciones: X causa Y, Y causa X, o una variable de confusión Z afecta a ambas.</a:t>
+              <a:t>La brecha entre ambos es un diagnóstico: 0,43 contra 0,76 indica curva o extremos.</a:t>
             </a:r>
           </a:p>
           <a:p>
@@ -3480,7 +3509,7 @@
               </a:spcAft>
             </a:pPr>
             <a:r>
-              <a:rPr sz="1400" b="0">
+              <a:rPr sz="1300" b="0">
                 <a:solidFill>
                   <a:srgbClr val="333333"/>
                 </a:solidFill>
@@ -3489,41 +3518,13 @@
               <a:t>     ◦  </a:t>
             </a:r>
             <a:r>
-              <a:rPr sz="1400" b="0">
+              <a:rPr sz="1300" b="0">
                 <a:solidFill>
                   <a:srgbClr val="333333"/>
                 </a:solidFill>
                 <a:latin typeface="Fira Sans"/>
               </a:rPr>
-              <a:t>Los datos observacionales, como los de una encuesta, muestran asociación; no bastan para establecer causalidad.</a:t>
-            </a:r>
-          </a:p>
-          <a:p>
-            <a:pPr>
-              <a:lnSpc>
-                <a:spcPct val="112000"/>
-              </a:lnSpc>
-              <a:spcAft>
-                <a:spcPts val="500"/>
-              </a:spcAft>
-            </a:pPr>
-            <a:r>
-              <a:rPr sz="1400" b="0">
-                <a:solidFill>
-                  <a:srgbClr val="333333"/>
-                </a:solidFill>
-                <a:latin typeface="Fira Sans"/>
-              </a:rPr>
-              <a:t>     ◦  </a:t>
-            </a:r>
-            <a:r>
-              <a:rPr sz="1400" b="0">
-                <a:solidFill>
-                  <a:srgbClr val="333333"/>
-                </a:solidFill>
-                <a:latin typeface="Fira Sans"/>
-              </a:rPr>
-              <a:t>La inferencia causal tiene métodos propios; este curso no los cubre.</a:t>
+              <a:t>Tras el logaritmo, Pearson llega a 0,73, casi igual a Spearman.</a:t>
             </a:r>
           </a:p>
           <a:p>
@@ -3536,7 +3537,7 @@
               </a:spcAft>
             </a:pPr>
             <a:r>
-              <a:rPr sz="1800" b="1">
+              <a:rPr sz="1500" b="1">
                 <a:solidFill>
                   <a:srgbClr val="E0A437"/>
                 </a:solidFill>
@@ -3545,17 +3546,41 @@
               <a:t>▸ </a:t>
             </a:r>
             <a:r>
-              <a:rPr sz="1800" b="1">
+              <a:rPr sz="1500" b="1">
                 <a:solidFill>
                   <a:srgbClr val="1D3557"/>
                 </a:solidFill>
                 <a:latin typeface="Fira Sans"/>
               </a:rPr>
-              <a:t>Regla de trabajo: una asociación se reporta como asociación, sin verbos causales que los datos no respaldan.</a:t>
-            </a:r>
-          </a:p>
-        </p:txBody>
-      </p:sp>
+              <a:t>Calcule ambos; si difieren mucho, mire el gráfico antes de reportar.</a:t>
+            </a:r>
+          </a:p>
+        </p:txBody>
+      </p:sp>
+      <p:pic>
+        <p:nvPicPr>
+          <p:cNvPr id="5" name="Picture 4" descr="18_loglog.png"/>
+          <p:cNvPicPr>
+            <a:picLocks noChangeAspect="1"/>
+          </p:cNvPicPr>
+          <p:nvPr/>
+        </p:nvPicPr>
+        <p:blipFill>
+          <a:blip r:embed="rId2"/>
+          <a:stretch>
+            <a:fillRect/>
+          </a:stretch>
+        </p:blipFill>
+        <p:spPr>
+          <a:xfrm>
+            <a:off x="4892040" y="1371600"/>
+            <a:ext cx="3840480" cy="3350924"/>
+          </a:xfrm>
+          <a:prstGeom prst="rect">
+            <a:avLst/>
+          </a:prstGeom>
+        </p:spPr>
+      </p:pic>
     </p:spTree>
   </p:cSld>
   <p:clrMapOvr>
@@ -3647,45 +3672,21 @@
                 </a:solidFill>
                 <a:latin typeface="Fira Sans"/>
               </a:rPr>
-              <a:t>Tipos de datos</a:t>
-            </a:r>
-          </a:p>
-        </p:txBody>
-      </p:sp>
-      <p:pic>
-        <p:nvPicPr>
-          <p:cNvPr id="4" name="Picture 3" descr="11_diagrama_tipos.png"/>
-          <p:cNvPicPr>
-            <a:picLocks noChangeAspect="1"/>
-          </p:cNvPicPr>
-          <p:nvPr/>
-        </p:nvPicPr>
-        <p:blipFill>
-          <a:blip r:embed="rId2"/>
-          <a:stretch>
-            <a:fillRect/>
-          </a:stretch>
-        </p:blipFill>
-        <p:spPr>
-          <a:xfrm>
-            <a:off x="2065807" y="1143000"/>
-            <a:ext cx="5012385" cy="3154680"/>
-          </a:xfrm>
-          <a:prstGeom prst="rect">
-            <a:avLst/>
-          </a:prstGeom>
-        </p:spPr>
-      </p:pic>
-      <p:sp>
-        <p:nvSpPr>
-          <p:cNvPr id="5" name="TextBox 4"/>
+              <a:t>Correlación y causalidad</a:t>
+            </a:r>
+          </a:p>
+        </p:txBody>
+      </p:sp>
+      <p:sp>
+        <p:nvSpPr>
+          <p:cNvPr id="4" name="TextBox 3"/>
           <p:cNvSpPr txBox="1"/>
           <p:nvPr/>
         </p:nvSpPr>
         <p:spPr>
           <a:xfrm>
-            <a:off x="704088" y="4434840"/>
-            <a:ext cx="7744968" cy="457200"/>
+            <a:off x="704088" y="1353312"/>
+            <a:ext cx="7744968" cy="3300984"/>
           </a:xfrm>
           <a:prstGeom prst="rect">
             <a:avLst/>
@@ -3698,14 +3699,143 @@
           </a:bodyPr>
           <a:lstStyle/>
           <a:p>
-            <a:r>
-              <a:rPr sz="1300" b="0">
+            <a:pPr>
+              <a:lnSpc>
+                <a:spcPct val="112000"/>
+              </a:lnSpc>
+              <a:spcAft>
+                <a:spcPts val="900"/>
+              </a:spcAft>
+            </a:pPr>
+            <a:r>
+              <a:rPr sz="1800" b="1">
+                <a:solidFill>
+                  <a:srgbClr val="E0A437"/>
+                </a:solidFill>
+                <a:latin typeface="Fira Sans"/>
+              </a:rPr>
+              <a:t>▸ </a:t>
+            </a:r>
+            <a:r>
+              <a:rPr sz="1800" b="0">
+                <a:solidFill>
+                  <a:srgbClr val="000000"/>
+                </a:solidFill>
+                <a:latin typeface="Fira Sans"/>
+              </a:rPr>
+              <a:t>Causalidad: intervenir X cambiaría Y. Es una afirmación más fuerte que la asociación.</a:t>
+            </a:r>
+          </a:p>
+          <a:p>
+            <a:pPr>
+              <a:lnSpc>
+                <a:spcPct val="112000"/>
+              </a:lnSpc>
+              <a:spcAft>
+                <a:spcPts val="500"/>
+              </a:spcAft>
+            </a:pPr>
+            <a:r>
+              <a:rPr sz="1400" b="0">
                 <a:solidFill>
                   <a:srgbClr val="333333"/>
                 </a:solidFill>
                 <a:latin typeface="Fira Sans"/>
               </a:rPr>
-              <a:t>El tipo de la variable determina qué operaciones tienen sentido (Bruce, Bruce y Gedeck, 2020, cap. 1).</a:t>
+              <a:t>     ◦  </a:t>
+            </a:r>
+            <a:r>
+              <a:rPr sz="1400" b="0">
+                <a:solidFill>
+                  <a:srgbClr val="333333"/>
+                </a:solidFill>
+                <a:latin typeface="Fira Sans"/>
+              </a:rPr>
+              <a:t>Una asociación observada admite varias explicaciones: X causa Y, Y causa X, o una variable de confusión Z afecta a ambas.</a:t>
+            </a:r>
+          </a:p>
+          <a:p>
+            <a:pPr>
+              <a:lnSpc>
+                <a:spcPct val="112000"/>
+              </a:lnSpc>
+              <a:spcAft>
+                <a:spcPts val="500"/>
+              </a:spcAft>
+            </a:pPr>
+            <a:r>
+              <a:rPr sz="1400" b="0">
+                <a:solidFill>
+                  <a:srgbClr val="333333"/>
+                </a:solidFill>
+                <a:latin typeface="Fira Sans"/>
+              </a:rPr>
+              <a:t>     ◦  </a:t>
+            </a:r>
+            <a:r>
+              <a:rPr sz="1400" b="0">
+                <a:solidFill>
+                  <a:srgbClr val="333333"/>
+                </a:solidFill>
+                <a:latin typeface="Fira Sans"/>
+              </a:rPr>
+              <a:t>Los datos observacionales, como los de una encuesta, muestran asociación; no bastan para establecer causalidad.</a:t>
+            </a:r>
+          </a:p>
+          <a:p>
+            <a:pPr>
+              <a:lnSpc>
+                <a:spcPct val="112000"/>
+              </a:lnSpc>
+              <a:spcAft>
+                <a:spcPts val="500"/>
+              </a:spcAft>
+            </a:pPr>
+            <a:r>
+              <a:rPr sz="1400" b="0">
+                <a:solidFill>
+                  <a:srgbClr val="333333"/>
+                </a:solidFill>
+                <a:latin typeface="Fira Sans"/>
+              </a:rPr>
+              <a:t>     ◦  </a:t>
+            </a:r>
+            <a:r>
+              <a:rPr sz="1400" b="0">
+                <a:solidFill>
+                  <a:srgbClr val="333333"/>
+                </a:solidFill>
+                <a:latin typeface="Fira Sans"/>
+              </a:rPr>
+              <a:t>La inferencia causal tiene métodos propios; este curso no los cubre.</a:t>
+            </a:r>
+          </a:p>
+          <a:p>
+            <a:pPr>
+              <a:lnSpc>
+                <a:spcPct val="112000"/>
+              </a:lnSpc>
+              <a:spcAft>
+                <a:spcPts val="900"/>
+              </a:spcAft>
+            </a:pPr>
+            <a:r>
+              <a:rPr sz="1800" b="1">
+                <a:solidFill>
+                  <a:srgbClr val="E0A437"/>
+                </a:solidFill>
+                <a:latin typeface="Fira Sans"/>
+              </a:rPr>
+              <a:t>▸ </a:t>
+            </a:r>
+            <a:r>
+              <a:rPr sz="1800" b="1">
+                <a:solidFill>
+                  <a:srgbClr val="1D3557"/>
+                </a:solidFill>
+                <a:latin typeface="Fira Sans"/>
+              </a:rPr>
+              <a:t>Regla de trabajo: una asociación se reporta como asociación, sin verbos causales que los datos no respaldan.</a:t>
             </a:r>
           </a:p>
         </p:txBody>
@@ -3801,21 +3931,45 @@
                 </a:solidFill>
                 <a:latin typeface="Fira Sans"/>
               </a:rPr>
-              <a:t>El tipo estadístico no es el tipo computacional</a:t>
-            </a:r>
-          </a:p>
-        </p:txBody>
-      </p:sp>
-      <p:sp>
-        <p:nvSpPr>
-          <p:cNvPr id="4" name="TextBox 3"/>
+              <a:t>Tipos de datos</a:t>
+            </a:r>
+          </a:p>
+        </p:txBody>
+      </p:sp>
+      <p:pic>
+        <p:nvPicPr>
+          <p:cNvPr id="4" name="Picture 3" descr="11_diagrama_tipos.png"/>
+          <p:cNvPicPr>
+            <a:picLocks noChangeAspect="1"/>
+          </p:cNvPicPr>
+          <p:nvPr/>
+        </p:nvPicPr>
+        <p:blipFill>
+          <a:blip r:embed="rId2"/>
+          <a:stretch>
+            <a:fillRect/>
+          </a:stretch>
+        </p:blipFill>
+        <p:spPr>
+          <a:xfrm>
+            <a:off x="2065807" y="1143000"/>
+            <a:ext cx="5012385" cy="3154680"/>
+          </a:xfrm>
+          <a:prstGeom prst="rect">
+            <a:avLst/>
+          </a:prstGeom>
+        </p:spPr>
+      </p:pic>
+      <p:sp>
+        <p:nvSpPr>
+          <p:cNvPr id="5" name="TextBox 4"/>
           <p:cNvSpPr txBox="1"/>
           <p:nvPr/>
         </p:nvSpPr>
         <p:spPr>
           <a:xfrm>
-            <a:off x="704088" y="1353312"/>
-            <a:ext cx="7744968" cy="3300984"/>
+            <a:off x="704088" y="4434840"/>
+            <a:ext cx="7744968" cy="457200"/>
           </a:xfrm>
           <a:prstGeom prst="rect">
             <a:avLst/>
@@ -3828,143 +3982,14 @@
           </a:bodyPr>
           <a:lstStyle/>
           <a:p>
-            <a:pPr>
-              <a:lnSpc>
-                <a:spcPct val="112000"/>
-              </a:lnSpc>
-              <a:spcAft>
-                <a:spcPts val="900"/>
-              </a:spcAft>
-            </a:pPr>
-            <a:r>
-              <a:rPr sz="1800" b="1">
-                <a:solidFill>
-                  <a:srgbClr val="E0A437"/>
-                </a:solidFill>
-                <a:latin typeface="Fira Sans"/>
-              </a:rPr>
-              <a:t>▸ </a:t>
-            </a:r>
-            <a:r>
-              <a:rPr sz="1800" b="0">
-                <a:solidFill>
-                  <a:srgbClr val="000000"/>
-                </a:solidFill>
-                <a:latin typeface="Fira Sans"/>
-              </a:rPr>
-              <a:t>En la EOD el sexo viene codificado 1 o 2: para Pandas es un entero (int64).</a:t>
-            </a:r>
-          </a:p>
-          <a:p>
-            <a:pPr>
-              <a:lnSpc>
-                <a:spcPct val="112000"/>
-              </a:lnSpc>
-              <a:spcAft>
-                <a:spcPts val="900"/>
-              </a:spcAft>
-            </a:pPr>
-            <a:r>
-              <a:rPr sz="1800" b="1">
-                <a:solidFill>
-                  <a:srgbClr val="E0A437"/>
-                </a:solidFill>
-                <a:latin typeface="Fira Sans"/>
-              </a:rPr>
-              <a:t>▸ </a:t>
-            </a:r>
-            <a:r>
-              <a:rPr sz="1800" b="0">
-                <a:solidFill>
-                  <a:srgbClr val="000000"/>
-                </a:solidFill>
-                <a:latin typeface="Fira Sans"/>
-              </a:rPr>
-              <a:t>El tipo computacional permite operar; el tipo estadístico decide si la operación significa algo.</a:t>
-            </a:r>
-          </a:p>
-          <a:p>
-            <a:pPr>
-              <a:lnSpc>
-                <a:spcPct val="112000"/>
-              </a:lnSpc>
-              <a:spcAft>
-                <a:spcPts val="500"/>
-              </a:spcAft>
-            </a:pPr>
-            <a:r>
-              <a:rPr sz="1400" b="0">
+            <a:r>
+              <a:rPr sz="1300" b="0">
                 <a:solidFill>
                   <a:srgbClr val="333333"/>
                 </a:solidFill>
                 <a:latin typeface="Fira Sans"/>
               </a:rPr>
-              <a:t>     ◦  </a:t>
-            </a:r>
-            <a:r>
-              <a:rPr sz="1400" b="0">
-                <a:solidFill>
-                  <a:srgbClr val="333333"/>
-                </a:solidFill>
-                <a:latin typeface="Fira Sans"/>
-              </a:rPr>
-              <a:t>El promedio de Sexo en la EOD es 1,53: aritméticamente correcto, sin significado.</a:t>
-            </a:r>
-          </a:p>
-          <a:p>
-            <a:pPr>
-              <a:lnSpc>
-                <a:spcPct val="112000"/>
-              </a:lnSpc>
-              <a:spcAft>
-                <a:spcPts val="500"/>
-              </a:spcAft>
-            </a:pPr>
-            <a:r>
-              <a:rPr sz="1400" b="0">
-                <a:solidFill>
-                  <a:srgbClr val="333333"/>
-                </a:solidFill>
-                <a:latin typeface="Fira Sans"/>
-              </a:rPr>
-              <a:t>     ◦  </a:t>
-            </a:r>
-            <a:r>
-              <a:rPr sz="1400" b="0">
-                <a:solidFill>
-                  <a:srgbClr val="333333"/>
-                </a:solidFill>
-                <a:latin typeface="Fira Sans"/>
-              </a:rPr>
-              <a:t>El promedio de Edad sí es interpretable: la variable es numérica.</a:t>
-            </a:r>
-          </a:p>
-          <a:p>
-            <a:pPr>
-              <a:lnSpc>
-                <a:spcPct val="112000"/>
-              </a:lnSpc>
-              <a:spcAft>
-                <a:spcPts val="900"/>
-              </a:spcAft>
-            </a:pPr>
-            <a:r>
-              <a:rPr sz="1800" b="1">
-                <a:solidFill>
-                  <a:srgbClr val="E0A437"/>
-                </a:solidFill>
-                <a:latin typeface="Fira Sans"/>
-              </a:rPr>
-              <a:t>▸ </a:t>
-            </a:r>
-            <a:r>
-              <a:rPr sz="1800" b="1">
-                <a:solidFill>
-                  <a:srgbClr val="1D3557"/>
-                </a:solidFill>
-                <a:latin typeface="Fira Sans"/>
-              </a:rPr>
-              <a:t>Identificar el tipo de cada variable es un paso del análisis, no una formalidad.</a:t>
+              <a:t>El tipo de la variable determina qué operaciones tienen sentido (Bruce, Bruce y Gedeck, 2020, cap. 1).</a:t>
             </a:r>
           </a:p>
         </p:txBody>
@@ -4060,7 +4085,7 @@
                 </a:solidFill>
                 <a:latin typeface="Fira Sans"/>
               </a:rPr>
-              <a:t>El análisis exploratorio de datos</a:t>
+              <a:t>El tipo estadístico no es el tipo computacional</a:t>
             </a:r>
           </a:p>
         </p:txBody>
@@ -4111,7 +4136,7 @@
                 </a:solidFill>
                 <a:latin typeface="Fira Sans"/>
               </a:rPr>
-              <a:t>La etapa en que se examinan los datos antes de modelarlos (Tukey, 1977).</a:t>
+              <a:t>En la EOD el sexo viene codificado 1 o 2: para Pandas es un entero (int64).</a:t>
             </a:r>
           </a:p>
           <a:p>
@@ -4139,7 +4164,7 @@
                 </a:solidFill>
                 <a:latin typeface="Fira Sans"/>
               </a:rPr>
-              <a:t>Responde cuatro tipos de pregunta:</a:t>
+              <a:t>El tipo computacional permite operar; el tipo estadístico decide si la operación significa algo.</a:t>
             </a:r>
           </a:p>
           <a:p>
@@ -4167,7 +4192,7 @@
                 </a:solidFill>
                 <a:latin typeface="Fira Sans"/>
               </a:rPr>
-              <a:t>La forma: cómo se distribuye cada variable.</a:t>
+              <a:t>El promedio de Sexo en la EOD es 1,53: aritméticamente correcto, sin significado.</a:t>
             </a:r>
           </a:p>
           <a:p>
@@ -4195,63 +4220,7 @@
                 </a:solidFill>
                 <a:latin typeface="Fira Sans"/>
               </a:rPr>
-              <a:t>Lo típico y lo extremo: qué es frecuente y qué es anómalo.</a:t>
-            </a:r>
-          </a:p>
-          <a:p>
-            <a:pPr>
-              <a:lnSpc>
-                <a:spcPct val="112000"/>
-              </a:lnSpc>
-              <a:spcAft>
-                <a:spcPts val="500"/>
-              </a:spcAft>
-            </a:pPr>
-            <a:r>
-              <a:rPr sz="1400" b="0">
-                <a:solidFill>
-                  <a:srgbClr val="333333"/>
-                </a:solidFill>
-                <a:latin typeface="Fira Sans"/>
-              </a:rPr>
-              <a:t>     ◦  </a:t>
-            </a:r>
-            <a:r>
-              <a:rPr sz="1400" b="0">
-                <a:solidFill>
-                  <a:srgbClr val="333333"/>
-                </a:solidFill>
-                <a:latin typeface="Fira Sans"/>
-              </a:rPr>
-              <a:t>Lo que falta: qué datos están ausentes y con qué patrón.</a:t>
-            </a:r>
-          </a:p>
-          <a:p>
-            <a:pPr>
-              <a:lnSpc>
-                <a:spcPct val="112000"/>
-              </a:lnSpc>
-              <a:spcAft>
-                <a:spcPts val="500"/>
-              </a:spcAft>
-            </a:pPr>
-            <a:r>
-              <a:rPr sz="1400" b="0">
-                <a:solidFill>
-                  <a:srgbClr val="333333"/>
-                </a:solidFill>
-                <a:latin typeface="Fira Sans"/>
-              </a:rPr>
-              <a:t>     ◦  </a:t>
-            </a:r>
-            <a:r>
-              <a:rPr sz="1400" b="0">
-                <a:solidFill>
-                  <a:srgbClr val="333333"/>
-                </a:solidFill>
-                <a:latin typeface="Fira Sans"/>
-              </a:rPr>
-              <a:t>Las relaciones: qué variables se asocian con qué otras.</a:t>
+              <a:t>El promedio de Edad sí es interpretable: la variable es numérica.</a:t>
             </a:r>
           </a:p>
           <a:p>
@@ -4273,41 +4242,13 @@
               <a:t>▸ </a:t>
             </a:r>
             <a:r>
-              <a:rPr sz="1800" b="0">
-                <a:solidFill>
-                  <a:srgbClr val="000000"/>
-                </a:solidFill>
-                <a:latin typeface="Fira Sans"/>
-              </a:rPr>
-              <a:t>Genera hipótesis; el análisis confirmatorio (unidad 5) las pone a prueba.</a:t>
-            </a:r>
-          </a:p>
-          <a:p>
-            <a:pPr>
-              <a:lnSpc>
-                <a:spcPct val="112000"/>
-              </a:lnSpc>
-              <a:spcAft>
-                <a:spcPts val="900"/>
-              </a:spcAft>
-            </a:pPr>
-            <a:r>
               <a:rPr sz="1800" b="1">
                 <a:solidFill>
-                  <a:srgbClr val="E0A437"/>
-                </a:solidFill>
-                <a:latin typeface="Fira Sans"/>
-              </a:rPr>
-              <a:t>▸ </a:t>
-            </a:r>
-            <a:r>
-              <a:rPr sz="1800" b="1">
-                <a:solidFill>
                   <a:srgbClr val="1D3557"/>
                 </a:solidFill>
                 <a:latin typeface="Fira Sans"/>
               </a:rPr>
-              <a:t>Una pregunta transversal para toda cifra resumen: ¿de quién habla este número? ¿De la muestra, de un subgrupo, de la ciudad?</a:t>
+              <a:t>Identificar el tipo de cada variable es un paso del análisis, no una formalidad.</a:t>
             </a:r>
           </a:p>
         </p:txBody>
@@ -4345,7 +4286,7 @@
             <a:avLst/>
           </a:prstGeom>
           <a:solidFill>
-            <a:srgbClr val="1D3557"/>
+            <a:srgbClr val="FAFBFC"/>
           </a:solidFill>
           <a:ln>
             <a:noFill/>
@@ -4382,8 +4323,8 @@
         </p:nvSpPr>
         <p:spPr>
           <a:xfrm>
-            <a:off x="603504" y="1847088"/>
-            <a:ext cx="7946136" cy="1399032"/>
+            <a:off x="402336" y="301752"/>
+            <a:ext cx="8348472" cy="795528"/>
           </a:xfrm>
           <a:prstGeom prst="rect">
             <a:avLst/>
@@ -4397,24 +4338,260 @@
           <a:lstStyle/>
           <a:p>
             <a:r>
-              <a:rPr sz="3400" b="1">
-                <a:solidFill>
-                  <a:srgbClr val="FFFFFF"/>
-                </a:solidFill>
-                <a:latin typeface="Fira Sans"/>
-              </a:rPr>
-              <a:t>Los datos</a:t>
-            </a:r>
-          </a:p>
-          <a:p>
+              <a:rPr sz="2800" b="1">
+                <a:solidFill>
+                  <a:srgbClr val="0F0F0F"/>
+                </a:solidFill>
+                <a:latin typeface="Fira Sans"/>
+              </a:rPr>
+              <a:t>El análisis exploratorio de datos</a:t>
+            </a:r>
+          </a:p>
+        </p:txBody>
+      </p:sp>
+      <p:sp>
+        <p:nvSpPr>
+          <p:cNvPr id="4" name="TextBox 3"/>
+          <p:cNvSpPr txBox="1"/>
+          <p:nvPr/>
+        </p:nvSpPr>
+        <p:spPr>
+          <a:xfrm>
+            <a:off x="704088" y="1353312"/>
+            <a:ext cx="7744968" cy="3300984"/>
+          </a:xfrm>
+          <a:prstGeom prst="rect">
+            <a:avLst/>
+          </a:prstGeom>
+          <a:noFill/>
+        </p:spPr>
+        <p:txBody>
+          <a:bodyPr wrap="square">
+            <a:spAutoFit/>
+          </a:bodyPr>
+          <a:lstStyle/>
+          <a:p>
+            <a:pPr>
+              <a:lnSpc>
+                <a:spcPct val="112000"/>
+              </a:lnSpc>
+              <a:spcAft>
+                <a:spcPts val="900"/>
+              </a:spcAft>
+            </a:pPr>
+            <a:r>
+              <a:rPr sz="1800" b="1">
+                <a:solidFill>
+                  <a:srgbClr val="E0A437"/>
+                </a:solidFill>
+                <a:latin typeface="Fira Sans"/>
+              </a:rPr>
+              <a:t>▸ </a:t>
+            </a:r>
             <a:r>
               <a:rPr sz="1800" b="0">
                 <a:solidFill>
+                  <a:srgbClr val="000000"/>
+                </a:solidFill>
+                <a:latin typeface="Fira Sans"/>
+              </a:rPr>
+              <a:t>La etapa en que se examinan los datos antes de modelarlos (Tukey, 1977).</a:t>
+            </a:r>
+          </a:p>
+          <a:p>
+            <a:pPr>
+              <a:lnSpc>
+                <a:spcPct val="112000"/>
+              </a:lnSpc>
+              <a:spcAft>
+                <a:spcPts val="900"/>
+              </a:spcAft>
+            </a:pPr>
+            <a:r>
+              <a:rPr sz="1800" b="1">
+                <a:solidFill>
                   <a:srgbClr val="E0A437"/>
                 </a:solidFill>
                 <a:latin typeface="Fira Sans"/>
               </a:rPr>
-              <a:t>Encuesta Origen Destino de Santiago 2012</a:t>
+              <a:t>▸ </a:t>
+            </a:r>
+            <a:r>
+              <a:rPr sz="1800" b="0">
+                <a:solidFill>
+                  <a:srgbClr val="000000"/>
+                </a:solidFill>
+                <a:latin typeface="Fira Sans"/>
+              </a:rPr>
+              <a:t>Responde cuatro tipos de pregunta:</a:t>
+            </a:r>
+          </a:p>
+          <a:p>
+            <a:pPr>
+              <a:lnSpc>
+                <a:spcPct val="112000"/>
+              </a:lnSpc>
+              <a:spcAft>
+                <a:spcPts val="500"/>
+              </a:spcAft>
+            </a:pPr>
+            <a:r>
+              <a:rPr sz="1400" b="0">
+                <a:solidFill>
+                  <a:srgbClr val="333333"/>
+                </a:solidFill>
+                <a:latin typeface="Fira Sans"/>
+              </a:rPr>
+              <a:t>     ◦  </a:t>
+            </a:r>
+            <a:r>
+              <a:rPr sz="1400" b="0">
+                <a:solidFill>
+                  <a:srgbClr val="333333"/>
+                </a:solidFill>
+                <a:latin typeface="Fira Sans"/>
+              </a:rPr>
+              <a:t>La forma: cómo se distribuye cada variable.</a:t>
+            </a:r>
+          </a:p>
+          <a:p>
+            <a:pPr>
+              <a:lnSpc>
+                <a:spcPct val="112000"/>
+              </a:lnSpc>
+              <a:spcAft>
+                <a:spcPts val="500"/>
+              </a:spcAft>
+            </a:pPr>
+            <a:r>
+              <a:rPr sz="1400" b="0">
+                <a:solidFill>
+                  <a:srgbClr val="333333"/>
+                </a:solidFill>
+                <a:latin typeface="Fira Sans"/>
+              </a:rPr>
+              <a:t>     ◦  </a:t>
+            </a:r>
+            <a:r>
+              <a:rPr sz="1400" b="0">
+                <a:solidFill>
+                  <a:srgbClr val="333333"/>
+                </a:solidFill>
+                <a:latin typeface="Fira Sans"/>
+              </a:rPr>
+              <a:t>Lo típico y lo extremo: qué es frecuente y qué es anómalo.</a:t>
+            </a:r>
+          </a:p>
+          <a:p>
+            <a:pPr>
+              <a:lnSpc>
+                <a:spcPct val="112000"/>
+              </a:lnSpc>
+              <a:spcAft>
+                <a:spcPts val="500"/>
+              </a:spcAft>
+            </a:pPr>
+            <a:r>
+              <a:rPr sz="1400" b="0">
+                <a:solidFill>
+                  <a:srgbClr val="333333"/>
+                </a:solidFill>
+                <a:latin typeface="Fira Sans"/>
+              </a:rPr>
+              <a:t>     ◦  </a:t>
+            </a:r>
+            <a:r>
+              <a:rPr sz="1400" b="0">
+                <a:solidFill>
+                  <a:srgbClr val="333333"/>
+                </a:solidFill>
+                <a:latin typeface="Fira Sans"/>
+              </a:rPr>
+              <a:t>Lo que falta: qué datos están ausentes y con qué patrón.</a:t>
+            </a:r>
+          </a:p>
+          <a:p>
+            <a:pPr>
+              <a:lnSpc>
+                <a:spcPct val="112000"/>
+              </a:lnSpc>
+              <a:spcAft>
+                <a:spcPts val="500"/>
+              </a:spcAft>
+            </a:pPr>
+            <a:r>
+              <a:rPr sz="1400" b="0">
+                <a:solidFill>
+                  <a:srgbClr val="333333"/>
+                </a:solidFill>
+                <a:latin typeface="Fira Sans"/>
+              </a:rPr>
+              <a:t>     ◦  </a:t>
+            </a:r>
+            <a:r>
+              <a:rPr sz="1400" b="0">
+                <a:solidFill>
+                  <a:srgbClr val="333333"/>
+                </a:solidFill>
+                <a:latin typeface="Fira Sans"/>
+              </a:rPr>
+              <a:t>Las relaciones: qué variables se asocian con qué otras.</a:t>
+            </a:r>
+          </a:p>
+          <a:p>
+            <a:pPr>
+              <a:lnSpc>
+                <a:spcPct val="112000"/>
+              </a:lnSpc>
+              <a:spcAft>
+                <a:spcPts val="900"/>
+              </a:spcAft>
+            </a:pPr>
+            <a:r>
+              <a:rPr sz="1800" b="1">
+                <a:solidFill>
+                  <a:srgbClr val="E0A437"/>
+                </a:solidFill>
+                <a:latin typeface="Fira Sans"/>
+              </a:rPr>
+              <a:t>▸ </a:t>
+            </a:r>
+            <a:r>
+              <a:rPr sz="1800" b="0">
+                <a:solidFill>
+                  <a:srgbClr val="000000"/>
+                </a:solidFill>
+                <a:latin typeface="Fira Sans"/>
+              </a:rPr>
+              <a:t>Genera hipótesis; el análisis confirmatorio (unidad 5) las pone a prueba.</a:t>
+            </a:r>
+          </a:p>
+          <a:p>
+            <a:pPr>
+              <a:lnSpc>
+                <a:spcPct val="112000"/>
+              </a:lnSpc>
+              <a:spcAft>
+                <a:spcPts val="900"/>
+              </a:spcAft>
+            </a:pPr>
+            <a:r>
+              <a:rPr sz="1800" b="1">
+                <a:solidFill>
+                  <a:srgbClr val="E0A437"/>
+                </a:solidFill>
+                <a:latin typeface="Fira Sans"/>
+              </a:rPr>
+              <a:t>▸ </a:t>
+            </a:r>
+            <a:r>
+              <a:rPr sz="1800" b="1">
+                <a:solidFill>
+                  <a:srgbClr val="1D3557"/>
+                </a:solidFill>
+                <a:latin typeface="Fira Sans"/>
+              </a:rPr>
+              <a:t>Una pregunta transversal para toda cifra resumen: ¿de quién habla este número? ¿De la muestra, de un subgrupo, de la ciudad?</a:t>
             </a:r>
           </a:p>
         </p:txBody>
@@ -4452,7 +4629,7 @@
             <a:avLst/>
           </a:prstGeom>
           <a:solidFill>
-            <a:srgbClr val="FAFBFC"/>
+            <a:srgbClr val="1D3557"/>
           </a:solidFill>
           <a:ln>
             <a:noFill/>
@@ -4489,8 +4666,8 @@
         </p:nvSpPr>
         <p:spPr>
           <a:xfrm>
-            <a:off x="402336" y="301752"/>
-            <a:ext cx="8348472" cy="795528"/>
+            <a:off x="603504" y="1847088"/>
+            <a:ext cx="7946136" cy="1399032"/>
           </a:xfrm>
           <a:prstGeom prst="rect">
             <a:avLst/>
@@ -4504,176 +4681,24 @@
           <a:lstStyle/>
           <a:p>
             <a:r>
-              <a:rPr sz="2800" b="1">
-                <a:solidFill>
-                  <a:srgbClr val="0F0F0F"/>
-                </a:solidFill>
-                <a:latin typeface="Fira Sans"/>
-              </a:rPr>
-              <a:t>La EOD 2012</a:t>
-            </a:r>
-          </a:p>
-        </p:txBody>
-      </p:sp>
-      <p:sp>
-        <p:nvSpPr>
-          <p:cNvPr id="4" name="TextBox 3"/>
-          <p:cNvSpPr txBox="1"/>
-          <p:nvPr/>
-        </p:nvSpPr>
-        <p:spPr>
-          <a:xfrm>
-            <a:off x="704088" y="1353312"/>
-            <a:ext cx="7744968" cy="3300984"/>
-          </a:xfrm>
-          <a:prstGeom prst="rect">
-            <a:avLst/>
-          </a:prstGeom>
-          <a:noFill/>
-        </p:spPr>
-        <p:txBody>
-          <a:bodyPr wrap="square">
-            <a:spAutoFit/>
-          </a:bodyPr>
-          <a:lstStyle/>
-          <a:p>
-            <a:pPr>
-              <a:lnSpc>
-                <a:spcPct val="112000"/>
-              </a:lnSpc>
-              <a:spcAft>
-                <a:spcPts val="900"/>
-              </a:spcAft>
-            </a:pPr>
-            <a:r>
-              <a:rPr sz="1800" b="1">
+              <a:rPr sz="3400" b="1">
+                <a:solidFill>
+                  <a:srgbClr val="FFFFFF"/>
+                </a:solidFill>
+                <a:latin typeface="Fira Sans"/>
+              </a:rPr>
+              <a:t>Los datos</a:t>
+            </a:r>
+          </a:p>
+          <a:p>
+            <a:r>
+              <a:rPr sz="1800" b="0">
                 <a:solidFill>
                   <a:srgbClr val="E0A437"/>
                 </a:solidFill>
                 <a:latin typeface="Fira Sans"/>
               </a:rPr>
-              <a:t>▸ </a:t>
-            </a:r>
-            <a:r>
-              <a:rPr sz="1800" b="0">
-                <a:solidFill>
-                  <a:srgbClr val="000000"/>
-                </a:solidFill>
-                <a:latin typeface="Fira Sans"/>
-              </a:rPr>
-              <a:t>Encuesta de movilidad del Gran Santiago (SECTRA y U. Alberto Hurtado).</a:t>
-            </a:r>
-          </a:p>
-          <a:p>
-            <a:pPr>
-              <a:lnSpc>
-                <a:spcPct val="112000"/>
-              </a:lnSpc>
-              <a:spcAft>
-                <a:spcPts val="900"/>
-              </a:spcAft>
-            </a:pPr>
-            <a:r>
-              <a:rPr sz="1800" b="1">
-                <a:solidFill>
-                  <a:srgbClr val="E0A437"/>
-                </a:solidFill>
-                <a:latin typeface="Fira Sans"/>
-              </a:rPr>
-              <a:t>▸ </a:t>
-            </a:r>
-            <a:r>
-              <a:rPr sz="1800" b="0">
-                <a:solidFill>
-                  <a:srgbClr val="000000"/>
-                </a:solidFill>
-                <a:latin typeface="Fira Sans"/>
-              </a:rPr>
-              <a:t>Registra todos los viajes de un día de los hogares encuestados.</a:t>
-            </a:r>
-          </a:p>
-          <a:p>
-            <a:pPr>
-              <a:lnSpc>
-                <a:spcPct val="112000"/>
-              </a:lnSpc>
-              <a:spcAft>
-                <a:spcPts val="500"/>
-              </a:spcAft>
-            </a:pPr>
-            <a:r>
-              <a:rPr sz="1400" b="0">
-                <a:solidFill>
-                  <a:srgbClr val="333333"/>
-                </a:solidFill>
-                <a:latin typeface="Fira Sans"/>
-              </a:rPr>
-              <a:t>     ◦  </a:t>
-            </a:r>
-            <a:r>
-              <a:rPr sz="1400" b="0">
-                <a:solidFill>
-                  <a:srgbClr val="333333"/>
-                </a:solidFill>
-                <a:latin typeface="Fira Sans"/>
-              </a:rPr>
-              <a:t>18.264 hogares, 60.054 personas, 113.591 viajes.</a:t>
-            </a:r>
-          </a:p>
-          <a:p>
-            <a:pPr>
-              <a:lnSpc>
-                <a:spcPct val="112000"/>
-              </a:lnSpc>
-              <a:spcAft>
-                <a:spcPts val="500"/>
-              </a:spcAft>
-            </a:pPr>
-            <a:r>
-              <a:rPr sz="1400" b="0">
-                <a:solidFill>
-                  <a:srgbClr val="333333"/>
-                </a:solidFill>
-                <a:latin typeface="Fira Sans"/>
-              </a:rPr>
-              <a:t>     ◦  </a:t>
-            </a:r>
-            <a:r>
-              <a:rPr sz="1400" b="0">
-                <a:solidFill>
-                  <a:srgbClr val="333333"/>
-                </a:solidFill>
-                <a:latin typeface="Fira Sans"/>
-              </a:rPr>
-              <a:t>Se usa en la planificación de transporte de la ciudad.</a:t>
-            </a:r>
-          </a:p>
-          <a:p>
-            <a:pPr>
-              <a:lnSpc>
-                <a:spcPct val="112000"/>
-              </a:lnSpc>
-              <a:spcAft>
-                <a:spcPts val="900"/>
-              </a:spcAft>
-            </a:pPr>
-            <a:r>
-              <a:rPr sz="1800" b="1">
-                <a:solidFill>
-                  <a:srgbClr val="E0A437"/>
-                </a:solidFill>
-                <a:latin typeface="Fira Sans"/>
-              </a:rPr>
-              <a:t>▸ </a:t>
-            </a:r>
-            <a:r>
-              <a:rPr sz="1800" b="1">
-                <a:solidFill>
-                  <a:srgbClr val="1D3557"/>
-                </a:solidFill>
-                <a:latin typeface="Fira Sans"/>
-              </a:rPr>
-              <a:t>El mismo diseño relacional de la Casen, el Censo o la ENUSC.</a:t>
+              <a:t>Encuesta Origen Destino de Santiago 2012</a:t>
             </a:r>
           </a:p>
         </p:txBody>
@@ -4769,45 +4794,21 @@
                 </a:solidFill>
                 <a:latin typeface="Fira Sans"/>
               </a:rPr>
-              <a:t>Una encuesta, varias tablas</a:t>
-            </a:r>
-          </a:p>
-        </p:txBody>
-      </p:sp>
-      <p:pic>
-        <p:nvPicPr>
-          <p:cNvPr id="4" name="Picture 3" descr="05_diagrama_tablas.png"/>
-          <p:cNvPicPr>
-            <a:picLocks noChangeAspect="1"/>
-          </p:cNvPicPr>
-          <p:nvPr/>
-        </p:nvPicPr>
-        <p:blipFill>
-          <a:blip r:embed="rId2"/>
-          <a:stretch>
-            <a:fillRect/>
-          </a:stretch>
-        </p:blipFill>
-        <p:spPr>
-          <a:xfrm>
-            <a:off x="1553651" y="1143000"/>
-            <a:ext cx="6036697" cy="3154680"/>
-          </a:xfrm>
-          <a:prstGeom prst="rect">
-            <a:avLst/>
-          </a:prstGeom>
-        </p:spPr>
-      </p:pic>
-      <p:sp>
-        <p:nvSpPr>
-          <p:cNvPr id="5" name="TextBox 4"/>
+              <a:t>La EOD 2012</a:t>
+            </a:r>
+          </a:p>
+        </p:txBody>
+      </p:sp>
+      <p:sp>
+        <p:nvSpPr>
+          <p:cNvPr id="4" name="TextBox 3"/>
           <p:cNvSpPr txBox="1"/>
           <p:nvPr/>
         </p:nvSpPr>
         <p:spPr>
           <a:xfrm>
-            <a:off x="704088" y="4434840"/>
-            <a:ext cx="7744968" cy="457200"/>
+            <a:off x="704088" y="1353312"/>
+            <a:ext cx="7744968" cy="3300984"/>
           </a:xfrm>
           <a:prstGeom prst="rect">
             <a:avLst/>
@@ -4820,14 +4821,143 @@
           </a:bodyPr>
           <a:lstStyle/>
           <a:p>
-            <a:r>
-              <a:rPr sz="1300" b="0">
+            <a:pPr>
+              <a:lnSpc>
+                <a:spcPct val="112000"/>
+              </a:lnSpc>
+              <a:spcAft>
+                <a:spcPts val="900"/>
+              </a:spcAft>
+            </a:pPr>
+            <a:r>
+              <a:rPr sz="1800" b="1">
+                <a:solidFill>
+                  <a:srgbClr val="E0A437"/>
+                </a:solidFill>
+                <a:latin typeface="Fira Sans"/>
+              </a:rPr>
+              <a:t>▸ </a:t>
+            </a:r>
+            <a:r>
+              <a:rPr sz="1800" b="0">
+                <a:solidFill>
+                  <a:srgbClr val="000000"/>
+                </a:solidFill>
+                <a:latin typeface="Fira Sans"/>
+              </a:rPr>
+              <a:t>Encuesta de movilidad del Gran Santiago (SECTRA y U. Alberto Hurtado).</a:t>
+            </a:r>
+          </a:p>
+          <a:p>
+            <a:pPr>
+              <a:lnSpc>
+                <a:spcPct val="112000"/>
+              </a:lnSpc>
+              <a:spcAft>
+                <a:spcPts val="900"/>
+              </a:spcAft>
+            </a:pPr>
+            <a:r>
+              <a:rPr sz="1800" b="1">
+                <a:solidFill>
+                  <a:srgbClr val="E0A437"/>
+                </a:solidFill>
+                <a:latin typeface="Fira Sans"/>
+              </a:rPr>
+              <a:t>▸ </a:t>
+            </a:r>
+            <a:r>
+              <a:rPr sz="1800" b="0">
+                <a:solidFill>
+                  <a:srgbClr val="000000"/>
+                </a:solidFill>
+                <a:latin typeface="Fira Sans"/>
+              </a:rPr>
+              <a:t>Registra todos los viajes de un día de los hogares encuestados.</a:t>
+            </a:r>
+          </a:p>
+          <a:p>
+            <a:pPr>
+              <a:lnSpc>
+                <a:spcPct val="112000"/>
+              </a:lnSpc>
+              <a:spcAft>
+                <a:spcPts val="500"/>
+              </a:spcAft>
+            </a:pPr>
+            <a:r>
+              <a:rPr sz="1400" b="0">
                 <a:solidFill>
                   <a:srgbClr val="333333"/>
                 </a:solidFill>
                 <a:latin typeface="Fira Sans"/>
               </a:rPr>
-              <a:t>Los códigos no significan nada sin sus tablas de parámetros: unirlas es parte del análisis.</a:t>
+              <a:t>     ◦  </a:t>
+            </a:r>
+            <a:r>
+              <a:rPr sz="1400" b="0">
+                <a:solidFill>
+                  <a:srgbClr val="333333"/>
+                </a:solidFill>
+                <a:latin typeface="Fira Sans"/>
+              </a:rPr>
+              <a:t>18.264 hogares, 60.054 personas, 113.591 viajes.</a:t>
+            </a:r>
+          </a:p>
+          <a:p>
+            <a:pPr>
+              <a:lnSpc>
+                <a:spcPct val="112000"/>
+              </a:lnSpc>
+              <a:spcAft>
+                <a:spcPts val="500"/>
+              </a:spcAft>
+            </a:pPr>
+            <a:r>
+              <a:rPr sz="1400" b="0">
+                <a:solidFill>
+                  <a:srgbClr val="333333"/>
+                </a:solidFill>
+                <a:latin typeface="Fira Sans"/>
+              </a:rPr>
+              <a:t>     ◦  </a:t>
+            </a:r>
+            <a:r>
+              <a:rPr sz="1400" b="0">
+                <a:solidFill>
+                  <a:srgbClr val="333333"/>
+                </a:solidFill>
+                <a:latin typeface="Fira Sans"/>
+              </a:rPr>
+              <a:t>Se usa en la planificación de transporte de la ciudad.</a:t>
+            </a:r>
+          </a:p>
+          <a:p>
+            <a:pPr>
+              <a:lnSpc>
+                <a:spcPct val="112000"/>
+              </a:lnSpc>
+              <a:spcAft>
+                <a:spcPts val="900"/>
+              </a:spcAft>
+            </a:pPr>
+            <a:r>
+              <a:rPr sz="1800" b="1">
+                <a:solidFill>
+                  <a:srgbClr val="E0A437"/>
+                </a:solidFill>
+                <a:latin typeface="Fira Sans"/>
+              </a:rPr>
+              <a:t>▸ </a:t>
+            </a:r>
+            <a:r>
+              <a:rPr sz="1800" b="1">
+                <a:solidFill>
+                  <a:srgbClr val="1D3557"/>
+                </a:solidFill>
+                <a:latin typeface="Fira Sans"/>
+              </a:rPr>
+              <a:t>El mismo diseño relacional de la Casen, el Censo o la ENUSC.</a:t>
             </a:r>
           </a:p>
         </p:txBody>
@@ -4865,7 +4995,7 @@
             <a:avLst/>
           </a:prstGeom>
           <a:solidFill>
-            <a:srgbClr val="1D3557"/>
+            <a:srgbClr val="FAFBFC"/>
           </a:solidFill>
           <a:ln>
             <a:noFill/>
@@ -4902,8 +5032,8 @@
         </p:nvSpPr>
         <p:spPr>
           <a:xfrm>
-            <a:off x="603504" y="1847088"/>
-            <a:ext cx="7946136" cy="1399032"/>
+            <a:off x="402336" y="301752"/>
+            <a:ext cx="8348472" cy="795528"/>
           </a:xfrm>
           <a:prstGeom prst="rect">
             <a:avLst/>
@@ -4917,24 +5047,71 @@
           <a:lstStyle/>
           <a:p>
             <a:r>
-              <a:rPr sz="3400" b="1">
-                <a:solidFill>
-                  <a:srgbClr val="FFFFFF"/>
-                </a:solidFill>
-                <a:latin typeface="Fira Sans"/>
-              </a:rPr>
-              <a:t>Repaso de Pandas</a:t>
-            </a:r>
-          </a:p>
-          <a:p>
-            <a:r>
-              <a:rPr sz="1800" b="0">
-                <a:solidFill>
-                  <a:srgbClr val="E0A437"/>
-                </a:solidFill>
-                <a:latin typeface="Fira Sans"/>
-              </a:rPr>
-              <a:t>Dos casos concretos con la EOD</a:t>
+              <a:rPr sz="2800" b="1">
+                <a:solidFill>
+                  <a:srgbClr val="0F0F0F"/>
+                </a:solidFill>
+                <a:latin typeface="Fira Sans"/>
+              </a:rPr>
+              <a:t>Una encuesta, varias tablas</a:t>
+            </a:r>
+          </a:p>
+        </p:txBody>
+      </p:sp>
+      <p:pic>
+        <p:nvPicPr>
+          <p:cNvPr id="4" name="Picture 3" descr="05_diagrama_tablas.png"/>
+          <p:cNvPicPr>
+            <a:picLocks noChangeAspect="1"/>
+          </p:cNvPicPr>
+          <p:nvPr/>
+        </p:nvPicPr>
+        <p:blipFill>
+          <a:blip r:embed="rId2"/>
+          <a:stretch>
+            <a:fillRect/>
+          </a:stretch>
+        </p:blipFill>
+        <p:spPr>
+          <a:xfrm>
+            <a:off x="1553651" y="1143000"/>
+            <a:ext cx="6036697" cy="3154680"/>
+          </a:xfrm>
+          <a:prstGeom prst="rect">
+            <a:avLst/>
+          </a:prstGeom>
+        </p:spPr>
+      </p:pic>
+      <p:sp>
+        <p:nvSpPr>
+          <p:cNvPr id="5" name="TextBox 4"/>
+          <p:cNvSpPr txBox="1"/>
+          <p:nvPr/>
+        </p:nvSpPr>
+        <p:spPr>
+          <a:xfrm>
+            <a:off x="704088" y="4434840"/>
+            <a:ext cx="7744968" cy="457200"/>
+          </a:xfrm>
+          <a:prstGeom prst="rect">
+            <a:avLst/>
+          </a:prstGeom>
+          <a:noFill/>
+        </p:spPr>
+        <p:txBody>
+          <a:bodyPr wrap="square">
+            <a:spAutoFit/>
+          </a:bodyPr>
+          <a:lstStyle/>
+          <a:p>
+            <a:r>
+              <a:rPr sz="1300" b="0">
+                <a:solidFill>
+                  <a:srgbClr val="333333"/>
+                </a:solidFill>
+                <a:latin typeface="Fira Sans"/>
+              </a:rPr>
+              <a:t>Los códigos no significan nada sin sus tablas de parámetros: unirlas es parte del análisis.</a:t>
             </a:r>
           </a:p>
         </p:txBody>
@@ -4972,7 +5149,7 @@
             <a:avLst/>
           </a:prstGeom>
           <a:solidFill>
-            <a:srgbClr val="FAFBFC"/>
+            <a:srgbClr val="1D3557"/>
           </a:solidFill>
           <a:ln>
             <a:noFill/>
@@ -5009,8 +5186,8 @@
         </p:nvSpPr>
         <p:spPr>
           <a:xfrm>
-            <a:off x="402336" y="301752"/>
-            <a:ext cx="8348472" cy="795528"/>
+            <a:off x="603504" y="1847088"/>
+            <a:ext cx="7946136" cy="1399032"/>
           </a:xfrm>
           <a:prstGeom prst="rect">
             <a:avLst/>
@@ -5024,155 +5201,24 @@
           <a:lstStyle/>
           <a:p>
             <a:r>
-              <a:rPr sz="2800" b="1">
-                <a:solidFill>
-                  <a:srgbClr val="0F0F0F"/>
-                </a:solidFill>
-                <a:latin typeface="Fira Sans"/>
-              </a:rPr>
-              <a:t>Abrir el dataset</a:t>
-            </a:r>
-          </a:p>
-        </p:txBody>
-      </p:sp>
-      <p:sp>
-        <p:nvSpPr>
-          <p:cNvPr id="4" name="Rectangle 3"/>
-          <p:cNvSpPr/>
-          <p:nvPr/>
-        </p:nvSpPr>
-        <p:spPr>
-          <a:xfrm>
-            <a:off x="704088" y="1280160"/>
-            <a:ext cx="7744968" cy="2377440"/>
-          </a:xfrm>
-          <a:prstGeom prst="rect">
-            <a:avLst/>
-          </a:prstGeom>
-          <a:solidFill>
-            <a:srgbClr val="F0F2F5"/>
-          </a:solidFill>
-          <a:ln>
-            <a:solidFill>
-              <a:srgbClr val="D8DDE3"/>
-            </a:solidFill>
-          </a:ln>
-          <a:effectLst/>
-        </p:spPr>
-        <p:style>
-          <a:lnRef idx="1">
-            <a:schemeClr val="accent1"/>
-          </a:lnRef>
-          <a:fillRef idx="3">
-            <a:schemeClr val="accent1"/>
-          </a:fillRef>
-          <a:effectRef idx="2">
-            <a:schemeClr val="accent1"/>
-          </a:effectRef>
-          <a:fontRef idx="minor">
-            <a:schemeClr val="lt1"/>
-          </a:fontRef>
-        </p:style>
-        <p:txBody>
-          <a:bodyPr rtlCol="0" anchor="ctr" wrap="square" lIns="228600" tIns="137160"/>
-          <a:lstStyle/>
-          <a:p>
-            <a:pPr/>
-            <a:r>
-              <a:rPr sz="1500" b="0">
-                <a:solidFill>
-                  <a:srgbClr val="1D3557"/>
-                </a:solidFill>
-                <a:latin typeface="Menlo"/>
-              </a:rPr>
-              <a:t>import pandas as pd</a:t>
-            </a:r>
-          </a:p>
-          <a:p>
-            <a:pPr/>
-            <a:r>
-              <a:rPr sz="1500" b="0">
-                <a:solidFill>
-                  <a:srgbClr val="1D3557"/>
-                </a:solidFill>
-                <a:latin typeface="Menlo"/>
-              </a:rPr>
-              <a:t/>
-            </a:r>
-          </a:p>
-          <a:p>
-            <a:pPr/>
-            <a:r>
-              <a:rPr sz="1500" b="0">
-                <a:solidFill>
-                  <a:srgbClr val="1D3557"/>
-                </a:solidFill>
-                <a:latin typeface="Menlo"/>
-              </a:rPr>
-              <a:t>viajes = pd.read_csv('datos/eod_stgo/viajes.csv',</a:t>
-            </a:r>
-          </a:p>
-          <a:p>
-            <a:pPr/>
-            <a:r>
-              <a:rPr sz="1500" b="0">
-                <a:solidFill>
-                  <a:srgbClr val="1D3557"/>
-                </a:solidFill>
-                <a:latin typeface="Menlo"/>
-              </a:rPr>
-              <a:t>                     sep=';', decimal=',')</a:t>
-            </a:r>
-          </a:p>
-        </p:txBody>
-      </p:sp>
-      <p:sp>
-        <p:nvSpPr>
-          <p:cNvPr id="5" name="TextBox 4"/>
-          <p:cNvSpPr txBox="1"/>
-          <p:nvPr/>
-        </p:nvSpPr>
-        <p:spPr>
-          <a:xfrm>
-            <a:off x="704088" y="3886200"/>
-            <a:ext cx="7744968" cy="1097280"/>
-          </a:xfrm>
-          <a:prstGeom prst="rect">
-            <a:avLst/>
-          </a:prstGeom>
-          <a:noFill/>
-        </p:spPr>
-        <p:txBody>
-          <a:bodyPr wrap="square">
-            <a:spAutoFit/>
-          </a:bodyPr>
-          <a:lstStyle/>
-          <a:p>
-            <a:pPr>
-              <a:lnSpc>
-                <a:spcPct val="112000"/>
-              </a:lnSpc>
-              <a:spcAft>
-                <a:spcPts val="900"/>
-              </a:spcAft>
-            </a:pPr>
-            <a:r>
-              <a:rPr sz="1600" b="1">
+              <a:rPr sz="3400" b="1">
+                <a:solidFill>
+                  <a:srgbClr val="FFFFFF"/>
+                </a:solidFill>
+                <a:latin typeface="Fira Sans"/>
+              </a:rPr>
+              <a:t>Repaso de Pandas</a:t>
+            </a:r>
+          </a:p>
+          <a:p>
+            <a:r>
+              <a:rPr sz="1800" b="0">
                 <a:solidFill>
                   <a:srgbClr val="E0A437"/>
                 </a:solidFill>
                 <a:latin typeface="Fira Sans"/>
               </a:rPr>
-              <a:t>▸ </a:t>
-            </a:r>
-            <a:r>
-              <a:rPr sz="1600" b="0">
-                <a:solidFill>
-                  <a:srgbClr val="000000"/>
-                </a:solidFill>
-                <a:latin typeface="Fira Sans"/>
-              </a:rPr>
-              <a:t>Todo el código de la clase está en el notebook 02_pandas_eda.ipynb del repositorio.</a:t>
+              <a:t>Dos casos concretos con la EOD</a:t>
             </a:r>
           </a:p>
         </p:txBody>
@@ -5268,35 +5314,102 @@
                 </a:solidFill>
                 <a:latin typeface="Fira Sans"/>
               </a:rPr>
-              <a:t>El DataFrame: la estructura central de Pandas</a:t>
-            </a:r>
-          </a:p>
-        </p:txBody>
-      </p:sp>
-      <p:pic>
-        <p:nvPicPr>
-          <p:cNvPr id="4" name="Picture 3" descr="13_dataframe.png"/>
-          <p:cNvPicPr>
-            <a:picLocks noChangeAspect="1"/>
-          </p:cNvPicPr>
-          <p:nvPr/>
-        </p:nvPicPr>
-        <p:blipFill>
-          <a:blip r:embed="rId2"/>
-          <a:stretch>
-            <a:fillRect/>
-          </a:stretch>
-        </p:blipFill>
-        <p:spPr>
-          <a:xfrm>
-            <a:off x="1417319" y="1143000"/>
-            <a:ext cx="6309360" cy="2553789"/>
-          </a:xfrm>
-          <a:prstGeom prst="rect">
-            <a:avLst/>
-          </a:prstGeom>
-        </p:spPr>
-      </p:pic>
+              <a:t>Abrir el dataset</a:t>
+            </a:r>
+          </a:p>
+        </p:txBody>
+      </p:sp>
+      <p:sp>
+        <p:nvSpPr>
+          <p:cNvPr id="4" name="Rectangle 3"/>
+          <p:cNvSpPr/>
+          <p:nvPr/>
+        </p:nvSpPr>
+        <p:spPr>
+          <a:xfrm>
+            <a:off x="704088" y="1280160"/>
+            <a:ext cx="7744968" cy="2377440"/>
+          </a:xfrm>
+          <a:prstGeom prst="rect">
+            <a:avLst/>
+          </a:prstGeom>
+          <a:solidFill>
+            <a:srgbClr val="F0F2F5"/>
+          </a:solidFill>
+          <a:ln>
+            <a:solidFill>
+              <a:srgbClr val="D8DDE3"/>
+            </a:solidFill>
+          </a:ln>
+          <a:effectLst/>
+        </p:spPr>
+        <p:style>
+          <a:lnRef idx="1">
+            <a:schemeClr val="accent1"/>
+          </a:lnRef>
+          <a:fillRef idx="3">
+            <a:schemeClr val="accent1"/>
+          </a:fillRef>
+          <a:effectRef idx="2">
+            <a:schemeClr val="accent1"/>
+          </a:effectRef>
+          <a:fontRef idx="minor">
+            <a:schemeClr val="lt1"/>
+          </a:fontRef>
+        </p:style>
+        <p:txBody>
+          <a:bodyPr rtlCol="0" anchor="ctr" wrap="square" lIns="228600" tIns="137160"/>
+          <a:lstStyle/>
+          <a:p>
+            <a:pPr/>
+            <a:r>
+              <a:rPr sz="1500" b="0">
+                <a:solidFill>
+                  <a:srgbClr val="1D3557"/>
+                </a:solidFill>
+                <a:latin typeface="Menlo"/>
+              </a:rPr>
+              <a:t>import pandas as pd</a:t>
+            </a:r>
+          </a:p>
+          <a:p>
+            <a:pPr/>
+            <a:r>
+              <a:rPr sz="1500" b="0">
+                <a:solidFill>
+                  <a:srgbClr val="1D3557"/>
+                </a:solidFill>
+                <a:latin typeface="Menlo"/>
+              </a:rPr>
+              <a:t/>
+            </a:r>
+          </a:p>
+          <a:p>
+            <a:pPr/>
+            <a:r>
+              <a:rPr sz="1500" b="0">
+                <a:solidFill>
+                  <a:srgbClr val="1D3557"/>
+                </a:solidFill>
+                <a:latin typeface="Menlo"/>
+              </a:rPr>
+              <a:t>viajes = pd.read_csv('datos/eod_stgo/viajes.csv',</a:t>
+            </a:r>
+          </a:p>
+          <a:p>
+            <a:pPr/>
+            <a:r>
+              <a:rPr sz="1500" b="0">
+                <a:solidFill>
+                  <a:srgbClr val="1D3557"/>
+                </a:solidFill>
+                <a:latin typeface="Menlo"/>
+              </a:rPr>
+              <a:t>                     sep=';', decimal=',')</a:t>
+            </a:r>
+          </a:p>
+        </p:txBody>
+      </p:sp>
       <p:sp>
         <p:nvSpPr>
           <p:cNvPr id="5" name="TextBox 4"/>
@@ -5305,8 +5418,8 @@
         </p:nvSpPr>
         <p:spPr>
           <a:xfrm>
-            <a:off x="704088" y="4434840"/>
-            <a:ext cx="7744968" cy="457200"/>
+            <a:off x="704088" y="3886200"/>
+            <a:ext cx="7744968" cy="1097280"/>
           </a:xfrm>
           <a:prstGeom prst="rect">
             <a:avLst/>
@@ -5319,14 +5432,31 @@
           </a:bodyPr>
           <a:lstStyle/>
           <a:p>
-            <a:r>
-              <a:rPr sz="1300" b="0">
-                <a:solidFill>
-                  <a:srgbClr val="333333"/>
-                </a:solidFill>
-                <a:latin typeface="Fira Sans"/>
-              </a:rPr>
-              <a:t>Una tabla con filas indexadas y columnas con nombre y tipo. Los códigos (comuna, propósito) se traducen con las tablas de parámetros, uniéndolas con merge.</a:t>
+            <a:pPr>
+              <a:lnSpc>
+                <a:spcPct val="112000"/>
+              </a:lnSpc>
+              <a:spcAft>
+                <a:spcPts val="900"/>
+              </a:spcAft>
+            </a:pPr>
+            <a:r>
+              <a:rPr sz="1600" b="1">
+                <a:solidFill>
+                  <a:srgbClr val="E0A437"/>
+                </a:solidFill>
+                <a:latin typeface="Fira Sans"/>
+              </a:rPr>
+              <a:t>▸ </a:t>
+            </a:r>
+            <a:r>
+              <a:rPr sz="1600" b="0">
+                <a:solidFill>
+                  <a:srgbClr val="000000"/>
+                </a:solidFill>
+                <a:latin typeface="Fira Sans"/>
+              </a:rPr>
+              <a:t>Todo el código de la clase está en el notebook 02_pandas_eda.ipynb del repositorio.</a:t>
             </a:r>
           </a:p>
         </p:txBody>
@@ -5737,14 +5867,14 @@
                 </a:solidFill>
                 <a:latin typeface="Fira Sans"/>
               </a:rPr>
-              <a:t>Las variantes del merge: qué filas se conservan</a:t>
+              <a:t>El DataFrame: la estructura central de Pandas</a:t>
             </a:r>
           </a:p>
         </p:txBody>
       </p:sp>
       <p:pic>
         <p:nvPicPr>
-          <p:cNvPr id="4" name="Picture 3" descr="07_diagrama_merge.png"/>
+          <p:cNvPr id="4" name="Picture 3" descr="13_dataframe.png"/>
           <p:cNvPicPr>
             <a:picLocks noChangeAspect="1"/>
           </p:cNvPicPr>
@@ -5759,7 +5889,7 @@
         <p:spPr>
           <a:xfrm>
             <a:off x="1417319" y="1143000"/>
-            <a:ext cx="6309360" cy="2397276"/>
+            <a:ext cx="6309360" cy="2553789"/>
           </a:xfrm>
           <a:prstGeom prst="rect">
             <a:avLst/>
@@ -5795,7 +5925,7 @@
                 </a:solidFill>
                 <a:latin typeface="Fira Sans"/>
               </a:rPr>
-              <a:t>El valor por defecto es inner: descarta sin aviso las filas sin pareja.</a:t>
+              <a:t>Una tabla con filas indexadas y columnas con nombre y tipo. Los códigos (comuna, propósito) se traducen con las tablas de parámetros, uniéndolas con merge.</a:t>
             </a:r>
           </a:p>
         </p:txBody>
@@ -5891,21 +6021,45 @@
                 </a:solidFill>
                 <a:latin typeface="Fira Sans"/>
               </a:rPr>
-              <a:t>El efecto del parámetro how sobre la población analizada</a:t>
-            </a:r>
-          </a:p>
-        </p:txBody>
-      </p:sp>
-      <p:sp>
-        <p:nvSpPr>
-          <p:cNvPr id="4" name="TextBox 3"/>
+              <a:t>Las variantes del merge: qué filas se conservan</a:t>
+            </a:r>
+          </a:p>
+        </p:txBody>
+      </p:sp>
+      <p:pic>
+        <p:nvPicPr>
+          <p:cNvPr id="4" name="Picture 3" descr="07_diagrama_merge.png"/>
+          <p:cNvPicPr>
+            <a:picLocks noChangeAspect="1"/>
+          </p:cNvPicPr>
+          <p:nvPr/>
+        </p:nvPicPr>
+        <p:blipFill>
+          <a:blip r:embed="rId2"/>
+          <a:stretch>
+            <a:fillRect/>
+          </a:stretch>
+        </p:blipFill>
+        <p:spPr>
+          <a:xfrm>
+            <a:off x="1417319" y="1143000"/>
+            <a:ext cx="6309360" cy="2397276"/>
+          </a:xfrm>
+          <a:prstGeom prst="rect">
+            <a:avLst/>
+          </a:prstGeom>
+        </p:spPr>
+      </p:pic>
+      <p:sp>
+        <p:nvSpPr>
+          <p:cNvPr id="5" name="TextBox 4"/>
           <p:cNvSpPr txBox="1"/>
           <p:nvPr/>
         </p:nvSpPr>
         <p:spPr>
           <a:xfrm>
-            <a:off x="704088" y="1353312"/>
-            <a:ext cx="7744968" cy="3300984"/>
+            <a:off x="704088" y="4434840"/>
+            <a:ext cx="7744968" cy="457200"/>
           </a:xfrm>
           <a:prstGeom prst="rect">
             <a:avLst/>
@@ -5918,143 +6072,14 @@
           </a:bodyPr>
           <a:lstStyle/>
           <a:p>
-            <a:pPr>
-              <a:lnSpc>
-                <a:spcPct val="112000"/>
-              </a:lnSpc>
-              <a:spcAft>
-                <a:spcPts val="900"/>
-              </a:spcAft>
-            </a:pPr>
-            <a:r>
-              <a:rPr sz="1800" b="1">
-                <a:solidFill>
-                  <a:srgbClr val="E0A437"/>
-                </a:solidFill>
-                <a:latin typeface="Fira Sans"/>
-              </a:rPr>
-              <a:t>▸ </a:t>
-            </a:r>
-            <a:r>
-              <a:rPr sz="1800" b="0">
-                <a:solidFill>
-                  <a:srgbClr val="000000"/>
-                </a:solidFill>
-                <a:latin typeface="Fira Sans"/>
-              </a:rPr>
-              <a:t>Personas con viajes, merge inner: 113.591 filas (una por viaje).</a:t>
-            </a:r>
-          </a:p>
-          <a:p>
-            <a:pPr>
-              <a:lnSpc>
-                <a:spcPct val="112000"/>
-              </a:lnSpc>
-              <a:spcAft>
-                <a:spcPts val="900"/>
-              </a:spcAft>
-            </a:pPr>
-            <a:r>
-              <a:rPr sz="1800" b="1">
-                <a:solidFill>
-                  <a:srgbClr val="E0A437"/>
-                </a:solidFill>
-                <a:latin typeface="Fira Sans"/>
-              </a:rPr>
-              <a:t>▸ </a:t>
-            </a:r>
-            <a:r>
-              <a:rPr sz="1800" b="0">
-                <a:solidFill>
-                  <a:srgbClr val="000000"/>
-                </a:solidFill>
-                <a:latin typeface="Fira Sans"/>
-              </a:rPr>
-              <a:t>El mismo merge en left: 127.379 filas.</a:t>
-            </a:r>
-          </a:p>
-          <a:p>
-            <a:pPr>
-              <a:lnSpc>
-                <a:spcPct val="112000"/>
-              </a:lnSpc>
-              <a:spcAft>
-                <a:spcPts val="500"/>
-              </a:spcAft>
-            </a:pPr>
-            <a:r>
-              <a:rPr sz="1400" b="0">
+            <a:r>
+              <a:rPr sz="1300" b="0">
                 <a:solidFill>
                   <a:srgbClr val="333333"/>
                 </a:solidFill>
                 <a:latin typeface="Fira Sans"/>
               </a:rPr>
-              <a:t>     ◦  </a:t>
-            </a:r>
-            <a:r>
-              <a:rPr sz="1400" b="0">
-                <a:solidFill>
-                  <a:srgbClr val="333333"/>
-                </a:solidFill>
-                <a:latin typeface="Fira Sans"/>
-              </a:rPr>
-              <a:t>La diferencia son 13.788 personas que no viajaron ese día.</a:t>
-            </a:r>
-          </a:p>
-          <a:p>
-            <a:pPr>
-              <a:lnSpc>
-                <a:spcPct val="112000"/>
-              </a:lnSpc>
-              <a:spcAft>
-                <a:spcPts val="500"/>
-              </a:spcAft>
-            </a:pPr>
-            <a:r>
-              <a:rPr sz="1400" b="0">
-                <a:solidFill>
-                  <a:srgbClr val="333333"/>
-                </a:solidFill>
-                <a:latin typeface="Fira Sans"/>
-              </a:rPr>
-              <a:t>     ◦  </a:t>
-            </a:r>
-            <a:r>
-              <a:rPr sz="1400" b="0">
-                <a:solidFill>
-                  <a:srgbClr val="333333"/>
-                </a:solidFill>
-                <a:latin typeface="Fira Sans"/>
-              </a:rPr>
-              <a:t>Con inner desaparecen; con left quedan, con NaN en el viaje.</a:t>
-            </a:r>
-          </a:p>
-          <a:p>
-            <a:pPr>
-              <a:lnSpc>
-                <a:spcPct val="112000"/>
-              </a:lnSpc>
-              <a:spcAft>
-                <a:spcPts val="900"/>
-              </a:spcAft>
-            </a:pPr>
-            <a:r>
-              <a:rPr sz="1800" b="1">
-                <a:solidFill>
-                  <a:srgbClr val="E0A437"/>
-                </a:solidFill>
-                <a:latin typeface="Fira Sans"/>
-              </a:rPr>
-              <a:t>▸ </a:t>
-            </a:r>
-            <a:r>
-              <a:rPr sz="1800" b="1">
-                <a:solidFill>
-                  <a:srgbClr val="1D3557"/>
-                </a:solidFill>
-                <a:latin typeface="Fira Sans"/>
-              </a:rPr>
-              <a:t>Un promedio calculado sobre el resultado del inner excluye a quienes no viajaron.</a:t>
+              <a:t>El valor por defecto es inner: descarta sin aviso las filas sin pareja.</a:t>
             </a:r>
           </a:p>
         </p:txBody>
@@ -6092,7 +6117,7 @@
             <a:avLst/>
           </a:prstGeom>
           <a:solidFill>
-            <a:srgbClr val="1D3557"/>
+            <a:srgbClr val="FAFBFC"/>
           </a:solidFill>
           <a:ln>
             <a:noFill/>
@@ -6129,8 +6154,8 @@
         </p:nvSpPr>
         <p:spPr>
           <a:xfrm>
-            <a:off x="603504" y="1847088"/>
-            <a:ext cx="7946136" cy="1399032"/>
+            <a:off x="402336" y="301752"/>
+            <a:ext cx="8348472" cy="795528"/>
           </a:xfrm>
           <a:prstGeom prst="rect">
             <a:avLst/>
@@ -6144,24 +6169,176 @@
           <a:lstStyle/>
           <a:p>
             <a:r>
-              <a:rPr sz="3400" b="1">
-                <a:solidFill>
-                  <a:srgbClr val="FFFFFF"/>
-                </a:solidFill>
-                <a:latin typeface="Fira Sans"/>
-              </a:rPr>
-              <a:t>Exploración de la EOD</a:t>
-            </a:r>
-          </a:p>
-          <a:p>
+              <a:rPr sz="2800" b="1">
+                <a:solidFill>
+                  <a:srgbClr val="0F0F0F"/>
+                </a:solidFill>
+                <a:latin typeface="Fira Sans"/>
+              </a:rPr>
+              <a:t>El efecto del parámetro how sobre la población analizada</a:t>
+            </a:r>
+          </a:p>
+        </p:txBody>
+      </p:sp>
+      <p:sp>
+        <p:nvSpPr>
+          <p:cNvPr id="4" name="TextBox 3"/>
+          <p:cNvSpPr txBox="1"/>
+          <p:nvPr/>
+        </p:nvSpPr>
+        <p:spPr>
+          <a:xfrm>
+            <a:off x="704088" y="1353312"/>
+            <a:ext cx="7744968" cy="3300984"/>
+          </a:xfrm>
+          <a:prstGeom prst="rect">
+            <a:avLst/>
+          </a:prstGeom>
+          <a:noFill/>
+        </p:spPr>
+        <p:txBody>
+          <a:bodyPr wrap="square">
+            <a:spAutoFit/>
+          </a:bodyPr>
+          <a:lstStyle/>
+          <a:p>
+            <a:pPr>
+              <a:lnSpc>
+                <a:spcPct val="112000"/>
+              </a:lnSpc>
+              <a:spcAft>
+                <a:spcPts val="900"/>
+              </a:spcAft>
+            </a:pPr>
+            <a:r>
+              <a:rPr sz="1800" b="1">
+                <a:solidFill>
+                  <a:srgbClr val="E0A437"/>
+                </a:solidFill>
+                <a:latin typeface="Fira Sans"/>
+              </a:rPr>
+              <a:t>▸ </a:t>
+            </a:r>
             <a:r>
               <a:rPr sz="1800" b="0">
                 <a:solidFill>
+                  <a:srgbClr val="000000"/>
+                </a:solidFill>
+                <a:latin typeface="Fira Sans"/>
+              </a:rPr>
+              <a:t>Personas con viajes, merge inner: 113.591 filas (una por viaje).</a:t>
+            </a:r>
+          </a:p>
+          <a:p>
+            <a:pPr>
+              <a:lnSpc>
+                <a:spcPct val="112000"/>
+              </a:lnSpc>
+              <a:spcAft>
+                <a:spcPts val="900"/>
+              </a:spcAft>
+            </a:pPr>
+            <a:r>
+              <a:rPr sz="1800" b="1">
+                <a:solidFill>
                   <a:srgbClr val="E0A437"/>
                 </a:solidFill>
                 <a:latin typeface="Fira Sans"/>
               </a:rPr>
-              <a:t>Estadística descriptiva sobre datos reales</a:t>
+              <a:t>▸ </a:t>
+            </a:r>
+            <a:r>
+              <a:rPr sz="1800" b="0">
+                <a:solidFill>
+                  <a:srgbClr val="000000"/>
+                </a:solidFill>
+                <a:latin typeface="Fira Sans"/>
+              </a:rPr>
+              <a:t>El mismo merge en left: 127.379 filas.</a:t>
+            </a:r>
+          </a:p>
+          <a:p>
+            <a:pPr>
+              <a:lnSpc>
+                <a:spcPct val="112000"/>
+              </a:lnSpc>
+              <a:spcAft>
+                <a:spcPts val="500"/>
+              </a:spcAft>
+            </a:pPr>
+            <a:r>
+              <a:rPr sz="1400" b="0">
+                <a:solidFill>
+                  <a:srgbClr val="333333"/>
+                </a:solidFill>
+                <a:latin typeface="Fira Sans"/>
+              </a:rPr>
+              <a:t>     ◦  </a:t>
+            </a:r>
+            <a:r>
+              <a:rPr sz="1400" b="0">
+                <a:solidFill>
+                  <a:srgbClr val="333333"/>
+                </a:solidFill>
+                <a:latin typeface="Fira Sans"/>
+              </a:rPr>
+              <a:t>La diferencia son 13.788 personas que no viajaron ese día.</a:t>
+            </a:r>
+          </a:p>
+          <a:p>
+            <a:pPr>
+              <a:lnSpc>
+                <a:spcPct val="112000"/>
+              </a:lnSpc>
+              <a:spcAft>
+                <a:spcPts val="500"/>
+              </a:spcAft>
+            </a:pPr>
+            <a:r>
+              <a:rPr sz="1400" b="0">
+                <a:solidFill>
+                  <a:srgbClr val="333333"/>
+                </a:solidFill>
+                <a:latin typeface="Fira Sans"/>
+              </a:rPr>
+              <a:t>     ◦  </a:t>
+            </a:r>
+            <a:r>
+              <a:rPr sz="1400" b="0">
+                <a:solidFill>
+                  <a:srgbClr val="333333"/>
+                </a:solidFill>
+                <a:latin typeface="Fira Sans"/>
+              </a:rPr>
+              <a:t>Con inner desaparecen; con left quedan, con NaN en el viaje.</a:t>
+            </a:r>
+          </a:p>
+          <a:p>
+            <a:pPr>
+              <a:lnSpc>
+                <a:spcPct val="112000"/>
+              </a:lnSpc>
+              <a:spcAft>
+                <a:spcPts val="900"/>
+              </a:spcAft>
+            </a:pPr>
+            <a:r>
+              <a:rPr sz="1800" b="1">
+                <a:solidFill>
+                  <a:srgbClr val="E0A437"/>
+                </a:solidFill>
+                <a:latin typeface="Fira Sans"/>
+              </a:rPr>
+              <a:t>▸ </a:t>
+            </a:r>
+            <a:r>
+              <a:rPr sz="1800" b="1">
+                <a:solidFill>
+                  <a:srgbClr val="1D3557"/>
+                </a:solidFill>
+                <a:latin typeface="Fira Sans"/>
+              </a:rPr>
+              <a:t>Un promedio calculado sobre el resultado del inner excluye a quienes no viajaron.</a:t>
             </a:r>
           </a:p>
         </p:txBody>
@@ -6199,7 +6376,7 @@
             <a:avLst/>
           </a:prstGeom>
           <a:solidFill>
-            <a:srgbClr val="FAFBFC"/>
+            <a:srgbClr val="1D3557"/>
           </a:solidFill>
           <a:ln>
             <a:noFill/>
@@ -6236,8 +6413,8 @@
         </p:nvSpPr>
         <p:spPr>
           <a:xfrm>
-            <a:off x="402336" y="301752"/>
-            <a:ext cx="8348472" cy="795528"/>
+            <a:off x="603504" y="1847088"/>
+            <a:ext cx="7946136" cy="1399032"/>
           </a:xfrm>
           <a:prstGeom prst="rect">
             <a:avLst/>
@@ -6251,176 +6428,28 @@
           <a:lstStyle/>
           <a:p>
             <a:r>
-              <a:rPr sz="2800" b="1">
-                <a:solidFill>
-                  <a:srgbClr val="0F0F0F"/>
-                </a:solidFill>
-                <a:latin typeface="Fira Sans"/>
-              </a:rPr>
-              <a:t>Viajes por persona: los ausentes también cuentan</a:t>
-            </a:r>
-          </a:p>
-        </p:txBody>
-      </p:sp>
-      <p:sp>
-        <p:nvSpPr>
-          <p:cNvPr id="4" name="TextBox 3"/>
-          <p:cNvSpPr txBox="1"/>
-          <p:nvPr/>
-        </p:nvSpPr>
-        <p:spPr>
-          <a:xfrm>
-            <a:off x="502920" y="1252728"/>
-            <a:ext cx="4023360" cy="3200400"/>
-          </a:xfrm>
-          <a:prstGeom prst="rect">
-            <a:avLst/>
-          </a:prstGeom>
-          <a:noFill/>
-        </p:spPr>
-        <p:txBody>
-          <a:bodyPr wrap="square">
-            <a:spAutoFit/>
-          </a:bodyPr>
-          <a:lstStyle/>
-          <a:p>
-            <a:pPr>
-              <a:lnSpc>
-                <a:spcPct val="112000"/>
-              </a:lnSpc>
-              <a:spcAft>
-                <a:spcPts val="900"/>
-              </a:spcAft>
-            </a:pPr>
-            <a:r>
-              <a:rPr sz="1500" b="1">
+              <a:rPr sz="3400" b="1">
+                <a:solidFill>
+                  <a:srgbClr val="FFFFFF"/>
+                </a:solidFill>
+                <a:latin typeface="Fira Sans"/>
+              </a:rPr>
+              <a:t>Exploración de la EOD</a:t>
+            </a:r>
+          </a:p>
+          <a:p>
+            <a:r>
+              <a:rPr sz="1800" b="0">
                 <a:solidFill>
                   <a:srgbClr val="E0A437"/>
                 </a:solidFill>
                 <a:latin typeface="Fira Sans"/>
               </a:rPr>
-              <a:t>▸ </a:t>
-            </a:r>
-            <a:r>
-              <a:rPr sz="1500" b="0">
-                <a:solidFill>
-                  <a:srgbClr val="000000"/>
-                </a:solidFill>
-                <a:latin typeface="Fira Sans"/>
-              </a:rPr>
-              <a:t>El 23% de las personas no viajó ese día.</a:t>
-            </a:r>
-          </a:p>
-          <a:p>
-            <a:pPr>
-              <a:lnSpc>
-                <a:spcPct val="112000"/>
-              </a:lnSpc>
-              <a:spcAft>
-                <a:spcPts val="900"/>
-              </a:spcAft>
-            </a:pPr>
-            <a:r>
-              <a:rPr sz="1500" b="1">
-                <a:solidFill>
-                  <a:srgbClr val="E0A437"/>
-                </a:solidFill>
-                <a:latin typeface="Fira Sans"/>
-              </a:rPr>
-              <a:t>▸ </a:t>
-            </a:r>
-            <a:r>
-              <a:rPr sz="1500" b="0">
-                <a:solidFill>
-                  <a:srgbClr val="000000"/>
-                </a:solidFill>
-                <a:latin typeface="Fira Sans"/>
-              </a:rPr>
-              <a:t>Media: 1,9 viajes. Mediana: 2 viajes.</a:t>
-            </a:r>
-          </a:p>
-          <a:p>
-            <a:pPr>
-              <a:lnSpc>
-                <a:spcPct val="112000"/>
-              </a:lnSpc>
-              <a:spcAft>
-                <a:spcPts val="900"/>
-              </a:spcAft>
-            </a:pPr>
-            <a:r>
-              <a:rPr sz="1500" b="1">
-                <a:solidFill>
-                  <a:srgbClr val="E0A437"/>
-                </a:solidFill>
-                <a:latin typeface="Fira Sans"/>
-              </a:rPr>
-              <a:t>▸ </a:t>
-            </a:r>
-            <a:r>
-              <a:rPr sz="1500" b="0">
-                <a:solidFill>
-                  <a:srgbClr val="000000"/>
-                </a:solidFill>
-                <a:latin typeface="Fira Sans"/>
-              </a:rPr>
-              <a:t>La media quedó bajo la mediana: la masa de ceros la desplaza.</a:t>
-            </a:r>
-          </a:p>
-          <a:p>
-            <a:pPr>
-              <a:lnSpc>
-                <a:spcPct val="112000"/>
-              </a:lnSpc>
-              <a:spcAft>
-                <a:spcPts val="900"/>
-              </a:spcAft>
-            </a:pPr>
-            <a:r>
-              <a:rPr sz="1500" b="1">
-                <a:solidFill>
-                  <a:srgbClr val="E0A437"/>
-                </a:solidFill>
-                <a:latin typeface="Fira Sans"/>
-              </a:rPr>
-              <a:t>▸ </a:t>
-            </a:r>
-            <a:r>
-              <a:rPr sz="1500" b="1">
-                <a:solidFill>
-                  <a:srgbClr val="1D3557"/>
-                </a:solidFill>
-                <a:latin typeface="Fira Sans"/>
-              </a:rPr>
-              <a:t>La dirección del sesgo depende de la forma de la distribución.</a:t>
-            </a:r>
-          </a:p>
-        </p:txBody>
-      </p:sp>
-      <p:pic>
-        <p:nvPicPr>
-          <p:cNvPr id="5" name="Picture 4" descr="02_viajes_por_persona.png"/>
-          <p:cNvPicPr>
-            <a:picLocks noChangeAspect="1"/>
-          </p:cNvPicPr>
-          <p:nvPr/>
-        </p:nvPicPr>
-        <p:blipFill>
-          <a:blip r:embed="rId2"/>
-          <a:stretch>
-            <a:fillRect/>
-          </a:stretch>
-        </p:blipFill>
-        <p:spPr>
-          <a:xfrm>
-            <a:off x="4892040" y="1371600"/>
-            <a:ext cx="3840480" cy="2191739"/>
-          </a:xfrm>
-          <a:prstGeom prst="rect">
-            <a:avLst/>
-          </a:prstGeom>
-        </p:spPr>
-      </p:pic>
+              <a:t>Estadística descriptiva sobre datos reales</a:t>
+            </a:r>
+          </a:p>
+        </p:txBody>
+      </p:sp>
     </p:spTree>
   </p:cSld>
   <p:clrMapOvr>
@@ -6512,14 +6541,149 @@
                 </a:solidFill>
                 <a:latin typeface="Fira Sans"/>
               </a:rPr>
-              <a:t>Los factores de expansión: de la muestra a la ciudad</a:t>
+              <a:t>Viajes por persona: los ausentes también cuentan</a:t>
+            </a:r>
+          </a:p>
+        </p:txBody>
+      </p:sp>
+      <p:sp>
+        <p:nvSpPr>
+          <p:cNvPr id="4" name="TextBox 3"/>
+          <p:cNvSpPr txBox="1"/>
+          <p:nvPr/>
+        </p:nvSpPr>
+        <p:spPr>
+          <a:xfrm>
+            <a:off x="502920" y="1252728"/>
+            <a:ext cx="4023360" cy="3200400"/>
+          </a:xfrm>
+          <a:prstGeom prst="rect">
+            <a:avLst/>
+          </a:prstGeom>
+          <a:noFill/>
+        </p:spPr>
+        <p:txBody>
+          <a:bodyPr wrap="square">
+            <a:spAutoFit/>
+          </a:bodyPr>
+          <a:lstStyle/>
+          <a:p>
+            <a:pPr>
+              <a:lnSpc>
+                <a:spcPct val="112000"/>
+              </a:lnSpc>
+              <a:spcAft>
+                <a:spcPts val="900"/>
+              </a:spcAft>
+            </a:pPr>
+            <a:r>
+              <a:rPr sz="1500" b="1">
+                <a:solidFill>
+                  <a:srgbClr val="E0A437"/>
+                </a:solidFill>
+                <a:latin typeface="Fira Sans"/>
+              </a:rPr>
+              <a:t>▸ </a:t>
+            </a:r>
+            <a:r>
+              <a:rPr sz="1500" b="0">
+                <a:solidFill>
+                  <a:srgbClr val="000000"/>
+                </a:solidFill>
+                <a:latin typeface="Fira Sans"/>
+              </a:rPr>
+              <a:t>El 23% de las personas no viajó ese día.</a:t>
+            </a:r>
+          </a:p>
+          <a:p>
+            <a:pPr>
+              <a:lnSpc>
+                <a:spcPct val="112000"/>
+              </a:lnSpc>
+              <a:spcAft>
+                <a:spcPts val="900"/>
+              </a:spcAft>
+            </a:pPr>
+            <a:r>
+              <a:rPr sz="1500" b="1">
+                <a:solidFill>
+                  <a:srgbClr val="E0A437"/>
+                </a:solidFill>
+                <a:latin typeface="Fira Sans"/>
+              </a:rPr>
+              <a:t>▸ </a:t>
+            </a:r>
+            <a:r>
+              <a:rPr sz="1500" b="0">
+                <a:solidFill>
+                  <a:srgbClr val="000000"/>
+                </a:solidFill>
+                <a:latin typeface="Fira Sans"/>
+              </a:rPr>
+              <a:t>Media: 1,9 viajes. Mediana: 2 viajes.</a:t>
+            </a:r>
+          </a:p>
+          <a:p>
+            <a:pPr>
+              <a:lnSpc>
+                <a:spcPct val="112000"/>
+              </a:lnSpc>
+              <a:spcAft>
+                <a:spcPts val="900"/>
+              </a:spcAft>
+            </a:pPr>
+            <a:r>
+              <a:rPr sz="1500" b="1">
+                <a:solidFill>
+                  <a:srgbClr val="E0A437"/>
+                </a:solidFill>
+                <a:latin typeface="Fira Sans"/>
+              </a:rPr>
+              <a:t>▸ </a:t>
+            </a:r>
+            <a:r>
+              <a:rPr sz="1500" b="0">
+                <a:solidFill>
+                  <a:srgbClr val="000000"/>
+                </a:solidFill>
+                <a:latin typeface="Fira Sans"/>
+              </a:rPr>
+              <a:t>La media quedó bajo la mediana: la masa de ceros la desplaza.</a:t>
+            </a:r>
+          </a:p>
+          <a:p>
+            <a:pPr>
+              <a:lnSpc>
+                <a:spcPct val="112000"/>
+              </a:lnSpc>
+              <a:spcAft>
+                <a:spcPts val="900"/>
+              </a:spcAft>
+            </a:pPr>
+            <a:r>
+              <a:rPr sz="1500" b="1">
+                <a:solidFill>
+                  <a:srgbClr val="E0A437"/>
+                </a:solidFill>
+                <a:latin typeface="Fira Sans"/>
+              </a:rPr>
+              <a:t>▸ </a:t>
+            </a:r>
+            <a:r>
+              <a:rPr sz="1500" b="1">
+                <a:solidFill>
+                  <a:srgbClr val="1D3557"/>
+                </a:solidFill>
+                <a:latin typeface="Fira Sans"/>
+              </a:rPr>
+              <a:t>La dirección del sesgo depende de la forma de la distribución.</a:t>
             </a:r>
           </a:p>
         </p:txBody>
       </p:sp>
       <p:pic>
         <p:nvPicPr>
-          <p:cNvPr id="4" name="Picture 3" descr="06_diagrama_factores.png"/>
+          <p:cNvPr id="5" name="Picture 4" descr="02_viajes_por_persona.png"/>
           <p:cNvPicPr>
             <a:picLocks noChangeAspect="1"/>
           </p:cNvPicPr>
@@ -6533,48 +6697,14 @@
         </p:blipFill>
         <p:spPr>
           <a:xfrm>
-            <a:off x="1417319" y="1143000"/>
-            <a:ext cx="6309360" cy="2871234"/>
+            <a:off x="4892040" y="1371600"/>
+            <a:ext cx="3840480" cy="2191739"/>
           </a:xfrm>
           <a:prstGeom prst="rect">
             <a:avLst/>
           </a:prstGeom>
         </p:spPr>
       </p:pic>
-      <p:sp>
-        <p:nvSpPr>
-          <p:cNvPr id="5" name="TextBox 4"/>
-          <p:cNvSpPr txBox="1"/>
-          <p:nvPr/>
-        </p:nvSpPr>
-        <p:spPr>
-          <a:xfrm>
-            <a:off x="704088" y="4434840"/>
-            <a:ext cx="7744968" cy="457200"/>
-          </a:xfrm>
-          <a:prstGeom prst="rect">
-            <a:avLst/>
-          </a:prstGeom>
-          <a:noFill/>
-        </p:spPr>
-        <p:txBody>
-          <a:bodyPr wrap="square">
-            <a:spAutoFit/>
-          </a:bodyPr>
-          <a:lstStyle/>
-          <a:p>
-            <a:r>
-              <a:rPr sz="1300" b="0">
-                <a:solidFill>
-                  <a:srgbClr val="333333"/>
-                </a:solidFill>
-                <a:latin typeface="Fira Sans"/>
-              </a:rPr>
-              <a:t>Contar filas responde por la muestra; sumar factores responde por la ciudad.</a:t>
-            </a:r>
-          </a:p>
-        </p:txBody>
-      </p:sp>
     </p:spTree>
   </p:cSld>
   <p:clrMapOvr>
@@ -6666,149 +6796,14 @@
                 </a:solidFill>
                 <a:latin typeface="Fira Sans"/>
               </a:rPr>
-              <a:t>El ingreso de los hogares: media y mediana</a:t>
-            </a:r>
-          </a:p>
-        </p:txBody>
-      </p:sp>
-      <p:sp>
-        <p:nvSpPr>
-          <p:cNvPr id="4" name="TextBox 3"/>
-          <p:cNvSpPr txBox="1"/>
-          <p:nvPr/>
-        </p:nvSpPr>
-        <p:spPr>
-          <a:xfrm>
-            <a:off x="502920" y="1252728"/>
-            <a:ext cx="4023360" cy="3200400"/>
-          </a:xfrm>
-          <a:prstGeom prst="rect">
-            <a:avLst/>
-          </a:prstGeom>
-          <a:noFill/>
-        </p:spPr>
-        <p:txBody>
-          <a:bodyPr wrap="square">
-            <a:spAutoFit/>
-          </a:bodyPr>
-          <a:lstStyle/>
-          <a:p>
-            <a:pPr>
-              <a:lnSpc>
-                <a:spcPct val="112000"/>
-              </a:lnSpc>
-              <a:spcAft>
-                <a:spcPts val="900"/>
-              </a:spcAft>
-            </a:pPr>
-            <a:r>
-              <a:rPr sz="1500" b="1">
-                <a:solidFill>
-                  <a:srgbClr val="E0A437"/>
-                </a:solidFill>
-                <a:latin typeface="Fira Sans"/>
-              </a:rPr>
-              <a:t>▸ </a:t>
-            </a:r>
-            <a:r>
-              <a:rPr sz="1500" b="0">
-                <a:solidFill>
-                  <a:srgbClr val="000000"/>
-                </a:solidFill>
-                <a:latin typeface="Fira Sans"/>
-              </a:rPr>
-              <a:t>Media: $688.274. Mediana: $507.826.</a:t>
-            </a:r>
-          </a:p>
-          <a:p>
-            <a:pPr>
-              <a:lnSpc>
-                <a:spcPct val="112000"/>
-              </a:lnSpc>
-              <a:spcAft>
-                <a:spcPts val="900"/>
-              </a:spcAft>
-            </a:pPr>
-            <a:r>
-              <a:rPr sz="1500" b="1">
-                <a:solidFill>
-                  <a:srgbClr val="E0A437"/>
-                </a:solidFill>
-                <a:latin typeface="Fira Sans"/>
-              </a:rPr>
-              <a:t>▸ </a:t>
-            </a:r>
-            <a:r>
-              <a:rPr sz="1500" b="0">
-                <a:solidFill>
-                  <a:srgbClr val="000000"/>
-                </a:solidFill>
-                <a:latin typeface="Fira Sans"/>
-              </a:rPr>
-              <a:t>La media es un 36% más alta que la mediana.</a:t>
-            </a:r>
-          </a:p>
-          <a:p>
-            <a:pPr>
-              <a:lnSpc>
-                <a:spcPct val="112000"/>
-              </a:lnSpc>
-              <a:spcAft>
-                <a:spcPts val="900"/>
-              </a:spcAft>
-            </a:pPr>
-            <a:r>
-              <a:rPr sz="1500" b="1">
-                <a:solidFill>
-                  <a:srgbClr val="E0A437"/>
-                </a:solidFill>
-                <a:latin typeface="Fira Sans"/>
-              </a:rPr>
-              <a:t>▸ </a:t>
-            </a:r>
-            <a:r>
-              <a:rPr sz="1500" b="0">
-                <a:solidFill>
-                  <a:srgbClr val="000000"/>
-                </a:solidFill>
-                <a:latin typeface="Fira Sans"/>
-              </a:rPr>
-              <a:t>Los ingresos altos desplazan el promedio; la mayoría gana menos.</a:t>
-            </a:r>
-          </a:p>
-          <a:p>
-            <a:pPr>
-              <a:lnSpc>
-                <a:spcPct val="112000"/>
-              </a:lnSpc>
-              <a:spcAft>
-                <a:spcPts val="900"/>
-              </a:spcAft>
-            </a:pPr>
-            <a:r>
-              <a:rPr sz="1500" b="1">
-                <a:solidFill>
-                  <a:srgbClr val="E0A437"/>
-                </a:solidFill>
-                <a:latin typeface="Fira Sans"/>
-              </a:rPr>
-              <a:t>▸ </a:t>
-            </a:r>
-            <a:r>
-              <a:rPr sz="1500" b="1">
-                <a:solidFill>
-                  <a:srgbClr val="1D3557"/>
-                </a:solidFill>
-                <a:latin typeface="Fira Sans"/>
-              </a:rPr>
-              <a:t>El promedio describe una situación en la que la mayoría no está.</a:t>
+              <a:t>Los factores de expansión: de la muestra a la ciudad</a:t>
             </a:r>
           </a:p>
         </p:txBody>
       </p:sp>
       <p:pic>
         <p:nvPicPr>
-          <p:cNvPr id="5" name="Picture 4" descr="01_ingreso_media_mediana.png"/>
+          <p:cNvPr id="4" name="Picture 3" descr="06_diagrama_factores.png"/>
           <p:cNvPicPr>
             <a:picLocks noChangeAspect="1"/>
           </p:cNvPicPr>
@@ -6822,14 +6817,48 @@
         </p:blipFill>
         <p:spPr>
           <a:xfrm>
-            <a:off x="4892040" y="1371600"/>
-            <a:ext cx="3840480" cy="2182719"/>
+            <a:off x="1417319" y="1143000"/>
+            <a:ext cx="6309360" cy="2871234"/>
           </a:xfrm>
           <a:prstGeom prst="rect">
             <a:avLst/>
           </a:prstGeom>
         </p:spPr>
       </p:pic>
+      <p:sp>
+        <p:nvSpPr>
+          <p:cNvPr id="5" name="TextBox 4"/>
+          <p:cNvSpPr txBox="1"/>
+          <p:nvPr/>
+        </p:nvSpPr>
+        <p:spPr>
+          <a:xfrm>
+            <a:off x="704088" y="4434840"/>
+            <a:ext cx="7744968" cy="457200"/>
+          </a:xfrm>
+          <a:prstGeom prst="rect">
+            <a:avLst/>
+          </a:prstGeom>
+          <a:noFill/>
+        </p:spPr>
+        <p:txBody>
+          <a:bodyPr wrap="square">
+            <a:spAutoFit/>
+          </a:bodyPr>
+          <a:lstStyle/>
+          <a:p>
+            <a:r>
+              <a:rPr sz="1300" b="0">
+                <a:solidFill>
+                  <a:srgbClr val="333333"/>
+                </a:solidFill>
+                <a:latin typeface="Fira Sans"/>
+              </a:rPr>
+              <a:t>Contar filas responde por la muestra; sumar factores responde por la ciudad.</a:t>
+            </a:r>
+          </a:p>
+        </p:txBody>
+      </p:sp>
     </p:spTree>
   </p:cSld>
   <p:clrMapOvr>
@@ -6921,7 +6950,7 @@
                 </a:solidFill>
                 <a:latin typeface="Fira Sans"/>
               </a:rPr>
-              <a:t>La duración de los viajes: valores extremos</a:t>
+              <a:t>El ingreso de los hogares: media y mediana</a:t>
             </a:r>
           </a:p>
         </p:txBody>
@@ -6972,7 +7001,7 @@
                 </a:solidFill>
                 <a:latin typeface="Fira Sans"/>
               </a:rPr>
-              <a:t>Mediana: 30 minutos. Percentil 95: 98 minutos.</a:t>
+              <a:t>Media: $688.274. Mediana: $507.826.</a:t>
             </a:r>
           </a:p>
           <a:p>
@@ -7000,7 +7029,7 @@
                 </a:solidFill>
                 <a:latin typeface="Fira Sans"/>
               </a:rPr>
-              <a:t>Máximo registrado: 1.335 minutos, un viaje de 22 horas.</a:t>
+              <a:t>La media es un 36% más alta que la mediana.</a:t>
             </a:r>
           </a:p>
           <a:p>
@@ -7028,7 +7057,7 @@
                 </a:solidFill>
                 <a:latin typeface="Fira Sans"/>
               </a:rPr>
-              <a:t>¿Error de digitación? ¿Turno nocturno mal anotado?</a:t>
+              <a:t>Los ingresos altos desplazan el promedio; la mayoría gana menos.</a:t>
             </a:r>
           </a:p>
           <a:p>
@@ -7056,14 +7085,14 @@
                 </a:solidFill>
                 <a:latin typeface="Fira Sans"/>
               </a:rPr>
-              <a:t>Los valores extremos se investigan y la decisión se declara.</a:t>
+              <a:t>El promedio describe una situación en la que la mayoría no está.</a:t>
             </a:r>
           </a:p>
         </p:txBody>
       </p:sp>
       <p:pic>
         <p:nvPicPr>
-          <p:cNvPr id="5" name="Picture 4" descr="04_duracion_viajes.png"/>
+          <p:cNvPr id="5" name="Picture 4" descr="01_ingreso_media_mediana.png"/>
           <p:cNvPicPr>
             <a:picLocks noChangeAspect="1"/>
           </p:cNvPicPr>
@@ -7078,7 +7107,7 @@
         <p:spPr>
           <a:xfrm>
             <a:off x="4892040" y="1371600"/>
-            <a:ext cx="3840480" cy="2146492"/>
+            <a:ext cx="3840480" cy="2182719"/>
           </a:xfrm>
           <a:prstGeom prst="rect">
             <a:avLst/>
@@ -7176,7 +7205,7 @@
                 </a:solidFill>
                 <a:latin typeface="Fira Sans"/>
               </a:rPr>
-              <a:t>La partición modal del Gran Santiago</a:t>
+              <a:t>La duración de los viajes: valores extremos</a:t>
             </a:r>
           </a:p>
         </p:txBody>
@@ -7227,91 +7256,7 @@
                 </a:solidFill>
                 <a:latin typeface="Fira Sans"/>
               </a:rPr>
-              <a:t>Dos merges y un groupby ponderado por factor.</a:t>
-            </a:r>
-          </a:p>
-          <a:p>
-            <a:pPr>
-              <a:lnSpc>
-                <a:spcPct val="112000"/>
-              </a:lnSpc>
-              <a:spcAft>
-                <a:spcPts val="500"/>
-              </a:spcAft>
-            </a:pPr>
-            <a:r>
-              <a:rPr sz="1300" b="0">
-                <a:solidFill>
-                  <a:srgbClr val="333333"/>
-                </a:solidFill>
-                <a:latin typeface="Fira Sans"/>
-              </a:rPr>
-              <a:t>     ◦  </a:t>
-            </a:r>
-            <a:r>
-              <a:rPr sz="1300" b="0">
-                <a:solidFill>
-                  <a:srgbClr val="333333"/>
-                </a:solidFill>
-                <a:latin typeface="Fira Sans"/>
-              </a:rPr>
-              <a:t>Caminata: 34% de los viajes.</a:t>
-            </a:r>
-          </a:p>
-          <a:p>
-            <a:pPr>
-              <a:lnSpc>
-                <a:spcPct val="112000"/>
-              </a:lnSpc>
-              <a:spcAft>
-                <a:spcPts val="500"/>
-              </a:spcAft>
-            </a:pPr>
-            <a:r>
-              <a:rPr sz="1300" b="0">
-                <a:solidFill>
-                  <a:srgbClr val="333333"/>
-                </a:solidFill>
-                <a:latin typeface="Fira Sans"/>
-              </a:rPr>
-              <a:t>     ◦  </a:t>
-            </a:r>
-            <a:r>
-              <a:rPr sz="1300" b="0">
-                <a:solidFill>
-                  <a:srgbClr val="333333"/>
-                </a:solidFill>
-                <a:latin typeface="Fira Sans"/>
-              </a:rPr>
-              <a:t>Transporte público (Bip!): 24%.</a:t>
-            </a:r>
-          </a:p>
-          <a:p>
-            <a:pPr>
-              <a:lnSpc>
-                <a:spcPct val="112000"/>
-              </a:lnSpc>
-              <a:spcAft>
-                <a:spcPts val="500"/>
-              </a:spcAft>
-            </a:pPr>
-            <a:r>
-              <a:rPr sz="1300" b="0">
-                <a:solidFill>
-                  <a:srgbClr val="333333"/>
-                </a:solidFill>
-                <a:latin typeface="Fira Sans"/>
-              </a:rPr>
-              <a:t>     ◦  </a:t>
-            </a:r>
-            <a:r>
-              <a:rPr sz="1300" b="0">
-                <a:solidFill>
-                  <a:srgbClr val="333333"/>
-                </a:solidFill>
-                <a:latin typeface="Fira Sans"/>
-              </a:rPr>
-              <a:t>Auto: 23%.</a:t>
+              <a:t>Mediana: 30 minutos. Percentil 95: 98 minutos.</a:t>
             </a:r>
           </a:p>
           <a:p>
@@ -7333,20 +7278,76 @@
               <a:t>▸ </a:t>
             </a:r>
             <a:r>
+              <a:rPr sz="1500" b="0">
+                <a:solidFill>
+                  <a:srgbClr val="000000"/>
+                </a:solidFill>
+                <a:latin typeface="Fira Sans"/>
+              </a:rPr>
+              <a:t>Máximo registrado: 1.335 minutos, un viaje de 22 horas.</a:t>
+            </a:r>
+          </a:p>
+          <a:p>
+            <a:pPr>
+              <a:lnSpc>
+                <a:spcPct val="112000"/>
+              </a:lnSpc>
+              <a:spcAft>
+                <a:spcPts val="900"/>
+              </a:spcAft>
+            </a:pPr>
+            <a:r>
               <a:rPr sz="1500" b="1">
                 <a:solidFill>
+                  <a:srgbClr val="E0A437"/>
+                </a:solidFill>
+                <a:latin typeface="Fira Sans"/>
+              </a:rPr>
+              <a:t>▸ </a:t>
+            </a:r>
+            <a:r>
+              <a:rPr sz="1500" b="0">
+                <a:solidFill>
+                  <a:srgbClr val="000000"/>
+                </a:solidFill>
+                <a:latin typeface="Fira Sans"/>
+              </a:rPr>
+              <a:t>¿Error de digitación? ¿Turno nocturno mal anotado?</a:t>
+            </a:r>
+          </a:p>
+          <a:p>
+            <a:pPr>
+              <a:lnSpc>
+                <a:spcPct val="112000"/>
+              </a:lnSpc>
+              <a:spcAft>
+                <a:spcPts val="900"/>
+              </a:spcAft>
+            </a:pPr>
+            <a:r>
+              <a:rPr sz="1500" b="1">
+                <a:solidFill>
+                  <a:srgbClr val="E0A437"/>
+                </a:solidFill>
+                <a:latin typeface="Fira Sans"/>
+              </a:rPr>
+              <a:t>▸ </a:t>
+            </a:r>
+            <a:r>
+              <a:rPr sz="1500" b="1">
+                <a:solidFill>
                   <a:srgbClr val="1D3557"/>
                 </a:solidFill>
                 <a:latin typeface="Fira Sans"/>
               </a:rPr>
-              <a:t>Calculada desde los microdatos, con los factores de un día laboral.</a:t>
+              <a:t>Los valores extremos se investigan y la decisión se declara.</a:t>
             </a:r>
           </a:p>
         </p:txBody>
       </p:sp>
       <p:pic>
         <p:nvPicPr>
-          <p:cNvPr id="5" name="Picture 4" descr="03_reparto_modal.png"/>
+          <p:cNvPr id="5" name="Picture 4" descr="04_duracion_viajes.png"/>
           <p:cNvPicPr>
             <a:picLocks noChangeAspect="1"/>
           </p:cNvPicPr>
@@ -7361,7 +7362,7 @@
         <p:spPr>
           <a:xfrm>
             <a:off x="4892040" y="1371600"/>
-            <a:ext cx="3840480" cy="1938578"/>
+            <a:ext cx="3840480" cy="2146492"/>
           </a:xfrm>
           <a:prstGeom prst="rect">
             <a:avLst/>
@@ -7459,14 +7460,177 @@
                 </a:solidFill>
                 <a:latin typeface="Fira Sans"/>
               </a:rPr>
-              <a:t>El reparto modal difiere entre comunas</a:t>
+              <a:t>La partición modal del Gran Santiago</a:t>
+            </a:r>
+          </a:p>
+        </p:txBody>
+      </p:sp>
+      <p:sp>
+        <p:nvSpPr>
+          <p:cNvPr id="4" name="TextBox 3"/>
+          <p:cNvSpPr txBox="1"/>
+          <p:nvPr/>
+        </p:nvSpPr>
+        <p:spPr>
+          <a:xfrm>
+            <a:off x="502920" y="1252728"/>
+            <a:ext cx="4023360" cy="3200400"/>
+          </a:xfrm>
+          <a:prstGeom prst="rect">
+            <a:avLst/>
+          </a:prstGeom>
+          <a:noFill/>
+        </p:spPr>
+        <p:txBody>
+          <a:bodyPr wrap="square">
+            <a:spAutoFit/>
+          </a:bodyPr>
+          <a:lstStyle/>
+          <a:p>
+            <a:pPr>
+              <a:lnSpc>
+                <a:spcPct val="112000"/>
+              </a:lnSpc>
+              <a:spcAft>
+                <a:spcPts val="900"/>
+              </a:spcAft>
+            </a:pPr>
+            <a:r>
+              <a:rPr sz="1500" b="1">
+                <a:solidFill>
+                  <a:srgbClr val="E0A437"/>
+                </a:solidFill>
+                <a:latin typeface="Fira Sans"/>
+              </a:rPr>
+              <a:t>▸ </a:t>
+            </a:r>
+            <a:r>
+              <a:rPr sz="1500" b="0">
+                <a:solidFill>
+                  <a:srgbClr val="000000"/>
+                </a:solidFill>
+                <a:latin typeface="Fira Sans"/>
+              </a:rPr>
+              <a:t>Dos merges y un groupby ponderado por factor.</a:t>
+            </a:r>
+          </a:p>
+          <a:p>
+            <a:pPr>
+              <a:lnSpc>
+                <a:spcPct val="112000"/>
+              </a:lnSpc>
+              <a:spcAft>
+                <a:spcPts val="500"/>
+              </a:spcAft>
+            </a:pPr>
+            <a:r>
+              <a:rPr sz="1300" b="0">
+                <a:solidFill>
+                  <a:srgbClr val="333333"/>
+                </a:solidFill>
+                <a:latin typeface="Fira Sans"/>
+              </a:rPr>
+              <a:t>     ◦  </a:t>
+            </a:r>
+            <a:r>
+              <a:rPr sz="1300" b="0">
+                <a:solidFill>
+                  <a:srgbClr val="333333"/>
+                </a:solidFill>
+                <a:latin typeface="Fira Sans"/>
+              </a:rPr>
+              <a:t>Caminata: 34% de los viajes.</a:t>
+            </a:r>
+          </a:p>
+          <a:p>
+            <a:pPr>
+              <a:lnSpc>
+                <a:spcPct val="112000"/>
+              </a:lnSpc>
+              <a:spcAft>
+                <a:spcPts val="500"/>
+              </a:spcAft>
+            </a:pPr>
+            <a:r>
+              <a:rPr sz="1300" b="0">
+                <a:solidFill>
+                  <a:srgbClr val="333333"/>
+                </a:solidFill>
+                <a:latin typeface="Fira Sans"/>
+              </a:rPr>
+              <a:t>     ◦  </a:t>
+            </a:r>
+            <a:r>
+              <a:rPr sz="1300" b="0">
+                <a:solidFill>
+                  <a:srgbClr val="333333"/>
+                </a:solidFill>
+                <a:latin typeface="Fira Sans"/>
+              </a:rPr>
+              <a:t>Transporte público (Bip!): 24%.</a:t>
+            </a:r>
+          </a:p>
+          <a:p>
+            <a:pPr>
+              <a:lnSpc>
+                <a:spcPct val="112000"/>
+              </a:lnSpc>
+              <a:spcAft>
+                <a:spcPts val="500"/>
+              </a:spcAft>
+            </a:pPr>
+            <a:r>
+              <a:rPr sz="1300" b="0">
+                <a:solidFill>
+                  <a:srgbClr val="333333"/>
+                </a:solidFill>
+                <a:latin typeface="Fira Sans"/>
+              </a:rPr>
+              <a:t>     ◦  </a:t>
+            </a:r>
+            <a:r>
+              <a:rPr sz="1300" b="0">
+                <a:solidFill>
+                  <a:srgbClr val="333333"/>
+                </a:solidFill>
+                <a:latin typeface="Fira Sans"/>
+              </a:rPr>
+              <a:t>Auto: 23%.</a:t>
+            </a:r>
+          </a:p>
+          <a:p>
+            <a:pPr>
+              <a:lnSpc>
+                <a:spcPct val="112000"/>
+              </a:lnSpc>
+              <a:spcAft>
+                <a:spcPts val="900"/>
+              </a:spcAft>
+            </a:pPr>
+            <a:r>
+              <a:rPr sz="1500" b="1">
+                <a:solidFill>
+                  <a:srgbClr val="E0A437"/>
+                </a:solidFill>
+                <a:latin typeface="Fira Sans"/>
+              </a:rPr>
+              <a:t>▸ </a:t>
+            </a:r>
+            <a:r>
+              <a:rPr sz="1500" b="1">
+                <a:solidFill>
+                  <a:srgbClr val="1D3557"/>
+                </a:solidFill>
+                <a:latin typeface="Fira Sans"/>
+              </a:rPr>
+              <a:t>Calculada desde los microdatos, con los factores de un día laboral.</a:t>
             </a:r>
           </a:p>
         </p:txBody>
       </p:sp>
       <p:pic>
         <p:nvPicPr>
-          <p:cNvPr id="4" name="Picture 3" descr="08_modo_por_comuna.png"/>
+          <p:cNvPr id="5" name="Picture 4" descr="03_reparto_modal.png"/>
           <p:cNvPicPr>
             <a:picLocks noChangeAspect="1"/>
           </p:cNvPicPr>
@@ -7480,48 +7644,14 @@
         </p:blipFill>
         <p:spPr>
           <a:xfrm>
-            <a:off x="1994250" y="1143000"/>
-            <a:ext cx="5155498" cy="3154679"/>
+            <a:off x="4892040" y="1371600"/>
+            <a:ext cx="3840480" cy="1938578"/>
           </a:xfrm>
           <a:prstGeom prst="rect">
             <a:avLst/>
           </a:prstGeom>
         </p:spPr>
       </p:pic>
-      <p:sp>
-        <p:nvSpPr>
-          <p:cNvPr id="5" name="TextBox 4"/>
-          <p:cNvSpPr txBox="1"/>
-          <p:nvPr/>
-        </p:nvSpPr>
-        <p:spPr>
-          <a:xfrm>
-            <a:off x="704088" y="4434840"/>
-            <a:ext cx="7744968" cy="457200"/>
-          </a:xfrm>
-          <a:prstGeom prst="rect">
-            <a:avLst/>
-          </a:prstGeom>
-          <a:noFill/>
-        </p:spPr>
-        <p:txBody>
-          <a:bodyPr wrap="square">
-            <a:spAutoFit/>
-          </a:bodyPr>
-          <a:lstStyle/>
-          <a:p>
-            <a:r>
-              <a:rPr sz="1300" b="0">
-                <a:solidFill>
-                  <a:srgbClr val="333333"/>
-                </a:solidFill>
-                <a:latin typeface="Fira Sans"/>
-              </a:rPr>
-              <a:t>Normalizar por comuna permite comparar proporciones entre comunas de tamaños muy distintos.</a:t>
-            </a:r>
-          </a:p>
-        </p:txBody>
-      </p:sp>
     </p:spTree>
   </p:cSld>
   <p:clrMapOvr>
@@ -7613,177 +7743,14 @@
                 </a:solidFill>
                 <a:latin typeface="Fira Sans"/>
               </a:rPr>
-              <a:t>Ingreso y uso de transporte público</a:t>
-            </a:r>
-          </a:p>
-        </p:txBody>
-      </p:sp>
-      <p:sp>
-        <p:nvSpPr>
-          <p:cNvPr id="4" name="TextBox 3"/>
-          <p:cNvSpPr txBox="1"/>
-          <p:nvPr/>
-        </p:nvSpPr>
-        <p:spPr>
-          <a:xfrm>
-            <a:off x="502920" y="1252728"/>
-            <a:ext cx="4023360" cy="3200400"/>
-          </a:xfrm>
-          <a:prstGeom prst="rect">
-            <a:avLst/>
-          </a:prstGeom>
-          <a:noFill/>
-        </p:spPr>
-        <p:txBody>
-          <a:bodyPr wrap="square">
-            <a:spAutoFit/>
-          </a:bodyPr>
-          <a:lstStyle/>
-          <a:p>
-            <a:pPr>
-              <a:lnSpc>
-                <a:spcPct val="112000"/>
-              </a:lnSpc>
-              <a:spcAft>
-                <a:spcPts val="900"/>
-              </a:spcAft>
-            </a:pPr>
-            <a:r>
-              <a:rPr sz="1500" b="1">
-                <a:solidFill>
-                  <a:srgbClr val="E0A437"/>
-                </a:solidFill>
-                <a:latin typeface="Fira Sans"/>
-              </a:rPr>
-              <a:t>▸ </a:t>
-            </a:r>
-            <a:r>
-              <a:rPr sz="1500" b="0">
-                <a:solidFill>
-                  <a:srgbClr val="000000"/>
-                </a:solidFill>
-                <a:latin typeface="Fira Sans"/>
-              </a:rPr>
-              <a:t>Cada punto es una comuna: ingreso medio contra proporción de viajes en transporte público.</a:t>
-            </a:r>
-          </a:p>
-          <a:p>
-            <a:pPr>
-              <a:lnSpc>
-                <a:spcPct val="112000"/>
-              </a:lnSpc>
-              <a:spcAft>
-                <a:spcPts val="500"/>
-              </a:spcAft>
-            </a:pPr>
-            <a:r>
-              <a:rPr sz="1300" b="0">
-                <a:solidFill>
-                  <a:srgbClr val="333333"/>
-                </a:solidFill>
-                <a:latin typeface="Fira Sans"/>
-              </a:rPr>
-              <a:t>     ◦  </a:t>
-            </a:r>
-            <a:r>
-              <a:rPr sz="1300" b="0">
-                <a:solidFill>
-                  <a:srgbClr val="333333"/>
-                </a:solidFill>
-                <a:latin typeface="Fira Sans"/>
-              </a:rPr>
-              <a:t>Periferia (Buin, Melipilla): poco transporte público; la red no llega.</a:t>
-            </a:r>
-          </a:p>
-          <a:p>
-            <a:pPr>
-              <a:lnSpc>
-                <a:spcPct val="112000"/>
-              </a:lnSpc>
-              <a:spcAft>
-                <a:spcPts val="500"/>
-              </a:spcAft>
-            </a:pPr>
-            <a:r>
-              <a:rPr sz="1300" b="0">
-                <a:solidFill>
-                  <a:srgbClr val="333333"/>
-                </a:solidFill>
-                <a:latin typeface="Fira Sans"/>
-              </a:rPr>
-              <a:t>     ◦  </a:t>
-            </a:r>
-            <a:r>
-              <a:rPr sz="1300" b="0">
-                <a:solidFill>
-                  <a:srgbClr val="333333"/>
-                </a:solidFill>
-                <a:latin typeface="Fira Sans"/>
-              </a:rPr>
-              <a:t>Ingresos altos (Vitacura, Lo Barnechea): conectadas, con poco uso.</a:t>
-            </a:r>
-          </a:p>
-          <a:p>
-            <a:pPr>
-              <a:lnSpc>
-                <a:spcPct val="112000"/>
-              </a:lnSpc>
-              <a:spcAft>
-                <a:spcPts val="500"/>
-              </a:spcAft>
-            </a:pPr>
-            <a:r>
-              <a:rPr sz="1300" b="0">
-                <a:solidFill>
-                  <a:srgbClr val="333333"/>
-                </a:solidFill>
-                <a:latin typeface="Fira Sans"/>
-              </a:rPr>
-              <a:t>     ◦  </a:t>
-            </a:r>
-            <a:r>
-              <a:rPr sz="1300" b="0">
-                <a:solidFill>
-                  <a:srgbClr val="333333"/>
-                </a:solidFill>
-                <a:latin typeface="Fira Sans"/>
-              </a:rPr>
-              <a:t>Correlación de Pearson: -0,17. La asociación lineal es débil.</a:t>
-            </a:r>
-          </a:p>
-          <a:p>
-            <a:pPr>
-              <a:lnSpc>
-                <a:spcPct val="112000"/>
-              </a:lnSpc>
-              <a:spcAft>
-                <a:spcPts val="900"/>
-              </a:spcAft>
-            </a:pPr>
-            <a:r>
-              <a:rPr sz="1500" b="1">
-                <a:solidFill>
-                  <a:srgbClr val="E0A437"/>
-                </a:solidFill>
-                <a:latin typeface="Fira Sans"/>
-              </a:rPr>
-              <a:t>▸ </a:t>
-            </a:r>
-            <a:r>
-              <a:rPr sz="1500" b="1">
-                <a:solidFill>
-                  <a:srgbClr val="1D3557"/>
-                </a:solidFill>
-                <a:latin typeface="Fira Sans"/>
-              </a:rPr>
-              <a:t>Como vimos en el marco conceptual: el coeficiente no reemplaza al gráfico, y la asociación no autoriza verbos causales.</a:t>
+              <a:t>El reparto modal difiere entre comunas</a:t>
             </a:r>
           </a:p>
         </p:txBody>
       </p:sp>
       <p:pic>
         <p:nvPicPr>
-          <p:cNvPr id="5" name="Picture 4" descr="09_ingreso_vs_tp.png"/>
+          <p:cNvPr id="4" name="Picture 3" descr="08_modo_por_comuna.png"/>
           <p:cNvPicPr>
             <a:picLocks noChangeAspect="1"/>
           </p:cNvPicPr>
@@ -7797,14 +7764,48 @@
         </p:blipFill>
         <p:spPr>
           <a:xfrm>
-            <a:off x="4892040" y="1371600"/>
-            <a:ext cx="3840480" cy="2526979"/>
+            <a:off x="1994250" y="1143000"/>
+            <a:ext cx="5155498" cy="3154679"/>
           </a:xfrm>
           <a:prstGeom prst="rect">
             <a:avLst/>
           </a:prstGeom>
         </p:spPr>
       </p:pic>
+      <p:sp>
+        <p:nvSpPr>
+          <p:cNvPr id="5" name="TextBox 4"/>
+          <p:cNvSpPr txBox="1"/>
+          <p:nvPr/>
+        </p:nvSpPr>
+        <p:spPr>
+          <a:xfrm>
+            <a:off x="704088" y="4434840"/>
+            <a:ext cx="7744968" cy="457200"/>
+          </a:xfrm>
+          <a:prstGeom prst="rect">
+            <a:avLst/>
+          </a:prstGeom>
+          <a:noFill/>
+        </p:spPr>
+        <p:txBody>
+          <a:bodyPr wrap="square">
+            <a:spAutoFit/>
+          </a:bodyPr>
+          <a:lstStyle/>
+          <a:p>
+            <a:r>
+              <a:rPr sz="1300" b="0">
+                <a:solidFill>
+                  <a:srgbClr val="333333"/>
+                </a:solidFill>
+                <a:latin typeface="Fira Sans"/>
+              </a:rPr>
+              <a:t>Normalizar por comuna permite comparar proporciones entre comunas de tamaños muy distintos.</a:t>
+            </a:r>
+          </a:p>
+        </p:txBody>
+      </p:sp>
     </p:spTree>
   </p:cSld>
   <p:clrMapOvr>
@@ -8003,14 +8004,177 @@
                 </a:solidFill>
                 <a:latin typeface="Fira Sans"/>
               </a:rPr>
-              <a:t>Los propósitos de viaje según el día de la semana</a:t>
+              <a:t>Ingreso y uso de transporte público</a:t>
+            </a:r>
+          </a:p>
+        </p:txBody>
+      </p:sp>
+      <p:sp>
+        <p:nvSpPr>
+          <p:cNvPr id="4" name="TextBox 3"/>
+          <p:cNvSpPr txBox="1"/>
+          <p:nvPr/>
+        </p:nvSpPr>
+        <p:spPr>
+          <a:xfrm>
+            <a:off x="502920" y="1252728"/>
+            <a:ext cx="4023360" cy="3200400"/>
+          </a:xfrm>
+          <a:prstGeom prst="rect">
+            <a:avLst/>
+          </a:prstGeom>
+          <a:noFill/>
+        </p:spPr>
+        <p:txBody>
+          <a:bodyPr wrap="square">
+            <a:spAutoFit/>
+          </a:bodyPr>
+          <a:lstStyle/>
+          <a:p>
+            <a:pPr>
+              <a:lnSpc>
+                <a:spcPct val="112000"/>
+              </a:lnSpc>
+              <a:spcAft>
+                <a:spcPts val="900"/>
+              </a:spcAft>
+            </a:pPr>
+            <a:r>
+              <a:rPr sz="1500" b="1">
+                <a:solidFill>
+                  <a:srgbClr val="E0A437"/>
+                </a:solidFill>
+                <a:latin typeface="Fira Sans"/>
+              </a:rPr>
+              <a:t>▸ </a:t>
+            </a:r>
+            <a:r>
+              <a:rPr sz="1500" b="0">
+                <a:solidFill>
+                  <a:srgbClr val="000000"/>
+                </a:solidFill>
+                <a:latin typeface="Fira Sans"/>
+              </a:rPr>
+              <a:t>Cada punto es una comuna: ingreso medio contra proporción de viajes en transporte público.</a:t>
+            </a:r>
+          </a:p>
+          <a:p>
+            <a:pPr>
+              <a:lnSpc>
+                <a:spcPct val="112000"/>
+              </a:lnSpc>
+              <a:spcAft>
+                <a:spcPts val="500"/>
+              </a:spcAft>
+            </a:pPr>
+            <a:r>
+              <a:rPr sz="1300" b="0">
+                <a:solidFill>
+                  <a:srgbClr val="333333"/>
+                </a:solidFill>
+                <a:latin typeface="Fira Sans"/>
+              </a:rPr>
+              <a:t>     ◦  </a:t>
+            </a:r>
+            <a:r>
+              <a:rPr sz="1300" b="0">
+                <a:solidFill>
+                  <a:srgbClr val="333333"/>
+                </a:solidFill>
+                <a:latin typeface="Fira Sans"/>
+              </a:rPr>
+              <a:t>Periferia (Buin, Melipilla): poco transporte público; la red no llega.</a:t>
+            </a:r>
+          </a:p>
+          <a:p>
+            <a:pPr>
+              <a:lnSpc>
+                <a:spcPct val="112000"/>
+              </a:lnSpc>
+              <a:spcAft>
+                <a:spcPts val="500"/>
+              </a:spcAft>
+            </a:pPr>
+            <a:r>
+              <a:rPr sz="1300" b="0">
+                <a:solidFill>
+                  <a:srgbClr val="333333"/>
+                </a:solidFill>
+                <a:latin typeface="Fira Sans"/>
+              </a:rPr>
+              <a:t>     ◦  </a:t>
+            </a:r>
+            <a:r>
+              <a:rPr sz="1300" b="0">
+                <a:solidFill>
+                  <a:srgbClr val="333333"/>
+                </a:solidFill>
+                <a:latin typeface="Fira Sans"/>
+              </a:rPr>
+              <a:t>Ingresos altos (Vitacura, Lo Barnechea): conectadas, con poco uso.</a:t>
+            </a:r>
+          </a:p>
+          <a:p>
+            <a:pPr>
+              <a:lnSpc>
+                <a:spcPct val="112000"/>
+              </a:lnSpc>
+              <a:spcAft>
+                <a:spcPts val="500"/>
+              </a:spcAft>
+            </a:pPr>
+            <a:r>
+              <a:rPr sz="1300" b="0">
+                <a:solidFill>
+                  <a:srgbClr val="333333"/>
+                </a:solidFill>
+                <a:latin typeface="Fira Sans"/>
+              </a:rPr>
+              <a:t>     ◦  </a:t>
+            </a:r>
+            <a:r>
+              <a:rPr sz="1300" b="0">
+                <a:solidFill>
+                  <a:srgbClr val="333333"/>
+                </a:solidFill>
+                <a:latin typeface="Fira Sans"/>
+              </a:rPr>
+              <a:t>Correlación de Pearson: -0,17. La asociación lineal es débil.</a:t>
+            </a:r>
+          </a:p>
+          <a:p>
+            <a:pPr>
+              <a:lnSpc>
+                <a:spcPct val="112000"/>
+              </a:lnSpc>
+              <a:spcAft>
+                <a:spcPts val="900"/>
+              </a:spcAft>
+            </a:pPr>
+            <a:r>
+              <a:rPr sz="1500" b="1">
+                <a:solidFill>
+                  <a:srgbClr val="E0A437"/>
+                </a:solidFill>
+                <a:latin typeface="Fira Sans"/>
+              </a:rPr>
+              <a:t>▸ </a:t>
+            </a:r>
+            <a:r>
+              <a:rPr sz="1500" b="1">
+                <a:solidFill>
+                  <a:srgbClr val="1D3557"/>
+                </a:solidFill>
+                <a:latin typeface="Fira Sans"/>
+              </a:rPr>
+              <a:t>Como vimos en el marco conceptual: el coeficiente no reemplaza al gráfico, y la asociación no autoriza verbos causales.</a:t>
             </a:r>
           </a:p>
         </p:txBody>
       </p:sp>
       <p:pic>
         <p:nvPicPr>
-          <p:cNvPr id="4" name="Picture 3" descr="10_heatmap_rutinas.png"/>
+          <p:cNvPr id="5" name="Picture 4" descr="09_ingreso_vs_tp.png"/>
           <p:cNvPicPr>
             <a:picLocks noChangeAspect="1"/>
           </p:cNvPicPr>
@@ -8024,48 +8188,14 @@
         </p:blipFill>
         <p:spPr>
           <a:xfrm>
-            <a:off x="1563778" y="1143000"/>
-            <a:ext cx="6016443" cy="3154680"/>
+            <a:off x="4892040" y="1371600"/>
+            <a:ext cx="3840480" cy="2526979"/>
           </a:xfrm>
           <a:prstGeom prst="rect">
             <a:avLst/>
           </a:prstGeom>
         </p:spPr>
       </p:pic>
-      <p:sp>
-        <p:nvSpPr>
-          <p:cNvPr id="5" name="TextBox 4"/>
-          <p:cNvSpPr txBox="1"/>
-          <p:nvPr/>
-        </p:nvSpPr>
-        <p:spPr>
-          <a:xfrm>
-            <a:off x="704088" y="4434840"/>
-            <a:ext cx="7744968" cy="457200"/>
-          </a:xfrm>
-          <a:prstGeom prst="rect">
-            <a:avLst/>
-          </a:prstGeom>
-          <a:noFill/>
-        </p:spPr>
-        <p:txBody>
-          <a:bodyPr wrap="square">
-            <a:spAutoFit/>
-          </a:bodyPr>
-          <a:lstStyle/>
-          <a:p>
-            <a:r>
-              <a:rPr sz="1300" b="0">
-                <a:solidFill>
-                  <a:srgbClr val="333333"/>
-                </a:solidFill>
-                <a:latin typeface="Fira Sans"/>
-              </a:rPr>
-              <a:t>El heatmap muestra 14 propósitos por 7 días en una sola figura: útil para tablas completas.</a:t>
-            </a:r>
-          </a:p>
-        </p:txBody>
-      </p:sp>
     </p:spTree>
   </p:cSld>
   <p:clrMapOvr>
@@ -8157,14 +8287,14 @@
                 </a:solidFill>
                 <a:latin typeface="Fira Sans"/>
               </a:rPr>
-              <a:t>Cuando los datos crecen</a:t>
+              <a:t>Los propósitos de viaje según el día de la semana</a:t>
             </a:r>
           </a:p>
         </p:txBody>
       </p:sp>
       <p:pic>
         <p:nvPicPr>
-          <p:cNvPr id="4" name="Picture 3" descr="14_escala_datos.png"/>
+          <p:cNvPr id="4" name="Picture 3" descr="10_heatmap_rutinas.png"/>
           <p:cNvPicPr>
             <a:picLocks noChangeAspect="1"/>
           </p:cNvPicPr>
@@ -8178,8 +8308,8 @@
         </p:blipFill>
         <p:spPr>
           <a:xfrm>
-            <a:off x="1417319" y="1143000"/>
-            <a:ext cx="6309360" cy="2324913"/>
+            <a:off x="1563778" y="1143000"/>
+            <a:ext cx="6016443" cy="3154680"/>
           </a:xfrm>
           <a:prstGeom prst="rect">
             <a:avLst/>
@@ -8215,7 +8345,7 @@
                 </a:solidFill>
                 <a:latin typeface="Fira Sans"/>
               </a:rPr>
-              <a:t>PySpark se usa con SQL o con sus propios DataFrames; Dask reparte operaciones estilo Pandas; Polars y DuckDB rinden en una sola máquina.</a:t>
+              <a:t>El heatmap muestra 14 propósitos por 7 días en una sola figura: útil para tablas completas.</a:t>
             </a:r>
           </a:p>
         </p:txBody>
@@ -8311,21 +8441,45 @@
                 </a:solidFill>
                 <a:latin typeface="Fira Sans"/>
               </a:rPr>
-              <a:t>Síntesis</a:t>
-            </a:r>
-          </a:p>
-        </p:txBody>
-      </p:sp>
-      <p:sp>
-        <p:nvSpPr>
-          <p:cNvPr id="4" name="TextBox 3"/>
+              <a:t>Cuando los datos crecen</a:t>
+            </a:r>
+          </a:p>
+        </p:txBody>
+      </p:sp>
+      <p:pic>
+        <p:nvPicPr>
+          <p:cNvPr id="4" name="Picture 3" descr="14_escala_datos.png"/>
+          <p:cNvPicPr>
+            <a:picLocks noChangeAspect="1"/>
+          </p:cNvPicPr>
+          <p:nvPr/>
+        </p:nvPicPr>
+        <p:blipFill>
+          <a:blip r:embed="rId2"/>
+          <a:stretch>
+            <a:fillRect/>
+          </a:stretch>
+        </p:blipFill>
+        <p:spPr>
+          <a:xfrm>
+            <a:off x="1417319" y="1143000"/>
+            <a:ext cx="6309360" cy="2324913"/>
+          </a:xfrm>
+          <a:prstGeom prst="rect">
+            <a:avLst/>
+          </a:prstGeom>
+        </p:spPr>
+      </p:pic>
+      <p:sp>
+        <p:nvSpPr>
+          <p:cNvPr id="5" name="TextBox 4"/>
           <p:cNvSpPr txBox="1"/>
           <p:nvPr/>
         </p:nvSpPr>
         <p:spPr>
           <a:xfrm>
-            <a:off x="704088" y="1353312"/>
-            <a:ext cx="7744968" cy="3300984"/>
+            <a:off x="704088" y="4434840"/>
+            <a:ext cx="7744968" cy="457200"/>
           </a:xfrm>
           <a:prstGeom prst="rect">
             <a:avLst/>
@@ -8338,143 +8492,14 @@
           </a:bodyPr>
           <a:lstStyle/>
           <a:p>
-            <a:pPr>
-              <a:lnSpc>
-                <a:spcPct val="112000"/>
-              </a:lnSpc>
-              <a:spcAft>
-                <a:spcPts val="900"/>
-              </a:spcAft>
-            </a:pPr>
-            <a:r>
-              <a:rPr sz="1800" b="1">
-                <a:solidFill>
-                  <a:srgbClr val="E0A437"/>
-                </a:solidFill>
-                <a:latin typeface="Fira Sans"/>
-              </a:rPr>
-              <a:t>▸ </a:t>
-            </a:r>
-            <a:r>
-              <a:rPr sz="1800" b="0">
-                <a:solidFill>
-                  <a:srgbClr val="000000"/>
-                </a:solidFill>
-                <a:latin typeface="Fira Sans"/>
-              </a:rPr>
-              <a:t>Un modelo es una simplificación con decisiones incorporadas; estimarlo puede buscar inferencia o predicción.</a:t>
-            </a:r>
-          </a:p>
-          <a:p>
-            <a:pPr>
-              <a:lnSpc>
-                <a:spcPct val="112000"/>
-              </a:lnSpc>
-              <a:spcAft>
-                <a:spcPts val="900"/>
-              </a:spcAft>
-            </a:pPr>
-            <a:r>
-              <a:rPr sz="1800" b="1">
-                <a:solidFill>
-                  <a:srgbClr val="E0A437"/>
-                </a:solidFill>
-                <a:latin typeface="Fira Sans"/>
-              </a:rPr>
-              <a:t>▸ </a:t>
-            </a:r>
-            <a:r>
-              <a:rPr sz="1800" b="0">
-                <a:solidFill>
-                  <a:srgbClr val="000000"/>
-                </a:solidFill>
-                <a:latin typeface="Fira Sans"/>
-              </a:rPr>
-              <a:t>Las asociaciones se reportan como asociaciones: la causalidad exige más que datos observacionales.</a:t>
-            </a:r>
-          </a:p>
-          <a:p>
-            <a:pPr>
-              <a:lnSpc>
-                <a:spcPct val="112000"/>
-              </a:lnSpc>
-              <a:spcAft>
-                <a:spcPts val="900"/>
-              </a:spcAft>
-            </a:pPr>
-            <a:r>
-              <a:rPr sz="1800" b="1">
-                <a:solidFill>
-                  <a:srgbClr val="E0A437"/>
-                </a:solidFill>
-                <a:latin typeface="Fira Sans"/>
-              </a:rPr>
-              <a:t>▸ </a:t>
-            </a:r>
-            <a:r>
-              <a:rPr sz="1800" b="0">
-                <a:solidFill>
-                  <a:srgbClr val="000000"/>
-                </a:solidFill>
-                <a:latin typeface="Fira Sans"/>
-              </a:rPr>
-              <a:t>El tipo de la variable, no su dtype, determina qué resúmenes tienen sentido.</a:t>
-            </a:r>
-          </a:p>
-          <a:p>
-            <a:pPr>
-              <a:lnSpc>
-                <a:spcPct val="112000"/>
-              </a:lnSpc>
-              <a:spcAft>
-                <a:spcPts val="900"/>
-              </a:spcAft>
-            </a:pPr>
-            <a:r>
-              <a:rPr sz="1800" b="1">
-                <a:solidFill>
-                  <a:srgbClr val="E0A437"/>
-                </a:solidFill>
-                <a:latin typeface="Fira Sans"/>
-              </a:rPr>
-              <a:t>▸ </a:t>
-            </a:r>
-            <a:r>
-              <a:rPr sz="1800" b="0">
-                <a:solidFill>
-                  <a:srgbClr val="000000"/>
-                </a:solidFill>
-                <a:latin typeface="Fira Sans"/>
-              </a:rPr>
-              <a:t>Con distribuciones asimétricas, la mediana y los percentiles describen mejor lo típico que la media.</a:t>
-            </a:r>
-          </a:p>
-          <a:p>
-            <a:pPr>
-              <a:lnSpc>
-                <a:spcPct val="112000"/>
-              </a:lnSpc>
-              <a:spcAft>
-                <a:spcPts val="900"/>
-              </a:spcAft>
-            </a:pPr>
-            <a:r>
-              <a:rPr sz="1800" b="1">
-                <a:solidFill>
-                  <a:srgbClr val="E0A437"/>
-                </a:solidFill>
-                <a:latin typeface="Fira Sans"/>
-              </a:rPr>
-              <a:t>▸ </a:t>
-            </a:r>
-            <a:r>
-              <a:rPr sz="1800" b="1">
-                <a:solidFill>
-                  <a:srgbClr val="1D3557"/>
-                </a:solidFill>
-                <a:latin typeface="Fira Sans"/>
-              </a:rPr>
-              <a:t>Ante toda cifra resumen: ¿de quién habla este número? ¿Muestra, subgrupo o ciudad?</a:t>
+            <a:r>
+              <a:rPr sz="1300" b="0">
+                <a:solidFill>
+                  <a:srgbClr val="333333"/>
+                </a:solidFill>
+                <a:latin typeface="Fira Sans"/>
+              </a:rPr>
+              <a:t>PySpark se usa con SQL o con sus propios DataFrames; Dask reparte operaciones estilo Pandas; Polars y DuckDB rinden en una sola máquina.</a:t>
             </a:r>
           </a:p>
         </p:txBody>
@@ -8570,7 +8595,7 @@
                 </a:solidFill>
                 <a:latin typeface="Fira Sans"/>
               </a:rPr>
-              <a:t>Segundo bloque: comienza la Tarea 1</a:t>
+              <a:t>Síntesis</a:t>
             </a:r>
           </a:p>
         </p:txBody>
@@ -8621,91 +8646,7 @@
                 </a:solidFill>
                 <a:latin typeface="Fira Sans"/>
               </a:rPr>
-              <a:t>El retrato de tu comuna: cada pareja adopta una comuna del Gran Santiago.</a:t>
-            </a:r>
-          </a:p>
-          <a:p>
-            <a:pPr>
-              <a:lnSpc>
-                <a:spcPct val="112000"/>
-              </a:lnSpc>
-              <a:spcAft>
-                <a:spcPts val="500"/>
-              </a:spcAft>
-            </a:pPr>
-            <a:r>
-              <a:rPr sz="1400" b="0">
-                <a:solidFill>
-                  <a:srgbClr val="333333"/>
-                </a:solidFill>
-                <a:latin typeface="Fira Sans"/>
-              </a:rPr>
-              <a:t>     ◦  </a:t>
-            </a:r>
-            <a:r>
-              <a:rPr sz="1400" b="0">
-                <a:solidFill>
-                  <a:srgbClr val="333333"/>
-                </a:solidFill>
-                <a:latin typeface="Fira Sans"/>
-              </a:rPr>
-              <a:t>Hoy: elegir la comuna y construir su retrato numérico.</a:t>
-            </a:r>
-          </a:p>
-          <a:p>
-            <a:pPr>
-              <a:lnSpc>
-                <a:spcPct val="112000"/>
-              </a:lnSpc>
-              <a:spcAft>
-                <a:spcPts val="500"/>
-              </a:spcAft>
-            </a:pPr>
-            <a:r>
-              <a:rPr sz="1400" b="0">
-                <a:solidFill>
-                  <a:srgbClr val="333333"/>
-                </a:solidFill>
-                <a:latin typeface="Fira Sans"/>
-              </a:rPr>
-              <a:t>     ◦  </a:t>
-            </a:r>
-            <a:r>
-              <a:rPr sz="1400" b="0">
-                <a:solidFill>
-                  <a:srgbClr val="333333"/>
-                </a:solidFill>
-                <a:latin typeface="Fira Sans"/>
-              </a:rPr>
-              <a:t>Próxima clase: el retrato gráfico, con métodos de visualización.</a:t>
-            </a:r>
-          </a:p>
-          <a:p>
-            <a:pPr>
-              <a:lnSpc>
-                <a:spcPct val="112000"/>
-              </a:lnSpc>
-              <a:spcAft>
-                <a:spcPts val="500"/>
-              </a:spcAft>
-            </a:pPr>
-            <a:r>
-              <a:rPr sz="1400" b="0">
-                <a:solidFill>
-                  <a:srgbClr val="333333"/>
-                </a:solidFill>
-                <a:latin typeface="Fira Sans"/>
-              </a:rPr>
-              <a:t>     ◦  </a:t>
-            </a:r>
-            <a:r>
-              <a:rPr sz="1400" b="0">
-                <a:solidFill>
-                  <a:srgbClr val="333333"/>
-                </a:solidFill>
-                <a:latin typeface="Fira Sans"/>
-              </a:rPr>
-              <a:t>Entrega del retrato completo: jueves 10 de septiembre, por Aula.</a:t>
+              <a:t>Un modelo es una simplificación con decisiones incorporadas; estimarlo puede buscar inferencia o predicción.</a:t>
             </a:r>
           </a:p>
           <a:p>
@@ -8733,7 +8674,7 @@
                 </a:solidFill>
                 <a:latin typeface="Fira Sans"/>
               </a:rPr>
-              <a:t>El enunciado está en evaluaciones/tareas/ y la guía de hoy en actividades/.</a:t>
+              <a:t>Las asociaciones se reportan como asociaciones: la causalidad exige más que datos observacionales.</a:t>
             </a:r>
           </a:p>
           <a:p>
@@ -8755,13 +8696,69 @@
               <a:t>▸ </a:t>
             </a:r>
             <a:r>
+              <a:rPr sz="1800" b="0">
+                <a:solidFill>
+                  <a:srgbClr val="000000"/>
+                </a:solidFill>
+                <a:latin typeface="Fira Sans"/>
+              </a:rPr>
+              <a:t>El tipo de la variable, no su dtype, determina qué resúmenes tienen sentido.</a:t>
+            </a:r>
+          </a:p>
+          <a:p>
+            <a:pPr>
+              <a:lnSpc>
+                <a:spcPct val="112000"/>
+              </a:lnSpc>
+              <a:spcAft>
+                <a:spcPts val="900"/>
+              </a:spcAft>
+            </a:pPr>
+            <a:r>
               <a:rPr sz="1800" b="1">
                 <a:solidFill>
+                  <a:srgbClr val="E0A437"/>
+                </a:solidFill>
+                <a:latin typeface="Fira Sans"/>
+              </a:rPr>
+              <a:t>▸ </a:t>
+            </a:r>
+            <a:r>
+              <a:rPr sz="1800" b="0">
+                <a:solidFill>
+                  <a:srgbClr val="000000"/>
+                </a:solidFill>
+                <a:latin typeface="Fira Sans"/>
+              </a:rPr>
+              <a:t>Con distribuciones asimétricas, la mediana y los percentiles describen mejor lo típico que la media.</a:t>
+            </a:r>
+          </a:p>
+          <a:p>
+            <a:pPr>
+              <a:lnSpc>
+                <a:spcPct val="112000"/>
+              </a:lnSpc>
+              <a:spcAft>
+                <a:spcPts val="900"/>
+              </a:spcAft>
+            </a:pPr>
+            <a:r>
+              <a:rPr sz="1800" b="1">
+                <a:solidFill>
+                  <a:srgbClr val="E0A437"/>
+                </a:solidFill>
+                <a:latin typeface="Fira Sans"/>
+              </a:rPr>
+              <a:t>▸ </a:t>
+            </a:r>
+            <a:r>
+              <a:rPr sz="1800" b="1">
+                <a:solidFill>
                   <a:srgbClr val="1D3557"/>
                 </a:solidFill>
                 <a:latin typeface="Fira Sans"/>
               </a:rPr>
-              <a:t>Lo que avancen en este bloque ya es parte de la tarea.</a:t>
+              <a:t>Ante toda cifra resumen: ¿de quién habla este número? ¿Muestra, subgrupo o ciudad?</a:t>
             </a:r>
           </a:p>
         </p:txBody>
@@ -8857,6 +8854,293 @@
                 </a:solidFill>
                 <a:latin typeface="Fira Sans"/>
               </a:rPr>
+              <a:t>Segundo bloque: comienza la Tarea 1</a:t>
+            </a:r>
+          </a:p>
+        </p:txBody>
+      </p:sp>
+      <p:sp>
+        <p:nvSpPr>
+          <p:cNvPr id="4" name="TextBox 3"/>
+          <p:cNvSpPr txBox="1"/>
+          <p:nvPr/>
+        </p:nvSpPr>
+        <p:spPr>
+          <a:xfrm>
+            <a:off x="704088" y="1353312"/>
+            <a:ext cx="7744968" cy="3300984"/>
+          </a:xfrm>
+          <a:prstGeom prst="rect">
+            <a:avLst/>
+          </a:prstGeom>
+          <a:noFill/>
+        </p:spPr>
+        <p:txBody>
+          <a:bodyPr wrap="square">
+            <a:spAutoFit/>
+          </a:bodyPr>
+          <a:lstStyle/>
+          <a:p>
+            <a:pPr>
+              <a:lnSpc>
+                <a:spcPct val="112000"/>
+              </a:lnSpc>
+              <a:spcAft>
+                <a:spcPts val="900"/>
+              </a:spcAft>
+            </a:pPr>
+            <a:r>
+              <a:rPr sz="1800" b="1">
+                <a:solidFill>
+                  <a:srgbClr val="E0A437"/>
+                </a:solidFill>
+                <a:latin typeface="Fira Sans"/>
+              </a:rPr>
+              <a:t>▸ </a:t>
+            </a:r>
+            <a:r>
+              <a:rPr sz="1800" b="0">
+                <a:solidFill>
+                  <a:srgbClr val="000000"/>
+                </a:solidFill>
+                <a:latin typeface="Fira Sans"/>
+              </a:rPr>
+              <a:t>El retrato de tu comuna: cada pareja adopta una comuna del Gran Santiago.</a:t>
+            </a:r>
+          </a:p>
+          <a:p>
+            <a:pPr>
+              <a:lnSpc>
+                <a:spcPct val="112000"/>
+              </a:lnSpc>
+              <a:spcAft>
+                <a:spcPts val="500"/>
+              </a:spcAft>
+            </a:pPr>
+            <a:r>
+              <a:rPr sz="1400" b="0">
+                <a:solidFill>
+                  <a:srgbClr val="333333"/>
+                </a:solidFill>
+                <a:latin typeface="Fira Sans"/>
+              </a:rPr>
+              <a:t>     ◦  </a:t>
+            </a:r>
+            <a:r>
+              <a:rPr sz="1400" b="0">
+                <a:solidFill>
+                  <a:srgbClr val="333333"/>
+                </a:solidFill>
+                <a:latin typeface="Fira Sans"/>
+              </a:rPr>
+              <a:t>Hoy: elegir la comuna y construir su retrato numérico.</a:t>
+            </a:r>
+          </a:p>
+          <a:p>
+            <a:pPr>
+              <a:lnSpc>
+                <a:spcPct val="112000"/>
+              </a:lnSpc>
+              <a:spcAft>
+                <a:spcPts val="500"/>
+              </a:spcAft>
+            </a:pPr>
+            <a:r>
+              <a:rPr sz="1400" b="0">
+                <a:solidFill>
+                  <a:srgbClr val="333333"/>
+                </a:solidFill>
+                <a:latin typeface="Fira Sans"/>
+              </a:rPr>
+              <a:t>     ◦  </a:t>
+            </a:r>
+            <a:r>
+              <a:rPr sz="1400" b="0">
+                <a:solidFill>
+                  <a:srgbClr val="333333"/>
+                </a:solidFill>
+                <a:latin typeface="Fira Sans"/>
+              </a:rPr>
+              <a:t>Próxima clase: el retrato gráfico, con métodos de visualización.</a:t>
+            </a:r>
+          </a:p>
+          <a:p>
+            <a:pPr>
+              <a:lnSpc>
+                <a:spcPct val="112000"/>
+              </a:lnSpc>
+              <a:spcAft>
+                <a:spcPts val="500"/>
+              </a:spcAft>
+            </a:pPr>
+            <a:r>
+              <a:rPr sz="1400" b="0">
+                <a:solidFill>
+                  <a:srgbClr val="333333"/>
+                </a:solidFill>
+                <a:latin typeface="Fira Sans"/>
+              </a:rPr>
+              <a:t>     ◦  </a:t>
+            </a:r>
+            <a:r>
+              <a:rPr sz="1400" b="0">
+                <a:solidFill>
+                  <a:srgbClr val="333333"/>
+                </a:solidFill>
+                <a:latin typeface="Fira Sans"/>
+              </a:rPr>
+              <a:t>Entrega del retrato completo: jueves 10 de septiembre, por Aula.</a:t>
+            </a:r>
+          </a:p>
+          <a:p>
+            <a:pPr>
+              <a:lnSpc>
+                <a:spcPct val="112000"/>
+              </a:lnSpc>
+              <a:spcAft>
+                <a:spcPts val="900"/>
+              </a:spcAft>
+            </a:pPr>
+            <a:r>
+              <a:rPr sz="1800" b="1">
+                <a:solidFill>
+                  <a:srgbClr val="E0A437"/>
+                </a:solidFill>
+                <a:latin typeface="Fira Sans"/>
+              </a:rPr>
+              <a:t>▸ </a:t>
+            </a:r>
+            <a:r>
+              <a:rPr sz="1800" b="0">
+                <a:solidFill>
+                  <a:srgbClr val="000000"/>
+                </a:solidFill>
+                <a:latin typeface="Fira Sans"/>
+              </a:rPr>
+              <a:t>El enunciado está en evaluaciones/tareas/ y la guía de hoy en actividades/.</a:t>
+            </a:r>
+          </a:p>
+          <a:p>
+            <a:pPr>
+              <a:lnSpc>
+                <a:spcPct val="112000"/>
+              </a:lnSpc>
+              <a:spcAft>
+                <a:spcPts val="900"/>
+              </a:spcAft>
+            </a:pPr>
+            <a:r>
+              <a:rPr sz="1800" b="1">
+                <a:solidFill>
+                  <a:srgbClr val="E0A437"/>
+                </a:solidFill>
+                <a:latin typeface="Fira Sans"/>
+              </a:rPr>
+              <a:t>▸ </a:t>
+            </a:r>
+            <a:r>
+              <a:rPr sz="1800" b="1">
+                <a:solidFill>
+                  <a:srgbClr val="1D3557"/>
+                </a:solidFill>
+                <a:latin typeface="Fira Sans"/>
+              </a:rPr>
+              <a:t>Lo que avancen en este bloque ya es parte de la tarea.</a:t>
+            </a:r>
+          </a:p>
+        </p:txBody>
+      </p:sp>
+    </p:spTree>
+  </p:cSld>
+  <p:clrMapOvr>
+    <a:masterClrMapping/>
+  </p:clrMapOvr>
+</p:sld>
+</file>
+
+<file path=ppt/slides/slide35.xml><?xml version="1.0" encoding="utf-8"?>
+<p:sld xmlns:a="http://schemas.openxmlformats.org/drawingml/2006/main" xmlns:p="http://schemas.openxmlformats.org/presentationml/2006/main" xmlns:r="http://schemas.openxmlformats.org/officeDocument/2006/relationships">
+  <p:cSld>
+    <p:spTree>
+      <p:nvGrpSpPr>
+        <p:cNvPr id="1" name=""/>
+        <p:cNvGrpSpPr/>
+        <p:nvPr/>
+      </p:nvGrpSpPr>
+      <p:grpSpPr/>
+      <p:sp>
+        <p:nvSpPr>
+          <p:cNvPr id="2" name="Rectangle 1"/>
+          <p:cNvSpPr/>
+          <p:nvPr/>
+        </p:nvSpPr>
+        <p:spPr>
+          <a:xfrm>
+            <a:off x="0" y="0"/>
+            <a:ext cx="9144000" cy="5138928"/>
+          </a:xfrm>
+          <a:prstGeom prst="rect">
+            <a:avLst/>
+          </a:prstGeom>
+          <a:solidFill>
+            <a:srgbClr val="FAFBFC"/>
+          </a:solidFill>
+          <a:ln>
+            <a:noFill/>
+          </a:ln>
+          <a:effectLst/>
+        </p:spPr>
+        <p:style>
+          <a:lnRef idx="1">
+            <a:schemeClr val="accent1"/>
+          </a:lnRef>
+          <a:fillRef idx="3">
+            <a:schemeClr val="accent1"/>
+          </a:fillRef>
+          <a:effectRef idx="2">
+            <a:schemeClr val="accent1"/>
+          </a:effectRef>
+          <a:fontRef idx="minor">
+            <a:schemeClr val="lt1"/>
+          </a:fontRef>
+        </p:style>
+        <p:txBody>
+          <a:bodyPr rtlCol="0" anchor="ctr"/>
+          <a:lstStyle/>
+          <a:p>
+            <a:pPr algn="ctr"/>
+          </a:p>
+        </p:txBody>
+      </p:sp>
+      <p:sp>
+        <p:nvSpPr>
+          <p:cNvPr id="3" name="TextBox 2"/>
+          <p:cNvSpPr txBox="1"/>
+          <p:nvPr/>
+        </p:nvSpPr>
+        <p:spPr>
+          <a:xfrm>
+            <a:off x="402336" y="301752"/>
+            <a:ext cx="8348472" cy="795528"/>
+          </a:xfrm>
+          <a:prstGeom prst="rect">
+            <a:avLst/>
+          </a:prstGeom>
+          <a:noFill/>
+        </p:spPr>
+        <p:txBody>
+          <a:bodyPr wrap="square">
+            <a:spAutoFit/>
+          </a:bodyPr>
+          <a:lstStyle/>
+          <a:p>
+            <a:r>
+              <a:rPr sz="2800" b="1">
+                <a:solidFill>
+                  <a:srgbClr val="0F0F0F"/>
+                </a:solidFill>
+                <a:latin typeface="Fira Sans"/>
+              </a:rPr>
               <a:t>Referencias</a:t>
             </a:r>
           </a:p>
@@ -9853,7 +10137,7 @@
                 </a:solidFill>
                 <a:latin typeface="Fira Sans"/>
               </a:rPr>
-              <a:t>Mide la asociación lineal: qué tan bien se ajustan los puntos a una recta. Entre -1 y 1 (Bruce, Bruce y Gedeck, 2020).</a:t>
+              <a:t>Mide la asociación lineal entre dos variables numéricas: qué tan bien se ajustan los puntos a una recta. Se denota r (Bruce, Bruce y Gedeck, 2020).</a:t>
             </a:r>
           </a:p>
           <a:p>
@@ -9881,7 +10165,7 @@
                 </a:solidFill>
                 <a:latin typeface="Fira Sans"/>
               </a:rPr>
-              <a:t>r = cov(X, Y) / (σX · σY): la covarianza estandarizada.</a:t>
+              <a:t>En la fórmula: xᵢ e yᵢ son los valores del par i; x̄ e ȳ, sus medias; n, el número de pares.</a:t>
             </a:r>
           </a:p>
           <a:p>
@@ -9909,7 +10193,7 @@
                 </a:solidFill>
                 <a:latin typeface="Fira Sans"/>
               </a:rPr>
-              <a:t>Un extremo entra multiplicando y puede dominar el resultado.</a:t>
+              <a:t>r = 1: recta creciente exacta; r = -1: decreciente exacta.</a:t>
             </a:r>
           </a:p>
           <a:p>
@@ -9937,35 +10221,7 @@
                 </a:solidFill>
                 <a:latin typeface="Fira Sans"/>
               </a:rPr>
-              <a:t>Una relación curva baja el coeficiente aunque la asociación sea fuerte.</a:t>
-            </a:r>
-          </a:p>
-          <a:p>
-            <a:pPr>
-              <a:lnSpc>
-                <a:spcPct val="112000"/>
-              </a:lnSpc>
-              <a:spcAft>
-                <a:spcPts val="500"/>
-              </a:spcAft>
-            </a:pPr>
-            <a:r>
-              <a:rPr sz="1300" b="0">
-                <a:solidFill>
-                  <a:srgbClr val="333333"/>
-                </a:solidFill>
-                <a:latin typeface="Fira Sans"/>
-              </a:rPr>
-              <a:t>     ◦  </a:t>
-            </a:r>
-            <a:r>
-              <a:rPr sz="1300" b="0">
-                <a:solidFill>
-                  <a:srgbClr val="333333"/>
-                </a:solidFill>
-                <a:latin typeface="Fira Sans"/>
-              </a:rPr>
-              <a:t>Transformar los datos cambia su valor.</a:t>
+              <a:t>r = 0: sin asociación lineal (puede existir asociación de otra forma).</a:t>
             </a:r>
           </a:p>
           <a:p>
@@ -10015,7 +10271,7 @@
         <p:spPr>
           <a:xfrm>
             <a:off x="4892040" y="1371600"/>
-            <a:ext cx="3840480" cy="3313850"/>
+            <a:ext cx="3840480" cy="3465730"/>
           </a:xfrm>
           <a:prstGeom prst="rect">
             <a:avLst/>
@@ -10164,7 +10420,7 @@
                 </a:solidFill>
                 <a:latin typeface="Fira Sans"/>
               </a:rPr>
-              <a:t>El mismo Pearson, calculado sobre los rangos: la posición de cada valor al ordenar.</a:t>
+              <a:t>El mismo Pearson, calculado sobre los rangos: la posición de cada valor al ordenar (1 = el menor). Se denota ρ (rho).</a:t>
             </a:r>
           </a:p>
           <a:p>
@@ -10192,7 +10448,7 @@
                 </a:solidFill>
                 <a:latin typeface="Fira Sans"/>
               </a:rPr>
-              <a:t>Sin empates:  ρ = 1 - 6·Σd² / (n·(n² - 1)),  con d la diferencia de rangos.</a:t>
+              <a:t>En la fórmula: dᵢ es la diferencia entre los rangos del caso i en ambas variables; n, el número de pares. Vale sin empates.</a:t>
             </a:r>
           </a:p>
           <a:p>
@@ -10220,7 +10476,7 @@
                 </a:solidFill>
                 <a:latin typeface="Fira Sans"/>
               </a:rPr>
-              <a:t>Los valores 5, 12, 8 y 200 tienen rangos 1, 3, 2 y 4: el 200 pasa a ser solo el cuarto.</a:t>
+              <a:t>Los valores 5, 12, 8 y 200 tienen rangos 1, 3, 2 y 4: la magnitud desaparece, queda el orden.</a:t>
             </a:r>
           </a:p>
           <a:p>
@@ -10248,7 +10504,7 @@
                 </a:solidFill>
                 <a:latin typeface="Fira Sans"/>
               </a:rPr>
-              <a:t>Robusto a extremos, invariante ante transformaciones monótonas, y válido para variables ordinales.</a:t>
+              <a:t>Mide asociación monotónica: robusto a extremos, invariante ante transformaciones monótonas, válido para ordinales.</a:t>
             </a:r>
           </a:p>
         </p:txBody>
@@ -10270,7 +10526,7 @@
         <p:spPr>
           <a:xfrm>
             <a:off x="4892040" y="1371600"/>
-            <a:ext cx="3840480" cy="3382599"/>
+            <a:ext cx="3840480" cy="3527147"/>
           </a:xfrm>
           <a:prstGeom prst="rect">
             <a:avLst/>
@@ -10522,7 +10778,7 @@
                 </a:solidFill>
                 <a:latin typeface="Fira Sans"/>
               </a:rPr>
-              <a:t>¿Cuándo usar cada coeficiente?</a:t>
+              <a:t>Cuando la relación no es lineal, el coeficiente puede ocultarla</a:t>
             </a:r>
           </a:p>
         </p:txBody>
@@ -10573,7 +10829,7 @@
                 </a:solidFill>
                 <a:latin typeface="Fira Sans"/>
               </a:rPr>
-              <a:t>Pearson: relación aproximadamente recta, sin extremos dominantes; antesala del modelo lineal.</a:t>
+              <a:t>Los viajes por persona según la edad: suben hasta los 30 a 40 años y luego bajan.</a:t>
             </a:r>
           </a:p>
           <a:p>
@@ -10601,7 +10857,7 @@
                 </a:solidFill>
                 <a:latin typeface="Fira Sans"/>
               </a:rPr>
-              <a:t>Spearman: asimetrías, extremos, curvas crecientes, o variables ordinales.</a:t>
+              <a:t>La asociación es clara, pero r = 0,04 y ρ = 0,05.</a:t>
             </a:r>
           </a:p>
           <a:p>
@@ -10629,7 +10885,7 @@
                 </a:solidFill>
                 <a:latin typeface="Fira Sans"/>
               </a:rPr>
-              <a:t>La brecha entre ambos es un diagnóstico: 0,43 contra 0,76 indica curva o extremos.</a:t>
+              <a:t>La relación no es monótona: el tramo que sube y el que baja se cancelan.</a:t>
             </a:r>
           </a:p>
           <a:p>
@@ -10657,7 +10913,7 @@
                 </a:solidFill>
                 <a:latin typeface="Fira Sans"/>
               </a:rPr>
-              <a:t>Tras el logaritmo, Pearson llega a 0,73, casi igual a Spearman.</a:t>
+              <a:t>Ni Pearson ni Spearman están diseñados para esta forma.</a:t>
             </a:r>
           </a:p>
           <a:p>
@@ -10685,14 +10941,14 @@
                 </a:solidFill>
                 <a:latin typeface="Fira Sans"/>
               </a:rPr>
-              <a:t>Calcule ambos; si difieren mucho, mire el gráfico antes de reportar.</a:t>
+              <a:t>Un coeficiente cercano a cero no demuestra ausencia de asociación: el gráfico sí la muestra.</a:t>
             </a:r>
           </a:p>
         </p:txBody>
       </p:sp>
       <p:pic>
         <p:nvPicPr>
-          <p:cNvPr id="5" name="Picture 4" descr="18_loglog.png"/>
+          <p:cNvPr id="5" name="Picture 4" descr="19_edad_viajes.png"/>
           <p:cNvPicPr>
             <a:picLocks noChangeAspect="1"/>
           </p:cNvPicPr>
@@ -10707,7 +10963,7 @@
         <p:spPr>
           <a:xfrm>
             <a:off x="4892040" y="1371600"/>
-            <a:ext cx="3840480" cy="3350924"/>
+            <a:ext cx="3840480" cy="2479524"/>
           </a:xfrm>
           <a:prstGeom prst="rect">
             <a:avLst/>

--- a/presentaciones/clase02_pandas_eda.pptx
+++ b/presentaciones/clase02_pandas_eda.pptx
@@ -40,6 +40,7 @@
     <p:sldId id="288" r:id="rId39"/>
     <p:sldId id="289" r:id="rId40"/>
     <p:sldId id="290" r:id="rId41"/>
+    <p:sldId id="291" r:id="rId42"/>
   </p:sldIdLst>
   <p:sldSz cx="9144000" cy="5138928" type="screen4x3"/>
   <p:notesSz cx="6858000" cy="9144000"/>
@@ -3389,7 +3390,7 @@
                 </a:solidFill>
                 <a:latin typeface="Fira Sans"/>
               </a:rPr>
-              <a:t>¿Cuándo usar cada coeficiente?</a:t>
+              <a:t>Cuando la relación no es lineal, el coeficiente puede ocultarla</a:t>
             </a:r>
           </a:p>
         </p:txBody>
@@ -3440,7 +3441,7 @@
                 </a:solidFill>
                 <a:latin typeface="Fira Sans"/>
               </a:rPr>
-              <a:t>Pearson: relación aproximadamente recta, sin extremos dominantes; antesala del modelo lineal.</a:t>
+              <a:t>Los viajes por persona según la edad: suben hasta los 30 a 40 años y luego bajan.</a:t>
             </a:r>
           </a:p>
           <a:p>
@@ -3468,7 +3469,7 @@
                 </a:solidFill>
                 <a:latin typeface="Fira Sans"/>
               </a:rPr>
-              <a:t>Spearman: asimetrías, extremos, curvas crecientes, o variables ordinales.</a:t>
+              <a:t>La asociación es clara, pero r = 0,04 y ρ = 0,05.</a:t>
             </a:r>
           </a:p>
           <a:p>
@@ -3496,7 +3497,7 @@
                 </a:solidFill>
                 <a:latin typeface="Fira Sans"/>
               </a:rPr>
-              <a:t>La brecha entre ambos es un diagnóstico: 0,43 contra 0,76 indica curva o extremos.</a:t>
+              <a:t>La relación no es monótona: el tramo que sube y el que baja se cancelan.</a:t>
             </a:r>
           </a:p>
           <a:p>
@@ -3524,7 +3525,7 @@
                 </a:solidFill>
                 <a:latin typeface="Fira Sans"/>
               </a:rPr>
-              <a:t>Tras el logaritmo, Pearson llega a 0,73, casi igual a Spearman.</a:t>
+              <a:t>Ni Pearson ni Spearman están diseñados para esta forma.</a:t>
             </a:r>
           </a:p>
           <a:p>
@@ -3552,14 +3553,14 @@
                 </a:solidFill>
                 <a:latin typeface="Fira Sans"/>
               </a:rPr>
-              <a:t>Calcule ambos; si difieren mucho, mire el gráfico antes de reportar.</a:t>
+              <a:t>Un coeficiente cercano a cero no demuestra ausencia de asociación: el gráfico sí la muestra.</a:t>
             </a:r>
           </a:p>
         </p:txBody>
       </p:sp>
       <p:pic>
         <p:nvPicPr>
-          <p:cNvPr id="5" name="Picture 4" descr="18_loglog.png"/>
+          <p:cNvPr id="5" name="Picture 4" descr="19_edad_viajes.png"/>
           <p:cNvPicPr>
             <a:picLocks noChangeAspect="1"/>
           </p:cNvPicPr>
@@ -3574,7 +3575,7 @@
         <p:spPr>
           <a:xfrm>
             <a:off x="4892040" y="1371600"/>
-            <a:ext cx="3840480" cy="3350924"/>
+            <a:ext cx="3840480" cy="2479524"/>
           </a:xfrm>
           <a:prstGeom prst="rect">
             <a:avLst/>
@@ -3672,7 +3673,7 @@
                 </a:solidFill>
                 <a:latin typeface="Fira Sans"/>
               </a:rPr>
-              <a:t>Correlación y causalidad</a:t>
+              <a:t>¿Cuándo usar cada coeficiente?</a:t>
             </a:r>
           </a:p>
         </p:txBody>
@@ -3685,8 +3686,8 @@
         </p:nvSpPr>
         <p:spPr>
           <a:xfrm>
-            <a:off x="704088" y="1353312"/>
-            <a:ext cx="7744968" cy="3300984"/>
+            <a:off x="502920" y="1252728"/>
+            <a:ext cx="4023360" cy="3200400"/>
           </a:xfrm>
           <a:prstGeom prst="rect">
             <a:avLst/>
@@ -3708,7 +3709,7 @@
               </a:spcAft>
             </a:pPr>
             <a:r>
-              <a:rPr sz="1800" b="1">
+              <a:rPr sz="1500" b="1">
                 <a:solidFill>
                   <a:srgbClr val="E0A437"/>
                 </a:solidFill>
@@ -3717,13 +3718,41 @@
               <a:t>▸ </a:t>
             </a:r>
             <a:r>
-              <a:rPr sz="1800" b="0">
+              <a:rPr sz="1500" b="0">
                 <a:solidFill>
                   <a:srgbClr val="000000"/>
                 </a:solidFill>
                 <a:latin typeface="Fira Sans"/>
               </a:rPr>
-              <a:t>Causalidad: intervenir X cambiaría Y. Es una afirmación más fuerte que la asociación.</a:t>
+              <a:t>Pearson: relación aproximadamente recta, sin extremos dominantes; antesala del modelo lineal.</a:t>
+            </a:r>
+          </a:p>
+          <a:p>
+            <a:pPr>
+              <a:lnSpc>
+                <a:spcPct val="112000"/>
+              </a:lnSpc>
+              <a:spcAft>
+                <a:spcPts val="900"/>
+              </a:spcAft>
+            </a:pPr>
+            <a:r>
+              <a:rPr sz="1500" b="1">
+                <a:solidFill>
+                  <a:srgbClr val="E0A437"/>
+                </a:solidFill>
+                <a:latin typeface="Fira Sans"/>
+              </a:rPr>
+              <a:t>▸ </a:t>
+            </a:r>
+            <a:r>
+              <a:rPr sz="1500" b="0">
+                <a:solidFill>
+                  <a:srgbClr val="000000"/>
+                </a:solidFill>
+                <a:latin typeface="Fira Sans"/>
+              </a:rPr>
+              <a:t>Spearman: asimetrías, extremos, curvas crecientes, o variables ordinales.</a:t>
             </a:r>
           </a:p>
           <a:p>
@@ -3736,7 +3765,7 @@
               </a:spcAft>
             </a:pPr>
             <a:r>
-              <a:rPr sz="1400" b="0">
+              <a:rPr sz="1300" b="0">
                 <a:solidFill>
                   <a:srgbClr val="333333"/>
                 </a:solidFill>
@@ -3745,13 +3774,13 @@
               <a:t>     ◦  </a:t>
             </a:r>
             <a:r>
-              <a:rPr sz="1400" b="0">
+              <a:rPr sz="1300" b="0">
                 <a:solidFill>
                   <a:srgbClr val="333333"/>
                 </a:solidFill>
                 <a:latin typeface="Fira Sans"/>
               </a:rPr>
-              <a:t>Una asociación observada admite varias explicaciones: X causa Y, Y causa X, o una variable de confusión Z afecta a ambas.</a:t>
+              <a:t>La brecha entre ambos es un diagnóstico: 0,43 contra 0,76 indica curva o extremos.</a:t>
             </a:r>
           </a:p>
           <a:p>
@@ -3764,7 +3793,7 @@
               </a:spcAft>
             </a:pPr>
             <a:r>
-              <a:rPr sz="1400" b="0">
+              <a:rPr sz="1300" b="0">
                 <a:solidFill>
                   <a:srgbClr val="333333"/>
                 </a:solidFill>
@@ -3773,41 +3802,13 @@
               <a:t>     ◦  </a:t>
             </a:r>
             <a:r>
-              <a:rPr sz="1400" b="0">
+              <a:rPr sz="1300" b="0">
                 <a:solidFill>
                   <a:srgbClr val="333333"/>
                 </a:solidFill>
                 <a:latin typeface="Fira Sans"/>
               </a:rPr>
-              <a:t>Los datos observacionales, como los de una encuesta, muestran asociación; no bastan para establecer causalidad.</a:t>
-            </a:r>
-          </a:p>
-          <a:p>
-            <a:pPr>
-              <a:lnSpc>
-                <a:spcPct val="112000"/>
-              </a:lnSpc>
-              <a:spcAft>
-                <a:spcPts val="500"/>
-              </a:spcAft>
-            </a:pPr>
-            <a:r>
-              <a:rPr sz="1400" b="0">
-                <a:solidFill>
-                  <a:srgbClr val="333333"/>
-                </a:solidFill>
-                <a:latin typeface="Fira Sans"/>
-              </a:rPr>
-              <a:t>     ◦  </a:t>
-            </a:r>
-            <a:r>
-              <a:rPr sz="1400" b="0">
-                <a:solidFill>
-                  <a:srgbClr val="333333"/>
-                </a:solidFill>
-                <a:latin typeface="Fira Sans"/>
-              </a:rPr>
-              <a:t>La inferencia causal tiene métodos propios; este curso no los cubre.</a:t>
+              <a:t>Tras el logaritmo, Pearson llega a 0,73, casi igual a Spearman.</a:t>
             </a:r>
           </a:p>
           <a:p>
@@ -3820,7 +3821,7 @@
               </a:spcAft>
             </a:pPr>
             <a:r>
-              <a:rPr sz="1800" b="1">
+              <a:rPr sz="1500" b="1">
                 <a:solidFill>
                   <a:srgbClr val="E0A437"/>
                 </a:solidFill>
@@ -3829,17 +3830,41 @@
               <a:t>▸ </a:t>
             </a:r>
             <a:r>
-              <a:rPr sz="1800" b="1">
+              <a:rPr sz="1500" b="1">
                 <a:solidFill>
                   <a:srgbClr val="1D3557"/>
                 </a:solidFill>
                 <a:latin typeface="Fira Sans"/>
               </a:rPr>
-              <a:t>Regla de trabajo: una asociación se reporta como asociación, sin verbos causales que los datos no respaldan.</a:t>
-            </a:r>
-          </a:p>
-        </p:txBody>
-      </p:sp>
+              <a:t>Calcule ambos; si difieren mucho, mire el gráfico antes de reportar.</a:t>
+            </a:r>
+          </a:p>
+        </p:txBody>
+      </p:sp>
+      <p:pic>
+        <p:nvPicPr>
+          <p:cNvPr id="5" name="Picture 4" descr="18_loglog.png"/>
+          <p:cNvPicPr>
+            <a:picLocks noChangeAspect="1"/>
+          </p:cNvPicPr>
+          <p:nvPr/>
+        </p:nvPicPr>
+        <p:blipFill>
+          <a:blip r:embed="rId2"/>
+          <a:stretch>
+            <a:fillRect/>
+          </a:stretch>
+        </p:blipFill>
+        <p:spPr>
+          <a:xfrm>
+            <a:off x="4892040" y="1371600"/>
+            <a:ext cx="3840480" cy="3350924"/>
+          </a:xfrm>
+          <a:prstGeom prst="rect">
+            <a:avLst/>
+          </a:prstGeom>
+        </p:spPr>
+      </p:pic>
     </p:spTree>
   </p:cSld>
   <p:clrMapOvr>
@@ -3931,45 +3956,21 @@
                 </a:solidFill>
                 <a:latin typeface="Fira Sans"/>
               </a:rPr>
-              <a:t>Tipos de datos</a:t>
-            </a:r>
-          </a:p>
-        </p:txBody>
-      </p:sp>
-      <p:pic>
-        <p:nvPicPr>
-          <p:cNvPr id="4" name="Picture 3" descr="11_diagrama_tipos.png"/>
-          <p:cNvPicPr>
-            <a:picLocks noChangeAspect="1"/>
-          </p:cNvPicPr>
-          <p:nvPr/>
-        </p:nvPicPr>
-        <p:blipFill>
-          <a:blip r:embed="rId2"/>
-          <a:stretch>
-            <a:fillRect/>
-          </a:stretch>
-        </p:blipFill>
-        <p:spPr>
-          <a:xfrm>
-            <a:off x="2065807" y="1143000"/>
-            <a:ext cx="5012385" cy="3154680"/>
-          </a:xfrm>
-          <a:prstGeom prst="rect">
-            <a:avLst/>
-          </a:prstGeom>
-        </p:spPr>
-      </p:pic>
-      <p:sp>
-        <p:nvSpPr>
-          <p:cNvPr id="5" name="TextBox 4"/>
+              <a:t>Correlación y causalidad</a:t>
+            </a:r>
+          </a:p>
+        </p:txBody>
+      </p:sp>
+      <p:sp>
+        <p:nvSpPr>
+          <p:cNvPr id="4" name="TextBox 3"/>
           <p:cNvSpPr txBox="1"/>
           <p:nvPr/>
         </p:nvSpPr>
         <p:spPr>
           <a:xfrm>
-            <a:off x="704088" y="4434840"/>
-            <a:ext cx="7744968" cy="457200"/>
+            <a:off x="704088" y="1353312"/>
+            <a:ext cx="7744968" cy="3300984"/>
           </a:xfrm>
           <a:prstGeom prst="rect">
             <a:avLst/>
@@ -3982,14 +3983,143 @@
           </a:bodyPr>
           <a:lstStyle/>
           <a:p>
-            <a:r>
-              <a:rPr sz="1300" b="0">
+            <a:pPr>
+              <a:lnSpc>
+                <a:spcPct val="112000"/>
+              </a:lnSpc>
+              <a:spcAft>
+                <a:spcPts val="900"/>
+              </a:spcAft>
+            </a:pPr>
+            <a:r>
+              <a:rPr sz="1800" b="1">
+                <a:solidFill>
+                  <a:srgbClr val="E0A437"/>
+                </a:solidFill>
+                <a:latin typeface="Fira Sans"/>
+              </a:rPr>
+              <a:t>▸ </a:t>
+            </a:r>
+            <a:r>
+              <a:rPr sz="1800" b="0">
+                <a:solidFill>
+                  <a:srgbClr val="000000"/>
+                </a:solidFill>
+                <a:latin typeface="Fira Sans"/>
+              </a:rPr>
+              <a:t>Causalidad: intervenir X cambiaría Y. Es una afirmación más fuerte que la asociación.</a:t>
+            </a:r>
+          </a:p>
+          <a:p>
+            <a:pPr>
+              <a:lnSpc>
+                <a:spcPct val="112000"/>
+              </a:lnSpc>
+              <a:spcAft>
+                <a:spcPts val="500"/>
+              </a:spcAft>
+            </a:pPr>
+            <a:r>
+              <a:rPr sz="1400" b="0">
                 <a:solidFill>
                   <a:srgbClr val="333333"/>
                 </a:solidFill>
                 <a:latin typeface="Fira Sans"/>
               </a:rPr>
-              <a:t>El tipo de la variable determina qué operaciones tienen sentido (Bruce, Bruce y Gedeck, 2020, cap. 1).</a:t>
+              <a:t>     ◦  </a:t>
+            </a:r>
+            <a:r>
+              <a:rPr sz="1400" b="0">
+                <a:solidFill>
+                  <a:srgbClr val="333333"/>
+                </a:solidFill>
+                <a:latin typeface="Fira Sans"/>
+              </a:rPr>
+              <a:t>Una asociación observada admite varias explicaciones: X causa Y, Y causa X, o una variable de confusión Z afecta a ambas.</a:t>
+            </a:r>
+          </a:p>
+          <a:p>
+            <a:pPr>
+              <a:lnSpc>
+                <a:spcPct val="112000"/>
+              </a:lnSpc>
+              <a:spcAft>
+                <a:spcPts val="500"/>
+              </a:spcAft>
+            </a:pPr>
+            <a:r>
+              <a:rPr sz="1400" b="0">
+                <a:solidFill>
+                  <a:srgbClr val="333333"/>
+                </a:solidFill>
+                <a:latin typeface="Fira Sans"/>
+              </a:rPr>
+              <a:t>     ◦  </a:t>
+            </a:r>
+            <a:r>
+              <a:rPr sz="1400" b="0">
+                <a:solidFill>
+                  <a:srgbClr val="333333"/>
+                </a:solidFill>
+                <a:latin typeface="Fira Sans"/>
+              </a:rPr>
+              <a:t>Los datos observacionales, como los de una encuesta, muestran asociación; no bastan para establecer causalidad.</a:t>
+            </a:r>
+          </a:p>
+          <a:p>
+            <a:pPr>
+              <a:lnSpc>
+                <a:spcPct val="112000"/>
+              </a:lnSpc>
+              <a:spcAft>
+                <a:spcPts val="500"/>
+              </a:spcAft>
+            </a:pPr>
+            <a:r>
+              <a:rPr sz="1400" b="0">
+                <a:solidFill>
+                  <a:srgbClr val="333333"/>
+                </a:solidFill>
+                <a:latin typeface="Fira Sans"/>
+              </a:rPr>
+              <a:t>     ◦  </a:t>
+            </a:r>
+            <a:r>
+              <a:rPr sz="1400" b="0">
+                <a:solidFill>
+                  <a:srgbClr val="333333"/>
+                </a:solidFill>
+                <a:latin typeface="Fira Sans"/>
+              </a:rPr>
+              <a:t>La inferencia causal tiene métodos propios; este curso no los cubre.</a:t>
+            </a:r>
+          </a:p>
+          <a:p>
+            <a:pPr>
+              <a:lnSpc>
+                <a:spcPct val="112000"/>
+              </a:lnSpc>
+              <a:spcAft>
+                <a:spcPts val="900"/>
+              </a:spcAft>
+            </a:pPr>
+            <a:r>
+              <a:rPr sz="1800" b="1">
+                <a:solidFill>
+                  <a:srgbClr val="E0A437"/>
+                </a:solidFill>
+                <a:latin typeface="Fira Sans"/>
+              </a:rPr>
+              <a:t>▸ </a:t>
+            </a:r>
+            <a:r>
+              <a:rPr sz="1800" b="1">
+                <a:solidFill>
+                  <a:srgbClr val="1D3557"/>
+                </a:solidFill>
+                <a:latin typeface="Fira Sans"/>
+              </a:rPr>
+              <a:t>Regla de trabajo: una asociación se reporta como asociación, sin verbos causales que los datos no respaldan.</a:t>
             </a:r>
           </a:p>
         </p:txBody>
@@ -4085,21 +4215,45 @@
                 </a:solidFill>
                 <a:latin typeface="Fira Sans"/>
               </a:rPr>
-              <a:t>El tipo estadístico no es el tipo computacional</a:t>
-            </a:r>
-          </a:p>
-        </p:txBody>
-      </p:sp>
-      <p:sp>
-        <p:nvSpPr>
-          <p:cNvPr id="4" name="TextBox 3"/>
+              <a:t>Tipos de datos</a:t>
+            </a:r>
+          </a:p>
+        </p:txBody>
+      </p:sp>
+      <p:pic>
+        <p:nvPicPr>
+          <p:cNvPr id="4" name="Picture 3" descr="11_diagrama_tipos.png"/>
+          <p:cNvPicPr>
+            <a:picLocks noChangeAspect="1"/>
+          </p:cNvPicPr>
+          <p:nvPr/>
+        </p:nvPicPr>
+        <p:blipFill>
+          <a:blip r:embed="rId2"/>
+          <a:stretch>
+            <a:fillRect/>
+          </a:stretch>
+        </p:blipFill>
+        <p:spPr>
+          <a:xfrm>
+            <a:off x="2065807" y="1143000"/>
+            <a:ext cx="5012385" cy="3154680"/>
+          </a:xfrm>
+          <a:prstGeom prst="rect">
+            <a:avLst/>
+          </a:prstGeom>
+        </p:spPr>
+      </p:pic>
+      <p:sp>
+        <p:nvSpPr>
+          <p:cNvPr id="5" name="TextBox 4"/>
           <p:cNvSpPr txBox="1"/>
           <p:nvPr/>
         </p:nvSpPr>
         <p:spPr>
           <a:xfrm>
-            <a:off x="704088" y="1353312"/>
-            <a:ext cx="7744968" cy="3300984"/>
+            <a:off x="704088" y="4434840"/>
+            <a:ext cx="7744968" cy="457200"/>
           </a:xfrm>
           <a:prstGeom prst="rect">
             <a:avLst/>
@@ -4112,143 +4266,14 @@
           </a:bodyPr>
           <a:lstStyle/>
           <a:p>
-            <a:pPr>
-              <a:lnSpc>
-                <a:spcPct val="112000"/>
-              </a:lnSpc>
-              <a:spcAft>
-                <a:spcPts val="900"/>
-              </a:spcAft>
-            </a:pPr>
-            <a:r>
-              <a:rPr sz="1800" b="1">
-                <a:solidFill>
-                  <a:srgbClr val="E0A437"/>
-                </a:solidFill>
-                <a:latin typeface="Fira Sans"/>
-              </a:rPr>
-              <a:t>▸ </a:t>
-            </a:r>
-            <a:r>
-              <a:rPr sz="1800" b="0">
-                <a:solidFill>
-                  <a:srgbClr val="000000"/>
-                </a:solidFill>
-                <a:latin typeface="Fira Sans"/>
-              </a:rPr>
-              <a:t>En la EOD el sexo viene codificado 1 o 2: para Pandas es un entero (int64).</a:t>
-            </a:r>
-          </a:p>
-          <a:p>
-            <a:pPr>
-              <a:lnSpc>
-                <a:spcPct val="112000"/>
-              </a:lnSpc>
-              <a:spcAft>
-                <a:spcPts val="900"/>
-              </a:spcAft>
-            </a:pPr>
-            <a:r>
-              <a:rPr sz="1800" b="1">
-                <a:solidFill>
-                  <a:srgbClr val="E0A437"/>
-                </a:solidFill>
-                <a:latin typeface="Fira Sans"/>
-              </a:rPr>
-              <a:t>▸ </a:t>
-            </a:r>
-            <a:r>
-              <a:rPr sz="1800" b="0">
-                <a:solidFill>
-                  <a:srgbClr val="000000"/>
-                </a:solidFill>
-                <a:latin typeface="Fira Sans"/>
-              </a:rPr>
-              <a:t>El tipo computacional permite operar; el tipo estadístico decide si la operación significa algo.</a:t>
-            </a:r>
-          </a:p>
-          <a:p>
-            <a:pPr>
-              <a:lnSpc>
-                <a:spcPct val="112000"/>
-              </a:lnSpc>
-              <a:spcAft>
-                <a:spcPts val="500"/>
-              </a:spcAft>
-            </a:pPr>
-            <a:r>
-              <a:rPr sz="1400" b="0">
+            <a:r>
+              <a:rPr sz="1300" b="0">
                 <a:solidFill>
                   <a:srgbClr val="333333"/>
                 </a:solidFill>
                 <a:latin typeface="Fira Sans"/>
               </a:rPr>
-              <a:t>     ◦  </a:t>
-            </a:r>
-            <a:r>
-              <a:rPr sz="1400" b="0">
-                <a:solidFill>
-                  <a:srgbClr val="333333"/>
-                </a:solidFill>
-                <a:latin typeface="Fira Sans"/>
-              </a:rPr>
-              <a:t>El promedio de Sexo en la EOD es 1,53: aritméticamente correcto, sin significado.</a:t>
-            </a:r>
-          </a:p>
-          <a:p>
-            <a:pPr>
-              <a:lnSpc>
-                <a:spcPct val="112000"/>
-              </a:lnSpc>
-              <a:spcAft>
-                <a:spcPts val="500"/>
-              </a:spcAft>
-            </a:pPr>
-            <a:r>
-              <a:rPr sz="1400" b="0">
-                <a:solidFill>
-                  <a:srgbClr val="333333"/>
-                </a:solidFill>
-                <a:latin typeface="Fira Sans"/>
-              </a:rPr>
-              <a:t>     ◦  </a:t>
-            </a:r>
-            <a:r>
-              <a:rPr sz="1400" b="0">
-                <a:solidFill>
-                  <a:srgbClr val="333333"/>
-                </a:solidFill>
-                <a:latin typeface="Fira Sans"/>
-              </a:rPr>
-              <a:t>El promedio de Edad sí es interpretable: la variable es numérica.</a:t>
-            </a:r>
-          </a:p>
-          <a:p>
-            <a:pPr>
-              <a:lnSpc>
-                <a:spcPct val="112000"/>
-              </a:lnSpc>
-              <a:spcAft>
-                <a:spcPts val="900"/>
-              </a:spcAft>
-            </a:pPr>
-            <a:r>
-              <a:rPr sz="1800" b="1">
-                <a:solidFill>
-                  <a:srgbClr val="E0A437"/>
-                </a:solidFill>
-                <a:latin typeface="Fira Sans"/>
-              </a:rPr>
-              <a:t>▸ </a:t>
-            </a:r>
-            <a:r>
-              <a:rPr sz="1800" b="1">
-                <a:solidFill>
-                  <a:srgbClr val="1D3557"/>
-                </a:solidFill>
-                <a:latin typeface="Fira Sans"/>
-              </a:rPr>
-              <a:t>Identificar el tipo de cada variable es un paso del análisis, no una formalidad.</a:t>
+              <a:t>El tipo de la variable determina qué operaciones tienen sentido (Bruce, Bruce y Gedeck, 2020, cap. 1).</a:t>
             </a:r>
           </a:p>
         </p:txBody>
@@ -4344,7 +4369,7 @@
                 </a:solidFill>
                 <a:latin typeface="Fira Sans"/>
               </a:rPr>
-              <a:t>El análisis exploratorio de datos</a:t>
+              <a:t>El tipo estadístico no es el tipo computacional</a:t>
             </a:r>
           </a:p>
         </p:txBody>
@@ -4395,7 +4420,7 @@
                 </a:solidFill>
                 <a:latin typeface="Fira Sans"/>
               </a:rPr>
-              <a:t>La etapa en que se examinan los datos antes de modelarlos (Tukey, 1977).</a:t>
+              <a:t>En la EOD el sexo viene codificado 1 o 2: para Pandas es un entero (int64).</a:t>
             </a:r>
           </a:p>
           <a:p>
@@ -4423,7 +4448,7 @@
                 </a:solidFill>
                 <a:latin typeface="Fira Sans"/>
               </a:rPr>
-              <a:t>Responde cuatro tipos de pregunta:</a:t>
+              <a:t>El tipo computacional permite operar; el tipo estadístico decide si la operación significa algo.</a:t>
             </a:r>
           </a:p>
           <a:p>
@@ -4451,7 +4476,7 @@
                 </a:solidFill>
                 <a:latin typeface="Fira Sans"/>
               </a:rPr>
-              <a:t>La forma: cómo se distribuye cada variable.</a:t>
+              <a:t>El promedio de Sexo en la EOD es 1,53: aritméticamente correcto, sin significado.</a:t>
             </a:r>
           </a:p>
           <a:p>
@@ -4479,63 +4504,7 @@
                 </a:solidFill>
                 <a:latin typeface="Fira Sans"/>
               </a:rPr>
-              <a:t>Lo típico y lo extremo: qué es frecuente y qué es anómalo.</a:t>
-            </a:r>
-          </a:p>
-          <a:p>
-            <a:pPr>
-              <a:lnSpc>
-                <a:spcPct val="112000"/>
-              </a:lnSpc>
-              <a:spcAft>
-                <a:spcPts val="500"/>
-              </a:spcAft>
-            </a:pPr>
-            <a:r>
-              <a:rPr sz="1400" b="0">
-                <a:solidFill>
-                  <a:srgbClr val="333333"/>
-                </a:solidFill>
-                <a:latin typeface="Fira Sans"/>
-              </a:rPr>
-              <a:t>     ◦  </a:t>
-            </a:r>
-            <a:r>
-              <a:rPr sz="1400" b="0">
-                <a:solidFill>
-                  <a:srgbClr val="333333"/>
-                </a:solidFill>
-                <a:latin typeface="Fira Sans"/>
-              </a:rPr>
-              <a:t>Lo que falta: qué datos están ausentes y con qué patrón.</a:t>
-            </a:r>
-          </a:p>
-          <a:p>
-            <a:pPr>
-              <a:lnSpc>
-                <a:spcPct val="112000"/>
-              </a:lnSpc>
-              <a:spcAft>
-                <a:spcPts val="500"/>
-              </a:spcAft>
-            </a:pPr>
-            <a:r>
-              <a:rPr sz="1400" b="0">
-                <a:solidFill>
-                  <a:srgbClr val="333333"/>
-                </a:solidFill>
-                <a:latin typeface="Fira Sans"/>
-              </a:rPr>
-              <a:t>     ◦  </a:t>
-            </a:r>
-            <a:r>
-              <a:rPr sz="1400" b="0">
-                <a:solidFill>
-                  <a:srgbClr val="333333"/>
-                </a:solidFill>
-                <a:latin typeface="Fira Sans"/>
-              </a:rPr>
-              <a:t>Las relaciones: qué variables se asocian con qué otras.</a:t>
+              <a:t>El promedio de Edad sí es interpretable: la variable es numérica.</a:t>
             </a:r>
           </a:p>
           <a:p>
@@ -4557,41 +4526,13 @@
               <a:t>▸ </a:t>
             </a:r>
             <a:r>
-              <a:rPr sz="1800" b="0">
-                <a:solidFill>
-                  <a:srgbClr val="000000"/>
-                </a:solidFill>
-                <a:latin typeface="Fira Sans"/>
-              </a:rPr>
-              <a:t>Genera hipótesis; el análisis confirmatorio (unidad 5) las pone a prueba.</a:t>
-            </a:r>
-          </a:p>
-          <a:p>
-            <a:pPr>
-              <a:lnSpc>
-                <a:spcPct val="112000"/>
-              </a:lnSpc>
-              <a:spcAft>
-                <a:spcPts val="900"/>
-              </a:spcAft>
-            </a:pPr>
-            <a:r>
               <a:rPr sz="1800" b="1">
                 <a:solidFill>
-                  <a:srgbClr val="E0A437"/>
-                </a:solidFill>
-                <a:latin typeface="Fira Sans"/>
-              </a:rPr>
-              <a:t>▸ </a:t>
-            </a:r>
-            <a:r>
-              <a:rPr sz="1800" b="1">
-                <a:solidFill>
                   <a:srgbClr val="1D3557"/>
                 </a:solidFill>
                 <a:latin typeface="Fira Sans"/>
               </a:rPr>
-              <a:t>Una pregunta transversal para toda cifra resumen: ¿de quién habla este número? ¿De la muestra, de un subgrupo, de la ciudad?</a:t>
+              <a:t>Identificar el tipo de cada variable es un paso del análisis, no una formalidad.</a:t>
             </a:r>
           </a:p>
         </p:txBody>
@@ -4629,7 +4570,7 @@
             <a:avLst/>
           </a:prstGeom>
           <a:solidFill>
-            <a:srgbClr val="1D3557"/>
+            <a:srgbClr val="FAFBFC"/>
           </a:solidFill>
           <a:ln>
             <a:noFill/>
@@ -4666,8 +4607,8 @@
         </p:nvSpPr>
         <p:spPr>
           <a:xfrm>
-            <a:off x="603504" y="1847088"/>
-            <a:ext cx="7946136" cy="1399032"/>
+            <a:off x="402336" y="301752"/>
+            <a:ext cx="8348472" cy="795528"/>
           </a:xfrm>
           <a:prstGeom prst="rect">
             <a:avLst/>
@@ -4681,24 +4622,260 @@
           <a:lstStyle/>
           <a:p>
             <a:r>
-              <a:rPr sz="3400" b="1">
-                <a:solidFill>
-                  <a:srgbClr val="FFFFFF"/>
-                </a:solidFill>
-                <a:latin typeface="Fira Sans"/>
-              </a:rPr>
-              <a:t>Los datos</a:t>
-            </a:r>
-          </a:p>
-          <a:p>
+              <a:rPr sz="2800" b="1">
+                <a:solidFill>
+                  <a:srgbClr val="0F0F0F"/>
+                </a:solidFill>
+                <a:latin typeface="Fira Sans"/>
+              </a:rPr>
+              <a:t>El análisis exploratorio de datos</a:t>
+            </a:r>
+          </a:p>
+        </p:txBody>
+      </p:sp>
+      <p:sp>
+        <p:nvSpPr>
+          <p:cNvPr id="4" name="TextBox 3"/>
+          <p:cNvSpPr txBox="1"/>
+          <p:nvPr/>
+        </p:nvSpPr>
+        <p:spPr>
+          <a:xfrm>
+            <a:off x="704088" y="1353312"/>
+            <a:ext cx="7744968" cy="3300984"/>
+          </a:xfrm>
+          <a:prstGeom prst="rect">
+            <a:avLst/>
+          </a:prstGeom>
+          <a:noFill/>
+        </p:spPr>
+        <p:txBody>
+          <a:bodyPr wrap="square">
+            <a:spAutoFit/>
+          </a:bodyPr>
+          <a:lstStyle/>
+          <a:p>
+            <a:pPr>
+              <a:lnSpc>
+                <a:spcPct val="112000"/>
+              </a:lnSpc>
+              <a:spcAft>
+                <a:spcPts val="900"/>
+              </a:spcAft>
+            </a:pPr>
+            <a:r>
+              <a:rPr sz="1800" b="1">
+                <a:solidFill>
+                  <a:srgbClr val="E0A437"/>
+                </a:solidFill>
+                <a:latin typeface="Fira Sans"/>
+              </a:rPr>
+              <a:t>▸ </a:t>
+            </a:r>
             <a:r>
               <a:rPr sz="1800" b="0">
                 <a:solidFill>
+                  <a:srgbClr val="000000"/>
+                </a:solidFill>
+                <a:latin typeface="Fira Sans"/>
+              </a:rPr>
+              <a:t>La etapa en que se examinan los datos antes de modelarlos (Tukey, 1977).</a:t>
+            </a:r>
+          </a:p>
+          <a:p>
+            <a:pPr>
+              <a:lnSpc>
+                <a:spcPct val="112000"/>
+              </a:lnSpc>
+              <a:spcAft>
+                <a:spcPts val="900"/>
+              </a:spcAft>
+            </a:pPr>
+            <a:r>
+              <a:rPr sz="1800" b="1">
+                <a:solidFill>
                   <a:srgbClr val="E0A437"/>
                 </a:solidFill>
                 <a:latin typeface="Fira Sans"/>
               </a:rPr>
-              <a:t>Encuesta Origen Destino de Santiago 2012</a:t>
+              <a:t>▸ </a:t>
+            </a:r>
+            <a:r>
+              <a:rPr sz="1800" b="0">
+                <a:solidFill>
+                  <a:srgbClr val="000000"/>
+                </a:solidFill>
+                <a:latin typeface="Fira Sans"/>
+              </a:rPr>
+              <a:t>Responde cuatro tipos de pregunta:</a:t>
+            </a:r>
+          </a:p>
+          <a:p>
+            <a:pPr>
+              <a:lnSpc>
+                <a:spcPct val="112000"/>
+              </a:lnSpc>
+              <a:spcAft>
+                <a:spcPts val="500"/>
+              </a:spcAft>
+            </a:pPr>
+            <a:r>
+              <a:rPr sz="1400" b="0">
+                <a:solidFill>
+                  <a:srgbClr val="333333"/>
+                </a:solidFill>
+                <a:latin typeface="Fira Sans"/>
+              </a:rPr>
+              <a:t>     ◦  </a:t>
+            </a:r>
+            <a:r>
+              <a:rPr sz="1400" b="0">
+                <a:solidFill>
+                  <a:srgbClr val="333333"/>
+                </a:solidFill>
+                <a:latin typeface="Fira Sans"/>
+              </a:rPr>
+              <a:t>La forma: cómo se distribuye cada variable.</a:t>
+            </a:r>
+          </a:p>
+          <a:p>
+            <a:pPr>
+              <a:lnSpc>
+                <a:spcPct val="112000"/>
+              </a:lnSpc>
+              <a:spcAft>
+                <a:spcPts val="500"/>
+              </a:spcAft>
+            </a:pPr>
+            <a:r>
+              <a:rPr sz="1400" b="0">
+                <a:solidFill>
+                  <a:srgbClr val="333333"/>
+                </a:solidFill>
+                <a:latin typeface="Fira Sans"/>
+              </a:rPr>
+              <a:t>     ◦  </a:t>
+            </a:r>
+            <a:r>
+              <a:rPr sz="1400" b="0">
+                <a:solidFill>
+                  <a:srgbClr val="333333"/>
+                </a:solidFill>
+                <a:latin typeface="Fira Sans"/>
+              </a:rPr>
+              <a:t>Lo típico y lo extremo: qué es frecuente y qué es anómalo.</a:t>
+            </a:r>
+          </a:p>
+          <a:p>
+            <a:pPr>
+              <a:lnSpc>
+                <a:spcPct val="112000"/>
+              </a:lnSpc>
+              <a:spcAft>
+                <a:spcPts val="500"/>
+              </a:spcAft>
+            </a:pPr>
+            <a:r>
+              <a:rPr sz="1400" b="0">
+                <a:solidFill>
+                  <a:srgbClr val="333333"/>
+                </a:solidFill>
+                <a:latin typeface="Fira Sans"/>
+              </a:rPr>
+              <a:t>     ◦  </a:t>
+            </a:r>
+            <a:r>
+              <a:rPr sz="1400" b="0">
+                <a:solidFill>
+                  <a:srgbClr val="333333"/>
+                </a:solidFill>
+                <a:latin typeface="Fira Sans"/>
+              </a:rPr>
+              <a:t>Lo que falta: qué datos están ausentes y con qué patrón.</a:t>
+            </a:r>
+          </a:p>
+          <a:p>
+            <a:pPr>
+              <a:lnSpc>
+                <a:spcPct val="112000"/>
+              </a:lnSpc>
+              <a:spcAft>
+                <a:spcPts val="500"/>
+              </a:spcAft>
+            </a:pPr>
+            <a:r>
+              <a:rPr sz="1400" b="0">
+                <a:solidFill>
+                  <a:srgbClr val="333333"/>
+                </a:solidFill>
+                <a:latin typeface="Fira Sans"/>
+              </a:rPr>
+              <a:t>     ◦  </a:t>
+            </a:r>
+            <a:r>
+              <a:rPr sz="1400" b="0">
+                <a:solidFill>
+                  <a:srgbClr val="333333"/>
+                </a:solidFill>
+                <a:latin typeface="Fira Sans"/>
+              </a:rPr>
+              <a:t>Las relaciones: qué variables se asocian con qué otras.</a:t>
+            </a:r>
+          </a:p>
+          <a:p>
+            <a:pPr>
+              <a:lnSpc>
+                <a:spcPct val="112000"/>
+              </a:lnSpc>
+              <a:spcAft>
+                <a:spcPts val="900"/>
+              </a:spcAft>
+            </a:pPr>
+            <a:r>
+              <a:rPr sz="1800" b="1">
+                <a:solidFill>
+                  <a:srgbClr val="E0A437"/>
+                </a:solidFill>
+                <a:latin typeface="Fira Sans"/>
+              </a:rPr>
+              <a:t>▸ </a:t>
+            </a:r>
+            <a:r>
+              <a:rPr sz="1800" b="0">
+                <a:solidFill>
+                  <a:srgbClr val="000000"/>
+                </a:solidFill>
+                <a:latin typeface="Fira Sans"/>
+              </a:rPr>
+              <a:t>Genera hipótesis; el análisis confirmatorio (unidad 5) las pone a prueba.</a:t>
+            </a:r>
+          </a:p>
+          <a:p>
+            <a:pPr>
+              <a:lnSpc>
+                <a:spcPct val="112000"/>
+              </a:lnSpc>
+              <a:spcAft>
+                <a:spcPts val="900"/>
+              </a:spcAft>
+            </a:pPr>
+            <a:r>
+              <a:rPr sz="1800" b="1">
+                <a:solidFill>
+                  <a:srgbClr val="E0A437"/>
+                </a:solidFill>
+                <a:latin typeface="Fira Sans"/>
+              </a:rPr>
+              <a:t>▸ </a:t>
+            </a:r>
+            <a:r>
+              <a:rPr sz="1800" b="1">
+                <a:solidFill>
+                  <a:srgbClr val="1D3557"/>
+                </a:solidFill>
+                <a:latin typeface="Fira Sans"/>
+              </a:rPr>
+              <a:t>Una pregunta transversal para toda cifra resumen: ¿de quién habla este número? ¿De la muestra, de un subgrupo, de la ciudad?</a:t>
             </a:r>
           </a:p>
         </p:txBody>
@@ -4736,7 +4913,7 @@
             <a:avLst/>
           </a:prstGeom>
           <a:solidFill>
-            <a:srgbClr val="FAFBFC"/>
+            <a:srgbClr val="1D3557"/>
           </a:solidFill>
           <a:ln>
             <a:noFill/>
@@ -4773,8 +4950,8 @@
         </p:nvSpPr>
         <p:spPr>
           <a:xfrm>
-            <a:off x="402336" y="301752"/>
-            <a:ext cx="8348472" cy="795528"/>
+            <a:off x="603504" y="1847088"/>
+            <a:ext cx="7946136" cy="1399032"/>
           </a:xfrm>
           <a:prstGeom prst="rect">
             <a:avLst/>
@@ -4788,176 +4965,24 @@
           <a:lstStyle/>
           <a:p>
             <a:r>
-              <a:rPr sz="2800" b="1">
-                <a:solidFill>
-                  <a:srgbClr val="0F0F0F"/>
-                </a:solidFill>
-                <a:latin typeface="Fira Sans"/>
-              </a:rPr>
-              <a:t>La EOD 2012</a:t>
-            </a:r>
-          </a:p>
-        </p:txBody>
-      </p:sp>
-      <p:sp>
-        <p:nvSpPr>
-          <p:cNvPr id="4" name="TextBox 3"/>
-          <p:cNvSpPr txBox="1"/>
-          <p:nvPr/>
-        </p:nvSpPr>
-        <p:spPr>
-          <a:xfrm>
-            <a:off x="704088" y="1353312"/>
-            <a:ext cx="7744968" cy="3300984"/>
-          </a:xfrm>
-          <a:prstGeom prst="rect">
-            <a:avLst/>
-          </a:prstGeom>
-          <a:noFill/>
-        </p:spPr>
-        <p:txBody>
-          <a:bodyPr wrap="square">
-            <a:spAutoFit/>
-          </a:bodyPr>
-          <a:lstStyle/>
-          <a:p>
-            <a:pPr>
-              <a:lnSpc>
-                <a:spcPct val="112000"/>
-              </a:lnSpc>
-              <a:spcAft>
-                <a:spcPts val="900"/>
-              </a:spcAft>
-            </a:pPr>
-            <a:r>
-              <a:rPr sz="1800" b="1">
+              <a:rPr sz="3400" b="1">
+                <a:solidFill>
+                  <a:srgbClr val="FFFFFF"/>
+                </a:solidFill>
+                <a:latin typeface="Fira Sans"/>
+              </a:rPr>
+              <a:t>Los datos</a:t>
+            </a:r>
+          </a:p>
+          <a:p>
+            <a:r>
+              <a:rPr sz="1800" b="0">
                 <a:solidFill>
                   <a:srgbClr val="E0A437"/>
                 </a:solidFill>
                 <a:latin typeface="Fira Sans"/>
               </a:rPr>
-              <a:t>▸ </a:t>
-            </a:r>
-            <a:r>
-              <a:rPr sz="1800" b="0">
-                <a:solidFill>
-                  <a:srgbClr val="000000"/>
-                </a:solidFill>
-                <a:latin typeface="Fira Sans"/>
-              </a:rPr>
-              <a:t>Encuesta de movilidad del Gran Santiago (SECTRA y U. Alberto Hurtado).</a:t>
-            </a:r>
-          </a:p>
-          <a:p>
-            <a:pPr>
-              <a:lnSpc>
-                <a:spcPct val="112000"/>
-              </a:lnSpc>
-              <a:spcAft>
-                <a:spcPts val="900"/>
-              </a:spcAft>
-            </a:pPr>
-            <a:r>
-              <a:rPr sz="1800" b="1">
-                <a:solidFill>
-                  <a:srgbClr val="E0A437"/>
-                </a:solidFill>
-                <a:latin typeface="Fira Sans"/>
-              </a:rPr>
-              <a:t>▸ </a:t>
-            </a:r>
-            <a:r>
-              <a:rPr sz="1800" b="0">
-                <a:solidFill>
-                  <a:srgbClr val="000000"/>
-                </a:solidFill>
-                <a:latin typeface="Fira Sans"/>
-              </a:rPr>
-              <a:t>Registra todos los viajes de un día de los hogares encuestados.</a:t>
-            </a:r>
-          </a:p>
-          <a:p>
-            <a:pPr>
-              <a:lnSpc>
-                <a:spcPct val="112000"/>
-              </a:lnSpc>
-              <a:spcAft>
-                <a:spcPts val="500"/>
-              </a:spcAft>
-            </a:pPr>
-            <a:r>
-              <a:rPr sz="1400" b="0">
-                <a:solidFill>
-                  <a:srgbClr val="333333"/>
-                </a:solidFill>
-                <a:latin typeface="Fira Sans"/>
-              </a:rPr>
-              <a:t>     ◦  </a:t>
-            </a:r>
-            <a:r>
-              <a:rPr sz="1400" b="0">
-                <a:solidFill>
-                  <a:srgbClr val="333333"/>
-                </a:solidFill>
-                <a:latin typeface="Fira Sans"/>
-              </a:rPr>
-              <a:t>18.264 hogares, 60.054 personas, 113.591 viajes.</a:t>
-            </a:r>
-          </a:p>
-          <a:p>
-            <a:pPr>
-              <a:lnSpc>
-                <a:spcPct val="112000"/>
-              </a:lnSpc>
-              <a:spcAft>
-                <a:spcPts val="500"/>
-              </a:spcAft>
-            </a:pPr>
-            <a:r>
-              <a:rPr sz="1400" b="0">
-                <a:solidFill>
-                  <a:srgbClr val="333333"/>
-                </a:solidFill>
-                <a:latin typeface="Fira Sans"/>
-              </a:rPr>
-              <a:t>     ◦  </a:t>
-            </a:r>
-            <a:r>
-              <a:rPr sz="1400" b="0">
-                <a:solidFill>
-                  <a:srgbClr val="333333"/>
-                </a:solidFill>
-                <a:latin typeface="Fira Sans"/>
-              </a:rPr>
-              <a:t>Se usa en la planificación de transporte de la ciudad.</a:t>
-            </a:r>
-          </a:p>
-          <a:p>
-            <a:pPr>
-              <a:lnSpc>
-                <a:spcPct val="112000"/>
-              </a:lnSpc>
-              <a:spcAft>
-                <a:spcPts val="900"/>
-              </a:spcAft>
-            </a:pPr>
-            <a:r>
-              <a:rPr sz="1800" b="1">
-                <a:solidFill>
-                  <a:srgbClr val="E0A437"/>
-                </a:solidFill>
-                <a:latin typeface="Fira Sans"/>
-              </a:rPr>
-              <a:t>▸ </a:t>
-            </a:r>
-            <a:r>
-              <a:rPr sz="1800" b="1">
-                <a:solidFill>
-                  <a:srgbClr val="1D3557"/>
-                </a:solidFill>
-                <a:latin typeface="Fira Sans"/>
-              </a:rPr>
-              <a:t>El mismo diseño relacional de la Casen, el Censo o la ENUSC.</a:t>
+              <a:t>Encuesta Origen Destino de Santiago 2012</a:t>
             </a:r>
           </a:p>
         </p:txBody>
@@ -5053,45 +5078,21 @@
                 </a:solidFill>
                 <a:latin typeface="Fira Sans"/>
               </a:rPr>
-              <a:t>Una encuesta, varias tablas</a:t>
-            </a:r>
-          </a:p>
-        </p:txBody>
-      </p:sp>
-      <p:pic>
-        <p:nvPicPr>
-          <p:cNvPr id="4" name="Picture 3" descr="05_diagrama_tablas.png"/>
-          <p:cNvPicPr>
-            <a:picLocks noChangeAspect="1"/>
-          </p:cNvPicPr>
-          <p:nvPr/>
-        </p:nvPicPr>
-        <p:blipFill>
-          <a:blip r:embed="rId2"/>
-          <a:stretch>
-            <a:fillRect/>
-          </a:stretch>
-        </p:blipFill>
-        <p:spPr>
-          <a:xfrm>
-            <a:off x="1553651" y="1143000"/>
-            <a:ext cx="6036697" cy="3154680"/>
-          </a:xfrm>
-          <a:prstGeom prst="rect">
-            <a:avLst/>
-          </a:prstGeom>
-        </p:spPr>
-      </p:pic>
-      <p:sp>
-        <p:nvSpPr>
-          <p:cNvPr id="5" name="TextBox 4"/>
+              <a:t>La EOD 2012</a:t>
+            </a:r>
+          </a:p>
+        </p:txBody>
+      </p:sp>
+      <p:sp>
+        <p:nvSpPr>
+          <p:cNvPr id="4" name="TextBox 3"/>
           <p:cNvSpPr txBox="1"/>
           <p:nvPr/>
         </p:nvSpPr>
         <p:spPr>
           <a:xfrm>
-            <a:off x="704088" y="4434840"/>
-            <a:ext cx="7744968" cy="457200"/>
+            <a:off x="704088" y="1353312"/>
+            <a:ext cx="7744968" cy="3300984"/>
           </a:xfrm>
           <a:prstGeom prst="rect">
             <a:avLst/>
@@ -5104,14 +5105,143 @@
           </a:bodyPr>
           <a:lstStyle/>
           <a:p>
-            <a:r>
-              <a:rPr sz="1300" b="0">
+            <a:pPr>
+              <a:lnSpc>
+                <a:spcPct val="112000"/>
+              </a:lnSpc>
+              <a:spcAft>
+                <a:spcPts val="900"/>
+              </a:spcAft>
+            </a:pPr>
+            <a:r>
+              <a:rPr sz="1800" b="1">
+                <a:solidFill>
+                  <a:srgbClr val="E0A437"/>
+                </a:solidFill>
+                <a:latin typeface="Fira Sans"/>
+              </a:rPr>
+              <a:t>▸ </a:t>
+            </a:r>
+            <a:r>
+              <a:rPr sz="1800" b="0">
+                <a:solidFill>
+                  <a:srgbClr val="000000"/>
+                </a:solidFill>
+                <a:latin typeface="Fira Sans"/>
+              </a:rPr>
+              <a:t>Encuesta de movilidad del Gran Santiago (SECTRA y U. Alberto Hurtado).</a:t>
+            </a:r>
+          </a:p>
+          <a:p>
+            <a:pPr>
+              <a:lnSpc>
+                <a:spcPct val="112000"/>
+              </a:lnSpc>
+              <a:spcAft>
+                <a:spcPts val="900"/>
+              </a:spcAft>
+            </a:pPr>
+            <a:r>
+              <a:rPr sz="1800" b="1">
+                <a:solidFill>
+                  <a:srgbClr val="E0A437"/>
+                </a:solidFill>
+                <a:latin typeface="Fira Sans"/>
+              </a:rPr>
+              <a:t>▸ </a:t>
+            </a:r>
+            <a:r>
+              <a:rPr sz="1800" b="0">
+                <a:solidFill>
+                  <a:srgbClr val="000000"/>
+                </a:solidFill>
+                <a:latin typeface="Fira Sans"/>
+              </a:rPr>
+              <a:t>Registra todos los viajes de un día de los hogares encuestados.</a:t>
+            </a:r>
+          </a:p>
+          <a:p>
+            <a:pPr>
+              <a:lnSpc>
+                <a:spcPct val="112000"/>
+              </a:lnSpc>
+              <a:spcAft>
+                <a:spcPts val="500"/>
+              </a:spcAft>
+            </a:pPr>
+            <a:r>
+              <a:rPr sz="1400" b="0">
                 <a:solidFill>
                   <a:srgbClr val="333333"/>
                 </a:solidFill>
                 <a:latin typeface="Fira Sans"/>
               </a:rPr>
-              <a:t>Los códigos no significan nada sin sus tablas de parámetros: unirlas es parte del análisis.</a:t>
+              <a:t>     ◦  </a:t>
+            </a:r>
+            <a:r>
+              <a:rPr sz="1400" b="0">
+                <a:solidFill>
+                  <a:srgbClr val="333333"/>
+                </a:solidFill>
+                <a:latin typeface="Fira Sans"/>
+              </a:rPr>
+              <a:t>18.264 hogares, 60.054 personas, 113.591 viajes.</a:t>
+            </a:r>
+          </a:p>
+          <a:p>
+            <a:pPr>
+              <a:lnSpc>
+                <a:spcPct val="112000"/>
+              </a:lnSpc>
+              <a:spcAft>
+                <a:spcPts val="500"/>
+              </a:spcAft>
+            </a:pPr>
+            <a:r>
+              <a:rPr sz="1400" b="0">
+                <a:solidFill>
+                  <a:srgbClr val="333333"/>
+                </a:solidFill>
+                <a:latin typeface="Fira Sans"/>
+              </a:rPr>
+              <a:t>     ◦  </a:t>
+            </a:r>
+            <a:r>
+              <a:rPr sz="1400" b="0">
+                <a:solidFill>
+                  <a:srgbClr val="333333"/>
+                </a:solidFill>
+                <a:latin typeface="Fira Sans"/>
+              </a:rPr>
+              <a:t>Se usa en la planificación de transporte de la ciudad.</a:t>
+            </a:r>
+          </a:p>
+          <a:p>
+            <a:pPr>
+              <a:lnSpc>
+                <a:spcPct val="112000"/>
+              </a:lnSpc>
+              <a:spcAft>
+                <a:spcPts val="900"/>
+              </a:spcAft>
+            </a:pPr>
+            <a:r>
+              <a:rPr sz="1800" b="1">
+                <a:solidFill>
+                  <a:srgbClr val="E0A437"/>
+                </a:solidFill>
+                <a:latin typeface="Fira Sans"/>
+              </a:rPr>
+              <a:t>▸ </a:t>
+            </a:r>
+            <a:r>
+              <a:rPr sz="1800" b="1">
+                <a:solidFill>
+                  <a:srgbClr val="1D3557"/>
+                </a:solidFill>
+                <a:latin typeface="Fira Sans"/>
+              </a:rPr>
+              <a:t>El mismo diseño relacional de la Casen, el Censo o la ENUSC.</a:t>
             </a:r>
           </a:p>
         </p:txBody>
@@ -5149,7 +5279,7 @@
             <a:avLst/>
           </a:prstGeom>
           <a:solidFill>
-            <a:srgbClr val="1D3557"/>
+            <a:srgbClr val="FAFBFC"/>
           </a:solidFill>
           <a:ln>
             <a:noFill/>
@@ -5186,8 +5316,8 @@
         </p:nvSpPr>
         <p:spPr>
           <a:xfrm>
-            <a:off x="603504" y="1847088"/>
-            <a:ext cx="7946136" cy="1399032"/>
+            <a:off x="402336" y="301752"/>
+            <a:ext cx="8348472" cy="795528"/>
           </a:xfrm>
           <a:prstGeom prst="rect">
             <a:avLst/>
@@ -5201,24 +5331,71 @@
           <a:lstStyle/>
           <a:p>
             <a:r>
-              <a:rPr sz="3400" b="1">
-                <a:solidFill>
-                  <a:srgbClr val="FFFFFF"/>
-                </a:solidFill>
-                <a:latin typeface="Fira Sans"/>
-              </a:rPr>
-              <a:t>Repaso de Pandas</a:t>
-            </a:r>
-          </a:p>
-          <a:p>
-            <a:r>
-              <a:rPr sz="1800" b="0">
-                <a:solidFill>
-                  <a:srgbClr val="E0A437"/>
-                </a:solidFill>
-                <a:latin typeface="Fira Sans"/>
-              </a:rPr>
-              <a:t>Dos casos concretos con la EOD</a:t>
+              <a:rPr sz="2800" b="1">
+                <a:solidFill>
+                  <a:srgbClr val="0F0F0F"/>
+                </a:solidFill>
+                <a:latin typeface="Fira Sans"/>
+              </a:rPr>
+              <a:t>Una encuesta, varias tablas</a:t>
+            </a:r>
+          </a:p>
+        </p:txBody>
+      </p:sp>
+      <p:pic>
+        <p:nvPicPr>
+          <p:cNvPr id="4" name="Picture 3" descr="05_diagrama_tablas.png"/>
+          <p:cNvPicPr>
+            <a:picLocks noChangeAspect="1"/>
+          </p:cNvPicPr>
+          <p:nvPr/>
+        </p:nvPicPr>
+        <p:blipFill>
+          <a:blip r:embed="rId2"/>
+          <a:stretch>
+            <a:fillRect/>
+          </a:stretch>
+        </p:blipFill>
+        <p:spPr>
+          <a:xfrm>
+            <a:off x="1553651" y="1143000"/>
+            <a:ext cx="6036697" cy="3154680"/>
+          </a:xfrm>
+          <a:prstGeom prst="rect">
+            <a:avLst/>
+          </a:prstGeom>
+        </p:spPr>
+      </p:pic>
+      <p:sp>
+        <p:nvSpPr>
+          <p:cNvPr id="5" name="TextBox 4"/>
+          <p:cNvSpPr txBox="1"/>
+          <p:nvPr/>
+        </p:nvSpPr>
+        <p:spPr>
+          <a:xfrm>
+            <a:off x="704088" y="4434840"/>
+            <a:ext cx="7744968" cy="457200"/>
+          </a:xfrm>
+          <a:prstGeom prst="rect">
+            <a:avLst/>
+          </a:prstGeom>
+          <a:noFill/>
+        </p:spPr>
+        <p:txBody>
+          <a:bodyPr wrap="square">
+            <a:spAutoFit/>
+          </a:bodyPr>
+          <a:lstStyle/>
+          <a:p>
+            <a:r>
+              <a:rPr sz="1300" b="0">
+                <a:solidFill>
+                  <a:srgbClr val="333333"/>
+                </a:solidFill>
+                <a:latin typeface="Fira Sans"/>
+              </a:rPr>
+              <a:t>Los códigos no significan nada sin sus tablas de parámetros: unirlas es parte del análisis.</a:t>
             </a:r>
           </a:p>
         </p:txBody>
@@ -5256,7 +5433,7 @@
             <a:avLst/>
           </a:prstGeom>
           <a:solidFill>
-            <a:srgbClr val="FAFBFC"/>
+            <a:srgbClr val="1D3557"/>
           </a:solidFill>
           <a:ln>
             <a:noFill/>
@@ -5293,8 +5470,8 @@
         </p:nvSpPr>
         <p:spPr>
           <a:xfrm>
-            <a:off x="402336" y="301752"/>
-            <a:ext cx="8348472" cy="795528"/>
+            <a:off x="603504" y="1847088"/>
+            <a:ext cx="7946136" cy="1399032"/>
           </a:xfrm>
           <a:prstGeom prst="rect">
             <a:avLst/>
@@ -5308,155 +5485,24 @@
           <a:lstStyle/>
           <a:p>
             <a:r>
-              <a:rPr sz="2800" b="1">
-                <a:solidFill>
-                  <a:srgbClr val="0F0F0F"/>
-                </a:solidFill>
-                <a:latin typeface="Fira Sans"/>
-              </a:rPr>
-              <a:t>Abrir el dataset</a:t>
-            </a:r>
-          </a:p>
-        </p:txBody>
-      </p:sp>
-      <p:sp>
-        <p:nvSpPr>
-          <p:cNvPr id="4" name="Rectangle 3"/>
-          <p:cNvSpPr/>
-          <p:nvPr/>
-        </p:nvSpPr>
-        <p:spPr>
-          <a:xfrm>
-            <a:off x="704088" y="1280160"/>
-            <a:ext cx="7744968" cy="2377440"/>
-          </a:xfrm>
-          <a:prstGeom prst="rect">
-            <a:avLst/>
-          </a:prstGeom>
-          <a:solidFill>
-            <a:srgbClr val="F0F2F5"/>
-          </a:solidFill>
-          <a:ln>
-            <a:solidFill>
-              <a:srgbClr val="D8DDE3"/>
-            </a:solidFill>
-          </a:ln>
-          <a:effectLst/>
-        </p:spPr>
-        <p:style>
-          <a:lnRef idx="1">
-            <a:schemeClr val="accent1"/>
-          </a:lnRef>
-          <a:fillRef idx="3">
-            <a:schemeClr val="accent1"/>
-          </a:fillRef>
-          <a:effectRef idx="2">
-            <a:schemeClr val="accent1"/>
-          </a:effectRef>
-          <a:fontRef idx="minor">
-            <a:schemeClr val="lt1"/>
-          </a:fontRef>
-        </p:style>
-        <p:txBody>
-          <a:bodyPr rtlCol="0" anchor="ctr" wrap="square" lIns="228600" tIns="137160"/>
-          <a:lstStyle/>
-          <a:p>
-            <a:pPr/>
-            <a:r>
-              <a:rPr sz="1500" b="0">
-                <a:solidFill>
-                  <a:srgbClr val="1D3557"/>
-                </a:solidFill>
-                <a:latin typeface="Menlo"/>
-              </a:rPr>
-              <a:t>import pandas as pd</a:t>
-            </a:r>
-          </a:p>
-          <a:p>
-            <a:pPr/>
-            <a:r>
-              <a:rPr sz="1500" b="0">
-                <a:solidFill>
-                  <a:srgbClr val="1D3557"/>
-                </a:solidFill>
-                <a:latin typeface="Menlo"/>
-              </a:rPr>
-              <a:t/>
-            </a:r>
-          </a:p>
-          <a:p>
-            <a:pPr/>
-            <a:r>
-              <a:rPr sz="1500" b="0">
-                <a:solidFill>
-                  <a:srgbClr val="1D3557"/>
-                </a:solidFill>
-                <a:latin typeface="Menlo"/>
-              </a:rPr>
-              <a:t>viajes = pd.read_csv('datos/eod_stgo/viajes.csv',</a:t>
-            </a:r>
-          </a:p>
-          <a:p>
-            <a:pPr/>
-            <a:r>
-              <a:rPr sz="1500" b="0">
-                <a:solidFill>
-                  <a:srgbClr val="1D3557"/>
-                </a:solidFill>
-                <a:latin typeface="Menlo"/>
-              </a:rPr>
-              <a:t>                     sep=';', decimal=',')</a:t>
-            </a:r>
-          </a:p>
-        </p:txBody>
-      </p:sp>
-      <p:sp>
-        <p:nvSpPr>
-          <p:cNvPr id="5" name="TextBox 4"/>
-          <p:cNvSpPr txBox="1"/>
-          <p:nvPr/>
-        </p:nvSpPr>
-        <p:spPr>
-          <a:xfrm>
-            <a:off x="704088" y="3886200"/>
-            <a:ext cx="7744968" cy="1097280"/>
-          </a:xfrm>
-          <a:prstGeom prst="rect">
-            <a:avLst/>
-          </a:prstGeom>
-          <a:noFill/>
-        </p:spPr>
-        <p:txBody>
-          <a:bodyPr wrap="square">
-            <a:spAutoFit/>
-          </a:bodyPr>
-          <a:lstStyle/>
-          <a:p>
-            <a:pPr>
-              <a:lnSpc>
-                <a:spcPct val="112000"/>
-              </a:lnSpc>
-              <a:spcAft>
-                <a:spcPts val="900"/>
-              </a:spcAft>
-            </a:pPr>
-            <a:r>
-              <a:rPr sz="1600" b="1">
+              <a:rPr sz="3400" b="1">
+                <a:solidFill>
+                  <a:srgbClr val="FFFFFF"/>
+                </a:solidFill>
+                <a:latin typeface="Fira Sans"/>
+              </a:rPr>
+              <a:t>Repaso de Pandas</a:t>
+            </a:r>
+          </a:p>
+          <a:p>
+            <a:r>
+              <a:rPr sz="1800" b="0">
                 <a:solidFill>
                   <a:srgbClr val="E0A437"/>
                 </a:solidFill>
                 <a:latin typeface="Fira Sans"/>
               </a:rPr>
-              <a:t>▸ </a:t>
-            </a:r>
-            <a:r>
-              <a:rPr sz="1600" b="0">
-                <a:solidFill>
-                  <a:srgbClr val="000000"/>
-                </a:solidFill>
-                <a:latin typeface="Fira Sans"/>
-              </a:rPr>
-              <a:t>Todo el código de la clase está en el notebook 02_pandas_eda.ipynb del repositorio.</a:t>
+              <a:t>Dos casos concretos con la EOD</a:t>
             </a:r>
           </a:p>
         </p:txBody>
@@ -5867,35 +5913,102 @@
                 </a:solidFill>
                 <a:latin typeface="Fira Sans"/>
               </a:rPr>
-              <a:t>El DataFrame: la estructura central de Pandas</a:t>
-            </a:r>
-          </a:p>
-        </p:txBody>
-      </p:sp>
-      <p:pic>
-        <p:nvPicPr>
-          <p:cNvPr id="4" name="Picture 3" descr="13_dataframe.png"/>
-          <p:cNvPicPr>
-            <a:picLocks noChangeAspect="1"/>
-          </p:cNvPicPr>
-          <p:nvPr/>
-        </p:nvPicPr>
-        <p:blipFill>
-          <a:blip r:embed="rId2"/>
-          <a:stretch>
-            <a:fillRect/>
-          </a:stretch>
-        </p:blipFill>
-        <p:spPr>
-          <a:xfrm>
-            <a:off x="1417319" y="1143000"/>
-            <a:ext cx="6309360" cy="2553789"/>
-          </a:xfrm>
-          <a:prstGeom prst="rect">
-            <a:avLst/>
-          </a:prstGeom>
-        </p:spPr>
-      </p:pic>
+              <a:t>Abrir el dataset</a:t>
+            </a:r>
+          </a:p>
+        </p:txBody>
+      </p:sp>
+      <p:sp>
+        <p:nvSpPr>
+          <p:cNvPr id="4" name="Rectangle 3"/>
+          <p:cNvSpPr/>
+          <p:nvPr/>
+        </p:nvSpPr>
+        <p:spPr>
+          <a:xfrm>
+            <a:off x="704088" y="1280160"/>
+            <a:ext cx="7744968" cy="2377440"/>
+          </a:xfrm>
+          <a:prstGeom prst="rect">
+            <a:avLst/>
+          </a:prstGeom>
+          <a:solidFill>
+            <a:srgbClr val="F0F2F5"/>
+          </a:solidFill>
+          <a:ln>
+            <a:solidFill>
+              <a:srgbClr val="D8DDE3"/>
+            </a:solidFill>
+          </a:ln>
+          <a:effectLst/>
+        </p:spPr>
+        <p:style>
+          <a:lnRef idx="1">
+            <a:schemeClr val="accent1"/>
+          </a:lnRef>
+          <a:fillRef idx="3">
+            <a:schemeClr val="accent1"/>
+          </a:fillRef>
+          <a:effectRef idx="2">
+            <a:schemeClr val="accent1"/>
+          </a:effectRef>
+          <a:fontRef idx="minor">
+            <a:schemeClr val="lt1"/>
+          </a:fontRef>
+        </p:style>
+        <p:txBody>
+          <a:bodyPr rtlCol="0" anchor="ctr" wrap="square" lIns="228600" tIns="137160"/>
+          <a:lstStyle/>
+          <a:p>
+            <a:pPr/>
+            <a:r>
+              <a:rPr sz="1500" b="0">
+                <a:solidFill>
+                  <a:srgbClr val="1D3557"/>
+                </a:solidFill>
+                <a:latin typeface="Menlo"/>
+              </a:rPr>
+              <a:t>import pandas as pd</a:t>
+            </a:r>
+          </a:p>
+          <a:p>
+            <a:pPr/>
+            <a:r>
+              <a:rPr sz="1500" b="0">
+                <a:solidFill>
+                  <a:srgbClr val="1D3557"/>
+                </a:solidFill>
+                <a:latin typeface="Menlo"/>
+              </a:rPr>
+              <a:t/>
+            </a:r>
+          </a:p>
+          <a:p>
+            <a:pPr/>
+            <a:r>
+              <a:rPr sz="1500" b="0">
+                <a:solidFill>
+                  <a:srgbClr val="1D3557"/>
+                </a:solidFill>
+                <a:latin typeface="Menlo"/>
+              </a:rPr>
+              <a:t>viajes = pd.read_csv('datos/eod_stgo/viajes.csv',</a:t>
+            </a:r>
+          </a:p>
+          <a:p>
+            <a:pPr/>
+            <a:r>
+              <a:rPr sz="1500" b="0">
+                <a:solidFill>
+                  <a:srgbClr val="1D3557"/>
+                </a:solidFill>
+                <a:latin typeface="Menlo"/>
+              </a:rPr>
+              <a:t>                     sep=';', decimal=',')</a:t>
+            </a:r>
+          </a:p>
+        </p:txBody>
+      </p:sp>
       <p:sp>
         <p:nvSpPr>
           <p:cNvPr id="5" name="TextBox 4"/>
@@ -5904,8 +6017,8 @@
         </p:nvSpPr>
         <p:spPr>
           <a:xfrm>
-            <a:off x="704088" y="4434840"/>
-            <a:ext cx="7744968" cy="457200"/>
+            <a:off x="704088" y="3886200"/>
+            <a:ext cx="7744968" cy="1097280"/>
           </a:xfrm>
           <a:prstGeom prst="rect">
             <a:avLst/>
@@ -5918,14 +6031,31 @@
           </a:bodyPr>
           <a:lstStyle/>
           <a:p>
-            <a:r>
-              <a:rPr sz="1300" b="0">
-                <a:solidFill>
-                  <a:srgbClr val="333333"/>
-                </a:solidFill>
-                <a:latin typeface="Fira Sans"/>
-              </a:rPr>
-              <a:t>Una tabla con filas indexadas y columnas con nombre y tipo. Los códigos (comuna, propósito) se traducen con las tablas de parámetros, uniéndolas con merge.</a:t>
+            <a:pPr>
+              <a:lnSpc>
+                <a:spcPct val="112000"/>
+              </a:lnSpc>
+              <a:spcAft>
+                <a:spcPts val="900"/>
+              </a:spcAft>
+            </a:pPr>
+            <a:r>
+              <a:rPr sz="1600" b="1">
+                <a:solidFill>
+                  <a:srgbClr val="E0A437"/>
+                </a:solidFill>
+                <a:latin typeface="Fira Sans"/>
+              </a:rPr>
+              <a:t>▸ </a:t>
+            </a:r>
+            <a:r>
+              <a:rPr sz="1600" b="0">
+                <a:solidFill>
+                  <a:srgbClr val="000000"/>
+                </a:solidFill>
+                <a:latin typeface="Fira Sans"/>
+              </a:rPr>
+              <a:t>Todo el código de la clase está en el notebook 02_pandas_eda.ipynb del repositorio.</a:t>
             </a:r>
           </a:p>
         </p:txBody>
@@ -6021,14 +6151,14 @@
                 </a:solidFill>
                 <a:latin typeface="Fira Sans"/>
               </a:rPr>
-              <a:t>Las variantes del merge: qué filas se conservan</a:t>
+              <a:t>El DataFrame: la estructura central de Pandas</a:t>
             </a:r>
           </a:p>
         </p:txBody>
       </p:sp>
       <p:pic>
         <p:nvPicPr>
-          <p:cNvPr id="4" name="Picture 3" descr="07_diagrama_merge.png"/>
+          <p:cNvPr id="4" name="Picture 3" descr="13_dataframe.png"/>
           <p:cNvPicPr>
             <a:picLocks noChangeAspect="1"/>
           </p:cNvPicPr>
@@ -6043,7 +6173,7 @@
         <p:spPr>
           <a:xfrm>
             <a:off x="1417319" y="1143000"/>
-            <a:ext cx="6309360" cy="2397276"/>
+            <a:ext cx="6309360" cy="2553789"/>
           </a:xfrm>
           <a:prstGeom prst="rect">
             <a:avLst/>
@@ -6079,7 +6209,7 @@
                 </a:solidFill>
                 <a:latin typeface="Fira Sans"/>
               </a:rPr>
-              <a:t>El valor por defecto es inner: descarta sin aviso las filas sin pareja.</a:t>
+              <a:t>Una tabla con filas indexadas y columnas con nombre y tipo. Los códigos (comuna, propósito) se traducen con las tablas de parámetros, uniéndolas con merge.</a:t>
             </a:r>
           </a:p>
         </p:txBody>
@@ -6175,21 +6305,45 @@
                 </a:solidFill>
                 <a:latin typeface="Fira Sans"/>
               </a:rPr>
-              <a:t>El efecto del parámetro how sobre la población analizada</a:t>
-            </a:r>
-          </a:p>
-        </p:txBody>
-      </p:sp>
-      <p:sp>
-        <p:nvSpPr>
-          <p:cNvPr id="4" name="TextBox 3"/>
+              <a:t>Las variantes del merge: qué filas se conservan</a:t>
+            </a:r>
+          </a:p>
+        </p:txBody>
+      </p:sp>
+      <p:pic>
+        <p:nvPicPr>
+          <p:cNvPr id="4" name="Picture 3" descr="07_diagrama_merge.png"/>
+          <p:cNvPicPr>
+            <a:picLocks noChangeAspect="1"/>
+          </p:cNvPicPr>
+          <p:nvPr/>
+        </p:nvPicPr>
+        <p:blipFill>
+          <a:blip r:embed="rId2"/>
+          <a:stretch>
+            <a:fillRect/>
+          </a:stretch>
+        </p:blipFill>
+        <p:spPr>
+          <a:xfrm>
+            <a:off x="1417319" y="1143000"/>
+            <a:ext cx="6309360" cy="2397276"/>
+          </a:xfrm>
+          <a:prstGeom prst="rect">
+            <a:avLst/>
+          </a:prstGeom>
+        </p:spPr>
+      </p:pic>
+      <p:sp>
+        <p:nvSpPr>
+          <p:cNvPr id="5" name="TextBox 4"/>
           <p:cNvSpPr txBox="1"/>
           <p:nvPr/>
         </p:nvSpPr>
         <p:spPr>
           <a:xfrm>
-            <a:off x="704088" y="1353312"/>
-            <a:ext cx="7744968" cy="3300984"/>
+            <a:off x="704088" y="4434840"/>
+            <a:ext cx="7744968" cy="457200"/>
           </a:xfrm>
           <a:prstGeom prst="rect">
             <a:avLst/>
@@ -6202,143 +6356,14 @@
           </a:bodyPr>
           <a:lstStyle/>
           <a:p>
-            <a:pPr>
-              <a:lnSpc>
-                <a:spcPct val="112000"/>
-              </a:lnSpc>
-              <a:spcAft>
-                <a:spcPts val="900"/>
-              </a:spcAft>
-            </a:pPr>
-            <a:r>
-              <a:rPr sz="1800" b="1">
-                <a:solidFill>
-                  <a:srgbClr val="E0A437"/>
-                </a:solidFill>
-                <a:latin typeface="Fira Sans"/>
-              </a:rPr>
-              <a:t>▸ </a:t>
-            </a:r>
-            <a:r>
-              <a:rPr sz="1800" b="0">
-                <a:solidFill>
-                  <a:srgbClr val="000000"/>
-                </a:solidFill>
-                <a:latin typeface="Fira Sans"/>
-              </a:rPr>
-              <a:t>Personas con viajes, merge inner: 113.591 filas (una por viaje).</a:t>
-            </a:r>
-          </a:p>
-          <a:p>
-            <a:pPr>
-              <a:lnSpc>
-                <a:spcPct val="112000"/>
-              </a:lnSpc>
-              <a:spcAft>
-                <a:spcPts val="900"/>
-              </a:spcAft>
-            </a:pPr>
-            <a:r>
-              <a:rPr sz="1800" b="1">
-                <a:solidFill>
-                  <a:srgbClr val="E0A437"/>
-                </a:solidFill>
-                <a:latin typeface="Fira Sans"/>
-              </a:rPr>
-              <a:t>▸ </a:t>
-            </a:r>
-            <a:r>
-              <a:rPr sz="1800" b="0">
-                <a:solidFill>
-                  <a:srgbClr val="000000"/>
-                </a:solidFill>
-                <a:latin typeface="Fira Sans"/>
-              </a:rPr>
-              <a:t>El mismo merge en left: 127.379 filas.</a:t>
-            </a:r>
-          </a:p>
-          <a:p>
-            <a:pPr>
-              <a:lnSpc>
-                <a:spcPct val="112000"/>
-              </a:lnSpc>
-              <a:spcAft>
-                <a:spcPts val="500"/>
-              </a:spcAft>
-            </a:pPr>
-            <a:r>
-              <a:rPr sz="1400" b="0">
+            <a:r>
+              <a:rPr sz="1300" b="0">
                 <a:solidFill>
                   <a:srgbClr val="333333"/>
                 </a:solidFill>
                 <a:latin typeface="Fira Sans"/>
               </a:rPr>
-              <a:t>     ◦  </a:t>
-            </a:r>
-            <a:r>
-              <a:rPr sz="1400" b="0">
-                <a:solidFill>
-                  <a:srgbClr val="333333"/>
-                </a:solidFill>
-                <a:latin typeface="Fira Sans"/>
-              </a:rPr>
-              <a:t>La diferencia son 13.788 personas que no viajaron ese día.</a:t>
-            </a:r>
-          </a:p>
-          <a:p>
-            <a:pPr>
-              <a:lnSpc>
-                <a:spcPct val="112000"/>
-              </a:lnSpc>
-              <a:spcAft>
-                <a:spcPts val="500"/>
-              </a:spcAft>
-            </a:pPr>
-            <a:r>
-              <a:rPr sz="1400" b="0">
-                <a:solidFill>
-                  <a:srgbClr val="333333"/>
-                </a:solidFill>
-                <a:latin typeface="Fira Sans"/>
-              </a:rPr>
-              <a:t>     ◦  </a:t>
-            </a:r>
-            <a:r>
-              <a:rPr sz="1400" b="0">
-                <a:solidFill>
-                  <a:srgbClr val="333333"/>
-                </a:solidFill>
-                <a:latin typeface="Fira Sans"/>
-              </a:rPr>
-              <a:t>Con inner desaparecen; con left quedan, con NaN en el viaje.</a:t>
-            </a:r>
-          </a:p>
-          <a:p>
-            <a:pPr>
-              <a:lnSpc>
-                <a:spcPct val="112000"/>
-              </a:lnSpc>
-              <a:spcAft>
-                <a:spcPts val="900"/>
-              </a:spcAft>
-            </a:pPr>
-            <a:r>
-              <a:rPr sz="1800" b="1">
-                <a:solidFill>
-                  <a:srgbClr val="E0A437"/>
-                </a:solidFill>
-                <a:latin typeface="Fira Sans"/>
-              </a:rPr>
-              <a:t>▸ </a:t>
-            </a:r>
-            <a:r>
-              <a:rPr sz="1800" b="1">
-                <a:solidFill>
-                  <a:srgbClr val="1D3557"/>
-                </a:solidFill>
-                <a:latin typeface="Fira Sans"/>
-              </a:rPr>
-              <a:t>Un promedio calculado sobre el resultado del inner excluye a quienes no viajaron.</a:t>
+              <a:t>El valor por defecto es inner: descarta sin aviso las filas sin pareja.</a:t>
             </a:r>
           </a:p>
         </p:txBody>
@@ -6376,7 +6401,7 @@
             <a:avLst/>
           </a:prstGeom>
           <a:solidFill>
-            <a:srgbClr val="1D3557"/>
+            <a:srgbClr val="FAFBFC"/>
           </a:solidFill>
           <a:ln>
             <a:noFill/>
@@ -6413,8 +6438,8 @@
         </p:nvSpPr>
         <p:spPr>
           <a:xfrm>
-            <a:off x="603504" y="1847088"/>
-            <a:ext cx="7946136" cy="1399032"/>
+            <a:off x="402336" y="301752"/>
+            <a:ext cx="8348472" cy="795528"/>
           </a:xfrm>
           <a:prstGeom prst="rect">
             <a:avLst/>
@@ -6428,24 +6453,176 @@
           <a:lstStyle/>
           <a:p>
             <a:r>
-              <a:rPr sz="3400" b="1">
-                <a:solidFill>
-                  <a:srgbClr val="FFFFFF"/>
-                </a:solidFill>
-                <a:latin typeface="Fira Sans"/>
-              </a:rPr>
-              <a:t>Exploración de la EOD</a:t>
-            </a:r>
-          </a:p>
-          <a:p>
+              <a:rPr sz="2800" b="1">
+                <a:solidFill>
+                  <a:srgbClr val="0F0F0F"/>
+                </a:solidFill>
+                <a:latin typeface="Fira Sans"/>
+              </a:rPr>
+              <a:t>El efecto del parámetro how sobre la población analizada</a:t>
+            </a:r>
+          </a:p>
+        </p:txBody>
+      </p:sp>
+      <p:sp>
+        <p:nvSpPr>
+          <p:cNvPr id="4" name="TextBox 3"/>
+          <p:cNvSpPr txBox="1"/>
+          <p:nvPr/>
+        </p:nvSpPr>
+        <p:spPr>
+          <a:xfrm>
+            <a:off x="704088" y="1353312"/>
+            <a:ext cx="7744968" cy="3300984"/>
+          </a:xfrm>
+          <a:prstGeom prst="rect">
+            <a:avLst/>
+          </a:prstGeom>
+          <a:noFill/>
+        </p:spPr>
+        <p:txBody>
+          <a:bodyPr wrap="square">
+            <a:spAutoFit/>
+          </a:bodyPr>
+          <a:lstStyle/>
+          <a:p>
+            <a:pPr>
+              <a:lnSpc>
+                <a:spcPct val="112000"/>
+              </a:lnSpc>
+              <a:spcAft>
+                <a:spcPts val="900"/>
+              </a:spcAft>
+            </a:pPr>
+            <a:r>
+              <a:rPr sz="1800" b="1">
+                <a:solidFill>
+                  <a:srgbClr val="E0A437"/>
+                </a:solidFill>
+                <a:latin typeface="Fira Sans"/>
+              </a:rPr>
+              <a:t>▸ </a:t>
+            </a:r>
             <a:r>
               <a:rPr sz="1800" b="0">
                 <a:solidFill>
+                  <a:srgbClr val="000000"/>
+                </a:solidFill>
+                <a:latin typeface="Fira Sans"/>
+              </a:rPr>
+              <a:t>Personas con viajes, merge inner: 113.591 filas (una por viaje).</a:t>
+            </a:r>
+          </a:p>
+          <a:p>
+            <a:pPr>
+              <a:lnSpc>
+                <a:spcPct val="112000"/>
+              </a:lnSpc>
+              <a:spcAft>
+                <a:spcPts val="900"/>
+              </a:spcAft>
+            </a:pPr>
+            <a:r>
+              <a:rPr sz="1800" b="1">
+                <a:solidFill>
                   <a:srgbClr val="E0A437"/>
                 </a:solidFill>
                 <a:latin typeface="Fira Sans"/>
               </a:rPr>
-              <a:t>Estadística descriptiva sobre datos reales</a:t>
+              <a:t>▸ </a:t>
+            </a:r>
+            <a:r>
+              <a:rPr sz="1800" b="0">
+                <a:solidFill>
+                  <a:srgbClr val="000000"/>
+                </a:solidFill>
+                <a:latin typeface="Fira Sans"/>
+              </a:rPr>
+              <a:t>El mismo merge en left: 127.379 filas.</a:t>
+            </a:r>
+          </a:p>
+          <a:p>
+            <a:pPr>
+              <a:lnSpc>
+                <a:spcPct val="112000"/>
+              </a:lnSpc>
+              <a:spcAft>
+                <a:spcPts val="500"/>
+              </a:spcAft>
+            </a:pPr>
+            <a:r>
+              <a:rPr sz="1400" b="0">
+                <a:solidFill>
+                  <a:srgbClr val="333333"/>
+                </a:solidFill>
+                <a:latin typeface="Fira Sans"/>
+              </a:rPr>
+              <a:t>     ◦  </a:t>
+            </a:r>
+            <a:r>
+              <a:rPr sz="1400" b="0">
+                <a:solidFill>
+                  <a:srgbClr val="333333"/>
+                </a:solidFill>
+                <a:latin typeface="Fira Sans"/>
+              </a:rPr>
+              <a:t>La diferencia son 13.788 personas que no viajaron ese día.</a:t>
+            </a:r>
+          </a:p>
+          <a:p>
+            <a:pPr>
+              <a:lnSpc>
+                <a:spcPct val="112000"/>
+              </a:lnSpc>
+              <a:spcAft>
+                <a:spcPts val="500"/>
+              </a:spcAft>
+            </a:pPr>
+            <a:r>
+              <a:rPr sz="1400" b="0">
+                <a:solidFill>
+                  <a:srgbClr val="333333"/>
+                </a:solidFill>
+                <a:latin typeface="Fira Sans"/>
+              </a:rPr>
+              <a:t>     ◦  </a:t>
+            </a:r>
+            <a:r>
+              <a:rPr sz="1400" b="0">
+                <a:solidFill>
+                  <a:srgbClr val="333333"/>
+                </a:solidFill>
+                <a:latin typeface="Fira Sans"/>
+              </a:rPr>
+              <a:t>Con inner desaparecen; con left quedan, con NaN en el viaje.</a:t>
+            </a:r>
+          </a:p>
+          <a:p>
+            <a:pPr>
+              <a:lnSpc>
+                <a:spcPct val="112000"/>
+              </a:lnSpc>
+              <a:spcAft>
+                <a:spcPts val="900"/>
+              </a:spcAft>
+            </a:pPr>
+            <a:r>
+              <a:rPr sz="1800" b="1">
+                <a:solidFill>
+                  <a:srgbClr val="E0A437"/>
+                </a:solidFill>
+                <a:latin typeface="Fira Sans"/>
+              </a:rPr>
+              <a:t>▸ </a:t>
+            </a:r>
+            <a:r>
+              <a:rPr sz="1800" b="1">
+                <a:solidFill>
+                  <a:srgbClr val="1D3557"/>
+                </a:solidFill>
+                <a:latin typeface="Fira Sans"/>
+              </a:rPr>
+              <a:t>Un promedio calculado sobre el resultado del inner excluye a quienes no viajaron.</a:t>
             </a:r>
           </a:p>
         </p:txBody>
@@ -6483,7 +6660,7 @@
             <a:avLst/>
           </a:prstGeom>
           <a:solidFill>
-            <a:srgbClr val="FAFBFC"/>
+            <a:srgbClr val="1D3557"/>
           </a:solidFill>
           <a:ln>
             <a:noFill/>
@@ -6520,8 +6697,8 @@
         </p:nvSpPr>
         <p:spPr>
           <a:xfrm>
-            <a:off x="402336" y="301752"/>
-            <a:ext cx="8348472" cy="795528"/>
+            <a:off x="603504" y="1847088"/>
+            <a:ext cx="7946136" cy="1399032"/>
           </a:xfrm>
           <a:prstGeom prst="rect">
             <a:avLst/>
@@ -6535,176 +6712,28 @@
           <a:lstStyle/>
           <a:p>
             <a:r>
-              <a:rPr sz="2800" b="1">
-                <a:solidFill>
-                  <a:srgbClr val="0F0F0F"/>
-                </a:solidFill>
-                <a:latin typeface="Fira Sans"/>
-              </a:rPr>
-              <a:t>Viajes por persona: los ausentes también cuentan</a:t>
-            </a:r>
-          </a:p>
-        </p:txBody>
-      </p:sp>
-      <p:sp>
-        <p:nvSpPr>
-          <p:cNvPr id="4" name="TextBox 3"/>
-          <p:cNvSpPr txBox="1"/>
-          <p:nvPr/>
-        </p:nvSpPr>
-        <p:spPr>
-          <a:xfrm>
-            <a:off x="502920" y="1252728"/>
-            <a:ext cx="4023360" cy="3200400"/>
-          </a:xfrm>
-          <a:prstGeom prst="rect">
-            <a:avLst/>
-          </a:prstGeom>
-          <a:noFill/>
-        </p:spPr>
-        <p:txBody>
-          <a:bodyPr wrap="square">
-            <a:spAutoFit/>
-          </a:bodyPr>
-          <a:lstStyle/>
-          <a:p>
-            <a:pPr>
-              <a:lnSpc>
-                <a:spcPct val="112000"/>
-              </a:lnSpc>
-              <a:spcAft>
-                <a:spcPts val="900"/>
-              </a:spcAft>
-            </a:pPr>
-            <a:r>
-              <a:rPr sz="1500" b="1">
+              <a:rPr sz="3400" b="1">
+                <a:solidFill>
+                  <a:srgbClr val="FFFFFF"/>
+                </a:solidFill>
+                <a:latin typeface="Fira Sans"/>
+              </a:rPr>
+              <a:t>Exploración de la EOD</a:t>
+            </a:r>
+          </a:p>
+          <a:p>
+            <a:r>
+              <a:rPr sz="1800" b="0">
                 <a:solidFill>
                   <a:srgbClr val="E0A437"/>
                 </a:solidFill>
                 <a:latin typeface="Fira Sans"/>
               </a:rPr>
-              <a:t>▸ </a:t>
-            </a:r>
-            <a:r>
-              <a:rPr sz="1500" b="0">
-                <a:solidFill>
-                  <a:srgbClr val="000000"/>
-                </a:solidFill>
-                <a:latin typeface="Fira Sans"/>
-              </a:rPr>
-              <a:t>El 23% de las personas no viajó ese día.</a:t>
-            </a:r>
-          </a:p>
-          <a:p>
-            <a:pPr>
-              <a:lnSpc>
-                <a:spcPct val="112000"/>
-              </a:lnSpc>
-              <a:spcAft>
-                <a:spcPts val="900"/>
-              </a:spcAft>
-            </a:pPr>
-            <a:r>
-              <a:rPr sz="1500" b="1">
-                <a:solidFill>
-                  <a:srgbClr val="E0A437"/>
-                </a:solidFill>
-                <a:latin typeface="Fira Sans"/>
-              </a:rPr>
-              <a:t>▸ </a:t>
-            </a:r>
-            <a:r>
-              <a:rPr sz="1500" b="0">
-                <a:solidFill>
-                  <a:srgbClr val="000000"/>
-                </a:solidFill>
-                <a:latin typeface="Fira Sans"/>
-              </a:rPr>
-              <a:t>Media: 1,9 viajes. Mediana: 2 viajes.</a:t>
-            </a:r>
-          </a:p>
-          <a:p>
-            <a:pPr>
-              <a:lnSpc>
-                <a:spcPct val="112000"/>
-              </a:lnSpc>
-              <a:spcAft>
-                <a:spcPts val="900"/>
-              </a:spcAft>
-            </a:pPr>
-            <a:r>
-              <a:rPr sz="1500" b="1">
-                <a:solidFill>
-                  <a:srgbClr val="E0A437"/>
-                </a:solidFill>
-                <a:latin typeface="Fira Sans"/>
-              </a:rPr>
-              <a:t>▸ </a:t>
-            </a:r>
-            <a:r>
-              <a:rPr sz="1500" b="0">
-                <a:solidFill>
-                  <a:srgbClr val="000000"/>
-                </a:solidFill>
-                <a:latin typeface="Fira Sans"/>
-              </a:rPr>
-              <a:t>La media quedó bajo la mediana: la masa de ceros la desplaza.</a:t>
-            </a:r>
-          </a:p>
-          <a:p>
-            <a:pPr>
-              <a:lnSpc>
-                <a:spcPct val="112000"/>
-              </a:lnSpc>
-              <a:spcAft>
-                <a:spcPts val="900"/>
-              </a:spcAft>
-            </a:pPr>
-            <a:r>
-              <a:rPr sz="1500" b="1">
-                <a:solidFill>
-                  <a:srgbClr val="E0A437"/>
-                </a:solidFill>
-                <a:latin typeface="Fira Sans"/>
-              </a:rPr>
-              <a:t>▸ </a:t>
-            </a:r>
-            <a:r>
-              <a:rPr sz="1500" b="1">
-                <a:solidFill>
-                  <a:srgbClr val="1D3557"/>
-                </a:solidFill>
-                <a:latin typeface="Fira Sans"/>
-              </a:rPr>
-              <a:t>La dirección del sesgo depende de la forma de la distribución.</a:t>
-            </a:r>
-          </a:p>
-        </p:txBody>
-      </p:sp>
-      <p:pic>
-        <p:nvPicPr>
-          <p:cNvPr id="5" name="Picture 4" descr="02_viajes_por_persona.png"/>
-          <p:cNvPicPr>
-            <a:picLocks noChangeAspect="1"/>
-          </p:cNvPicPr>
-          <p:nvPr/>
-        </p:nvPicPr>
-        <p:blipFill>
-          <a:blip r:embed="rId2"/>
-          <a:stretch>
-            <a:fillRect/>
-          </a:stretch>
-        </p:blipFill>
-        <p:spPr>
-          <a:xfrm>
-            <a:off x="4892040" y="1371600"/>
-            <a:ext cx="3840480" cy="2191739"/>
-          </a:xfrm>
-          <a:prstGeom prst="rect">
-            <a:avLst/>
-          </a:prstGeom>
-        </p:spPr>
-      </p:pic>
+              <a:t>Estadística descriptiva sobre datos reales</a:t>
+            </a:r>
+          </a:p>
+        </p:txBody>
+      </p:sp>
     </p:spTree>
   </p:cSld>
   <p:clrMapOvr>
@@ -6796,14 +6825,149 @@
                 </a:solidFill>
                 <a:latin typeface="Fira Sans"/>
               </a:rPr>
-              <a:t>Los factores de expansión: de la muestra a la ciudad</a:t>
+              <a:t>Viajes por persona: los ausentes también cuentan</a:t>
+            </a:r>
+          </a:p>
+        </p:txBody>
+      </p:sp>
+      <p:sp>
+        <p:nvSpPr>
+          <p:cNvPr id="4" name="TextBox 3"/>
+          <p:cNvSpPr txBox="1"/>
+          <p:nvPr/>
+        </p:nvSpPr>
+        <p:spPr>
+          <a:xfrm>
+            <a:off x="502920" y="1252728"/>
+            <a:ext cx="4023360" cy="3200400"/>
+          </a:xfrm>
+          <a:prstGeom prst="rect">
+            <a:avLst/>
+          </a:prstGeom>
+          <a:noFill/>
+        </p:spPr>
+        <p:txBody>
+          <a:bodyPr wrap="square">
+            <a:spAutoFit/>
+          </a:bodyPr>
+          <a:lstStyle/>
+          <a:p>
+            <a:pPr>
+              <a:lnSpc>
+                <a:spcPct val="112000"/>
+              </a:lnSpc>
+              <a:spcAft>
+                <a:spcPts val="900"/>
+              </a:spcAft>
+            </a:pPr>
+            <a:r>
+              <a:rPr sz="1500" b="1">
+                <a:solidFill>
+                  <a:srgbClr val="E0A437"/>
+                </a:solidFill>
+                <a:latin typeface="Fira Sans"/>
+              </a:rPr>
+              <a:t>▸ </a:t>
+            </a:r>
+            <a:r>
+              <a:rPr sz="1500" b="0">
+                <a:solidFill>
+                  <a:srgbClr val="000000"/>
+                </a:solidFill>
+                <a:latin typeface="Fira Sans"/>
+              </a:rPr>
+              <a:t>El 23% de las personas no viajó ese día.</a:t>
+            </a:r>
+          </a:p>
+          <a:p>
+            <a:pPr>
+              <a:lnSpc>
+                <a:spcPct val="112000"/>
+              </a:lnSpc>
+              <a:spcAft>
+                <a:spcPts val="900"/>
+              </a:spcAft>
+            </a:pPr>
+            <a:r>
+              <a:rPr sz="1500" b="1">
+                <a:solidFill>
+                  <a:srgbClr val="E0A437"/>
+                </a:solidFill>
+                <a:latin typeface="Fira Sans"/>
+              </a:rPr>
+              <a:t>▸ </a:t>
+            </a:r>
+            <a:r>
+              <a:rPr sz="1500" b="0">
+                <a:solidFill>
+                  <a:srgbClr val="000000"/>
+                </a:solidFill>
+                <a:latin typeface="Fira Sans"/>
+              </a:rPr>
+              <a:t>Media: 1,9 viajes. Mediana: 2 viajes.</a:t>
+            </a:r>
+          </a:p>
+          <a:p>
+            <a:pPr>
+              <a:lnSpc>
+                <a:spcPct val="112000"/>
+              </a:lnSpc>
+              <a:spcAft>
+                <a:spcPts val="900"/>
+              </a:spcAft>
+            </a:pPr>
+            <a:r>
+              <a:rPr sz="1500" b="1">
+                <a:solidFill>
+                  <a:srgbClr val="E0A437"/>
+                </a:solidFill>
+                <a:latin typeface="Fira Sans"/>
+              </a:rPr>
+              <a:t>▸ </a:t>
+            </a:r>
+            <a:r>
+              <a:rPr sz="1500" b="0">
+                <a:solidFill>
+                  <a:srgbClr val="000000"/>
+                </a:solidFill>
+                <a:latin typeface="Fira Sans"/>
+              </a:rPr>
+              <a:t>La media quedó bajo la mediana: la masa de ceros la desplaza.</a:t>
+            </a:r>
+          </a:p>
+          <a:p>
+            <a:pPr>
+              <a:lnSpc>
+                <a:spcPct val="112000"/>
+              </a:lnSpc>
+              <a:spcAft>
+                <a:spcPts val="900"/>
+              </a:spcAft>
+            </a:pPr>
+            <a:r>
+              <a:rPr sz="1500" b="1">
+                <a:solidFill>
+                  <a:srgbClr val="E0A437"/>
+                </a:solidFill>
+                <a:latin typeface="Fira Sans"/>
+              </a:rPr>
+              <a:t>▸ </a:t>
+            </a:r>
+            <a:r>
+              <a:rPr sz="1500" b="1">
+                <a:solidFill>
+                  <a:srgbClr val="1D3557"/>
+                </a:solidFill>
+                <a:latin typeface="Fira Sans"/>
+              </a:rPr>
+              <a:t>La dirección del sesgo depende de la forma de la distribución.</a:t>
             </a:r>
           </a:p>
         </p:txBody>
       </p:sp>
       <p:pic>
         <p:nvPicPr>
-          <p:cNvPr id="4" name="Picture 3" descr="06_diagrama_factores.png"/>
+          <p:cNvPr id="5" name="Picture 4" descr="02_viajes_por_persona.png"/>
           <p:cNvPicPr>
             <a:picLocks noChangeAspect="1"/>
           </p:cNvPicPr>
@@ -6817,48 +6981,14 @@
         </p:blipFill>
         <p:spPr>
           <a:xfrm>
-            <a:off x="1417319" y="1143000"/>
-            <a:ext cx="6309360" cy="2871234"/>
+            <a:off x="4892040" y="1371600"/>
+            <a:ext cx="3840480" cy="2191739"/>
           </a:xfrm>
           <a:prstGeom prst="rect">
             <a:avLst/>
           </a:prstGeom>
         </p:spPr>
       </p:pic>
-      <p:sp>
-        <p:nvSpPr>
-          <p:cNvPr id="5" name="TextBox 4"/>
-          <p:cNvSpPr txBox="1"/>
-          <p:nvPr/>
-        </p:nvSpPr>
-        <p:spPr>
-          <a:xfrm>
-            <a:off x="704088" y="4434840"/>
-            <a:ext cx="7744968" cy="457200"/>
-          </a:xfrm>
-          <a:prstGeom prst="rect">
-            <a:avLst/>
-          </a:prstGeom>
-          <a:noFill/>
-        </p:spPr>
-        <p:txBody>
-          <a:bodyPr wrap="square">
-            <a:spAutoFit/>
-          </a:bodyPr>
-          <a:lstStyle/>
-          <a:p>
-            <a:r>
-              <a:rPr sz="1300" b="0">
-                <a:solidFill>
-                  <a:srgbClr val="333333"/>
-                </a:solidFill>
-                <a:latin typeface="Fira Sans"/>
-              </a:rPr>
-              <a:t>Contar filas responde por la muestra; sumar factores responde por la ciudad.</a:t>
-            </a:r>
-          </a:p>
-        </p:txBody>
-      </p:sp>
     </p:spTree>
   </p:cSld>
   <p:clrMapOvr>
@@ -6950,149 +7080,14 @@
                 </a:solidFill>
                 <a:latin typeface="Fira Sans"/>
               </a:rPr>
-              <a:t>El ingreso de los hogares: media y mediana</a:t>
-            </a:r>
-          </a:p>
-        </p:txBody>
-      </p:sp>
-      <p:sp>
-        <p:nvSpPr>
-          <p:cNvPr id="4" name="TextBox 3"/>
-          <p:cNvSpPr txBox="1"/>
-          <p:nvPr/>
-        </p:nvSpPr>
-        <p:spPr>
-          <a:xfrm>
-            <a:off x="502920" y="1252728"/>
-            <a:ext cx="4023360" cy="3200400"/>
-          </a:xfrm>
-          <a:prstGeom prst="rect">
-            <a:avLst/>
-          </a:prstGeom>
-          <a:noFill/>
-        </p:spPr>
-        <p:txBody>
-          <a:bodyPr wrap="square">
-            <a:spAutoFit/>
-          </a:bodyPr>
-          <a:lstStyle/>
-          <a:p>
-            <a:pPr>
-              <a:lnSpc>
-                <a:spcPct val="112000"/>
-              </a:lnSpc>
-              <a:spcAft>
-                <a:spcPts val="900"/>
-              </a:spcAft>
-            </a:pPr>
-            <a:r>
-              <a:rPr sz="1500" b="1">
-                <a:solidFill>
-                  <a:srgbClr val="E0A437"/>
-                </a:solidFill>
-                <a:latin typeface="Fira Sans"/>
-              </a:rPr>
-              <a:t>▸ </a:t>
-            </a:r>
-            <a:r>
-              <a:rPr sz="1500" b="0">
-                <a:solidFill>
-                  <a:srgbClr val="000000"/>
-                </a:solidFill>
-                <a:latin typeface="Fira Sans"/>
-              </a:rPr>
-              <a:t>Media: $688.274. Mediana: $507.826.</a:t>
-            </a:r>
-          </a:p>
-          <a:p>
-            <a:pPr>
-              <a:lnSpc>
-                <a:spcPct val="112000"/>
-              </a:lnSpc>
-              <a:spcAft>
-                <a:spcPts val="900"/>
-              </a:spcAft>
-            </a:pPr>
-            <a:r>
-              <a:rPr sz="1500" b="1">
-                <a:solidFill>
-                  <a:srgbClr val="E0A437"/>
-                </a:solidFill>
-                <a:latin typeface="Fira Sans"/>
-              </a:rPr>
-              <a:t>▸ </a:t>
-            </a:r>
-            <a:r>
-              <a:rPr sz="1500" b="0">
-                <a:solidFill>
-                  <a:srgbClr val="000000"/>
-                </a:solidFill>
-                <a:latin typeface="Fira Sans"/>
-              </a:rPr>
-              <a:t>La media es un 36% más alta que la mediana.</a:t>
-            </a:r>
-          </a:p>
-          <a:p>
-            <a:pPr>
-              <a:lnSpc>
-                <a:spcPct val="112000"/>
-              </a:lnSpc>
-              <a:spcAft>
-                <a:spcPts val="900"/>
-              </a:spcAft>
-            </a:pPr>
-            <a:r>
-              <a:rPr sz="1500" b="1">
-                <a:solidFill>
-                  <a:srgbClr val="E0A437"/>
-                </a:solidFill>
-                <a:latin typeface="Fira Sans"/>
-              </a:rPr>
-              <a:t>▸ </a:t>
-            </a:r>
-            <a:r>
-              <a:rPr sz="1500" b="0">
-                <a:solidFill>
-                  <a:srgbClr val="000000"/>
-                </a:solidFill>
-                <a:latin typeface="Fira Sans"/>
-              </a:rPr>
-              <a:t>Los ingresos altos desplazan el promedio; la mayoría gana menos.</a:t>
-            </a:r>
-          </a:p>
-          <a:p>
-            <a:pPr>
-              <a:lnSpc>
-                <a:spcPct val="112000"/>
-              </a:lnSpc>
-              <a:spcAft>
-                <a:spcPts val="900"/>
-              </a:spcAft>
-            </a:pPr>
-            <a:r>
-              <a:rPr sz="1500" b="1">
-                <a:solidFill>
-                  <a:srgbClr val="E0A437"/>
-                </a:solidFill>
-                <a:latin typeface="Fira Sans"/>
-              </a:rPr>
-              <a:t>▸ </a:t>
-            </a:r>
-            <a:r>
-              <a:rPr sz="1500" b="1">
-                <a:solidFill>
-                  <a:srgbClr val="1D3557"/>
-                </a:solidFill>
-                <a:latin typeface="Fira Sans"/>
-              </a:rPr>
-              <a:t>El promedio describe una situación en la que la mayoría no está.</a:t>
+              <a:t>Los factores de expansión: de la muestra a la ciudad</a:t>
             </a:r>
           </a:p>
         </p:txBody>
       </p:sp>
       <p:pic>
         <p:nvPicPr>
-          <p:cNvPr id="5" name="Picture 4" descr="01_ingreso_media_mediana.png"/>
+          <p:cNvPr id="4" name="Picture 3" descr="06_diagrama_factores.png"/>
           <p:cNvPicPr>
             <a:picLocks noChangeAspect="1"/>
           </p:cNvPicPr>
@@ -7106,14 +7101,48 @@
         </p:blipFill>
         <p:spPr>
           <a:xfrm>
-            <a:off x="4892040" y="1371600"/>
-            <a:ext cx="3840480" cy="2182719"/>
+            <a:off x="1417319" y="1143000"/>
+            <a:ext cx="6309360" cy="2871234"/>
           </a:xfrm>
           <a:prstGeom prst="rect">
             <a:avLst/>
           </a:prstGeom>
         </p:spPr>
       </p:pic>
+      <p:sp>
+        <p:nvSpPr>
+          <p:cNvPr id="5" name="TextBox 4"/>
+          <p:cNvSpPr txBox="1"/>
+          <p:nvPr/>
+        </p:nvSpPr>
+        <p:spPr>
+          <a:xfrm>
+            <a:off x="704088" y="4434840"/>
+            <a:ext cx="7744968" cy="457200"/>
+          </a:xfrm>
+          <a:prstGeom prst="rect">
+            <a:avLst/>
+          </a:prstGeom>
+          <a:noFill/>
+        </p:spPr>
+        <p:txBody>
+          <a:bodyPr wrap="square">
+            <a:spAutoFit/>
+          </a:bodyPr>
+          <a:lstStyle/>
+          <a:p>
+            <a:r>
+              <a:rPr sz="1300" b="0">
+                <a:solidFill>
+                  <a:srgbClr val="333333"/>
+                </a:solidFill>
+                <a:latin typeface="Fira Sans"/>
+              </a:rPr>
+              <a:t>Contar filas responde por la muestra; sumar factores responde por la ciudad.</a:t>
+            </a:r>
+          </a:p>
+        </p:txBody>
+      </p:sp>
     </p:spTree>
   </p:cSld>
   <p:clrMapOvr>
@@ -7205,7 +7234,7 @@
                 </a:solidFill>
                 <a:latin typeface="Fira Sans"/>
               </a:rPr>
-              <a:t>La duración de los viajes: valores extremos</a:t>
+              <a:t>El ingreso de los hogares: media y mediana</a:t>
             </a:r>
           </a:p>
         </p:txBody>
@@ -7256,7 +7285,7 @@
                 </a:solidFill>
                 <a:latin typeface="Fira Sans"/>
               </a:rPr>
-              <a:t>Mediana: 30 minutos. Percentil 95: 98 minutos.</a:t>
+              <a:t>Media: $688.274. Mediana: $507.826.</a:t>
             </a:r>
           </a:p>
           <a:p>
@@ -7284,7 +7313,7 @@
                 </a:solidFill>
                 <a:latin typeface="Fira Sans"/>
               </a:rPr>
-              <a:t>Máximo registrado: 1.335 minutos, un viaje de 22 horas.</a:t>
+              <a:t>La media es un 36% más alta que la mediana.</a:t>
             </a:r>
           </a:p>
           <a:p>
@@ -7312,7 +7341,7 @@
                 </a:solidFill>
                 <a:latin typeface="Fira Sans"/>
               </a:rPr>
-              <a:t>¿Error de digitación? ¿Turno nocturno mal anotado?</a:t>
+              <a:t>Los ingresos altos desplazan el promedio; la mayoría gana menos.</a:t>
             </a:r>
           </a:p>
           <a:p>
@@ -7340,14 +7369,14 @@
                 </a:solidFill>
                 <a:latin typeface="Fira Sans"/>
               </a:rPr>
-              <a:t>Los valores extremos se investigan y la decisión se declara.</a:t>
+              <a:t>El promedio describe una situación en la que la mayoría no está.</a:t>
             </a:r>
           </a:p>
         </p:txBody>
       </p:sp>
       <p:pic>
         <p:nvPicPr>
-          <p:cNvPr id="5" name="Picture 4" descr="04_duracion_viajes.png"/>
+          <p:cNvPr id="5" name="Picture 4" descr="01_ingreso_media_mediana.png"/>
           <p:cNvPicPr>
             <a:picLocks noChangeAspect="1"/>
           </p:cNvPicPr>
@@ -7362,7 +7391,7 @@
         <p:spPr>
           <a:xfrm>
             <a:off x="4892040" y="1371600"/>
-            <a:ext cx="3840480" cy="2146492"/>
+            <a:ext cx="3840480" cy="2182719"/>
           </a:xfrm>
           <a:prstGeom prst="rect">
             <a:avLst/>
@@ -7460,7 +7489,7 @@
                 </a:solidFill>
                 <a:latin typeface="Fira Sans"/>
               </a:rPr>
-              <a:t>La partición modal del Gran Santiago</a:t>
+              <a:t>La duración de los viajes: valores extremos</a:t>
             </a:r>
           </a:p>
         </p:txBody>
@@ -7511,91 +7540,7 @@
                 </a:solidFill>
                 <a:latin typeface="Fira Sans"/>
               </a:rPr>
-              <a:t>Dos merges y un groupby ponderado por factor.</a:t>
-            </a:r>
-          </a:p>
-          <a:p>
-            <a:pPr>
-              <a:lnSpc>
-                <a:spcPct val="112000"/>
-              </a:lnSpc>
-              <a:spcAft>
-                <a:spcPts val="500"/>
-              </a:spcAft>
-            </a:pPr>
-            <a:r>
-              <a:rPr sz="1300" b="0">
-                <a:solidFill>
-                  <a:srgbClr val="333333"/>
-                </a:solidFill>
-                <a:latin typeface="Fira Sans"/>
-              </a:rPr>
-              <a:t>     ◦  </a:t>
-            </a:r>
-            <a:r>
-              <a:rPr sz="1300" b="0">
-                <a:solidFill>
-                  <a:srgbClr val="333333"/>
-                </a:solidFill>
-                <a:latin typeface="Fira Sans"/>
-              </a:rPr>
-              <a:t>Caminata: 34% de los viajes.</a:t>
-            </a:r>
-          </a:p>
-          <a:p>
-            <a:pPr>
-              <a:lnSpc>
-                <a:spcPct val="112000"/>
-              </a:lnSpc>
-              <a:spcAft>
-                <a:spcPts val="500"/>
-              </a:spcAft>
-            </a:pPr>
-            <a:r>
-              <a:rPr sz="1300" b="0">
-                <a:solidFill>
-                  <a:srgbClr val="333333"/>
-                </a:solidFill>
-                <a:latin typeface="Fira Sans"/>
-              </a:rPr>
-              <a:t>     ◦  </a:t>
-            </a:r>
-            <a:r>
-              <a:rPr sz="1300" b="0">
-                <a:solidFill>
-                  <a:srgbClr val="333333"/>
-                </a:solidFill>
-                <a:latin typeface="Fira Sans"/>
-              </a:rPr>
-              <a:t>Transporte público (Bip!): 24%.</a:t>
-            </a:r>
-          </a:p>
-          <a:p>
-            <a:pPr>
-              <a:lnSpc>
-                <a:spcPct val="112000"/>
-              </a:lnSpc>
-              <a:spcAft>
-                <a:spcPts val="500"/>
-              </a:spcAft>
-            </a:pPr>
-            <a:r>
-              <a:rPr sz="1300" b="0">
-                <a:solidFill>
-                  <a:srgbClr val="333333"/>
-                </a:solidFill>
-                <a:latin typeface="Fira Sans"/>
-              </a:rPr>
-              <a:t>     ◦  </a:t>
-            </a:r>
-            <a:r>
-              <a:rPr sz="1300" b="0">
-                <a:solidFill>
-                  <a:srgbClr val="333333"/>
-                </a:solidFill>
-                <a:latin typeface="Fira Sans"/>
-              </a:rPr>
-              <a:t>Auto: 23%.</a:t>
+              <a:t>Mediana: 30 minutos. Percentil 95: 98 minutos.</a:t>
             </a:r>
           </a:p>
           <a:p>
@@ -7617,20 +7562,76 @@
               <a:t>▸ </a:t>
             </a:r>
             <a:r>
+              <a:rPr sz="1500" b="0">
+                <a:solidFill>
+                  <a:srgbClr val="000000"/>
+                </a:solidFill>
+                <a:latin typeface="Fira Sans"/>
+              </a:rPr>
+              <a:t>Máximo registrado: 1.335 minutos, un viaje de 22 horas.</a:t>
+            </a:r>
+          </a:p>
+          <a:p>
+            <a:pPr>
+              <a:lnSpc>
+                <a:spcPct val="112000"/>
+              </a:lnSpc>
+              <a:spcAft>
+                <a:spcPts val="900"/>
+              </a:spcAft>
+            </a:pPr>
+            <a:r>
               <a:rPr sz="1500" b="1">
                 <a:solidFill>
+                  <a:srgbClr val="E0A437"/>
+                </a:solidFill>
+                <a:latin typeface="Fira Sans"/>
+              </a:rPr>
+              <a:t>▸ </a:t>
+            </a:r>
+            <a:r>
+              <a:rPr sz="1500" b="0">
+                <a:solidFill>
+                  <a:srgbClr val="000000"/>
+                </a:solidFill>
+                <a:latin typeface="Fira Sans"/>
+              </a:rPr>
+              <a:t>¿Error de digitación? ¿Turno nocturno mal anotado?</a:t>
+            </a:r>
+          </a:p>
+          <a:p>
+            <a:pPr>
+              <a:lnSpc>
+                <a:spcPct val="112000"/>
+              </a:lnSpc>
+              <a:spcAft>
+                <a:spcPts val="900"/>
+              </a:spcAft>
+            </a:pPr>
+            <a:r>
+              <a:rPr sz="1500" b="1">
+                <a:solidFill>
+                  <a:srgbClr val="E0A437"/>
+                </a:solidFill>
+                <a:latin typeface="Fira Sans"/>
+              </a:rPr>
+              <a:t>▸ </a:t>
+            </a:r>
+            <a:r>
+              <a:rPr sz="1500" b="1">
+                <a:solidFill>
                   <a:srgbClr val="1D3557"/>
                 </a:solidFill>
                 <a:latin typeface="Fira Sans"/>
               </a:rPr>
-              <a:t>Calculada desde los microdatos, con los factores de un día laboral.</a:t>
+              <a:t>Los valores extremos se investigan y la decisión se declara.</a:t>
             </a:r>
           </a:p>
         </p:txBody>
       </p:sp>
       <p:pic>
         <p:nvPicPr>
-          <p:cNvPr id="5" name="Picture 4" descr="03_reparto_modal.png"/>
+          <p:cNvPr id="5" name="Picture 4" descr="04_duracion_viajes.png"/>
           <p:cNvPicPr>
             <a:picLocks noChangeAspect="1"/>
           </p:cNvPicPr>
@@ -7645,7 +7646,7 @@
         <p:spPr>
           <a:xfrm>
             <a:off x="4892040" y="1371600"/>
-            <a:ext cx="3840480" cy="1938578"/>
+            <a:ext cx="3840480" cy="2146492"/>
           </a:xfrm>
           <a:prstGeom prst="rect">
             <a:avLst/>
@@ -7743,14 +7744,177 @@
                 </a:solidFill>
                 <a:latin typeface="Fira Sans"/>
               </a:rPr>
-              <a:t>El reparto modal difiere entre comunas</a:t>
+              <a:t>La partición modal del Gran Santiago</a:t>
+            </a:r>
+          </a:p>
+        </p:txBody>
+      </p:sp>
+      <p:sp>
+        <p:nvSpPr>
+          <p:cNvPr id="4" name="TextBox 3"/>
+          <p:cNvSpPr txBox="1"/>
+          <p:nvPr/>
+        </p:nvSpPr>
+        <p:spPr>
+          <a:xfrm>
+            <a:off x="502920" y="1252728"/>
+            <a:ext cx="4023360" cy="3200400"/>
+          </a:xfrm>
+          <a:prstGeom prst="rect">
+            <a:avLst/>
+          </a:prstGeom>
+          <a:noFill/>
+        </p:spPr>
+        <p:txBody>
+          <a:bodyPr wrap="square">
+            <a:spAutoFit/>
+          </a:bodyPr>
+          <a:lstStyle/>
+          <a:p>
+            <a:pPr>
+              <a:lnSpc>
+                <a:spcPct val="112000"/>
+              </a:lnSpc>
+              <a:spcAft>
+                <a:spcPts val="900"/>
+              </a:spcAft>
+            </a:pPr>
+            <a:r>
+              <a:rPr sz="1500" b="1">
+                <a:solidFill>
+                  <a:srgbClr val="E0A437"/>
+                </a:solidFill>
+                <a:latin typeface="Fira Sans"/>
+              </a:rPr>
+              <a:t>▸ </a:t>
+            </a:r>
+            <a:r>
+              <a:rPr sz="1500" b="0">
+                <a:solidFill>
+                  <a:srgbClr val="000000"/>
+                </a:solidFill>
+                <a:latin typeface="Fira Sans"/>
+              </a:rPr>
+              <a:t>Dos merges y un groupby ponderado por factor.</a:t>
+            </a:r>
+          </a:p>
+          <a:p>
+            <a:pPr>
+              <a:lnSpc>
+                <a:spcPct val="112000"/>
+              </a:lnSpc>
+              <a:spcAft>
+                <a:spcPts val="500"/>
+              </a:spcAft>
+            </a:pPr>
+            <a:r>
+              <a:rPr sz="1300" b="0">
+                <a:solidFill>
+                  <a:srgbClr val="333333"/>
+                </a:solidFill>
+                <a:latin typeface="Fira Sans"/>
+              </a:rPr>
+              <a:t>     ◦  </a:t>
+            </a:r>
+            <a:r>
+              <a:rPr sz="1300" b="0">
+                <a:solidFill>
+                  <a:srgbClr val="333333"/>
+                </a:solidFill>
+                <a:latin typeface="Fira Sans"/>
+              </a:rPr>
+              <a:t>Caminata: 34% de los viajes.</a:t>
+            </a:r>
+          </a:p>
+          <a:p>
+            <a:pPr>
+              <a:lnSpc>
+                <a:spcPct val="112000"/>
+              </a:lnSpc>
+              <a:spcAft>
+                <a:spcPts val="500"/>
+              </a:spcAft>
+            </a:pPr>
+            <a:r>
+              <a:rPr sz="1300" b="0">
+                <a:solidFill>
+                  <a:srgbClr val="333333"/>
+                </a:solidFill>
+                <a:latin typeface="Fira Sans"/>
+              </a:rPr>
+              <a:t>     ◦  </a:t>
+            </a:r>
+            <a:r>
+              <a:rPr sz="1300" b="0">
+                <a:solidFill>
+                  <a:srgbClr val="333333"/>
+                </a:solidFill>
+                <a:latin typeface="Fira Sans"/>
+              </a:rPr>
+              <a:t>Transporte público (Bip!): 24%.</a:t>
+            </a:r>
+          </a:p>
+          <a:p>
+            <a:pPr>
+              <a:lnSpc>
+                <a:spcPct val="112000"/>
+              </a:lnSpc>
+              <a:spcAft>
+                <a:spcPts val="500"/>
+              </a:spcAft>
+            </a:pPr>
+            <a:r>
+              <a:rPr sz="1300" b="0">
+                <a:solidFill>
+                  <a:srgbClr val="333333"/>
+                </a:solidFill>
+                <a:latin typeface="Fira Sans"/>
+              </a:rPr>
+              <a:t>     ◦  </a:t>
+            </a:r>
+            <a:r>
+              <a:rPr sz="1300" b="0">
+                <a:solidFill>
+                  <a:srgbClr val="333333"/>
+                </a:solidFill>
+                <a:latin typeface="Fira Sans"/>
+              </a:rPr>
+              <a:t>Auto: 23%.</a:t>
+            </a:r>
+          </a:p>
+          <a:p>
+            <a:pPr>
+              <a:lnSpc>
+                <a:spcPct val="112000"/>
+              </a:lnSpc>
+              <a:spcAft>
+                <a:spcPts val="900"/>
+              </a:spcAft>
+            </a:pPr>
+            <a:r>
+              <a:rPr sz="1500" b="1">
+                <a:solidFill>
+                  <a:srgbClr val="E0A437"/>
+                </a:solidFill>
+                <a:latin typeface="Fira Sans"/>
+              </a:rPr>
+              <a:t>▸ </a:t>
+            </a:r>
+            <a:r>
+              <a:rPr sz="1500" b="1">
+                <a:solidFill>
+                  <a:srgbClr val="1D3557"/>
+                </a:solidFill>
+                <a:latin typeface="Fira Sans"/>
+              </a:rPr>
+              <a:t>Calculada desde los microdatos, con los factores de un día laboral.</a:t>
             </a:r>
           </a:p>
         </p:txBody>
       </p:sp>
       <p:pic>
         <p:nvPicPr>
-          <p:cNvPr id="4" name="Picture 3" descr="08_modo_por_comuna.png"/>
+          <p:cNvPr id="5" name="Picture 4" descr="03_reparto_modal.png"/>
           <p:cNvPicPr>
             <a:picLocks noChangeAspect="1"/>
           </p:cNvPicPr>
@@ -7764,48 +7928,14 @@
         </p:blipFill>
         <p:spPr>
           <a:xfrm>
-            <a:off x="1994250" y="1143000"/>
-            <a:ext cx="5155498" cy="3154679"/>
+            <a:off x="4892040" y="1371600"/>
+            <a:ext cx="3840480" cy="1938578"/>
           </a:xfrm>
           <a:prstGeom prst="rect">
             <a:avLst/>
           </a:prstGeom>
         </p:spPr>
       </p:pic>
-      <p:sp>
-        <p:nvSpPr>
-          <p:cNvPr id="5" name="TextBox 4"/>
-          <p:cNvSpPr txBox="1"/>
-          <p:nvPr/>
-        </p:nvSpPr>
-        <p:spPr>
-          <a:xfrm>
-            <a:off x="704088" y="4434840"/>
-            <a:ext cx="7744968" cy="457200"/>
-          </a:xfrm>
-          <a:prstGeom prst="rect">
-            <a:avLst/>
-          </a:prstGeom>
-          <a:noFill/>
-        </p:spPr>
-        <p:txBody>
-          <a:bodyPr wrap="square">
-            <a:spAutoFit/>
-          </a:bodyPr>
-          <a:lstStyle/>
-          <a:p>
-            <a:r>
-              <a:rPr sz="1300" b="0">
-                <a:solidFill>
-                  <a:srgbClr val="333333"/>
-                </a:solidFill>
-                <a:latin typeface="Fira Sans"/>
-              </a:rPr>
-              <a:t>Normalizar por comuna permite comparar proporciones entre comunas de tamaños muy distintos.</a:t>
-            </a:r>
-          </a:p>
-        </p:txBody>
-      </p:sp>
     </p:spTree>
   </p:cSld>
   <p:clrMapOvr>
@@ -8004,177 +8134,14 @@
                 </a:solidFill>
                 <a:latin typeface="Fira Sans"/>
               </a:rPr>
-              <a:t>Ingreso y uso de transporte público</a:t>
-            </a:r>
-          </a:p>
-        </p:txBody>
-      </p:sp>
-      <p:sp>
-        <p:nvSpPr>
-          <p:cNvPr id="4" name="TextBox 3"/>
-          <p:cNvSpPr txBox="1"/>
-          <p:nvPr/>
-        </p:nvSpPr>
-        <p:spPr>
-          <a:xfrm>
-            <a:off x="502920" y="1252728"/>
-            <a:ext cx="4023360" cy="3200400"/>
-          </a:xfrm>
-          <a:prstGeom prst="rect">
-            <a:avLst/>
-          </a:prstGeom>
-          <a:noFill/>
-        </p:spPr>
-        <p:txBody>
-          <a:bodyPr wrap="square">
-            <a:spAutoFit/>
-          </a:bodyPr>
-          <a:lstStyle/>
-          <a:p>
-            <a:pPr>
-              <a:lnSpc>
-                <a:spcPct val="112000"/>
-              </a:lnSpc>
-              <a:spcAft>
-                <a:spcPts val="900"/>
-              </a:spcAft>
-            </a:pPr>
-            <a:r>
-              <a:rPr sz="1500" b="1">
-                <a:solidFill>
-                  <a:srgbClr val="E0A437"/>
-                </a:solidFill>
-                <a:latin typeface="Fira Sans"/>
-              </a:rPr>
-              <a:t>▸ </a:t>
-            </a:r>
-            <a:r>
-              <a:rPr sz="1500" b="0">
-                <a:solidFill>
-                  <a:srgbClr val="000000"/>
-                </a:solidFill>
-                <a:latin typeface="Fira Sans"/>
-              </a:rPr>
-              <a:t>Cada punto es una comuna: ingreso medio contra proporción de viajes en transporte público.</a:t>
-            </a:r>
-          </a:p>
-          <a:p>
-            <a:pPr>
-              <a:lnSpc>
-                <a:spcPct val="112000"/>
-              </a:lnSpc>
-              <a:spcAft>
-                <a:spcPts val="500"/>
-              </a:spcAft>
-            </a:pPr>
-            <a:r>
-              <a:rPr sz="1300" b="0">
-                <a:solidFill>
-                  <a:srgbClr val="333333"/>
-                </a:solidFill>
-                <a:latin typeface="Fira Sans"/>
-              </a:rPr>
-              <a:t>     ◦  </a:t>
-            </a:r>
-            <a:r>
-              <a:rPr sz="1300" b="0">
-                <a:solidFill>
-                  <a:srgbClr val="333333"/>
-                </a:solidFill>
-                <a:latin typeface="Fira Sans"/>
-              </a:rPr>
-              <a:t>Periferia (Buin, Melipilla): poco transporte público; la red no llega.</a:t>
-            </a:r>
-          </a:p>
-          <a:p>
-            <a:pPr>
-              <a:lnSpc>
-                <a:spcPct val="112000"/>
-              </a:lnSpc>
-              <a:spcAft>
-                <a:spcPts val="500"/>
-              </a:spcAft>
-            </a:pPr>
-            <a:r>
-              <a:rPr sz="1300" b="0">
-                <a:solidFill>
-                  <a:srgbClr val="333333"/>
-                </a:solidFill>
-                <a:latin typeface="Fira Sans"/>
-              </a:rPr>
-              <a:t>     ◦  </a:t>
-            </a:r>
-            <a:r>
-              <a:rPr sz="1300" b="0">
-                <a:solidFill>
-                  <a:srgbClr val="333333"/>
-                </a:solidFill>
-                <a:latin typeface="Fira Sans"/>
-              </a:rPr>
-              <a:t>Ingresos altos (Vitacura, Lo Barnechea): conectadas, con poco uso.</a:t>
-            </a:r>
-          </a:p>
-          <a:p>
-            <a:pPr>
-              <a:lnSpc>
-                <a:spcPct val="112000"/>
-              </a:lnSpc>
-              <a:spcAft>
-                <a:spcPts val="500"/>
-              </a:spcAft>
-            </a:pPr>
-            <a:r>
-              <a:rPr sz="1300" b="0">
-                <a:solidFill>
-                  <a:srgbClr val="333333"/>
-                </a:solidFill>
-                <a:latin typeface="Fira Sans"/>
-              </a:rPr>
-              <a:t>     ◦  </a:t>
-            </a:r>
-            <a:r>
-              <a:rPr sz="1300" b="0">
-                <a:solidFill>
-                  <a:srgbClr val="333333"/>
-                </a:solidFill>
-                <a:latin typeface="Fira Sans"/>
-              </a:rPr>
-              <a:t>Correlación de Pearson: -0,17. La asociación lineal es débil.</a:t>
-            </a:r>
-          </a:p>
-          <a:p>
-            <a:pPr>
-              <a:lnSpc>
-                <a:spcPct val="112000"/>
-              </a:lnSpc>
-              <a:spcAft>
-                <a:spcPts val="900"/>
-              </a:spcAft>
-            </a:pPr>
-            <a:r>
-              <a:rPr sz="1500" b="1">
-                <a:solidFill>
-                  <a:srgbClr val="E0A437"/>
-                </a:solidFill>
-                <a:latin typeface="Fira Sans"/>
-              </a:rPr>
-              <a:t>▸ </a:t>
-            </a:r>
-            <a:r>
-              <a:rPr sz="1500" b="1">
-                <a:solidFill>
-                  <a:srgbClr val="1D3557"/>
-                </a:solidFill>
-                <a:latin typeface="Fira Sans"/>
-              </a:rPr>
-              <a:t>Como vimos en el marco conceptual: el coeficiente no reemplaza al gráfico, y la asociación no autoriza verbos causales.</a:t>
+              <a:t>El reparto modal difiere entre comunas</a:t>
             </a:r>
           </a:p>
         </p:txBody>
       </p:sp>
       <p:pic>
         <p:nvPicPr>
-          <p:cNvPr id="5" name="Picture 4" descr="09_ingreso_vs_tp.png"/>
+          <p:cNvPr id="4" name="Picture 3" descr="08_modo_por_comuna.png"/>
           <p:cNvPicPr>
             <a:picLocks noChangeAspect="1"/>
           </p:cNvPicPr>
@@ -8188,14 +8155,48 @@
         </p:blipFill>
         <p:spPr>
           <a:xfrm>
-            <a:off x="4892040" y="1371600"/>
-            <a:ext cx="3840480" cy="2526979"/>
+            <a:off x="1994250" y="1143000"/>
+            <a:ext cx="5155498" cy="3154679"/>
           </a:xfrm>
           <a:prstGeom prst="rect">
             <a:avLst/>
           </a:prstGeom>
         </p:spPr>
       </p:pic>
+      <p:sp>
+        <p:nvSpPr>
+          <p:cNvPr id="5" name="TextBox 4"/>
+          <p:cNvSpPr txBox="1"/>
+          <p:nvPr/>
+        </p:nvSpPr>
+        <p:spPr>
+          <a:xfrm>
+            <a:off x="704088" y="4434840"/>
+            <a:ext cx="7744968" cy="457200"/>
+          </a:xfrm>
+          <a:prstGeom prst="rect">
+            <a:avLst/>
+          </a:prstGeom>
+          <a:noFill/>
+        </p:spPr>
+        <p:txBody>
+          <a:bodyPr wrap="square">
+            <a:spAutoFit/>
+          </a:bodyPr>
+          <a:lstStyle/>
+          <a:p>
+            <a:r>
+              <a:rPr sz="1300" b="0">
+                <a:solidFill>
+                  <a:srgbClr val="333333"/>
+                </a:solidFill>
+                <a:latin typeface="Fira Sans"/>
+              </a:rPr>
+              <a:t>Normalizar por comuna permite comparar proporciones entre comunas de tamaños muy distintos.</a:t>
+            </a:r>
+          </a:p>
+        </p:txBody>
+      </p:sp>
     </p:spTree>
   </p:cSld>
   <p:clrMapOvr>
@@ -8287,14 +8288,177 @@
                 </a:solidFill>
                 <a:latin typeface="Fira Sans"/>
               </a:rPr>
-              <a:t>Los propósitos de viaje según el día de la semana</a:t>
+              <a:t>Ingreso y uso de transporte público</a:t>
+            </a:r>
+          </a:p>
+        </p:txBody>
+      </p:sp>
+      <p:sp>
+        <p:nvSpPr>
+          <p:cNvPr id="4" name="TextBox 3"/>
+          <p:cNvSpPr txBox="1"/>
+          <p:nvPr/>
+        </p:nvSpPr>
+        <p:spPr>
+          <a:xfrm>
+            <a:off x="502920" y="1252728"/>
+            <a:ext cx="4023360" cy="3200400"/>
+          </a:xfrm>
+          <a:prstGeom prst="rect">
+            <a:avLst/>
+          </a:prstGeom>
+          <a:noFill/>
+        </p:spPr>
+        <p:txBody>
+          <a:bodyPr wrap="square">
+            <a:spAutoFit/>
+          </a:bodyPr>
+          <a:lstStyle/>
+          <a:p>
+            <a:pPr>
+              <a:lnSpc>
+                <a:spcPct val="112000"/>
+              </a:lnSpc>
+              <a:spcAft>
+                <a:spcPts val="900"/>
+              </a:spcAft>
+            </a:pPr>
+            <a:r>
+              <a:rPr sz="1500" b="1">
+                <a:solidFill>
+                  <a:srgbClr val="E0A437"/>
+                </a:solidFill>
+                <a:latin typeface="Fira Sans"/>
+              </a:rPr>
+              <a:t>▸ </a:t>
+            </a:r>
+            <a:r>
+              <a:rPr sz="1500" b="0">
+                <a:solidFill>
+                  <a:srgbClr val="000000"/>
+                </a:solidFill>
+                <a:latin typeface="Fira Sans"/>
+              </a:rPr>
+              <a:t>Cada punto es una comuna: ingreso medio contra proporción de viajes en transporte público.</a:t>
+            </a:r>
+          </a:p>
+          <a:p>
+            <a:pPr>
+              <a:lnSpc>
+                <a:spcPct val="112000"/>
+              </a:lnSpc>
+              <a:spcAft>
+                <a:spcPts val="500"/>
+              </a:spcAft>
+            </a:pPr>
+            <a:r>
+              <a:rPr sz="1300" b="0">
+                <a:solidFill>
+                  <a:srgbClr val="333333"/>
+                </a:solidFill>
+                <a:latin typeface="Fira Sans"/>
+              </a:rPr>
+              <a:t>     ◦  </a:t>
+            </a:r>
+            <a:r>
+              <a:rPr sz="1300" b="0">
+                <a:solidFill>
+                  <a:srgbClr val="333333"/>
+                </a:solidFill>
+                <a:latin typeface="Fira Sans"/>
+              </a:rPr>
+              <a:t>Periferia (Buin, Melipilla): poco transporte público; la red no llega.</a:t>
+            </a:r>
+          </a:p>
+          <a:p>
+            <a:pPr>
+              <a:lnSpc>
+                <a:spcPct val="112000"/>
+              </a:lnSpc>
+              <a:spcAft>
+                <a:spcPts val="500"/>
+              </a:spcAft>
+            </a:pPr>
+            <a:r>
+              <a:rPr sz="1300" b="0">
+                <a:solidFill>
+                  <a:srgbClr val="333333"/>
+                </a:solidFill>
+                <a:latin typeface="Fira Sans"/>
+              </a:rPr>
+              <a:t>     ◦  </a:t>
+            </a:r>
+            <a:r>
+              <a:rPr sz="1300" b="0">
+                <a:solidFill>
+                  <a:srgbClr val="333333"/>
+                </a:solidFill>
+                <a:latin typeface="Fira Sans"/>
+              </a:rPr>
+              <a:t>Ingresos altos (Vitacura, Lo Barnechea): conectadas, con poco uso.</a:t>
+            </a:r>
+          </a:p>
+          <a:p>
+            <a:pPr>
+              <a:lnSpc>
+                <a:spcPct val="112000"/>
+              </a:lnSpc>
+              <a:spcAft>
+                <a:spcPts val="500"/>
+              </a:spcAft>
+            </a:pPr>
+            <a:r>
+              <a:rPr sz="1300" b="0">
+                <a:solidFill>
+                  <a:srgbClr val="333333"/>
+                </a:solidFill>
+                <a:latin typeface="Fira Sans"/>
+              </a:rPr>
+              <a:t>     ◦  </a:t>
+            </a:r>
+            <a:r>
+              <a:rPr sz="1300" b="0">
+                <a:solidFill>
+                  <a:srgbClr val="333333"/>
+                </a:solidFill>
+                <a:latin typeface="Fira Sans"/>
+              </a:rPr>
+              <a:t>Correlación de Pearson: -0,17. La asociación lineal es débil.</a:t>
+            </a:r>
+          </a:p>
+          <a:p>
+            <a:pPr>
+              <a:lnSpc>
+                <a:spcPct val="112000"/>
+              </a:lnSpc>
+              <a:spcAft>
+                <a:spcPts val="900"/>
+              </a:spcAft>
+            </a:pPr>
+            <a:r>
+              <a:rPr sz="1500" b="1">
+                <a:solidFill>
+                  <a:srgbClr val="E0A437"/>
+                </a:solidFill>
+                <a:latin typeface="Fira Sans"/>
+              </a:rPr>
+              <a:t>▸ </a:t>
+            </a:r>
+            <a:r>
+              <a:rPr sz="1500" b="1">
+                <a:solidFill>
+                  <a:srgbClr val="1D3557"/>
+                </a:solidFill>
+                <a:latin typeface="Fira Sans"/>
+              </a:rPr>
+              <a:t>Como vimos en el marco conceptual: el coeficiente no reemplaza al gráfico, y la asociación no autoriza verbos causales.</a:t>
             </a:r>
           </a:p>
         </p:txBody>
       </p:sp>
       <p:pic>
         <p:nvPicPr>
-          <p:cNvPr id="4" name="Picture 3" descr="10_heatmap_rutinas.png"/>
+          <p:cNvPr id="5" name="Picture 4" descr="09_ingreso_vs_tp.png"/>
           <p:cNvPicPr>
             <a:picLocks noChangeAspect="1"/>
           </p:cNvPicPr>
@@ -8308,48 +8472,14 @@
         </p:blipFill>
         <p:spPr>
           <a:xfrm>
-            <a:off x="1563778" y="1143000"/>
-            <a:ext cx="6016443" cy="3154680"/>
+            <a:off x="4892040" y="1371600"/>
+            <a:ext cx="3840480" cy="2526979"/>
           </a:xfrm>
           <a:prstGeom prst="rect">
             <a:avLst/>
           </a:prstGeom>
         </p:spPr>
       </p:pic>
-      <p:sp>
-        <p:nvSpPr>
-          <p:cNvPr id="5" name="TextBox 4"/>
-          <p:cNvSpPr txBox="1"/>
-          <p:nvPr/>
-        </p:nvSpPr>
-        <p:spPr>
-          <a:xfrm>
-            <a:off x="704088" y="4434840"/>
-            <a:ext cx="7744968" cy="457200"/>
-          </a:xfrm>
-          <a:prstGeom prst="rect">
-            <a:avLst/>
-          </a:prstGeom>
-          <a:noFill/>
-        </p:spPr>
-        <p:txBody>
-          <a:bodyPr wrap="square">
-            <a:spAutoFit/>
-          </a:bodyPr>
-          <a:lstStyle/>
-          <a:p>
-            <a:r>
-              <a:rPr sz="1300" b="0">
-                <a:solidFill>
-                  <a:srgbClr val="333333"/>
-                </a:solidFill>
-                <a:latin typeface="Fira Sans"/>
-              </a:rPr>
-              <a:t>El heatmap muestra 14 propósitos por 7 días en una sola figura: útil para tablas completas.</a:t>
-            </a:r>
-          </a:p>
-        </p:txBody>
-      </p:sp>
     </p:spTree>
   </p:cSld>
   <p:clrMapOvr>
@@ -8441,14 +8571,14 @@
                 </a:solidFill>
                 <a:latin typeface="Fira Sans"/>
               </a:rPr>
-              <a:t>Cuando los datos crecen</a:t>
+              <a:t>Los propósitos de viaje según el día de la semana</a:t>
             </a:r>
           </a:p>
         </p:txBody>
       </p:sp>
       <p:pic>
         <p:nvPicPr>
-          <p:cNvPr id="4" name="Picture 3" descr="14_escala_datos.png"/>
+          <p:cNvPr id="4" name="Picture 3" descr="10_heatmap_rutinas.png"/>
           <p:cNvPicPr>
             <a:picLocks noChangeAspect="1"/>
           </p:cNvPicPr>
@@ -8462,8 +8592,8 @@
         </p:blipFill>
         <p:spPr>
           <a:xfrm>
-            <a:off x="1417319" y="1143000"/>
-            <a:ext cx="6309360" cy="2324913"/>
+            <a:off x="1563778" y="1143000"/>
+            <a:ext cx="6016443" cy="3154680"/>
           </a:xfrm>
           <a:prstGeom prst="rect">
             <a:avLst/>
@@ -8499,7 +8629,7 @@
                 </a:solidFill>
                 <a:latin typeface="Fira Sans"/>
               </a:rPr>
-              <a:t>PySpark se usa con SQL o con sus propios DataFrames; Dask reparte operaciones estilo Pandas; Polars y DuckDB rinden en una sola máquina.</a:t>
+              <a:t>El heatmap muestra 14 propósitos por 7 días en una sola figura: útil para tablas completas.</a:t>
             </a:r>
           </a:p>
         </p:txBody>
@@ -8595,21 +8725,45 @@
                 </a:solidFill>
                 <a:latin typeface="Fira Sans"/>
               </a:rPr>
-              <a:t>Síntesis</a:t>
-            </a:r>
-          </a:p>
-        </p:txBody>
-      </p:sp>
-      <p:sp>
-        <p:nvSpPr>
-          <p:cNvPr id="4" name="TextBox 3"/>
+              <a:t>Cuando los datos crecen</a:t>
+            </a:r>
+          </a:p>
+        </p:txBody>
+      </p:sp>
+      <p:pic>
+        <p:nvPicPr>
+          <p:cNvPr id="4" name="Picture 3" descr="14_escala_datos.png"/>
+          <p:cNvPicPr>
+            <a:picLocks noChangeAspect="1"/>
+          </p:cNvPicPr>
+          <p:nvPr/>
+        </p:nvPicPr>
+        <p:blipFill>
+          <a:blip r:embed="rId2"/>
+          <a:stretch>
+            <a:fillRect/>
+          </a:stretch>
+        </p:blipFill>
+        <p:spPr>
+          <a:xfrm>
+            <a:off x="1417319" y="1143000"/>
+            <a:ext cx="6309360" cy="2324913"/>
+          </a:xfrm>
+          <a:prstGeom prst="rect">
+            <a:avLst/>
+          </a:prstGeom>
+        </p:spPr>
+      </p:pic>
+      <p:sp>
+        <p:nvSpPr>
+          <p:cNvPr id="5" name="TextBox 4"/>
           <p:cNvSpPr txBox="1"/>
           <p:nvPr/>
         </p:nvSpPr>
         <p:spPr>
           <a:xfrm>
-            <a:off x="704088" y="1353312"/>
-            <a:ext cx="7744968" cy="3300984"/>
+            <a:off x="704088" y="4434840"/>
+            <a:ext cx="7744968" cy="457200"/>
           </a:xfrm>
           <a:prstGeom prst="rect">
             <a:avLst/>
@@ -8622,143 +8776,14 @@
           </a:bodyPr>
           <a:lstStyle/>
           <a:p>
-            <a:pPr>
-              <a:lnSpc>
-                <a:spcPct val="112000"/>
-              </a:lnSpc>
-              <a:spcAft>
-                <a:spcPts val="900"/>
-              </a:spcAft>
-            </a:pPr>
-            <a:r>
-              <a:rPr sz="1800" b="1">
-                <a:solidFill>
-                  <a:srgbClr val="E0A437"/>
-                </a:solidFill>
-                <a:latin typeface="Fira Sans"/>
-              </a:rPr>
-              <a:t>▸ </a:t>
-            </a:r>
-            <a:r>
-              <a:rPr sz="1800" b="0">
-                <a:solidFill>
-                  <a:srgbClr val="000000"/>
-                </a:solidFill>
-                <a:latin typeface="Fira Sans"/>
-              </a:rPr>
-              <a:t>Un modelo es una simplificación con decisiones incorporadas; estimarlo puede buscar inferencia o predicción.</a:t>
-            </a:r>
-          </a:p>
-          <a:p>
-            <a:pPr>
-              <a:lnSpc>
-                <a:spcPct val="112000"/>
-              </a:lnSpc>
-              <a:spcAft>
-                <a:spcPts val="900"/>
-              </a:spcAft>
-            </a:pPr>
-            <a:r>
-              <a:rPr sz="1800" b="1">
-                <a:solidFill>
-                  <a:srgbClr val="E0A437"/>
-                </a:solidFill>
-                <a:latin typeface="Fira Sans"/>
-              </a:rPr>
-              <a:t>▸ </a:t>
-            </a:r>
-            <a:r>
-              <a:rPr sz="1800" b="0">
-                <a:solidFill>
-                  <a:srgbClr val="000000"/>
-                </a:solidFill>
-                <a:latin typeface="Fira Sans"/>
-              </a:rPr>
-              <a:t>Las asociaciones se reportan como asociaciones: la causalidad exige más que datos observacionales.</a:t>
-            </a:r>
-          </a:p>
-          <a:p>
-            <a:pPr>
-              <a:lnSpc>
-                <a:spcPct val="112000"/>
-              </a:lnSpc>
-              <a:spcAft>
-                <a:spcPts val="900"/>
-              </a:spcAft>
-            </a:pPr>
-            <a:r>
-              <a:rPr sz="1800" b="1">
-                <a:solidFill>
-                  <a:srgbClr val="E0A437"/>
-                </a:solidFill>
-                <a:latin typeface="Fira Sans"/>
-              </a:rPr>
-              <a:t>▸ </a:t>
-            </a:r>
-            <a:r>
-              <a:rPr sz="1800" b="0">
-                <a:solidFill>
-                  <a:srgbClr val="000000"/>
-                </a:solidFill>
-                <a:latin typeface="Fira Sans"/>
-              </a:rPr>
-              <a:t>El tipo de la variable, no su dtype, determina qué resúmenes tienen sentido.</a:t>
-            </a:r>
-          </a:p>
-          <a:p>
-            <a:pPr>
-              <a:lnSpc>
-                <a:spcPct val="112000"/>
-              </a:lnSpc>
-              <a:spcAft>
-                <a:spcPts val="900"/>
-              </a:spcAft>
-            </a:pPr>
-            <a:r>
-              <a:rPr sz="1800" b="1">
-                <a:solidFill>
-                  <a:srgbClr val="E0A437"/>
-                </a:solidFill>
-                <a:latin typeface="Fira Sans"/>
-              </a:rPr>
-              <a:t>▸ </a:t>
-            </a:r>
-            <a:r>
-              <a:rPr sz="1800" b="0">
-                <a:solidFill>
-                  <a:srgbClr val="000000"/>
-                </a:solidFill>
-                <a:latin typeface="Fira Sans"/>
-              </a:rPr>
-              <a:t>Con distribuciones asimétricas, la mediana y los percentiles describen mejor lo típico que la media.</a:t>
-            </a:r>
-          </a:p>
-          <a:p>
-            <a:pPr>
-              <a:lnSpc>
-                <a:spcPct val="112000"/>
-              </a:lnSpc>
-              <a:spcAft>
-                <a:spcPts val="900"/>
-              </a:spcAft>
-            </a:pPr>
-            <a:r>
-              <a:rPr sz="1800" b="1">
-                <a:solidFill>
-                  <a:srgbClr val="E0A437"/>
-                </a:solidFill>
-                <a:latin typeface="Fira Sans"/>
-              </a:rPr>
-              <a:t>▸ </a:t>
-            </a:r>
-            <a:r>
-              <a:rPr sz="1800" b="1">
-                <a:solidFill>
-                  <a:srgbClr val="1D3557"/>
-                </a:solidFill>
-                <a:latin typeface="Fira Sans"/>
-              </a:rPr>
-              <a:t>Ante toda cifra resumen: ¿de quién habla este número? ¿Muestra, subgrupo o ciudad?</a:t>
+            <a:r>
+              <a:rPr sz="1300" b="0">
+                <a:solidFill>
+                  <a:srgbClr val="333333"/>
+                </a:solidFill>
+                <a:latin typeface="Fira Sans"/>
+              </a:rPr>
+              <a:t>PySpark se usa con SQL o con sus propios DataFrames; Dask reparte operaciones estilo Pandas; Polars y DuckDB rinden en una sola máquina.</a:t>
             </a:r>
           </a:p>
         </p:txBody>
@@ -8854,7 +8879,7 @@
                 </a:solidFill>
                 <a:latin typeface="Fira Sans"/>
               </a:rPr>
-              <a:t>Segundo bloque: comienza la Tarea 1</a:t>
+              <a:t>Síntesis</a:t>
             </a:r>
           </a:p>
         </p:txBody>
@@ -8905,91 +8930,7 @@
                 </a:solidFill>
                 <a:latin typeface="Fira Sans"/>
               </a:rPr>
-              <a:t>El retrato de tu comuna: cada pareja adopta una comuna del Gran Santiago.</a:t>
-            </a:r>
-          </a:p>
-          <a:p>
-            <a:pPr>
-              <a:lnSpc>
-                <a:spcPct val="112000"/>
-              </a:lnSpc>
-              <a:spcAft>
-                <a:spcPts val="500"/>
-              </a:spcAft>
-            </a:pPr>
-            <a:r>
-              <a:rPr sz="1400" b="0">
-                <a:solidFill>
-                  <a:srgbClr val="333333"/>
-                </a:solidFill>
-                <a:latin typeface="Fira Sans"/>
-              </a:rPr>
-              <a:t>     ◦  </a:t>
-            </a:r>
-            <a:r>
-              <a:rPr sz="1400" b="0">
-                <a:solidFill>
-                  <a:srgbClr val="333333"/>
-                </a:solidFill>
-                <a:latin typeface="Fira Sans"/>
-              </a:rPr>
-              <a:t>Hoy: elegir la comuna y construir su retrato numérico.</a:t>
-            </a:r>
-          </a:p>
-          <a:p>
-            <a:pPr>
-              <a:lnSpc>
-                <a:spcPct val="112000"/>
-              </a:lnSpc>
-              <a:spcAft>
-                <a:spcPts val="500"/>
-              </a:spcAft>
-            </a:pPr>
-            <a:r>
-              <a:rPr sz="1400" b="0">
-                <a:solidFill>
-                  <a:srgbClr val="333333"/>
-                </a:solidFill>
-                <a:latin typeface="Fira Sans"/>
-              </a:rPr>
-              <a:t>     ◦  </a:t>
-            </a:r>
-            <a:r>
-              <a:rPr sz="1400" b="0">
-                <a:solidFill>
-                  <a:srgbClr val="333333"/>
-                </a:solidFill>
-                <a:latin typeface="Fira Sans"/>
-              </a:rPr>
-              <a:t>Próxima clase: el retrato gráfico, con métodos de visualización.</a:t>
-            </a:r>
-          </a:p>
-          <a:p>
-            <a:pPr>
-              <a:lnSpc>
-                <a:spcPct val="112000"/>
-              </a:lnSpc>
-              <a:spcAft>
-                <a:spcPts val="500"/>
-              </a:spcAft>
-            </a:pPr>
-            <a:r>
-              <a:rPr sz="1400" b="0">
-                <a:solidFill>
-                  <a:srgbClr val="333333"/>
-                </a:solidFill>
-                <a:latin typeface="Fira Sans"/>
-              </a:rPr>
-              <a:t>     ◦  </a:t>
-            </a:r>
-            <a:r>
-              <a:rPr sz="1400" b="0">
-                <a:solidFill>
-                  <a:srgbClr val="333333"/>
-                </a:solidFill>
-                <a:latin typeface="Fira Sans"/>
-              </a:rPr>
-              <a:t>Entrega del retrato completo: jueves 10 de septiembre, por Aula.</a:t>
+              <a:t>Un modelo es una simplificación con decisiones incorporadas; estimarlo puede buscar inferencia o predicción.</a:t>
             </a:r>
           </a:p>
           <a:p>
@@ -9017,7 +8958,7 @@
                 </a:solidFill>
                 <a:latin typeface="Fira Sans"/>
               </a:rPr>
-              <a:t>El enunciado está en evaluaciones/tareas/ y la guía de hoy en actividades/.</a:t>
+              <a:t>Las asociaciones se reportan como asociaciones: la causalidad exige más que datos observacionales.</a:t>
             </a:r>
           </a:p>
           <a:p>
@@ -9039,13 +8980,69 @@
               <a:t>▸ </a:t>
             </a:r>
             <a:r>
+              <a:rPr sz="1800" b="0">
+                <a:solidFill>
+                  <a:srgbClr val="000000"/>
+                </a:solidFill>
+                <a:latin typeface="Fira Sans"/>
+              </a:rPr>
+              <a:t>El tipo de la variable, no su dtype, determina qué resúmenes tienen sentido.</a:t>
+            </a:r>
+          </a:p>
+          <a:p>
+            <a:pPr>
+              <a:lnSpc>
+                <a:spcPct val="112000"/>
+              </a:lnSpc>
+              <a:spcAft>
+                <a:spcPts val="900"/>
+              </a:spcAft>
+            </a:pPr>
+            <a:r>
               <a:rPr sz="1800" b="1">
                 <a:solidFill>
+                  <a:srgbClr val="E0A437"/>
+                </a:solidFill>
+                <a:latin typeface="Fira Sans"/>
+              </a:rPr>
+              <a:t>▸ </a:t>
+            </a:r>
+            <a:r>
+              <a:rPr sz="1800" b="0">
+                <a:solidFill>
+                  <a:srgbClr val="000000"/>
+                </a:solidFill>
+                <a:latin typeface="Fira Sans"/>
+              </a:rPr>
+              <a:t>Con distribuciones asimétricas, la mediana y los percentiles describen mejor lo típico que la media.</a:t>
+            </a:r>
+          </a:p>
+          <a:p>
+            <a:pPr>
+              <a:lnSpc>
+                <a:spcPct val="112000"/>
+              </a:lnSpc>
+              <a:spcAft>
+                <a:spcPts val="900"/>
+              </a:spcAft>
+            </a:pPr>
+            <a:r>
+              <a:rPr sz="1800" b="1">
+                <a:solidFill>
+                  <a:srgbClr val="E0A437"/>
+                </a:solidFill>
+                <a:latin typeface="Fira Sans"/>
+              </a:rPr>
+              <a:t>▸ </a:t>
+            </a:r>
+            <a:r>
+              <a:rPr sz="1800" b="1">
+                <a:solidFill>
                   <a:srgbClr val="1D3557"/>
                 </a:solidFill>
                 <a:latin typeface="Fira Sans"/>
               </a:rPr>
-              <a:t>Lo que avancen en este bloque ya es parte de la tarea.</a:t>
+              <a:t>Ante toda cifra resumen: ¿de quién habla este número? ¿Muestra, subgrupo o ciudad?</a:t>
             </a:r>
           </a:p>
         </p:txBody>
@@ -9059,6 +9056,293 @@
 </file>
 
 <file path=ppt/slides/slide35.xml><?xml version="1.0" encoding="utf-8"?>
+<p:sld xmlns:a="http://schemas.openxmlformats.org/drawingml/2006/main" xmlns:p="http://schemas.openxmlformats.org/presentationml/2006/main" xmlns:r="http://schemas.openxmlformats.org/officeDocument/2006/relationships">
+  <p:cSld>
+    <p:spTree>
+      <p:nvGrpSpPr>
+        <p:cNvPr id="1" name=""/>
+        <p:cNvGrpSpPr/>
+        <p:nvPr/>
+      </p:nvGrpSpPr>
+      <p:grpSpPr/>
+      <p:sp>
+        <p:nvSpPr>
+          <p:cNvPr id="2" name="Rectangle 1"/>
+          <p:cNvSpPr/>
+          <p:nvPr/>
+        </p:nvSpPr>
+        <p:spPr>
+          <a:xfrm>
+            <a:off x="0" y="0"/>
+            <a:ext cx="9144000" cy="5138928"/>
+          </a:xfrm>
+          <a:prstGeom prst="rect">
+            <a:avLst/>
+          </a:prstGeom>
+          <a:solidFill>
+            <a:srgbClr val="FAFBFC"/>
+          </a:solidFill>
+          <a:ln>
+            <a:noFill/>
+          </a:ln>
+          <a:effectLst/>
+        </p:spPr>
+        <p:style>
+          <a:lnRef idx="1">
+            <a:schemeClr val="accent1"/>
+          </a:lnRef>
+          <a:fillRef idx="3">
+            <a:schemeClr val="accent1"/>
+          </a:fillRef>
+          <a:effectRef idx="2">
+            <a:schemeClr val="accent1"/>
+          </a:effectRef>
+          <a:fontRef idx="minor">
+            <a:schemeClr val="lt1"/>
+          </a:fontRef>
+        </p:style>
+        <p:txBody>
+          <a:bodyPr rtlCol="0" anchor="ctr"/>
+          <a:lstStyle/>
+          <a:p>
+            <a:pPr algn="ctr"/>
+          </a:p>
+        </p:txBody>
+      </p:sp>
+      <p:sp>
+        <p:nvSpPr>
+          <p:cNvPr id="3" name="TextBox 2"/>
+          <p:cNvSpPr txBox="1"/>
+          <p:nvPr/>
+        </p:nvSpPr>
+        <p:spPr>
+          <a:xfrm>
+            <a:off x="402336" y="301752"/>
+            <a:ext cx="8348472" cy="795528"/>
+          </a:xfrm>
+          <a:prstGeom prst="rect">
+            <a:avLst/>
+          </a:prstGeom>
+          <a:noFill/>
+        </p:spPr>
+        <p:txBody>
+          <a:bodyPr wrap="square">
+            <a:spAutoFit/>
+          </a:bodyPr>
+          <a:lstStyle/>
+          <a:p>
+            <a:r>
+              <a:rPr sz="2800" b="1">
+                <a:solidFill>
+                  <a:srgbClr val="0F0F0F"/>
+                </a:solidFill>
+                <a:latin typeface="Fira Sans"/>
+              </a:rPr>
+              <a:t>Segundo bloque: comienza la Tarea 1</a:t>
+            </a:r>
+          </a:p>
+        </p:txBody>
+      </p:sp>
+      <p:sp>
+        <p:nvSpPr>
+          <p:cNvPr id="4" name="TextBox 3"/>
+          <p:cNvSpPr txBox="1"/>
+          <p:nvPr/>
+        </p:nvSpPr>
+        <p:spPr>
+          <a:xfrm>
+            <a:off x="704088" y="1353312"/>
+            <a:ext cx="7744968" cy="3300984"/>
+          </a:xfrm>
+          <a:prstGeom prst="rect">
+            <a:avLst/>
+          </a:prstGeom>
+          <a:noFill/>
+        </p:spPr>
+        <p:txBody>
+          <a:bodyPr wrap="square">
+            <a:spAutoFit/>
+          </a:bodyPr>
+          <a:lstStyle/>
+          <a:p>
+            <a:pPr>
+              <a:lnSpc>
+                <a:spcPct val="112000"/>
+              </a:lnSpc>
+              <a:spcAft>
+                <a:spcPts val="900"/>
+              </a:spcAft>
+            </a:pPr>
+            <a:r>
+              <a:rPr sz="1800" b="1">
+                <a:solidFill>
+                  <a:srgbClr val="E0A437"/>
+                </a:solidFill>
+                <a:latin typeface="Fira Sans"/>
+              </a:rPr>
+              <a:t>▸ </a:t>
+            </a:r>
+            <a:r>
+              <a:rPr sz="1800" b="0">
+                <a:solidFill>
+                  <a:srgbClr val="000000"/>
+                </a:solidFill>
+                <a:latin typeface="Fira Sans"/>
+              </a:rPr>
+              <a:t>El retrato de tu comuna: cada pareja adopta una comuna del Gran Santiago.</a:t>
+            </a:r>
+          </a:p>
+          <a:p>
+            <a:pPr>
+              <a:lnSpc>
+                <a:spcPct val="112000"/>
+              </a:lnSpc>
+              <a:spcAft>
+                <a:spcPts val="500"/>
+              </a:spcAft>
+            </a:pPr>
+            <a:r>
+              <a:rPr sz="1400" b="0">
+                <a:solidFill>
+                  <a:srgbClr val="333333"/>
+                </a:solidFill>
+                <a:latin typeface="Fira Sans"/>
+              </a:rPr>
+              <a:t>     ◦  </a:t>
+            </a:r>
+            <a:r>
+              <a:rPr sz="1400" b="0">
+                <a:solidFill>
+                  <a:srgbClr val="333333"/>
+                </a:solidFill>
+                <a:latin typeface="Fira Sans"/>
+              </a:rPr>
+              <a:t>Hoy: elegir la comuna y construir su retrato numérico.</a:t>
+            </a:r>
+          </a:p>
+          <a:p>
+            <a:pPr>
+              <a:lnSpc>
+                <a:spcPct val="112000"/>
+              </a:lnSpc>
+              <a:spcAft>
+                <a:spcPts val="500"/>
+              </a:spcAft>
+            </a:pPr>
+            <a:r>
+              <a:rPr sz="1400" b="0">
+                <a:solidFill>
+                  <a:srgbClr val="333333"/>
+                </a:solidFill>
+                <a:latin typeface="Fira Sans"/>
+              </a:rPr>
+              <a:t>     ◦  </a:t>
+            </a:r>
+            <a:r>
+              <a:rPr sz="1400" b="0">
+                <a:solidFill>
+                  <a:srgbClr val="333333"/>
+                </a:solidFill>
+                <a:latin typeface="Fira Sans"/>
+              </a:rPr>
+              <a:t>Próxima clase: el retrato gráfico, con métodos de visualización.</a:t>
+            </a:r>
+          </a:p>
+          <a:p>
+            <a:pPr>
+              <a:lnSpc>
+                <a:spcPct val="112000"/>
+              </a:lnSpc>
+              <a:spcAft>
+                <a:spcPts val="500"/>
+              </a:spcAft>
+            </a:pPr>
+            <a:r>
+              <a:rPr sz="1400" b="0">
+                <a:solidFill>
+                  <a:srgbClr val="333333"/>
+                </a:solidFill>
+                <a:latin typeface="Fira Sans"/>
+              </a:rPr>
+              <a:t>     ◦  </a:t>
+            </a:r>
+            <a:r>
+              <a:rPr sz="1400" b="0">
+                <a:solidFill>
+                  <a:srgbClr val="333333"/>
+                </a:solidFill>
+                <a:latin typeface="Fira Sans"/>
+              </a:rPr>
+              <a:t>Entrega del retrato completo: jueves 10 de septiembre, por Aula.</a:t>
+            </a:r>
+          </a:p>
+          <a:p>
+            <a:pPr>
+              <a:lnSpc>
+                <a:spcPct val="112000"/>
+              </a:lnSpc>
+              <a:spcAft>
+                <a:spcPts val="900"/>
+              </a:spcAft>
+            </a:pPr>
+            <a:r>
+              <a:rPr sz="1800" b="1">
+                <a:solidFill>
+                  <a:srgbClr val="E0A437"/>
+                </a:solidFill>
+                <a:latin typeface="Fira Sans"/>
+              </a:rPr>
+              <a:t>▸ </a:t>
+            </a:r>
+            <a:r>
+              <a:rPr sz="1800" b="0">
+                <a:solidFill>
+                  <a:srgbClr val="000000"/>
+                </a:solidFill>
+                <a:latin typeface="Fira Sans"/>
+              </a:rPr>
+              <a:t>El enunciado está en evaluaciones/tareas/ y la guía de hoy en actividades/.</a:t>
+            </a:r>
+          </a:p>
+          <a:p>
+            <a:pPr>
+              <a:lnSpc>
+                <a:spcPct val="112000"/>
+              </a:lnSpc>
+              <a:spcAft>
+                <a:spcPts val="900"/>
+              </a:spcAft>
+            </a:pPr>
+            <a:r>
+              <a:rPr sz="1800" b="1">
+                <a:solidFill>
+                  <a:srgbClr val="E0A437"/>
+                </a:solidFill>
+                <a:latin typeface="Fira Sans"/>
+              </a:rPr>
+              <a:t>▸ </a:t>
+            </a:r>
+            <a:r>
+              <a:rPr sz="1800" b="1">
+                <a:solidFill>
+                  <a:srgbClr val="1D3557"/>
+                </a:solidFill>
+                <a:latin typeface="Fira Sans"/>
+              </a:rPr>
+              <a:t>Lo que avancen en este bloque ya es parte de la tarea.</a:t>
+            </a:r>
+          </a:p>
+        </p:txBody>
+      </p:sp>
+    </p:spTree>
+  </p:cSld>
+  <p:clrMapOvr>
+    <a:masterClrMapping/>
+  </p:clrMapOvr>
+</p:sld>
+</file>
+
+<file path=ppt/slides/slide36.xml><?xml version="1.0" encoding="utf-8"?>
 <p:sld xmlns:a="http://schemas.openxmlformats.org/drawingml/2006/main" xmlns:p="http://schemas.openxmlformats.org/presentationml/2006/main" xmlns:r="http://schemas.openxmlformats.org/officeDocument/2006/relationships">
   <p:cSld>
     <p:spTree>
@@ -10369,149 +10653,14 @@
                 </a:solidFill>
                 <a:latin typeface="Fira Sans"/>
               </a:rPr>
-              <a:t>El coeficiente de Spearman</a:t>
-            </a:r>
-          </a:p>
-        </p:txBody>
-      </p:sp>
-      <p:sp>
-        <p:nvSpPr>
-          <p:cNvPr id="4" name="TextBox 3"/>
-          <p:cNvSpPr txBox="1"/>
-          <p:nvPr/>
-        </p:nvSpPr>
-        <p:spPr>
-          <a:xfrm>
-            <a:off x="502920" y="1252728"/>
-            <a:ext cx="4023360" cy="3200400"/>
-          </a:xfrm>
-          <a:prstGeom prst="rect">
-            <a:avLst/>
-          </a:prstGeom>
-          <a:noFill/>
-        </p:spPr>
-        <p:txBody>
-          <a:bodyPr wrap="square">
-            <a:spAutoFit/>
-          </a:bodyPr>
-          <a:lstStyle/>
-          <a:p>
-            <a:pPr>
-              <a:lnSpc>
-                <a:spcPct val="112000"/>
-              </a:lnSpc>
-              <a:spcAft>
-                <a:spcPts val="900"/>
-              </a:spcAft>
-            </a:pPr>
-            <a:r>
-              <a:rPr sz="1500" b="1">
-                <a:solidFill>
-                  <a:srgbClr val="E0A437"/>
-                </a:solidFill>
-                <a:latin typeface="Fira Sans"/>
-              </a:rPr>
-              <a:t>▸ </a:t>
-            </a:r>
-            <a:r>
-              <a:rPr sz="1500" b="0">
-                <a:solidFill>
-                  <a:srgbClr val="000000"/>
-                </a:solidFill>
-                <a:latin typeface="Fira Sans"/>
-              </a:rPr>
-              <a:t>El mismo Pearson, calculado sobre los rangos: la posición de cada valor al ordenar (1 = el menor). Se denota ρ (rho).</a:t>
-            </a:r>
-          </a:p>
-          <a:p>
-            <a:pPr>
-              <a:lnSpc>
-                <a:spcPct val="112000"/>
-              </a:lnSpc>
-              <a:spcAft>
-                <a:spcPts val="900"/>
-              </a:spcAft>
-            </a:pPr>
-            <a:r>
-              <a:rPr sz="1500" b="1">
-                <a:solidFill>
-                  <a:srgbClr val="E0A437"/>
-                </a:solidFill>
-                <a:latin typeface="Fira Sans"/>
-              </a:rPr>
-              <a:t>▸ </a:t>
-            </a:r>
-            <a:r>
-              <a:rPr sz="1500" b="0">
-                <a:solidFill>
-                  <a:srgbClr val="000000"/>
-                </a:solidFill>
-                <a:latin typeface="Fira Sans"/>
-              </a:rPr>
-              <a:t>En la fórmula: dᵢ es la diferencia entre los rangos del caso i en ambas variables; n, el número de pares. Vale sin empates.</a:t>
-            </a:r>
-          </a:p>
-          <a:p>
-            <a:pPr>
-              <a:lnSpc>
-                <a:spcPct val="112000"/>
-              </a:lnSpc>
-              <a:spcAft>
-                <a:spcPts val="500"/>
-              </a:spcAft>
-            </a:pPr>
-            <a:r>
-              <a:rPr sz="1300" b="0">
-                <a:solidFill>
-                  <a:srgbClr val="333333"/>
-                </a:solidFill>
-                <a:latin typeface="Fira Sans"/>
-              </a:rPr>
-              <a:t>     ◦  </a:t>
-            </a:r>
-            <a:r>
-              <a:rPr sz="1300" b="0">
-                <a:solidFill>
-                  <a:srgbClr val="333333"/>
-                </a:solidFill>
-                <a:latin typeface="Fira Sans"/>
-              </a:rPr>
-              <a:t>Los valores 5, 12, 8 y 200 tienen rangos 1, 3, 2 y 4: la magnitud desaparece, queda el orden.</a:t>
-            </a:r>
-          </a:p>
-          <a:p>
-            <a:pPr>
-              <a:lnSpc>
-                <a:spcPct val="112000"/>
-              </a:lnSpc>
-              <a:spcAft>
-                <a:spcPts val="900"/>
-              </a:spcAft>
-            </a:pPr>
-            <a:r>
-              <a:rPr sz="1500" b="1">
-                <a:solidFill>
-                  <a:srgbClr val="E0A437"/>
-                </a:solidFill>
-                <a:latin typeface="Fira Sans"/>
-              </a:rPr>
-              <a:t>▸ </a:t>
-            </a:r>
-            <a:r>
-              <a:rPr sz="1500" b="1">
-                <a:solidFill>
-                  <a:srgbClr val="1D3557"/>
-                </a:solidFill>
-                <a:latin typeface="Fira Sans"/>
-              </a:rPr>
-              <a:t>Mide asociación monotónica: robusto a extremos, invariante ante transformaciones monótonas, válido para ordinales.</a:t>
+              <a:t>Antes de Spearman: cómo se calculan los rangos</a:t>
             </a:r>
           </a:p>
         </p:txBody>
       </p:sp>
       <p:pic>
         <p:nvPicPr>
-          <p:cNvPr id="5" name="Picture 4" descr="17_spearman_rangos.png"/>
+          <p:cNvPr id="4" name="Picture 3" descr="20_rangos_ejemplo.png"/>
           <p:cNvPicPr>
             <a:picLocks noChangeAspect="1"/>
           </p:cNvPicPr>
@@ -10525,14 +10674,48 @@
         </p:blipFill>
         <p:spPr>
           <a:xfrm>
-            <a:off x="4892040" y="1371600"/>
-            <a:ext cx="3840480" cy="3527147"/>
+            <a:off x="1635523" y="1143000"/>
+            <a:ext cx="5872953" cy="3154680"/>
           </a:xfrm>
           <a:prstGeom prst="rect">
             <a:avLst/>
           </a:prstGeom>
         </p:spPr>
       </p:pic>
+      <p:sp>
+        <p:nvSpPr>
+          <p:cNvPr id="5" name="TextBox 4"/>
+          <p:cNvSpPr txBox="1"/>
+          <p:nvPr/>
+        </p:nvSpPr>
+        <p:spPr>
+          <a:xfrm>
+            <a:off x="704088" y="4434840"/>
+            <a:ext cx="7744968" cy="457200"/>
+          </a:xfrm>
+          <a:prstGeom prst="rect">
+            <a:avLst/>
+          </a:prstGeom>
+          <a:noFill/>
+        </p:spPr>
+        <p:txBody>
+          <a:bodyPr wrap="square">
+            <a:spAutoFit/>
+          </a:bodyPr>
+          <a:lstStyle/>
+          <a:p>
+            <a:r>
+              <a:rPr sz="1300" b="0">
+                <a:solidFill>
+                  <a:srgbClr val="333333"/>
+                </a:solidFill>
+                <a:latin typeface="Fira Sans"/>
+              </a:rPr>
+              <a:t>Cada variable se ordena por separado y cada valor recibe su posición; d compara las posiciones de un mismo viaje.</a:t>
+            </a:r>
+          </a:p>
+        </p:txBody>
+      </p:sp>
     </p:spTree>
   </p:cSld>
   <p:clrMapOvr>
@@ -10624,14 +10807,149 @@
                 </a:solidFill>
                 <a:latin typeface="Fira Sans"/>
               </a:rPr>
-              <a:t>La correlación, vista en los datos completos</a:t>
+              <a:t>El coeficiente de Spearman</a:t>
+            </a:r>
+          </a:p>
+        </p:txBody>
+      </p:sp>
+      <p:sp>
+        <p:nvSpPr>
+          <p:cNvPr id="4" name="TextBox 3"/>
+          <p:cNvSpPr txBox="1"/>
+          <p:nvPr/>
+        </p:nvSpPr>
+        <p:spPr>
+          <a:xfrm>
+            <a:off x="502920" y="1252728"/>
+            <a:ext cx="4023360" cy="3200400"/>
+          </a:xfrm>
+          <a:prstGeom prst="rect">
+            <a:avLst/>
+          </a:prstGeom>
+          <a:noFill/>
+        </p:spPr>
+        <p:txBody>
+          <a:bodyPr wrap="square">
+            <a:spAutoFit/>
+          </a:bodyPr>
+          <a:lstStyle/>
+          <a:p>
+            <a:pPr>
+              <a:lnSpc>
+                <a:spcPct val="112000"/>
+              </a:lnSpc>
+              <a:spcAft>
+                <a:spcPts val="900"/>
+              </a:spcAft>
+            </a:pPr>
+            <a:r>
+              <a:rPr sz="1500" b="1">
+                <a:solidFill>
+                  <a:srgbClr val="E0A437"/>
+                </a:solidFill>
+                <a:latin typeface="Fira Sans"/>
+              </a:rPr>
+              <a:t>▸ </a:t>
+            </a:r>
+            <a:r>
+              <a:rPr sz="1500" b="0">
+                <a:solidFill>
+                  <a:srgbClr val="000000"/>
+                </a:solidFill>
+                <a:latin typeface="Fira Sans"/>
+              </a:rPr>
+              <a:t>El mismo Pearson, calculado sobre los rangos: la posición de cada valor al ordenar (1 = el menor). Se denota ρ (rho).</a:t>
+            </a:r>
+          </a:p>
+          <a:p>
+            <a:pPr>
+              <a:lnSpc>
+                <a:spcPct val="112000"/>
+              </a:lnSpc>
+              <a:spcAft>
+                <a:spcPts val="900"/>
+              </a:spcAft>
+            </a:pPr>
+            <a:r>
+              <a:rPr sz="1500" b="1">
+                <a:solidFill>
+                  <a:srgbClr val="E0A437"/>
+                </a:solidFill>
+                <a:latin typeface="Fira Sans"/>
+              </a:rPr>
+              <a:t>▸ </a:t>
+            </a:r>
+            <a:r>
+              <a:rPr sz="1500" b="0">
+                <a:solidFill>
+                  <a:srgbClr val="000000"/>
+                </a:solidFill>
+                <a:latin typeface="Fira Sans"/>
+              </a:rPr>
+              <a:t>En la fórmula: dᵢ es la diferencia entre los rangos del caso i en ambas variables; n, el número de pares. Vale sin empates.</a:t>
+            </a:r>
+          </a:p>
+          <a:p>
+            <a:pPr>
+              <a:lnSpc>
+                <a:spcPct val="112000"/>
+              </a:lnSpc>
+              <a:spcAft>
+                <a:spcPts val="500"/>
+              </a:spcAft>
+            </a:pPr>
+            <a:r>
+              <a:rPr sz="1300" b="0">
+                <a:solidFill>
+                  <a:srgbClr val="333333"/>
+                </a:solidFill>
+                <a:latin typeface="Fira Sans"/>
+              </a:rPr>
+              <a:t>     ◦  </a:t>
+            </a:r>
+            <a:r>
+              <a:rPr sz="1300" b="0">
+                <a:solidFill>
+                  <a:srgbClr val="333333"/>
+                </a:solidFill>
+                <a:latin typeface="Fira Sans"/>
+              </a:rPr>
+              <a:t>Los valores 5, 12, 8 y 200 tienen rangos 1, 3, 2 y 4: la magnitud desaparece, queda el orden.</a:t>
+            </a:r>
+          </a:p>
+          <a:p>
+            <a:pPr>
+              <a:lnSpc>
+                <a:spcPct val="112000"/>
+              </a:lnSpc>
+              <a:spcAft>
+                <a:spcPts val="900"/>
+              </a:spcAft>
+            </a:pPr>
+            <a:r>
+              <a:rPr sz="1500" b="1">
+                <a:solidFill>
+                  <a:srgbClr val="E0A437"/>
+                </a:solidFill>
+                <a:latin typeface="Fira Sans"/>
+              </a:rPr>
+              <a:t>▸ </a:t>
+            </a:r>
+            <a:r>
+              <a:rPr sz="1500" b="1">
+                <a:solidFill>
+                  <a:srgbClr val="1D3557"/>
+                </a:solidFill>
+                <a:latin typeface="Fira Sans"/>
+              </a:rPr>
+              <a:t>Mide asociación monotónica: robusto a extremos, invariante ante transformaciones monótonas, válido para ordinales.</a:t>
             </a:r>
           </a:p>
         </p:txBody>
       </p:sp>
       <p:pic>
         <p:nvPicPr>
-          <p:cNvPr id="4" name="Picture 3" descr="12_scatter_distancia_tiempo.png"/>
+          <p:cNvPr id="5" name="Picture 4" descr="17_spearman_rangos.png"/>
           <p:cNvPicPr>
             <a:picLocks noChangeAspect="1"/>
           </p:cNvPicPr>
@@ -10645,48 +10963,14 @@
         </p:blipFill>
         <p:spPr>
           <a:xfrm>
-            <a:off x="2281014" y="1143000"/>
-            <a:ext cx="4581971" cy="3154680"/>
+            <a:off x="4892040" y="1371600"/>
+            <a:ext cx="3840480" cy="3527147"/>
           </a:xfrm>
           <a:prstGeom prst="rect">
             <a:avLst/>
           </a:prstGeom>
         </p:spPr>
       </p:pic>
-      <p:sp>
-        <p:nvSpPr>
-          <p:cNvPr id="5" name="TextBox 4"/>
-          <p:cNvSpPr txBox="1"/>
-          <p:nvPr/>
-        </p:nvSpPr>
-        <p:spPr>
-          <a:xfrm>
-            <a:off x="704088" y="4434840"/>
-            <a:ext cx="7744968" cy="457200"/>
-          </a:xfrm>
-          <a:prstGeom prst="rect">
-            <a:avLst/>
-          </a:prstGeom>
-          <a:noFill/>
-        </p:spPr>
-        <p:txBody>
-          <a:bodyPr wrap="square">
-            <a:spAutoFit/>
-          </a:bodyPr>
-          <a:lstStyle/>
-          <a:p>
-            <a:r>
-              <a:rPr sz="1300" b="0">
-                <a:solidFill>
-                  <a:srgbClr val="333333"/>
-                </a:solidFill>
-                <a:latin typeface="Fira Sans"/>
-              </a:rPr>
-              <a:t>La mediana por tramo sube de forma sostenida (Spearman 0,76) pero no recta y con extremos (Pearson 0,43).</a:t>
-            </a:r>
-          </a:p>
-        </p:txBody>
-      </p:sp>
     </p:spTree>
   </p:cSld>
   <p:clrMapOvr>
@@ -10778,177 +11062,14 @@
                 </a:solidFill>
                 <a:latin typeface="Fira Sans"/>
               </a:rPr>
-              <a:t>Cuando la relación no es lineal, el coeficiente puede ocultarla</a:t>
-            </a:r>
-          </a:p>
-        </p:txBody>
-      </p:sp>
-      <p:sp>
-        <p:nvSpPr>
-          <p:cNvPr id="4" name="TextBox 3"/>
-          <p:cNvSpPr txBox="1"/>
-          <p:nvPr/>
-        </p:nvSpPr>
-        <p:spPr>
-          <a:xfrm>
-            <a:off x="502920" y="1252728"/>
-            <a:ext cx="4023360" cy="3200400"/>
-          </a:xfrm>
-          <a:prstGeom prst="rect">
-            <a:avLst/>
-          </a:prstGeom>
-          <a:noFill/>
-        </p:spPr>
-        <p:txBody>
-          <a:bodyPr wrap="square">
-            <a:spAutoFit/>
-          </a:bodyPr>
-          <a:lstStyle/>
-          <a:p>
-            <a:pPr>
-              <a:lnSpc>
-                <a:spcPct val="112000"/>
-              </a:lnSpc>
-              <a:spcAft>
-                <a:spcPts val="900"/>
-              </a:spcAft>
-            </a:pPr>
-            <a:r>
-              <a:rPr sz="1500" b="1">
-                <a:solidFill>
-                  <a:srgbClr val="E0A437"/>
-                </a:solidFill>
-                <a:latin typeface="Fira Sans"/>
-              </a:rPr>
-              <a:t>▸ </a:t>
-            </a:r>
-            <a:r>
-              <a:rPr sz="1500" b="0">
-                <a:solidFill>
-                  <a:srgbClr val="000000"/>
-                </a:solidFill>
-                <a:latin typeface="Fira Sans"/>
-              </a:rPr>
-              <a:t>Los viajes por persona según la edad: suben hasta los 30 a 40 años y luego bajan.</a:t>
-            </a:r>
-          </a:p>
-          <a:p>
-            <a:pPr>
-              <a:lnSpc>
-                <a:spcPct val="112000"/>
-              </a:lnSpc>
-              <a:spcAft>
-                <a:spcPts val="900"/>
-              </a:spcAft>
-            </a:pPr>
-            <a:r>
-              <a:rPr sz="1500" b="1">
-                <a:solidFill>
-                  <a:srgbClr val="E0A437"/>
-                </a:solidFill>
-                <a:latin typeface="Fira Sans"/>
-              </a:rPr>
-              <a:t>▸ </a:t>
-            </a:r>
-            <a:r>
-              <a:rPr sz="1500" b="0">
-                <a:solidFill>
-                  <a:srgbClr val="000000"/>
-                </a:solidFill>
-                <a:latin typeface="Fira Sans"/>
-              </a:rPr>
-              <a:t>La asociación es clara, pero r = 0,04 y ρ = 0,05.</a:t>
-            </a:r>
-          </a:p>
-          <a:p>
-            <a:pPr>
-              <a:lnSpc>
-                <a:spcPct val="112000"/>
-              </a:lnSpc>
-              <a:spcAft>
-                <a:spcPts val="500"/>
-              </a:spcAft>
-            </a:pPr>
-            <a:r>
-              <a:rPr sz="1300" b="0">
-                <a:solidFill>
-                  <a:srgbClr val="333333"/>
-                </a:solidFill>
-                <a:latin typeface="Fira Sans"/>
-              </a:rPr>
-              <a:t>     ◦  </a:t>
-            </a:r>
-            <a:r>
-              <a:rPr sz="1300" b="0">
-                <a:solidFill>
-                  <a:srgbClr val="333333"/>
-                </a:solidFill>
-                <a:latin typeface="Fira Sans"/>
-              </a:rPr>
-              <a:t>La relación no es monótona: el tramo que sube y el que baja se cancelan.</a:t>
-            </a:r>
-          </a:p>
-          <a:p>
-            <a:pPr>
-              <a:lnSpc>
-                <a:spcPct val="112000"/>
-              </a:lnSpc>
-              <a:spcAft>
-                <a:spcPts val="500"/>
-              </a:spcAft>
-            </a:pPr>
-            <a:r>
-              <a:rPr sz="1300" b="0">
-                <a:solidFill>
-                  <a:srgbClr val="333333"/>
-                </a:solidFill>
-                <a:latin typeface="Fira Sans"/>
-              </a:rPr>
-              <a:t>     ◦  </a:t>
-            </a:r>
-            <a:r>
-              <a:rPr sz="1300" b="0">
-                <a:solidFill>
-                  <a:srgbClr val="333333"/>
-                </a:solidFill>
-                <a:latin typeface="Fira Sans"/>
-              </a:rPr>
-              <a:t>Ni Pearson ni Spearman están diseñados para esta forma.</a:t>
-            </a:r>
-          </a:p>
-          <a:p>
-            <a:pPr>
-              <a:lnSpc>
-                <a:spcPct val="112000"/>
-              </a:lnSpc>
-              <a:spcAft>
-                <a:spcPts val="900"/>
-              </a:spcAft>
-            </a:pPr>
-            <a:r>
-              <a:rPr sz="1500" b="1">
-                <a:solidFill>
-                  <a:srgbClr val="E0A437"/>
-                </a:solidFill>
-                <a:latin typeface="Fira Sans"/>
-              </a:rPr>
-              <a:t>▸ </a:t>
-            </a:r>
-            <a:r>
-              <a:rPr sz="1500" b="1">
-                <a:solidFill>
-                  <a:srgbClr val="1D3557"/>
-                </a:solidFill>
-                <a:latin typeface="Fira Sans"/>
-              </a:rPr>
-              <a:t>Un coeficiente cercano a cero no demuestra ausencia de asociación: el gráfico sí la muestra.</a:t>
+              <a:t>La correlación, vista en los datos completos</a:t>
             </a:r>
           </a:p>
         </p:txBody>
       </p:sp>
       <p:pic>
         <p:nvPicPr>
-          <p:cNvPr id="5" name="Picture 4" descr="19_edad_viajes.png"/>
+          <p:cNvPr id="4" name="Picture 3" descr="12_scatter_distancia_tiempo.png"/>
           <p:cNvPicPr>
             <a:picLocks noChangeAspect="1"/>
           </p:cNvPicPr>
@@ -10962,14 +11083,48 @@
         </p:blipFill>
         <p:spPr>
           <a:xfrm>
-            <a:off x="4892040" y="1371600"/>
-            <a:ext cx="3840480" cy="2479524"/>
+            <a:off x="2281014" y="1143000"/>
+            <a:ext cx="4581971" cy="3154680"/>
           </a:xfrm>
           <a:prstGeom prst="rect">
             <a:avLst/>
           </a:prstGeom>
         </p:spPr>
       </p:pic>
+      <p:sp>
+        <p:nvSpPr>
+          <p:cNvPr id="5" name="TextBox 4"/>
+          <p:cNvSpPr txBox="1"/>
+          <p:nvPr/>
+        </p:nvSpPr>
+        <p:spPr>
+          <a:xfrm>
+            <a:off x="704088" y="4434840"/>
+            <a:ext cx="7744968" cy="457200"/>
+          </a:xfrm>
+          <a:prstGeom prst="rect">
+            <a:avLst/>
+          </a:prstGeom>
+          <a:noFill/>
+        </p:spPr>
+        <p:txBody>
+          <a:bodyPr wrap="square">
+            <a:spAutoFit/>
+          </a:bodyPr>
+          <a:lstStyle/>
+          <a:p>
+            <a:r>
+              <a:rPr sz="1300" b="0">
+                <a:solidFill>
+                  <a:srgbClr val="333333"/>
+                </a:solidFill>
+                <a:latin typeface="Fira Sans"/>
+              </a:rPr>
+              <a:t>La mediana por tramo sube de forma sostenida (Spearman 0,76) pero no recta y con extremos (Pearson 0,43).</a:t>
+            </a:r>
+          </a:p>
+        </p:txBody>
+      </p:sp>
     </p:spTree>
   </p:cSld>
   <p:clrMapOvr>

--- a/presentaciones/clase02_pandas_eda.pptx
+++ b/presentaciones/clase02_pandas_eda.pptx
@@ -5395,7 +5395,7 @@
                 </a:solidFill>
                 <a:latin typeface="Fira Sans"/>
               </a:rPr>
-              <a:t>Los códigos no significan nada sin sus tablas de parámetros: unirlas es parte del análisis.</a:t>
+              <a:t>Llaves: Hogar · Hogar + Persona · Hogar + Persona + Viaje. Los códigos se resuelven contra tablas_parametros/.</a:t>
             </a:r>
           </a:p>
         </p:txBody>
@@ -6209,7 +6209,7 @@
                 </a:solidFill>
                 <a:latin typeface="Fira Sans"/>
               </a:rPr>
-              <a:t>Una tabla con filas indexadas y columnas con nombre y tipo. Los códigos (comuna, propósito) se traducen con las tablas de parámetros, uniéndolas con merge.</a:t>
+              <a:t>Los códigos (ComunaOrigen, Proposito) se resuelven contra tablas_parametros/ con merge.</a:t>
             </a:r>
           </a:p>
         </p:txBody>

--- a/presentaciones/clase02_pandas_eda.pptx
+++ b/presentaciones/clase02_pandas_eda.pptx
@@ -4628,7 +4628,7 @@
                 </a:solidFill>
                 <a:latin typeface="Fira Sans"/>
               </a:rPr>
-              <a:t>El análisis exploratorio de datos</a:t>
+              <a:t>El análisis exploratorio de datos (EDA)</a:t>
             </a:r>
           </a:p>
         </p:txBody>
@@ -4679,7 +4679,7 @@
                 </a:solidFill>
                 <a:latin typeface="Fira Sans"/>
               </a:rPr>
-              <a:t>La etapa en que se examinan los datos antes de modelarlos (Tukey, 1977).</a:t>
+              <a:t>La etapa en que se examinan los datos antes de modelarlos (EDA, por exploratory data analysis; Tukey, 1977).</a:t>
             </a:r>
           </a:p>
           <a:p>
@@ -6729,7 +6729,7 @@
                 </a:solidFill>
                 <a:latin typeface="Fira Sans"/>
               </a:rPr>
-              <a:t>Estadística descriptiva sobre datos reales</a:t>
+              <a:t>EDA sobre la EOD: estadística descriptiva ponderada</a:t>
             </a:r>
           </a:p>
         </p:txBody>
@@ -6825,149 +6825,14 @@
                 </a:solidFill>
                 <a:latin typeface="Fira Sans"/>
               </a:rPr>
-              <a:t>Viajes por persona: los ausentes también cuentan</a:t>
-            </a:r>
-          </a:p>
-        </p:txBody>
-      </p:sp>
-      <p:sp>
-        <p:nvSpPr>
-          <p:cNvPr id="4" name="TextBox 3"/>
-          <p:cNvSpPr txBox="1"/>
-          <p:nvPr/>
-        </p:nvSpPr>
-        <p:spPr>
-          <a:xfrm>
-            <a:off x="502920" y="1252728"/>
-            <a:ext cx="4023360" cy="3200400"/>
-          </a:xfrm>
-          <a:prstGeom prst="rect">
-            <a:avLst/>
-          </a:prstGeom>
-          <a:noFill/>
-        </p:spPr>
-        <p:txBody>
-          <a:bodyPr wrap="square">
-            <a:spAutoFit/>
-          </a:bodyPr>
-          <a:lstStyle/>
-          <a:p>
-            <a:pPr>
-              <a:lnSpc>
-                <a:spcPct val="112000"/>
-              </a:lnSpc>
-              <a:spcAft>
-                <a:spcPts val="900"/>
-              </a:spcAft>
-            </a:pPr>
-            <a:r>
-              <a:rPr sz="1500" b="1">
-                <a:solidFill>
-                  <a:srgbClr val="E0A437"/>
-                </a:solidFill>
-                <a:latin typeface="Fira Sans"/>
-              </a:rPr>
-              <a:t>▸ </a:t>
-            </a:r>
-            <a:r>
-              <a:rPr sz="1500" b="0">
-                <a:solidFill>
-                  <a:srgbClr val="000000"/>
-                </a:solidFill>
-                <a:latin typeface="Fira Sans"/>
-              </a:rPr>
-              <a:t>El 23% de las personas no viajó ese día.</a:t>
-            </a:r>
-          </a:p>
-          <a:p>
-            <a:pPr>
-              <a:lnSpc>
-                <a:spcPct val="112000"/>
-              </a:lnSpc>
-              <a:spcAft>
-                <a:spcPts val="900"/>
-              </a:spcAft>
-            </a:pPr>
-            <a:r>
-              <a:rPr sz="1500" b="1">
-                <a:solidFill>
-                  <a:srgbClr val="E0A437"/>
-                </a:solidFill>
-                <a:latin typeface="Fira Sans"/>
-              </a:rPr>
-              <a:t>▸ </a:t>
-            </a:r>
-            <a:r>
-              <a:rPr sz="1500" b="0">
-                <a:solidFill>
-                  <a:srgbClr val="000000"/>
-                </a:solidFill>
-                <a:latin typeface="Fira Sans"/>
-              </a:rPr>
-              <a:t>Media: 1,9 viajes. Mediana: 2 viajes.</a:t>
-            </a:r>
-          </a:p>
-          <a:p>
-            <a:pPr>
-              <a:lnSpc>
-                <a:spcPct val="112000"/>
-              </a:lnSpc>
-              <a:spcAft>
-                <a:spcPts val="900"/>
-              </a:spcAft>
-            </a:pPr>
-            <a:r>
-              <a:rPr sz="1500" b="1">
-                <a:solidFill>
-                  <a:srgbClr val="E0A437"/>
-                </a:solidFill>
-                <a:latin typeface="Fira Sans"/>
-              </a:rPr>
-              <a:t>▸ </a:t>
-            </a:r>
-            <a:r>
-              <a:rPr sz="1500" b="0">
-                <a:solidFill>
-                  <a:srgbClr val="000000"/>
-                </a:solidFill>
-                <a:latin typeface="Fira Sans"/>
-              </a:rPr>
-              <a:t>La media quedó bajo la mediana: la masa de ceros la desplaza.</a:t>
-            </a:r>
-          </a:p>
-          <a:p>
-            <a:pPr>
-              <a:lnSpc>
-                <a:spcPct val="112000"/>
-              </a:lnSpc>
-              <a:spcAft>
-                <a:spcPts val="900"/>
-              </a:spcAft>
-            </a:pPr>
-            <a:r>
-              <a:rPr sz="1500" b="1">
-                <a:solidFill>
-                  <a:srgbClr val="E0A437"/>
-                </a:solidFill>
-                <a:latin typeface="Fira Sans"/>
-              </a:rPr>
-              <a:t>▸ </a:t>
-            </a:r>
-            <a:r>
-              <a:rPr sz="1500" b="1">
-                <a:solidFill>
-                  <a:srgbClr val="1D3557"/>
-                </a:solidFill>
-                <a:latin typeface="Fira Sans"/>
-              </a:rPr>
-              <a:t>La dirección del sesgo depende de la forma de la distribución.</a:t>
+              <a:t>Los factores de expansión: de la muestra a la ciudad</a:t>
             </a:r>
           </a:p>
         </p:txBody>
       </p:sp>
       <p:pic>
         <p:nvPicPr>
-          <p:cNvPr id="5" name="Picture 4" descr="02_viajes_por_persona.png"/>
+          <p:cNvPr id="4" name="Picture 3" descr="06_diagrama_factores.png"/>
           <p:cNvPicPr>
             <a:picLocks noChangeAspect="1"/>
           </p:cNvPicPr>
@@ -6981,14 +6846,48 @@
         </p:blipFill>
         <p:spPr>
           <a:xfrm>
-            <a:off x="4892040" y="1371600"/>
-            <a:ext cx="3840480" cy="2191739"/>
+            <a:off x="1417319" y="1143000"/>
+            <a:ext cx="6309360" cy="2871234"/>
           </a:xfrm>
           <a:prstGeom prst="rect">
             <a:avLst/>
           </a:prstGeom>
         </p:spPr>
       </p:pic>
+      <p:sp>
+        <p:nvSpPr>
+          <p:cNvPr id="5" name="TextBox 4"/>
+          <p:cNvSpPr txBox="1"/>
+          <p:nvPr/>
+        </p:nvSpPr>
+        <p:spPr>
+          <a:xfrm>
+            <a:off x="704088" y="4434840"/>
+            <a:ext cx="7744968" cy="457200"/>
+          </a:xfrm>
+          <a:prstGeom prst="rect">
+            <a:avLst/>
+          </a:prstGeom>
+          <a:noFill/>
+        </p:spPr>
+        <p:txBody>
+          <a:bodyPr wrap="square">
+            <a:spAutoFit/>
+          </a:bodyPr>
+          <a:lstStyle/>
+          <a:p>
+            <a:r>
+              <a:rPr sz="1300" b="0">
+                <a:solidFill>
+                  <a:srgbClr val="333333"/>
+                </a:solidFill>
+                <a:latin typeface="Fira Sans"/>
+              </a:rPr>
+              <a:t>Contar filas responde por la muestra; sumar factores responde por la ciudad.</a:t>
+            </a:r>
+          </a:p>
+        </p:txBody>
+      </p:sp>
     </p:spTree>
   </p:cSld>
   <p:clrMapOvr>
@@ -7080,14 +6979,149 @@
                 </a:solidFill>
                 <a:latin typeface="Fira Sans"/>
               </a:rPr>
-              <a:t>Los factores de expansión: de la muestra a la ciudad</a:t>
+              <a:t>Viajes por persona: los ausentes también cuentan</a:t>
+            </a:r>
+          </a:p>
+        </p:txBody>
+      </p:sp>
+      <p:sp>
+        <p:nvSpPr>
+          <p:cNvPr id="4" name="TextBox 3"/>
+          <p:cNvSpPr txBox="1"/>
+          <p:nvPr/>
+        </p:nvSpPr>
+        <p:spPr>
+          <a:xfrm>
+            <a:off x="502920" y="1252728"/>
+            <a:ext cx="4023360" cy="3200400"/>
+          </a:xfrm>
+          <a:prstGeom prst="rect">
+            <a:avLst/>
+          </a:prstGeom>
+          <a:noFill/>
+        </p:spPr>
+        <p:txBody>
+          <a:bodyPr wrap="square">
+            <a:spAutoFit/>
+          </a:bodyPr>
+          <a:lstStyle/>
+          <a:p>
+            <a:pPr>
+              <a:lnSpc>
+                <a:spcPct val="112000"/>
+              </a:lnSpc>
+              <a:spcAft>
+                <a:spcPts val="900"/>
+              </a:spcAft>
+            </a:pPr>
+            <a:r>
+              <a:rPr sz="1500" b="1">
+                <a:solidFill>
+                  <a:srgbClr val="E0A437"/>
+                </a:solidFill>
+                <a:latin typeface="Fira Sans"/>
+              </a:rPr>
+              <a:t>▸ </a:t>
+            </a:r>
+            <a:r>
+              <a:rPr sz="1500" b="0">
+                <a:solidFill>
+                  <a:srgbClr val="000000"/>
+                </a:solidFill>
+                <a:latin typeface="Fira Sans"/>
+              </a:rPr>
+              <a:t>El 23% de las personas no viajó ese día.</a:t>
+            </a:r>
+          </a:p>
+          <a:p>
+            <a:pPr>
+              <a:lnSpc>
+                <a:spcPct val="112000"/>
+              </a:lnSpc>
+              <a:spcAft>
+                <a:spcPts val="900"/>
+              </a:spcAft>
+            </a:pPr>
+            <a:r>
+              <a:rPr sz="1500" b="1">
+                <a:solidFill>
+                  <a:srgbClr val="E0A437"/>
+                </a:solidFill>
+                <a:latin typeface="Fira Sans"/>
+              </a:rPr>
+              <a:t>▸ </a:t>
+            </a:r>
+            <a:r>
+              <a:rPr sz="1500" b="0">
+                <a:solidFill>
+                  <a:srgbClr val="000000"/>
+                </a:solidFill>
+                <a:latin typeface="Fira Sans"/>
+              </a:rPr>
+              <a:t>Media: 1,9 viajes. Mediana: 2 viajes.</a:t>
+            </a:r>
+          </a:p>
+          <a:p>
+            <a:pPr>
+              <a:lnSpc>
+                <a:spcPct val="112000"/>
+              </a:lnSpc>
+              <a:spcAft>
+                <a:spcPts val="900"/>
+              </a:spcAft>
+            </a:pPr>
+            <a:r>
+              <a:rPr sz="1500" b="1">
+                <a:solidFill>
+                  <a:srgbClr val="E0A437"/>
+                </a:solidFill>
+                <a:latin typeface="Fira Sans"/>
+              </a:rPr>
+              <a:t>▸ </a:t>
+            </a:r>
+            <a:r>
+              <a:rPr sz="1500" b="0">
+                <a:solidFill>
+                  <a:srgbClr val="000000"/>
+                </a:solidFill>
+                <a:latin typeface="Fira Sans"/>
+              </a:rPr>
+              <a:t>La media quedó bajo la mediana: la masa de ceros la desplaza.</a:t>
+            </a:r>
+          </a:p>
+          <a:p>
+            <a:pPr>
+              <a:lnSpc>
+                <a:spcPct val="112000"/>
+              </a:lnSpc>
+              <a:spcAft>
+                <a:spcPts val="900"/>
+              </a:spcAft>
+            </a:pPr>
+            <a:r>
+              <a:rPr sz="1500" b="1">
+                <a:solidFill>
+                  <a:srgbClr val="E0A437"/>
+                </a:solidFill>
+                <a:latin typeface="Fira Sans"/>
+              </a:rPr>
+              <a:t>▸ </a:t>
+            </a:r>
+            <a:r>
+              <a:rPr sz="1500" b="1">
+                <a:solidFill>
+                  <a:srgbClr val="1D3557"/>
+                </a:solidFill>
+                <a:latin typeface="Fira Sans"/>
+              </a:rPr>
+              <a:t>La dirección del sesgo depende de la forma de la distribución.</a:t>
             </a:r>
           </a:p>
         </p:txBody>
       </p:sp>
       <p:pic>
         <p:nvPicPr>
-          <p:cNvPr id="4" name="Picture 3" descr="06_diagrama_factores.png"/>
+          <p:cNvPr id="5" name="Picture 4" descr="02_viajes_por_persona.png"/>
           <p:cNvPicPr>
             <a:picLocks noChangeAspect="1"/>
           </p:cNvPicPr>
@@ -7101,48 +7135,14 @@
         </p:blipFill>
         <p:spPr>
           <a:xfrm>
-            <a:off x="1417319" y="1143000"/>
-            <a:ext cx="6309360" cy="2871234"/>
+            <a:off x="4892040" y="1371600"/>
+            <a:ext cx="3840480" cy="2191739"/>
           </a:xfrm>
           <a:prstGeom prst="rect">
             <a:avLst/>
           </a:prstGeom>
         </p:spPr>
       </p:pic>
-      <p:sp>
-        <p:nvSpPr>
-          <p:cNvPr id="5" name="TextBox 4"/>
-          <p:cNvSpPr txBox="1"/>
-          <p:nvPr/>
-        </p:nvSpPr>
-        <p:spPr>
-          <a:xfrm>
-            <a:off x="704088" y="4434840"/>
-            <a:ext cx="7744968" cy="457200"/>
-          </a:xfrm>
-          <a:prstGeom prst="rect">
-            <a:avLst/>
-          </a:prstGeom>
-          <a:noFill/>
-        </p:spPr>
-        <p:txBody>
-          <a:bodyPr wrap="square">
-            <a:spAutoFit/>
-          </a:bodyPr>
-          <a:lstStyle/>
-          <a:p>
-            <a:r>
-              <a:rPr sz="1300" b="0">
-                <a:solidFill>
-                  <a:srgbClr val="333333"/>
-                </a:solidFill>
-                <a:latin typeface="Fira Sans"/>
-              </a:rPr>
-              <a:t>Contar filas responde por la muestra; sumar factores responde por la ciudad.</a:t>
-            </a:r>
-          </a:p>
-        </p:txBody>
-      </p:sp>
     </p:spTree>
   </p:cSld>
   <p:clrMapOvr>

--- a/presentaciones/clase02_pandas_eda.pptx
+++ b/presentaciones/clase02_pandas_eda.pptx
@@ -41,6 +41,7 @@
     <p:sldId id="289" r:id="rId40"/>
     <p:sldId id="290" r:id="rId41"/>
     <p:sldId id="291" r:id="rId42"/>
+    <p:sldId id="292" r:id="rId43"/>
   </p:sldIdLst>
   <p:sldSz cx="9144000" cy="5138928" type="screen4x3"/>
   <p:notesSz cx="6858000" cy="9144000"/>
@@ -5913,112 +5914,21 @@
                 </a:solidFill>
                 <a:latin typeface="Fira Sans"/>
               </a:rPr>
-              <a:t>Abrir el dataset</a:t>
-            </a:r>
-          </a:p>
-        </p:txBody>
-      </p:sp>
-      <p:sp>
-        <p:nvSpPr>
-          <p:cNvPr id="4" name="Rectangle 3"/>
-          <p:cNvSpPr/>
-          <p:nvPr/>
-        </p:nvSpPr>
-        <p:spPr>
-          <a:xfrm>
-            <a:off x="704088" y="1280160"/>
-            <a:ext cx="7744968" cy="2377440"/>
-          </a:xfrm>
-          <a:prstGeom prst="rect">
-            <a:avLst/>
-          </a:prstGeom>
-          <a:solidFill>
-            <a:srgbClr val="F0F2F5"/>
-          </a:solidFill>
-          <a:ln>
-            <a:solidFill>
-              <a:srgbClr val="D8DDE3"/>
-            </a:solidFill>
-          </a:ln>
-          <a:effectLst/>
-        </p:spPr>
-        <p:style>
-          <a:lnRef idx="1">
-            <a:schemeClr val="accent1"/>
-          </a:lnRef>
-          <a:fillRef idx="3">
-            <a:schemeClr val="accent1"/>
-          </a:fillRef>
-          <a:effectRef idx="2">
-            <a:schemeClr val="accent1"/>
-          </a:effectRef>
-          <a:fontRef idx="minor">
-            <a:schemeClr val="lt1"/>
-          </a:fontRef>
-        </p:style>
-        <p:txBody>
-          <a:bodyPr rtlCol="0" anchor="ctr" wrap="square" lIns="228600" tIns="137160"/>
-          <a:lstStyle/>
-          <a:p>
-            <a:pPr/>
-            <a:r>
-              <a:rPr sz="1500" b="0">
-                <a:solidFill>
-                  <a:srgbClr val="1D3557"/>
-                </a:solidFill>
-                <a:latin typeface="Menlo"/>
-              </a:rPr>
-              <a:t>import pandas as pd</a:t>
-            </a:r>
-          </a:p>
-          <a:p>
-            <a:pPr/>
-            <a:r>
-              <a:rPr sz="1500" b="0">
-                <a:solidFill>
-                  <a:srgbClr val="1D3557"/>
-                </a:solidFill>
-                <a:latin typeface="Menlo"/>
-              </a:rPr>
-              <a:t/>
-            </a:r>
-          </a:p>
-          <a:p>
-            <a:pPr/>
-            <a:r>
-              <a:rPr sz="1500" b="0">
-                <a:solidFill>
-                  <a:srgbClr val="1D3557"/>
-                </a:solidFill>
-                <a:latin typeface="Menlo"/>
-              </a:rPr>
-              <a:t>viajes = pd.read_csv('datos/eod_stgo/viajes.csv',</a:t>
-            </a:r>
-          </a:p>
-          <a:p>
-            <a:pPr/>
-            <a:r>
-              <a:rPr sz="1500" b="0">
-                <a:solidFill>
-                  <a:srgbClr val="1D3557"/>
-                </a:solidFill>
-                <a:latin typeface="Menlo"/>
-              </a:rPr>
-              <a:t>                     sep=';', decimal=',')</a:t>
-            </a:r>
-          </a:p>
-        </p:txBody>
-      </p:sp>
-      <p:sp>
-        <p:nvSpPr>
-          <p:cNvPr id="5" name="TextBox 4"/>
+              <a:t>El DataFrame: origen y propiedades</a:t>
+            </a:r>
+          </a:p>
+        </p:txBody>
+      </p:sp>
+      <p:sp>
+        <p:nvSpPr>
+          <p:cNvPr id="4" name="TextBox 3"/>
           <p:cNvSpPr txBox="1"/>
           <p:nvPr/>
         </p:nvSpPr>
         <p:spPr>
           <a:xfrm>
-            <a:off x="704088" y="3886200"/>
-            <a:ext cx="7744968" cy="1097280"/>
+            <a:off x="704088" y="1353312"/>
+            <a:ext cx="7744968" cy="3300984"/>
           </a:xfrm>
           <a:prstGeom prst="rect">
             <a:avLst/>
@@ -6040,7 +5950,7 @@
               </a:spcAft>
             </a:pPr>
             <a:r>
-              <a:rPr sz="1600" b="1">
+              <a:rPr sz="1800" b="1">
                 <a:solidFill>
                   <a:srgbClr val="E0A437"/>
                 </a:solidFill>
@@ -6049,13 +5959,153 @@
               <a:t>▸ </a:t>
             </a:r>
             <a:r>
-              <a:rPr sz="1600" b="0">
+              <a:rPr sz="1800" b="0">
                 <a:solidFill>
                   <a:srgbClr val="000000"/>
                 </a:solidFill>
                 <a:latin typeface="Fira Sans"/>
               </a:rPr>
-              <a:t>Todo el código de la clase está en el notebook 02_pandas_eda.ipynb del repositorio.</a:t>
+              <a:t>Estructura tabular bidimensional: columnas con nombre y tipo propio, filas indexadas.</a:t>
+            </a:r>
+          </a:p>
+          <a:p>
+            <a:pPr>
+              <a:lnSpc>
+                <a:spcPct val="112000"/>
+              </a:lnSpc>
+              <a:spcAft>
+                <a:spcPts val="900"/>
+              </a:spcAft>
+            </a:pPr>
+            <a:r>
+              <a:rPr sz="1800" b="1">
+                <a:solidFill>
+                  <a:srgbClr val="E0A437"/>
+                </a:solidFill>
+                <a:latin typeface="Fira Sans"/>
+              </a:rPr>
+              <a:t>▸ </a:t>
+            </a:r>
+            <a:r>
+              <a:rPr sz="1800" b="0">
+                <a:solidFill>
+                  <a:srgbClr val="000000"/>
+                </a:solidFill>
+                <a:latin typeface="Fira Sans"/>
+              </a:rPr>
+              <a:t>El concepto viene del lenguaje S: los objetos data.frame (Chambers y Hastie, 1992). Wes McKinney lo llevó a Python con pandas (McKinney, 2010).</a:t>
+            </a:r>
+          </a:p>
+          <a:p>
+            <a:pPr>
+              <a:lnSpc>
+                <a:spcPct val="112000"/>
+              </a:lnSpc>
+              <a:spcAft>
+                <a:spcPts val="500"/>
+              </a:spcAft>
+            </a:pPr>
+            <a:r>
+              <a:rPr sz="1400" b="0">
+                <a:solidFill>
+                  <a:srgbClr val="333333"/>
+                </a:solidFill>
+                <a:latin typeface="Fira Sans"/>
+              </a:rPr>
+              <a:t>     ◦  </a:t>
+            </a:r>
+            <a:r>
+              <a:rPr sz="1400" b="0">
+                <a:solidFill>
+                  <a:srgbClr val="333333"/>
+                </a:solidFill>
+                <a:latin typeface="Fira Sans"/>
+              </a:rPr>
+              <a:t>Cada columna es un arreglo tipado contiguo: las operaciones son vectorizadas, no ciclos de Python.</a:t>
+            </a:r>
+          </a:p>
+          <a:p>
+            <a:pPr>
+              <a:lnSpc>
+                <a:spcPct val="112000"/>
+              </a:lnSpc>
+              <a:spcAft>
+                <a:spcPts val="500"/>
+              </a:spcAft>
+            </a:pPr>
+            <a:r>
+              <a:rPr sz="1400" b="0">
+                <a:solidFill>
+                  <a:srgbClr val="333333"/>
+                </a:solidFill>
+                <a:latin typeface="Fira Sans"/>
+              </a:rPr>
+              <a:t>     ◦  </a:t>
+            </a:r>
+            <a:r>
+              <a:rPr sz="1400" b="0">
+                <a:solidFill>
+                  <a:srgbClr val="333333"/>
+                </a:solidFill>
+                <a:latin typeface="Fira Sans"/>
+              </a:rPr>
+              <a:t>El índice alinea los datos automáticamente en operaciones entre tablas y series.</a:t>
+            </a:r>
+          </a:p>
+          <a:p>
+            <a:pPr>
+              <a:lnSpc>
+                <a:spcPct val="112000"/>
+              </a:lnSpc>
+              <a:spcAft>
+                <a:spcPts val="500"/>
+              </a:spcAft>
+            </a:pPr>
+            <a:r>
+              <a:rPr sz="1400" b="0">
+                <a:solidFill>
+                  <a:srgbClr val="333333"/>
+                </a:solidFill>
+                <a:latin typeface="Fira Sans"/>
+              </a:rPr>
+              <a:t>     ◦  </a:t>
+            </a:r>
+            <a:r>
+              <a:rPr sz="1400" b="0">
+                <a:solidFill>
+                  <a:srgbClr val="333333"/>
+                </a:solidFill>
+                <a:latin typeface="Fira Sans"/>
+              </a:rPr>
+              <a:t>Implementa el álgebra relacional en memoria: selección, proyección, join (merge) y agregación (groupby).</a:t>
+            </a:r>
+          </a:p>
+          <a:p>
+            <a:pPr>
+              <a:lnSpc>
+                <a:spcPct val="112000"/>
+              </a:lnSpc>
+              <a:spcAft>
+                <a:spcPts val="900"/>
+              </a:spcAft>
+            </a:pPr>
+            <a:r>
+              <a:rPr sz="1800" b="1">
+                <a:solidFill>
+                  <a:srgbClr val="E0A437"/>
+                </a:solidFill>
+                <a:latin typeface="Fira Sans"/>
+              </a:rPr>
+              <a:t>▸ </a:t>
+            </a:r>
+            <a:r>
+              <a:rPr sz="1800" b="1">
+                <a:solidFill>
+                  <a:srgbClr val="1D3557"/>
+                </a:solidFill>
+                <a:latin typeface="Fira Sans"/>
+              </a:rPr>
+              <a:t>La interfaz se volvió un estándar: Spark, Polars y Dask implementan DataFrames con esta misma idea.</a:t>
             </a:r>
           </a:p>
         </p:txBody>
@@ -6151,35 +6201,102 @@
                 </a:solidFill>
                 <a:latin typeface="Fira Sans"/>
               </a:rPr>
-              <a:t>El DataFrame: la estructura central de Pandas</a:t>
-            </a:r>
-          </a:p>
-        </p:txBody>
-      </p:sp>
-      <p:pic>
-        <p:nvPicPr>
-          <p:cNvPr id="4" name="Picture 3" descr="13_dataframe.png"/>
-          <p:cNvPicPr>
-            <a:picLocks noChangeAspect="1"/>
-          </p:cNvPicPr>
-          <p:nvPr/>
-        </p:nvPicPr>
-        <p:blipFill>
-          <a:blip r:embed="rId2"/>
-          <a:stretch>
-            <a:fillRect/>
-          </a:stretch>
-        </p:blipFill>
-        <p:spPr>
-          <a:xfrm>
-            <a:off x="1417319" y="1143000"/>
-            <a:ext cx="6309360" cy="2553789"/>
-          </a:xfrm>
-          <a:prstGeom prst="rect">
-            <a:avLst/>
-          </a:prstGeom>
-        </p:spPr>
-      </p:pic>
+              <a:t>Abrir el dataset</a:t>
+            </a:r>
+          </a:p>
+        </p:txBody>
+      </p:sp>
+      <p:sp>
+        <p:nvSpPr>
+          <p:cNvPr id="4" name="Rectangle 3"/>
+          <p:cNvSpPr/>
+          <p:nvPr/>
+        </p:nvSpPr>
+        <p:spPr>
+          <a:xfrm>
+            <a:off x="704088" y="1280160"/>
+            <a:ext cx="7744968" cy="2377440"/>
+          </a:xfrm>
+          <a:prstGeom prst="rect">
+            <a:avLst/>
+          </a:prstGeom>
+          <a:solidFill>
+            <a:srgbClr val="F0F2F5"/>
+          </a:solidFill>
+          <a:ln>
+            <a:solidFill>
+              <a:srgbClr val="D8DDE3"/>
+            </a:solidFill>
+          </a:ln>
+          <a:effectLst/>
+        </p:spPr>
+        <p:style>
+          <a:lnRef idx="1">
+            <a:schemeClr val="accent1"/>
+          </a:lnRef>
+          <a:fillRef idx="3">
+            <a:schemeClr val="accent1"/>
+          </a:fillRef>
+          <a:effectRef idx="2">
+            <a:schemeClr val="accent1"/>
+          </a:effectRef>
+          <a:fontRef idx="minor">
+            <a:schemeClr val="lt1"/>
+          </a:fontRef>
+        </p:style>
+        <p:txBody>
+          <a:bodyPr rtlCol="0" anchor="ctr" wrap="square" lIns="228600" tIns="137160"/>
+          <a:lstStyle/>
+          <a:p>
+            <a:pPr/>
+            <a:r>
+              <a:rPr sz="1500" b="0">
+                <a:solidFill>
+                  <a:srgbClr val="1D3557"/>
+                </a:solidFill>
+                <a:latin typeface="Menlo"/>
+              </a:rPr>
+              <a:t>import pandas as pd</a:t>
+            </a:r>
+          </a:p>
+          <a:p>
+            <a:pPr/>
+            <a:r>
+              <a:rPr sz="1500" b="0">
+                <a:solidFill>
+                  <a:srgbClr val="1D3557"/>
+                </a:solidFill>
+                <a:latin typeface="Menlo"/>
+              </a:rPr>
+              <a:t/>
+            </a:r>
+          </a:p>
+          <a:p>
+            <a:pPr/>
+            <a:r>
+              <a:rPr sz="1500" b="0">
+                <a:solidFill>
+                  <a:srgbClr val="1D3557"/>
+                </a:solidFill>
+                <a:latin typeface="Menlo"/>
+              </a:rPr>
+              <a:t>viajes = pd.read_csv('datos/eod_stgo/viajes.csv',</a:t>
+            </a:r>
+          </a:p>
+          <a:p>
+            <a:pPr/>
+            <a:r>
+              <a:rPr sz="1500" b="0">
+                <a:solidFill>
+                  <a:srgbClr val="1D3557"/>
+                </a:solidFill>
+                <a:latin typeface="Menlo"/>
+              </a:rPr>
+              <a:t>                     sep=';', decimal=',')</a:t>
+            </a:r>
+          </a:p>
+        </p:txBody>
+      </p:sp>
       <p:sp>
         <p:nvSpPr>
           <p:cNvPr id="5" name="TextBox 4"/>
@@ -6188,8 +6305,8 @@
         </p:nvSpPr>
         <p:spPr>
           <a:xfrm>
-            <a:off x="704088" y="4434840"/>
-            <a:ext cx="7744968" cy="457200"/>
+            <a:off x="704088" y="3886200"/>
+            <a:ext cx="7744968" cy="1097280"/>
           </a:xfrm>
           <a:prstGeom prst="rect">
             <a:avLst/>
@@ -6202,14 +6319,31 @@
           </a:bodyPr>
           <a:lstStyle/>
           <a:p>
-            <a:r>
-              <a:rPr sz="1300" b="0">
-                <a:solidFill>
-                  <a:srgbClr val="333333"/>
-                </a:solidFill>
-                <a:latin typeface="Fira Sans"/>
-              </a:rPr>
-              <a:t>Los códigos (ComunaOrigen, Proposito) se resuelven contra tablas_parametros/ con merge.</a:t>
+            <a:pPr>
+              <a:lnSpc>
+                <a:spcPct val="112000"/>
+              </a:lnSpc>
+              <a:spcAft>
+                <a:spcPts val="900"/>
+              </a:spcAft>
+            </a:pPr>
+            <a:r>
+              <a:rPr sz="1600" b="1">
+                <a:solidFill>
+                  <a:srgbClr val="E0A437"/>
+                </a:solidFill>
+                <a:latin typeface="Fira Sans"/>
+              </a:rPr>
+              <a:t>▸ </a:t>
+            </a:r>
+            <a:r>
+              <a:rPr sz="1600" b="0">
+                <a:solidFill>
+                  <a:srgbClr val="000000"/>
+                </a:solidFill>
+                <a:latin typeface="Fira Sans"/>
+              </a:rPr>
+              <a:t>Todo el código de la clase está en el notebook 02_pandas_eda.ipynb del repositorio.</a:t>
             </a:r>
           </a:p>
         </p:txBody>
@@ -6305,14 +6439,14 @@
                 </a:solidFill>
                 <a:latin typeface="Fira Sans"/>
               </a:rPr>
-              <a:t>Las variantes del merge: qué filas se conservan</a:t>
+              <a:t>El DataFrame: la estructura central de Pandas</a:t>
             </a:r>
           </a:p>
         </p:txBody>
       </p:sp>
       <p:pic>
         <p:nvPicPr>
-          <p:cNvPr id="4" name="Picture 3" descr="07_diagrama_merge.png"/>
+          <p:cNvPr id="4" name="Picture 3" descr="13_dataframe.png"/>
           <p:cNvPicPr>
             <a:picLocks noChangeAspect="1"/>
           </p:cNvPicPr>
@@ -6327,7 +6461,7 @@
         <p:spPr>
           <a:xfrm>
             <a:off x="1417319" y="1143000"/>
-            <a:ext cx="6309360" cy="2397276"/>
+            <a:ext cx="6309360" cy="2553789"/>
           </a:xfrm>
           <a:prstGeom prst="rect">
             <a:avLst/>
@@ -6363,7 +6497,7 @@
                 </a:solidFill>
                 <a:latin typeface="Fira Sans"/>
               </a:rPr>
-              <a:t>El valor por defecto es inner: descarta sin aviso las filas sin pareja.</a:t>
+              <a:t>Los códigos (ComunaOrigen, Proposito) se resuelven contra tablas_parametros/ con merge.</a:t>
             </a:r>
           </a:p>
         </p:txBody>
@@ -6459,21 +6593,45 @@
                 </a:solidFill>
                 <a:latin typeface="Fira Sans"/>
               </a:rPr>
-              <a:t>El efecto del parámetro how sobre la población analizada</a:t>
-            </a:r>
-          </a:p>
-        </p:txBody>
-      </p:sp>
-      <p:sp>
-        <p:nvSpPr>
-          <p:cNvPr id="4" name="TextBox 3"/>
+              <a:t>Las variantes del merge: qué filas se conservan</a:t>
+            </a:r>
+          </a:p>
+        </p:txBody>
+      </p:sp>
+      <p:pic>
+        <p:nvPicPr>
+          <p:cNvPr id="4" name="Picture 3" descr="07_diagrama_merge.png"/>
+          <p:cNvPicPr>
+            <a:picLocks noChangeAspect="1"/>
+          </p:cNvPicPr>
+          <p:nvPr/>
+        </p:nvPicPr>
+        <p:blipFill>
+          <a:blip r:embed="rId2"/>
+          <a:stretch>
+            <a:fillRect/>
+          </a:stretch>
+        </p:blipFill>
+        <p:spPr>
+          <a:xfrm>
+            <a:off x="1417319" y="1143000"/>
+            <a:ext cx="6309360" cy="2397276"/>
+          </a:xfrm>
+          <a:prstGeom prst="rect">
+            <a:avLst/>
+          </a:prstGeom>
+        </p:spPr>
+      </p:pic>
+      <p:sp>
+        <p:nvSpPr>
+          <p:cNvPr id="5" name="TextBox 4"/>
           <p:cNvSpPr txBox="1"/>
           <p:nvPr/>
         </p:nvSpPr>
         <p:spPr>
           <a:xfrm>
-            <a:off x="704088" y="1353312"/>
-            <a:ext cx="7744968" cy="3300984"/>
+            <a:off x="704088" y="4434840"/>
+            <a:ext cx="7744968" cy="457200"/>
           </a:xfrm>
           <a:prstGeom prst="rect">
             <a:avLst/>
@@ -6486,143 +6644,14 @@
           </a:bodyPr>
           <a:lstStyle/>
           <a:p>
-            <a:pPr>
-              <a:lnSpc>
-                <a:spcPct val="112000"/>
-              </a:lnSpc>
-              <a:spcAft>
-                <a:spcPts val="900"/>
-              </a:spcAft>
-            </a:pPr>
-            <a:r>
-              <a:rPr sz="1800" b="1">
-                <a:solidFill>
-                  <a:srgbClr val="E0A437"/>
-                </a:solidFill>
-                <a:latin typeface="Fira Sans"/>
-              </a:rPr>
-              <a:t>▸ </a:t>
-            </a:r>
-            <a:r>
-              <a:rPr sz="1800" b="0">
-                <a:solidFill>
-                  <a:srgbClr val="000000"/>
-                </a:solidFill>
-                <a:latin typeface="Fira Sans"/>
-              </a:rPr>
-              <a:t>Personas con viajes, merge inner: 113.591 filas (una por viaje).</a:t>
-            </a:r>
-          </a:p>
-          <a:p>
-            <a:pPr>
-              <a:lnSpc>
-                <a:spcPct val="112000"/>
-              </a:lnSpc>
-              <a:spcAft>
-                <a:spcPts val="900"/>
-              </a:spcAft>
-            </a:pPr>
-            <a:r>
-              <a:rPr sz="1800" b="1">
-                <a:solidFill>
-                  <a:srgbClr val="E0A437"/>
-                </a:solidFill>
-                <a:latin typeface="Fira Sans"/>
-              </a:rPr>
-              <a:t>▸ </a:t>
-            </a:r>
-            <a:r>
-              <a:rPr sz="1800" b="0">
-                <a:solidFill>
-                  <a:srgbClr val="000000"/>
-                </a:solidFill>
-                <a:latin typeface="Fira Sans"/>
-              </a:rPr>
-              <a:t>El mismo merge en left: 127.379 filas.</a:t>
-            </a:r>
-          </a:p>
-          <a:p>
-            <a:pPr>
-              <a:lnSpc>
-                <a:spcPct val="112000"/>
-              </a:lnSpc>
-              <a:spcAft>
-                <a:spcPts val="500"/>
-              </a:spcAft>
-            </a:pPr>
-            <a:r>
-              <a:rPr sz="1400" b="0">
+            <a:r>
+              <a:rPr sz="1300" b="0">
                 <a:solidFill>
                   <a:srgbClr val="333333"/>
                 </a:solidFill>
                 <a:latin typeface="Fira Sans"/>
               </a:rPr>
-              <a:t>     ◦  </a:t>
-            </a:r>
-            <a:r>
-              <a:rPr sz="1400" b="0">
-                <a:solidFill>
-                  <a:srgbClr val="333333"/>
-                </a:solidFill>
-                <a:latin typeface="Fira Sans"/>
-              </a:rPr>
-              <a:t>La diferencia son 13.788 personas que no viajaron ese día.</a:t>
-            </a:r>
-          </a:p>
-          <a:p>
-            <a:pPr>
-              <a:lnSpc>
-                <a:spcPct val="112000"/>
-              </a:lnSpc>
-              <a:spcAft>
-                <a:spcPts val="500"/>
-              </a:spcAft>
-            </a:pPr>
-            <a:r>
-              <a:rPr sz="1400" b="0">
-                <a:solidFill>
-                  <a:srgbClr val="333333"/>
-                </a:solidFill>
-                <a:latin typeface="Fira Sans"/>
-              </a:rPr>
-              <a:t>     ◦  </a:t>
-            </a:r>
-            <a:r>
-              <a:rPr sz="1400" b="0">
-                <a:solidFill>
-                  <a:srgbClr val="333333"/>
-                </a:solidFill>
-                <a:latin typeface="Fira Sans"/>
-              </a:rPr>
-              <a:t>Con inner desaparecen; con left quedan, con NaN en el viaje.</a:t>
-            </a:r>
-          </a:p>
-          <a:p>
-            <a:pPr>
-              <a:lnSpc>
-                <a:spcPct val="112000"/>
-              </a:lnSpc>
-              <a:spcAft>
-                <a:spcPts val="900"/>
-              </a:spcAft>
-            </a:pPr>
-            <a:r>
-              <a:rPr sz="1800" b="1">
-                <a:solidFill>
-                  <a:srgbClr val="E0A437"/>
-                </a:solidFill>
-                <a:latin typeface="Fira Sans"/>
-              </a:rPr>
-              <a:t>▸ </a:t>
-            </a:r>
-            <a:r>
-              <a:rPr sz="1800" b="1">
-                <a:solidFill>
-                  <a:srgbClr val="1D3557"/>
-                </a:solidFill>
-                <a:latin typeface="Fira Sans"/>
-              </a:rPr>
-              <a:t>Un promedio calculado sobre el resultado del inner excluye a quienes no viajaron.</a:t>
+              <a:t>El valor por defecto es inner: descarta sin aviso las filas sin pareja.</a:t>
             </a:r>
           </a:p>
         </p:txBody>
@@ -6660,7 +6689,7 @@
             <a:avLst/>
           </a:prstGeom>
           <a:solidFill>
-            <a:srgbClr val="1D3557"/>
+            <a:srgbClr val="FAFBFC"/>
           </a:solidFill>
           <a:ln>
             <a:noFill/>
@@ -6697,8 +6726,8 @@
         </p:nvSpPr>
         <p:spPr>
           <a:xfrm>
-            <a:off x="603504" y="1847088"/>
-            <a:ext cx="7946136" cy="1399032"/>
+            <a:off x="402336" y="301752"/>
+            <a:ext cx="8348472" cy="795528"/>
           </a:xfrm>
           <a:prstGeom prst="rect">
             <a:avLst/>
@@ -6712,24 +6741,176 @@
           <a:lstStyle/>
           <a:p>
             <a:r>
-              <a:rPr sz="3400" b="1">
-                <a:solidFill>
-                  <a:srgbClr val="FFFFFF"/>
-                </a:solidFill>
-                <a:latin typeface="Fira Sans"/>
-              </a:rPr>
-              <a:t>Exploración de la EOD</a:t>
-            </a:r>
-          </a:p>
-          <a:p>
+              <a:rPr sz="2800" b="1">
+                <a:solidFill>
+                  <a:srgbClr val="0F0F0F"/>
+                </a:solidFill>
+                <a:latin typeface="Fira Sans"/>
+              </a:rPr>
+              <a:t>El efecto del parámetro how sobre la población analizada</a:t>
+            </a:r>
+          </a:p>
+        </p:txBody>
+      </p:sp>
+      <p:sp>
+        <p:nvSpPr>
+          <p:cNvPr id="4" name="TextBox 3"/>
+          <p:cNvSpPr txBox="1"/>
+          <p:nvPr/>
+        </p:nvSpPr>
+        <p:spPr>
+          <a:xfrm>
+            <a:off x="704088" y="1353312"/>
+            <a:ext cx="7744968" cy="3300984"/>
+          </a:xfrm>
+          <a:prstGeom prst="rect">
+            <a:avLst/>
+          </a:prstGeom>
+          <a:noFill/>
+        </p:spPr>
+        <p:txBody>
+          <a:bodyPr wrap="square">
+            <a:spAutoFit/>
+          </a:bodyPr>
+          <a:lstStyle/>
+          <a:p>
+            <a:pPr>
+              <a:lnSpc>
+                <a:spcPct val="112000"/>
+              </a:lnSpc>
+              <a:spcAft>
+                <a:spcPts val="900"/>
+              </a:spcAft>
+            </a:pPr>
+            <a:r>
+              <a:rPr sz="1800" b="1">
+                <a:solidFill>
+                  <a:srgbClr val="E0A437"/>
+                </a:solidFill>
+                <a:latin typeface="Fira Sans"/>
+              </a:rPr>
+              <a:t>▸ </a:t>
+            </a:r>
             <a:r>
               <a:rPr sz="1800" b="0">
                 <a:solidFill>
+                  <a:srgbClr val="000000"/>
+                </a:solidFill>
+                <a:latin typeface="Fira Sans"/>
+              </a:rPr>
+              <a:t>Personas con viajes, merge inner: 113.591 filas (una por viaje).</a:t>
+            </a:r>
+          </a:p>
+          <a:p>
+            <a:pPr>
+              <a:lnSpc>
+                <a:spcPct val="112000"/>
+              </a:lnSpc>
+              <a:spcAft>
+                <a:spcPts val="900"/>
+              </a:spcAft>
+            </a:pPr>
+            <a:r>
+              <a:rPr sz="1800" b="1">
+                <a:solidFill>
                   <a:srgbClr val="E0A437"/>
                 </a:solidFill>
                 <a:latin typeface="Fira Sans"/>
               </a:rPr>
-              <a:t>EDA sobre la EOD: estadística descriptiva ponderada</a:t>
+              <a:t>▸ </a:t>
+            </a:r>
+            <a:r>
+              <a:rPr sz="1800" b="0">
+                <a:solidFill>
+                  <a:srgbClr val="000000"/>
+                </a:solidFill>
+                <a:latin typeface="Fira Sans"/>
+              </a:rPr>
+              <a:t>El mismo merge en left: 127.379 filas.</a:t>
+            </a:r>
+          </a:p>
+          <a:p>
+            <a:pPr>
+              <a:lnSpc>
+                <a:spcPct val="112000"/>
+              </a:lnSpc>
+              <a:spcAft>
+                <a:spcPts val="500"/>
+              </a:spcAft>
+            </a:pPr>
+            <a:r>
+              <a:rPr sz="1400" b="0">
+                <a:solidFill>
+                  <a:srgbClr val="333333"/>
+                </a:solidFill>
+                <a:latin typeface="Fira Sans"/>
+              </a:rPr>
+              <a:t>     ◦  </a:t>
+            </a:r>
+            <a:r>
+              <a:rPr sz="1400" b="0">
+                <a:solidFill>
+                  <a:srgbClr val="333333"/>
+                </a:solidFill>
+                <a:latin typeface="Fira Sans"/>
+              </a:rPr>
+              <a:t>La diferencia son 13.788 personas que no viajaron ese día.</a:t>
+            </a:r>
+          </a:p>
+          <a:p>
+            <a:pPr>
+              <a:lnSpc>
+                <a:spcPct val="112000"/>
+              </a:lnSpc>
+              <a:spcAft>
+                <a:spcPts val="500"/>
+              </a:spcAft>
+            </a:pPr>
+            <a:r>
+              <a:rPr sz="1400" b="0">
+                <a:solidFill>
+                  <a:srgbClr val="333333"/>
+                </a:solidFill>
+                <a:latin typeface="Fira Sans"/>
+              </a:rPr>
+              <a:t>     ◦  </a:t>
+            </a:r>
+            <a:r>
+              <a:rPr sz="1400" b="0">
+                <a:solidFill>
+                  <a:srgbClr val="333333"/>
+                </a:solidFill>
+                <a:latin typeface="Fira Sans"/>
+              </a:rPr>
+              <a:t>Con inner desaparecen; con left quedan, con NaN en el viaje.</a:t>
+            </a:r>
+          </a:p>
+          <a:p>
+            <a:pPr>
+              <a:lnSpc>
+                <a:spcPct val="112000"/>
+              </a:lnSpc>
+              <a:spcAft>
+                <a:spcPts val="900"/>
+              </a:spcAft>
+            </a:pPr>
+            <a:r>
+              <a:rPr sz="1800" b="1">
+                <a:solidFill>
+                  <a:srgbClr val="E0A437"/>
+                </a:solidFill>
+                <a:latin typeface="Fira Sans"/>
+              </a:rPr>
+              <a:t>▸ </a:t>
+            </a:r>
+            <a:r>
+              <a:rPr sz="1800" b="1">
+                <a:solidFill>
+                  <a:srgbClr val="1D3557"/>
+                </a:solidFill>
+                <a:latin typeface="Fira Sans"/>
+              </a:rPr>
+              <a:t>Un promedio calculado sobre el resultado del inner excluye a quienes no viajaron.</a:t>
             </a:r>
           </a:p>
         </p:txBody>
@@ -6767,7 +6948,7 @@
             <a:avLst/>
           </a:prstGeom>
           <a:solidFill>
-            <a:srgbClr val="FAFBFC"/>
+            <a:srgbClr val="1D3557"/>
           </a:solidFill>
           <a:ln>
             <a:noFill/>
@@ -6804,8 +6985,8 @@
         </p:nvSpPr>
         <p:spPr>
           <a:xfrm>
-            <a:off x="402336" y="301752"/>
-            <a:ext cx="8348472" cy="795528"/>
+            <a:off x="603504" y="1847088"/>
+            <a:ext cx="7946136" cy="1399032"/>
           </a:xfrm>
           <a:prstGeom prst="rect">
             <a:avLst/>
@@ -6819,71 +7000,24 @@
           <a:lstStyle/>
           <a:p>
             <a:r>
-              <a:rPr sz="2800" b="1">
-                <a:solidFill>
-                  <a:srgbClr val="0F0F0F"/>
-                </a:solidFill>
-                <a:latin typeface="Fira Sans"/>
-              </a:rPr>
-              <a:t>Los factores de expansión: de la muestra a la ciudad</a:t>
-            </a:r>
-          </a:p>
-        </p:txBody>
-      </p:sp>
-      <p:pic>
-        <p:nvPicPr>
-          <p:cNvPr id="4" name="Picture 3" descr="06_diagrama_factores.png"/>
-          <p:cNvPicPr>
-            <a:picLocks noChangeAspect="1"/>
-          </p:cNvPicPr>
-          <p:nvPr/>
-        </p:nvPicPr>
-        <p:blipFill>
-          <a:blip r:embed="rId2"/>
-          <a:stretch>
-            <a:fillRect/>
-          </a:stretch>
-        </p:blipFill>
-        <p:spPr>
-          <a:xfrm>
-            <a:off x="1417319" y="1143000"/>
-            <a:ext cx="6309360" cy="2871234"/>
-          </a:xfrm>
-          <a:prstGeom prst="rect">
-            <a:avLst/>
-          </a:prstGeom>
-        </p:spPr>
-      </p:pic>
-      <p:sp>
-        <p:nvSpPr>
-          <p:cNvPr id="5" name="TextBox 4"/>
-          <p:cNvSpPr txBox="1"/>
-          <p:nvPr/>
-        </p:nvSpPr>
-        <p:spPr>
-          <a:xfrm>
-            <a:off x="704088" y="4434840"/>
-            <a:ext cx="7744968" cy="457200"/>
-          </a:xfrm>
-          <a:prstGeom prst="rect">
-            <a:avLst/>
-          </a:prstGeom>
-          <a:noFill/>
-        </p:spPr>
-        <p:txBody>
-          <a:bodyPr wrap="square">
-            <a:spAutoFit/>
-          </a:bodyPr>
-          <a:lstStyle/>
-          <a:p>
-            <a:r>
-              <a:rPr sz="1300" b="0">
-                <a:solidFill>
-                  <a:srgbClr val="333333"/>
-                </a:solidFill>
-                <a:latin typeface="Fira Sans"/>
-              </a:rPr>
-              <a:t>Contar filas responde por la muestra; sumar factores responde por la ciudad.</a:t>
+              <a:rPr sz="3400" b="1">
+                <a:solidFill>
+                  <a:srgbClr val="FFFFFF"/>
+                </a:solidFill>
+                <a:latin typeface="Fira Sans"/>
+              </a:rPr>
+              <a:t>Exploración de la EOD</a:t>
+            </a:r>
+          </a:p>
+          <a:p>
+            <a:r>
+              <a:rPr sz="1800" b="0">
+                <a:solidFill>
+                  <a:srgbClr val="E0A437"/>
+                </a:solidFill>
+                <a:latin typeface="Fira Sans"/>
+              </a:rPr>
+              <a:t>EDA sobre la EOD: estadística descriptiva ponderada</a:t>
             </a:r>
           </a:p>
         </p:txBody>
@@ -6979,149 +7113,14 @@
                 </a:solidFill>
                 <a:latin typeface="Fira Sans"/>
               </a:rPr>
-              <a:t>Viajes por persona: los ausentes también cuentan</a:t>
-            </a:r>
-          </a:p>
-        </p:txBody>
-      </p:sp>
-      <p:sp>
-        <p:nvSpPr>
-          <p:cNvPr id="4" name="TextBox 3"/>
-          <p:cNvSpPr txBox="1"/>
-          <p:nvPr/>
-        </p:nvSpPr>
-        <p:spPr>
-          <a:xfrm>
-            <a:off x="502920" y="1252728"/>
-            <a:ext cx="4023360" cy="3200400"/>
-          </a:xfrm>
-          <a:prstGeom prst="rect">
-            <a:avLst/>
-          </a:prstGeom>
-          <a:noFill/>
-        </p:spPr>
-        <p:txBody>
-          <a:bodyPr wrap="square">
-            <a:spAutoFit/>
-          </a:bodyPr>
-          <a:lstStyle/>
-          <a:p>
-            <a:pPr>
-              <a:lnSpc>
-                <a:spcPct val="112000"/>
-              </a:lnSpc>
-              <a:spcAft>
-                <a:spcPts val="900"/>
-              </a:spcAft>
-            </a:pPr>
-            <a:r>
-              <a:rPr sz="1500" b="1">
-                <a:solidFill>
-                  <a:srgbClr val="E0A437"/>
-                </a:solidFill>
-                <a:latin typeface="Fira Sans"/>
-              </a:rPr>
-              <a:t>▸ </a:t>
-            </a:r>
-            <a:r>
-              <a:rPr sz="1500" b="0">
-                <a:solidFill>
-                  <a:srgbClr val="000000"/>
-                </a:solidFill>
-                <a:latin typeface="Fira Sans"/>
-              </a:rPr>
-              <a:t>El 23% de las personas no viajó ese día.</a:t>
-            </a:r>
-          </a:p>
-          <a:p>
-            <a:pPr>
-              <a:lnSpc>
-                <a:spcPct val="112000"/>
-              </a:lnSpc>
-              <a:spcAft>
-                <a:spcPts val="900"/>
-              </a:spcAft>
-            </a:pPr>
-            <a:r>
-              <a:rPr sz="1500" b="1">
-                <a:solidFill>
-                  <a:srgbClr val="E0A437"/>
-                </a:solidFill>
-                <a:latin typeface="Fira Sans"/>
-              </a:rPr>
-              <a:t>▸ </a:t>
-            </a:r>
-            <a:r>
-              <a:rPr sz="1500" b="0">
-                <a:solidFill>
-                  <a:srgbClr val="000000"/>
-                </a:solidFill>
-                <a:latin typeface="Fira Sans"/>
-              </a:rPr>
-              <a:t>Media: 1,9 viajes. Mediana: 2 viajes.</a:t>
-            </a:r>
-          </a:p>
-          <a:p>
-            <a:pPr>
-              <a:lnSpc>
-                <a:spcPct val="112000"/>
-              </a:lnSpc>
-              <a:spcAft>
-                <a:spcPts val="900"/>
-              </a:spcAft>
-            </a:pPr>
-            <a:r>
-              <a:rPr sz="1500" b="1">
-                <a:solidFill>
-                  <a:srgbClr val="E0A437"/>
-                </a:solidFill>
-                <a:latin typeface="Fira Sans"/>
-              </a:rPr>
-              <a:t>▸ </a:t>
-            </a:r>
-            <a:r>
-              <a:rPr sz="1500" b="0">
-                <a:solidFill>
-                  <a:srgbClr val="000000"/>
-                </a:solidFill>
-                <a:latin typeface="Fira Sans"/>
-              </a:rPr>
-              <a:t>La media quedó bajo la mediana: la masa de ceros la desplaza.</a:t>
-            </a:r>
-          </a:p>
-          <a:p>
-            <a:pPr>
-              <a:lnSpc>
-                <a:spcPct val="112000"/>
-              </a:lnSpc>
-              <a:spcAft>
-                <a:spcPts val="900"/>
-              </a:spcAft>
-            </a:pPr>
-            <a:r>
-              <a:rPr sz="1500" b="1">
-                <a:solidFill>
-                  <a:srgbClr val="E0A437"/>
-                </a:solidFill>
-                <a:latin typeface="Fira Sans"/>
-              </a:rPr>
-              <a:t>▸ </a:t>
-            </a:r>
-            <a:r>
-              <a:rPr sz="1500" b="1">
-                <a:solidFill>
-                  <a:srgbClr val="1D3557"/>
-                </a:solidFill>
-                <a:latin typeface="Fira Sans"/>
-              </a:rPr>
-              <a:t>La dirección del sesgo depende de la forma de la distribución.</a:t>
+              <a:t>Los factores de expansión: de la muestra a la ciudad</a:t>
             </a:r>
           </a:p>
         </p:txBody>
       </p:sp>
       <p:pic>
         <p:nvPicPr>
-          <p:cNvPr id="5" name="Picture 4" descr="02_viajes_por_persona.png"/>
+          <p:cNvPr id="4" name="Picture 3" descr="06_diagrama_factores.png"/>
           <p:cNvPicPr>
             <a:picLocks noChangeAspect="1"/>
           </p:cNvPicPr>
@@ -7135,14 +7134,48 @@
         </p:blipFill>
         <p:spPr>
           <a:xfrm>
-            <a:off x="4892040" y="1371600"/>
-            <a:ext cx="3840480" cy="2191739"/>
+            <a:off x="1417319" y="1143000"/>
+            <a:ext cx="6309360" cy="2871234"/>
           </a:xfrm>
           <a:prstGeom prst="rect">
             <a:avLst/>
           </a:prstGeom>
         </p:spPr>
       </p:pic>
+      <p:sp>
+        <p:nvSpPr>
+          <p:cNvPr id="5" name="TextBox 4"/>
+          <p:cNvSpPr txBox="1"/>
+          <p:nvPr/>
+        </p:nvSpPr>
+        <p:spPr>
+          <a:xfrm>
+            <a:off x="704088" y="4434840"/>
+            <a:ext cx="7744968" cy="457200"/>
+          </a:xfrm>
+          <a:prstGeom prst="rect">
+            <a:avLst/>
+          </a:prstGeom>
+          <a:noFill/>
+        </p:spPr>
+        <p:txBody>
+          <a:bodyPr wrap="square">
+            <a:spAutoFit/>
+          </a:bodyPr>
+          <a:lstStyle/>
+          <a:p>
+            <a:r>
+              <a:rPr sz="1300" b="0">
+                <a:solidFill>
+                  <a:srgbClr val="333333"/>
+                </a:solidFill>
+                <a:latin typeface="Fira Sans"/>
+              </a:rPr>
+              <a:t>Contar filas responde por la muestra; sumar factores responde por la ciudad.</a:t>
+            </a:r>
+          </a:p>
+        </p:txBody>
+      </p:sp>
     </p:spTree>
   </p:cSld>
   <p:clrMapOvr>
@@ -7234,7 +7267,7 @@
                 </a:solidFill>
                 <a:latin typeface="Fira Sans"/>
               </a:rPr>
-              <a:t>El ingreso de los hogares: media y mediana</a:t>
+              <a:t>Viajes por persona: los ausentes también cuentan</a:t>
             </a:r>
           </a:p>
         </p:txBody>
@@ -7285,7 +7318,7 @@
                 </a:solidFill>
                 <a:latin typeface="Fira Sans"/>
               </a:rPr>
-              <a:t>Media: $688.274. Mediana: $507.826.</a:t>
+              <a:t>El 23% de las personas no viajó ese día.</a:t>
             </a:r>
           </a:p>
           <a:p>
@@ -7313,7 +7346,7 @@
                 </a:solidFill>
                 <a:latin typeface="Fira Sans"/>
               </a:rPr>
-              <a:t>La media es un 36% más alta que la mediana.</a:t>
+              <a:t>Media: 1,9 viajes. Mediana: 2 viajes.</a:t>
             </a:r>
           </a:p>
           <a:p>
@@ -7341,7 +7374,7 @@
                 </a:solidFill>
                 <a:latin typeface="Fira Sans"/>
               </a:rPr>
-              <a:t>Los ingresos altos desplazan el promedio; la mayoría gana menos.</a:t>
+              <a:t>La media quedó bajo la mediana: la masa de ceros la desplaza.</a:t>
             </a:r>
           </a:p>
           <a:p>
@@ -7369,14 +7402,14 @@
                 </a:solidFill>
                 <a:latin typeface="Fira Sans"/>
               </a:rPr>
-              <a:t>El promedio describe una situación en la que la mayoría no está.</a:t>
+              <a:t>La dirección del sesgo depende de la forma de la distribución.</a:t>
             </a:r>
           </a:p>
         </p:txBody>
       </p:sp>
       <p:pic>
         <p:nvPicPr>
-          <p:cNvPr id="5" name="Picture 4" descr="01_ingreso_media_mediana.png"/>
+          <p:cNvPr id="5" name="Picture 4" descr="02_viajes_por_persona.png"/>
           <p:cNvPicPr>
             <a:picLocks noChangeAspect="1"/>
           </p:cNvPicPr>
@@ -7391,7 +7424,7 @@
         <p:spPr>
           <a:xfrm>
             <a:off x="4892040" y="1371600"/>
-            <a:ext cx="3840480" cy="2182719"/>
+            <a:ext cx="3840480" cy="2199656"/>
           </a:xfrm>
           <a:prstGeom prst="rect">
             <a:avLst/>
@@ -7489,7 +7522,7 @@
                 </a:solidFill>
                 <a:latin typeface="Fira Sans"/>
               </a:rPr>
-              <a:t>La duración de los viajes: valores extremos</a:t>
+              <a:t>El ingreso de los hogares: media y mediana</a:t>
             </a:r>
           </a:p>
         </p:txBody>
@@ -7540,7 +7573,7 @@
                 </a:solidFill>
                 <a:latin typeface="Fira Sans"/>
               </a:rPr>
-              <a:t>Mediana: 30 minutos. Percentil 95: 98 minutos.</a:t>
+              <a:t>Media: $688.274. Mediana: $507.826.</a:t>
             </a:r>
           </a:p>
           <a:p>
@@ -7568,7 +7601,7 @@
                 </a:solidFill>
                 <a:latin typeface="Fira Sans"/>
               </a:rPr>
-              <a:t>Máximo registrado: 1.335 minutos, un viaje de 22 horas.</a:t>
+              <a:t>La media es un 36% más alta que la mediana.</a:t>
             </a:r>
           </a:p>
           <a:p>
@@ -7596,7 +7629,7 @@
                 </a:solidFill>
                 <a:latin typeface="Fira Sans"/>
               </a:rPr>
-              <a:t>¿Error de digitación? ¿Turno nocturno mal anotado?</a:t>
+              <a:t>Los ingresos altos desplazan el promedio; la mayoría gana menos.</a:t>
             </a:r>
           </a:p>
           <a:p>
@@ -7624,14 +7657,14 @@
                 </a:solidFill>
                 <a:latin typeface="Fira Sans"/>
               </a:rPr>
-              <a:t>Los valores extremos se investigan y la decisión se declara.</a:t>
+              <a:t>El promedio describe una situación en la que la mayoría no está.</a:t>
             </a:r>
           </a:p>
         </p:txBody>
       </p:sp>
       <p:pic>
         <p:nvPicPr>
-          <p:cNvPr id="5" name="Picture 4" descr="04_duracion_viajes.png"/>
+          <p:cNvPr id="5" name="Picture 4" descr="01_ingreso_media_mediana.png"/>
           <p:cNvPicPr>
             <a:picLocks noChangeAspect="1"/>
           </p:cNvPicPr>
@@ -7646,7 +7679,7 @@
         <p:spPr>
           <a:xfrm>
             <a:off x="4892040" y="1371600"/>
-            <a:ext cx="3840480" cy="2146492"/>
+            <a:ext cx="3840480" cy="2182719"/>
           </a:xfrm>
           <a:prstGeom prst="rect">
             <a:avLst/>
@@ -7744,7 +7777,7 @@
                 </a:solidFill>
                 <a:latin typeface="Fira Sans"/>
               </a:rPr>
-              <a:t>La partición modal del Gran Santiago</a:t>
+              <a:t>La duración de los viajes: valores extremos</a:t>
             </a:r>
           </a:p>
         </p:txBody>
@@ -7795,91 +7828,7 @@
                 </a:solidFill>
                 <a:latin typeface="Fira Sans"/>
               </a:rPr>
-              <a:t>Dos merges y un groupby ponderado por factor.</a:t>
-            </a:r>
-          </a:p>
-          <a:p>
-            <a:pPr>
-              <a:lnSpc>
-                <a:spcPct val="112000"/>
-              </a:lnSpc>
-              <a:spcAft>
-                <a:spcPts val="500"/>
-              </a:spcAft>
-            </a:pPr>
-            <a:r>
-              <a:rPr sz="1300" b="0">
-                <a:solidFill>
-                  <a:srgbClr val="333333"/>
-                </a:solidFill>
-                <a:latin typeface="Fira Sans"/>
-              </a:rPr>
-              <a:t>     ◦  </a:t>
-            </a:r>
-            <a:r>
-              <a:rPr sz="1300" b="0">
-                <a:solidFill>
-                  <a:srgbClr val="333333"/>
-                </a:solidFill>
-                <a:latin typeface="Fira Sans"/>
-              </a:rPr>
-              <a:t>Caminata: 34% de los viajes.</a:t>
-            </a:r>
-          </a:p>
-          <a:p>
-            <a:pPr>
-              <a:lnSpc>
-                <a:spcPct val="112000"/>
-              </a:lnSpc>
-              <a:spcAft>
-                <a:spcPts val="500"/>
-              </a:spcAft>
-            </a:pPr>
-            <a:r>
-              <a:rPr sz="1300" b="0">
-                <a:solidFill>
-                  <a:srgbClr val="333333"/>
-                </a:solidFill>
-                <a:latin typeface="Fira Sans"/>
-              </a:rPr>
-              <a:t>     ◦  </a:t>
-            </a:r>
-            <a:r>
-              <a:rPr sz="1300" b="0">
-                <a:solidFill>
-                  <a:srgbClr val="333333"/>
-                </a:solidFill>
-                <a:latin typeface="Fira Sans"/>
-              </a:rPr>
-              <a:t>Transporte público (Bip!): 24%.</a:t>
-            </a:r>
-          </a:p>
-          <a:p>
-            <a:pPr>
-              <a:lnSpc>
-                <a:spcPct val="112000"/>
-              </a:lnSpc>
-              <a:spcAft>
-                <a:spcPts val="500"/>
-              </a:spcAft>
-            </a:pPr>
-            <a:r>
-              <a:rPr sz="1300" b="0">
-                <a:solidFill>
-                  <a:srgbClr val="333333"/>
-                </a:solidFill>
-                <a:latin typeface="Fira Sans"/>
-              </a:rPr>
-              <a:t>     ◦  </a:t>
-            </a:r>
-            <a:r>
-              <a:rPr sz="1300" b="0">
-                <a:solidFill>
-                  <a:srgbClr val="333333"/>
-                </a:solidFill>
-                <a:latin typeface="Fira Sans"/>
-              </a:rPr>
-              <a:t>Auto: 23%.</a:t>
+              <a:t>Mediana: 30 minutos. Percentil 95: 98 minutos.</a:t>
             </a:r>
           </a:p>
           <a:p>
@@ -7901,20 +7850,76 @@
               <a:t>▸ </a:t>
             </a:r>
             <a:r>
+              <a:rPr sz="1500" b="0">
+                <a:solidFill>
+                  <a:srgbClr val="000000"/>
+                </a:solidFill>
+                <a:latin typeface="Fira Sans"/>
+              </a:rPr>
+              <a:t>Máximo registrado: 1.335 minutos, un viaje de 22 horas.</a:t>
+            </a:r>
+          </a:p>
+          <a:p>
+            <a:pPr>
+              <a:lnSpc>
+                <a:spcPct val="112000"/>
+              </a:lnSpc>
+              <a:spcAft>
+                <a:spcPts val="900"/>
+              </a:spcAft>
+            </a:pPr>
+            <a:r>
               <a:rPr sz="1500" b="1">
                 <a:solidFill>
+                  <a:srgbClr val="E0A437"/>
+                </a:solidFill>
+                <a:latin typeface="Fira Sans"/>
+              </a:rPr>
+              <a:t>▸ </a:t>
+            </a:r>
+            <a:r>
+              <a:rPr sz="1500" b="0">
+                <a:solidFill>
+                  <a:srgbClr val="000000"/>
+                </a:solidFill>
+                <a:latin typeface="Fira Sans"/>
+              </a:rPr>
+              <a:t>¿Error de digitación? ¿Turno nocturno mal anotado?</a:t>
+            </a:r>
+          </a:p>
+          <a:p>
+            <a:pPr>
+              <a:lnSpc>
+                <a:spcPct val="112000"/>
+              </a:lnSpc>
+              <a:spcAft>
+                <a:spcPts val="900"/>
+              </a:spcAft>
+            </a:pPr>
+            <a:r>
+              <a:rPr sz="1500" b="1">
+                <a:solidFill>
+                  <a:srgbClr val="E0A437"/>
+                </a:solidFill>
+                <a:latin typeface="Fira Sans"/>
+              </a:rPr>
+              <a:t>▸ </a:t>
+            </a:r>
+            <a:r>
+              <a:rPr sz="1500" b="1">
+                <a:solidFill>
                   <a:srgbClr val="1D3557"/>
                 </a:solidFill>
                 <a:latin typeface="Fira Sans"/>
               </a:rPr>
-              <a:t>Calculada desde los microdatos, con los factores de un día laboral.</a:t>
+              <a:t>Los valores extremos se investigan y la decisión se declara.</a:t>
             </a:r>
           </a:p>
         </p:txBody>
       </p:sp>
       <p:pic>
         <p:nvPicPr>
-          <p:cNvPr id="5" name="Picture 4" descr="03_reparto_modal.png"/>
+          <p:cNvPr id="5" name="Picture 4" descr="04_duracion_viajes.png"/>
           <p:cNvPicPr>
             <a:picLocks noChangeAspect="1"/>
           </p:cNvPicPr>
@@ -7929,7 +7934,7 @@
         <p:spPr>
           <a:xfrm>
             <a:off x="4892040" y="1371600"/>
-            <a:ext cx="3840480" cy="1938578"/>
+            <a:ext cx="3840480" cy="2170536"/>
           </a:xfrm>
           <a:prstGeom prst="rect">
             <a:avLst/>
@@ -8134,14 +8139,177 @@
                 </a:solidFill>
                 <a:latin typeface="Fira Sans"/>
               </a:rPr>
-              <a:t>El reparto modal difiere entre comunas</a:t>
+              <a:t>La partición modal del Gran Santiago</a:t>
+            </a:r>
+          </a:p>
+        </p:txBody>
+      </p:sp>
+      <p:sp>
+        <p:nvSpPr>
+          <p:cNvPr id="4" name="TextBox 3"/>
+          <p:cNvSpPr txBox="1"/>
+          <p:nvPr/>
+        </p:nvSpPr>
+        <p:spPr>
+          <a:xfrm>
+            <a:off x="502920" y="1252728"/>
+            <a:ext cx="4023360" cy="3200400"/>
+          </a:xfrm>
+          <a:prstGeom prst="rect">
+            <a:avLst/>
+          </a:prstGeom>
+          <a:noFill/>
+        </p:spPr>
+        <p:txBody>
+          <a:bodyPr wrap="square">
+            <a:spAutoFit/>
+          </a:bodyPr>
+          <a:lstStyle/>
+          <a:p>
+            <a:pPr>
+              <a:lnSpc>
+                <a:spcPct val="112000"/>
+              </a:lnSpc>
+              <a:spcAft>
+                <a:spcPts val="900"/>
+              </a:spcAft>
+            </a:pPr>
+            <a:r>
+              <a:rPr sz="1500" b="1">
+                <a:solidFill>
+                  <a:srgbClr val="E0A437"/>
+                </a:solidFill>
+                <a:latin typeface="Fira Sans"/>
+              </a:rPr>
+              <a:t>▸ </a:t>
+            </a:r>
+            <a:r>
+              <a:rPr sz="1500" b="0">
+                <a:solidFill>
+                  <a:srgbClr val="000000"/>
+                </a:solidFill>
+                <a:latin typeface="Fira Sans"/>
+              </a:rPr>
+              <a:t>Dos merges y un groupby ponderado por factor.</a:t>
+            </a:r>
+          </a:p>
+          <a:p>
+            <a:pPr>
+              <a:lnSpc>
+                <a:spcPct val="112000"/>
+              </a:lnSpc>
+              <a:spcAft>
+                <a:spcPts val="500"/>
+              </a:spcAft>
+            </a:pPr>
+            <a:r>
+              <a:rPr sz="1300" b="0">
+                <a:solidFill>
+                  <a:srgbClr val="333333"/>
+                </a:solidFill>
+                <a:latin typeface="Fira Sans"/>
+              </a:rPr>
+              <a:t>     ◦  </a:t>
+            </a:r>
+            <a:r>
+              <a:rPr sz="1300" b="0">
+                <a:solidFill>
+                  <a:srgbClr val="333333"/>
+                </a:solidFill>
+                <a:latin typeface="Fira Sans"/>
+              </a:rPr>
+              <a:t>Caminata: 34% de los viajes.</a:t>
+            </a:r>
+          </a:p>
+          <a:p>
+            <a:pPr>
+              <a:lnSpc>
+                <a:spcPct val="112000"/>
+              </a:lnSpc>
+              <a:spcAft>
+                <a:spcPts val="500"/>
+              </a:spcAft>
+            </a:pPr>
+            <a:r>
+              <a:rPr sz="1300" b="0">
+                <a:solidFill>
+                  <a:srgbClr val="333333"/>
+                </a:solidFill>
+                <a:latin typeface="Fira Sans"/>
+              </a:rPr>
+              <a:t>     ◦  </a:t>
+            </a:r>
+            <a:r>
+              <a:rPr sz="1300" b="0">
+                <a:solidFill>
+                  <a:srgbClr val="333333"/>
+                </a:solidFill>
+                <a:latin typeface="Fira Sans"/>
+              </a:rPr>
+              <a:t>Transporte público (Bip!): 24%.</a:t>
+            </a:r>
+          </a:p>
+          <a:p>
+            <a:pPr>
+              <a:lnSpc>
+                <a:spcPct val="112000"/>
+              </a:lnSpc>
+              <a:spcAft>
+                <a:spcPts val="500"/>
+              </a:spcAft>
+            </a:pPr>
+            <a:r>
+              <a:rPr sz="1300" b="0">
+                <a:solidFill>
+                  <a:srgbClr val="333333"/>
+                </a:solidFill>
+                <a:latin typeface="Fira Sans"/>
+              </a:rPr>
+              <a:t>     ◦  </a:t>
+            </a:r>
+            <a:r>
+              <a:rPr sz="1300" b="0">
+                <a:solidFill>
+                  <a:srgbClr val="333333"/>
+                </a:solidFill>
+                <a:latin typeface="Fira Sans"/>
+              </a:rPr>
+              <a:t>Auto: 23%.</a:t>
+            </a:r>
+          </a:p>
+          <a:p>
+            <a:pPr>
+              <a:lnSpc>
+                <a:spcPct val="112000"/>
+              </a:lnSpc>
+              <a:spcAft>
+                <a:spcPts val="900"/>
+              </a:spcAft>
+            </a:pPr>
+            <a:r>
+              <a:rPr sz="1500" b="1">
+                <a:solidFill>
+                  <a:srgbClr val="E0A437"/>
+                </a:solidFill>
+                <a:latin typeface="Fira Sans"/>
+              </a:rPr>
+              <a:t>▸ </a:t>
+            </a:r>
+            <a:r>
+              <a:rPr sz="1500" b="1">
+                <a:solidFill>
+                  <a:srgbClr val="1D3557"/>
+                </a:solidFill>
+                <a:latin typeface="Fira Sans"/>
+              </a:rPr>
+              <a:t>Calculada desde los microdatos, con los factores de un día laboral.</a:t>
             </a:r>
           </a:p>
         </p:txBody>
       </p:sp>
       <p:pic>
         <p:nvPicPr>
-          <p:cNvPr id="4" name="Picture 3" descr="08_modo_por_comuna.png"/>
+          <p:cNvPr id="5" name="Picture 4" descr="03_reparto_modal.png"/>
           <p:cNvPicPr>
             <a:picLocks noChangeAspect="1"/>
           </p:cNvPicPr>
@@ -8155,48 +8323,14 @@
         </p:blipFill>
         <p:spPr>
           <a:xfrm>
-            <a:off x="1994250" y="1143000"/>
-            <a:ext cx="5155498" cy="3154679"/>
+            <a:off x="4892040" y="1371600"/>
+            <a:ext cx="3840480" cy="1909061"/>
           </a:xfrm>
           <a:prstGeom prst="rect">
             <a:avLst/>
           </a:prstGeom>
         </p:spPr>
       </p:pic>
-      <p:sp>
-        <p:nvSpPr>
-          <p:cNvPr id="5" name="TextBox 4"/>
-          <p:cNvSpPr txBox="1"/>
-          <p:nvPr/>
-        </p:nvSpPr>
-        <p:spPr>
-          <a:xfrm>
-            <a:off x="704088" y="4434840"/>
-            <a:ext cx="7744968" cy="457200"/>
-          </a:xfrm>
-          <a:prstGeom prst="rect">
-            <a:avLst/>
-          </a:prstGeom>
-          <a:noFill/>
-        </p:spPr>
-        <p:txBody>
-          <a:bodyPr wrap="square">
-            <a:spAutoFit/>
-          </a:bodyPr>
-          <a:lstStyle/>
-          <a:p>
-            <a:r>
-              <a:rPr sz="1300" b="0">
-                <a:solidFill>
-                  <a:srgbClr val="333333"/>
-                </a:solidFill>
-                <a:latin typeface="Fira Sans"/>
-              </a:rPr>
-              <a:t>Normalizar por comuna permite comparar proporciones entre comunas de tamaños muy distintos.</a:t>
-            </a:r>
-          </a:p>
-        </p:txBody>
-      </p:sp>
     </p:spTree>
   </p:cSld>
   <p:clrMapOvr>
@@ -8288,177 +8422,14 @@
                 </a:solidFill>
                 <a:latin typeface="Fira Sans"/>
               </a:rPr>
-              <a:t>Ingreso y uso de transporte público</a:t>
-            </a:r>
-          </a:p>
-        </p:txBody>
-      </p:sp>
-      <p:sp>
-        <p:nvSpPr>
-          <p:cNvPr id="4" name="TextBox 3"/>
-          <p:cNvSpPr txBox="1"/>
-          <p:nvPr/>
-        </p:nvSpPr>
-        <p:spPr>
-          <a:xfrm>
-            <a:off x="502920" y="1252728"/>
-            <a:ext cx="4023360" cy="3200400"/>
-          </a:xfrm>
-          <a:prstGeom prst="rect">
-            <a:avLst/>
-          </a:prstGeom>
-          <a:noFill/>
-        </p:spPr>
-        <p:txBody>
-          <a:bodyPr wrap="square">
-            <a:spAutoFit/>
-          </a:bodyPr>
-          <a:lstStyle/>
-          <a:p>
-            <a:pPr>
-              <a:lnSpc>
-                <a:spcPct val="112000"/>
-              </a:lnSpc>
-              <a:spcAft>
-                <a:spcPts val="900"/>
-              </a:spcAft>
-            </a:pPr>
-            <a:r>
-              <a:rPr sz="1500" b="1">
-                <a:solidFill>
-                  <a:srgbClr val="E0A437"/>
-                </a:solidFill>
-                <a:latin typeface="Fira Sans"/>
-              </a:rPr>
-              <a:t>▸ </a:t>
-            </a:r>
-            <a:r>
-              <a:rPr sz="1500" b="0">
-                <a:solidFill>
-                  <a:srgbClr val="000000"/>
-                </a:solidFill>
-                <a:latin typeface="Fira Sans"/>
-              </a:rPr>
-              <a:t>Cada punto es una comuna: ingreso medio contra proporción de viajes en transporte público.</a:t>
-            </a:r>
-          </a:p>
-          <a:p>
-            <a:pPr>
-              <a:lnSpc>
-                <a:spcPct val="112000"/>
-              </a:lnSpc>
-              <a:spcAft>
-                <a:spcPts val="500"/>
-              </a:spcAft>
-            </a:pPr>
-            <a:r>
-              <a:rPr sz="1300" b="0">
-                <a:solidFill>
-                  <a:srgbClr val="333333"/>
-                </a:solidFill>
-                <a:latin typeface="Fira Sans"/>
-              </a:rPr>
-              <a:t>     ◦  </a:t>
-            </a:r>
-            <a:r>
-              <a:rPr sz="1300" b="0">
-                <a:solidFill>
-                  <a:srgbClr val="333333"/>
-                </a:solidFill>
-                <a:latin typeface="Fira Sans"/>
-              </a:rPr>
-              <a:t>Periferia (Buin, Melipilla): poco transporte público; la red no llega.</a:t>
-            </a:r>
-          </a:p>
-          <a:p>
-            <a:pPr>
-              <a:lnSpc>
-                <a:spcPct val="112000"/>
-              </a:lnSpc>
-              <a:spcAft>
-                <a:spcPts val="500"/>
-              </a:spcAft>
-            </a:pPr>
-            <a:r>
-              <a:rPr sz="1300" b="0">
-                <a:solidFill>
-                  <a:srgbClr val="333333"/>
-                </a:solidFill>
-                <a:latin typeface="Fira Sans"/>
-              </a:rPr>
-              <a:t>     ◦  </a:t>
-            </a:r>
-            <a:r>
-              <a:rPr sz="1300" b="0">
-                <a:solidFill>
-                  <a:srgbClr val="333333"/>
-                </a:solidFill>
-                <a:latin typeface="Fira Sans"/>
-              </a:rPr>
-              <a:t>Ingresos altos (Vitacura, Lo Barnechea): conectadas, con poco uso.</a:t>
-            </a:r>
-          </a:p>
-          <a:p>
-            <a:pPr>
-              <a:lnSpc>
-                <a:spcPct val="112000"/>
-              </a:lnSpc>
-              <a:spcAft>
-                <a:spcPts val="500"/>
-              </a:spcAft>
-            </a:pPr>
-            <a:r>
-              <a:rPr sz="1300" b="0">
-                <a:solidFill>
-                  <a:srgbClr val="333333"/>
-                </a:solidFill>
-                <a:latin typeface="Fira Sans"/>
-              </a:rPr>
-              <a:t>     ◦  </a:t>
-            </a:r>
-            <a:r>
-              <a:rPr sz="1300" b="0">
-                <a:solidFill>
-                  <a:srgbClr val="333333"/>
-                </a:solidFill>
-                <a:latin typeface="Fira Sans"/>
-              </a:rPr>
-              <a:t>Correlación de Pearson: -0,17. La asociación lineal es débil.</a:t>
-            </a:r>
-          </a:p>
-          <a:p>
-            <a:pPr>
-              <a:lnSpc>
-                <a:spcPct val="112000"/>
-              </a:lnSpc>
-              <a:spcAft>
-                <a:spcPts val="900"/>
-              </a:spcAft>
-            </a:pPr>
-            <a:r>
-              <a:rPr sz="1500" b="1">
-                <a:solidFill>
-                  <a:srgbClr val="E0A437"/>
-                </a:solidFill>
-                <a:latin typeface="Fira Sans"/>
-              </a:rPr>
-              <a:t>▸ </a:t>
-            </a:r>
-            <a:r>
-              <a:rPr sz="1500" b="1">
-                <a:solidFill>
-                  <a:srgbClr val="1D3557"/>
-                </a:solidFill>
-                <a:latin typeface="Fira Sans"/>
-              </a:rPr>
-              <a:t>Como vimos en el marco conceptual: el coeficiente no reemplaza al gráfico, y la asociación no autoriza verbos causales.</a:t>
+              <a:t>El reparto modal difiere entre comunas</a:t>
             </a:r>
           </a:p>
         </p:txBody>
       </p:sp>
       <p:pic>
         <p:nvPicPr>
-          <p:cNvPr id="5" name="Picture 4" descr="09_ingreso_vs_tp.png"/>
+          <p:cNvPr id="4" name="Picture 3" descr="08_modo_por_comuna.png"/>
           <p:cNvPicPr>
             <a:picLocks noChangeAspect="1"/>
           </p:cNvPicPr>
@@ -8472,14 +8443,48 @@
         </p:blipFill>
         <p:spPr>
           <a:xfrm>
-            <a:off x="4892040" y="1371600"/>
-            <a:ext cx="3840480" cy="2526979"/>
+            <a:off x="1994250" y="1143000"/>
+            <a:ext cx="5155498" cy="3154679"/>
           </a:xfrm>
           <a:prstGeom prst="rect">
             <a:avLst/>
           </a:prstGeom>
         </p:spPr>
       </p:pic>
+      <p:sp>
+        <p:nvSpPr>
+          <p:cNvPr id="5" name="TextBox 4"/>
+          <p:cNvSpPr txBox="1"/>
+          <p:nvPr/>
+        </p:nvSpPr>
+        <p:spPr>
+          <a:xfrm>
+            <a:off x="704088" y="4434840"/>
+            <a:ext cx="7744968" cy="457200"/>
+          </a:xfrm>
+          <a:prstGeom prst="rect">
+            <a:avLst/>
+          </a:prstGeom>
+          <a:noFill/>
+        </p:spPr>
+        <p:txBody>
+          <a:bodyPr wrap="square">
+            <a:spAutoFit/>
+          </a:bodyPr>
+          <a:lstStyle/>
+          <a:p>
+            <a:r>
+              <a:rPr sz="1300" b="0">
+                <a:solidFill>
+                  <a:srgbClr val="333333"/>
+                </a:solidFill>
+                <a:latin typeface="Fira Sans"/>
+              </a:rPr>
+              <a:t>Normalizar por comuna permite comparar proporciones entre comunas de tamaños muy distintos.</a:t>
+            </a:r>
+          </a:p>
+        </p:txBody>
+      </p:sp>
     </p:spTree>
   </p:cSld>
   <p:clrMapOvr>
@@ -8571,14 +8576,177 @@
                 </a:solidFill>
                 <a:latin typeface="Fira Sans"/>
               </a:rPr>
-              <a:t>Los propósitos de viaje según el día de la semana</a:t>
+              <a:t>Ingreso y uso de transporte público</a:t>
+            </a:r>
+          </a:p>
+        </p:txBody>
+      </p:sp>
+      <p:sp>
+        <p:nvSpPr>
+          <p:cNvPr id="4" name="TextBox 3"/>
+          <p:cNvSpPr txBox="1"/>
+          <p:nvPr/>
+        </p:nvSpPr>
+        <p:spPr>
+          <a:xfrm>
+            <a:off x="502920" y="1252728"/>
+            <a:ext cx="4023360" cy="3200400"/>
+          </a:xfrm>
+          <a:prstGeom prst="rect">
+            <a:avLst/>
+          </a:prstGeom>
+          <a:noFill/>
+        </p:spPr>
+        <p:txBody>
+          <a:bodyPr wrap="square">
+            <a:spAutoFit/>
+          </a:bodyPr>
+          <a:lstStyle/>
+          <a:p>
+            <a:pPr>
+              <a:lnSpc>
+                <a:spcPct val="112000"/>
+              </a:lnSpc>
+              <a:spcAft>
+                <a:spcPts val="900"/>
+              </a:spcAft>
+            </a:pPr>
+            <a:r>
+              <a:rPr sz="1500" b="1">
+                <a:solidFill>
+                  <a:srgbClr val="E0A437"/>
+                </a:solidFill>
+                <a:latin typeface="Fira Sans"/>
+              </a:rPr>
+              <a:t>▸ </a:t>
+            </a:r>
+            <a:r>
+              <a:rPr sz="1500" b="0">
+                <a:solidFill>
+                  <a:srgbClr val="000000"/>
+                </a:solidFill>
+                <a:latin typeface="Fira Sans"/>
+              </a:rPr>
+              <a:t>Cada punto es una comuna: ingreso medio contra proporción de viajes en transporte público.</a:t>
+            </a:r>
+          </a:p>
+          <a:p>
+            <a:pPr>
+              <a:lnSpc>
+                <a:spcPct val="112000"/>
+              </a:lnSpc>
+              <a:spcAft>
+                <a:spcPts val="500"/>
+              </a:spcAft>
+            </a:pPr>
+            <a:r>
+              <a:rPr sz="1300" b="0">
+                <a:solidFill>
+                  <a:srgbClr val="333333"/>
+                </a:solidFill>
+                <a:latin typeface="Fira Sans"/>
+              </a:rPr>
+              <a:t>     ◦  </a:t>
+            </a:r>
+            <a:r>
+              <a:rPr sz="1300" b="0">
+                <a:solidFill>
+                  <a:srgbClr val="333333"/>
+                </a:solidFill>
+                <a:latin typeface="Fira Sans"/>
+              </a:rPr>
+              <a:t>Periferia (Buin, Melipilla): poco transporte público; la red no llega.</a:t>
+            </a:r>
+          </a:p>
+          <a:p>
+            <a:pPr>
+              <a:lnSpc>
+                <a:spcPct val="112000"/>
+              </a:lnSpc>
+              <a:spcAft>
+                <a:spcPts val="500"/>
+              </a:spcAft>
+            </a:pPr>
+            <a:r>
+              <a:rPr sz="1300" b="0">
+                <a:solidFill>
+                  <a:srgbClr val="333333"/>
+                </a:solidFill>
+                <a:latin typeface="Fira Sans"/>
+              </a:rPr>
+              <a:t>     ◦  </a:t>
+            </a:r>
+            <a:r>
+              <a:rPr sz="1300" b="0">
+                <a:solidFill>
+                  <a:srgbClr val="333333"/>
+                </a:solidFill>
+                <a:latin typeface="Fira Sans"/>
+              </a:rPr>
+              <a:t>Ingresos altos (Vitacura, Lo Barnechea): conectadas, con poco uso.</a:t>
+            </a:r>
+          </a:p>
+          <a:p>
+            <a:pPr>
+              <a:lnSpc>
+                <a:spcPct val="112000"/>
+              </a:lnSpc>
+              <a:spcAft>
+                <a:spcPts val="500"/>
+              </a:spcAft>
+            </a:pPr>
+            <a:r>
+              <a:rPr sz="1300" b="0">
+                <a:solidFill>
+                  <a:srgbClr val="333333"/>
+                </a:solidFill>
+                <a:latin typeface="Fira Sans"/>
+              </a:rPr>
+              <a:t>     ◦  </a:t>
+            </a:r>
+            <a:r>
+              <a:rPr sz="1300" b="0">
+                <a:solidFill>
+                  <a:srgbClr val="333333"/>
+                </a:solidFill>
+                <a:latin typeface="Fira Sans"/>
+              </a:rPr>
+              <a:t>Correlación de Pearson: -0,17. La asociación lineal es débil.</a:t>
+            </a:r>
+          </a:p>
+          <a:p>
+            <a:pPr>
+              <a:lnSpc>
+                <a:spcPct val="112000"/>
+              </a:lnSpc>
+              <a:spcAft>
+                <a:spcPts val="900"/>
+              </a:spcAft>
+            </a:pPr>
+            <a:r>
+              <a:rPr sz="1500" b="1">
+                <a:solidFill>
+                  <a:srgbClr val="E0A437"/>
+                </a:solidFill>
+                <a:latin typeface="Fira Sans"/>
+              </a:rPr>
+              <a:t>▸ </a:t>
+            </a:r>
+            <a:r>
+              <a:rPr sz="1500" b="1">
+                <a:solidFill>
+                  <a:srgbClr val="1D3557"/>
+                </a:solidFill>
+                <a:latin typeface="Fira Sans"/>
+              </a:rPr>
+              <a:t>Como vimos en el marco conceptual: el coeficiente no reemplaza al gráfico, y la asociación no autoriza verbos causales.</a:t>
             </a:r>
           </a:p>
         </p:txBody>
       </p:sp>
       <p:pic>
         <p:nvPicPr>
-          <p:cNvPr id="4" name="Picture 3" descr="10_heatmap_rutinas.png"/>
+          <p:cNvPr id="5" name="Picture 4" descr="09_ingreso_vs_tp.png"/>
           <p:cNvPicPr>
             <a:picLocks noChangeAspect="1"/>
           </p:cNvPicPr>
@@ -8592,48 +8760,14 @@
         </p:blipFill>
         <p:spPr>
           <a:xfrm>
-            <a:off x="1563778" y="1143000"/>
-            <a:ext cx="6016443" cy="3154680"/>
+            <a:off x="4892040" y="1371600"/>
+            <a:ext cx="3840480" cy="2526979"/>
           </a:xfrm>
           <a:prstGeom prst="rect">
             <a:avLst/>
           </a:prstGeom>
         </p:spPr>
       </p:pic>
-      <p:sp>
-        <p:nvSpPr>
-          <p:cNvPr id="5" name="TextBox 4"/>
-          <p:cNvSpPr txBox="1"/>
-          <p:nvPr/>
-        </p:nvSpPr>
-        <p:spPr>
-          <a:xfrm>
-            <a:off x="704088" y="4434840"/>
-            <a:ext cx="7744968" cy="457200"/>
-          </a:xfrm>
-          <a:prstGeom prst="rect">
-            <a:avLst/>
-          </a:prstGeom>
-          <a:noFill/>
-        </p:spPr>
-        <p:txBody>
-          <a:bodyPr wrap="square">
-            <a:spAutoFit/>
-          </a:bodyPr>
-          <a:lstStyle/>
-          <a:p>
-            <a:r>
-              <a:rPr sz="1300" b="0">
-                <a:solidFill>
-                  <a:srgbClr val="333333"/>
-                </a:solidFill>
-                <a:latin typeface="Fira Sans"/>
-              </a:rPr>
-              <a:t>El heatmap muestra 14 propósitos por 7 días en una sola figura: útil para tablas completas.</a:t>
-            </a:r>
-          </a:p>
-        </p:txBody>
-      </p:sp>
     </p:spTree>
   </p:cSld>
   <p:clrMapOvr>
@@ -8725,14 +8859,14 @@
                 </a:solidFill>
                 <a:latin typeface="Fira Sans"/>
               </a:rPr>
-              <a:t>Cuando los datos crecen</a:t>
+              <a:t>Los propósitos de viaje según el día de la semana</a:t>
             </a:r>
           </a:p>
         </p:txBody>
       </p:sp>
       <p:pic>
         <p:nvPicPr>
-          <p:cNvPr id="4" name="Picture 3" descr="14_escala_datos.png"/>
+          <p:cNvPr id="4" name="Picture 3" descr="10_heatmap_rutinas.png"/>
           <p:cNvPicPr>
             <a:picLocks noChangeAspect="1"/>
           </p:cNvPicPr>
@@ -8746,8 +8880,8 @@
         </p:blipFill>
         <p:spPr>
           <a:xfrm>
-            <a:off x="1417319" y="1143000"/>
-            <a:ext cx="6309360" cy="2324913"/>
+            <a:off x="1649319" y="1143000"/>
+            <a:ext cx="5845360" cy="3154680"/>
           </a:xfrm>
           <a:prstGeom prst="rect">
             <a:avLst/>
@@ -8783,7 +8917,7 @@
                 </a:solidFill>
                 <a:latin typeface="Fira Sans"/>
               </a:rPr>
-              <a:t>PySpark se usa con SQL o con sus propios DataFrames; Dask reparte operaciones estilo Pandas; Polars y DuckDB rinden en una sola máquina.</a:t>
+              <a:t>El heatmap muestra 14 propósitos por 7 días en una sola figura: útil para tablas completas.</a:t>
             </a:r>
           </a:p>
         </p:txBody>
@@ -8879,21 +9013,45 @@
                 </a:solidFill>
                 <a:latin typeface="Fira Sans"/>
               </a:rPr>
-              <a:t>Síntesis</a:t>
-            </a:r>
-          </a:p>
-        </p:txBody>
-      </p:sp>
-      <p:sp>
-        <p:nvSpPr>
-          <p:cNvPr id="4" name="TextBox 3"/>
+              <a:t>Cuando los datos crecen</a:t>
+            </a:r>
+          </a:p>
+        </p:txBody>
+      </p:sp>
+      <p:pic>
+        <p:nvPicPr>
+          <p:cNvPr id="4" name="Picture 3" descr="14_escala_datos.png"/>
+          <p:cNvPicPr>
+            <a:picLocks noChangeAspect="1"/>
+          </p:cNvPicPr>
+          <p:nvPr/>
+        </p:nvPicPr>
+        <p:blipFill>
+          <a:blip r:embed="rId2"/>
+          <a:stretch>
+            <a:fillRect/>
+          </a:stretch>
+        </p:blipFill>
+        <p:spPr>
+          <a:xfrm>
+            <a:off x="1417319" y="1143000"/>
+            <a:ext cx="6309360" cy="2324913"/>
+          </a:xfrm>
+          <a:prstGeom prst="rect">
+            <a:avLst/>
+          </a:prstGeom>
+        </p:spPr>
+      </p:pic>
+      <p:sp>
+        <p:nvSpPr>
+          <p:cNvPr id="5" name="TextBox 4"/>
           <p:cNvSpPr txBox="1"/>
           <p:nvPr/>
         </p:nvSpPr>
         <p:spPr>
           <a:xfrm>
-            <a:off x="704088" y="1353312"/>
-            <a:ext cx="7744968" cy="3300984"/>
+            <a:off x="704088" y="4434840"/>
+            <a:ext cx="7744968" cy="457200"/>
           </a:xfrm>
           <a:prstGeom prst="rect">
             <a:avLst/>
@@ -8906,143 +9064,14 @@
           </a:bodyPr>
           <a:lstStyle/>
           <a:p>
-            <a:pPr>
-              <a:lnSpc>
-                <a:spcPct val="112000"/>
-              </a:lnSpc>
-              <a:spcAft>
-                <a:spcPts val="900"/>
-              </a:spcAft>
-            </a:pPr>
-            <a:r>
-              <a:rPr sz="1800" b="1">
-                <a:solidFill>
-                  <a:srgbClr val="E0A437"/>
-                </a:solidFill>
-                <a:latin typeface="Fira Sans"/>
-              </a:rPr>
-              <a:t>▸ </a:t>
-            </a:r>
-            <a:r>
-              <a:rPr sz="1800" b="0">
-                <a:solidFill>
-                  <a:srgbClr val="000000"/>
-                </a:solidFill>
-                <a:latin typeface="Fira Sans"/>
-              </a:rPr>
-              <a:t>Un modelo es una simplificación con decisiones incorporadas; estimarlo puede buscar inferencia o predicción.</a:t>
-            </a:r>
-          </a:p>
-          <a:p>
-            <a:pPr>
-              <a:lnSpc>
-                <a:spcPct val="112000"/>
-              </a:lnSpc>
-              <a:spcAft>
-                <a:spcPts val="900"/>
-              </a:spcAft>
-            </a:pPr>
-            <a:r>
-              <a:rPr sz="1800" b="1">
-                <a:solidFill>
-                  <a:srgbClr val="E0A437"/>
-                </a:solidFill>
-                <a:latin typeface="Fira Sans"/>
-              </a:rPr>
-              <a:t>▸ </a:t>
-            </a:r>
-            <a:r>
-              <a:rPr sz="1800" b="0">
-                <a:solidFill>
-                  <a:srgbClr val="000000"/>
-                </a:solidFill>
-                <a:latin typeface="Fira Sans"/>
-              </a:rPr>
-              <a:t>Las asociaciones se reportan como asociaciones: la causalidad exige más que datos observacionales.</a:t>
-            </a:r>
-          </a:p>
-          <a:p>
-            <a:pPr>
-              <a:lnSpc>
-                <a:spcPct val="112000"/>
-              </a:lnSpc>
-              <a:spcAft>
-                <a:spcPts val="900"/>
-              </a:spcAft>
-            </a:pPr>
-            <a:r>
-              <a:rPr sz="1800" b="1">
-                <a:solidFill>
-                  <a:srgbClr val="E0A437"/>
-                </a:solidFill>
-                <a:latin typeface="Fira Sans"/>
-              </a:rPr>
-              <a:t>▸ </a:t>
-            </a:r>
-            <a:r>
-              <a:rPr sz="1800" b="0">
-                <a:solidFill>
-                  <a:srgbClr val="000000"/>
-                </a:solidFill>
-                <a:latin typeface="Fira Sans"/>
-              </a:rPr>
-              <a:t>El tipo de la variable, no su dtype, determina qué resúmenes tienen sentido.</a:t>
-            </a:r>
-          </a:p>
-          <a:p>
-            <a:pPr>
-              <a:lnSpc>
-                <a:spcPct val="112000"/>
-              </a:lnSpc>
-              <a:spcAft>
-                <a:spcPts val="900"/>
-              </a:spcAft>
-            </a:pPr>
-            <a:r>
-              <a:rPr sz="1800" b="1">
-                <a:solidFill>
-                  <a:srgbClr val="E0A437"/>
-                </a:solidFill>
-                <a:latin typeface="Fira Sans"/>
-              </a:rPr>
-              <a:t>▸ </a:t>
-            </a:r>
-            <a:r>
-              <a:rPr sz="1800" b="0">
-                <a:solidFill>
-                  <a:srgbClr val="000000"/>
-                </a:solidFill>
-                <a:latin typeface="Fira Sans"/>
-              </a:rPr>
-              <a:t>Con distribuciones asimétricas, la mediana y los percentiles describen mejor lo típico que la media.</a:t>
-            </a:r>
-          </a:p>
-          <a:p>
-            <a:pPr>
-              <a:lnSpc>
-                <a:spcPct val="112000"/>
-              </a:lnSpc>
-              <a:spcAft>
-                <a:spcPts val="900"/>
-              </a:spcAft>
-            </a:pPr>
-            <a:r>
-              <a:rPr sz="1800" b="1">
-                <a:solidFill>
-                  <a:srgbClr val="E0A437"/>
-                </a:solidFill>
-                <a:latin typeface="Fira Sans"/>
-              </a:rPr>
-              <a:t>▸ </a:t>
-            </a:r>
-            <a:r>
-              <a:rPr sz="1800" b="1">
-                <a:solidFill>
-                  <a:srgbClr val="1D3557"/>
-                </a:solidFill>
-                <a:latin typeface="Fira Sans"/>
-              </a:rPr>
-              <a:t>Ante toda cifra resumen: ¿de quién habla este número? ¿Muestra, subgrupo o ciudad?</a:t>
+            <a:r>
+              <a:rPr sz="1300" b="0">
+                <a:solidFill>
+                  <a:srgbClr val="333333"/>
+                </a:solidFill>
+                <a:latin typeface="Fira Sans"/>
+              </a:rPr>
+              <a:t>PySpark se usa con SQL o con sus propios DataFrames; Dask reparte operaciones estilo Pandas; Polars y DuckDB rinden en una sola máquina.</a:t>
             </a:r>
           </a:p>
         </p:txBody>
@@ -9138,7 +9167,7 @@
                 </a:solidFill>
                 <a:latin typeface="Fira Sans"/>
               </a:rPr>
-              <a:t>Segundo bloque: comienza la Tarea 1</a:t>
+              <a:t>Síntesis</a:t>
             </a:r>
           </a:p>
         </p:txBody>
@@ -9189,91 +9218,7 @@
                 </a:solidFill>
                 <a:latin typeface="Fira Sans"/>
               </a:rPr>
-              <a:t>El retrato de tu comuna: cada pareja adopta una comuna del Gran Santiago.</a:t>
-            </a:r>
-          </a:p>
-          <a:p>
-            <a:pPr>
-              <a:lnSpc>
-                <a:spcPct val="112000"/>
-              </a:lnSpc>
-              <a:spcAft>
-                <a:spcPts val="500"/>
-              </a:spcAft>
-            </a:pPr>
-            <a:r>
-              <a:rPr sz="1400" b="0">
-                <a:solidFill>
-                  <a:srgbClr val="333333"/>
-                </a:solidFill>
-                <a:latin typeface="Fira Sans"/>
-              </a:rPr>
-              <a:t>     ◦  </a:t>
-            </a:r>
-            <a:r>
-              <a:rPr sz="1400" b="0">
-                <a:solidFill>
-                  <a:srgbClr val="333333"/>
-                </a:solidFill>
-                <a:latin typeface="Fira Sans"/>
-              </a:rPr>
-              <a:t>Hoy: elegir la comuna y construir su retrato numérico.</a:t>
-            </a:r>
-          </a:p>
-          <a:p>
-            <a:pPr>
-              <a:lnSpc>
-                <a:spcPct val="112000"/>
-              </a:lnSpc>
-              <a:spcAft>
-                <a:spcPts val="500"/>
-              </a:spcAft>
-            </a:pPr>
-            <a:r>
-              <a:rPr sz="1400" b="0">
-                <a:solidFill>
-                  <a:srgbClr val="333333"/>
-                </a:solidFill>
-                <a:latin typeface="Fira Sans"/>
-              </a:rPr>
-              <a:t>     ◦  </a:t>
-            </a:r>
-            <a:r>
-              <a:rPr sz="1400" b="0">
-                <a:solidFill>
-                  <a:srgbClr val="333333"/>
-                </a:solidFill>
-                <a:latin typeface="Fira Sans"/>
-              </a:rPr>
-              <a:t>Próxima clase: el retrato gráfico, con métodos de visualización.</a:t>
-            </a:r>
-          </a:p>
-          <a:p>
-            <a:pPr>
-              <a:lnSpc>
-                <a:spcPct val="112000"/>
-              </a:lnSpc>
-              <a:spcAft>
-                <a:spcPts val="500"/>
-              </a:spcAft>
-            </a:pPr>
-            <a:r>
-              <a:rPr sz="1400" b="0">
-                <a:solidFill>
-                  <a:srgbClr val="333333"/>
-                </a:solidFill>
-                <a:latin typeface="Fira Sans"/>
-              </a:rPr>
-              <a:t>     ◦  </a:t>
-            </a:r>
-            <a:r>
-              <a:rPr sz="1400" b="0">
-                <a:solidFill>
-                  <a:srgbClr val="333333"/>
-                </a:solidFill>
-                <a:latin typeface="Fira Sans"/>
-              </a:rPr>
-              <a:t>Entrega del retrato completo: jueves 10 de septiembre, por Aula.</a:t>
+              <a:t>Un modelo es una simplificación con decisiones incorporadas; estimarlo puede buscar inferencia o predicción.</a:t>
             </a:r>
           </a:p>
           <a:p>
@@ -9301,7 +9246,7 @@
                 </a:solidFill>
                 <a:latin typeface="Fira Sans"/>
               </a:rPr>
-              <a:t>El enunciado está en evaluaciones/tareas/ y la guía de hoy en actividades/.</a:t>
+              <a:t>Las asociaciones se reportan como asociaciones: la causalidad exige más que datos observacionales.</a:t>
             </a:r>
           </a:p>
           <a:p>
@@ -9323,13 +9268,69 @@
               <a:t>▸ </a:t>
             </a:r>
             <a:r>
+              <a:rPr sz="1800" b="0">
+                <a:solidFill>
+                  <a:srgbClr val="000000"/>
+                </a:solidFill>
+                <a:latin typeface="Fira Sans"/>
+              </a:rPr>
+              <a:t>El tipo de la variable, no su dtype, determina qué resúmenes tienen sentido.</a:t>
+            </a:r>
+          </a:p>
+          <a:p>
+            <a:pPr>
+              <a:lnSpc>
+                <a:spcPct val="112000"/>
+              </a:lnSpc>
+              <a:spcAft>
+                <a:spcPts val="900"/>
+              </a:spcAft>
+            </a:pPr>
+            <a:r>
               <a:rPr sz="1800" b="1">
                 <a:solidFill>
+                  <a:srgbClr val="E0A437"/>
+                </a:solidFill>
+                <a:latin typeface="Fira Sans"/>
+              </a:rPr>
+              <a:t>▸ </a:t>
+            </a:r>
+            <a:r>
+              <a:rPr sz="1800" b="0">
+                <a:solidFill>
+                  <a:srgbClr val="000000"/>
+                </a:solidFill>
+                <a:latin typeface="Fira Sans"/>
+              </a:rPr>
+              <a:t>Con distribuciones asimétricas, la mediana y los percentiles describen mejor lo típico que la media.</a:t>
+            </a:r>
+          </a:p>
+          <a:p>
+            <a:pPr>
+              <a:lnSpc>
+                <a:spcPct val="112000"/>
+              </a:lnSpc>
+              <a:spcAft>
+                <a:spcPts val="900"/>
+              </a:spcAft>
+            </a:pPr>
+            <a:r>
+              <a:rPr sz="1800" b="1">
+                <a:solidFill>
+                  <a:srgbClr val="E0A437"/>
+                </a:solidFill>
+                <a:latin typeface="Fira Sans"/>
+              </a:rPr>
+              <a:t>▸ </a:t>
+            </a:r>
+            <a:r>
+              <a:rPr sz="1800" b="1">
+                <a:solidFill>
                   <a:srgbClr val="1D3557"/>
                 </a:solidFill>
                 <a:latin typeface="Fira Sans"/>
               </a:rPr>
-              <a:t>Lo que avancen en este bloque ya es parte de la tarea.</a:t>
+              <a:t>Ante toda cifra resumen: ¿de quién habla este número? ¿Muestra, subgrupo o ciudad?</a:t>
             </a:r>
           </a:p>
         </p:txBody>
@@ -9425,7 +9426,7 @@
                 </a:solidFill>
                 <a:latin typeface="Fira Sans"/>
               </a:rPr>
-              <a:t>Referencias</a:t>
+              <a:t>Segundo bloque: comienza la Tarea 1</a:t>
             </a:r>
           </a:p>
         </p:txBody>
@@ -9476,7 +9477,91 @@
                 </a:solidFill>
                 <a:latin typeface="Fira Sans"/>
               </a:rPr>
-              <a:t>James, G., Witten, D., Hastie, T. y Tibshirani, R. (2023). An Introduction to Statistical Learning with Applications in Python. Springer. Capítulo 2. Descarga gratuita en statlearning.com.</a:t>
+              <a:t>El retrato de tu comuna: cada pareja adopta una comuna del Gran Santiago.</a:t>
+            </a:r>
+          </a:p>
+          <a:p>
+            <a:pPr>
+              <a:lnSpc>
+                <a:spcPct val="112000"/>
+              </a:lnSpc>
+              <a:spcAft>
+                <a:spcPts val="500"/>
+              </a:spcAft>
+            </a:pPr>
+            <a:r>
+              <a:rPr sz="1400" b="0">
+                <a:solidFill>
+                  <a:srgbClr val="333333"/>
+                </a:solidFill>
+                <a:latin typeface="Fira Sans"/>
+              </a:rPr>
+              <a:t>     ◦  </a:t>
+            </a:r>
+            <a:r>
+              <a:rPr sz="1400" b="0">
+                <a:solidFill>
+                  <a:srgbClr val="333333"/>
+                </a:solidFill>
+                <a:latin typeface="Fira Sans"/>
+              </a:rPr>
+              <a:t>Hoy: elegir la comuna y construir su retrato numérico.</a:t>
+            </a:r>
+          </a:p>
+          <a:p>
+            <a:pPr>
+              <a:lnSpc>
+                <a:spcPct val="112000"/>
+              </a:lnSpc>
+              <a:spcAft>
+                <a:spcPts val="500"/>
+              </a:spcAft>
+            </a:pPr>
+            <a:r>
+              <a:rPr sz="1400" b="0">
+                <a:solidFill>
+                  <a:srgbClr val="333333"/>
+                </a:solidFill>
+                <a:latin typeface="Fira Sans"/>
+              </a:rPr>
+              <a:t>     ◦  </a:t>
+            </a:r>
+            <a:r>
+              <a:rPr sz="1400" b="0">
+                <a:solidFill>
+                  <a:srgbClr val="333333"/>
+                </a:solidFill>
+                <a:latin typeface="Fira Sans"/>
+              </a:rPr>
+              <a:t>Próxima clase: el retrato gráfico, con métodos de visualización.</a:t>
+            </a:r>
+          </a:p>
+          <a:p>
+            <a:pPr>
+              <a:lnSpc>
+                <a:spcPct val="112000"/>
+              </a:lnSpc>
+              <a:spcAft>
+                <a:spcPts val="500"/>
+              </a:spcAft>
+            </a:pPr>
+            <a:r>
+              <a:rPr sz="1400" b="0">
+                <a:solidFill>
+                  <a:srgbClr val="333333"/>
+                </a:solidFill>
+                <a:latin typeface="Fira Sans"/>
+              </a:rPr>
+              <a:t>     ◦  </a:t>
+            </a:r>
+            <a:r>
+              <a:rPr sz="1400" b="0">
+                <a:solidFill>
+                  <a:srgbClr val="333333"/>
+                </a:solidFill>
+                <a:latin typeface="Fira Sans"/>
+              </a:rPr>
+              <a:t>Entrega del retrato completo: jueves 10 de septiembre, por Aula.</a:t>
             </a:r>
           </a:p>
           <a:p>
@@ -9504,7 +9589,7 @@
                 </a:solidFill>
                 <a:latin typeface="Fira Sans"/>
               </a:rPr>
-              <a:t>Bruce, P., Bruce, A. y Gedeck, P. (2020). Practical Statistics for Data Scientists, 2ª ed. O'Reilly. Capítulo 1.</a:t>
+              <a:t>El enunciado está en evaluaciones/tareas/ y la guía de hoy en actividades/.</a:t>
             </a:r>
           </a:p>
           <a:p>
@@ -9526,13 +9611,272 @@
               <a:t>▸ </a:t>
             </a:r>
             <a:r>
+              <a:rPr sz="1800" b="1">
+                <a:solidFill>
+                  <a:srgbClr val="1D3557"/>
+                </a:solidFill>
+                <a:latin typeface="Fira Sans"/>
+              </a:rPr>
+              <a:t>Lo que avancen en este bloque ya es parte de la tarea.</a:t>
+            </a:r>
+          </a:p>
+        </p:txBody>
+      </p:sp>
+    </p:spTree>
+  </p:cSld>
+  <p:clrMapOvr>
+    <a:masterClrMapping/>
+  </p:clrMapOvr>
+</p:sld>
+</file>
+
+<file path=ppt/slides/slide37.xml><?xml version="1.0" encoding="utf-8"?>
+<p:sld xmlns:a="http://schemas.openxmlformats.org/drawingml/2006/main" xmlns:p="http://schemas.openxmlformats.org/presentationml/2006/main" xmlns:r="http://schemas.openxmlformats.org/officeDocument/2006/relationships">
+  <p:cSld>
+    <p:spTree>
+      <p:nvGrpSpPr>
+        <p:cNvPr id="1" name=""/>
+        <p:cNvGrpSpPr/>
+        <p:nvPr/>
+      </p:nvGrpSpPr>
+      <p:grpSpPr/>
+      <p:sp>
+        <p:nvSpPr>
+          <p:cNvPr id="2" name="Rectangle 1"/>
+          <p:cNvSpPr/>
+          <p:nvPr/>
+        </p:nvSpPr>
+        <p:spPr>
+          <a:xfrm>
+            <a:off x="0" y="0"/>
+            <a:ext cx="9144000" cy="5138928"/>
+          </a:xfrm>
+          <a:prstGeom prst="rect">
+            <a:avLst/>
+          </a:prstGeom>
+          <a:solidFill>
+            <a:srgbClr val="FAFBFC"/>
+          </a:solidFill>
+          <a:ln>
+            <a:noFill/>
+          </a:ln>
+          <a:effectLst/>
+        </p:spPr>
+        <p:style>
+          <a:lnRef idx="1">
+            <a:schemeClr val="accent1"/>
+          </a:lnRef>
+          <a:fillRef idx="3">
+            <a:schemeClr val="accent1"/>
+          </a:fillRef>
+          <a:effectRef idx="2">
+            <a:schemeClr val="accent1"/>
+          </a:effectRef>
+          <a:fontRef idx="minor">
+            <a:schemeClr val="lt1"/>
+          </a:fontRef>
+        </p:style>
+        <p:txBody>
+          <a:bodyPr rtlCol="0" anchor="ctr"/>
+          <a:lstStyle/>
+          <a:p>
+            <a:pPr algn="ctr"/>
+          </a:p>
+        </p:txBody>
+      </p:sp>
+      <p:sp>
+        <p:nvSpPr>
+          <p:cNvPr id="3" name="TextBox 2"/>
+          <p:cNvSpPr txBox="1"/>
+          <p:nvPr/>
+        </p:nvSpPr>
+        <p:spPr>
+          <a:xfrm>
+            <a:off x="402336" y="301752"/>
+            <a:ext cx="8348472" cy="795528"/>
+          </a:xfrm>
+          <a:prstGeom prst="rect">
+            <a:avLst/>
+          </a:prstGeom>
+          <a:noFill/>
+        </p:spPr>
+        <p:txBody>
+          <a:bodyPr wrap="square">
+            <a:spAutoFit/>
+          </a:bodyPr>
+          <a:lstStyle/>
+          <a:p>
+            <a:r>
+              <a:rPr sz="2800" b="1">
+                <a:solidFill>
+                  <a:srgbClr val="0F0F0F"/>
+                </a:solidFill>
+                <a:latin typeface="Fira Sans"/>
+              </a:rPr>
+              <a:t>Referencias</a:t>
+            </a:r>
+          </a:p>
+        </p:txBody>
+      </p:sp>
+      <p:sp>
+        <p:nvSpPr>
+          <p:cNvPr id="4" name="TextBox 3"/>
+          <p:cNvSpPr txBox="1"/>
+          <p:nvPr/>
+        </p:nvSpPr>
+        <p:spPr>
+          <a:xfrm>
+            <a:off x="704088" y="1353312"/>
+            <a:ext cx="7744968" cy="3300984"/>
+          </a:xfrm>
+          <a:prstGeom prst="rect">
+            <a:avLst/>
+          </a:prstGeom>
+          <a:noFill/>
+        </p:spPr>
+        <p:txBody>
+          <a:bodyPr wrap="square">
+            <a:spAutoFit/>
+          </a:bodyPr>
+          <a:lstStyle/>
+          <a:p>
+            <a:pPr>
+              <a:lnSpc>
+                <a:spcPct val="112000"/>
+              </a:lnSpc>
+              <a:spcAft>
+                <a:spcPts val="900"/>
+              </a:spcAft>
+            </a:pPr>
+            <a:r>
+              <a:rPr sz="1800" b="1">
+                <a:solidFill>
+                  <a:srgbClr val="E0A437"/>
+                </a:solidFill>
+                <a:latin typeface="Fira Sans"/>
+              </a:rPr>
+              <a:t>▸ </a:t>
+            </a:r>
+            <a:r>
               <a:rPr sz="1800" b="0">
                 <a:solidFill>
                   <a:srgbClr val="000000"/>
                 </a:solidFill>
                 <a:latin typeface="Fira Sans"/>
               </a:rPr>
+              <a:t>James, G., Witten, D., Hastie, T. y Tibshirani, R. (2023). An Introduction to Statistical Learning with Applications in Python. Springer. Capítulo 2. Descarga gratuita en statlearning.com.</a:t>
+            </a:r>
+          </a:p>
+          <a:p>
+            <a:pPr>
+              <a:lnSpc>
+                <a:spcPct val="112000"/>
+              </a:lnSpc>
+              <a:spcAft>
+                <a:spcPts val="900"/>
+              </a:spcAft>
+            </a:pPr>
+            <a:r>
+              <a:rPr sz="1800" b="1">
+                <a:solidFill>
+                  <a:srgbClr val="E0A437"/>
+                </a:solidFill>
+                <a:latin typeface="Fira Sans"/>
+              </a:rPr>
+              <a:t>▸ </a:t>
+            </a:r>
+            <a:r>
+              <a:rPr sz="1800" b="0">
+                <a:solidFill>
+                  <a:srgbClr val="000000"/>
+                </a:solidFill>
+                <a:latin typeface="Fira Sans"/>
+              </a:rPr>
+              <a:t>Bruce, P., Bruce, A. y Gedeck, P. (2020). Practical Statistics for Data Scientists, 2ª ed. O'Reilly. Capítulo 1.</a:t>
+            </a:r>
+          </a:p>
+          <a:p>
+            <a:pPr>
+              <a:lnSpc>
+                <a:spcPct val="112000"/>
+              </a:lnSpc>
+              <a:spcAft>
+                <a:spcPts val="900"/>
+              </a:spcAft>
+            </a:pPr>
+            <a:r>
+              <a:rPr sz="1800" b="1">
+                <a:solidFill>
+                  <a:srgbClr val="E0A437"/>
+                </a:solidFill>
+                <a:latin typeface="Fira Sans"/>
+              </a:rPr>
+              <a:t>▸ </a:t>
+            </a:r>
+            <a:r>
+              <a:rPr sz="1800" b="0">
+                <a:solidFill>
+                  <a:srgbClr val="000000"/>
+                </a:solidFill>
+                <a:latin typeface="Fira Sans"/>
+              </a:rPr>
               <a:t>Tukey, J. W. (1977). Exploratory Data Analysis. Addison-Wesley.</a:t>
+            </a:r>
+          </a:p>
+          <a:p>
+            <a:pPr>
+              <a:lnSpc>
+                <a:spcPct val="112000"/>
+              </a:lnSpc>
+              <a:spcAft>
+                <a:spcPts val="900"/>
+              </a:spcAft>
+            </a:pPr>
+            <a:r>
+              <a:rPr sz="1800" b="1">
+                <a:solidFill>
+                  <a:srgbClr val="E0A437"/>
+                </a:solidFill>
+                <a:latin typeface="Fira Sans"/>
+              </a:rPr>
+              <a:t>▸ </a:t>
+            </a:r>
+            <a:r>
+              <a:rPr sz="1800" b="0">
+                <a:solidFill>
+                  <a:srgbClr val="000000"/>
+                </a:solidFill>
+                <a:latin typeface="Fira Sans"/>
+              </a:rPr>
+              <a:t>Chambers, J. M. y Hastie, T. J. (1992). Statistical Models in S. Wadsworth &amp; Brooks/Cole.</a:t>
+            </a:r>
+          </a:p>
+          <a:p>
+            <a:pPr>
+              <a:lnSpc>
+                <a:spcPct val="112000"/>
+              </a:lnSpc>
+              <a:spcAft>
+                <a:spcPts val="900"/>
+              </a:spcAft>
+            </a:pPr>
+            <a:r>
+              <a:rPr sz="1800" b="1">
+                <a:solidFill>
+                  <a:srgbClr val="E0A437"/>
+                </a:solidFill>
+                <a:latin typeface="Fira Sans"/>
+              </a:rPr>
+              <a:t>▸ </a:t>
+            </a:r>
+            <a:r>
+              <a:rPr sz="1800" b="0">
+                <a:solidFill>
+                  <a:srgbClr val="000000"/>
+                </a:solidFill>
+                <a:latin typeface="Fira Sans"/>
+              </a:rPr>
+              <a:t>McKinney, W. (2010). Data Structures for Statistical Computing in Python. Proceedings of the 9th Python in Science Conference.</a:t>
             </a:r>
           </a:p>
           <a:p>

--- a/presentaciones/clase02_pandas_eda.pptx
+++ b/presentaciones/clase02_pandas_eda.pptx
@@ -5914,21 +5914,45 @@
                 </a:solidFill>
                 <a:latin typeface="Fira Sans"/>
               </a:rPr>
-              <a:t>El DataFrame: origen y propiedades</a:t>
-            </a:r>
-          </a:p>
-        </p:txBody>
-      </p:sp>
-      <p:sp>
-        <p:nvSpPr>
-          <p:cNvPr id="4" name="TextBox 3"/>
+              <a:t>El DataFrame: la estructura central de Pandas</a:t>
+            </a:r>
+          </a:p>
+        </p:txBody>
+      </p:sp>
+      <p:pic>
+        <p:nvPicPr>
+          <p:cNvPr id="4" name="Picture 3" descr="13_dataframe.png"/>
+          <p:cNvPicPr>
+            <a:picLocks noChangeAspect="1"/>
+          </p:cNvPicPr>
+          <p:nvPr/>
+        </p:nvPicPr>
+        <p:blipFill>
+          <a:blip r:embed="rId2"/>
+          <a:stretch>
+            <a:fillRect/>
+          </a:stretch>
+        </p:blipFill>
+        <p:spPr>
+          <a:xfrm>
+            <a:off x="1417319" y="1143000"/>
+            <a:ext cx="6309360" cy="2553789"/>
+          </a:xfrm>
+          <a:prstGeom prst="rect">
+            <a:avLst/>
+          </a:prstGeom>
+        </p:spPr>
+      </p:pic>
+      <p:sp>
+        <p:nvSpPr>
+          <p:cNvPr id="5" name="TextBox 4"/>
           <p:cNvSpPr txBox="1"/>
           <p:nvPr/>
         </p:nvSpPr>
         <p:spPr>
           <a:xfrm>
-            <a:off x="704088" y="1353312"/>
-            <a:ext cx="7744968" cy="3300984"/>
+            <a:off x="704088" y="4434840"/>
+            <a:ext cx="7744968" cy="457200"/>
           </a:xfrm>
           <a:prstGeom prst="rect">
             <a:avLst/>
@@ -5941,171 +5965,14 @@
           </a:bodyPr>
           <a:lstStyle/>
           <a:p>
-            <a:pPr>
-              <a:lnSpc>
-                <a:spcPct val="112000"/>
-              </a:lnSpc>
-              <a:spcAft>
-                <a:spcPts val="900"/>
-              </a:spcAft>
-            </a:pPr>
-            <a:r>
-              <a:rPr sz="1800" b="1">
-                <a:solidFill>
-                  <a:srgbClr val="E0A437"/>
-                </a:solidFill>
-                <a:latin typeface="Fira Sans"/>
-              </a:rPr>
-              <a:t>▸ </a:t>
-            </a:r>
-            <a:r>
-              <a:rPr sz="1800" b="0">
-                <a:solidFill>
-                  <a:srgbClr val="000000"/>
-                </a:solidFill>
-                <a:latin typeface="Fira Sans"/>
-              </a:rPr>
-              <a:t>Estructura tabular bidimensional: columnas con nombre y tipo propio, filas indexadas.</a:t>
-            </a:r>
-          </a:p>
-          <a:p>
-            <a:pPr>
-              <a:lnSpc>
-                <a:spcPct val="112000"/>
-              </a:lnSpc>
-              <a:spcAft>
-                <a:spcPts val="900"/>
-              </a:spcAft>
-            </a:pPr>
-            <a:r>
-              <a:rPr sz="1800" b="1">
-                <a:solidFill>
-                  <a:srgbClr val="E0A437"/>
-                </a:solidFill>
-                <a:latin typeface="Fira Sans"/>
-              </a:rPr>
-              <a:t>▸ </a:t>
-            </a:r>
-            <a:r>
-              <a:rPr sz="1800" b="0">
-                <a:solidFill>
-                  <a:srgbClr val="000000"/>
-                </a:solidFill>
-                <a:latin typeface="Fira Sans"/>
-              </a:rPr>
-              <a:t>El concepto viene del lenguaje S: los objetos data.frame (Chambers y Hastie, 1992). Wes McKinney lo llevó a Python con pandas (McKinney, 2010).</a:t>
-            </a:r>
-          </a:p>
-          <a:p>
-            <a:pPr>
-              <a:lnSpc>
-                <a:spcPct val="112000"/>
-              </a:lnSpc>
-              <a:spcAft>
-                <a:spcPts val="500"/>
-              </a:spcAft>
-            </a:pPr>
-            <a:r>
-              <a:rPr sz="1400" b="0">
+            <a:r>
+              <a:rPr sz="1300" b="0">
                 <a:solidFill>
                   <a:srgbClr val="333333"/>
                 </a:solidFill>
                 <a:latin typeface="Fira Sans"/>
               </a:rPr>
-              <a:t>     ◦  </a:t>
-            </a:r>
-            <a:r>
-              <a:rPr sz="1400" b="0">
-                <a:solidFill>
-                  <a:srgbClr val="333333"/>
-                </a:solidFill>
-                <a:latin typeface="Fira Sans"/>
-              </a:rPr>
-              <a:t>Cada columna es un arreglo tipado contiguo: las operaciones son vectorizadas, no ciclos de Python.</a:t>
-            </a:r>
-          </a:p>
-          <a:p>
-            <a:pPr>
-              <a:lnSpc>
-                <a:spcPct val="112000"/>
-              </a:lnSpc>
-              <a:spcAft>
-                <a:spcPts val="500"/>
-              </a:spcAft>
-            </a:pPr>
-            <a:r>
-              <a:rPr sz="1400" b="0">
-                <a:solidFill>
-                  <a:srgbClr val="333333"/>
-                </a:solidFill>
-                <a:latin typeface="Fira Sans"/>
-              </a:rPr>
-              <a:t>     ◦  </a:t>
-            </a:r>
-            <a:r>
-              <a:rPr sz="1400" b="0">
-                <a:solidFill>
-                  <a:srgbClr val="333333"/>
-                </a:solidFill>
-                <a:latin typeface="Fira Sans"/>
-              </a:rPr>
-              <a:t>El índice alinea los datos automáticamente en operaciones entre tablas y series.</a:t>
-            </a:r>
-          </a:p>
-          <a:p>
-            <a:pPr>
-              <a:lnSpc>
-                <a:spcPct val="112000"/>
-              </a:lnSpc>
-              <a:spcAft>
-                <a:spcPts val="500"/>
-              </a:spcAft>
-            </a:pPr>
-            <a:r>
-              <a:rPr sz="1400" b="0">
-                <a:solidFill>
-                  <a:srgbClr val="333333"/>
-                </a:solidFill>
-                <a:latin typeface="Fira Sans"/>
-              </a:rPr>
-              <a:t>     ◦  </a:t>
-            </a:r>
-            <a:r>
-              <a:rPr sz="1400" b="0">
-                <a:solidFill>
-                  <a:srgbClr val="333333"/>
-                </a:solidFill>
-                <a:latin typeface="Fira Sans"/>
-              </a:rPr>
-              <a:t>Implementa el álgebra relacional en memoria: selección, proyección, join (merge) y agregación (groupby).</a:t>
-            </a:r>
-          </a:p>
-          <a:p>
-            <a:pPr>
-              <a:lnSpc>
-                <a:spcPct val="112000"/>
-              </a:lnSpc>
-              <a:spcAft>
-                <a:spcPts val="900"/>
-              </a:spcAft>
-            </a:pPr>
-            <a:r>
-              <a:rPr sz="1800" b="1">
-                <a:solidFill>
-                  <a:srgbClr val="E0A437"/>
-                </a:solidFill>
-                <a:latin typeface="Fira Sans"/>
-              </a:rPr>
-              <a:t>▸ </a:t>
-            </a:r>
-            <a:r>
-              <a:rPr sz="1800" b="1">
-                <a:solidFill>
-                  <a:srgbClr val="1D3557"/>
-                </a:solidFill>
-                <a:latin typeface="Fira Sans"/>
-              </a:rPr>
-              <a:t>La interfaz se volvió un estándar: Spark, Polars y Dask implementan DataFrames con esta misma idea.</a:t>
+              <a:t>Los códigos (ComunaOrigen, Proposito) se resuelven contra tablas_parametros/ con merge.</a:t>
             </a:r>
           </a:p>
         </p:txBody>
@@ -6201,112 +6068,21 @@
                 </a:solidFill>
                 <a:latin typeface="Fira Sans"/>
               </a:rPr>
-              <a:t>Abrir el dataset</a:t>
-            </a:r>
-          </a:p>
-        </p:txBody>
-      </p:sp>
-      <p:sp>
-        <p:nvSpPr>
-          <p:cNvPr id="4" name="Rectangle 3"/>
-          <p:cNvSpPr/>
-          <p:nvPr/>
-        </p:nvSpPr>
-        <p:spPr>
-          <a:xfrm>
-            <a:off x="704088" y="1280160"/>
-            <a:ext cx="7744968" cy="2377440"/>
-          </a:xfrm>
-          <a:prstGeom prst="rect">
-            <a:avLst/>
-          </a:prstGeom>
-          <a:solidFill>
-            <a:srgbClr val="F0F2F5"/>
-          </a:solidFill>
-          <a:ln>
-            <a:solidFill>
-              <a:srgbClr val="D8DDE3"/>
-            </a:solidFill>
-          </a:ln>
-          <a:effectLst/>
-        </p:spPr>
-        <p:style>
-          <a:lnRef idx="1">
-            <a:schemeClr val="accent1"/>
-          </a:lnRef>
-          <a:fillRef idx="3">
-            <a:schemeClr val="accent1"/>
-          </a:fillRef>
-          <a:effectRef idx="2">
-            <a:schemeClr val="accent1"/>
-          </a:effectRef>
-          <a:fontRef idx="minor">
-            <a:schemeClr val="lt1"/>
-          </a:fontRef>
-        </p:style>
-        <p:txBody>
-          <a:bodyPr rtlCol="0" anchor="ctr" wrap="square" lIns="228600" tIns="137160"/>
-          <a:lstStyle/>
-          <a:p>
-            <a:pPr/>
-            <a:r>
-              <a:rPr sz="1500" b="0">
-                <a:solidFill>
-                  <a:srgbClr val="1D3557"/>
-                </a:solidFill>
-                <a:latin typeface="Menlo"/>
-              </a:rPr>
-              <a:t>import pandas as pd</a:t>
-            </a:r>
-          </a:p>
-          <a:p>
-            <a:pPr/>
-            <a:r>
-              <a:rPr sz="1500" b="0">
-                <a:solidFill>
-                  <a:srgbClr val="1D3557"/>
-                </a:solidFill>
-                <a:latin typeface="Menlo"/>
-              </a:rPr>
-              <a:t/>
-            </a:r>
-          </a:p>
-          <a:p>
-            <a:pPr/>
-            <a:r>
-              <a:rPr sz="1500" b="0">
-                <a:solidFill>
-                  <a:srgbClr val="1D3557"/>
-                </a:solidFill>
-                <a:latin typeface="Menlo"/>
-              </a:rPr>
-              <a:t>viajes = pd.read_csv('datos/eod_stgo/viajes.csv',</a:t>
-            </a:r>
-          </a:p>
-          <a:p>
-            <a:pPr/>
-            <a:r>
-              <a:rPr sz="1500" b="0">
-                <a:solidFill>
-                  <a:srgbClr val="1D3557"/>
-                </a:solidFill>
-                <a:latin typeface="Menlo"/>
-              </a:rPr>
-              <a:t>                     sep=';', decimal=',')</a:t>
-            </a:r>
-          </a:p>
-        </p:txBody>
-      </p:sp>
-      <p:sp>
-        <p:nvSpPr>
-          <p:cNvPr id="5" name="TextBox 4"/>
+              <a:t>El DataFrame: origen y propiedades</a:t>
+            </a:r>
+          </a:p>
+        </p:txBody>
+      </p:sp>
+      <p:sp>
+        <p:nvSpPr>
+          <p:cNvPr id="4" name="TextBox 3"/>
           <p:cNvSpPr txBox="1"/>
           <p:nvPr/>
         </p:nvSpPr>
         <p:spPr>
           <a:xfrm>
-            <a:off x="704088" y="3886200"/>
-            <a:ext cx="7744968" cy="1097280"/>
+            <a:off x="704088" y="1353312"/>
+            <a:ext cx="7744968" cy="3300984"/>
           </a:xfrm>
           <a:prstGeom prst="rect">
             <a:avLst/>
@@ -6328,7 +6104,7 @@
               </a:spcAft>
             </a:pPr>
             <a:r>
-              <a:rPr sz="1600" b="1">
+              <a:rPr sz="1800" b="1">
                 <a:solidFill>
                   <a:srgbClr val="E0A437"/>
                 </a:solidFill>
@@ -6337,13 +6113,153 @@
               <a:t>▸ </a:t>
             </a:r>
             <a:r>
-              <a:rPr sz="1600" b="0">
+              <a:rPr sz="1800" b="0">
                 <a:solidFill>
                   <a:srgbClr val="000000"/>
                 </a:solidFill>
                 <a:latin typeface="Fira Sans"/>
               </a:rPr>
-              <a:t>Todo el código de la clase está en el notebook 02_pandas_eda.ipynb del repositorio.</a:t>
+              <a:t>Estructura tabular bidimensional: columnas con nombre y tipo propio, filas indexadas.</a:t>
+            </a:r>
+          </a:p>
+          <a:p>
+            <a:pPr>
+              <a:lnSpc>
+                <a:spcPct val="112000"/>
+              </a:lnSpc>
+              <a:spcAft>
+                <a:spcPts val="900"/>
+              </a:spcAft>
+            </a:pPr>
+            <a:r>
+              <a:rPr sz="1800" b="1">
+                <a:solidFill>
+                  <a:srgbClr val="E0A437"/>
+                </a:solidFill>
+                <a:latin typeface="Fira Sans"/>
+              </a:rPr>
+              <a:t>▸ </a:t>
+            </a:r>
+            <a:r>
+              <a:rPr sz="1800" b="0">
+                <a:solidFill>
+                  <a:srgbClr val="000000"/>
+                </a:solidFill>
+                <a:latin typeface="Fira Sans"/>
+              </a:rPr>
+              <a:t>El concepto viene del lenguaje S: los objetos data.frame (Chambers y Hastie, 1992). Wes McKinney lo llevó a Python con pandas (McKinney, 2010).</a:t>
+            </a:r>
+          </a:p>
+          <a:p>
+            <a:pPr>
+              <a:lnSpc>
+                <a:spcPct val="112000"/>
+              </a:lnSpc>
+              <a:spcAft>
+                <a:spcPts val="500"/>
+              </a:spcAft>
+            </a:pPr>
+            <a:r>
+              <a:rPr sz="1400" b="0">
+                <a:solidFill>
+                  <a:srgbClr val="333333"/>
+                </a:solidFill>
+                <a:latin typeface="Fira Sans"/>
+              </a:rPr>
+              <a:t>     ◦  </a:t>
+            </a:r>
+            <a:r>
+              <a:rPr sz="1400" b="0">
+                <a:solidFill>
+                  <a:srgbClr val="333333"/>
+                </a:solidFill>
+                <a:latin typeface="Fira Sans"/>
+              </a:rPr>
+              <a:t>Cada columna es un arreglo tipado contiguo: las operaciones son vectorizadas, no ciclos de Python.</a:t>
+            </a:r>
+          </a:p>
+          <a:p>
+            <a:pPr>
+              <a:lnSpc>
+                <a:spcPct val="112000"/>
+              </a:lnSpc>
+              <a:spcAft>
+                <a:spcPts val="500"/>
+              </a:spcAft>
+            </a:pPr>
+            <a:r>
+              <a:rPr sz="1400" b="0">
+                <a:solidFill>
+                  <a:srgbClr val="333333"/>
+                </a:solidFill>
+                <a:latin typeface="Fira Sans"/>
+              </a:rPr>
+              <a:t>     ◦  </a:t>
+            </a:r>
+            <a:r>
+              <a:rPr sz="1400" b="0">
+                <a:solidFill>
+                  <a:srgbClr val="333333"/>
+                </a:solidFill>
+                <a:latin typeface="Fira Sans"/>
+              </a:rPr>
+              <a:t>El índice alinea los datos automáticamente en operaciones entre tablas y series.</a:t>
+            </a:r>
+          </a:p>
+          <a:p>
+            <a:pPr>
+              <a:lnSpc>
+                <a:spcPct val="112000"/>
+              </a:lnSpc>
+              <a:spcAft>
+                <a:spcPts val="500"/>
+              </a:spcAft>
+            </a:pPr>
+            <a:r>
+              <a:rPr sz="1400" b="0">
+                <a:solidFill>
+                  <a:srgbClr val="333333"/>
+                </a:solidFill>
+                <a:latin typeface="Fira Sans"/>
+              </a:rPr>
+              <a:t>     ◦  </a:t>
+            </a:r>
+            <a:r>
+              <a:rPr sz="1400" b="0">
+                <a:solidFill>
+                  <a:srgbClr val="333333"/>
+                </a:solidFill>
+                <a:latin typeface="Fira Sans"/>
+              </a:rPr>
+              <a:t>Implementa el álgebra relacional en memoria: selección, proyección, join (merge) y agregación (groupby).</a:t>
+            </a:r>
+          </a:p>
+          <a:p>
+            <a:pPr>
+              <a:lnSpc>
+                <a:spcPct val="112000"/>
+              </a:lnSpc>
+              <a:spcAft>
+                <a:spcPts val="900"/>
+              </a:spcAft>
+            </a:pPr>
+            <a:r>
+              <a:rPr sz="1800" b="1">
+                <a:solidFill>
+                  <a:srgbClr val="E0A437"/>
+                </a:solidFill>
+                <a:latin typeface="Fira Sans"/>
+              </a:rPr>
+              <a:t>▸ </a:t>
+            </a:r>
+            <a:r>
+              <a:rPr sz="1800" b="1">
+                <a:solidFill>
+                  <a:srgbClr val="1D3557"/>
+                </a:solidFill>
+                <a:latin typeface="Fira Sans"/>
+              </a:rPr>
+              <a:t>La interfaz se volvió un estándar: Spark, Polars y Dask implementan DataFrames con esta misma idea.</a:t>
             </a:r>
           </a:p>
         </p:txBody>
@@ -6439,35 +6355,102 @@
                 </a:solidFill>
                 <a:latin typeface="Fira Sans"/>
               </a:rPr>
-              <a:t>El DataFrame: la estructura central de Pandas</a:t>
-            </a:r>
-          </a:p>
-        </p:txBody>
-      </p:sp>
-      <p:pic>
-        <p:nvPicPr>
-          <p:cNvPr id="4" name="Picture 3" descr="13_dataframe.png"/>
-          <p:cNvPicPr>
-            <a:picLocks noChangeAspect="1"/>
-          </p:cNvPicPr>
-          <p:nvPr/>
-        </p:nvPicPr>
-        <p:blipFill>
-          <a:blip r:embed="rId2"/>
-          <a:stretch>
-            <a:fillRect/>
-          </a:stretch>
-        </p:blipFill>
-        <p:spPr>
-          <a:xfrm>
-            <a:off x="1417319" y="1143000"/>
-            <a:ext cx="6309360" cy="2553789"/>
-          </a:xfrm>
-          <a:prstGeom prst="rect">
-            <a:avLst/>
-          </a:prstGeom>
-        </p:spPr>
-      </p:pic>
+              <a:t>Abrir el dataset</a:t>
+            </a:r>
+          </a:p>
+        </p:txBody>
+      </p:sp>
+      <p:sp>
+        <p:nvSpPr>
+          <p:cNvPr id="4" name="Rectangle 3"/>
+          <p:cNvSpPr/>
+          <p:nvPr/>
+        </p:nvSpPr>
+        <p:spPr>
+          <a:xfrm>
+            <a:off x="704088" y="1280160"/>
+            <a:ext cx="7744968" cy="2377440"/>
+          </a:xfrm>
+          <a:prstGeom prst="rect">
+            <a:avLst/>
+          </a:prstGeom>
+          <a:solidFill>
+            <a:srgbClr val="F0F2F5"/>
+          </a:solidFill>
+          <a:ln>
+            <a:solidFill>
+              <a:srgbClr val="D8DDE3"/>
+            </a:solidFill>
+          </a:ln>
+          <a:effectLst/>
+        </p:spPr>
+        <p:style>
+          <a:lnRef idx="1">
+            <a:schemeClr val="accent1"/>
+          </a:lnRef>
+          <a:fillRef idx="3">
+            <a:schemeClr val="accent1"/>
+          </a:fillRef>
+          <a:effectRef idx="2">
+            <a:schemeClr val="accent1"/>
+          </a:effectRef>
+          <a:fontRef idx="minor">
+            <a:schemeClr val="lt1"/>
+          </a:fontRef>
+        </p:style>
+        <p:txBody>
+          <a:bodyPr rtlCol="0" anchor="ctr" wrap="square" lIns="228600" tIns="137160"/>
+          <a:lstStyle/>
+          <a:p>
+            <a:pPr/>
+            <a:r>
+              <a:rPr sz="1500" b="0">
+                <a:solidFill>
+                  <a:srgbClr val="1D3557"/>
+                </a:solidFill>
+                <a:latin typeface="Menlo"/>
+              </a:rPr>
+              <a:t>import pandas as pd</a:t>
+            </a:r>
+          </a:p>
+          <a:p>
+            <a:pPr/>
+            <a:r>
+              <a:rPr sz="1500" b="0">
+                <a:solidFill>
+                  <a:srgbClr val="1D3557"/>
+                </a:solidFill>
+                <a:latin typeface="Menlo"/>
+              </a:rPr>
+              <a:t/>
+            </a:r>
+          </a:p>
+          <a:p>
+            <a:pPr/>
+            <a:r>
+              <a:rPr sz="1500" b="0">
+                <a:solidFill>
+                  <a:srgbClr val="1D3557"/>
+                </a:solidFill>
+                <a:latin typeface="Menlo"/>
+              </a:rPr>
+              <a:t>viajes = pd.read_csv('datos/eod_stgo/viajes.csv',</a:t>
+            </a:r>
+          </a:p>
+          <a:p>
+            <a:pPr/>
+            <a:r>
+              <a:rPr sz="1500" b="0">
+                <a:solidFill>
+                  <a:srgbClr val="1D3557"/>
+                </a:solidFill>
+                <a:latin typeface="Menlo"/>
+              </a:rPr>
+              <a:t>                     sep=';', decimal=',')</a:t>
+            </a:r>
+          </a:p>
+        </p:txBody>
+      </p:sp>
       <p:sp>
         <p:nvSpPr>
           <p:cNvPr id="5" name="TextBox 4"/>
@@ -6476,8 +6459,8 @@
         </p:nvSpPr>
         <p:spPr>
           <a:xfrm>
-            <a:off x="704088" y="4434840"/>
-            <a:ext cx="7744968" cy="457200"/>
+            <a:off x="704088" y="3886200"/>
+            <a:ext cx="7744968" cy="1097280"/>
           </a:xfrm>
           <a:prstGeom prst="rect">
             <a:avLst/>
@@ -6490,14 +6473,31 @@
           </a:bodyPr>
           <a:lstStyle/>
           <a:p>
-            <a:r>
-              <a:rPr sz="1300" b="0">
-                <a:solidFill>
-                  <a:srgbClr val="333333"/>
-                </a:solidFill>
-                <a:latin typeface="Fira Sans"/>
-              </a:rPr>
-              <a:t>Los códigos (ComunaOrigen, Proposito) se resuelven contra tablas_parametros/ con merge.</a:t>
+            <a:pPr>
+              <a:lnSpc>
+                <a:spcPct val="112000"/>
+              </a:lnSpc>
+              <a:spcAft>
+                <a:spcPts val="900"/>
+              </a:spcAft>
+            </a:pPr>
+            <a:r>
+              <a:rPr sz="1600" b="1">
+                <a:solidFill>
+                  <a:srgbClr val="E0A437"/>
+                </a:solidFill>
+                <a:latin typeface="Fira Sans"/>
+              </a:rPr>
+              <a:t>▸ </a:t>
+            </a:r>
+            <a:r>
+              <a:rPr sz="1600" b="0">
+                <a:solidFill>
+                  <a:srgbClr val="000000"/>
+                </a:solidFill>
+                <a:latin typeface="Fira Sans"/>
+              </a:rPr>
+              <a:t>Todo el código de la clase está en el notebook 02_pandas_eda.ipynb del repositorio.</a:t>
             </a:r>
           </a:p>
         </p:txBody>

--- a/presentaciones/clase02_pandas_eda.pptx
+++ b/presentaciones/clase02_pandas_eda.pptx
@@ -6175,7 +6175,35 @@
                 </a:solidFill>
                 <a:latin typeface="Fira Sans"/>
               </a:rPr>
-              <a:t>Cada columna es un arreglo tipado contiguo: las operaciones son vectorizadas, no ciclos de Python.</a:t>
+              <a:t>Cada columna es un arreglo tipado y contiguo en memoria.</a:t>
+            </a:r>
+          </a:p>
+          <a:p>
+            <a:pPr>
+              <a:lnSpc>
+                <a:spcPct val="112000"/>
+              </a:lnSpc>
+              <a:spcAft>
+                <a:spcPts val="500"/>
+              </a:spcAft>
+            </a:pPr>
+            <a:r>
+              <a:rPr sz="1400" b="0">
+                <a:solidFill>
+                  <a:srgbClr val="333333"/>
+                </a:solidFill>
+                <a:latin typeface="Fira Sans"/>
+              </a:rPr>
+              <a:t>     ◦  </a:t>
+            </a:r>
+            <a:r>
+              <a:rPr sz="1400" b="0">
+                <a:solidFill>
+                  <a:srgbClr val="333333"/>
+                </a:solidFill>
+                <a:latin typeface="Fira Sans"/>
+              </a:rPr>
+              <a:t>Por eso las operaciones se ejecutan en código compilado sobre la columna completa, en vez de interpretar un ciclo elemento por elemento: sumar TiempoViaje toma 0,08 ms contra 7 ms del ciclo equivalente.</a:t>
             </a:r>
           </a:p>
           <a:p>

--- a/presentaciones/clase02_pandas_eda.pptx
+++ b/presentaciones/clase02_pandas_eda.pptx
@@ -5818,7 +5818,7 @@
                 </a:solidFill>
                 <a:latin typeface="Fira Sans"/>
               </a:rPr>
-              <a:t>En el segundo bloque comienza la Tarea 1.</a:t>
+              <a:t>El concepto de la clase es el EDA: examinar los datos antes de modelarlos. Los puntos 1 a 4 entregan los lentes; el 6 lo pone en práctica.</a:t>
             </a:r>
           </a:p>
         </p:txBody>
@@ -9358,7 +9358,7 @@
                 </a:solidFill>
                 <a:latin typeface="Fira Sans"/>
               </a:rPr>
-              <a:t>Ante toda cifra resumen: ¿de quién habla este número? ¿Muestra, subgrupo o ciudad?</a:t>
+              <a:t>El concepto de la clase: el EDA, examinar los datos antes de modelarlos, preguntando ante cada cifra de quién habla.</a:t>
             </a:r>
           </a:p>
         </p:txBody>

--- a/presentaciones/clase02_pandas_eda.pptx
+++ b/presentaciones/clase02_pandas_eda.pptx
@@ -42,6 +42,7 @@
     <p:sldId id="290" r:id="rId41"/>
     <p:sldId id="291" r:id="rId42"/>
     <p:sldId id="292" r:id="rId43"/>
+    <p:sldId id="293" r:id="rId44"/>
   </p:sldIdLst>
   <p:sldSz cx="9144000" cy="5138928" type="screen4x3"/>
   <p:notesSz cx="6858000" cy="9144000"/>
@@ -7295,7 +7296,7 @@
                 </a:solidFill>
                 <a:latin typeface="Fira Sans"/>
               </a:rPr>
-              <a:t>Viajes por persona: los ausentes también cuentan</a:t>
+              <a:t>El factor de expansión, formalmente</a:t>
             </a:r>
           </a:p>
         </p:txBody>
@@ -7346,7 +7347,7 @@
                 </a:solidFill>
                 <a:latin typeface="Fira Sans"/>
               </a:rPr>
-              <a:t>El 23% de las personas no viajó ese día.</a:t>
+              <a:t>Cada persona i tiene una probabilidad πᵢ de ser incluida en la muestra (según su zona, su hogar y el día asignado).</a:t>
             </a:r>
           </a:p>
           <a:p>
@@ -7374,7 +7375,63 @@
                 </a:solidFill>
                 <a:latin typeface="Fira Sans"/>
               </a:rPr>
-              <a:t>Media: 1,9 viajes. Mediana: 2 viajes.</a:t>
+              <a:t>Su factor es el inverso: wᵢ = 1/πᵢ, las personas de la población que representa (Horvitz y Thompson, 1952).</a:t>
+            </a:r>
+          </a:p>
+          <a:p>
+            <a:pPr>
+              <a:lnSpc>
+                <a:spcPct val="112000"/>
+              </a:lnSpc>
+              <a:spcAft>
+                <a:spcPts val="500"/>
+              </a:spcAft>
+            </a:pPr>
+            <a:r>
+              <a:rPr sz="1300" b="0">
+                <a:solidFill>
+                  <a:srgbClr val="333333"/>
+                </a:solidFill>
+                <a:latin typeface="Fira Sans"/>
+              </a:rPr>
+              <a:t>     ◦  </a:t>
+            </a:r>
+            <a:r>
+              <a:rPr sz="1300" b="0">
+                <a:solidFill>
+                  <a:srgbClr val="333333"/>
+                </a:solidFill>
+                <a:latin typeface="Fira Sans"/>
+              </a:rPr>
+              <a:t>El total poblacional se estima sumando factores; las medias, ponderando por ellos.</a:t>
+            </a:r>
+          </a:p>
+          <a:p>
+            <a:pPr>
+              <a:lnSpc>
+                <a:spcPct val="112000"/>
+              </a:lnSpc>
+              <a:spcAft>
+                <a:spcPts val="500"/>
+              </a:spcAft>
+            </a:pPr>
+            <a:r>
+              <a:rPr sz="1300" b="0">
+                <a:solidFill>
+                  <a:srgbClr val="333333"/>
+                </a:solidFill>
+                <a:latin typeface="Fira Sans"/>
+              </a:rPr>
+              <a:t>     ◦  </a:t>
+            </a:r>
+            <a:r>
+              <a:rPr sz="1300" b="0">
+                <a:solidFill>
+                  <a:srgbClr val="333333"/>
+                </a:solidFill>
+                <a:latin typeface="Fira Sans"/>
+              </a:rPr>
+              <a:t>En la EOD: Factor_LaboralNormal (persona) y FactorLaboralNormal (viaje).</a:t>
             </a:r>
           </a:p>
           <a:p>
@@ -7396,48 +7453,20 @@
               <a:t>▸ </a:t>
             </a:r>
             <a:r>
-              <a:rPr sz="1500" b="0">
-                <a:solidFill>
-                  <a:srgbClr val="000000"/>
-                </a:solidFill>
-                <a:latin typeface="Fira Sans"/>
-              </a:rPr>
-              <a:t>La media quedó bajo la mediana: la masa de ceros la desplaza.</a:t>
-            </a:r>
-          </a:p>
-          <a:p>
-            <a:pPr>
-              <a:lnSpc>
-                <a:spcPct val="112000"/>
-              </a:lnSpc>
-              <a:spcAft>
-                <a:spcPts val="900"/>
-              </a:spcAft>
-            </a:pPr>
-            <a:r>
               <a:rPr sz="1500" b="1">
                 <a:solidFill>
-                  <a:srgbClr val="E0A437"/>
-                </a:solidFill>
-                <a:latin typeface="Fira Sans"/>
-              </a:rPr>
-              <a:t>▸ </a:t>
-            </a:r>
-            <a:r>
-              <a:rPr sz="1500" b="1">
-                <a:solidFill>
                   <a:srgbClr val="1D3557"/>
                 </a:solidFill>
                 <a:latin typeface="Fira Sans"/>
               </a:rPr>
-              <a:t>La dirección del sesgo depende de la forma de la distribución.</a:t>
+              <a:t>Dos pasos, en orden: definir la población (¿día laboral?) y ponderar dentro de ella. La cifra ingenua decía 23% sin viajes; la estimación correcta es 15%.</a:t>
             </a:r>
           </a:p>
         </p:txBody>
       </p:sp>
       <p:pic>
         <p:nvPicPr>
-          <p:cNvPr id="5" name="Picture 4" descr="02_viajes_por_persona.png"/>
+          <p:cNvPr id="5" name="Picture 4" descr="21_factor_formulas.png"/>
           <p:cNvPicPr>
             <a:picLocks noChangeAspect="1"/>
           </p:cNvPicPr>
@@ -7452,7 +7481,7 @@
         <p:spPr>
           <a:xfrm>
             <a:off x="4892040" y="1371600"/>
-            <a:ext cx="3840480" cy="2199656"/>
+            <a:ext cx="3840480" cy="3506775"/>
           </a:xfrm>
           <a:prstGeom prst="rect">
             <a:avLst/>
@@ -7550,7 +7579,7 @@
                 </a:solidFill>
                 <a:latin typeface="Fira Sans"/>
               </a:rPr>
-              <a:t>El ingreso de los hogares: media y mediana</a:t>
+              <a:t>Viajes por persona: los ausentes también cuentan</a:t>
             </a:r>
           </a:p>
         </p:txBody>
@@ -7601,7 +7630,7 @@
                 </a:solidFill>
                 <a:latin typeface="Fira Sans"/>
               </a:rPr>
-              <a:t>Media: $688.274. Mediana: $507.826.</a:t>
+              <a:t>Quien no viajó no está en la tabla de viajes: hay que reincorporarlo antes de calcular.</a:t>
             </a:r>
           </a:p>
           <a:p>
@@ -7629,7 +7658,7 @@
                 </a:solidFill>
                 <a:latin typeface="Fira Sans"/>
               </a:rPr>
-              <a:t>La media es un 36% más alta que la mediana.</a:t>
+              <a:t>Ponderado: el 15% de las personas no viajó; media de 2,2 viajes, mediana de 2.</a:t>
             </a:r>
           </a:p>
           <a:p>
@@ -7657,7 +7686,7 @@
                 </a:solidFill>
                 <a:latin typeface="Fira Sans"/>
               </a:rPr>
-              <a:t>Los ingresos altos desplazan el promedio; la mayoría gana menos.</a:t>
+              <a:t>El 59% de la población hace exactamente 2 viajes: la ida y la vuelta.</a:t>
             </a:r>
           </a:p>
           <a:p>
@@ -7685,14 +7714,14 @@
                 </a:solidFill>
                 <a:latin typeface="Fira Sans"/>
               </a:rPr>
-              <a:t>El promedio describe una situación en la que la mayoría no está.</a:t>
+              <a:t>La cifra ingenua decía 23%: mezclaba días de fin de semana y omitía los factores.</a:t>
             </a:r>
           </a:p>
         </p:txBody>
       </p:sp>
       <p:pic>
         <p:nvPicPr>
-          <p:cNvPr id="5" name="Picture 4" descr="01_ingreso_media_mediana.png"/>
+          <p:cNvPr id="5" name="Picture 4" descr="02_viajes_por_persona.png"/>
           <p:cNvPicPr>
             <a:picLocks noChangeAspect="1"/>
           </p:cNvPicPr>
@@ -7707,7 +7736,7 @@
         <p:spPr>
           <a:xfrm>
             <a:off x="4892040" y="1371600"/>
-            <a:ext cx="3840480" cy="2182719"/>
+            <a:ext cx="3840480" cy="2335791"/>
           </a:xfrm>
           <a:prstGeom prst="rect">
             <a:avLst/>
@@ -7805,7 +7834,7 @@
                 </a:solidFill>
                 <a:latin typeface="Fira Sans"/>
               </a:rPr>
-              <a:t>La duración de los viajes: valores extremos</a:t>
+              <a:t>El ingreso de los hogares: media y mediana</a:t>
             </a:r>
           </a:p>
         </p:txBody>
@@ -7856,7 +7885,7 @@
                 </a:solidFill>
                 <a:latin typeface="Fira Sans"/>
               </a:rPr>
-              <a:t>Mediana: 30 minutos. Percentil 95: 98 minutos.</a:t>
+              <a:t>Ponderado por el factor del hogar: media $729.898, mediana $520.000.</a:t>
             </a:r>
           </a:p>
           <a:p>
@@ -7884,7 +7913,7 @@
                 </a:solidFill>
                 <a:latin typeface="Fira Sans"/>
               </a:rPr>
-              <a:t>Máximo registrado: 1.335 minutos, un viaje de 22 horas.</a:t>
+              <a:t>La media es un 40% más alta que la mediana.</a:t>
             </a:r>
           </a:p>
           <a:p>
@@ -7912,7 +7941,7 @@
                 </a:solidFill>
                 <a:latin typeface="Fira Sans"/>
               </a:rPr>
-              <a:t>¿Error de digitación? ¿Turno nocturno mal anotado?</a:t>
+              <a:t>Los ingresos altos desplazan el promedio; la mayoría gana menos.</a:t>
             </a:r>
           </a:p>
           <a:p>
@@ -7940,14 +7969,14 @@
                 </a:solidFill>
                 <a:latin typeface="Fira Sans"/>
               </a:rPr>
-              <a:t>Los valores extremos se investigan y la decisión se declara.</a:t>
+              <a:t>El promedio describe una situación en la que la mayoría no está.</a:t>
             </a:r>
           </a:p>
         </p:txBody>
       </p:sp>
       <p:pic>
         <p:nvPicPr>
-          <p:cNvPr id="5" name="Picture 4" descr="04_duracion_viajes.png"/>
+          <p:cNvPr id="5" name="Picture 4" descr="01_ingreso_media_mediana.png"/>
           <p:cNvPicPr>
             <a:picLocks noChangeAspect="1"/>
           </p:cNvPicPr>
@@ -7962,7 +7991,7 @@
         <p:spPr>
           <a:xfrm>
             <a:off x="4892040" y="1371600"/>
-            <a:ext cx="3840480" cy="2170536"/>
+            <a:ext cx="3840480" cy="2119546"/>
           </a:xfrm>
           <a:prstGeom prst="rect">
             <a:avLst/>
@@ -8167,7 +8196,7 @@
                 </a:solidFill>
                 <a:latin typeface="Fira Sans"/>
               </a:rPr>
-              <a:t>La partición modal del Gran Santiago</a:t>
+              <a:t>La duración de los viajes: valores extremos</a:t>
             </a:r>
           </a:p>
         </p:txBody>
@@ -8218,91 +8247,7 @@
                 </a:solidFill>
                 <a:latin typeface="Fira Sans"/>
               </a:rPr>
-              <a:t>Dos merges y un groupby ponderado por factor.</a:t>
-            </a:r>
-          </a:p>
-          <a:p>
-            <a:pPr>
-              <a:lnSpc>
-                <a:spcPct val="112000"/>
-              </a:lnSpc>
-              <a:spcAft>
-                <a:spcPts val="500"/>
-              </a:spcAft>
-            </a:pPr>
-            <a:r>
-              <a:rPr sz="1300" b="0">
-                <a:solidFill>
-                  <a:srgbClr val="333333"/>
-                </a:solidFill>
-                <a:latin typeface="Fira Sans"/>
-              </a:rPr>
-              <a:t>     ◦  </a:t>
-            </a:r>
-            <a:r>
-              <a:rPr sz="1300" b="0">
-                <a:solidFill>
-                  <a:srgbClr val="333333"/>
-                </a:solidFill>
-                <a:latin typeface="Fira Sans"/>
-              </a:rPr>
-              <a:t>Caminata: 34% de los viajes.</a:t>
-            </a:r>
-          </a:p>
-          <a:p>
-            <a:pPr>
-              <a:lnSpc>
-                <a:spcPct val="112000"/>
-              </a:lnSpc>
-              <a:spcAft>
-                <a:spcPts val="500"/>
-              </a:spcAft>
-            </a:pPr>
-            <a:r>
-              <a:rPr sz="1300" b="0">
-                <a:solidFill>
-                  <a:srgbClr val="333333"/>
-                </a:solidFill>
-                <a:latin typeface="Fira Sans"/>
-              </a:rPr>
-              <a:t>     ◦  </a:t>
-            </a:r>
-            <a:r>
-              <a:rPr sz="1300" b="0">
-                <a:solidFill>
-                  <a:srgbClr val="333333"/>
-                </a:solidFill>
-                <a:latin typeface="Fira Sans"/>
-              </a:rPr>
-              <a:t>Transporte público (Bip!): 24%.</a:t>
-            </a:r>
-          </a:p>
-          <a:p>
-            <a:pPr>
-              <a:lnSpc>
-                <a:spcPct val="112000"/>
-              </a:lnSpc>
-              <a:spcAft>
-                <a:spcPts val="500"/>
-              </a:spcAft>
-            </a:pPr>
-            <a:r>
-              <a:rPr sz="1300" b="0">
-                <a:solidFill>
-                  <a:srgbClr val="333333"/>
-                </a:solidFill>
-                <a:latin typeface="Fira Sans"/>
-              </a:rPr>
-              <a:t>     ◦  </a:t>
-            </a:r>
-            <a:r>
-              <a:rPr sz="1300" b="0">
-                <a:solidFill>
-                  <a:srgbClr val="333333"/>
-                </a:solidFill>
-                <a:latin typeface="Fira Sans"/>
-              </a:rPr>
-              <a:t>Auto: 23%.</a:t>
+              <a:t>Ponderado por el factor del viaje: mediana de 25 minutos, percentil 95 de 90.</a:t>
             </a:r>
           </a:p>
           <a:p>
@@ -8324,20 +8269,76 @@
               <a:t>▸ </a:t>
             </a:r>
             <a:r>
+              <a:rPr sz="1500" b="0">
+                <a:solidFill>
+                  <a:srgbClr val="000000"/>
+                </a:solidFill>
+                <a:latin typeface="Fira Sans"/>
+              </a:rPr>
+              <a:t>Máximo registrado: 1.335 minutos, un viaje de 22 horas.</a:t>
+            </a:r>
+          </a:p>
+          <a:p>
+            <a:pPr>
+              <a:lnSpc>
+                <a:spcPct val="112000"/>
+              </a:lnSpc>
+              <a:spcAft>
+                <a:spcPts val="900"/>
+              </a:spcAft>
+            </a:pPr>
+            <a:r>
               <a:rPr sz="1500" b="1">
                 <a:solidFill>
+                  <a:srgbClr val="E0A437"/>
+                </a:solidFill>
+                <a:latin typeface="Fira Sans"/>
+              </a:rPr>
+              <a:t>▸ </a:t>
+            </a:r>
+            <a:r>
+              <a:rPr sz="1500" b="0">
+                <a:solidFill>
+                  <a:srgbClr val="000000"/>
+                </a:solidFill>
+                <a:latin typeface="Fira Sans"/>
+              </a:rPr>
+              <a:t>¿Error de digitación? ¿Turno nocturno mal anotado?</a:t>
+            </a:r>
+          </a:p>
+          <a:p>
+            <a:pPr>
+              <a:lnSpc>
+                <a:spcPct val="112000"/>
+              </a:lnSpc>
+              <a:spcAft>
+                <a:spcPts val="900"/>
+              </a:spcAft>
+            </a:pPr>
+            <a:r>
+              <a:rPr sz="1500" b="1">
+                <a:solidFill>
+                  <a:srgbClr val="E0A437"/>
+                </a:solidFill>
+                <a:latin typeface="Fira Sans"/>
+              </a:rPr>
+              <a:t>▸ </a:t>
+            </a:r>
+            <a:r>
+              <a:rPr sz="1500" b="1">
+                <a:solidFill>
                   <a:srgbClr val="1D3557"/>
                 </a:solidFill>
                 <a:latin typeface="Fira Sans"/>
               </a:rPr>
-              <a:t>Calculada desde los microdatos, con los factores de un día laboral.</a:t>
+              <a:t>Los valores extremos se investigan y la decisión se declara.</a:t>
             </a:r>
           </a:p>
         </p:txBody>
       </p:sp>
       <p:pic>
         <p:nvPicPr>
-          <p:cNvPr id="5" name="Picture 4" descr="03_reparto_modal.png"/>
+          <p:cNvPr id="5" name="Picture 4" descr="04_duracion_viajes.png"/>
           <p:cNvPicPr>
             <a:picLocks noChangeAspect="1"/>
           </p:cNvPicPr>
@@ -8352,7 +8353,7 @@
         <p:spPr>
           <a:xfrm>
             <a:off x="4892040" y="1371600"/>
-            <a:ext cx="3840480" cy="1909061"/>
+            <a:ext cx="3840480" cy="2170536"/>
           </a:xfrm>
           <a:prstGeom prst="rect">
             <a:avLst/>
@@ -8450,14 +8451,177 @@
                 </a:solidFill>
                 <a:latin typeface="Fira Sans"/>
               </a:rPr>
-              <a:t>El reparto modal difiere entre comunas</a:t>
+              <a:t>La partición modal del Gran Santiago</a:t>
+            </a:r>
+          </a:p>
+        </p:txBody>
+      </p:sp>
+      <p:sp>
+        <p:nvSpPr>
+          <p:cNvPr id="4" name="TextBox 3"/>
+          <p:cNvSpPr txBox="1"/>
+          <p:nvPr/>
+        </p:nvSpPr>
+        <p:spPr>
+          <a:xfrm>
+            <a:off x="502920" y="1252728"/>
+            <a:ext cx="4023360" cy="3200400"/>
+          </a:xfrm>
+          <a:prstGeom prst="rect">
+            <a:avLst/>
+          </a:prstGeom>
+          <a:noFill/>
+        </p:spPr>
+        <p:txBody>
+          <a:bodyPr wrap="square">
+            <a:spAutoFit/>
+          </a:bodyPr>
+          <a:lstStyle/>
+          <a:p>
+            <a:pPr>
+              <a:lnSpc>
+                <a:spcPct val="112000"/>
+              </a:lnSpc>
+              <a:spcAft>
+                <a:spcPts val="900"/>
+              </a:spcAft>
+            </a:pPr>
+            <a:r>
+              <a:rPr sz="1500" b="1">
+                <a:solidFill>
+                  <a:srgbClr val="E0A437"/>
+                </a:solidFill>
+                <a:latin typeface="Fira Sans"/>
+              </a:rPr>
+              <a:t>▸ </a:t>
+            </a:r>
+            <a:r>
+              <a:rPr sz="1500" b="0">
+                <a:solidFill>
+                  <a:srgbClr val="000000"/>
+                </a:solidFill>
+                <a:latin typeface="Fira Sans"/>
+              </a:rPr>
+              <a:t>Dos merges y un groupby ponderado por factor.</a:t>
+            </a:r>
+          </a:p>
+          <a:p>
+            <a:pPr>
+              <a:lnSpc>
+                <a:spcPct val="112000"/>
+              </a:lnSpc>
+              <a:spcAft>
+                <a:spcPts val="500"/>
+              </a:spcAft>
+            </a:pPr>
+            <a:r>
+              <a:rPr sz="1300" b="0">
+                <a:solidFill>
+                  <a:srgbClr val="333333"/>
+                </a:solidFill>
+                <a:latin typeface="Fira Sans"/>
+              </a:rPr>
+              <a:t>     ◦  </a:t>
+            </a:r>
+            <a:r>
+              <a:rPr sz="1300" b="0">
+                <a:solidFill>
+                  <a:srgbClr val="333333"/>
+                </a:solidFill>
+                <a:latin typeface="Fira Sans"/>
+              </a:rPr>
+              <a:t>Caminata: 34% de los viajes.</a:t>
+            </a:r>
+          </a:p>
+          <a:p>
+            <a:pPr>
+              <a:lnSpc>
+                <a:spcPct val="112000"/>
+              </a:lnSpc>
+              <a:spcAft>
+                <a:spcPts val="500"/>
+              </a:spcAft>
+            </a:pPr>
+            <a:r>
+              <a:rPr sz="1300" b="0">
+                <a:solidFill>
+                  <a:srgbClr val="333333"/>
+                </a:solidFill>
+                <a:latin typeface="Fira Sans"/>
+              </a:rPr>
+              <a:t>     ◦  </a:t>
+            </a:r>
+            <a:r>
+              <a:rPr sz="1300" b="0">
+                <a:solidFill>
+                  <a:srgbClr val="333333"/>
+                </a:solidFill>
+                <a:latin typeface="Fira Sans"/>
+              </a:rPr>
+              <a:t>Transporte público (Bip!): 24%.</a:t>
+            </a:r>
+          </a:p>
+          <a:p>
+            <a:pPr>
+              <a:lnSpc>
+                <a:spcPct val="112000"/>
+              </a:lnSpc>
+              <a:spcAft>
+                <a:spcPts val="500"/>
+              </a:spcAft>
+            </a:pPr>
+            <a:r>
+              <a:rPr sz="1300" b="0">
+                <a:solidFill>
+                  <a:srgbClr val="333333"/>
+                </a:solidFill>
+                <a:latin typeface="Fira Sans"/>
+              </a:rPr>
+              <a:t>     ◦  </a:t>
+            </a:r>
+            <a:r>
+              <a:rPr sz="1300" b="0">
+                <a:solidFill>
+                  <a:srgbClr val="333333"/>
+                </a:solidFill>
+                <a:latin typeface="Fira Sans"/>
+              </a:rPr>
+              <a:t>Auto: 23%.</a:t>
+            </a:r>
+          </a:p>
+          <a:p>
+            <a:pPr>
+              <a:lnSpc>
+                <a:spcPct val="112000"/>
+              </a:lnSpc>
+              <a:spcAft>
+                <a:spcPts val="900"/>
+              </a:spcAft>
+            </a:pPr>
+            <a:r>
+              <a:rPr sz="1500" b="1">
+                <a:solidFill>
+                  <a:srgbClr val="E0A437"/>
+                </a:solidFill>
+                <a:latin typeface="Fira Sans"/>
+              </a:rPr>
+              <a:t>▸ </a:t>
+            </a:r>
+            <a:r>
+              <a:rPr sz="1500" b="1">
+                <a:solidFill>
+                  <a:srgbClr val="1D3557"/>
+                </a:solidFill>
+                <a:latin typeface="Fira Sans"/>
+              </a:rPr>
+              <a:t>Calculada desde los microdatos, con los factores de un día laboral.</a:t>
             </a:r>
           </a:p>
         </p:txBody>
       </p:sp>
       <p:pic>
         <p:nvPicPr>
-          <p:cNvPr id="4" name="Picture 3" descr="08_modo_por_comuna.png"/>
+          <p:cNvPr id="5" name="Picture 4" descr="03_reparto_modal.png"/>
           <p:cNvPicPr>
             <a:picLocks noChangeAspect="1"/>
           </p:cNvPicPr>
@@ -8471,48 +8635,14 @@
         </p:blipFill>
         <p:spPr>
           <a:xfrm>
-            <a:off x="1994250" y="1143000"/>
-            <a:ext cx="5155498" cy="3154679"/>
+            <a:off x="4892040" y="1371600"/>
+            <a:ext cx="3840480" cy="1909061"/>
           </a:xfrm>
           <a:prstGeom prst="rect">
             <a:avLst/>
           </a:prstGeom>
         </p:spPr>
       </p:pic>
-      <p:sp>
-        <p:nvSpPr>
-          <p:cNvPr id="5" name="TextBox 4"/>
-          <p:cNvSpPr txBox="1"/>
-          <p:nvPr/>
-        </p:nvSpPr>
-        <p:spPr>
-          <a:xfrm>
-            <a:off x="704088" y="4434840"/>
-            <a:ext cx="7744968" cy="457200"/>
-          </a:xfrm>
-          <a:prstGeom prst="rect">
-            <a:avLst/>
-          </a:prstGeom>
-          <a:noFill/>
-        </p:spPr>
-        <p:txBody>
-          <a:bodyPr wrap="square">
-            <a:spAutoFit/>
-          </a:bodyPr>
-          <a:lstStyle/>
-          <a:p>
-            <a:r>
-              <a:rPr sz="1300" b="0">
-                <a:solidFill>
-                  <a:srgbClr val="333333"/>
-                </a:solidFill>
-                <a:latin typeface="Fira Sans"/>
-              </a:rPr>
-              <a:t>Normalizar por comuna permite comparar proporciones entre comunas de tamaños muy distintos.</a:t>
-            </a:r>
-          </a:p>
-        </p:txBody>
-      </p:sp>
     </p:spTree>
   </p:cSld>
   <p:clrMapOvr>
@@ -8604,177 +8734,14 @@
                 </a:solidFill>
                 <a:latin typeface="Fira Sans"/>
               </a:rPr>
-              <a:t>Ingreso y uso de transporte público</a:t>
-            </a:r>
-          </a:p>
-        </p:txBody>
-      </p:sp>
-      <p:sp>
-        <p:nvSpPr>
-          <p:cNvPr id="4" name="TextBox 3"/>
-          <p:cNvSpPr txBox="1"/>
-          <p:nvPr/>
-        </p:nvSpPr>
-        <p:spPr>
-          <a:xfrm>
-            <a:off x="502920" y="1252728"/>
-            <a:ext cx="4023360" cy="3200400"/>
-          </a:xfrm>
-          <a:prstGeom prst="rect">
-            <a:avLst/>
-          </a:prstGeom>
-          <a:noFill/>
-        </p:spPr>
-        <p:txBody>
-          <a:bodyPr wrap="square">
-            <a:spAutoFit/>
-          </a:bodyPr>
-          <a:lstStyle/>
-          <a:p>
-            <a:pPr>
-              <a:lnSpc>
-                <a:spcPct val="112000"/>
-              </a:lnSpc>
-              <a:spcAft>
-                <a:spcPts val="900"/>
-              </a:spcAft>
-            </a:pPr>
-            <a:r>
-              <a:rPr sz="1500" b="1">
-                <a:solidFill>
-                  <a:srgbClr val="E0A437"/>
-                </a:solidFill>
-                <a:latin typeface="Fira Sans"/>
-              </a:rPr>
-              <a:t>▸ </a:t>
-            </a:r>
-            <a:r>
-              <a:rPr sz="1500" b="0">
-                <a:solidFill>
-                  <a:srgbClr val="000000"/>
-                </a:solidFill>
-                <a:latin typeface="Fira Sans"/>
-              </a:rPr>
-              <a:t>Cada punto es una comuna: ingreso medio contra proporción de viajes en transporte público.</a:t>
-            </a:r>
-          </a:p>
-          <a:p>
-            <a:pPr>
-              <a:lnSpc>
-                <a:spcPct val="112000"/>
-              </a:lnSpc>
-              <a:spcAft>
-                <a:spcPts val="500"/>
-              </a:spcAft>
-            </a:pPr>
-            <a:r>
-              <a:rPr sz="1300" b="0">
-                <a:solidFill>
-                  <a:srgbClr val="333333"/>
-                </a:solidFill>
-                <a:latin typeface="Fira Sans"/>
-              </a:rPr>
-              <a:t>     ◦  </a:t>
-            </a:r>
-            <a:r>
-              <a:rPr sz="1300" b="0">
-                <a:solidFill>
-                  <a:srgbClr val="333333"/>
-                </a:solidFill>
-                <a:latin typeface="Fira Sans"/>
-              </a:rPr>
-              <a:t>Periferia (Buin, Melipilla): poco transporte público; la red no llega.</a:t>
-            </a:r>
-          </a:p>
-          <a:p>
-            <a:pPr>
-              <a:lnSpc>
-                <a:spcPct val="112000"/>
-              </a:lnSpc>
-              <a:spcAft>
-                <a:spcPts val="500"/>
-              </a:spcAft>
-            </a:pPr>
-            <a:r>
-              <a:rPr sz="1300" b="0">
-                <a:solidFill>
-                  <a:srgbClr val="333333"/>
-                </a:solidFill>
-                <a:latin typeface="Fira Sans"/>
-              </a:rPr>
-              <a:t>     ◦  </a:t>
-            </a:r>
-            <a:r>
-              <a:rPr sz="1300" b="0">
-                <a:solidFill>
-                  <a:srgbClr val="333333"/>
-                </a:solidFill>
-                <a:latin typeface="Fira Sans"/>
-              </a:rPr>
-              <a:t>Ingresos altos (Vitacura, Lo Barnechea): conectadas, con poco uso.</a:t>
-            </a:r>
-          </a:p>
-          <a:p>
-            <a:pPr>
-              <a:lnSpc>
-                <a:spcPct val="112000"/>
-              </a:lnSpc>
-              <a:spcAft>
-                <a:spcPts val="500"/>
-              </a:spcAft>
-            </a:pPr>
-            <a:r>
-              <a:rPr sz="1300" b="0">
-                <a:solidFill>
-                  <a:srgbClr val="333333"/>
-                </a:solidFill>
-                <a:latin typeface="Fira Sans"/>
-              </a:rPr>
-              <a:t>     ◦  </a:t>
-            </a:r>
-            <a:r>
-              <a:rPr sz="1300" b="0">
-                <a:solidFill>
-                  <a:srgbClr val="333333"/>
-                </a:solidFill>
-                <a:latin typeface="Fira Sans"/>
-              </a:rPr>
-              <a:t>Correlación de Pearson: -0,17. La asociación lineal es débil.</a:t>
-            </a:r>
-          </a:p>
-          <a:p>
-            <a:pPr>
-              <a:lnSpc>
-                <a:spcPct val="112000"/>
-              </a:lnSpc>
-              <a:spcAft>
-                <a:spcPts val="900"/>
-              </a:spcAft>
-            </a:pPr>
-            <a:r>
-              <a:rPr sz="1500" b="1">
-                <a:solidFill>
-                  <a:srgbClr val="E0A437"/>
-                </a:solidFill>
-                <a:latin typeface="Fira Sans"/>
-              </a:rPr>
-              <a:t>▸ </a:t>
-            </a:r>
-            <a:r>
-              <a:rPr sz="1500" b="1">
-                <a:solidFill>
-                  <a:srgbClr val="1D3557"/>
-                </a:solidFill>
-                <a:latin typeface="Fira Sans"/>
-              </a:rPr>
-              <a:t>Como vimos en el marco conceptual: el coeficiente no reemplaza al gráfico, y la asociación no autoriza verbos causales.</a:t>
+              <a:t>El reparto modal difiere entre comunas</a:t>
             </a:r>
           </a:p>
         </p:txBody>
       </p:sp>
       <p:pic>
         <p:nvPicPr>
-          <p:cNvPr id="5" name="Picture 4" descr="09_ingreso_vs_tp.png"/>
+          <p:cNvPr id="4" name="Picture 3" descr="08_modo_por_comuna.png"/>
           <p:cNvPicPr>
             <a:picLocks noChangeAspect="1"/>
           </p:cNvPicPr>
@@ -8788,14 +8755,48 @@
         </p:blipFill>
         <p:spPr>
           <a:xfrm>
-            <a:off x="4892040" y="1371600"/>
-            <a:ext cx="3840480" cy="2526979"/>
+            <a:off x="1994250" y="1143000"/>
+            <a:ext cx="5155498" cy="3154679"/>
           </a:xfrm>
           <a:prstGeom prst="rect">
             <a:avLst/>
           </a:prstGeom>
         </p:spPr>
       </p:pic>
+      <p:sp>
+        <p:nvSpPr>
+          <p:cNvPr id="5" name="TextBox 4"/>
+          <p:cNvSpPr txBox="1"/>
+          <p:nvPr/>
+        </p:nvSpPr>
+        <p:spPr>
+          <a:xfrm>
+            <a:off x="704088" y="4434840"/>
+            <a:ext cx="7744968" cy="457200"/>
+          </a:xfrm>
+          <a:prstGeom prst="rect">
+            <a:avLst/>
+          </a:prstGeom>
+          <a:noFill/>
+        </p:spPr>
+        <p:txBody>
+          <a:bodyPr wrap="square">
+            <a:spAutoFit/>
+          </a:bodyPr>
+          <a:lstStyle/>
+          <a:p>
+            <a:r>
+              <a:rPr sz="1300" b="0">
+                <a:solidFill>
+                  <a:srgbClr val="333333"/>
+                </a:solidFill>
+                <a:latin typeface="Fira Sans"/>
+              </a:rPr>
+              <a:t>Normalizar por comuna permite comparar proporciones entre comunas de tamaños muy distintos.</a:t>
+            </a:r>
+          </a:p>
+        </p:txBody>
+      </p:sp>
     </p:spTree>
   </p:cSld>
   <p:clrMapOvr>
@@ -8887,14 +8888,177 @@
                 </a:solidFill>
                 <a:latin typeface="Fira Sans"/>
               </a:rPr>
-              <a:t>Los propósitos de viaje según el día de la semana</a:t>
+              <a:t>Ingreso y uso de transporte público</a:t>
+            </a:r>
+          </a:p>
+        </p:txBody>
+      </p:sp>
+      <p:sp>
+        <p:nvSpPr>
+          <p:cNvPr id="4" name="TextBox 3"/>
+          <p:cNvSpPr txBox="1"/>
+          <p:nvPr/>
+        </p:nvSpPr>
+        <p:spPr>
+          <a:xfrm>
+            <a:off x="502920" y="1252728"/>
+            <a:ext cx="4023360" cy="3200400"/>
+          </a:xfrm>
+          <a:prstGeom prst="rect">
+            <a:avLst/>
+          </a:prstGeom>
+          <a:noFill/>
+        </p:spPr>
+        <p:txBody>
+          <a:bodyPr wrap="square">
+            <a:spAutoFit/>
+          </a:bodyPr>
+          <a:lstStyle/>
+          <a:p>
+            <a:pPr>
+              <a:lnSpc>
+                <a:spcPct val="112000"/>
+              </a:lnSpc>
+              <a:spcAft>
+                <a:spcPts val="900"/>
+              </a:spcAft>
+            </a:pPr>
+            <a:r>
+              <a:rPr sz="1500" b="1">
+                <a:solidFill>
+                  <a:srgbClr val="E0A437"/>
+                </a:solidFill>
+                <a:latin typeface="Fira Sans"/>
+              </a:rPr>
+              <a:t>▸ </a:t>
+            </a:r>
+            <a:r>
+              <a:rPr sz="1500" b="0">
+                <a:solidFill>
+                  <a:srgbClr val="000000"/>
+                </a:solidFill>
+                <a:latin typeface="Fira Sans"/>
+              </a:rPr>
+              <a:t>Cada punto es una comuna: ingreso medio contra proporción de viajes en transporte público.</a:t>
+            </a:r>
+          </a:p>
+          <a:p>
+            <a:pPr>
+              <a:lnSpc>
+                <a:spcPct val="112000"/>
+              </a:lnSpc>
+              <a:spcAft>
+                <a:spcPts val="500"/>
+              </a:spcAft>
+            </a:pPr>
+            <a:r>
+              <a:rPr sz="1300" b="0">
+                <a:solidFill>
+                  <a:srgbClr val="333333"/>
+                </a:solidFill>
+                <a:latin typeface="Fira Sans"/>
+              </a:rPr>
+              <a:t>     ◦  </a:t>
+            </a:r>
+            <a:r>
+              <a:rPr sz="1300" b="0">
+                <a:solidFill>
+                  <a:srgbClr val="333333"/>
+                </a:solidFill>
+                <a:latin typeface="Fira Sans"/>
+              </a:rPr>
+              <a:t>Periferia (Buin, Melipilla): poco transporte público; la red no llega.</a:t>
+            </a:r>
+          </a:p>
+          <a:p>
+            <a:pPr>
+              <a:lnSpc>
+                <a:spcPct val="112000"/>
+              </a:lnSpc>
+              <a:spcAft>
+                <a:spcPts val="500"/>
+              </a:spcAft>
+            </a:pPr>
+            <a:r>
+              <a:rPr sz="1300" b="0">
+                <a:solidFill>
+                  <a:srgbClr val="333333"/>
+                </a:solidFill>
+                <a:latin typeface="Fira Sans"/>
+              </a:rPr>
+              <a:t>     ◦  </a:t>
+            </a:r>
+            <a:r>
+              <a:rPr sz="1300" b="0">
+                <a:solidFill>
+                  <a:srgbClr val="333333"/>
+                </a:solidFill>
+                <a:latin typeface="Fira Sans"/>
+              </a:rPr>
+              <a:t>Ingresos altos (Vitacura, Lo Barnechea): conectadas, con poco uso.</a:t>
+            </a:r>
+          </a:p>
+          <a:p>
+            <a:pPr>
+              <a:lnSpc>
+                <a:spcPct val="112000"/>
+              </a:lnSpc>
+              <a:spcAft>
+                <a:spcPts val="500"/>
+              </a:spcAft>
+            </a:pPr>
+            <a:r>
+              <a:rPr sz="1300" b="0">
+                <a:solidFill>
+                  <a:srgbClr val="333333"/>
+                </a:solidFill>
+                <a:latin typeface="Fira Sans"/>
+              </a:rPr>
+              <a:t>     ◦  </a:t>
+            </a:r>
+            <a:r>
+              <a:rPr sz="1300" b="0">
+                <a:solidFill>
+                  <a:srgbClr val="333333"/>
+                </a:solidFill>
+                <a:latin typeface="Fira Sans"/>
+              </a:rPr>
+              <a:t>Correlación de Pearson: -0,17. La asociación lineal es débil.</a:t>
+            </a:r>
+          </a:p>
+          <a:p>
+            <a:pPr>
+              <a:lnSpc>
+                <a:spcPct val="112000"/>
+              </a:lnSpc>
+              <a:spcAft>
+                <a:spcPts val="900"/>
+              </a:spcAft>
+            </a:pPr>
+            <a:r>
+              <a:rPr sz="1500" b="1">
+                <a:solidFill>
+                  <a:srgbClr val="E0A437"/>
+                </a:solidFill>
+                <a:latin typeface="Fira Sans"/>
+              </a:rPr>
+              <a:t>▸ </a:t>
+            </a:r>
+            <a:r>
+              <a:rPr sz="1500" b="1">
+                <a:solidFill>
+                  <a:srgbClr val="1D3557"/>
+                </a:solidFill>
+                <a:latin typeface="Fira Sans"/>
+              </a:rPr>
+              <a:t>Como vimos en el marco conceptual: el coeficiente no reemplaza al gráfico, y la asociación no autoriza verbos causales.</a:t>
             </a:r>
           </a:p>
         </p:txBody>
       </p:sp>
       <p:pic>
         <p:nvPicPr>
-          <p:cNvPr id="4" name="Picture 3" descr="10_heatmap_rutinas.png"/>
+          <p:cNvPr id="5" name="Picture 4" descr="09_ingreso_vs_tp.png"/>
           <p:cNvPicPr>
             <a:picLocks noChangeAspect="1"/>
           </p:cNvPicPr>
@@ -8908,48 +9072,14 @@
         </p:blipFill>
         <p:spPr>
           <a:xfrm>
-            <a:off x="1649319" y="1143000"/>
-            <a:ext cx="5845360" cy="3154680"/>
+            <a:off x="4892040" y="1371600"/>
+            <a:ext cx="3840480" cy="2526979"/>
           </a:xfrm>
           <a:prstGeom prst="rect">
             <a:avLst/>
           </a:prstGeom>
         </p:spPr>
       </p:pic>
-      <p:sp>
-        <p:nvSpPr>
-          <p:cNvPr id="5" name="TextBox 4"/>
-          <p:cNvSpPr txBox="1"/>
-          <p:nvPr/>
-        </p:nvSpPr>
-        <p:spPr>
-          <a:xfrm>
-            <a:off x="704088" y="4434840"/>
-            <a:ext cx="7744968" cy="457200"/>
-          </a:xfrm>
-          <a:prstGeom prst="rect">
-            <a:avLst/>
-          </a:prstGeom>
-          <a:noFill/>
-        </p:spPr>
-        <p:txBody>
-          <a:bodyPr wrap="square">
-            <a:spAutoFit/>
-          </a:bodyPr>
-          <a:lstStyle/>
-          <a:p>
-            <a:r>
-              <a:rPr sz="1300" b="0">
-                <a:solidFill>
-                  <a:srgbClr val="333333"/>
-                </a:solidFill>
-                <a:latin typeface="Fira Sans"/>
-              </a:rPr>
-              <a:t>El heatmap muestra 14 propósitos por 7 días en una sola figura: útil para tablas completas.</a:t>
-            </a:r>
-          </a:p>
-        </p:txBody>
-      </p:sp>
     </p:spTree>
   </p:cSld>
   <p:clrMapOvr>
@@ -9041,14 +9171,14 @@
                 </a:solidFill>
                 <a:latin typeface="Fira Sans"/>
               </a:rPr>
-              <a:t>Cuando los datos crecen</a:t>
+              <a:t>Los propósitos de viaje según el día de la semana</a:t>
             </a:r>
           </a:p>
         </p:txBody>
       </p:sp>
       <p:pic>
         <p:nvPicPr>
-          <p:cNvPr id="4" name="Picture 3" descr="14_escala_datos.png"/>
+          <p:cNvPr id="4" name="Picture 3" descr="10_heatmap_rutinas.png"/>
           <p:cNvPicPr>
             <a:picLocks noChangeAspect="1"/>
           </p:cNvPicPr>
@@ -9062,8 +9192,8 @@
         </p:blipFill>
         <p:spPr>
           <a:xfrm>
-            <a:off x="1417319" y="1143000"/>
-            <a:ext cx="6309360" cy="2324913"/>
+            <a:off x="1649319" y="1143000"/>
+            <a:ext cx="5845360" cy="3154680"/>
           </a:xfrm>
           <a:prstGeom prst="rect">
             <a:avLst/>
@@ -9099,7 +9229,7 @@
                 </a:solidFill>
                 <a:latin typeface="Fira Sans"/>
               </a:rPr>
-              <a:t>PySpark se usa con SQL o con sus propios DataFrames; Dask reparte operaciones estilo Pandas; Polars y DuckDB rinden en una sola máquina.</a:t>
+              <a:t>El heatmap muestra 14 propósitos por 7 días en una sola figura: útil para tablas completas.</a:t>
             </a:r>
           </a:p>
         </p:txBody>
@@ -9195,21 +9325,45 @@
                 </a:solidFill>
                 <a:latin typeface="Fira Sans"/>
               </a:rPr>
-              <a:t>Síntesis</a:t>
-            </a:r>
-          </a:p>
-        </p:txBody>
-      </p:sp>
-      <p:sp>
-        <p:nvSpPr>
-          <p:cNvPr id="4" name="TextBox 3"/>
+              <a:t>Cuando los datos crecen</a:t>
+            </a:r>
+          </a:p>
+        </p:txBody>
+      </p:sp>
+      <p:pic>
+        <p:nvPicPr>
+          <p:cNvPr id="4" name="Picture 3" descr="14_escala_datos.png"/>
+          <p:cNvPicPr>
+            <a:picLocks noChangeAspect="1"/>
+          </p:cNvPicPr>
+          <p:nvPr/>
+        </p:nvPicPr>
+        <p:blipFill>
+          <a:blip r:embed="rId2"/>
+          <a:stretch>
+            <a:fillRect/>
+          </a:stretch>
+        </p:blipFill>
+        <p:spPr>
+          <a:xfrm>
+            <a:off x="1417319" y="1143000"/>
+            <a:ext cx="6309360" cy="2324913"/>
+          </a:xfrm>
+          <a:prstGeom prst="rect">
+            <a:avLst/>
+          </a:prstGeom>
+        </p:spPr>
+      </p:pic>
+      <p:sp>
+        <p:nvSpPr>
+          <p:cNvPr id="5" name="TextBox 4"/>
           <p:cNvSpPr txBox="1"/>
           <p:nvPr/>
         </p:nvSpPr>
         <p:spPr>
           <a:xfrm>
-            <a:off x="704088" y="1353312"/>
-            <a:ext cx="7744968" cy="3300984"/>
+            <a:off x="704088" y="4434840"/>
+            <a:ext cx="7744968" cy="457200"/>
           </a:xfrm>
           <a:prstGeom prst="rect">
             <a:avLst/>
@@ -9222,143 +9376,14 @@
           </a:bodyPr>
           <a:lstStyle/>
           <a:p>
-            <a:pPr>
-              <a:lnSpc>
-                <a:spcPct val="112000"/>
-              </a:lnSpc>
-              <a:spcAft>
-                <a:spcPts val="900"/>
-              </a:spcAft>
-            </a:pPr>
-            <a:r>
-              <a:rPr sz="1800" b="1">
-                <a:solidFill>
-                  <a:srgbClr val="E0A437"/>
-                </a:solidFill>
-                <a:latin typeface="Fira Sans"/>
-              </a:rPr>
-              <a:t>▸ </a:t>
-            </a:r>
-            <a:r>
-              <a:rPr sz="1800" b="0">
-                <a:solidFill>
-                  <a:srgbClr val="000000"/>
-                </a:solidFill>
-                <a:latin typeface="Fira Sans"/>
-              </a:rPr>
-              <a:t>Un modelo es una simplificación con decisiones incorporadas; estimarlo puede buscar inferencia o predicción.</a:t>
-            </a:r>
-          </a:p>
-          <a:p>
-            <a:pPr>
-              <a:lnSpc>
-                <a:spcPct val="112000"/>
-              </a:lnSpc>
-              <a:spcAft>
-                <a:spcPts val="900"/>
-              </a:spcAft>
-            </a:pPr>
-            <a:r>
-              <a:rPr sz="1800" b="1">
-                <a:solidFill>
-                  <a:srgbClr val="E0A437"/>
-                </a:solidFill>
-                <a:latin typeface="Fira Sans"/>
-              </a:rPr>
-              <a:t>▸ </a:t>
-            </a:r>
-            <a:r>
-              <a:rPr sz="1800" b="0">
-                <a:solidFill>
-                  <a:srgbClr val="000000"/>
-                </a:solidFill>
-                <a:latin typeface="Fira Sans"/>
-              </a:rPr>
-              <a:t>Las asociaciones se reportan como asociaciones: la causalidad exige más que datos observacionales.</a:t>
-            </a:r>
-          </a:p>
-          <a:p>
-            <a:pPr>
-              <a:lnSpc>
-                <a:spcPct val="112000"/>
-              </a:lnSpc>
-              <a:spcAft>
-                <a:spcPts val="900"/>
-              </a:spcAft>
-            </a:pPr>
-            <a:r>
-              <a:rPr sz="1800" b="1">
-                <a:solidFill>
-                  <a:srgbClr val="E0A437"/>
-                </a:solidFill>
-                <a:latin typeface="Fira Sans"/>
-              </a:rPr>
-              <a:t>▸ </a:t>
-            </a:r>
-            <a:r>
-              <a:rPr sz="1800" b="0">
-                <a:solidFill>
-                  <a:srgbClr val="000000"/>
-                </a:solidFill>
-                <a:latin typeface="Fira Sans"/>
-              </a:rPr>
-              <a:t>El tipo de la variable, no su dtype, determina qué resúmenes tienen sentido.</a:t>
-            </a:r>
-          </a:p>
-          <a:p>
-            <a:pPr>
-              <a:lnSpc>
-                <a:spcPct val="112000"/>
-              </a:lnSpc>
-              <a:spcAft>
-                <a:spcPts val="900"/>
-              </a:spcAft>
-            </a:pPr>
-            <a:r>
-              <a:rPr sz="1800" b="1">
-                <a:solidFill>
-                  <a:srgbClr val="E0A437"/>
-                </a:solidFill>
-                <a:latin typeface="Fira Sans"/>
-              </a:rPr>
-              <a:t>▸ </a:t>
-            </a:r>
-            <a:r>
-              <a:rPr sz="1800" b="0">
-                <a:solidFill>
-                  <a:srgbClr val="000000"/>
-                </a:solidFill>
-                <a:latin typeface="Fira Sans"/>
-              </a:rPr>
-              <a:t>Con distribuciones asimétricas, la mediana y los percentiles describen mejor lo típico que la media.</a:t>
-            </a:r>
-          </a:p>
-          <a:p>
-            <a:pPr>
-              <a:lnSpc>
-                <a:spcPct val="112000"/>
-              </a:lnSpc>
-              <a:spcAft>
-                <a:spcPts val="900"/>
-              </a:spcAft>
-            </a:pPr>
-            <a:r>
-              <a:rPr sz="1800" b="1">
-                <a:solidFill>
-                  <a:srgbClr val="E0A437"/>
-                </a:solidFill>
-                <a:latin typeface="Fira Sans"/>
-              </a:rPr>
-              <a:t>▸ </a:t>
-            </a:r>
-            <a:r>
-              <a:rPr sz="1800" b="1">
-                <a:solidFill>
-                  <a:srgbClr val="1D3557"/>
-                </a:solidFill>
-                <a:latin typeface="Fira Sans"/>
-              </a:rPr>
-              <a:t>El concepto de la clase: el EDA, examinar los datos antes de modelarlos, preguntando ante cada cifra de quién habla.</a:t>
+            <a:r>
+              <a:rPr sz="1300" b="0">
+                <a:solidFill>
+                  <a:srgbClr val="333333"/>
+                </a:solidFill>
+                <a:latin typeface="Fira Sans"/>
+              </a:rPr>
+              <a:t>PySpark se usa con SQL o con sus propios DataFrames; Dask reparte operaciones estilo Pandas; Polars y DuckDB rinden en una sola máquina.</a:t>
             </a:r>
           </a:p>
         </p:txBody>
@@ -9454,7 +9479,7 @@
                 </a:solidFill>
                 <a:latin typeface="Fira Sans"/>
               </a:rPr>
-              <a:t>Segundo bloque: comienza la Tarea 1</a:t>
+              <a:t>Síntesis</a:t>
             </a:r>
           </a:p>
         </p:txBody>
@@ -9505,91 +9530,7 @@
                 </a:solidFill>
                 <a:latin typeface="Fira Sans"/>
               </a:rPr>
-              <a:t>El retrato de tu comuna: cada pareja adopta una comuna del Gran Santiago.</a:t>
-            </a:r>
-          </a:p>
-          <a:p>
-            <a:pPr>
-              <a:lnSpc>
-                <a:spcPct val="112000"/>
-              </a:lnSpc>
-              <a:spcAft>
-                <a:spcPts val="500"/>
-              </a:spcAft>
-            </a:pPr>
-            <a:r>
-              <a:rPr sz="1400" b="0">
-                <a:solidFill>
-                  <a:srgbClr val="333333"/>
-                </a:solidFill>
-                <a:latin typeface="Fira Sans"/>
-              </a:rPr>
-              <a:t>     ◦  </a:t>
-            </a:r>
-            <a:r>
-              <a:rPr sz="1400" b="0">
-                <a:solidFill>
-                  <a:srgbClr val="333333"/>
-                </a:solidFill>
-                <a:latin typeface="Fira Sans"/>
-              </a:rPr>
-              <a:t>Hoy: elegir la comuna y construir su retrato numérico.</a:t>
-            </a:r>
-          </a:p>
-          <a:p>
-            <a:pPr>
-              <a:lnSpc>
-                <a:spcPct val="112000"/>
-              </a:lnSpc>
-              <a:spcAft>
-                <a:spcPts val="500"/>
-              </a:spcAft>
-            </a:pPr>
-            <a:r>
-              <a:rPr sz="1400" b="0">
-                <a:solidFill>
-                  <a:srgbClr val="333333"/>
-                </a:solidFill>
-                <a:latin typeface="Fira Sans"/>
-              </a:rPr>
-              <a:t>     ◦  </a:t>
-            </a:r>
-            <a:r>
-              <a:rPr sz="1400" b="0">
-                <a:solidFill>
-                  <a:srgbClr val="333333"/>
-                </a:solidFill>
-                <a:latin typeface="Fira Sans"/>
-              </a:rPr>
-              <a:t>Próxima clase: el retrato gráfico, con métodos de visualización.</a:t>
-            </a:r>
-          </a:p>
-          <a:p>
-            <a:pPr>
-              <a:lnSpc>
-                <a:spcPct val="112000"/>
-              </a:lnSpc>
-              <a:spcAft>
-                <a:spcPts val="500"/>
-              </a:spcAft>
-            </a:pPr>
-            <a:r>
-              <a:rPr sz="1400" b="0">
-                <a:solidFill>
-                  <a:srgbClr val="333333"/>
-                </a:solidFill>
-                <a:latin typeface="Fira Sans"/>
-              </a:rPr>
-              <a:t>     ◦  </a:t>
-            </a:r>
-            <a:r>
-              <a:rPr sz="1400" b="0">
-                <a:solidFill>
-                  <a:srgbClr val="333333"/>
-                </a:solidFill>
-                <a:latin typeface="Fira Sans"/>
-              </a:rPr>
-              <a:t>Entrega del retrato completo: jueves 10 de septiembre, por Aula.</a:t>
+              <a:t>Un modelo es una simplificación con decisiones incorporadas; estimarlo puede buscar inferencia o predicción.</a:t>
             </a:r>
           </a:p>
           <a:p>
@@ -9617,7 +9558,7 @@
                 </a:solidFill>
                 <a:latin typeface="Fira Sans"/>
               </a:rPr>
-              <a:t>El enunciado está en evaluaciones/tareas/ y la guía de hoy en actividades/.</a:t>
+              <a:t>Las asociaciones se reportan como asociaciones: la causalidad exige más que datos observacionales.</a:t>
             </a:r>
           </a:p>
           <a:p>
@@ -9639,13 +9580,97 @@
               <a:t>▸ </a:t>
             </a:r>
             <a:r>
+              <a:rPr sz="1800" b="0">
+                <a:solidFill>
+                  <a:srgbClr val="000000"/>
+                </a:solidFill>
+                <a:latin typeface="Fira Sans"/>
+              </a:rPr>
+              <a:t>El tipo de la variable, no su dtype, determina qué resúmenes tienen sentido.</a:t>
+            </a:r>
+          </a:p>
+          <a:p>
+            <a:pPr>
+              <a:lnSpc>
+                <a:spcPct val="112000"/>
+              </a:lnSpc>
+              <a:spcAft>
+                <a:spcPts val="900"/>
+              </a:spcAft>
+            </a:pPr>
+            <a:r>
               <a:rPr sz="1800" b="1">
                 <a:solidFill>
+                  <a:srgbClr val="E0A437"/>
+                </a:solidFill>
+                <a:latin typeface="Fira Sans"/>
+              </a:rPr>
+              <a:t>▸ </a:t>
+            </a:r>
+            <a:r>
+              <a:rPr sz="1800" b="0">
+                <a:solidFill>
+                  <a:srgbClr val="000000"/>
+                </a:solidFill>
+                <a:latin typeface="Fira Sans"/>
+              </a:rPr>
+              <a:t>Con distribuciones asimétricas, la mediana y los percentiles describen mejor lo típico que la media.</a:t>
+            </a:r>
+          </a:p>
+          <a:p>
+            <a:pPr>
+              <a:lnSpc>
+                <a:spcPct val="112000"/>
+              </a:lnSpc>
+              <a:spcAft>
+                <a:spcPts val="900"/>
+              </a:spcAft>
+            </a:pPr>
+            <a:r>
+              <a:rPr sz="1800" b="1">
+                <a:solidFill>
+                  <a:srgbClr val="E0A437"/>
+                </a:solidFill>
+                <a:latin typeface="Fira Sans"/>
+              </a:rPr>
+              <a:t>▸ </a:t>
+            </a:r>
+            <a:r>
+              <a:rPr sz="1800" b="0">
+                <a:solidFill>
+                  <a:srgbClr val="000000"/>
+                </a:solidFill>
+                <a:latin typeface="Fira Sans"/>
+              </a:rPr>
+              <a:t>En una encuesta, primero se define la población y luego se pondera por los factores: la cifra ingenua del 23% sin viajes era en realidad un 15%.</a:t>
+            </a:r>
+          </a:p>
+          <a:p>
+            <a:pPr>
+              <a:lnSpc>
+                <a:spcPct val="112000"/>
+              </a:lnSpc>
+              <a:spcAft>
+                <a:spcPts val="900"/>
+              </a:spcAft>
+            </a:pPr>
+            <a:r>
+              <a:rPr sz="1800" b="1">
+                <a:solidFill>
+                  <a:srgbClr val="E0A437"/>
+                </a:solidFill>
+                <a:latin typeface="Fira Sans"/>
+              </a:rPr>
+              <a:t>▸ </a:t>
+            </a:r>
+            <a:r>
+              <a:rPr sz="1800" b="1">
+                <a:solidFill>
                   <a:srgbClr val="1D3557"/>
                 </a:solidFill>
                 <a:latin typeface="Fira Sans"/>
               </a:rPr>
-              <a:t>Lo que avancen en este bloque ya es parte de la tarea.</a:t>
+              <a:t>El concepto de la clase: el EDA, examinar los datos antes de modelarlos, preguntando ante cada cifra de quién habla.</a:t>
             </a:r>
           </a:p>
         </p:txBody>
@@ -9741,7 +9766,7 @@
                 </a:solidFill>
                 <a:latin typeface="Fira Sans"/>
               </a:rPr>
-              <a:t>Referencias</a:t>
+              <a:t>Segundo bloque: comienza la Tarea 1</a:t>
             </a:r>
           </a:p>
         </p:txBody>
@@ -9792,6 +9817,293 @@
                 </a:solidFill>
                 <a:latin typeface="Fira Sans"/>
               </a:rPr>
+              <a:t>El retrato de tu comuna: cada pareja adopta una comuna del Gran Santiago.</a:t>
+            </a:r>
+          </a:p>
+          <a:p>
+            <a:pPr>
+              <a:lnSpc>
+                <a:spcPct val="112000"/>
+              </a:lnSpc>
+              <a:spcAft>
+                <a:spcPts val="500"/>
+              </a:spcAft>
+            </a:pPr>
+            <a:r>
+              <a:rPr sz="1400" b="0">
+                <a:solidFill>
+                  <a:srgbClr val="333333"/>
+                </a:solidFill>
+                <a:latin typeface="Fira Sans"/>
+              </a:rPr>
+              <a:t>     ◦  </a:t>
+            </a:r>
+            <a:r>
+              <a:rPr sz="1400" b="0">
+                <a:solidFill>
+                  <a:srgbClr val="333333"/>
+                </a:solidFill>
+                <a:latin typeface="Fira Sans"/>
+              </a:rPr>
+              <a:t>Hoy: elegir la comuna y construir su retrato numérico.</a:t>
+            </a:r>
+          </a:p>
+          <a:p>
+            <a:pPr>
+              <a:lnSpc>
+                <a:spcPct val="112000"/>
+              </a:lnSpc>
+              <a:spcAft>
+                <a:spcPts val="500"/>
+              </a:spcAft>
+            </a:pPr>
+            <a:r>
+              <a:rPr sz="1400" b="0">
+                <a:solidFill>
+                  <a:srgbClr val="333333"/>
+                </a:solidFill>
+                <a:latin typeface="Fira Sans"/>
+              </a:rPr>
+              <a:t>     ◦  </a:t>
+            </a:r>
+            <a:r>
+              <a:rPr sz="1400" b="0">
+                <a:solidFill>
+                  <a:srgbClr val="333333"/>
+                </a:solidFill>
+                <a:latin typeface="Fira Sans"/>
+              </a:rPr>
+              <a:t>Próxima clase: el retrato gráfico, con métodos de visualización.</a:t>
+            </a:r>
+          </a:p>
+          <a:p>
+            <a:pPr>
+              <a:lnSpc>
+                <a:spcPct val="112000"/>
+              </a:lnSpc>
+              <a:spcAft>
+                <a:spcPts val="500"/>
+              </a:spcAft>
+            </a:pPr>
+            <a:r>
+              <a:rPr sz="1400" b="0">
+                <a:solidFill>
+                  <a:srgbClr val="333333"/>
+                </a:solidFill>
+                <a:latin typeface="Fira Sans"/>
+              </a:rPr>
+              <a:t>     ◦  </a:t>
+            </a:r>
+            <a:r>
+              <a:rPr sz="1400" b="0">
+                <a:solidFill>
+                  <a:srgbClr val="333333"/>
+                </a:solidFill>
+                <a:latin typeface="Fira Sans"/>
+              </a:rPr>
+              <a:t>Entrega del retrato completo: jueves 10 de septiembre, por Aula.</a:t>
+            </a:r>
+          </a:p>
+          <a:p>
+            <a:pPr>
+              <a:lnSpc>
+                <a:spcPct val="112000"/>
+              </a:lnSpc>
+              <a:spcAft>
+                <a:spcPts val="900"/>
+              </a:spcAft>
+            </a:pPr>
+            <a:r>
+              <a:rPr sz="1800" b="1">
+                <a:solidFill>
+                  <a:srgbClr val="E0A437"/>
+                </a:solidFill>
+                <a:latin typeface="Fira Sans"/>
+              </a:rPr>
+              <a:t>▸ </a:t>
+            </a:r>
+            <a:r>
+              <a:rPr sz="1800" b="0">
+                <a:solidFill>
+                  <a:srgbClr val="000000"/>
+                </a:solidFill>
+                <a:latin typeface="Fira Sans"/>
+              </a:rPr>
+              <a:t>El enunciado está en evaluaciones/tareas/ y la guía de hoy en actividades/.</a:t>
+            </a:r>
+          </a:p>
+          <a:p>
+            <a:pPr>
+              <a:lnSpc>
+                <a:spcPct val="112000"/>
+              </a:lnSpc>
+              <a:spcAft>
+                <a:spcPts val="900"/>
+              </a:spcAft>
+            </a:pPr>
+            <a:r>
+              <a:rPr sz="1800" b="1">
+                <a:solidFill>
+                  <a:srgbClr val="E0A437"/>
+                </a:solidFill>
+                <a:latin typeface="Fira Sans"/>
+              </a:rPr>
+              <a:t>▸ </a:t>
+            </a:r>
+            <a:r>
+              <a:rPr sz="1800" b="1">
+                <a:solidFill>
+                  <a:srgbClr val="1D3557"/>
+                </a:solidFill>
+                <a:latin typeface="Fira Sans"/>
+              </a:rPr>
+              <a:t>Lo que avancen en este bloque ya es parte de la tarea.</a:t>
+            </a:r>
+          </a:p>
+        </p:txBody>
+      </p:sp>
+    </p:spTree>
+  </p:cSld>
+  <p:clrMapOvr>
+    <a:masterClrMapping/>
+  </p:clrMapOvr>
+</p:sld>
+</file>
+
+<file path=ppt/slides/slide38.xml><?xml version="1.0" encoding="utf-8"?>
+<p:sld xmlns:a="http://schemas.openxmlformats.org/drawingml/2006/main" xmlns:p="http://schemas.openxmlformats.org/presentationml/2006/main" xmlns:r="http://schemas.openxmlformats.org/officeDocument/2006/relationships">
+  <p:cSld>
+    <p:spTree>
+      <p:nvGrpSpPr>
+        <p:cNvPr id="1" name=""/>
+        <p:cNvGrpSpPr/>
+        <p:nvPr/>
+      </p:nvGrpSpPr>
+      <p:grpSpPr/>
+      <p:sp>
+        <p:nvSpPr>
+          <p:cNvPr id="2" name="Rectangle 1"/>
+          <p:cNvSpPr/>
+          <p:nvPr/>
+        </p:nvSpPr>
+        <p:spPr>
+          <a:xfrm>
+            <a:off x="0" y="0"/>
+            <a:ext cx="9144000" cy="5138928"/>
+          </a:xfrm>
+          <a:prstGeom prst="rect">
+            <a:avLst/>
+          </a:prstGeom>
+          <a:solidFill>
+            <a:srgbClr val="FAFBFC"/>
+          </a:solidFill>
+          <a:ln>
+            <a:noFill/>
+          </a:ln>
+          <a:effectLst/>
+        </p:spPr>
+        <p:style>
+          <a:lnRef idx="1">
+            <a:schemeClr val="accent1"/>
+          </a:lnRef>
+          <a:fillRef idx="3">
+            <a:schemeClr val="accent1"/>
+          </a:fillRef>
+          <a:effectRef idx="2">
+            <a:schemeClr val="accent1"/>
+          </a:effectRef>
+          <a:fontRef idx="minor">
+            <a:schemeClr val="lt1"/>
+          </a:fontRef>
+        </p:style>
+        <p:txBody>
+          <a:bodyPr rtlCol="0" anchor="ctr"/>
+          <a:lstStyle/>
+          <a:p>
+            <a:pPr algn="ctr"/>
+          </a:p>
+        </p:txBody>
+      </p:sp>
+      <p:sp>
+        <p:nvSpPr>
+          <p:cNvPr id="3" name="TextBox 2"/>
+          <p:cNvSpPr txBox="1"/>
+          <p:nvPr/>
+        </p:nvSpPr>
+        <p:spPr>
+          <a:xfrm>
+            <a:off x="402336" y="301752"/>
+            <a:ext cx="8348472" cy="795528"/>
+          </a:xfrm>
+          <a:prstGeom prst="rect">
+            <a:avLst/>
+          </a:prstGeom>
+          <a:noFill/>
+        </p:spPr>
+        <p:txBody>
+          <a:bodyPr wrap="square">
+            <a:spAutoFit/>
+          </a:bodyPr>
+          <a:lstStyle/>
+          <a:p>
+            <a:r>
+              <a:rPr sz="2800" b="1">
+                <a:solidFill>
+                  <a:srgbClr val="0F0F0F"/>
+                </a:solidFill>
+                <a:latin typeface="Fira Sans"/>
+              </a:rPr>
+              <a:t>Referencias</a:t>
+            </a:r>
+          </a:p>
+        </p:txBody>
+      </p:sp>
+      <p:sp>
+        <p:nvSpPr>
+          <p:cNvPr id="4" name="TextBox 3"/>
+          <p:cNvSpPr txBox="1"/>
+          <p:nvPr/>
+        </p:nvSpPr>
+        <p:spPr>
+          <a:xfrm>
+            <a:off x="704088" y="1353312"/>
+            <a:ext cx="7744968" cy="3300984"/>
+          </a:xfrm>
+          <a:prstGeom prst="rect">
+            <a:avLst/>
+          </a:prstGeom>
+          <a:noFill/>
+        </p:spPr>
+        <p:txBody>
+          <a:bodyPr wrap="square">
+            <a:spAutoFit/>
+          </a:bodyPr>
+          <a:lstStyle/>
+          <a:p>
+            <a:pPr>
+              <a:lnSpc>
+                <a:spcPct val="112000"/>
+              </a:lnSpc>
+              <a:spcAft>
+                <a:spcPts val="900"/>
+              </a:spcAft>
+            </a:pPr>
+            <a:r>
+              <a:rPr sz="1800" b="1">
+                <a:solidFill>
+                  <a:srgbClr val="E0A437"/>
+                </a:solidFill>
+                <a:latin typeface="Fira Sans"/>
+              </a:rPr>
+              <a:t>▸ </a:t>
+            </a:r>
+            <a:r>
+              <a:rPr sz="1800" b="0">
+                <a:solidFill>
+                  <a:srgbClr val="000000"/>
+                </a:solidFill>
+                <a:latin typeface="Fira Sans"/>
+              </a:rPr>
               <a:t>James, G., Witten, D., Hastie, T. y Tibshirani, R. (2023). An Introduction to Statistical Learning with Applications in Python. Springer. Capítulo 2. Descarga gratuita en statlearning.com.</a:t>
             </a:r>
           </a:p>
@@ -9849,6 +10161,34 @@
                 <a:latin typeface="Fira Sans"/>
               </a:rPr>
               <a:t>Tukey, J. W. (1977). Exploratory Data Analysis. Addison-Wesley.</a:t>
+            </a:r>
+          </a:p>
+          <a:p>
+            <a:pPr>
+              <a:lnSpc>
+                <a:spcPct val="112000"/>
+              </a:lnSpc>
+              <a:spcAft>
+                <a:spcPts val="900"/>
+              </a:spcAft>
+            </a:pPr>
+            <a:r>
+              <a:rPr sz="1800" b="1">
+                <a:solidFill>
+                  <a:srgbClr val="E0A437"/>
+                </a:solidFill>
+                <a:latin typeface="Fira Sans"/>
+              </a:rPr>
+              <a:t>▸ </a:t>
+            </a:r>
+            <a:r>
+              <a:rPr sz="1800" b="0">
+                <a:solidFill>
+                  <a:srgbClr val="000000"/>
+                </a:solidFill>
+                <a:latin typeface="Fira Sans"/>
+              </a:rPr>
+              <a:t>Horvitz, D. G. y Thompson, D. J. (1952). A Generalization of Sampling Without Replacement from a Finite Universe. JASA 47(260).</a:t>
             </a:r>
           </a:p>
           <a:p>

--- a/presentaciones/clase02_pandas_eda.pptx
+++ b/presentaciones/clase02_pandas_eda.pptx
@@ -5819,7 +5819,7 @@
                 </a:solidFill>
                 <a:latin typeface="Fira Sans"/>
               </a:rPr>
-              <a:t>El concepto de la clase es el EDA: examinar los datos antes de modelarlos. Los puntos 1 a 4 entregan los lentes; el 6 lo pone en práctica.</a:t>
+              <a:t>El concepto de la clase es el EDA: examinar los datos antes de modelarlos. Los puntos 1 a 4 son sus definiciones de base; el punto 6 lo aplica a la EOD.</a:t>
             </a:r>
           </a:p>
         </p:txBody>

--- a/presentaciones/clase02_pandas_eda.pptx
+++ b/presentaciones/clase02_pandas_eda.pptx
@@ -7431,7 +7431,7 @@
                 </a:solidFill>
                 <a:latin typeface="Fira Sans"/>
               </a:rPr>
-              <a:t>En la EOD: Factor_LaboralNormal (persona) y FactorLaboralNormal (viaje).</a:t>
+              <a:t>Se usa el factor de la unidad analizada: hogar (Factor), persona (Factor_LaboralNormal), viaje (FactorLaboralNormal); dos nombres difieren solo en un guion bajo.</a:t>
             </a:r>
           </a:p>
           <a:p>

--- a/presentaciones/clase02_pandas_eda.pptx
+++ b/presentaciones/clase02_pandas_eda.pptx
@@ -42,7 +42,6 @@
     <p:sldId id="290" r:id="rId41"/>
     <p:sldId id="291" r:id="rId42"/>
     <p:sldId id="292" r:id="rId43"/>
-    <p:sldId id="293" r:id="rId44"/>
   </p:sldIdLst>
   <p:sldSz cx="9144000" cy="5138928" type="screen4x3"/>
   <p:notesSz cx="6858000" cy="9144000"/>
@@ -8888,177 +8887,14 @@
                 </a:solidFill>
                 <a:latin typeface="Fira Sans"/>
               </a:rPr>
-              <a:t>Ingreso y uso de transporte público</a:t>
-            </a:r>
-          </a:p>
-        </p:txBody>
-      </p:sp>
-      <p:sp>
-        <p:nvSpPr>
-          <p:cNvPr id="4" name="TextBox 3"/>
-          <p:cNvSpPr txBox="1"/>
-          <p:nvPr/>
-        </p:nvSpPr>
-        <p:spPr>
-          <a:xfrm>
-            <a:off x="502920" y="1252728"/>
-            <a:ext cx="4023360" cy="3200400"/>
-          </a:xfrm>
-          <a:prstGeom prst="rect">
-            <a:avLst/>
-          </a:prstGeom>
-          <a:noFill/>
-        </p:spPr>
-        <p:txBody>
-          <a:bodyPr wrap="square">
-            <a:spAutoFit/>
-          </a:bodyPr>
-          <a:lstStyle/>
-          <a:p>
-            <a:pPr>
-              <a:lnSpc>
-                <a:spcPct val="112000"/>
-              </a:lnSpc>
-              <a:spcAft>
-                <a:spcPts val="900"/>
-              </a:spcAft>
-            </a:pPr>
-            <a:r>
-              <a:rPr sz="1500" b="1">
-                <a:solidFill>
-                  <a:srgbClr val="E0A437"/>
-                </a:solidFill>
-                <a:latin typeface="Fira Sans"/>
-              </a:rPr>
-              <a:t>▸ </a:t>
-            </a:r>
-            <a:r>
-              <a:rPr sz="1500" b="0">
-                <a:solidFill>
-                  <a:srgbClr val="000000"/>
-                </a:solidFill>
-                <a:latin typeface="Fira Sans"/>
-              </a:rPr>
-              <a:t>Cada punto es una comuna: ingreso medio contra proporción de viajes en transporte público.</a:t>
-            </a:r>
-          </a:p>
-          <a:p>
-            <a:pPr>
-              <a:lnSpc>
-                <a:spcPct val="112000"/>
-              </a:lnSpc>
-              <a:spcAft>
-                <a:spcPts val="500"/>
-              </a:spcAft>
-            </a:pPr>
-            <a:r>
-              <a:rPr sz="1300" b="0">
-                <a:solidFill>
-                  <a:srgbClr val="333333"/>
-                </a:solidFill>
-                <a:latin typeface="Fira Sans"/>
-              </a:rPr>
-              <a:t>     ◦  </a:t>
-            </a:r>
-            <a:r>
-              <a:rPr sz="1300" b="0">
-                <a:solidFill>
-                  <a:srgbClr val="333333"/>
-                </a:solidFill>
-                <a:latin typeface="Fira Sans"/>
-              </a:rPr>
-              <a:t>Periferia (Buin, Melipilla): poco transporte público; la red no llega.</a:t>
-            </a:r>
-          </a:p>
-          <a:p>
-            <a:pPr>
-              <a:lnSpc>
-                <a:spcPct val="112000"/>
-              </a:lnSpc>
-              <a:spcAft>
-                <a:spcPts val="500"/>
-              </a:spcAft>
-            </a:pPr>
-            <a:r>
-              <a:rPr sz="1300" b="0">
-                <a:solidFill>
-                  <a:srgbClr val="333333"/>
-                </a:solidFill>
-                <a:latin typeface="Fira Sans"/>
-              </a:rPr>
-              <a:t>     ◦  </a:t>
-            </a:r>
-            <a:r>
-              <a:rPr sz="1300" b="0">
-                <a:solidFill>
-                  <a:srgbClr val="333333"/>
-                </a:solidFill>
-                <a:latin typeface="Fira Sans"/>
-              </a:rPr>
-              <a:t>Ingresos altos (Vitacura, Lo Barnechea): conectadas, con poco uso.</a:t>
-            </a:r>
-          </a:p>
-          <a:p>
-            <a:pPr>
-              <a:lnSpc>
-                <a:spcPct val="112000"/>
-              </a:lnSpc>
-              <a:spcAft>
-                <a:spcPts val="500"/>
-              </a:spcAft>
-            </a:pPr>
-            <a:r>
-              <a:rPr sz="1300" b="0">
-                <a:solidFill>
-                  <a:srgbClr val="333333"/>
-                </a:solidFill>
-                <a:latin typeface="Fira Sans"/>
-              </a:rPr>
-              <a:t>     ◦  </a:t>
-            </a:r>
-            <a:r>
-              <a:rPr sz="1300" b="0">
-                <a:solidFill>
-                  <a:srgbClr val="333333"/>
-                </a:solidFill>
-                <a:latin typeface="Fira Sans"/>
-              </a:rPr>
-              <a:t>Correlación de Pearson: -0,17. La asociación lineal es débil.</a:t>
-            </a:r>
-          </a:p>
-          <a:p>
-            <a:pPr>
-              <a:lnSpc>
-                <a:spcPct val="112000"/>
-              </a:lnSpc>
-              <a:spcAft>
-                <a:spcPts val="900"/>
-              </a:spcAft>
-            </a:pPr>
-            <a:r>
-              <a:rPr sz="1500" b="1">
-                <a:solidFill>
-                  <a:srgbClr val="E0A437"/>
-                </a:solidFill>
-                <a:latin typeface="Fira Sans"/>
-              </a:rPr>
-              <a:t>▸ </a:t>
-            </a:r>
-            <a:r>
-              <a:rPr sz="1500" b="1">
-                <a:solidFill>
-                  <a:srgbClr val="1D3557"/>
-                </a:solidFill>
-                <a:latin typeface="Fira Sans"/>
-              </a:rPr>
-              <a:t>Como vimos en el marco conceptual: el coeficiente no reemplaza al gráfico, y la asociación no autoriza verbos causales.</a:t>
+              <a:t>Los propósitos de viaje según el día de la semana</a:t>
             </a:r>
           </a:p>
         </p:txBody>
       </p:sp>
       <p:pic>
         <p:nvPicPr>
-          <p:cNvPr id="5" name="Picture 4" descr="09_ingreso_vs_tp.png"/>
+          <p:cNvPr id="4" name="Picture 3" descr="10_heatmap_rutinas.png"/>
           <p:cNvPicPr>
             <a:picLocks noChangeAspect="1"/>
           </p:cNvPicPr>
@@ -9072,14 +8908,48 @@
         </p:blipFill>
         <p:spPr>
           <a:xfrm>
-            <a:off x="4892040" y="1371600"/>
-            <a:ext cx="3840480" cy="2526979"/>
+            <a:off x="1649319" y="1143000"/>
+            <a:ext cx="5845360" cy="3154680"/>
           </a:xfrm>
           <a:prstGeom prst="rect">
             <a:avLst/>
           </a:prstGeom>
         </p:spPr>
       </p:pic>
+      <p:sp>
+        <p:nvSpPr>
+          <p:cNvPr id="5" name="TextBox 4"/>
+          <p:cNvSpPr txBox="1"/>
+          <p:nvPr/>
+        </p:nvSpPr>
+        <p:spPr>
+          <a:xfrm>
+            <a:off x="704088" y="4434840"/>
+            <a:ext cx="7744968" cy="457200"/>
+          </a:xfrm>
+          <a:prstGeom prst="rect">
+            <a:avLst/>
+          </a:prstGeom>
+          <a:noFill/>
+        </p:spPr>
+        <p:txBody>
+          <a:bodyPr wrap="square">
+            <a:spAutoFit/>
+          </a:bodyPr>
+          <a:lstStyle/>
+          <a:p>
+            <a:r>
+              <a:rPr sz="1300" b="0">
+                <a:solidFill>
+                  <a:srgbClr val="333333"/>
+                </a:solidFill>
+                <a:latin typeface="Fira Sans"/>
+              </a:rPr>
+              <a:t>El heatmap muestra 14 propósitos por 7 días en una sola figura: útil para tablas completas.</a:t>
+            </a:r>
+          </a:p>
+        </p:txBody>
+      </p:sp>
     </p:spTree>
   </p:cSld>
   <p:clrMapOvr>
@@ -9171,14 +9041,14 @@
                 </a:solidFill>
                 <a:latin typeface="Fira Sans"/>
               </a:rPr>
-              <a:t>Los propósitos de viaje según el día de la semana</a:t>
+              <a:t>Cuando los datos crecen</a:t>
             </a:r>
           </a:p>
         </p:txBody>
       </p:sp>
       <p:pic>
         <p:nvPicPr>
-          <p:cNvPr id="4" name="Picture 3" descr="10_heatmap_rutinas.png"/>
+          <p:cNvPr id="4" name="Picture 3" descr="14_escala_datos.png"/>
           <p:cNvPicPr>
             <a:picLocks noChangeAspect="1"/>
           </p:cNvPicPr>
@@ -9192,8 +9062,8 @@
         </p:blipFill>
         <p:spPr>
           <a:xfrm>
-            <a:off x="1649319" y="1143000"/>
-            <a:ext cx="5845360" cy="3154680"/>
+            <a:off x="1417319" y="1143000"/>
+            <a:ext cx="6309360" cy="2324913"/>
           </a:xfrm>
           <a:prstGeom prst="rect">
             <a:avLst/>
@@ -9229,7 +9099,7 @@
                 </a:solidFill>
                 <a:latin typeface="Fira Sans"/>
               </a:rPr>
-              <a:t>El heatmap muestra 14 propósitos por 7 días en una sola figura: útil para tablas completas.</a:t>
+              <a:t>PySpark se usa con SQL o con sus propios DataFrames; Dask reparte operaciones estilo Pandas; Polars y DuckDB rinden en una sola máquina.</a:t>
             </a:r>
           </a:p>
         </p:txBody>
@@ -9325,45 +9195,21 @@
                 </a:solidFill>
                 <a:latin typeface="Fira Sans"/>
               </a:rPr>
-              <a:t>Cuando los datos crecen</a:t>
-            </a:r>
-          </a:p>
-        </p:txBody>
-      </p:sp>
-      <p:pic>
-        <p:nvPicPr>
-          <p:cNvPr id="4" name="Picture 3" descr="14_escala_datos.png"/>
-          <p:cNvPicPr>
-            <a:picLocks noChangeAspect="1"/>
-          </p:cNvPicPr>
-          <p:nvPr/>
-        </p:nvPicPr>
-        <p:blipFill>
-          <a:blip r:embed="rId2"/>
-          <a:stretch>
-            <a:fillRect/>
-          </a:stretch>
-        </p:blipFill>
-        <p:spPr>
-          <a:xfrm>
-            <a:off x="1417319" y="1143000"/>
-            <a:ext cx="6309360" cy="2324913"/>
-          </a:xfrm>
-          <a:prstGeom prst="rect">
-            <a:avLst/>
-          </a:prstGeom>
-        </p:spPr>
-      </p:pic>
-      <p:sp>
-        <p:nvSpPr>
-          <p:cNvPr id="5" name="TextBox 4"/>
+              <a:t>Síntesis</a:t>
+            </a:r>
+          </a:p>
+        </p:txBody>
+      </p:sp>
+      <p:sp>
+        <p:nvSpPr>
+          <p:cNvPr id="4" name="TextBox 3"/>
           <p:cNvSpPr txBox="1"/>
           <p:nvPr/>
         </p:nvSpPr>
         <p:spPr>
           <a:xfrm>
-            <a:off x="704088" y="4434840"/>
-            <a:ext cx="7744968" cy="457200"/>
+            <a:off x="704088" y="1353312"/>
+            <a:ext cx="7744968" cy="3300984"/>
           </a:xfrm>
           <a:prstGeom prst="rect">
             <a:avLst/>
@@ -9376,14 +9222,171 @@
           </a:bodyPr>
           <a:lstStyle/>
           <a:p>
-            <a:r>
-              <a:rPr sz="1300" b="0">
-                <a:solidFill>
-                  <a:srgbClr val="333333"/>
-                </a:solidFill>
-                <a:latin typeface="Fira Sans"/>
-              </a:rPr>
-              <a:t>PySpark se usa con SQL o con sus propios DataFrames; Dask reparte operaciones estilo Pandas; Polars y DuckDB rinden en una sola máquina.</a:t>
+            <a:pPr>
+              <a:lnSpc>
+                <a:spcPct val="112000"/>
+              </a:lnSpc>
+              <a:spcAft>
+                <a:spcPts val="900"/>
+              </a:spcAft>
+            </a:pPr>
+            <a:r>
+              <a:rPr sz="1800" b="1">
+                <a:solidFill>
+                  <a:srgbClr val="E0A437"/>
+                </a:solidFill>
+                <a:latin typeface="Fira Sans"/>
+              </a:rPr>
+              <a:t>▸ </a:t>
+            </a:r>
+            <a:r>
+              <a:rPr sz="1800" b="0">
+                <a:solidFill>
+                  <a:srgbClr val="000000"/>
+                </a:solidFill>
+                <a:latin typeface="Fira Sans"/>
+              </a:rPr>
+              <a:t>Un modelo es una simplificación con decisiones incorporadas; estimarlo puede buscar inferencia o predicción.</a:t>
+            </a:r>
+          </a:p>
+          <a:p>
+            <a:pPr>
+              <a:lnSpc>
+                <a:spcPct val="112000"/>
+              </a:lnSpc>
+              <a:spcAft>
+                <a:spcPts val="900"/>
+              </a:spcAft>
+            </a:pPr>
+            <a:r>
+              <a:rPr sz="1800" b="1">
+                <a:solidFill>
+                  <a:srgbClr val="E0A437"/>
+                </a:solidFill>
+                <a:latin typeface="Fira Sans"/>
+              </a:rPr>
+              <a:t>▸ </a:t>
+            </a:r>
+            <a:r>
+              <a:rPr sz="1800" b="0">
+                <a:solidFill>
+                  <a:srgbClr val="000000"/>
+                </a:solidFill>
+                <a:latin typeface="Fira Sans"/>
+              </a:rPr>
+              <a:t>Las asociaciones se reportan como asociaciones: la causalidad exige más que datos observacionales.</a:t>
+            </a:r>
+          </a:p>
+          <a:p>
+            <a:pPr>
+              <a:lnSpc>
+                <a:spcPct val="112000"/>
+              </a:lnSpc>
+              <a:spcAft>
+                <a:spcPts val="900"/>
+              </a:spcAft>
+            </a:pPr>
+            <a:r>
+              <a:rPr sz="1800" b="1">
+                <a:solidFill>
+                  <a:srgbClr val="E0A437"/>
+                </a:solidFill>
+                <a:latin typeface="Fira Sans"/>
+              </a:rPr>
+              <a:t>▸ </a:t>
+            </a:r>
+            <a:r>
+              <a:rPr sz="1800" b="0">
+                <a:solidFill>
+                  <a:srgbClr val="000000"/>
+                </a:solidFill>
+                <a:latin typeface="Fira Sans"/>
+              </a:rPr>
+              <a:t>El tipo de la variable, no su dtype, determina qué resúmenes tienen sentido.</a:t>
+            </a:r>
+          </a:p>
+          <a:p>
+            <a:pPr>
+              <a:lnSpc>
+                <a:spcPct val="112000"/>
+              </a:lnSpc>
+              <a:spcAft>
+                <a:spcPts val="900"/>
+              </a:spcAft>
+            </a:pPr>
+            <a:r>
+              <a:rPr sz="1800" b="1">
+                <a:solidFill>
+                  <a:srgbClr val="E0A437"/>
+                </a:solidFill>
+                <a:latin typeface="Fira Sans"/>
+              </a:rPr>
+              <a:t>▸ </a:t>
+            </a:r>
+            <a:r>
+              <a:rPr sz="1800" b="0">
+                <a:solidFill>
+                  <a:srgbClr val="000000"/>
+                </a:solidFill>
+                <a:latin typeface="Fira Sans"/>
+              </a:rPr>
+              <a:t>Con distribuciones asimétricas, la mediana y los percentiles describen mejor lo típico que la media.</a:t>
+            </a:r>
+          </a:p>
+          <a:p>
+            <a:pPr>
+              <a:lnSpc>
+                <a:spcPct val="112000"/>
+              </a:lnSpc>
+              <a:spcAft>
+                <a:spcPts val="900"/>
+              </a:spcAft>
+            </a:pPr>
+            <a:r>
+              <a:rPr sz="1800" b="1">
+                <a:solidFill>
+                  <a:srgbClr val="E0A437"/>
+                </a:solidFill>
+                <a:latin typeface="Fira Sans"/>
+              </a:rPr>
+              <a:t>▸ </a:t>
+            </a:r>
+            <a:r>
+              <a:rPr sz="1800" b="0">
+                <a:solidFill>
+                  <a:srgbClr val="000000"/>
+                </a:solidFill>
+                <a:latin typeface="Fira Sans"/>
+              </a:rPr>
+              <a:t>En una encuesta, primero se define la población y luego se pondera por los factores: la cifra ingenua del 23% sin viajes era en realidad un 15%.</a:t>
+            </a:r>
+          </a:p>
+          <a:p>
+            <a:pPr>
+              <a:lnSpc>
+                <a:spcPct val="112000"/>
+              </a:lnSpc>
+              <a:spcAft>
+                <a:spcPts val="900"/>
+              </a:spcAft>
+            </a:pPr>
+            <a:r>
+              <a:rPr sz="1800" b="1">
+                <a:solidFill>
+                  <a:srgbClr val="E0A437"/>
+                </a:solidFill>
+                <a:latin typeface="Fira Sans"/>
+              </a:rPr>
+              <a:t>▸ </a:t>
+            </a:r>
+            <a:r>
+              <a:rPr sz="1800" b="1">
+                <a:solidFill>
+                  <a:srgbClr val="1D3557"/>
+                </a:solidFill>
+                <a:latin typeface="Fira Sans"/>
+              </a:rPr>
+              <a:t>El concepto de la clase: el EDA, examinar los datos antes de modelarlos, preguntando ante cada cifra de quién habla.</a:t>
             </a:r>
           </a:p>
         </p:txBody>
@@ -9479,7 +9482,7 @@
                 </a:solidFill>
                 <a:latin typeface="Fira Sans"/>
               </a:rPr>
-              <a:t>Síntesis</a:t>
+              <a:t>Segundo bloque: comienza la Tarea 1</a:t>
             </a:r>
           </a:p>
         </p:txBody>
@@ -9530,7 +9533,91 @@
                 </a:solidFill>
                 <a:latin typeface="Fira Sans"/>
               </a:rPr>
-              <a:t>Un modelo es una simplificación con decisiones incorporadas; estimarlo puede buscar inferencia o predicción.</a:t>
+              <a:t>El retrato de tu comuna: cada pareja adopta una comuna del Gran Santiago.</a:t>
+            </a:r>
+          </a:p>
+          <a:p>
+            <a:pPr>
+              <a:lnSpc>
+                <a:spcPct val="112000"/>
+              </a:lnSpc>
+              <a:spcAft>
+                <a:spcPts val="500"/>
+              </a:spcAft>
+            </a:pPr>
+            <a:r>
+              <a:rPr sz="1400" b="0">
+                <a:solidFill>
+                  <a:srgbClr val="333333"/>
+                </a:solidFill>
+                <a:latin typeface="Fira Sans"/>
+              </a:rPr>
+              <a:t>     ◦  </a:t>
+            </a:r>
+            <a:r>
+              <a:rPr sz="1400" b="0">
+                <a:solidFill>
+                  <a:srgbClr val="333333"/>
+                </a:solidFill>
+                <a:latin typeface="Fira Sans"/>
+              </a:rPr>
+              <a:t>Hoy: elegir la comuna y construir su retrato numérico.</a:t>
+            </a:r>
+          </a:p>
+          <a:p>
+            <a:pPr>
+              <a:lnSpc>
+                <a:spcPct val="112000"/>
+              </a:lnSpc>
+              <a:spcAft>
+                <a:spcPts val="500"/>
+              </a:spcAft>
+            </a:pPr>
+            <a:r>
+              <a:rPr sz="1400" b="0">
+                <a:solidFill>
+                  <a:srgbClr val="333333"/>
+                </a:solidFill>
+                <a:latin typeface="Fira Sans"/>
+              </a:rPr>
+              <a:t>     ◦  </a:t>
+            </a:r>
+            <a:r>
+              <a:rPr sz="1400" b="0">
+                <a:solidFill>
+                  <a:srgbClr val="333333"/>
+                </a:solidFill>
+                <a:latin typeface="Fira Sans"/>
+              </a:rPr>
+              <a:t>Próxima clase: el retrato gráfico, con métodos de visualización.</a:t>
+            </a:r>
+          </a:p>
+          <a:p>
+            <a:pPr>
+              <a:lnSpc>
+                <a:spcPct val="112000"/>
+              </a:lnSpc>
+              <a:spcAft>
+                <a:spcPts val="500"/>
+              </a:spcAft>
+            </a:pPr>
+            <a:r>
+              <a:rPr sz="1400" b="0">
+                <a:solidFill>
+                  <a:srgbClr val="333333"/>
+                </a:solidFill>
+                <a:latin typeface="Fira Sans"/>
+              </a:rPr>
+              <a:t>     ◦  </a:t>
+            </a:r>
+            <a:r>
+              <a:rPr sz="1400" b="0">
+                <a:solidFill>
+                  <a:srgbClr val="333333"/>
+                </a:solidFill>
+                <a:latin typeface="Fira Sans"/>
+              </a:rPr>
+              <a:t>Entrega del retrato completo: jueves 10 de septiembre, por Aula.</a:t>
             </a:r>
           </a:p>
           <a:p>
@@ -9558,7 +9645,7 @@
                 </a:solidFill>
                 <a:latin typeface="Fira Sans"/>
               </a:rPr>
-              <a:t>Las asociaciones se reportan como asociaciones: la causalidad exige más que datos observacionales.</a:t>
+              <a:t>El enunciado está en evaluaciones/tareas/ y la guía de hoy en actividades/.</a:t>
             </a:r>
           </a:p>
           <a:p>
@@ -9580,97 +9667,13 @@
               <a:t>▸ </a:t>
             </a:r>
             <a:r>
-              <a:rPr sz="1800" b="0">
-                <a:solidFill>
-                  <a:srgbClr val="000000"/>
-                </a:solidFill>
-                <a:latin typeface="Fira Sans"/>
-              </a:rPr>
-              <a:t>El tipo de la variable, no su dtype, determina qué resúmenes tienen sentido.</a:t>
-            </a:r>
-          </a:p>
-          <a:p>
-            <a:pPr>
-              <a:lnSpc>
-                <a:spcPct val="112000"/>
-              </a:lnSpc>
-              <a:spcAft>
-                <a:spcPts val="900"/>
-              </a:spcAft>
-            </a:pPr>
-            <a:r>
               <a:rPr sz="1800" b="1">
                 <a:solidFill>
-                  <a:srgbClr val="E0A437"/>
-                </a:solidFill>
-                <a:latin typeface="Fira Sans"/>
-              </a:rPr>
-              <a:t>▸ </a:t>
-            </a:r>
-            <a:r>
-              <a:rPr sz="1800" b="0">
-                <a:solidFill>
-                  <a:srgbClr val="000000"/>
-                </a:solidFill>
-                <a:latin typeface="Fira Sans"/>
-              </a:rPr>
-              <a:t>Con distribuciones asimétricas, la mediana y los percentiles describen mejor lo típico que la media.</a:t>
-            </a:r>
-          </a:p>
-          <a:p>
-            <a:pPr>
-              <a:lnSpc>
-                <a:spcPct val="112000"/>
-              </a:lnSpc>
-              <a:spcAft>
-                <a:spcPts val="900"/>
-              </a:spcAft>
-            </a:pPr>
-            <a:r>
-              <a:rPr sz="1800" b="1">
-                <a:solidFill>
-                  <a:srgbClr val="E0A437"/>
-                </a:solidFill>
-                <a:latin typeface="Fira Sans"/>
-              </a:rPr>
-              <a:t>▸ </a:t>
-            </a:r>
-            <a:r>
-              <a:rPr sz="1800" b="0">
-                <a:solidFill>
-                  <a:srgbClr val="000000"/>
-                </a:solidFill>
-                <a:latin typeface="Fira Sans"/>
-              </a:rPr>
-              <a:t>En una encuesta, primero se define la población y luego se pondera por los factores: la cifra ingenua del 23% sin viajes era en realidad un 15%.</a:t>
-            </a:r>
-          </a:p>
-          <a:p>
-            <a:pPr>
-              <a:lnSpc>
-                <a:spcPct val="112000"/>
-              </a:lnSpc>
-              <a:spcAft>
-                <a:spcPts val="900"/>
-              </a:spcAft>
-            </a:pPr>
-            <a:r>
-              <a:rPr sz="1800" b="1">
-                <a:solidFill>
-                  <a:srgbClr val="E0A437"/>
-                </a:solidFill>
-                <a:latin typeface="Fira Sans"/>
-              </a:rPr>
-              <a:t>▸ </a:t>
-            </a:r>
-            <a:r>
-              <a:rPr sz="1800" b="1">
-                <a:solidFill>
                   <a:srgbClr val="1D3557"/>
                 </a:solidFill>
                 <a:latin typeface="Fira Sans"/>
               </a:rPr>
-              <a:t>El concepto de la clase: el EDA, examinar los datos antes de modelarlos, preguntando ante cada cifra de quién habla.</a:t>
+              <a:t>Lo que avancen en este bloque ya es parte de la tarea.</a:t>
             </a:r>
           </a:p>
         </p:txBody>
@@ -9684,293 +9687,6 @@
 </file>
 
 <file path=ppt/slides/slide37.xml><?xml version="1.0" encoding="utf-8"?>
-<p:sld xmlns:a="http://schemas.openxmlformats.org/drawingml/2006/main" xmlns:p="http://schemas.openxmlformats.org/presentationml/2006/main" xmlns:r="http://schemas.openxmlformats.org/officeDocument/2006/relationships">
-  <p:cSld>
-    <p:spTree>
-      <p:nvGrpSpPr>
-        <p:cNvPr id="1" name=""/>
-        <p:cNvGrpSpPr/>
-        <p:nvPr/>
-      </p:nvGrpSpPr>
-      <p:grpSpPr/>
-      <p:sp>
-        <p:nvSpPr>
-          <p:cNvPr id="2" name="Rectangle 1"/>
-          <p:cNvSpPr/>
-          <p:nvPr/>
-        </p:nvSpPr>
-        <p:spPr>
-          <a:xfrm>
-            <a:off x="0" y="0"/>
-            <a:ext cx="9144000" cy="5138928"/>
-          </a:xfrm>
-          <a:prstGeom prst="rect">
-            <a:avLst/>
-          </a:prstGeom>
-          <a:solidFill>
-            <a:srgbClr val="FAFBFC"/>
-          </a:solidFill>
-          <a:ln>
-            <a:noFill/>
-          </a:ln>
-          <a:effectLst/>
-        </p:spPr>
-        <p:style>
-          <a:lnRef idx="1">
-            <a:schemeClr val="accent1"/>
-          </a:lnRef>
-          <a:fillRef idx="3">
-            <a:schemeClr val="accent1"/>
-          </a:fillRef>
-          <a:effectRef idx="2">
-            <a:schemeClr val="accent1"/>
-          </a:effectRef>
-          <a:fontRef idx="minor">
-            <a:schemeClr val="lt1"/>
-          </a:fontRef>
-        </p:style>
-        <p:txBody>
-          <a:bodyPr rtlCol="0" anchor="ctr"/>
-          <a:lstStyle/>
-          <a:p>
-            <a:pPr algn="ctr"/>
-          </a:p>
-        </p:txBody>
-      </p:sp>
-      <p:sp>
-        <p:nvSpPr>
-          <p:cNvPr id="3" name="TextBox 2"/>
-          <p:cNvSpPr txBox="1"/>
-          <p:nvPr/>
-        </p:nvSpPr>
-        <p:spPr>
-          <a:xfrm>
-            <a:off x="402336" y="301752"/>
-            <a:ext cx="8348472" cy="795528"/>
-          </a:xfrm>
-          <a:prstGeom prst="rect">
-            <a:avLst/>
-          </a:prstGeom>
-          <a:noFill/>
-        </p:spPr>
-        <p:txBody>
-          <a:bodyPr wrap="square">
-            <a:spAutoFit/>
-          </a:bodyPr>
-          <a:lstStyle/>
-          <a:p>
-            <a:r>
-              <a:rPr sz="2800" b="1">
-                <a:solidFill>
-                  <a:srgbClr val="0F0F0F"/>
-                </a:solidFill>
-                <a:latin typeface="Fira Sans"/>
-              </a:rPr>
-              <a:t>Segundo bloque: comienza la Tarea 1</a:t>
-            </a:r>
-          </a:p>
-        </p:txBody>
-      </p:sp>
-      <p:sp>
-        <p:nvSpPr>
-          <p:cNvPr id="4" name="TextBox 3"/>
-          <p:cNvSpPr txBox="1"/>
-          <p:nvPr/>
-        </p:nvSpPr>
-        <p:spPr>
-          <a:xfrm>
-            <a:off x="704088" y="1353312"/>
-            <a:ext cx="7744968" cy="3300984"/>
-          </a:xfrm>
-          <a:prstGeom prst="rect">
-            <a:avLst/>
-          </a:prstGeom>
-          <a:noFill/>
-        </p:spPr>
-        <p:txBody>
-          <a:bodyPr wrap="square">
-            <a:spAutoFit/>
-          </a:bodyPr>
-          <a:lstStyle/>
-          <a:p>
-            <a:pPr>
-              <a:lnSpc>
-                <a:spcPct val="112000"/>
-              </a:lnSpc>
-              <a:spcAft>
-                <a:spcPts val="900"/>
-              </a:spcAft>
-            </a:pPr>
-            <a:r>
-              <a:rPr sz="1800" b="1">
-                <a:solidFill>
-                  <a:srgbClr val="E0A437"/>
-                </a:solidFill>
-                <a:latin typeface="Fira Sans"/>
-              </a:rPr>
-              <a:t>▸ </a:t>
-            </a:r>
-            <a:r>
-              <a:rPr sz="1800" b="0">
-                <a:solidFill>
-                  <a:srgbClr val="000000"/>
-                </a:solidFill>
-                <a:latin typeface="Fira Sans"/>
-              </a:rPr>
-              <a:t>El retrato de tu comuna: cada pareja adopta una comuna del Gran Santiago.</a:t>
-            </a:r>
-          </a:p>
-          <a:p>
-            <a:pPr>
-              <a:lnSpc>
-                <a:spcPct val="112000"/>
-              </a:lnSpc>
-              <a:spcAft>
-                <a:spcPts val="500"/>
-              </a:spcAft>
-            </a:pPr>
-            <a:r>
-              <a:rPr sz="1400" b="0">
-                <a:solidFill>
-                  <a:srgbClr val="333333"/>
-                </a:solidFill>
-                <a:latin typeface="Fira Sans"/>
-              </a:rPr>
-              <a:t>     ◦  </a:t>
-            </a:r>
-            <a:r>
-              <a:rPr sz="1400" b="0">
-                <a:solidFill>
-                  <a:srgbClr val="333333"/>
-                </a:solidFill>
-                <a:latin typeface="Fira Sans"/>
-              </a:rPr>
-              <a:t>Hoy: elegir la comuna y construir su retrato numérico.</a:t>
-            </a:r>
-          </a:p>
-          <a:p>
-            <a:pPr>
-              <a:lnSpc>
-                <a:spcPct val="112000"/>
-              </a:lnSpc>
-              <a:spcAft>
-                <a:spcPts val="500"/>
-              </a:spcAft>
-            </a:pPr>
-            <a:r>
-              <a:rPr sz="1400" b="0">
-                <a:solidFill>
-                  <a:srgbClr val="333333"/>
-                </a:solidFill>
-                <a:latin typeface="Fira Sans"/>
-              </a:rPr>
-              <a:t>     ◦  </a:t>
-            </a:r>
-            <a:r>
-              <a:rPr sz="1400" b="0">
-                <a:solidFill>
-                  <a:srgbClr val="333333"/>
-                </a:solidFill>
-                <a:latin typeface="Fira Sans"/>
-              </a:rPr>
-              <a:t>Próxima clase: el retrato gráfico, con métodos de visualización.</a:t>
-            </a:r>
-          </a:p>
-          <a:p>
-            <a:pPr>
-              <a:lnSpc>
-                <a:spcPct val="112000"/>
-              </a:lnSpc>
-              <a:spcAft>
-                <a:spcPts val="500"/>
-              </a:spcAft>
-            </a:pPr>
-            <a:r>
-              <a:rPr sz="1400" b="0">
-                <a:solidFill>
-                  <a:srgbClr val="333333"/>
-                </a:solidFill>
-                <a:latin typeface="Fira Sans"/>
-              </a:rPr>
-              <a:t>     ◦  </a:t>
-            </a:r>
-            <a:r>
-              <a:rPr sz="1400" b="0">
-                <a:solidFill>
-                  <a:srgbClr val="333333"/>
-                </a:solidFill>
-                <a:latin typeface="Fira Sans"/>
-              </a:rPr>
-              <a:t>Entrega del retrato completo: jueves 10 de septiembre, por Aula.</a:t>
-            </a:r>
-          </a:p>
-          <a:p>
-            <a:pPr>
-              <a:lnSpc>
-                <a:spcPct val="112000"/>
-              </a:lnSpc>
-              <a:spcAft>
-                <a:spcPts val="900"/>
-              </a:spcAft>
-            </a:pPr>
-            <a:r>
-              <a:rPr sz="1800" b="1">
-                <a:solidFill>
-                  <a:srgbClr val="E0A437"/>
-                </a:solidFill>
-                <a:latin typeface="Fira Sans"/>
-              </a:rPr>
-              <a:t>▸ </a:t>
-            </a:r>
-            <a:r>
-              <a:rPr sz="1800" b="0">
-                <a:solidFill>
-                  <a:srgbClr val="000000"/>
-                </a:solidFill>
-                <a:latin typeface="Fira Sans"/>
-              </a:rPr>
-              <a:t>El enunciado está en evaluaciones/tareas/ y la guía de hoy en actividades/.</a:t>
-            </a:r>
-          </a:p>
-          <a:p>
-            <a:pPr>
-              <a:lnSpc>
-                <a:spcPct val="112000"/>
-              </a:lnSpc>
-              <a:spcAft>
-                <a:spcPts val="900"/>
-              </a:spcAft>
-            </a:pPr>
-            <a:r>
-              <a:rPr sz="1800" b="1">
-                <a:solidFill>
-                  <a:srgbClr val="E0A437"/>
-                </a:solidFill>
-                <a:latin typeface="Fira Sans"/>
-              </a:rPr>
-              <a:t>▸ </a:t>
-            </a:r>
-            <a:r>
-              <a:rPr sz="1800" b="1">
-                <a:solidFill>
-                  <a:srgbClr val="1D3557"/>
-                </a:solidFill>
-                <a:latin typeface="Fira Sans"/>
-              </a:rPr>
-              <a:t>Lo que avancen en este bloque ya es parte de la tarea.</a:t>
-            </a:r>
-          </a:p>
-        </p:txBody>
-      </p:sp>
-    </p:spTree>
-  </p:cSld>
-  <p:clrMapOvr>
-    <a:masterClrMapping/>
-  </p:clrMapOvr>
-</p:sld>
-</file>
-
-<file path=ppt/slides/slide38.xml><?xml version="1.0" encoding="utf-8"?>
 <p:sld xmlns:a="http://schemas.openxmlformats.org/drawingml/2006/main" xmlns:p="http://schemas.openxmlformats.org/presentationml/2006/main" xmlns:r="http://schemas.openxmlformats.org/officeDocument/2006/relationships">
   <p:cSld>
     <p:spTree>

--- a/presentaciones/clase02_pandas_eda.pptx
+++ b/presentaciones/clase02_pandas_eda.pptx
@@ -41,7 +41,6 @@
     <p:sldId id="289" r:id="rId40"/>
     <p:sldId id="290" r:id="rId41"/>
     <p:sldId id="291" r:id="rId42"/>
-    <p:sldId id="292" r:id="rId43"/>
   </p:sldIdLst>
   <p:sldSz cx="9144000" cy="5138928" type="screen4x3"/>
   <p:notesSz cx="6858000" cy="9144000"/>
@@ -7346,7 +7345,7 @@
                 </a:solidFill>
                 <a:latin typeface="Fira Sans"/>
               </a:rPr>
-              <a:t>Cada persona i tiene una probabilidad πᵢ de ser incluida en la muestra (según su zona, su hogar y el día asignado).</a:t>
+              <a:t>Cada persona encuestada i trae un factor de expansión wᵢ (el factor de la persona): cuántas personas de la ciudad representa.</a:t>
             </a:r>
           </a:p>
           <a:p>
@@ -7374,63 +7373,7 @@
                 </a:solidFill>
                 <a:latin typeface="Fira Sans"/>
               </a:rPr>
-              <a:t>Su factor es el inverso: wᵢ = 1/πᵢ, las personas de la población que representa (Horvitz y Thompson, 1952).</a:t>
-            </a:r>
-          </a:p>
-          <a:p>
-            <a:pPr>
-              <a:lnSpc>
-                <a:spcPct val="112000"/>
-              </a:lnSpc>
-              <a:spcAft>
-                <a:spcPts val="500"/>
-              </a:spcAft>
-            </a:pPr>
-            <a:r>
-              <a:rPr sz="1300" b="0">
-                <a:solidFill>
-                  <a:srgbClr val="333333"/>
-                </a:solidFill>
-                <a:latin typeface="Fira Sans"/>
-              </a:rPr>
-              <a:t>     ◦  </a:t>
-            </a:r>
-            <a:r>
-              <a:rPr sz="1300" b="0">
-                <a:solidFill>
-                  <a:srgbClr val="333333"/>
-                </a:solidFill>
-                <a:latin typeface="Fira Sans"/>
-              </a:rPr>
-              <a:t>El total poblacional se estima sumando factores; las medias, ponderando por ellos.</a:t>
-            </a:r>
-          </a:p>
-          <a:p>
-            <a:pPr>
-              <a:lnSpc>
-                <a:spcPct val="112000"/>
-              </a:lnSpc>
-              <a:spcAft>
-                <a:spcPts val="500"/>
-              </a:spcAft>
-            </a:pPr>
-            <a:r>
-              <a:rPr sz="1300" b="0">
-                <a:solidFill>
-                  <a:srgbClr val="333333"/>
-                </a:solidFill>
-                <a:latin typeface="Fira Sans"/>
-              </a:rPr>
-              <a:t>     ◦  </a:t>
-            </a:r>
-            <a:r>
-              <a:rPr sz="1300" b="0">
-                <a:solidFill>
-                  <a:srgbClr val="333333"/>
-                </a:solidFill>
-                <a:latin typeface="Fira Sans"/>
-              </a:rPr>
-              <a:t>Se usa el factor de la unidad analizada: hogar (Factor), persona (Factor_LaboralNormal), viaje (FactorLaboralNormal); dos nombres difieren solo en un guion bajo.</a:t>
+              <a:t>Si a una persona le corresponde un factor de 100, esa fila del dataset representa a 100 personas reales de Santiago con características similares.</a:t>
             </a:r>
           </a:p>
           <a:p>
@@ -7452,13 +7395,41 @@
               <a:t>▸ </a:t>
             </a:r>
             <a:r>
+              <a:rPr sz="1500" b="0">
+                <a:solidFill>
+                  <a:srgbClr val="000000"/>
+                </a:solidFill>
+                <a:latin typeface="Fira Sans"/>
+              </a:rPr>
+              <a:t>Sumar los factores estima el tamaño de la población; ponderar por ellos, sus medias (Horvitz y Thompson, 1952).</a:t>
+            </a:r>
+          </a:p>
+          <a:p>
+            <a:pPr>
+              <a:lnSpc>
+                <a:spcPct val="112000"/>
+              </a:lnSpc>
+              <a:spcAft>
+                <a:spcPts val="900"/>
+              </a:spcAft>
+            </a:pPr>
+            <a:r>
               <a:rPr sz="1500" b="1">
                 <a:solidFill>
+                  <a:srgbClr val="E0A437"/>
+                </a:solidFill>
+                <a:latin typeface="Fira Sans"/>
+              </a:rPr>
+              <a:t>▸ </a:t>
+            </a:r>
+            <a:r>
+              <a:rPr sz="1500" b="1">
+                <a:solidFill>
                   <a:srgbClr val="1D3557"/>
                 </a:solidFill>
                 <a:latin typeface="Fira Sans"/>
               </a:rPr>
-              <a:t>Dos pasos, en orden: definir la población (¿día laboral?) y ponderar dentro de ella. La cifra ingenua decía 23% sin viajes; la estimación correcta es 15%.</a:t>
+              <a:t>Se usa el factor de la unidad analizada: Factor (hogar), Factor_LaboralNormal (persona), FactorLaboralNormal (viaje).</a:t>
             </a:r>
           </a:p>
         </p:txBody>
@@ -7480,7 +7451,7 @@
         <p:spPr>
           <a:xfrm>
             <a:off x="4892040" y="1371600"/>
-            <a:ext cx="3840480" cy="3506775"/>
+            <a:ext cx="3840480" cy="2294047"/>
           </a:xfrm>
           <a:prstGeom prst="rect">
             <a:avLst/>
@@ -7578,149 +7549,14 @@
                 </a:solidFill>
                 <a:latin typeface="Fira Sans"/>
               </a:rPr>
-              <a:t>Viajes por persona: los ausentes también cuentan</a:t>
-            </a:r>
-          </a:p>
-        </p:txBody>
-      </p:sp>
-      <p:sp>
-        <p:nvSpPr>
-          <p:cNvPr id="4" name="TextBox 3"/>
-          <p:cNvSpPr txBox="1"/>
-          <p:nvPr/>
-        </p:nvSpPr>
-        <p:spPr>
-          <a:xfrm>
-            <a:off x="502920" y="1252728"/>
-            <a:ext cx="4023360" cy="3200400"/>
-          </a:xfrm>
-          <a:prstGeom prst="rect">
-            <a:avLst/>
-          </a:prstGeom>
-          <a:noFill/>
-        </p:spPr>
-        <p:txBody>
-          <a:bodyPr wrap="square">
-            <a:spAutoFit/>
-          </a:bodyPr>
-          <a:lstStyle/>
-          <a:p>
-            <a:pPr>
-              <a:lnSpc>
-                <a:spcPct val="112000"/>
-              </a:lnSpc>
-              <a:spcAft>
-                <a:spcPts val="900"/>
-              </a:spcAft>
-            </a:pPr>
-            <a:r>
-              <a:rPr sz="1500" b="1">
-                <a:solidFill>
-                  <a:srgbClr val="E0A437"/>
-                </a:solidFill>
-                <a:latin typeface="Fira Sans"/>
-              </a:rPr>
-              <a:t>▸ </a:t>
-            </a:r>
-            <a:r>
-              <a:rPr sz="1500" b="0">
-                <a:solidFill>
-                  <a:srgbClr val="000000"/>
-                </a:solidFill>
-                <a:latin typeface="Fira Sans"/>
-              </a:rPr>
-              <a:t>Quien no viajó no está en la tabla de viajes: hay que reincorporarlo antes de calcular.</a:t>
-            </a:r>
-          </a:p>
-          <a:p>
-            <a:pPr>
-              <a:lnSpc>
-                <a:spcPct val="112000"/>
-              </a:lnSpc>
-              <a:spcAft>
-                <a:spcPts val="900"/>
-              </a:spcAft>
-            </a:pPr>
-            <a:r>
-              <a:rPr sz="1500" b="1">
-                <a:solidFill>
-                  <a:srgbClr val="E0A437"/>
-                </a:solidFill>
-                <a:latin typeface="Fira Sans"/>
-              </a:rPr>
-              <a:t>▸ </a:t>
-            </a:r>
-            <a:r>
-              <a:rPr sz="1500" b="0">
-                <a:solidFill>
-                  <a:srgbClr val="000000"/>
-                </a:solidFill>
-                <a:latin typeface="Fira Sans"/>
-              </a:rPr>
-              <a:t>Ponderado: el 15% de las personas no viajó; media de 2,2 viajes, mediana de 2.</a:t>
-            </a:r>
-          </a:p>
-          <a:p>
-            <a:pPr>
-              <a:lnSpc>
-                <a:spcPct val="112000"/>
-              </a:lnSpc>
-              <a:spcAft>
-                <a:spcPts val="900"/>
-              </a:spcAft>
-            </a:pPr>
-            <a:r>
-              <a:rPr sz="1500" b="1">
-                <a:solidFill>
-                  <a:srgbClr val="E0A437"/>
-                </a:solidFill>
-                <a:latin typeface="Fira Sans"/>
-              </a:rPr>
-              <a:t>▸ </a:t>
-            </a:r>
-            <a:r>
-              <a:rPr sz="1500" b="0">
-                <a:solidFill>
-                  <a:srgbClr val="000000"/>
-                </a:solidFill>
-                <a:latin typeface="Fira Sans"/>
-              </a:rPr>
-              <a:t>El 59% de la población hace exactamente 2 viajes: la ida y la vuelta.</a:t>
-            </a:r>
-          </a:p>
-          <a:p>
-            <a:pPr>
-              <a:lnSpc>
-                <a:spcPct val="112000"/>
-              </a:lnSpc>
-              <a:spcAft>
-                <a:spcPts val="900"/>
-              </a:spcAft>
-            </a:pPr>
-            <a:r>
-              <a:rPr sz="1500" b="1">
-                <a:solidFill>
-                  <a:srgbClr val="E0A437"/>
-                </a:solidFill>
-                <a:latin typeface="Fira Sans"/>
-              </a:rPr>
-              <a:t>▸ </a:t>
-            </a:r>
-            <a:r>
-              <a:rPr sz="1500" b="1">
-                <a:solidFill>
-                  <a:srgbClr val="1D3557"/>
-                </a:solidFill>
-                <a:latin typeface="Fira Sans"/>
-              </a:rPr>
-              <a:t>La cifra ingenua decía 23%: mezclaba días de fin de semana y omitía los factores.</a:t>
+              <a:t>Primero definir la población, luego ponderar</a:t>
             </a:r>
           </a:p>
         </p:txBody>
       </p:sp>
       <p:pic>
         <p:nvPicPr>
-          <p:cNvPr id="5" name="Picture 4" descr="02_viajes_por_persona.png"/>
+          <p:cNvPr id="4" name="Picture 3" descr="22_definir_poblacion.png"/>
           <p:cNvPicPr>
             <a:picLocks noChangeAspect="1"/>
           </p:cNvPicPr>
@@ -7734,14 +7570,48 @@
         </p:blipFill>
         <p:spPr>
           <a:xfrm>
-            <a:off x="4892040" y="1371600"/>
-            <a:ext cx="3840480" cy="2335791"/>
+            <a:off x="1928389" y="1143000"/>
+            <a:ext cx="5287220" cy="3154679"/>
           </a:xfrm>
           <a:prstGeom prst="rect">
             <a:avLst/>
           </a:prstGeom>
         </p:spPr>
       </p:pic>
+      <p:sp>
+        <p:nvSpPr>
+          <p:cNvPr id="5" name="TextBox 4"/>
+          <p:cNvSpPr txBox="1"/>
+          <p:nvPr/>
+        </p:nvSpPr>
+        <p:spPr>
+          <a:xfrm>
+            <a:off x="704088" y="4434840"/>
+            <a:ext cx="7744968" cy="457200"/>
+          </a:xfrm>
+          <a:prstGeom prst="rect">
+            <a:avLst/>
+          </a:prstGeom>
+          <a:noFill/>
+        </p:spPr>
+        <p:txBody>
+          <a:bodyPr wrap="square">
+            <a:spAutoFit/>
+          </a:bodyPr>
+          <a:lstStyle/>
+          <a:p>
+            <a:r>
+              <a:rPr sz="1300" b="0">
+                <a:solidFill>
+                  <a:srgbClr val="333333"/>
+                </a:solidFill>
+                <a:latin typeface="Fira Sans"/>
+              </a:rPr>
+              <a:t>La cifra ingenua mezcla fin de semana y temporada estival; restringir al día laboral normal da 16,2 % y ponderar dentro de ese universo, 15,1 %.</a:t>
+            </a:r>
+          </a:p>
+        </p:txBody>
+      </p:sp>
     </p:spTree>
   </p:cSld>
   <p:clrMapOvr>
@@ -7833,7 +7703,7 @@
                 </a:solidFill>
                 <a:latin typeface="Fira Sans"/>
               </a:rPr>
-              <a:t>El ingreso de los hogares: media y mediana</a:t>
+              <a:t>Viajes por persona: los ausentes también cuentan</a:t>
             </a:r>
           </a:p>
         </p:txBody>
@@ -7884,7 +7754,7 @@
                 </a:solidFill>
                 <a:latin typeface="Fira Sans"/>
               </a:rPr>
-              <a:t>Ponderado por el factor del hogar: media $729.898, mediana $520.000.</a:t>
+              <a:t>Quien no viajó no está en la tabla de viajes: hay que reincorporarlo antes de calcular.</a:t>
             </a:r>
           </a:p>
           <a:p>
@@ -7912,7 +7782,7 @@
                 </a:solidFill>
                 <a:latin typeface="Fira Sans"/>
               </a:rPr>
-              <a:t>La media es un 40% más alta que la mediana.</a:t>
+              <a:t>Ponderado: el 15% de las personas no viajó; media de 2,2 viajes, mediana de 2.</a:t>
             </a:r>
           </a:p>
           <a:p>
@@ -7940,7 +7810,7 @@
                 </a:solidFill>
                 <a:latin typeface="Fira Sans"/>
               </a:rPr>
-              <a:t>Los ingresos altos desplazan el promedio; la mayoría gana menos.</a:t>
+              <a:t>El 59% de la población hace exactamente 2 viajes: la ida y la vuelta.</a:t>
             </a:r>
           </a:p>
           <a:p>
@@ -7968,14 +7838,14 @@
                 </a:solidFill>
                 <a:latin typeface="Fira Sans"/>
               </a:rPr>
-              <a:t>El promedio describe una situación en la que la mayoría no está.</a:t>
+              <a:t>La cifra ingenua decía 23%: mezclaba días de fin de semana y omitía los factores.</a:t>
             </a:r>
           </a:p>
         </p:txBody>
       </p:sp>
       <p:pic>
         <p:nvPicPr>
-          <p:cNvPr id="5" name="Picture 4" descr="01_ingreso_media_mediana.png"/>
+          <p:cNvPr id="5" name="Picture 4" descr="02_viajes_por_persona.png"/>
           <p:cNvPicPr>
             <a:picLocks noChangeAspect="1"/>
           </p:cNvPicPr>
@@ -7990,7 +7860,7 @@
         <p:spPr>
           <a:xfrm>
             <a:off x="4892040" y="1371600"/>
-            <a:ext cx="3840480" cy="2119546"/>
+            <a:ext cx="3840480" cy="2335791"/>
           </a:xfrm>
           <a:prstGeom prst="rect">
             <a:avLst/>
@@ -8195,7 +8065,7 @@
                 </a:solidFill>
                 <a:latin typeface="Fira Sans"/>
               </a:rPr>
-              <a:t>La duración de los viajes: valores extremos</a:t>
+              <a:t>El ingreso de los hogares: media y mediana</a:t>
             </a:r>
           </a:p>
         </p:txBody>
@@ -8246,7 +8116,7 @@
                 </a:solidFill>
                 <a:latin typeface="Fira Sans"/>
               </a:rPr>
-              <a:t>Ponderado por el factor del viaje: mediana de 25 minutos, percentil 95 de 90.</a:t>
+              <a:t>Ponderado por el factor del hogar: media $729.898, mediana $520.000.</a:t>
             </a:r>
           </a:p>
           <a:p>
@@ -8274,7 +8144,7 @@
                 </a:solidFill>
                 <a:latin typeface="Fira Sans"/>
               </a:rPr>
-              <a:t>Máximo registrado: 1.335 minutos, un viaje de 22 horas.</a:t>
+              <a:t>La media es un 40% más alta que la mediana.</a:t>
             </a:r>
           </a:p>
           <a:p>
@@ -8302,7 +8172,7 @@
                 </a:solidFill>
                 <a:latin typeface="Fira Sans"/>
               </a:rPr>
-              <a:t>¿Error de digitación? ¿Turno nocturno mal anotado?</a:t>
+              <a:t>Los ingresos altos desplazan el promedio; la mayoría gana menos.</a:t>
             </a:r>
           </a:p>
           <a:p>
@@ -8330,14 +8200,14 @@
                 </a:solidFill>
                 <a:latin typeface="Fira Sans"/>
               </a:rPr>
-              <a:t>Los valores extremos se investigan y la decisión se declara.</a:t>
+              <a:t>El promedio describe una situación en la que la mayoría no está.</a:t>
             </a:r>
           </a:p>
         </p:txBody>
       </p:sp>
       <p:pic>
         <p:nvPicPr>
-          <p:cNvPr id="5" name="Picture 4" descr="04_duracion_viajes.png"/>
+          <p:cNvPr id="5" name="Picture 4" descr="01_ingreso_media_mediana.png"/>
           <p:cNvPicPr>
             <a:picLocks noChangeAspect="1"/>
           </p:cNvPicPr>
@@ -8352,7 +8222,7 @@
         <p:spPr>
           <a:xfrm>
             <a:off x="4892040" y="1371600"/>
-            <a:ext cx="3840480" cy="2170536"/>
+            <a:ext cx="3840480" cy="2119546"/>
           </a:xfrm>
           <a:prstGeom prst="rect">
             <a:avLst/>
@@ -8450,177 +8320,14 @@
                 </a:solidFill>
                 <a:latin typeface="Fira Sans"/>
               </a:rPr>
-              <a:t>La partición modal del Gran Santiago</a:t>
-            </a:r>
-          </a:p>
-        </p:txBody>
-      </p:sp>
-      <p:sp>
-        <p:nvSpPr>
-          <p:cNvPr id="4" name="TextBox 3"/>
-          <p:cNvSpPr txBox="1"/>
-          <p:nvPr/>
-        </p:nvSpPr>
-        <p:spPr>
-          <a:xfrm>
-            <a:off x="502920" y="1252728"/>
-            <a:ext cx="4023360" cy="3200400"/>
-          </a:xfrm>
-          <a:prstGeom prst="rect">
-            <a:avLst/>
-          </a:prstGeom>
-          <a:noFill/>
-        </p:spPr>
-        <p:txBody>
-          <a:bodyPr wrap="square">
-            <a:spAutoFit/>
-          </a:bodyPr>
-          <a:lstStyle/>
-          <a:p>
-            <a:pPr>
-              <a:lnSpc>
-                <a:spcPct val="112000"/>
-              </a:lnSpc>
-              <a:spcAft>
-                <a:spcPts val="900"/>
-              </a:spcAft>
-            </a:pPr>
-            <a:r>
-              <a:rPr sz="1500" b="1">
-                <a:solidFill>
-                  <a:srgbClr val="E0A437"/>
-                </a:solidFill>
-                <a:latin typeface="Fira Sans"/>
-              </a:rPr>
-              <a:t>▸ </a:t>
-            </a:r>
-            <a:r>
-              <a:rPr sz="1500" b="0">
-                <a:solidFill>
-                  <a:srgbClr val="000000"/>
-                </a:solidFill>
-                <a:latin typeface="Fira Sans"/>
-              </a:rPr>
-              <a:t>Dos merges y un groupby ponderado por factor.</a:t>
-            </a:r>
-          </a:p>
-          <a:p>
-            <a:pPr>
-              <a:lnSpc>
-                <a:spcPct val="112000"/>
-              </a:lnSpc>
-              <a:spcAft>
-                <a:spcPts val="500"/>
-              </a:spcAft>
-            </a:pPr>
-            <a:r>
-              <a:rPr sz="1300" b="0">
-                <a:solidFill>
-                  <a:srgbClr val="333333"/>
-                </a:solidFill>
-                <a:latin typeface="Fira Sans"/>
-              </a:rPr>
-              <a:t>     ◦  </a:t>
-            </a:r>
-            <a:r>
-              <a:rPr sz="1300" b="0">
-                <a:solidFill>
-                  <a:srgbClr val="333333"/>
-                </a:solidFill>
-                <a:latin typeface="Fira Sans"/>
-              </a:rPr>
-              <a:t>Caminata: 34% de los viajes.</a:t>
-            </a:r>
-          </a:p>
-          <a:p>
-            <a:pPr>
-              <a:lnSpc>
-                <a:spcPct val="112000"/>
-              </a:lnSpc>
-              <a:spcAft>
-                <a:spcPts val="500"/>
-              </a:spcAft>
-            </a:pPr>
-            <a:r>
-              <a:rPr sz="1300" b="0">
-                <a:solidFill>
-                  <a:srgbClr val="333333"/>
-                </a:solidFill>
-                <a:latin typeface="Fira Sans"/>
-              </a:rPr>
-              <a:t>     ◦  </a:t>
-            </a:r>
-            <a:r>
-              <a:rPr sz="1300" b="0">
-                <a:solidFill>
-                  <a:srgbClr val="333333"/>
-                </a:solidFill>
-                <a:latin typeface="Fira Sans"/>
-              </a:rPr>
-              <a:t>Transporte público (Bip!): 24%.</a:t>
-            </a:r>
-          </a:p>
-          <a:p>
-            <a:pPr>
-              <a:lnSpc>
-                <a:spcPct val="112000"/>
-              </a:lnSpc>
-              <a:spcAft>
-                <a:spcPts val="500"/>
-              </a:spcAft>
-            </a:pPr>
-            <a:r>
-              <a:rPr sz="1300" b="0">
-                <a:solidFill>
-                  <a:srgbClr val="333333"/>
-                </a:solidFill>
-                <a:latin typeface="Fira Sans"/>
-              </a:rPr>
-              <a:t>     ◦  </a:t>
-            </a:r>
-            <a:r>
-              <a:rPr sz="1300" b="0">
-                <a:solidFill>
-                  <a:srgbClr val="333333"/>
-                </a:solidFill>
-                <a:latin typeface="Fira Sans"/>
-              </a:rPr>
-              <a:t>Auto: 23%.</a:t>
-            </a:r>
-          </a:p>
-          <a:p>
-            <a:pPr>
-              <a:lnSpc>
-                <a:spcPct val="112000"/>
-              </a:lnSpc>
-              <a:spcAft>
-                <a:spcPts val="900"/>
-              </a:spcAft>
-            </a:pPr>
-            <a:r>
-              <a:rPr sz="1500" b="1">
-                <a:solidFill>
-                  <a:srgbClr val="E0A437"/>
-                </a:solidFill>
-                <a:latin typeface="Fira Sans"/>
-              </a:rPr>
-              <a:t>▸ </a:t>
-            </a:r>
-            <a:r>
-              <a:rPr sz="1500" b="1">
-                <a:solidFill>
-                  <a:srgbClr val="1D3557"/>
-                </a:solidFill>
-                <a:latin typeface="Fira Sans"/>
-              </a:rPr>
-              <a:t>Calculada desde los microdatos, con los factores de un día laboral.</a:t>
+              <a:t>El reparto modal difiere entre comunas</a:t>
             </a:r>
           </a:p>
         </p:txBody>
       </p:sp>
       <p:pic>
         <p:nvPicPr>
-          <p:cNvPr id="5" name="Picture 4" descr="03_reparto_modal.png"/>
+          <p:cNvPr id="4" name="Picture 3" descr="08_modo_por_comuna.png"/>
           <p:cNvPicPr>
             <a:picLocks noChangeAspect="1"/>
           </p:cNvPicPr>
@@ -8634,14 +8341,48 @@
         </p:blipFill>
         <p:spPr>
           <a:xfrm>
-            <a:off x="4892040" y="1371600"/>
-            <a:ext cx="3840480" cy="1909061"/>
+            <a:off x="1994250" y="1143000"/>
+            <a:ext cx="5155498" cy="3154679"/>
           </a:xfrm>
           <a:prstGeom prst="rect">
             <a:avLst/>
           </a:prstGeom>
         </p:spPr>
       </p:pic>
+      <p:sp>
+        <p:nvSpPr>
+          <p:cNvPr id="5" name="TextBox 4"/>
+          <p:cNvSpPr txBox="1"/>
+          <p:nvPr/>
+        </p:nvSpPr>
+        <p:spPr>
+          <a:xfrm>
+            <a:off x="704088" y="4434840"/>
+            <a:ext cx="7744968" cy="457200"/>
+          </a:xfrm>
+          <a:prstGeom prst="rect">
+            <a:avLst/>
+          </a:prstGeom>
+          <a:noFill/>
+        </p:spPr>
+        <p:txBody>
+          <a:bodyPr wrap="square">
+            <a:spAutoFit/>
+          </a:bodyPr>
+          <a:lstStyle/>
+          <a:p>
+            <a:r>
+              <a:rPr sz="1300" b="0">
+                <a:solidFill>
+                  <a:srgbClr val="333333"/>
+                </a:solidFill>
+                <a:latin typeface="Fira Sans"/>
+              </a:rPr>
+              <a:t>Normalizar por comuna permite comparar proporciones entre comunas de tamaños muy distintos.</a:t>
+            </a:r>
+          </a:p>
+        </p:txBody>
+      </p:sp>
     </p:spTree>
   </p:cSld>
   <p:clrMapOvr>
@@ -8733,14 +8474,14 @@
                 </a:solidFill>
                 <a:latin typeface="Fira Sans"/>
               </a:rPr>
-              <a:t>El reparto modal difiere entre comunas</a:t>
+              <a:t>Los propósitos de viaje según el día de la semana</a:t>
             </a:r>
           </a:p>
         </p:txBody>
       </p:sp>
       <p:pic>
         <p:nvPicPr>
-          <p:cNvPr id="4" name="Picture 3" descr="08_modo_por_comuna.png"/>
+          <p:cNvPr id="4" name="Picture 3" descr="10_heatmap_rutinas.png"/>
           <p:cNvPicPr>
             <a:picLocks noChangeAspect="1"/>
           </p:cNvPicPr>
@@ -8754,8 +8495,8 @@
         </p:blipFill>
         <p:spPr>
           <a:xfrm>
-            <a:off x="1994250" y="1143000"/>
-            <a:ext cx="5155498" cy="3154679"/>
+            <a:off x="1649319" y="1143000"/>
+            <a:ext cx="5845360" cy="3154680"/>
           </a:xfrm>
           <a:prstGeom prst="rect">
             <a:avLst/>
@@ -8791,7 +8532,7 @@
                 </a:solidFill>
                 <a:latin typeface="Fira Sans"/>
               </a:rPr>
-              <a:t>Normalizar por comuna permite comparar proporciones entre comunas de tamaños muy distintos.</a:t>
+              <a:t>El heatmap muestra 14 propósitos por 7 días en una sola figura: útil para tablas completas.</a:t>
             </a:r>
           </a:p>
         </p:txBody>
@@ -8887,14 +8628,14 @@
                 </a:solidFill>
                 <a:latin typeface="Fira Sans"/>
               </a:rPr>
-              <a:t>Los propósitos de viaje según el día de la semana</a:t>
+              <a:t>Cuando los datos crecen</a:t>
             </a:r>
           </a:p>
         </p:txBody>
       </p:sp>
       <p:pic>
         <p:nvPicPr>
-          <p:cNvPr id="4" name="Picture 3" descr="10_heatmap_rutinas.png"/>
+          <p:cNvPr id="4" name="Picture 3" descr="14_escala_datos.png"/>
           <p:cNvPicPr>
             <a:picLocks noChangeAspect="1"/>
           </p:cNvPicPr>
@@ -8908,8 +8649,8 @@
         </p:blipFill>
         <p:spPr>
           <a:xfrm>
-            <a:off x="1649319" y="1143000"/>
-            <a:ext cx="5845360" cy="3154680"/>
+            <a:off x="1417319" y="1143000"/>
+            <a:ext cx="6309360" cy="2324913"/>
           </a:xfrm>
           <a:prstGeom prst="rect">
             <a:avLst/>
@@ -8945,7 +8686,7 @@
                 </a:solidFill>
                 <a:latin typeface="Fira Sans"/>
               </a:rPr>
-              <a:t>El heatmap muestra 14 propósitos por 7 días en una sola figura: útil para tablas completas.</a:t>
+              <a:t>PySpark se usa con SQL o con sus propios DataFrames; Dask reparte operaciones estilo Pandas; Polars y DuckDB rinden en una sola máquina.</a:t>
             </a:r>
           </a:p>
         </p:txBody>
@@ -9041,45 +8782,21 @@
                 </a:solidFill>
                 <a:latin typeface="Fira Sans"/>
               </a:rPr>
-              <a:t>Cuando los datos crecen</a:t>
-            </a:r>
-          </a:p>
-        </p:txBody>
-      </p:sp>
-      <p:pic>
-        <p:nvPicPr>
-          <p:cNvPr id="4" name="Picture 3" descr="14_escala_datos.png"/>
-          <p:cNvPicPr>
-            <a:picLocks noChangeAspect="1"/>
-          </p:cNvPicPr>
-          <p:nvPr/>
-        </p:nvPicPr>
-        <p:blipFill>
-          <a:blip r:embed="rId2"/>
-          <a:stretch>
-            <a:fillRect/>
-          </a:stretch>
-        </p:blipFill>
-        <p:spPr>
-          <a:xfrm>
-            <a:off x="1417319" y="1143000"/>
-            <a:ext cx="6309360" cy="2324913"/>
-          </a:xfrm>
-          <a:prstGeom prst="rect">
-            <a:avLst/>
-          </a:prstGeom>
-        </p:spPr>
-      </p:pic>
-      <p:sp>
-        <p:nvSpPr>
-          <p:cNvPr id="5" name="TextBox 4"/>
+              <a:t>Síntesis</a:t>
+            </a:r>
+          </a:p>
+        </p:txBody>
+      </p:sp>
+      <p:sp>
+        <p:nvSpPr>
+          <p:cNvPr id="4" name="TextBox 3"/>
           <p:cNvSpPr txBox="1"/>
           <p:nvPr/>
         </p:nvSpPr>
         <p:spPr>
           <a:xfrm>
-            <a:off x="704088" y="4434840"/>
-            <a:ext cx="7744968" cy="457200"/>
+            <a:off x="704088" y="1353312"/>
+            <a:ext cx="7744968" cy="3300984"/>
           </a:xfrm>
           <a:prstGeom prst="rect">
             <a:avLst/>
@@ -9092,14 +8809,171 @@
           </a:bodyPr>
           <a:lstStyle/>
           <a:p>
-            <a:r>
-              <a:rPr sz="1300" b="0">
-                <a:solidFill>
-                  <a:srgbClr val="333333"/>
-                </a:solidFill>
-                <a:latin typeface="Fira Sans"/>
-              </a:rPr>
-              <a:t>PySpark se usa con SQL o con sus propios DataFrames; Dask reparte operaciones estilo Pandas; Polars y DuckDB rinden en una sola máquina.</a:t>
+            <a:pPr>
+              <a:lnSpc>
+                <a:spcPct val="112000"/>
+              </a:lnSpc>
+              <a:spcAft>
+                <a:spcPts val="900"/>
+              </a:spcAft>
+            </a:pPr>
+            <a:r>
+              <a:rPr sz="1800" b="1">
+                <a:solidFill>
+                  <a:srgbClr val="E0A437"/>
+                </a:solidFill>
+                <a:latin typeface="Fira Sans"/>
+              </a:rPr>
+              <a:t>▸ </a:t>
+            </a:r>
+            <a:r>
+              <a:rPr sz="1800" b="0">
+                <a:solidFill>
+                  <a:srgbClr val="000000"/>
+                </a:solidFill>
+                <a:latin typeface="Fira Sans"/>
+              </a:rPr>
+              <a:t>Un modelo es una simplificación con decisiones incorporadas; estimarlo puede buscar inferencia o predicción.</a:t>
+            </a:r>
+          </a:p>
+          <a:p>
+            <a:pPr>
+              <a:lnSpc>
+                <a:spcPct val="112000"/>
+              </a:lnSpc>
+              <a:spcAft>
+                <a:spcPts val="900"/>
+              </a:spcAft>
+            </a:pPr>
+            <a:r>
+              <a:rPr sz="1800" b="1">
+                <a:solidFill>
+                  <a:srgbClr val="E0A437"/>
+                </a:solidFill>
+                <a:latin typeface="Fira Sans"/>
+              </a:rPr>
+              <a:t>▸ </a:t>
+            </a:r>
+            <a:r>
+              <a:rPr sz="1800" b="0">
+                <a:solidFill>
+                  <a:srgbClr val="000000"/>
+                </a:solidFill>
+                <a:latin typeface="Fira Sans"/>
+              </a:rPr>
+              <a:t>Las asociaciones se reportan como asociaciones: la causalidad exige más que datos observacionales.</a:t>
+            </a:r>
+          </a:p>
+          <a:p>
+            <a:pPr>
+              <a:lnSpc>
+                <a:spcPct val="112000"/>
+              </a:lnSpc>
+              <a:spcAft>
+                <a:spcPts val="900"/>
+              </a:spcAft>
+            </a:pPr>
+            <a:r>
+              <a:rPr sz="1800" b="1">
+                <a:solidFill>
+                  <a:srgbClr val="E0A437"/>
+                </a:solidFill>
+                <a:latin typeface="Fira Sans"/>
+              </a:rPr>
+              <a:t>▸ </a:t>
+            </a:r>
+            <a:r>
+              <a:rPr sz="1800" b="0">
+                <a:solidFill>
+                  <a:srgbClr val="000000"/>
+                </a:solidFill>
+                <a:latin typeface="Fira Sans"/>
+              </a:rPr>
+              <a:t>El tipo de la variable, no su dtype, determina qué resúmenes tienen sentido.</a:t>
+            </a:r>
+          </a:p>
+          <a:p>
+            <a:pPr>
+              <a:lnSpc>
+                <a:spcPct val="112000"/>
+              </a:lnSpc>
+              <a:spcAft>
+                <a:spcPts val="900"/>
+              </a:spcAft>
+            </a:pPr>
+            <a:r>
+              <a:rPr sz="1800" b="1">
+                <a:solidFill>
+                  <a:srgbClr val="E0A437"/>
+                </a:solidFill>
+                <a:latin typeface="Fira Sans"/>
+              </a:rPr>
+              <a:t>▸ </a:t>
+            </a:r>
+            <a:r>
+              <a:rPr sz="1800" b="0">
+                <a:solidFill>
+                  <a:srgbClr val="000000"/>
+                </a:solidFill>
+                <a:latin typeface="Fira Sans"/>
+              </a:rPr>
+              <a:t>Con distribuciones asimétricas, la mediana y los percentiles describen mejor lo típico que la media.</a:t>
+            </a:r>
+          </a:p>
+          <a:p>
+            <a:pPr>
+              <a:lnSpc>
+                <a:spcPct val="112000"/>
+              </a:lnSpc>
+              <a:spcAft>
+                <a:spcPts val="900"/>
+              </a:spcAft>
+            </a:pPr>
+            <a:r>
+              <a:rPr sz="1800" b="1">
+                <a:solidFill>
+                  <a:srgbClr val="E0A437"/>
+                </a:solidFill>
+                <a:latin typeface="Fira Sans"/>
+              </a:rPr>
+              <a:t>▸ </a:t>
+            </a:r>
+            <a:r>
+              <a:rPr sz="1800" b="0">
+                <a:solidFill>
+                  <a:srgbClr val="000000"/>
+                </a:solidFill>
+                <a:latin typeface="Fira Sans"/>
+              </a:rPr>
+              <a:t>En una encuesta, primero se define la población y luego se pondera por los factores: la cifra ingenua del 23% sin viajes era en realidad un 15%.</a:t>
+            </a:r>
+          </a:p>
+          <a:p>
+            <a:pPr>
+              <a:lnSpc>
+                <a:spcPct val="112000"/>
+              </a:lnSpc>
+              <a:spcAft>
+                <a:spcPts val="900"/>
+              </a:spcAft>
+            </a:pPr>
+            <a:r>
+              <a:rPr sz="1800" b="1">
+                <a:solidFill>
+                  <a:srgbClr val="E0A437"/>
+                </a:solidFill>
+                <a:latin typeface="Fira Sans"/>
+              </a:rPr>
+              <a:t>▸ </a:t>
+            </a:r>
+            <a:r>
+              <a:rPr sz="1800" b="1">
+                <a:solidFill>
+                  <a:srgbClr val="1D3557"/>
+                </a:solidFill>
+                <a:latin typeface="Fira Sans"/>
+              </a:rPr>
+              <a:t>El concepto de la clase: el EDA, examinar los datos antes de modelarlos, preguntando ante cada cifra de quién habla.</a:t>
             </a:r>
           </a:p>
         </p:txBody>
@@ -9195,7 +9069,7 @@
                 </a:solidFill>
                 <a:latin typeface="Fira Sans"/>
               </a:rPr>
-              <a:t>Síntesis</a:t>
+              <a:t>Segundo bloque: comienza la Tarea 1</a:t>
             </a:r>
           </a:p>
         </p:txBody>
@@ -9246,7 +9120,91 @@
                 </a:solidFill>
                 <a:latin typeface="Fira Sans"/>
               </a:rPr>
-              <a:t>Un modelo es una simplificación con decisiones incorporadas; estimarlo puede buscar inferencia o predicción.</a:t>
+              <a:t>El retrato de tu comuna: cada pareja adopta una comuna del Gran Santiago.</a:t>
+            </a:r>
+          </a:p>
+          <a:p>
+            <a:pPr>
+              <a:lnSpc>
+                <a:spcPct val="112000"/>
+              </a:lnSpc>
+              <a:spcAft>
+                <a:spcPts val="500"/>
+              </a:spcAft>
+            </a:pPr>
+            <a:r>
+              <a:rPr sz="1400" b="0">
+                <a:solidFill>
+                  <a:srgbClr val="333333"/>
+                </a:solidFill>
+                <a:latin typeface="Fira Sans"/>
+              </a:rPr>
+              <a:t>     ◦  </a:t>
+            </a:r>
+            <a:r>
+              <a:rPr sz="1400" b="0">
+                <a:solidFill>
+                  <a:srgbClr val="333333"/>
+                </a:solidFill>
+                <a:latin typeface="Fira Sans"/>
+              </a:rPr>
+              <a:t>Hoy: elegir la comuna y construir su retrato numérico.</a:t>
+            </a:r>
+          </a:p>
+          <a:p>
+            <a:pPr>
+              <a:lnSpc>
+                <a:spcPct val="112000"/>
+              </a:lnSpc>
+              <a:spcAft>
+                <a:spcPts val="500"/>
+              </a:spcAft>
+            </a:pPr>
+            <a:r>
+              <a:rPr sz="1400" b="0">
+                <a:solidFill>
+                  <a:srgbClr val="333333"/>
+                </a:solidFill>
+                <a:latin typeface="Fira Sans"/>
+              </a:rPr>
+              <a:t>     ◦  </a:t>
+            </a:r>
+            <a:r>
+              <a:rPr sz="1400" b="0">
+                <a:solidFill>
+                  <a:srgbClr val="333333"/>
+                </a:solidFill>
+                <a:latin typeface="Fira Sans"/>
+              </a:rPr>
+              <a:t>Próxima clase: el retrato gráfico, con métodos de visualización.</a:t>
+            </a:r>
+          </a:p>
+          <a:p>
+            <a:pPr>
+              <a:lnSpc>
+                <a:spcPct val="112000"/>
+              </a:lnSpc>
+              <a:spcAft>
+                <a:spcPts val="500"/>
+              </a:spcAft>
+            </a:pPr>
+            <a:r>
+              <a:rPr sz="1400" b="0">
+                <a:solidFill>
+                  <a:srgbClr val="333333"/>
+                </a:solidFill>
+                <a:latin typeface="Fira Sans"/>
+              </a:rPr>
+              <a:t>     ◦  </a:t>
+            </a:r>
+            <a:r>
+              <a:rPr sz="1400" b="0">
+                <a:solidFill>
+                  <a:srgbClr val="333333"/>
+                </a:solidFill>
+                <a:latin typeface="Fira Sans"/>
+              </a:rPr>
+              <a:t>Entrega del retrato completo: jueves 10 de septiembre, por Aula.</a:t>
             </a:r>
           </a:p>
           <a:p>
@@ -9274,7 +9232,7 @@
                 </a:solidFill>
                 <a:latin typeface="Fira Sans"/>
               </a:rPr>
-              <a:t>Las asociaciones se reportan como asociaciones: la causalidad exige más que datos observacionales.</a:t>
+              <a:t>El enunciado está en evaluaciones/tareas/ y la guía de hoy en actividades/.</a:t>
             </a:r>
           </a:p>
           <a:p>
@@ -9296,97 +9254,13 @@
               <a:t>▸ </a:t>
             </a:r>
             <a:r>
-              <a:rPr sz="1800" b="0">
-                <a:solidFill>
-                  <a:srgbClr val="000000"/>
-                </a:solidFill>
-                <a:latin typeface="Fira Sans"/>
-              </a:rPr>
-              <a:t>El tipo de la variable, no su dtype, determina qué resúmenes tienen sentido.</a:t>
-            </a:r>
-          </a:p>
-          <a:p>
-            <a:pPr>
-              <a:lnSpc>
-                <a:spcPct val="112000"/>
-              </a:lnSpc>
-              <a:spcAft>
-                <a:spcPts val="900"/>
-              </a:spcAft>
-            </a:pPr>
-            <a:r>
               <a:rPr sz="1800" b="1">
                 <a:solidFill>
-                  <a:srgbClr val="E0A437"/>
-                </a:solidFill>
-                <a:latin typeface="Fira Sans"/>
-              </a:rPr>
-              <a:t>▸ </a:t>
-            </a:r>
-            <a:r>
-              <a:rPr sz="1800" b="0">
-                <a:solidFill>
-                  <a:srgbClr val="000000"/>
-                </a:solidFill>
-                <a:latin typeface="Fira Sans"/>
-              </a:rPr>
-              <a:t>Con distribuciones asimétricas, la mediana y los percentiles describen mejor lo típico que la media.</a:t>
-            </a:r>
-          </a:p>
-          <a:p>
-            <a:pPr>
-              <a:lnSpc>
-                <a:spcPct val="112000"/>
-              </a:lnSpc>
-              <a:spcAft>
-                <a:spcPts val="900"/>
-              </a:spcAft>
-            </a:pPr>
-            <a:r>
-              <a:rPr sz="1800" b="1">
-                <a:solidFill>
-                  <a:srgbClr val="E0A437"/>
-                </a:solidFill>
-                <a:latin typeface="Fira Sans"/>
-              </a:rPr>
-              <a:t>▸ </a:t>
-            </a:r>
-            <a:r>
-              <a:rPr sz="1800" b="0">
-                <a:solidFill>
-                  <a:srgbClr val="000000"/>
-                </a:solidFill>
-                <a:latin typeface="Fira Sans"/>
-              </a:rPr>
-              <a:t>En una encuesta, primero se define la población y luego se pondera por los factores: la cifra ingenua del 23% sin viajes era en realidad un 15%.</a:t>
-            </a:r>
-          </a:p>
-          <a:p>
-            <a:pPr>
-              <a:lnSpc>
-                <a:spcPct val="112000"/>
-              </a:lnSpc>
-              <a:spcAft>
-                <a:spcPts val="900"/>
-              </a:spcAft>
-            </a:pPr>
-            <a:r>
-              <a:rPr sz="1800" b="1">
-                <a:solidFill>
-                  <a:srgbClr val="E0A437"/>
-                </a:solidFill>
-                <a:latin typeface="Fira Sans"/>
-              </a:rPr>
-              <a:t>▸ </a:t>
-            </a:r>
-            <a:r>
-              <a:rPr sz="1800" b="1">
-                <a:solidFill>
                   <a:srgbClr val="1D3557"/>
                 </a:solidFill>
                 <a:latin typeface="Fira Sans"/>
               </a:rPr>
-              <a:t>El concepto de la clase: el EDA, examinar los datos antes de modelarlos, preguntando ante cada cifra de quién habla.</a:t>
+              <a:t>Lo que avancen en este bloque ya es parte de la tarea.</a:t>
             </a:r>
           </a:p>
         </p:txBody>
@@ -9400,293 +9274,6 @@
 </file>
 
 <file path=ppt/slides/slide36.xml><?xml version="1.0" encoding="utf-8"?>
-<p:sld xmlns:a="http://schemas.openxmlformats.org/drawingml/2006/main" xmlns:p="http://schemas.openxmlformats.org/presentationml/2006/main" xmlns:r="http://schemas.openxmlformats.org/officeDocument/2006/relationships">
-  <p:cSld>
-    <p:spTree>
-      <p:nvGrpSpPr>
-        <p:cNvPr id="1" name=""/>
-        <p:cNvGrpSpPr/>
-        <p:nvPr/>
-      </p:nvGrpSpPr>
-      <p:grpSpPr/>
-      <p:sp>
-        <p:nvSpPr>
-          <p:cNvPr id="2" name="Rectangle 1"/>
-          <p:cNvSpPr/>
-          <p:nvPr/>
-        </p:nvSpPr>
-        <p:spPr>
-          <a:xfrm>
-            <a:off x="0" y="0"/>
-            <a:ext cx="9144000" cy="5138928"/>
-          </a:xfrm>
-          <a:prstGeom prst="rect">
-            <a:avLst/>
-          </a:prstGeom>
-          <a:solidFill>
-            <a:srgbClr val="FAFBFC"/>
-          </a:solidFill>
-          <a:ln>
-            <a:noFill/>
-          </a:ln>
-          <a:effectLst/>
-        </p:spPr>
-        <p:style>
-          <a:lnRef idx="1">
-            <a:schemeClr val="accent1"/>
-          </a:lnRef>
-          <a:fillRef idx="3">
-            <a:schemeClr val="accent1"/>
-          </a:fillRef>
-          <a:effectRef idx="2">
-            <a:schemeClr val="accent1"/>
-          </a:effectRef>
-          <a:fontRef idx="minor">
-            <a:schemeClr val="lt1"/>
-          </a:fontRef>
-        </p:style>
-        <p:txBody>
-          <a:bodyPr rtlCol="0" anchor="ctr"/>
-          <a:lstStyle/>
-          <a:p>
-            <a:pPr algn="ctr"/>
-          </a:p>
-        </p:txBody>
-      </p:sp>
-      <p:sp>
-        <p:nvSpPr>
-          <p:cNvPr id="3" name="TextBox 2"/>
-          <p:cNvSpPr txBox="1"/>
-          <p:nvPr/>
-        </p:nvSpPr>
-        <p:spPr>
-          <a:xfrm>
-            <a:off x="402336" y="301752"/>
-            <a:ext cx="8348472" cy="795528"/>
-          </a:xfrm>
-          <a:prstGeom prst="rect">
-            <a:avLst/>
-          </a:prstGeom>
-          <a:noFill/>
-        </p:spPr>
-        <p:txBody>
-          <a:bodyPr wrap="square">
-            <a:spAutoFit/>
-          </a:bodyPr>
-          <a:lstStyle/>
-          <a:p>
-            <a:r>
-              <a:rPr sz="2800" b="1">
-                <a:solidFill>
-                  <a:srgbClr val="0F0F0F"/>
-                </a:solidFill>
-                <a:latin typeface="Fira Sans"/>
-              </a:rPr>
-              <a:t>Segundo bloque: comienza la Tarea 1</a:t>
-            </a:r>
-          </a:p>
-        </p:txBody>
-      </p:sp>
-      <p:sp>
-        <p:nvSpPr>
-          <p:cNvPr id="4" name="TextBox 3"/>
-          <p:cNvSpPr txBox="1"/>
-          <p:nvPr/>
-        </p:nvSpPr>
-        <p:spPr>
-          <a:xfrm>
-            <a:off x="704088" y="1353312"/>
-            <a:ext cx="7744968" cy="3300984"/>
-          </a:xfrm>
-          <a:prstGeom prst="rect">
-            <a:avLst/>
-          </a:prstGeom>
-          <a:noFill/>
-        </p:spPr>
-        <p:txBody>
-          <a:bodyPr wrap="square">
-            <a:spAutoFit/>
-          </a:bodyPr>
-          <a:lstStyle/>
-          <a:p>
-            <a:pPr>
-              <a:lnSpc>
-                <a:spcPct val="112000"/>
-              </a:lnSpc>
-              <a:spcAft>
-                <a:spcPts val="900"/>
-              </a:spcAft>
-            </a:pPr>
-            <a:r>
-              <a:rPr sz="1800" b="1">
-                <a:solidFill>
-                  <a:srgbClr val="E0A437"/>
-                </a:solidFill>
-                <a:latin typeface="Fira Sans"/>
-              </a:rPr>
-              <a:t>▸ </a:t>
-            </a:r>
-            <a:r>
-              <a:rPr sz="1800" b="0">
-                <a:solidFill>
-                  <a:srgbClr val="000000"/>
-                </a:solidFill>
-                <a:latin typeface="Fira Sans"/>
-              </a:rPr>
-              <a:t>El retrato de tu comuna: cada pareja adopta una comuna del Gran Santiago.</a:t>
-            </a:r>
-          </a:p>
-          <a:p>
-            <a:pPr>
-              <a:lnSpc>
-                <a:spcPct val="112000"/>
-              </a:lnSpc>
-              <a:spcAft>
-                <a:spcPts val="500"/>
-              </a:spcAft>
-            </a:pPr>
-            <a:r>
-              <a:rPr sz="1400" b="0">
-                <a:solidFill>
-                  <a:srgbClr val="333333"/>
-                </a:solidFill>
-                <a:latin typeface="Fira Sans"/>
-              </a:rPr>
-              <a:t>     ◦  </a:t>
-            </a:r>
-            <a:r>
-              <a:rPr sz="1400" b="0">
-                <a:solidFill>
-                  <a:srgbClr val="333333"/>
-                </a:solidFill>
-                <a:latin typeface="Fira Sans"/>
-              </a:rPr>
-              <a:t>Hoy: elegir la comuna y construir su retrato numérico.</a:t>
-            </a:r>
-          </a:p>
-          <a:p>
-            <a:pPr>
-              <a:lnSpc>
-                <a:spcPct val="112000"/>
-              </a:lnSpc>
-              <a:spcAft>
-                <a:spcPts val="500"/>
-              </a:spcAft>
-            </a:pPr>
-            <a:r>
-              <a:rPr sz="1400" b="0">
-                <a:solidFill>
-                  <a:srgbClr val="333333"/>
-                </a:solidFill>
-                <a:latin typeface="Fira Sans"/>
-              </a:rPr>
-              <a:t>     ◦  </a:t>
-            </a:r>
-            <a:r>
-              <a:rPr sz="1400" b="0">
-                <a:solidFill>
-                  <a:srgbClr val="333333"/>
-                </a:solidFill>
-                <a:latin typeface="Fira Sans"/>
-              </a:rPr>
-              <a:t>Próxima clase: el retrato gráfico, con métodos de visualización.</a:t>
-            </a:r>
-          </a:p>
-          <a:p>
-            <a:pPr>
-              <a:lnSpc>
-                <a:spcPct val="112000"/>
-              </a:lnSpc>
-              <a:spcAft>
-                <a:spcPts val="500"/>
-              </a:spcAft>
-            </a:pPr>
-            <a:r>
-              <a:rPr sz="1400" b="0">
-                <a:solidFill>
-                  <a:srgbClr val="333333"/>
-                </a:solidFill>
-                <a:latin typeface="Fira Sans"/>
-              </a:rPr>
-              <a:t>     ◦  </a:t>
-            </a:r>
-            <a:r>
-              <a:rPr sz="1400" b="0">
-                <a:solidFill>
-                  <a:srgbClr val="333333"/>
-                </a:solidFill>
-                <a:latin typeface="Fira Sans"/>
-              </a:rPr>
-              <a:t>Entrega del retrato completo: jueves 10 de septiembre, por Aula.</a:t>
-            </a:r>
-          </a:p>
-          <a:p>
-            <a:pPr>
-              <a:lnSpc>
-                <a:spcPct val="112000"/>
-              </a:lnSpc>
-              <a:spcAft>
-                <a:spcPts val="900"/>
-              </a:spcAft>
-            </a:pPr>
-            <a:r>
-              <a:rPr sz="1800" b="1">
-                <a:solidFill>
-                  <a:srgbClr val="E0A437"/>
-                </a:solidFill>
-                <a:latin typeface="Fira Sans"/>
-              </a:rPr>
-              <a:t>▸ </a:t>
-            </a:r>
-            <a:r>
-              <a:rPr sz="1800" b="0">
-                <a:solidFill>
-                  <a:srgbClr val="000000"/>
-                </a:solidFill>
-                <a:latin typeface="Fira Sans"/>
-              </a:rPr>
-              <a:t>El enunciado está en evaluaciones/tareas/ y la guía de hoy en actividades/.</a:t>
-            </a:r>
-          </a:p>
-          <a:p>
-            <a:pPr>
-              <a:lnSpc>
-                <a:spcPct val="112000"/>
-              </a:lnSpc>
-              <a:spcAft>
-                <a:spcPts val="900"/>
-              </a:spcAft>
-            </a:pPr>
-            <a:r>
-              <a:rPr sz="1800" b="1">
-                <a:solidFill>
-                  <a:srgbClr val="E0A437"/>
-                </a:solidFill>
-                <a:latin typeface="Fira Sans"/>
-              </a:rPr>
-              <a:t>▸ </a:t>
-            </a:r>
-            <a:r>
-              <a:rPr sz="1800" b="1">
-                <a:solidFill>
-                  <a:srgbClr val="1D3557"/>
-                </a:solidFill>
-                <a:latin typeface="Fira Sans"/>
-              </a:rPr>
-              <a:t>Lo que avancen en este bloque ya es parte de la tarea.</a:t>
-            </a:r>
-          </a:p>
-        </p:txBody>
-      </p:sp>
-    </p:spTree>
-  </p:cSld>
-  <p:clrMapOvr>
-    <a:masterClrMapping/>
-  </p:clrMapOvr>
-</p:sld>
-</file>
-
-<file path=ppt/slides/slide37.xml><?xml version="1.0" encoding="utf-8"?>
 <p:sld xmlns:a="http://schemas.openxmlformats.org/drawingml/2006/main" xmlns:p="http://schemas.openxmlformats.org/presentationml/2006/main" xmlns:r="http://schemas.openxmlformats.org/officeDocument/2006/relationships">
   <p:cSld>
     <p:spTree>

--- a/presentaciones/clase02_pandas_eda.pptx
+++ b/presentaciones/clase02_pandas_eda.pptx
@@ -40,7 +40,6 @@
     <p:sldId id="288" r:id="rId39"/>
     <p:sldId id="289" r:id="rId40"/>
     <p:sldId id="290" r:id="rId41"/>
-    <p:sldId id="291" r:id="rId42"/>
   </p:sldIdLst>
   <p:sldSz cx="9144000" cy="5138928" type="screen4x3"/>
   <p:notesSz cx="6858000" cy="9144000"/>
@@ -7703,7 +7702,7 @@
                 </a:solidFill>
                 <a:latin typeface="Fira Sans"/>
               </a:rPr>
-              <a:t>Viajes por persona: los ausentes también cuentan</a:t>
+              <a:t>El ingreso de los hogares: media y mediana</a:t>
             </a:r>
           </a:p>
         </p:txBody>
@@ -7754,7 +7753,7 @@
                 </a:solidFill>
                 <a:latin typeface="Fira Sans"/>
               </a:rPr>
-              <a:t>Quien no viajó no está en la tabla de viajes: hay que reincorporarlo antes de calcular.</a:t>
+              <a:t>Ponderado por el factor del hogar: media $729.898, mediana $520.000.</a:t>
             </a:r>
           </a:p>
           <a:p>
@@ -7782,7 +7781,7 @@
                 </a:solidFill>
                 <a:latin typeface="Fira Sans"/>
               </a:rPr>
-              <a:t>Ponderado: el 15% de las personas no viajó; media de 2,2 viajes, mediana de 2.</a:t>
+              <a:t>La media es un 40% más alta que la mediana.</a:t>
             </a:r>
           </a:p>
           <a:p>
@@ -7810,7 +7809,7 @@
                 </a:solidFill>
                 <a:latin typeface="Fira Sans"/>
               </a:rPr>
-              <a:t>El 59% de la población hace exactamente 2 viajes: la ida y la vuelta.</a:t>
+              <a:t>Los ingresos altos desplazan el promedio; la mayoría gana menos.</a:t>
             </a:r>
           </a:p>
           <a:p>
@@ -7838,14 +7837,14 @@
                 </a:solidFill>
                 <a:latin typeface="Fira Sans"/>
               </a:rPr>
-              <a:t>La cifra ingenua decía 23%: mezclaba días de fin de semana y omitía los factores.</a:t>
+              <a:t>El promedio describe una situación en la que la mayoría no está.</a:t>
             </a:r>
           </a:p>
         </p:txBody>
       </p:sp>
       <p:pic>
         <p:nvPicPr>
-          <p:cNvPr id="5" name="Picture 4" descr="02_viajes_por_persona.png"/>
+          <p:cNvPr id="5" name="Picture 4" descr="01_ingreso_media_mediana.png"/>
           <p:cNvPicPr>
             <a:picLocks noChangeAspect="1"/>
           </p:cNvPicPr>
@@ -7860,7 +7859,7 @@
         <p:spPr>
           <a:xfrm>
             <a:off x="4892040" y="1371600"/>
-            <a:ext cx="3840480" cy="2335791"/>
+            <a:ext cx="3840480" cy="2119546"/>
           </a:xfrm>
           <a:prstGeom prst="rect">
             <a:avLst/>
@@ -8065,149 +8064,14 @@
                 </a:solidFill>
                 <a:latin typeface="Fira Sans"/>
               </a:rPr>
-              <a:t>El ingreso de los hogares: media y mediana</a:t>
-            </a:r>
-          </a:p>
-        </p:txBody>
-      </p:sp>
-      <p:sp>
-        <p:nvSpPr>
-          <p:cNvPr id="4" name="TextBox 3"/>
-          <p:cNvSpPr txBox="1"/>
-          <p:nvPr/>
-        </p:nvSpPr>
-        <p:spPr>
-          <a:xfrm>
-            <a:off x="502920" y="1252728"/>
-            <a:ext cx="4023360" cy="3200400"/>
-          </a:xfrm>
-          <a:prstGeom prst="rect">
-            <a:avLst/>
-          </a:prstGeom>
-          <a:noFill/>
-        </p:spPr>
-        <p:txBody>
-          <a:bodyPr wrap="square">
-            <a:spAutoFit/>
-          </a:bodyPr>
-          <a:lstStyle/>
-          <a:p>
-            <a:pPr>
-              <a:lnSpc>
-                <a:spcPct val="112000"/>
-              </a:lnSpc>
-              <a:spcAft>
-                <a:spcPts val="900"/>
-              </a:spcAft>
-            </a:pPr>
-            <a:r>
-              <a:rPr sz="1500" b="1">
-                <a:solidFill>
-                  <a:srgbClr val="E0A437"/>
-                </a:solidFill>
-                <a:latin typeface="Fira Sans"/>
-              </a:rPr>
-              <a:t>▸ </a:t>
-            </a:r>
-            <a:r>
-              <a:rPr sz="1500" b="0">
-                <a:solidFill>
-                  <a:srgbClr val="000000"/>
-                </a:solidFill>
-                <a:latin typeface="Fira Sans"/>
-              </a:rPr>
-              <a:t>Ponderado por el factor del hogar: media $729.898, mediana $520.000.</a:t>
-            </a:r>
-          </a:p>
-          <a:p>
-            <a:pPr>
-              <a:lnSpc>
-                <a:spcPct val="112000"/>
-              </a:lnSpc>
-              <a:spcAft>
-                <a:spcPts val="900"/>
-              </a:spcAft>
-            </a:pPr>
-            <a:r>
-              <a:rPr sz="1500" b="1">
-                <a:solidFill>
-                  <a:srgbClr val="E0A437"/>
-                </a:solidFill>
-                <a:latin typeface="Fira Sans"/>
-              </a:rPr>
-              <a:t>▸ </a:t>
-            </a:r>
-            <a:r>
-              <a:rPr sz="1500" b="0">
-                <a:solidFill>
-                  <a:srgbClr val="000000"/>
-                </a:solidFill>
-                <a:latin typeface="Fira Sans"/>
-              </a:rPr>
-              <a:t>La media es un 40% más alta que la mediana.</a:t>
-            </a:r>
-          </a:p>
-          <a:p>
-            <a:pPr>
-              <a:lnSpc>
-                <a:spcPct val="112000"/>
-              </a:lnSpc>
-              <a:spcAft>
-                <a:spcPts val="900"/>
-              </a:spcAft>
-            </a:pPr>
-            <a:r>
-              <a:rPr sz="1500" b="1">
-                <a:solidFill>
-                  <a:srgbClr val="E0A437"/>
-                </a:solidFill>
-                <a:latin typeface="Fira Sans"/>
-              </a:rPr>
-              <a:t>▸ </a:t>
-            </a:r>
-            <a:r>
-              <a:rPr sz="1500" b="0">
-                <a:solidFill>
-                  <a:srgbClr val="000000"/>
-                </a:solidFill>
-                <a:latin typeface="Fira Sans"/>
-              </a:rPr>
-              <a:t>Los ingresos altos desplazan el promedio; la mayoría gana menos.</a:t>
-            </a:r>
-          </a:p>
-          <a:p>
-            <a:pPr>
-              <a:lnSpc>
-                <a:spcPct val="112000"/>
-              </a:lnSpc>
-              <a:spcAft>
-                <a:spcPts val="900"/>
-              </a:spcAft>
-            </a:pPr>
-            <a:r>
-              <a:rPr sz="1500" b="1">
-                <a:solidFill>
-                  <a:srgbClr val="E0A437"/>
-                </a:solidFill>
-                <a:latin typeface="Fira Sans"/>
-              </a:rPr>
-              <a:t>▸ </a:t>
-            </a:r>
-            <a:r>
-              <a:rPr sz="1500" b="1">
-                <a:solidFill>
-                  <a:srgbClr val="1D3557"/>
-                </a:solidFill>
-                <a:latin typeface="Fira Sans"/>
-              </a:rPr>
-              <a:t>El promedio describe una situación en la que la mayoría no está.</a:t>
+              <a:t>El reparto modal difiere entre comunas</a:t>
             </a:r>
           </a:p>
         </p:txBody>
       </p:sp>
       <p:pic>
         <p:nvPicPr>
-          <p:cNvPr id="5" name="Picture 4" descr="01_ingreso_media_mediana.png"/>
+          <p:cNvPr id="4" name="Picture 3" descr="08_modo_por_comuna.png"/>
           <p:cNvPicPr>
             <a:picLocks noChangeAspect="1"/>
           </p:cNvPicPr>
@@ -8221,14 +8085,48 @@
         </p:blipFill>
         <p:spPr>
           <a:xfrm>
-            <a:off x="4892040" y="1371600"/>
-            <a:ext cx="3840480" cy="2119546"/>
+            <a:off x="1994250" y="1143000"/>
+            <a:ext cx="5155498" cy="3154679"/>
           </a:xfrm>
           <a:prstGeom prst="rect">
             <a:avLst/>
           </a:prstGeom>
         </p:spPr>
       </p:pic>
+      <p:sp>
+        <p:nvSpPr>
+          <p:cNvPr id="5" name="TextBox 4"/>
+          <p:cNvSpPr txBox="1"/>
+          <p:nvPr/>
+        </p:nvSpPr>
+        <p:spPr>
+          <a:xfrm>
+            <a:off x="704088" y="4434840"/>
+            <a:ext cx="7744968" cy="457200"/>
+          </a:xfrm>
+          <a:prstGeom prst="rect">
+            <a:avLst/>
+          </a:prstGeom>
+          <a:noFill/>
+        </p:spPr>
+        <p:txBody>
+          <a:bodyPr wrap="square">
+            <a:spAutoFit/>
+          </a:bodyPr>
+          <a:lstStyle/>
+          <a:p>
+            <a:r>
+              <a:rPr sz="1300" b="0">
+                <a:solidFill>
+                  <a:srgbClr val="333333"/>
+                </a:solidFill>
+                <a:latin typeface="Fira Sans"/>
+              </a:rPr>
+              <a:t>Normalizar por comuna permite comparar proporciones entre comunas de tamaños muy distintos.</a:t>
+            </a:r>
+          </a:p>
+        </p:txBody>
+      </p:sp>
     </p:spTree>
   </p:cSld>
   <p:clrMapOvr>
@@ -8320,14 +8218,14 @@
                 </a:solidFill>
                 <a:latin typeface="Fira Sans"/>
               </a:rPr>
-              <a:t>El reparto modal difiere entre comunas</a:t>
+              <a:t>Los propósitos de viaje según el día de la semana</a:t>
             </a:r>
           </a:p>
         </p:txBody>
       </p:sp>
       <p:pic>
         <p:nvPicPr>
-          <p:cNvPr id="4" name="Picture 3" descr="08_modo_por_comuna.png"/>
+          <p:cNvPr id="4" name="Picture 3" descr="10_heatmap_rutinas.png"/>
           <p:cNvPicPr>
             <a:picLocks noChangeAspect="1"/>
           </p:cNvPicPr>
@@ -8341,8 +8239,8 @@
         </p:blipFill>
         <p:spPr>
           <a:xfrm>
-            <a:off x="1994250" y="1143000"/>
-            <a:ext cx="5155498" cy="3154679"/>
+            <a:off x="1649319" y="1143000"/>
+            <a:ext cx="5845360" cy="3154680"/>
           </a:xfrm>
           <a:prstGeom prst="rect">
             <a:avLst/>
@@ -8378,7 +8276,7 @@
                 </a:solidFill>
                 <a:latin typeface="Fira Sans"/>
               </a:rPr>
-              <a:t>Normalizar por comuna permite comparar proporciones entre comunas de tamaños muy distintos.</a:t>
+              <a:t>El heatmap muestra 14 propósitos por 7 días en una sola figura: útil para tablas completas.</a:t>
             </a:r>
           </a:p>
         </p:txBody>
@@ -8474,14 +8372,14 @@
                 </a:solidFill>
                 <a:latin typeface="Fira Sans"/>
               </a:rPr>
-              <a:t>Los propósitos de viaje según el día de la semana</a:t>
+              <a:t>Cuando los datos crecen</a:t>
             </a:r>
           </a:p>
         </p:txBody>
       </p:sp>
       <p:pic>
         <p:nvPicPr>
-          <p:cNvPr id="4" name="Picture 3" descr="10_heatmap_rutinas.png"/>
+          <p:cNvPr id="4" name="Picture 3" descr="14_escala_datos.png"/>
           <p:cNvPicPr>
             <a:picLocks noChangeAspect="1"/>
           </p:cNvPicPr>
@@ -8495,8 +8393,8 @@
         </p:blipFill>
         <p:spPr>
           <a:xfrm>
-            <a:off x="1649319" y="1143000"/>
-            <a:ext cx="5845360" cy="3154680"/>
+            <a:off x="1417319" y="1143000"/>
+            <a:ext cx="6309360" cy="2324913"/>
           </a:xfrm>
           <a:prstGeom prst="rect">
             <a:avLst/>
@@ -8532,7 +8430,7 @@
                 </a:solidFill>
                 <a:latin typeface="Fira Sans"/>
               </a:rPr>
-              <a:t>El heatmap muestra 14 propósitos por 7 días en una sola figura: útil para tablas completas.</a:t>
+              <a:t>PySpark se usa con SQL o con sus propios DataFrames; Dask reparte operaciones estilo Pandas; Polars y DuckDB rinden en una sola máquina.</a:t>
             </a:r>
           </a:p>
         </p:txBody>
@@ -8628,45 +8526,21 @@
                 </a:solidFill>
                 <a:latin typeface="Fira Sans"/>
               </a:rPr>
-              <a:t>Cuando los datos crecen</a:t>
-            </a:r>
-          </a:p>
-        </p:txBody>
-      </p:sp>
-      <p:pic>
-        <p:nvPicPr>
-          <p:cNvPr id="4" name="Picture 3" descr="14_escala_datos.png"/>
-          <p:cNvPicPr>
-            <a:picLocks noChangeAspect="1"/>
-          </p:cNvPicPr>
-          <p:nvPr/>
-        </p:nvPicPr>
-        <p:blipFill>
-          <a:blip r:embed="rId2"/>
-          <a:stretch>
-            <a:fillRect/>
-          </a:stretch>
-        </p:blipFill>
-        <p:spPr>
-          <a:xfrm>
-            <a:off x="1417319" y="1143000"/>
-            <a:ext cx="6309360" cy="2324913"/>
-          </a:xfrm>
-          <a:prstGeom prst="rect">
-            <a:avLst/>
-          </a:prstGeom>
-        </p:spPr>
-      </p:pic>
-      <p:sp>
-        <p:nvSpPr>
-          <p:cNvPr id="5" name="TextBox 4"/>
+              <a:t>Síntesis</a:t>
+            </a:r>
+          </a:p>
+        </p:txBody>
+      </p:sp>
+      <p:sp>
+        <p:nvSpPr>
+          <p:cNvPr id="4" name="TextBox 3"/>
           <p:cNvSpPr txBox="1"/>
           <p:nvPr/>
         </p:nvSpPr>
         <p:spPr>
           <a:xfrm>
-            <a:off x="704088" y="4434840"/>
-            <a:ext cx="7744968" cy="457200"/>
+            <a:off x="704088" y="1353312"/>
+            <a:ext cx="7744968" cy="3300984"/>
           </a:xfrm>
           <a:prstGeom prst="rect">
             <a:avLst/>
@@ -8679,14 +8553,171 @@
           </a:bodyPr>
           <a:lstStyle/>
           <a:p>
-            <a:r>
-              <a:rPr sz="1300" b="0">
-                <a:solidFill>
-                  <a:srgbClr val="333333"/>
-                </a:solidFill>
-                <a:latin typeface="Fira Sans"/>
-              </a:rPr>
-              <a:t>PySpark se usa con SQL o con sus propios DataFrames; Dask reparte operaciones estilo Pandas; Polars y DuckDB rinden en una sola máquina.</a:t>
+            <a:pPr>
+              <a:lnSpc>
+                <a:spcPct val="112000"/>
+              </a:lnSpc>
+              <a:spcAft>
+                <a:spcPts val="900"/>
+              </a:spcAft>
+            </a:pPr>
+            <a:r>
+              <a:rPr sz="1800" b="1">
+                <a:solidFill>
+                  <a:srgbClr val="E0A437"/>
+                </a:solidFill>
+                <a:latin typeface="Fira Sans"/>
+              </a:rPr>
+              <a:t>▸ </a:t>
+            </a:r>
+            <a:r>
+              <a:rPr sz="1800" b="0">
+                <a:solidFill>
+                  <a:srgbClr val="000000"/>
+                </a:solidFill>
+                <a:latin typeface="Fira Sans"/>
+              </a:rPr>
+              <a:t>Un modelo es una simplificación con decisiones incorporadas; estimarlo puede buscar inferencia o predicción.</a:t>
+            </a:r>
+          </a:p>
+          <a:p>
+            <a:pPr>
+              <a:lnSpc>
+                <a:spcPct val="112000"/>
+              </a:lnSpc>
+              <a:spcAft>
+                <a:spcPts val="900"/>
+              </a:spcAft>
+            </a:pPr>
+            <a:r>
+              <a:rPr sz="1800" b="1">
+                <a:solidFill>
+                  <a:srgbClr val="E0A437"/>
+                </a:solidFill>
+                <a:latin typeface="Fira Sans"/>
+              </a:rPr>
+              <a:t>▸ </a:t>
+            </a:r>
+            <a:r>
+              <a:rPr sz="1800" b="0">
+                <a:solidFill>
+                  <a:srgbClr val="000000"/>
+                </a:solidFill>
+                <a:latin typeface="Fira Sans"/>
+              </a:rPr>
+              <a:t>Las asociaciones se reportan como asociaciones: la causalidad exige más que datos observacionales.</a:t>
+            </a:r>
+          </a:p>
+          <a:p>
+            <a:pPr>
+              <a:lnSpc>
+                <a:spcPct val="112000"/>
+              </a:lnSpc>
+              <a:spcAft>
+                <a:spcPts val="900"/>
+              </a:spcAft>
+            </a:pPr>
+            <a:r>
+              <a:rPr sz="1800" b="1">
+                <a:solidFill>
+                  <a:srgbClr val="E0A437"/>
+                </a:solidFill>
+                <a:latin typeface="Fira Sans"/>
+              </a:rPr>
+              <a:t>▸ </a:t>
+            </a:r>
+            <a:r>
+              <a:rPr sz="1800" b="0">
+                <a:solidFill>
+                  <a:srgbClr val="000000"/>
+                </a:solidFill>
+                <a:latin typeface="Fira Sans"/>
+              </a:rPr>
+              <a:t>El tipo de la variable, no su dtype, determina qué resúmenes tienen sentido.</a:t>
+            </a:r>
+          </a:p>
+          <a:p>
+            <a:pPr>
+              <a:lnSpc>
+                <a:spcPct val="112000"/>
+              </a:lnSpc>
+              <a:spcAft>
+                <a:spcPts val="900"/>
+              </a:spcAft>
+            </a:pPr>
+            <a:r>
+              <a:rPr sz="1800" b="1">
+                <a:solidFill>
+                  <a:srgbClr val="E0A437"/>
+                </a:solidFill>
+                <a:latin typeface="Fira Sans"/>
+              </a:rPr>
+              <a:t>▸ </a:t>
+            </a:r>
+            <a:r>
+              <a:rPr sz="1800" b="0">
+                <a:solidFill>
+                  <a:srgbClr val="000000"/>
+                </a:solidFill>
+                <a:latin typeface="Fira Sans"/>
+              </a:rPr>
+              <a:t>Con distribuciones asimétricas, la mediana y los percentiles describen mejor lo típico que la media.</a:t>
+            </a:r>
+          </a:p>
+          <a:p>
+            <a:pPr>
+              <a:lnSpc>
+                <a:spcPct val="112000"/>
+              </a:lnSpc>
+              <a:spcAft>
+                <a:spcPts val="900"/>
+              </a:spcAft>
+            </a:pPr>
+            <a:r>
+              <a:rPr sz="1800" b="1">
+                <a:solidFill>
+                  <a:srgbClr val="E0A437"/>
+                </a:solidFill>
+                <a:latin typeface="Fira Sans"/>
+              </a:rPr>
+              <a:t>▸ </a:t>
+            </a:r>
+            <a:r>
+              <a:rPr sz="1800" b="0">
+                <a:solidFill>
+                  <a:srgbClr val="000000"/>
+                </a:solidFill>
+                <a:latin typeface="Fira Sans"/>
+              </a:rPr>
+              <a:t>En una encuesta, primero se define la población y luego se pondera por los factores: la cifra ingenua del 23% sin viajes era en realidad un 15%.</a:t>
+            </a:r>
+          </a:p>
+          <a:p>
+            <a:pPr>
+              <a:lnSpc>
+                <a:spcPct val="112000"/>
+              </a:lnSpc>
+              <a:spcAft>
+                <a:spcPts val="900"/>
+              </a:spcAft>
+            </a:pPr>
+            <a:r>
+              <a:rPr sz="1800" b="1">
+                <a:solidFill>
+                  <a:srgbClr val="E0A437"/>
+                </a:solidFill>
+                <a:latin typeface="Fira Sans"/>
+              </a:rPr>
+              <a:t>▸ </a:t>
+            </a:r>
+            <a:r>
+              <a:rPr sz="1800" b="1">
+                <a:solidFill>
+                  <a:srgbClr val="1D3557"/>
+                </a:solidFill>
+                <a:latin typeface="Fira Sans"/>
+              </a:rPr>
+              <a:t>El concepto de la clase: el EDA, examinar los datos antes de modelarlos, preguntando ante cada cifra de quién habla.</a:t>
             </a:r>
           </a:p>
         </p:txBody>
@@ -8782,7 +8813,7 @@
                 </a:solidFill>
                 <a:latin typeface="Fira Sans"/>
               </a:rPr>
-              <a:t>Síntesis</a:t>
+              <a:t>Segundo bloque: comienza la Tarea 1</a:t>
             </a:r>
           </a:p>
         </p:txBody>
@@ -8833,7 +8864,91 @@
                 </a:solidFill>
                 <a:latin typeface="Fira Sans"/>
               </a:rPr>
-              <a:t>Un modelo es una simplificación con decisiones incorporadas; estimarlo puede buscar inferencia o predicción.</a:t>
+              <a:t>El retrato de tu comuna: cada pareja adopta una comuna del Gran Santiago.</a:t>
+            </a:r>
+          </a:p>
+          <a:p>
+            <a:pPr>
+              <a:lnSpc>
+                <a:spcPct val="112000"/>
+              </a:lnSpc>
+              <a:spcAft>
+                <a:spcPts val="500"/>
+              </a:spcAft>
+            </a:pPr>
+            <a:r>
+              <a:rPr sz="1400" b="0">
+                <a:solidFill>
+                  <a:srgbClr val="333333"/>
+                </a:solidFill>
+                <a:latin typeface="Fira Sans"/>
+              </a:rPr>
+              <a:t>     ◦  </a:t>
+            </a:r>
+            <a:r>
+              <a:rPr sz="1400" b="0">
+                <a:solidFill>
+                  <a:srgbClr val="333333"/>
+                </a:solidFill>
+                <a:latin typeface="Fira Sans"/>
+              </a:rPr>
+              <a:t>Hoy: elegir la comuna y construir su retrato numérico.</a:t>
+            </a:r>
+          </a:p>
+          <a:p>
+            <a:pPr>
+              <a:lnSpc>
+                <a:spcPct val="112000"/>
+              </a:lnSpc>
+              <a:spcAft>
+                <a:spcPts val="500"/>
+              </a:spcAft>
+            </a:pPr>
+            <a:r>
+              <a:rPr sz="1400" b="0">
+                <a:solidFill>
+                  <a:srgbClr val="333333"/>
+                </a:solidFill>
+                <a:latin typeface="Fira Sans"/>
+              </a:rPr>
+              <a:t>     ◦  </a:t>
+            </a:r>
+            <a:r>
+              <a:rPr sz="1400" b="0">
+                <a:solidFill>
+                  <a:srgbClr val="333333"/>
+                </a:solidFill>
+                <a:latin typeface="Fira Sans"/>
+              </a:rPr>
+              <a:t>Próxima clase: el retrato gráfico, con métodos de visualización.</a:t>
+            </a:r>
+          </a:p>
+          <a:p>
+            <a:pPr>
+              <a:lnSpc>
+                <a:spcPct val="112000"/>
+              </a:lnSpc>
+              <a:spcAft>
+                <a:spcPts val="500"/>
+              </a:spcAft>
+            </a:pPr>
+            <a:r>
+              <a:rPr sz="1400" b="0">
+                <a:solidFill>
+                  <a:srgbClr val="333333"/>
+                </a:solidFill>
+                <a:latin typeface="Fira Sans"/>
+              </a:rPr>
+              <a:t>     ◦  </a:t>
+            </a:r>
+            <a:r>
+              <a:rPr sz="1400" b="0">
+                <a:solidFill>
+                  <a:srgbClr val="333333"/>
+                </a:solidFill>
+                <a:latin typeface="Fira Sans"/>
+              </a:rPr>
+              <a:t>Entrega del retrato completo: jueves 10 de septiembre, por Aula.</a:t>
             </a:r>
           </a:p>
           <a:p>
@@ -8861,7 +8976,7 @@
                 </a:solidFill>
                 <a:latin typeface="Fira Sans"/>
               </a:rPr>
-              <a:t>Las asociaciones se reportan como asociaciones: la causalidad exige más que datos observacionales.</a:t>
+              <a:t>El enunciado está en evaluaciones/tareas/ y la guía de hoy en actividades/.</a:t>
             </a:r>
           </a:p>
           <a:p>
@@ -8883,97 +8998,13 @@
               <a:t>▸ </a:t>
             </a:r>
             <a:r>
-              <a:rPr sz="1800" b="0">
-                <a:solidFill>
-                  <a:srgbClr val="000000"/>
-                </a:solidFill>
-                <a:latin typeface="Fira Sans"/>
-              </a:rPr>
-              <a:t>El tipo de la variable, no su dtype, determina qué resúmenes tienen sentido.</a:t>
-            </a:r>
-          </a:p>
-          <a:p>
-            <a:pPr>
-              <a:lnSpc>
-                <a:spcPct val="112000"/>
-              </a:lnSpc>
-              <a:spcAft>
-                <a:spcPts val="900"/>
-              </a:spcAft>
-            </a:pPr>
-            <a:r>
               <a:rPr sz="1800" b="1">
                 <a:solidFill>
-                  <a:srgbClr val="E0A437"/>
-                </a:solidFill>
-                <a:latin typeface="Fira Sans"/>
-              </a:rPr>
-              <a:t>▸ </a:t>
-            </a:r>
-            <a:r>
-              <a:rPr sz="1800" b="0">
-                <a:solidFill>
-                  <a:srgbClr val="000000"/>
-                </a:solidFill>
-                <a:latin typeface="Fira Sans"/>
-              </a:rPr>
-              <a:t>Con distribuciones asimétricas, la mediana y los percentiles describen mejor lo típico que la media.</a:t>
-            </a:r>
-          </a:p>
-          <a:p>
-            <a:pPr>
-              <a:lnSpc>
-                <a:spcPct val="112000"/>
-              </a:lnSpc>
-              <a:spcAft>
-                <a:spcPts val="900"/>
-              </a:spcAft>
-            </a:pPr>
-            <a:r>
-              <a:rPr sz="1800" b="1">
-                <a:solidFill>
-                  <a:srgbClr val="E0A437"/>
-                </a:solidFill>
-                <a:latin typeface="Fira Sans"/>
-              </a:rPr>
-              <a:t>▸ </a:t>
-            </a:r>
-            <a:r>
-              <a:rPr sz="1800" b="0">
-                <a:solidFill>
-                  <a:srgbClr val="000000"/>
-                </a:solidFill>
-                <a:latin typeface="Fira Sans"/>
-              </a:rPr>
-              <a:t>En una encuesta, primero se define la población y luego se pondera por los factores: la cifra ingenua del 23% sin viajes era en realidad un 15%.</a:t>
-            </a:r>
-          </a:p>
-          <a:p>
-            <a:pPr>
-              <a:lnSpc>
-                <a:spcPct val="112000"/>
-              </a:lnSpc>
-              <a:spcAft>
-                <a:spcPts val="900"/>
-              </a:spcAft>
-            </a:pPr>
-            <a:r>
-              <a:rPr sz="1800" b="1">
-                <a:solidFill>
-                  <a:srgbClr val="E0A437"/>
-                </a:solidFill>
-                <a:latin typeface="Fira Sans"/>
-              </a:rPr>
-              <a:t>▸ </a:t>
-            </a:r>
-            <a:r>
-              <a:rPr sz="1800" b="1">
-                <a:solidFill>
                   <a:srgbClr val="1D3557"/>
                 </a:solidFill>
                 <a:latin typeface="Fira Sans"/>
               </a:rPr>
-              <a:t>El concepto de la clase: el EDA, examinar los datos antes de modelarlos, preguntando ante cada cifra de quién habla.</a:t>
+              <a:t>Lo que avancen en este bloque ya es parte de la tarea.</a:t>
             </a:r>
           </a:p>
         </p:txBody>
@@ -8987,293 +9018,6 @@
 </file>
 
 <file path=ppt/slides/slide35.xml><?xml version="1.0" encoding="utf-8"?>
-<p:sld xmlns:a="http://schemas.openxmlformats.org/drawingml/2006/main" xmlns:p="http://schemas.openxmlformats.org/presentationml/2006/main" xmlns:r="http://schemas.openxmlformats.org/officeDocument/2006/relationships">
-  <p:cSld>
-    <p:spTree>
-      <p:nvGrpSpPr>
-        <p:cNvPr id="1" name=""/>
-        <p:cNvGrpSpPr/>
-        <p:nvPr/>
-      </p:nvGrpSpPr>
-      <p:grpSpPr/>
-      <p:sp>
-        <p:nvSpPr>
-          <p:cNvPr id="2" name="Rectangle 1"/>
-          <p:cNvSpPr/>
-          <p:nvPr/>
-        </p:nvSpPr>
-        <p:spPr>
-          <a:xfrm>
-            <a:off x="0" y="0"/>
-            <a:ext cx="9144000" cy="5138928"/>
-          </a:xfrm>
-          <a:prstGeom prst="rect">
-            <a:avLst/>
-          </a:prstGeom>
-          <a:solidFill>
-            <a:srgbClr val="FAFBFC"/>
-          </a:solidFill>
-          <a:ln>
-            <a:noFill/>
-          </a:ln>
-          <a:effectLst/>
-        </p:spPr>
-        <p:style>
-          <a:lnRef idx="1">
-            <a:schemeClr val="accent1"/>
-          </a:lnRef>
-          <a:fillRef idx="3">
-            <a:schemeClr val="accent1"/>
-          </a:fillRef>
-          <a:effectRef idx="2">
-            <a:schemeClr val="accent1"/>
-          </a:effectRef>
-          <a:fontRef idx="minor">
-            <a:schemeClr val="lt1"/>
-          </a:fontRef>
-        </p:style>
-        <p:txBody>
-          <a:bodyPr rtlCol="0" anchor="ctr"/>
-          <a:lstStyle/>
-          <a:p>
-            <a:pPr algn="ctr"/>
-          </a:p>
-        </p:txBody>
-      </p:sp>
-      <p:sp>
-        <p:nvSpPr>
-          <p:cNvPr id="3" name="TextBox 2"/>
-          <p:cNvSpPr txBox="1"/>
-          <p:nvPr/>
-        </p:nvSpPr>
-        <p:spPr>
-          <a:xfrm>
-            <a:off x="402336" y="301752"/>
-            <a:ext cx="8348472" cy="795528"/>
-          </a:xfrm>
-          <a:prstGeom prst="rect">
-            <a:avLst/>
-          </a:prstGeom>
-          <a:noFill/>
-        </p:spPr>
-        <p:txBody>
-          <a:bodyPr wrap="square">
-            <a:spAutoFit/>
-          </a:bodyPr>
-          <a:lstStyle/>
-          <a:p>
-            <a:r>
-              <a:rPr sz="2800" b="1">
-                <a:solidFill>
-                  <a:srgbClr val="0F0F0F"/>
-                </a:solidFill>
-                <a:latin typeface="Fira Sans"/>
-              </a:rPr>
-              <a:t>Segundo bloque: comienza la Tarea 1</a:t>
-            </a:r>
-          </a:p>
-        </p:txBody>
-      </p:sp>
-      <p:sp>
-        <p:nvSpPr>
-          <p:cNvPr id="4" name="TextBox 3"/>
-          <p:cNvSpPr txBox="1"/>
-          <p:nvPr/>
-        </p:nvSpPr>
-        <p:spPr>
-          <a:xfrm>
-            <a:off x="704088" y="1353312"/>
-            <a:ext cx="7744968" cy="3300984"/>
-          </a:xfrm>
-          <a:prstGeom prst="rect">
-            <a:avLst/>
-          </a:prstGeom>
-          <a:noFill/>
-        </p:spPr>
-        <p:txBody>
-          <a:bodyPr wrap="square">
-            <a:spAutoFit/>
-          </a:bodyPr>
-          <a:lstStyle/>
-          <a:p>
-            <a:pPr>
-              <a:lnSpc>
-                <a:spcPct val="112000"/>
-              </a:lnSpc>
-              <a:spcAft>
-                <a:spcPts val="900"/>
-              </a:spcAft>
-            </a:pPr>
-            <a:r>
-              <a:rPr sz="1800" b="1">
-                <a:solidFill>
-                  <a:srgbClr val="E0A437"/>
-                </a:solidFill>
-                <a:latin typeface="Fira Sans"/>
-              </a:rPr>
-              <a:t>▸ </a:t>
-            </a:r>
-            <a:r>
-              <a:rPr sz="1800" b="0">
-                <a:solidFill>
-                  <a:srgbClr val="000000"/>
-                </a:solidFill>
-                <a:latin typeface="Fira Sans"/>
-              </a:rPr>
-              <a:t>El retrato de tu comuna: cada pareja adopta una comuna del Gran Santiago.</a:t>
-            </a:r>
-          </a:p>
-          <a:p>
-            <a:pPr>
-              <a:lnSpc>
-                <a:spcPct val="112000"/>
-              </a:lnSpc>
-              <a:spcAft>
-                <a:spcPts val="500"/>
-              </a:spcAft>
-            </a:pPr>
-            <a:r>
-              <a:rPr sz="1400" b="0">
-                <a:solidFill>
-                  <a:srgbClr val="333333"/>
-                </a:solidFill>
-                <a:latin typeface="Fira Sans"/>
-              </a:rPr>
-              <a:t>     ◦  </a:t>
-            </a:r>
-            <a:r>
-              <a:rPr sz="1400" b="0">
-                <a:solidFill>
-                  <a:srgbClr val="333333"/>
-                </a:solidFill>
-                <a:latin typeface="Fira Sans"/>
-              </a:rPr>
-              <a:t>Hoy: elegir la comuna y construir su retrato numérico.</a:t>
-            </a:r>
-          </a:p>
-          <a:p>
-            <a:pPr>
-              <a:lnSpc>
-                <a:spcPct val="112000"/>
-              </a:lnSpc>
-              <a:spcAft>
-                <a:spcPts val="500"/>
-              </a:spcAft>
-            </a:pPr>
-            <a:r>
-              <a:rPr sz="1400" b="0">
-                <a:solidFill>
-                  <a:srgbClr val="333333"/>
-                </a:solidFill>
-                <a:latin typeface="Fira Sans"/>
-              </a:rPr>
-              <a:t>     ◦  </a:t>
-            </a:r>
-            <a:r>
-              <a:rPr sz="1400" b="0">
-                <a:solidFill>
-                  <a:srgbClr val="333333"/>
-                </a:solidFill>
-                <a:latin typeface="Fira Sans"/>
-              </a:rPr>
-              <a:t>Próxima clase: el retrato gráfico, con métodos de visualización.</a:t>
-            </a:r>
-          </a:p>
-          <a:p>
-            <a:pPr>
-              <a:lnSpc>
-                <a:spcPct val="112000"/>
-              </a:lnSpc>
-              <a:spcAft>
-                <a:spcPts val="500"/>
-              </a:spcAft>
-            </a:pPr>
-            <a:r>
-              <a:rPr sz="1400" b="0">
-                <a:solidFill>
-                  <a:srgbClr val="333333"/>
-                </a:solidFill>
-                <a:latin typeface="Fira Sans"/>
-              </a:rPr>
-              <a:t>     ◦  </a:t>
-            </a:r>
-            <a:r>
-              <a:rPr sz="1400" b="0">
-                <a:solidFill>
-                  <a:srgbClr val="333333"/>
-                </a:solidFill>
-                <a:latin typeface="Fira Sans"/>
-              </a:rPr>
-              <a:t>Entrega del retrato completo: jueves 10 de septiembre, por Aula.</a:t>
-            </a:r>
-          </a:p>
-          <a:p>
-            <a:pPr>
-              <a:lnSpc>
-                <a:spcPct val="112000"/>
-              </a:lnSpc>
-              <a:spcAft>
-                <a:spcPts val="900"/>
-              </a:spcAft>
-            </a:pPr>
-            <a:r>
-              <a:rPr sz="1800" b="1">
-                <a:solidFill>
-                  <a:srgbClr val="E0A437"/>
-                </a:solidFill>
-                <a:latin typeface="Fira Sans"/>
-              </a:rPr>
-              <a:t>▸ </a:t>
-            </a:r>
-            <a:r>
-              <a:rPr sz="1800" b="0">
-                <a:solidFill>
-                  <a:srgbClr val="000000"/>
-                </a:solidFill>
-                <a:latin typeface="Fira Sans"/>
-              </a:rPr>
-              <a:t>El enunciado está en evaluaciones/tareas/ y la guía de hoy en actividades/.</a:t>
-            </a:r>
-          </a:p>
-          <a:p>
-            <a:pPr>
-              <a:lnSpc>
-                <a:spcPct val="112000"/>
-              </a:lnSpc>
-              <a:spcAft>
-                <a:spcPts val="900"/>
-              </a:spcAft>
-            </a:pPr>
-            <a:r>
-              <a:rPr sz="1800" b="1">
-                <a:solidFill>
-                  <a:srgbClr val="E0A437"/>
-                </a:solidFill>
-                <a:latin typeface="Fira Sans"/>
-              </a:rPr>
-              <a:t>▸ </a:t>
-            </a:r>
-            <a:r>
-              <a:rPr sz="1800" b="1">
-                <a:solidFill>
-                  <a:srgbClr val="1D3557"/>
-                </a:solidFill>
-                <a:latin typeface="Fira Sans"/>
-              </a:rPr>
-              <a:t>Lo que avancen en este bloque ya es parte de la tarea.</a:t>
-            </a:r>
-          </a:p>
-        </p:txBody>
-      </p:sp>
-    </p:spTree>
-  </p:cSld>
-  <p:clrMapOvr>
-    <a:masterClrMapping/>
-  </p:clrMapOvr>
-</p:sld>
-</file>
-
-<file path=ppt/slides/slide36.xml><?xml version="1.0" encoding="utf-8"?>
 <p:sld xmlns:a="http://schemas.openxmlformats.org/drawingml/2006/main" xmlns:p="http://schemas.openxmlformats.org/presentationml/2006/main" xmlns:r="http://schemas.openxmlformats.org/officeDocument/2006/relationships">
   <p:cSld>
     <p:spTree>
